--- a/slides.pptx
+++ b/slides.pptx
@@ -42821,7 +42821,7 @@
                 </a:solidFill>
                 <a:latin typeface="Noto Sans JP"/>
               </a:rPr>
-              <a:t>考察 2/3</a:t>
+              <a:t>まとめ 1/2</a:t>
             </a:r>
           </a:p>
         </p:txBody>
@@ -42900,7 +42900,7 @@
                 </a:solidFill>
                 <a:latin typeface="Noto Sans JP"/>
               </a:rPr>
-              <a:t>現状の課題と今後の研究展望</a:t>
+              <a:t>実証された主要結果</a:t>
             </a:r>
           </a:p>
         </p:txBody>
@@ -42986,49 +42986,14 @@
       </p:sp>
       <p:sp>
         <p:nvSpPr>
-          <p:cNvPr id="10" name="TextBox 9"/>
-          <p:cNvSpPr txBox="1"/>
+          <p:cNvPr id="10" name="Rounded Rectangle 9"/>
+          <p:cNvSpPr/>
           <p:nvPr/>
         </p:nvSpPr>
         <p:spPr>
           <a:xfrm>
             <a:off x="365760" y="859536"/>
-            <a:ext cx="5592927" cy="274320"/>
-          </a:xfrm>
-          <a:prstGeom prst="rect">
-            <a:avLst/>
-          </a:prstGeom>
-          <a:noFill/>
-        </p:spPr>
-        <p:txBody>
-          <a:bodyPr wrap="square" anchor="t" lIns="36000" rIns="36000" tIns="18000" bIns="18000">
-            <a:spAutoFit/>
-          </a:bodyPr>
-          <a:lstStyle/>
-          <a:p>
-            <a:pPr algn="l"/>
-            <a:r>
-              <a:rPr sz="1200" b="1" i="0">
-                <a:solidFill>
-                  <a:srgbClr val="64748B"/>
-                </a:solidFill>
-                <a:latin typeface="Noto Sans JP"/>
-              </a:rPr>
-              <a:t>現状の限界・課題</a:t>
-            </a:r>
-          </a:p>
-        </p:txBody>
-      </p:sp>
-      <p:sp>
-        <p:nvSpPr>
-          <p:cNvPr id="11" name="Rounded Rectangle 10"/>
-          <p:cNvSpPr/>
-          <p:nvPr/>
-        </p:nvSpPr>
-        <p:spPr>
-          <a:xfrm>
-            <a:off x="365760" y="1271016"/>
-            <a:ext cx="1772869" cy="2011680"/>
+            <a:ext cx="2769031" cy="4206240"/>
           </a:xfrm>
           <a:prstGeom prst="roundRect">
             <a:avLst>
@@ -43069,14 +43034,58 @@
       </p:sp>
       <p:sp>
         <p:nvSpPr>
+          <p:cNvPr id="11" name="Rectangle 10"/>
+          <p:cNvSpPr/>
+          <p:nvPr/>
+        </p:nvSpPr>
+        <p:spPr>
+          <a:xfrm>
+            <a:off x="365760" y="859536"/>
+            <a:ext cx="2769031" cy="36576"/>
+          </a:xfrm>
+          <a:prstGeom prst="rect">
+            <a:avLst/>
+          </a:prstGeom>
+          <a:solidFill>
+            <a:srgbClr val="3B5174"/>
+          </a:solidFill>
+          <a:ln>
+            <a:noFill/>
+          </a:ln>
+          <a:effectLst/>
+        </p:spPr>
+        <p:style>
+          <a:lnRef idx="1">
+            <a:schemeClr val="accent1"/>
+          </a:lnRef>
+          <a:fillRef idx="3">
+            <a:schemeClr val="accent1"/>
+          </a:fillRef>
+          <a:effectRef idx="2">
+            <a:schemeClr val="accent1"/>
+          </a:effectRef>
+          <a:fontRef idx="minor">
+            <a:schemeClr val="lt1"/>
+          </a:fontRef>
+        </p:style>
+        <p:txBody>
+          <a:bodyPr rtlCol="0" anchor="ctr"/>
+          <a:lstStyle/>
+          <a:p>
+            <a:pPr algn="ctr"/>
+          </a:p>
+        </p:txBody>
+      </p:sp>
+      <p:sp>
+        <p:nvSpPr>
           <p:cNvPr id="12" name="TextBox 11"/>
           <p:cNvSpPr txBox="1"/>
           <p:nvPr/>
         </p:nvSpPr>
         <p:spPr>
           <a:xfrm>
-            <a:off x="493776" y="1399032"/>
-            <a:ext cx="1516837" cy="219456"/>
+            <a:off x="548640" y="1024128"/>
+            <a:ext cx="2403271" cy="219456"/>
           </a:xfrm>
           <a:prstGeom prst="rect">
             <a:avLst/>
@@ -43097,7 +43106,7 @@
                 </a:solidFill>
                 <a:latin typeface="Noto Sans JP"/>
               </a:rPr>
-              <a:t>スケール</a:t>
+              <a:t>RHEOLOGY</a:t>
             </a:r>
           </a:p>
         </p:txBody>
@@ -43110,8 +43119,8 @@
         </p:nvSpPr>
         <p:spPr>
           <a:xfrm>
-            <a:off x="493776" y="1636776"/>
-            <a:ext cx="1516837" cy="310896"/>
+            <a:off x="548640" y="1261872"/>
+            <a:ext cx="2403271" cy="329184"/>
           </a:xfrm>
           <a:prstGeom prst="rect">
             <a:avLst/>
@@ -43132,7 +43141,7 @@
                 </a:solidFill>
                 <a:latin typeface="Noto Sans JP"/>
               </a:rPr>
-              <a:t>実地試験未実施</a:t>
+              <a:t>レオロジー特性</a:t>
             </a:r>
           </a:p>
         </p:txBody>
@@ -43145,8 +43154,8 @@
         </p:nvSpPr>
         <p:spPr>
           <a:xfrm>
-            <a:off x="493776" y="1965960"/>
-            <a:ext cx="1516837" cy="1234440"/>
+            <a:off x="548640" y="1627632"/>
+            <a:ext cx="182880" cy="274320"/>
           </a:xfrm>
           <a:prstGeom prst="rect">
             <a:avLst/>
@@ -43163,60 +43172,270 @@
             <a:r>
               <a:rPr sz="1100" b="0" i="0">
                 <a:solidFill>
+                  <a:srgbClr val="3B5174"/>
+                </a:solidFill>
+                <a:latin typeface="Noto Sans JP"/>
+              </a:rPr>
+              <a:t>•</a:t>
+            </a:r>
+          </a:p>
+        </p:txBody>
+      </p:sp>
+      <p:sp>
+        <p:nvSpPr>
+          <p:cNvPr id="15" name="TextBox 14"/>
+          <p:cNvSpPr txBox="1"/>
+          <p:nvPr/>
+        </p:nvSpPr>
+        <p:spPr>
+          <a:xfrm>
+            <a:off x="749808" y="1627632"/>
+            <a:ext cx="2202103" cy="274320"/>
+          </a:xfrm>
+          <a:prstGeom prst="rect">
+            <a:avLst/>
+          </a:prstGeom>
+          <a:noFill/>
+        </p:spPr>
+        <p:txBody>
+          <a:bodyPr wrap="square" anchor="t" lIns="36000" rIns="36000" tIns="18000" bIns="18000">
+            <a:spAutoFit/>
+          </a:bodyPr>
+          <a:lstStyle/>
+          <a:p>
+            <a:pPr algn="l"/>
+            <a:r>
+              <a:rPr sz="1100" b="0" i="0">
+                <a:solidFill>
                   <a:srgbClr val="475569"/>
                 </a:solidFill>
                 <a:latin typeface="Noto Sans JP"/>
               </a:rPr>
-              <a:t>ラボスケールのみ。実環境での検証が必要</a:t>
-            </a:r>
-          </a:p>
-        </p:txBody>
-      </p:sp>
-      <p:sp>
-        <p:nvSpPr>
-          <p:cNvPr id="15" name="TextBox 14"/>
-          <p:cNvSpPr txBox="1"/>
-          <p:nvPr/>
-        </p:nvSpPr>
-        <p:spPr>
-          <a:xfrm>
-            <a:off x="2138629" y="1271016"/>
-            <a:ext cx="137160" cy="2011680"/>
-          </a:xfrm>
-          <a:prstGeom prst="rect">
-            <a:avLst/>
-          </a:prstGeom>
-          <a:noFill/>
-        </p:spPr>
-        <p:txBody>
-          <a:bodyPr wrap="square" anchor="ctr" lIns="36000" rIns="36000" tIns="18000" bIns="18000">
-            <a:spAutoFit/>
-          </a:bodyPr>
-          <a:lstStyle/>
-          <a:p>
-            <a:pPr algn="ctr"/>
-            <a:r>
-              <a:rPr sz="1200" b="0" i="0">
-                <a:solidFill>
-                  <a:srgbClr val="64748B"/>
-                </a:solidFill>
-                <a:latin typeface="Noto Sans JP"/>
-              </a:rPr>
-              <a:t>▶</a:t>
-            </a:r>
-          </a:p>
-        </p:txBody>
-      </p:sp>
-      <p:sp>
-        <p:nvSpPr>
-          <p:cNvPr id="16" name="Rounded Rectangle 15"/>
+              <a:t>全系で G' &gt; G''（ゲル挙動）</a:t>
+            </a:r>
+          </a:p>
+        </p:txBody>
+      </p:sp>
+      <p:sp>
+        <p:nvSpPr>
+          <p:cNvPr id="16" name="TextBox 15"/>
+          <p:cNvSpPr txBox="1"/>
+          <p:nvPr/>
+        </p:nvSpPr>
+        <p:spPr>
+          <a:xfrm>
+            <a:off x="548640" y="1901952"/>
+            <a:ext cx="182880" cy="274320"/>
+          </a:xfrm>
+          <a:prstGeom prst="rect">
+            <a:avLst/>
+          </a:prstGeom>
+          <a:noFill/>
+        </p:spPr>
+        <p:txBody>
+          <a:bodyPr wrap="square" anchor="t" lIns="36000" rIns="36000" tIns="18000" bIns="18000">
+            <a:spAutoFit/>
+          </a:bodyPr>
+          <a:lstStyle/>
+          <a:p>
+            <a:pPr algn="l"/>
+            <a:r>
+              <a:rPr sz="1100" b="0" i="0">
+                <a:solidFill>
+                  <a:srgbClr val="3B5174"/>
+                </a:solidFill>
+                <a:latin typeface="Noto Sans JP"/>
+              </a:rPr>
+              <a:t>•</a:t>
+            </a:r>
+          </a:p>
+        </p:txBody>
+      </p:sp>
+      <p:sp>
+        <p:nvSpPr>
+          <p:cNvPr id="17" name="TextBox 16"/>
+          <p:cNvSpPr txBox="1"/>
+          <p:nvPr/>
+        </p:nvSpPr>
+        <p:spPr>
+          <a:xfrm>
+            <a:off x="749808" y="1901952"/>
+            <a:ext cx="2202103" cy="274320"/>
+          </a:xfrm>
+          <a:prstGeom prst="rect">
+            <a:avLst/>
+          </a:prstGeom>
+          <a:noFill/>
+        </p:spPr>
+        <p:txBody>
+          <a:bodyPr wrap="square" anchor="t" lIns="36000" rIns="36000" tIns="18000" bIns="18000">
+            <a:spAutoFit/>
+          </a:bodyPr>
+          <a:lstStyle/>
+          <a:p>
+            <a:pPr algn="l"/>
+            <a:r>
+              <a:rPr sz="1100" b="0" i="0">
+                <a:solidFill>
+                  <a:srgbClr val="475569"/>
+                </a:solidFill>
+                <a:latin typeface="Noto Sans JP"/>
+              </a:rPr>
+              <a:t>n = 0.108–0.188</a:t>
+            </a:r>
+          </a:p>
+        </p:txBody>
+      </p:sp>
+      <p:sp>
+        <p:nvSpPr>
+          <p:cNvPr id="18" name="TextBox 17"/>
+          <p:cNvSpPr txBox="1"/>
+          <p:nvPr/>
+        </p:nvSpPr>
+        <p:spPr>
+          <a:xfrm>
+            <a:off x="548640" y="2176272"/>
+            <a:ext cx="182880" cy="274320"/>
+          </a:xfrm>
+          <a:prstGeom prst="rect">
+            <a:avLst/>
+          </a:prstGeom>
+          <a:noFill/>
+        </p:spPr>
+        <p:txBody>
+          <a:bodyPr wrap="square" anchor="t" lIns="36000" rIns="36000" tIns="18000" bIns="18000">
+            <a:spAutoFit/>
+          </a:bodyPr>
+          <a:lstStyle/>
+          <a:p>
+            <a:pPr algn="l"/>
+            <a:r>
+              <a:rPr sz="1100" b="0" i="0">
+                <a:solidFill>
+                  <a:srgbClr val="3B5174"/>
+                </a:solidFill>
+                <a:latin typeface="Noto Sans JP"/>
+              </a:rPr>
+              <a:t>•</a:t>
+            </a:r>
+          </a:p>
+        </p:txBody>
+      </p:sp>
+      <p:sp>
+        <p:nvSpPr>
+          <p:cNvPr id="19" name="TextBox 18"/>
+          <p:cNvSpPr txBox="1"/>
+          <p:nvPr/>
+        </p:nvSpPr>
+        <p:spPr>
+          <a:xfrm>
+            <a:off x="749808" y="2176272"/>
+            <a:ext cx="2202103" cy="274320"/>
+          </a:xfrm>
+          <a:prstGeom prst="rect">
+            <a:avLst/>
+          </a:prstGeom>
+          <a:noFill/>
+        </p:spPr>
+        <p:txBody>
+          <a:bodyPr wrap="square" anchor="t" lIns="36000" rIns="36000" tIns="18000" bIns="18000">
+            <a:spAutoFit/>
+          </a:bodyPr>
+          <a:lstStyle/>
+          <a:p>
+            <a:pPr algn="l"/>
+            <a:r>
+              <a:rPr sz="1100" b="0" i="0">
+                <a:solidFill>
+                  <a:srgbClr val="475569"/>
+                </a:solidFill>
+                <a:latin typeface="Noto Sans JP"/>
+              </a:rPr>
+              <a:t>降伏応力 AquaGel-K の約3倍</a:t>
+            </a:r>
+          </a:p>
+        </p:txBody>
+      </p:sp>
+      <p:sp>
+        <p:nvSpPr>
+          <p:cNvPr id="20" name="TextBox 19"/>
+          <p:cNvSpPr txBox="1"/>
+          <p:nvPr/>
+        </p:nvSpPr>
+        <p:spPr>
+          <a:xfrm>
+            <a:off x="548640" y="2450592"/>
+            <a:ext cx="182880" cy="274320"/>
+          </a:xfrm>
+          <a:prstGeom prst="rect">
+            <a:avLst/>
+          </a:prstGeom>
+          <a:noFill/>
+        </p:spPr>
+        <p:txBody>
+          <a:bodyPr wrap="square" anchor="t" lIns="36000" rIns="36000" tIns="18000" bIns="18000">
+            <a:spAutoFit/>
+          </a:bodyPr>
+          <a:lstStyle/>
+          <a:p>
+            <a:pPr algn="l"/>
+            <a:r>
+              <a:rPr sz="1100" b="0" i="0">
+                <a:solidFill>
+                  <a:srgbClr val="3B5174"/>
+                </a:solidFill>
+                <a:latin typeface="Noto Sans JP"/>
+              </a:rPr>
+              <a:t>•</a:t>
+            </a:r>
+          </a:p>
+        </p:txBody>
+      </p:sp>
+      <p:sp>
+        <p:nvSpPr>
+          <p:cNvPr id="21" name="TextBox 20"/>
+          <p:cNvSpPr txBox="1"/>
+          <p:nvPr/>
+        </p:nvSpPr>
+        <p:spPr>
+          <a:xfrm>
+            <a:off x="749808" y="2450592"/>
+            <a:ext cx="2202103" cy="274320"/>
+          </a:xfrm>
+          <a:prstGeom prst="rect">
+            <a:avLst/>
+          </a:prstGeom>
+          <a:noFill/>
+        </p:spPr>
+        <p:txBody>
+          <a:bodyPr wrap="square" anchor="t" lIns="36000" rIns="36000" tIns="18000" bIns="18000">
+            <a:spAutoFit/>
+          </a:bodyPr>
+          <a:lstStyle/>
+          <a:p>
+            <a:pPr algn="l"/>
+            <a:r>
+              <a:rPr sz="1100" b="0" i="0">
+                <a:solidFill>
+                  <a:srgbClr val="475569"/>
+                </a:solidFill>
+                <a:latin typeface="Noto Sans JP"/>
+              </a:rPr>
+              <a:t>tan δ &lt;&lt; 1（弾性支配）</a:t>
+            </a:r>
+          </a:p>
+        </p:txBody>
+      </p:sp>
+      <p:sp>
+        <p:nvSpPr>
+          <p:cNvPr id="22" name="Rounded Rectangle 21"/>
           <p:cNvSpPr/>
           <p:nvPr/>
         </p:nvSpPr>
         <p:spPr>
           <a:xfrm>
-            <a:off x="2275789" y="1271016"/>
-            <a:ext cx="1772869" cy="2011680"/>
+            <a:off x="3262807" y="859536"/>
+            <a:ext cx="2769031" cy="4206240"/>
           </a:xfrm>
           <a:prstGeom prst="roundRect">
             <a:avLst>
@@ -43257,14 +43476,58 @@
       </p:sp>
       <p:sp>
         <p:nvSpPr>
-          <p:cNvPr id="17" name="TextBox 16"/>
-          <p:cNvSpPr txBox="1"/>
-          <p:nvPr/>
-        </p:nvSpPr>
-        <p:spPr>
-          <a:xfrm>
-            <a:off x="2403805" y="1399032"/>
-            <a:ext cx="1516837" cy="219456"/>
+          <p:cNvPr id="23" name="Rectangle 22"/>
+          <p:cNvSpPr/>
+          <p:nvPr/>
+        </p:nvSpPr>
+        <p:spPr>
+          <a:xfrm>
+            <a:off x="3262807" y="859536"/>
+            <a:ext cx="2769031" cy="36576"/>
+          </a:xfrm>
+          <a:prstGeom prst="rect">
+            <a:avLst/>
+          </a:prstGeom>
+          <a:solidFill>
+            <a:srgbClr val="3B5174"/>
+          </a:solidFill>
+          <a:ln>
+            <a:noFill/>
+          </a:ln>
+          <a:effectLst/>
+        </p:spPr>
+        <p:style>
+          <a:lnRef idx="1">
+            <a:schemeClr val="accent1"/>
+          </a:lnRef>
+          <a:fillRef idx="3">
+            <a:schemeClr val="accent1"/>
+          </a:fillRef>
+          <a:effectRef idx="2">
+            <a:schemeClr val="accent1"/>
+          </a:effectRef>
+          <a:fontRef idx="minor">
+            <a:schemeClr val="lt1"/>
+          </a:fontRef>
+        </p:style>
+        <p:txBody>
+          <a:bodyPr rtlCol="0" anchor="ctr"/>
+          <a:lstStyle/>
+          <a:p>
+            <a:pPr algn="ctr"/>
+          </a:p>
+        </p:txBody>
+      </p:sp>
+      <p:sp>
+        <p:nvSpPr>
+          <p:cNvPr id="24" name="TextBox 23"/>
+          <p:cNvSpPr txBox="1"/>
+          <p:nvPr/>
+        </p:nvSpPr>
+        <p:spPr>
+          <a:xfrm>
+            <a:off x="3445687" y="1024128"/>
+            <a:ext cx="2403271" cy="219456"/>
           </a:xfrm>
           <a:prstGeom prst="rect">
             <a:avLst/>
@@ -43285,21 +43548,21 @@
                 </a:solidFill>
                 <a:latin typeface="Noto Sans JP"/>
               </a:rPr>
-              <a:t>耐久性</a:t>
-            </a:r>
-          </a:p>
-        </p:txBody>
-      </p:sp>
-      <p:sp>
-        <p:nvSpPr>
-          <p:cNvPr id="18" name="TextBox 17"/>
-          <p:cNvSpPr txBox="1"/>
-          <p:nvPr/>
-        </p:nvSpPr>
-        <p:spPr>
-          <a:xfrm>
-            <a:off x="2403805" y="1636776"/>
-            <a:ext cx="1516837" cy="310896"/>
+              <a:t>FIRE PROTECTION</a:t>
+            </a:r>
+          </a:p>
+        </p:txBody>
+      </p:sp>
+      <p:sp>
+        <p:nvSpPr>
+          <p:cNvPr id="25" name="TextBox 24"/>
+          <p:cNvSpPr txBox="1"/>
+          <p:nvPr/>
+        </p:nvSpPr>
+        <p:spPr>
+          <a:xfrm>
+            <a:off x="3445687" y="1261872"/>
+            <a:ext cx="2403271" cy="329184"/>
           </a:xfrm>
           <a:prstGeom prst="rect">
             <a:avLst/>
@@ -43320,21 +43583,21 @@
                 </a:solidFill>
                 <a:latin typeface="Noto Sans JP"/>
               </a:rPr>
-              <a:t>長期保存安定性</a:t>
-            </a:r>
-          </a:p>
-        </p:txBody>
-      </p:sp>
-      <p:sp>
-        <p:nvSpPr>
-          <p:cNvPr id="19" name="TextBox 18"/>
-          <p:cNvSpPr txBox="1"/>
-          <p:nvPr/>
-        </p:nvSpPr>
-        <p:spPr>
-          <a:xfrm>
-            <a:off x="2403805" y="1965960"/>
-            <a:ext cx="1516837" cy="1234440"/>
+              <a:t>火炎保護性能</a:t>
+            </a:r>
+          </a:p>
+        </p:txBody>
+      </p:sp>
+      <p:sp>
+        <p:nvSpPr>
+          <p:cNvPr id="26" name="TextBox 25"/>
+          <p:cNvSpPr txBox="1"/>
+          <p:nvPr/>
+        </p:nvSpPr>
+        <p:spPr>
+          <a:xfrm>
+            <a:off x="3445687" y="1627632"/>
+            <a:ext cx="182880" cy="274320"/>
           </a:xfrm>
           <a:prstGeom prst="rect">
             <a:avLst/>
@@ -43351,60 +43614,270 @@
             <a:r>
               <a:rPr sz="1100" b="0" i="0">
                 <a:solidFill>
+                  <a:srgbClr val="3B5174"/>
+                </a:solidFill>
+                <a:latin typeface="Noto Sans JP"/>
+              </a:rPr>
+              <a:t>•</a:t>
+            </a:r>
+          </a:p>
+        </p:txBody>
+      </p:sp>
+      <p:sp>
+        <p:nvSpPr>
+          <p:cNvPr id="27" name="TextBox 26"/>
+          <p:cNvSpPr txBox="1"/>
+          <p:nvPr/>
+        </p:nvSpPr>
+        <p:spPr>
+          <a:xfrm>
+            <a:off x="3646855" y="1627632"/>
+            <a:ext cx="2202103" cy="274320"/>
+          </a:xfrm>
+          <a:prstGeom prst="rect">
+            <a:avLst/>
+          </a:prstGeom>
+          <a:noFill/>
+        </p:spPr>
+        <p:txBody>
+          <a:bodyPr wrap="square" anchor="t" lIns="36000" rIns="36000" tIns="18000" bIns="18000">
+            <a:spAutoFit/>
+          </a:bodyPr>
+          <a:lstStyle/>
+          <a:p>
+            <a:pPr algn="l"/>
+            <a:r>
+              <a:rPr sz="1100" b="0" i="0">
+                <a:solidFill>
                   <a:srgbClr val="475569"/>
                 </a:solidFill>
                 <a:latin typeface="Noto Sans JP"/>
               </a:rPr>
-              <a:t>分相・沈降の評価。シーズン保管対応</a:t>
-            </a:r>
-          </a:p>
-        </p:txBody>
-      </p:sp>
-      <p:sp>
-        <p:nvSpPr>
-          <p:cNvPr id="20" name="TextBox 19"/>
-          <p:cNvSpPr txBox="1"/>
-          <p:nvPr/>
-        </p:nvSpPr>
-        <p:spPr>
-          <a:xfrm>
-            <a:off x="4048658" y="1271016"/>
-            <a:ext cx="137160" cy="2011680"/>
-          </a:xfrm>
-          <a:prstGeom prst="rect">
-            <a:avLst/>
-          </a:prstGeom>
-          <a:noFill/>
-        </p:spPr>
-        <p:txBody>
-          <a:bodyPr wrap="square" anchor="ctr" lIns="36000" rIns="36000" tIns="18000" bIns="18000">
-            <a:spAutoFit/>
-          </a:bodyPr>
-          <a:lstStyle/>
-          <a:p>
-            <a:pPr algn="ctr"/>
-            <a:r>
-              <a:rPr sz="1200" b="0" i="0">
-                <a:solidFill>
-                  <a:srgbClr val="64748B"/>
-                </a:solidFill>
-                <a:latin typeface="Noto Sans JP"/>
-              </a:rPr>
-              <a:t>▶</a:t>
-            </a:r>
-          </a:p>
-        </p:txBody>
-      </p:sp>
-      <p:sp>
-        <p:nvSpPr>
-          <p:cNvPr id="21" name="Rounded Rectangle 20"/>
+              <a:t>Time to char ≈ 10 分</a:t>
+            </a:r>
+          </a:p>
+        </p:txBody>
+      </p:sp>
+      <p:sp>
+        <p:nvSpPr>
+          <p:cNvPr id="28" name="TextBox 27"/>
+          <p:cNvSpPr txBox="1"/>
+          <p:nvPr/>
+        </p:nvSpPr>
+        <p:spPr>
+          <a:xfrm>
+            <a:off x="3445687" y="1901952"/>
+            <a:ext cx="182880" cy="274320"/>
+          </a:xfrm>
+          <a:prstGeom prst="rect">
+            <a:avLst/>
+          </a:prstGeom>
+          <a:noFill/>
+        </p:spPr>
+        <p:txBody>
+          <a:bodyPr wrap="square" anchor="t" lIns="36000" rIns="36000" tIns="18000" bIns="18000">
+            <a:spAutoFit/>
+          </a:bodyPr>
+          <a:lstStyle/>
+          <a:p>
+            <a:pPr algn="l"/>
+            <a:r>
+              <a:rPr sz="1100" b="0" i="0">
+                <a:solidFill>
+                  <a:srgbClr val="3B5174"/>
+                </a:solidFill>
+                <a:latin typeface="Noto Sans JP"/>
+              </a:rPr>
+              <a:t>•</a:t>
+            </a:r>
+          </a:p>
+        </p:txBody>
+      </p:sp>
+      <p:sp>
+        <p:nvSpPr>
+          <p:cNvPr id="29" name="TextBox 28"/>
+          <p:cNvSpPr txBox="1"/>
+          <p:nvPr/>
+        </p:nvSpPr>
+        <p:spPr>
+          <a:xfrm>
+            <a:off x="3646855" y="1901952"/>
+            <a:ext cx="2202103" cy="274320"/>
+          </a:xfrm>
+          <a:prstGeom prst="rect">
+            <a:avLst/>
+          </a:prstGeom>
+          <a:noFill/>
+        </p:spPr>
+        <p:txBody>
+          <a:bodyPr wrap="square" anchor="t" lIns="36000" rIns="36000" tIns="18000" bIns="18000">
+            <a:spAutoFit/>
+          </a:bodyPr>
+          <a:lstStyle/>
+          <a:p>
+            <a:pPr algn="l"/>
+            <a:r>
+              <a:rPr sz="1100" b="0" i="0">
+                <a:solidFill>
+                  <a:srgbClr val="475569"/>
+                </a:solidFill>
+                <a:latin typeface="Noto Sans JP"/>
+              </a:rPr>
+              <a:t>水のみ（~2分）の約5倍</a:t>
+            </a:r>
+          </a:p>
+        </p:txBody>
+      </p:sp>
+      <p:sp>
+        <p:nvSpPr>
+          <p:cNvPr id="30" name="TextBox 29"/>
+          <p:cNvSpPr txBox="1"/>
+          <p:nvPr/>
+        </p:nvSpPr>
+        <p:spPr>
+          <a:xfrm>
+            <a:off x="3445687" y="2176272"/>
+            <a:ext cx="182880" cy="274320"/>
+          </a:xfrm>
+          <a:prstGeom prst="rect">
+            <a:avLst/>
+          </a:prstGeom>
+          <a:noFill/>
+        </p:spPr>
+        <p:txBody>
+          <a:bodyPr wrap="square" anchor="t" lIns="36000" rIns="36000" tIns="18000" bIns="18000">
+            <a:spAutoFit/>
+          </a:bodyPr>
+          <a:lstStyle/>
+          <a:p>
+            <a:pPr algn="l"/>
+            <a:r>
+              <a:rPr sz="1100" b="0" i="0">
+                <a:solidFill>
+                  <a:srgbClr val="3B5174"/>
+                </a:solidFill>
+                <a:latin typeface="Noto Sans JP"/>
+              </a:rPr>
+              <a:t>•</a:t>
+            </a:r>
+          </a:p>
+        </p:txBody>
+      </p:sp>
+      <p:sp>
+        <p:nvSpPr>
+          <p:cNvPr id="31" name="TextBox 30"/>
+          <p:cNvSpPr txBox="1"/>
+          <p:nvPr/>
+        </p:nvSpPr>
+        <p:spPr>
+          <a:xfrm>
+            <a:off x="3646855" y="2176272"/>
+            <a:ext cx="2202103" cy="274320"/>
+          </a:xfrm>
+          <a:prstGeom prst="rect">
+            <a:avLst/>
+          </a:prstGeom>
+          <a:noFill/>
+        </p:spPr>
+        <p:txBody>
+          <a:bodyPr wrap="square" anchor="t" lIns="36000" rIns="36000" tIns="18000" bIns="18000">
+            <a:spAutoFit/>
+          </a:bodyPr>
+          <a:lstStyle/>
+          <a:p>
+            <a:pPr algn="l"/>
+            <a:r>
+              <a:rPr sz="1100" b="0" i="0">
+                <a:solidFill>
+                  <a:srgbClr val="475569"/>
+                </a:solidFill>
+                <a:latin typeface="Noto Sans JP"/>
+              </a:rPr>
+              <a:t>AquaGel-K比 約40%延長</a:t>
+            </a:r>
+          </a:p>
+        </p:txBody>
+      </p:sp>
+      <p:sp>
+        <p:nvSpPr>
+          <p:cNvPr id="32" name="TextBox 31"/>
+          <p:cNvSpPr txBox="1"/>
+          <p:nvPr/>
+        </p:nvSpPr>
+        <p:spPr>
+          <a:xfrm>
+            <a:off x="3445687" y="2450592"/>
+            <a:ext cx="182880" cy="274320"/>
+          </a:xfrm>
+          <a:prstGeom prst="rect">
+            <a:avLst/>
+          </a:prstGeom>
+          <a:noFill/>
+        </p:spPr>
+        <p:txBody>
+          <a:bodyPr wrap="square" anchor="t" lIns="36000" rIns="36000" tIns="18000" bIns="18000">
+            <a:spAutoFit/>
+          </a:bodyPr>
+          <a:lstStyle/>
+          <a:p>
+            <a:pPr algn="l"/>
+            <a:r>
+              <a:rPr sz="1100" b="0" i="0">
+                <a:solidFill>
+                  <a:srgbClr val="3B5174"/>
+                </a:solidFill>
+                <a:latin typeface="Noto Sans JP"/>
+              </a:rPr>
+              <a:t>•</a:t>
+            </a:r>
+          </a:p>
+        </p:txBody>
+      </p:sp>
+      <p:sp>
+        <p:nvSpPr>
+          <p:cNvPr id="33" name="TextBox 32"/>
+          <p:cNvSpPr txBox="1"/>
+          <p:nvPr/>
+        </p:nvSpPr>
+        <p:spPr>
+          <a:xfrm>
+            <a:off x="3646855" y="2450592"/>
+            <a:ext cx="2202103" cy="274320"/>
+          </a:xfrm>
+          <a:prstGeom prst="rect">
+            <a:avLst/>
+          </a:prstGeom>
+          <a:noFill/>
+        </p:spPr>
+        <p:txBody>
+          <a:bodyPr wrap="square" anchor="t" lIns="36000" rIns="36000" tIns="18000" bIns="18000">
+            <a:spAutoFit/>
+          </a:bodyPr>
+          <a:lstStyle/>
+          <a:p>
+            <a:pPr algn="l"/>
+            <a:r>
+              <a:rPr sz="1100" b="0" i="0">
+                <a:solidFill>
+                  <a:srgbClr val="475569"/>
+                </a:solidFill>
+                <a:latin typeface="Noto Sans JP"/>
+              </a:rPr>
+              <a:t>300秒後も表面ほぼ無傷</a:t>
+            </a:r>
+          </a:p>
+        </p:txBody>
+      </p:sp>
+      <p:sp>
+        <p:nvSpPr>
+          <p:cNvPr id="34" name="Rounded Rectangle 33"/>
           <p:cNvSpPr/>
           <p:nvPr/>
         </p:nvSpPr>
         <p:spPr>
           <a:xfrm>
-            <a:off x="4185818" y="1271016"/>
-            <a:ext cx="1772869" cy="2011680"/>
+            <a:off x="6159855" y="859536"/>
+            <a:ext cx="2769031" cy="4206240"/>
           </a:xfrm>
           <a:prstGeom prst="roundRect">
             <a:avLst>
@@ -43445,165 +43918,14 @@
       </p:sp>
       <p:sp>
         <p:nvSpPr>
-          <p:cNvPr id="22" name="TextBox 21"/>
-          <p:cNvSpPr txBox="1"/>
-          <p:nvPr/>
-        </p:nvSpPr>
-        <p:spPr>
-          <a:xfrm>
-            <a:off x="4313834" y="1399032"/>
-            <a:ext cx="1516837" cy="219456"/>
-          </a:xfrm>
-          <a:prstGeom prst="rect">
-            <a:avLst/>
-          </a:prstGeom>
-          <a:noFill/>
-        </p:spPr>
-        <p:txBody>
-          <a:bodyPr wrap="square" anchor="t" lIns="36000" rIns="36000" tIns="18000" bIns="18000">
-            <a:spAutoFit/>
-          </a:bodyPr>
-          <a:lstStyle/>
-          <a:p>
-            <a:pPr algn="l"/>
-            <a:r>
-              <a:rPr sz="1000" b="1" i="0">
-                <a:solidFill>
-                  <a:srgbClr val="64748B"/>
-                </a:solidFill>
-                <a:latin typeface="Noto Sans JP"/>
-              </a:rPr>
-              <a:t>コスト</a:t>
-            </a:r>
-          </a:p>
-        </p:txBody>
-      </p:sp>
-      <p:sp>
-        <p:nvSpPr>
-          <p:cNvPr id="23" name="TextBox 22"/>
-          <p:cNvSpPr txBox="1"/>
-          <p:nvPr/>
-        </p:nvSpPr>
-        <p:spPr>
-          <a:xfrm>
-            <a:off x="4313834" y="1636776"/>
-            <a:ext cx="1516837" cy="310896"/>
-          </a:xfrm>
-          <a:prstGeom prst="rect">
-            <a:avLst/>
-          </a:prstGeom>
-          <a:noFill/>
-        </p:spPr>
-        <p:txBody>
-          <a:bodyPr wrap="square" anchor="t" lIns="36000" rIns="36000" tIns="18000" bIns="18000">
-            <a:spAutoFit/>
-          </a:bodyPr>
-          <a:lstStyle/>
-          <a:p>
-            <a:pPr algn="l"/>
-            <a:r>
-              <a:rPr sz="1400" b="1" i="0">
-                <a:solidFill>
-                  <a:srgbClr val="1E293B"/>
-                </a:solidFill>
-                <a:latin typeface="Noto Sans JP"/>
-              </a:rPr>
-              <a:t>量産コスト</a:t>
-            </a:r>
-          </a:p>
-        </p:txBody>
-      </p:sp>
-      <p:sp>
-        <p:nvSpPr>
-          <p:cNvPr id="24" name="TextBox 23"/>
-          <p:cNvSpPr txBox="1"/>
-          <p:nvPr/>
-        </p:nvSpPr>
-        <p:spPr>
-          <a:xfrm>
-            <a:off x="4313834" y="1965960"/>
-            <a:ext cx="1516837" cy="1234440"/>
-          </a:xfrm>
-          <a:prstGeom prst="rect">
-            <a:avLst/>
-          </a:prstGeom>
-          <a:noFill/>
-        </p:spPr>
-        <p:txBody>
-          <a:bodyPr wrap="square" anchor="t" lIns="36000" rIns="36000" tIns="18000" bIns="18000">
-            <a:spAutoFit/>
-          </a:bodyPr>
-          <a:lstStyle/>
-          <a:p>
-            <a:pPr algn="l"/>
-            <a:r>
-              <a:rPr sz="1100" b="0" i="0">
-                <a:solidFill>
-                  <a:srgbClr val="475569"/>
-                </a:solidFill>
-                <a:latin typeface="Noto Sans JP"/>
-              </a:rPr>
-              <a:t>原料コストと大量調製プロセスの確立</a:t>
-            </a:r>
-          </a:p>
-        </p:txBody>
-      </p:sp>
-      <p:sp>
-        <p:nvSpPr>
-          <p:cNvPr id="25" name="Rounded Rectangle 24"/>
+          <p:cNvPr id="35" name="Rectangle 34"/>
           <p:cNvSpPr/>
           <p:nvPr/>
         </p:nvSpPr>
         <p:spPr>
           <a:xfrm>
-            <a:off x="365760" y="3465576"/>
-            <a:ext cx="5592927" cy="777240"/>
-          </a:xfrm>
-          <a:prstGeom prst="roundRect">
-            <a:avLst>
-              <a:gd name="adj" fmla="val 4000"/>
-            </a:avLst>
-          </a:prstGeom>
-          <a:solidFill>
-            <a:srgbClr val="F8FAFC"/>
-          </a:solidFill>
-          <a:ln>
-            <a:noFill/>
-          </a:ln>
-          <a:effectLst/>
-        </p:spPr>
-        <p:style>
-          <a:lnRef idx="1">
-            <a:schemeClr val="accent1"/>
-          </a:lnRef>
-          <a:fillRef idx="3">
-            <a:schemeClr val="accent1"/>
-          </a:fillRef>
-          <a:effectRef idx="2">
-            <a:schemeClr val="accent1"/>
-          </a:effectRef>
-          <a:fontRef idx="minor">
-            <a:schemeClr val="lt1"/>
-          </a:fontRef>
-        </p:style>
-        <p:txBody>
-          <a:bodyPr rtlCol="0" anchor="ctr"/>
-          <a:lstStyle/>
-          <a:p>
-            <a:pPr algn="ctr"/>
-          </a:p>
-        </p:txBody>
-      </p:sp>
-      <p:sp>
-        <p:nvSpPr>
-          <p:cNvPr id="26" name="Rectangle 25"/>
-          <p:cNvSpPr/>
-          <p:nvPr/>
-        </p:nvSpPr>
-        <p:spPr>
-          <a:xfrm>
-            <a:off x="365760" y="3465576"/>
-            <a:ext cx="54864" cy="777240"/>
+            <a:off x="6159855" y="859536"/>
+            <a:ext cx="2769031" cy="36576"/>
           </a:xfrm>
           <a:prstGeom prst="rect">
             <a:avLst/>
@@ -43640,14 +43962,896 @@
       </p:sp>
       <p:sp>
         <p:nvSpPr>
-          <p:cNvPr id="27" name="TextBox 26"/>
-          <p:cNvSpPr txBox="1"/>
-          <p:nvPr/>
-        </p:nvSpPr>
-        <p:spPr>
-          <a:xfrm>
-            <a:off x="548640" y="3465576"/>
-            <a:ext cx="365760" cy="777240"/>
+          <p:cNvPr id="36" name="TextBox 35"/>
+          <p:cNvSpPr txBox="1"/>
+          <p:nvPr/>
+        </p:nvSpPr>
+        <p:spPr>
+          <a:xfrm>
+            <a:off x="6342735" y="1024128"/>
+            <a:ext cx="2403271" cy="219456"/>
+          </a:xfrm>
+          <a:prstGeom prst="rect">
+            <a:avLst/>
+          </a:prstGeom>
+          <a:noFill/>
+        </p:spPr>
+        <p:txBody>
+          <a:bodyPr wrap="square" anchor="t" lIns="36000" rIns="36000" tIns="18000" bIns="18000">
+            <a:spAutoFit/>
+          </a:bodyPr>
+          <a:lstStyle/>
+          <a:p>
+            <a:pPr algn="l"/>
+            <a:r>
+              <a:rPr sz="1000" b="1" i="0">
+                <a:solidFill>
+                  <a:srgbClr val="64748B"/>
+                </a:solidFill>
+                <a:latin typeface="Noto Sans JP"/>
+              </a:rPr>
+              <a:t>FOAMING / SEM</a:t>
+            </a:r>
+          </a:p>
+        </p:txBody>
+      </p:sp>
+      <p:sp>
+        <p:nvSpPr>
+          <p:cNvPr id="37" name="TextBox 36"/>
+          <p:cNvSpPr txBox="1"/>
+          <p:nvPr/>
+        </p:nvSpPr>
+        <p:spPr>
+          <a:xfrm>
+            <a:off x="6342735" y="1261872"/>
+            <a:ext cx="2403271" cy="329184"/>
+          </a:xfrm>
+          <a:prstGeom prst="rect">
+            <a:avLst/>
+          </a:prstGeom>
+          <a:noFill/>
+        </p:spPr>
+        <p:txBody>
+          <a:bodyPr wrap="square" anchor="t" lIns="36000" rIns="36000" tIns="18000" bIns="18000">
+            <a:spAutoFit/>
+          </a:bodyPr>
+          <a:lstStyle/>
+          <a:p>
+            <a:pPr algn="l"/>
+            <a:r>
+              <a:rPr sz="1400" b="1" i="0">
+                <a:solidFill>
+                  <a:srgbClr val="1E293B"/>
+                </a:solidFill>
+                <a:latin typeface="Noto Sans JP"/>
+              </a:rPr>
+              <a:t>発泡・微細構造</a:t>
+            </a:r>
+          </a:p>
+        </p:txBody>
+      </p:sp>
+      <p:sp>
+        <p:nvSpPr>
+          <p:cNvPr id="38" name="TextBox 37"/>
+          <p:cNvSpPr txBox="1"/>
+          <p:nvPr/>
+        </p:nvSpPr>
+        <p:spPr>
+          <a:xfrm>
+            <a:off x="6342735" y="1627632"/>
+            <a:ext cx="182880" cy="274320"/>
+          </a:xfrm>
+          <a:prstGeom prst="rect">
+            <a:avLst/>
+          </a:prstGeom>
+          <a:noFill/>
+        </p:spPr>
+        <p:txBody>
+          <a:bodyPr wrap="square" anchor="t" lIns="36000" rIns="36000" tIns="18000" bIns="18000">
+            <a:spAutoFit/>
+          </a:bodyPr>
+          <a:lstStyle/>
+          <a:p>
+            <a:pPr algn="l"/>
+            <a:r>
+              <a:rPr sz="1100" b="0" i="0">
+                <a:solidFill>
+                  <a:srgbClr val="3B5174"/>
+                </a:solidFill>
+                <a:latin typeface="Noto Sans JP"/>
+              </a:rPr>
+              <a:t>•</a:t>
+            </a:r>
+          </a:p>
+        </p:txBody>
+      </p:sp>
+      <p:sp>
+        <p:nvSpPr>
+          <p:cNvPr id="39" name="TextBox 38"/>
+          <p:cNvSpPr txBox="1"/>
+          <p:nvPr/>
+        </p:nvSpPr>
+        <p:spPr>
+          <a:xfrm>
+            <a:off x="6543903" y="1627632"/>
+            <a:ext cx="2202103" cy="274320"/>
+          </a:xfrm>
+          <a:prstGeom prst="rect">
+            <a:avLst/>
+          </a:prstGeom>
+          <a:noFill/>
+        </p:spPr>
+        <p:txBody>
+          <a:bodyPr wrap="square" anchor="t" lIns="36000" rIns="36000" tIns="18000" bIns="18000">
+            <a:spAutoFit/>
+          </a:bodyPr>
+          <a:lstStyle/>
+          <a:p>
+            <a:pPr algn="l"/>
+            <a:r>
+              <a:rPr sz="1100" b="0" i="0">
+                <a:solidFill>
+                  <a:srgbClr val="475569"/>
+                </a:solidFill>
+                <a:latin typeface="Noto Sans JP"/>
+              </a:rPr>
+              <a:t>Foaming Index ≈ 2.2–2.6</a:t>
+            </a:r>
+          </a:p>
+        </p:txBody>
+      </p:sp>
+      <p:sp>
+        <p:nvSpPr>
+          <p:cNvPr id="40" name="TextBox 39"/>
+          <p:cNvSpPr txBox="1"/>
+          <p:nvPr/>
+        </p:nvSpPr>
+        <p:spPr>
+          <a:xfrm>
+            <a:off x="6342735" y="1901952"/>
+            <a:ext cx="182880" cy="274320"/>
+          </a:xfrm>
+          <a:prstGeom prst="rect">
+            <a:avLst/>
+          </a:prstGeom>
+          <a:noFill/>
+        </p:spPr>
+        <p:txBody>
+          <a:bodyPr wrap="square" anchor="t" lIns="36000" rIns="36000" tIns="18000" bIns="18000">
+            <a:spAutoFit/>
+          </a:bodyPr>
+          <a:lstStyle/>
+          <a:p>
+            <a:pPr algn="l"/>
+            <a:r>
+              <a:rPr sz="1100" b="0" i="0">
+                <a:solidFill>
+                  <a:srgbClr val="3B5174"/>
+                </a:solidFill>
+                <a:latin typeface="Noto Sans JP"/>
+              </a:rPr>
+              <a:t>•</a:t>
+            </a:r>
+          </a:p>
+        </p:txBody>
+      </p:sp>
+      <p:sp>
+        <p:nvSpPr>
+          <p:cNvPr id="41" name="TextBox 40"/>
+          <p:cNvSpPr txBox="1"/>
+          <p:nvPr/>
+        </p:nvSpPr>
+        <p:spPr>
+          <a:xfrm>
+            <a:off x="6543903" y="1901952"/>
+            <a:ext cx="2202103" cy="274320"/>
+          </a:xfrm>
+          <a:prstGeom prst="rect">
+            <a:avLst/>
+          </a:prstGeom>
+          <a:noFill/>
+        </p:spPr>
+        <p:txBody>
+          <a:bodyPr wrap="square" anchor="t" lIns="36000" rIns="36000" tIns="18000" bIns="18000">
+            <a:spAutoFit/>
+          </a:bodyPr>
+          <a:lstStyle/>
+          <a:p>
+            <a:pPr algn="l"/>
+            <a:r>
+              <a:rPr sz="1100" b="0" i="0">
+                <a:solidFill>
+                  <a:srgbClr val="475569"/>
+                </a:solidFill>
+                <a:latin typeface="Noto Sans JP"/>
+              </a:rPr>
+              <a:t>SDS 0.1% で均一微細気泡</a:t>
+            </a:r>
+          </a:p>
+        </p:txBody>
+      </p:sp>
+      <p:sp>
+        <p:nvSpPr>
+          <p:cNvPr id="42" name="TextBox 41"/>
+          <p:cNvSpPr txBox="1"/>
+          <p:nvPr/>
+        </p:nvSpPr>
+        <p:spPr>
+          <a:xfrm>
+            <a:off x="6342735" y="2176272"/>
+            <a:ext cx="182880" cy="274320"/>
+          </a:xfrm>
+          <a:prstGeom prst="rect">
+            <a:avLst/>
+          </a:prstGeom>
+          <a:noFill/>
+        </p:spPr>
+        <p:txBody>
+          <a:bodyPr wrap="square" anchor="t" lIns="36000" rIns="36000" tIns="18000" bIns="18000">
+            <a:spAutoFit/>
+          </a:bodyPr>
+          <a:lstStyle/>
+          <a:p>
+            <a:pPr algn="l"/>
+            <a:r>
+              <a:rPr sz="1100" b="0" i="0">
+                <a:solidFill>
+                  <a:srgbClr val="3B5174"/>
+                </a:solidFill>
+                <a:latin typeface="Noto Sans JP"/>
+              </a:rPr>
+              <a:t>•</a:t>
+            </a:r>
+          </a:p>
+        </p:txBody>
+      </p:sp>
+      <p:sp>
+        <p:nvSpPr>
+          <p:cNvPr id="43" name="TextBox 42"/>
+          <p:cNvSpPr txBox="1"/>
+          <p:nvPr/>
+        </p:nvSpPr>
+        <p:spPr>
+          <a:xfrm>
+            <a:off x="6543903" y="2176272"/>
+            <a:ext cx="2202103" cy="274320"/>
+          </a:xfrm>
+          <a:prstGeom prst="rect">
+            <a:avLst/>
+          </a:prstGeom>
+          <a:noFill/>
+        </p:spPr>
+        <p:txBody>
+          <a:bodyPr wrap="square" anchor="t" lIns="36000" rIns="36000" tIns="18000" bIns="18000">
+            <a:spAutoFit/>
+          </a:bodyPr>
+          <a:lstStyle/>
+          <a:p>
+            <a:pPr algn="l"/>
+            <a:r>
+              <a:rPr sz="1100" b="0" i="0">
+                <a:solidFill>
+                  <a:srgbClr val="475569"/>
+                </a:solidFill>
+                <a:latin typeface="Noto Sans JP"/>
+              </a:rPr>
+              <a:t>SEMで焼結進行を観察</a:t>
+            </a:r>
+          </a:p>
+        </p:txBody>
+      </p:sp>
+      <p:sp>
+        <p:nvSpPr>
+          <p:cNvPr id="44" name="TextBox 43"/>
+          <p:cNvSpPr txBox="1"/>
+          <p:nvPr/>
+        </p:nvSpPr>
+        <p:spPr>
+          <a:xfrm>
+            <a:off x="6342735" y="2450592"/>
+            <a:ext cx="182880" cy="274320"/>
+          </a:xfrm>
+          <a:prstGeom prst="rect">
+            <a:avLst/>
+          </a:prstGeom>
+          <a:noFill/>
+        </p:spPr>
+        <p:txBody>
+          <a:bodyPr wrap="square" anchor="t" lIns="36000" rIns="36000" tIns="18000" bIns="18000">
+            <a:spAutoFit/>
+          </a:bodyPr>
+          <a:lstStyle/>
+          <a:p>
+            <a:pPr algn="l"/>
+            <a:r>
+              <a:rPr sz="1100" b="0" i="0">
+                <a:solidFill>
+                  <a:srgbClr val="3B5174"/>
+                </a:solidFill>
+                <a:latin typeface="Noto Sans JP"/>
+              </a:rPr>
+              <a:t>•</a:t>
+            </a:r>
+          </a:p>
+        </p:txBody>
+      </p:sp>
+      <p:sp>
+        <p:nvSpPr>
+          <p:cNvPr id="45" name="TextBox 44"/>
+          <p:cNvSpPr txBox="1"/>
+          <p:nvPr/>
+        </p:nvSpPr>
+        <p:spPr>
+          <a:xfrm>
+            <a:off x="6543903" y="2450592"/>
+            <a:ext cx="2202103" cy="274320"/>
+          </a:xfrm>
+          <a:prstGeom prst="rect">
+            <a:avLst/>
+          </a:prstGeom>
+          <a:noFill/>
+        </p:spPr>
+        <p:txBody>
+          <a:bodyPr wrap="square" anchor="t" lIns="36000" rIns="36000" tIns="18000" bIns="18000">
+            <a:spAutoFit/>
+          </a:bodyPr>
+          <a:lstStyle/>
+          <a:p>
+            <a:pPr algn="l"/>
+            <a:r>
+              <a:rPr sz="1100" b="0" i="0">
+                <a:solidFill>
+                  <a:srgbClr val="475569"/>
+                </a:solidFill>
+                <a:latin typeface="Noto Sans JP"/>
+              </a:rPr>
+              <a:t>ネック形成 → 多孔質骨格</a:t>
+            </a:r>
+          </a:p>
+        </p:txBody>
+      </p:sp>
+      <p:sp>
+        <p:nvSpPr>
+          <p:cNvPr id="46" name="Rounded Rectangle 45"/>
+          <p:cNvSpPr/>
+          <p:nvPr/>
+        </p:nvSpPr>
+        <p:spPr>
+          <a:xfrm>
+            <a:off x="9056903" y="859536"/>
+            <a:ext cx="2769031" cy="4206240"/>
+          </a:xfrm>
+          <a:prstGeom prst="roundRect">
+            <a:avLst>
+              <a:gd name="adj" fmla="val 4000"/>
+            </a:avLst>
+          </a:prstGeom>
+          <a:solidFill>
+            <a:srgbClr val="F1F5F9"/>
+          </a:solidFill>
+          <a:ln w="6350">
+            <a:solidFill>
+              <a:srgbClr val="E2E8F0"/>
+            </a:solidFill>
+          </a:ln>
+          <a:effectLst/>
+        </p:spPr>
+        <p:style>
+          <a:lnRef idx="1">
+            <a:schemeClr val="accent1"/>
+          </a:lnRef>
+          <a:fillRef idx="3">
+            <a:schemeClr val="accent1"/>
+          </a:fillRef>
+          <a:effectRef idx="2">
+            <a:schemeClr val="accent1"/>
+          </a:effectRef>
+          <a:fontRef idx="minor">
+            <a:schemeClr val="lt1"/>
+          </a:fontRef>
+        </p:style>
+        <p:txBody>
+          <a:bodyPr rtlCol="0" anchor="ctr"/>
+          <a:lstStyle/>
+          <a:p>
+            <a:pPr algn="ctr"/>
+          </a:p>
+        </p:txBody>
+      </p:sp>
+      <p:sp>
+        <p:nvSpPr>
+          <p:cNvPr id="47" name="Rectangle 46"/>
+          <p:cNvSpPr/>
+          <p:nvPr/>
+        </p:nvSpPr>
+        <p:spPr>
+          <a:xfrm>
+            <a:off x="9056903" y="859536"/>
+            <a:ext cx="2769031" cy="36576"/>
+          </a:xfrm>
+          <a:prstGeom prst="rect">
+            <a:avLst/>
+          </a:prstGeom>
+          <a:solidFill>
+            <a:srgbClr val="3B5174"/>
+          </a:solidFill>
+          <a:ln>
+            <a:noFill/>
+          </a:ln>
+          <a:effectLst/>
+        </p:spPr>
+        <p:style>
+          <a:lnRef idx="1">
+            <a:schemeClr val="accent1"/>
+          </a:lnRef>
+          <a:fillRef idx="3">
+            <a:schemeClr val="accent1"/>
+          </a:fillRef>
+          <a:effectRef idx="2">
+            <a:schemeClr val="accent1"/>
+          </a:effectRef>
+          <a:fontRef idx="minor">
+            <a:schemeClr val="lt1"/>
+          </a:fontRef>
+        </p:style>
+        <p:txBody>
+          <a:bodyPr rtlCol="0" anchor="ctr"/>
+          <a:lstStyle/>
+          <a:p>
+            <a:pPr algn="ctr"/>
+          </a:p>
+        </p:txBody>
+      </p:sp>
+      <p:sp>
+        <p:nvSpPr>
+          <p:cNvPr id="48" name="TextBox 47"/>
+          <p:cNvSpPr txBox="1"/>
+          <p:nvPr/>
+        </p:nvSpPr>
+        <p:spPr>
+          <a:xfrm>
+            <a:off x="9239783" y="1024128"/>
+            <a:ext cx="2403271" cy="219456"/>
+          </a:xfrm>
+          <a:prstGeom prst="rect">
+            <a:avLst/>
+          </a:prstGeom>
+          <a:noFill/>
+        </p:spPr>
+        <p:txBody>
+          <a:bodyPr wrap="square" anchor="t" lIns="36000" rIns="36000" tIns="18000" bIns="18000">
+            <a:spAutoFit/>
+          </a:bodyPr>
+          <a:lstStyle/>
+          <a:p>
+            <a:pPr algn="l"/>
+            <a:r>
+              <a:rPr sz="1000" b="1" i="0">
+                <a:solidFill>
+                  <a:srgbClr val="64748B"/>
+                </a:solidFill>
+                <a:latin typeface="Noto Sans JP"/>
+              </a:rPr>
+              <a:t>CHEMISTRY</a:t>
+            </a:r>
+          </a:p>
+        </p:txBody>
+      </p:sp>
+      <p:sp>
+        <p:nvSpPr>
+          <p:cNvPr id="49" name="TextBox 48"/>
+          <p:cNvSpPr txBox="1"/>
+          <p:nvPr/>
+        </p:nvSpPr>
+        <p:spPr>
+          <a:xfrm>
+            <a:off x="9239783" y="1261872"/>
+            <a:ext cx="2403271" cy="329184"/>
+          </a:xfrm>
+          <a:prstGeom prst="rect">
+            <a:avLst/>
+          </a:prstGeom>
+          <a:noFill/>
+        </p:spPr>
+        <p:txBody>
+          <a:bodyPr wrap="square" anchor="t" lIns="36000" rIns="36000" tIns="18000" bIns="18000">
+            <a:spAutoFit/>
+          </a:bodyPr>
+          <a:lstStyle/>
+          <a:p>
+            <a:pPr algn="l"/>
+            <a:r>
+              <a:rPr sz="1400" b="1" i="0">
+                <a:solidFill>
+                  <a:srgbClr val="1E293B"/>
+                </a:solidFill>
+                <a:latin typeface="Noto Sans JP"/>
+              </a:rPr>
+              <a:t>化学的変態</a:t>
+            </a:r>
+          </a:p>
+        </p:txBody>
+      </p:sp>
+      <p:sp>
+        <p:nvSpPr>
+          <p:cNvPr id="50" name="TextBox 49"/>
+          <p:cNvSpPr txBox="1"/>
+          <p:nvPr/>
+        </p:nvSpPr>
+        <p:spPr>
+          <a:xfrm>
+            <a:off x="9239783" y="1627632"/>
+            <a:ext cx="182880" cy="274320"/>
+          </a:xfrm>
+          <a:prstGeom prst="rect">
+            <a:avLst/>
+          </a:prstGeom>
+          <a:noFill/>
+        </p:spPr>
+        <p:txBody>
+          <a:bodyPr wrap="square" anchor="t" lIns="36000" rIns="36000" tIns="18000" bIns="18000">
+            <a:spAutoFit/>
+          </a:bodyPr>
+          <a:lstStyle/>
+          <a:p>
+            <a:pPr algn="l"/>
+            <a:r>
+              <a:rPr sz="1100" b="0" i="0">
+                <a:solidFill>
+                  <a:srgbClr val="3B5174"/>
+                </a:solidFill>
+                <a:latin typeface="Noto Sans JP"/>
+              </a:rPr>
+              <a:t>•</a:t>
+            </a:r>
+          </a:p>
+        </p:txBody>
+      </p:sp>
+      <p:sp>
+        <p:nvSpPr>
+          <p:cNvPr id="51" name="TextBox 50"/>
+          <p:cNvSpPr txBox="1"/>
+          <p:nvPr/>
+        </p:nvSpPr>
+        <p:spPr>
+          <a:xfrm>
+            <a:off x="9440951" y="1627632"/>
+            <a:ext cx="2202103" cy="274320"/>
+          </a:xfrm>
+          <a:prstGeom prst="rect">
+            <a:avLst/>
+          </a:prstGeom>
+          <a:noFill/>
+        </p:spPr>
+        <p:txBody>
+          <a:bodyPr wrap="square" anchor="t" lIns="36000" rIns="36000" tIns="18000" bIns="18000">
+            <a:spAutoFit/>
+          </a:bodyPr>
+          <a:lstStyle/>
+          <a:p>
+            <a:pPr algn="l"/>
+            <a:r>
+              <a:rPr sz="1100" b="0" i="0">
+                <a:solidFill>
+                  <a:srgbClr val="475569"/>
+                </a:solidFill>
+                <a:latin typeface="Noto Sans JP"/>
+              </a:rPr>
+              <a:t>FT-IR：燃焼後は純 SiO₂</a:t>
+            </a:r>
+          </a:p>
+        </p:txBody>
+      </p:sp>
+      <p:sp>
+        <p:nvSpPr>
+          <p:cNvPr id="52" name="TextBox 51"/>
+          <p:cNvSpPr txBox="1"/>
+          <p:nvPr/>
+        </p:nvSpPr>
+        <p:spPr>
+          <a:xfrm>
+            <a:off x="9239783" y="1901952"/>
+            <a:ext cx="182880" cy="274320"/>
+          </a:xfrm>
+          <a:prstGeom prst="rect">
+            <a:avLst/>
+          </a:prstGeom>
+          <a:noFill/>
+        </p:spPr>
+        <p:txBody>
+          <a:bodyPr wrap="square" anchor="t" lIns="36000" rIns="36000" tIns="18000" bIns="18000">
+            <a:spAutoFit/>
+          </a:bodyPr>
+          <a:lstStyle/>
+          <a:p>
+            <a:pPr algn="l"/>
+            <a:r>
+              <a:rPr sz="1100" b="0" i="0">
+                <a:solidFill>
+                  <a:srgbClr val="3B5174"/>
+                </a:solidFill>
+                <a:latin typeface="Noto Sans JP"/>
+              </a:rPr>
+              <a:t>•</a:t>
+            </a:r>
+          </a:p>
+        </p:txBody>
+      </p:sp>
+      <p:sp>
+        <p:nvSpPr>
+          <p:cNvPr id="53" name="TextBox 52"/>
+          <p:cNvSpPr txBox="1"/>
+          <p:nvPr/>
+        </p:nvSpPr>
+        <p:spPr>
+          <a:xfrm>
+            <a:off x="9440951" y="1901952"/>
+            <a:ext cx="2202103" cy="274320"/>
+          </a:xfrm>
+          <a:prstGeom prst="rect">
+            <a:avLst/>
+          </a:prstGeom>
+          <a:noFill/>
+        </p:spPr>
+        <p:txBody>
+          <a:bodyPr wrap="square" anchor="t" lIns="36000" rIns="36000" tIns="18000" bIns="18000">
+            <a:spAutoFit/>
+          </a:bodyPr>
+          <a:lstStyle/>
+          <a:p>
+            <a:pPr algn="l"/>
+            <a:r>
+              <a:rPr sz="1100" b="0" i="0">
+                <a:solidFill>
+                  <a:srgbClr val="475569"/>
+                </a:solidFill>
+                <a:latin typeface="Noto Sans JP"/>
+              </a:rPr>
+              <a:t>XPS：Si濃度 約8倍に増加</a:t>
+            </a:r>
+          </a:p>
+        </p:txBody>
+      </p:sp>
+      <p:sp>
+        <p:nvSpPr>
+          <p:cNvPr id="54" name="TextBox 53"/>
+          <p:cNvSpPr txBox="1"/>
+          <p:nvPr/>
+        </p:nvSpPr>
+        <p:spPr>
+          <a:xfrm>
+            <a:off x="9239783" y="2176272"/>
+            <a:ext cx="182880" cy="274320"/>
+          </a:xfrm>
+          <a:prstGeom prst="rect">
+            <a:avLst/>
+          </a:prstGeom>
+          <a:noFill/>
+        </p:spPr>
+        <p:txBody>
+          <a:bodyPr wrap="square" anchor="t" lIns="36000" rIns="36000" tIns="18000" bIns="18000">
+            <a:spAutoFit/>
+          </a:bodyPr>
+          <a:lstStyle/>
+          <a:p>
+            <a:pPr algn="l"/>
+            <a:r>
+              <a:rPr sz="1100" b="0" i="0">
+                <a:solidFill>
+                  <a:srgbClr val="3B5174"/>
+                </a:solidFill>
+                <a:latin typeface="Noto Sans JP"/>
+              </a:rPr>
+              <a:t>•</a:t>
+            </a:r>
+          </a:p>
+        </p:txBody>
+      </p:sp>
+      <p:sp>
+        <p:nvSpPr>
+          <p:cNvPr id="55" name="TextBox 54"/>
+          <p:cNvSpPr txBox="1"/>
+          <p:nvPr/>
+        </p:nvSpPr>
+        <p:spPr>
+          <a:xfrm>
+            <a:off x="9440951" y="2176272"/>
+            <a:ext cx="2202103" cy="274320"/>
+          </a:xfrm>
+          <a:prstGeom prst="rect">
+            <a:avLst/>
+          </a:prstGeom>
+          <a:noFill/>
+        </p:spPr>
+        <p:txBody>
+          <a:bodyPr wrap="square" anchor="t" lIns="36000" rIns="36000" tIns="18000" bIns="18000">
+            <a:spAutoFit/>
+          </a:bodyPr>
+          <a:lstStyle/>
+          <a:p>
+            <a:pPr algn="l"/>
+            <a:r>
+              <a:rPr sz="1100" b="0" i="0">
+                <a:solidFill>
+                  <a:srgbClr val="475569"/>
+                </a:solidFill>
+                <a:latin typeface="Noto Sans JP"/>
+              </a:rPr>
+              <a:t>TGA：シリカ残渣 ~5–8 wt%</a:t>
+            </a:r>
+          </a:p>
+        </p:txBody>
+      </p:sp>
+      <p:sp>
+        <p:nvSpPr>
+          <p:cNvPr id="56" name="TextBox 55"/>
+          <p:cNvSpPr txBox="1"/>
+          <p:nvPr/>
+        </p:nvSpPr>
+        <p:spPr>
+          <a:xfrm>
+            <a:off x="9239783" y="2450592"/>
+            <a:ext cx="182880" cy="274320"/>
+          </a:xfrm>
+          <a:prstGeom prst="rect">
+            <a:avLst/>
+          </a:prstGeom>
+          <a:noFill/>
+        </p:spPr>
+        <p:txBody>
+          <a:bodyPr wrap="square" anchor="t" lIns="36000" rIns="36000" tIns="18000" bIns="18000">
+            <a:spAutoFit/>
+          </a:bodyPr>
+          <a:lstStyle/>
+          <a:p>
+            <a:pPr algn="l"/>
+            <a:r>
+              <a:rPr sz="1100" b="0" i="0">
+                <a:solidFill>
+                  <a:srgbClr val="3B5174"/>
+                </a:solidFill>
+                <a:latin typeface="Noto Sans JP"/>
+              </a:rPr>
+              <a:t>•</a:t>
+            </a:r>
+          </a:p>
+        </p:txBody>
+      </p:sp>
+      <p:sp>
+        <p:nvSpPr>
+          <p:cNvPr id="57" name="TextBox 56"/>
+          <p:cNvSpPr txBox="1"/>
+          <p:nvPr/>
+        </p:nvSpPr>
+        <p:spPr>
+          <a:xfrm>
+            <a:off x="9440951" y="2450592"/>
+            <a:ext cx="2202103" cy="274320"/>
+          </a:xfrm>
+          <a:prstGeom prst="rect">
+            <a:avLst/>
+          </a:prstGeom>
+          <a:noFill/>
+        </p:spPr>
+        <p:txBody>
+          <a:bodyPr wrap="square" anchor="t" lIns="36000" rIns="36000" tIns="18000" bIns="18000">
+            <a:spAutoFit/>
+          </a:bodyPr>
+          <a:lstStyle/>
+          <a:p>
+            <a:pPr algn="l"/>
+            <a:r>
+              <a:rPr sz="1100" b="0" i="0">
+                <a:solidFill>
+                  <a:srgbClr val="475569"/>
+                </a:solidFill>
+                <a:latin typeface="Noto Sans JP"/>
+              </a:rPr>
+              <a:t>エアロゲル化を化学確認</a:t>
+            </a:r>
+          </a:p>
+        </p:txBody>
+      </p:sp>
+      <p:sp>
+        <p:nvSpPr>
+          <p:cNvPr id="58" name="Rounded Rectangle 57"/>
+          <p:cNvSpPr/>
+          <p:nvPr/>
+        </p:nvSpPr>
+        <p:spPr>
+          <a:xfrm>
+            <a:off x="365760" y="5294376"/>
+            <a:ext cx="11460175" cy="731520"/>
+          </a:xfrm>
+          <a:prstGeom prst="roundRect">
+            <a:avLst>
+              <a:gd name="adj" fmla="val 4000"/>
+            </a:avLst>
+          </a:prstGeom>
+          <a:solidFill>
+            <a:srgbClr val="1E293B"/>
+          </a:solidFill>
+          <a:ln>
+            <a:noFill/>
+          </a:ln>
+          <a:effectLst/>
+        </p:spPr>
+        <p:style>
+          <a:lnRef idx="1">
+            <a:schemeClr val="accent1"/>
+          </a:lnRef>
+          <a:fillRef idx="3">
+            <a:schemeClr val="accent1"/>
+          </a:fillRef>
+          <a:effectRef idx="2">
+            <a:schemeClr val="accent1"/>
+          </a:effectRef>
+          <a:fontRef idx="minor">
+            <a:schemeClr val="lt1"/>
+          </a:fontRef>
+        </p:style>
+        <p:txBody>
+          <a:bodyPr rtlCol="0" anchor="ctr"/>
+          <a:lstStyle/>
+          <a:p>
+            <a:pPr algn="ctr"/>
+          </a:p>
+        </p:txBody>
+      </p:sp>
+      <p:sp>
+        <p:nvSpPr>
+          <p:cNvPr id="59" name="Rectangle 58"/>
+          <p:cNvSpPr/>
+          <p:nvPr/>
+        </p:nvSpPr>
+        <p:spPr>
+          <a:xfrm>
+            <a:off x="365760" y="5294376"/>
+            <a:ext cx="54864" cy="731520"/>
+          </a:xfrm>
+          <a:prstGeom prst="rect">
+            <a:avLst/>
+          </a:prstGeom>
+          <a:solidFill>
+            <a:srgbClr val="D4A574"/>
+          </a:solidFill>
+          <a:ln>
+            <a:noFill/>
+          </a:ln>
+          <a:effectLst/>
+        </p:spPr>
+        <p:style>
+          <a:lnRef idx="1">
+            <a:schemeClr val="accent1"/>
+          </a:lnRef>
+          <a:fillRef idx="3">
+            <a:schemeClr val="accent1"/>
+          </a:fillRef>
+          <a:effectRef idx="2">
+            <a:schemeClr val="accent1"/>
+          </a:effectRef>
+          <a:fontRef idx="minor">
+            <a:schemeClr val="lt1"/>
+          </a:fontRef>
+        </p:style>
+        <p:txBody>
+          <a:bodyPr rtlCol="0" anchor="ctr"/>
+          <a:lstStyle/>
+          <a:p>
+            <a:pPr algn="ctr"/>
+          </a:p>
+        </p:txBody>
+      </p:sp>
+      <p:sp>
+        <p:nvSpPr>
+          <p:cNvPr id="60" name="TextBox 59"/>
+          <p:cNvSpPr txBox="1"/>
+          <p:nvPr/>
+        </p:nvSpPr>
+        <p:spPr>
+          <a:xfrm>
+            <a:off x="548640" y="5294376"/>
+            <a:ext cx="365760" cy="731520"/>
           </a:xfrm>
           <a:prstGeom prst="rect">
             <a:avLst/>
@@ -43664,25 +44868,25 @@
             <a:r>
               <a:rPr sz="1400" b="0" i="0">
                 <a:solidFill>
-                  <a:srgbClr val="3B5174"/>
-                </a:solidFill>
-                <a:latin typeface="Noto Sans JP"/>
-              </a:rPr>
-              <a:t>⚠</a:t>
-            </a:r>
-          </a:p>
-        </p:txBody>
-      </p:sp>
-      <p:sp>
-        <p:nvSpPr>
-          <p:cNvPr id="28" name="TextBox 27"/>
-          <p:cNvSpPr txBox="1"/>
-          <p:nvPr/>
-        </p:nvSpPr>
-        <p:spPr>
-          <a:xfrm>
-            <a:off x="960120" y="3465576"/>
-            <a:ext cx="4907127" cy="777240"/>
+                  <a:srgbClr val="D4A574"/>
+                </a:solidFill>
+                <a:latin typeface="Noto Sans JP"/>
+              </a:rPr>
+              <a:t>◆</a:t>
+            </a:r>
+          </a:p>
+        </p:txBody>
+      </p:sp>
+      <p:sp>
+        <p:nvSpPr>
+          <p:cNvPr id="61" name="TextBox 60"/>
+          <p:cNvSpPr txBox="1"/>
+          <p:nvPr/>
+        </p:nvSpPr>
+        <p:spPr>
+          <a:xfrm>
+            <a:off x="960120" y="5294376"/>
+            <a:ext cx="10774375" cy="731520"/>
           </a:xfrm>
           <a:prstGeom prst="rect">
             <a:avLst/>
@@ -43699,466 +44903,11 @@
             <a:r>
               <a:rPr sz="1300" b="1" i="0">
                 <a:solidFill>
-                  <a:srgbClr val="1E293B"/>
-                </a:solidFill>
-                <a:latin typeface="Noto Sans JP"/>
-              </a:rPr>
-              <a:t>実地での風・乾燥・温度勾配下での挙動は未評価</a:t>
-            </a:r>
-          </a:p>
-        </p:txBody>
-      </p:sp>
-      <p:sp>
-        <p:nvSpPr>
-          <p:cNvPr id="29" name="TextBox 28"/>
-          <p:cNvSpPr txBox="1"/>
-          <p:nvPr/>
-        </p:nvSpPr>
-        <p:spPr>
-          <a:xfrm>
-            <a:off x="6233007" y="859536"/>
-            <a:ext cx="5592927" cy="274320"/>
-          </a:xfrm>
-          <a:prstGeom prst="rect">
-            <a:avLst/>
-          </a:prstGeom>
-          <a:noFill/>
-        </p:spPr>
-        <p:txBody>
-          <a:bodyPr wrap="square" anchor="t" lIns="36000" rIns="36000" tIns="18000" bIns="18000">
-            <a:spAutoFit/>
-          </a:bodyPr>
-          <a:lstStyle/>
-          <a:p>
-            <a:pPr algn="l"/>
-            <a:r>
-              <a:rPr sz="1200" b="1" i="0">
-                <a:solidFill>
-                  <a:srgbClr val="64748B"/>
-                </a:solidFill>
-                <a:latin typeface="Noto Sans JP"/>
-              </a:rPr>
-              <a:t>今後の研究展望</a:t>
-            </a:r>
-          </a:p>
-        </p:txBody>
-      </p:sp>
-      <p:sp>
-        <p:nvSpPr>
-          <p:cNvPr id="30" name="TextBox 29"/>
-          <p:cNvSpPr txBox="1"/>
-          <p:nvPr/>
-        </p:nvSpPr>
-        <p:spPr>
-          <a:xfrm>
-            <a:off x="6324447" y="1362456"/>
-            <a:ext cx="365760" cy="274320"/>
-          </a:xfrm>
-          <a:prstGeom prst="rect">
-            <a:avLst/>
-          </a:prstGeom>
-          <a:noFill/>
-        </p:spPr>
-        <p:txBody>
-          <a:bodyPr wrap="square" anchor="t" lIns="36000" rIns="36000" tIns="18000" bIns="18000">
-            <a:spAutoFit/>
-          </a:bodyPr>
-          <a:lstStyle/>
-          <a:p>
-            <a:pPr algn="l"/>
-            <a:r>
-              <a:rPr sz="1500" b="1" i="0">
-                <a:solidFill>
-                  <a:srgbClr val="3B5174"/>
-                </a:solidFill>
-                <a:latin typeface="Noto Sans JP"/>
-              </a:rPr>
-              <a:t>→</a:t>
-            </a:r>
-          </a:p>
-        </p:txBody>
-      </p:sp>
-      <p:sp>
-        <p:nvSpPr>
-          <p:cNvPr id="31" name="TextBox 30"/>
-          <p:cNvSpPr txBox="1"/>
-          <p:nvPr/>
-        </p:nvSpPr>
-        <p:spPr>
-          <a:xfrm>
-            <a:off x="6690207" y="1362456"/>
-            <a:ext cx="5044287" cy="274320"/>
-          </a:xfrm>
-          <a:prstGeom prst="rect">
-            <a:avLst/>
-          </a:prstGeom>
-          <a:noFill/>
-        </p:spPr>
-        <p:txBody>
-          <a:bodyPr wrap="square" anchor="t" lIns="36000" rIns="36000" tIns="18000" bIns="18000">
-            <a:spAutoFit/>
-          </a:bodyPr>
-          <a:lstStyle/>
-          <a:p>
-            <a:pPr algn="l"/>
-            <a:r>
-              <a:rPr sz="1200" b="0" i="0">
-                <a:solidFill>
-                  <a:srgbClr val="334155"/>
-                </a:solidFill>
-                <a:latin typeface="Noto Sans JP"/>
-              </a:rPr>
-              <a:t>大規模燃焼炉・野外模擬試験による性能検証</a:t>
-            </a:r>
-          </a:p>
-        </p:txBody>
-      </p:sp>
-      <p:sp>
-        <p:nvSpPr>
-          <p:cNvPr id="32" name="TextBox 31"/>
-          <p:cNvSpPr txBox="1"/>
-          <p:nvPr/>
-        </p:nvSpPr>
-        <p:spPr>
-          <a:xfrm>
-            <a:off x="6324447" y="1865376"/>
-            <a:ext cx="365760" cy="274320"/>
-          </a:xfrm>
-          <a:prstGeom prst="rect">
-            <a:avLst/>
-          </a:prstGeom>
-          <a:noFill/>
-        </p:spPr>
-        <p:txBody>
-          <a:bodyPr wrap="square" anchor="t" lIns="36000" rIns="36000" tIns="18000" bIns="18000">
-            <a:spAutoFit/>
-          </a:bodyPr>
-          <a:lstStyle/>
-          <a:p>
-            <a:pPr algn="l"/>
-            <a:r>
-              <a:rPr sz="1500" b="1" i="0">
-                <a:solidFill>
-                  <a:srgbClr val="3B5174"/>
-                </a:solidFill>
-                <a:latin typeface="Noto Sans JP"/>
-              </a:rPr>
-              <a:t>→</a:t>
-            </a:r>
-          </a:p>
-        </p:txBody>
-      </p:sp>
-      <p:sp>
-        <p:nvSpPr>
-          <p:cNvPr id="33" name="TextBox 32"/>
-          <p:cNvSpPr txBox="1"/>
-          <p:nvPr/>
-        </p:nvSpPr>
-        <p:spPr>
-          <a:xfrm>
-            <a:off x="6690207" y="1865376"/>
-            <a:ext cx="5044287" cy="274320"/>
-          </a:xfrm>
-          <a:prstGeom prst="rect">
-            <a:avLst/>
-          </a:prstGeom>
-          <a:noFill/>
-        </p:spPr>
-        <p:txBody>
-          <a:bodyPr wrap="square" anchor="t" lIns="36000" rIns="36000" tIns="18000" bIns="18000">
-            <a:spAutoFit/>
-          </a:bodyPr>
-          <a:lstStyle/>
-          <a:p>
-            <a:pPr algn="l"/>
-            <a:r>
-              <a:rPr sz="1200" b="0" i="0">
-                <a:solidFill>
-                  <a:srgbClr val="334155"/>
-                </a:solidFill>
-                <a:latin typeface="Noto Sans JP"/>
-              </a:rPr>
-              <a:t>異なる基材（コンクリート・金属・植生）での付着性評価</a:t>
-            </a:r>
-          </a:p>
-        </p:txBody>
-      </p:sp>
-      <p:sp>
-        <p:nvSpPr>
-          <p:cNvPr id="34" name="TextBox 33"/>
-          <p:cNvSpPr txBox="1"/>
-          <p:nvPr/>
-        </p:nvSpPr>
-        <p:spPr>
-          <a:xfrm>
-            <a:off x="6324447" y="2368296"/>
-            <a:ext cx="365760" cy="274320"/>
-          </a:xfrm>
-          <a:prstGeom prst="rect">
-            <a:avLst/>
-          </a:prstGeom>
-          <a:noFill/>
-        </p:spPr>
-        <p:txBody>
-          <a:bodyPr wrap="square" anchor="t" lIns="36000" rIns="36000" tIns="18000" bIns="18000">
-            <a:spAutoFit/>
-          </a:bodyPr>
-          <a:lstStyle/>
-          <a:p>
-            <a:pPr algn="l"/>
-            <a:r>
-              <a:rPr sz="1500" b="1" i="0">
-                <a:solidFill>
-                  <a:srgbClr val="3B5174"/>
-                </a:solidFill>
-                <a:latin typeface="Noto Sans JP"/>
-              </a:rPr>
-              <a:t>→</a:t>
-            </a:r>
-          </a:p>
-        </p:txBody>
-      </p:sp>
-      <p:sp>
-        <p:nvSpPr>
-          <p:cNvPr id="35" name="TextBox 34"/>
-          <p:cNvSpPr txBox="1"/>
-          <p:nvPr/>
-        </p:nvSpPr>
-        <p:spPr>
-          <a:xfrm>
-            <a:off x="6690207" y="2368296"/>
-            <a:ext cx="5044287" cy="274320"/>
-          </a:xfrm>
-          <a:prstGeom prst="rect">
-            <a:avLst/>
-          </a:prstGeom>
-          <a:noFill/>
-        </p:spPr>
-        <p:txBody>
-          <a:bodyPr wrap="square" anchor="t" lIns="36000" rIns="36000" tIns="18000" bIns="18000">
-            <a:spAutoFit/>
-          </a:bodyPr>
-          <a:lstStyle/>
-          <a:p>
-            <a:pPr algn="l"/>
-            <a:r>
-              <a:rPr sz="1200" b="0" i="0">
-                <a:solidFill>
-                  <a:srgbClr val="334155"/>
-                </a:solidFill>
-                <a:latin typeface="Noto Sans JP"/>
-              </a:rPr>
-              <a:t>エアロゲル熱伝導率の直接測定（λ = 0.015–0.040 W/m·K 想定）</a:t>
-            </a:r>
-          </a:p>
-        </p:txBody>
-      </p:sp>
-      <p:sp>
-        <p:nvSpPr>
-          <p:cNvPr id="36" name="TextBox 35"/>
-          <p:cNvSpPr txBox="1"/>
-          <p:nvPr/>
-        </p:nvSpPr>
-        <p:spPr>
-          <a:xfrm>
-            <a:off x="6324447" y="2871216"/>
-            <a:ext cx="365760" cy="274320"/>
-          </a:xfrm>
-          <a:prstGeom prst="rect">
-            <a:avLst/>
-          </a:prstGeom>
-          <a:noFill/>
-        </p:spPr>
-        <p:txBody>
-          <a:bodyPr wrap="square" anchor="t" lIns="36000" rIns="36000" tIns="18000" bIns="18000">
-            <a:spAutoFit/>
-          </a:bodyPr>
-          <a:lstStyle/>
-          <a:p>
-            <a:pPr algn="l"/>
-            <a:r>
-              <a:rPr sz="1500" b="1" i="0">
-                <a:solidFill>
-                  <a:srgbClr val="3B5174"/>
-                </a:solidFill>
-                <a:latin typeface="Noto Sans JP"/>
-              </a:rPr>
-              <a:t>→</a:t>
-            </a:r>
-          </a:p>
-        </p:txBody>
-      </p:sp>
-      <p:sp>
-        <p:nvSpPr>
-          <p:cNvPr id="37" name="TextBox 36"/>
-          <p:cNvSpPr txBox="1"/>
-          <p:nvPr/>
-        </p:nvSpPr>
-        <p:spPr>
-          <a:xfrm>
-            <a:off x="6690207" y="2871216"/>
-            <a:ext cx="5044287" cy="274320"/>
-          </a:xfrm>
-          <a:prstGeom prst="rect">
-            <a:avLst/>
-          </a:prstGeom>
-          <a:noFill/>
-        </p:spPr>
-        <p:txBody>
-          <a:bodyPr wrap="square" anchor="t" lIns="36000" rIns="36000" tIns="18000" bIns="18000">
-            <a:spAutoFit/>
-          </a:bodyPr>
-          <a:lstStyle/>
-          <a:p>
-            <a:pPr algn="l"/>
-            <a:r>
-              <a:rPr sz="1200" b="0" i="0">
-                <a:solidFill>
-                  <a:srgbClr val="334155"/>
-                </a:solidFill>
-                <a:latin typeface="Noto Sans JP"/>
-              </a:rPr>
-              <a:t>SDS代替界面活性剤の探索（生分解性向上）</a:t>
-            </a:r>
-          </a:p>
-        </p:txBody>
-      </p:sp>
-      <p:sp>
-        <p:nvSpPr>
-          <p:cNvPr id="38" name="TextBox 37"/>
-          <p:cNvSpPr txBox="1"/>
-          <p:nvPr/>
-        </p:nvSpPr>
-        <p:spPr>
-          <a:xfrm>
-            <a:off x="6324447" y="3374136"/>
-            <a:ext cx="365760" cy="274320"/>
-          </a:xfrm>
-          <a:prstGeom prst="rect">
-            <a:avLst/>
-          </a:prstGeom>
-          <a:noFill/>
-        </p:spPr>
-        <p:txBody>
-          <a:bodyPr wrap="square" anchor="t" lIns="36000" rIns="36000" tIns="18000" bIns="18000">
-            <a:spAutoFit/>
-          </a:bodyPr>
-          <a:lstStyle/>
-          <a:p>
-            <a:pPr algn="l"/>
-            <a:r>
-              <a:rPr sz="1500" b="1" i="0">
-                <a:solidFill>
-                  <a:srgbClr val="3B5174"/>
-                </a:solidFill>
-                <a:latin typeface="Noto Sans JP"/>
-              </a:rPr>
-              <a:t>→</a:t>
-            </a:r>
-          </a:p>
-        </p:txBody>
-      </p:sp>
-      <p:sp>
-        <p:nvSpPr>
-          <p:cNvPr id="39" name="TextBox 38"/>
-          <p:cNvSpPr txBox="1"/>
-          <p:nvPr/>
-        </p:nvSpPr>
-        <p:spPr>
-          <a:xfrm>
-            <a:off x="6690207" y="3374136"/>
-            <a:ext cx="5044287" cy="274320"/>
-          </a:xfrm>
-          <a:prstGeom prst="rect">
-            <a:avLst/>
-          </a:prstGeom>
-          <a:noFill/>
-        </p:spPr>
-        <p:txBody>
-          <a:bodyPr wrap="square" anchor="t" lIns="36000" rIns="36000" tIns="18000" bIns="18000">
-            <a:spAutoFit/>
-          </a:bodyPr>
-          <a:lstStyle/>
-          <a:p>
-            <a:pPr algn="l"/>
-            <a:r>
-              <a:rPr sz="1200" b="0" i="0">
-                <a:solidFill>
-                  <a:srgbClr val="334155"/>
-                </a:solidFill>
-                <a:latin typeface="Noto Sans JP"/>
-              </a:rPr>
-              <a:t>MC/HEC 濃度最適化・CSP粒径効果の系統的研究</a:t>
-            </a:r>
-          </a:p>
-        </p:txBody>
-      </p:sp>
-      <p:sp>
-        <p:nvSpPr>
-          <p:cNvPr id="40" name="TextBox 39"/>
-          <p:cNvSpPr txBox="1"/>
-          <p:nvPr/>
-        </p:nvSpPr>
-        <p:spPr>
-          <a:xfrm>
-            <a:off x="6324447" y="3877056"/>
-            <a:ext cx="365760" cy="274320"/>
-          </a:xfrm>
-          <a:prstGeom prst="rect">
-            <a:avLst/>
-          </a:prstGeom>
-          <a:noFill/>
-        </p:spPr>
-        <p:txBody>
-          <a:bodyPr wrap="square" anchor="t" lIns="36000" rIns="36000" tIns="18000" bIns="18000">
-            <a:spAutoFit/>
-          </a:bodyPr>
-          <a:lstStyle/>
-          <a:p>
-            <a:pPr algn="l"/>
-            <a:r>
-              <a:rPr sz="1500" b="1" i="0">
-                <a:solidFill>
-                  <a:srgbClr val="3B5174"/>
-                </a:solidFill>
-                <a:latin typeface="Noto Sans JP"/>
-              </a:rPr>
-              <a:t>→</a:t>
-            </a:r>
-          </a:p>
-        </p:txBody>
-      </p:sp>
-      <p:sp>
-        <p:nvSpPr>
-          <p:cNvPr id="41" name="TextBox 40"/>
-          <p:cNvSpPr txBox="1"/>
-          <p:nvPr/>
-        </p:nvSpPr>
-        <p:spPr>
-          <a:xfrm>
-            <a:off x="6690207" y="3877056"/>
-            <a:ext cx="5044287" cy="274320"/>
-          </a:xfrm>
-          <a:prstGeom prst="rect">
-            <a:avLst/>
-          </a:prstGeom>
-          <a:noFill/>
-        </p:spPr>
-        <p:txBody>
-          <a:bodyPr wrap="square" anchor="t" lIns="36000" rIns="36000" tIns="18000" bIns="18000">
-            <a:spAutoFit/>
-          </a:bodyPr>
-          <a:lstStyle/>
-          <a:p>
-            <a:pPr algn="l"/>
-            <a:r>
-              <a:rPr sz="1200" b="0" i="0">
-                <a:solidFill>
-                  <a:srgbClr val="334155"/>
-                </a:solidFill>
-                <a:latin typeface="Noto Sans JP"/>
-              </a:rPr>
-              <a:t>降水後の再塗布不要な耐水化改良</a:t>
+                  <a:srgbClr val="FFFFFF"/>
+                </a:solidFill>
+                <a:latin typeface="Noto Sans JP"/>
+              </a:rPr>
+              <a:t>加熱により CSP が焼結し、ゲルが多孔質シリカエアロゲル断熱層へ自己変態 ― 水蒸発後も火炎保護が継続</a:t>
             </a:r>
           </a:p>
         </p:txBody>
@@ -44343,7 +45092,7 @@
                 </a:solidFill>
                 <a:latin typeface="Noto Sans JP"/>
               </a:rPr>
-              <a:t>考察 3/3</a:t>
+              <a:t>まとめ 2/2</a:t>
             </a:r>
           </a:p>
         </p:txBody>
@@ -44422,7 +45171,7 @@
                 </a:solidFill>
                 <a:latin typeface="Noto Sans JP"/>
               </a:rPr>
-              <a:t>研究成果のまとめと展望</a:t>
+              <a:t>研究の結論</a:t>
             </a:r>
           </a:p>
         </p:txBody>
@@ -44877,7 +45626,7 @@
                 </a:solidFill>
                 <a:latin typeface="Noto Sans JP"/>
               </a:rPr>
-              <a:t>CSPがheat-activatedで焼結 → 多孔質シリカ層が水蒸発後も継続的に断熱</a:t>
+              <a:t>CSPが加熱で焼結 → 多孔質シリカ層が水蒸発後も継続的に断熱</a:t>
             </a:r>
           </a:p>
         </p:txBody>
@@ -45380,7 +46129,7 @@
                 </a:solidFill>
                 <a:latin typeface="Noto Sans JP"/>
               </a:rPr>
-              <a:t>想定される実装シナリオ</a:t>
+              <a:t>核心メカニズム</a:t>
             </a:r>
           </a:p>
         </p:txBody>
@@ -45450,7 +46199,7 @@
                 </a:solidFill>
                 <a:latin typeface="Noto Sans JP"/>
               </a:rPr>
-              <a:t>WUI住宅・重要インフラの事前保護散布</a:t>
+              <a:t>火炎接触でMCがゲル化し構造を固定</a:t>
             </a:r>
           </a:p>
         </p:txBody>
@@ -45520,7 +46269,7 @@
                 </a:solidFill>
                 <a:latin typeface="Noto Sans JP"/>
               </a:rPr>
-              <a:t>延焼経路の防火線(fire break)形成</a:t>
+              <a:t>脱水・加熱でCSPが焼結</a:t>
             </a:r>
           </a:p>
         </p:txBody>
@@ -45590,7 +46339,7 @@
                 </a:solidFill>
                 <a:latin typeface="Noto Sans JP"/>
               </a:rPr>
-              <a:t>送電線・通信塔など金属構造物の被覆</a:t>
+              <a:t>多孔質SiO₂エアロゲル断熱層を形成</a:t>
             </a:r>
           </a:p>
         </p:txBody>
@@ -45717,7 +46466,7 @@
                 </a:solidFill>
                 <a:latin typeface="Noto Sans JP"/>
               </a:rPr>
-              <a:t>今後の課題</a:t>
+              <a:t>実証された保護性能</a:t>
             </a:r>
           </a:p>
         </p:txBody>
@@ -45787,7 +46536,7 @@
                 </a:solidFill>
                 <a:latin typeface="Noto Sans JP"/>
               </a:rPr>
-              <a:t>大規模散布試験（実地ベンチマーク）</a:t>
+              <a:t>Time to char ~10分（水の約5倍）</a:t>
             </a:r>
           </a:p>
         </p:txBody>
@@ -45857,7 +46606,7 @@
                 </a:solidFill>
                 <a:latin typeface="Noto Sans JP"/>
               </a:rPr>
-              <a:t>長期保存安定性・コスト評価</a:t>
+              <a:t>水蒸発後も保護が継続</a:t>
             </a:r>
           </a:p>
         </p:txBody>
@@ -45927,7 +46676,7 @@
                 </a:solidFill>
                 <a:latin typeface="Noto Sans JP"/>
               </a:rPr>
-              <a:t>環境への影響評価（生分解性試験）</a:t>
+              <a:t>既存散布インフラと互換な流動特性</a:t>
             </a:r>
           </a:p>
         </p:txBody>
@@ -46087,7 +46836,7 @@
                 </a:solidFill>
                 <a:latin typeface="Noto Sans JP"/>
               </a:rPr>
-              <a:t>「水のキャリア」から「自己変態する難燃材料」へ ― WEGの新しい設計パラダイム</a:t>
+              <a:t>「水のキャリア」から「加熱で自己変態する難燃材料」へ ― WEGの新しい設計思想</a:t>
             </a:r>
           </a:p>
         </p:txBody>

--- a/slides.pptx
+++ b/slides.pptx
@@ -43211,7 +43211,7 @@
                 </a:solidFill>
                 <a:latin typeface="Noto Sans JP"/>
               </a:rPr>
-              <a:t>全系で G' &gt; G''（ゲル挙動）</a:t>
+              <a:t>全系で G' &gt; G''、crossoverなし</a:t>
             </a:r>
           </a:p>
         </p:txBody>
@@ -43281,7 +43281,7 @@
                 </a:solidFill>
                 <a:latin typeface="Noto Sans JP"/>
               </a:rPr>
-              <a:t>n = 0.108–0.188</a:t>
+              <a:t>G': HEC+MC≈46, MHEC≈26 Pa</a:t>
             </a:r>
           </a:p>
         </p:txBody>
@@ -43351,7 +43351,7 @@
                 </a:solidFill>
                 <a:latin typeface="Noto Sans JP"/>
               </a:rPr>
-              <a:t>降伏応力 AquaGel-K の約3倍</a:t>
+              <a:t>剪断希薄化（HB適合）→ 噴霧可</a:t>
             </a:r>
           </a:p>
         </p:txBody>
@@ -43421,7 +43421,7 @@
                 </a:solidFill>
                 <a:latin typeface="Noto Sans JP"/>
               </a:rPr>
-              <a:t>tan δ &lt;&lt; 1（弾性支配）</a:t>
+              <a:t>tan δ &lt; 1 の固体的ゲル</a:t>
             </a:r>
           </a:p>
         </p:txBody>
@@ -43653,7 +43653,7 @@
                 </a:solidFill>
                 <a:latin typeface="Noto Sans JP"/>
               </a:rPr>
-              <a:t>Time to char ≈ 10 分</a:t>
+              <a:t>HEC+MC/CSP：7分超 char遅延</a:t>
             </a:r>
           </a:p>
         </p:txBody>
@@ -43723,7 +43723,7 @@
                 </a:solidFill>
                 <a:latin typeface="Noto Sans JP"/>
               </a:rPr>
-              <a:t>水のみ（~2分）の約5倍</a:t>
+              <a:t>MHEC/CSP：5分超</a:t>
             </a:r>
           </a:p>
         </p:txBody>
@@ -43793,7 +43793,7 @@
                 </a:solidFill>
                 <a:latin typeface="Noto Sans JP"/>
               </a:rPr>
-              <a:t>AquaGel-K比 約40%延長</a:t>
+              <a:t>市販品の3〜6倍の効果</a:t>
             </a:r>
           </a:p>
         </p:txBody>
@@ -43863,7 +43863,7 @@
                 </a:solidFill>
                 <a:latin typeface="Noto Sans JP"/>
               </a:rPr>
-              <a:t>300秒後も表面ほぼ無傷</a:t>
+              <a:t>水~0.3分, AquaGel-K~1.5分</a:t>
             </a:r>
           </a:p>
         </p:txBody>
@@ -44095,7 +44095,7 @@
                 </a:solidFill>
                 <a:latin typeface="Noto Sans JP"/>
               </a:rPr>
-              <a:t>Foaming Index ≈ 2.2–2.6</a:t>
+              <a:t>Foaming Index 最大≈2.6</a:t>
             </a:r>
           </a:p>
         </p:txBody>
@@ -44165,7 +44165,7 @@
                 </a:solidFill>
                 <a:latin typeface="Noto Sans JP"/>
               </a:rPr>
-              <a:t>SDS 0.1% で均一微細気泡</a:t>
+              <a:t>AquaGel-Kは発泡せず≈0</a:t>
             </a:r>
           </a:p>
         </p:txBody>
@@ -44235,7 +44235,7 @@
                 </a:solidFill>
                 <a:latin typeface="Noto Sans JP"/>
               </a:rPr>
-              <a:t>SEMで焼結進行を観察</a:t>
+              <a:t>燃焼で多孔質シリカ層を形成</a:t>
             </a:r>
           </a:p>
         </p:txBody>
@@ -44305,7 +44305,7 @@
                 </a:solidFill>
                 <a:latin typeface="Noto Sans JP"/>
               </a:rPr>
-              <a:t>ネック形成 → 多孔質骨格</a:t>
+              <a:t>2分以降に粒子が焼結（SEM）</a:t>
             </a:r>
           </a:p>
         </p:txBody>
@@ -44537,7 +44537,7 @@
                 </a:solidFill>
                 <a:latin typeface="Noto Sans JP"/>
               </a:rPr>
-              <a:t>FT-IR：燃焼後は純 SiO₂</a:t>
+              <a:t>FT-IR：CH/SiO比が低下</a:t>
             </a:r>
           </a:p>
         </p:txBody>
@@ -44607,7 +44607,7 @@
                 </a:solidFill>
                 <a:latin typeface="Noto Sans JP"/>
               </a:rPr>
-              <a:t>XPS：Si濃度 約8倍に増加</a:t>
+              <a:t>XPS：燃焼で炭素が大幅減</a:t>
             </a:r>
           </a:p>
         </p:txBody>
@@ -44677,7 +44677,7 @@
                 </a:solidFill>
                 <a:latin typeface="Noto Sans JP"/>
               </a:rPr>
-              <a:t>TGA：シリカ残渣 ~5–8 wt%</a:t>
+              <a:t>MHEC/CSP C 38.3%→4.8%</a:t>
             </a:r>
           </a:p>
         </p:txBody>
@@ -44747,7 +44747,7 @@
                 </a:solidFill>
                 <a:latin typeface="Noto Sans JP"/>
               </a:rPr>
-              <a:t>エアロゲル化を化学確認</a:t>
+              <a:t>残存はシリカ（SiO₂）</a:t>
             </a:r>
           </a:p>
         </p:txBody>
@@ -44907,7 +44907,7 @@
                 </a:solidFill>
                 <a:latin typeface="Noto Sans JP"/>
               </a:rPr>
-              <a:t>加熱により CSP が焼結し、ゲルが多孔質シリカエアロゲル断熱層へ自己変態 ― 水蒸発後も火炎保護が継続</a:t>
+              <a:t>火炎で水が蒸発しつつゲルが多孔質シリカエアロゲルへ転換 → 乾燥後も基材を断熱保護（市販WEGにない機構）</a:t>
             </a:r>
           </a:p>
         </p:txBody>
@@ -45403,7 +45403,7 @@
                 </a:solidFill>
                 <a:latin typeface="Noto Sans JP"/>
               </a:rPr>
-              <a:t>Time to char ~10分</a:t>
+              <a:t>市販品の3〜6倍の保護</a:t>
             </a:r>
           </a:p>
         </p:txBody>
@@ -45438,7 +45438,7 @@
                 </a:solidFill>
                 <a:latin typeface="Noto Sans JP"/>
               </a:rPr>
-              <a:t>水の約5倍、AquaGel-K比で約40%延長。火炎下の木材保護時間を大幅に拡張</a:t>
+              <a:t>HEC+MC/CSPは7分超、MHEC/CSPは5分超 char遅延。火炎下で基材を長く保護</a:t>
             </a:r>
           </a:p>
         </p:txBody>
@@ -45626,7 +45626,7 @@
                 </a:solidFill>
                 <a:latin typeface="Noto Sans JP"/>
               </a:rPr>
-              <a:t>CSPが加熱で焼結 → 多孔質シリカ層が水蒸発後も継続的に断熱</a:t>
+              <a:t>加熱で脱水・CSPが焼結 → in situで多孔質シリカエアロゲル断熱層を形成（乾燥後も保護継続）</a:t>
             </a:r>
           </a:p>
         </p:txBody>
@@ -45814,7 +45814,7 @@
                 </a:solidFill>
                 <a:latin typeface="Noto Sans JP"/>
               </a:rPr>
-              <a:t>n = 0.108〜0.188 の剪断希薄化流体。既存のホース・ノズルで噴霧可能</a:t>
+              <a:t>剪断希薄化を示す噴霧可能な流体。基材への高い付着性・濡れ性を両立</a:t>
             </a:r>
           </a:p>
         </p:txBody>
@@ -45967,7 +45967,7 @@
                 </a:solidFill>
                 <a:latin typeface="Noto Sans JP"/>
               </a:rPr>
-              <a:t>持続可能な原料</a:t>
+              <a:t>持続可能・安全な原料</a:t>
             </a:r>
           </a:p>
         </p:txBody>
@@ -46002,7 +46002,7 @@
                 </a:solidFill>
                 <a:latin typeface="Noto Sans JP"/>
               </a:rPr>
-              <a:t>セルロース誘導体は食品グレード、シリカは無害な無機材料。低環境負荷</a:t>
+              <a:t>地球上最も豊富なセルロース誘導体。前研究で生分解性を確認、シリカは無害</a:t>
             </a:r>
           </a:p>
         </p:txBody>
@@ -46199,7 +46199,7 @@
                 </a:solidFill>
                 <a:latin typeface="Noto Sans JP"/>
               </a:rPr>
-              <a:t>火炎接触でMCがゲル化し構造を固定</a:t>
+              <a:t>火炎接触で水が急速に蒸発・脱水</a:t>
             </a:r>
           </a:p>
         </p:txBody>
@@ -46269,7 +46269,7 @@
                 </a:solidFill>
                 <a:latin typeface="Noto Sans JP"/>
               </a:rPr>
-              <a:t>脱水・加熱でCSPが焼結</a:t>
+              <a:t>CSPが焼結し粒子間ネックを形成</a:t>
             </a:r>
           </a:p>
         </p:txBody>
@@ -46339,7 +46339,7 @@
                 </a:solidFill>
                 <a:latin typeface="Noto Sans JP"/>
               </a:rPr>
-              <a:t>多孔質SiO₂エアロゲル断熱層を形成</a:t>
+              <a:t>多孔質シリカエアロゲル断熱層が完成</a:t>
             </a:r>
           </a:p>
         </p:txBody>
@@ -46466,7 +46466,7 @@
                 </a:solidFill>
                 <a:latin typeface="Noto Sans JP"/>
               </a:rPr>
-              <a:t>実証された保護性能</a:t>
+              <a:t>論文が示す意義</a:t>
             </a:r>
           </a:p>
         </p:txBody>
@@ -46536,7 +46536,7 @@
                 </a:solidFill>
                 <a:latin typeface="Noto Sans JP"/>
               </a:rPr>
-              <a:t>Time to char ~10分（水の約5倍）</a:t>
+              <a:t>PPプラットフォームは多様な難燃材料の基盤</a:t>
             </a:r>
           </a:p>
         </p:txBody>
@@ -46606,7 +46606,7 @@
                 </a:solidFill>
                 <a:latin typeface="Noto Sans JP"/>
               </a:rPr>
-              <a:t>水蒸発後も保護が継続</a:t>
+              <a:t>modular製造・大規模適用に展開可能</a:t>
             </a:r>
           </a:p>
         </p:txBody>
@@ -46676,7 +46676,7 @@
                 </a:solidFill>
                 <a:latin typeface="Noto Sans JP"/>
               </a:rPr>
-              <a:t>既存散布インフラと互換な流動特性</a:t>
+              <a:t>455日経時後も難燃性を維持（MHEC/CSP）</a:t>
             </a:r>
           </a:p>
         </p:txBody>
@@ -46836,7 +46836,7 @@
                 </a:solidFill>
                 <a:latin typeface="Noto Sans JP"/>
               </a:rPr>
-              <a:t>「水のキャリア」から「加熱で自己変態する難燃材料」へ ― WEGの新しい設計思想</a:t>
+              <a:t>「水のキャリア」から「加熱で自己変態する難燃材料」へ ― 乾燥後も効力を保つ次世代WEG</a:t>
             </a:r>
           </a:p>
         </p:txBody>

--- a/slides.pptx
+++ b/slides.pptx
@@ -6381,7 +6381,7 @@
                 </a:solidFill>
                 <a:latin typeface="Noto Sans JP"/>
               </a:rPr>
-              <a:t>原液：水中で12 wt%濃度のコロイド分散液</a:t>
+              <a:t>LUDOX TM-50（原液 50 wt%）→ 15 wt%に希釈（pH 9）</a:t>
             </a:r>
           </a:p>
         </p:txBody>
@@ -6451,7 +6451,7 @@
                 </a:solidFill>
                 <a:latin typeface="Noto Sans JP"/>
               </a:rPr>
-              <a:t>粒子サイズ：数十nmの単分散シリカ</a:t>
+              <a:t>粒子サイズ：22 nm（単分散）</a:t>
             </a:r>
           </a:p>
         </p:txBody>
@@ -6928,7 +6928,7 @@
                 </a:solidFill>
                 <a:latin typeface="Noto Sans JP"/>
               </a:rPr>
-              <a:t>役割：発泡を促進し多孔構造を強化</a:t>
+              <a:t>SDS添加でも Foaming Index は改善しなかった</a:t>
             </a:r>
           </a:p>
         </p:txBody>
@@ -7068,7 +7068,7 @@
                 </a:solidFill>
                 <a:latin typeface="Noto Sans JP"/>
               </a:rPr>
-              <a:t>SEMで気泡サイズ・分布を制御確認</a:t>
+              <a:t>SDS量増加で気泡が粗大化（SEM確認）</a:t>
             </a:r>
           </a:p>
         </p:txBody>
@@ -9830,7 +9830,7 @@
                 </a:solidFill>
                 <a:latin typeface="Noto Sans JP"/>
               </a:rPr>
-              <a:t>ブタンバーナーで木材を加熱</a:t>
+              <a:t>MAP-Proトーチ（~2054°C）で白木合板を加熱</a:t>
             </a:r>
           </a:p>
         </p:txBody>
@@ -14322,7 +14322,7 @@
                 </a:solidFill>
                 <a:latin typeface="Noto Sans JP"/>
               </a:rPr>
-              <a:t>AquaGel-Kよりも本研究WEGの方が高弾性</a:t>
+              <a:t>AquaGel-K（G'=457 Pa）より低い G'（46/26 Pa）だが全系でゲル挙動</a:t>
             </a:r>
           </a:p>
         </p:txBody>
@@ -15105,7 +15105,7 @@
                 </a:solidFill>
                 <a:latin typeface="Noto Sans JP"/>
               </a:rPr>
-              <a:t>Power-law index n</a:t>
+              <a:t>流動指数 n</a:t>
             </a:r>
           </a:p>
         </p:txBody>
@@ -15140,7 +15140,7 @@
                 </a:solidFill>
                 <a:latin typeface="Noto Sans JP"/>
               </a:rPr>
-              <a:t>0.108</a:t>
+              <a:t>n &lt; 1</a:t>
             </a:r>
           </a:p>
         </p:txBody>
@@ -15175,7 +15175,7 @@
                 </a:solidFill>
                 <a:latin typeface="Noto Sans JP"/>
               </a:rPr>
-              <a:t>HEC+MC/CSP 1-5</a:t>
+              <a:t>HEC+MC/CSP — 強い剪断希薄化</a:t>
             </a:r>
           </a:p>
         </p:txBody>
@@ -15258,7 +15258,7 @@
                 </a:solidFill>
                 <a:latin typeface="Noto Sans JP"/>
               </a:rPr>
-              <a:t>Power-law index n</a:t>
+              <a:t>流動指数 n</a:t>
             </a:r>
           </a:p>
         </p:txBody>
@@ -15293,7 +15293,7 @@
                 </a:solidFill>
                 <a:latin typeface="Noto Sans JP"/>
               </a:rPr>
-              <a:t>0.188</a:t>
+              <a:t>n &lt; 1</a:t>
             </a:r>
           </a:p>
         </p:txBody>
@@ -15328,7 +15328,7 @@
                 </a:solidFill>
                 <a:latin typeface="Noto Sans JP"/>
               </a:rPr>
-              <a:t>MHEC/CSP 1-5</a:t>
+              <a:t>MHEC/CSP — 同様に剪断希薄化</a:t>
             </a:r>
           </a:p>
         </p:txBody>
@@ -15847,7 +15847,7 @@
                 </a:solidFill>
                 <a:latin typeface="Noto Sans JP"/>
               </a:rPr>
-              <a:t>レオロジー③：Herschel-Bulkley モデルパラメータ</a:t>
+              <a:t>レオロジー③：静的降伏応力と長期安定性</a:t>
             </a:r>
           </a:p>
         </p:txBody>
@@ -16086,7 +16086,7 @@
                 </a:solidFill>
                 <a:latin typeface="Noto Sans JP"/>
               </a:rPr>
-              <a:t>σ = τ₀ + K · γ̇ⁿ  （τ₀：降伏応力, K：稠度係数, n：流動指数）</a:t>
+              <a:t>静的降伏応力：振幅掃引のG'/G'' クロスオーバー点（σ_s）。流れ始めに必要な最小応力</a:t>
             </a:r>
           </a:p>
         </p:txBody>
@@ -16100,7 +16100,7 @@
         <p:spPr>
           <a:xfrm>
             <a:off x="365760" y="1636776"/>
-            <a:ext cx="11460175" cy="434340"/>
+            <a:ext cx="11460175" cy="502920"/>
           </a:xfrm>
           <a:prstGeom prst="rect">
             <a:avLst/>
@@ -16144,7 +16144,7 @@
         <p:spPr>
           <a:xfrm>
             <a:off x="457200" y="1636776"/>
-            <a:ext cx="4365294" cy="434340"/>
+            <a:ext cx="3554979" cy="502920"/>
           </a:xfrm>
           <a:prstGeom prst="rect">
             <a:avLst/>
@@ -16178,8 +16178,8 @@
         </p:nvSpPr>
         <p:spPr>
           <a:xfrm>
-            <a:off x="4913934" y="1636776"/>
-            <a:ext cx="1818589" cy="434340"/>
+            <a:off x="4103619" y="1636776"/>
+            <a:ext cx="2513145" cy="502920"/>
           </a:xfrm>
           <a:prstGeom prst="rect">
             <a:avLst/>
@@ -16200,7 +16200,7 @@
                 </a:solidFill>
                 <a:latin typeface="Noto Sans JP"/>
               </a:rPr>
-              <a:t>τ₀ (Pa)</a:t>
+              <a:t>静的降伏応力（新鮮）</a:t>
             </a:r>
           </a:p>
         </p:txBody>
@@ -16213,8 +16213,8 @@
         </p:nvSpPr>
         <p:spPr>
           <a:xfrm>
-            <a:off x="6823963" y="1636776"/>
-            <a:ext cx="1818589" cy="434340"/>
+            <a:off x="6708204" y="1636776"/>
+            <a:ext cx="2513145" cy="502920"/>
           </a:xfrm>
           <a:prstGeom prst="rect">
             <a:avLst/>
@@ -16235,7 +16235,7 @@
                 </a:solidFill>
                 <a:latin typeface="Noto Sans JP"/>
               </a:rPr>
-              <a:t>K (Pa·sⁿ)</a:t>
+              <a:t>静的降伏応力（455日後）</a:t>
             </a:r>
           </a:p>
         </p:txBody>
@@ -16248,8 +16248,8 @@
         </p:nvSpPr>
         <p:spPr>
           <a:xfrm>
-            <a:off x="8733993" y="1636776"/>
-            <a:ext cx="1500250" cy="434340"/>
+            <a:off x="9312789" y="1636776"/>
+            <a:ext cx="2513145" cy="502920"/>
           </a:xfrm>
           <a:prstGeom prst="rect">
             <a:avLst/>
@@ -16270,56 +16270,21 @@
                 </a:solidFill>
                 <a:latin typeface="Noto Sans JP"/>
               </a:rPr>
-              <a:t>n</a:t>
-            </a:r>
-          </a:p>
-        </p:txBody>
-      </p:sp>
-      <p:sp>
-        <p:nvSpPr>
-          <p:cNvPr id="19" name="TextBox 18"/>
-          <p:cNvSpPr txBox="1"/>
-          <p:nvPr/>
-        </p:nvSpPr>
-        <p:spPr>
-          <a:xfrm>
-            <a:off x="10325684" y="1636776"/>
-            <a:ext cx="1500250" cy="434340"/>
-          </a:xfrm>
-          <a:prstGeom prst="rect">
-            <a:avLst/>
-          </a:prstGeom>
-          <a:noFill/>
-        </p:spPr>
-        <p:txBody>
-          <a:bodyPr wrap="square" anchor="ctr" lIns="36000" rIns="36000" tIns="18000" bIns="18000">
-            <a:spAutoFit/>
-          </a:bodyPr>
-          <a:lstStyle/>
-          <a:p>
-            <a:pPr algn="l"/>
-            <a:r>
-              <a:rPr sz="1100" b="1" i="0">
-                <a:solidFill>
-                  <a:srgbClr val="FFFFFF"/>
-                </a:solidFill>
-                <a:latin typeface="Noto Sans JP"/>
-              </a:rPr>
-              <a:t>R²</a:t>
-            </a:r>
-          </a:p>
-        </p:txBody>
-      </p:sp>
-      <p:sp>
-        <p:nvSpPr>
-          <p:cNvPr id="20" name="Rectangle 19"/>
+              <a:t>備考</a:t>
+            </a:r>
+          </a:p>
+        </p:txBody>
+      </p:sp>
+      <p:sp>
+        <p:nvSpPr>
+          <p:cNvPr id="19" name="Rectangle 18"/>
           <p:cNvSpPr/>
           <p:nvPr/>
         </p:nvSpPr>
         <p:spPr>
           <a:xfrm>
-            <a:off x="365760" y="2071116"/>
-            <a:ext cx="11460175" cy="434340"/>
+            <a:off x="365760" y="2139696"/>
+            <a:ext cx="11460175" cy="502920"/>
           </a:xfrm>
           <a:prstGeom prst="rect">
             <a:avLst/>
@@ -16358,14 +16323,49 @@
       </p:sp>
       <p:sp>
         <p:nvSpPr>
+          <p:cNvPr id="20" name="TextBox 19"/>
+          <p:cNvSpPr txBox="1"/>
+          <p:nvPr/>
+        </p:nvSpPr>
+        <p:spPr>
+          <a:xfrm>
+            <a:off x="457200" y="2139696"/>
+            <a:ext cx="3554979" cy="502920"/>
+          </a:xfrm>
+          <a:prstGeom prst="rect">
+            <a:avLst/>
+          </a:prstGeom>
+          <a:noFill/>
+        </p:spPr>
+        <p:txBody>
+          <a:bodyPr wrap="square" anchor="ctr" lIns="36000" rIns="36000" tIns="18000" bIns="18000">
+            <a:spAutoFit/>
+          </a:bodyPr>
+          <a:lstStyle/>
+          <a:p>
+            <a:pPr algn="l"/>
+            <a:r>
+              <a:rPr sz="1100" b="1" i="0">
+                <a:solidFill>
+                  <a:srgbClr val="334155"/>
+                </a:solidFill>
+                <a:latin typeface="Noto Sans JP"/>
+              </a:rPr>
+              <a:t>HEC+MC/CSP 1-5</a:t>
+            </a:r>
+          </a:p>
+        </p:txBody>
+      </p:sp>
+      <p:sp>
+        <p:nvSpPr>
           <p:cNvPr id="21" name="TextBox 20"/>
           <p:cNvSpPr txBox="1"/>
           <p:nvPr/>
         </p:nvSpPr>
         <p:spPr>
           <a:xfrm>
-            <a:off x="457200" y="2071116"/>
-            <a:ext cx="4365294" cy="434340"/>
+            <a:off x="4103619" y="2139696"/>
+            <a:ext cx="2513145" cy="502920"/>
           </a:xfrm>
           <a:prstGeom prst="rect">
             <a:avLst/>
@@ -16380,167 +16380,97 @@
           <a:p>
             <a:pPr algn="l"/>
             <a:r>
+              <a:rPr sz="1100" b="1" i="0">
+                <a:solidFill>
+                  <a:srgbClr val="3B5174"/>
+                </a:solidFill>
+                <a:latin typeface="Noto Sans JP"/>
+              </a:rPr>
+              <a:t>33.34 Pa</a:t>
+            </a:r>
+          </a:p>
+        </p:txBody>
+      </p:sp>
+      <p:sp>
+        <p:nvSpPr>
+          <p:cNvPr id="22" name="TextBox 21"/>
+          <p:cNvSpPr txBox="1"/>
+          <p:nvPr/>
+        </p:nvSpPr>
+        <p:spPr>
+          <a:xfrm>
+            <a:off x="6708204" y="2139696"/>
+            <a:ext cx="2513145" cy="502920"/>
+          </a:xfrm>
+          <a:prstGeom prst="rect">
+            <a:avLst/>
+          </a:prstGeom>
+          <a:noFill/>
+        </p:spPr>
+        <p:txBody>
+          <a:bodyPr wrap="square" anchor="ctr" lIns="36000" rIns="36000" tIns="18000" bIns="18000">
+            <a:spAutoFit/>
+          </a:bodyPr>
+          <a:lstStyle/>
+          <a:p>
+            <a:pPr algn="l"/>
+            <a:r>
               <a:rPr sz="1100" b="0" i="0">
                 <a:solidFill>
+                  <a:srgbClr val="5B8C5A"/>
+                </a:solidFill>
+                <a:latin typeface="Noto Sans JP"/>
+              </a:rPr>
+              <a:t>68.9 Pa</a:t>
+            </a:r>
+          </a:p>
+        </p:txBody>
+      </p:sp>
+      <p:sp>
+        <p:nvSpPr>
+          <p:cNvPr id="23" name="TextBox 22"/>
+          <p:cNvSpPr txBox="1"/>
+          <p:nvPr/>
+        </p:nvSpPr>
+        <p:spPr>
+          <a:xfrm>
+            <a:off x="9312789" y="2139696"/>
+            <a:ext cx="2513145" cy="502920"/>
+          </a:xfrm>
+          <a:prstGeom prst="rect">
+            <a:avLst/>
+          </a:prstGeom>
+          <a:noFill/>
+        </p:spPr>
+        <p:txBody>
+          <a:bodyPr wrap="square" anchor="ctr" lIns="36000" rIns="36000" tIns="18000" bIns="18000">
+            <a:spAutoFit/>
+          </a:bodyPr>
+          <a:lstStyle/>
+          <a:p>
+            <a:pPr algn="l"/>
+            <a:r>
+              <a:rPr sz="1100" b="0" i="0">
+                <a:solidFill>
                   <a:srgbClr val="334155"/>
                 </a:solidFill>
                 <a:latin typeface="Noto Sans JP"/>
               </a:rPr>
-              <a:t>AquaGel-K（市販対照）</a:t>
-            </a:r>
-          </a:p>
-        </p:txBody>
-      </p:sp>
-      <p:sp>
-        <p:nvSpPr>
-          <p:cNvPr id="22" name="TextBox 21"/>
-          <p:cNvSpPr txBox="1"/>
-          <p:nvPr/>
-        </p:nvSpPr>
-        <p:spPr>
-          <a:xfrm>
-            <a:off x="4913934" y="2071116"/>
-            <a:ext cx="1818589" cy="434340"/>
-          </a:xfrm>
-          <a:prstGeom prst="rect">
-            <a:avLst/>
-          </a:prstGeom>
-          <a:noFill/>
-        </p:spPr>
-        <p:txBody>
-          <a:bodyPr wrap="square" anchor="ctr" lIns="36000" rIns="36000" tIns="18000" bIns="18000">
-            <a:spAutoFit/>
-          </a:bodyPr>
-          <a:lstStyle/>
-          <a:p>
-            <a:pPr algn="l"/>
-            <a:r>
-              <a:rPr sz="1100" b="0" i="0">
-                <a:solidFill>
-                  <a:srgbClr val="334155"/>
-                </a:solidFill>
-                <a:latin typeface="Noto Sans JP"/>
-              </a:rPr>
-              <a:t>0.31</a:t>
-            </a:r>
-          </a:p>
-        </p:txBody>
-      </p:sp>
-      <p:sp>
-        <p:nvSpPr>
-          <p:cNvPr id="23" name="TextBox 22"/>
-          <p:cNvSpPr txBox="1"/>
-          <p:nvPr/>
-        </p:nvSpPr>
-        <p:spPr>
-          <a:xfrm>
-            <a:off x="6823963" y="2071116"/>
-            <a:ext cx="1818589" cy="434340"/>
-          </a:xfrm>
-          <a:prstGeom prst="rect">
-            <a:avLst/>
-          </a:prstGeom>
-          <a:noFill/>
-        </p:spPr>
-        <p:txBody>
-          <a:bodyPr wrap="square" anchor="ctr" lIns="36000" rIns="36000" tIns="18000" bIns="18000">
-            <a:spAutoFit/>
-          </a:bodyPr>
-          <a:lstStyle/>
-          <a:p>
-            <a:pPr algn="l"/>
-            <a:r>
-              <a:rPr sz="1100" b="0" i="0">
-                <a:solidFill>
-                  <a:srgbClr val="334155"/>
-                </a:solidFill>
-                <a:latin typeface="Noto Sans JP"/>
-              </a:rPr>
-              <a:t>0.85</a:t>
-            </a:r>
-          </a:p>
-        </p:txBody>
-      </p:sp>
-      <p:sp>
-        <p:nvSpPr>
-          <p:cNvPr id="24" name="TextBox 23"/>
-          <p:cNvSpPr txBox="1"/>
-          <p:nvPr/>
-        </p:nvSpPr>
-        <p:spPr>
-          <a:xfrm>
-            <a:off x="8733993" y="2071116"/>
-            <a:ext cx="1500250" cy="434340"/>
-          </a:xfrm>
-          <a:prstGeom prst="rect">
-            <a:avLst/>
-          </a:prstGeom>
-          <a:noFill/>
-        </p:spPr>
-        <p:txBody>
-          <a:bodyPr wrap="square" anchor="ctr" lIns="36000" rIns="36000" tIns="18000" bIns="18000">
-            <a:spAutoFit/>
-          </a:bodyPr>
-          <a:lstStyle/>
-          <a:p>
-            <a:pPr algn="l"/>
-            <a:r>
-              <a:rPr sz="1100" b="0" i="0">
-                <a:solidFill>
-                  <a:srgbClr val="334155"/>
-                </a:solidFill>
-                <a:latin typeface="Noto Sans JP"/>
-              </a:rPr>
-              <a:t>0.52</a:t>
-            </a:r>
-          </a:p>
-        </p:txBody>
-      </p:sp>
-      <p:sp>
-        <p:nvSpPr>
-          <p:cNvPr id="25" name="TextBox 24"/>
-          <p:cNvSpPr txBox="1"/>
-          <p:nvPr/>
-        </p:nvSpPr>
-        <p:spPr>
-          <a:xfrm>
-            <a:off x="10325684" y="2071116"/>
-            <a:ext cx="1500250" cy="434340"/>
-          </a:xfrm>
-          <a:prstGeom prst="rect">
-            <a:avLst/>
-          </a:prstGeom>
-          <a:noFill/>
-        </p:spPr>
-        <p:txBody>
-          <a:bodyPr wrap="square" anchor="ctr" lIns="36000" rIns="36000" tIns="18000" bIns="18000">
-            <a:spAutoFit/>
-          </a:bodyPr>
-          <a:lstStyle/>
-          <a:p>
-            <a:pPr algn="l"/>
-            <a:r>
-              <a:rPr sz="1100" b="0" i="0">
-                <a:solidFill>
-                  <a:srgbClr val="5B8C5A"/>
-                </a:solidFill>
-                <a:latin typeface="Noto Sans JP"/>
-              </a:rPr>
-              <a:t>&gt;0.99</a:t>
-            </a:r>
-          </a:p>
-        </p:txBody>
-      </p:sp>
-      <p:sp>
-        <p:nvSpPr>
-          <p:cNvPr id="26" name="Rectangle 25"/>
+              <a:t>ゲル強度が経時で増大</a:t>
+            </a:r>
+          </a:p>
+        </p:txBody>
+      </p:sp>
+      <p:sp>
+        <p:nvSpPr>
+          <p:cNvPr id="24" name="Rectangle 23"/>
           <p:cNvSpPr/>
           <p:nvPr/>
         </p:nvSpPr>
         <p:spPr>
           <a:xfrm>
-            <a:off x="365760" y="2505456"/>
-            <a:ext cx="11460175" cy="434340"/>
+            <a:off x="365760" y="2642616"/>
+            <a:ext cx="11460175" cy="502920"/>
           </a:xfrm>
           <a:prstGeom prst="rect">
             <a:avLst/>
@@ -16579,14 +16509,84 @@
       </p:sp>
       <p:sp>
         <p:nvSpPr>
+          <p:cNvPr id="25" name="TextBox 24"/>
+          <p:cNvSpPr txBox="1"/>
+          <p:nvPr/>
+        </p:nvSpPr>
+        <p:spPr>
+          <a:xfrm>
+            <a:off x="457200" y="2642616"/>
+            <a:ext cx="3554979" cy="502920"/>
+          </a:xfrm>
+          <a:prstGeom prst="rect">
+            <a:avLst/>
+          </a:prstGeom>
+          <a:noFill/>
+        </p:spPr>
+        <p:txBody>
+          <a:bodyPr wrap="square" anchor="ctr" lIns="36000" rIns="36000" tIns="18000" bIns="18000">
+            <a:spAutoFit/>
+          </a:bodyPr>
+          <a:lstStyle/>
+          <a:p>
+            <a:pPr algn="l"/>
+            <a:r>
+              <a:rPr sz="1100" b="1" i="0">
+                <a:solidFill>
+                  <a:srgbClr val="334155"/>
+                </a:solidFill>
+                <a:latin typeface="Noto Sans JP"/>
+              </a:rPr>
+              <a:t>MHEC/CSP 1-5</a:t>
+            </a:r>
+          </a:p>
+        </p:txBody>
+      </p:sp>
+      <p:sp>
+        <p:nvSpPr>
+          <p:cNvPr id="26" name="TextBox 25"/>
+          <p:cNvSpPr txBox="1"/>
+          <p:nvPr/>
+        </p:nvSpPr>
+        <p:spPr>
+          <a:xfrm>
+            <a:off x="4103619" y="2642616"/>
+            <a:ext cx="2513145" cy="502920"/>
+          </a:xfrm>
+          <a:prstGeom prst="rect">
+            <a:avLst/>
+          </a:prstGeom>
+          <a:noFill/>
+        </p:spPr>
+        <p:txBody>
+          <a:bodyPr wrap="square" anchor="ctr" lIns="36000" rIns="36000" tIns="18000" bIns="18000">
+            <a:spAutoFit/>
+          </a:bodyPr>
+          <a:lstStyle/>
+          <a:p>
+            <a:pPr algn="l"/>
+            <a:r>
+              <a:rPr sz="1100" b="1" i="0">
+                <a:solidFill>
+                  <a:srgbClr val="3B5174"/>
+                </a:solidFill>
+                <a:latin typeface="Noto Sans JP"/>
+              </a:rPr>
+              <a:t>3.31 Pa</a:t>
+            </a:r>
+          </a:p>
+        </p:txBody>
+      </p:sp>
+      <p:sp>
+        <p:nvSpPr>
           <p:cNvPr id="27" name="TextBox 26"/>
           <p:cNvSpPr txBox="1"/>
           <p:nvPr/>
         </p:nvSpPr>
         <p:spPr>
           <a:xfrm>
-            <a:off x="457200" y="2505456"/>
-            <a:ext cx="4365294" cy="434340"/>
+            <a:off x="6708204" y="2642616"/>
+            <a:ext cx="2513145" cy="502920"/>
           </a:xfrm>
           <a:prstGeom prst="rect">
             <a:avLst/>
@@ -16601,167 +16601,62 @@
           <a:p>
             <a:pPr algn="l"/>
             <a:r>
-              <a:rPr sz="1100" b="1" i="0">
+              <a:rPr sz="1100" b="0" i="0">
+                <a:solidFill>
+                  <a:srgbClr val="5B8C5A"/>
+                </a:solidFill>
+                <a:latin typeface="Noto Sans JP"/>
+              </a:rPr>
+              <a:t>4.56 Pa</a:t>
+            </a:r>
+          </a:p>
+        </p:txBody>
+      </p:sp>
+      <p:sp>
+        <p:nvSpPr>
+          <p:cNvPr id="28" name="TextBox 27"/>
+          <p:cNvSpPr txBox="1"/>
+          <p:nvPr/>
+        </p:nvSpPr>
+        <p:spPr>
+          <a:xfrm>
+            <a:off x="9312789" y="2642616"/>
+            <a:ext cx="2513145" cy="502920"/>
+          </a:xfrm>
+          <a:prstGeom prst="rect">
+            <a:avLst/>
+          </a:prstGeom>
+          <a:noFill/>
+        </p:spPr>
+        <p:txBody>
+          <a:bodyPr wrap="square" anchor="ctr" lIns="36000" rIns="36000" tIns="18000" bIns="18000">
+            <a:spAutoFit/>
+          </a:bodyPr>
+          <a:lstStyle/>
+          <a:p>
+            <a:pPr algn="l"/>
+            <a:r>
+              <a:rPr sz="1100" b="0" i="0">
                 <a:solidFill>
                   <a:srgbClr val="334155"/>
                 </a:solidFill>
                 <a:latin typeface="Noto Sans JP"/>
               </a:rPr>
-              <a:t>HEC+MC/CSP 1-5</a:t>
-            </a:r>
-          </a:p>
-        </p:txBody>
-      </p:sp>
-      <p:sp>
-        <p:nvSpPr>
-          <p:cNvPr id="28" name="TextBox 27"/>
-          <p:cNvSpPr txBox="1"/>
-          <p:nvPr/>
-        </p:nvSpPr>
-        <p:spPr>
-          <a:xfrm>
-            <a:off x="4913934" y="2505456"/>
-            <a:ext cx="1818589" cy="434340"/>
-          </a:xfrm>
-          <a:prstGeom prst="rect">
-            <a:avLst/>
-          </a:prstGeom>
-          <a:noFill/>
-        </p:spPr>
-        <p:txBody>
-          <a:bodyPr wrap="square" anchor="ctr" lIns="36000" rIns="36000" tIns="18000" bIns="18000">
-            <a:spAutoFit/>
-          </a:bodyPr>
-          <a:lstStyle/>
-          <a:p>
-            <a:pPr algn="l"/>
-            <a:r>
-              <a:rPr sz="1100" b="1" i="0">
-                <a:solidFill>
-                  <a:srgbClr val="334155"/>
-                </a:solidFill>
-                <a:latin typeface="Noto Sans JP"/>
-              </a:rPr>
-              <a:t>0.59</a:t>
-            </a:r>
-          </a:p>
-        </p:txBody>
-      </p:sp>
-      <p:sp>
-        <p:nvSpPr>
-          <p:cNvPr id="29" name="TextBox 28"/>
-          <p:cNvSpPr txBox="1"/>
-          <p:nvPr/>
-        </p:nvSpPr>
-        <p:spPr>
-          <a:xfrm>
-            <a:off x="6823963" y="2505456"/>
-            <a:ext cx="1818589" cy="434340"/>
-          </a:xfrm>
-          <a:prstGeom prst="rect">
-            <a:avLst/>
-          </a:prstGeom>
-          <a:noFill/>
-        </p:spPr>
-        <p:txBody>
-          <a:bodyPr wrap="square" anchor="ctr" lIns="36000" rIns="36000" tIns="18000" bIns="18000">
-            <a:spAutoFit/>
-          </a:bodyPr>
-          <a:lstStyle/>
-          <a:p>
-            <a:pPr algn="l"/>
-            <a:r>
-              <a:rPr sz="1100" b="1" i="0">
-                <a:solidFill>
-                  <a:srgbClr val="334155"/>
-                </a:solidFill>
-                <a:latin typeface="Noto Sans JP"/>
-              </a:rPr>
-              <a:t>2.04</a:t>
-            </a:r>
-          </a:p>
-        </p:txBody>
-      </p:sp>
-      <p:sp>
-        <p:nvSpPr>
-          <p:cNvPr id="30" name="TextBox 29"/>
-          <p:cNvSpPr txBox="1"/>
-          <p:nvPr/>
-        </p:nvSpPr>
-        <p:spPr>
-          <a:xfrm>
-            <a:off x="8733993" y="2505456"/>
-            <a:ext cx="1500250" cy="434340"/>
-          </a:xfrm>
-          <a:prstGeom prst="rect">
-            <a:avLst/>
-          </a:prstGeom>
-          <a:noFill/>
-        </p:spPr>
-        <p:txBody>
-          <a:bodyPr wrap="square" anchor="ctr" lIns="36000" rIns="36000" tIns="18000" bIns="18000">
-            <a:spAutoFit/>
-          </a:bodyPr>
-          <a:lstStyle/>
-          <a:p>
-            <a:pPr algn="l"/>
-            <a:r>
-              <a:rPr sz="1100" b="1" i="0">
-                <a:solidFill>
-                  <a:srgbClr val="B08442"/>
-                </a:solidFill>
-                <a:latin typeface="Noto Sans JP"/>
-              </a:rPr>
-              <a:t>0.108</a:t>
-            </a:r>
-          </a:p>
-        </p:txBody>
-      </p:sp>
-      <p:sp>
-        <p:nvSpPr>
-          <p:cNvPr id="31" name="TextBox 30"/>
-          <p:cNvSpPr txBox="1"/>
-          <p:nvPr/>
-        </p:nvSpPr>
-        <p:spPr>
-          <a:xfrm>
-            <a:off x="10325684" y="2505456"/>
-            <a:ext cx="1500250" cy="434340"/>
-          </a:xfrm>
-          <a:prstGeom prst="rect">
-            <a:avLst/>
-          </a:prstGeom>
-          <a:noFill/>
-        </p:spPr>
-        <p:txBody>
-          <a:bodyPr wrap="square" anchor="ctr" lIns="36000" rIns="36000" tIns="18000" bIns="18000">
-            <a:spAutoFit/>
-          </a:bodyPr>
-          <a:lstStyle/>
-          <a:p>
-            <a:pPr algn="l"/>
-            <a:r>
-              <a:rPr sz="1100" b="0" i="0">
-                <a:solidFill>
-                  <a:srgbClr val="5B8C5A"/>
-                </a:solidFill>
-                <a:latin typeface="Noto Sans JP"/>
-              </a:rPr>
-              <a:t>&gt;0.99</a:t>
-            </a:r>
-          </a:p>
-        </p:txBody>
-      </p:sp>
-      <p:sp>
-        <p:nvSpPr>
-          <p:cNvPr id="32" name="Rectangle 31"/>
+              <a:t>長期安定性を確認（455日）</a:t>
+            </a:r>
+          </a:p>
+        </p:txBody>
+      </p:sp>
+      <p:sp>
+        <p:nvSpPr>
+          <p:cNvPr id="29" name="Rectangle 28"/>
           <p:cNvSpPr/>
           <p:nvPr/>
         </p:nvSpPr>
         <p:spPr>
           <a:xfrm>
-            <a:off x="365760" y="2939796"/>
-            <a:ext cx="11460175" cy="434340"/>
+            <a:off x="365760" y="3145536"/>
+            <a:ext cx="11460175" cy="502920"/>
           </a:xfrm>
           <a:prstGeom prst="rect">
             <a:avLst/>
@@ -16800,14 +16695,119 @@
       </p:sp>
       <p:sp>
         <p:nvSpPr>
+          <p:cNvPr id="30" name="TextBox 29"/>
+          <p:cNvSpPr txBox="1"/>
+          <p:nvPr/>
+        </p:nvSpPr>
+        <p:spPr>
+          <a:xfrm>
+            <a:off x="457200" y="3145536"/>
+            <a:ext cx="3554979" cy="502920"/>
+          </a:xfrm>
+          <a:prstGeom prst="rect">
+            <a:avLst/>
+          </a:prstGeom>
+          <a:noFill/>
+        </p:spPr>
+        <p:txBody>
+          <a:bodyPr wrap="square" anchor="ctr" lIns="36000" rIns="36000" tIns="18000" bIns="18000">
+            <a:spAutoFit/>
+          </a:bodyPr>
+          <a:lstStyle/>
+          <a:p>
+            <a:pPr algn="l"/>
+            <a:r>
+              <a:rPr sz="1100" b="0" i="0">
+                <a:solidFill>
+                  <a:srgbClr val="334155"/>
+                </a:solidFill>
+                <a:latin typeface="Noto Sans JP"/>
+              </a:rPr>
+              <a:t>AquaGel-K（市販対照）</a:t>
+            </a:r>
+          </a:p>
+        </p:txBody>
+      </p:sp>
+      <p:sp>
+        <p:nvSpPr>
+          <p:cNvPr id="31" name="TextBox 30"/>
+          <p:cNvSpPr txBox="1"/>
+          <p:nvPr/>
+        </p:nvSpPr>
+        <p:spPr>
+          <a:xfrm>
+            <a:off x="4103619" y="3145536"/>
+            <a:ext cx="2513145" cy="502920"/>
+          </a:xfrm>
+          <a:prstGeom prst="rect">
+            <a:avLst/>
+          </a:prstGeom>
+          <a:noFill/>
+        </p:spPr>
+        <p:txBody>
+          <a:bodyPr wrap="square" anchor="ctr" lIns="36000" rIns="36000" tIns="18000" bIns="18000">
+            <a:spAutoFit/>
+          </a:bodyPr>
+          <a:lstStyle/>
+          <a:p>
+            <a:pPr algn="l"/>
+            <a:r>
+              <a:rPr sz="1100" b="0" i="0">
+                <a:solidFill>
+                  <a:srgbClr val="334155"/>
+                </a:solidFill>
+                <a:latin typeface="Noto Sans JP"/>
+              </a:rPr>
+              <a:t>—</a:t>
+            </a:r>
+          </a:p>
+        </p:txBody>
+      </p:sp>
+      <p:sp>
+        <p:nvSpPr>
+          <p:cNvPr id="32" name="TextBox 31"/>
+          <p:cNvSpPr txBox="1"/>
+          <p:nvPr/>
+        </p:nvSpPr>
+        <p:spPr>
+          <a:xfrm>
+            <a:off x="6708204" y="3145536"/>
+            <a:ext cx="2513145" cy="502920"/>
+          </a:xfrm>
+          <a:prstGeom prst="rect">
+            <a:avLst/>
+          </a:prstGeom>
+          <a:noFill/>
+        </p:spPr>
+        <p:txBody>
+          <a:bodyPr wrap="square" anchor="ctr" lIns="36000" rIns="36000" tIns="18000" bIns="18000">
+            <a:spAutoFit/>
+          </a:bodyPr>
+          <a:lstStyle/>
+          <a:p>
+            <a:pPr algn="l"/>
+            <a:r>
+              <a:rPr sz="1100" b="0" i="0">
+                <a:solidFill>
+                  <a:srgbClr val="334155"/>
+                </a:solidFill>
+                <a:latin typeface="Noto Sans JP"/>
+              </a:rPr>
+              <a:t>—</a:t>
+            </a:r>
+          </a:p>
+        </p:txBody>
+      </p:sp>
+      <p:sp>
+        <p:nvSpPr>
           <p:cNvPr id="33" name="TextBox 32"/>
           <p:cNvSpPr txBox="1"/>
           <p:nvPr/>
         </p:nvSpPr>
         <p:spPr>
           <a:xfrm>
-            <a:off x="457200" y="2939796"/>
-            <a:ext cx="4365294" cy="434340"/>
+            <a:off x="9312789" y="3145536"/>
+            <a:ext cx="2513145" cy="502920"/>
           </a:xfrm>
           <a:prstGeom prst="rect">
             <a:avLst/>
@@ -16824,606 +16824,24 @@
             <a:r>
               <a:rPr sz="1100" b="0" i="0">
                 <a:solidFill>
-                  <a:srgbClr val="334155"/>
-                </a:solidFill>
-                <a:latin typeface="Noto Sans JP"/>
-              </a:rPr>
-              <a:t>HEC+MC/CSP/SDS 1-5-0.1</a:t>
-            </a:r>
-          </a:p>
-        </p:txBody>
-      </p:sp>
-      <p:sp>
-        <p:nvSpPr>
-          <p:cNvPr id="34" name="TextBox 33"/>
-          <p:cNvSpPr txBox="1"/>
-          <p:nvPr/>
-        </p:nvSpPr>
-        <p:spPr>
-          <a:xfrm>
-            <a:off x="4913934" y="2939796"/>
-            <a:ext cx="1818589" cy="434340"/>
-          </a:xfrm>
-          <a:prstGeom prst="rect">
-            <a:avLst/>
-          </a:prstGeom>
-          <a:noFill/>
-        </p:spPr>
-        <p:txBody>
-          <a:bodyPr wrap="square" anchor="ctr" lIns="36000" rIns="36000" tIns="18000" bIns="18000">
-            <a:spAutoFit/>
-          </a:bodyPr>
-          <a:lstStyle/>
-          <a:p>
-            <a:pPr algn="l"/>
-            <a:r>
-              <a:rPr sz="1100" b="0" i="0">
-                <a:solidFill>
-                  <a:srgbClr val="334155"/>
-                </a:solidFill>
-                <a:latin typeface="Noto Sans JP"/>
-              </a:rPr>
-              <a:t>0.54</a:t>
-            </a:r>
-          </a:p>
-        </p:txBody>
-      </p:sp>
-      <p:sp>
-        <p:nvSpPr>
-          <p:cNvPr id="35" name="TextBox 34"/>
-          <p:cNvSpPr txBox="1"/>
-          <p:nvPr/>
-        </p:nvSpPr>
-        <p:spPr>
-          <a:xfrm>
-            <a:off x="6823963" y="2939796"/>
-            <a:ext cx="1818589" cy="434340"/>
-          </a:xfrm>
-          <a:prstGeom prst="rect">
-            <a:avLst/>
-          </a:prstGeom>
-          <a:noFill/>
-        </p:spPr>
-        <p:txBody>
-          <a:bodyPr wrap="square" anchor="ctr" lIns="36000" rIns="36000" tIns="18000" bIns="18000">
-            <a:spAutoFit/>
-          </a:bodyPr>
-          <a:lstStyle/>
-          <a:p>
-            <a:pPr algn="l"/>
-            <a:r>
-              <a:rPr sz="1100" b="0" i="0">
-                <a:solidFill>
-                  <a:srgbClr val="334155"/>
-                </a:solidFill>
-                <a:latin typeface="Noto Sans JP"/>
-              </a:rPr>
-              <a:t>1.87</a:t>
-            </a:r>
-          </a:p>
-        </p:txBody>
-      </p:sp>
-      <p:sp>
-        <p:nvSpPr>
-          <p:cNvPr id="36" name="TextBox 35"/>
-          <p:cNvSpPr txBox="1"/>
-          <p:nvPr/>
-        </p:nvSpPr>
-        <p:spPr>
-          <a:xfrm>
-            <a:off x="8733993" y="2939796"/>
-            <a:ext cx="1500250" cy="434340"/>
-          </a:xfrm>
-          <a:prstGeom prst="rect">
-            <a:avLst/>
-          </a:prstGeom>
-          <a:noFill/>
-        </p:spPr>
-        <p:txBody>
-          <a:bodyPr wrap="square" anchor="ctr" lIns="36000" rIns="36000" tIns="18000" bIns="18000">
-            <a:spAutoFit/>
-          </a:bodyPr>
-          <a:lstStyle/>
-          <a:p>
-            <a:pPr algn="l"/>
-            <a:r>
-              <a:rPr sz="1100" b="0" i="0">
-                <a:solidFill>
-                  <a:srgbClr val="334155"/>
-                </a:solidFill>
-                <a:latin typeface="Noto Sans JP"/>
-              </a:rPr>
-              <a:t>0.115</a:t>
-            </a:r>
-          </a:p>
-        </p:txBody>
-      </p:sp>
-      <p:sp>
-        <p:nvSpPr>
-          <p:cNvPr id="37" name="TextBox 36"/>
-          <p:cNvSpPr txBox="1"/>
-          <p:nvPr/>
-        </p:nvSpPr>
-        <p:spPr>
-          <a:xfrm>
-            <a:off x="10325684" y="2939796"/>
-            <a:ext cx="1500250" cy="434340"/>
-          </a:xfrm>
-          <a:prstGeom prst="rect">
-            <a:avLst/>
-          </a:prstGeom>
-          <a:noFill/>
-        </p:spPr>
-        <p:txBody>
-          <a:bodyPr wrap="square" anchor="ctr" lIns="36000" rIns="36000" tIns="18000" bIns="18000">
-            <a:spAutoFit/>
-          </a:bodyPr>
-          <a:lstStyle/>
-          <a:p>
-            <a:pPr algn="l"/>
-            <a:r>
-              <a:rPr sz="1100" b="0" i="0">
-                <a:solidFill>
-                  <a:srgbClr val="5B8C5A"/>
-                </a:solidFill>
-                <a:latin typeface="Noto Sans JP"/>
-              </a:rPr>
-              <a:t>&gt;0.99</a:t>
-            </a:r>
-          </a:p>
-        </p:txBody>
-      </p:sp>
-      <p:sp>
-        <p:nvSpPr>
-          <p:cNvPr id="38" name="Rectangle 37"/>
+                  <a:srgbClr val="64748B"/>
+                </a:solidFill>
+                <a:latin typeface="Noto Sans JP"/>
+              </a:rPr>
+              <a:t>比較対照</a:t>
+            </a:r>
+          </a:p>
+        </p:txBody>
+      </p:sp>
+      <p:sp>
+        <p:nvSpPr>
+          <p:cNvPr id="34" name="Rounded Rectangle 33"/>
           <p:cNvSpPr/>
           <p:nvPr/>
         </p:nvSpPr>
         <p:spPr>
           <a:xfrm>
-            <a:off x="365760" y="3374136"/>
-            <a:ext cx="11460175" cy="434340"/>
-          </a:xfrm>
-          <a:prstGeom prst="rect">
-            <a:avLst/>
-          </a:prstGeom>
-          <a:solidFill>
-            <a:srgbClr val="FFFFFF"/>
-          </a:solidFill>
-          <a:ln w="3810">
-            <a:solidFill>
-              <a:srgbClr val="E2E8F0"/>
-            </a:solidFill>
-          </a:ln>
-          <a:effectLst/>
-        </p:spPr>
-        <p:style>
-          <a:lnRef idx="1">
-            <a:schemeClr val="accent1"/>
-          </a:lnRef>
-          <a:fillRef idx="3">
-            <a:schemeClr val="accent1"/>
-          </a:fillRef>
-          <a:effectRef idx="2">
-            <a:schemeClr val="accent1"/>
-          </a:effectRef>
-          <a:fontRef idx="minor">
-            <a:schemeClr val="lt1"/>
-          </a:fontRef>
-        </p:style>
-        <p:txBody>
-          <a:bodyPr rtlCol="0" anchor="ctr"/>
-          <a:lstStyle/>
-          <a:p>
-            <a:pPr algn="ctr"/>
-          </a:p>
-        </p:txBody>
-      </p:sp>
-      <p:sp>
-        <p:nvSpPr>
-          <p:cNvPr id="39" name="TextBox 38"/>
-          <p:cNvSpPr txBox="1"/>
-          <p:nvPr/>
-        </p:nvSpPr>
-        <p:spPr>
-          <a:xfrm>
-            <a:off x="457200" y="3374136"/>
-            <a:ext cx="4365294" cy="434340"/>
-          </a:xfrm>
-          <a:prstGeom prst="rect">
-            <a:avLst/>
-          </a:prstGeom>
-          <a:noFill/>
-        </p:spPr>
-        <p:txBody>
-          <a:bodyPr wrap="square" anchor="ctr" lIns="36000" rIns="36000" tIns="18000" bIns="18000">
-            <a:spAutoFit/>
-          </a:bodyPr>
-          <a:lstStyle/>
-          <a:p>
-            <a:pPr algn="l"/>
-            <a:r>
-              <a:rPr sz="1100" b="0" i="0">
-                <a:solidFill>
-                  <a:srgbClr val="334155"/>
-                </a:solidFill>
-                <a:latin typeface="Noto Sans JP"/>
-              </a:rPr>
-              <a:t>HEC+MC/CSP/SDS 1-5-0.5</a:t>
-            </a:r>
-          </a:p>
-        </p:txBody>
-      </p:sp>
-      <p:sp>
-        <p:nvSpPr>
-          <p:cNvPr id="40" name="TextBox 39"/>
-          <p:cNvSpPr txBox="1"/>
-          <p:nvPr/>
-        </p:nvSpPr>
-        <p:spPr>
-          <a:xfrm>
-            <a:off x="4913934" y="3374136"/>
-            <a:ext cx="1818589" cy="434340"/>
-          </a:xfrm>
-          <a:prstGeom prst="rect">
-            <a:avLst/>
-          </a:prstGeom>
-          <a:noFill/>
-        </p:spPr>
-        <p:txBody>
-          <a:bodyPr wrap="square" anchor="ctr" lIns="36000" rIns="36000" tIns="18000" bIns="18000">
-            <a:spAutoFit/>
-          </a:bodyPr>
-          <a:lstStyle/>
-          <a:p>
-            <a:pPr algn="l"/>
-            <a:r>
-              <a:rPr sz="1100" b="0" i="0">
-                <a:solidFill>
-                  <a:srgbClr val="334155"/>
-                </a:solidFill>
-                <a:latin typeface="Noto Sans JP"/>
-              </a:rPr>
-              <a:t>0.48</a:t>
-            </a:r>
-          </a:p>
-        </p:txBody>
-      </p:sp>
-      <p:sp>
-        <p:nvSpPr>
-          <p:cNvPr id="41" name="TextBox 40"/>
-          <p:cNvSpPr txBox="1"/>
-          <p:nvPr/>
-        </p:nvSpPr>
-        <p:spPr>
-          <a:xfrm>
-            <a:off x="6823963" y="3374136"/>
-            <a:ext cx="1818589" cy="434340"/>
-          </a:xfrm>
-          <a:prstGeom prst="rect">
-            <a:avLst/>
-          </a:prstGeom>
-          <a:noFill/>
-        </p:spPr>
-        <p:txBody>
-          <a:bodyPr wrap="square" anchor="ctr" lIns="36000" rIns="36000" tIns="18000" bIns="18000">
-            <a:spAutoFit/>
-          </a:bodyPr>
-          <a:lstStyle/>
-          <a:p>
-            <a:pPr algn="l"/>
-            <a:r>
-              <a:rPr sz="1100" b="0" i="0">
-                <a:solidFill>
-                  <a:srgbClr val="334155"/>
-                </a:solidFill>
-                <a:latin typeface="Noto Sans JP"/>
-              </a:rPr>
-              <a:t>1.65</a:t>
-            </a:r>
-          </a:p>
-        </p:txBody>
-      </p:sp>
-      <p:sp>
-        <p:nvSpPr>
-          <p:cNvPr id="42" name="TextBox 41"/>
-          <p:cNvSpPr txBox="1"/>
-          <p:nvPr/>
-        </p:nvSpPr>
-        <p:spPr>
-          <a:xfrm>
-            <a:off x="8733993" y="3374136"/>
-            <a:ext cx="1500250" cy="434340"/>
-          </a:xfrm>
-          <a:prstGeom prst="rect">
-            <a:avLst/>
-          </a:prstGeom>
-          <a:noFill/>
-        </p:spPr>
-        <p:txBody>
-          <a:bodyPr wrap="square" anchor="ctr" lIns="36000" rIns="36000" tIns="18000" bIns="18000">
-            <a:spAutoFit/>
-          </a:bodyPr>
-          <a:lstStyle/>
-          <a:p>
-            <a:pPr algn="l"/>
-            <a:r>
-              <a:rPr sz="1100" b="0" i="0">
-                <a:solidFill>
-                  <a:srgbClr val="334155"/>
-                </a:solidFill>
-                <a:latin typeface="Noto Sans JP"/>
-              </a:rPr>
-              <a:t>0.122</a:t>
-            </a:r>
-          </a:p>
-        </p:txBody>
-      </p:sp>
-      <p:sp>
-        <p:nvSpPr>
-          <p:cNvPr id="43" name="TextBox 42"/>
-          <p:cNvSpPr txBox="1"/>
-          <p:nvPr/>
-        </p:nvSpPr>
-        <p:spPr>
-          <a:xfrm>
-            <a:off x="10325684" y="3374136"/>
-            <a:ext cx="1500250" cy="434340"/>
-          </a:xfrm>
-          <a:prstGeom prst="rect">
-            <a:avLst/>
-          </a:prstGeom>
-          <a:noFill/>
-        </p:spPr>
-        <p:txBody>
-          <a:bodyPr wrap="square" anchor="ctr" lIns="36000" rIns="36000" tIns="18000" bIns="18000">
-            <a:spAutoFit/>
-          </a:bodyPr>
-          <a:lstStyle/>
-          <a:p>
-            <a:pPr algn="l"/>
-            <a:r>
-              <a:rPr sz="1100" b="0" i="0">
-                <a:solidFill>
-                  <a:srgbClr val="5B8C5A"/>
-                </a:solidFill>
-                <a:latin typeface="Noto Sans JP"/>
-              </a:rPr>
-              <a:t>&gt;0.99</a:t>
-            </a:r>
-          </a:p>
-        </p:txBody>
-      </p:sp>
-      <p:sp>
-        <p:nvSpPr>
-          <p:cNvPr id="44" name="Rectangle 43"/>
-          <p:cNvSpPr/>
-          <p:nvPr/>
-        </p:nvSpPr>
-        <p:spPr>
-          <a:xfrm>
-            <a:off x="365760" y="3808476"/>
-            <a:ext cx="11460175" cy="434340"/>
-          </a:xfrm>
-          <a:prstGeom prst="rect">
-            <a:avLst/>
-          </a:prstGeom>
-          <a:solidFill>
-            <a:srgbClr val="F8FAFC"/>
-          </a:solidFill>
-          <a:ln w="3810">
-            <a:solidFill>
-              <a:srgbClr val="E2E8F0"/>
-            </a:solidFill>
-          </a:ln>
-          <a:effectLst/>
-        </p:spPr>
-        <p:style>
-          <a:lnRef idx="1">
-            <a:schemeClr val="accent1"/>
-          </a:lnRef>
-          <a:fillRef idx="3">
-            <a:schemeClr val="accent1"/>
-          </a:fillRef>
-          <a:effectRef idx="2">
-            <a:schemeClr val="accent1"/>
-          </a:effectRef>
-          <a:fontRef idx="minor">
-            <a:schemeClr val="lt1"/>
-          </a:fontRef>
-        </p:style>
-        <p:txBody>
-          <a:bodyPr rtlCol="0" anchor="ctr"/>
-          <a:lstStyle/>
-          <a:p>
-            <a:pPr algn="ctr"/>
-          </a:p>
-        </p:txBody>
-      </p:sp>
-      <p:sp>
-        <p:nvSpPr>
-          <p:cNvPr id="45" name="TextBox 44"/>
-          <p:cNvSpPr txBox="1"/>
-          <p:nvPr/>
-        </p:nvSpPr>
-        <p:spPr>
-          <a:xfrm>
-            <a:off x="457200" y="3808476"/>
-            <a:ext cx="4365294" cy="434340"/>
-          </a:xfrm>
-          <a:prstGeom prst="rect">
-            <a:avLst/>
-          </a:prstGeom>
-          <a:noFill/>
-        </p:spPr>
-        <p:txBody>
-          <a:bodyPr wrap="square" anchor="ctr" lIns="36000" rIns="36000" tIns="18000" bIns="18000">
-            <a:spAutoFit/>
-          </a:bodyPr>
-          <a:lstStyle/>
-          <a:p>
-            <a:pPr algn="l"/>
-            <a:r>
-              <a:rPr sz="1100" b="1" i="0">
-                <a:solidFill>
-                  <a:srgbClr val="334155"/>
-                </a:solidFill>
-                <a:latin typeface="Noto Sans JP"/>
-              </a:rPr>
-              <a:t>MHEC/CSP 1-5</a:t>
-            </a:r>
-          </a:p>
-        </p:txBody>
-      </p:sp>
-      <p:sp>
-        <p:nvSpPr>
-          <p:cNvPr id="46" name="TextBox 45"/>
-          <p:cNvSpPr txBox="1"/>
-          <p:nvPr/>
-        </p:nvSpPr>
-        <p:spPr>
-          <a:xfrm>
-            <a:off x="4913934" y="3808476"/>
-            <a:ext cx="1818589" cy="434340"/>
-          </a:xfrm>
-          <a:prstGeom prst="rect">
-            <a:avLst/>
-          </a:prstGeom>
-          <a:noFill/>
-        </p:spPr>
-        <p:txBody>
-          <a:bodyPr wrap="square" anchor="ctr" lIns="36000" rIns="36000" tIns="18000" bIns="18000">
-            <a:spAutoFit/>
-          </a:bodyPr>
-          <a:lstStyle/>
-          <a:p>
-            <a:pPr algn="l"/>
-            <a:r>
-              <a:rPr sz="1100" b="1" i="0">
-                <a:solidFill>
-                  <a:srgbClr val="334155"/>
-                </a:solidFill>
-                <a:latin typeface="Noto Sans JP"/>
-              </a:rPr>
-              <a:t>0.41</a:t>
-            </a:r>
-          </a:p>
-        </p:txBody>
-      </p:sp>
-      <p:sp>
-        <p:nvSpPr>
-          <p:cNvPr id="47" name="TextBox 46"/>
-          <p:cNvSpPr txBox="1"/>
-          <p:nvPr/>
-        </p:nvSpPr>
-        <p:spPr>
-          <a:xfrm>
-            <a:off x="6823963" y="3808476"/>
-            <a:ext cx="1818589" cy="434340"/>
-          </a:xfrm>
-          <a:prstGeom prst="rect">
-            <a:avLst/>
-          </a:prstGeom>
-          <a:noFill/>
-        </p:spPr>
-        <p:txBody>
-          <a:bodyPr wrap="square" anchor="ctr" lIns="36000" rIns="36000" tIns="18000" bIns="18000">
-            <a:spAutoFit/>
-          </a:bodyPr>
-          <a:lstStyle/>
-          <a:p>
-            <a:pPr algn="l"/>
-            <a:r>
-              <a:rPr sz="1100" b="1" i="0">
-                <a:solidFill>
-                  <a:srgbClr val="334155"/>
-                </a:solidFill>
-                <a:latin typeface="Noto Sans JP"/>
-              </a:rPr>
-              <a:t>1.43</a:t>
-            </a:r>
-          </a:p>
-        </p:txBody>
-      </p:sp>
-      <p:sp>
-        <p:nvSpPr>
-          <p:cNvPr id="48" name="TextBox 47"/>
-          <p:cNvSpPr txBox="1"/>
-          <p:nvPr/>
-        </p:nvSpPr>
-        <p:spPr>
-          <a:xfrm>
-            <a:off x="8733993" y="3808476"/>
-            <a:ext cx="1500250" cy="434340"/>
-          </a:xfrm>
-          <a:prstGeom prst="rect">
-            <a:avLst/>
-          </a:prstGeom>
-          <a:noFill/>
-        </p:spPr>
-        <p:txBody>
-          <a:bodyPr wrap="square" anchor="ctr" lIns="36000" rIns="36000" tIns="18000" bIns="18000">
-            <a:spAutoFit/>
-          </a:bodyPr>
-          <a:lstStyle/>
-          <a:p>
-            <a:pPr algn="l"/>
-            <a:r>
-              <a:rPr sz="1100" b="1" i="0">
-                <a:solidFill>
-                  <a:srgbClr val="B08442"/>
-                </a:solidFill>
-                <a:latin typeface="Noto Sans JP"/>
-              </a:rPr>
-              <a:t>0.188</a:t>
-            </a:r>
-          </a:p>
-        </p:txBody>
-      </p:sp>
-      <p:sp>
-        <p:nvSpPr>
-          <p:cNvPr id="49" name="TextBox 48"/>
-          <p:cNvSpPr txBox="1"/>
-          <p:nvPr/>
-        </p:nvSpPr>
-        <p:spPr>
-          <a:xfrm>
-            <a:off x="10325684" y="3808476"/>
-            <a:ext cx="1500250" cy="434340"/>
-          </a:xfrm>
-          <a:prstGeom prst="rect">
-            <a:avLst/>
-          </a:prstGeom>
-          <a:noFill/>
-        </p:spPr>
-        <p:txBody>
-          <a:bodyPr wrap="square" anchor="ctr" lIns="36000" rIns="36000" tIns="18000" bIns="18000">
-            <a:spAutoFit/>
-          </a:bodyPr>
-          <a:lstStyle/>
-          <a:p>
-            <a:pPr algn="l"/>
-            <a:r>
-              <a:rPr sz="1100" b="0" i="0">
-                <a:solidFill>
-                  <a:srgbClr val="5B8C5A"/>
-                </a:solidFill>
-                <a:latin typeface="Noto Sans JP"/>
-              </a:rPr>
-              <a:t>&gt;0.99</a:t>
-            </a:r>
-          </a:p>
-        </p:txBody>
-      </p:sp>
-      <p:sp>
-        <p:nvSpPr>
-          <p:cNvPr id="50" name="Rounded Rectangle 49"/>
-          <p:cNvSpPr/>
-          <p:nvPr/>
-        </p:nvSpPr>
-        <p:spPr>
-          <a:xfrm>
-            <a:off x="365760" y="4517136"/>
+            <a:off x="365760" y="3922776"/>
             <a:ext cx="3728618" cy="1691640"/>
           </a:xfrm>
           <a:prstGeom prst="roundRect">
@@ -17465,13 +16883,13 @@
       </p:sp>
       <p:sp>
         <p:nvSpPr>
-          <p:cNvPr id="51" name="TextBox 50"/>
-          <p:cNvSpPr txBox="1"/>
-          <p:nvPr/>
-        </p:nvSpPr>
-        <p:spPr>
-          <a:xfrm>
-            <a:off x="530352" y="4663440"/>
+          <p:cNvPr id="35" name="TextBox 34"/>
+          <p:cNvSpPr txBox="1"/>
+          <p:nvPr/>
+        </p:nvSpPr>
+        <p:spPr>
+          <a:xfrm>
+            <a:off x="530352" y="4069080"/>
             <a:ext cx="3399434" cy="320040"/>
           </a:xfrm>
           <a:prstGeom prst="rect">
@@ -17493,20 +16911,20 @@
                 </a:solidFill>
                 <a:latin typeface="Noto Sans JP"/>
               </a:rPr>
-              <a:t>降伏応力 τ₀</a:t>
-            </a:r>
-          </a:p>
-        </p:txBody>
-      </p:sp>
-      <p:sp>
-        <p:nvSpPr>
-          <p:cNvPr id="52" name="TextBox 51"/>
-          <p:cNvSpPr txBox="1"/>
-          <p:nvPr/>
-        </p:nvSpPr>
-        <p:spPr>
-          <a:xfrm>
-            <a:off x="530352" y="5029200"/>
+              <a:t>静的降伏応力</a:t>
+            </a:r>
+          </a:p>
+        </p:txBody>
+      </p:sp>
+      <p:sp>
+        <p:nvSpPr>
+          <p:cNvPr id="36" name="TextBox 35"/>
+          <p:cNvSpPr txBox="1"/>
+          <p:nvPr/>
+        </p:nvSpPr>
+        <p:spPr>
+          <a:xfrm>
+            <a:off x="530352" y="4434840"/>
             <a:ext cx="3399434" cy="1051560"/>
           </a:xfrm>
           <a:prstGeom prst="rect">
@@ -17528,20 +16946,20 @@
                 </a:solidFill>
                 <a:latin typeface="Noto Sans JP"/>
               </a:rPr>
-              <a:t>流れ始めるのに必要な最小応力。WEGはAquaGel-Kの約2倍 → 垂直面での流れ落ち抵抗が高い</a:t>
-            </a:r>
-          </a:p>
-        </p:txBody>
-      </p:sp>
-      <p:sp>
-        <p:nvSpPr>
-          <p:cNvPr id="53" name="Rounded Rectangle 52"/>
+              <a:t>振幅掃引のG'/G''クロスオーバー点で測定。HEC+MC/CSPは33.34 Pa、MHEC/CSPは3.31 Pa（新鮮配合）</a:t>
+            </a:r>
+          </a:p>
+        </p:txBody>
+      </p:sp>
+      <p:sp>
+        <p:nvSpPr>
+          <p:cNvPr id="37" name="Rounded Rectangle 36"/>
           <p:cNvSpPr/>
           <p:nvPr/>
         </p:nvSpPr>
         <p:spPr>
           <a:xfrm>
-            <a:off x="4231538" y="4517136"/>
+            <a:off x="4231538" y="3922776"/>
             <a:ext cx="3728618" cy="1691640"/>
           </a:xfrm>
           <a:prstGeom prst="roundRect">
@@ -17583,13 +17001,13 @@
       </p:sp>
       <p:sp>
         <p:nvSpPr>
-          <p:cNvPr id="54" name="TextBox 53"/>
-          <p:cNvSpPr txBox="1"/>
-          <p:nvPr/>
-        </p:nvSpPr>
-        <p:spPr>
-          <a:xfrm>
-            <a:off x="4396130" y="4663440"/>
+          <p:cNvPr id="38" name="TextBox 37"/>
+          <p:cNvSpPr txBox="1"/>
+          <p:nvPr/>
+        </p:nvSpPr>
+        <p:spPr>
+          <a:xfrm>
+            <a:off x="4396130" y="4069080"/>
             <a:ext cx="3399434" cy="320040"/>
           </a:xfrm>
           <a:prstGeom prst="rect">
@@ -17611,20 +17029,20 @@
                 </a:solidFill>
                 <a:latin typeface="Noto Sans JP"/>
               </a:rPr>
-              <a:t>流動指数 n （&lt;&lt; 1）</a:t>
-            </a:r>
-          </a:p>
-        </p:txBody>
-      </p:sp>
-      <p:sp>
-        <p:nvSpPr>
-          <p:cNvPr id="55" name="TextBox 54"/>
-          <p:cNvSpPr txBox="1"/>
-          <p:nvPr/>
-        </p:nvSpPr>
-        <p:spPr>
-          <a:xfrm>
-            <a:off x="4396130" y="5029200"/>
+              <a:t>長期安定性</a:t>
+            </a:r>
+          </a:p>
+        </p:txBody>
+      </p:sp>
+      <p:sp>
+        <p:nvSpPr>
+          <p:cNvPr id="39" name="TextBox 38"/>
+          <p:cNvSpPr txBox="1"/>
+          <p:nvPr/>
+        </p:nvSpPr>
+        <p:spPr>
+          <a:xfrm>
+            <a:off x="4396130" y="4434840"/>
             <a:ext cx="3399434" cy="1051560"/>
           </a:xfrm>
           <a:prstGeom prst="rect">
@@ -17646,20 +17064,20 @@
                 </a:solidFill>
                 <a:latin typeface="Noto Sans JP"/>
               </a:rPr>
-              <a:t>HEC+MC/CSP の n=0.108 は強い剪断希薄化を示す。スプレー時の低粘度と静止時の高粘度を両立</a:t>
-            </a:r>
-          </a:p>
-        </p:txBody>
-      </p:sp>
-      <p:sp>
-        <p:nvSpPr>
-          <p:cNvPr id="56" name="Rounded Rectangle 55"/>
+              <a:t>MHEC/CSPは455日経時後も3.31→4.56 Paとわずかな変化のみ。実用配合の長期安定性を実証</a:t>
+            </a:r>
+          </a:p>
+        </p:txBody>
+      </p:sp>
+      <p:sp>
+        <p:nvSpPr>
+          <p:cNvPr id="40" name="Rounded Rectangle 39"/>
           <p:cNvSpPr/>
           <p:nvPr/>
         </p:nvSpPr>
         <p:spPr>
           <a:xfrm>
-            <a:off x="8097316" y="4517136"/>
+            <a:off x="8097316" y="3922776"/>
             <a:ext cx="3728618" cy="1691640"/>
           </a:xfrm>
           <a:prstGeom prst="roundRect">
@@ -17701,13 +17119,13 @@
       </p:sp>
       <p:sp>
         <p:nvSpPr>
-          <p:cNvPr id="57" name="TextBox 56"/>
-          <p:cNvSpPr txBox="1"/>
-          <p:nvPr/>
-        </p:nvSpPr>
-        <p:spPr>
-          <a:xfrm>
-            <a:off x="8261908" y="4663440"/>
+          <p:cNvPr id="41" name="TextBox 40"/>
+          <p:cNvSpPr txBox="1"/>
+          <p:nvPr/>
+        </p:nvSpPr>
+        <p:spPr>
+          <a:xfrm>
+            <a:off x="8261908" y="4069080"/>
             <a:ext cx="3399434" cy="320040"/>
           </a:xfrm>
           <a:prstGeom prst="rect">
@@ -17736,13 +17154,13 @@
       </p:sp>
       <p:sp>
         <p:nvSpPr>
-          <p:cNvPr id="58" name="TextBox 57"/>
-          <p:cNvSpPr txBox="1"/>
-          <p:nvPr/>
-        </p:nvSpPr>
-        <p:spPr>
-          <a:xfrm>
-            <a:off x="8261908" y="5029200"/>
+          <p:cNvPr id="42" name="TextBox 41"/>
+          <p:cNvSpPr txBox="1"/>
+          <p:nvPr/>
+        </p:nvSpPr>
+        <p:spPr>
+          <a:xfrm>
+            <a:off x="8261908" y="4434840"/>
             <a:ext cx="3399434" cy="1051560"/>
           </a:xfrm>
           <a:prstGeom prst="rect">
@@ -17764,7 +17182,7 @@
                 </a:solidFill>
                 <a:latin typeface="Noto Sans JP"/>
               </a:rPr>
-              <a:t>HEC+MC系はより低い n と高い K → より強い剪断希薄化。MHEC系は単一ポリマーで類似機能を実現</a:t>
+              <a:t>HEC+MC系はより高い降伏応力で垂直面付着に有利。MHEC系は単一ポリマーで製造が簡便</a:t>
             </a:r>
           </a:p>
         </p:txBody>
@@ -18028,7 +17446,7 @@
                 </a:solidFill>
                 <a:latin typeface="Noto Sans JP"/>
               </a:rPr>
-              <a:t>レオロジー④：動的降伏応力・粘弾性（tan δ）</a:t>
+              <a:t>レオロジー④：貯蔵弾性率 G' と粘弾性（tan δ）</a:t>
             </a:r>
           </a:p>
         </p:txBody>
@@ -18142,7 +17560,7 @@
                 </a:solidFill>
                 <a:latin typeface="Noto Sans JP"/>
               </a:rPr>
-              <a:t>動的降伏応力（Amplitude Sweep より）</a:t>
+              <a:t>G' 貯蔵弾性率（1 rad/s）</a:t>
             </a:r>
           </a:p>
         </p:txBody>
@@ -18177,7 +17595,7 @@
                 </a:solidFill>
                 <a:latin typeface="Noto Sans JP"/>
               </a:rPr>
-              <a:t>AquaGel-K</a:t>
+              <a:t>MHEC/CSP 1-5</a:t>
             </a:r>
           </a:p>
         </p:txBody>
@@ -18239,7 +17657,7 @@
         <p:spPr>
           <a:xfrm>
             <a:off x="2286000" y="1344168"/>
-            <a:ext cx="746717" cy="146304"/>
+            <a:ext cx="346690" cy="146304"/>
           </a:xfrm>
           <a:prstGeom prst="roundRect">
             <a:avLst>
@@ -18247,7 +17665,7 @@
             </a:avLst>
           </a:prstGeom>
           <a:solidFill>
-            <a:srgbClr val="AAB4C0"/>
+            <a:srgbClr val="9F7639"/>
           </a:solidFill>
           <a:ln>
             <a:noFill/>
@@ -18306,7 +17724,7 @@
                 </a:solidFill>
                 <a:latin typeface="Noto Sans JP"/>
               </a:rPr>
-              <a:t>~0.4 Pa</a:t>
+              <a:t>25.6 Pa</a:t>
             </a:r>
           </a:p>
         </p:txBody>
@@ -18403,7 +17821,7 @@
         <p:spPr>
           <a:xfrm>
             <a:off x="2286000" y="1801368"/>
-            <a:ext cx="2266820" cy="146304"/>
+            <a:ext cx="666711" cy="146304"/>
           </a:xfrm>
           <a:prstGeom prst="roundRect">
             <a:avLst>
@@ -18470,7 +17888,7 @@
                 </a:solidFill>
                 <a:latin typeface="Noto Sans JP"/>
               </a:rPr>
-              <a:t>~1.2 Pa</a:t>
+              <a:t>46.4 Pa</a:t>
             </a:r>
           </a:p>
         </p:txBody>
@@ -18505,7 +17923,7 @@
                 </a:solidFill>
                 <a:latin typeface="Noto Sans JP"/>
               </a:rPr>
-              <a:t>+SDS 0.1 wt%</a:t>
+              <a:t>AquaGel-K</a:t>
             </a:r>
           </a:p>
         </p:txBody>
@@ -18567,7 +17985,7 @@
         <p:spPr>
           <a:xfrm>
             <a:off x="2286000" y="2258568"/>
-            <a:ext cx="2080141" cy="146304"/>
+            <a:ext cx="2533505" cy="146304"/>
           </a:xfrm>
           <a:prstGeom prst="roundRect">
             <a:avLst>
@@ -18575,7 +17993,7 @@
             </a:avLst>
           </a:prstGeom>
           <a:solidFill>
-            <a:srgbClr val="5B7A99"/>
+            <a:srgbClr val="AAB4C0"/>
           </a:solidFill>
           <a:ln>
             <a:noFill/>
@@ -18634,20 +18052,215 @@
                 </a:solidFill>
                 <a:latin typeface="Noto Sans JP"/>
               </a:rPr>
-              <a:t>~1.1 Pa</a:t>
-            </a:r>
-          </a:p>
-        </p:txBody>
-      </p:sp>
-      <p:sp>
-        <p:nvSpPr>
-          <p:cNvPr id="23" name="TextBox 22"/>
-          <p:cNvSpPr txBox="1"/>
-          <p:nvPr/>
-        </p:nvSpPr>
-        <p:spPr>
-          <a:xfrm>
-            <a:off x="365760" y="2642616"/>
+              <a:t>456.8 Pa</a:t>
+            </a:r>
+          </a:p>
+        </p:txBody>
+      </p:sp>
+      <p:sp>
+        <p:nvSpPr>
+          <p:cNvPr id="23" name="Rounded Rectangle 22"/>
+          <p:cNvSpPr/>
+          <p:nvPr/>
+        </p:nvSpPr>
+        <p:spPr>
+          <a:xfrm>
+            <a:off x="365760" y="2779776"/>
+            <a:ext cx="5592927" cy="731520"/>
+          </a:xfrm>
+          <a:prstGeom prst="roundRect">
+            <a:avLst>
+              <a:gd name="adj" fmla="val 4000"/>
+            </a:avLst>
+          </a:prstGeom>
+          <a:solidFill>
+            <a:srgbClr val="F8FAFC"/>
+          </a:solidFill>
+          <a:ln>
+            <a:noFill/>
+          </a:ln>
+          <a:effectLst/>
+        </p:spPr>
+        <p:style>
+          <a:lnRef idx="1">
+            <a:schemeClr val="accent1"/>
+          </a:lnRef>
+          <a:fillRef idx="3">
+            <a:schemeClr val="accent1"/>
+          </a:fillRef>
+          <a:effectRef idx="2">
+            <a:schemeClr val="accent1"/>
+          </a:effectRef>
+          <a:fontRef idx="minor">
+            <a:schemeClr val="lt1"/>
+          </a:fontRef>
+        </p:style>
+        <p:txBody>
+          <a:bodyPr rtlCol="0" anchor="ctr"/>
+          <a:lstStyle/>
+          <a:p>
+            <a:pPr algn="ctr"/>
+          </a:p>
+        </p:txBody>
+      </p:sp>
+      <p:sp>
+        <p:nvSpPr>
+          <p:cNvPr id="24" name="Rectangle 23"/>
+          <p:cNvSpPr/>
+          <p:nvPr/>
+        </p:nvSpPr>
+        <p:spPr>
+          <a:xfrm>
+            <a:off x="365760" y="2779776"/>
+            <a:ext cx="54864" cy="731520"/>
+          </a:xfrm>
+          <a:prstGeom prst="rect">
+            <a:avLst/>
+          </a:prstGeom>
+          <a:solidFill>
+            <a:srgbClr val="3B5174"/>
+          </a:solidFill>
+          <a:ln>
+            <a:noFill/>
+          </a:ln>
+          <a:effectLst/>
+        </p:spPr>
+        <p:style>
+          <a:lnRef idx="1">
+            <a:schemeClr val="accent1"/>
+          </a:lnRef>
+          <a:fillRef idx="3">
+            <a:schemeClr val="accent1"/>
+          </a:fillRef>
+          <a:effectRef idx="2">
+            <a:schemeClr val="accent1"/>
+          </a:effectRef>
+          <a:fontRef idx="minor">
+            <a:schemeClr val="lt1"/>
+          </a:fontRef>
+        </p:style>
+        <p:txBody>
+          <a:bodyPr rtlCol="0" anchor="ctr"/>
+          <a:lstStyle/>
+          <a:p>
+            <a:pPr algn="ctr"/>
+          </a:p>
+        </p:txBody>
+      </p:sp>
+      <p:sp>
+        <p:nvSpPr>
+          <p:cNvPr id="25" name="TextBox 24"/>
+          <p:cNvSpPr txBox="1"/>
+          <p:nvPr/>
+        </p:nvSpPr>
+        <p:spPr>
+          <a:xfrm>
+            <a:off x="548640" y="2779776"/>
+            <a:ext cx="365760" cy="731520"/>
+          </a:xfrm>
+          <a:prstGeom prst="rect">
+            <a:avLst/>
+          </a:prstGeom>
+          <a:noFill/>
+        </p:spPr>
+        <p:txBody>
+          <a:bodyPr wrap="square" anchor="ctr" lIns="36000" rIns="36000" tIns="18000" bIns="18000">
+            <a:spAutoFit/>
+          </a:bodyPr>
+          <a:lstStyle/>
+          <a:p>
+            <a:pPr algn="l"/>
+            <a:r>
+              <a:rPr sz="1400" b="0" i="0">
+                <a:solidFill>
+                  <a:srgbClr val="3B5174"/>
+                </a:solidFill>
+                <a:latin typeface="Noto Sans JP"/>
+              </a:rPr>
+              <a:t>ⓘ</a:t>
+            </a:r>
+          </a:p>
+        </p:txBody>
+      </p:sp>
+      <p:sp>
+        <p:nvSpPr>
+          <p:cNvPr id="26" name="TextBox 25"/>
+          <p:cNvSpPr txBox="1"/>
+          <p:nvPr/>
+        </p:nvSpPr>
+        <p:spPr>
+          <a:xfrm>
+            <a:off x="960120" y="2779776"/>
+            <a:ext cx="4907127" cy="731520"/>
+          </a:xfrm>
+          <a:prstGeom prst="rect">
+            <a:avLst/>
+          </a:prstGeom>
+          <a:noFill/>
+        </p:spPr>
+        <p:txBody>
+          <a:bodyPr wrap="square" anchor="ctr" lIns="36000" rIns="36000" tIns="18000" bIns="18000">
+            <a:spAutoFit/>
+          </a:bodyPr>
+          <a:lstStyle/>
+          <a:p>
+            <a:pPr algn="l"/>
+            <a:r>
+              <a:rPr sz="1300" b="1" i="0">
+                <a:solidFill>
+                  <a:srgbClr val="1E293B"/>
+                </a:solidFill>
+                <a:latin typeface="Noto Sans JP"/>
+              </a:rPr>
+              <a:t>全系でG'&gt;G''（ゲル挙動）。AquaGel-KのG'が最高だがtan δ も大きく流動的</a:t>
+            </a:r>
+          </a:p>
+        </p:txBody>
+      </p:sp>
+      <p:sp>
+        <p:nvSpPr>
+          <p:cNvPr id="27" name="TextBox 26"/>
+          <p:cNvSpPr txBox="1"/>
+          <p:nvPr/>
+        </p:nvSpPr>
+        <p:spPr>
+          <a:xfrm>
+            <a:off x="6233007" y="859536"/>
+            <a:ext cx="5592927" cy="274320"/>
+          </a:xfrm>
+          <a:prstGeom prst="rect">
+            <a:avLst/>
+          </a:prstGeom>
+          <a:noFill/>
+        </p:spPr>
+        <p:txBody>
+          <a:bodyPr wrap="square" anchor="t" lIns="36000" rIns="36000" tIns="18000" bIns="18000">
+            <a:spAutoFit/>
+          </a:bodyPr>
+          <a:lstStyle/>
+          <a:p>
+            <a:pPr algn="l"/>
+            <a:r>
+              <a:rPr sz="1200" b="1" i="0">
+                <a:solidFill>
+                  <a:srgbClr val="64748B"/>
+                </a:solidFill>
+                <a:latin typeface="Noto Sans JP"/>
+              </a:rPr>
+              <a:t>損失正接 tan δ = G'' / G'（弾性支配 = &lt;1）</a:t>
+            </a:r>
+          </a:p>
+        </p:txBody>
+      </p:sp>
+      <p:sp>
+        <p:nvSpPr>
+          <p:cNvPr id="28" name="TextBox 27"/>
+          <p:cNvSpPr txBox="1"/>
+          <p:nvPr/>
+        </p:nvSpPr>
+        <p:spPr>
+          <a:xfrm>
+            <a:off x="6233007" y="1271016"/>
             <a:ext cx="1828800" cy="274320"/>
           </a:xfrm>
           <a:prstGeom prst="rect">
@@ -18669,20 +18282,20 @@
                 </a:solidFill>
                 <a:latin typeface="Noto Sans JP"/>
               </a:rPr>
-              <a:t>MHEC/CSP 1-5</a:t>
-            </a:r>
-          </a:p>
-        </p:txBody>
-      </p:sp>
-      <p:sp>
-        <p:nvSpPr>
-          <p:cNvPr id="24" name="Rounded Rectangle 23"/>
+              <a:t>AquaGel-K</a:t>
+            </a:r>
+          </a:p>
+        </p:txBody>
+      </p:sp>
+      <p:sp>
+        <p:nvSpPr>
+          <p:cNvPr id="29" name="Rounded Rectangle 28"/>
           <p:cNvSpPr/>
           <p:nvPr/>
         </p:nvSpPr>
         <p:spPr>
           <a:xfrm>
-            <a:off x="2286000" y="2715768"/>
+            <a:off x="8153247" y="1344168"/>
             <a:ext cx="2666847" cy="146304"/>
           </a:xfrm>
           <a:prstGeom prst="roundRect">
@@ -18724,14 +18337,14 @@
       </p:sp>
       <p:sp>
         <p:nvSpPr>
-          <p:cNvPr id="25" name="Rounded Rectangle 24"/>
+          <p:cNvPr id="30" name="Rounded Rectangle 29"/>
           <p:cNvSpPr/>
           <p:nvPr/>
         </p:nvSpPr>
         <p:spPr>
           <a:xfrm>
-            <a:off x="2286000" y="2715768"/>
-            <a:ext cx="1733450" cy="146304"/>
+            <a:off x="8153247" y="1344168"/>
+            <a:ext cx="1120075" cy="146304"/>
           </a:xfrm>
           <a:prstGeom prst="roundRect">
             <a:avLst>
@@ -18739,7 +18352,7 @@
             </a:avLst>
           </a:prstGeom>
           <a:solidFill>
-            <a:srgbClr val="9F7639"/>
+            <a:srgbClr val="AAB4C0"/>
           </a:solidFill>
           <a:ln>
             <a:noFill/>
@@ -18770,13 +18383,13 @@
       </p:sp>
       <p:sp>
         <p:nvSpPr>
-          <p:cNvPr id="26" name="TextBox 25"/>
-          <p:cNvSpPr txBox="1"/>
-          <p:nvPr/>
-        </p:nvSpPr>
-        <p:spPr>
-          <a:xfrm>
-            <a:off x="5044287" y="2642616"/>
+          <p:cNvPr id="31" name="TextBox 30"/>
+          <p:cNvSpPr txBox="1"/>
+          <p:nvPr/>
+        </p:nvSpPr>
+        <p:spPr>
+          <a:xfrm>
+            <a:off x="10911535" y="1271016"/>
             <a:ext cx="914400" cy="274320"/>
           </a:xfrm>
           <a:prstGeom prst="rect">
@@ -18798,111 +18411,21 @@
                 </a:solidFill>
                 <a:latin typeface="Noto Sans JP"/>
               </a:rPr>
-              <a:t>~0.9 Pa</a:t>
-            </a:r>
-          </a:p>
-        </p:txBody>
-      </p:sp>
-      <p:sp>
-        <p:nvSpPr>
-          <p:cNvPr id="27" name="Rounded Rectangle 26"/>
-          <p:cNvSpPr/>
-          <p:nvPr/>
-        </p:nvSpPr>
-        <p:spPr>
-          <a:xfrm>
-            <a:off x="365760" y="3236976"/>
-            <a:ext cx="5592927" cy="731520"/>
-          </a:xfrm>
-          <a:prstGeom prst="roundRect">
-            <a:avLst>
-              <a:gd name="adj" fmla="val 4000"/>
-            </a:avLst>
-          </a:prstGeom>
-          <a:solidFill>
-            <a:srgbClr val="F8FAFC"/>
-          </a:solidFill>
-          <a:ln>
-            <a:noFill/>
-          </a:ln>
-          <a:effectLst/>
-        </p:spPr>
-        <p:style>
-          <a:lnRef idx="1">
-            <a:schemeClr val="accent1"/>
-          </a:lnRef>
-          <a:fillRef idx="3">
-            <a:schemeClr val="accent1"/>
-          </a:fillRef>
-          <a:effectRef idx="2">
-            <a:schemeClr val="accent1"/>
-          </a:effectRef>
-          <a:fontRef idx="minor">
-            <a:schemeClr val="lt1"/>
-          </a:fontRef>
-        </p:style>
-        <p:txBody>
-          <a:bodyPr rtlCol="0" anchor="ctr"/>
-          <a:lstStyle/>
-          <a:p>
-            <a:pPr algn="ctr"/>
-          </a:p>
-        </p:txBody>
-      </p:sp>
-      <p:sp>
-        <p:nvSpPr>
-          <p:cNvPr id="28" name="Rectangle 27"/>
-          <p:cNvSpPr/>
-          <p:nvPr/>
-        </p:nvSpPr>
-        <p:spPr>
-          <a:xfrm>
-            <a:off x="365760" y="3236976"/>
-            <a:ext cx="54864" cy="731520"/>
-          </a:xfrm>
-          <a:prstGeom prst="rect">
-            <a:avLst/>
-          </a:prstGeom>
-          <a:solidFill>
-            <a:srgbClr val="3B5174"/>
-          </a:solidFill>
-          <a:ln>
-            <a:noFill/>
-          </a:ln>
-          <a:effectLst/>
-        </p:spPr>
-        <p:style>
-          <a:lnRef idx="1">
-            <a:schemeClr val="accent1"/>
-          </a:lnRef>
-          <a:fillRef idx="3">
-            <a:schemeClr val="accent1"/>
-          </a:fillRef>
-          <a:effectRef idx="2">
-            <a:schemeClr val="accent1"/>
-          </a:effectRef>
-          <a:fontRef idx="minor">
-            <a:schemeClr val="lt1"/>
-          </a:fontRef>
-        </p:style>
-        <p:txBody>
-          <a:bodyPr rtlCol="0" anchor="ctr"/>
-          <a:lstStyle/>
-          <a:p>
-            <a:pPr algn="ctr"/>
-          </a:p>
-        </p:txBody>
-      </p:sp>
-      <p:sp>
-        <p:nvSpPr>
-          <p:cNvPr id="29" name="TextBox 28"/>
-          <p:cNvSpPr txBox="1"/>
-          <p:nvPr/>
-        </p:nvSpPr>
-        <p:spPr>
-          <a:xfrm>
-            <a:off x="548640" y="3236976"/>
-            <a:ext cx="365760" cy="731520"/>
+              <a:t>0.168</a:t>
+            </a:r>
+          </a:p>
+        </p:txBody>
+      </p:sp>
+      <p:sp>
+        <p:nvSpPr>
+          <p:cNvPr id="32" name="TextBox 31"/>
+          <p:cNvSpPr txBox="1"/>
+          <p:nvPr/>
+        </p:nvSpPr>
+        <p:spPr>
+          <a:xfrm>
+            <a:off x="6233007" y="1728216"/>
+            <a:ext cx="1828800" cy="274320"/>
           </a:xfrm>
           <a:prstGeom prst="rect">
             <a:avLst/>
@@ -18917,118 +18440,13 @@
           <a:p>
             <a:pPr algn="l"/>
             <a:r>
-              <a:rPr sz="1400" b="0" i="0">
-                <a:solidFill>
-                  <a:srgbClr val="3B5174"/>
-                </a:solidFill>
-                <a:latin typeface="Noto Sans JP"/>
-              </a:rPr>
-              <a:t>ⓘ</a:t>
-            </a:r>
-          </a:p>
-        </p:txBody>
-      </p:sp>
-      <p:sp>
-        <p:nvSpPr>
-          <p:cNvPr id="30" name="TextBox 29"/>
-          <p:cNvSpPr txBox="1"/>
-          <p:nvPr/>
-        </p:nvSpPr>
-        <p:spPr>
-          <a:xfrm>
-            <a:off x="960120" y="3236976"/>
-            <a:ext cx="4907127" cy="731520"/>
-          </a:xfrm>
-          <a:prstGeom prst="rect">
-            <a:avLst/>
-          </a:prstGeom>
-          <a:noFill/>
-        </p:spPr>
-        <p:txBody>
-          <a:bodyPr wrap="square" anchor="ctr" lIns="36000" rIns="36000" tIns="18000" bIns="18000">
-            <a:spAutoFit/>
-          </a:bodyPr>
-          <a:lstStyle/>
-          <a:p>
-            <a:pPr algn="l"/>
-            <a:r>
-              <a:rPr sz="1300" b="1" i="0">
-                <a:solidFill>
-                  <a:srgbClr val="1E293B"/>
-                </a:solidFill>
-                <a:latin typeface="Noto Sans JP"/>
-              </a:rPr>
-              <a:t>G' = G'' クロスオーバー点での応力 = 動的降伏応力。WEGはAquaGel-Kの約3倍</a:t>
-            </a:r>
-          </a:p>
-        </p:txBody>
-      </p:sp>
-      <p:sp>
-        <p:nvSpPr>
-          <p:cNvPr id="31" name="TextBox 30"/>
-          <p:cNvSpPr txBox="1"/>
-          <p:nvPr/>
-        </p:nvSpPr>
-        <p:spPr>
-          <a:xfrm>
-            <a:off x="6233007" y="859536"/>
-            <a:ext cx="5592927" cy="274320"/>
-          </a:xfrm>
-          <a:prstGeom prst="rect">
-            <a:avLst/>
-          </a:prstGeom>
-          <a:noFill/>
-        </p:spPr>
-        <p:txBody>
-          <a:bodyPr wrap="square" anchor="t" lIns="36000" rIns="36000" tIns="18000" bIns="18000">
-            <a:spAutoFit/>
-          </a:bodyPr>
-          <a:lstStyle/>
-          <a:p>
-            <a:pPr algn="l"/>
-            <a:r>
-              <a:rPr sz="1200" b="1" i="0">
-                <a:solidFill>
-                  <a:srgbClr val="64748B"/>
-                </a:solidFill>
-                <a:latin typeface="Noto Sans JP"/>
-              </a:rPr>
-              <a:t>損失正接 tan δ = G'' / G'（弾性支配 = &lt;1）</a:t>
-            </a:r>
-          </a:p>
-        </p:txBody>
-      </p:sp>
-      <p:sp>
-        <p:nvSpPr>
-          <p:cNvPr id="32" name="TextBox 31"/>
-          <p:cNvSpPr txBox="1"/>
-          <p:nvPr/>
-        </p:nvSpPr>
-        <p:spPr>
-          <a:xfrm>
-            <a:off x="6233007" y="1271016"/>
-            <a:ext cx="1828800" cy="274320"/>
-          </a:xfrm>
-          <a:prstGeom prst="rect">
-            <a:avLst/>
-          </a:prstGeom>
-          <a:noFill/>
-        </p:spPr>
-        <p:txBody>
-          <a:bodyPr wrap="square" anchor="ctr" lIns="36000" rIns="36000" tIns="18000" bIns="18000">
-            <a:spAutoFit/>
-          </a:bodyPr>
-          <a:lstStyle/>
-          <a:p>
-            <a:pPr algn="l"/>
-            <a:r>
               <a:rPr sz="1200" b="0" i="0">
                 <a:solidFill>
                   <a:srgbClr val="334155"/>
                 </a:solidFill>
                 <a:latin typeface="Noto Sans JP"/>
               </a:rPr>
-              <a:t>AquaGel-K</a:t>
+              <a:t>HEC+MC/CSP 1-5</a:t>
             </a:r>
           </a:p>
         </p:txBody>
@@ -19041,7 +18459,7 @@
         </p:nvSpPr>
         <p:spPr>
           <a:xfrm>
-            <a:off x="8153247" y="1344168"/>
+            <a:off x="8153247" y="1801368"/>
             <a:ext cx="2666847" cy="146304"/>
           </a:xfrm>
           <a:prstGeom prst="roundRect">
@@ -19089,8 +18507,8 @@
         </p:nvSpPr>
         <p:spPr>
           <a:xfrm>
-            <a:off x="8153247" y="1344168"/>
-            <a:ext cx="1333423" cy="146304"/>
+            <a:off x="8153247" y="1801368"/>
+            <a:ext cx="1466766" cy="146304"/>
           </a:xfrm>
           <a:prstGeom prst="roundRect">
             <a:avLst>
@@ -19098,7 +18516,7 @@
             </a:avLst>
           </a:prstGeom>
           <a:solidFill>
-            <a:srgbClr val="AAB4C0"/>
+            <a:srgbClr val="4A7C8C"/>
           </a:solidFill>
           <a:ln>
             <a:noFill/>
@@ -19135,7 +18553,7 @@
         </p:nvSpPr>
         <p:spPr>
           <a:xfrm>
-            <a:off x="10911535" y="1271016"/>
+            <a:off x="10911535" y="1728216"/>
             <a:ext cx="914400" cy="274320"/>
           </a:xfrm>
           <a:prstGeom prst="rect">
@@ -19157,7 +18575,7 @@
                 </a:solidFill>
                 <a:latin typeface="Noto Sans JP"/>
               </a:rPr>
-              <a:t>~0.25</a:t>
+              <a:t>0.219</a:t>
             </a:r>
           </a:p>
         </p:txBody>
@@ -19170,7 +18588,7 @@
         </p:nvSpPr>
         <p:spPr>
           <a:xfrm>
-            <a:off x="6233007" y="1728216"/>
+            <a:off x="6233007" y="2185416"/>
             <a:ext cx="1828800" cy="274320"/>
           </a:xfrm>
           <a:prstGeom prst="rect">
@@ -19192,7 +18610,7 @@
                 </a:solidFill>
                 <a:latin typeface="Noto Sans JP"/>
               </a:rPr>
-              <a:t>HEC+MC/CSP 1-5</a:t>
+              <a:t>MHEC/CSP 1-5</a:t>
             </a:r>
           </a:p>
         </p:txBody>
@@ -19205,7 +18623,7 @@
         </p:nvSpPr>
         <p:spPr>
           <a:xfrm>
-            <a:off x="8153247" y="1801368"/>
+            <a:off x="8153247" y="2258568"/>
             <a:ext cx="2666847" cy="146304"/>
           </a:xfrm>
           <a:prstGeom prst="roundRect">
@@ -19253,336 +18671,8 @@
         </p:nvSpPr>
         <p:spPr>
           <a:xfrm>
-            <a:off x="8153247" y="1801368"/>
-            <a:ext cx="533369" cy="146304"/>
-          </a:xfrm>
-          <a:prstGeom prst="roundRect">
-            <a:avLst>
-              <a:gd name="adj" fmla="val 50000"/>
-            </a:avLst>
-          </a:prstGeom>
-          <a:solidFill>
-            <a:srgbClr val="4A7C8C"/>
-          </a:solidFill>
-          <a:ln>
-            <a:noFill/>
-          </a:ln>
-          <a:effectLst/>
-        </p:spPr>
-        <p:style>
-          <a:lnRef idx="1">
-            <a:schemeClr val="accent1"/>
-          </a:lnRef>
-          <a:fillRef idx="3">
-            <a:schemeClr val="accent1"/>
-          </a:fillRef>
-          <a:effectRef idx="2">
-            <a:schemeClr val="accent1"/>
-          </a:effectRef>
-          <a:fontRef idx="minor">
-            <a:schemeClr val="lt1"/>
-          </a:fontRef>
-        </p:style>
-        <p:txBody>
-          <a:bodyPr rtlCol="0" anchor="ctr"/>
-          <a:lstStyle/>
-          <a:p>
-            <a:pPr algn="ctr"/>
-          </a:p>
-        </p:txBody>
-      </p:sp>
-      <p:sp>
-        <p:nvSpPr>
-          <p:cNvPr id="39" name="TextBox 38"/>
-          <p:cNvSpPr txBox="1"/>
-          <p:nvPr/>
-        </p:nvSpPr>
-        <p:spPr>
-          <a:xfrm>
-            <a:off x="10911535" y="1728216"/>
-            <a:ext cx="914400" cy="274320"/>
-          </a:xfrm>
-          <a:prstGeom prst="rect">
-            <a:avLst/>
-          </a:prstGeom>
-          <a:noFill/>
-        </p:spPr>
-        <p:txBody>
-          <a:bodyPr wrap="square" anchor="ctr" lIns="36000" rIns="36000" tIns="18000" bIns="18000">
-            <a:spAutoFit/>
-          </a:bodyPr>
-          <a:lstStyle/>
-          <a:p>
-            <a:pPr algn="l"/>
-            <a:r>
-              <a:rPr sz="1100" b="1" i="0">
-                <a:solidFill>
-                  <a:srgbClr val="475569"/>
-                </a:solidFill>
-                <a:latin typeface="Noto Sans JP"/>
-              </a:rPr>
-              <a:t>~0.10</a:t>
-            </a:r>
-          </a:p>
-        </p:txBody>
-      </p:sp>
-      <p:sp>
-        <p:nvSpPr>
-          <p:cNvPr id="40" name="TextBox 39"/>
-          <p:cNvSpPr txBox="1"/>
-          <p:nvPr/>
-        </p:nvSpPr>
-        <p:spPr>
-          <a:xfrm>
-            <a:off x="6233007" y="2185416"/>
-            <a:ext cx="1828800" cy="274320"/>
-          </a:xfrm>
-          <a:prstGeom prst="rect">
-            <a:avLst/>
-          </a:prstGeom>
-          <a:noFill/>
-        </p:spPr>
-        <p:txBody>
-          <a:bodyPr wrap="square" anchor="ctr" lIns="36000" rIns="36000" tIns="18000" bIns="18000">
-            <a:spAutoFit/>
-          </a:bodyPr>
-          <a:lstStyle/>
-          <a:p>
-            <a:pPr algn="l"/>
-            <a:r>
-              <a:rPr sz="1200" b="0" i="0">
-                <a:solidFill>
-                  <a:srgbClr val="334155"/>
-                </a:solidFill>
-                <a:latin typeface="Noto Sans JP"/>
-              </a:rPr>
-              <a:t>+SDS 0.1 wt%</a:t>
-            </a:r>
-          </a:p>
-        </p:txBody>
-      </p:sp>
-      <p:sp>
-        <p:nvSpPr>
-          <p:cNvPr id="41" name="Rounded Rectangle 40"/>
-          <p:cNvSpPr/>
-          <p:nvPr/>
-        </p:nvSpPr>
-        <p:spPr>
-          <a:xfrm>
             <a:off x="8153247" y="2258568"/>
             <a:ext cx="2666847" cy="146304"/>
-          </a:xfrm>
-          <a:prstGeom prst="roundRect">
-            <a:avLst>
-              <a:gd name="adj" fmla="val 50000"/>
-            </a:avLst>
-          </a:prstGeom>
-          <a:solidFill>
-            <a:srgbClr val="F1F5F9"/>
-          </a:solidFill>
-          <a:ln w="3810">
-            <a:solidFill>
-              <a:srgbClr val="E2E8F0"/>
-            </a:solidFill>
-          </a:ln>
-          <a:effectLst/>
-        </p:spPr>
-        <p:style>
-          <a:lnRef idx="1">
-            <a:schemeClr val="accent1"/>
-          </a:lnRef>
-          <a:fillRef idx="3">
-            <a:schemeClr val="accent1"/>
-          </a:fillRef>
-          <a:effectRef idx="2">
-            <a:schemeClr val="accent1"/>
-          </a:effectRef>
-          <a:fontRef idx="minor">
-            <a:schemeClr val="lt1"/>
-          </a:fontRef>
-        </p:style>
-        <p:txBody>
-          <a:bodyPr rtlCol="0" anchor="ctr"/>
-          <a:lstStyle/>
-          <a:p>
-            <a:pPr algn="ctr"/>
-          </a:p>
-        </p:txBody>
-      </p:sp>
-      <p:sp>
-        <p:nvSpPr>
-          <p:cNvPr id="42" name="Rounded Rectangle 41"/>
-          <p:cNvSpPr/>
-          <p:nvPr/>
-        </p:nvSpPr>
-        <p:spPr>
-          <a:xfrm>
-            <a:off x="8153247" y="2258568"/>
-            <a:ext cx="640043" cy="146304"/>
-          </a:xfrm>
-          <a:prstGeom prst="roundRect">
-            <a:avLst>
-              <a:gd name="adj" fmla="val 50000"/>
-            </a:avLst>
-          </a:prstGeom>
-          <a:solidFill>
-            <a:srgbClr val="5B7A99"/>
-          </a:solidFill>
-          <a:ln>
-            <a:noFill/>
-          </a:ln>
-          <a:effectLst/>
-        </p:spPr>
-        <p:style>
-          <a:lnRef idx="1">
-            <a:schemeClr val="accent1"/>
-          </a:lnRef>
-          <a:fillRef idx="3">
-            <a:schemeClr val="accent1"/>
-          </a:fillRef>
-          <a:effectRef idx="2">
-            <a:schemeClr val="accent1"/>
-          </a:effectRef>
-          <a:fontRef idx="minor">
-            <a:schemeClr val="lt1"/>
-          </a:fontRef>
-        </p:style>
-        <p:txBody>
-          <a:bodyPr rtlCol="0" anchor="ctr"/>
-          <a:lstStyle/>
-          <a:p>
-            <a:pPr algn="ctr"/>
-          </a:p>
-        </p:txBody>
-      </p:sp>
-      <p:sp>
-        <p:nvSpPr>
-          <p:cNvPr id="43" name="TextBox 42"/>
-          <p:cNvSpPr txBox="1"/>
-          <p:nvPr/>
-        </p:nvSpPr>
-        <p:spPr>
-          <a:xfrm>
-            <a:off x="10911535" y="2185416"/>
-            <a:ext cx="914400" cy="274320"/>
-          </a:xfrm>
-          <a:prstGeom prst="rect">
-            <a:avLst/>
-          </a:prstGeom>
-          <a:noFill/>
-        </p:spPr>
-        <p:txBody>
-          <a:bodyPr wrap="square" anchor="ctr" lIns="36000" rIns="36000" tIns="18000" bIns="18000">
-            <a:spAutoFit/>
-          </a:bodyPr>
-          <a:lstStyle/>
-          <a:p>
-            <a:pPr algn="l"/>
-            <a:r>
-              <a:rPr sz="1100" b="1" i="0">
-                <a:solidFill>
-                  <a:srgbClr val="475569"/>
-                </a:solidFill>
-                <a:latin typeface="Noto Sans JP"/>
-              </a:rPr>
-              <a:t>~0.12</a:t>
-            </a:r>
-          </a:p>
-        </p:txBody>
-      </p:sp>
-      <p:sp>
-        <p:nvSpPr>
-          <p:cNvPr id="44" name="TextBox 43"/>
-          <p:cNvSpPr txBox="1"/>
-          <p:nvPr/>
-        </p:nvSpPr>
-        <p:spPr>
-          <a:xfrm>
-            <a:off x="6233007" y="2642616"/>
-            <a:ext cx="1828800" cy="274320"/>
-          </a:xfrm>
-          <a:prstGeom prst="rect">
-            <a:avLst/>
-          </a:prstGeom>
-          <a:noFill/>
-        </p:spPr>
-        <p:txBody>
-          <a:bodyPr wrap="square" anchor="ctr" lIns="36000" rIns="36000" tIns="18000" bIns="18000">
-            <a:spAutoFit/>
-          </a:bodyPr>
-          <a:lstStyle/>
-          <a:p>
-            <a:pPr algn="l"/>
-            <a:r>
-              <a:rPr sz="1200" b="0" i="0">
-                <a:solidFill>
-                  <a:srgbClr val="334155"/>
-                </a:solidFill>
-                <a:latin typeface="Noto Sans JP"/>
-              </a:rPr>
-              <a:t>MHEC/CSP 1-5</a:t>
-            </a:r>
-          </a:p>
-        </p:txBody>
-      </p:sp>
-      <p:sp>
-        <p:nvSpPr>
-          <p:cNvPr id="45" name="Rounded Rectangle 44"/>
-          <p:cNvSpPr/>
-          <p:nvPr/>
-        </p:nvSpPr>
-        <p:spPr>
-          <a:xfrm>
-            <a:off x="8153247" y="2715768"/>
-            <a:ext cx="2666847" cy="146304"/>
-          </a:xfrm>
-          <a:prstGeom prst="roundRect">
-            <a:avLst>
-              <a:gd name="adj" fmla="val 50000"/>
-            </a:avLst>
-          </a:prstGeom>
-          <a:solidFill>
-            <a:srgbClr val="F1F5F9"/>
-          </a:solidFill>
-          <a:ln w="3810">
-            <a:solidFill>
-              <a:srgbClr val="E2E8F0"/>
-            </a:solidFill>
-          </a:ln>
-          <a:effectLst/>
-        </p:spPr>
-        <p:style>
-          <a:lnRef idx="1">
-            <a:schemeClr val="accent1"/>
-          </a:lnRef>
-          <a:fillRef idx="3">
-            <a:schemeClr val="accent1"/>
-          </a:fillRef>
-          <a:effectRef idx="2">
-            <a:schemeClr val="accent1"/>
-          </a:effectRef>
-          <a:fontRef idx="minor">
-            <a:schemeClr val="lt1"/>
-          </a:fontRef>
-        </p:style>
-        <p:txBody>
-          <a:bodyPr rtlCol="0" anchor="ctr"/>
-          <a:lstStyle/>
-          <a:p>
-            <a:pPr algn="ctr"/>
-          </a:p>
-        </p:txBody>
-      </p:sp>
-      <p:sp>
-        <p:nvSpPr>
-          <p:cNvPr id="46" name="Rounded Rectangle 45"/>
-          <p:cNvSpPr/>
-          <p:nvPr/>
-        </p:nvSpPr>
-        <p:spPr>
-          <a:xfrm>
-            <a:off x="8153247" y="2715768"/>
-            <a:ext cx="800054" cy="146304"/>
           </a:xfrm>
           <a:prstGeom prst="roundRect">
             <a:avLst>
@@ -19621,13 +18711,13 @@
       </p:sp>
       <p:sp>
         <p:nvSpPr>
-          <p:cNvPr id="47" name="TextBox 46"/>
-          <p:cNvSpPr txBox="1"/>
-          <p:nvPr/>
-        </p:nvSpPr>
-        <p:spPr>
-          <a:xfrm>
-            <a:off x="10911535" y="2642616"/>
+          <p:cNvPr id="39" name="TextBox 38"/>
+          <p:cNvSpPr txBox="1"/>
+          <p:nvPr/>
+        </p:nvSpPr>
+        <p:spPr>
+          <a:xfrm>
+            <a:off x="10911535" y="2185416"/>
             <a:ext cx="914400" cy="274320"/>
           </a:xfrm>
           <a:prstGeom prst="rect">
@@ -19649,20 +18739,20 @@
                 </a:solidFill>
                 <a:latin typeface="Noto Sans JP"/>
               </a:rPr>
-              <a:t>~0.15</a:t>
-            </a:r>
-          </a:p>
-        </p:txBody>
-      </p:sp>
-      <p:sp>
-        <p:nvSpPr>
-          <p:cNvPr id="48" name="Rounded Rectangle 47"/>
+              <a:t>0.400</a:t>
+            </a:r>
+          </a:p>
+        </p:txBody>
+      </p:sp>
+      <p:sp>
+        <p:nvSpPr>
+          <p:cNvPr id="40" name="Rounded Rectangle 39"/>
           <p:cNvSpPr/>
           <p:nvPr/>
         </p:nvSpPr>
         <p:spPr>
           <a:xfrm>
-            <a:off x="6233007" y="3236976"/>
+            <a:off x="6233007" y="2779776"/>
             <a:ext cx="5592927" cy="731520"/>
           </a:xfrm>
           <a:prstGeom prst="roundRect">
@@ -19702,13 +18792,13 @@
       </p:sp>
       <p:sp>
         <p:nvSpPr>
-          <p:cNvPr id="49" name="Rectangle 48"/>
+          <p:cNvPr id="41" name="Rectangle 40"/>
           <p:cNvSpPr/>
           <p:nvPr/>
         </p:nvSpPr>
         <p:spPr>
           <a:xfrm>
-            <a:off x="6233007" y="3236976"/>
+            <a:off x="6233007" y="2779776"/>
             <a:ext cx="54864" cy="731520"/>
           </a:xfrm>
           <a:prstGeom prst="rect">
@@ -19746,13 +18836,13 @@
       </p:sp>
       <p:sp>
         <p:nvSpPr>
-          <p:cNvPr id="50" name="TextBox 49"/>
-          <p:cNvSpPr txBox="1"/>
-          <p:nvPr/>
-        </p:nvSpPr>
-        <p:spPr>
-          <a:xfrm>
-            <a:off x="6415887" y="3236976"/>
+          <p:cNvPr id="42" name="TextBox 41"/>
+          <p:cNvSpPr txBox="1"/>
+          <p:nvPr/>
+        </p:nvSpPr>
+        <p:spPr>
+          <a:xfrm>
+            <a:off x="6415887" y="2779776"/>
             <a:ext cx="365760" cy="731520"/>
           </a:xfrm>
           <a:prstGeom prst="rect">
@@ -19781,13 +18871,13 @@
       </p:sp>
       <p:sp>
         <p:nvSpPr>
-          <p:cNvPr id="51" name="TextBox 50"/>
-          <p:cNvSpPr txBox="1"/>
-          <p:nvPr/>
-        </p:nvSpPr>
-        <p:spPr>
-          <a:xfrm>
-            <a:off x="6827367" y="3236976"/>
+          <p:cNvPr id="43" name="TextBox 42"/>
+          <p:cNvSpPr txBox="1"/>
+          <p:nvPr/>
+        </p:nvSpPr>
+        <p:spPr>
+          <a:xfrm>
+            <a:off x="6827367" y="2779776"/>
             <a:ext cx="4907127" cy="731520"/>
           </a:xfrm>
           <a:prstGeom prst="rect">
@@ -19809,7 +18899,7 @@
                 </a:solidFill>
                 <a:latin typeface="Noto Sans JP"/>
               </a:rPr>
-              <a:t>tan δ &lt;&lt; 1 → 全配合系が明確なゲル挙動。弾性成分が圧倒的に支配的</a:t>
+              <a:t>全系でtan δ &lt; 1 → ゲル挙動。AquaGel-K が最も弾性的（0.168）。MHEC系は流動性が高め（0.400）</a:t>
             </a:r>
           </a:p>
         </p:txBody>
@@ -22095,7 +21185,7 @@
                 </a:solidFill>
                 <a:latin typeface="Noto Sans JP"/>
               </a:rPr>
-              <a:t>より低い n=0.108 → 強い剪断希薄化</a:t>
+              <a:t>強い剪断希薄化（n &lt; 1）</a:t>
             </a:r>
           </a:p>
         </p:txBody>
@@ -22165,7 +21255,7 @@
                 </a:solidFill>
                 <a:latin typeface="Noto Sans JP"/>
               </a:rPr>
-              <a:t>Time to char ≈ 9–10 min</a:t>
+              <a:t>Time to char ＞ 7 min</a:t>
             </a:r>
           </a:p>
         </p:txBody>
@@ -22235,7 +21325,7 @@
                 </a:solidFill>
                 <a:latin typeface="Noto Sans JP"/>
               </a:rPr>
-              <a:t>Foaming Index ≈ 2.2–2.6</a:t>
+              <a:t>Foaming Index 最大≈2.6（SDS無し）</a:t>
             </a:r>
           </a:p>
         </p:txBody>
@@ -22690,7 +21780,7 @@
                 </a:solidFill>
                 <a:latin typeface="Noto Sans JP"/>
               </a:rPr>
-              <a:t>n=0.188（HEC+MC より若干高い）</a:t>
+              <a:t>剪断希薄化（n &lt; 1）</a:t>
             </a:r>
           </a:p>
         </p:txBody>
@@ -22760,7 +21850,7 @@
                 </a:solidFill>
                 <a:latin typeface="Noto Sans JP"/>
               </a:rPr>
-              <a:t>Time to char ≈ 10 min</a:t>
+              <a:t>Time to char ＞ 5 min</a:t>
             </a:r>
           </a:p>
         </p:txBody>
@@ -23845,7 +22935,7 @@
                 </a:solidFill>
                 <a:latin typeface="Noto Sans JP"/>
               </a:rPr>
-              <a:t>基板：松材（pine wood）薄板</a:t>
+              <a:t>基板：白木合板（whitewood plywood）</a:t>
             </a:r>
           </a:p>
         </p:txBody>
@@ -23985,7 +23075,7 @@
                 </a:solidFill>
                 <a:latin typeface="Noto Sans JP"/>
               </a:rPr>
-              <a:t>火炎源：ブタン直炎</a:t>
+              <a:t>火炎源：MAP-Pro トーチ（~2054°C）</a:t>
             </a:r>
           </a:p>
         </p:txBody>
@@ -24760,7 +23850,7 @@
         <p:spPr>
           <a:xfrm>
             <a:off x="2834640" y="1344168"/>
-            <a:ext cx="620587" cy="146304"/>
+            <a:ext cx="137908" cy="146304"/>
           </a:xfrm>
           <a:prstGeom prst="roundRect">
             <a:avLst>
@@ -24827,7 +23917,7 @@
                 </a:solidFill>
                 <a:latin typeface="Noto Sans JP"/>
               </a:rPr>
-              <a:t>~2 min</a:t>
+              <a:t>~0.3 min</a:t>
             </a:r>
           </a:p>
         </p:txBody>
@@ -24924,7 +24014,7 @@
         <p:spPr>
           <a:xfrm>
             <a:off x="2834640" y="1847088"/>
-            <a:ext cx="2068625" cy="146304"/>
+            <a:ext cx="689541" cy="146304"/>
           </a:xfrm>
           <a:prstGeom prst="roundRect">
             <a:avLst>
@@ -24991,7 +24081,7 @@
                 </a:solidFill>
                 <a:latin typeface="Noto Sans JP"/>
               </a:rPr>
-              <a:t>~7 min</a:t>
+              <a:t>~1.5 min</a:t>
             </a:r>
           </a:p>
         </p:txBody>
@@ -25026,7 +24116,7 @@
                 </a:solidFill>
                 <a:latin typeface="Noto Sans JP"/>
               </a:rPr>
-              <a:t>HEC+MC/CSP 1-5</a:t>
+              <a:t>MHEC/CSP 1-5</a:t>
             </a:r>
           </a:p>
         </p:txBody>
@@ -25088,7 +24178,7 @@
         <p:spPr>
           <a:xfrm>
             <a:off x="2834640" y="2350008"/>
-            <a:ext cx="2758166" cy="146304"/>
+            <a:ext cx="2241010" cy="146304"/>
           </a:xfrm>
           <a:prstGeom prst="roundRect">
             <a:avLst>
@@ -25096,7 +24186,7 @@
             </a:avLst>
           </a:prstGeom>
           <a:solidFill>
-            <a:srgbClr val="4A7C8C"/>
+            <a:srgbClr val="9F7639"/>
           </a:solidFill>
           <a:ln>
             <a:noFill/>
@@ -25155,7 +24245,7 @@
                 </a:solidFill>
                 <a:latin typeface="Noto Sans JP"/>
               </a:rPr>
-              <a:t>~9 min</a:t>
+              <a:t>&gt;5 min</a:t>
             </a:r>
           </a:p>
         </p:txBody>
@@ -25190,7 +24280,7 @@
                 </a:solidFill>
                 <a:latin typeface="Noto Sans JP"/>
               </a:rPr>
-              <a:t>HEC+MC/CSP/SDS 1-5-0.1</a:t>
+              <a:t>HEC+MC/CSP 1-5</a:t>
             </a:r>
           </a:p>
         </p:txBody>
@@ -25260,7 +24350,7 @@
             </a:avLst>
           </a:prstGeom>
           <a:solidFill>
-            <a:srgbClr val="5B7A99"/>
+            <a:srgbClr val="4A7C8C"/>
           </a:solidFill>
           <a:ln>
             <a:noFill/>
@@ -25319,7 +24409,7 @@
                 </a:solidFill>
                 <a:latin typeface="Noto Sans JP"/>
               </a:rPr>
-              <a:t>~10 min</a:t>
+              <a:t>&gt;7 min</a:t>
             </a:r>
           </a:p>
         </p:txBody>
@@ -25354,7 +24444,7 @@
                 </a:solidFill>
                 <a:latin typeface="Noto Sans JP"/>
               </a:rPr>
-              <a:t>MHEC/CSP 1-5</a:t>
+              <a:t>HEC+MC/CSP/SDS 1-5-0.1</a:t>
             </a:r>
           </a:p>
         </p:txBody>
@@ -25416,7 +24506,7 @@
         <p:spPr>
           <a:xfrm>
             <a:off x="2834640" y="3355848"/>
-            <a:ext cx="3171891" cy="146304"/>
+            <a:ext cx="3102937" cy="146304"/>
           </a:xfrm>
           <a:prstGeom prst="roundRect">
             <a:avLst>
@@ -25483,7 +24573,7 @@
                 </a:solidFill>
                 <a:latin typeface="Noto Sans JP"/>
               </a:rPr>
-              <a:t>~10 min</a:t>
+              <a:t>&gt;7 min</a:t>
             </a:r>
           </a:p>
         </p:txBody>
@@ -25643,7 +24733,7 @@
                 </a:solidFill>
                 <a:latin typeface="Noto Sans JP"/>
               </a:rPr>
-              <a:t>本研究WEG群はAquaGel-K比で約40%延長、水のみと比べて約5倍の保護時間</a:t>
+              <a:t>本研究WEGは市販AquaGel-Kの3〜6倍の保護時間を達成（全試験でn≥3）</a:t>
             </a:r>
           </a:p>
         </p:txBody>
@@ -26603,7 +25693,7 @@
                 </a:solidFill>
                 <a:latin typeface="Noto Sans JP"/>
               </a:rPr>
-              <a:t>~2分で木材表面が炭化</a:t>
+              <a:t>~0.3分（約18秒）で炭化</a:t>
             </a:r>
           </a:p>
         </p:txBody>
@@ -26896,7 +25986,7 @@
                 </a:solidFill>
                 <a:latin typeface="Noto Sans JP"/>
               </a:rPr>
-              <a:t>~7分で炭化</a:t>
+              <a:t>~1.5分で炭化</a:t>
             </a:r>
           </a:p>
         </p:txBody>
@@ -27259,7 +26349,7 @@
                 </a:solidFill>
                 <a:latin typeface="Noto Sans JP"/>
               </a:rPr>
-              <a:t>~10分間、炭化を阻止</a:t>
+              <a:t>&gt;7分間（HEC+MC）炭化を阻止</a:t>
             </a:r>
           </a:p>
         </p:txBody>
@@ -27987,7 +27077,7 @@
                 </a:solidFill>
                 <a:latin typeface="Noto Sans JP"/>
               </a:rPr>
-              <a:t>Time to char：~2 min</a:t>
+              <a:t>Time to char：~0.3 min</a:t>
             </a:r>
           </a:p>
         </p:txBody>
@@ -28175,7 +27265,7 @@
                 </a:solidFill>
                 <a:latin typeface="Noto Sans JP"/>
               </a:rPr>
-              <a:t>Time to char：~7 min</a:t>
+              <a:t>Time to char：~1.5 min</a:t>
             </a:r>
           </a:p>
         </p:txBody>
@@ -28363,7 +27453,7 @@
                 </a:solidFill>
                 <a:latin typeface="Noto Sans JP"/>
               </a:rPr>
-              <a:t>Time to char：~10 min</a:t>
+              <a:t>Time to char：&gt;7 min</a:t>
             </a:r>
           </a:p>
         </p:txBody>
@@ -28495,7 +27585,7 @@
                 </a:solidFill>
                 <a:latin typeface="Noto Sans JP"/>
               </a:rPr>
-              <a:t>~10</a:t>
+              <a:t>&gt;7</a:t>
             </a:r>
             <a:r>
               <a:rPr sz="6000" b="0" i="0">
@@ -28539,7 +27629,7 @@
                 </a:solidFill>
                 <a:latin typeface="Noto Sans JP"/>
               </a:rPr>
-              <a:t>本研究WEGの Time to char</a:t>
+              <a:t>本研究WEGの Time to char（HEC+MC/CSP）</a:t>
             </a:r>
           </a:p>
         </p:txBody>
@@ -28574,7 +27664,7 @@
                 </a:solidFill>
                 <a:latin typeface="Noto Sans JP"/>
               </a:rPr>
-              <a:t>水のみ（~2分）の約5倍、市販AquaGel-K（~7分）の約1.4倍の保護時間を達成</a:t>
+              <a:t>市販AquaGel-K（~1.5分）の3〜6倍の保護時間を達成（全試験でn≥3）</a:t>
             </a:r>
           </a:p>
         </p:txBody>
@@ -28669,7 +27759,7 @@
         <p:spPr>
           <a:xfrm>
             <a:off x="3931920" y="5568696"/>
-            <a:ext cx="1280160" cy="164592"/>
+            <a:ext cx="256032" cy="164592"/>
           </a:xfrm>
           <a:prstGeom prst="roundRect">
             <a:avLst>
@@ -28736,7 +27826,7 @@
                 </a:solidFill>
                 <a:latin typeface="Noto Sans JP"/>
               </a:rPr>
-              <a:t>~2 min</a:t>
+              <a:t>~0.3 min</a:t>
             </a:r>
           </a:p>
         </p:txBody>
@@ -28831,7 +27921,7 @@
         <p:spPr>
           <a:xfrm>
             <a:off x="3931920" y="5888736"/>
-            <a:ext cx="3840480" cy="164592"/>
+            <a:ext cx="1280160" cy="164592"/>
           </a:xfrm>
           <a:prstGeom prst="roundRect">
             <a:avLst>
@@ -28898,7 +27988,7 @@
                 </a:solidFill>
                 <a:latin typeface="Noto Sans JP"/>
               </a:rPr>
-              <a:t>~7 min</a:t>
+              <a:t>~1.5 min</a:t>
             </a:r>
           </a:p>
         </p:txBody>
@@ -29060,7 +28150,7 @@
                 </a:solidFill>
                 <a:latin typeface="Noto Sans JP"/>
               </a:rPr>
-              <a:t>~10 min</a:t>
+              <a:t>&gt;7 min</a:t>
             </a:r>
           </a:p>
         </p:txBody>
@@ -30031,7 +29121,7 @@
                 </a:solidFill>
                 <a:latin typeface="Noto Sans JP"/>
               </a:rPr>
-              <a:t>~0</a:t>
+              <a:t>≈0</a:t>
             </a:r>
           </a:p>
         </p:txBody>
@@ -30066,7 +29156,7 @@
                 </a:solidFill>
                 <a:latin typeface="Noto Sans JP"/>
               </a:rPr>
-              <a:t>HEC+MC/CSP 1-5</a:t>
+              <a:t>MHEC/CSP 1-5</a:t>
             </a:r>
           </a:p>
         </p:txBody>
@@ -30128,7 +29218,7 @@
         <p:spPr>
           <a:xfrm>
             <a:off x="1920240" y="4224528"/>
-            <a:ext cx="1718226" cy="146304"/>
+            <a:ext cx="1655745" cy="146304"/>
           </a:xfrm>
           <a:prstGeom prst="roundRect">
             <a:avLst>
@@ -30136,7 +29226,7 @@
             </a:avLst>
           </a:prstGeom>
           <a:solidFill>
-            <a:srgbClr val="4A7C8C"/>
+            <a:srgbClr val="9F7639"/>
           </a:solidFill>
           <a:ln>
             <a:noFill/>
@@ -30195,7 +29285,7 @@
                 </a:solidFill>
                 <a:latin typeface="Noto Sans JP"/>
               </a:rPr>
-              <a:t>~2.2×</a:t>
+              <a:t>≈2.1×</a:t>
             </a:r>
           </a:p>
         </p:txBody>
@@ -30230,7 +29320,7 @@
                 </a:solidFill>
                 <a:latin typeface="Noto Sans JP"/>
               </a:rPr>
-              <a:t>+SDS 0.1 wt%</a:t>
+              <a:t>HEC+MC/CSP/SDS 1-5-0.1</a:t>
             </a:r>
           </a:p>
         </p:txBody>
@@ -30292,7 +29382,7 @@
         <p:spPr>
           <a:xfrm>
             <a:off x="1920240" y="4636008"/>
-            <a:ext cx="2030630" cy="146304"/>
+            <a:ext cx="1874428" cy="146304"/>
           </a:xfrm>
           <a:prstGeom prst="roundRect">
             <a:avLst>
@@ -30359,7 +29449,7 @@
                 </a:solidFill>
                 <a:latin typeface="Noto Sans JP"/>
               </a:rPr>
-              <a:t>~2.6×</a:t>
+              <a:t>≈2.3×</a:t>
             </a:r>
           </a:p>
         </p:txBody>
@@ -30394,7 +29484,7 @@
                 </a:solidFill>
                 <a:latin typeface="Noto Sans JP"/>
               </a:rPr>
-              <a:t>MHEC/CSP 1-5</a:t>
+              <a:t>HEC+MC/CSP 1-5</a:t>
             </a:r>
           </a:p>
         </p:txBody>
@@ -30456,7 +29546,7 @@
         <p:spPr>
           <a:xfrm>
             <a:off x="1920240" y="5047488"/>
-            <a:ext cx="1811947" cy="146304"/>
+            <a:ext cx="2124352" cy="146304"/>
           </a:xfrm>
           <a:prstGeom prst="roundRect">
             <a:avLst>
@@ -30464,7 +29554,7 @@
             </a:avLst>
           </a:prstGeom>
           <a:solidFill>
-            <a:srgbClr val="9F7639"/>
+            <a:srgbClr val="4A7C8C"/>
           </a:solidFill>
           <a:ln>
             <a:noFill/>
@@ -30523,7 +29613,7 @@
                 </a:solidFill>
                 <a:latin typeface="Noto Sans JP"/>
               </a:rPr>
-              <a:t>~2.3×</a:t>
+              <a:t>≈2.6×</a:t>
             </a:r>
           </a:p>
         </p:txBody>
@@ -30838,7 +29928,7 @@
                 </a:solidFill>
                 <a:latin typeface="Noto Sans JP"/>
               </a:rPr>
-              <a:t>SDS 0.1 wt%が最適：均一な微細気泡を形成</a:t>
+              <a:t>SDS無しのHEC+MC/CSPが最高発泡指数（≈2.6）を達成</a:t>
             </a:r>
           </a:p>
         </p:txBody>
@@ -31402,124 +30492,6 @@
           <a:solidFill>
             <a:srgbClr val="FFFFFF"/>
           </a:solidFill>
-          <a:ln w="6350">
-            <a:solidFill>
-              <a:srgbClr val="E2E8F0"/>
-            </a:solidFill>
-          </a:ln>
-          <a:effectLst/>
-        </p:spPr>
-        <p:style>
-          <a:lnRef idx="1">
-            <a:schemeClr val="accent1"/>
-          </a:lnRef>
-          <a:fillRef idx="3">
-            <a:schemeClr val="accent1"/>
-          </a:fillRef>
-          <a:effectRef idx="2">
-            <a:schemeClr val="accent1"/>
-          </a:effectRef>
-          <a:fontRef idx="minor">
-            <a:schemeClr val="lt1"/>
-          </a:fontRef>
-        </p:style>
-        <p:txBody>
-          <a:bodyPr rtlCol="0" anchor="ctr"/>
-          <a:lstStyle/>
-          <a:p>
-            <a:pPr algn="ctr"/>
-          </a:p>
-        </p:txBody>
-      </p:sp>
-      <p:sp>
-        <p:nvSpPr>
-          <p:cNvPr id="16" name="TextBox 15"/>
-          <p:cNvSpPr txBox="1"/>
-          <p:nvPr/>
-        </p:nvSpPr>
-        <p:spPr>
-          <a:xfrm>
-            <a:off x="530352" y="4215384"/>
-            <a:ext cx="3405530" cy="320040"/>
-          </a:xfrm>
-          <a:prstGeom prst="rect">
-            <a:avLst/>
-          </a:prstGeom>
-          <a:noFill/>
-        </p:spPr>
-        <p:txBody>
-          <a:bodyPr wrap="square" anchor="t" lIns="36000" rIns="36000" tIns="18000" bIns="18000">
-            <a:spAutoFit/>
-          </a:bodyPr>
-          <a:lstStyle/>
-          <a:p>
-            <a:pPr algn="l"/>
-            <a:r>
-              <a:rPr sz="1300" b="1" i="0">
-                <a:solidFill>
-                  <a:srgbClr val="64748B"/>
-                </a:solidFill>
-                <a:latin typeface="Noto Sans JP"/>
-              </a:rPr>
-              <a:t>0% SDS</a:t>
-            </a:r>
-          </a:p>
-        </p:txBody>
-      </p:sp>
-      <p:sp>
-        <p:nvSpPr>
-          <p:cNvPr id="17" name="TextBox 16"/>
-          <p:cNvSpPr txBox="1"/>
-          <p:nvPr/>
-        </p:nvSpPr>
-        <p:spPr>
-          <a:xfrm>
-            <a:off x="530352" y="4700016"/>
-            <a:ext cx="3405530" cy="1280160"/>
-          </a:xfrm>
-          <a:prstGeom prst="rect">
-            <a:avLst/>
-          </a:prstGeom>
-          <a:noFill/>
-        </p:spPr>
-        <p:txBody>
-          <a:bodyPr wrap="square" anchor="t" lIns="36000" rIns="36000" tIns="18000" bIns="18000">
-            <a:spAutoFit/>
-          </a:bodyPr>
-          <a:lstStyle/>
-          <a:p>
-            <a:pPr algn="l"/>
-            <a:r>
-              <a:rPr sz="1200" b="0" i="0">
-                <a:solidFill>
-                  <a:srgbClr val="475569"/>
-                </a:solidFill>
-                <a:latin typeface="Noto Sans JP"/>
-              </a:rPr>
-              <a:t>緻密なシリカネットワーク。気孔少。</a:t>
-            </a:r>
-          </a:p>
-        </p:txBody>
-      </p:sp>
-      <p:sp>
-        <p:nvSpPr>
-          <p:cNvPr id="18" name="Rounded Rectangle 17"/>
-          <p:cNvSpPr/>
-          <p:nvPr/>
-        </p:nvSpPr>
-        <p:spPr>
-          <a:xfrm>
-            <a:off x="4228490" y="4014216"/>
-            <a:ext cx="3734714" cy="2103120"/>
-          </a:xfrm>
-          <a:prstGeom prst="roundRect">
-            <a:avLst>
-              <a:gd name="adj" fmla="val 4000"/>
-            </a:avLst>
-          </a:prstGeom>
-          <a:solidFill>
-            <a:srgbClr val="FFFFFF"/>
-          </a:solidFill>
           <a:ln w="10160">
             <a:solidFill>
               <a:srgbClr val="3B5174"/>
@@ -31551,13 +30523,13 @@
       </p:sp>
       <p:sp>
         <p:nvSpPr>
-          <p:cNvPr id="19" name="TextBox 18"/>
-          <p:cNvSpPr txBox="1"/>
-          <p:nvPr/>
-        </p:nvSpPr>
-        <p:spPr>
-          <a:xfrm>
-            <a:off x="4393082" y="4215384"/>
+          <p:cNvPr id="16" name="TextBox 15"/>
+          <p:cNvSpPr txBox="1"/>
+          <p:nvPr/>
+        </p:nvSpPr>
+        <p:spPr>
+          <a:xfrm>
+            <a:off x="530352" y="4215384"/>
             <a:ext cx="3405530" cy="320040"/>
           </a:xfrm>
           <a:prstGeom prst="rect">
@@ -31579,20 +30551,20 @@
                 </a:solidFill>
                 <a:latin typeface="Noto Sans JP"/>
               </a:rPr>
-              <a:t>0.1% SDS（最適）</a:t>
-            </a:r>
-          </a:p>
-        </p:txBody>
-      </p:sp>
-      <p:sp>
-        <p:nvSpPr>
-          <p:cNvPr id="20" name="TextBox 19"/>
-          <p:cNvSpPr txBox="1"/>
-          <p:nvPr/>
-        </p:nvSpPr>
-        <p:spPr>
-          <a:xfrm>
-            <a:off x="4393082" y="4700016"/>
+              <a:t>0% SDS</a:t>
+            </a:r>
+          </a:p>
+        </p:txBody>
+      </p:sp>
+      <p:sp>
+        <p:nvSpPr>
+          <p:cNvPr id="17" name="TextBox 16"/>
+          <p:cNvSpPr txBox="1"/>
+          <p:nvPr/>
+        </p:nvSpPr>
+        <p:spPr>
+          <a:xfrm>
+            <a:off x="530352" y="4700016"/>
             <a:ext cx="3405530" cy="1280160"/>
           </a:xfrm>
           <a:prstGeom prst="rect">
@@ -31614,20 +30586,20 @@
                 </a:solidFill>
                 <a:latin typeface="Noto Sans JP"/>
               </a:rPr>
-              <a:t>均一な微細気泡。最高の発泡指数。</a:t>
-            </a:r>
-          </a:p>
-        </p:txBody>
-      </p:sp>
-      <p:sp>
-        <p:nvSpPr>
-          <p:cNvPr id="21" name="Rounded Rectangle 20"/>
+              <a:t>最高の発泡指数（≈2.6）。SDSなしが膨張率最大。</a:t>
+            </a:r>
+          </a:p>
+        </p:txBody>
+      </p:sp>
+      <p:sp>
+        <p:nvSpPr>
+          <p:cNvPr id="18" name="Rounded Rectangle 17"/>
           <p:cNvSpPr/>
           <p:nvPr/>
         </p:nvSpPr>
         <p:spPr>
           <a:xfrm>
-            <a:off x="8091220" y="4014216"/>
+            <a:off x="4228490" y="4014216"/>
             <a:ext cx="3734714" cy="2103120"/>
           </a:xfrm>
           <a:prstGeom prst="roundRect">
@@ -31669,6 +30641,124 @@
       </p:sp>
       <p:sp>
         <p:nvSpPr>
+          <p:cNvPr id="19" name="TextBox 18"/>
+          <p:cNvSpPr txBox="1"/>
+          <p:nvPr/>
+        </p:nvSpPr>
+        <p:spPr>
+          <a:xfrm>
+            <a:off x="4393082" y="4215384"/>
+            <a:ext cx="3405530" cy="320040"/>
+          </a:xfrm>
+          <a:prstGeom prst="rect">
+            <a:avLst/>
+          </a:prstGeom>
+          <a:noFill/>
+        </p:spPr>
+        <p:txBody>
+          <a:bodyPr wrap="square" anchor="t" lIns="36000" rIns="36000" tIns="18000" bIns="18000">
+            <a:spAutoFit/>
+          </a:bodyPr>
+          <a:lstStyle/>
+          <a:p>
+            <a:pPr algn="l"/>
+            <a:r>
+              <a:rPr sz="1300" b="1" i="0">
+                <a:solidFill>
+                  <a:srgbClr val="64748B"/>
+                </a:solidFill>
+                <a:latin typeface="Noto Sans JP"/>
+              </a:rPr>
+              <a:t>0.1% SDS</a:t>
+            </a:r>
+          </a:p>
+        </p:txBody>
+      </p:sp>
+      <p:sp>
+        <p:nvSpPr>
+          <p:cNvPr id="20" name="TextBox 19"/>
+          <p:cNvSpPr txBox="1"/>
+          <p:nvPr/>
+        </p:nvSpPr>
+        <p:spPr>
+          <a:xfrm>
+            <a:off x="4393082" y="4700016"/>
+            <a:ext cx="3405530" cy="1280160"/>
+          </a:xfrm>
+          <a:prstGeom prst="rect">
+            <a:avLst/>
+          </a:prstGeom>
+          <a:noFill/>
+        </p:spPr>
+        <p:txBody>
+          <a:bodyPr wrap="square" anchor="t" lIns="36000" rIns="36000" tIns="18000" bIns="18000">
+            <a:spAutoFit/>
+          </a:bodyPr>
+          <a:lstStyle/>
+          <a:p>
+            <a:pPr algn="l"/>
+            <a:r>
+              <a:rPr sz="1200" b="0" i="0">
+                <a:solidFill>
+                  <a:srgbClr val="475569"/>
+                </a:solidFill>
+                <a:latin typeface="Noto Sans JP"/>
+              </a:rPr>
+              <a:t>均一な微細気泡構造。発泡指数≈2.3（SDSなしより低い）。</a:t>
+            </a:r>
+          </a:p>
+        </p:txBody>
+      </p:sp>
+      <p:sp>
+        <p:nvSpPr>
+          <p:cNvPr id="21" name="Rounded Rectangle 20"/>
+          <p:cNvSpPr/>
+          <p:nvPr/>
+        </p:nvSpPr>
+        <p:spPr>
+          <a:xfrm>
+            <a:off x="8091220" y="4014216"/>
+            <a:ext cx="3734714" cy="2103120"/>
+          </a:xfrm>
+          <a:prstGeom prst="roundRect">
+            <a:avLst>
+              <a:gd name="adj" fmla="val 4000"/>
+            </a:avLst>
+          </a:prstGeom>
+          <a:solidFill>
+            <a:srgbClr val="FFFFFF"/>
+          </a:solidFill>
+          <a:ln w="6350">
+            <a:solidFill>
+              <a:srgbClr val="E2E8F0"/>
+            </a:solidFill>
+          </a:ln>
+          <a:effectLst/>
+        </p:spPr>
+        <p:style>
+          <a:lnRef idx="1">
+            <a:schemeClr val="accent1"/>
+          </a:lnRef>
+          <a:fillRef idx="3">
+            <a:schemeClr val="accent1"/>
+          </a:fillRef>
+          <a:effectRef idx="2">
+            <a:schemeClr val="accent1"/>
+          </a:effectRef>
+          <a:fontRef idx="minor">
+            <a:schemeClr val="lt1"/>
+          </a:fontRef>
+        </p:style>
+        <p:txBody>
+          <a:bodyPr rtlCol="0" anchor="ctr"/>
+          <a:lstStyle/>
+          <a:p>
+            <a:pPr algn="ctr"/>
+          </a:p>
+        </p:txBody>
+      </p:sp>
+      <p:sp>
+        <p:nvSpPr>
           <p:cNvPr id="22" name="TextBox 21"/>
           <p:cNvSpPr txBox="1"/>
           <p:nvPr/>
@@ -31732,7 +30822,7 @@
                 </a:solidFill>
                 <a:latin typeface="Noto Sans JP"/>
               </a:rPr>
-              <a:t>気泡サイズ不均一・粗大化。</a:t>
+              <a:t>気泡サイズ不均一・粗大化。発泡指数がさらに低下。</a:t>
             </a:r>
           </a:p>
         </p:txBody>
@@ -33223,7 +32313,7 @@
         <p:spPr>
           <a:xfrm>
             <a:off x="6187287" y="1243584"/>
-            <a:ext cx="5638647" cy="480060"/>
+            <a:ext cx="5638647" cy="640080"/>
           </a:xfrm>
           <a:prstGeom prst="rect">
             <a:avLst/>
@@ -33267,7 +32357,7 @@
         <p:spPr>
           <a:xfrm>
             <a:off x="6278727" y="1243584"/>
-            <a:ext cx="1788109" cy="480060"/>
+            <a:ext cx="1922362" cy="640080"/>
           </a:xfrm>
           <a:prstGeom prst="rect">
             <a:avLst/>
@@ -33288,7 +32378,7 @@
                 </a:solidFill>
                 <a:latin typeface="Noto Sans JP"/>
               </a:rPr>
-              <a:t>元素</a:t>
+              <a:t>配合系</a:t>
             </a:r>
           </a:p>
         </p:txBody>
@@ -33301,8 +32391,8 @@
         </p:nvSpPr>
         <p:spPr>
           <a:xfrm>
-            <a:off x="8158276" y="1243584"/>
-            <a:ext cx="1788109" cy="480060"/>
+            <a:off x="8292530" y="1243584"/>
+            <a:ext cx="1720982" cy="640080"/>
           </a:xfrm>
           <a:prstGeom prst="rect">
             <a:avLst/>
@@ -33323,7 +32413,7 @@
                 </a:solidFill>
                 <a:latin typeface="Noto Sans JP"/>
               </a:rPr>
-              <a:t>燃焼前</a:t>
+              <a:t>C 1s 燃焼前 (at%)</a:t>
             </a:r>
           </a:p>
         </p:txBody>
@@ -33336,8 +32426,8 @@
         </p:nvSpPr>
         <p:spPr>
           <a:xfrm>
-            <a:off x="10037825" y="1243584"/>
-            <a:ext cx="1788109" cy="480060"/>
+            <a:off x="10104952" y="1243584"/>
+            <a:ext cx="1720982" cy="640080"/>
           </a:xfrm>
           <a:prstGeom prst="rect">
             <a:avLst/>
@@ -33358,7 +32448,7 @@
                 </a:solidFill>
                 <a:latin typeface="Noto Sans JP"/>
               </a:rPr>
-              <a:t>燃焼後</a:t>
+              <a:t>C 1s 燃焼後 (at%)</a:t>
             </a:r>
           </a:p>
         </p:txBody>
@@ -33371,8 +32461,8 @@
         </p:nvSpPr>
         <p:spPr>
           <a:xfrm>
-            <a:off x="6187287" y="1723644"/>
-            <a:ext cx="5638647" cy="480060"/>
+            <a:off x="6187287" y="1883664"/>
+            <a:ext cx="5638647" cy="640080"/>
           </a:xfrm>
           <a:prstGeom prst="rect">
             <a:avLst/>
@@ -33417,8 +32507,8 @@
         </p:nvSpPr>
         <p:spPr>
           <a:xfrm>
-            <a:off x="6278727" y="1723644"/>
-            <a:ext cx="1788109" cy="480060"/>
+            <a:off x="6278727" y="1883664"/>
+            <a:ext cx="1922362" cy="640080"/>
           </a:xfrm>
           <a:prstGeom prst="rect">
             <a:avLst/>
@@ -33439,7 +32529,7 @@
                 </a:solidFill>
                 <a:latin typeface="Noto Sans JP"/>
               </a:rPr>
-              <a:t>Si 2p</a:t>
+              <a:t>HEC+MC/CSP</a:t>
             </a:r>
           </a:p>
         </p:txBody>
@@ -33452,8 +32542,8 @@
         </p:nvSpPr>
         <p:spPr>
           <a:xfrm>
-            <a:off x="8158276" y="1723644"/>
-            <a:ext cx="1788109" cy="480060"/>
+            <a:off x="8292530" y="1883664"/>
+            <a:ext cx="1720982" cy="640080"/>
           </a:xfrm>
           <a:prstGeom prst="rect">
             <a:avLst/>
@@ -33474,7 +32564,7 @@
                 </a:solidFill>
                 <a:latin typeface="Noto Sans JP"/>
               </a:rPr>
-              <a:t>~4</a:t>
+              <a:t>25.6</a:t>
             </a:r>
           </a:p>
         </p:txBody>
@@ -33487,8 +32577,8 @@
         </p:nvSpPr>
         <p:spPr>
           <a:xfrm>
-            <a:off x="10037825" y="1723644"/>
-            <a:ext cx="1788109" cy="480060"/>
+            <a:off x="10104952" y="1883664"/>
+            <a:ext cx="1720982" cy="640080"/>
           </a:xfrm>
           <a:prstGeom prst="rect">
             <a:avLst/>
@@ -33505,11 +32595,11 @@
             <a:r>
               <a:rPr sz="1100" b="1" i="0">
                 <a:solidFill>
-                  <a:srgbClr val="5B8C5A"/>
-                </a:solidFill>
-                <a:latin typeface="Noto Sans JP"/>
-              </a:rPr>
-              <a:t>~33</a:t>
+                  <a:srgbClr val="A05656"/>
+                </a:solidFill>
+                <a:latin typeface="Noto Sans JP"/>
+              </a:rPr>
+              <a:t>14.9</a:t>
             </a:r>
           </a:p>
         </p:txBody>
@@ -33522,8 +32612,8 @@
         </p:nvSpPr>
         <p:spPr>
           <a:xfrm>
-            <a:off x="6187287" y="2203704"/>
-            <a:ext cx="5638647" cy="480060"/>
+            <a:off x="6187287" y="2523744"/>
+            <a:ext cx="5638647" cy="640080"/>
           </a:xfrm>
           <a:prstGeom prst="rect">
             <a:avLst/>
@@ -33568,8 +32658,8 @@
         </p:nvSpPr>
         <p:spPr>
           <a:xfrm>
-            <a:off x="6278727" y="2203704"/>
-            <a:ext cx="1788109" cy="480060"/>
+            <a:off x="6278727" y="2523744"/>
+            <a:ext cx="1922362" cy="640080"/>
           </a:xfrm>
           <a:prstGeom prst="rect">
             <a:avLst/>
@@ -33590,7 +32680,7 @@
                 </a:solidFill>
                 <a:latin typeface="Noto Sans JP"/>
               </a:rPr>
-              <a:t>C 1s</a:t>
+              <a:t>MHEC/CSP</a:t>
             </a:r>
           </a:p>
         </p:txBody>
@@ -33603,8 +32693,8 @@
         </p:nvSpPr>
         <p:spPr>
           <a:xfrm>
-            <a:off x="8158276" y="2203704"/>
-            <a:ext cx="1788109" cy="480060"/>
+            <a:off x="8292530" y="2523744"/>
+            <a:ext cx="1720982" cy="640080"/>
           </a:xfrm>
           <a:prstGeom prst="rect">
             <a:avLst/>
@@ -33625,7 +32715,7 @@
                 </a:solidFill>
                 <a:latin typeface="Noto Sans JP"/>
               </a:rPr>
-              <a:t>~55</a:t>
+              <a:t>38.3</a:t>
             </a:r>
           </a:p>
         </p:txBody>
@@ -33638,8 +32728,8 @@
         </p:nvSpPr>
         <p:spPr>
           <a:xfrm>
-            <a:off x="10037825" y="2203704"/>
-            <a:ext cx="1788109" cy="480060"/>
+            <a:off x="10104952" y="2523744"/>
+            <a:ext cx="1720982" cy="640080"/>
           </a:xfrm>
           <a:prstGeom prst="rect">
             <a:avLst/>
@@ -33660,165 +32750,14 @@
                 </a:solidFill>
                 <a:latin typeface="Noto Sans JP"/>
               </a:rPr>
-              <a:t>~8</a:t>
-            </a:r>
-          </a:p>
-        </p:txBody>
-      </p:sp>
-      <p:sp>
-        <p:nvSpPr>
-          <p:cNvPr id="52" name="Rectangle 51"/>
-          <p:cNvSpPr/>
-          <p:nvPr/>
-        </p:nvSpPr>
-        <p:spPr>
-          <a:xfrm>
-            <a:off x="6187287" y="2683764"/>
-            <a:ext cx="5638647" cy="480060"/>
-          </a:xfrm>
-          <a:prstGeom prst="rect">
-            <a:avLst/>
-          </a:prstGeom>
-          <a:solidFill>
-            <a:srgbClr val="F8FAFC"/>
-          </a:solidFill>
-          <a:ln w="3810">
-            <a:solidFill>
-              <a:srgbClr val="E2E8F0"/>
-            </a:solidFill>
-          </a:ln>
-          <a:effectLst/>
-        </p:spPr>
-        <p:style>
-          <a:lnRef idx="1">
-            <a:schemeClr val="accent1"/>
-          </a:lnRef>
-          <a:fillRef idx="3">
-            <a:schemeClr val="accent1"/>
-          </a:fillRef>
-          <a:effectRef idx="2">
-            <a:schemeClr val="accent1"/>
-          </a:effectRef>
-          <a:fontRef idx="minor">
-            <a:schemeClr val="lt1"/>
-          </a:fontRef>
-        </p:style>
-        <p:txBody>
-          <a:bodyPr rtlCol="0" anchor="ctr"/>
-          <a:lstStyle/>
-          <a:p>
-            <a:pPr algn="ctr"/>
-          </a:p>
-        </p:txBody>
-      </p:sp>
-      <p:sp>
-        <p:nvSpPr>
-          <p:cNvPr id="53" name="TextBox 52"/>
-          <p:cNvSpPr txBox="1"/>
-          <p:nvPr/>
-        </p:nvSpPr>
-        <p:spPr>
-          <a:xfrm>
-            <a:off x="6278727" y="2683764"/>
-            <a:ext cx="1788109" cy="480060"/>
-          </a:xfrm>
-          <a:prstGeom prst="rect">
-            <a:avLst/>
-          </a:prstGeom>
-          <a:noFill/>
-        </p:spPr>
-        <p:txBody>
-          <a:bodyPr wrap="square" anchor="ctr" lIns="36000" rIns="36000" tIns="18000" bIns="18000">
-            <a:spAutoFit/>
-          </a:bodyPr>
-          <a:lstStyle/>
-          <a:p>
-            <a:pPr algn="l"/>
-            <a:r>
-              <a:rPr sz="1100" b="1" i="0">
-                <a:solidFill>
-                  <a:srgbClr val="334155"/>
-                </a:solidFill>
-                <a:latin typeface="Noto Sans JP"/>
-              </a:rPr>
-              <a:t>O 1s</a:t>
-            </a:r>
-          </a:p>
-        </p:txBody>
-      </p:sp>
-      <p:sp>
-        <p:nvSpPr>
-          <p:cNvPr id="54" name="TextBox 53"/>
-          <p:cNvSpPr txBox="1"/>
-          <p:nvPr/>
-        </p:nvSpPr>
-        <p:spPr>
-          <a:xfrm>
-            <a:off x="8158276" y="2683764"/>
-            <a:ext cx="1788109" cy="480060"/>
-          </a:xfrm>
-          <a:prstGeom prst="rect">
-            <a:avLst/>
-          </a:prstGeom>
-          <a:noFill/>
-        </p:spPr>
-        <p:txBody>
-          <a:bodyPr wrap="square" anchor="ctr" lIns="36000" rIns="36000" tIns="18000" bIns="18000">
-            <a:spAutoFit/>
-          </a:bodyPr>
-          <a:lstStyle/>
-          <a:p>
-            <a:pPr algn="l"/>
-            <a:r>
-              <a:rPr sz="1100" b="0" i="0">
-                <a:solidFill>
-                  <a:srgbClr val="334155"/>
-                </a:solidFill>
-                <a:latin typeface="Noto Sans JP"/>
-              </a:rPr>
-              <a:t>~41</a:t>
-            </a:r>
-          </a:p>
-        </p:txBody>
-      </p:sp>
-      <p:sp>
-        <p:nvSpPr>
-          <p:cNvPr id="55" name="TextBox 54"/>
-          <p:cNvSpPr txBox="1"/>
-          <p:nvPr/>
-        </p:nvSpPr>
-        <p:spPr>
-          <a:xfrm>
-            <a:off x="10037825" y="2683764"/>
-            <a:ext cx="1788109" cy="480060"/>
-          </a:xfrm>
-          <a:prstGeom prst="rect">
-            <a:avLst/>
-          </a:prstGeom>
-          <a:noFill/>
-        </p:spPr>
-        <p:txBody>
-          <a:bodyPr wrap="square" anchor="ctr" lIns="36000" rIns="36000" tIns="18000" bIns="18000">
-            <a:spAutoFit/>
-          </a:bodyPr>
-          <a:lstStyle/>
-          <a:p>
-            <a:pPr algn="l"/>
-            <a:r>
-              <a:rPr sz="1100" b="0" i="0">
-                <a:solidFill>
-                  <a:srgbClr val="334155"/>
-                </a:solidFill>
-                <a:latin typeface="Noto Sans JP"/>
-              </a:rPr>
-              <a:t>~59</a:t>
-            </a:r>
-          </a:p>
-        </p:txBody>
-      </p:sp>
-      <p:sp>
-        <p:nvSpPr>
-          <p:cNvPr id="56" name="Rounded Rectangle 55"/>
+              <a:t>4.8</a:t>
+            </a:r>
+          </a:p>
+        </p:txBody>
+      </p:sp>
+      <p:sp>
+        <p:nvSpPr>
+          <p:cNvPr id="52" name="Rounded Rectangle 51"/>
           <p:cNvSpPr/>
           <p:nvPr/>
         </p:nvSpPr>
@@ -33864,7 +32803,7 @@
       </p:sp>
       <p:sp>
         <p:nvSpPr>
-          <p:cNvPr id="57" name="Rectangle 56"/>
+          <p:cNvPr id="53" name="Rectangle 52"/>
           <p:cNvSpPr/>
           <p:nvPr/>
         </p:nvSpPr>
@@ -33908,7 +32847,7 @@
       </p:sp>
       <p:sp>
         <p:nvSpPr>
-          <p:cNvPr id="58" name="TextBox 57"/>
+          <p:cNvPr id="54" name="TextBox 53"/>
           <p:cNvSpPr txBox="1"/>
           <p:nvPr/>
         </p:nvSpPr>
@@ -33943,7 +32882,7 @@
       </p:sp>
       <p:sp>
         <p:nvSpPr>
-          <p:cNvPr id="59" name="TextBox 58"/>
+          <p:cNvPr id="55" name="TextBox 54"/>
           <p:cNvSpPr txBox="1"/>
           <p:nvPr/>
         </p:nvSpPr>
@@ -33971,14 +32910,14 @@
                 </a:solidFill>
                 <a:latin typeface="Noto Sans JP"/>
               </a:rPr>
-              <a:t>Si濃度が約8倍に増加、C濃度が激減 → 有機マトリクスが除去されシリカが露出</a:t>
-            </a:r>
-          </a:p>
-        </p:txBody>
-      </p:sp>
-      <p:sp>
-        <p:nvSpPr>
-          <p:cNvPr id="60" name="Rounded Rectangle 59"/>
+              <a:t>炭素濃度が大幅減（MHEC: 38.3→4.8 at%）→ 有機マトリクスが燃焼除去、シリカが残存・露出</a:t>
+            </a:r>
+          </a:p>
+        </p:txBody>
+      </p:sp>
+      <p:sp>
+        <p:nvSpPr>
+          <p:cNvPr id="56" name="Rounded Rectangle 55"/>
           <p:cNvSpPr/>
           <p:nvPr/>
         </p:nvSpPr>
@@ -34026,7 +32965,7 @@
       </p:sp>
       <p:sp>
         <p:nvSpPr>
-          <p:cNvPr id="61" name="TextBox 60"/>
+          <p:cNvPr id="57" name="TextBox 56"/>
           <p:cNvSpPr txBox="1"/>
           <p:nvPr/>
         </p:nvSpPr>
@@ -34061,7 +33000,7 @@
       </p:sp>
       <p:sp>
         <p:nvSpPr>
-          <p:cNvPr id="62" name="TextBox 61"/>
+          <p:cNvPr id="58" name="TextBox 57"/>
           <p:cNvSpPr txBox="1"/>
           <p:nvPr/>
         </p:nvSpPr>
@@ -42266,7 +41205,7 @@
                 </a:solidFill>
                 <a:latin typeface="Noto Sans JP"/>
               </a:rPr>
-              <a:t>保護時間 5× 向上</a:t>
+              <a:t>保護時間大幅向上（水は~0.3分で炭化）</a:t>
             </a:r>
           </a:p>
         </p:txBody>
@@ -42336,7 +41275,7 @@
                 </a:solidFill>
                 <a:latin typeface="Noto Sans JP"/>
               </a:rPr>
-              <a:t>水蒸発後も継続保護</a:t>
+              <a:t>3〜6倍の保護時間＋水蒸発後も継続</a:t>
             </a:r>
           </a:p>
         </p:txBody>
@@ -46962,16 +45901,16 @@
           <a:p>
             <a:pPr algn="ctr"/>
             <a:r>
-              <a:rPr sz="13000" b="1" i="0">
+              <a:rPr sz="10000" b="1" i="0">
                 <a:solidFill>
                   <a:srgbClr val="D4A574"/>
                 </a:solidFill>
                 <a:latin typeface="Noto Sans JP"/>
               </a:rPr>
-              <a:t>5</a:t>
-            </a:r>
-            <a:r>
-              <a:rPr sz="7500" b="1" i="0">
+              <a:t>3–6</a:t>
+            </a:r>
+            <a:r>
+              <a:rPr sz="6500" b="1" i="0">
                 <a:solidFill>
                   <a:srgbClr val="C89A68"/>
                 </a:solidFill>
@@ -47012,7 +45951,7 @@
                 </a:solidFill>
                 <a:latin typeface="Noto Sans JP"/>
               </a:rPr>
-              <a:t>従来品（水）比 Time to char 向上率</a:t>
+              <a:t>市販WEG（AquaGel-K）比 Time to char 向上率</a:t>
             </a:r>
           </a:p>
         </p:txBody>
@@ -47221,7 +46160,7 @@
                 </a:solidFill>
                 <a:latin typeface="Noto Sans JP"/>
               </a:rPr>
-              <a:t>~10 min</a:t>
+              <a:t>&gt;7 min</a:t>
             </a:r>
           </a:p>
         </p:txBody>
@@ -47316,7 +46255,7 @@
         <p:spPr>
           <a:xfrm>
             <a:off x="4663440" y="5815584"/>
-            <a:ext cx="3090672" cy="146304"/>
+            <a:ext cx="3233318" cy="146304"/>
           </a:xfrm>
           <a:prstGeom prst="roundRect">
             <a:avLst>
@@ -47383,7 +46322,7 @@
                 </a:solidFill>
                 <a:latin typeface="Noto Sans JP"/>
               </a:rPr>
-              <a:t>~2.6×</a:t>
+              <a:t>≈2.6×</a:t>
             </a:r>
           </a:p>
         </p:txBody>
@@ -47418,7 +46357,7 @@
                 </a:solidFill>
                 <a:latin typeface="Noto Sans JP"/>
               </a:rPr>
-              <a:t>Power-law n</a:t>
+              <a:t>Shear-thinning</a:t>
             </a:r>
           </a:p>
         </p:txBody>
@@ -47478,7 +46417,7 @@
         <p:spPr>
           <a:xfrm>
             <a:off x="4663440" y="6108192"/>
-            <a:ext cx="523036" cy="146304"/>
+            <a:ext cx="2852928" cy="146304"/>
           </a:xfrm>
           <a:prstGeom prst="roundRect">
             <a:avLst>
@@ -47545,7 +46484,7 @@
                 </a:solidFill>
                 <a:latin typeface="Noto Sans JP"/>
               </a:rPr>
-              <a:t>0.108</a:t>
+              <a:t>n &lt; 1</a:t>
             </a:r>
           </a:p>
         </p:txBody>

--- a/slides.pptx
+++ b/slides.pptx
@@ -46869,664 +46869,14 @@
       </p:sp>
       <p:sp>
         <p:nvSpPr>
-          <p:cNvPr id="10" name="Rounded Rectangle 9"/>
+          <p:cNvPr id="10" name="Rectangle 9"/>
           <p:cNvSpPr/>
           <p:nvPr/>
         </p:nvSpPr>
         <p:spPr>
           <a:xfrm>
             <a:off x="365760" y="859536"/>
-            <a:ext cx="2276996" cy="1554480"/>
-          </a:xfrm>
-          <a:prstGeom prst="roundRect">
-            <a:avLst>
-              <a:gd name="adj" fmla="val 4000"/>
-            </a:avLst>
-          </a:prstGeom>
-          <a:solidFill>
-            <a:srgbClr val="F1F5F9"/>
-          </a:solidFill>
-          <a:ln w="6350">
-            <a:solidFill>
-              <a:srgbClr val="E2E8F0"/>
-            </a:solidFill>
-          </a:ln>
-          <a:effectLst/>
-        </p:spPr>
-        <p:style>
-          <a:lnRef idx="1">
-            <a:schemeClr val="accent1"/>
-          </a:lnRef>
-          <a:fillRef idx="3">
-            <a:schemeClr val="accent1"/>
-          </a:fillRef>
-          <a:effectRef idx="2">
-            <a:schemeClr val="accent1"/>
-          </a:effectRef>
-          <a:fontRef idx="minor">
-            <a:schemeClr val="lt1"/>
-          </a:fontRef>
-        </p:style>
-        <p:txBody>
-          <a:bodyPr rtlCol="0" anchor="ctr"/>
-          <a:lstStyle/>
-          <a:p>
-            <a:pPr algn="ctr"/>
-          </a:p>
-        </p:txBody>
-      </p:sp>
-      <p:sp>
-        <p:nvSpPr>
-          <p:cNvPr id="11" name="TextBox 10"/>
-          <p:cNvSpPr txBox="1"/>
-          <p:nvPr/>
-        </p:nvSpPr>
-        <p:spPr>
-          <a:xfrm>
-            <a:off x="365760" y="1042416"/>
-            <a:ext cx="2276996" cy="777240"/>
-          </a:xfrm>
-          <a:prstGeom prst="rect">
-            <a:avLst/>
-          </a:prstGeom>
-          <a:noFill/>
-        </p:spPr>
-        <p:txBody>
-          <a:bodyPr wrap="square" anchor="ctr" lIns="36000" rIns="36000" tIns="18000" bIns="18000">
-            <a:spAutoFit/>
-          </a:bodyPr>
-          <a:lstStyle/>
-          <a:p>
-            <a:pPr algn="ctr"/>
-            <a:r>
-              <a:rPr sz="4600" b="1" i="0">
-                <a:solidFill>
-                  <a:srgbClr val="1E293B"/>
-                </a:solidFill>
-                <a:latin typeface="Noto Sans JP"/>
-              </a:rPr>
-              <a:t>5</a:t>
-            </a:r>
-            <a:r>
-              <a:rPr sz="2000" b="0" i="0">
-                <a:solidFill>
-                  <a:srgbClr val="475569"/>
-                </a:solidFill>
-                <a:latin typeface="Noto Sans JP"/>
-              </a:rPr>
-              <a:t>倍</a:t>
-            </a:r>
-          </a:p>
-        </p:txBody>
-      </p:sp>
-      <p:sp>
-        <p:nvSpPr>
-          <p:cNvPr id="12" name="TextBox 11"/>
-          <p:cNvSpPr txBox="1"/>
-          <p:nvPr/>
-        </p:nvSpPr>
-        <p:spPr>
-          <a:xfrm>
-            <a:off x="457200" y="1865376"/>
-            <a:ext cx="2094116" cy="292608"/>
-          </a:xfrm>
-          <a:prstGeom prst="rect">
-            <a:avLst/>
-          </a:prstGeom>
-          <a:noFill/>
-        </p:spPr>
-        <p:txBody>
-          <a:bodyPr wrap="square" anchor="t" lIns="36000" rIns="36000" tIns="18000" bIns="18000">
-            <a:spAutoFit/>
-          </a:bodyPr>
-          <a:lstStyle/>
-          <a:p>
-            <a:pPr algn="ctr"/>
-            <a:r>
-              <a:rPr sz="1200" b="1" i="0">
-                <a:solidFill>
-                  <a:srgbClr val="334155"/>
-                </a:solidFill>
-                <a:latin typeface="Noto Sans JP"/>
-              </a:rPr>
-              <a:t>大規模山火事の増加</a:t>
-            </a:r>
-          </a:p>
-        </p:txBody>
-      </p:sp>
-      <p:sp>
-        <p:nvSpPr>
-          <p:cNvPr id="13" name="TextBox 12"/>
-          <p:cNvSpPr txBox="1"/>
-          <p:nvPr/>
-        </p:nvSpPr>
-        <p:spPr>
-          <a:xfrm>
-            <a:off x="457200" y="2157984"/>
-            <a:ext cx="2094116" cy="274320"/>
-          </a:xfrm>
-          <a:prstGeom prst="rect">
-            <a:avLst/>
-          </a:prstGeom>
-          <a:noFill/>
-        </p:spPr>
-        <p:txBody>
-          <a:bodyPr wrap="square" anchor="t" lIns="36000" rIns="36000" tIns="18000" bIns="18000">
-            <a:spAutoFit/>
-          </a:bodyPr>
-          <a:lstStyle/>
-          <a:p>
-            <a:pPr algn="ctr"/>
-            <a:r>
-              <a:rPr sz="1000" b="0" i="0">
-                <a:solidFill>
-                  <a:srgbClr val="64748B"/>
-                </a:solidFill>
-                <a:latin typeface="Noto Sans JP"/>
-              </a:rPr>
-              <a:t>過去30年で焼失面積拡大</a:t>
-            </a:r>
-          </a:p>
-        </p:txBody>
-      </p:sp>
-      <p:sp>
-        <p:nvSpPr>
-          <p:cNvPr id="14" name="Rounded Rectangle 13"/>
-          <p:cNvSpPr/>
-          <p:nvPr/>
-        </p:nvSpPr>
-        <p:spPr>
-          <a:xfrm>
-            <a:off x="2734196" y="859536"/>
-            <a:ext cx="2276996" cy="1554480"/>
-          </a:xfrm>
-          <a:prstGeom prst="roundRect">
-            <a:avLst>
-              <a:gd name="adj" fmla="val 4000"/>
-            </a:avLst>
-          </a:prstGeom>
-          <a:solidFill>
-            <a:srgbClr val="F1F5F9"/>
-          </a:solidFill>
-          <a:ln w="6350">
-            <a:solidFill>
-              <a:srgbClr val="E2E8F0"/>
-            </a:solidFill>
-          </a:ln>
-          <a:effectLst/>
-        </p:spPr>
-        <p:style>
-          <a:lnRef idx="1">
-            <a:schemeClr val="accent1"/>
-          </a:lnRef>
-          <a:fillRef idx="3">
-            <a:schemeClr val="accent1"/>
-          </a:fillRef>
-          <a:effectRef idx="2">
-            <a:schemeClr val="accent1"/>
-          </a:effectRef>
-          <a:fontRef idx="minor">
-            <a:schemeClr val="lt1"/>
-          </a:fontRef>
-        </p:style>
-        <p:txBody>
-          <a:bodyPr rtlCol="0" anchor="ctr"/>
-          <a:lstStyle/>
-          <a:p>
-            <a:pPr algn="ctr"/>
-          </a:p>
-        </p:txBody>
-      </p:sp>
-      <p:sp>
-        <p:nvSpPr>
-          <p:cNvPr id="15" name="TextBox 14"/>
-          <p:cNvSpPr txBox="1"/>
-          <p:nvPr/>
-        </p:nvSpPr>
-        <p:spPr>
-          <a:xfrm>
-            <a:off x="2734196" y="1042416"/>
-            <a:ext cx="2276996" cy="777240"/>
-          </a:xfrm>
-          <a:prstGeom prst="rect">
-            <a:avLst/>
-          </a:prstGeom>
-          <a:noFill/>
-        </p:spPr>
-        <p:txBody>
-          <a:bodyPr wrap="square" anchor="ctr" lIns="36000" rIns="36000" tIns="18000" bIns="18000">
-            <a:spAutoFit/>
-          </a:bodyPr>
-          <a:lstStyle/>
-          <a:p>
-            <a:pPr algn="ctr"/>
-            <a:r>
-              <a:rPr sz="4000" b="1" i="0">
-                <a:solidFill>
-                  <a:srgbClr val="1E293B"/>
-                </a:solidFill>
-                <a:latin typeface="Noto Sans JP"/>
-              </a:rPr>
-              <a:t>400</a:t>
-            </a:r>
-            <a:r>
-              <a:rPr sz="1800" b="0" i="0">
-                <a:solidFill>
-                  <a:srgbClr val="475569"/>
-                </a:solidFill>
-                <a:latin typeface="Noto Sans JP"/>
-              </a:rPr>
-              <a:t>万km²</a:t>
-            </a:r>
-          </a:p>
-        </p:txBody>
-      </p:sp>
-      <p:sp>
-        <p:nvSpPr>
-          <p:cNvPr id="16" name="TextBox 15"/>
-          <p:cNvSpPr txBox="1"/>
-          <p:nvPr/>
-        </p:nvSpPr>
-        <p:spPr>
-          <a:xfrm>
-            <a:off x="2825636" y="1865376"/>
-            <a:ext cx="2094116" cy="292608"/>
-          </a:xfrm>
-          <a:prstGeom prst="rect">
-            <a:avLst/>
-          </a:prstGeom>
-          <a:noFill/>
-        </p:spPr>
-        <p:txBody>
-          <a:bodyPr wrap="square" anchor="t" lIns="36000" rIns="36000" tIns="18000" bIns="18000">
-            <a:spAutoFit/>
-          </a:bodyPr>
-          <a:lstStyle/>
-          <a:p>
-            <a:pPr algn="ctr"/>
-            <a:r>
-              <a:rPr sz="1200" b="1" i="0">
-                <a:solidFill>
-                  <a:srgbClr val="334155"/>
-                </a:solidFill>
-                <a:latin typeface="Noto Sans JP"/>
-              </a:rPr>
-              <a:t>年間焼失面積（世界）</a:t>
-            </a:r>
-          </a:p>
-        </p:txBody>
-      </p:sp>
-      <p:sp>
-        <p:nvSpPr>
-          <p:cNvPr id="17" name="TextBox 16"/>
-          <p:cNvSpPr txBox="1"/>
-          <p:nvPr/>
-        </p:nvSpPr>
-        <p:spPr>
-          <a:xfrm>
-            <a:off x="2825636" y="2157984"/>
-            <a:ext cx="2094116" cy="274320"/>
-          </a:xfrm>
-          <a:prstGeom prst="rect">
-            <a:avLst/>
-          </a:prstGeom>
-          <a:noFill/>
-        </p:spPr>
-        <p:txBody>
-          <a:bodyPr wrap="square" anchor="t" lIns="36000" rIns="36000" tIns="18000" bIns="18000">
-            <a:spAutoFit/>
-          </a:bodyPr>
-          <a:lstStyle/>
-          <a:p>
-            <a:pPr algn="ctr"/>
-            <a:r>
-              <a:rPr sz="1000" b="0" i="0">
-                <a:solidFill>
-                  <a:srgbClr val="64748B"/>
-                </a:solidFill>
-                <a:latin typeface="Noto Sans JP"/>
-              </a:rPr>
-              <a:t>気候変動・干ばつが要因</a:t>
-            </a:r>
-          </a:p>
-        </p:txBody>
-      </p:sp>
-      <p:sp>
-        <p:nvSpPr>
-          <p:cNvPr id="18" name="Rounded Rectangle 17"/>
-          <p:cNvSpPr/>
-          <p:nvPr/>
-        </p:nvSpPr>
-        <p:spPr>
-          <a:xfrm>
-            <a:off x="5102632" y="859536"/>
-            <a:ext cx="2276996" cy="1554480"/>
-          </a:xfrm>
-          <a:prstGeom prst="roundRect">
-            <a:avLst>
-              <a:gd name="adj" fmla="val 4000"/>
-            </a:avLst>
-          </a:prstGeom>
-          <a:solidFill>
-            <a:srgbClr val="F1F5F9"/>
-          </a:solidFill>
-          <a:ln w="6350">
-            <a:solidFill>
-              <a:srgbClr val="E2E8F0"/>
-            </a:solidFill>
-          </a:ln>
-          <a:effectLst/>
-        </p:spPr>
-        <p:style>
-          <a:lnRef idx="1">
-            <a:schemeClr val="accent1"/>
-          </a:lnRef>
-          <a:fillRef idx="3">
-            <a:schemeClr val="accent1"/>
-          </a:fillRef>
-          <a:effectRef idx="2">
-            <a:schemeClr val="accent1"/>
-          </a:effectRef>
-          <a:fontRef idx="minor">
-            <a:schemeClr val="lt1"/>
-          </a:fontRef>
-        </p:style>
-        <p:txBody>
-          <a:bodyPr rtlCol="0" anchor="ctr"/>
-          <a:lstStyle/>
-          <a:p>
-            <a:pPr algn="ctr"/>
-          </a:p>
-        </p:txBody>
-      </p:sp>
-      <p:sp>
-        <p:nvSpPr>
-          <p:cNvPr id="19" name="TextBox 18"/>
-          <p:cNvSpPr txBox="1"/>
-          <p:nvPr/>
-        </p:nvSpPr>
-        <p:spPr>
-          <a:xfrm>
-            <a:off x="5102632" y="1042416"/>
-            <a:ext cx="2276996" cy="777240"/>
-          </a:xfrm>
-          <a:prstGeom prst="rect">
-            <a:avLst/>
-          </a:prstGeom>
-          <a:noFill/>
-        </p:spPr>
-        <p:txBody>
-          <a:bodyPr wrap="square" anchor="ctr" lIns="36000" rIns="36000" tIns="18000" bIns="18000">
-            <a:spAutoFit/>
-          </a:bodyPr>
-          <a:lstStyle/>
-          <a:p>
-            <a:pPr algn="ctr"/>
-            <a:r>
-              <a:rPr sz="4200" b="1" i="0">
-                <a:solidFill>
-                  <a:srgbClr val="1E293B"/>
-                </a:solidFill>
-                <a:latin typeface="Noto Sans JP"/>
-              </a:rPr>
-              <a:t>4500</a:t>
-            </a:r>
-            <a:r>
-              <a:rPr sz="1800" b="0" i="0">
-                <a:solidFill>
-                  <a:srgbClr val="475569"/>
-                </a:solidFill>
-                <a:latin typeface="Noto Sans JP"/>
-              </a:rPr>
-              <a:t>万人</a:t>
-            </a:r>
-          </a:p>
-        </p:txBody>
-      </p:sp>
-      <p:sp>
-        <p:nvSpPr>
-          <p:cNvPr id="20" name="TextBox 19"/>
-          <p:cNvSpPr txBox="1"/>
-          <p:nvPr/>
-        </p:nvSpPr>
-        <p:spPr>
-          <a:xfrm>
-            <a:off x="5194072" y="1865376"/>
-            <a:ext cx="2094116" cy="292608"/>
-          </a:xfrm>
-          <a:prstGeom prst="rect">
-            <a:avLst/>
-          </a:prstGeom>
-          <a:noFill/>
-        </p:spPr>
-        <p:txBody>
-          <a:bodyPr wrap="square" anchor="t" lIns="36000" rIns="36000" tIns="18000" bIns="18000">
-            <a:spAutoFit/>
-          </a:bodyPr>
-          <a:lstStyle/>
-          <a:p>
-            <a:pPr algn="ctr"/>
-            <a:r>
-              <a:rPr sz="1200" b="1" i="0">
-                <a:solidFill>
-                  <a:srgbClr val="334155"/>
-                </a:solidFill>
-                <a:latin typeface="Noto Sans JP"/>
-              </a:rPr>
-              <a:t>米国WUI居住者</a:t>
-            </a:r>
-          </a:p>
-        </p:txBody>
-      </p:sp>
-      <p:sp>
-        <p:nvSpPr>
-          <p:cNvPr id="21" name="TextBox 20"/>
-          <p:cNvSpPr txBox="1"/>
-          <p:nvPr/>
-        </p:nvSpPr>
-        <p:spPr>
-          <a:xfrm>
-            <a:off x="5194072" y="2157984"/>
-            <a:ext cx="2094116" cy="274320"/>
-          </a:xfrm>
-          <a:prstGeom prst="rect">
-            <a:avLst/>
-          </a:prstGeom>
-          <a:noFill/>
-        </p:spPr>
-        <p:txBody>
-          <a:bodyPr wrap="square" anchor="t" lIns="36000" rIns="36000" tIns="18000" bIns="18000">
-            <a:spAutoFit/>
-          </a:bodyPr>
-          <a:lstStyle/>
-          <a:p>
-            <a:pPr algn="ctr"/>
-            <a:r>
-              <a:rPr sz="1000" b="0" i="0">
-                <a:solidFill>
-                  <a:srgbClr val="64748B"/>
-                </a:solidFill>
-                <a:latin typeface="Noto Sans JP"/>
-              </a:rPr>
-              <a:t>境界帯のリスク層</a:t>
-            </a:r>
-          </a:p>
-        </p:txBody>
-      </p:sp>
-      <p:sp>
-        <p:nvSpPr>
-          <p:cNvPr id="22" name="Rounded Rectangle 21"/>
-          <p:cNvSpPr/>
-          <p:nvPr/>
-        </p:nvSpPr>
-        <p:spPr>
-          <a:xfrm>
-            <a:off x="365760" y="2596896"/>
-            <a:ext cx="7013868" cy="914400"/>
-          </a:xfrm>
-          <a:prstGeom prst="roundRect">
-            <a:avLst>
-              <a:gd name="adj" fmla="val 4000"/>
-            </a:avLst>
-          </a:prstGeom>
-          <a:solidFill>
-            <a:srgbClr val="FFFFFF"/>
-          </a:solidFill>
-          <a:ln w="6350">
-            <a:solidFill>
-              <a:srgbClr val="E2E8F0"/>
-            </a:solidFill>
-          </a:ln>
-          <a:effectLst/>
-        </p:spPr>
-        <p:style>
-          <a:lnRef idx="1">
-            <a:schemeClr val="accent1"/>
-          </a:lnRef>
-          <a:fillRef idx="3">
-            <a:schemeClr val="accent1"/>
-          </a:fillRef>
-          <a:effectRef idx="2">
-            <a:schemeClr val="accent1"/>
-          </a:effectRef>
-          <a:fontRef idx="minor">
-            <a:schemeClr val="lt1"/>
-          </a:fontRef>
-        </p:style>
-        <p:txBody>
-          <a:bodyPr rtlCol="0" anchor="ctr"/>
-          <a:lstStyle/>
-          <a:p>
-            <a:pPr algn="ctr"/>
-          </a:p>
-        </p:txBody>
-      </p:sp>
-      <p:sp>
-        <p:nvSpPr>
-          <p:cNvPr id="23" name="TextBox 22"/>
-          <p:cNvSpPr txBox="1"/>
-          <p:nvPr/>
-        </p:nvSpPr>
-        <p:spPr>
-          <a:xfrm>
-            <a:off x="548640" y="2724912"/>
-            <a:ext cx="6648108" cy="274320"/>
-          </a:xfrm>
-          <a:prstGeom prst="rect">
-            <a:avLst/>
-          </a:prstGeom>
-          <a:noFill/>
-        </p:spPr>
-        <p:txBody>
-          <a:bodyPr wrap="square" anchor="t" lIns="36000" rIns="36000" tIns="18000" bIns="18000">
-            <a:spAutoFit/>
-          </a:bodyPr>
-          <a:lstStyle/>
-          <a:p>
-            <a:pPr algn="l"/>
-            <a:r>
-              <a:rPr sz="1100" b="1" i="0">
-                <a:solidFill>
-                  <a:srgbClr val="64748B"/>
-                </a:solidFill>
-                <a:latin typeface="Noto Sans JP"/>
-              </a:rPr>
-              <a:t>用語</a:t>
-            </a:r>
-          </a:p>
-        </p:txBody>
-      </p:sp>
-      <p:sp>
-        <p:nvSpPr>
-          <p:cNvPr id="24" name="TextBox 23"/>
-          <p:cNvSpPr txBox="1"/>
-          <p:nvPr/>
-        </p:nvSpPr>
-        <p:spPr>
-          <a:xfrm>
-            <a:off x="548640" y="2980944"/>
-            <a:ext cx="6648108" cy="502920"/>
-          </a:xfrm>
-          <a:prstGeom prst="rect">
-            <a:avLst/>
-          </a:prstGeom>
-          <a:noFill/>
-        </p:spPr>
-        <p:txBody>
-          <a:bodyPr wrap="square" anchor="t" lIns="36000" rIns="36000" tIns="18000" bIns="18000">
-            <a:spAutoFit/>
-          </a:bodyPr>
-          <a:lstStyle/>
-          <a:p>
-            <a:pPr algn="l"/>
-            <a:r>
-              <a:rPr sz="1300" b="0" i="0">
-                <a:solidFill>
-                  <a:srgbClr val="1E293B"/>
-                </a:solidFill>
-                <a:latin typeface="Noto Sans JP"/>
-              </a:rPr>
-              <a:t>WUI（Wildland-Urban Interface）：野生地と都市の境界帯。山火事被害が住宅に直接及ぶ高リスク領域</a:t>
-            </a:r>
-          </a:p>
-        </p:txBody>
-      </p:sp>
-      <p:sp>
-        <p:nvSpPr>
-          <p:cNvPr id="25" name="Rounded Rectangle 24"/>
-          <p:cNvSpPr/>
-          <p:nvPr/>
-        </p:nvSpPr>
-        <p:spPr>
-          <a:xfrm>
-            <a:off x="365760" y="3675888"/>
-            <a:ext cx="7013868" cy="594360"/>
-          </a:xfrm>
-          <a:prstGeom prst="roundRect">
-            <a:avLst>
-              <a:gd name="adj" fmla="val 4000"/>
-            </a:avLst>
-          </a:prstGeom>
-          <a:solidFill>
-            <a:srgbClr val="F8FAFC"/>
-          </a:solidFill>
-          <a:ln>
-            <a:noFill/>
-          </a:ln>
-          <a:effectLst/>
-        </p:spPr>
-        <p:style>
-          <a:lnRef idx="1">
-            <a:schemeClr val="accent1"/>
-          </a:lnRef>
-          <a:fillRef idx="3">
-            <a:schemeClr val="accent1"/>
-          </a:fillRef>
-          <a:effectRef idx="2">
-            <a:schemeClr val="accent1"/>
-          </a:effectRef>
-          <a:fontRef idx="minor">
-            <a:schemeClr val="lt1"/>
-          </a:fontRef>
-        </p:style>
-        <p:txBody>
-          <a:bodyPr rtlCol="0" anchor="ctr"/>
-          <a:lstStyle/>
-          <a:p>
-            <a:pPr algn="ctr"/>
-          </a:p>
-        </p:txBody>
-      </p:sp>
-      <p:sp>
-        <p:nvSpPr>
-          <p:cNvPr id="26" name="Rectangle 25"/>
-          <p:cNvSpPr/>
-          <p:nvPr/>
-        </p:nvSpPr>
-        <p:spPr>
-          <a:xfrm>
-            <a:off x="365760" y="3675888"/>
-            <a:ext cx="54864" cy="594360"/>
+            <a:ext cx="45720" cy="1645920"/>
           </a:xfrm>
           <a:prstGeom prst="rect">
             <a:avLst/>
@@ -47563,57 +46913,57 @@
       </p:sp>
       <p:sp>
         <p:nvSpPr>
-          <p:cNvPr id="27" name="TextBox 26"/>
-          <p:cNvSpPr txBox="1"/>
-          <p:nvPr/>
-        </p:nvSpPr>
-        <p:spPr>
-          <a:xfrm>
-            <a:off x="548640" y="3675888"/>
-            <a:ext cx="365760" cy="594360"/>
-          </a:xfrm>
-          <a:prstGeom prst="rect">
-            <a:avLst/>
-          </a:prstGeom>
-          <a:noFill/>
-        </p:spPr>
-        <p:txBody>
-          <a:bodyPr wrap="square" anchor="ctr" lIns="36000" rIns="36000" tIns="18000" bIns="18000">
-            <a:spAutoFit/>
-          </a:bodyPr>
-          <a:lstStyle/>
-          <a:p>
-            <a:pPr algn="l"/>
-            <a:r>
-              <a:rPr sz="1400" b="0" i="0">
-                <a:solidFill>
-                  <a:srgbClr val="3B5174"/>
-                </a:solidFill>
-                <a:latin typeface="Noto Sans JP"/>
-              </a:rPr>
-              <a:t>⚠</a:t>
-            </a:r>
-          </a:p>
-        </p:txBody>
-      </p:sp>
-      <p:sp>
-        <p:nvSpPr>
-          <p:cNvPr id="28" name="TextBox 27"/>
-          <p:cNvSpPr txBox="1"/>
-          <p:nvPr/>
-        </p:nvSpPr>
-        <p:spPr>
-          <a:xfrm>
-            <a:off x="960120" y="3675888"/>
-            <a:ext cx="6328068" cy="594360"/>
-          </a:xfrm>
-          <a:prstGeom prst="rect">
-            <a:avLst/>
-          </a:prstGeom>
-          <a:noFill/>
-        </p:spPr>
-        <p:txBody>
-          <a:bodyPr wrap="square" anchor="ctr" lIns="36000" rIns="36000" tIns="18000" bIns="18000">
+          <p:cNvPr id="11" name="TextBox 10"/>
+          <p:cNvSpPr txBox="1"/>
+          <p:nvPr/>
+        </p:nvSpPr>
+        <p:spPr>
+          <a:xfrm>
+            <a:off x="530352" y="859536"/>
+            <a:ext cx="4538953" cy="1005840"/>
+          </a:xfrm>
+          <a:prstGeom prst="rect">
+            <a:avLst/>
+          </a:prstGeom>
+          <a:noFill/>
+        </p:spPr>
+        <p:txBody>
+          <a:bodyPr wrap="square" anchor="t" lIns="36000" rIns="36000" tIns="18000" bIns="18000">
+            <a:spAutoFit/>
+          </a:bodyPr>
+          <a:lstStyle/>
+          <a:p>
+            <a:pPr algn="l"/>
+            <a:r>
+              <a:rPr sz="6800" b="1" i="0">
+                <a:solidFill>
+                  <a:srgbClr val="1E293B"/>
+                </a:solidFill>
+                <a:latin typeface="Noto Sans JP"/>
+              </a:rPr>
+              <a:t>5×</a:t>
+            </a:r>
+          </a:p>
+        </p:txBody>
+      </p:sp>
+      <p:sp>
+        <p:nvSpPr>
+          <p:cNvPr id="12" name="TextBox 11"/>
+          <p:cNvSpPr txBox="1"/>
+          <p:nvPr/>
+        </p:nvSpPr>
+        <p:spPr>
+          <a:xfrm>
+            <a:off x="530352" y="1847088"/>
+            <a:ext cx="4538953" cy="292608"/>
+          </a:xfrm>
+          <a:prstGeom prst="rect">
+            <a:avLst/>
+          </a:prstGeom>
+          <a:noFill/>
+        </p:spPr>
+        <p:txBody>
+          <a:bodyPr wrap="square" anchor="t" lIns="36000" rIns="36000" tIns="18000" bIns="18000">
             <a:spAutoFit/>
           </a:bodyPr>
           <a:lstStyle/>
@@ -47622,25 +46972,344 @@
             <a:r>
               <a:rPr sz="1300" b="1" i="0">
                 <a:solidFill>
+                  <a:srgbClr val="334155"/>
+                </a:solidFill>
+                <a:latin typeface="Noto Sans JP"/>
+              </a:rPr>
+              <a:t>大規模山火事の増加（過去30年）</a:t>
+            </a:r>
+          </a:p>
+        </p:txBody>
+      </p:sp>
+      <p:sp>
+        <p:nvSpPr>
+          <p:cNvPr id="13" name="TextBox 12"/>
+          <p:cNvSpPr txBox="1"/>
+          <p:nvPr/>
+        </p:nvSpPr>
+        <p:spPr>
+          <a:xfrm>
+            <a:off x="530352" y="2139696"/>
+            <a:ext cx="4538953" cy="256032"/>
+          </a:xfrm>
+          <a:prstGeom prst="rect">
+            <a:avLst/>
+          </a:prstGeom>
+          <a:noFill/>
+        </p:spPr>
+        <p:txBody>
+          <a:bodyPr wrap="square" anchor="t" lIns="36000" rIns="36000" tIns="18000" bIns="18000">
+            <a:spAutoFit/>
+          </a:bodyPr>
+          <a:lstStyle/>
+          <a:p>
+            <a:pPr algn="l"/>
+            <a:r>
+              <a:rPr sz="1100" b="0" i="0">
+                <a:solidFill>
+                  <a:srgbClr val="64748B"/>
+                </a:solidFill>
+                <a:latin typeface="Noto Sans JP"/>
+              </a:rPr>
+              <a:t>気候変動・干ばつが主要因</a:t>
+            </a:r>
+          </a:p>
+        </p:txBody>
+      </p:sp>
+      <p:sp>
+        <p:nvSpPr>
+          <p:cNvPr id="14" name="Rectangle 13"/>
+          <p:cNvSpPr/>
+          <p:nvPr/>
+        </p:nvSpPr>
+        <p:spPr>
+          <a:xfrm>
+            <a:off x="530352" y="2560320"/>
+            <a:ext cx="3527659" cy="18288"/>
+          </a:xfrm>
+          <a:prstGeom prst="rect">
+            <a:avLst/>
+          </a:prstGeom>
+          <a:solidFill>
+            <a:srgbClr val="E2E8F0"/>
+          </a:solidFill>
+          <a:ln>
+            <a:noFill/>
+          </a:ln>
+          <a:effectLst/>
+        </p:spPr>
+        <p:style>
+          <a:lnRef idx="1">
+            <a:schemeClr val="accent1"/>
+          </a:lnRef>
+          <a:fillRef idx="3">
+            <a:schemeClr val="accent1"/>
+          </a:fillRef>
+          <a:effectRef idx="2">
+            <a:schemeClr val="accent1"/>
+          </a:effectRef>
+          <a:fontRef idx="minor">
+            <a:schemeClr val="lt1"/>
+          </a:fontRef>
+        </p:style>
+        <p:txBody>
+          <a:bodyPr rtlCol="0" anchor="ctr"/>
+          <a:lstStyle/>
+          <a:p>
+            <a:pPr algn="ctr"/>
+          </a:p>
+        </p:txBody>
+      </p:sp>
+      <p:sp>
+        <p:nvSpPr>
+          <p:cNvPr id="15" name="Rectangle 14"/>
+          <p:cNvSpPr/>
+          <p:nvPr/>
+        </p:nvSpPr>
+        <p:spPr>
+          <a:xfrm>
+            <a:off x="365760" y="2761488"/>
+            <a:ext cx="45720" cy="1463040"/>
+          </a:xfrm>
+          <a:prstGeom prst="rect">
+            <a:avLst/>
+          </a:prstGeom>
+          <a:solidFill>
+            <a:srgbClr val="9F7639"/>
+          </a:solidFill>
+          <a:ln>
+            <a:noFill/>
+          </a:ln>
+          <a:effectLst/>
+        </p:spPr>
+        <p:style>
+          <a:lnRef idx="1">
+            <a:schemeClr val="accent1"/>
+          </a:lnRef>
+          <a:fillRef idx="3">
+            <a:schemeClr val="accent1"/>
+          </a:fillRef>
+          <a:effectRef idx="2">
+            <a:schemeClr val="accent1"/>
+          </a:effectRef>
+          <a:fontRef idx="minor">
+            <a:schemeClr val="lt1"/>
+          </a:fontRef>
+        </p:style>
+        <p:txBody>
+          <a:bodyPr rtlCol="0" anchor="ctr"/>
+          <a:lstStyle/>
+          <a:p>
+            <a:pPr algn="ctr"/>
+          </a:p>
+        </p:txBody>
+      </p:sp>
+      <p:sp>
+        <p:nvSpPr>
+          <p:cNvPr id="16" name="TextBox 15"/>
+          <p:cNvSpPr txBox="1"/>
+          <p:nvPr/>
+        </p:nvSpPr>
+        <p:spPr>
+          <a:xfrm>
+            <a:off x="530352" y="2761488"/>
+            <a:ext cx="4538953" cy="822960"/>
+          </a:xfrm>
+          <a:prstGeom prst="rect">
+            <a:avLst/>
+          </a:prstGeom>
+          <a:noFill/>
+        </p:spPr>
+        <p:txBody>
+          <a:bodyPr wrap="square" anchor="t" lIns="36000" rIns="36000" tIns="18000" bIns="18000">
+            <a:spAutoFit/>
+          </a:bodyPr>
+          <a:lstStyle/>
+          <a:p>
+            <a:pPr algn="l"/>
+            <a:r>
+              <a:rPr sz="4000" b="1" i="0">
+                <a:solidFill>
                   <a:srgbClr val="1E293B"/>
                 </a:solidFill>
                 <a:latin typeface="Noto Sans JP"/>
               </a:rPr>
-              <a:t>気候変動により乾燥・強風期間が延長 → 従来の消火戦略では対応が追いつかない</a:t>
-            </a:r>
-          </a:p>
-        </p:txBody>
-      </p:sp>
-      <p:sp>
-        <p:nvSpPr>
-          <p:cNvPr id="29" name="Rounded Rectangle 28"/>
+              <a:t>4500万人</a:t>
+            </a:r>
+          </a:p>
+        </p:txBody>
+      </p:sp>
+      <p:sp>
+        <p:nvSpPr>
+          <p:cNvPr id="17" name="TextBox 16"/>
+          <p:cNvSpPr txBox="1"/>
+          <p:nvPr/>
+        </p:nvSpPr>
+        <p:spPr>
+          <a:xfrm>
+            <a:off x="530352" y="3584448"/>
+            <a:ext cx="4538953" cy="292608"/>
+          </a:xfrm>
+          <a:prstGeom prst="rect">
+            <a:avLst/>
+          </a:prstGeom>
+          <a:noFill/>
+        </p:spPr>
+        <p:txBody>
+          <a:bodyPr wrap="square" anchor="t" lIns="36000" rIns="36000" tIns="18000" bIns="18000">
+            <a:spAutoFit/>
+          </a:bodyPr>
+          <a:lstStyle/>
+          <a:p>
+            <a:pPr algn="l"/>
+            <a:r>
+              <a:rPr sz="1300" b="1" i="0">
+                <a:solidFill>
+                  <a:srgbClr val="334155"/>
+                </a:solidFill>
+                <a:latin typeface="Noto Sans JP"/>
+              </a:rPr>
+              <a:t>米国WUI居住者</a:t>
+            </a:r>
+          </a:p>
+        </p:txBody>
+      </p:sp>
+      <p:sp>
+        <p:nvSpPr>
+          <p:cNvPr id="18" name="TextBox 17"/>
+          <p:cNvSpPr txBox="1"/>
+          <p:nvPr/>
+        </p:nvSpPr>
+        <p:spPr>
+          <a:xfrm>
+            <a:off x="530352" y="3877056"/>
+            <a:ext cx="4538953" cy="256032"/>
+          </a:xfrm>
+          <a:prstGeom prst="rect">
+            <a:avLst/>
+          </a:prstGeom>
+          <a:noFill/>
+        </p:spPr>
+        <p:txBody>
+          <a:bodyPr wrap="square" anchor="t" lIns="36000" rIns="36000" tIns="18000" bIns="18000">
+            <a:spAutoFit/>
+          </a:bodyPr>
+          <a:lstStyle/>
+          <a:p>
+            <a:pPr algn="l"/>
+            <a:r>
+              <a:rPr sz="1100" b="0" i="0">
+                <a:solidFill>
+                  <a:srgbClr val="64748B"/>
+                </a:solidFill>
+                <a:latin typeface="Noto Sans JP"/>
+              </a:rPr>
+              <a:t>野生地と都市の境界帯（WUI）の高リスク層</a:t>
+            </a:r>
+          </a:p>
+        </p:txBody>
+      </p:sp>
+      <p:sp>
+        <p:nvSpPr>
+          <p:cNvPr id="19" name="Rectangle 18"/>
           <p:cNvSpPr/>
           <p:nvPr/>
         </p:nvSpPr>
         <p:spPr>
           <a:xfrm>
-            <a:off x="7562508" y="859536"/>
-            <a:ext cx="4263426" cy="4206240"/>
+            <a:off x="530352" y="4315968"/>
+            <a:ext cx="4233190" cy="18288"/>
+          </a:xfrm>
+          <a:prstGeom prst="rect">
+            <a:avLst/>
+          </a:prstGeom>
+          <a:solidFill>
+            <a:srgbClr val="E2E8F0"/>
+          </a:solidFill>
+          <a:ln>
+            <a:noFill/>
+          </a:ln>
+          <a:effectLst/>
+        </p:spPr>
+        <p:style>
+          <a:lnRef idx="1">
+            <a:schemeClr val="accent1"/>
+          </a:lnRef>
+          <a:fillRef idx="3">
+            <a:schemeClr val="accent1"/>
+          </a:fillRef>
+          <a:effectRef idx="2">
+            <a:schemeClr val="accent1"/>
+          </a:effectRef>
+          <a:fontRef idx="minor">
+            <a:schemeClr val="lt1"/>
+          </a:fontRef>
+        </p:style>
+        <p:txBody>
+          <a:bodyPr rtlCol="0" anchor="ctr"/>
+          <a:lstStyle/>
+          <a:p>
+            <a:pPr algn="ctr"/>
+          </a:p>
+        </p:txBody>
+      </p:sp>
+      <p:sp>
+        <p:nvSpPr>
+          <p:cNvPr id="20" name="TextBox 19"/>
+          <p:cNvSpPr txBox="1"/>
+          <p:nvPr/>
+        </p:nvSpPr>
+        <p:spPr>
+          <a:xfrm>
+            <a:off x="530352" y="4480560"/>
+            <a:ext cx="4538953" cy="640080"/>
+          </a:xfrm>
+          <a:prstGeom prst="rect">
+            <a:avLst/>
+          </a:prstGeom>
+          <a:noFill/>
+        </p:spPr>
+        <p:txBody>
+          <a:bodyPr wrap="square" anchor="t" lIns="36000" rIns="36000" tIns="18000" bIns="18000">
+            <a:spAutoFit/>
+          </a:bodyPr>
+          <a:lstStyle/>
+          <a:p>
+            <a:pPr algn="l"/>
+            <a:r>
+              <a:rPr sz="1200" b="0" i="1">
+                <a:solidFill>
+                  <a:srgbClr val="475569"/>
+                </a:solidFill>
+                <a:latin typeface="Noto Sans JP"/>
+              </a:rPr>
+              <a:t>乾燥・強風期間の長期化により、</a:t>
+            </a:r>
+          </a:p>
+          <a:p>
+            <a:pPr algn="l"/>
+            <a:r>
+              <a:rPr sz="1200" b="0" i="1">
+                <a:solidFill>
+                  <a:srgbClr val="475569"/>
+                </a:solidFill>
+                <a:latin typeface="Noto Sans JP"/>
+              </a:rPr>
+              <a:t>従来の消火・防火戦略だけでは対応が困難</a:t>
+            </a:r>
+          </a:p>
+        </p:txBody>
+      </p:sp>
+      <p:sp>
+        <p:nvSpPr>
+          <p:cNvPr id="21" name="Rounded Rectangle 20"/>
+          <p:cNvSpPr/>
+          <p:nvPr/>
+        </p:nvSpPr>
+        <p:spPr>
+          <a:xfrm>
+            <a:off x="5252185" y="859536"/>
+            <a:ext cx="6573749" cy="5760720"/>
           </a:xfrm>
           <a:prstGeom prst="roundRect">
             <a:avLst>
@@ -47681,13 +47350,13 @@
       </p:sp>
       <p:sp>
         <p:nvSpPr>
-          <p:cNvPr id="30" name="Rectangle 29"/>
+          <p:cNvPr id="22" name="Rectangle 21"/>
           <p:cNvSpPr/>
           <p:nvPr/>
         </p:nvSpPr>
         <p:spPr>
           <a:xfrm>
-            <a:off x="7672236" y="969264"/>
+            <a:off x="5361913" y="969264"/>
             <a:ext cx="868680" cy="292608"/>
           </a:xfrm>
           <a:prstGeom prst="rect">
@@ -47725,13 +47394,13 @@
       </p:sp>
       <p:sp>
         <p:nvSpPr>
-          <p:cNvPr id="31" name="TextBox 30"/>
-          <p:cNvSpPr txBox="1"/>
-          <p:nvPr/>
-        </p:nvSpPr>
-        <p:spPr>
-          <a:xfrm>
-            <a:off x="7672236" y="969264"/>
+          <p:cNvPr id="23" name="TextBox 22"/>
+          <p:cNvSpPr txBox="1"/>
+          <p:nvPr/>
+        </p:nvSpPr>
+        <p:spPr>
+          <a:xfrm>
+            <a:off x="5361913" y="969264"/>
             <a:ext cx="868680" cy="292608"/>
           </a:xfrm>
           <a:prstGeom prst="rect">
@@ -47753,21 +47422,21 @@
                 </a:solidFill>
                 <a:latin typeface="Noto Sans JP"/>
               </a:rPr>
-              <a:t>Fig. 3c</a:t>
-            </a:r>
-          </a:p>
-        </p:txBody>
-      </p:sp>
-      <p:sp>
-        <p:nvSpPr>
-          <p:cNvPr id="32" name="TextBox 31"/>
-          <p:cNvSpPr txBox="1"/>
-          <p:nvPr/>
-        </p:nvSpPr>
-        <p:spPr>
-          <a:xfrm>
-            <a:off x="7562508" y="859536"/>
-            <a:ext cx="4263426" cy="4206240"/>
+              <a:t>Image</a:t>
+            </a:r>
+          </a:p>
+        </p:txBody>
+      </p:sp>
+      <p:sp>
+        <p:nvSpPr>
+          <p:cNvPr id="24" name="TextBox 23"/>
+          <p:cNvSpPr txBox="1"/>
+          <p:nvPr/>
+        </p:nvSpPr>
+        <p:spPr>
+          <a:xfrm>
+            <a:off x="5252185" y="859536"/>
+            <a:ext cx="6573749" cy="5760720"/>
           </a:xfrm>
           <a:prstGeom prst="rect">
             <a:avLst/>
@@ -47795,14 +47464,14 @@
       </p:sp>
       <p:sp>
         <p:nvSpPr>
-          <p:cNvPr id="33" name="TextBox 32"/>
-          <p:cNvSpPr txBox="1"/>
-          <p:nvPr/>
-        </p:nvSpPr>
-        <p:spPr>
-          <a:xfrm>
-            <a:off x="7562508" y="5102352"/>
-            <a:ext cx="4263426" cy="274320"/>
+          <p:cNvPr id="25" name="TextBox 24"/>
+          <p:cNvSpPr txBox="1"/>
+          <p:nvPr/>
+        </p:nvSpPr>
+        <p:spPr>
+          <a:xfrm>
+            <a:off x="5252185" y="6656832"/>
+            <a:ext cx="6573749" cy="274320"/>
           </a:xfrm>
           <a:prstGeom prst="rect">
             <a:avLst/>
@@ -47823,7 +47492,7 @@
                 </a:solidFill>
                 <a:latin typeface="Noto Sans JP"/>
               </a:rPr>
-              <a:t>直炎接触下での燃焼過程</a:t>
+              <a:t>山火事・WUI境界帯（写真）</a:t>
             </a:r>
           </a:p>
         </p:txBody>
@@ -48180,7 +47849,7 @@
         <p:spPr>
           <a:xfrm>
             <a:off x="365760" y="859536"/>
-            <a:ext cx="11460175" cy="2743200"/>
+            <a:ext cx="11460175" cy="3200400"/>
           </a:xfrm>
           <a:prstGeom prst="roundRect">
             <a:avLst>
@@ -48307,7 +47976,7 @@
         <p:spPr>
           <a:xfrm>
             <a:off x="365760" y="859536"/>
-            <a:ext cx="11460175" cy="2743200"/>
+            <a:ext cx="11460175" cy="3200400"/>
           </a:xfrm>
           <a:prstGeom prst="rect">
             <a:avLst/>
@@ -48341,7 +48010,7 @@
         </p:nvSpPr>
         <p:spPr>
           <a:xfrm>
-            <a:off x="365760" y="3639312"/>
+            <a:off x="365760" y="4096512"/>
             <a:ext cx="11460175" cy="274320"/>
           </a:xfrm>
           <a:prstGeom prst="rect">
@@ -48376,59 +48045,13 @@
         </p:nvSpPr>
         <p:spPr>
           <a:xfrm>
-            <a:off x="365760" y="4014216"/>
-            <a:ext cx="2769031" cy="2011680"/>
+            <a:off x="1549107" y="4315968"/>
+            <a:ext cx="402336" cy="402336"/>
           </a:xfrm>
           <a:prstGeom prst="roundRect">
             <a:avLst>
-              <a:gd name="adj" fmla="val 4000"/>
+              <a:gd name="adj" fmla="val 50000"/>
             </a:avLst>
-          </a:prstGeom>
-          <a:solidFill>
-            <a:srgbClr val="F1F5F9"/>
-          </a:solidFill>
-          <a:ln w="6350">
-            <a:solidFill>
-              <a:srgbClr val="E2E8F0"/>
-            </a:solidFill>
-          </a:ln>
-          <a:effectLst/>
-        </p:spPr>
-        <p:style>
-          <a:lnRef idx="1">
-            <a:schemeClr val="accent1"/>
-          </a:lnRef>
-          <a:fillRef idx="3">
-            <a:schemeClr val="accent1"/>
-          </a:fillRef>
-          <a:effectRef idx="2">
-            <a:schemeClr val="accent1"/>
-          </a:effectRef>
-          <a:fontRef idx="minor">
-            <a:schemeClr val="lt1"/>
-          </a:fontRef>
-        </p:style>
-        <p:txBody>
-          <a:bodyPr rtlCol="0" anchor="ctr"/>
-          <a:lstStyle/>
-          <a:p>
-            <a:pPr algn="ctr"/>
-          </a:p>
-        </p:txBody>
-      </p:sp>
-      <p:sp>
-        <p:nvSpPr>
-          <p:cNvPr id="16" name="Rectangle 15"/>
-          <p:cNvSpPr/>
-          <p:nvPr/>
-        </p:nvSpPr>
-        <p:spPr>
-          <a:xfrm>
-            <a:off x="365760" y="4014216"/>
-            <a:ext cx="2769031" cy="36576"/>
-          </a:xfrm>
-          <a:prstGeom prst="rect">
-            <a:avLst/>
           </a:prstGeom>
           <a:solidFill>
             <a:srgbClr val="3B5174"/>
@@ -48462,132 +48085,58 @@
       </p:sp>
       <p:sp>
         <p:nvSpPr>
-          <p:cNvPr id="17" name="TextBox 16"/>
-          <p:cNvSpPr txBox="1"/>
-          <p:nvPr/>
-        </p:nvSpPr>
-        <p:spPr>
-          <a:xfrm>
-            <a:off x="548640" y="4178808"/>
-            <a:ext cx="2403271" cy="219456"/>
-          </a:xfrm>
-          <a:prstGeom prst="rect">
-            <a:avLst/>
-          </a:prstGeom>
-          <a:noFill/>
-        </p:spPr>
-        <p:txBody>
-          <a:bodyPr wrap="square" anchor="t" lIns="36000" rIns="36000" tIns="18000" bIns="18000">
-            <a:spAutoFit/>
-          </a:bodyPr>
-          <a:lstStyle/>
-          <a:p>
-            <a:pPr algn="l"/>
-            <a:r>
-              <a:rPr sz="1000" b="1" i="0">
-                <a:solidFill>
-                  <a:srgbClr val="64748B"/>
-                </a:solidFill>
-                <a:latin typeface="Noto Sans JP"/>
-              </a:rPr>
-              <a:t>STEP 1</a:t>
-            </a:r>
-          </a:p>
-        </p:txBody>
-      </p:sp>
-      <p:sp>
-        <p:nvSpPr>
-          <p:cNvPr id="18" name="TextBox 17"/>
-          <p:cNvSpPr txBox="1"/>
-          <p:nvPr/>
-        </p:nvSpPr>
-        <p:spPr>
-          <a:xfrm>
-            <a:off x="548640" y="4416552"/>
-            <a:ext cx="2403271" cy="329184"/>
-          </a:xfrm>
-          <a:prstGeom prst="rect">
-            <a:avLst/>
-          </a:prstGeom>
-          <a:noFill/>
-        </p:spPr>
-        <p:txBody>
-          <a:bodyPr wrap="square" anchor="t" lIns="36000" rIns="36000" tIns="18000" bIns="18000">
-            <a:spAutoFit/>
-          </a:bodyPr>
-          <a:lstStyle/>
-          <a:p>
-            <a:pPr algn="l"/>
+          <p:cNvPr id="16" name="TextBox 15"/>
+          <p:cNvSpPr txBox="1"/>
+          <p:nvPr/>
+        </p:nvSpPr>
+        <p:spPr>
+          <a:xfrm>
+            <a:off x="1549107" y="4315968"/>
+            <a:ext cx="402336" cy="402336"/>
+          </a:xfrm>
+          <a:prstGeom prst="rect">
+            <a:avLst/>
+          </a:prstGeom>
+          <a:noFill/>
+        </p:spPr>
+        <p:txBody>
+          <a:bodyPr wrap="square" anchor="ctr" lIns="36000" rIns="36000" tIns="18000" bIns="18000">
+            <a:spAutoFit/>
+          </a:bodyPr>
+          <a:lstStyle/>
+          <a:p>
+            <a:pPr algn="ctr"/>
             <a:r>
               <a:rPr sz="1600" b="1" i="0">
                 <a:solidFill>
-                  <a:srgbClr val="1E293B"/>
-                </a:solidFill>
-                <a:latin typeface="Noto Sans JP"/>
-              </a:rPr>
-              <a:t>ゲル散布</a:t>
-            </a:r>
-          </a:p>
-        </p:txBody>
-      </p:sp>
-      <p:sp>
-        <p:nvSpPr>
-          <p:cNvPr id="19" name="TextBox 18"/>
-          <p:cNvSpPr txBox="1"/>
-          <p:nvPr/>
-        </p:nvSpPr>
-        <p:spPr>
-          <a:xfrm>
-            <a:off x="548640" y="4782312"/>
-            <a:ext cx="2403271" cy="1133856"/>
-          </a:xfrm>
-          <a:prstGeom prst="rect">
-            <a:avLst/>
-          </a:prstGeom>
-          <a:noFill/>
-        </p:spPr>
-        <p:txBody>
-          <a:bodyPr wrap="square" anchor="t" lIns="36000" rIns="36000" tIns="18000" bIns="18000">
-            <a:spAutoFit/>
-          </a:bodyPr>
-          <a:lstStyle/>
-          <a:p>
-            <a:pPr algn="l"/>
-            <a:r>
-              <a:rPr sz="1200" b="0" i="0">
-                <a:solidFill>
-                  <a:srgbClr val="475569"/>
-                </a:solidFill>
-                <a:latin typeface="Noto Sans JP"/>
-              </a:rPr>
-              <a:t>セルロース系ゲルを建物・植生にスプレー塗布</a:t>
-            </a:r>
-          </a:p>
-        </p:txBody>
-      </p:sp>
-      <p:sp>
-        <p:nvSpPr>
-          <p:cNvPr id="20" name="Rounded Rectangle 19"/>
+                  <a:srgbClr val="FFFFFF"/>
+                </a:solidFill>
+                <a:latin typeface="Noto Sans JP"/>
+              </a:rPr>
+              <a:t>1</a:t>
+            </a:r>
+          </a:p>
+        </p:txBody>
+      </p:sp>
+      <p:sp>
+        <p:nvSpPr>
+          <p:cNvPr id="17" name="Rectangle 16"/>
           <p:cNvSpPr/>
           <p:nvPr/>
         </p:nvSpPr>
         <p:spPr>
           <a:xfrm>
-            <a:off x="3262807" y="4014216"/>
-            <a:ext cx="2769031" cy="2011680"/>
-          </a:xfrm>
-          <a:prstGeom prst="roundRect">
-            <a:avLst>
-              <a:gd name="adj" fmla="val 4000"/>
-            </a:avLst>
+            <a:off x="3171367" y="4507992"/>
+            <a:ext cx="54864" cy="18288"/>
+          </a:xfrm>
+          <a:prstGeom prst="rect">
+            <a:avLst/>
           </a:prstGeom>
           <a:solidFill>
-            <a:srgbClr val="F1F5F9"/>
+            <a:srgbClr val="AAB4C0"/>
           </a:solidFill>
-          <a:ln w="6350">
-            <a:solidFill>
-              <a:srgbClr val="E2E8F0"/>
-            </a:solidFill>
+          <a:ln>
+            <a:noFill/>
           </a:ln>
           <a:effectLst/>
         </p:spPr>
@@ -48615,17 +48164,101 @@
       </p:sp>
       <p:sp>
         <p:nvSpPr>
-          <p:cNvPr id="21" name="Rectangle 20"/>
+          <p:cNvPr id="18" name="TextBox 17"/>
+          <p:cNvSpPr txBox="1"/>
+          <p:nvPr/>
+        </p:nvSpPr>
+        <p:spPr>
+          <a:xfrm>
+            <a:off x="365760" y="4846320"/>
+            <a:ext cx="2769031" cy="274320"/>
+          </a:xfrm>
+          <a:prstGeom prst="rect">
+            <a:avLst/>
+          </a:prstGeom>
+          <a:noFill/>
+        </p:spPr>
+        <p:txBody>
+          <a:bodyPr wrap="square" anchor="t" lIns="36000" rIns="36000" tIns="18000" bIns="18000">
+            <a:spAutoFit/>
+          </a:bodyPr>
+          <a:lstStyle/>
+          <a:p>
+            <a:pPr algn="ctr"/>
+            <a:r>
+              <a:rPr sz="1300" b="1" i="0">
+                <a:solidFill>
+                  <a:srgbClr val="1E293B"/>
+                </a:solidFill>
+                <a:latin typeface="Noto Sans JP"/>
+              </a:rPr>
+              <a:t>ゲル散布</a:t>
+            </a:r>
+          </a:p>
+        </p:txBody>
+      </p:sp>
+      <p:sp>
+        <p:nvSpPr>
+          <p:cNvPr id="19" name="TextBox 18"/>
+          <p:cNvSpPr txBox="1"/>
+          <p:nvPr/>
+        </p:nvSpPr>
+        <p:spPr>
+          <a:xfrm>
+            <a:off x="365760" y="5138928"/>
+            <a:ext cx="2769031" cy="548640"/>
+          </a:xfrm>
+          <a:prstGeom prst="rect">
+            <a:avLst/>
+          </a:prstGeom>
+          <a:noFill/>
+        </p:spPr>
+        <p:txBody>
+          <a:bodyPr wrap="square" anchor="t" lIns="36000" rIns="36000" tIns="18000" bIns="18000">
+            <a:spAutoFit/>
+          </a:bodyPr>
+          <a:lstStyle/>
+          <a:p>
+            <a:pPr algn="ctr"/>
+            <a:r>
+              <a:rPr sz="1100" b="0" i="0">
+                <a:solidFill>
+                  <a:srgbClr val="475569"/>
+                </a:solidFill>
+                <a:latin typeface="Noto Sans JP"/>
+              </a:rPr>
+              <a:t>セルロース系ゲルを</a:t>
+            </a:r>
+          </a:p>
+          <a:p>
+            <a:pPr algn="ctr"/>
+            <a:r>
+              <a:rPr sz="1100" b="0" i="0">
+                <a:solidFill>
+                  <a:srgbClr val="475569"/>
+                </a:solidFill>
+                <a:latin typeface="Noto Sans JP"/>
+              </a:rPr>
+              <a:t>建物・植生にスプレー塗布</a:t>
+            </a:r>
+          </a:p>
+        </p:txBody>
+      </p:sp>
+      <p:sp>
+        <p:nvSpPr>
+          <p:cNvPr id="20" name="Rounded Rectangle 19"/>
           <p:cNvSpPr/>
           <p:nvPr/>
         </p:nvSpPr>
         <p:spPr>
           <a:xfrm>
-            <a:off x="3262807" y="4014216"/>
-            <a:ext cx="2769031" cy="36576"/>
-          </a:xfrm>
-          <a:prstGeom prst="rect">
-            <a:avLst/>
+            <a:off x="4446155" y="4315968"/>
+            <a:ext cx="402336" cy="402336"/>
+          </a:xfrm>
+          <a:prstGeom prst="roundRect">
+            <a:avLst>
+              <a:gd name="adj" fmla="val 50000"/>
+            </a:avLst>
           </a:prstGeom>
           <a:solidFill>
             <a:srgbClr val="3B5174"/>
@@ -48659,132 +48292,58 @@
       </p:sp>
       <p:sp>
         <p:nvSpPr>
-          <p:cNvPr id="22" name="TextBox 21"/>
-          <p:cNvSpPr txBox="1"/>
-          <p:nvPr/>
-        </p:nvSpPr>
-        <p:spPr>
-          <a:xfrm>
-            <a:off x="3445687" y="4178808"/>
-            <a:ext cx="2403271" cy="219456"/>
-          </a:xfrm>
-          <a:prstGeom prst="rect">
-            <a:avLst/>
-          </a:prstGeom>
-          <a:noFill/>
-        </p:spPr>
-        <p:txBody>
-          <a:bodyPr wrap="square" anchor="t" lIns="36000" rIns="36000" tIns="18000" bIns="18000">
-            <a:spAutoFit/>
-          </a:bodyPr>
-          <a:lstStyle/>
-          <a:p>
-            <a:pPr algn="l"/>
-            <a:r>
-              <a:rPr sz="1000" b="1" i="0">
-                <a:solidFill>
-                  <a:srgbClr val="64748B"/>
-                </a:solidFill>
-                <a:latin typeface="Noto Sans JP"/>
-              </a:rPr>
-              <a:t>STEP 2</a:t>
-            </a:r>
-          </a:p>
-        </p:txBody>
-      </p:sp>
-      <p:sp>
-        <p:nvSpPr>
-          <p:cNvPr id="23" name="TextBox 22"/>
-          <p:cNvSpPr txBox="1"/>
-          <p:nvPr/>
-        </p:nvSpPr>
-        <p:spPr>
-          <a:xfrm>
-            <a:off x="3445687" y="4416552"/>
-            <a:ext cx="2403271" cy="329184"/>
-          </a:xfrm>
-          <a:prstGeom prst="rect">
-            <a:avLst/>
-          </a:prstGeom>
-          <a:noFill/>
-        </p:spPr>
-        <p:txBody>
-          <a:bodyPr wrap="square" anchor="t" lIns="36000" rIns="36000" tIns="18000" bIns="18000">
-            <a:spAutoFit/>
-          </a:bodyPr>
-          <a:lstStyle/>
-          <a:p>
-            <a:pPr algn="l"/>
+          <p:cNvPr id="21" name="TextBox 20"/>
+          <p:cNvSpPr txBox="1"/>
+          <p:nvPr/>
+        </p:nvSpPr>
+        <p:spPr>
+          <a:xfrm>
+            <a:off x="4446155" y="4315968"/>
+            <a:ext cx="402336" cy="402336"/>
+          </a:xfrm>
+          <a:prstGeom prst="rect">
+            <a:avLst/>
+          </a:prstGeom>
+          <a:noFill/>
+        </p:spPr>
+        <p:txBody>
+          <a:bodyPr wrap="square" anchor="ctr" lIns="36000" rIns="36000" tIns="18000" bIns="18000">
+            <a:spAutoFit/>
+          </a:bodyPr>
+          <a:lstStyle/>
+          <a:p>
+            <a:pPr algn="ctr"/>
             <a:r>
               <a:rPr sz="1600" b="1" i="0">
                 <a:solidFill>
-                  <a:srgbClr val="1E293B"/>
-                </a:solidFill>
-                <a:latin typeface="Noto Sans JP"/>
-              </a:rPr>
-              <a:t>火炎接触</a:t>
-            </a:r>
-          </a:p>
-        </p:txBody>
-      </p:sp>
-      <p:sp>
-        <p:nvSpPr>
-          <p:cNvPr id="24" name="TextBox 23"/>
-          <p:cNvSpPr txBox="1"/>
-          <p:nvPr/>
-        </p:nvSpPr>
-        <p:spPr>
-          <a:xfrm>
-            <a:off x="3445687" y="4782312"/>
-            <a:ext cx="2403271" cy="1133856"/>
-          </a:xfrm>
-          <a:prstGeom prst="rect">
-            <a:avLst/>
-          </a:prstGeom>
-          <a:noFill/>
-        </p:spPr>
-        <p:txBody>
-          <a:bodyPr wrap="square" anchor="t" lIns="36000" rIns="36000" tIns="18000" bIns="18000">
-            <a:spAutoFit/>
-          </a:bodyPr>
-          <a:lstStyle/>
-          <a:p>
-            <a:pPr algn="l"/>
-            <a:r>
-              <a:rPr sz="1200" b="0" i="0">
-                <a:solidFill>
-                  <a:srgbClr val="475569"/>
-                </a:solidFill>
-                <a:latin typeface="Noto Sans JP"/>
-              </a:rPr>
-              <a:t>水分が蒸発し、ゲルが発泡しながら粒子が凝集</a:t>
-            </a:r>
-          </a:p>
-        </p:txBody>
-      </p:sp>
-      <p:sp>
-        <p:nvSpPr>
-          <p:cNvPr id="25" name="Rounded Rectangle 24"/>
+                  <a:srgbClr val="FFFFFF"/>
+                </a:solidFill>
+                <a:latin typeface="Noto Sans JP"/>
+              </a:rPr>
+              <a:t>2</a:t>
+            </a:r>
+          </a:p>
+        </p:txBody>
+      </p:sp>
+      <p:sp>
+        <p:nvSpPr>
+          <p:cNvPr id="22" name="Rectangle 21"/>
           <p:cNvSpPr/>
           <p:nvPr/>
         </p:nvSpPr>
         <p:spPr>
           <a:xfrm>
-            <a:off x="6159855" y="4014216"/>
-            <a:ext cx="2769031" cy="2011680"/>
-          </a:xfrm>
-          <a:prstGeom prst="roundRect">
-            <a:avLst>
-              <a:gd name="adj" fmla="val 4000"/>
-            </a:avLst>
+            <a:off x="6068415" y="4507992"/>
+            <a:ext cx="54864" cy="18288"/>
+          </a:xfrm>
+          <a:prstGeom prst="rect">
+            <a:avLst/>
           </a:prstGeom>
           <a:solidFill>
-            <a:srgbClr val="F1F5F9"/>
+            <a:srgbClr val="AAB4C0"/>
           </a:solidFill>
-          <a:ln w="6350">
-            <a:solidFill>
-              <a:srgbClr val="E2E8F0"/>
-            </a:solidFill>
+          <a:ln>
+            <a:noFill/>
           </a:ln>
           <a:effectLst/>
         </p:spPr>
@@ -48812,17 +48371,101 @@
       </p:sp>
       <p:sp>
         <p:nvSpPr>
-          <p:cNvPr id="26" name="Rectangle 25"/>
+          <p:cNvPr id="23" name="TextBox 22"/>
+          <p:cNvSpPr txBox="1"/>
+          <p:nvPr/>
+        </p:nvSpPr>
+        <p:spPr>
+          <a:xfrm>
+            <a:off x="3262807" y="4846320"/>
+            <a:ext cx="2769031" cy="274320"/>
+          </a:xfrm>
+          <a:prstGeom prst="rect">
+            <a:avLst/>
+          </a:prstGeom>
+          <a:noFill/>
+        </p:spPr>
+        <p:txBody>
+          <a:bodyPr wrap="square" anchor="t" lIns="36000" rIns="36000" tIns="18000" bIns="18000">
+            <a:spAutoFit/>
+          </a:bodyPr>
+          <a:lstStyle/>
+          <a:p>
+            <a:pPr algn="ctr"/>
+            <a:r>
+              <a:rPr sz="1300" b="1" i="0">
+                <a:solidFill>
+                  <a:srgbClr val="1E293B"/>
+                </a:solidFill>
+                <a:latin typeface="Noto Sans JP"/>
+              </a:rPr>
+              <a:t>火炎接触</a:t>
+            </a:r>
+          </a:p>
+        </p:txBody>
+      </p:sp>
+      <p:sp>
+        <p:nvSpPr>
+          <p:cNvPr id="24" name="TextBox 23"/>
+          <p:cNvSpPr txBox="1"/>
+          <p:nvPr/>
+        </p:nvSpPr>
+        <p:spPr>
+          <a:xfrm>
+            <a:off x="3262807" y="5138928"/>
+            <a:ext cx="2769031" cy="548640"/>
+          </a:xfrm>
+          <a:prstGeom prst="rect">
+            <a:avLst/>
+          </a:prstGeom>
+          <a:noFill/>
+        </p:spPr>
+        <p:txBody>
+          <a:bodyPr wrap="square" anchor="t" lIns="36000" rIns="36000" tIns="18000" bIns="18000">
+            <a:spAutoFit/>
+          </a:bodyPr>
+          <a:lstStyle/>
+          <a:p>
+            <a:pPr algn="ctr"/>
+            <a:r>
+              <a:rPr sz="1100" b="0" i="0">
+                <a:solidFill>
+                  <a:srgbClr val="475569"/>
+                </a:solidFill>
+                <a:latin typeface="Noto Sans JP"/>
+              </a:rPr>
+              <a:t>水分蒸発、ゲルが発泡</a:t>
+            </a:r>
+          </a:p>
+          <a:p>
+            <a:pPr algn="ctr"/>
+            <a:r>
+              <a:rPr sz="1100" b="0" i="0">
+                <a:solidFill>
+                  <a:srgbClr val="475569"/>
+                </a:solidFill>
+                <a:latin typeface="Noto Sans JP"/>
+              </a:rPr>
+              <a:t>しながら粒子が凝集</a:t>
+            </a:r>
+          </a:p>
+        </p:txBody>
+      </p:sp>
+      <p:sp>
+        <p:nvSpPr>
+          <p:cNvPr id="25" name="Rounded Rectangle 24"/>
           <p:cNvSpPr/>
           <p:nvPr/>
         </p:nvSpPr>
         <p:spPr>
           <a:xfrm>
-            <a:off x="6159855" y="4014216"/>
-            <a:ext cx="2769031" cy="36576"/>
-          </a:xfrm>
-          <a:prstGeom prst="rect">
-            <a:avLst/>
+            <a:off x="7343203" y="4315968"/>
+            <a:ext cx="402336" cy="402336"/>
+          </a:xfrm>
+          <a:prstGeom prst="roundRect">
+            <a:avLst>
+              <a:gd name="adj" fmla="val 50000"/>
+            </a:avLst>
           </a:prstGeom>
           <a:solidFill>
             <a:srgbClr val="3B5174"/>
@@ -48856,132 +48499,58 @@
       </p:sp>
       <p:sp>
         <p:nvSpPr>
-          <p:cNvPr id="27" name="TextBox 26"/>
-          <p:cNvSpPr txBox="1"/>
-          <p:nvPr/>
-        </p:nvSpPr>
-        <p:spPr>
-          <a:xfrm>
-            <a:off x="6342735" y="4178808"/>
-            <a:ext cx="2403271" cy="219456"/>
-          </a:xfrm>
-          <a:prstGeom prst="rect">
-            <a:avLst/>
-          </a:prstGeom>
-          <a:noFill/>
-        </p:spPr>
-        <p:txBody>
-          <a:bodyPr wrap="square" anchor="t" lIns="36000" rIns="36000" tIns="18000" bIns="18000">
-            <a:spAutoFit/>
-          </a:bodyPr>
-          <a:lstStyle/>
-          <a:p>
-            <a:pPr algn="l"/>
-            <a:r>
-              <a:rPr sz="1000" b="1" i="0">
-                <a:solidFill>
-                  <a:srgbClr val="64748B"/>
-                </a:solidFill>
-                <a:latin typeface="Noto Sans JP"/>
-              </a:rPr>
-              <a:t>STEP 3</a:t>
-            </a:r>
-          </a:p>
-        </p:txBody>
-      </p:sp>
-      <p:sp>
-        <p:nvSpPr>
-          <p:cNvPr id="28" name="TextBox 27"/>
-          <p:cNvSpPr txBox="1"/>
-          <p:nvPr/>
-        </p:nvSpPr>
-        <p:spPr>
-          <a:xfrm>
-            <a:off x="6342735" y="4416552"/>
-            <a:ext cx="2403271" cy="329184"/>
-          </a:xfrm>
-          <a:prstGeom prst="rect">
-            <a:avLst/>
-          </a:prstGeom>
-          <a:noFill/>
-        </p:spPr>
-        <p:txBody>
-          <a:bodyPr wrap="square" anchor="t" lIns="36000" rIns="36000" tIns="18000" bIns="18000">
-            <a:spAutoFit/>
-          </a:bodyPr>
-          <a:lstStyle/>
-          <a:p>
-            <a:pPr algn="l"/>
+          <p:cNvPr id="26" name="TextBox 25"/>
+          <p:cNvSpPr txBox="1"/>
+          <p:nvPr/>
+        </p:nvSpPr>
+        <p:spPr>
+          <a:xfrm>
+            <a:off x="7343203" y="4315968"/>
+            <a:ext cx="402336" cy="402336"/>
+          </a:xfrm>
+          <a:prstGeom prst="rect">
+            <a:avLst/>
+          </a:prstGeom>
+          <a:noFill/>
+        </p:spPr>
+        <p:txBody>
+          <a:bodyPr wrap="square" anchor="ctr" lIns="36000" rIns="36000" tIns="18000" bIns="18000">
+            <a:spAutoFit/>
+          </a:bodyPr>
+          <a:lstStyle/>
+          <a:p>
+            <a:pPr algn="ctr"/>
             <a:r>
               <a:rPr sz="1600" b="1" i="0">
                 <a:solidFill>
-                  <a:srgbClr val="1E293B"/>
-                </a:solidFill>
-                <a:latin typeface="Noto Sans JP"/>
-              </a:rPr>
-              <a:t>エアロゲル形成</a:t>
-            </a:r>
-          </a:p>
-        </p:txBody>
-      </p:sp>
-      <p:sp>
-        <p:nvSpPr>
-          <p:cNvPr id="29" name="TextBox 28"/>
-          <p:cNvSpPr txBox="1"/>
-          <p:nvPr/>
-        </p:nvSpPr>
-        <p:spPr>
-          <a:xfrm>
-            <a:off x="6342735" y="4782312"/>
-            <a:ext cx="2403271" cy="1133856"/>
-          </a:xfrm>
-          <a:prstGeom prst="rect">
-            <a:avLst/>
-          </a:prstGeom>
-          <a:noFill/>
-        </p:spPr>
-        <p:txBody>
-          <a:bodyPr wrap="square" anchor="t" lIns="36000" rIns="36000" tIns="18000" bIns="18000">
-            <a:spAutoFit/>
-          </a:bodyPr>
-          <a:lstStyle/>
-          <a:p>
-            <a:pPr algn="l"/>
-            <a:r>
-              <a:rPr sz="1200" b="0" i="0">
-                <a:solidFill>
-                  <a:srgbClr val="475569"/>
-                </a:solidFill>
-                <a:latin typeface="Noto Sans JP"/>
-              </a:rPr>
-              <a:t>シリカ粒子が焼結し多孔質エアロゲル層が生成</a:t>
-            </a:r>
-          </a:p>
-        </p:txBody>
-      </p:sp>
-      <p:sp>
-        <p:nvSpPr>
-          <p:cNvPr id="30" name="Rounded Rectangle 29"/>
+                  <a:srgbClr val="FFFFFF"/>
+                </a:solidFill>
+                <a:latin typeface="Noto Sans JP"/>
+              </a:rPr>
+              <a:t>3</a:t>
+            </a:r>
+          </a:p>
+        </p:txBody>
+      </p:sp>
+      <p:sp>
+        <p:nvSpPr>
+          <p:cNvPr id="27" name="Rectangle 26"/>
           <p:cNvSpPr/>
           <p:nvPr/>
         </p:nvSpPr>
         <p:spPr>
           <a:xfrm>
-            <a:off x="9056903" y="4014216"/>
-            <a:ext cx="2769031" cy="2011680"/>
-          </a:xfrm>
-          <a:prstGeom prst="roundRect">
-            <a:avLst>
-              <a:gd name="adj" fmla="val 4000"/>
-            </a:avLst>
+            <a:off x="8965463" y="4507992"/>
+            <a:ext cx="54864" cy="18288"/>
+          </a:xfrm>
+          <a:prstGeom prst="rect">
+            <a:avLst/>
           </a:prstGeom>
           <a:solidFill>
-            <a:srgbClr val="F1F5F9"/>
+            <a:srgbClr val="AAB4C0"/>
           </a:solidFill>
-          <a:ln w="6350">
-            <a:solidFill>
-              <a:srgbClr val="E2E8F0"/>
-            </a:solidFill>
+          <a:ln>
+            <a:noFill/>
           </a:ln>
           <a:effectLst/>
         </p:spPr>
@@ -49009,17 +48578,101 @@
       </p:sp>
       <p:sp>
         <p:nvSpPr>
-          <p:cNvPr id="31" name="Rectangle 30"/>
+          <p:cNvPr id="28" name="TextBox 27"/>
+          <p:cNvSpPr txBox="1"/>
+          <p:nvPr/>
+        </p:nvSpPr>
+        <p:spPr>
+          <a:xfrm>
+            <a:off x="6159855" y="4846320"/>
+            <a:ext cx="2769031" cy="274320"/>
+          </a:xfrm>
+          <a:prstGeom prst="rect">
+            <a:avLst/>
+          </a:prstGeom>
+          <a:noFill/>
+        </p:spPr>
+        <p:txBody>
+          <a:bodyPr wrap="square" anchor="t" lIns="36000" rIns="36000" tIns="18000" bIns="18000">
+            <a:spAutoFit/>
+          </a:bodyPr>
+          <a:lstStyle/>
+          <a:p>
+            <a:pPr algn="ctr"/>
+            <a:r>
+              <a:rPr sz="1300" b="1" i="0">
+                <a:solidFill>
+                  <a:srgbClr val="1E293B"/>
+                </a:solidFill>
+                <a:latin typeface="Noto Sans JP"/>
+              </a:rPr>
+              <a:t>エアロゲル形成</a:t>
+            </a:r>
+          </a:p>
+        </p:txBody>
+      </p:sp>
+      <p:sp>
+        <p:nvSpPr>
+          <p:cNvPr id="29" name="TextBox 28"/>
+          <p:cNvSpPr txBox="1"/>
+          <p:nvPr/>
+        </p:nvSpPr>
+        <p:spPr>
+          <a:xfrm>
+            <a:off x="6159855" y="5138928"/>
+            <a:ext cx="2769031" cy="548640"/>
+          </a:xfrm>
+          <a:prstGeom prst="rect">
+            <a:avLst/>
+          </a:prstGeom>
+          <a:noFill/>
+        </p:spPr>
+        <p:txBody>
+          <a:bodyPr wrap="square" anchor="t" lIns="36000" rIns="36000" tIns="18000" bIns="18000">
+            <a:spAutoFit/>
+          </a:bodyPr>
+          <a:lstStyle/>
+          <a:p>
+            <a:pPr algn="ctr"/>
+            <a:r>
+              <a:rPr sz="1100" b="0" i="0">
+                <a:solidFill>
+                  <a:srgbClr val="475569"/>
+                </a:solidFill>
+                <a:latin typeface="Noto Sans JP"/>
+              </a:rPr>
+              <a:t>シリカ粒子が焼結し</a:t>
+            </a:r>
+          </a:p>
+          <a:p>
+            <a:pPr algn="ctr"/>
+            <a:r>
+              <a:rPr sz="1100" b="0" i="0">
+                <a:solidFill>
+                  <a:srgbClr val="475569"/>
+                </a:solidFill>
+                <a:latin typeface="Noto Sans JP"/>
+              </a:rPr>
+              <a:t>多孔質断熱層を形成</a:t>
+            </a:r>
+          </a:p>
+        </p:txBody>
+      </p:sp>
+      <p:sp>
+        <p:nvSpPr>
+          <p:cNvPr id="30" name="Rounded Rectangle 29"/>
           <p:cNvSpPr/>
           <p:nvPr/>
         </p:nvSpPr>
         <p:spPr>
           <a:xfrm>
-            <a:off x="9056903" y="4014216"/>
-            <a:ext cx="2769031" cy="36576"/>
-          </a:xfrm>
-          <a:prstGeom prst="rect">
-            <a:avLst/>
+            <a:off x="10240251" y="4315968"/>
+            <a:ext cx="402336" cy="402336"/>
+          </a:xfrm>
+          <a:prstGeom prst="roundRect">
+            <a:avLst>
+              <a:gd name="adj" fmla="val 50000"/>
+            </a:avLst>
           </a:prstGeom>
           <a:solidFill>
             <a:srgbClr val="3B5174"/>
@@ -49053,35 +48706,70 @@
       </p:sp>
       <p:sp>
         <p:nvSpPr>
+          <p:cNvPr id="31" name="TextBox 30"/>
+          <p:cNvSpPr txBox="1"/>
+          <p:nvPr/>
+        </p:nvSpPr>
+        <p:spPr>
+          <a:xfrm>
+            <a:off x="10240251" y="4315968"/>
+            <a:ext cx="402336" cy="402336"/>
+          </a:xfrm>
+          <a:prstGeom prst="rect">
+            <a:avLst/>
+          </a:prstGeom>
+          <a:noFill/>
+        </p:spPr>
+        <p:txBody>
+          <a:bodyPr wrap="square" anchor="ctr" lIns="36000" rIns="36000" tIns="18000" bIns="18000">
+            <a:spAutoFit/>
+          </a:bodyPr>
+          <a:lstStyle/>
+          <a:p>
+            <a:pPr algn="ctr"/>
+            <a:r>
+              <a:rPr sz="1600" b="1" i="0">
+                <a:solidFill>
+                  <a:srgbClr val="FFFFFF"/>
+                </a:solidFill>
+                <a:latin typeface="Noto Sans JP"/>
+              </a:rPr>
+              <a:t>4</a:t>
+            </a:r>
+          </a:p>
+        </p:txBody>
+      </p:sp>
+      <p:sp>
+        <p:nvSpPr>
           <p:cNvPr id="32" name="TextBox 31"/>
           <p:cNvSpPr txBox="1"/>
           <p:nvPr/>
         </p:nvSpPr>
         <p:spPr>
           <a:xfrm>
-            <a:off x="9239783" y="4178808"/>
-            <a:ext cx="2403271" cy="219456"/>
-          </a:xfrm>
-          <a:prstGeom prst="rect">
-            <a:avLst/>
-          </a:prstGeom>
-          <a:noFill/>
-        </p:spPr>
-        <p:txBody>
-          <a:bodyPr wrap="square" anchor="t" lIns="36000" rIns="36000" tIns="18000" bIns="18000">
-            <a:spAutoFit/>
-          </a:bodyPr>
-          <a:lstStyle/>
-          <a:p>
-            <a:pPr algn="l"/>
-            <a:r>
-              <a:rPr sz="1000" b="1" i="0">
-                <a:solidFill>
-                  <a:srgbClr val="64748B"/>
-                </a:solidFill>
-                <a:latin typeface="Noto Sans JP"/>
-              </a:rPr>
-              <a:t>STEP 4</a:t>
+            <a:off x="9056903" y="4846320"/>
+            <a:ext cx="2769031" cy="274320"/>
+          </a:xfrm>
+          <a:prstGeom prst="rect">
+            <a:avLst/>
+          </a:prstGeom>
+          <a:noFill/>
+        </p:spPr>
+        <p:txBody>
+          <a:bodyPr wrap="square" anchor="t" lIns="36000" rIns="36000" tIns="18000" bIns="18000">
+            <a:spAutoFit/>
+          </a:bodyPr>
+          <a:lstStyle/>
+          <a:p>
+            <a:pPr algn="ctr"/>
+            <a:r>
+              <a:rPr sz="1300" b="1" i="0">
+                <a:solidFill>
+                  <a:srgbClr val="1E293B"/>
+                </a:solidFill>
+                <a:latin typeface="Noto Sans JP"/>
+              </a:rPr>
+              <a:t>継続保護</a:t>
             </a:r>
           </a:p>
         </p:txBody>
@@ -49094,64 +48782,41 @@
         </p:nvSpPr>
         <p:spPr>
           <a:xfrm>
-            <a:off x="9239783" y="4416552"/>
-            <a:ext cx="2403271" cy="329184"/>
-          </a:xfrm>
-          <a:prstGeom prst="rect">
-            <a:avLst/>
-          </a:prstGeom>
-          <a:noFill/>
-        </p:spPr>
-        <p:txBody>
-          <a:bodyPr wrap="square" anchor="t" lIns="36000" rIns="36000" tIns="18000" bIns="18000">
-            <a:spAutoFit/>
-          </a:bodyPr>
-          <a:lstStyle/>
-          <a:p>
-            <a:pPr algn="l"/>
-            <a:r>
-              <a:rPr sz="1600" b="1" i="0">
-                <a:solidFill>
-                  <a:srgbClr val="1E293B"/>
-                </a:solidFill>
-                <a:latin typeface="Noto Sans JP"/>
-              </a:rPr>
-              <a:t>継続保護</a:t>
-            </a:r>
-          </a:p>
-        </p:txBody>
-      </p:sp>
-      <p:sp>
-        <p:nvSpPr>
-          <p:cNvPr id="34" name="TextBox 33"/>
-          <p:cNvSpPr txBox="1"/>
-          <p:nvPr/>
-        </p:nvSpPr>
-        <p:spPr>
-          <a:xfrm>
-            <a:off x="9239783" y="4782312"/>
-            <a:ext cx="2403271" cy="1133856"/>
-          </a:xfrm>
-          <a:prstGeom prst="rect">
-            <a:avLst/>
-          </a:prstGeom>
-          <a:noFill/>
-        </p:spPr>
-        <p:txBody>
-          <a:bodyPr wrap="square" anchor="t" lIns="36000" rIns="36000" tIns="18000" bIns="18000">
-            <a:spAutoFit/>
-          </a:bodyPr>
-          <a:lstStyle/>
-          <a:p>
-            <a:pPr algn="l"/>
-            <a:r>
-              <a:rPr sz="1200" b="0" i="0">
+            <a:off x="9056903" y="5138928"/>
+            <a:ext cx="2769031" cy="548640"/>
+          </a:xfrm>
+          <a:prstGeom prst="rect">
+            <a:avLst/>
+          </a:prstGeom>
+          <a:noFill/>
+        </p:spPr>
+        <p:txBody>
+          <a:bodyPr wrap="square" anchor="t" lIns="36000" rIns="36000" tIns="18000" bIns="18000">
+            <a:spAutoFit/>
+          </a:bodyPr>
+          <a:lstStyle/>
+          <a:p>
+            <a:pPr algn="ctr"/>
+            <a:r>
+              <a:rPr sz="1100" b="0" i="0">
                 <a:solidFill>
                   <a:srgbClr val="475569"/>
                 </a:solidFill>
                 <a:latin typeface="Noto Sans JP"/>
               </a:rPr>
-              <a:t>超低熱伝導率の断熱層が基材を継続的に守る</a:t>
+              <a:t>超低熱伝導の断熱層が</a:t>
+            </a:r>
+          </a:p>
+          <a:p>
+            <a:pPr algn="ctr"/>
+            <a:r>
+              <a:rPr sz="1100" b="0" i="0">
+                <a:solidFill>
+                  <a:srgbClr val="475569"/>
+                </a:solidFill>
+                <a:latin typeface="Noto Sans JP"/>
+              </a:rPr>
+              <a:t>基材を継続的に守る</a:t>
             </a:r>
           </a:p>
         </p:txBody>
@@ -49501,17 +49166,895 @@
       </p:sp>
       <p:sp>
         <p:nvSpPr>
-          <p:cNvPr id="10" name="Rectangle 9"/>
+          <p:cNvPr id="10" name="Rounded Rectangle 9"/>
           <p:cNvSpPr/>
           <p:nvPr/>
         </p:nvSpPr>
         <p:spPr>
           <a:xfrm>
             <a:off x="365760" y="859536"/>
-            <a:ext cx="7472275" cy="585216"/>
-          </a:xfrm>
-          <a:prstGeom prst="rect">
-            <a:avLst/>
+            <a:ext cx="2741599" cy="5248656"/>
+          </a:xfrm>
+          <a:prstGeom prst="roundRect">
+            <a:avLst>
+              <a:gd name="adj" fmla="val 4000"/>
+            </a:avLst>
+          </a:prstGeom>
+          <a:solidFill>
+            <a:srgbClr val="F1F5F9"/>
+          </a:solidFill>
+          <a:ln w="6350">
+            <a:solidFill>
+              <a:srgbClr val="E2E8F0"/>
+            </a:solidFill>
+          </a:ln>
+          <a:effectLst/>
+        </p:spPr>
+        <p:style>
+          <a:lnRef idx="1">
+            <a:schemeClr val="accent1"/>
+          </a:lnRef>
+          <a:fillRef idx="3">
+            <a:schemeClr val="accent1"/>
+          </a:fillRef>
+          <a:effectRef idx="2">
+            <a:schemeClr val="accent1"/>
+          </a:effectRef>
+          <a:fontRef idx="minor">
+            <a:schemeClr val="lt1"/>
+          </a:fontRef>
+        </p:style>
+        <p:txBody>
+          <a:bodyPr rtlCol="0" anchor="ctr"/>
+          <a:lstStyle/>
+          <a:p>
+            <a:pPr algn="ctr"/>
+          </a:p>
+        </p:txBody>
+      </p:sp>
+      <p:sp>
+        <p:nvSpPr>
+          <p:cNvPr id="11" name="Rectangle 10"/>
+          <p:cNvSpPr/>
+          <p:nvPr/>
+        </p:nvSpPr>
+        <p:spPr>
+          <a:xfrm>
+            <a:off x="365760" y="859536"/>
+            <a:ext cx="2741599" cy="36576"/>
+          </a:xfrm>
+          <a:prstGeom prst="rect">
+            <a:avLst/>
+          </a:prstGeom>
+          <a:solidFill>
+            <a:srgbClr val="E2E8F0"/>
+          </a:solidFill>
+          <a:ln>
+            <a:noFill/>
+          </a:ln>
+          <a:effectLst/>
+        </p:spPr>
+        <p:style>
+          <a:lnRef idx="1">
+            <a:schemeClr val="accent1"/>
+          </a:lnRef>
+          <a:fillRef idx="3">
+            <a:schemeClr val="accent1"/>
+          </a:fillRef>
+          <a:effectRef idx="2">
+            <a:schemeClr val="accent1"/>
+          </a:effectRef>
+          <a:fontRef idx="minor">
+            <a:schemeClr val="lt1"/>
+          </a:fontRef>
+        </p:style>
+        <p:txBody>
+          <a:bodyPr rtlCol="0" anchor="ctr"/>
+          <a:lstStyle/>
+          <a:p>
+            <a:pPr algn="ctr"/>
+          </a:p>
+        </p:txBody>
+      </p:sp>
+      <p:sp>
+        <p:nvSpPr>
+          <p:cNvPr id="12" name="Rounded Rectangle 11"/>
+          <p:cNvSpPr/>
+          <p:nvPr/>
+        </p:nvSpPr>
+        <p:spPr>
+          <a:xfrm>
+            <a:off x="475488" y="969264"/>
+            <a:ext cx="2522143" cy="2514600"/>
+          </a:xfrm>
+          <a:prstGeom prst="roundRect">
+            <a:avLst>
+              <a:gd name="adj" fmla="val 3000"/>
+            </a:avLst>
+          </a:prstGeom>
+          <a:solidFill>
+            <a:srgbClr val="F5F8FC"/>
+          </a:solidFill>
+          <a:ln w="8890">
+            <a:solidFill>
+              <a:srgbClr val="C0D0E0"/>
+            </a:solidFill>
+          </a:ln>
+          <a:effectLst/>
+        </p:spPr>
+        <p:style>
+          <a:lnRef idx="1">
+            <a:schemeClr val="accent1"/>
+          </a:lnRef>
+          <a:fillRef idx="3">
+            <a:schemeClr val="accent1"/>
+          </a:fillRef>
+          <a:effectRef idx="2">
+            <a:schemeClr val="accent1"/>
+          </a:effectRef>
+          <a:fontRef idx="minor">
+            <a:schemeClr val="lt1"/>
+          </a:fontRef>
+        </p:style>
+        <p:txBody>
+          <a:bodyPr rtlCol="0" anchor="ctr"/>
+          <a:lstStyle/>
+          <a:p>
+            <a:pPr algn="ctr"/>
+          </a:p>
+        </p:txBody>
+      </p:sp>
+      <p:sp>
+        <p:nvSpPr>
+          <p:cNvPr id="13" name="TextBox 12"/>
+          <p:cNvSpPr txBox="1"/>
+          <p:nvPr/>
+        </p:nvSpPr>
+        <p:spPr>
+          <a:xfrm>
+            <a:off x="475488" y="969264"/>
+            <a:ext cx="2522143" cy="2514600"/>
+          </a:xfrm>
+          <a:prstGeom prst="rect">
+            <a:avLst/>
+          </a:prstGeom>
+          <a:noFill/>
+        </p:spPr>
+        <p:txBody>
+          <a:bodyPr wrap="square" anchor="ctr" lIns="36000" rIns="36000" tIns="18000" bIns="18000">
+            <a:spAutoFit/>
+          </a:bodyPr>
+          <a:lstStyle/>
+          <a:p>
+            <a:pPr algn="ctr"/>
+            <a:r>
+              <a:rPr sz="1100" b="0" i="0">
+                <a:solidFill>
+                  <a:srgbClr val="AAB4C0"/>
+                </a:solidFill>
+                <a:latin typeface="Noto Sans JP"/>
+              </a:rPr>
+              <a:t>（写真）</a:t>
+            </a:r>
+          </a:p>
+        </p:txBody>
+      </p:sp>
+      <p:sp>
+        <p:nvSpPr>
+          <p:cNvPr id="14" name="TextBox 13"/>
+          <p:cNvSpPr txBox="1"/>
+          <p:nvPr/>
+        </p:nvSpPr>
+        <p:spPr>
+          <a:xfrm>
+            <a:off x="457200" y="3611880"/>
+            <a:ext cx="2558719" cy="310896"/>
+          </a:xfrm>
+          <a:prstGeom prst="rect">
+            <a:avLst/>
+          </a:prstGeom>
+          <a:noFill/>
+        </p:spPr>
+        <p:txBody>
+          <a:bodyPr wrap="square" anchor="t" lIns="36000" rIns="36000" tIns="18000" bIns="18000">
+            <a:spAutoFit/>
+          </a:bodyPr>
+          <a:lstStyle/>
+          <a:p>
+            <a:pPr algn="ctr"/>
+            <a:r>
+              <a:rPr sz="1400" b="1" i="0">
+                <a:solidFill>
+                  <a:srgbClr val="1E293B"/>
+                </a:solidFill>
+                <a:latin typeface="Noto Sans JP"/>
+              </a:rPr>
+              <a:t>水のみ</a:t>
+            </a:r>
+          </a:p>
+        </p:txBody>
+      </p:sp>
+      <p:sp>
+        <p:nvSpPr>
+          <p:cNvPr id="15" name="TextBox 14"/>
+          <p:cNvSpPr txBox="1"/>
+          <p:nvPr/>
+        </p:nvSpPr>
+        <p:spPr>
+          <a:xfrm>
+            <a:off x="457200" y="3922776"/>
+            <a:ext cx="2558719" cy="237744"/>
+          </a:xfrm>
+          <a:prstGeom prst="rect">
+            <a:avLst/>
+          </a:prstGeom>
+          <a:noFill/>
+        </p:spPr>
+        <p:txBody>
+          <a:bodyPr wrap="square" anchor="t" lIns="36000" rIns="36000" tIns="18000" bIns="18000">
+            <a:spAutoFit/>
+          </a:bodyPr>
+          <a:lstStyle/>
+          <a:p>
+            <a:pPr algn="ctr"/>
+            <a:r>
+              <a:rPr sz="1000" b="0" i="0">
+                <a:solidFill>
+                  <a:srgbClr val="64748B"/>
+                </a:solidFill>
+                <a:latin typeface="Noto Sans JP"/>
+              </a:rPr>
+              <a:t>H₂O</a:t>
+            </a:r>
+          </a:p>
+        </p:txBody>
+      </p:sp>
+      <p:sp>
+        <p:nvSpPr>
+          <p:cNvPr id="16" name="TextBox 15"/>
+          <p:cNvSpPr txBox="1"/>
+          <p:nvPr/>
+        </p:nvSpPr>
+        <p:spPr>
+          <a:xfrm>
+            <a:off x="457200" y="4197096"/>
+            <a:ext cx="2558719" cy="1837944"/>
+          </a:xfrm>
+          <a:prstGeom prst="rect">
+            <a:avLst/>
+          </a:prstGeom>
+          <a:noFill/>
+        </p:spPr>
+        <p:txBody>
+          <a:bodyPr wrap="square" anchor="t" lIns="36000" rIns="36000" tIns="18000" bIns="18000">
+            <a:spAutoFit/>
+          </a:bodyPr>
+          <a:lstStyle/>
+          <a:p>
+            <a:pPr algn="ctr"/>
+            <a:r>
+              <a:rPr sz="1200" b="0" i="0">
+                <a:solidFill>
+                  <a:srgbClr val="A05656"/>
+                </a:solidFill>
+                <a:latin typeface="Noto Sans JP"/>
+              </a:rPr>
+              <a:t>蒸発・流失で</a:t>
+            </a:r>
+          </a:p>
+          <a:p>
+            <a:pPr algn="ctr"/>
+            <a:r>
+              <a:rPr sz="1200" b="0" i="0">
+                <a:solidFill>
+                  <a:srgbClr val="A05656"/>
+                </a:solidFill>
+                <a:latin typeface="Noto Sans JP"/>
+              </a:rPr>
+              <a:t>即座に効果消失</a:t>
+            </a:r>
+          </a:p>
+        </p:txBody>
+      </p:sp>
+      <p:sp>
+        <p:nvSpPr>
+          <p:cNvPr id="17" name="Rounded Rectangle 16"/>
+          <p:cNvSpPr/>
+          <p:nvPr/>
+        </p:nvSpPr>
+        <p:spPr>
+          <a:xfrm>
+            <a:off x="3271951" y="859536"/>
+            <a:ext cx="2741599" cy="5248656"/>
+          </a:xfrm>
+          <a:prstGeom prst="roundRect">
+            <a:avLst>
+              <a:gd name="adj" fmla="val 4000"/>
+            </a:avLst>
+          </a:prstGeom>
+          <a:solidFill>
+            <a:srgbClr val="F1F5F9"/>
+          </a:solidFill>
+          <a:ln w="6350">
+            <a:solidFill>
+              <a:srgbClr val="E2E8F0"/>
+            </a:solidFill>
+          </a:ln>
+          <a:effectLst/>
+        </p:spPr>
+        <p:style>
+          <a:lnRef idx="1">
+            <a:schemeClr val="accent1"/>
+          </a:lnRef>
+          <a:fillRef idx="3">
+            <a:schemeClr val="accent1"/>
+          </a:fillRef>
+          <a:effectRef idx="2">
+            <a:schemeClr val="accent1"/>
+          </a:effectRef>
+          <a:fontRef idx="minor">
+            <a:schemeClr val="lt1"/>
+          </a:fontRef>
+        </p:style>
+        <p:txBody>
+          <a:bodyPr rtlCol="0" anchor="ctr"/>
+          <a:lstStyle/>
+          <a:p>
+            <a:pPr algn="ctr"/>
+          </a:p>
+        </p:txBody>
+      </p:sp>
+      <p:sp>
+        <p:nvSpPr>
+          <p:cNvPr id="18" name="Rectangle 17"/>
+          <p:cNvSpPr/>
+          <p:nvPr/>
+        </p:nvSpPr>
+        <p:spPr>
+          <a:xfrm>
+            <a:off x="3271951" y="859536"/>
+            <a:ext cx="2741599" cy="36576"/>
+          </a:xfrm>
+          <a:prstGeom prst="rect">
+            <a:avLst/>
+          </a:prstGeom>
+          <a:solidFill>
+            <a:srgbClr val="E2E8F0"/>
+          </a:solidFill>
+          <a:ln>
+            <a:noFill/>
+          </a:ln>
+          <a:effectLst/>
+        </p:spPr>
+        <p:style>
+          <a:lnRef idx="1">
+            <a:schemeClr val="accent1"/>
+          </a:lnRef>
+          <a:fillRef idx="3">
+            <a:schemeClr val="accent1"/>
+          </a:fillRef>
+          <a:effectRef idx="2">
+            <a:schemeClr val="accent1"/>
+          </a:effectRef>
+          <a:fontRef idx="minor">
+            <a:schemeClr val="lt1"/>
+          </a:fontRef>
+        </p:style>
+        <p:txBody>
+          <a:bodyPr rtlCol="0" anchor="ctr"/>
+          <a:lstStyle/>
+          <a:p>
+            <a:pPr algn="ctr"/>
+          </a:p>
+        </p:txBody>
+      </p:sp>
+      <p:sp>
+        <p:nvSpPr>
+          <p:cNvPr id="19" name="Rounded Rectangle 18"/>
+          <p:cNvSpPr/>
+          <p:nvPr/>
+        </p:nvSpPr>
+        <p:spPr>
+          <a:xfrm>
+            <a:off x="3381679" y="969264"/>
+            <a:ext cx="2522143" cy="2514600"/>
+          </a:xfrm>
+          <a:prstGeom prst="roundRect">
+            <a:avLst>
+              <a:gd name="adj" fmla="val 3000"/>
+            </a:avLst>
+          </a:prstGeom>
+          <a:solidFill>
+            <a:srgbClr val="F5F8FC"/>
+          </a:solidFill>
+          <a:ln w="8890">
+            <a:solidFill>
+              <a:srgbClr val="C0D0E0"/>
+            </a:solidFill>
+          </a:ln>
+          <a:effectLst/>
+        </p:spPr>
+        <p:style>
+          <a:lnRef idx="1">
+            <a:schemeClr val="accent1"/>
+          </a:lnRef>
+          <a:fillRef idx="3">
+            <a:schemeClr val="accent1"/>
+          </a:fillRef>
+          <a:effectRef idx="2">
+            <a:schemeClr val="accent1"/>
+          </a:effectRef>
+          <a:fontRef idx="minor">
+            <a:schemeClr val="lt1"/>
+          </a:fontRef>
+        </p:style>
+        <p:txBody>
+          <a:bodyPr rtlCol="0" anchor="ctr"/>
+          <a:lstStyle/>
+          <a:p>
+            <a:pPr algn="ctr"/>
+          </a:p>
+        </p:txBody>
+      </p:sp>
+      <p:sp>
+        <p:nvSpPr>
+          <p:cNvPr id="20" name="TextBox 19"/>
+          <p:cNvSpPr txBox="1"/>
+          <p:nvPr/>
+        </p:nvSpPr>
+        <p:spPr>
+          <a:xfrm>
+            <a:off x="3381679" y="969264"/>
+            <a:ext cx="2522143" cy="2514600"/>
+          </a:xfrm>
+          <a:prstGeom prst="rect">
+            <a:avLst/>
+          </a:prstGeom>
+          <a:noFill/>
+        </p:spPr>
+        <p:txBody>
+          <a:bodyPr wrap="square" anchor="ctr" lIns="36000" rIns="36000" tIns="18000" bIns="18000">
+            <a:spAutoFit/>
+          </a:bodyPr>
+          <a:lstStyle/>
+          <a:p>
+            <a:pPr algn="ctr"/>
+            <a:r>
+              <a:rPr sz="1100" b="0" i="0">
+                <a:solidFill>
+                  <a:srgbClr val="AAB4C0"/>
+                </a:solidFill>
+                <a:latin typeface="Noto Sans JP"/>
+              </a:rPr>
+              <a:t>（写真）</a:t>
+            </a:r>
+          </a:p>
+        </p:txBody>
+      </p:sp>
+      <p:sp>
+        <p:nvSpPr>
+          <p:cNvPr id="21" name="TextBox 20"/>
+          <p:cNvSpPr txBox="1"/>
+          <p:nvPr/>
+        </p:nvSpPr>
+        <p:spPr>
+          <a:xfrm>
+            <a:off x="3363391" y="3611880"/>
+            <a:ext cx="2558719" cy="310896"/>
+          </a:xfrm>
+          <a:prstGeom prst="rect">
+            <a:avLst/>
+          </a:prstGeom>
+          <a:noFill/>
+        </p:spPr>
+        <p:txBody>
+          <a:bodyPr wrap="square" anchor="t" lIns="36000" rIns="36000" tIns="18000" bIns="18000">
+            <a:spAutoFit/>
+          </a:bodyPr>
+          <a:lstStyle/>
+          <a:p>
+            <a:pPr algn="ctr"/>
+            <a:r>
+              <a:rPr sz="1400" b="1" i="0">
+                <a:solidFill>
+                  <a:srgbClr val="1E293B"/>
+                </a:solidFill>
+                <a:latin typeface="Noto Sans JP"/>
+              </a:rPr>
+              <a:t>Phos-Chek</a:t>
+            </a:r>
+          </a:p>
+        </p:txBody>
+      </p:sp>
+      <p:sp>
+        <p:nvSpPr>
+          <p:cNvPr id="22" name="TextBox 21"/>
+          <p:cNvSpPr txBox="1"/>
+          <p:nvPr/>
+        </p:nvSpPr>
+        <p:spPr>
+          <a:xfrm>
+            <a:off x="3363391" y="3922776"/>
+            <a:ext cx="2558719" cy="237744"/>
+          </a:xfrm>
+          <a:prstGeom prst="rect">
+            <a:avLst/>
+          </a:prstGeom>
+          <a:noFill/>
+        </p:spPr>
+        <p:txBody>
+          <a:bodyPr wrap="square" anchor="t" lIns="36000" rIns="36000" tIns="18000" bIns="18000">
+            <a:spAutoFit/>
+          </a:bodyPr>
+          <a:lstStyle/>
+          <a:p>
+            <a:pPr algn="ctr"/>
+            <a:r>
+              <a:rPr sz="1000" b="0" i="0">
+                <a:solidFill>
+                  <a:srgbClr val="64748B"/>
+                </a:solidFill>
+                <a:latin typeface="Noto Sans JP"/>
+              </a:rPr>
+              <a:t>リン酸アンモニウム</a:t>
+            </a:r>
+          </a:p>
+        </p:txBody>
+      </p:sp>
+      <p:sp>
+        <p:nvSpPr>
+          <p:cNvPr id="23" name="TextBox 22"/>
+          <p:cNvSpPr txBox="1"/>
+          <p:nvPr/>
+        </p:nvSpPr>
+        <p:spPr>
+          <a:xfrm>
+            <a:off x="3363391" y="4197096"/>
+            <a:ext cx="2558719" cy="1837944"/>
+          </a:xfrm>
+          <a:prstGeom prst="rect">
+            <a:avLst/>
+          </a:prstGeom>
+          <a:noFill/>
+        </p:spPr>
+        <p:txBody>
+          <a:bodyPr wrap="square" anchor="t" lIns="36000" rIns="36000" tIns="18000" bIns="18000">
+            <a:spAutoFit/>
+          </a:bodyPr>
+          <a:lstStyle/>
+          <a:p>
+            <a:pPr algn="ctr"/>
+            <a:r>
+              <a:rPr sz="1200" b="0" i="0">
+                <a:solidFill>
+                  <a:srgbClr val="A05656"/>
+                </a:solidFill>
+                <a:latin typeface="Noto Sans JP"/>
+              </a:rPr>
+              <a:t>土壌・水系への</a:t>
+            </a:r>
+          </a:p>
+          <a:p>
+            <a:pPr algn="ctr"/>
+            <a:r>
+              <a:rPr sz="1200" b="0" i="0">
+                <a:solidFill>
+                  <a:srgbClr val="A05656"/>
+                </a:solidFill>
+                <a:latin typeface="Noto Sans JP"/>
+              </a:rPr>
+              <a:t>化学汚染が残留</a:t>
+            </a:r>
+          </a:p>
+        </p:txBody>
+      </p:sp>
+      <p:sp>
+        <p:nvSpPr>
+          <p:cNvPr id="24" name="Rounded Rectangle 23"/>
+          <p:cNvSpPr/>
+          <p:nvPr/>
+        </p:nvSpPr>
+        <p:spPr>
+          <a:xfrm>
+            <a:off x="6178143" y="859536"/>
+            <a:ext cx="2741599" cy="5248656"/>
+          </a:xfrm>
+          <a:prstGeom prst="roundRect">
+            <a:avLst>
+              <a:gd name="adj" fmla="val 4000"/>
+            </a:avLst>
+          </a:prstGeom>
+          <a:solidFill>
+            <a:srgbClr val="F1F5F9"/>
+          </a:solidFill>
+          <a:ln w="6350">
+            <a:solidFill>
+              <a:srgbClr val="E2E8F0"/>
+            </a:solidFill>
+          </a:ln>
+          <a:effectLst/>
+        </p:spPr>
+        <p:style>
+          <a:lnRef idx="1">
+            <a:schemeClr val="accent1"/>
+          </a:lnRef>
+          <a:fillRef idx="3">
+            <a:schemeClr val="accent1"/>
+          </a:fillRef>
+          <a:effectRef idx="2">
+            <a:schemeClr val="accent1"/>
+          </a:effectRef>
+          <a:fontRef idx="minor">
+            <a:schemeClr val="lt1"/>
+          </a:fontRef>
+        </p:style>
+        <p:txBody>
+          <a:bodyPr rtlCol="0" anchor="ctr"/>
+          <a:lstStyle/>
+          <a:p>
+            <a:pPr algn="ctr"/>
+          </a:p>
+        </p:txBody>
+      </p:sp>
+      <p:sp>
+        <p:nvSpPr>
+          <p:cNvPr id="25" name="Rectangle 24"/>
+          <p:cNvSpPr/>
+          <p:nvPr/>
+        </p:nvSpPr>
+        <p:spPr>
+          <a:xfrm>
+            <a:off x="6178143" y="859536"/>
+            <a:ext cx="2741599" cy="36576"/>
+          </a:xfrm>
+          <a:prstGeom prst="rect">
+            <a:avLst/>
+          </a:prstGeom>
+          <a:solidFill>
+            <a:srgbClr val="E2E8F0"/>
+          </a:solidFill>
+          <a:ln>
+            <a:noFill/>
+          </a:ln>
+          <a:effectLst/>
+        </p:spPr>
+        <p:style>
+          <a:lnRef idx="1">
+            <a:schemeClr val="accent1"/>
+          </a:lnRef>
+          <a:fillRef idx="3">
+            <a:schemeClr val="accent1"/>
+          </a:fillRef>
+          <a:effectRef idx="2">
+            <a:schemeClr val="accent1"/>
+          </a:effectRef>
+          <a:fontRef idx="minor">
+            <a:schemeClr val="lt1"/>
+          </a:fontRef>
+        </p:style>
+        <p:txBody>
+          <a:bodyPr rtlCol="0" anchor="ctr"/>
+          <a:lstStyle/>
+          <a:p>
+            <a:pPr algn="ctr"/>
+          </a:p>
+        </p:txBody>
+      </p:sp>
+      <p:sp>
+        <p:nvSpPr>
+          <p:cNvPr id="26" name="Rounded Rectangle 25"/>
+          <p:cNvSpPr/>
+          <p:nvPr/>
+        </p:nvSpPr>
+        <p:spPr>
+          <a:xfrm>
+            <a:off x="6287871" y="969264"/>
+            <a:ext cx="2522143" cy="2514600"/>
+          </a:xfrm>
+          <a:prstGeom prst="roundRect">
+            <a:avLst>
+              <a:gd name="adj" fmla="val 3000"/>
+            </a:avLst>
+          </a:prstGeom>
+          <a:solidFill>
+            <a:srgbClr val="F5F8FC"/>
+          </a:solidFill>
+          <a:ln w="8890">
+            <a:solidFill>
+              <a:srgbClr val="C0D0E0"/>
+            </a:solidFill>
+          </a:ln>
+          <a:effectLst/>
+        </p:spPr>
+        <p:style>
+          <a:lnRef idx="1">
+            <a:schemeClr val="accent1"/>
+          </a:lnRef>
+          <a:fillRef idx="3">
+            <a:schemeClr val="accent1"/>
+          </a:fillRef>
+          <a:effectRef idx="2">
+            <a:schemeClr val="accent1"/>
+          </a:effectRef>
+          <a:fontRef idx="minor">
+            <a:schemeClr val="lt1"/>
+          </a:fontRef>
+        </p:style>
+        <p:txBody>
+          <a:bodyPr rtlCol="0" anchor="ctr"/>
+          <a:lstStyle/>
+          <a:p>
+            <a:pPr algn="ctr"/>
+          </a:p>
+        </p:txBody>
+      </p:sp>
+      <p:sp>
+        <p:nvSpPr>
+          <p:cNvPr id="27" name="TextBox 26"/>
+          <p:cNvSpPr txBox="1"/>
+          <p:nvPr/>
+        </p:nvSpPr>
+        <p:spPr>
+          <a:xfrm>
+            <a:off x="6287871" y="969264"/>
+            <a:ext cx="2522143" cy="2514600"/>
+          </a:xfrm>
+          <a:prstGeom prst="rect">
+            <a:avLst/>
+          </a:prstGeom>
+          <a:noFill/>
+        </p:spPr>
+        <p:txBody>
+          <a:bodyPr wrap="square" anchor="ctr" lIns="36000" rIns="36000" tIns="18000" bIns="18000">
+            <a:spAutoFit/>
+          </a:bodyPr>
+          <a:lstStyle/>
+          <a:p>
+            <a:pPr algn="ctr"/>
+            <a:r>
+              <a:rPr sz="1100" b="0" i="0">
+                <a:solidFill>
+                  <a:srgbClr val="AAB4C0"/>
+                </a:solidFill>
+                <a:latin typeface="Noto Sans JP"/>
+              </a:rPr>
+              <a:t>（写真）</a:t>
+            </a:r>
+          </a:p>
+        </p:txBody>
+      </p:sp>
+      <p:sp>
+        <p:nvSpPr>
+          <p:cNvPr id="28" name="TextBox 27"/>
+          <p:cNvSpPr txBox="1"/>
+          <p:nvPr/>
+        </p:nvSpPr>
+        <p:spPr>
+          <a:xfrm>
+            <a:off x="6269583" y="3611880"/>
+            <a:ext cx="2558719" cy="310896"/>
+          </a:xfrm>
+          <a:prstGeom prst="rect">
+            <a:avLst/>
+          </a:prstGeom>
+          <a:noFill/>
+        </p:spPr>
+        <p:txBody>
+          <a:bodyPr wrap="square" anchor="t" lIns="36000" rIns="36000" tIns="18000" bIns="18000">
+            <a:spAutoFit/>
+          </a:bodyPr>
+          <a:lstStyle/>
+          <a:p>
+            <a:pPr algn="ctr"/>
+            <a:r>
+              <a:rPr sz="1400" b="1" i="0">
+                <a:solidFill>
+                  <a:srgbClr val="1E293B"/>
+                </a:solidFill>
+                <a:latin typeface="Noto Sans JP"/>
+              </a:rPr>
+              <a:t>AquaGel-K</a:t>
+            </a:r>
+          </a:p>
+        </p:txBody>
+      </p:sp>
+      <p:sp>
+        <p:nvSpPr>
+          <p:cNvPr id="29" name="TextBox 28"/>
+          <p:cNvSpPr txBox="1"/>
+          <p:nvPr/>
+        </p:nvSpPr>
+        <p:spPr>
+          <a:xfrm>
+            <a:off x="6269583" y="3922776"/>
+            <a:ext cx="2558719" cy="237744"/>
+          </a:xfrm>
+          <a:prstGeom prst="rect">
+            <a:avLst/>
+          </a:prstGeom>
+          <a:noFill/>
+        </p:spPr>
+        <p:txBody>
+          <a:bodyPr wrap="square" anchor="t" lIns="36000" rIns="36000" tIns="18000" bIns="18000">
+            <a:spAutoFit/>
+          </a:bodyPr>
+          <a:lstStyle/>
+          <a:p>
+            <a:pPr algn="ctr"/>
+            <a:r>
+              <a:rPr sz="1000" b="0" i="0">
+                <a:solidFill>
+                  <a:srgbClr val="64748B"/>
+                </a:solidFill>
+                <a:latin typeface="Noto Sans JP"/>
+              </a:rPr>
+              <a:t>架橋ポリアクリレート</a:t>
+            </a:r>
+          </a:p>
+        </p:txBody>
+      </p:sp>
+      <p:sp>
+        <p:nvSpPr>
+          <p:cNvPr id="30" name="TextBox 29"/>
+          <p:cNvSpPr txBox="1"/>
+          <p:nvPr/>
+        </p:nvSpPr>
+        <p:spPr>
+          <a:xfrm>
+            <a:off x="6269583" y="4197096"/>
+            <a:ext cx="2558719" cy="1837944"/>
+          </a:xfrm>
+          <a:prstGeom prst="rect">
+            <a:avLst/>
+          </a:prstGeom>
+          <a:noFill/>
+        </p:spPr>
+        <p:txBody>
+          <a:bodyPr wrap="square" anchor="t" lIns="36000" rIns="36000" tIns="18000" bIns="18000">
+            <a:spAutoFit/>
+          </a:bodyPr>
+          <a:lstStyle/>
+          <a:p>
+            <a:pPr algn="ctr"/>
+            <a:r>
+              <a:rPr sz="1200" b="0" i="0">
+                <a:solidFill>
+                  <a:srgbClr val="A05656"/>
+                </a:solidFill>
+                <a:latin typeface="Noto Sans JP"/>
+              </a:rPr>
+              <a:t>水蒸発と同時に</a:t>
+            </a:r>
+          </a:p>
+          <a:p>
+            <a:pPr algn="ctr"/>
+            <a:r>
+              <a:rPr sz="1200" b="0" i="0">
+                <a:solidFill>
+                  <a:srgbClr val="A05656"/>
+                </a:solidFill>
+                <a:latin typeface="Noto Sans JP"/>
+              </a:rPr>
+              <a:t>保護機能が消失</a:t>
+            </a:r>
+          </a:p>
+        </p:txBody>
+      </p:sp>
+      <p:sp>
+        <p:nvSpPr>
+          <p:cNvPr id="31" name="Rounded Rectangle 30"/>
+          <p:cNvSpPr/>
+          <p:nvPr/>
+        </p:nvSpPr>
+        <p:spPr>
+          <a:xfrm>
+            <a:off x="9084335" y="859536"/>
+            <a:ext cx="2741599" cy="5248656"/>
+          </a:xfrm>
+          <a:prstGeom prst="roundRect">
+            <a:avLst>
+              <a:gd name="adj" fmla="val 4000"/>
+            </a:avLst>
           </a:prstGeom>
           <a:solidFill>
             <a:srgbClr val="1E293B"/>
@@ -49545,944 +50088,14 @@
       </p:sp>
       <p:sp>
         <p:nvSpPr>
-          <p:cNvPr id="11" name="TextBox 10"/>
-          <p:cNvSpPr txBox="1"/>
-          <p:nvPr/>
-        </p:nvSpPr>
-        <p:spPr>
-          <a:xfrm>
-            <a:off x="457200" y="859536"/>
-            <a:ext cx="1509761" cy="585216"/>
-          </a:xfrm>
-          <a:prstGeom prst="rect">
-            <a:avLst/>
-          </a:prstGeom>
-          <a:noFill/>
-        </p:spPr>
-        <p:txBody>
-          <a:bodyPr wrap="square" anchor="ctr" lIns="36000" rIns="36000" tIns="18000" bIns="18000">
-            <a:spAutoFit/>
-          </a:bodyPr>
-          <a:lstStyle/>
-          <a:p>
-            <a:pPr algn="l"/>
-            <a:r>
-              <a:rPr sz="1100" b="1" i="0">
-                <a:solidFill>
-                  <a:srgbClr val="FFFFFF"/>
-                </a:solidFill>
-                <a:latin typeface="Noto Sans JP"/>
-              </a:rPr>
-              <a:t>技術</a:t>
-            </a:r>
-          </a:p>
-        </p:txBody>
-      </p:sp>
-      <p:sp>
-        <p:nvSpPr>
-          <p:cNvPr id="12" name="TextBox 11"/>
-          <p:cNvSpPr txBox="1"/>
-          <p:nvPr/>
-        </p:nvSpPr>
-        <p:spPr>
-          <a:xfrm>
-            <a:off x="2058401" y="859536"/>
-            <a:ext cx="2043495" cy="585216"/>
-          </a:xfrm>
-          <a:prstGeom prst="rect">
-            <a:avLst/>
-          </a:prstGeom>
-          <a:noFill/>
-        </p:spPr>
-        <p:txBody>
-          <a:bodyPr wrap="square" anchor="ctr" lIns="36000" rIns="36000" tIns="18000" bIns="18000">
-            <a:spAutoFit/>
-          </a:bodyPr>
-          <a:lstStyle/>
-          <a:p>
-            <a:pPr algn="l"/>
-            <a:r>
-              <a:rPr sz="1100" b="1" i="0">
-                <a:solidFill>
-                  <a:srgbClr val="FFFFFF"/>
-                </a:solidFill>
-                <a:latin typeface="Noto Sans JP"/>
-              </a:rPr>
-              <a:t>主成分</a:t>
-            </a:r>
-          </a:p>
-        </p:txBody>
-      </p:sp>
-      <p:sp>
-        <p:nvSpPr>
-          <p:cNvPr id="13" name="TextBox 12"/>
-          <p:cNvSpPr txBox="1"/>
-          <p:nvPr/>
-        </p:nvSpPr>
-        <p:spPr>
-          <a:xfrm>
-            <a:off x="4193337" y="859536"/>
-            <a:ext cx="2043495" cy="585216"/>
-          </a:xfrm>
-          <a:prstGeom prst="rect">
-            <a:avLst/>
-          </a:prstGeom>
-          <a:noFill/>
-        </p:spPr>
-        <p:txBody>
-          <a:bodyPr wrap="square" anchor="ctr" lIns="36000" rIns="36000" tIns="18000" bIns="18000">
-            <a:spAutoFit/>
-          </a:bodyPr>
-          <a:lstStyle/>
-          <a:p>
-            <a:pPr algn="l"/>
-            <a:r>
-              <a:rPr sz="1100" b="1" i="0">
-                <a:solidFill>
-                  <a:srgbClr val="FFFFFF"/>
-                </a:solidFill>
-                <a:latin typeface="Noto Sans JP"/>
-              </a:rPr>
-              <a:t>特徴</a:t>
-            </a:r>
-          </a:p>
-        </p:txBody>
-      </p:sp>
-      <p:sp>
-        <p:nvSpPr>
-          <p:cNvPr id="14" name="TextBox 13"/>
-          <p:cNvSpPr txBox="1"/>
-          <p:nvPr/>
-        </p:nvSpPr>
-        <p:spPr>
-          <a:xfrm>
-            <a:off x="6328273" y="859536"/>
-            <a:ext cx="1509761" cy="585216"/>
-          </a:xfrm>
-          <a:prstGeom prst="rect">
-            <a:avLst/>
-          </a:prstGeom>
-          <a:noFill/>
-        </p:spPr>
-        <p:txBody>
-          <a:bodyPr wrap="square" anchor="ctr" lIns="36000" rIns="36000" tIns="18000" bIns="18000">
-            <a:spAutoFit/>
-          </a:bodyPr>
-          <a:lstStyle/>
-          <a:p>
-            <a:pPr algn="l"/>
-            <a:r>
-              <a:rPr sz="1100" b="1" i="0">
-                <a:solidFill>
-                  <a:srgbClr val="FFFFFF"/>
-                </a:solidFill>
-                <a:latin typeface="Noto Sans JP"/>
-              </a:rPr>
-              <a:t>限界</a:t>
-            </a:r>
-          </a:p>
-        </p:txBody>
-      </p:sp>
-      <p:sp>
-        <p:nvSpPr>
-          <p:cNvPr id="15" name="Rectangle 14"/>
+          <p:cNvPr id="32" name="Rectangle 31"/>
           <p:cNvSpPr/>
           <p:nvPr/>
         </p:nvSpPr>
         <p:spPr>
           <a:xfrm>
-            <a:off x="365760" y="1444752"/>
-            <a:ext cx="7472275" cy="585216"/>
-          </a:xfrm>
-          <a:prstGeom prst="rect">
-            <a:avLst/>
-          </a:prstGeom>
-          <a:solidFill>
-            <a:srgbClr val="F8FAFC"/>
-          </a:solidFill>
-          <a:ln w="3810">
-            <a:solidFill>
-              <a:srgbClr val="E2E8F0"/>
-            </a:solidFill>
-          </a:ln>
-          <a:effectLst/>
-        </p:spPr>
-        <p:style>
-          <a:lnRef idx="1">
-            <a:schemeClr val="accent1"/>
-          </a:lnRef>
-          <a:fillRef idx="3">
-            <a:schemeClr val="accent1"/>
-          </a:fillRef>
-          <a:effectRef idx="2">
-            <a:schemeClr val="accent1"/>
-          </a:effectRef>
-          <a:fontRef idx="minor">
-            <a:schemeClr val="lt1"/>
-          </a:fontRef>
-        </p:style>
-        <p:txBody>
-          <a:bodyPr rtlCol="0" anchor="ctr"/>
-          <a:lstStyle/>
-          <a:p>
-            <a:pPr algn="ctr"/>
-          </a:p>
-        </p:txBody>
-      </p:sp>
-      <p:sp>
-        <p:nvSpPr>
-          <p:cNvPr id="16" name="TextBox 15"/>
-          <p:cNvSpPr txBox="1"/>
-          <p:nvPr/>
-        </p:nvSpPr>
-        <p:spPr>
-          <a:xfrm>
-            <a:off x="457200" y="1444752"/>
-            <a:ext cx="1509761" cy="585216"/>
-          </a:xfrm>
-          <a:prstGeom prst="rect">
-            <a:avLst/>
-          </a:prstGeom>
-          <a:noFill/>
-        </p:spPr>
-        <p:txBody>
-          <a:bodyPr wrap="square" anchor="ctr" lIns="36000" rIns="36000" tIns="18000" bIns="18000">
-            <a:spAutoFit/>
-          </a:bodyPr>
-          <a:lstStyle/>
-          <a:p>
-            <a:pPr algn="l"/>
-            <a:r>
-              <a:rPr sz="1100" b="0" i="0">
-                <a:solidFill>
-                  <a:srgbClr val="334155"/>
-                </a:solidFill>
-                <a:latin typeface="Noto Sans JP"/>
-              </a:rPr>
-              <a:t>水のみ</a:t>
-            </a:r>
-          </a:p>
-        </p:txBody>
-      </p:sp>
-      <p:sp>
-        <p:nvSpPr>
-          <p:cNvPr id="17" name="TextBox 16"/>
-          <p:cNvSpPr txBox="1"/>
-          <p:nvPr/>
-        </p:nvSpPr>
-        <p:spPr>
-          <a:xfrm>
-            <a:off x="2058401" y="1444752"/>
-            <a:ext cx="2043495" cy="585216"/>
-          </a:xfrm>
-          <a:prstGeom prst="rect">
-            <a:avLst/>
-          </a:prstGeom>
-          <a:noFill/>
-        </p:spPr>
-        <p:txBody>
-          <a:bodyPr wrap="square" anchor="ctr" lIns="36000" rIns="36000" tIns="18000" bIns="18000">
-            <a:spAutoFit/>
-          </a:bodyPr>
-          <a:lstStyle/>
-          <a:p>
-            <a:pPr algn="l"/>
-            <a:r>
-              <a:rPr sz="1100" b="0" i="0">
-                <a:solidFill>
-                  <a:srgbClr val="334155"/>
-                </a:solidFill>
-                <a:latin typeface="Noto Sans JP"/>
-              </a:rPr>
-              <a:t>H₂O</a:t>
-            </a:r>
-          </a:p>
-        </p:txBody>
-      </p:sp>
-      <p:sp>
-        <p:nvSpPr>
-          <p:cNvPr id="18" name="TextBox 17"/>
-          <p:cNvSpPr txBox="1"/>
-          <p:nvPr/>
-        </p:nvSpPr>
-        <p:spPr>
-          <a:xfrm>
-            <a:off x="4193337" y="1444752"/>
-            <a:ext cx="2043495" cy="585216"/>
-          </a:xfrm>
-          <a:prstGeom prst="rect">
-            <a:avLst/>
-          </a:prstGeom>
-          <a:noFill/>
-        </p:spPr>
-        <p:txBody>
-          <a:bodyPr wrap="square" anchor="ctr" lIns="36000" rIns="36000" tIns="18000" bIns="18000">
-            <a:spAutoFit/>
-          </a:bodyPr>
-          <a:lstStyle/>
-          <a:p>
-            <a:pPr algn="l"/>
-            <a:r>
-              <a:rPr sz="1100" b="0" i="0">
-                <a:solidFill>
-                  <a:srgbClr val="334155"/>
-                </a:solidFill>
-                <a:latin typeface="Noto Sans JP"/>
-              </a:rPr>
-              <a:t>蒸発潜熱による冷却</a:t>
-            </a:r>
-          </a:p>
-        </p:txBody>
-      </p:sp>
-      <p:sp>
-        <p:nvSpPr>
-          <p:cNvPr id="19" name="TextBox 18"/>
-          <p:cNvSpPr txBox="1"/>
-          <p:nvPr/>
-        </p:nvSpPr>
-        <p:spPr>
-          <a:xfrm>
-            <a:off x="6328273" y="1444752"/>
-            <a:ext cx="1509761" cy="585216"/>
-          </a:xfrm>
-          <a:prstGeom prst="rect">
-            <a:avLst/>
-          </a:prstGeom>
-          <a:noFill/>
-        </p:spPr>
-        <p:txBody>
-          <a:bodyPr wrap="square" anchor="ctr" lIns="36000" rIns="36000" tIns="18000" bIns="18000">
-            <a:spAutoFit/>
-          </a:bodyPr>
-          <a:lstStyle/>
-          <a:p>
-            <a:pPr algn="l"/>
-            <a:r>
-              <a:rPr sz="1100" b="0" i="0">
-                <a:solidFill>
-                  <a:srgbClr val="A05656"/>
-                </a:solidFill>
-                <a:latin typeface="Noto Sans JP"/>
-              </a:rPr>
-              <a:t>即座に流失・蒸発</a:t>
-            </a:r>
-          </a:p>
-        </p:txBody>
-      </p:sp>
-      <p:sp>
-        <p:nvSpPr>
-          <p:cNvPr id="20" name="Rectangle 19"/>
-          <p:cNvSpPr/>
-          <p:nvPr/>
-        </p:nvSpPr>
-        <p:spPr>
-          <a:xfrm>
-            <a:off x="365760" y="2029968"/>
-            <a:ext cx="7472275" cy="585216"/>
-          </a:xfrm>
-          <a:prstGeom prst="rect">
-            <a:avLst/>
-          </a:prstGeom>
-          <a:solidFill>
-            <a:srgbClr val="FFFFFF"/>
-          </a:solidFill>
-          <a:ln w="3810">
-            <a:solidFill>
-              <a:srgbClr val="E2E8F0"/>
-            </a:solidFill>
-          </a:ln>
-          <a:effectLst/>
-        </p:spPr>
-        <p:style>
-          <a:lnRef idx="1">
-            <a:schemeClr val="accent1"/>
-          </a:lnRef>
-          <a:fillRef idx="3">
-            <a:schemeClr val="accent1"/>
-          </a:fillRef>
-          <a:effectRef idx="2">
-            <a:schemeClr val="accent1"/>
-          </a:effectRef>
-          <a:fontRef idx="minor">
-            <a:schemeClr val="lt1"/>
-          </a:fontRef>
-        </p:style>
-        <p:txBody>
-          <a:bodyPr rtlCol="0" anchor="ctr"/>
-          <a:lstStyle/>
-          <a:p>
-            <a:pPr algn="ctr"/>
-          </a:p>
-        </p:txBody>
-      </p:sp>
-      <p:sp>
-        <p:nvSpPr>
-          <p:cNvPr id="21" name="TextBox 20"/>
-          <p:cNvSpPr txBox="1"/>
-          <p:nvPr/>
-        </p:nvSpPr>
-        <p:spPr>
-          <a:xfrm>
-            <a:off x="457200" y="2029968"/>
-            <a:ext cx="1509761" cy="585216"/>
-          </a:xfrm>
-          <a:prstGeom prst="rect">
-            <a:avLst/>
-          </a:prstGeom>
-          <a:noFill/>
-        </p:spPr>
-        <p:txBody>
-          <a:bodyPr wrap="square" anchor="ctr" lIns="36000" rIns="36000" tIns="18000" bIns="18000">
-            <a:spAutoFit/>
-          </a:bodyPr>
-          <a:lstStyle/>
-          <a:p>
-            <a:pPr algn="l"/>
-            <a:r>
-              <a:rPr sz="1100" b="0" i="0">
-                <a:solidFill>
-                  <a:srgbClr val="334155"/>
-                </a:solidFill>
-                <a:latin typeface="Noto Sans JP"/>
-              </a:rPr>
-              <a:t>Phos-Chek</a:t>
-            </a:r>
-          </a:p>
-        </p:txBody>
-      </p:sp>
-      <p:sp>
-        <p:nvSpPr>
-          <p:cNvPr id="22" name="TextBox 21"/>
-          <p:cNvSpPr txBox="1"/>
-          <p:nvPr/>
-        </p:nvSpPr>
-        <p:spPr>
-          <a:xfrm>
-            <a:off x="2058401" y="2029968"/>
-            <a:ext cx="2043495" cy="585216"/>
-          </a:xfrm>
-          <a:prstGeom prst="rect">
-            <a:avLst/>
-          </a:prstGeom>
-          <a:noFill/>
-        </p:spPr>
-        <p:txBody>
-          <a:bodyPr wrap="square" anchor="ctr" lIns="36000" rIns="36000" tIns="18000" bIns="18000">
-            <a:spAutoFit/>
-          </a:bodyPr>
-          <a:lstStyle/>
-          <a:p>
-            <a:pPr algn="l"/>
-            <a:r>
-              <a:rPr sz="1100" b="0" i="0">
-                <a:solidFill>
-                  <a:srgbClr val="334155"/>
-                </a:solidFill>
-                <a:latin typeface="Noto Sans JP"/>
-              </a:rPr>
-              <a:t>リン酸アンモニウム</a:t>
-            </a:r>
-          </a:p>
-        </p:txBody>
-      </p:sp>
-      <p:sp>
-        <p:nvSpPr>
-          <p:cNvPr id="23" name="TextBox 22"/>
-          <p:cNvSpPr txBox="1"/>
-          <p:nvPr/>
-        </p:nvSpPr>
-        <p:spPr>
-          <a:xfrm>
-            <a:off x="4193337" y="2029968"/>
-            <a:ext cx="2043495" cy="585216"/>
-          </a:xfrm>
-          <a:prstGeom prst="rect">
-            <a:avLst/>
-          </a:prstGeom>
-          <a:noFill/>
-        </p:spPr>
-        <p:txBody>
-          <a:bodyPr wrap="square" anchor="ctr" lIns="36000" rIns="36000" tIns="18000" bIns="18000">
-            <a:spAutoFit/>
-          </a:bodyPr>
-          <a:lstStyle/>
-          <a:p>
-            <a:pPr algn="l"/>
-            <a:r>
-              <a:rPr sz="1100" b="0" i="0">
-                <a:solidFill>
-                  <a:srgbClr val="334155"/>
-                </a:solidFill>
-                <a:latin typeface="Noto Sans JP"/>
-              </a:rPr>
-              <a:t>樹木・地表に直接散布</a:t>
-            </a:r>
-          </a:p>
-        </p:txBody>
-      </p:sp>
-      <p:sp>
-        <p:nvSpPr>
-          <p:cNvPr id="24" name="TextBox 23"/>
-          <p:cNvSpPr txBox="1"/>
-          <p:nvPr/>
-        </p:nvSpPr>
-        <p:spPr>
-          <a:xfrm>
-            <a:off x="6328273" y="2029968"/>
-            <a:ext cx="1509761" cy="585216"/>
-          </a:xfrm>
-          <a:prstGeom prst="rect">
-            <a:avLst/>
-          </a:prstGeom>
-          <a:noFill/>
-        </p:spPr>
-        <p:txBody>
-          <a:bodyPr wrap="square" anchor="ctr" lIns="36000" rIns="36000" tIns="18000" bIns="18000">
-            <a:spAutoFit/>
-          </a:bodyPr>
-          <a:lstStyle/>
-          <a:p>
-            <a:pPr algn="l"/>
-            <a:r>
-              <a:rPr sz="1100" b="0" i="0">
-                <a:solidFill>
-                  <a:srgbClr val="A05656"/>
-                </a:solidFill>
-                <a:latin typeface="Noto Sans JP"/>
-              </a:rPr>
-              <a:t>土壌・水系への残留</a:t>
-            </a:r>
-          </a:p>
-        </p:txBody>
-      </p:sp>
-      <p:sp>
-        <p:nvSpPr>
-          <p:cNvPr id="25" name="Rectangle 24"/>
-          <p:cNvSpPr/>
-          <p:nvPr/>
-        </p:nvSpPr>
-        <p:spPr>
-          <a:xfrm>
-            <a:off x="365760" y="2615184"/>
-            <a:ext cx="7472275" cy="585216"/>
-          </a:xfrm>
-          <a:prstGeom prst="rect">
-            <a:avLst/>
-          </a:prstGeom>
-          <a:solidFill>
-            <a:srgbClr val="F8FAFC"/>
-          </a:solidFill>
-          <a:ln w="3810">
-            <a:solidFill>
-              <a:srgbClr val="E2E8F0"/>
-            </a:solidFill>
-          </a:ln>
-          <a:effectLst/>
-        </p:spPr>
-        <p:style>
-          <a:lnRef idx="1">
-            <a:schemeClr val="accent1"/>
-          </a:lnRef>
-          <a:fillRef idx="3">
-            <a:schemeClr val="accent1"/>
-          </a:fillRef>
-          <a:effectRef idx="2">
-            <a:schemeClr val="accent1"/>
-          </a:effectRef>
-          <a:fontRef idx="minor">
-            <a:schemeClr val="lt1"/>
-          </a:fontRef>
-        </p:style>
-        <p:txBody>
-          <a:bodyPr rtlCol="0" anchor="ctr"/>
-          <a:lstStyle/>
-          <a:p>
-            <a:pPr algn="ctr"/>
-          </a:p>
-        </p:txBody>
-      </p:sp>
-      <p:sp>
-        <p:nvSpPr>
-          <p:cNvPr id="26" name="TextBox 25"/>
-          <p:cNvSpPr txBox="1"/>
-          <p:nvPr/>
-        </p:nvSpPr>
-        <p:spPr>
-          <a:xfrm>
-            <a:off x="457200" y="2615184"/>
-            <a:ext cx="1509761" cy="585216"/>
-          </a:xfrm>
-          <a:prstGeom prst="rect">
-            <a:avLst/>
-          </a:prstGeom>
-          <a:noFill/>
-        </p:spPr>
-        <p:txBody>
-          <a:bodyPr wrap="square" anchor="ctr" lIns="36000" rIns="36000" tIns="18000" bIns="18000">
-            <a:spAutoFit/>
-          </a:bodyPr>
-          <a:lstStyle/>
-          <a:p>
-            <a:pPr algn="l"/>
-            <a:r>
-              <a:rPr sz="1100" b="0" i="0">
-                <a:solidFill>
-                  <a:srgbClr val="334155"/>
-                </a:solidFill>
-                <a:latin typeface="Noto Sans JP"/>
-              </a:rPr>
-              <a:t>AquaGel-K</a:t>
-            </a:r>
-          </a:p>
-        </p:txBody>
-      </p:sp>
-      <p:sp>
-        <p:nvSpPr>
-          <p:cNvPr id="27" name="TextBox 26"/>
-          <p:cNvSpPr txBox="1"/>
-          <p:nvPr/>
-        </p:nvSpPr>
-        <p:spPr>
-          <a:xfrm>
-            <a:off x="2058401" y="2615184"/>
-            <a:ext cx="2043495" cy="585216"/>
-          </a:xfrm>
-          <a:prstGeom prst="rect">
-            <a:avLst/>
-          </a:prstGeom>
-          <a:noFill/>
-        </p:spPr>
-        <p:txBody>
-          <a:bodyPr wrap="square" anchor="ctr" lIns="36000" rIns="36000" tIns="18000" bIns="18000">
-            <a:spAutoFit/>
-          </a:bodyPr>
-          <a:lstStyle/>
-          <a:p>
-            <a:pPr algn="l"/>
-            <a:r>
-              <a:rPr sz="1100" b="0" i="0">
-                <a:solidFill>
-                  <a:srgbClr val="334155"/>
-                </a:solidFill>
-                <a:latin typeface="Noto Sans JP"/>
-              </a:rPr>
-              <a:t>架橋ポリアクリレート</a:t>
-            </a:r>
-          </a:p>
-        </p:txBody>
-      </p:sp>
-      <p:sp>
-        <p:nvSpPr>
-          <p:cNvPr id="28" name="TextBox 27"/>
-          <p:cNvSpPr txBox="1"/>
-          <p:nvPr/>
-        </p:nvSpPr>
-        <p:spPr>
-          <a:xfrm>
-            <a:off x="4193337" y="2615184"/>
-            <a:ext cx="2043495" cy="585216"/>
-          </a:xfrm>
-          <a:prstGeom prst="rect">
-            <a:avLst/>
-          </a:prstGeom>
-          <a:noFill/>
-        </p:spPr>
-        <p:txBody>
-          <a:bodyPr wrap="square" anchor="ctr" lIns="36000" rIns="36000" tIns="18000" bIns="18000">
-            <a:spAutoFit/>
-          </a:bodyPr>
-          <a:lstStyle/>
-          <a:p>
-            <a:pPr algn="l"/>
-            <a:r>
-              <a:rPr sz="1100" b="0" i="0">
-                <a:solidFill>
-                  <a:srgbClr val="334155"/>
-                </a:solidFill>
-                <a:latin typeface="Noto Sans JP"/>
-              </a:rPr>
-              <a:t>水を高濃度に保持</a:t>
-            </a:r>
-          </a:p>
-        </p:txBody>
-      </p:sp>
-      <p:sp>
-        <p:nvSpPr>
-          <p:cNvPr id="29" name="TextBox 28"/>
-          <p:cNvSpPr txBox="1"/>
-          <p:nvPr/>
-        </p:nvSpPr>
-        <p:spPr>
-          <a:xfrm>
-            <a:off x="6328273" y="2615184"/>
-            <a:ext cx="1509761" cy="585216"/>
-          </a:xfrm>
-          <a:prstGeom prst="rect">
-            <a:avLst/>
-          </a:prstGeom>
-          <a:noFill/>
-        </p:spPr>
-        <p:txBody>
-          <a:bodyPr wrap="square" anchor="ctr" lIns="36000" rIns="36000" tIns="18000" bIns="18000">
-            <a:spAutoFit/>
-          </a:bodyPr>
-          <a:lstStyle/>
-          <a:p>
-            <a:pPr algn="l"/>
-            <a:r>
-              <a:rPr sz="1100" b="0" i="0">
-                <a:solidFill>
-                  <a:srgbClr val="A05656"/>
-                </a:solidFill>
-                <a:latin typeface="Noto Sans JP"/>
-              </a:rPr>
-              <a:t>水蒸発後は機能消失</a:t>
-            </a:r>
-          </a:p>
-        </p:txBody>
-      </p:sp>
-      <p:sp>
-        <p:nvSpPr>
-          <p:cNvPr id="30" name="Rectangle 29"/>
-          <p:cNvSpPr/>
-          <p:nvPr/>
-        </p:nvSpPr>
-        <p:spPr>
-          <a:xfrm>
-            <a:off x="365760" y="3200400"/>
-            <a:ext cx="7472275" cy="585216"/>
-          </a:xfrm>
-          <a:prstGeom prst="rect">
-            <a:avLst/>
-          </a:prstGeom>
-          <a:solidFill>
-            <a:srgbClr val="FFFFFF"/>
-          </a:solidFill>
-          <a:ln w="3810">
-            <a:solidFill>
-              <a:srgbClr val="E2E8F0"/>
-            </a:solidFill>
-          </a:ln>
-          <a:effectLst/>
-        </p:spPr>
-        <p:style>
-          <a:lnRef idx="1">
-            <a:schemeClr val="accent1"/>
-          </a:lnRef>
-          <a:fillRef idx="3">
-            <a:schemeClr val="accent1"/>
-          </a:fillRef>
-          <a:effectRef idx="2">
-            <a:schemeClr val="accent1"/>
-          </a:effectRef>
-          <a:fontRef idx="minor">
-            <a:schemeClr val="lt1"/>
-          </a:fontRef>
-        </p:style>
-        <p:txBody>
-          <a:bodyPr rtlCol="0" anchor="ctr"/>
-          <a:lstStyle/>
-          <a:p>
-            <a:pPr algn="ctr"/>
-          </a:p>
-        </p:txBody>
-      </p:sp>
-      <p:sp>
-        <p:nvSpPr>
-          <p:cNvPr id="31" name="TextBox 30"/>
-          <p:cNvSpPr txBox="1"/>
-          <p:nvPr/>
-        </p:nvSpPr>
-        <p:spPr>
-          <a:xfrm>
-            <a:off x="457200" y="3200400"/>
-            <a:ext cx="1509761" cy="585216"/>
-          </a:xfrm>
-          <a:prstGeom prst="rect">
-            <a:avLst/>
-          </a:prstGeom>
-          <a:noFill/>
-        </p:spPr>
-        <p:txBody>
-          <a:bodyPr wrap="square" anchor="ctr" lIns="36000" rIns="36000" tIns="18000" bIns="18000">
-            <a:spAutoFit/>
-          </a:bodyPr>
-          <a:lstStyle/>
-          <a:p>
-            <a:pPr algn="l"/>
-            <a:r>
-              <a:rPr sz="1100" b="1" i="0">
-                <a:solidFill>
-                  <a:srgbClr val="3B5174"/>
-                </a:solidFill>
-                <a:latin typeface="Noto Sans JP"/>
-              </a:rPr>
-              <a:t>本研究 WEG</a:t>
-            </a:r>
-          </a:p>
-        </p:txBody>
-      </p:sp>
-      <p:sp>
-        <p:nvSpPr>
-          <p:cNvPr id="32" name="TextBox 31"/>
-          <p:cNvSpPr txBox="1"/>
-          <p:nvPr/>
-        </p:nvSpPr>
-        <p:spPr>
-          <a:xfrm>
-            <a:off x="2058401" y="3200400"/>
-            <a:ext cx="2043495" cy="585216"/>
-          </a:xfrm>
-          <a:prstGeom prst="rect">
-            <a:avLst/>
-          </a:prstGeom>
-          <a:noFill/>
-        </p:spPr>
-        <p:txBody>
-          <a:bodyPr wrap="square" anchor="ctr" lIns="36000" rIns="36000" tIns="18000" bIns="18000">
-            <a:spAutoFit/>
-          </a:bodyPr>
-          <a:lstStyle/>
-          <a:p>
-            <a:pPr algn="l"/>
-            <a:r>
-              <a:rPr sz="1100" b="0" i="0">
-                <a:solidFill>
-                  <a:srgbClr val="334155"/>
-                </a:solidFill>
-                <a:latin typeface="Noto Sans JP"/>
-              </a:rPr>
-              <a:t>セルロース系＋シリカ</a:t>
-            </a:r>
-          </a:p>
-        </p:txBody>
-      </p:sp>
-      <p:sp>
-        <p:nvSpPr>
-          <p:cNvPr id="33" name="TextBox 32"/>
-          <p:cNvSpPr txBox="1"/>
-          <p:nvPr/>
-        </p:nvSpPr>
-        <p:spPr>
-          <a:xfrm>
-            <a:off x="4193337" y="3200400"/>
-            <a:ext cx="2043495" cy="585216"/>
-          </a:xfrm>
-          <a:prstGeom prst="rect">
-            <a:avLst/>
-          </a:prstGeom>
-          <a:noFill/>
-        </p:spPr>
-        <p:txBody>
-          <a:bodyPr wrap="square" anchor="ctr" lIns="36000" rIns="36000" tIns="18000" bIns="18000">
-            <a:spAutoFit/>
-          </a:bodyPr>
-          <a:lstStyle/>
-          <a:p>
-            <a:pPr algn="l"/>
-            <a:r>
-              <a:rPr sz="1100" b="0" i="0">
-                <a:solidFill>
-                  <a:srgbClr val="334155"/>
-                </a:solidFill>
-                <a:latin typeface="Noto Sans JP"/>
-              </a:rPr>
-              <a:t>加熱でエアロゲル層形成</a:t>
-            </a:r>
-          </a:p>
-        </p:txBody>
-      </p:sp>
-      <p:sp>
-        <p:nvSpPr>
-          <p:cNvPr id="34" name="TextBox 33"/>
-          <p:cNvSpPr txBox="1"/>
-          <p:nvPr/>
-        </p:nvSpPr>
-        <p:spPr>
-          <a:xfrm>
-            <a:off x="6328273" y="3200400"/>
-            <a:ext cx="1509761" cy="585216"/>
-          </a:xfrm>
-          <a:prstGeom prst="rect">
-            <a:avLst/>
-          </a:prstGeom>
-          <a:noFill/>
-        </p:spPr>
-        <p:txBody>
-          <a:bodyPr wrap="square" anchor="ctr" lIns="36000" rIns="36000" tIns="18000" bIns="18000">
-            <a:spAutoFit/>
-          </a:bodyPr>
-          <a:lstStyle/>
-          <a:p>
-            <a:pPr algn="l"/>
-            <a:r>
-              <a:rPr sz="1100" b="1" i="0">
-                <a:solidFill>
-                  <a:srgbClr val="5B8C5A"/>
-                </a:solidFill>
-                <a:latin typeface="Noto Sans JP"/>
-              </a:rPr>
-              <a:t>水蒸発後も継続保護</a:t>
-            </a:r>
-          </a:p>
-        </p:txBody>
-      </p:sp>
-      <p:sp>
-        <p:nvSpPr>
-          <p:cNvPr id="35" name="Rounded Rectangle 34"/>
-          <p:cNvSpPr/>
-          <p:nvPr/>
-        </p:nvSpPr>
-        <p:spPr>
-          <a:xfrm>
-            <a:off x="365760" y="3986784"/>
-            <a:ext cx="7472275" cy="640080"/>
-          </a:xfrm>
-          <a:prstGeom prst="roundRect">
-            <a:avLst>
-              <a:gd name="adj" fmla="val 4000"/>
-            </a:avLst>
-          </a:prstGeom>
-          <a:solidFill>
-            <a:srgbClr val="1E293B"/>
-          </a:solidFill>
-          <a:ln>
-            <a:noFill/>
-          </a:ln>
-          <a:effectLst/>
-        </p:spPr>
-        <p:style>
-          <a:lnRef idx="1">
-            <a:schemeClr val="accent1"/>
-          </a:lnRef>
-          <a:fillRef idx="3">
-            <a:schemeClr val="accent1"/>
-          </a:fillRef>
-          <a:effectRef idx="2">
-            <a:schemeClr val="accent1"/>
-          </a:effectRef>
-          <a:fontRef idx="minor">
-            <a:schemeClr val="lt1"/>
-          </a:fontRef>
-        </p:style>
-        <p:txBody>
-          <a:bodyPr rtlCol="0" anchor="ctr"/>
-          <a:lstStyle/>
-          <a:p>
-            <a:pPr algn="ctr"/>
-          </a:p>
-        </p:txBody>
-      </p:sp>
-      <p:sp>
-        <p:nvSpPr>
-          <p:cNvPr id="36" name="Rectangle 35"/>
-          <p:cNvSpPr/>
-          <p:nvPr/>
-        </p:nvSpPr>
-        <p:spPr>
-          <a:xfrm>
-            <a:off x="365760" y="3986784"/>
-            <a:ext cx="54864" cy="640080"/>
+            <a:off x="9084335" y="859536"/>
+            <a:ext cx="2741599" cy="36576"/>
           </a:xfrm>
           <a:prstGeom prst="rect">
             <a:avLst/>
@@ -50519,96 +50132,26 @@
       </p:sp>
       <p:sp>
         <p:nvSpPr>
-          <p:cNvPr id="37" name="TextBox 36"/>
-          <p:cNvSpPr txBox="1"/>
-          <p:nvPr/>
-        </p:nvSpPr>
-        <p:spPr>
-          <a:xfrm>
-            <a:off x="548640" y="3986784"/>
-            <a:ext cx="365760" cy="640080"/>
-          </a:xfrm>
-          <a:prstGeom prst="rect">
-            <a:avLst/>
-          </a:prstGeom>
-          <a:noFill/>
-        </p:spPr>
-        <p:txBody>
-          <a:bodyPr wrap="square" anchor="ctr" lIns="36000" rIns="36000" tIns="18000" bIns="18000">
-            <a:spAutoFit/>
-          </a:bodyPr>
-          <a:lstStyle/>
-          <a:p>
-            <a:pPr algn="l"/>
-            <a:r>
-              <a:rPr sz="1400" b="0" i="0">
-                <a:solidFill>
-                  <a:srgbClr val="D4A574"/>
-                </a:solidFill>
-                <a:latin typeface="Noto Sans JP"/>
-              </a:rPr>
-              <a:t>→</a:t>
-            </a:r>
-          </a:p>
-        </p:txBody>
-      </p:sp>
-      <p:sp>
-        <p:nvSpPr>
-          <p:cNvPr id="38" name="TextBox 37"/>
-          <p:cNvSpPr txBox="1"/>
-          <p:nvPr/>
-        </p:nvSpPr>
-        <p:spPr>
-          <a:xfrm>
-            <a:off x="960120" y="3986784"/>
-            <a:ext cx="6786475" cy="640080"/>
-          </a:xfrm>
-          <a:prstGeom prst="rect">
-            <a:avLst/>
-          </a:prstGeom>
-          <a:noFill/>
-        </p:spPr>
-        <p:txBody>
-          <a:bodyPr wrap="square" anchor="ctr" lIns="36000" rIns="36000" tIns="18000" bIns="18000">
-            <a:spAutoFit/>
-          </a:bodyPr>
-          <a:lstStyle/>
-          <a:p>
-            <a:pPr algn="l"/>
-            <a:r>
-              <a:rPr sz="1300" b="1" i="0">
-                <a:solidFill>
-                  <a:srgbClr val="FFFFFF"/>
-                </a:solidFill>
-                <a:latin typeface="Noto Sans JP"/>
-              </a:rPr>
-              <a:t>課題：既存WEGは「水のキャリア」止まりで、水分喪失と同時に保護機能が失われる</a:t>
-            </a:r>
-          </a:p>
-        </p:txBody>
-      </p:sp>
-      <p:sp>
-        <p:nvSpPr>
-          <p:cNvPr id="39" name="Rounded Rectangle 38"/>
+          <p:cNvPr id="33" name="Rounded Rectangle 32"/>
           <p:cNvSpPr/>
           <p:nvPr/>
         </p:nvSpPr>
         <p:spPr>
           <a:xfrm>
-            <a:off x="8020915" y="859536"/>
-            <a:ext cx="3805019" cy="3840480"/>
+            <a:off x="9194063" y="969264"/>
+            <a:ext cx="2522143" cy="2514600"/>
           </a:xfrm>
           <a:prstGeom prst="roundRect">
             <a:avLst>
-              <a:gd name="adj" fmla="val 2000"/>
+              <a:gd name="adj" fmla="val 3000"/>
             </a:avLst>
           </a:prstGeom>
           <a:solidFill>
-            <a:srgbClr val="F5F8FC"/>
+            <a:srgbClr val="2A3C54"/>
           </a:solidFill>
-          <a:ln w="12700">
+          <a:ln w="8890">
             <a:solidFill>
-              <a:srgbClr val="C0D0E0"/>
+              <a:srgbClr val="445E7A"/>
             </a:solidFill>
           </a:ln>
           <a:effectLst/>
@@ -50637,20 +50180,172 @@
       </p:sp>
       <p:sp>
         <p:nvSpPr>
-          <p:cNvPr id="40" name="Rectangle 39"/>
+          <p:cNvPr id="34" name="TextBox 33"/>
+          <p:cNvSpPr txBox="1"/>
+          <p:nvPr/>
+        </p:nvSpPr>
+        <p:spPr>
+          <a:xfrm>
+            <a:off x="9194063" y="969264"/>
+            <a:ext cx="2522143" cy="2514600"/>
+          </a:xfrm>
+          <a:prstGeom prst="rect">
+            <a:avLst/>
+          </a:prstGeom>
+          <a:noFill/>
+        </p:spPr>
+        <p:txBody>
+          <a:bodyPr wrap="square" anchor="ctr" lIns="36000" rIns="36000" tIns="18000" bIns="18000">
+            <a:spAutoFit/>
+          </a:bodyPr>
+          <a:lstStyle/>
+          <a:p>
+            <a:pPr algn="ctr"/>
+            <a:r>
+              <a:rPr sz="1100" b="0" i="0">
+                <a:solidFill>
+                  <a:srgbClr val="88A0B8"/>
+                </a:solidFill>
+                <a:latin typeface="Noto Sans JP"/>
+              </a:rPr>
+              <a:t>（写真）</a:t>
+            </a:r>
+          </a:p>
+        </p:txBody>
+      </p:sp>
+      <p:sp>
+        <p:nvSpPr>
+          <p:cNvPr id="35" name="TextBox 34"/>
+          <p:cNvSpPr txBox="1"/>
+          <p:nvPr/>
+        </p:nvSpPr>
+        <p:spPr>
+          <a:xfrm>
+            <a:off x="9175775" y="3611880"/>
+            <a:ext cx="2558719" cy="310896"/>
+          </a:xfrm>
+          <a:prstGeom prst="rect">
+            <a:avLst/>
+          </a:prstGeom>
+          <a:noFill/>
+        </p:spPr>
+        <p:txBody>
+          <a:bodyPr wrap="square" anchor="t" lIns="36000" rIns="36000" tIns="18000" bIns="18000">
+            <a:spAutoFit/>
+          </a:bodyPr>
+          <a:lstStyle/>
+          <a:p>
+            <a:pPr algn="ctr"/>
+            <a:r>
+              <a:rPr sz="1400" b="1" i="0">
+                <a:solidFill>
+                  <a:srgbClr val="FFFFFF"/>
+                </a:solidFill>
+                <a:latin typeface="Noto Sans JP"/>
+              </a:rPr>
+              <a:t>WEG（本研究）</a:t>
+            </a:r>
+          </a:p>
+        </p:txBody>
+      </p:sp>
+      <p:sp>
+        <p:nvSpPr>
+          <p:cNvPr id="36" name="TextBox 35"/>
+          <p:cNvSpPr txBox="1"/>
+          <p:nvPr/>
+        </p:nvSpPr>
+        <p:spPr>
+          <a:xfrm>
+            <a:off x="9175775" y="3922776"/>
+            <a:ext cx="2558719" cy="237744"/>
+          </a:xfrm>
+          <a:prstGeom prst="rect">
+            <a:avLst/>
+          </a:prstGeom>
+          <a:noFill/>
+        </p:spPr>
+        <p:txBody>
+          <a:bodyPr wrap="square" anchor="t" lIns="36000" rIns="36000" tIns="18000" bIns="18000">
+            <a:spAutoFit/>
+          </a:bodyPr>
+          <a:lstStyle/>
+          <a:p>
+            <a:pPr algn="ctr"/>
+            <a:r>
+              <a:rPr sz="1000" b="0" i="0">
+                <a:solidFill>
+                  <a:srgbClr val="A0B8D0"/>
+                </a:solidFill>
+                <a:latin typeface="Noto Sans JP"/>
+              </a:rPr>
+              <a:t>セルロース＋シリカ</a:t>
+            </a:r>
+          </a:p>
+        </p:txBody>
+      </p:sp>
+      <p:sp>
+        <p:nvSpPr>
+          <p:cNvPr id="37" name="TextBox 36"/>
+          <p:cNvSpPr txBox="1"/>
+          <p:nvPr/>
+        </p:nvSpPr>
+        <p:spPr>
+          <a:xfrm>
+            <a:off x="9175775" y="4197096"/>
+            <a:ext cx="2558719" cy="1837944"/>
+          </a:xfrm>
+          <a:prstGeom prst="rect">
+            <a:avLst/>
+          </a:prstGeom>
+          <a:noFill/>
+        </p:spPr>
+        <p:txBody>
+          <a:bodyPr wrap="square" anchor="t" lIns="36000" rIns="36000" tIns="18000" bIns="18000">
+            <a:spAutoFit/>
+          </a:bodyPr>
+          <a:lstStyle/>
+          <a:p>
+            <a:pPr algn="ctr"/>
+            <a:r>
+              <a:rPr sz="1200" b="1" i="0">
+                <a:solidFill>
+                  <a:srgbClr val="5B8C5A"/>
+                </a:solidFill>
+                <a:latin typeface="Noto Sans JP"/>
+              </a:rPr>
+              <a:t>水蒸発後も</a:t>
+            </a:r>
+          </a:p>
+          <a:p>
+            <a:pPr algn="ctr"/>
+            <a:r>
+              <a:rPr sz="1200" b="1" i="0">
+                <a:solidFill>
+                  <a:srgbClr val="5B8C5A"/>
+                </a:solidFill>
+                <a:latin typeface="Noto Sans JP"/>
+              </a:rPr>
+              <a:t>エアロゲル層が継続保護</a:t>
+            </a:r>
+          </a:p>
+        </p:txBody>
+      </p:sp>
+      <p:sp>
+        <p:nvSpPr>
+          <p:cNvPr id="38" name="Rectangle 37"/>
           <p:cNvSpPr/>
           <p:nvPr/>
         </p:nvSpPr>
         <p:spPr>
           <a:xfrm>
-            <a:off x="8130643" y="969264"/>
-            <a:ext cx="868680" cy="292608"/>
+            <a:off x="365760" y="6236208"/>
+            <a:ext cx="11460175" cy="18288"/>
           </a:xfrm>
           <a:prstGeom prst="rect">
             <a:avLst/>
           </a:prstGeom>
           <a:solidFill>
-            <a:srgbClr val="1E293B"/>
+            <a:srgbClr val="E2E8F0"/>
           </a:solidFill>
           <a:ln>
             <a:noFill/>
@@ -50681,105 +50376,35 @@
       </p:sp>
       <p:sp>
         <p:nvSpPr>
-          <p:cNvPr id="41" name="TextBox 40"/>
-          <p:cNvSpPr txBox="1"/>
-          <p:nvPr/>
-        </p:nvSpPr>
-        <p:spPr>
-          <a:xfrm>
-            <a:off x="8130643" y="969264"/>
-            <a:ext cx="868680" cy="292608"/>
-          </a:xfrm>
-          <a:prstGeom prst="rect">
-            <a:avLst/>
-          </a:prstGeom>
-          <a:noFill/>
-        </p:spPr>
-        <p:txBody>
-          <a:bodyPr wrap="square" anchor="ctr" lIns="36000" rIns="36000" tIns="18000" bIns="18000">
-            <a:spAutoFit/>
-          </a:bodyPr>
-          <a:lstStyle/>
-          <a:p>
-            <a:pPr algn="ctr"/>
-            <a:r>
-              <a:rPr sz="1100" b="1" i="0">
-                <a:solidFill>
-                  <a:srgbClr val="FFFFFF"/>
-                </a:solidFill>
-                <a:latin typeface="Noto Sans JP"/>
-              </a:rPr>
-              <a:t>Fig. 3d</a:t>
-            </a:r>
-          </a:p>
-        </p:txBody>
-      </p:sp>
-      <p:sp>
-        <p:nvSpPr>
-          <p:cNvPr id="42" name="TextBox 41"/>
-          <p:cNvSpPr txBox="1"/>
-          <p:nvPr/>
-        </p:nvSpPr>
-        <p:spPr>
-          <a:xfrm>
-            <a:off x="8020915" y="859536"/>
-            <a:ext cx="3805019" cy="3840480"/>
-          </a:xfrm>
-          <a:prstGeom prst="rect">
-            <a:avLst/>
-          </a:prstGeom>
-          <a:noFill/>
-        </p:spPr>
-        <p:txBody>
-          <a:bodyPr wrap="square" anchor="ctr" lIns="36000" rIns="36000" tIns="18000" bIns="18000">
-            <a:spAutoFit/>
-          </a:bodyPr>
-          <a:lstStyle/>
-          <a:p>
-            <a:pPr algn="ctr"/>
-            <a:r>
-              <a:rPr sz="1200" b="0" i="0">
-                <a:solidFill>
-                  <a:srgbClr val="AAB4C0"/>
-                </a:solidFill>
-                <a:latin typeface="Noto Sans JP"/>
-              </a:rPr>
-              <a:t>（論文の図を貼り付け）</a:t>
-            </a:r>
-          </a:p>
-        </p:txBody>
-      </p:sp>
-      <p:sp>
-        <p:nvSpPr>
-          <p:cNvPr id="43" name="TextBox 42"/>
-          <p:cNvSpPr txBox="1"/>
-          <p:nvPr/>
-        </p:nvSpPr>
-        <p:spPr>
-          <a:xfrm>
-            <a:off x="8020915" y="4736592"/>
-            <a:ext cx="3805019" cy="274320"/>
-          </a:xfrm>
-          <a:prstGeom prst="rect">
-            <a:avLst/>
-          </a:prstGeom>
-          <a:noFill/>
-        </p:spPr>
-        <p:txBody>
-          <a:bodyPr wrap="square" anchor="t" lIns="36000" rIns="36000" tIns="18000" bIns="18000">
-            <a:spAutoFit/>
-          </a:bodyPr>
-          <a:lstStyle/>
-          <a:p>
-            <a:pPr algn="ctr"/>
-            <a:r>
-              <a:rPr sz="1000" b="0" i="1">
-                <a:solidFill>
-                  <a:srgbClr val="64748B"/>
-                </a:solidFill>
-                <a:latin typeface="Noto Sans JP"/>
-              </a:rPr>
-              <a:t>300秒後の比較：Water vs 本研究WEG</a:t>
+          <p:cNvPr id="39" name="TextBox 38"/>
+          <p:cNvSpPr txBox="1"/>
+          <p:nvPr/>
+        </p:nvSpPr>
+        <p:spPr>
+          <a:xfrm>
+            <a:off x="365760" y="6345936"/>
+            <a:ext cx="11460175" cy="329184"/>
+          </a:xfrm>
+          <a:prstGeom prst="rect">
+            <a:avLst/>
+          </a:prstGeom>
+          <a:noFill/>
+        </p:spPr>
+        <p:txBody>
+          <a:bodyPr wrap="square" anchor="t" lIns="36000" rIns="36000" tIns="18000" bIns="18000">
+            <a:spAutoFit/>
+          </a:bodyPr>
+          <a:lstStyle/>
+          <a:p>
+            <a:pPr algn="ctr"/>
+            <a:r>
+              <a:rPr sz="1300" b="1" i="0">
+                <a:solidFill>
+                  <a:srgbClr val="1E293B"/>
+                </a:solidFill>
+                <a:latin typeface="Noto Sans JP"/>
+              </a:rPr>
+              <a:t>課題：既存WEGは「水のキャリア」止まり ─ 水分喪失と同時に保護機能が失われる</a:t>
             </a:r>
           </a:p>
         </p:txBody>
@@ -51129,62 +50754,14 @@
       </p:sp>
       <p:sp>
         <p:nvSpPr>
-          <p:cNvPr id="10" name="Rounded Rectangle 9"/>
+          <p:cNvPr id="10" name="Rectangle 9"/>
           <p:cNvSpPr/>
           <p:nvPr/>
         </p:nvSpPr>
         <p:spPr>
           <a:xfrm>
             <a:off x="365760" y="859536"/>
-            <a:ext cx="3328324" cy="3108960"/>
-          </a:xfrm>
-          <a:prstGeom prst="roundRect">
-            <a:avLst>
-              <a:gd name="adj" fmla="val 4000"/>
-            </a:avLst>
-          </a:prstGeom>
-          <a:solidFill>
-            <a:srgbClr val="F1F5F9"/>
-          </a:solidFill>
-          <a:ln w="6350">
-            <a:solidFill>
-              <a:srgbClr val="E2E8F0"/>
-            </a:solidFill>
-          </a:ln>
-          <a:effectLst/>
-        </p:spPr>
-        <p:style>
-          <a:lnRef idx="1">
-            <a:schemeClr val="accent1"/>
-          </a:lnRef>
-          <a:fillRef idx="3">
-            <a:schemeClr val="accent1"/>
-          </a:fillRef>
-          <a:effectRef idx="2">
-            <a:schemeClr val="accent1"/>
-          </a:effectRef>
-          <a:fontRef idx="minor">
-            <a:schemeClr val="lt1"/>
-          </a:fontRef>
-        </p:style>
-        <p:txBody>
-          <a:bodyPr rtlCol="0" anchor="ctr"/>
-          <a:lstStyle/>
-          <a:p>
-            <a:pPr algn="ctr"/>
-          </a:p>
-        </p:txBody>
-      </p:sp>
-      <p:sp>
-        <p:nvSpPr>
-          <p:cNvPr id="11" name="Rectangle 10"/>
-          <p:cNvSpPr/>
-          <p:nvPr/>
-        </p:nvSpPr>
-        <p:spPr>
-          <a:xfrm>
-            <a:off x="365760" y="859536"/>
-            <a:ext cx="3328324" cy="36576"/>
+            <a:ext cx="45720" cy="1389888"/>
           </a:xfrm>
           <a:prstGeom prst="rect">
             <a:avLst/>
@@ -51221,35 +50798,70 @@
       </p:sp>
       <p:sp>
         <p:nvSpPr>
+          <p:cNvPr id="11" name="TextBox 10"/>
+          <p:cNvSpPr txBox="1"/>
+          <p:nvPr/>
+        </p:nvSpPr>
+        <p:spPr>
+          <a:xfrm>
+            <a:off x="530352" y="859536"/>
+            <a:ext cx="4080546" cy="475488"/>
+          </a:xfrm>
+          <a:prstGeom prst="rect">
+            <a:avLst/>
+          </a:prstGeom>
+          <a:noFill/>
+        </p:spPr>
+        <p:txBody>
+          <a:bodyPr wrap="square" anchor="t" lIns="36000" rIns="36000" tIns="18000" bIns="18000">
+            <a:spAutoFit/>
+          </a:bodyPr>
+          <a:lstStyle/>
+          <a:p>
+            <a:pPr algn="l"/>
+            <a:r>
+              <a:rPr sz="2200" b="1" i="1">
+                <a:solidFill>
+                  <a:srgbClr val="1E293B"/>
+                </a:solidFill>
+                <a:latin typeface="Noto Sans JP"/>
+              </a:rPr>
+              <a:t>Heat-Activated</a:t>
+            </a:r>
+          </a:p>
+        </p:txBody>
+      </p:sp>
+      <p:sp>
+        <p:nvSpPr>
           <p:cNvPr id="12" name="TextBox 11"/>
           <p:cNvSpPr txBox="1"/>
           <p:nvPr/>
         </p:nvSpPr>
         <p:spPr>
           <a:xfrm>
-            <a:off x="548640" y="1024128"/>
-            <a:ext cx="2962564" cy="219456"/>
-          </a:xfrm>
-          <a:prstGeom prst="rect">
-            <a:avLst/>
-          </a:prstGeom>
-          <a:noFill/>
-        </p:spPr>
-        <p:txBody>
-          <a:bodyPr wrap="square" anchor="t" lIns="36000" rIns="36000" tIns="18000" bIns="18000">
-            <a:spAutoFit/>
-          </a:bodyPr>
-          <a:lstStyle/>
-          <a:p>
-            <a:pPr algn="l"/>
-            <a:r>
-              <a:rPr sz="1000" b="1" i="0">
-                <a:solidFill>
-                  <a:srgbClr val="64748B"/>
-                </a:solidFill>
-                <a:latin typeface="Noto Sans JP"/>
-              </a:rPr>
-              <a:t>DESIGN CONCEPT</a:t>
+            <a:off x="530352" y="1316736"/>
+            <a:ext cx="4080546" cy="475488"/>
+          </a:xfrm>
+          <a:prstGeom prst="rect">
+            <a:avLst/>
+          </a:prstGeom>
+          <a:noFill/>
+        </p:spPr>
+        <p:txBody>
+          <a:bodyPr wrap="square" anchor="t" lIns="36000" rIns="36000" tIns="18000" bIns="18000">
+            <a:spAutoFit/>
+          </a:bodyPr>
+          <a:lstStyle/>
+          <a:p>
+            <a:pPr algn="l"/>
+            <a:r>
+              <a:rPr sz="2200" b="1" i="1">
+                <a:solidFill>
+                  <a:srgbClr val="3B5174"/>
+                </a:solidFill>
+                <a:latin typeface="Noto Sans JP"/>
+              </a:rPr>
+              <a:t>Aerogel Formation</a:t>
             </a:r>
           </a:p>
         </p:txBody>
@@ -51262,43 +50874,8 @@
         </p:nvSpPr>
         <p:spPr>
           <a:xfrm>
-            <a:off x="548640" y="1261872"/>
-            <a:ext cx="2962564" cy="329184"/>
-          </a:xfrm>
-          <a:prstGeom prst="rect">
-            <a:avLst/>
-          </a:prstGeom>
-          <a:noFill/>
-        </p:spPr>
-        <p:txBody>
-          <a:bodyPr wrap="square" anchor="t" lIns="36000" rIns="36000" tIns="18000" bIns="18000">
-            <a:spAutoFit/>
-          </a:bodyPr>
-          <a:lstStyle/>
-          <a:p>
-            <a:pPr algn="l"/>
-            <a:r>
-              <a:rPr sz="1500" b="1" i="0">
-                <a:solidFill>
-                  <a:srgbClr val="1E293B"/>
-                </a:solidFill>
-                <a:latin typeface="Noto Sans JP"/>
-              </a:rPr>
-              <a:t>設計コンセプト</a:t>
-            </a:r>
-          </a:p>
-        </p:txBody>
-      </p:sp>
-      <p:sp>
-        <p:nvSpPr>
-          <p:cNvPr id="14" name="TextBox 13"/>
-          <p:cNvSpPr txBox="1"/>
-          <p:nvPr/>
-        </p:nvSpPr>
-        <p:spPr>
-          <a:xfrm>
-            <a:off x="548640" y="1627632"/>
-            <a:ext cx="182880" cy="274320"/>
+            <a:off x="530352" y="1810512"/>
+            <a:ext cx="4080546" cy="310896"/>
           </a:xfrm>
           <a:prstGeom prst="rect">
             <a:avLst/>
@@ -51315,278 +50892,31 @@
             <a:r>
               <a:rPr sz="1100" b="0" i="0">
                 <a:solidFill>
-                  <a:srgbClr val="3B5174"/>
-                </a:solidFill>
-                <a:latin typeface="Noto Sans JP"/>
-              </a:rPr>
-              <a:t>•</a:t>
-            </a:r>
-          </a:p>
-        </p:txBody>
-      </p:sp>
-      <p:sp>
-        <p:nvSpPr>
-          <p:cNvPr id="15" name="TextBox 14"/>
-          <p:cNvSpPr txBox="1"/>
-          <p:nvPr/>
-        </p:nvSpPr>
-        <p:spPr>
-          <a:xfrm>
-            <a:off x="749808" y="1627632"/>
-            <a:ext cx="2761396" cy="274320"/>
-          </a:xfrm>
-          <a:prstGeom prst="rect">
-            <a:avLst/>
-          </a:prstGeom>
-          <a:noFill/>
-        </p:spPr>
-        <p:txBody>
-          <a:bodyPr wrap="square" anchor="t" lIns="36000" rIns="36000" tIns="18000" bIns="18000">
-            <a:spAutoFit/>
-          </a:bodyPr>
-          <a:lstStyle/>
-          <a:p>
-            <a:pPr algn="l"/>
-            <a:r>
-              <a:rPr sz="1100" b="0" i="0">
-                <a:solidFill>
                   <a:srgbClr val="475569"/>
                 </a:solidFill>
                 <a:latin typeface="Noto Sans JP"/>
               </a:rPr>
-              <a:t>セルロースポリマー(HEC, MC, MHEC)が水溶性ゲル骨格を形成</a:t>
-            </a:r>
-          </a:p>
-        </p:txBody>
-      </p:sp>
-      <p:sp>
-        <p:nvSpPr>
-          <p:cNvPr id="16" name="TextBox 15"/>
-          <p:cNvSpPr txBox="1"/>
-          <p:nvPr/>
-        </p:nvSpPr>
-        <p:spPr>
-          <a:xfrm>
-            <a:off x="548640" y="1901952"/>
-            <a:ext cx="182880" cy="274320"/>
-          </a:xfrm>
-          <a:prstGeom prst="rect">
-            <a:avLst/>
-          </a:prstGeom>
-          <a:noFill/>
-        </p:spPr>
-        <p:txBody>
-          <a:bodyPr wrap="square" anchor="t" lIns="36000" rIns="36000" tIns="18000" bIns="18000">
-            <a:spAutoFit/>
-          </a:bodyPr>
-          <a:lstStyle/>
-          <a:p>
-            <a:pPr algn="l"/>
-            <a:r>
-              <a:rPr sz="1100" b="0" i="0">
-                <a:solidFill>
-                  <a:srgbClr val="3B5174"/>
-                </a:solidFill>
-                <a:latin typeface="Noto Sans JP"/>
-              </a:rPr>
-              <a:t>•</a:t>
-            </a:r>
-          </a:p>
-        </p:txBody>
-      </p:sp>
-      <p:sp>
-        <p:nvSpPr>
-          <p:cNvPr id="17" name="TextBox 16"/>
-          <p:cNvSpPr txBox="1"/>
-          <p:nvPr/>
-        </p:nvSpPr>
-        <p:spPr>
-          <a:xfrm>
-            <a:off x="749808" y="1901952"/>
-            <a:ext cx="2761396" cy="274320"/>
-          </a:xfrm>
-          <a:prstGeom prst="rect">
-            <a:avLst/>
-          </a:prstGeom>
-          <a:noFill/>
-        </p:spPr>
-        <p:txBody>
-          <a:bodyPr wrap="square" anchor="t" lIns="36000" rIns="36000" tIns="18000" bIns="18000">
-            <a:spAutoFit/>
-          </a:bodyPr>
-          <a:lstStyle/>
-          <a:p>
-            <a:pPr algn="l"/>
-            <a:r>
-              <a:rPr sz="1100" b="0" i="0">
-                <a:solidFill>
-                  <a:srgbClr val="475569"/>
-                </a:solidFill>
-                <a:latin typeface="Noto Sans JP"/>
-              </a:rPr>
-              <a:t>コロイダルシリカ粒子(CSP)を均一分散</a:t>
-            </a:r>
-          </a:p>
-        </p:txBody>
-      </p:sp>
-      <p:sp>
-        <p:nvSpPr>
-          <p:cNvPr id="18" name="TextBox 17"/>
-          <p:cNvSpPr txBox="1"/>
-          <p:nvPr/>
-        </p:nvSpPr>
-        <p:spPr>
-          <a:xfrm>
-            <a:off x="548640" y="2176272"/>
-            <a:ext cx="182880" cy="274320"/>
-          </a:xfrm>
-          <a:prstGeom prst="rect">
-            <a:avLst/>
-          </a:prstGeom>
-          <a:noFill/>
-        </p:spPr>
-        <p:txBody>
-          <a:bodyPr wrap="square" anchor="t" lIns="36000" rIns="36000" tIns="18000" bIns="18000">
-            <a:spAutoFit/>
-          </a:bodyPr>
-          <a:lstStyle/>
-          <a:p>
-            <a:pPr algn="l"/>
-            <a:r>
-              <a:rPr sz="1100" b="0" i="0">
-                <a:solidFill>
-                  <a:srgbClr val="3B5174"/>
-                </a:solidFill>
-                <a:latin typeface="Noto Sans JP"/>
-              </a:rPr>
-              <a:t>•</a:t>
-            </a:r>
-          </a:p>
-        </p:txBody>
-      </p:sp>
-      <p:sp>
-        <p:nvSpPr>
-          <p:cNvPr id="19" name="TextBox 18"/>
-          <p:cNvSpPr txBox="1"/>
-          <p:nvPr/>
-        </p:nvSpPr>
-        <p:spPr>
-          <a:xfrm>
-            <a:off x="749808" y="2176272"/>
-            <a:ext cx="2761396" cy="274320"/>
-          </a:xfrm>
-          <a:prstGeom prst="rect">
-            <a:avLst/>
-          </a:prstGeom>
-          <a:noFill/>
-        </p:spPr>
-        <p:txBody>
-          <a:bodyPr wrap="square" anchor="t" lIns="36000" rIns="36000" tIns="18000" bIns="18000">
-            <a:spAutoFit/>
-          </a:bodyPr>
-          <a:lstStyle/>
-          <a:p>
-            <a:pPr algn="l"/>
-            <a:r>
-              <a:rPr sz="1100" b="0" i="0">
-                <a:solidFill>
-                  <a:srgbClr val="475569"/>
-                </a:solidFill>
-                <a:latin typeface="Noto Sans JP"/>
-              </a:rPr>
-              <a:t>加熱時に水が発泡し多孔構造を形成</a:t>
-            </a:r>
-          </a:p>
-        </p:txBody>
-      </p:sp>
-      <p:sp>
-        <p:nvSpPr>
-          <p:cNvPr id="20" name="TextBox 19"/>
-          <p:cNvSpPr txBox="1"/>
-          <p:nvPr/>
-        </p:nvSpPr>
-        <p:spPr>
-          <a:xfrm>
-            <a:off x="548640" y="2450592"/>
-            <a:ext cx="182880" cy="274320"/>
-          </a:xfrm>
-          <a:prstGeom prst="rect">
-            <a:avLst/>
-          </a:prstGeom>
-          <a:noFill/>
-        </p:spPr>
-        <p:txBody>
-          <a:bodyPr wrap="square" anchor="t" lIns="36000" rIns="36000" tIns="18000" bIns="18000">
-            <a:spAutoFit/>
-          </a:bodyPr>
-          <a:lstStyle/>
-          <a:p>
-            <a:pPr algn="l"/>
-            <a:r>
-              <a:rPr sz="1100" b="0" i="0">
-                <a:solidFill>
-                  <a:srgbClr val="3B5174"/>
-                </a:solidFill>
-                <a:latin typeface="Noto Sans JP"/>
-              </a:rPr>
-              <a:t>•</a:t>
-            </a:r>
-          </a:p>
-        </p:txBody>
-      </p:sp>
-      <p:sp>
-        <p:nvSpPr>
-          <p:cNvPr id="21" name="TextBox 20"/>
-          <p:cNvSpPr txBox="1"/>
-          <p:nvPr/>
-        </p:nvSpPr>
-        <p:spPr>
-          <a:xfrm>
-            <a:off x="749808" y="2450592"/>
-            <a:ext cx="2761396" cy="274320"/>
-          </a:xfrm>
-          <a:prstGeom prst="rect">
-            <a:avLst/>
-          </a:prstGeom>
-          <a:noFill/>
-        </p:spPr>
-        <p:txBody>
-          <a:bodyPr wrap="square" anchor="t" lIns="36000" rIns="36000" tIns="18000" bIns="18000">
-            <a:spAutoFit/>
-          </a:bodyPr>
-          <a:lstStyle/>
-          <a:p>
-            <a:pPr algn="l"/>
-            <a:r>
-              <a:rPr sz="1100" b="0" i="0">
-                <a:solidFill>
-                  <a:srgbClr val="475569"/>
-                </a:solidFill>
-                <a:latin typeface="Noto Sans JP"/>
-              </a:rPr>
-              <a:t>シリカ粒子が焼結しエアロゲル層に転換</a:t>
-            </a:r>
-          </a:p>
-        </p:txBody>
-      </p:sp>
-      <p:sp>
-        <p:nvSpPr>
-          <p:cNvPr id="22" name="Rounded Rectangle 21"/>
+              <a:t>火炎接触をトリガーに、ゲル自体が断熱材へ変態</a:t>
+            </a:r>
+          </a:p>
+        </p:txBody>
+      </p:sp>
+      <p:sp>
+        <p:nvSpPr>
+          <p:cNvPr id="14" name="Rectangle 13"/>
           <p:cNvSpPr/>
           <p:nvPr/>
         </p:nvSpPr>
         <p:spPr>
           <a:xfrm>
-            <a:off x="3822100" y="859536"/>
-            <a:ext cx="3328324" cy="3108960"/>
-          </a:xfrm>
-          <a:prstGeom prst="roundRect">
-            <a:avLst>
-              <a:gd name="adj" fmla="val 4000"/>
-            </a:avLst>
+            <a:off x="530352" y="2267712"/>
+            <a:ext cx="3608367" cy="18288"/>
+          </a:xfrm>
+          <a:prstGeom prst="rect">
+            <a:avLst/>
           </a:prstGeom>
           <a:solidFill>
-            <a:srgbClr val="1E293B"/>
+            <a:srgbClr val="E2E8F0"/>
           </a:solidFill>
           <a:ln>
             <a:noFill/>
@@ -51617,84 +50947,294 @@
       </p:sp>
       <p:sp>
         <p:nvSpPr>
+          <p:cNvPr id="15" name="TextBox 14"/>
+          <p:cNvSpPr txBox="1"/>
+          <p:nvPr/>
+        </p:nvSpPr>
+        <p:spPr>
+          <a:xfrm>
+            <a:off x="365760" y="2450592"/>
+            <a:ext cx="402336" cy="274320"/>
+          </a:xfrm>
+          <a:prstGeom prst="rect">
+            <a:avLst/>
+          </a:prstGeom>
+          <a:noFill/>
+        </p:spPr>
+        <p:txBody>
+          <a:bodyPr wrap="square" anchor="t" lIns="36000" rIns="36000" tIns="18000" bIns="18000">
+            <a:spAutoFit/>
+          </a:bodyPr>
+          <a:lstStyle/>
+          <a:p>
+            <a:pPr algn="l"/>
+            <a:r>
+              <a:rPr sz="1100" b="1" i="0">
+                <a:solidFill>
+                  <a:srgbClr val="3B5174"/>
+                </a:solidFill>
+                <a:latin typeface="Noto Sans JP"/>
+              </a:rPr>
+              <a:t>01</a:t>
+            </a:r>
+          </a:p>
+        </p:txBody>
+      </p:sp>
+      <p:sp>
+        <p:nvSpPr>
+          <p:cNvPr id="16" name="TextBox 15"/>
+          <p:cNvSpPr txBox="1"/>
+          <p:nvPr/>
+        </p:nvSpPr>
+        <p:spPr>
+          <a:xfrm>
+            <a:off x="786384" y="2450592"/>
+            <a:ext cx="3824514" cy="256032"/>
+          </a:xfrm>
+          <a:prstGeom prst="rect">
+            <a:avLst/>
+          </a:prstGeom>
+          <a:noFill/>
+        </p:spPr>
+        <p:txBody>
+          <a:bodyPr wrap="square" anchor="t" lIns="36000" rIns="36000" tIns="18000" bIns="18000">
+            <a:spAutoFit/>
+          </a:bodyPr>
+          <a:lstStyle/>
+          <a:p>
+            <a:pPr algn="l"/>
+            <a:r>
+              <a:rPr sz="1300" b="1" i="0">
+                <a:solidFill>
+                  <a:srgbClr val="1E293B"/>
+                </a:solidFill>
+                <a:latin typeface="Noto Sans JP"/>
+              </a:rPr>
+              <a:t>水分依存からの脱却</a:t>
+            </a:r>
+          </a:p>
+        </p:txBody>
+      </p:sp>
+      <p:sp>
+        <p:nvSpPr>
+          <p:cNvPr id="17" name="TextBox 16"/>
+          <p:cNvSpPr txBox="1"/>
+          <p:nvPr/>
+        </p:nvSpPr>
+        <p:spPr>
+          <a:xfrm>
+            <a:off x="786384" y="2706624"/>
+            <a:ext cx="3824514" cy="256032"/>
+          </a:xfrm>
+          <a:prstGeom prst="rect">
+            <a:avLst/>
+          </a:prstGeom>
+          <a:noFill/>
+        </p:spPr>
+        <p:txBody>
+          <a:bodyPr wrap="square" anchor="t" lIns="36000" rIns="36000" tIns="18000" bIns="18000">
+            <a:spAutoFit/>
+          </a:bodyPr>
+          <a:lstStyle/>
+          <a:p>
+            <a:pPr algn="l"/>
+            <a:r>
+              <a:rPr sz="1100" b="0" i="0">
+                <a:solidFill>
+                  <a:srgbClr val="64748B"/>
+                </a:solidFill>
+                <a:latin typeface="Noto Sans JP"/>
+              </a:rPr>
+              <a:t>熱で活性化する固体保護層を形成</a:t>
+            </a:r>
+          </a:p>
+        </p:txBody>
+      </p:sp>
+      <p:sp>
+        <p:nvSpPr>
+          <p:cNvPr id="18" name="TextBox 17"/>
+          <p:cNvSpPr txBox="1"/>
+          <p:nvPr/>
+        </p:nvSpPr>
+        <p:spPr>
+          <a:xfrm>
+            <a:off x="365760" y="3136392"/>
+            <a:ext cx="402336" cy="274320"/>
+          </a:xfrm>
+          <a:prstGeom prst="rect">
+            <a:avLst/>
+          </a:prstGeom>
+          <a:noFill/>
+        </p:spPr>
+        <p:txBody>
+          <a:bodyPr wrap="square" anchor="t" lIns="36000" rIns="36000" tIns="18000" bIns="18000">
+            <a:spAutoFit/>
+          </a:bodyPr>
+          <a:lstStyle/>
+          <a:p>
+            <a:pPr algn="l"/>
+            <a:r>
+              <a:rPr sz="1100" b="1" i="0">
+                <a:solidFill>
+                  <a:srgbClr val="3B5174"/>
+                </a:solidFill>
+                <a:latin typeface="Noto Sans JP"/>
+              </a:rPr>
+              <a:t>02</a:t>
+            </a:r>
+          </a:p>
+        </p:txBody>
+      </p:sp>
+      <p:sp>
+        <p:nvSpPr>
+          <p:cNvPr id="19" name="TextBox 18"/>
+          <p:cNvSpPr txBox="1"/>
+          <p:nvPr/>
+        </p:nvSpPr>
+        <p:spPr>
+          <a:xfrm>
+            <a:off x="786384" y="3136392"/>
+            <a:ext cx="3824514" cy="256032"/>
+          </a:xfrm>
+          <a:prstGeom prst="rect">
+            <a:avLst/>
+          </a:prstGeom>
+          <a:noFill/>
+        </p:spPr>
+        <p:txBody>
+          <a:bodyPr wrap="square" anchor="t" lIns="36000" rIns="36000" tIns="18000" bIns="18000">
+            <a:spAutoFit/>
+          </a:bodyPr>
+          <a:lstStyle/>
+          <a:p>
+            <a:pPr algn="l"/>
+            <a:r>
+              <a:rPr sz="1300" b="1" i="0">
+                <a:solidFill>
+                  <a:srgbClr val="1E293B"/>
+                </a:solidFill>
+                <a:latin typeface="Noto Sans JP"/>
+              </a:rPr>
+              <a:t>持続可能な素材</a:t>
+            </a:r>
+          </a:p>
+        </p:txBody>
+      </p:sp>
+      <p:sp>
+        <p:nvSpPr>
+          <p:cNvPr id="20" name="TextBox 19"/>
+          <p:cNvSpPr txBox="1"/>
+          <p:nvPr/>
+        </p:nvSpPr>
+        <p:spPr>
+          <a:xfrm>
+            <a:off x="786384" y="3392424"/>
+            <a:ext cx="3824514" cy="256032"/>
+          </a:xfrm>
+          <a:prstGeom prst="rect">
+            <a:avLst/>
+          </a:prstGeom>
+          <a:noFill/>
+        </p:spPr>
+        <p:txBody>
+          <a:bodyPr wrap="square" anchor="t" lIns="36000" rIns="36000" tIns="18000" bIns="18000">
+            <a:spAutoFit/>
+          </a:bodyPr>
+          <a:lstStyle/>
+          <a:p>
+            <a:pPr algn="l"/>
+            <a:r>
+              <a:rPr sz="1100" b="0" i="0">
+                <a:solidFill>
+                  <a:srgbClr val="64748B"/>
+                </a:solidFill>
+                <a:latin typeface="Noto Sans JP"/>
+              </a:rPr>
+              <a:t>天然由来・食品添加物グレード素材</a:t>
+            </a:r>
+          </a:p>
+        </p:txBody>
+      </p:sp>
+      <p:sp>
+        <p:nvSpPr>
+          <p:cNvPr id="21" name="TextBox 20"/>
+          <p:cNvSpPr txBox="1"/>
+          <p:nvPr/>
+        </p:nvSpPr>
+        <p:spPr>
+          <a:xfrm>
+            <a:off x="365760" y="3822192"/>
+            <a:ext cx="402336" cy="274320"/>
+          </a:xfrm>
+          <a:prstGeom prst="rect">
+            <a:avLst/>
+          </a:prstGeom>
+          <a:noFill/>
+        </p:spPr>
+        <p:txBody>
+          <a:bodyPr wrap="square" anchor="t" lIns="36000" rIns="36000" tIns="18000" bIns="18000">
+            <a:spAutoFit/>
+          </a:bodyPr>
+          <a:lstStyle/>
+          <a:p>
+            <a:pPr algn="l"/>
+            <a:r>
+              <a:rPr sz="1100" b="1" i="0">
+                <a:solidFill>
+                  <a:srgbClr val="3B5174"/>
+                </a:solidFill>
+                <a:latin typeface="Noto Sans JP"/>
+              </a:rPr>
+              <a:t>03</a:t>
+            </a:r>
+          </a:p>
+        </p:txBody>
+      </p:sp>
+      <p:sp>
+        <p:nvSpPr>
+          <p:cNvPr id="22" name="TextBox 21"/>
+          <p:cNvSpPr txBox="1"/>
+          <p:nvPr/>
+        </p:nvSpPr>
+        <p:spPr>
+          <a:xfrm>
+            <a:off x="786384" y="3822192"/>
+            <a:ext cx="3824514" cy="256032"/>
+          </a:xfrm>
+          <a:prstGeom prst="rect">
+            <a:avLst/>
+          </a:prstGeom>
+          <a:noFill/>
+        </p:spPr>
+        <p:txBody>
+          <a:bodyPr wrap="square" anchor="t" lIns="36000" rIns="36000" tIns="18000" bIns="18000">
+            <a:spAutoFit/>
+          </a:bodyPr>
+          <a:lstStyle/>
+          <a:p>
+            <a:pPr algn="l"/>
+            <a:r>
+              <a:rPr sz="1300" b="1" i="0">
+                <a:solidFill>
+                  <a:srgbClr val="1E293B"/>
+                </a:solidFill>
+                <a:latin typeface="Noto Sans JP"/>
+              </a:rPr>
+              <a:t>既存インフラと互換</a:t>
+            </a:r>
+          </a:p>
+        </p:txBody>
+      </p:sp>
+      <p:sp>
+        <p:nvSpPr>
           <p:cNvPr id="23" name="TextBox 22"/>
           <p:cNvSpPr txBox="1"/>
           <p:nvPr/>
         </p:nvSpPr>
         <p:spPr>
           <a:xfrm>
-            <a:off x="4004980" y="1024128"/>
-            <a:ext cx="2962564" cy="219456"/>
-          </a:xfrm>
-          <a:prstGeom prst="rect">
-            <a:avLst/>
-          </a:prstGeom>
-          <a:noFill/>
-        </p:spPr>
-        <p:txBody>
-          <a:bodyPr wrap="square" anchor="t" lIns="36000" rIns="36000" tIns="18000" bIns="18000">
-            <a:spAutoFit/>
-          </a:bodyPr>
-          <a:lstStyle/>
-          <a:p>
-            <a:pPr algn="l"/>
-            <a:r>
-              <a:rPr sz="1000" b="1" i="0">
-                <a:solidFill>
-                  <a:srgbClr val="A0B8D0"/>
-                </a:solidFill>
-                <a:latin typeface="Noto Sans JP"/>
-              </a:rPr>
-              <a:t>INNOVATION</a:t>
-            </a:r>
-          </a:p>
-        </p:txBody>
-      </p:sp>
-      <p:sp>
-        <p:nvSpPr>
-          <p:cNvPr id="24" name="TextBox 23"/>
-          <p:cNvSpPr txBox="1"/>
-          <p:nvPr/>
-        </p:nvSpPr>
-        <p:spPr>
-          <a:xfrm>
-            <a:off x="4004980" y="1261872"/>
-            <a:ext cx="2962564" cy="329184"/>
-          </a:xfrm>
-          <a:prstGeom prst="rect">
-            <a:avLst/>
-          </a:prstGeom>
-          <a:noFill/>
-        </p:spPr>
-        <p:txBody>
-          <a:bodyPr wrap="square" anchor="t" lIns="36000" rIns="36000" tIns="18000" bIns="18000">
-            <a:spAutoFit/>
-          </a:bodyPr>
-          <a:lstStyle/>
-          <a:p>
-            <a:pPr algn="l"/>
-            <a:r>
-              <a:rPr sz="1500" b="1" i="0">
-                <a:solidFill>
-                  <a:srgbClr val="FFFFFF"/>
-                </a:solidFill>
-                <a:latin typeface="Noto Sans JP"/>
-              </a:rPr>
-              <a:t>3つの革新ポイント</a:t>
-            </a:r>
-          </a:p>
-        </p:txBody>
-      </p:sp>
-      <p:sp>
-        <p:nvSpPr>
-          <p:cNvPr id="25" name="TextBox 24"/>
-          <p:cNvSpPr txBox="1"/>
-          <p:nvPr/>
-        </p:nvSpPr>
-        <p:spPr>
-          <a:xfrm>
-            <a:off x="4004980" y="1627632"/>
-            <a:ext cx="182880" cy="274320"/>
+            <a:off x="786384" y="4078224"/>
+            <a:ext cx="3824514" cy="256032"/>
           </a:xfrm>
           <a:prstGeom prst="rect">
             <a:avLst/>
@@ -51711,372 +51251,25 @@
             <a:r>
               <a:rPr sz="1100" b="0" i="0">
                 <a:solidFill>
-                  <a:srgbClr val="D4A574"/>
-                </a:solidFill>
-                <a:latin typeface="Noto Sans JP"/>
-              </a:rPr>
-              <a:t>•</a:t>
-            </a:r>
-          </a:p>
-        </p:txBody>
-      </p:sp>
-      <p:sp>
-        <p:nvSpPr>
-          <p:cNvPr id="26" name="TextBox 25"/>
-          <p:cNvSpPr txBox="1"/>
-          <p:nvPr/>
-        </p:nvSpPr>
-        <p:spPr>
-          <a:xfrm>
-            <a:off x="4206148" y="1627632"/>
-            <a:ext cx="2761396" cy="274320"/>
-          </a:xfrm>
-          <a:prstGeom prst="rect">
-            <a:avLst/>
-          </a:prstGeom>
-          <a:noFill/>
-        </p:spPr>
-        <p:txBody>
-          <a:bodyPr wrap="square" anchor="t" lIns="36000" rIns="36000" tIns="18000" bIns="18000">
-            <a:spAutoFit/>
-          </a:bodyPr>
-          <a:lstStyle/>
-          <a:p>
-            <a:pPr algn="l"/>
-            <a:r>
-              <a:rPr sz="1100" b="0" i="0">
-                <a:solidFill>
-                  <a:srgbClr val="C8D8E8"/>
-                </a:solidFill>
-                <a:latin typeface="Noto Sans JP"/>
-              </a:rPr>
-              <a:t>水分依存からの脱却：熱で活性化する固体保護層</a:t>
-            </a:r>
-          </a:p>
-        </p:txBody>
-      </p:sp>
-      <p:sp>
-        <p:nvSpPr>
-          <p:cNvPr id="27" name="TextBox 26"/>
-          <p:cNvSpPr txBox="1"/>
-          <p:nvPr/>
-        </p:nvSpPr>
-        <p:spPr>
-          <a:xfrm>
-            <a:off x="4004980" y="1901952"/>
-            <a:ext cx="182880" cy="274320"/>
-          </a:xfrm>
-          <a:prstGeom prst="rect">
-            <a:avLst/>
-          </a:prstGeom>
-          <a:noFill/>
-        </p:spPr>
-        <p:txBody>
-          <a:bodyPr wrap="square" anchor="t" lIns="36000" rIns="36000" tIns="18000" bIns="18000">
-            <a:spAutoFit/>
-          </a:bodyPr>
-          <a:lstStyle/>
-          <a:p>
-            <a:pPr algn="l"/>
-            <a:r>
-              <a:rPr sz="1100" b="0" i="0">
-                <a:solidFill>
-                  <a:srgbClr val="D4A574"/>
-                </a:solidFill>
-                <a:latin typeface="Noto Sans JP"/>
-              </a:rPr>
-              <a:t>•</a:t>
-            </a:r>
-          </a:p>
-        </p:txBody>
-      </p:sp>
-      <p:sp>
-        <p:nvSpPr>
-          <p:cNvPr id="28" name="TextBox 27"/>
-          <p:cNvSpPr txBox="1"/>
-          <p:nvPr/>
-        </p:nvSpPr>
-        <p:spPr>
-          <a:xfrm>
-            <a:off x="4206148" y="1901952"/>
-            <a:ext cx="2761396" cy="274320"/>
-          </a:xfrm>
-          <a:prstGeom prst="rect">
-            <a:avLst/>
-          </a:prstGeom>
-          <a:noFill/>
-        </p:spPr>
-        <p:txBody>
-          <a:bodyPr wrap="square" anchor="t" lIns="36000" rIns="36000" tIns="18000" bIns="18000">
-            <a:spAutoFit/>
-          </a:bodyPr>
-          <a:lstStyle/>
-          <a:p>
-            <a:pPr algn="l"/>
-            <a:r>
-              <a:rPr sz="1100" b="0" i="0">
-                <a:solidFill>
-                  <a:srgbClr val="C8D8E8"/>
-                </a:solidFill>
-                <a:latin typeface="Noto Sans JP"/>
-              </a:rPr>
-              <a:t>持続可能：天然由来・食品添加物グレード</a:t>
-            </a:r>
-          </a:p>
-        </p:txBody>
-      </p:sp>
-      <p:sp>
-        <p:nvSpPr>
-          <p:cNvPr id="29" name="TextBox 28"/>
-          <p:cNvSpPr txBox="1"/>
-          <p:nvPr/>
-        </p:nvSpPr>
-        <p:spPr>
-          <a:xfrm>
-            <a:off x="4004980" y="2176272"/>
-            <a:ext cx="182880" cy="274320"/>
-          </a:xfrm>
-          <a:prstGeom prst="rect">
-            <a:avLst/>
-          </a:prstGeom>
-          <a:noFill/>
-        </p:spPr>
-        <p:txBody>
-          <a:bodyPr wrap="square" anchor="t" lIns="36000" rIns="36000" tIns="18000" bIns="18000">
-            <a:spAutoFit/>
-          </a:bodyPr>
-          <a:lstStyle/>
-          <a:p>
-            <a:pPr algn="l"/>
-            <a:r>
-              <a:rPr sz="1100" b="0" i="0">
-                <a:solidFill>
-                  <a:srgbClr val="D4A574"/>
-                </a:solidFill>
-                <a:latin typeface="Noto Sans JP"/>
-              </a:rPr>
-              <a:t>•</a:t>
-            </a:r>
-          </a:p>
-        </p:txBody>
-      </p:sp>
-      <p:sp>
-        <p:nvSpPr>
-          <p:cNvPr id="30" name="TextBox 29"/>
-          <p:cNvSpPr txBox="1"/>
-          <p:nvPr/>
-        </p:nvSpPr>
-        <p:spPr>
-          <a:xfrm>
-            <a:off x="4206148" y="2176272"/>
-            <a:ext cx="2761396" cy="274320"/>
-          </a:xfrm>
-          <a:prstGeom prst="rect">
-            <a:avLst/>
-          </a:prstGeom>
-          <a:noFill/>
-        </p:spPr>
-        <p:txBody>
-          <a:bodyPr wrap="square" anchor="t" lIns="36000" rIns="36000" tIns="18000" bIns="18000">
-            <a:spAutoFit/>
-          </a:bodyPr>
-          <a:lstStyle/>
-          <a:p>
-            <a:pPr algn="l"/>
-            <a:r>
-              <a:rPr sz="1100" b="0" i="0">
-                <a:solidFill>
-                  <a:srgbClr val="C8D8E8"/>
-                </a:solidFill>
-                <a:latin typeface="Noto Sans JP"/>
-              </a:rPr>
-              <a:t>既存散布インフラと互換：噴霧可能な流体</a:t>
-            </a:r>
-          </a:p>
-        </p:txBody>
-      </p:sp>
-      <p:sp>
-        <p:nvSpPr>
-          <p:cNvPr id="31" name="Rounded Rectangle 30"/>
+                  <a:srgbClr val="64748B"/>
+                </a:solidFill>
+                <a:latin typeface="Noto Sans JP"/>
+              </a:rPr>
+              <a:t>噴霧可能な流体として散布可能</a:t>
+            </a:r>
+          </a:p>
+        </p:txBody>
+      </p:sp>
+      <p:sp>
+        <p:nvSpPr>
+          <p:cNvPr id="24" name="Rounded Rectangle 23"/>
           <p:cNvSpPr/>
           <p:nvPr/>
         </p:nvSpPr>
         <p:spPr>
           <a:xfrm>
-            <a:off x="365760" y="4197096"/>
-            <a:ext cx="6784665" cy="731520"/>
-          </a:xfrm>
-          <a:prstGeom prst="roundRect">
-            <a:avLst>
-              <a:gd name="adj" fmla="val 4000"/>
-            </a:avLst>
-          </a:prstGeom>
-          <a:solidFill>
-            <a:srgbClr val="F8FAFC"/>
-          </a:solidFill>
-          <a:ln>
-            <a:noFill/>
-          </a:ln>
-          <a:effectLst/>
-        </p:spPr>
-        <p:style>
-          <a:lnRef idx="1">
-            <a:schemeClr val="accent1"/>
-          </a:lnRef>
-          <a:fillRef idx="3">
-            <a:schemeClr val="accent1"/>
-          </a:fillRef>
-          <a:effectRef idx="2">
-            <a:schemeClr val="accent1"/>
-          </a:effectRef>
-          <a:fontRef idx="minor">
-            <a:schemeClr val="lt1"/>
-          </a:fontRef>
-        </p:style>
-        <p:txBody>
-          <a:bodyPr rtlCol="0" anchor="ctr"/>
-          <a:lstStyle/>
-          <a:p>
-            <a:pPr algn="ctr"/>
-          </a:p>
-        </p:txBody>
-      </p:sp>
-      <p:sp>
-        <p:nvSpPr>
-          <p:cNvPr id="32" name="Rectangle 31"/>
-          <p:cNvSpPr/>
-          <p:nvPr/>
-        </p:nvSpPr>
-        <p:spPr>
-          <a:xfrm>
-            <a:off x="365760" y="4197096"/>
-            <a:ext cx="54864" cy="731520"/>
-          </a:xfrm>
-          <a:prstGeom prst="rect">
-            <a:avLst/>
-          </a:prstGeom>
-          <a:solidFill>
-            <a:srgbClr val="3B5174"/>
-          </a:solidFill>
-          <a:ln>
-            <a:noFill/>
-          </a:ln>
-          <a:effectLst/>
-        </p:spPr>
-        <p:style>
-          <a:lnRef idx="1">
-            <a:schemeClr val="accent1"/>
-          </a:lnRef>
-          <a:fillRef idx="3">
-            <a:schemeClr val="accent1"/>
-          </a:fillRef>
-          <a:effectRef idx="2">
-            <a:schemeClr val="accent1"/>
-          </a:effectRef>
-          <a:fontRef idx="minor">
-            <a:schemeClr val="lt1"/>
-          </a:fontRef>
-        </p:style>
-        <p:txBody>
-          <a:bodyPr rtlCol="0" anchor="ctr"/>
-          <a:lstStyle/>
-          <a:p>
-            <a:pPr algn="ctr"/>
-          </a:p>
-        </p:txBody>
-      </p:sp>
-      <p:sp>
-        <p:nvSpPr>
-          <p:cNvPr id="33" name="TextBox 32"/>
-          <p:cNvSpPr txBox="1"/>
-          <p:nvPr/>
-        </p:nvSpPr>
-        <p:spPr>
-          <a:xfrm>
-            <a:off x="548640" y="4197096"/>
-            <a:ext cx="365760" cy="731520"/>
-          </a:xfrm>
-          <a:prstGeom prst="rect">
-            <a:avLst/>
-          </a:prstGeom>
-          <a:noFill/>
-        </p:spPr>
-        <p:txBody>
-          <a:bodyPr wrap="square" anchor="ctr" lIns="36000" rIns="36000" tIns="18000" bIns="18000">
-            <a:spAutoFit/>
-          </a:bodyPr>
-          <a:lstStyle/>
-          <a:p>
-            <a:pPr algn="l"/>
-            <a:r>
-              <a:rPr sz="1400" b="0" i="0">
-                <a:solidFill>
-                  <a:srgbClr val="3B5174"/>
-                </a:solidFill>
-                <a:latin typeface="Noto Sans JP"/>
-              </a:rPr>
-              <a:t>💡</a:t>
-            </a:r>
-          </a:p>
-        </p:txBody>
-      </p:sp>
-      <p:sp>
-        <p:nvSpPr>
-          <p:cNvPr id="34" name="TextBox 33"/>
-          <p:cNvSpPr txBox="1"/>
-          <p:nvPr/>
-        </p:nvSpPr>
-        <p:spPr>
-          <a:xfrm>
-            <a:off x="960120" y="4197096"/>
-            <a:ext cx="6098865" cy="731520"/>
-          </a:xfrm>
-          <a:prstGeom prst="rect">
-            <a:avLst/>
-          </a:prstGeom>
-          <a:noFill/>
-        </p:spPr>
-        <p:txBody>
-          <a:bodyPr wrap="square" anchor="ctr" lIns="36000" rIns="36000" tIns="18000" bIns="18000">
-            <a:spAutoFit/>
-          </a:bodyPr>
-          <a:lstStyle/>
-          <a:p>
-            <a:pPr algn="l"/>
-            <a:r>
-              <a:rPr sz="1300" b="1" i="0">
-                <a:solidFill>
-                  <a:srgbClr val="1E293B"/>
-                </a:solidFill>
-                <a:latin typeface="Noto Sans JP"/>
-              </a:rPr>
-              <a:t>"Heat-Activated Formation of Silica Aerogels"</a:t>
-            </a:r>
-          </a:p>
-          <a:p>
-            <a:pPr algn="l"/>
-            <a:r>
-              <a:rPr sz="1300" b="1" i="0">
-                <a:solidFill>
-                  <a:srgbClr val="1E293B"/>
-                </a:solidFill>
-                <a:latin typeface="Noto Sans JP"/>
-              </a:rPr>
-              <a:t>— 火炎接触をトリガーに、ゲル自身がエアロゲル断熱材へ変態する</a:t>
-            </a:r>
-          </a:p>
-        </p:txBody>
-      </p:sp>
-      <p:sp>
-        <p:nvSpPr>
-          <p:cNvPr id="35" name="Rounded Rectangle 34"/>
-          <p:cNvSpPr/>
-          <p:nvPr/>
-        </p:nvSpPr>
-        <p:spPr>
-          <a:xfrm>
-            <a:off x="7333305" y="859536"/>
-            <a:ext cx="4492630" cy="4389120"/>
+            <a:off x="4793778" y="859536"/>
+            <a:ext cx="7032156" cy="5760720"/>
           </a:xfrm>
           <a:prstGeom prst="roundRect">
             <a:avLst>
@@ -52117,13 +51310,13 @@
       </p:sp>
       <p:sp>
         <p:nvSpPr>
-          <p:cNvPr id="36" name="Rectangle 35"/>
+          <p:cNvPr id="25" name="Rectangle 24"/>
           <p:cNvSpPr/>
           <p:nvPr/>
         </p:nvSpPr>
         <p:spPr>
           <a:xfrm>
-            <a:off x="7443033" y="969264"/>
+            <a:off x="4903506" y="969264"/>
             <a:ext cx="868680" cy="292608"/>
           </a:xfrm>
           <a:prstGeom prst="rect">
@@ -52161,13 +51354,13 @@
       </p:sp>
       <p:sp>
         <p:nvSpPr>
-          <p:cNvPr id="37" name="TextBox 36"/>
-          <p:cNvSpPr txBox="1"/>
-          <p:nvPr/>
-        </p:nvSpPr>
-        <p:spPr>
-          <a:xfrm>
-            <a:off x="7443033" y="969264"/>
+          <p:cNvPr id="26" name="TextBox 25"/>
+          <p:cNvSpPr txBox="1"/>
+          <p:nvPr/>
+        </p:nvSpPr>
+        <p:spPr>
+          <a:xfrm>
+            <a:off x="4903506" y="969264"/>
             <a:ext cx="868680" cy="292608"/>
           </a:xfrm>
           <a:prstGeom prst="rect">
@@ -52196,14 +51389,14 @@
       </p:sp>
       <p:sp>
         <p:nvSpPr>
-          <p:cNvPr id="38" name="TextBox 37"/>
-          <p:cNvSpPr txBox="1"/>
-          <p:nvPr/>
-        </p:nvSpPr>
-        <p:spPr>
-          <a:xfrm>
-            <a:off x="7333305" y="859536"/>
-            <a:ext cx="4492630" cy="4389120"/>
+          <p:cNvPr id="27" name="TextBox 26"/>
+          <p:cNvSpPr txBox="1"/>
+          <p:nvPr/>
+        </p:nvSpPr>
+        <p:spPr>
+          <a:xfrm>
+            <a:off x="4793778" y="859536"/>
+            <a:ext cx="7032156" cy="5760720"/>
           </a:xfrm>
           <a:prstGeom prst="rect">
             <a:avLst/>
@@ -52231,14 +51424,14 @@
       </p:sp>
       <p:sp>
         <p:nvSpPr>
-          <p:cNvPr id="39" name="TextBox 38"/>
-          <p:cNvSpPr txBox="1"/>
-          <p:nvPr/>
-        </p:nvSpPr>
-        <p:spPr>
-          <a:xfrm>
-            <a:off x="7333305" y="5285232"/>
-            <a:ext cx="4492630" cy="274320"/>
+          <p:cNvPr id="28" name="TextBox 27"/>
+          <p:cNvSpPr txBox="1"/>
+          <p:nvPr/>
+        </p:nvSpPr>
+        <p:spPr>
+          <a:xfrm>
+            <a:off x="4793778" y="6656832"/>
+            <a:ext cx="7032156" cy="274320"/>
           </a:xfrm>
           <a:prstGeom prst="rect">
             <a:avLst/>
@@ -52259,7 +51452,7 @@
                 </a:solidFill>
                 <a:latin typeface="Noto Sans JP"/>
               </a:rPr>
-              <a:t>シリカエアロゲル形成の3段階（プレビュー）</a:t>
+              <a:t>シリカエアロゲル形成の3段階</a:t>
             </a:r>
           </a:p>
         </p:txBody>

--- a/slides.pptx
+++ b/slides.pptx
@@ -51382,7 +51382,7 @@
                 </a:solidFill>
                 <a:latin typeface="Noto Sans JP"/>
               </a:rPr>
-              <a:t>Fig. 5a</a:t>
+              <a:t>概念図</a:t>
             </a:r>
           </a:p>
         </p:txBody>
@@ -51452,7 +51452,7 @@
                 </a:solidFill>
                 <a:latin typeface="Noto Sans JP"/>
               </a:rPr>
-              <a:t>シリカエアロゲル形成の3段階</a:t>
+              <a:t>加熱トリガーでゲルが多孔質エアロゲル断熱層へ変態</a:t>
             </a:r>
           </a:p>
         </p:txBody>
@@ -52415,27 +52415,163 @@
       </p:sp>
       <p:sp>
         <p:nvSpPr>
-          <p:cNvPr id="10" name="Rounded Rectangle 9"/>
+          <p:cNvPr id="10" name="TextBox 9"/>
+          <p:cNvSpPr txBox="1"/>
+          <p:nvPr/>
+        </p:nvSpPr>
+        <p:spPr>
+          <a:xfrm>
+            <a:off x="365760" y="859536"/>
+            <a:ext cx="822960" cy="1920240"/>
+          </a:xfrm>
+          <a:prstGeom prst="rect">
+            <a:avLst/>
+          </a:prstGeom>
+          <a:noFill/>
+        </p:spPr>
+        <p:txBody>
+          <a:bodyPr wrap="square" anchor="ctr" lIns="36000" rIns="36000" tIns="18000" bIns="18000">
+            <a:spAutoFit/>
+          </a:bodyPr>
+          <a:lstStyle/>
+          <a:p>
+            <a:pPr algn="l"/>
+            <a:r>
+              <a:rPr sz="5400" b="1" i="0">
+                <a:solidFill>
+                  <a:srgbClr val="E2E8F0"/>
+                </a:solidFill>
+                <a:latin typeface="Noto Sans JP"/>
+              </a:rPr>
+              <a:t>A</a:t>
+            </a:r>
+          </a:p>
+        </p:txBody>
+      </p:sp>
+      <p:sp>
+        <p:nvSpPr>
+          <p:cNvPr id="11" name="TextBox 10"/>
+          <p:cNvSpPr txBox="1"/>
+          <p:nvPr/>
+        </p:nvSpPr>
+        <p:spPr>
+          <a:xfrm>
+            <a:off x="1234440" y="1060704"/>
+            <a:ext cx="5324688" cy="411480"/>
+          </a:xfrm>
+          <a:prstGeom prst="rect">
+            <a:avLst/>
+          </a:prstGeom>
+          <a:noFill/>
+        </p:spPr>
+        <p:txBody>
+          <a:bodyPr wrap="square" anchor="t" lIns="36000" rIns="36000" tIns="18000" bIns="18000">
+            <a:spAutoFit/>
+          </a:bodyPr>
+          <a:lstStyle/>
+          <a:p>
+            <a:pPr algn="l"/>
+            <a:r>
+              <a:rPr sz="2400" b="1" i="0">
+                <a:solidFill>
+                  <a:srgbClr val="1E293B"/>
+                </a:solidFill>
+                <a:latin typeface="Noto Sans JP"/>
+              </a:rPr>
+              <a:t>HEC</a:t>
+            </a:r>
+          </a:p>
+        </p:txBody>
+      </p:sp>
+      <p:sp>
+        <p:nvSpPr>
+          <p:cNvPr id="12" name="TextBox 11"/>
+          <p:cNvSpPr txBox="1"/>
+          <p:nvPr/>
+        </p:nvSpPr>
+        <p:spPr>
+          <a:xfrm>
+            <a:off x="1234440" y="1499616"/>
+            <a:ext cx="5324688" cy="256032"/>
+          </a:xfrm>
+          <a:prstGeom prst="rect">
+            <a:avLst/>
+          </a:prstGeom>
+          <a:noFill/>
+        </p:spPr>
+        <p:txBody>
+          <a:bodyPr wrap="square" anchor="t" lIns="36000" rIns="36000" tIns="18000" bIns="18000">
+            <a:spAutoFit/>
+          </a:bodyPr>
+          <a:lstStyle/>
+          <a:p>
+            <a:pPr algn="l"/>
+            <a:r>
+              <a:rPr sz="1100" b="0" i="0">
+                <a:solidFill>
+                  <a:srgbClr val="64748B"/>
+                </a:solidFill>
+                <a:latin typeface="Noto Sans JP"/>
+              </a:rPr>
+              <a:t>Hydroxyethyl cellulose</a:t>
+            </a:r>
+          </a:p>
+        </p:txBody>
+      </p:sp>
+      <p:sp>
+        <p:nvSpPr>
+          <p:cNvPr id="13" name="TextBox 12"/>
+          <p:cNvSpPr txBox="1"/>
+          <p:nvPr/>
+        </p:nvSpPr>
+        <p:spPr>
+          <a:xfrm>
+            <a:off x="1234440" y="1773936"/>
+            <a:ext cx="5324688" cy="310896"/>
+          </a:xfrm>
+          <a:prstGeom prst="rect">
+            <a:avLst/>
+          </a:prstGeom>
+          <a:noFill/>
+        </p:spPr>
+        <p:txBody>
+          <a:bodyPr wrap="square" anchor="t" lIns="36000" rIns="36000" tIns="18000" bIns="18000">
+            <a:spAutoFit/>
+          </a:bodyPr>
+          <a:lstStyle/>
+          <a:p>
+            <a:pPr algn="l"/>
+            <a:r>
+              <a:rPr sz="1200" b="1" i="0">
+                <a:solidFill>
+                  <a:srgbClr val="3B5174"/>
+                </a:solidFill>
+                <a:latin typeface="Noto Sans JP"/>
+              </a:rPr>
+              <a:t>ベース粘性を付与する骨格成分</a:t>
+            </a:r>
+          </a:p>
+        </p:txBody>
+      </p:sp>
+      <p:sp>
+        <p:nvSpPr>
+          <p:cNvPr id="14" name="Rectangle 13"/>
           <p:cNvSpPr/>
           <p:nvPr/>
         </p:nvSpPr>
         <p:spPr>
           <a:xfrm>
-            <a:off x="365760" y="859536"/>
-            <a:ext cx="3734714" cy="1920240"/>
-          </a:xfrm>
-          <a:prstGeom prst="roundRect">
-            <a:avLst>
-              <a:gd name="adj" fmla="val 4000"/>
-            </a:avLst>
+            <a:off x="365760" y="2761488"/>
+            <a:ext cx="6193368" cy="13716"/>
+          </a:xfrm>
+          <a:prstGeom prst="rect">
+            <a:avLst/>
           </a:prstGeom>
           <a:solidFill>
-            <a:srgbClr val="F8FAFC"/>
+            <a:srgbClr val="E2E8F0"/>
           </a:solidFill>
-          <a:ln w="6350">
-            <a:solidFill>
-              <a:srgbClr val="E2E8F0"/>
-            </a:solidFill>
+          <a:ln>
+            <a:noFill/>
           </a:ln>
           <a:effectLst/>
         </p:spPr>
@@ -52463,131 +52599,119 @@
       </p:sp>
       <p:sp>
         <p:nvSpPr>
-          <p:cNvPr id="11" name="TextBox 10"/>
-          <p:cNvSpPr txBox="1"/>
-          <p:nvPr/>
-        </p:nvSpPr>
-        <p:spPr>
-          <a:xfrm>
-            <a:off x="548640" y="987552"/>
-            <a:ext cx="3368954" cy="228600"/>
-          </a:xfrm>
-          <a:prstGeom prst="rect">
-            <a:avLst/>
-          </a:prstGeom>
-          <a:noFill/>
-        </p:spPr>
-        <p:txBody>
-          <a:bodyPr wrap="square" anchor="t" lIns="36000" rIns="36000" tIns="18000" bIns="18000">
-            <a:spAutoFit/>
-          </a:bodyPr>
-          <a:lstStyle/>
-          <a:p>
-            <a:pPr algn="l"/>
-            <a:r>
-              <a:rPr sz="1100" b="1" i="0">
+          <p:cNvPr id="15" name="TextBox 14"/>
+          <p:cNvSpPr txBox="1"/>
+          <p:nvPr/>
+        </p:nvSpPr>
+        <p:spPr>
+          <a:xfrm>
+            <a:off x="365760" y="2779776"/>
+            <a:ext cx="822960" cy="1920240"/>
+          </a:xfrm>
+          <a:prstGeom prst="rect">
+            <a:avLst/>
+          </a:prstGeom>
+          <a:noFill/>
+        </p:spPr>
+        <p:txBody>
+          <a:bodyPr wrap="square" anchor="ctr" lIns="36000" rIns="36000" tIns="18000" bIns="18000">
+            <a:spAutoFit/>
+          </a:bodyPr>
+          <a:lstStyle/>
+          <a:p>
+            <a:pPr algn="l"/>
+            <a:r>
+              <a:rPr sz="5400" b="1" i="0">
+                <a:solidFill>
+                  <a:srgbClr val="E2E8F0"/>
+                </a:solidFill>
+                <a:latin typeface="Noto Sans JP"/>
+              </a:rPr>
+              <a:t>B</a:t>
+            </a:r>
+          </a:p>
+        </p:txBody>
+      </p:sp>
+      <p:sp>
+        <p:nvSpPr>
+          <p:cNvPr id="16" name="TextBox 15"/>
+          <p:cNvSpPr txBox="1"/>
+          <p:nvPr/>
+        </p:nvSpPr>
+        <p:spPr>
+          <a:xfrm>
+            <a:off x="1234440" y="2980944"/>
+            <a:ext cx="5324688" cy="411480"/>
+          </a:xfrm>
+          <a:prstGeom prst="rect">
+            <a:avLst/>
+          </a:prstGeom>
+          <a:noFill/>
+        </p:spPr>
+        <p:txBody>
+          <a:bodyPr wrap="square" anchor="t" lIns="36000" rIns="36000" tIns="18000" bIns="18000">
+            <a:spAutoFit/>
+          </a:bodyPr>
+          <a:lstStyle/>
+          <a:p>
+            <a:pPr algn="l"/>
+            <a:r>
+              <a:rPr sz="2400" b="1" i="0">
+                <a:solidFill>
+                  <a:srgbClr val="1E293B"/>
+                </a:solidFill>
+                <a:latin typeface="Noto Sans JP"/>
+              </a:rPr>
+              <a:t>MC</a:t>
+            </a:r>
+          </a:p>
+        </p:txBody>
+      </p:sp>
+      <p:sp>
+        <p:nvSpPr>
+          <p:cNvPr id="17" name="TextBox 16"/>
+          <p:cNvSpPr txBox="1"/>
+          <p:nvPr/>
+        </p:nvSpPr>
+        <p:spPr>
+          <a:xfrm>
+            <a:off x="1234440" y="3419856"/>
+            <a:ext cx="5324688" cy="256032"/>
+          </a:xfrm>
+          <a:prstGeom prst="rect">
+            <a:avLst/>
+          </a:prstGeom>
+          <a:noFill/>
+        </p:spPr>
+        <p:txBody>
+          <a:bodyPr wrap="square" anchor="t" lIns="36000" rIns="36000" tIns="18000" bIns="18000">
+            <a:spAutoFit/>
+          </a:bodyPr>
+          <a:lstStyle/>
+          <a:p>
+            <a:pPr algn="l"/>
+            <a:r>
+              <a:rPr sz="1100" b="0" i="0">
                 <a:solidFill>
                   <a:srgbClr val="64748B"/>
                 </a:solidFill>
                 <a:latin typeface="Noto Sans JP"/>
               </a:rPr>
-              <a:t>Polymer A</a:t>
-            </a:r>
-          </a:p>
-        </p:txBody>
-      </p:sp>
-      <p:sp>
-        <p:nvSpPr>
-          <p:cNvPr id="12" name="TextBox 11"/>
-          <p:cNvSpPr txBox="1"/>
-          <p:nvPr/>
-        </p:nvSpPr>
-        <p:spPr>
-          <a:xfrm>
-            <a:off x="548640" y="1243584"/>
-            <a:ext cx="3368954" cy="457200"/>
-          </a:xfrm>
-          <a:prstGeom prst="rect">
-            <a:avLst/>
-          </a:prstGeom>
-          <a:noFill/>
-        </p:spPr>
-        <p:txBody>
-          <a:bodyPr wrap="square" anchor="t" lIns="36000" rIns="36000" tIns="18000" bIns="18000">
-            <a:spAutoFit/>
-          </a:bodyPr>
-          <a:lstStyle/>
-          <a:p>
-            <a:pPr algn="l"/>
-            <a:r>
-              <a:rPr sz="2600" b="1" i="0">
-                <a:solidFill>
-                  <a:srgbClr val="1E293B"/>
-                </a:solidFill>
-                <a:latin typeface="Noto Sans JP"/>
-              </a:rPr>
-              <a:t>HEC</a:t>
-            </a:r>
-          </a:p>
-        </p:txBody>
-      </p:sp>
-      <p:sp>
-        <p:nvSpPr>
-          <p:cNvPr id="13" name="TextBox 12"/>
-          <p:cNvSpPr txBox="1"/>
-          <p:nvPr/>
-        </p:nvSpPr>
-        <p:spPr>
-          <a:xfrm>
-            <a:off x="548640" y="1737360"/>
-            <a:ext cx="3368954" cy="594360"/>
-          </a:xfrm>
-          <a:prstGeom prst="rect">
-            <a:avLst/>
-          </a:prstGeom>
-          <a:noFill/>
-        </p:spPr>
-        <p:txBody>
-          <a:bodyPr wrap="square" anchor="t" lIns="36000" rIns="36000" tIns="18000" bIns="18000">
-            <a:spAutoFit/>
-          </a:bodyPr>
-          <a:lstStyle/>
-          <a:p>
-            <a:pPr algn="l"/>
-            <a:r>
-              <a:rPr sz="1100" b="0" i="0">
-                <a:solidFill>
-                  <a:srgbClr val="475569"/>
-                </a:solidFill>
-                <a:latin typeface="Noto Sans JP"/>
-              </a:rPr>
-              <a:t>Hydroxyethyl cellulose</a:t>
-            </a:r>
-          </a:p>
-          <a:p>
-            <a:pPr algn="l"/>
-            <a:r>
-              <a:rPr sz="1100" b="0" i="0">
-                <a:solidFill>
-                  <a:srgbClr val="475569"/>
-                </a:solidFill>
-                <a:latin typeface="Noto Sans JP"/>
-              </a:rPr>
-              <a:t>ヒドロキシエチルセルロース</a:t>
-            </a:r>
-          </a:p>
-        </p:txBody>
-      </p:sp>
-      <p:sp>
-        <p:nvSpPr>
-          <p:cNvPr id="14" name="TextBox 13"/>
-          <p:cNvSpPr txBox="1"/>
-          <p:nvPr/>
-        </p:nvSpPr>
-        <p:spPr>
-          <a:xfrm>
-            <a:off x="548640" y="2395728"/>
-            <a:ext cx="3368954" cy="274320"/>
+              <a:t>Methyl cellulose</a:t>
+            </a:r>
+          </a:p>
+        </p:txBody>
+      </p:sp>
+      <p:sp>
+        <p:nvSpPr>
+          <p:cNvPr id="18" name="TextBox 17"/>
+          <p:cNvSpPr txBox="1"/>
+          <p:nvPr/>
+        </p:nvSpPr>
+        <p:spPr>
+          <a:xfrm>
+            <a:off x="1234440" y="3694176"/>
+            <a:ext cx="5324688" cy="310896"/>
           </a:xfrm>
           <a:prstGeom prst="rect">
             <a:avLst/>
@@ -52608,34 +52732,30 @@
                 </a:solidFill>
                 <a:latin typeface="Noto Sans JP"/>
               </a:rPr>
-              <a:t>→ ベース粘性付与</a:t>
-            </a:r>
-          </a:p>
-        </p:txBody>
-      </p:sp>
-      <p:sp>
-        <p:nvSpPr>
-          <p:cNvPr id="15" name="Rounded Rectangle 14"/>
+              <a:t>加熱でゲル化（熱可逆性）── 火炎保護の鍵</a:t>
+            </a:r>
+          </a:p>
+        </p:txBody>
+      </p:sp>
+      <p:sp>
+        <p:nvSpPr>
+          <p:cNvPr id="19" name="Rectangle 18"/>
           <p:cNvSpPr/>
           <p:nvPr/>
         </p:nvSpPr>
         <p:spPr>
           <a:xfrm>
-            <a:off x="4228490" y="859536"/>
-            <a:ext cx="3734714" cy="1920240"/>
-          </a:xfrm>
-          <a:prstGeom prst="roundRect">
-            <a:avLst>
-              <a:gd name="adj" fmla="val 4000"/>
-            </a:avLst>
+            <a:off x="365760" y="4681728"/>
+            <a:ext cx="6193368" cy="13716"/>
+          </a:xfrm>
+          <a:prstGeom prst="rect">
+            <a:avLst/>
           </a:prstGeom>
           <a:solidFill>
-            <a:srgbClr val="F8FAFC"/>
+            <a:srgbClr val="E2E8F0"/>
           </a:solidFill>
-          <a:ln w="6350">
-            <a:solidFill>
-              <a:srgbClr val="E2E8F0"/>
-            </a:solidFill>
+          <a:ln>
+            <a:noFill/>
           </a:ln>
           <a:effectLst/>
         </p:spPr>
@@ -52663,131 +52783,119 @@
       </p:sp>
       <p:sp>
         <p:nvSpPr>
-          <p:cNvPr id="16" name="TextBox 15"/>
-          <p:cNvSpPr txBox="1"/>
-          <p:nvPr/>
-        </p:nvSpPr>
-        <p:spPr>
-          <a:xfrm>
-            <a:off x="4411370" y="987552"/>
-            <a:ext cx="3368954" cy="228600"/>
-          </a:xfrm>
-          <a:prstGeom prst="rect">
-            <a:avLst/>
-          </a:prstGeom>
-          <a:noFill/>
-        </p:spPr>
-        <p:txBody>
-          <a:bodyPr wrap="square" anchor="t" lIns="36000" rIns="36000" tIns="18000" bIns="18000">
-            <a:spAutoFit/>
-          </a:bodyPr>
-          <a:lstStyle/>
-          <a:p>
-            <a:pPr algn="l"/>
-            <a:r>
-              <a:rPr sz="1100" b="1" i="0">
+          <p:cNvPr id="20" name="TextBox 19"/>
+          <p:cNvSpPr txBox="1"/>
+          <p:nvPr/>
+        </p:nvSpPr>
+        <p:spPr>
+          <a:xfrm>
+            <a:off x="365760" y="4700016"/>
+            <a:ext cx="822960" cy="1920240"/>
+          </a:xfrm>
+          <a:prstGeom prst="rect">
+            <a:avLst/>
+          </a:prstGeom>
+          <a:noFill/>
+        </p:spPr>
+        <p:txBody>
+          <a:bodyPr wrap="square" anchor="ctr" lIns="36000" rIns="36000" tIns="18000" bIns="18000">
+            <a:spAutoFit/>
+          </a:bodyPr>
+          <a:lstStyle/>
+          <a:p>
+            <a:pPr algn="l"/>
+            <a:r>
+              <a:rPr sz="5400" b="1" i="0">
+                <a:solidFill>
+                  <a:srgbClr val="E2E8F0"/>
+                </a:solidFill>
+                <a:latin typeface="Noto Sans JP"/>
+              </a:rPr>
+              <a:t>C</a:t>
+            </a:r>
+          </a:p>
+        </p:txBody>
+      </p:sp>
+      <p:sp>
+        <p:nvSpPr>
+          <p:cNvPr id="21" name="TextBox 20"/>
+          <p:cNvSpPr txBox="1"/>
+          <p:nvPr/>
+        </p:nvSpPr>
+        <p:spPr>
+          <a:xfrm>
+            <a:off x="1234440" y="4901184"/>
+            <a:ext cx="5324688" cy="411480"/>
+          </a:xfrm>
+          <a:prstGeom prst="rect">
+            <a:avLst/>
+          </a:prstGeom>
+          <a:noFill/>
+        </p:spPr>
+        <p:txBody>
+          <a:bodyPr wrap="square" anchor="t" lIns="36000" rIns="36000" tIns="18000" bIns="18000">
+            <a:spAutoFit/>
+          </a:bodyPr>
+          <a:lstStyle/>
+          <a:p>
+            <a:pPr algn="l"/>
+            <a:r>
+              <a:rPr sz="2400" b="1" i="0">
+                <a:solidFill>
+                  <a:srgbClr val="1E293B"/>
+                </a:solidFill>
+                <a:latin typeface="Noto Sans JP"/>
+              </a:rPr>
+              <a:t>MHEC</a:t>
+            </a:r>
+          </a:p>
+        </p:txBody>
+      </p:sp>
+      <p:sp>
+        <p:nvSpPr>
+          <p:cNvPr id="22" name="TextBox 21"/>
+          <p:cNvSpPr txBox="1"/>
+          <p:nvPr/>
+        </p:nvSpPr>
+        <p:spPr>
+          <a:xfrm>
+            <a:off x="1234440" y="5340096"/>
+            <a:ext cx="5324688" cy="256032"/>
+          </a:xfrm>
+          <a:prstGeom prst="rect">
+            <a:avLst/>
+          </a:prstGeom>
+          <a:noFill/>
+        </p:spPr>
+        <p:txBody>
+          <a:bodyPr wrap="square" anchor="t" lIns="36000" rIns="36000" tIns="18000" bIns="18000">
+            <a:spAutoFit/>
+          </a:bodyPr>
+          <a:lstStyle/>
+          <a:p>
+            <a:pPr algn="l"/>
+            <a:r>
+              <a:rPr sz="1100" b="0" i="0">
                 <a:solidFill>
                   <a:srgbClr val="64748B"/>
                 </a:solidFill>
                 <a:latin typeface="Noto Sans JP"/>
               </a:rPr>
-              <a:t>Polymer B</a:t>
-            </a:r>
-          </a:p>
-        </p:txBody>
-      </p:sp>
-      <p:sp>
-        <p:nvSpPr>
-          <p:cNvPr id="17" name="TextBox 16"/>
-          <p:cNvSpPr txBox="1"/>
-          <p:nvPr/>
-        </p:nvSpPr>
-        <p:spPr>
-          <a:xfrm>
-            <a:off x="4411370" y="1243584"/>
-            <a:ext cx="3368954" cy="457200"/>
-          </a:xfrm>
-          <a:prstGeom prst="rect">
-            <a:avLst/>
-          </a:prstGeom>
-          <a:noFill/>
-        </p:spPr>
-        <p:txBody>
-          <a:bodyPr wrap="square" anchor="t" lIns="36000" rIns="36000" tIns="18000" bIns="18000">
-            <a:spAutoFit/>
-          </a:bodyPr>
-          <a:lstStyle/>
-          <a:p>
-            <a:pPr algn="l"/>
-            <a:r>
-              <a:rPr sz="2600" b="1" i="0">
-                <a:solidFill>
-                  <a:srgbClr val="1E293B"/>
-                </a:solidFill>
-                <a:latin typeface="Noto Sans JP"/>
-              </a:rPr>
-              <a:t>MC</a:t>
-            </a:r>
-          </a:p>
-        </p:txBody>
-      </p:sp>
-      <p:sp>
-        <p:nvSpPr>
-          <p:cNvPr id="18" name="TextBox 17"/>
-          <p:cNvSpPr txBox="1"/>
-          <p:nvPr/>
-        </p:nvSpPr>
-        <p:spPr>
-          <a:xfrm>
-            <a:off x="4411370" y="1737360"/>
-            <a:ext cx="3368954" cy="594360"/>
-          </a:xfrm>
-          <a:prstGeom prst="rect">
-            <a:avLst/>
-          </a:prstGeom>
-          <a:noFill/>
-        </p:spPr>
-        <p:txBody>
-          <a:bodyPr wrap="square" anchor="t" lIns="36000" rIns="36000" tIns="18000" bIns="18000">
-            <a:spAutoFit/>
-          </a:bodyPr>
-          <a:lstStyle/>
-          <a:p>
-            <a:pPr algn="l"/>
-            <a:r>
-              <a:rPr sz="1100" b="0" i="0">
-                <a:solidFill>
-                  <a:srgbClr val="475569"/>
-                </a:solidFill>
-                <a:latin typeface="Noto Sans JP"/>
-              </a:rPr>
-              <a:t>Methyl cellulose</a:t>
-            </a:r>
-          </a:p>
-          <a:p>
-            <a:pPr algn="l"/>
-            <a:r>
-              <a:rPr sz="1100" b="0" i="0">
-                <a:solidFill>
-                  <a:srgbClr val="475569"/>
-                </a:solidFill>
-                <a:latin typeface="Noto Sans JP"/>
-              </a:rPr>
-              <a:t>メチルセルロース</a:t>
-            </a:r>
-          </a:p>
-        </p:txBody>
-      </p:sp>
-      <p:sp>
-        <p:nvSpPr>
-          <p:cNvPr id="19" name="TextBox 18"/>
-          <p:cNvSpPr txBox="1"/>
-          <p:nvPr/>
-        </p:nvSpPr>
-        <p:spPr>
-          <a:xfrm>
-            <a:off x="4411370" y="2395728"/>
-            <a:ext cx="3368954" cy="274320"/>
+              <a:t>Methyl 2-hydroxyethyl cellulose</a:t>
+            </a:r>
+          </a:p>
+        </p:txBody>
+      </p:sp>
+      <p:sp>
+        <p:nvSpPr>
+          <p:cNvPr id="23" name="TextBox 22"/>
+          <p:cNvSpPr txBox="1"/>
+          <p:nvPr/>
+        </p:nvSpPr>
+        <p:spPr>
+          <a:xfrm>
+            <a:off x="1234440" y="5614416"/>
+            <a:ext cx="5324688" cy="310896"/>
           </a:xfrm>
           <a:prstGeom prst="rect">
             <a:avLst/>
@@ -52808,221 +52916,21 @@
                 </a:solidFill>
                 <a:latin typeface="Noto Sans JP"/>
               </a:rPr>
-              <a:t>→ 加熱時にゲル化（熱可逆性）</a:t>
-            </a:r>
-          </a:p>
-        </p:txBody>
-      </p:sp>
-      <p:sp>
-        <p:nvSpPr>
-          <p:cNvPr id="20" name="Rounded Rectangle 19"/>
+              <a:t>AとBの特性を併せ持つ複合型</a:t>
+            </a:r>
+          </a:p>
+        </p:txBody>
+      </p:sp>
+      <p:sp>
+        <p:nvSpPr>
+          <p:cNvPr id="24" name="Rounded Rectangle 23"/>
           <p:cNvSpPr/>
           <p:nvPr/>
         </p:nvSpPr>
         <p:spPr>
           <a:xfrm>
-            <a:off x="8091220" y="859536"/>
-            <a:ext cx="3734714" cy="1920240"/>
-          </a:xfrm>
-          <a:prstGeom prst="roundRect">
-            <a:avLst>
-              <a:gd name="adj" fmla="val 4000"/>
-            </a:avLst>
-          </a:prstGeom>
-          <a:solidFill>
-            <a:srgbClr val="F8FAFC"/>
-          </a:solidFill>
-          <a:ln w="6350">
-            <a:solidFill>
-              <a:srgbClr val="E2E8F0"/>
-            </a:solidFill>
-          </a:ln>
-          <a:effectLst/>
-        </p:spPr>
-        <p:style>
-          <a:lnRef idx="1">
-            <a:schemeClr val="accent1"/>
-          </a:lnRef>
-          <a:fillRef idx="3">
-            <a:schemeClr val="accent1"/>
-          </a:fillRef>
-          <a:effectRef idx="2">
-            <a:schemeClr val="accent1"/>
-          </a:effectRef>
-          <a:fontRef idx="minor">
-            <a:schemeClr val="lt1"/>
-          </a:fontRef>
-        </p:style>
-        <p:txBody>
-          <a:bodyPr rtlCol="0" anchor="ctr"/>
-          <a:lstStyle/>
-          <a:p>
-            <a:pPr algn="ctr"/>
-          </a:p>
-        </p:txBody>
-      </p:sp>
-      <p:sp>
-        <p:nvSpPr>
-          <p:cNvPr id="21" name="TextBox 20"/>
-          <p:cNvSpPr txBox="1"/>
-          <p:nvPr/>
-        </p:nvSpPr>
-        <p:spPr>
-          <a:xfrm>
-            <a:off x="8274100" y="987552"/>
-            <a:ext cx="3368954" cy="228600"/>
-          </a:xfrm>
-          <a:prstGeom prst="rect">
-            <a:avLst/>
-          </a:prstGeom>
-          <a:noFill/>
-        </p:spPr>
-        <p:txBody>
-          <a:bodyPr wrap="square" anchor="t" lIns="36000" rIns="36000" tIns="18000" bIns="18000">
-            <a:spAutoFit/>
-          </a:bodyPr>
-          <a:lstStyle/>
-          <a:p>
-            <a:pPr algn="l"/>
-            <a:r>
-              <a:rPr sz="1100" b="1" i="0">
-                <a:solidFill>
-                  <a:srgbClr val="64748B"/>
-                </a:solidFill>
-                <a:latin typeface="Noto Sans JP"/>
-              </a:rPr>
-              <a:t>Polymer C</a:t>
-            </a:r>
-          </a:p>
-        </p:txBody>
-      </p:sp>
-      <p:sp>
-        <p:nvSpPr>
-          <p:cNvPr id="22" name="TextBox 21"/>
-          <p:cNvSpPr txBox="1"/>
-          <p:nvPr/>
-        </p:nvSpPr>
-        <p:spPr>
-          <a:xfrm>
-            <a:off x="8274100" y="1243584"/>
-            <a:ext cx="3368954" cy="457200"/>
-          </a:xfrm>
-          <a:prstGeom prst="rect">
-            <a:avLst/>
-          </a:prstGeom>
-          <a:noFill/>
-        </p:spPr>
-        <p:txBody>
-          <a:bodyPr wrap="square" anchor="t" lIns="36000" rIns="36000" tIns="18000" bIns="18000">
-            <a:spAutoFit/>
-          </a:bodyPr>
-          <a:lstStyle/>
-          <a:p>
-            <a:pPr algn="l"/>
-            <a:r>
-              <a:rPr sz="2600" b="1" i="0">
-                <a:solidFill>
-                  <a:srgbClr val="1E293B"/>
-                </a:solidFill>
-                <a:latin typeface="Noto Sans JP"/>
-              </a:rPr>
-              <a:t>MHEC</a:t>
-            </a:r>
-          </a:p>
-        </p:txBody>
-      </p:sp>
-      <p:sp>
-        <p:nvSpPr>
-          <p:cNvPr id="23" name="TextBox 22"/>
-          <p:cNvSpPr txBox="1"/>
-          <p:nvPr/>
-        </p:nvSpPr>
-        <p:spPr>
-          <a:xfrm>
-            <a:off x="8274100" y="1737360"/>
-            <a:ext cx="3368954" cy="594360"/>
-          </a:xfrm>
-          <a:prstGeom prst="rect">
-            <a:avLst/>
-          </a:prstGeom>
-          <a:noFill/>
-        </p:spPr>
-        <p:txBody>
-          <a:bodyPr wrap="square" anchor="t" lIns="36000" rIns="36000" tIns="18000" bIns="18000">
-            <a:spAutoFit/>
-          </a:bodyPr>
-          <a:lstStyle/>
-          <a:p>
-            <a:pPr algn="l"/>
-            <a:r>
-              <a:rPr sz="1100" b="0" i="0">
-                <a:solidFill>
-                  <a:srgbClr val="475569"/>
-                </a:solidFill>
-                <a:latin typeface="Noto Sans JP"/>
-              </a:rPr>
-              <a:t>Methyl 2-hydroxyethyl cellulose</a:t>
-            </a:r>
-          </a:p>
-          <a:p>
-            <a:pPr algn="l"/>
-            <a:r>
-              <a:rPr sz="1100" b="0" i="0">
-                <a:solidFill>
-                  <a:srgbClr val="475569"/>
-                </a:solidFill>
-                <a:latin typeface="Noto Sans JP"/>
-              </a:rPr>
-              <a:t>メチル2-ヒドロキシエチルセルロース</a:t>
-            </a:r>
-          </a:p>
-        </p:txBody>
-      </p:sp>
-      <p:sp>
-        <p:nvSpPr>
-          <p:cNvPr id="24" name="TextBox 23"/>
-          <p:cNvSpPr txBox="1"/>
-          <p:nvPr/>
-        </p:nvSpPr>
-        <p:spPr>
-          <a:xfrm>
-            <a:off x="8274100" y="2395728"/>
-            <a:ext cx="3368954" cy="274320"/>
-          </a:xfrm>
-          <a:prstGeom prst="rect">
-            <a:avLst/>
-          </a:prstGeom>
-          <a:noFill/>
-        </p:spPr>
-        <p:txBody>
-          <a:bodyPr wrap="square" anchor="t" lIns="36000" rIns="36000" tIns="18000" bIns="18000">
-            <a:spAutoFit/>
-          </a:bodyPr>
-          <a:lstStyle/>
-          <a:p>
-            <a:pPr algn="l"/>
-            <a:r>
-              <a:rPr sz="1200" b="1" i="0">
-                <a:solidFill>
-                  <a:srgbClr val="3B5174"/>
-                </a:solidFill>
-                <a:latin typeface="Noto Sans JP"/>
-              </a:rPr>
-              <a:t>→ AとBの特性を統合</a:t>
-            </a:r>
-          </a:p>
-        </p:txBody>
-      </p:sp>
-      <p:sp>
-        <p:nvSpPr>
-          <p:cNvPr id="25" name="Rounded Rectangle 24"/>
-          <p:cNvSpPr/>
-          <p:nvPr/>
-        </p:nvSpPr>
-        <p:spPr>
-          <a:xfrm>
-            <a:off x="365760" y="3054096"/>
-            <a:ext cx="11460175" cy="3246120"/>
+            <a:off x="6742008" y="859536"/>
+            <a:ext cx="5083926" cy="5760720"/>
           </a:xfrm>
           <a:prstGeom prst="roundRect">
             <a:avLst>
@@ -53063,13 +52971,13 @@
       </p:sp>
       <p:sp>
         <p:nvSpPr>
-          <p:cNvPr id="26" name="Rectangle 25"/>
+          <p:cNvPr id="25" name="Rectangle 24"/>
           <p:cNvSpPr/>
           <p:nvPr/>
         </p:nvSpPr>
         <p:spPr>
           <a:xfrm>
-            <a:off x="475488" y="3163824"/>
+            <a:off x="6851736" y="969264"/>
             <a:ext cx="868680" cy="292608"/>
           </a:xfrm>
           <a:prstGeom prst="rect">
@@ -53107,14 +53015,49 @@
       </p:sp>
       <p:sp>
         <p:nvSpPr>
+          <p:cNvPr id="26" name="TextBox 25"/>
+          <p:cNvSpPr txBox="1"/>
+          <p:nvPr/>
+        </p:nvSpPr>
+        <p:spPr>
+          <a:xfrm>
+            <a:off x="6851736" y="969264"/>
+            <a:ext cx="868680" cy="292608"/>
+          </a:xfrm>
+          <a:prstGeom prst="rect">
+            <a:avLst/>
+          </a:prstGeom>
+          <a:noFill/>
+        </p:spPr>
+        <p:txBody>
+          <a:bodyPr wrap="square" anchor="ctr" lIns="36000" rIns="36000" tIns="18000" bIns="18000">
+            <a:spAutoFit/>
+          </a:bodyPr>
+          <a:lstStyle/>
+          <a:p>
+            <a:pPr algn="ctr"/>
+            <a:r>
+              <a:rPr sz="1100" b="1" i="0">
+                <a:solidFill>
+                  <a:srgbClr val="FFFFFF"/>
+                </a:solidFill>
+                <a:latin typeface="Noto Sans JP"/>
+              </a:rPr>
+              <a:t>Fig. 1b/c</a:t>
+            </a:r>
+          </a:p>
+        </p:txBody>
+      </p:sp>
+      <p:sp>
+        <p:nvSpPr>
           <p:cNvPr id="27" name="TextBox 26"/>
           <p:cNvSpPr txBox="1"/>
           <p:nvPr/>
         </p:nvSpPr>
         <p:spPr>
           <a:xfrm>
-            <a:off x="475488" y="3163824"/>
-            <a:ext cx="868680" cy="292608"/>
+            <a:off x="6742008" y="859536"/>
+            <a:ext cx="5083926" cy="5760720"/>
           </a:xfrm>
           <a:prstGeom prst="rect">
             <a:avLst/>
@@ -53129,13 +53072,13 @@
           <a:p>
             <a:pPr algn="ctr"/>
             <a:r>
-              <a:rPr sz="1100" b="1" i="0">
-                <a:solidFill>
-                  <a:srgbClr val="FFFFFF"/>
-                </a:solidFill>
-                <a:latin typeface="Noto Sans JP"/>
-              </a:rPr>
-              <a:t>Fig. 1b/c</a:t>
+              <a:rPr sz="1200" b="0" i="0">
+                <a:solidFill>
+                  <a:srgbClr val="AAB4C0"/>
+                </a:solidFill>
+                <a:latin typeface="Noto Sans JP"/>
+              </a:rPr>
+              <a:t>（論文の図を貼り付け）</a:t>
             </a:r>
           </a:p>
         </p:txBody>
@@ -53148,43 +53091,8 @@
         </p:nvSpPr>
         <p:spPr>
           <a:xfrm>
-            <a:off x="365760" y="3054096"/>
-            <a:ext cx="11460175" cy="3246120"/>
-          </a:xfrm>
-          <a:prstGeom prst="rect">
-            <a:avLst/>
-          </a:prstGeom>
-          <a:noFill/>
-        </p:spPr>
-        <p:txBody>
-          <a:bodyPr wrap="square" anchor="ctr" lIns="36000" rIns="36000" tIns="18000" bIns="18000">
-            <a:spAutoFit/>
-          </a:bodyPr>
-          <a:lstStyle/>
-          <a:p>
-            <a:pPr algn="ctr"/>
-            <a:r>
-              <a:rPr sz="1200" b="0" i="0">
-                <a:solidFill>
-                  <a:srgbClr val="AAB4C0"/>
-                </a:solidFill>
-                <a:latin typeface="Noto Sans JP"/>
-              </a:rPr>
-              <a:t>（論文の図を貼り付け）</a:t>
-            </a:r>
-          </a:p>
-        </p:txBody>
-      </p:sp>
-      <p:sp>
-        <p:nvSpPr>
-          <p:cNvPr id="29" name="TextBox 28"/>
-          <p:cNvSpPr txBox="1"/>
-          <p:nvPr/>
-        </p:nvSpPr>
-        <p:spPr>
-          <a:xfrm>
-            <a:off x="365760" y="6336792"/>
-            <a:ext cx="11460175" cy="274320"/>
+            <a:off x="6742008" y="6656832"/>
+            <a:ext cx="5083926" cy="274320"/>
           </a:xfrm>
           <a:prstGeom prst="rect">
             <a:avLst/>
@@ -53205,7 +53113,7 @@
                 </a:solidFill>
                 <a:latin typeface="Noto Sans JP"/>
               </a:rPr>
-              <a:t>各ポリマーの化学構造とコロイダルシリカ(CSP)との混合スキーム</a:t>
+              <a:t>各ポリマーの化学構造とCSP混合スキーム</a:t>
             </a:r>
           </a:p>
         </p:txBody>

--- a/slides.pptx
+++ b/slides.pptx
@@ -3934,19 +3934,19 @@
         <p:spPr>
           <a:xfrm>
             <a:off x="365760" y="859536"/>
-            <a:ext cx="5409444" cy="3200400"/>
+            <a:ext cx="5409444" cy="2468880"/>
           </a:xfrm>
           <a:prstGeom prst="roundRect">
             <a:avLst>
-              <a:gd name="adj" fmla="val 4000"/>
+              <a:gd name="adj" fmla="val 2000"/>
             </a:avLst>
           </a:prstGeom>
           <a:solidFill>
-            <a:srgbClr val="F1F5F9"/>
+            <a:srgbClr val="F5F8FC"/>
           </a:solidFill>
-          <a:ln w="6350">
+          <a:ln w="12700">
             <a:solidFill>
-              <a:srgbClr val="E2E8F0"/>
+              <a:srgbClr val="C0D0E0"/>
             </a:solidFill>
           </a:ln>
           <a:effectLst/>
@@ -3981,14 +3981,14 @@
         </p:nvSpPr>
         <p:spPr>
           <a:xfrm>
-            <a:off x="365760" y="859536"/>
-            <a:ext cx="5409444" cy="36576"/>
+            <a:off x="475488" y="969264"/>
+            <a:ext cx="868680" cy="292608"/>
           </a:xfrm>
           <a:prstGeom prst="rect">
             <a:avLst/>
           </a:prstGeom>
           <a:solidFill>
-            <a:srgbClr val="3B5174"/>
+            <a:srgbClr val="1E293B"/>
           </a:solidFill>
           <a:ln>
             <a:noFill/>
@@ -4025,366 +4025,119 @@
         </p:nvSpPr>
         <p:spPr>
           <a:xfrm>
-            <a:off x="548640" y="1024128"/>
-            <a:ext cx="5043684" cy="219456"/>
-          </a:xfrm>
-          <a:prstGeom prst="rect">
-            <a:avLst/>
-          </a:prstGeom>
-          <a:noFill/>
-        </p:spPr>
-        <p:txBody>
-          <a:bodyPr wrap="square" anchor="t" lIns="36000" rIns="36000" tIns="18000" bIns="18000">
-            <a:spAutoFit/>
-          </a:bodyPr>
-          <a:lstStyle/>
-          <a:p>
-            <a:pPr algn="l"/>
-            <a:r>
-              <a:rPr sz="1000" b="1" i="0">
+            <a:off x="475488" y="969264"/>
+            <a:ext cx="868680" cy="292608"/>
+          </a:xfrm>
+          <a:prstGeom prst="rect">
+            <a:avLst/>
+          </a:prstGeom>
+          <a:noFill/>
+        </p:spPr>
+        <p:txBody>
+          <a:bodyPr wrap="square" anchor="ctr" lIns="36000" rIns="36000" tIns="18000" bIns="18000">
+            <a:spAutoFit/>
+          </a:bodyPr>
+          <a:lstStyle/>
+          <a:p>
+            <a:pPr algn="ctr"/>
+            <a:r>
+              <a:rPr sz="1100" b="1" i="0">
+                <a:solidFill>
+                  <a:srgbClr val="FFFFFF"/>
+                </a:solidFill>
+                <a:latin typeface="Noto Sans JP"/>
+              </a:rPr>
+              <a:t>Photo</a:t>
+            </a:r>
+          </a:p>
+        </p:txBody>
+      </p:sp>
+      <p:sp>
+        <p:nvSpPr>
+          <p:cNvPr id="13" name="TextBox 12"/>
+          <p:cNvSpPr txBox="1"/>
+          <p:nvPr/>
+        </p:nvSpPr>
+        <p:spPr>
+          <a:xfrm>
+            <a:off x="365760" y="859536"/>
+            <a:ext cx="5409444" cy="2468880"/>
+          </a:xfrm>
+          <a:prstGeom prst="rect">
+            <a:avLst/>
+          </a:prstGeom>
+          <a:noFill/>
+        </p:spPr>
+        <p:txBody>
+          <a:bodyPr wrap="square" anchor="ctr" lIns="36000" rIns="36000" tIns="18000" bIns="18000">
+            <a:spAutoFit/>
+          </a:bodyPr>
+          <a:lstStyle/>
+          <a:p>
+            <a:pPr algn="ctr"/>
+            <a:r>
+              <a:rPr sz="1200" b="0" i="0">
+                <a:solidFill>
+                  <a:srgbClr val="AAB4C0"/>
+                </a:solidFill>
+                <a:latin typeface="Noto Sans JP"/>
+              </a:rPr>
+              <a:t>（論文の図を貼り付け）</a:t>
+            </a:r>
+          </a:p>
+        </p:txBody>
+      </p:sp>
+      <p:sp>
+        <p:nvSpPr>
+          <p:cNvPr id="14" name="TextBox 13"/>
+          <p:cNvSpPr txBox="1"/>
+          <p:nvPr/>
+        </p:nvSpPr>
+        <p:spPr>
+          <a:xfrm>
+            <a:off x="365760" y="3364992"/>
+            <a:ext cx="5409444" cy="274320"/>
+          </a:xfrm>
+          <a:prstGeom prst="rect">
+            <a:avLst/>
+          </a:prstGeom>
+          <a:noFill/>
+        </p:spPr>
+        <p:txBody>
+          <a:bodyPr wrap="square" anchor="t" lIns="36000" rIns="36000" tIns="18000" bIns="18000">
+            <a:spAutoFit/>
+          </a:bodyPr>
+          <a:lstStyle/>
+          <a:p>
+            <a:pPr algn="ctr"/>
+            <a:r>
+              <a:rPr sz="1000" b="0" i="1">
                 <a:solidFill>
                   <a:srgbClr val="64748B"/>
                 </a:solidFill>
                 <a:latin typeface="Noto Sans JP"/>
               </a:rPr>
-              <a:t>THERMAL RESPONSE</a:t>
-            </a:r>
-          </a:p>
-        </p:txBody>
-      </p:sp>
-      <p:sp>
-        <p:nvSpPr>
-          <p:cNvPr id="13" name="TextBox 12"/>
-          <p:cNvSpPr txBox="1"/>
-          <p:nvPr/>
-        </p:nvSpPr>
-        <p:spPr>
-          <a:xfrm>
-            <a:off x="548640" y="1261872"/>
-            <a:ext cx="5043684" cy="329184"/>
-          </a:xfrm>
-          <a:prstGeom prst="rect">
-            <a:avLst/>
-          </a:prstGeom>
-          <a:noFill/>
-        </p:spPr>
-        <p:txBody>
-          <a:bodyPr wrap="square" anchor="t" lIns="36000" rIns="36000" tIns="18000" bIns="18000">
-            <a:spAutoFit/>
-          </a:bodyPr>
-          <a:lstStyle/>
-          <a:p>
-            <a:pPr algn="l"/>
-            <a:r>
-              <a:rPr sz="1500" b="1" i="0">
-                <a:solidFill>
-                  <a:srgbClr val="1E293B"/>
-                </a:solidFill>
-                <a:latin typeface="Noto Sans JP"/>
-              </a:rPr>
-              <a:t>逆熱応答（LCST挙動）</a:t>
-            </a:r>
-          </a:p>
-        </p:txBody>
-      </p:sp>
-      <p:sp>
-        <p:nvSpPr>
-          <p:cNvPr id="14" name="TextBox 13"/>
-          <p:cNvSpPr txBox="1"/>
-          <p:nvPr/>
-        </p:nvSpPr>
-        <p:spPr>
-          <a:xfrm>
-            <a:off x="548640" y="1627632"/>
-            <a:ext cx="182880" cy="274320"/>
-          </a:xfrm>
-          <a:prstGeom prst="rect">
-            <a:avLst/>
-          </a:prstGeom>
-          <a:noFill/>
-        </p:spPr>
-        <p:txBody>
-          <a:bodyPr wrap="square" anchor="t" lIns="36000" rIns="36000" tIns="18000" bIns="18000">
-            <a:spAutoFit/>
-          </a:bodyPr>
-          <a:lstStyle/>
-          <a:p>
-            <a:pPr algn="l"/>
-            <a:r>
-              <a:rPr sz="1200" b="0" i="0">
-                <a:solidFill>
-                  <a:srgbClr val="3B5174"/>
-                </a:solidFill>
-                <a:latin typeface="Noto Sans JP"/>
-              </a:rPr>
-              <a:t>•</a:t>
-            </a:r>
-          </a:p>
-        </p:txBody>
-      </p:sp>
-      <p:sp>
-        <p:nvSpPr>
-          <p:cNvPr id="15" name="TextBox 14"/>
-          <p:cNvSpPr txBox="1"/>
-          <p:nvPr/>
-        </p:nvSpPr>
-        <p:spPr>
-          <a:xfrm>
-            <a:off x="749808" y="1627632"/>
-            <a:ext cx="4842516" cy="274320"/>
-          </a:xfrm>
-          <a:prstGeom prst="rect">
-            <a:avLst/>
-          </a:prstGeom>
-          <a:noFill/>
-        </p:spPr>
-        <p:txBody>
-          <a:bodyPr wrap="square" anchor="t" lIns="36000" rIns="36000" tIns="18000" bIns="18000">
-            <a:spAutoFit/>
-          </a:bodyPr>
-          <a:lstStyle/>
-          <a:p>
-            <a:pPr algn="l"/>
-            <a:r>
-              <a:rPr sz="1200" b="0" i="0">
-                <a:solidFill>
-                  <a:srgbClr val="475569"/>
-                </a:solidFill>
-                <a:latin typeface="Noto Sans JP"/>
-              </a:rPr>
-              <a:t>MCは冷水（&lt;20°C）に溶解し低粘度溶液を形成</a:t>
-            </a:r>
-          </a:p>
-        </p:txBody>
-      </p:sp>
-      <p:sp>
-        <p:nvSpPr>
-          <p:cNvPr id="16" name="TextBox 15"/>
-          <p:cNvSpPr txBox="1"/>
-          <p:nvPr/>
-        </p:nvSpPr>
-        <p:spPr>
-          <a:xfrm>
-            <a:off x="548640" y="1901952"/>
-            <a:ext cx="182880" cy="274320"/>
-          </a:xfrm>
-          <a:prstGeom prst="rect">
-            <a:avLst/>
-          </a:prstGeom>
-          <a:noFill/>
-        </p:spPr>
-        <p:txBody>
-          <a:bodyPr wrap="square" anchor="t" lIns="36000" rIns="36000" tIns="18000" bIns="18000">
-            <a:spAutoFit/>
-          </a:bodyPr>
-          <a:lstStyle/>
-          <a:p>
-            <a:pPr algn="l"/>
-            <a:r>
-              <a:rPr sz="1200" b="0" i="0">
-                <a:solidFill>
-                  <a:srgbClr val="3B5174"/>
-                </a:solidFill>
-                <a:latin typeface="Noto Sans JP"/>
-              </a:rPr>
-              <a:t>•</a:t>
-            </a:r>
-          </a:p>
-        </p:txBody>
-      </p:sp>
-      <p:sp>
-        <p:nvSpPr>
-          <p:cNvPr id="17" name="TextBox 16"/>
-          <p:cNvSpPr txBox="1"/>
-          <p:nvPr/>
-        </p:nvSpPr>
-        <p:spPr>
-          <a:xfrm>
-            <a:off x="749808" y="1901952"/>
-            <a:ext cx="4842516" cy="274320"/>
-          </a:xfrm>
-          <a:prstGeom prst="rect">
-            <a:avLst/>
-          </a:prstGeom>
-          <a:noFill/>
-        </p:spPr>
-        <p:txBody>
-          <a:bodyPr wrap="square" anchor="t" lIns="36000" rIns="36000" tIns="18000" bIns="18000">
-            <a:spAutoFit/>
-          </a:bodyPr>
-          <a:lstStyle/>
-          <a:p>
-            <a:pPr algn="l"/>
-            <a:r>
-              <a:rPr sz="1200" b="0" i="0">
-                <a:solidFill>
-                  <a:srgbClr val="475569"/>
-                </a:solidFill>
-                <a:latin typeface="Noto Sans JP"/>
-              </a:rPr>
-              <a:t>加熱でLCSTを超えてゲル化</a:t>
-            </a:r>
-          </a:p>
-        </p:txBody>
-      </p:sp>
-      <p:sp>
-        <p:nvSpPr>
-          <p:cNvPr id="18" name="TextBox 17"/>
-          <p:cNvSpPr txBox="1"/>
-          <p:nvPr/>
-        </p:nvSpPr>
-        <p:spPr>
-          <a:xfrm>
-            <a:off x="548640" y="2176272"/>
-            <a:ext cx="182880" cy="274320"/>
-          </a:xfrm>
-          <a:prstGeom prst="rect">
-            <a:avLst/>
-          </a:prstGeom>
-          <a:noFill/>
-        </p:spPr>
-        <p:txBody>
-          <a:bodyPr wrap="square" anchor="t" lIns="36000" rIns="36000" tIns="18000" bIns="18000">
-            <a:spAutoFit/>
-          </a:bodyPr>
-          <a:lstStyle/>
-          <a:p>
-            <a:pPr algn="l"/>
-            <a:r>
-              <a:rPr sz="1200" b="0" i="0">
-                <a:solidFill>
-                  <a:srgbClr val="3B5174"/>
-                </a:solidFill>
-                <a:latin typeface="Noto Sans JP"/>
-              </a:rPr>
-              <a:t>•</a:t>
-            </a:r>
-          </a:p>
-        </p:txBody>
-      </p:sp>
-      <p:sp>
-        <p:nvSpPr>
-          <p:cNvPr id="19" name="TextBox 18"/>
-          <p:cNvSpPr txBox="1"/>
-          <p:nvPr/>
-        </p:nvSpPr>
-        <p:spPr>
-          <a:xfrm>
-            <a:off x="749808" y="2176272"/>
-            <a:ext cx="4842516" cy="274320"/>
-          </a:xfrm>
-          <a:prstGeom prst="rect">
-            <a:avLst/>
-          </a:prstGeom>
-          <a:noFill/>
-        </p:spPr>
-        <p:txBody>
-          <a:bodyPr wrap="square" anchor="t" lIns="36000" rIns="36000" tIns="18000" bIns="18000">
-            <a:spAutoFit/>
-          </a:bodyPr>
-          <a:lstStyle/>
-          <a:p>
-            <a:pPr algn="l"/>
-            <a:r>
-              <a:rPr sz="1200" b="0" i="0">
-                <a:solidFill>
-                  <a:srgbClr val="475569"/>
-                </a:solidFill>
-                <a:latin typeface="Noto Sans JP"/>
-              </a:rPr>
-              <a:t>MCのゲル化開始温度：約 50–60°C（濃度依存）</a:t>
-            </a:r>
-          </a:p>
-        </p:txBody>
-      </p:sp>
-      <p:sp>
-        <p:nvSpPr>
-          <p:cNvPr id="20" name="TextBox 19"/>
-          <p:cNvSpPr txBox="1"/>
-          <p:nvPr/>
-        </p:nvSpPr>
-        <p:spPr>
-          <a:xfrm>
-            <a:off x="548640" y="2450592"/>
-            <a:ext cx="182880" cy="274320"/>
-          </a:xfrm>
-          <a:prstGeom prst="rect">
-            <a:avLst/>
-          </a:prstGeom>
-          <a:noFill/>
-        </p:spPr>
-        <p:txBody>
-          <a:bodyPr wrap="square" anchor="t" lIns="36000" rIns="36000" tIns="18000" bIns="18000">
-            <a:spAutoFit/>
-          </a:bodyPr>
-          <a:lstStyle/>
-          <a:p>
-            <a:pPr algn="l"/>
-            <a:r>
-              <a:rPr sz="1200" b="0" i="0">
-                <a:solidFill>
-                  <a:srgbClr val="3B5174"/>
-                </a:solidFill>
-                <a:latin typeface="Noto Sans JP"/>
-              </a:rPr>
-              <a:t>•</a:t>
-            </a:r>
-          </a:p>
-        </p:txBody>
-      </p:sp>
-      <p:sp>
-        <p:nvSpPr>
-          <p:cNvPr id="21" name="TextBox 20"/>
-          <p:cNvSpPr txBox="1"/>
-          <p:nvPr/>
-        </p:nvSpPr>
-        <p:spPr>
-          <a:xfrm>
-            <a:off x="749808" y="2450592"/>
-            <a:ext cx="4842516" cy="274320"/>
-          </a:xfrm>
-          <a:prstGeom prst="rect">
-            <a:avLst/>
-          </a:prstGeom>
-          <a:noFill/>
-        </p:spPr>
-        <p:txBody>
-          <a:bodyPr wrap="square" anchor="t" lIns="36000" rIns="36000" tIns="18000" bIns="18000">
-            <a:spAutoFit/>
-          </a:bodyPr>
-          <a:lstStyle/>
-          <a:p>
-            <a:pPr algn="l"/>
-            <a:r>
-              <a:rPr sz="1200" b="0" i="0">
-                <a:solidFill>
-                  <a:srgbClr val="475569"/>
-                </a:solidFill>
-                <a:latin typeface="Noto Sans JP"/>
-              </a:rPr>
-              <a:t>常温では液体 → 火炎接触で即座にゲル</a:t>
-            </a:r>
-          </a:p>
-        </p:txBody>
-      </p:sp>
-      <p:sp>
-        <p:nvSpPr>
-          <p:cNvPr id="22" name="Rounded Rectangle 21"/>
+              <a:t>MCゾル（室温）→ ゲル（加熱後）の外観比較</a:t>
+            </a:r>
+          </a:p>
+        </p:txBody>
+      </p:sp>
+      <p:sp>
+        <p:nvSpPr>
+          <p:cNvPr id="15" name="Rectangle 14"/>
           <p:cNvSpPr/>
           <p:nvPr/>
         </p:nvSpPr>
         <p:spPr>
           <a:xfrm>
-            <a:off x="365760" y="4242816"/>
-            <a:ext cx="5409444" cy="777240"/>
-          </a:xfrm>
-          <a:prstGeom prst="roundRect">
-            <a:avLst>
-              <a:gd name="adj" fmla="val 4000"/>
-            </a:avLst>
+            <a:off x="365760" y="3511296"/>
+            <a:ext cx="4868499" cy="13716"/>
+          </a:xfrm>
+          <a:prstGeom prst="rect">
+            <a:avLst/>
           </a:prstGeom>
           <a:solidFill>
-            <a:srgbClr val="F8FAFC"/>
+            <a:srgbClr val="E2E8F0"/>
           </a:solidFill>
           <a:ln>
             <a:noFill/>
@@ -4415,121 +4168,217 @@
       </p:sp>
       <p:sp>
         <p:nvSpPr>
-          <p:cNvPr id="23" name="Rectangle 22"/>
-          <p:cNvSpPr/>
-          <p:nvPr/>
-        </p:nvSpPr>
-        <p:spPr>
-          <a:xfrm>
-            <a:off x="365760" y="4242816"/>
-            <a:ext cx="54864" cy="777240"/>
-          </a:xfrm>
-          <a:prstGeom prst="rect">
-            <a:avLst/>
-          </a:prstGeom>
-          <a:solidFill>
-            <a:srgbClr val="3B5174"/>
-          </a:solidFill>
-          <a:ln>
-            <a:noFill/>
-          </a:ln>
-          <a:effectLst/>
-        </p:spPr>
-        <p:style>
-          <a:lnRef idx="1">
-            <a:schemeClr val="accent1"/>
-          </a:lnRef>
-          <a:fillRef idx="3">
-            <a:schemeClr val="accent1"/>
-          </a:fillRef>
-          <a:effectRef idx="2">
-            <a:schemeClr val="accent1"/>
-          </a:effectRef>
-          <a:fontRef idx="minor">
-            <a:schemeClr val="lt1"/>
-          </a:fontRef>
-        </p:style>
-        <p:txBody>
-          <a:bodyPr rtlCol="0" anchor="ctr"/>
-          <a:lstStyle/>
-          <a:p>
-            <a:pPr algn="ctr"/>
-          </a:p>
-        </p:txBody>
-      </p:sp>
-      <p:sp>
-        <p:nvSpPr>
-          <p:cNvPr id="24" name="TextBox 23"/>
-          <p:cNvSpPr txBox="1"/>
-          <p:nvPr/>
-        </p:nvSpPr>
-        <p:spPr>
-          <a:xfrm>
-            <a:off x="548640" y="4242816"/>
-            <a:ext cx="365760" cy="777240"/>
-          </a:xfrm>
-          <a:prstGeom prst="rect">
-            <a:avLst/>
-          </a:prstGeom>
-          <a:noFill/>
-        </p:spPr>
-        <p:txBody>
-          <a:bodyPr wrap="square" anchor="ctr" lIns="36000" rIns="36000" tIns="18000" bIns="18000">
-            <a:spAutoFit/>
-          </a:bodyPr>
-          <a:lstStyle/>
-          <a:p>
-            <a:pPr algn="l"/>
-            <a:r>
-              <a:rPr sz="1400" b="0" i="0">
+          <p:cNvPr id="16" name="TextBox 15"/>
+          <p:cNvSpPr txBox="1"/>
+          <p:nvPr/>
+        </p:nvSpPr>
+        <p:spPr>
+          <a:xfrm>
+            <a:off x="365760" y="3675888"/>
+            <a:ext cx="804672" cy="274320"/>
+          </a:xfrm>
+          <a:prstGeom prst="rect">
+            <a:avLst/>
+          </a:prstGeom>
+          <a:noFill/>
+        </p:spPr>
+        <p:txBody>
+          <a:bodyPr wrap="square" anchor="t" lIns="36000" rIns="36000" tIns="18000" bIns="18000">
+            <a:spAutoFit/>
+          </a:bodyPr>
+          <a:lstStyle/>
+          <a:p>
+            <a:pPr algn="l"/>
+            <a:r>
+              <a:rPr sz="1000" b="1" i="0">
                 <a:solidFill>
                   <a:srgbClr val="3B5174"/>
                 </a:solidFill>
                 <a:latin typeface="Noto Sans JP"/>
               </a:rPr>
-              <a:t>🔥</a:t>
-            </a:r>
-          </a:p>
-        </p:txBody>
-      </p:sp>
-      <p:sp>
-        <p:nvSpPr>
-          <p:cNvPr id="25" name="TextBox 24"/>
-          <p:cNvSpPr txBox="1"/>
-          <p:nvPr/>
-        </p:nvSpPr>
-        <p:spPr>
-          <a:xfrm>
-            <a:off x="960120" y="4242816"/>
-            <a:ext cx="4723644" cy="777240"/>
-          </a:xfrm>
-          <a:prstGeom prst="rect">
-            <a:avLst/>
-          </a:prstGeom>
-          <a:noFill/>
-        </p:spPr>
-        <p:txBody>
-          <a:bodyPr wrap="square" anchor="ctr" lIns="36000" rIns="36000" tIns="18000" bIns="18000">
-            <a:spAutoFit/>
-          </a:bodyPr>
-          <a:lstStyle/>
-          <a:p>
-            <a:pPr algn="l"/>
-            <a:r>
-              <a:rPr sz="1300" b="1" i="0">
-                <a:solidFill>
-                  <a:srgbClr val="1E293B"/>
-                </a:solidFill>
-                <a:latin typeface="Noto Sans JP"/>
-              </a:rPr>
-              <a:t>火炎接触初期にMCがゲル化 → CSPを固定したまま発泡構造を維持</a:t>
-            </a:r>
-          </a:p>
-        </p:txBody>
-      </p:sp>
-      <p:sp>
-        <p:nvSpPr>
-          <p:cNvPr id="26" name="Rounded Rectangle 25"/>
+              <a:t>LCST</a:t>
+            </a:r>
+          </a:p>
+        </p:txBody>
+      </p:sp>
+      <p:sp>
+        <p:nvSpPr>
+          <p:cNvPr id="17" name="TextBox 16"/>
+          <p:cNvSpPr txBox="1"/>
+          <p:nvPr/>
+        </p:nvSpPr>
+        <p:spPr>
+          <a:xfrm>
+            <a:off x="1207008" y="3675888"/>
+            <a:ext cx="4568196" cy="274320"/>
+          </a:xfrm>
+          <a:prstGeom prst="rect">
+            <a:avLst/>
+          </a:prstGeom>
+          <a:noFill/>
+        </p:spPr>
+        <p:txBody>
+          <a:bodyPr wrap="square" anchor="t" lIns="36000" rIns="36000" tIns="18000" bIns="18000">
+            <a:spAutoFit/>
+          </a:bodyPr>
+          <a:lstStyle/>
+          <a:p>
+            <a:pPr algn="l"/>
+            <a:r>
+              <a:rPr sz="1200" b="0" i="0">
+                <a:solidFill>
+                  <a:srgbClr val="334155"/>
+                </a:solidFill>
+                <a:latin typeface="Noto Sans JP"/>
+              </a:rPr>
+              <a:t>~55°C でゲル化開始（1 wt% 水溶液）</a:t>
+            </a:r>
+          </a:p>
+        </p:txBody>
+      </p:sp>
+      <p:sp>
+        <p:nvSpPr>
+          <p:cNvPr id="18" name="TextBox 17"/>
+          <p:cNvSpPr txBox="1"/>
+          <p:nvPr/>
+        </p:nvSpPr>
+        <p:spPr>
+          <a:xfrm>
+            <a:off x="365760" y="4041648"/>
+            <a:ext cx="804672" cy="274320"/>
+          </a:xfrm>
+          <a:prstGeom prst="rect">
+            <a:avLst/>
+          </a:prstGeom>
+          <a:noFill/>
+        </p:spPr>
+        <p:txBody>
+          <a:bodyPr wrap="square" anchor="t" lIns="36000" rIns="36000" tIns="18000" bIns="18000">
+            <a:spAutoFit/>
+          </a:bodyPr>
+          <a:lstStyle/>
+          <a:p>
+            <a:pPr algn="l"/>
+            <a:r>
+              <a:rPr sz="1000" b="1" i="0">
+                <a:solidFill>
+                  <a:srgbClr val="3B5174"/>
+                </a:solidFill>
+                <a:latin typeface="Noto Sans JP"/>
+              </a:rPr>
+              <a:t>熱分解</a:t>
+            </a:r>
+          </a:p>
+        </p:txBody>
+      </p:sp>
+      <p:sp>
+        <p:nvSpPr>
+          <p:cNvPr id="19" name="TextBox 18"/>
+          <p:cNvSpPr txBox="1"/>
+          <p:nvPr/>
+        </p:nvSpPr>
+        <p:spPr>
+          <a:xfrm>
+            <a:off x="1207008" y="4041648"/>
+            <a:ext cx="4568196" cy="274320"/>
+          </a:xfrm>
+          <a:prstGeom prst="rect">
+            <a:avLst/>
+          </a:prstGeom>
+          <a:noFill/>
+        </p:spPr>
+        <p:txBody>
+          <a:bodyPr wrap="square" anchor="t" lIns="36000" rIns="36000" tIns="18000" bIns="18000">
+            <a:spAutoFit/>
+          </a:bodyPr>
+          <a:lstStyle/>
+          <a:p>
+            <a:pPr algn="l"/>
+            <a:r>
+              <a:rPr sz="1200" b="0" i="0">
+                <a:solidFill>
+                  <a:srgbClr val="334155"/>
+                </a:solidFill>
+                <a:latin typeface="Noto Sans JP"/>
+              </a:rPr>
+              <a:t>~300°C で有機成分が分解</a:t>
+            </a:r>
+          </a:p>
+        </p:txBody>
+      </p:sp>
+      <p:sp>
+        <p:nvSpPr>
+          <p:cNvPr id="20" name="TextBox 19"/>
+          <p:cNvSpPr txBox="1"/>
+          <p:nvPr/>
+        </p:nvSpPr>
+        <p:spPr>
+          <a:xfrm>
+            <a:off x="365760" y="4407408"/>
+            <a:ext cx="804672" cy="274320"/>
+          </a:xfrm>
+          <a:prstGeom prst="rect">
+            <a:avLst/>
+          </a:prstGeom>
+          <a:noFill/>
+        </p:spPr>
+        <p:txBody>
+          <a:bodyPr wrap="square" anchor="t" lIns="36000" rIns="36000" tIns="18000" bIns="18000">
+            <a:spAutoFit/>
+          </a:bodyPr>
+          <a:lstStyle/>
+          <a:p>
+            <a:pPr algn="l"/>
+            <a:r>
+              <a:rPr sz="1000" b="1" i="0">
+                <a:solidFill>
+                  <a:srgbClr val="3B5174"/>
+                </a:solidFill>
+                <a:latin typeface="Noto Sans JP"/>
+              </a:rPr>
+              <a:t>設計意図</a:t>
+            </a:r>
+          </a:p>
+        </p:txBody>
+      </p:sp>
+      <p:sp>
+        <p:nvSpPr>
+          <p:cNvPr id="21" name="TextBox 20"/>
+          <p:cNvSpPr txBox="1"/>
+          <p:nvPr/>
+        </p:nvSpPr>
+        <p:spPr>
+          <a:xfrm>
+            <a:off x="1207008" y="4407408"/>
+            <a:ext cx="4568196" cy="274320"/>
+          </a:xfrm>
+          <a:prstGeom prst="rect">
+            <a:avLst/>
+          </a:prstGeom>
+          <a:noFill/>
+        </p:spPr>
+        <p:txBody>
+          <a:bodyPr wrap="square" anchor="t" lIns="36000" rIns="36000" tIns="18000" bIns="18000">
+            <a:spAutoFit/>
+          </a:bodyPr>
+          <a:lstStyle/>
+          <a:p>
+            <a:pPr algn="l"/>
+            <a:r>
+              <a:rPr sz="1200" b="0" i="0">
+                <a:solidFill>
+                  <a:srgbClr val="334155"/>
+                </a:solidFill>
+                <a:latin typeface="Noto Sans JP"/>
+              </a:rPr>
+              <a:t>常温では液体、火炎接触で即ゲル → CSPを固定</a:t>
+            </a:r>
+          </a:p>
+        </p:txBody>
+      </p:sp>
+      <p:sp>
+        <p:nvSpPr>
+          <p:cNvPr id="22" name="Rounded Rectangle 21"/>
           <p:cNvSpPr/>
           <p:nvPr/>
         </p:nvSpPr>
@@ -4577,7 +4426,7 @@
       </p:sp>
       <p:sp>
         <p:nvSpPr>
-          <p:cNvPr id="27" name="TextBox 26"/>
+          <p:cNvPr id="23" name="TextBox 22"/>
           <p:cNvSpPr txBox="1"/>
           <p:nvPr/>
         </p:nvSpPr>
@@ -4612,7 +4461,7 @@
       </p:sp>
       <p:sp>
         <p:nvSpPr>
-          <p:cNvPr id="28" name="TextBox 27"/>
+          <p:cNvPr id="24" name="TextBox 23"/>
           <p:cNvSpPr txBox="1"/>
           <p:nvPr/>
         </p:nvSpPr>
@@ -4647,7 +4496,7 @@
       </p:sp>
       <p:sp>
         <p:nvSpPr>
-          <p:cNvPr id="29" name="TextBox 28"/>
+          <p:cNvPr id="25" name="TextBox 24"/>
           <p:cNvSpPr txBox="1"/>
           <p:nvPr/>
         </p:nvSpPr>
@@ -4682,7 +4531,7 @@
       </p:sp>
       <p:sp>
         <p:nvSpPr>
-          <p:cNvPr id="30" name="Rounded Rectangle 29"/>
+          <p:cNvPr id="26" name="Rounded Rectangle 25"/>
           <p:cNvSpPr/>
           <p:nvPr/>
         </p:nvSpPr>
@@ -4730,7 +4579,7 @@
       </p:sp>
       <p:sp>
         <p:nvSpPr>
-          <p:cNvPr id="31" name="TextBox 30"/>
+          <p:cNvPr id="27" name="TextBox 26"/>
           <p:cNvSpPr txBox="1"/>
           <p:nvPr/>
         </p:nvSpPr>
@@ -4765,7 +4614,7 @@
       </p:sp>
       <p:sp>
         <p:nvSpPr>
-          <p:cNvPr id="32" name="TextBox 31"/>
+          <p:cNvPr id="28" name="TextBox 27"/>
           <p:cNvSpPr txBox="1"/>
           <p:nvPr/>
         </p:nvSpPr>
@@ -4800,7 +4649,7 @@
       </p:sp>
       <p:sp>
         <p:nvSpPr>
-          <p:cNvPr id="33" name="TextBox 32"/>
+          <p:cNvPr id="29" name="TextBox 28"/>
           <p:cNvSpPr txBox="1"/>
           <p:nvPr/>
         </p:nvSpPr>
@@ -4835,7 +4684,7 @@
       </p:sp>
       <p:sp>
         <p:nvSpPr>
-          <p:cNvPr id="34" name="Rounded Rectangle 33"/>
+          <p:cNvPr id="30" name="Rounded Rectangle 29"/>
           <p:cNvSpPr/>
           <p:nvPr/>
         </p:nvSpPr>
@@ -4883,7 +4732,7 @@
       </p:sp>
       <p:sp>
         <p:nvSpPr>
-          <p:cNvPr id="35" name="TextBox 34"/>
+          <p:cNvPr id="31" name="TextBox 30"/>
           <p:cNvSpPr txBox="1"/>
           <p:nvPr/>
         </p:nvSpPr>
@@ -4918,7 +4767,7 @@
       </p:sp>
       <p:sp>
         <p:nvSpPr>
-          <p:cNvPr id="36" name="TextBox 35"/>
+          <p:cNvPr id="32" name="TextBox 31"/>
           <p:cNvSpPr txBox="1"/>
           <p:nvPr/>
         </p:nvSpPr>
@@ -4953,7 +4802,7 @@
       </p:sp>
       <p:sp>
         <p:nvSpPr>
-          <p:cNvPr id="37" name="TextBox 36"/>
+          <p:cNvPr id="33" name="TextBox 32"/>
           <p:cNvSpPr txBox="1"/>
           <p:nvPr/>
         </p:nvSpPr>
@@ -4988,7 +4837,7 @@
       </p:sp>
       <p:sp>
         <p:nvSpPr>
-          <p:cNvPr id="38" name="Rounded Rectangle 37"/>
+          <p:cNvPr id="34" name="Rounded Rectangle 33"/>
           <p:cNvSpPr/>
           <p:nvPr/>
         </p:nvSpPr>
@@ -5034,7 +4883,7 @@
       </p:sp>
       <p:sp>
         <p:nvSpPr>
-          <p:cNvPr id="39" name="TextBox 38"/>
+          <p:cNvPr id="35" name="TextBox 34"/>
           <p:cNvSpPr txBox="1"/>
           <p:nvPr/>
         </p:nvSpPr>
@@ -5069,7 +4918,7 @@
       </p:sp>
       <p:sp>
         <p:nvSpPr>
-          <p:cNvPr id="40" name="Rounded Rectangle 39"/>
+          <p:cNvPr id="36" name="Rounded Rectangle 35"/>
           <p:cNvSpPr/>
           <p:nvPr/>
         </p:nvSpPr>
@@ -5115,7 +4964,7 @@
       </p:sp>
       <p:sp>
         <p:nvSpPr>
-          <p:cNvPr id="41" name="TextBox 40"/>
+          <p:cNvPr id="37" name="TextBox 36"/>
           <p:cNvSpPr txBox="1"/>
           <p:nvPr/>
         </p:nvSpPr>
@@ -5150,7 +4999,7 @@
       </p:sp>
       <p:sp>
         <p:nvSpPr>
-          <p:cNvPr id="42" name="TextBox 41"/>
+          <p:cNvPr id="38" name="TextBox 37"/>
           <p:cNvSpPr txBox="1"/>
           <p:nvPr/>
         </p:nvSpPr>
@@ -5185,7 +5034,7 @@
       </p:sp>
       <p:sp>
         <p:nvSpPr>
-          <p:cNvPr id="43" name="TextBox 42"/>
+          <p:cNvPr id="39" name="TextBox 38"/>
           <p:cNvSpPr txBox="1"/>
           <p:nvPr/>
         </p:nvSpPr>
@@ -5220,7 +5069,7 @@
       </p:sp>
       <p:sp>
         <p:nvSpPr>
-          <p:cNvPr id="44" name="TextBox 43"/>
+          <p:cNvPr id="40" name="TextBox 39"/>
           <p:cNvSpPr txBox="1"/>
           <p:nvPr/>
         </p:nvSpPr>
@@ -5255,7 +5104,7 @@
       </p:sp>
       <p:sp>
         <p:nvSpPr>
-          <p:cNvPr id="45" name="Rounded Rectangle 44"/>
+          <p:cNvPr id="41" name="Rounded Rectangle 40"/>
           <p:cNvSpPr/>
           <p:nvPr/>
         </p:nvSpPr>
@@ -5301,7 +5150,7 @@
       </p:sp>
       <p:sp>
         <p:nvSpPr>
-          <p:cNvPr id="46" name="TextBox 45"/>
+          <p:cNvPr id="42" name="TextBox 41"/>
           <p:cNvSpPr txBox="1"/>
           <p:nvPr/>
         </p:nvSpPr>
@@ -5336,7 +5185,7 @@
       </p:sp>
       <p:sp>
         <p:nvSpPr>
-          <p:cNvPr id="47" name="TextBox 46"/>
+          <p:cNvPr id="43" name="TextBox 42"/>
           <p:cNvSpPr txBox="1"/>
           <p:nvPr/>
         </p:nvSpPr>
@@ -5371,7 +5220,7 @@
       </p:sp>
       <p:sp>
         <p:nvSpPr>
-          <p:cNvPr id="48" name="TextBox 47"/>
+          <p:cNvPr id="44" name="TextBox 43"/>
           <p:cNvSpPr txBox="1"/>
           <p:nvPr/>
         </p:nvSpPr>
@@ -5406,7 +5255,7 @@
       </p:sp>
       <p:sp>
         <p:nvSpPr>
-          <p:cNvPr id="49" name="TextBox 48"/>
+          <p:cNvPr id="45" name="TextBox 44"/>
           <p:cNvSpPr txBox="1"/>
           <p:nvPr/>
         </p:nvSpPr>
@@ -5441,7 +5290,7 @@
       </p:sp>
       <p:sp>
         <p:nvSpPr>
-          <p:cNvPr id="50" name="Rounded Rectangle 49"/>
+          <p:cNvPr id="46" name="Rounded Rectangle 45"/>
           <p:cNvSpPr/>
           <p:nvPr/>
         </p:nvSpPr>
@@ -5487,7 +5336,7 @@
       </p:sp>
       <p:sp>
         <p:nvSpPr>
-          <p:cNvPr id="51" name="TextBox 50"/>
+          <p:cNvPr id="47" name="TextBox 46"/>
           <p:cNvSpPr txBox="1"/>
           <p:nvPr/>
         </p:nvSpPr>
@@ -5522,7 +5371,7 @@
       </p:sp>
       <p:sp>
         <p:nvSpPr>
-          <p:cNvPr id="52" name="TextBox 51"/>
+          <p:cNvPr id="48" name="TextBox 47"/>
           <p:cNvSpPr txBox="1"/>
           <p:nvPr/>
         </p:nvSpPr>
@@ -5557,7 +5406,7 @@
       </p:sp>
       <p:sp>
         <p:nvSpPr>
-          <p:cNvPr id="53" name="TextBox 52"/>
+          <p:cNvPr id="49" name="TextBox 48"/>
           <p:cNvSpPr txBox="1"/>
           <p:nvPr/>
         </p:nvSpPr>
@@ -5592,7 +5441,7 @@
       </p:sp>
       <p:sp>
         <p:nvSpPr>
-          <p:cNvPr id="54" name="TextBox 53"/>
+          <p:cNvPr id="50" name="TextBox 49"/>
           <p:cNvSpPr txBox="1"/>
           <p:nvPr/>
         </p:nvSpPr>
@@ -5627,7 +5476,7 @@
       </p:sp>
       <p:sp>
         <p:nvSpPr>
-          <p:cNvPr id="55" name="Rounded Rectangle 54"/>
+          <p:cNvPr id="51" name="Rounded Rectangle 50"/>
           <p:cNvSpPr/>
           <p:nvPr/>
         </p:nvSpPr>
@@ -5673,7 +5522,7 @@
       </p:sp>
       <p:sp>
         <p:nvSpPr>
-          <p:cNvPr id="56" name="TextBox 55"/>
+          <p:cNvPr id="52" name="TextBox 51"/>
           <p:cNvSpPr txBox="1"/>
           <p:nvPr/>
         </p:nvSpPr>
@@ -5708,7 +5557,7 @@
       </p:sp>
       <p:sp>
         <p:nvSpPr>
-          <p:cNvPr id="57" name="TextBox 56"/>
+          <p:cNvPr id="53" name="TextBox 52"/>
           <p:cNvSpPr txBox="1"/>
           <p:nvPr/>
         </p:nvSpPr>
@@ -5743,7 +5592,7 @@
       </p:sp>
       <p:sp>
         <p:nvSpPr>
-          <p:cNvPr id="58" name="TextBox 57"/>
+          <p:cNvPr id="54" name="TextBox 53"/>
           <p:cNvSpPr txBox="1"/>
           <p:nvPr/>
         </p:nvSpPr>
@@ -6128,19 +5977,19 @@
         <p:spPr>
           <a:xfrm>
             <a:off x="365760" y="859536"/>
-            <a:ext cx="5647791" cy="3840480"/>
+            <a:ext cx="5647791" cy="2194560"/>
           </a:xfrm>
           <a:prstGeom prst="roundRect">
             <a:avLst>
-              <a:gd name="adj" fmla="val 4000"/>
+              <a:gd name="adj" fmla="val 2000"/>
             </a:avLst>
           </a:prstGeom>
           <a:solidFill>
-            <a:srgbClr val="F1F5F9"/>
+            <a:srgbClr val="F5F8FC"/>
           </a:solidFill>
-          <a:ln w="6350">
+          <a:ln w="12700">
             <a:solidFill>
-              <a:srgbClr val="E2E8F0"/>
+              <a:srgbClr val="C0D0E0"/>
             </a:solidFill>
           </a:ln>
           <a:effectLst/>
@@ -6175,8 +6024,1030 @@
         </p:nvSpPr>
         <p:spPr>
           <a:xfrm>
+            <a:off x="475488" y="969264"/>
+            <a:ext cx="868680" cy="292608"/>
+          </a:xfrm>
+          <a:prstGeom prst="rect">
+            <a:avLst/>
+          </a:prstGeom>
+          <a:solidFill>
+            <a:srgbClr val="1E293B"/>
+          </a:solidFill>
+          <a:ln>
+            <a:noFill/>
+          </a:ln>
+          <a:effectLst/>
+        </p:spPr>
+        <p:style>
+          <a:lnRef idx="1">
+            <a:schemeClr val="accent1"/>
+          </a:lnRef>
+          <a:fillRef idx="3">
+            <a:schemeClr val="accent1"/>
+          </a:fillRef>
+          <a:effectRef idx="2">
+            <a:schemeClr val="accent1"/>
+          </a:effectRef>
+          <a:fontRef idx="minor">
+            <a:schemeClr val="lt1"/>
+          </a:fontRef>
+        </p:style>
+        <p:txBody>
+          <a:bodyPr rtlCol="0" anchor="ctr"/>
+          <a:lstStyle/>
+          <a:p>
+            <a:pPr algn="ctr"/>
+          </a:p>
+        </p:txBody>
+      </p:sp>
+      <p:sp>
+        <p:nvSpPr>
+          <p:cNvPr id="12" name="TextBox 11"/>
+          <p:cNvSpPr txBox="1"/>
+          <p:nvPr/>
+        </p:nvSpPr>
+        <p:spPr>
+          <a:xfrm>
+            <a:off x="475488" y="969264"/>
+            <a:ext cx="868680" cy="292608"/>
+          </a:xfrm>
+          <a:prstGeom prst="rect">
+            <a:avLst/>
+          </a:prstGeom>
+          <a:noFill/>
+        </p:spPr>
+        <p:txBody>
+          <a:bodyPr wrap="square" anchor="ctr" lIns="36000" rIns="36000" tIns="18000" bIns="18000">
+            <a:spAutoFit/>
+          </a:bodyPr>
+          <a:lstStyle/>
+          <a:p>
+            <a:pPr algn="ctr"/>
+            <a:r>
+              <a:rPr sz="1100" b="1" i="0">
+                <a:solidFill>
+                  <a:srgbClr val="FFFFFF"/>
+                </a:solidFill>
+                <a:latin typeface="Noto Sans JP"/>
+              </a:rPr>
+              <a:t>TEM</a:t>
+            </a:r>
+          </a:p>
+        </p:txBody>
+      </p:sp>
+      <p:sp>
+        <p:nvSpPr>
+          <p:cNvPr id="13" name="TextBox 12"/>
+          <p:cNvSpPr txBox="1"/>
+          <p:nvPr/>
+        </p:nvSpPr>
+        <p:spPr>
+          <a:xfrm>
             <a:off x="365760" y="859536"/>
-            <a:ext cx="5647791" cy="36576"/>
+            <a:ext cx="5647791" cy="2194560"/>
+          </a:xfrm>
+          <a:prstGeom prst="rect">
+            <a:avLst/>
+          </a:prstGeom>
+          <a:noFill/>
+        </p:spPr>
+        <p:txBody>
+          <a:bodyPr wrap="square" anchor="ctr" lIns="36000" rIns="36000" tIns="18000" bIns="18000">
+            <a:spAutoFit/>
+          </a:bodyPr>
+          <a:lstStyle/>
+          <a:p>
+            <a:pPr algn="ctr"/>
+            <a:r>
+              <a:rPr sz="1200" b="0" i="0">
+                <a:solidFill>
+                  <a:srgbClr val="AAB4C0"/>
+                </a:solidFill>
+                <a:latin typeface="Noto Sans JP"/>
+              </a:rPr>
+              <a:t>（論文の図を貼り付け）</a:t>
+            </a:r>
+          </a:p>
+        </p:txBody>
+      </p:sp>
+      <p:sp>
+        <p:nvSpPr>
+          <p:cNvPr id="14" name="TextBox 13"/>
+          <p:cNvSpPr txBox="1"/>
+          <p:nvPr/>
+        </p:nvSpPr>
+        <p:spPr>
+          <a:xfrm>
+            <a:off x="365760" y="3090672"/>
+            <a:ext cx="5647791" cy="274320"/>
+          </a:xfrm>
+          <a:prstGeom prst="rect">
+            <a:avLst/>
+          </a:prstGeom>
+          <a:noFill/>
+        </p:spPr>
+        <p:txBody>
+          <a:bodyPr wrap="square" anchor="t" lIns="36000" rIns="36000" tIns="18000" bIns="18000">
+            <a:spAutoFit/>
+          </a:bodyPr>
+          <a:lstStyle/>
+          <a:p>
+            <a:pPr algn="ctr"/>
+            <a:r>
+              <a:rPr sz="1000" b="0" i="1">
+                <a:solidFill>
+                  <a:srgbClr val="64748B"/>
+                </a:solidFill>
+                <a:latin typeface="Noto Sans JP"/>
+              </a:rPr>
+              <a:t>CSP粒子（22 nm、単分散）</a:t>
+            </a:r>
+          </a:p>
+        </p:txBody>
+      </p:sp>
+      <p:sp>
+        <p:nvSpPr>
+          <p:cNvPr id="15" name="TextBox 14"/>
+          <p:cNvSpPr txBox="1"/>
+          <p:nvPr/>
+        </p:nvSpPr>
+        <p:spPr>
+          <a:xfrm>
+            <a:off x="365760" y="3218688"/>
+            <a:ext cx="5647791" cy="310896"/>
+          </a:xfrm>
+          <a:prstGeom prst="rect">
+            <a:avLst/>
+          </a:prstGeom>
+          <a:noFill/>
+        </p:spPr>
+        <p:txBody>
+          <a:bodyPr wrap="square" anchor="t" lIns="36000" rIns="36000" tIns="18000" bIns="18000">
+            <a:spAutoFit/>
+          </a:bodyPr>
+          <a:lstStyle/>
+          <a:p>
+            <a:pPr algn="l"/>
+            <a:r>
+              <a:rPr sz="1400" b="1" i="0">
+                <a:solidFill>
+                  <a:srgbClr val="1E293B"/>
+                </a:solidFill>
+                <a:latin typeface="Noto Sans JP"/>
+              </a:rPr>
+              <a:t>CSP — Colloidal Silica Particles</a:t>
+            </a:r>
+          </a:p>
+        </p:txBody>
+      </p:sp>
+      <p:sp>
+        <p:nvSpPr>
+          <p:cNvPr id="16" name="TextBox 15"/>
+          <p:cNvSpPr txBox="1"/>
+          <p:nvPr/>
+        </p:nvSpPr>
+        <p:spPr>
+          <a:xfrm>
+            <a:off x="365760" y="3566160"/>
+            <a:ext cx="182880" cy="256032"/>
+          </a:xfrm>
+          <a:prstGeom prst="rect">
+            <a:avLst/>
+          </a:prstGeom>
+          <a:noFill/>
+        </p:spPr>
+        <p:txBody>
+          <a:bodyPr wrap="square" anchor="t" lIns="36000" rIns="36000" tIns="18000" bIns="18000">
+            <a:spAutoFit/>
+          </a:bodyPr>
+          <a:lstStyle/>
+          <a:p>
+            <a:pPr algn="l"/>
+            <a:r>
+              <a:rPr sz="1200" b="0" i="0">
+                <a:solidFill>
+                  <a:srgbClr val="3B5174"/>
+                </a:solidFill>
+                <a:latin typeface="Noto Sans JP"/>
+              </a:rPr>
+              <a:t>•</a:t>
+            </a:r>
+          </a:p>
+        </p:txBody>
+      </p:sp>
+      <p:sp>
+        <p:nvSpPr>
+          <p:cNvPr id="17" name="TextBox 16"/>
+          <p:cNvSpPr txBox="1"/>
+          <p:nvPr/>
+        </p:nvSpPr>
+        <p:spPr>
+          <a:xfrm>
+            <a:off x="566928" y="3566160"/>
+            <a:ext cx="5446623" cy="256032"/>
+          </a:xfrm>
+          <a:prstGeom prst="rect">
+            <a:avLst/>
+          </a:prstGeom>
+          <a:noFill/>
+        </p:spPr>
+        <p:txBody>
+          <a:bodyPr wrap="square" anchor="t" lIns="36000" rIns="36000" tIns="18000" bIns="18000">
+            <a:spAutoFit/>
+          </a:bodyPr>
+          <a:lstStyle/>
+          <a:p>
+            <a:pPr algn="l"/>
+            <a:r>
+              <a:rPr sz="1200" b="0" i="0">
+                <a:solidFill>
+                  <a:srgbClr val="334155"/>
+                </a:solidFill>
+                <a:latin typeface="Noto Sans JP"/>
+              </a:rPr>
+              <a:t>LUDOX TM-50（原液 50 wt%）→ 15 wt%に希釈（pH 9）</a:t>
+            </a:r>
+          </a:p>
+        </p:txBody>
+      </p:sp>
+      <p:sp>
+        <p:nvSpPr>
+          <p:cNvPr id="18" name="TextBox 17"/>
+          <p:cNvSpPr txBox="1"/>
+          <p:nvPr/>
+        </p:nvSpPr>
+        <p:spPr>
+          <a:xfrm>
+            <a:off x="365760" y="3877056"/>
+            <a:ext cx="182880" cy="256032"/>
+          </a:xfrm>
+          <a:prstGeom prst="rect">
+            <a:avLst/>
+          </a:prstGeom>
+          <a:noFill/>
+        </p:spPr>
+        <p:txBody>
+          <a:bodyPr wrap="square" anchor="t" lIns="36000" rIns="36000" tIns="18000" bIns="18000">
+            <a:spAutoFit/>
+          </a:bodyPr>
+          <a:lstStyle/>
+          <a:p>
+            <a:pPr algn="l"/>
+            <a:r>
+              <a:rPr sz="1200" b="0" i="0">
+                <a:solidFill>
+                  <a:srgbClr val="3B5174"/>
+                </a:solidFill>
+                <a:latin typeface="Noto Sans JP"/>
+              </a:rPr>
+              <a:t>•</a:t>
+            </a:r>
+          </a:p>
+        </p:txBody>
+      </p:sp>
+      <p:sp>
+        <p:nvSpPr>
+          <p:cNvPr id="19" name="TextBox 18"/>
+          <p:cNvSpPr txBox="1"/>
+          <p:nvPr/>
+        </p:nvSpPr>
+        <p:spPr>
+          <a:xfrm>
+            <a:off x="566928" y="3877056"/>
+            <a:ext cx="5446623" cy="256032"/>
+          </a:xfrm>
+          <a:prstGeom prst="rect">
+            <a:avLst/>
+          </a:prstGeom>
+          <a:noFill/>
+        </p:spPr>
+        <p:txBody>
+          <a:bodyPr wrap="square" anchor="t" lIns="36000" rIns="36000" tIns="18000" bIns="18000">
+            <a:spAutoFit/>
+          </a:bodyPr>
+          <a:lstStyle/>
+          <a:p>
+            <a:pPr algn="l"/>
+            <a:r>
+              <a:rPr sz="1200" b="0" i="0">
+                <a:solidFill>
+                  <a:srgbClr val="334155"/>
+                </a:solidFill>
+                <a:latin typeface="Noto Sans JP"/>
+              </a:rPr>
+              <a:t>粒子サイズ：22 nm（単分散）</a:t>
+            </a:r>
+          </a:p>
+        </p:txBody>
+      </p:sp>
+      <p:sp>
+        <p:nvSpPr>
+          <p:cNvPr id="20" name="TextBox 19"/>
+          <p:cNvSpPr txBox="1"/>
+          <p:nvPr/>
+        </p:nvSpPr>
+        <p:spPr>
+          <a:xfrm>
+            <a:off x="365760" y="4187952"/>
+            <a:ext cx="182880" cy="256032"/>
+          </a:xfrm>
+          <a:prstGeom prst="rect">
+            <a:avLst/>
+          </a:prstGeom>
+          <a:noFill/>
+        </p:spPr>
+        <p:txBody>
+          <a:bodyPr wrap="square" anchor="t" lIns="36000" rIns="36000" tIns="18000" bIns="18000">
+            <a:spAutoFit/>
+          </a:bodyPr>
+          <a:lstStyle/>
+          <a:p>
+            <a:pPr algn="l"/>
+            <a:r>
+              <a:rPr sz="1200" b="0" i="0">
+                <a:solidFill>
+                  <a:srgbClr val="3B5174"/>
+                </a:solidFill>
+                <a:latin typeface="Noto Sans JP"/>
+              </a:rPr>
+              <a:t>•</a:t>
+            </a:r>
+          </a:p>
+        </p:txBody>
+      </p:sp>
+      <p:sp>
+        <p:nvSpPr>
+          <p:cNvPr id="21" name="TextBox 20"/>
+          <p:cNvSpPr txBox="1"/>
+          <p:nvPr/>
+        </p:nvSpPr>
+        <p:spPr>
+          <a:xfrm>
+            <a:off x="566928" y="4187952"/>
+            <a:ext cx="5446623" cy="256032"/>
+          </a:xfrm>
+          <a:prstGeom prst="rect">
+            <a:avLst/>
+          </a:prstGeom>
+          <a:noFill/>
+        </p:spPr>
+        <p:txBody>
+          <a:bodyPr wrap="square" anchor="t" lIns="36000" rIns="36000" tIns="18000" bIns="18000">
+            <a:spAutoFit/>
+          </a:bodyPr>
+          <a:lstStyle/>
+          <a:p>
+            <a:pPr algn="l"/>
+            <a:r>
+              <a:rPr sz="1200" b="0" i="0">
+                <a:solidFill>
+                  <a:srgbClr val="334155"/>
+                </a:solidFill>
+                <a:latin typeface="Noto Sans JP"/>
+              </a:rPr>
+              <a:t>配合濃度：ゲル中 5 wt%</a:t>
+            </a:r>
+          </a:p>
+        </p:txBody>
+      </p:sp>
+      <p:sp>
+        <p:nvSpPr>
+          <p:cNvPr id="22" name="TextBox 21"/>
+          <p:cNvSpPr txBox="1"/>
+          <p:nvPr/>
+        </p:nvSpPr>
+        <p:spPr>
+          <a:xfrm>
+            <a:off x="365760" y="4498848"/>
+            <a:ext cx="182880" cy="256032"/>
+          </a:xfrm>
+          <a:prstGeom prst="rect">
+            <a:avLst/>
+          </a:prstGeom>
+          <a:noFill/>
+        </p:spPr>
+        <p:txBody>
+          <a:bodyPr wrap="square" anchor="t" lIns="36000" rIns="36000" tIns="18000" bIns="18000">
+            <a:spAutoFit/>
+          </a:bodyPr>
+          <a:lstStyle/>
+          <a:p>
+            <a:pPr algn="l"/>
+            <a:r>
+              <a:rPr sz="1200" b="0" i="0">
+                <a:solidFill>
+                  <a:srgbClr val="3B5174"/>
+                </a:solidFill>
+                <a:latin typeface="Noto Sans JP"/>
+              </a:rPr>
+              <a:t>•</a:t>
+            </a:r>
+          </a:p>
+        </p:txBody>
+      </p:sp>
+      <p:sp>
+        <p:nvSpPr>
+          <p:cNvPr id="23" name="TextBox 22"/>
+          <p:cNvSpPr txBox="1"/>
+          <p:nvPr/>
+        </p:nvSpPr>
+        <p:spPr>
+          <a:xfrm>
+            <a:off x="566928" y="4498848"/>
+            <a:ext cx="5446623" cy="256032"/>
+          </a:xfrm>
+          <a:prstGeom prst="rect">
+            <a:avLst/>
+          </a:prstGeom>
+          <a:noFill/>
+        </p:spPr>
+        <p:txBody>
+          <a:bodyPr wrap="square" anchor="t" lIns="36000" rIns="36000" tIns="18000" bIns="18000">
+            <a:spAutoFit/>
+          </a:bodyPr>
+          <a:lstStyle/>
+          <a:p>
+            <a:pPr algn="l"/>
+            <a:r>
+              <a:rPr sz="1200" b="0" i="0">
+                <a:solidFill>
+                  <a:srgbClr val="334155"/>
+                </a:solidFill>
+                <a:latin typeface="Noto Sans JP"/>
+              </a:rPr>
+              <a:t>加熱時に焼結 → silica aerogel に変態</a:t>
+            </a:r>
+          </a:p>
+        </p:txBody>
+      </p:sp>
+      <p:sp>
+        <p:nvSpPr>
+          <p:cNvPr id="24" name="Rounded Rectangle 23"/>
+          <p:cNvSpPr/>
+          <p:nvPr/>
+        </p:nvSpPr>
+        <p:spPr>
+          <a:xfrm>
+            <a:off x="6178143" y="859536"/>
+            <a:ext cx="5647791" cy="2194560"/>
+          </a:xfrm>
+          <a:prstGeom prst="roundRect">
+            <a:avLst>
+              <a:gd name="adj" fmla="val 2000"/>
+            </a:avLst>
+          </a:prstGeom>
+          <a:solidFill>
+            <a:srgbClr val="F5F8FC"/>
+          </a:solidFill>
+          <a:ln w="12700">
+            <a:solidFill>
+              <a:srgbClr val="C0D0E0"/>
+            </a:solidFill>
+          </a:ln>
+          <a:effectLst/>
+        </p:spPr>
+        <p:style>
+          <a:lnRef idx="1">
+            <a:schemeClr val="accent1"/>
+          </a:lnRef>
+          <a:fillRef idx="3">
+            <a:schemeClr val="accent1"/>
+          </a:fillRef>
+          <a:effectRef idx="2">
+            <a:schemeClr val="accent1"/>
+          </a:effectRef>
+          <a:fontRef idx="minor">
+            <a:schemeClr val="lt1"/>
+          </a:fontRef>
+        </p:style>
+        <p:txBody>
+          <a:bodyPr rtlCol="0" anchor="ctr"/>
+          <a:lstStyle/>
+          <a:p>
+            <a:pPr algn="ctr"/>
+          </a:p>
+        </p:txBody>
+      </p:sp>
+      <p:sp>
+        <p:nvSpPr>
+          <p:cNvPr id="25" name="Rectangle 24"/>
+          <p:cNvSpPr/>
+          <p:nvPr/>
+        </p:nvSpPr>
+        <p:spPr>
+          <a:xfrm>
+            <a:off x="6287871" y="969264"/>
+            <a:ext cx="868680" cy="292608"/>
+          </a:xfrm>
+          <a:prstGeom prst="rect">
+            <a:avLst/>
+          </a:prstGeom>
+          <a:solidFill>
+            <a:srgbClr val="1E293B"/>
+          </a:solidFill>
+          <a:ln>
+            <a:noFill/>
+          </a:ln>
+          <a:effectLst/>
+        </p:spPr>
+        <p:style>
+          <a:lnRef idx="1">
+            <a:schemeClr val="accent1"/>
+          </a:lnRef>
+          <a:fillRef idx="3">
+            <a:schemeClr val="accent1"/>
+          </a:fillRef>
+          <a:effectRef idx="2">
+            <a:schemeClr val="accent1"/>
+          </a:effectRef>
+          <a:fontRef idx="minor">
+            <a:schemeClr val="lt1"/>
+          </a:fontRef>
+        </p:style>
+        <p:txBody>
+          <a:bodyPr rtlCol="0" anchor="ctr"/>
+          <a:lstStyle/>
+          <a:p>
+            <a:pPr algn="ctr"/>
+          </a:p>
+        </p:txBody>
+      </p:sp>
+      <p:sp>
+        <p:nvSpPr>
+          <p:cNvPr id="26" name="TextBox 25"/>
+          <p:cNvSpPr txBox="1"/>
+          <p:nvPr/>
+        </p:nvSpPr>
+        <p:spPr>
+          <a:xfrm>
+            <a:off x="6287871" y="969264"/>
+            <a:ext cx="868680" cy="292608"/>
+          </a:xfrm>
+          <a:prstGeom prst="rect">
+            <a:avLst/>
+          </a:prstGeom>
+          <a:noFill/>
+        </p:spPr>
+        <p:txBody>
+          <a:bodyPr wrap="square" anchor="ctr" lIns="36000" rIns="36000" tIns="18000" bIns="18000">
+            <a:spAutoFit/>
+          </a:bodyPr>
+          <a:lstStyle/>
+          <a:p>
+            <a:pPr algn="ctr"/>
+            <a:r>
+              <a:rPr sz="1100" b="1" i="0">
+                <a:solidFill>
+                  <a:srgbClr val="FFFFFF"/>
+                </a:solidFill>
+                <a:latin typeface="Noto Sans JP"/>
+              </a:rPr>
+              <a:t>SEM</a:t>
+            </a:r>
+          </a:p>
+        </p:txBody>
+      </p:sp>
+      <p:sp>
+        <p:nvSpPr>
+          <p:cNvPr id="27" name="TextBox 26"/>
+          <p:cNvSpPr txBox="1"/>
+          <p:nvPr/>
+        </p:nvSpPr>
+        <p:spPr>
+          <a:xfrm>
+            <a:off x="6178143" y="859536"/>
+            <a:ext cx="5647791" cy="2194560"/>
+          </a:xfrm>
+          <a:prstGeom prst="rect">
+            <a:avLst/>
+          </a:prstGeom>
+          <a:noFill/>
+        </p:spPr>
+        <p:txBody>
+          <a:bodyPr wrap="square" anchor="ctr" lIns="36000" rIns="36000" tIns="18000" bIns="18000">
+            <a:spAutoFit/>
+          </a:bodyPr>
+          <a:lstStyle/>
+          <a:p>
+            <a:pPr algn="ctr"/>
+            <a:r>
+              <a:rPr sz="1200" b="0" i="0">
+                <a:solidFill>
+                  <a:srgbClr val="AAB4C0"/>
+                </a:solidFill>
+                <a:latin typeface="Noto Sans JP"/>
+              </a:rPr>
+              <a:t>（論文の図を貼り付け）</a:t>
+            </a:r>
+          </a:p>
+        </p:txBody>
+      </p:sp>
+      <p:sp>
+        <p:nvSpPr>
+          <p:cNvPr id="28" name="TextBox 27"/>
+          <p:cNvSpPr txBox="1"/>
+          <p:nvPr/>
+        </p:nvSpPr>
+        <p:spPr>
+          <a:xfrm>
+            <a:off x="6178143" y="3090672"/>
+            <a:ext cx="5647791" cy="274320"/>
+          </a:xfrm>
+          <a:prstGeom prst="rect">
+            <a:avLst/>
+          </a:prstGeom>
+          <a:noFill/>
+        </p:spPr>
+        <p:txBody>
+          <a:bodyPr wrap="square" anchor="t" lIns="36000" rIns="36000" tIns="18000" bIns="18000">
+            <a:spAutoFit/>
+          </a:bodyPr>
+          <a:lstStyle/>
+          <a:p>
+            <a:pPr algn="ctr"/>
+            <a:r>
+              <a:rPr sz="1000" b="0" i="1">
+                <a:solidFill>
+                  <a:srgbClr val="64748B"/>
+                </a:solidFill>
+                <a:latin typeface="Noto Sans JP"/>
+              </a:rPr>
+              <a:t>SDS添加量による発泡構造の変化</a:t>
+            </a:r>
+          </a:p>
+        </p:txBody>
+      </p:sp>
+      <p:sp>
+        <p:nvSpPr>
+          <p:cNvPr id="29" name="TextBox 28"/>
+          <p:cNvSpPr txBox="1"/>
+          <p:nvPr/>
+        </p:nvSpPr>
+        <p:spPr>
+          <a:xfrm>
+            <a:off x="6178143" y="3218688"/>
+            <a:ext cx="5647791" cy="310896"/>
+          </a:xfrm>
+          <a:prstGeom prst="rect">
+            <a:avLst/>
+          </a:prstGeom>
+          <a:noFill/>
+        </p:spPr>
+        <p:txBody>
+          <a:bodyPr wrap="square" anchor="t" lIns="36000" rIns="36000" tIns="18000" bIns="18000">
+            <a:spAutoFit/>
+          </a:bodyPr>
+          <a:lstStyle/>
+          <a:p>
+            <a:pPr algn="l"/>
+            <a:r>
+              <a:rPr sz="1400" b="1" i="0">
+                <a:solidFill>
+                  <a:srgbClr val="1E293B"/>
+                </a:solidFill>
+                <a:latin typeface="Noto Sans JP"/>
+              </a:rPr>
+              <a:t>SDS — Sodium Dodecyl Sulfate</a:t>
+            </a:r>
+          </a:p>
+        </p:txBody>
+      </p:sp>
+      <p:sp>
+        <p:nvSpPr>
+          <p:cNvPr id="30" name="TextBox 29"/>
+          <p:cNvSpPr txBox="1"/>
+          <p:nvPr/>
+        </p:nvSpPr>
+        <p:spPr>
+          <a:xfrm>
+            <a:off x="6178143" y="3566160"/>
+            <a:ext cx="182880" cy="256032"/>
+          </a:xfrm>
+          <a:prstGeom prst="rect">
+            <a:avLst/>
+          </a:prstGeom>
+          <a:noFill/>
+        </p:spPr>
+        <p:txBody>
+          <a:bodyPr wrap="square" anchor="t" lIns="36000" rIns="36000" tIns="18000" bIns="18000">
+            <a:spAutoFit/>
+          </a:bodyPr>
+          <a:lstStyle/>
+          <a:p>
+            <a:pPr algn="l"/>
+            <a:r>
+              <a:rPr sz="1200" b="0" i="0">
+                <a:solidFill>
+                  <a:srgbClr val="3B5174"/>
+                </a:solidFill>
+                <a:latin typeface="Noto Sans JP"/>
+              </a:rPr>
+              <a:t>•</a:t>
+            </a:r>
+          </a:p>
+        </p:txBody>
+      </p:sp>
+      <p:sp>
+        <p:nvSpPr>
+          <p:cNvPr id="31" name="TextBox 30"/>
+          <p:cNvSpPr txBox="1"/>
+          <p:nvPr/>
+        </p:nvSpPr>
+        <p:spPr>
+          <a:xfrm>
+            <a:off x="6379311" y="3566160"/>
+            <a:ext cx="5446623" cy="256032"/>
+          </a:xfrm>
+          <a:prstGeom prst="rect">
+            <a:avLst/>
+          </a:prstGeom>
+          <a:noFill/>
+        </p:spPr>
+        <p:txBody>
+          <a:bodyPr wrap="square" anchor="t" lIns="36000" rIns="36000" tIns="18000" bIns="18000">
+            <a:spAutoFit/>
+          </a:bodyPr>
+          <a:lstStyle/>
+          <a:p>
+            <a:pPr algn="l"/>
+            <a:r>
+              <a:rPr sz="1200" b="0" i="0">
+                <a:solidFill>
+                  <a:srgbClr val="334155"/>
+                </a:solidFill>
+                <a:latin typeface="Noto Sans JP"/>
+              </a:rPr>
+              <a:t>陰イオン性界面活性剤（添加剤）</a:t>
+            </a:r>
+          </a:p>
+        </p:txBody>
+      </p:sp>
+      <p:sp>
+        <p:nvSpPr>
+          <p:cNvPr id="32" name="TextBox 31"/>
+          <p:cNvSpPr txBox="1"/>
+          <p:nvPr/>
+        </p:nvSpPr>
+        <p:spPr>
+          <a:xfrm>
+            <a:off x="6178143" y="3877056"/>
+            <a:ext cx="182880" cy="256032"/>
+          </a:xfrm>
+          <a:prstGeom prst="rect">
+            <a:avLst/>
+          </a:prstGeom>
+          <a:noFill/>
+        </p:spPr>
+        <p:txBody>
+          <a:bodyPr wrap="square" anchor="t" lIns="36000" rIns="36000" tIns="18000" bIns="18000">
+            <a:spAutoFit/>
+          </a:bodyPr>
+          <a:lstStyle/>
+          <a:p>
+            <a:pPr algn="l"/>
+            <a:r>
+              <a:rPr sz="1200" b="0" i="0">
+                <a:solidFill>
+                  <a:srgbClr val="3B5174"/>
+                </a:solidFill>
+                <a:latin typeface="Noto Sans JP"/>
+              </a:rPr>
+              <a:t>•</a:t>
+            </a:r>
+          </a:p>
+        </p:txBody>
+      </p:sp>
+      <p:sp>
+        <p:nvSpPr>
+          <p:cNvPr id="33" name="TextBox 32"/>
+          <p:cNvSpPr txBox="1"/>
+          <p:nvPr/>
+        </p:nvSpPr>
+        <p:spPr>
+          <a:xfrm>
+            <a:off x="6379311" y="3877056"/>
+            <a:ext cx="5446623" cy="256032"/>
+          </a:xfrm>
+          <a:prstGeom prst="rect">
+            <a:avLst/>
+          </a:prstGeom>
+          <a:noFill/>
+        </p:spPr>
+        <p:txBody>
+          <a:bodyPr wrap="square" anchor="t" lIns="36000" rIns="36000" tIns="18000" bIns="18000">
+            <a:spAutoFit/>
+          </a:bodyPr>
+          <a:lstStyle/>
+          <a:p>
+            <a:pPr algn="l"/>
+            <a:r>
+              <a:rPr sz="1200" b="0" i="0">
+                <a:solidFill>
+                  <a:srgbClr val="334155"/>
+                </a:solidFill>
+                <a:latin typeface="Noto Sans JP"/>
+              </a:rPr>
+              <a:t>SDS添加でも Foaming Index は改善しなかった</a:t>
+            </a:r>
+          </a:p>
+        </p:txBody>
+      </p:sp>
+      <p:sp>
+        <p:nvSpPr>
+          <p:cNvPr id="34" name="TextBox 33"/>
+          <p:cNvSpPr txBox="1"/>
+          <p:nvPr/>
+        </p:nvSpPr>
+        <p:spPr>
+          <a:xfrm>
+            <a:off x="6178143" y="4187952"/>
+            <a:ext cx="182880" cy="256032"/>
+          </a:xfrm>
+          <a:prstGeom prst="rect">
+            <a:avLst/>
+          </a:prstGeom>
+          <a:noFill/>
+        </p:spPr>
+        <p:txBody>
+          <a:bodyPr wrap="square" anchor="t" lIns="36000" rIns="36000" tIns="18000" bIns="18000">
+            <a:spAutoFit/>
+          </a:bodyPr>
+          <a:lstStyle/>
+          <a:p>
+            <a:pPr algn="l"/>
+            <a:r>
+              <a:rPr sz="1200" b="0" i="0">
+                <a:solidFill>
+                  <a:srgbClr val="3B5174"/>
+                </a:solidFill>
+                <a:latin typeface="Noto Sans JP"/>
+              </a:rPr>
+              <a:t>•</a:t>
+            </a:r>
+          </a:p>
+        </p:txBody>
+      </p:sp>
+      <p:sp>
+        <p:nvSpPr>
+          <p:cNvPr id="35" name="TextBox 34"/>
+          <p:cNvSpPr txBox="1"/>
+          <p:nvPr/>
+        </p:nvSpPr>
+        <p:spPr>
+          <a:xfrm>
+            <a:off x="6379311" y="4187952"/>
+            <a:ext cx="5446623" cy="256032"/>
+          </a:xfrm>
+          <a:prstGeom prst="rect">
+            <a:avLst/>
+          </a:prstGeom>
+          <a:noFill/>
+        </p:spPr>
+        <p:txBody>
+          <a:bodyPr wrap="square" anchor="t" lIns="36000" rIns="36000" tIns="18000" bIns="18000">
+            <a:spAutoFit/>
+          </a:bodyPr>
+          <a:lstStyle/>
+          <a:p>
+            <a:pPr algn="l"/>
+            <a:r>
+              <a:rPr sz="1200" b="0" i="0">
+                <a:solidFill>
+                  <a:srgbClr val="334155"/>
+                </a:solidFill>
+                <a:latin typeface="Noto Sans JP"/>
+              </a:rPr>
+              <a:t>添加濃度：0.1 wt% ・ 0.5 wt% の2水準</a:t>
+            </a:r>
+          </a:p>
+        </p:txBody>
+      </p:sp>
+      <p:sp>
+        <p:nvSpPr>
+          <p:cNvPr id="36" name="TextBox 35"/>
+          <p:cNvSpPr txBox="1"/>
+          <p:nvPr/>
+        </p:nvSpPr>
+        <p:spPr>
+          <a:xfrm>
+            <a:off x="6178143" y="4498848"/>
+            <a:ext cx="182880" cy="256032"/>
+          </a:xfrm>
+          <a:prstGeom prst="rect">
+            <a:avLst/>
+          </a:prstGeom>
+          <a:noFill/>
+        </p:spPr>
+        <p:txBody>
+          <a:bodyPr wrap="square" anchor="t" lIns="36000" rIns="36000" tIns="18000" bIns="18000">
+            <a:spAutoFit/>
+          </a:bodyPr>
+          <a:lstStyle/>
+          <a:p>
+            <a:pPr algn="l"/>
+            <a:r>
+              <a:rPr sz="1200" b="0" i="0">
+                <a:solidFill>
+                  <a:srgbClr val="3B5174"/>
+                </a:solidFill>
+                <a:latin typeface="Noto Sans JP"/>
+              </a:rPr>
+              <a:t>•</a:t>
+            </a:r>
+          </a:p>
+        </p:txBody>
+      </p:sp>
+      <p:sp>
+        <p:nvSpPr>
+          <p:cNvPr id="37" name="TextBox 36"/>
+          <p:cNvSpPr txBox="1"/>
+          <p:nvPr/>
+        </p:nvSpPr>
+        <p:spPr>
+          <a:xfrm>
+            <a:off x="6379311" y="4498848"/>
+            <a:ext cx="5446623" cy="256032"/>
+          </a:xfrm>
+          <a:prstGeom prst="rect">
+            <a:avLst/>
+          </a:prstGeom>
+          <a:noFill/>
+        </p:spPr>
+        <p:txBody>
+          <a:bodyPr wrap="square" anchor="t" lIns="36000" rIns="36000" tIns="18000" bIns="18000">
+            <a:spAutoFit/>
+          </a:bodyPr>
+          <a:lstStyle/>
+          <a:p>
+            <a:pPr algn="l"/>
+            <a:r>
+              <a:rPr sz="1200" b="0" i="0">
+                <a:solidFill>
+                  <a:srgbClr val="334155"/>
+                </a:solidFill>
+                <a:latin typeface="Noto Sans JP"/>
+              </a:rPr>
+              <a:t>SDS量増加で気泡が粗大化（SEM確認）</a:t>
+            </a:r>
+          </a:p>
+        </p:txBody>
+      </p:sp>
+      <p:sp>
+        <p:nvSpPr>
+          <p:cNvPr id="38" name="Rounded Rectangle 37"/>
+          <p:cNvSpPr/>
+          <p:nvPr/>
+        </p:nvSpPr>
+        <p:spPr>
+          <a:xfrm>
+            <a:off x="365760" y="6053328"/>
+            <a:ext cx="11460175" cy="658368"/>
+          </a:xfrm>
+          <a:prstGeom prst="roundRect">
+            <a:avLst>
+              <a:gd name="adj" fmla="val 4000"/>
+            </a:avLst>
+          </a:prstGeom>
+          <a:solidFill>
+            <a:srgbClr val="F8FAFC"/>
+          </a:solidFill>
+          <a:ln>
+            <a:noFill/>
+          </a:ln>
+          <a:effectLst/>
+        </p:spPr>
+        <p:style>
+          <a:lnRef idx="1">
+            <a:schemeClr val="accent1"/>
+          </a:lnRef>
+          <a:fillRef idx="3">
+            <a:schemeClr val="accent1"/>
+          </a:fillRef>
+          <a:effectRef idx="2">
+            <a:schemeClr val="accent1"/>
+          </a:effectRef>
+          <a:fontRef idx="minor">
+            <a:schemeClr val="lt1"/>
+          </a:fontRef>
+        </p:style>
+        <p:txBody>
+          <a:bodyPr rtlCol="0" anchor="ctr"/>
+          <a:lstStyle/>
+          <a:p>
+            <a:pPr algn="ctr"/>
+          </a:p>
+        </p:txBody>
+      </p:sp>
+      <p:sp>
+        <p:nvSpPr>
+          <p:cNvPr id="39" name="Rectangle 38"/>
+          <p:cNvSpPr/>
+          <p:nvPr/>
+        </p:nvSpPr>
+        <p:spPr>
+          <a:xfrm>
+            <a:off x="365760" y="6053328"/>
+            <a:ext cx="54864" cy="658368"/>
           </a:xfrm>
           <a:prstGeom prst="rect">
             <a:avLst/>
@@ -6213,986 +7084,34 @@
       </p:sp>
       <p:sp>
         <p:nvSpPr>
-          <p:cNvPr id="12" name="TextBox 11"/>
-          <p:cNvSpPr txBox="1"/>
-          <p:nvPr/>
-        </p:nvSpPr>
-        <p:spPr>
-          <a:xfrm>
-            <a:off x="548640" y="1042416"/>
-            <a:ext cx="548640" cy="457200"/>
-          </a:xfrm>
-          <a:prstGeom prst="rect">
-            <a:avLst/>
-          </a:prstGeom>
-          <a:noFill/>
-        </p:spPr>
-        <p:txBody>
-          <a:bodyPr wrap="square" anchor="t" lIns="36000" rIns="36000" tIns="18000" bIns="18000">
-            <a:spAutoFit/>
-          </a:bodyPr>
-          <a:lstStyle/>
-          <a:p>
-            <a:pPr algn="l"/>
-            <a:r>
-              <a:rPr sz="2800" b="0" i="0">
+          <p:cNvPr id="40" name="TextBox 39"/>
+          <p:cNvSpPr txBox="1"/>
+          <p:nvPr/>
+        </p:nvSpPr>
+        <p:spPr>
+          <a:xfrm>
+            <a:off x="548640" y="6053328"/>
+            <a:ext cx="365760" cy="658368"/>
+          </a:xfrm>
+          <a:prstGeom prst="rect">
+            <a:avLst/>
+          </a:prstGeom>
+          <a:noFill/>
+        </p:spPr>
+        <p:txBody>
+          <a:bodyPr wrap="square" anchor="ctr" lIns="36000" rIns="36000" tIns="18000" bIns="18000">
+            <a:spAutoFit/>
+          </a:bodyPr>
+          <a:lstStyle/>
+          <a:p>
+            <a:pPr algn="l"/>
+            <a:r>
+              <a:rPr sz="1400" b="0" i="0">
                 <a:solidFill>
                   <a:srgbClr val="3B5174"/>
                 </a:solidFill>
                 <a:latin typeface="Noto Sans JP"/>
               </a:rPr>
-              <a:t>●</a:t>
-            </a:r>
-          </a:p>
-        </p:txBody>
-      </p:sp>
-      <p:sp>
-        <p:nvSpPr>
-          <p:cNvPr id="13" name="TextBox 12"/>
-          <p:cNvSpPr txBox="1"/>
-          <p:nvPr/>
-        </p:nvSpPr>
-        <p:spPr>
-          <a:xfrm>
-            <a:off x="1234440" y="1060704"/>
-            <a:ext cx="4641951" cy="274320"/>
-          </a:xfrm>
-          <a:prstGeom prst="rect">
-            <a:avLst/>
-          </a:prstGeom>
-          <a:noFill/>
-        </p:spPr>
-        <p:txBody>
-          <a:bodyPr wrap="square" anchor="t" lIns="36000" rIns="36000" tIns="18000" bIns="18000">
-            <a:spAutoFit/>
-          </a:bodyPr>
-          <a:lstStyle/>
-          <a:p>
-            <a:pPr algn="l"/>
-            <a:r>
-              <a:rPr sz="1100" b="1" i="0">
-                <a:solidFill>
-                  <a:srgbClr val="64748B"/>
-                </a:solidFill>
-                <a:latin typeface="Noto Sans JP"/>
-              </a:rPr>
-              <a:t>CSP</a:t>
-            </a:r>
-          </a:p>
-        </p:txBody>
-      </p:sp>
-      <p:sp>
-        <p:nvSpPr>
-          <p:cNvPr id="14" name="TextBox 13"/>
-          <p:cNvSpPr txBox="1"/>
-          <p:nvPr/>
-        </p:nvSpPr>
-        <p:spPr>
-          <a:xfrm>
-            <a:off x="1234440" y="1316736"/>
-            <a:ext cx="4641951" cy="457200"/>
-          </a:xfrm>
-          <a:prstGeom prst="rect">
-            <a:avLst/>
-          </a:prstGeom>
-          <a:noFill/>
-        </p:spPr>
-        <p:txBody>
-          <a:bodyPr wrap="square" anchor="t" lIns="36000" rIns="36000" tIns="18000" bIns="18000">
-            <a:spAutoFit/>
-          </a:bodyPr>
-          <a:lstStyle/>
-          <a:p>
-            <a:pPr algn="l"/>
-            <a:r>
-              <a:rPr sz="1800" b="1" i="0">
-                <a:solidFill>
-                  <a:srgbClr val="1E293B"/>
-                </a:solidFill>
-                <a:latin typeface="Noto Sans JP"/>
-              </a:rPr>
-              <a:t>Colloidal Silica Particles</a:t>
-            </a:r>
-          </a:p>
-        </p:txBody>
-      </p:sp>
-      <p:sp>
-        <p:nvSpPr>
-          <p:cNvPr id="15" name="TextBox 14"/>
-          <p:cNvSpPr txBox="1"/>
-          <p:nvPr/>
-        </p:nvSpPr>
-        <p:spPr>
-          <a:xfrm>
-            <a:off x="640080" y="2048256"/>
-            <a:ext cx="182880" cy="274320"/>
-          </a:xfrm>
-          <a:prstGeom prst="rect">
-            <a:avLst/>
-          </a:prstGeom>
-          <a:noFill/>
-        </p:spPr>
-        <p:txBody>
-          <a:bodyPr wrap="square" anchor="t" lIns="36000" rIns="36000" tIns="18000" bIns="18000">
-            <a:spAutoFit/>
-          </a:bodyPr>
-          <a:lstStyle/>
-          <a:p>
-            <a:pPr algn="l"/>
-            <a:r>
-              <a:rPr sz="1400" b="0" i="0">
-                <a:solidFill>
-                  <a:srgbClr val="3B5174"/>
-                </a:solidFill>
-                <a:latin typeface="Noto Sans JP"/>
-              </a:rPr>
-              <a:t>•</a:t>
-            </a:r>
-          </a:p>
-        </p:txBody>
-      </p:sp>
-      <p:sp>
-        <p:nvSpPr>
-          <p:cNvPr id="16" name="TextBox 15"/>
-          <p:cNvSpPr txBox="1"/>
-          <p:nvPr/>
-        </p:nvSpPr>
-        <p:spPr>
-          <a:xfrm>
-            <a:off x="868680" y="2048256"/>
-            <a:ext cx="4961991" cy="274320"/>
-          </a:xfrm>
-          <a:prstGeom prst="rect">
-            <a:avLst/>
-          </a:prstGeom>
-          <a:noFill/>
-        </p:spPr>
-        <p:txBody>
-          <a:bodyPr wrap="square" anchor="t" lIns="36000" rIns="36000" tIns="18000" bIns="18000">
-            <a:spAutoFit/>
-          </a:bodyPr>
-          <a:lstStyle/>
-          <a:p>
-            <a:pPr algn="l"/>
-            <a:r>
-              <a:rPr sz="1300" b="0" i="0">
-                <a:solidFill>
-                  <a:srgbClr val="334155"/>
-                </a:solidFill>
-                <a:latin typeface="Noto Sans JP"/>
-              </a:rPr>
-              <a:t>LUDOX TM-50（原液 50 wt%）→ 15 wt%に希釈（pH 9）</a:t>
-            </a:r>
-          </a:p>
-        </p:txBody>
-      </p:sp>
-      <p:sp>
-        <p:nvSpPr>
-          <p:cNvPr id="17" name="TextBox 16"/>
-          <p:cNvSpPr txBox="1"/>
-          <p:nvPr/>
-        </p:nvSpPr>
-        <p:spPr>
-          <a:xfrm>
-            <a:off x="640080" y="2432304"/>
-            <a:ext cx="182880" cy="274320"/>
-          </a:xfrm>
-          <a:prstGeom prst="rect">
-            <a:avLst/>
-          </a:prstGeom>
-          <a:noFill/>
-        </p:spPr>
-        <p:txBody>
-          <a:bodyPr wrap="square" anchor="t" lIns="36000" rIns="36000" tIns="18000" bIns="18000">
-            <a:spAutoFit/>
-          </a:bodyPr>
-          <a:lstStyle/>
-          <a:p>
-            <a:pPr algn="l"/>
-            <a:r>
-              <a:rPr sz="1400" b="0" i="0">
-                <a:solidFill>
-                  <a:srgbClr val="3B5174"/>
-                </a:solidFill>
-                <a:latin typeface="Noto Sans JP"/>
-              </a:rPr>
-              <a:t>•</a:t>
-            </a:r>
-          </a:p>
-        </p:txBody>
-      </p:sp>
-      <p:sp>
-        <p:nvSpPr>
-          <p:cNvPr id="18" name="TextBox 17"/>
-          <p:cNvSpPr txBox="1"/>
-          <p:nvPr/>
-        </p:nvSpPr>
-        <p:spPr>
-          <a:xfrm>
-            <a:off x="868680" y="2432304"/>
-            <a:ext cx="4961991" cy="274320"/>
-          </a:xfrm>
-          <a:prstGeom prst="rect">
-            <a:avLst/>
-          </a:prstGeom>
-          <a:noFill/>
-        </p:spPr>
-        <p:txBody>
-          <a:bodyPr wrap="square" anchor="t" lIns="36000" rIns="36000" tIns="18000" bIns="18000">
-            <a:spAutoFit/>
-          </a:bodyPr>
-          <a:lstStyle/>
-          <a:p>
-            <a:pPr algn="l"/>
-            <a:r>
-              <a:rPr sz="1300" b="0" i="0">
-                <a:solidFill>
-                  <a:srgbClr val="334155"/>
-                </a:solidFill>
-                <a:latin typeface="Noto Sans JP"/>
-              </a:rPr>
-              <a:t>粒子サイズ：22 nm（単分散）</a:t>
-            </a:r>
-          </a:p>
-        </p:txBody>
-      </p:sp>
-      <p:sp>
-        <p:nvSpPr>
-          <p:cNvPr id="19" name="TextBox 18"/>
-          <p:cNvSpPr txBox="1"/>
-          <p:nvPr/>
-        </p:nvSpPr>
-        <p:spPr>
-          <a:xfrm>
-            <a:off x="640080" y="2816352"/>
-            <a:ext cx="182880" cy="274320"/>
-          </a:xfrm>
-          <a:prstGeom prst="rect">
-            <a:avLst/>
-          </a:prstGeom>
-          <a:noFill/>
-        </p:spPr>
-        <p:txBody>
-          <a:bodyPr wrap="square" anchor="t" lIns="36000" rIns="36000" tIns="18000" bIns="18000">
-            <a:spAutoFit/>
-          </a:bodyPr>
-          <a:lstStyle/>
-          <a:p>
-            <a:pPr algn="l"/>
-            <a:r>
-              <a:rPr sz="1400" b="0" i="0">
-                <a:solidFill>
-                  <a:srgbClr val="3B5174"/>
-                </a:solidFill>
-                <a:latin typeface="Noto Sans JP"/>
-              </a:rPr>
-              <a:t>•</a:t>
-            </a:r>
-          </a:p>
-        </p:txBody>
-      </p:sp>
-      <p:sp>
-        <p:nvSpPr>
-          <p:cNvPr id="20" name="TextBox 19"/>
-          <p:cNvSpPr txBox="1"/>
-          <p:nvPr/>
-        </p:nvSpPr>
-        <p:spPr>
-          <a:xfrm>
-            <a:off x="868680" y="2816352"/>
-            <a:ext cx="4961991" cy="274320"/>
-          </a:xfrm>
-          <a:prstGeom prst="rect">
-            <a:avLst/>
-          </a:prstGeom>
-          <a:noFill/>
-        </p:spPr>
-        <p:txBody>
-          <a:bodyPr wrap="square" anchor="t" lIns="36000" rIns="36000" tIns="18000" bIns="18000">
-            <a:spAutoFit/>
-          </a:bodyPr>
-          <a:lstStyle/>
-          <a:p>
-            <a:pPr algn="l"/>
-            <a:r>
-              <a:rPr sz="1300" b="0" i="0">
-                <a:solidFill>
-                  <a:srgbClr val="334155"/>
-                </a:solidFill>
-                <a:latin typeface="Noto Sans JP"/>
-              </a:rPr>
-              <a:t>配合濃度：ゲル中 5 wt%</a:t>
-            </a:r>
-          </a:p>
-        </p:txBody>
-      </p:sp>
-      <p:sp>
-        <p:nvSpPr>
-          <p:cNvPr id="21" name="TextBox 20"/>
-          <p:cNvSpPr txBox="1"/>
-          <p:nvPr/>
-        </p:nvSpPr>
-        <p:spPr>
-          <a:xfrm>
-            <a:off x="640080" y="3200400"/>
-            <a:ext cx="182880" cy="274320"/>
-          </a:xfrm>
-          <a:prstGeom prst="rect">
-            <a:avLst/>
-          </a:prstGeom>
-          <a:noFill/>
-        </p:spPr>
-        <p:txBody>
-          <a:bodyPr wrap="square" anchor="t" lIns="36000" rIns="36000" tIns="18000" bIns="18000">
-            <a:spAutoFit/>
-          </a:bodyPr>
-          <a:lstStyle/>
-          <a:p>
-            <a:pPr algn="l"/>
-            <a:r>
-              <a:rPr sz="1400" b="0" i="0">
-                <a:solidFill>
-                  <a:srgbClr val="3B5174"/>
-                </a:solidFill>
-                <a:latin typeface="Noto Sans JP"/>
-              </a:rPr>
-              <a:t>•</a:t>
-            </a:r>
-          </a:p>
-        </p:txBody>
-      </p:sp>
-      <p:sp>
-        <p:nvSpPr>
-          <p:cNvPr id="22" name="TextBox 21"/>
-          <p:cNvSpPr txBox="1"/>
-          <p:nvPr/>
-        </p:nvSpPr>
-        <p:spPr>
-          <a:xfrm>
-            <a:off x="868680" y="3200400"/>
-            <a:ext cx="4961991" cy="274320"/>
-          </a:xfrm>
-          <a:prstGeom prst="rect">
-            <a:avLst/>
-          </a:prstGeom>
-          <a:noFill/>
-        </p:spPr>
-        <p:txBody>
-          <a:bodyPr wrap="square" anchor="t" lIns="36000" rIns="36000" tIns="18000" bIns="18000">
-            <a:spAutoFit/>
-          </a:bodyPr>
-          <a:lstStyle/>
-          <a:p>
-            <a:pPr algn="l"/>
-            <a:r>
-              <a:rPr sz="1300" b="0" i="0">
-                <a:solidFill>
-                  <a:srgbClr val="334155"/>
-                </a:solidFill>
-                <a:latin typeface="Noto Sans JP"/>
-              </a:rPr>
-              <a:t>加熱時に焼結 → silica aerogel に変態</a:t>
-            </a:r>
-          </a:p>
-        </p:txBody>
-      </p:sp>
-      <p:sp>
-        <p:nvSpPr>
-          <p:cNvPr id="23" name="Rounded Rectangle 22"/>
-          <p:cNvSpPr/>
-          <p:nvPr/>
-        </p:nvSpPr>
-        <p:spPr>
-          <a:xfrm>
-            <a:off x="6178143" y="859536"/>
-            <a:ext cx="5647791" cy="3840480"/>
-          </a:xfrm>
-          <a:prstGeom prst="roundRect">
-            <a:avLst>
-              <a:gd name="adj" fmla="val 4000"/>
-            </a:avLst>
-          </a:prstGeom>
-          <a:solidFill>
-            <a:srgbClr val="F1F5F9"/>
-          </a:solidFill>
-          <a:ln w="6350">
-            <a:solidFill>
-              <a:srgbClr val="E2E8F0"/>
-            </a:solidFill>
-          </a:ln>
-          <a:effectLst/>
-        </p:spPr>
-        <p:style>
-          <a:lnRef idx="1">
-            <a:schemeClr val="accent1"/>
-          </a:lnRef>
-          <a:fillRef idx="3">
-            <a:schemeClr val="accent1"/>
-          </a:fillRef>
-          <a:effectRef idx="2">
-            <a:schemeClr val="accent1"/>
-          </a:effectRef>
-          <a:fontRef idx="minor">
-            <a:schemeClr val="lt1"/>
-          </a:fontRef>
-        </p:style>
-        <p:txBody>
-          <a:bodyPr rtlCol="0" anchor="ctr"/>
-          <a:lstStyle/>
-          <a:p>
-            <a:pPr algn="ctr"/>
-          </a:p>
-        </p:txBody>
-      </p:sp>
-      <p:sp>
-        <p:nvSpPr>
-          <p:cNvPr id="24" name="Rectangle 23"/>
-          <p:cNvSpPr/>
-          <p:nvPr/>
-        </p:nvSpPr>
-        <p:spPr>
-          <a:xfrm>
-            <a:off x="6178143" y="859536"/>
-            <a:ext cx="5647791" cy="36576"/>
-          </a:xfrm>
-          <a:prstGeom prst="rect">
-            <a:avLst/>
-          </a:prstGeom>
-          <a:solidFill>
-            <a:srgbClr val="3B5174"/>
-          </a:solidFill>
-          <a:ln>
-            <a:noFill/>
-          </a:ln>
-          <a:effectLst/>
-        </p:spPr>
-        <p:style>
-          <a:lnRef idx="1">
-            <a:schemeClr val="accent1"/>
-          </a:lnRef>
-          <a:fillRef idx="3">
-            <a:schemeClr val="accent1"/>
-          </a:fillRef>
-          <a:effectRef idx="2">
-            <a:schemeClr val="accent1"/>
-          </a:effectRef>
-          <a:fontRef idx="minor">
-            <a:schemeClr val="lt1"/>
-          </a:fontRef>
-        </p:style>
-        <p:txBody>
-          <a:bodyPr rtlCol="0" anchor="ctr"/>
-          <a:lstStyle/>
-          <a:p>
-            <a:pPr algn="ctr"/>
-          </a:p>
-        </p:txBody>
-      </p:sp>
-      <p:sp>
-        <p:nvSpPr>
-          <p:cNvPr id="25" name="TextBox 24"/>
-          <p:cNvSpPr txBox="1"/>
-          <p:nvPr/>
-        </p:nvSpPr>
-        <p:spPr>
-          <a:xfrm>
-            <a:off x="6361023" y="1042416"/>
-            <a:ext cx="548640" cy="457200"/>
-          </a:xfrm>
-          <a:prstGeom prst="rect">
-            <a:avLst/>
-          </a:prstGeom>
-          <a:noFill/>
-        </p:spPr>
-        <p:txBody>
-          <a:bodyPr wrap="square" anchor="t" lIns="36000" rIns="36000" tIns="18000" bIns="18000">
-            <a:spAutoFit/>
-          </a:bodyPr>
-          <a:lstStyle/>
-          <a:p>
-            <a:pPr algn="l"/>
-            <a:r>
-              <a:rPr sz="2800" b="0" i="0">
-                <a:solidFill>
-                  <a:srgbClr val="3B5174"/>
-                </a:solidFill>
-                <a:latin typeface="Noto Sans JP"/>
-              </a:rPr>
-              <a:t>◆</a:t>
-            </a:r>
-          </a:p>
-        </p:txBody>
-      </p:sp>
-      <p:sp>
-        <p:nvSpPr>
-          <p:cNvPr id="26" name="TextBox 25"/>
-          <p:cNvSpPr txBox="1"/>
-          <p:nvPr/>
-        </p:nvSpPr>
-        <p:spPr>
-          <a:xfrm>
-            <a:off x="7046823" y="1060704"/>
-            <a:ext cx="4641951" cy="274320"/>
-          </a:xfrm>
-          <a:prstGeom prst="rect">
-            <a:avLst/>
-          </a:prstGeom>
-          <a:noFill/>
-        </p:spPr>
-        <p:txBody>
-          <a:bodyPr wrap="square" anchor="t" lIns="36000" rIns="36000" tIns="18000" bIns="18000">
-            <a:spAutoFit/>
-          </a:bodyPr>
-          <a:lstStyle/>
-          <a:p>
-            <a:pPr algn="l"/>
-            <a:r>
-              <a:rPr sz="1100" b="1" i="0">
-                <a:solidFill>
-                  <a:srgbClr val="64748B"/>
-                </a:solidFill>
-                <a:latin typeface="Noto Sans JP"/>
-              </a:rPr>
-              <a:t>SDS（添加剤）</a:t>
-            </a:r>
-          </a:p>
-        </p:txBody>
-      </p:sp>
-      <p:sp>
-        <p:nvSpPr>
-          <p:cNvPr id="27" name="TextBox 26"/>
-          <p:cNvSpPr txBox="1"/>
-          <p:nvPr/>
-        </p:nvSpPr>
-        <p:spPr>
-          <a:xfrm>
-            <a:off x="7046823" y="1316736"/>
-            <a:ext cx="4641951" cy="457200"/>
-          </a:xfrm>
-          <a:prstGeom prst="rect">
-            <a:avLst/>
-          </a:prstGeom>
-          <a:noFill/>
-        </p:spPr>
-        <p:txBody>
-          <a:bodyPr wrap="square" anchor="t" lIns="36000" rIns="36000" tIns="18000" bIns="18000">
-            <a:spAutoFit/>
-          </a:bodyPr>
-          <a:lstStyle/>
-          <a:p>
-            <a:pPr algn="l"/>
-            <a:r>
-              <a:rPr sz="1800" b="1" i="0">
-                <a:solidFill>
-                  <a:srgbClr val="1E293B"/>
-                </a:solidFill>
-                <a:latin typeface="Noto Sans JP"/>
-              </a:rPr>
-              <a:t>Sodium Dodecyl Sulfate</a:t>
-            </a:r>
-          </a:p>
-        </p:txBody>
-      </p:sp>
-      <p:sp>
-        <p:nvSpPr>
-          <p:cNvPr id="28" name="TextBox 27"/>
-          <p:cNvSpPr txBox="1"/>
-          <p:nvPr/>
-        </p:nvSpPr>
-        <p:spPr>
-          <a:xfrm>
-            <a:off x="6452463" y="2048256"/>
-            <a:ext cx="182880" cy="274320"/>
-          </a:xfrm>
-          <a:prstGeom prst="rect">
-            <a:avLst/>
-          </a:prstGeom>
-          <a:noFill/>
-        </p:spPr>
-        <p:txBody>
-          <a:bodyPr wrap="square" anchor="t" lIns="36000" rIns="36000" tIns="18000" bIns="18000">
-            <a:spAutoFit/>
-          </a:bodyPr>
-          <a:lstStyle/>
-          <a:p>
-            <a:pPr algn="l"/>
-            <a:r>
-              <a:rPr sz="1400" b="0" i="0">
-                <a:solidFill>
-                  <a:srgbClr val="3B5174"/>
-                </a:solidFill>
-                <a:latin typeface="Noto Sans JP"/>
-              </a:rPr>
-              <a:t>•</a:t>
-            </a:r>
-          </a:p>
-        </p:txBody>
-      </p:sp>
-      <p:sp>
-        <p:nvSpPr>
-          <p:cNvPr id="29" name="TextBox 28"/>
-          <p:cNvSpPr txBox="1"/>
-          <p:nvPr/>
-        </p:nvSpPr>
-        <p:spPr>
-          <a:xfrm>
-            <a:off x="6681063" y="2048256"/>
-            <a:ext cx="4961991" cy="274320"/>
-          </a:xfrm>
-          <a:prstGeom prst="rect">
-            <a:avLst/>
-          </a:prstGeom>
-          <a:noFill/>
-        </p:spPr>
-        <p:txBody>
-          <a:bodyPr wrap="square" anchor="t" lIns="36000" rIns="36000" tIns="18000" bIns="18000">
-            <a:spAutoFit/>
-          </a:bodyPr>
-          <a:lstStyle/>
-          <a:p>
-            <a:pPr algn="l"/>
-            <a:r>
-              <a:rPr sz="1300" b="0" i="0">
-                <a:solidFill>
-                  <a:srgbClr val="334155"/>
-                </a:solidFill>
-                <a:latin typeface="Noto Sans JP"/>
-              </a:rPr>
-              <a:t>陰イオン性界面活性剤</a:t>
-            </a:r>
-          </a:p>
-        </p:txBody>
-      </p:sp>
-      <p:sp>
-        <p:nvSpPr>
-          <p:cNvPr id="30" name="TextBox 29"/>
-          <p:cNvSpPr txBox="1"/>
-          <p:nvPr/>
-        </p:nvSpPr>
-        <p:spPr>
-          <a:xfrm>
-            <a:off x="6452463" y="2432304"/>
-            <a:ext cx="182880" cy="274320"/>
-          </a:xfrm>
-          <a:prstGeom prst="rect">
-            <a:avLst/>
-          </a:prstGeom>
-          <a:noFill/>
-        </p:spPr>
-        <p:txBody>
-          <a:bodyPr wrap="square" anchor="t" lIns="36000" rIns="36000" tIns="18000" bIns="18000">
-            <a:spAutoFit/>
-          </a:bodyPr>
-          <a:lstStyle/>
-          <a:p>
-            <a:pPr algn="l"/>
-            <a:r>
-              <a:rPr sz="1400" b="0" i="0">
-                <a:solidFill>
-                  <a:srgbClr val="3B5174"/>
-                </a:solidFill>
-                <a:latin typeface="Noto Sans JP"/>
-              </a:rPr>
-              <a:t>•</a:t>
-            </a:r>
-          </a:p>
-        </p:txBody>
-      </p:sp>
-      <p:sp>
-        <p:nvSpPr>
-          <p:cNvPr id="31" name="TextBox 30"/>
-          <p:cNvSpPr txBox="1"/>
-          <p:nvPr/>
-        </p:nvSpPr>
-        <p:spPr>
-          <a:xfrm>
-            <a:off x="6681063" y="2432304"/>
-            <a:ext cx="4961991" cy="274320"/>
-          </a:xfrm>
-          <a:prstGeom prst="rect">
-            <a:avLst/>
-          </a:prstGeom>
-          <a:noFill/>
-        </p:spPr>
-        <p:txBody>
-          <a:bodyPr wrap="square" anchor="t" lIns="36000" rIns="36000" tIns="18000" bIns="18000">
-            <a:spAutoFit/>
-          </a:bodyPr>
-          <a:lstStyle/>
-          <a:p>
-            <a:pPr algn="l"/>
-            <a:r>
-              <a:rPr sz="1300" b="0" i="0">
-                <a:solidFill>
-                  <a:srgbClr val="334155"/>
-                </a:solidFill>
-                <a:latin typeface="Noto Sans JP"/>
-              </a:rPr>
-              <a:t>SDS添加でも Foaming Index は改善しなかった</a:t>
-            </a:r>
-          </a:p>
-        </p:txBody>
-      </p:sp>
-      <p:sp>
-        <p:nvSpPr>
-          <p:cNvPr id="32" name="TextBox 31"/>
-          <p:cNvSpPr txBox="1"/>
-          <p:nvPr/>
-        </p:nvSpPr>
-        <p:spPr>
-          <a:xfrm>
-            <a:off x="6452463" y="2816352"/>
-            <a:ext cx="182880" cy="274320"/>
-          </a:xfrm>
-          <a:prstGeom prst="rect">
-            <a:avLst/>
-          </a:prstGeom>
-          <a:noFill/>
-        </p:spPr>
-        <p:txBody>
-          <a:bodyPr wrap="square" anchor="t" lIns="36000" rIns="36000" tIns="18000" bIns="18000">
-            <a:spAutoFit/>
-          </a:bodyPr>
-          <a:lstStyle/>
-          <a:p>
-            <a:pPr algn="l"/>
-            <a:r>
-              <a:rPr sz="1400" b="0" i="0">
-                <a:solidFill>
-                  <a:srgbClr val="3B5174"/>
-                </a:solidFill>
-                <a:latin typeface="Noto Sans JP"/>
-              </a:rPr>
-              <a:t>•</a:t>
-            </a:r>
-          </a:p>
-        </p:txBody>
-      </p:sp>
-      <p:sp>
-        <p:nvSpPr>
-          <p:cNvPr id="33" name="TextBox 32"/>
-          <p:cNvSpPr txBox="1"/>
-          <p:nvPr/>
-        </p:nvSpPr>
-        <p:spPr>
-          <a:xfrm>
-            <a:off x="6681063" y="2816352"/>
-            <a:ext cx="4961991" cy="274320"/>
-          </a:xfrm>
-          <a:prstGeom prst="rect">
-            <a:avLst/>
-          </a:prstGeom>
-          <a:noFill/>
-        </p:spPr>
-        <p:txBody>
-          <a:bodyPr wrap="square" anchor="t" lIns="36000" rIns="36000" tIns="18000" bIns="18000">
-            <a:spAutoFit/>
-          </a:bodyPr>
-          <a:lstStyle/>
-          <a:p>
-            <a:pPr algn="l"/>
-            <a:r>
-              <a:rPr sz="1300" b="0" i="0">
-                <a:solidFill>
-                  <a:srgbClr val="334155"/>
-                </a:solidFill>
-                <a:latin typeface="Noto Sans JP"/>
-              </a:rPr>
-              <a:t>添加濃度：0.1 wt% ・ 0.5 wt% の2水準</a:t>
-            </a:r>
-          </a:p>
-        </p:txBody>
-      </p:sp>
-      <p:sp>
-        <p:nvSpPr>
-          <p:cNvPr id="34" name="TextBox 33"/>
-          <p:cNvSpPr txBox="1"/>
-          <p:nvPr/>
-        </p:nvSpPr>
-        <p:spPr>
-          <a:xfrm>
-            <a:off x="6452463" y="3200400"/>
-            <a:ext cx="182880" cy="274320"/>
-          </a:xfrm>
-          <a:prstGeom prst="rect">
-            <a:avLst/>
-          </a:prstGeom>
-          <a:noFill/>
-        </p:spPr>
-        <p:txBody>
-          <a:bodyPr wrap="square" anchor="t" lIns="36000" rIns="36000" tIns="18000" bIns="18000">
-            <a:spAutoFit/>
-          </a:bodyPr>
-          <a:lstStyle/>
-          <a:p>
-            <a:pPr algn="l"/>
-            <a:r>
-              <a:rPr sz="1400" b="0" i="0">
-                <a:solidFill>
-                  <a:srgbClr val="3B5174"/>
-                </a:solidFill>
-                <a:latin typeface="Noto Sans JP"/>
-              </a:rPr>
-              <a:t>•</a:t>
-            </a:r>
-          </a:p>
-        </p:txBody>
-      </p:sp>
-      <p:sp>
-        <p:nvSpPr>
-          <p:cNvPr id="35" name="TextBox 34"/>
-          <p:cNvSpPr txBox="1"/>
-          <p:nvPr/>
-        </p:nvSpPr>
-        <p:spPr>
-          <a:xfrm>
-            <a:off x="6681063" y="3200400"/>
-            <a:ext cx="4961991" cy="274320"/>
-          </a:xfrm>
-          <a:prstGeom prst="rect">
-            <a:avLst/>
-          </a:prstGeom>
-          <a:noFill/>
-        </p:spPr>
-        <p:txBody>
-          <a:bodyPr wrap="square" anchor="t" lIns="36000" rIns="36000" tIns="18000" bIns="18000">
-            <a:spAutoFit/>
-          </a:bodyPr>
-          <a:lstStyle/>
-          <a:p>
-            <a:pPr algn="l"/>
-            <a:r>
-              <a:rPr sz="1300" b="0" i="0">
-                <a:solidFill>
-                  <a:srgbClr val="334155"/>
-                </a:solidFill>
-                <a:latin typeface="Noto Sans JP"/>
-              </a:rPr>
-              <a:t>SDS量増加で気泡が粗大化（SEM確認）</a:t>
-            </a:r>
-          </a:p>
-        </p:txBody>
-      </p:sp>
-      <p:sp>
-        <p:nvSpPr>
-          <p:cNvPr id="36" name="Rounded Rectangle 35"/>
-          <p:cNvSpPr/>
-          <p:nvPr/>
-        </p:nvSpPr>
-        <p:spPr>
-          <a:xfrm>
-            <a:off x="365760" y="4974336"/>
-            <a:ext cx="11460175" cy="731520"/>
-          </a:xfrm>
-          <a:prstGeom prst="roundRect">
-            <a:avLst>
-              <a:gd name="adj" fmla="val 4000"/>
-            </a:avLst>
-          </a:prstGeom>
-          <a:solidFill>
-            <a:srgbClr val="F8FAFC"/>
-          </a:solidFill>
-          <a:ln>
-            <a:noFill/>
-          </a:ln>
-          <a:effectLst/>
-        </p:spPr>
-        <p:style>
-          <a:lnRef idx="1">
-            <a:schemeClr val="accent1"/>
-          </a:lnRef>
-          <a:fillRef idx="3">
-            <a:schemeClr val="accent1"/>
-          </a:fillRef>
-          <a:effectRef idx="2">
-            <a:schemeClr val="accent1"/>
-          </a:effectRef>
-          <a:fontRef idx="minor">
-            <a:schemeClr val="lt1"/>
-          </a:fontRef>
-        </p:style>
-        <p:txBody>
-          <a:bodyPr rtlCol="0" anchor="ctr"/>
-          <a:lstStyle/>
-          <a:p>
-            <a:pPr algn="ctr"/>
-          </a:p>
-        </p:txBody>
-      </p:sp>
-      <p:sp>
-        <p:nvSpPr>
-          <p:cNvPr id="37" name="Rectangle 36"/>
-          <p:cNvSpPr/>
-          <p:nvPr/>
-        </p:nvSpPr>
-        <p:spPr>
-          <a:xfrm>
-            <a:off x="365760" y="4974336"/>
-            <a:ext cx="54864" cy="731520"/>
-          </a:xfrm>
-          <a:prstGeom prst="rect">
-            <a:avLst/>
-          </a:prstGeom>
-          <a:solidFill>
-            <a:srgbClr val="3B5174"/>
-          </a:solidFill>
-          <a:ln>
-            <a:noFill/>
-          </a:ln>
-          <a:effectLst/>
-        </p:spPr>
-        <p:style>
-          <a:lnRef idx="1">
-            <a:schemeClr val="accent1"/>
-          </a:lnRef>
-          <a:fillRef idx="3">
-            <a:schemeClr val="accent1"/>
-          </a:fillRef>
-          <a:effectRef idx="2">
-            <a:schemeClr val="accent1"/>
-          </a:effectRef>
-          <a:fontRef idx="minor">
-            <a:schemeClr val="lt1"/>
-          </a:fontRef>
-        </p:style>
-        <p:txBody>
-          <a:bodyPr rtlCol="0" anchor="ctr"/>
-          <a:lstStyle/>
-          <a:p>
-            <a:pPr algn="ctr"/>
-          </a:p>
-        </p:txBody>
-      </p:sp>
-      <p:sp>
-        <p:nvSpPr>
-          <p:cNvPr id="38" name="TextBox 37"/>
-          <p:cNvSpPr txBox="1"/>
-          <p:nvPr/>
-        </p:nvSpPr>
-        <p:spPr>
-          <a:xfrm>
-            <a:off x="548640" y="4974336"/>
-            <a:ext cx="365760" cy="731520"/>
-          </a:xfrm>
-          <a:prstGeom prst="rect">
-            <a:avLst/>
-          </a:prstGeom>
-          <a:noFill/>
-        </p:spPr>
-        <p:txBody>
-          <a:bodyPr wrap="square" anchor="ctr" lIns="36000" rIns="36000" tIns="18000" bIns="18000">
-            <a:spAutoFit/>
-          </a:bodyPr>
-          <a:lstStyle/>
-          <a:p>
-            <a:pPr algn="l"/>
-            <a:r>
-              <a:rPr sz="1400" b="0" i="0">
-                <a:solidFill>
-                  <a:srgbClr val="3B5174"/>
-                </a:solidFill>
-                <a:latin typeface="Noto Sans JP"/>
-              </a:rPr>
               <a:t>💡</a:t>
             </a:r>
           </a:p>
@@ -7200,14 +7119,14 @@
       </p:sp>
       <p:sp>
         <p:nvSpPr>
-          <p:cNvPr id="39" name="TextBox 38"/>
-          <p:cNvSpPr txBox="1"/>
-          <p:nvPr/>
-        </p:nvSpPr>
-        <p:spPr>
-          <a:xfrm>
-            <a:off x="960120" y="4974336"/>
-            <a:ext cx="10774375" cy="731520"/>
+          <p:cNvPr id="41" name="TextBox 40"/>
+          <p:cNvSpPr txBox="1"/>
+          <p:nvPr/>
+        </p:nvSpPr>
+        <p:spPr>
+          <a:xfrm>
+            <a:off x="960120" y="6053328"/>
+            <a:ext cx="10774375" cy="658368"/>
           </a:xfrm>
           <a:prstGeom prst="rect">
             <a:avLst/>

--- a/slides.pptx
+++ b/slides.pptx
@@ -8305,7 +8305,7 @@
         <p:spPr>
           <a:xfrm>
             <a:off x="365760" y="2962656"/>
-            <a:ext cx="5638647" cy="2286000"/>
+            <a:ext cx="3710330" cy="2286000"/>
           </a:xfrm>
           <a:prstGeom prst="roundRect">
             <a:avLst>
@@ -8353,7 +8353,7 @@
         <p:spPr>
           <a:xfrm>
             <a:off x="365760" y="2962656"/>
-            <a:ext cx="5638647" cy="36576"/>
+            <a:ext cx="3710330" cy="36576"/>
           </a:xfrm>
           <a:prstGeom prst="rect">
             <a:avLst/>
@@ -8397,22 +8397,22 @@
         <p:spPr>
           <a:xfrm>
             <a:off x="548640" y="3127248"/>
-            <a:ext cx="5272887" cy="329184"/>
-          </a:xfrm>
-          <a:prstGeom prst="rect">
-            <a:avLst/>
-          </a:prstGeom>
-          <a:noFill/>
-        </p:spPr>
-        <p:txBody>
-          <a:bodyPr wrap="square" anchor="t" lIns="36000" rIns="36000" tIns="18000" bIns="18000">
-            <a:spAutoFit/>
-          </a:bodyPr>
-          <a:lstStyle/>
-          <a:p>
-            <a:pPr algn="l"/>
-            <a:r>
-              <a:rPr sz="1500" b="1" i="0">
+            <a:ext cx="3344570" cy="329184"/>
+          </a:xfrm>
+          <a:prstGeom prst="rect">
+            <a:avLst/>
+          </a:prstGeom>
+          <a:noFill/>
+        </p:spPr>
+        <p:txBody>
+          <a:bodyPr wrap="square" anchor="t" lIns="36000" rIns="36000" tIns="18000" bIns="18000">
+            <a:spAutoFit/>
+          </a:bodyPr>
+          <a:lstStyle/>
+          <a:p>
+            <a:pPr algn="l"/>
+            <a:r>
+              <a:rPr sz="1400" b="1" i="0">
                 <a:solidFill>
                   <a:srgbClr val="1E293B"/>
                 </a:solidFill>
@@ -8447,7 +8447,7 @@
           <a:p>
             <a:pPr algn="l"/>
             <a:r>
-              <a:rPr sz="1200" b="0" i="0">
+              <a:rPr sz="1100" b="0" i="0">
                 <a:solidFill>
                   <a:srgbClr val="3B5174"/>
                 </a:solidFill>
@@ -8467,28 +8467,28 @@
         <p:spPr>
           <a:xfrm>
             <a:off x="749808" y="3493008"/>
-            <a:ext cx="5071719" cy="274320"/>
-          </a:xfrm>
-          <a:prstGeom prst="rect">
-            <a:avLst/>
-          </a:prstGeom>
-          <a:noFill/>
-        </p:spPr>
-        <p:txBody>
-          <a:bodyPr wrap="square" anchor="t" lIns="36000" rIns="36000" tIns="18000" bIns="18000">
-            <a:spAutoFit/>
-          </a:bodyPr>
-          <a:lstStyle/>
-          <a:p>
-            <a:pPr algn="l"/>
-            <a:r>
-              <a:rPr sz="1200" b="0" i="0">
+            <a:ext cx="3143402" cy="274320"/>
+          </a:xfrm>
+          <a:prstGeom prst="rect">
+            <a:avLst/>
+          </a:prstGeom>
+          <a:noFill/>
+        </p:spPr>
+        <p:txBody>
+          <a:bodyPr wrap="square" anchor="t" lIns="36000" rIns="36000" tIns="18000" bIns="18000">
+            <a:spAutoFit/>
+          </a:bodyPr>
+          <a:lstStyle/>
+          <a:p>
+            <a:pPr algn="l"/>
+            <a:r>
+              <a:rPr sz="1100" b="0" i="0">
                 <a:solidFill>
                   <a:srgbClr val="475569"/>
                 </a:solidFill>
                 <a:latin typeface="Noto Sans JP"/>
               </a:rPr>
-              <a:t>ポリマー種を変えて(HEC+MC vs MHEC)機能差を比較</a:t>
+              <a:t>ポリマー種を変えて機能差を比較</a:t>
             </a:r>
           </a:p>
         </p:txBody>
@@ -8517,7 +8517,7 @@
           <a:p>
             <a:pPr algn="l"/>
             <a:r>
-              <a:rPr sz="1200" b="0" i="0">
+              <a:rPr sz="1100" b="0" i="0">
                 <a:solidFill>
                   <a:srgbClr val="3B5174"/>
                 </a:solidFill>
@@ -8537,28 +8537,28 @@
         <p:spPr>
           <a:xfrm>
             <a:off x="749808" y="3767328"/>
-            <a:ext cx="5071719" cy="274320"/>
-          </a:xfrm>
-          <a:prstGeom prst="rect">
-            <a:avLst/>
-          </a:prstGeom>
-          <a:noFill/>
-        </p:spPr>
-        <p:txBody>
-          <a:bodyPr wrap="square" anchor="t" lIns="36000" rIns="36000" tIns="18000" bIns="18000">
-            <a:spAutoFit/>
-          </a:bodyPr>
-          <a:lstStyle/>
-          <a:p>
-            <a:pPr algn="l"/>
-            <a:r>
-              <a:rPr sz="1200" b="0" i="0">
+            <a:ext cx="3143402" cy="274320"/>
+          </a:xfrm>
+          <a:prstGeom prst="rect">
+            <a:avLst/>
+          </a:prstGeom>
+          <a:noFill/>
+        </p:spPr>
+        <p:txBody>
+          <a:bodyPr wrap="square" anchor="t" lIns="36000" rIns="36000" tIns="18000" bIns="18000">
+            <a:spAutoFit/>
+          </a:bodyPr>
+          <a:lstStyle/>
+          <a:p>
+            <a:pPr algn="l"/>
+            <a:r>
+              <a:rPr sz="1100" b="0" i="0">
                 <a:solidFill>
                   <a:srgbClr val="475569"/>
                 </a:solidFill>
                 <a:latin typeface="Noto Sans JP"/>
               </a:rPr>
-              <a:t>SDS濃度を2水準で発泡構造への影響を検証</a:t>
+              <a:t>SDS濃度を2水準で発泡構造を検証</a:t>
             </a:r>
           </a:p>
         </p:txBody>
@@ -8587,7 +8587,7 @@
           <a:p>
             <a:pPr algn="l"/>
             <a:r>
-              <a:rPr sz="1200" b="0" i="0">
+              <a:rPr sz="1100" b="0" i="0">
                 <a:solidFill>
                   <a:srgbClr val="3B5174"/>
                 </a:solidFill>
@@ -8607,28 +8607,28 @@
         <p:spPr>
           <a:xfrm>
             <a:off x="749808" y="4041648"/>
-            <a:ext cx="5071719" cy="274320"/>
-          </a:xfrm>
-          <a:prstGeom prst="rect">
-            <a:avLst/>
-          </a:prstGeom>
-          <a:noFill/>
-        </p:spPr>
-        <p:txBody>
-          <a:bodyPr wrap="square" anchor="t" lIns="36000" rIns="36000" tIns="18000" bIns="18000">
-            <a:spAutoFit/>
-          </a:bodyPr>
-          <a:lstStyle/>
-          <a:p>
-            <a:pPr algn="l"/>
-            <a:r>
-              <a:rPr sz="1200" b="0" i="0">
+            <a:ext cx="3143402" cy="274320"/>
+          </a:xfrm>
+          <a:prstGeom prst="rect">
+            <a:avLst/>
+          </a:prstGeom>
+          <a:noFill/>
+        </p:spPr>
+        <p:txBody>
+          <a:bodyPr wrap="square" anchor="t" lIns="36000" rIns="36000" tIns="18000" bIns="18000">
+            <a:spAutoFit/>
+          </a:bodyPr>
+          <a:lstStyle/>
+          <a:p>
+            <a:pPr algn="l"/>
+            <a:r>
+              <a:rPr sz="1100" b="0" i="0">
                 <a:solidFill>
                   <a:srgbClr val="475569"/>
                 </a:solidFill>
                 <a:latin typeface="Noto Sans JP"/>
               </a:rPr>
-              <a:t>市販品AquaGel-Kとの直接比較</a:t>
+              <a:t>市販品AquaGel-Kと直接比較</a:t>
             </a:r>
           </a:p>
         </p:txBody>
@@ -8641,8 +8641,8 @@
         </p:nvSpPr>
         <p:spPr>
           <a:xfrm>
-            <a:off x="6187287" y="2962656"/>
-            <a:ext cx="5638647" cy="2286000"/>
+            <a:off x="4240682" y="2962656"/>
+            <a:ext cx="3710330" cy="2286000"/>
           </a:xfrm>
           <a:prstGeom prst="roundRect">
             <a:avLst>
@@ -8689,8 +8689,8 @@
         </p:nvSpPr>
         <p:spPr>
           <a:xfrm>
-            <a:off x="6187287" y="2962656"/>
-            <a:ext cx="5638647" cy="36576"/>
+            <a:off x="4240682" y="2962656"/>
+            <a:ext cx="3710330" cy="36576"/>
           </a:xfrm>
           <a:prstGeom prst="rect">
             <a:avLst/>
@@ -8733,23 +8733,23 @@
         </p:nvSpPr>
         <p:spPr>
           <a:xfrm>
-            <a:off x="6370167" y="3127248"/>
-            <a:ext cx="5272887" cy="329184"/>
-          </a:xfrm>
-          <a:prstGeom prst="rect">
-            <a:avLst/>
-          </a:prstGeom>
-          <a:noFill/>
-        </p:spPr>
-        <p:txBody>
-          <a:bodyPr wrap="square" anchor="t" lIns="36000" rIns="36000" tIns="18000" bIns="18000">
-            <a:spAutoFit/>
-          </a:bodyPr>
-          <a:lstStyle/>
-          <a:p>
-            <a:pPr algn="l"/>
-            <a:r>
-              <a:rPr sz="1500" b="1" i="0">
+            <a:off x="4423562" y="3127248"/>
+            <a:ext cx="3344570" cy="329184"/>
+          </a:xfrm>
+          <a:prstGeom prst="rect">
+            <a:avLst/>
+          </a:prstGeom>
+          <a:noFill/>
+        </p:spPr>
+        <p:txBody>
+          <a:bodyPr wrap="square" anchor="t" lIns="36000" rIns="36000" tIns="18000" bIns="18000">
+            <a:spAutoFit/>
+          </a:bodyPr>
+          <a:lstStyle/>
+          <a:p>
+            <a:pPr algn="l"/>
+            <a:r>
+              <a:rPr sz="1400" b="1" i="0">
                 <a:solidFill>
                   <a:srgbClr val="1E293B"/>
                 </a:solidFill>
@@ -8768,23 +8768,23 @@
         </p:nvSpPr>
         <p:spPr>
           <a:xfrm>
-            <a:off x="6370167" y="3493008"/>
-            <a:ext cx="5272887" cy="1645920"/>
-          </a:xfrm>
-          <a:prstGeom prst="rect">
-            <a:avLst/>
-          </a:prstGeom>
-          <a:noFill/>
-        </p:spPr>
-        <p:txBody>
-          <a:bodyPr wrap="square" anchor="t" lIns="36000" rIns="36000" tIns="18000" bIns="18000">
-            <a:spAutoFit/>
-          </a:bodyPr>
-          <a:lstStyle/>
-          <a:p>
-            <a:pPr algn="l"/>
-            <a:r>
-              <a:rPr sz="1400" b="0" i="0">
+            <a:off x="4423562" y="3493008"/>
+            <a:ext cx="3344570" cy="1645920"/>
+          </a:xfrm>
+          <a:prstGeom prst="rect">
+            <a:avLst/>
+          </a:prstGeom>
+          <a:noFill/>
+        </p:spPr>
+        <p:txBody>
+          <a:bodyPr wrap="square" anchor="t" lIns="36000" rIns="36000" tIns="18000" bIns="18000">
+            <a:spAutoFit/>
+          </a:bodyPr>
+          <a:lstStyle/>
+          <a:p>
+            <a:pPr algn="l"/>
+            <a:r>
+              <a:rPr sz="1300" b="0" i="0">
                 <a:solidFill>
                   <a:srgbClr val="475569"/>
                 </a:solidFill>
@@ -8796,13 +8796,234 @@
           <a:p>
             <a:pPr algn="l"/>
             <a:r>
-              <a:rPr sz="1400" b="0" i="0">
+              <a:rPr sz="1300" b="0" i="0">
                 <a:solidFill>
                   <a:srgbClr val="475569"/>
                 </a:solidFill>
                 <a:latin typeface="Noto Sans JP"/>
               </a:rPr>
-              <a:t>→ HEC+MC 1 wt% ／ CSP 5 wt% ／ SDS 0.1 wt%</a:t>
+              <a:t>→ HEC+MC 1 wt%</a:t>
+            </a:r>
+          </a:p>
+          <a:p>
+            <a:pPr algn="l"/>
+            <a:r>
+              <a:rPr sz="1300" b="0" i="0">
+                <a:solidFill>
+                  <a:srgbClr val="475569"/>
+                </a:solidFill>
+                <a:latin typeface="Noto Sans JP"/>
+              </a:rPr>
+              <a:t>／ CSP 5 wt%</a:t>
+            </a:r>
+          </a:p>
+          <a:p>
+            <a:pPr algn="l"/>
+            <a:r>
+              <a:rPr sz="1300" b="0" i="0">
+                <a:solidFill>
+                  <a:srgbClr val="475569"/>
+                </a:solidFill>
+                <a:latin typeface="Noto Sans JP"/>
+              </a:rPr>
+              <a:t>／ SDS 0.1 wt%</a:t>
+            </a:r>
+          </a:p>
+        </p:txBody>
+      </p:sp>
+      <p:sp>
+        <p:nvSpPr>
+          <p:cNvPr id="43" name="Rounded Rectangle 42"/>
+          <p:cNvSpPr/>
+          <p:nvPr/>
+        </p:nvSpPr>
+        <p:spPr>
+          <a:xfrm>
+            <a:off x="8115604" y="2962656"/>
+            <a:ext cx="3710330" cy="1975104"/>
+          </a:xfrm>
+          <a:prstGeom prst="roundRect">
+            <a:avLst>
+              <a:gd name="adj" fmla="val 2000"/>
+            </a:avLst>
+          </a:prstGeom>
+          <a:solidFill>
+            <a:srgbClr val="F5F8FC"/>
+          </a:solidFill>
+          <a:ln w="12700">
+            <a:solidFill>
+              <a:srgbClr val="C0D0E0"/>
+            </a:solidFill>
+          </a:ln>
+          <a:effectLst/>
+        </p:spPr>
+        <p:style>
+          <a:lnRef idx="1">
+            <a:schemeClr val="accent1"/>
+          </a:lnRef>
+          <a:fillRef idx="3">
+            <a:schemeClr val="accent1"/>
+          </a:fillRef>
+          <a:effectRef idx="2">
+            <a:schemeClr val="accent1"/>
+          </a:effectRef>
+          <a:fontRef idx="minor">
+            <a:schemeClr val="lt1"/>
+          </a:fontRef>
+        </p:style>
+        <p:txBody>
+          <a:bodyPr rtlCol="0" anchor="ctr"/>
+          <a:lstStyle/>
+          <a:p>
+            <a:pPr algn="ctr"/>
+          </a:p>
+        </p:txBody>
+      </p:sp>
+      <p:sp>
+        <p:nvSpPr>
+          <p:cNvPr id="44" name="Rectangle 43"/>
+          <p:cNvSpPr/>
+          <p:nvPr/>
+        </p:nvSpPr>
+        <p:spPr>
+          <a:xfrm>
+            <a:off x="8225332" y="3072384"/>
+            <a:ext cx="868680" cy="292608"/>
+          </a:xfrm>
+          <a:prstGeom prst="rect">
+            <a:avLst/>
+          </a:prstGeom>
+          <a:solidFill>
+            <a:srgbClr val="1E293B"/>
+          </a:solidFill>
+          <a:ln>
+            <a:noFill/>
+          </a:ln>
+          <a:effectLst/>
+        </p:spPr>
+        <p:style>
+          <a:lnRef idx="1">
+            <a:schemeClr val="accent1"/>
+          </a:lnRef>
+          <a:fillRef idx="3">
+            <a:schemeClr val="accent1"/>
+          </a:fillRef>
+          <a:effectRef idx="2">
+            <a:schemeClr val="accent1"/>
+          </a:effectRef>
+          <a:fontRef idx="minor">
+            <a:schemeClr val="lt1"/>
+          </a:fontRef>
+        </p:style>
+        <p:txBody>
+          <a:bodyPr rtlCol="0" anchor="ctr"/>
+          <a:lstStyle/>
+          <a:p>
+            <a:pPr algn="ctr"/>
+          </a:p>
+        </p:txBody>
+      </p:sp>
+      <p:sp>
+        <p:nvSpPr>
+          <p:cNvPr id="45" name="TextBox 44"/>
+          <p:cNvSpPr txBox="1"/>
+          <p:nvPr/>
+        </p:nvSpPr>
+        <p:spPr>
+          <a:xfrm>
+            <a:off x="8225332" y="3072384"/>
+            <a:ext cx="868680" cy="292608"/>
+          </a:xfrm>
+          <a:prstGeom prst="rect">
+            <a:avLst/>
+          </a:prstGeom>
+          <a:noFill/>
+        </p:spPr>
+        <p:txBody>
+          <a:bodyPr wrap="square" anchor="ctr" lIns="36000" rIns="36000" tIns="18000" bIns="18000">
+            <a:spAutoFit/>
+          </a:bodyPr>
+          <a:lstStyle/>
+          <a:p>
+            <a:pPr algn="ctr"/>
+            <a:r>
+              <a:rPr sz="1100" b="1" i="0">
+                <a:solidFill>
+                  <a:srgbClr val="FFFFFF"/>
+                </a:solidFill>
+                <a:latin typeface="Noto Sans JP"/>
+              </a:rPr>
+              <a:t>Photo</a:t>
+            </a:r>
+          </a:p>
+        </p:txBody>
+      </p:sp>
+      <p:sp>
+        <p:nvSpPr>
+          <p:cNvPr id="46" name="TextBox 45"/>
+          <p:cNvSpPr txBox="1"/>
+          <p:nvPr/>
+        </p:nvSpPr>
+        <p:spPr>
+          <a:xfrm>
+            <a:off x="8115604" y="2962656"/>
+            <a:ext cx="3710330" cy="1975104"/>
+          </a:xfrm>
+          <a:prstGeom prst="rect">
+            <a:avLst/>
+          </a:prstGeom>
+          <a:noFill/>
+        </p:spPr>
+        <p:txBody>
+          <a:bodyPr wrap="square" anchor="ctr" lIns="36000" rIns="36000" tIns="18000" bIns="18000">
+            <a:spAutoFit/>
+          </a:bodyPr>
+          <a:lstStyle/>
+          <a:p>
+            <a:pPr algn="ctr"/>
+            <a:r>
+              <a:rPr sz="1200" b="0" i="0">
+                <a:solidFill>
+                  <a:srgbClr val="AAB4C0"/>
+                </a:solidFill>
+                <a:latin typeface="Noto Sans JP"/>
+              </a:rPr>
+              <a:t>（論文の図を貼り付け）</a:t>
+            </a:r>
+          </a:p>
+        </p:txBody>
+      </p:sp>
+      <p:sp>
+        <p:nvSpPr>
+          <p:cNvPr id="47" name="TextBox 46"/>
+          <p:cNvSpPr txBox="1"/>
+          <p:nvPr/>
+        </p:nvSpPr>
+        <p:spPr>
+          <a:xfrm>
+            <a:off x="8115604" y="4974336"/>
+            <a:ext cx="3710330" cy="274320"/>
+          </a:xfrm>
+          <a:prstGeom prst="rect">
+            <a:avLst/>
+          </a:prstGeom>
+          <a:noFill/>
+        </p:spPr>
+        <p:txBody>
+          <a:bodyPr wrap="square" anchor="t" lIns="36000" rIns="36000" tIns="18000" bIns="18000">
+            <a:spAutoFit/>
+          </a:bodyPr>
+          <a:lstStyle/>
+          <a:p>
+            <a:pPr algn="ctr"/>
+            <a:r>
+              <a:rPr sz="1000" b="0" i="1">
+                <a:solidFill>
+                  <a:srgbClr val="64748B"/>
+                </a:solidFill>
+                <a:latin typeface="Noto Sans JP"/>
+              </a:rPr>
+              <a:t>5配合系のゲル外観</a:t>
             </a:r>
           </a:p>
         </p:txBody>
@@ -9159,7 +9380,204 @@
         <p:spPr>
           <a:xfrm>
             <a:off x="365760" y="859536"/>
-            <a:ext cx="3728618" cy="2788920"/>
+            <a:ext cx="3805019" cy="5449824"/>
+          </a:xfrm>
+          <a:prstGeom prst="roundRect">
+            <a:avLst>
+              <a:gd name="adj" fmla="val 2000"/>
+            </a:avLst>
+          </a:prstGeom>
+          <a:solidFill>
+            <a:srgbClr val="F5F8FC"/>
+          </a:solidFill>
+          <a:ln w="12700">
+            <a:solidFill>
+              <a:srgbClr val="C0D0E0"/>
+            </a:solidFill>
+          </a:ln>
+          <a:effectLst/>
+        </p:spPr>
+        <p:style>
+          <a:lnRef idx="1">
+            <a:schemeClr val="accent1"/>
+          </a:lnRef>
+          <a:fillRef idx="3">
+            <a:schemeClr val="accent1"/>
+          </a:fillRef>
+          <a:effectRef idx="2">
+            <a:schemeClr val="accent1"/>
+          </a:effectRef>
+          <a:fontRef idx="minor">
+            <a:schemeClr val="lt1"/>
+          </a:fontRef>
+        </p:style>
+        <p:txBody>
+          <a:bodyPr rtlCol="0" anchor="ctr"/>
+          <a:lstStyle/>
+          <a:p>
+            <a:pPr algn="ctr"/>
+          </a:p>
+        </p:txBody>
+      </p:sp>
+      <p:sp>
+        <p:nvSpPr>
+          <p:cNvPr id="11" name="Rectangle 10"/>
+          <p:cNvSpPr/>
+          <p:nvPr/>
+        </p:nvSpPr>
+        <p:spPr>
+          <a:xfrm>
+            <a:off x="475488" y="969264"/>
+            <a:ext cx="868680" cy="292608"/>
+          </a:xfrm>
+          <a:prstGeom prst="rect">
+            <a:avLst/>
+          </a:prstGeom>
+          <a:solidFill>
+            <a:srgbClr val="1E293B"/>
+          </a:solidFill>
+          <a:ln>
+            <a:noFill/>
+          </a:ln>
+          <a:effectLst/>
+        </p:spPr>
+        <p:style>
+          <a:lnRef idx="1">
+            <a:schemeClr val="accent1"/>
+          </a:lnRef>
+          <a:fillRef idx="3">
+            <a:schemeClr val="accent1"/>
+          </a:fillRef>
+          <a:effectRef idx="2">
+            <a:schemeClr val="accent1"/>
+          </a:effectRef>
+          <a:fontRef idx="minor">
+            <a:schemeClr val="lt1"/>
+          </a:fontRef>
+        </p:style>
+        <p:txBody>
+          <a:bodyPr rtlCol="0" anchor="ctr"/>
+          <a:lstStyle/>
+          <a:p>
+            <a:pPr algn="ctr"/>
+          </a:p>
+        </p:txBody>
+      </p:sp>
+      <p:sp>
+        <p:nvSpPr>
+          <p:cNvPr id="12" name="TextBox 11"/>
+          <p:cNvSpPr txBox="1"/>
+          <p:nvPr/>
+        </p:nvSpPr>
+        <p:spPr>
+          <a:xfrm>
+            <a:off x="475488" y="969264"/>
+            <a:ext cx="868680" cy="292608"/>
+          </a:xfrm>
+          <a:prstGeom prst="rect">
+            <a:avLst/>
+          </a:prstGeom>
+          <a:noFill/>
+        </p:spPr>
+        <p:txBody>
+          <a:bodyPr wrap="square" anchor="ctr" lIns="36000" rIns="36000" tIns="18000" bIns="18000">
+            <a:spAutoFit/>
+          </a:bodyPr>
+          <a:lstStyle/>
+          <a:p>
+            <a:pPr algn="ctr"/>
+            <a:r>
+              <a:rPr sz="1100" b="1" i="0">
+                <a:solidFill>
+                  <a:srgbClr val="FFFFFF"/>
+                </a:solidFill>
+                <a:latin typeface="Noto Sans JP"/>
+              </a:rPr>
+              <a:t>Setup</a:t>
+            </a:r>
+          </a:p>
+        </p:txBody>
+      </p:sp>
+      <p:sp>
+        <p:nvSpPr>
+          <p:cNvPr id="13" name="TextBox 12"/>
+          <p:cNvSpPr txBox="1"/>
+          <p:nvPr/>
+        </p:nvSpPr>
+        <p:spPr>
+          <a:xfrm>
+            <a:off x="365760" y="859536"/>
+            <a:ext cx="3805019" cy="5449824"/>
+          </a:xfrm>
+          <a:prstGeom prst="rect">
+            <a:avLst/>
+          </a:prstGeom>
+          <a:noFill/>
+        </p:spPr>
+        <p:txBody>
+          <a:bodyPr wrap="square" anchor="ctr" lIns="36000" rIns="36000" tIns="18000" bIns="18000">
+            <a:spAutoFit/>
+          </a:bodyPr>
+          <a:lstStyle/>
+          <a:p>
+            <a:pPr algn="ctr"/>
+            <a:r>
+              <a:rPr sz="1200" b="0" i="0">
+                <a:solidFill>
+                  <a:srgbClr val="AAB4C0"/>
+                </a:solidFill>
+                <a:latin typeface="Noto Sans JP"/>
+              </a:rPr>
+              <a:t>（論文の図を貼り付け）</a:t>
+            </a:r>
+          </a:p>
+        </p:txBody>
+      </p:sp>
+      <p:sp>
+        <p:nvSpPr>
+          <p:cNvPr id="14" name="TextBox 13"/>
+          <p:cNvSpPr txBox="1"/>
+          <p:nvPr/>
+        </p:nvSpPr>
+        <p:spPr>
+          <a:xfrm>
+            <a:off x="365760" y="6345936"/>
+            <a:ext cx="3805019" cy="274320"/>
+          </a:xfrm>
+          <a:prstGeom prst="rect">
+            <a:avLst/>
+          </a:prstGeom>
+          <a:noFill/>
+        </p:spPr>
+        <p:txBody>
+          <a:bodyPr wrap="square" anchor="t" lIns="36000" rIns="36000" tIns="18000" bIns="18000">
+            <a:spAutoFit/>
+          </a:bodyPr>
+          <a:lstStyle/>
+          <a:p>
+            <a:pPr algn="ctr"/>
+            <a:r>
+              <a:rPr sz="1000" b="0" i="1">
+                <a:solidFill>
+                  <a:srgbClr val="64748B"/>
+                </a:solidFill>
+                <a:latin typeface="Noto Sans JP"/>
+              </a:rPr>
+              <a:t>燃焼試験セットアップ（MAP-Proトーチ／合板基板）</a:t>
+            </a:r>
+          </a:p>
+        </p:txBody>
+      </p:sp>
+      <p:sp>
+        <p:nvSpPr>
+          <p:cNvPr id="15" name="Rounded Rectangle 14"/>
+          <p:cNvSpPr/>
+          <p:nvPr/>
+        </p:nvSpPr>
+        <p:spPr>
+          <a:xfrm>
+            <a:off x="4353659" y="859536"/>
+            <a:ext cx="3667557" cy="1798320"/>
           </a:xfrm>
           <a:prstGeom prst="roundRect">
             <a:avLst>
@@ -9200,14 +9618,14 @@
       </p:sp>
       <p:sp>
         <p:nvSpPr>
-          <p:cNvPr id="11" name="Rectangle 10"/>
+          <p:cNvPr id="16" name="Rectangle 15"/>
           <p:cNvSpPr/>
           <p:nvPr/>
         </p:nvSpPr>
         <p:spPr>
           <a:xfrm>
-            <a:off x="365760" y="859536"/>
-            <a:ext cx="3728618" cy="36576"/>
+            <a:off x="4353659" y="859536"/>
+            <a:ext cx="3667557" cy="36576"/>
           </a:xfrm>
           <a:prstGeom prst="rect">
             <a:avLst/>
@@ -9244,14 +9662,14 @@
       </p:sp>
       <p:sp>
         <p:nvSpPr>
-          <p:cNvPr id="12" name="TextBox 11"/>
-          <p:cNvSpPr txBox="1"/>
-          <p:nvPr/>
-        </p:nvSpPr>
-        <p:spPr>
-          <a:xfrm>
-            <a:off x="548640" y="1024128"/>
-            <a:ext cx="3362858" cy="219456"/>
+          <p:cNvPr id="17" name="TextBox 16"/>
+          <p:cNvSpPr txBox="1"/>
+          <p:nvPr/>
+        </p:nvSpPr>
+        <p:spPr>
+          <a:xfrm>
+            <a:off x="4536539" y="1024128"/>
+            <a:ext cx="3301797" cy="219456"/>
           </a:xfrm>
           <a:prstGeom prst="rect">
             <a:avLst/>
@@ -9279,29 +9697,29 @@
       </p:sp>
       <p:sp>
         <p:nvSpPr>
-          <p:cNvPr id="13" name="TextBox 12"/>
-          <p:cNvSpPr txBox="1"/>
-          <p:nvPr/>
-        </p:nvSpPr>
-        <p:spPr>
-          <a:xfrm>
-            <a:off x="548640" y="1261872"/>
-            <a:ext cx="3362858" cy="329184"/>
-          </a:xfrm>
-          <a:prstGeom prst="rect">
-            <a:avLst/>
-          </a:prstGeom>
-          <a:noFill/>
-        </p:spPr>
-        <p:txBody>
-          <a:bodyPr wrap="square" anchor="t" lIns="36000" rIns="36000" tIns="18000" bIns="18000">
-            <a:spAutoFit/>
-          </a:bodyPr>
-          <a:lstStyle/>
-          <a:p>
-            <a:pPr algn="l"/>
-            <a:r>
-              <a:rPr sz="1400" b="1" i="0">
+          <p:cNvPr id="18" name="TextBox 17"/>
+          <p:cNvSpPr txBox="1"/>
+          <p:nvPr/>
+        </p:nvSpPr>
+        <p:spPr>
+          <a:xfrm>
+            <a:off x="4536539" y="1261872"/>
+            <a:ext cx="3301797" cy="329184"/>
+          </a:xfrm>
+          <a:prstGeom prst="rect">
+            <a:avLst/>
+          </a:prstGeom>
+          <a:noFill/>
+        </p:spPr>
+        <p:txBody>
+          <a:bodyPr wrap="square" anchor="t" lIns="36000" rIns="36000" tIns="18000" bIns="18000">
+            <a:spAutoFit/>
+          </a:bodyPr>
+          <a:lstStyle/>
+          <a:p>
+            <a:pPr algn="l"/>
+            <a:r>
+              <a:rPr sz="1300" b="1" i="0">
                 <a:solidFill>
                   <a:srgbClr val="1E293B"/>
                 </a:solidFill>
@@ -9314,13 +9732,13 @@
       </p:sp>
       <p:sp>
         <p:nvSpPr>
-          <p:cNvPr id="14" name="TextBox 13"/>
-          <p:cNvSpPr txBox="1"/>
-          <p:nvPr/>
-        </p:nvSpPr>
-        <p:spPr>
-          <a:xfrm>
-            <a:off x="548640" y="1627632"/>
+          <p:cNvPr id="19" name="TextBox 18"/>
+          <p:cNvSpPr txBox="1"/>
+          <p:nvPr/>
+        </p:nvSpPr>
+        <p:spPr>
+          <a:xfrm>
+            <a:off x="4536539" y="1627632"/>
             <a:ext cx="182880" cy="274320"/>
           </a:xfrm>
           <a:prstGeom prst="rect">
@@ -9336,7 +9754,7 @@
           <a:p>
             <a:pPr algn="l"/>
             <a:r>
-              <a:rPr sz="1100" b="0" i="0">
+              <a:rPr sz="1000" b="0" i="0">
                 <a:solidFill>
                   <a:srgbClr val="3B5174"/>
                 </a:solidFill>
@@ -9349,29 +9767,29 @@
       </p:sp>
       <p:sp>
         <p:nvSpPr>
-          <p:cNvPr id="15" name="TextBox 14"/>
-          <p:cNvSpPr txBox="1"/>
-          <p:nvPr/>
-        </p:nvSpPr>
-        <p:spPr>
-          <a:xfrm>
-            <a:off x="749808" y="1627632"/>
-            <a:ext cx="3161690" cy="274320"/>
-          </a:xfrm>
-          <a:prstGeom prst="rect">
-            <a:avLst/>
-          </a:prstGeom>
-          <a:noFill/>
-        </p:spPr>
-        <p:txBody>
-          <a:bodyPr wrap="square" anchor="t" lIns="36000" rIns="36000" tIns="18000" bIns="18000">
-            <a:spAutoFit/>
-          </a:bodyPr>
-          <a:lstStyle/>
-          <a:p>
-            <a:pPr algn="l"/>
-            <a:r>
-              <a:rPr sz="1100" b="0" i="0">
+          <p:cNvPr id="20" name="TextBox 19"/>
+          <p:cNvSpPr txBox="1"/>
+          <p:nvPr/>
+        </p:nvSpPr>
+        <p:spPr>
+          <a:xfrm>
+            <a:off x="4737707" y="1627632"/>
+            <a:ext cx="3100629" cy="274320"/>
+          </a:xfrm>
+          <a:prstGeom prst="rect">
+            <a:avLst/>
+          </a:prstGeom>
+          <a:noFill/>
+        </p:spPr>
+        <p:txBody>
+          <a:bodyPr wrap="square" anchor="t" lIns="36000" rIns="36000" tIns="18000" bIns="18000">
+            <a:spAutoFit/>
+          </a:bodyPr>
+          <a:lstStyle/>
+          <a:p>
+            <a:pPr algn="l"/>
+            <a:r>
+              <a:rPr sz="1000" b="0" i="0">
                 <a:solidFill>
                   <a:srgbClr val="475569"/>
                 </a:solidFill>
@@ -9384,13 +9802,13 @@
       </p:sp>
       <p:sp>
         <p:nvSpPr>
-          <p:cNvPr id="16" name="TextBox 15"/>
-          <p:cNvSpPr txBox="1"/>
-          <p:nvPr/>
-        </p:nvSpPr>
-        <p:spPr>
-          <a:xfrm>
-            <a:off x="548640" y="1901952"/>
+          <p:cNvPr id="21" name="TextBox 20"/>
+          <p:cNvSpPr txBox="1"/>
+          <p:nvPr/>
+        </p:nvSpPr>
+        <p:spPr>
+          <a:xfrm>
+            <a:off x="4536539" y="1901952"/>
             <a:ext cx="182880" cy="274320"/>
           </a:xfrm>
           <a:prstGeom prst="rect">
@@ -9406,7 +9824,7 @@
           <a:p>
             <a:pPr algn="l"/>
             <a:r>
-              <a:rPr sz="1100" b="0" i="0">
+              <a:rPr sz="1000" b="0" i="0">
                 <a:solidFill>
                   <a:srgbClr val="3B5174"/>
                 </a:solidFill>
@@ -9419,48 +9837,48 @@
       </p:sp>
       <p:sp>
         <p:nvSpPr>
-          <p:cNvPr id="17" name="TextBox 16"/>
-          <p:cNvSpPr txBox="1"/>
-          <p:nvPr/>
-        </p:nvSpPr>
-        <p:spPr>
-          <a:xfrm>
-            <a:off x="749808" y="1901952"/>
-            <a:ext cx="3161690" cy="274320"/>
-          </a:xfrm>
-          <a:prstGeom prst="rect">
-            <a:avLst/>
-          </a:prstGeom>
-          <a:noFill/>
-        </p:spPr>
-        <p:txBody>
-          <a:bodyPr wrap="square" anchor="t" lIns="36000" rIns="36000" tIns="18000" bIns="18000">
-            <a:spAutoFit/>
-          </a:bodyPr>
-          <a:lstStyle/>
-          <a:p>
-            <a:pPr algn="l"/>
-            <a:r>
-              <a:rPr sz="1100" b="0" i="0">
+          <p:cNvPr id="22" name="TextBox 21"/>
+          <p:cNvSpPr txBox="1"/>
+          <p:nvPr/>
+        </p:nvSpPr>
+        <p:spPr>
+          <a:xfrm>
+            <a:off x="4737707" y="1901952"/>
+            <a:ext cx="3100629" cy="274320"/>
+          </a:xfrm>
+          <a:prstGeom prst="rect">
+            <a:avLst/>
+          </a:prstGeom>
+          <a:noFill/>
+        </p:spPr>
+        <p:txBody>
+          <a:bodyPr wrap="square" anchor="t" lIns="36000" rIns="36000" tIns="18000" bIns="18000">
+            <a:spAutoFit/>
+          </a:bodyPr>
+          <a:lstStyle/>
+          <a:p>
+            <a:pPr algn="l"/>
+            <a:r>
+              <a:rPr sz="1000" b="0" i="0">
                 <a:solidFill>
                   <a:srgbClr val="475569"/>
                 </a:solidFill>
                 <a:latin typeface="Noto Sans JP"/>
               </a:rPr>
-              <a:t>定常流動掃引（粘度 vs 剪断速度）</a:t>
-            </a:r>
-          </a:p>
-        </p:txBody>
-      </p:sp>
-      <p:sp>
-        <p:nvSpPr>
-          <p:cNvPr id="18" name="TextBox 17"/>
-          <p:cNvSpPr txBox="1"/>
-          <p:nvPr/>
-        </p:nvSpPr>
-        <p:spPr>
-          <a:xfrm>
-            <a:off x="548640" y="2176272"/>
+              <a:t>定常流動掃引（粘度）</a:t>
+            </a:r>
+          </a:p>
+        </p:txBody>
+      </p:sp>
+      <p:sp>
+        <p:nvSpPr>
+          <p:cNvPr id="23" name="TextBox 22"/>
+          <p:cNvSpPr txBox="1"/>
+          <p:nvPr/>
+        </p:nvSpPr>
+        <p:spPr>
+          <a:xfrm>
+            <a:off x="4536539" y="2176272"/>
             <a:ext cx="182880" cy="274320"/>
           </a:xfrm>
           <a:prstGeom prst="rect">
@@ -9476,7 +9894,7 @@
           <a:p>
             <a:pPr algn="l"/>
             <a:r>
-              <a:rPr sz="1100" b="0" i="0">
+              <a:rPr sz="1000" b="0" i="0">
                 <a:solidFill>
                   <a:srgbClr val="3B5174"/>
                 </a:solidFill>
@@ -9489,49 +9907,49 @@
       </p:sp>
       <p:sp>
         <p:nvSpPr>
-          <p:cNvPr id="19" name="TextBox 18"/>
-          <p:cNvSpPr txBox="1"/>
-          <p:nvPr/>
-        </p:nvSpPr>
-        <p:spPr>
-          <a:xfrm>
-            <a:off x="749808" y="2176272"/>
-            <a:ext cx="3161690" cy="274320"/>
-          </a:xfrm>
-          <a:prstGeom prst="rect">
-            <a:avLst/>
-          </a:prstGeom>
-          <a:noFill/>
-        </p:spPr>
-        <p:txBody>
-          <a:bodyPr wrap="square" anchor="t" lIns="36000" rIns="36000" tIns="18000" bIns="18000">
-            <a:spAutoFit/>
-          </a:bodyPr>
-          <a:lstStyle/>
-          <a:p>
-            <a:pPr algn="l"/>
-            <a:r>
-              <a:rPr sz="1100" b="0" i="0">
+          <p:cNvPr id="24" name="TextBox 23"/>
+          <p:cNvSpPr txBox="1"/>
+          <p:nvPr/>
+        </p:nvSpPr>
+        <p:spPr>
+          <a:xfrm>
+            <a:off x="4737707" y="2176272"/>
+            <a:ext cx="3100629" cy="274320"/>
+          </a:xfrm>
+          <a:prstGeom prst="rect">
+            <a:avLst/>
+          </a:prstGeom>
+          <a:noFill/>
+        </p:spPr>
+        <p:txBody>
+          <a:bodyPr wrap="square" anchor="t" lIns="36000" rIns="36000" tIns="18000" bIns="18000">
+            <a:spAutoFit/>
+          </a:bodyPr>
+          <a:lstStyle/>
+          <a:p>
+            <a:pPr algn="l"/>
+            <a:r>
+              <a:rPr sz="1000" b="0" i="0">
                 <a:solidFill>
                   <a:srgbClr val="475569"/>
                 </a:solidFill>
                 <a:latin typeface="Noto Sans JP"/>
               </a:rPr>
-              <a:t>Herschel-Bulkleyモデル適合</a:t>
-            </a:r>
-          </a:p>
-        </p:txBody>
-      </p:sp>
-      <p:sp>
-        <p:nvSpPr>
-          <p:cNvPr id="20" name="Rounded Rectangle 19"/>
+              <a:t>Herschel-Bulkley適合</a:t>
+            </a:r>
+          </a:p>
+        </p:txBody>
+      </p:sp>
+      <p:sp>
+        <p:nvSpPr>
+          <p:cNvPr id="25" name="Rounded Rectangle 24"/>
           <p:cNvSpPr/>
           <p:nvPr/>
         </p:nvSpPr>
         <p:spPr>
           <a:xfrm>
-            <a:off x="4231538" y="859536"/>
-            <a:ext cx="3728618" cy="2788920"/>
+            <a:off x="8158377" y="859536"/>
+            <a:ext cx="3667557" cy="1798320"/>
           </a:xfrm>
           <a:prstGeom prst="roundRect">
             <a:avLst>
@@ -9572,14 +9990,14 @@
       </p:sp>
       <p:sp>
         <p:nvSpPr>
-          <p:cNvPr id="21" name="Rectangle 20"/>
+          <p:cNvPr id="26" name="Rectangle 25"/>
           <p:cNvSpPr/>
           <p:nvPr/>
         </p:nvSpPr>
         <p:spPr>
           <a:xfrm>
-            <a:off x="4231538" y="859536"/>
-            <a:ext cx="3728618" cy="36576"/>
+            <a:off x="8158377" y="859536"/>
+            <a:ext cx="3667557" cy="36576"/>
           </a:xfrm>
           <a:prstGeom prst="rect">
             <a:avLst/>
@@ -9616,14 +10034,14 @@
       </p:sp>
       <p:sp>
         <p:nvSpPr>
-          <p:cNvPr id="22" name="TextBox 21"/>
-          <p:cNvSpPr txBox="1"/>
-          <p:nvPr/>
-        </p:nvSpPr>
-        <p:spPr>
-          <a:xfrm>
-            <a:off x="4414418" y="1024128"/>
-            <a:ext cx="3362858" cy="219456"/>
+          <p:cNvPr id="27" name="TextBox 26"/>
+          <p:cNvSpPr txBox="1"/>
+          <p:nvPr/>
+        </p:nvSpPr>
+        <p:spPr>
+          <a:xfrm>
+            <a:off x="8341257" y="1024128"/>
+            <a:ext cx="3301797" cy="219456"/>
           </a:xfrm>
           <a:prstGeom prst="rect">
             <a:avLst/>
@@ -9651,48 +10069,48 @@
       </p:sp>
       <p:sp>
         <p:nvSpPr>
-          <p:cNvPr id="23" name="TextBox 22"/>
-          <p:cNvSpPr txBox="1"/>
-          <p:nvPr/>
-        </p:nvSpPr>
-        <p:spPr>
-          <a:xfrm>
-            <a:off x="4414418" y="1261872"/>
-            <a:ext cx="3362858" cy="329184"/>
-          </a:xfrm>
-          <a:prstGeom prst="rect">
-            <a:avLst/>
-          </a:prstGeom>
-          <a:noFill/>
-        </p:spPr>
-        <p:txBody>
-          <a:bodyPr wrap="square" anchor="t" lIns="36000" rIns="36000" tIns="18000" bIns="18000">
-            <a:spAutoFit/>
-          </a:bodyPr>
-          <a:lstStyle/>
-          <a:p>
-            <a:pPr algn="l"/>
-            <a:r>
-              <a:rPr sz="1400" b="1" i="0">
+          <p:cNvPr id="28" name="TextBox 27"/>
+          <p:cNvSpPr txBox="1"/>
+          <p:nvPr/>
+        </p:nvSpPr>
+        <p:spPr>
+          <a:xfrm>
+            <a:off x="8341257" y="1261872"/>
+            <a:ext cx="3301797" cy="329184"/>
+          </a:xfrm>
+          <a:prstGeom prst="rect">
+            <a:avLst/>
+          </a:prstGeom>
+          <a:noFill/>
+        </p:spPr>
+        <p:txBody>
+          <a:bodyPr wrap="square" anchor="t" lIns="36000" rIns="36000" tIns="18000" bIns="18000">
+            <a:spAutoFit/>
+          </a:bodyPr>
+          <a:lstStyle/>
+          <a:p>
+            <a:pPr algn="l"/>
+            <a:r>
+              <a:rPr sz="1300" b="1" i="0">
                 <a:solidFill>
                   <a:srgbClr val="1E293B"/>
                 </a:solidFill>
                 <a:latin typeface="Noto Sans JP"/>
               </a:rPr>
-              <a:t>燃焼試験（Time-to-char）</a:t>
-            </a:r>
-          </a:p>
-        </p:txBody>
-      </p:sp>
-      <p:sp>
-        <p:nvSpPr>
-          <p:cNvPr id="24" name="TextBox 23"/>
-          <p:cNvSpPr txBox="1"/>
-          <p:nvPr/>
-        </p:nvSpPr>
-        <p:spPr>
-          <a:xfrm>
-            <a:off x="4414418" y="1627632"/>
+              <a:t>燃焼試験</a:t>
+            </a:r>
+          </a:p>
+        </p:txBody>
+      </p:sp>
+      <p:sp>
+        <p:nvSpPr>
+          <p:cNvPr id="29" name="TextBox 28"/>
+          <p:cNvSpPr txBox="1"/>
+          <p:nvPr/>
+        </p:nvSpPr>
+        <p:spPr>
+          <a:xfrm>
+            <a:off x="8341257" y="1627632"/>
             <a:ext cx="182880" cy="274320"/>
           </a:xfrm>
           <a:prstGeom prst="rect">
@@ -9708,7 +10126,7 @@
           <a:p>
             <a:pPr algn="l"/>
             <a:r>
-              <a:rPr sz="1100" b="0" i="0">
+              <a:rPr sz="1000" b="0" i="0">
                 <a:solidFill>
                   <a:srgbClr val="3B5174"/>
                 </a:solidFill>
@@ -9721,48 +10139,48 @@
       </p:sp>
       <p:sp>
         <p:nvSpPr>
-          <p:cNvPr id="25" name="TextBox 24"/>
-          <p:cNvSpPr txBox="1"/>
-          <p:nvPr/>
-        </p:nvSpPr>
-        <p:spPr>
-          <a:xfrm>
-            <a:off x="4615586" y="1627632"/>
-            <a:ext cx="3161690" cy="274320"/>
-          </a:xfrm>
-          <a:prstGeom prst="rect">
-            <a:avLst/>
-          </a:prstGeom>
-          <a:noFill/>
-        </p:spPr>
-        <p:txBody>
-          <a:bodyPr wrap="square" anchor="t" lIns="36000" rIns="36000" tIns="18000" bIns="18000">
-            <a:spAutoFit/>
-          </a:bodyPr>
-          <a:lstStyle/>
-          <a:p>
-            <a:pPr algn="l"/>
-            <a:r>
-              <a:rPr sz="1100" b="0" i="0">
+          <p:cNvPr id="30" name="TextBox 29"/>
+          <p:cNvSpPr txBox="1"/>
+          <p:nvPr/>
+        </p:nvSpPr>
+        <p:spPr>
+          <a:xfrm>
+            <a:off x="8542425" y="1627632"/>
+            <a:ext cx="3100629" cy="274320"/>
+          </a:xfrm>
+          <a:prstGeom prst="rect">
+            <a:avLst/>
+          </a:prstGeom>
+          <a:noFill/>
+        </p:spPr>
+        <p:txBody>
+          <a:bodyPr wrap="square" anchor="t" lIns="36000" rIns="36000" tIns="18000" bIns="18000">
+            <a:spAutoFit/>
+          </a:bodyPr>
+          <a:lstStyle/>
+          <a:p>
+            <a:pPr algn="l"/>
+            <a:r>
+              <a:rPr sz="1000" b="0" i="0">
                 <a:solidFill>
                   <a:srgbClr val="475569"/>
                 </a:solidFill>
                 <a:latin typeface="Noto Sans JP"/>
               </a:rPr>
-              <a:t>MAP-Proトーチ（~2054°C）で白木合板を加熱</a:t>
-            </a:r>
-          </a:p>
-        </p:txBody>
-      </p:sp>
-      <p:sp>
-        <p:nvSpPr>
-          <p:cNvPr id="26" name="TextBox 25"/>
-          <p:cNvSpPr txBox="1"/>
-          <p:nvPr/>
-        </p:nvSpPr>
-        <p:spPr>
-          <a:xfrm>
-            <a:off x="4414418" y="1901952"/>
+              <a:t>MAP-Proトーチ(~2054°C)で加熱</a:t>
+            </a:r>
+          </a:p>
+        </p:txBody>
+      </p:sp>
+      <p:sp>
+        <p:nvSpPr>
+          <p:cNvPr id="31" name="TextBox 30"/>
+          <p:cNvSpPr txBox="1"/>
+          <p:nvPr/>
+        </p:nvSpPr>
+        <p:spPr>
+          <a:xfrm>
+            <a:off x="8341257" y="1901952"/>
             <a:ext cx="182880" cy="274320"/>
           </a:xfrm>
           <a:prstGeom prst="rect">
@@ -9778,7 +10196,7 @@
           <a:p>
             <a:pPr algn="l"/>
             <a:r>
-              <a:rPr sz="1100" b="0" i="0">
+              <a:rPr sz="1000" b="0" i="0">
                 <a:solidFill>
                   <a:srgbClr val="3B5174"/>
                 </a:solidFill>
@@ -9791,29 +10209,29 @@
       </p:sp>
       <p:sp>
         <p:nvSpPr>
-          <p:cNvPr id="27" name="TextBox 26"/>
-          <p:cNvSpPr txBox="1"/>
-          <p:nvPr/>
-        </p:nvSpPr>
-        <p:spPr>
-          <a:xfrm>
-            <a:off x="4615586" y="1901952"/>
-            <a:ext cx="3161690" cy="274320"/>
-          </a:xfrm>
-          <a:prstGeom prst="rect">
-            <a:avLst/>
-          </a:prstGeom>
-          <a:noFill/>
-        </p:spPr>
-        <p:txBody>
-          <a:bodyPr wrap="square" anchor="t" lIns="36000" rIns="36000" tIns="18000" bIns="18000">
-            <a:spAutoFit/>
-          </a:bodyPr>
-          <a:lstStyle/>
-          <a:p>
-            <a:pPr algn="l"/>
-            <a:r>
-              <a:rPr sz="1100" b="0" i="0">
+          <p:cNvPr id="32" name="TextBox 31"/>
+          <p:cNvSpPr txBox="1"/>
+          <p:nvPr/>
+        </p:nvSpPr>
+        <p:spPr>
+          <a:xfrm>
+            <a:off x="8542425" y="1901952"/>
+            <a:ext cx="3100629" cy="274320"/>
+          </a:xfrm>
+          <a:prstGeom prst="rect">
+            <a:avLst/>
+          </a:prstGeom>
+          <a:noFill/>
+        </p:spPr>
+        <p:txBody>
+          <a:bodyPr wrap="square" anchor="t" lIns="36000" rIns="36000" tIns="18000" bIns="18000">
+            <a:spAutoFit/>
+          </a:bodyPr>
+          <a:lstStyle/>
+          <a:p>
+            <a:pPr algn="l"/>
+            <a:r>
+              <a:rPr sz="1000" b="0" i="0">
                 <a:solidFill>
                   <a:srgbClr val="475569"/>
                 </a:solidFill>
@@ -9826,13 +10244,13 @@
       </p:sp>
       <p:sp>
         <p:nvSpPr>
-          <p:cNvPr id="28" name="TextBox 27"/>
-          <p:cNvSpPr txBox="1"/>
-          <p:nvPr/>
-        </p:nvSpPr>
-        <p:spPr>
-          <a:xfrm>
-            <a:off x="4414418" y="2176272"/>
+          <p:cNvPr id="33" name="TextBox 32"/>
+          <p:cNvSpPr txBox="1"/>
+          <p:nvPr/>
+        </p:nvSpPr>
+        <p:spPr>
+          <a:xfrm>
+            <a:off x="8341257" y="2176272"/>
             <a:ext cx="182880" cy="274320"/>
           </a:xfrm>
           <a:prstGeom prst="rect">
@@ -9848,7 +10266,7 @@
           <a:p>
             <a:pPr algn="l"/>
             <a:r>
-              <a:rPr sz="1100" b="0" i="0">
+              <a:rPr sz="1000" b="0" i="0">
                 <a:solidFill>
                   <a:srgbClr val="3B5174"/>
                 </a:solidFill>
@@ -9861,49 +10279,49 @@
       </p:sp>
       <p:sp>
         <p:nvSpPr>
-          <p:cNvPr id="29" name="TextBox 28"/>
-          <p:cNvSpPr txBox="1"/>
-          <p:nvPr/>
-        </p:nvSpPr>
-        <p:spPr>
-          <a:xfrm>
-            <a:off x="4615586" y="2176272"/>
-            <a:ext cx="3161690" cy="274320"/>
-          </a:xfrm>
-          <a:prstGeom prst="rect">
-            <a:avLst/>
-          </a:prstGeom>
-          <a:noFill/>
-        </p:spPr>
-        <p:txBody>
-          <a:bodyPr wrap="square" anchor="t" lIns="36000" rIns="36000" tIns="18000" bIns="18000">
-            <a:spAutoFit/>
-          </a:bodyPr>
-          <a:lstStyle/>
-          <a:p>
-            <a:pPr algn="l"/>
-            <a:r>
-              <a:rPr sz="1100" b="0" i="0">
+          <p:cNvPr id="34" name="TextBox 33"/>
+          <p:cNvSpPr txBox="1"/>
+          <p:nvPr/>
+        </p:nvSpPr>
+        <p:spPr>
+          <a:xfrm>
+            <a:off x="8542425" y="2176272"/>
+            <a:ext cx="3100629" cy="274320"/>
+          </a:xfrm>
+          <a:prstGeom prst="rect">
+            <a:avLst/>
+          </a:prstGeom>
+          <a:noFill/>
+        </p:spPr>
+        <p:txBody>
+          <a:bodyPr wrap="square" anchor="t" lIns="36000" rIns="36000" tIns="18000" bIns="18000">
+            <a:spAutoFit/>
+          </a:bodyPr>
+          <a:lstStyle/>
+          <a:p>
+            <a:pPr algn="l"/>
+            <a:r>
+              <a:rPr sz="1000" b="0" i="0">
                 <a:solidFill>
                   <a:srgbClr val="475569"/>
                 </a:solidFill>
                 <a:latin typeface="Noto Sans JP"/>
               </a:rPr>
-              <a:t>120 s / 300 s時点を写真比較</a:t>
-            </a:r>
-          </a:p>
-        </p:txBody>
-      </p:sp>
-      <p:sp>
-        <p:nvSpPr>
-          <p:cNvPr id="30" name="Rounded Rectangle 29"/>
+              <a:t>120/300 s時点を比較</a:t>
+            </a:r>
+          </a:p>
+        </p:txBody>
+      </p:sp>
+      <p:sp>
+        <p:nvSpPr>
+          <p:cNvPr id="35" name="Rounded Rectangle 34"/>
           <p:cNvSpPr/>
           <p:nvPr/>
         </p:nvSpPr>
         <p:spPr>
           <a:xfrm>
-            <a:off x="8097316" y="859536"/>
-            <a:ext cx="3728618" cy="2788920"/>
+            <a:off x="4353659" y="2840736"/>
+            <a:ext cx="3667557" cy="1798320"/>
           </a:xfrm>
           <a:prstGeom prst="roundRect">
             <a:avLst>
@@ -9944,14 +10362,14 @@
       </p:sp>
       <p:sp>
         <p:nvSpPr>
-          <p:cNvPr id="31" name="Rectangle 30"/>
+          <p:cNvPr id="36" name="Rectangle 35"/>
           <p:cNvSpPr/>
           <p:nvPr/>
         </p:nvSpPr>
         <p:spPr>
           <a:xfrm>
-            <a:off x="8097316" y="859536"/>
-            <a:ext cx="3728618" cy="36576"/>
+            <a:off x="4353659" y="2840736"/>
+            <a:ext cx="3667557" cy="36576"/>
           </a:xfrm>
           <a:prstGeom prst="rect">
             <a:avLst/>
@@ -9988,14 +10406,14 @@
       </p:sp>
       <p:sp>
         <p:nvSpPr>
-          <p:cNvPr id="32" name="TextBox 31"/>
-          <p:cNvSpPr txBox="1"/>
-          <p:nvPr/>
-        </p:nvSpPr>
-        <p:spPr>
-          <a:xfrm>
-            <a:off x="8280196" y="1024128"/>
-            <a:ext cx="3362858" cy="219456"/>
+          <p:cNvPr id="37" name="TextBox 36"/>
+          <p:cNvSpPr txBox="1"/>
+          <p:nvPr/>
+        </p:nvSpPr>
+        <p:spPr>
+          <a:xfrm>
+            <a:off x="4536539" y="3005328"/>
+            <a:ext cx="3301797" cy="219456"/>
           </a:xfrm>
           <a:prstGeom prst="rect">
             <a:avLst/>
@@ -10023,29 +10441,29 @@
       </p:sp>
       <p:sp>
         <p:nvSpPr>
-          <p:cNvPr id="33" name="TextBox 32"/>
-          <p:cNvSpPr txBox="1"/>
-          <p:nvPr/>
-        </p:nvSpPr>
-        <p:spPr>
-          <a:xfrm>
-            <a:off x="8280196" y="1261872"/>
-            <a:ext cx="3362858" cy="329184"/>
-          </a:xfrm>
-          <a:prstGeom prst="rect">
-            <a:avLst/>
-          </a:prstGeom>
-          <a:noFill/>
-        </p:spPr>
-        <p:txBody>
-          <a:bodyPr wrap="square" anchor="t" lIns="36000" rIns="36000" tIns="18000" bIns="18000">
-            <a:spAutoFit/>
-          </a:bodyPr>
-          <a:lstStyle/>
-          <a:p>
-            <a:pPr algn="l"/>
-            <a:r>
-              <a:rPr sz="1400" b="1" i="0">
+          <p:cNvPr id="38" name="TextBox 37"/>
+          <p:cNvSpPr txBox="1"/>
+          <p:nvPr/>
+        </p:nvSpPr>
+        <p:spPr>
+          <a:xfrm>
+            <a:off x="4536539" y="3243072"/>
+            <a:ext cx="3301797" cy="329184"/>
+          </a:xfrm>
+          <a:prstGeom prst="rect">
+            <a:avLst/>
+          </a:prstGeom>
+          <a:noFill/>
+        </p:spPr>
+        <p:txBody>
+          <a:bodyPr wrap="square" anchor="t" lIns="36000" rIns="36000" tIns="18000" bIns="18000">
+            <a:spAutoFit/>
+          </a:bodyPr>
+          <a:lstStyle/>
+          <a:p>
+            <a:pPr algn="l"/>
+            <a:r>
+              <a:rPr sz="1300" b="1" i="0">
                 <a:solidFill>
                   <a:srgbClr val="1E293B"/>
                 </a:solidFill>
@@ -10058,13 +10476,13 @@
       </p:sp>
       <p:sp>
         <p:nvSpPr>
-          <p:cNvPr id="34" name="TextBox 33"/>
-          <p:cNvSpPr txBox="1"/>
-          <p:nvPr/>
-        </p:nvSpPr>
-        <p:spPr>
-          <a:xfrm>
-            <a:off x="8280196" y="1627632"/>
+          <p:cNvPr id="39" name="TextBox 38"/>
+          <p:cNvSpPr txBox="1"/>
+          <p:nvPr/>
+        </p:nvSpPr>
+        <p:spPr>
+          <a:xfrm>
+            <a:off x="4536539" y="3608832"/>
             <a:ext cx="182880" cy="274320"/>
           </a:xfrm>
           <a:prstGeom prst="rect">
@@ -10080,7 +10498,7 @@
           <a:p>
             <a:pPr algn="l"/>
             <a:r>
-              <a:rPr sz="1100" b="0" i="0">
+              <a:rPr sz="1000" b="0" i="0">
                 <a:solidFill>
                   <a:srgbClr val="3B5174"/>
                 </a:solidFill>
@@ -10093,29 +10511,29 @@
       </p:sp>
       <p:sp>
         <p:nvSpPr>
-          <p:cNvPr id="35" name="TextBox 34"/>
-          <p:cNvSpPr txBox="1"/>
-          <p:nvPr/>
-        </p:nvSpPr>
-        <p:spPr>
-          <a:xfrm>
-            <a:off x="8481364" y="1627632"/>
-            <a:ext cx="3161690" cy="274320"/>
-          </a:xfrm>
-          <a:prstGeom prst="rect">
-            <a:avLst/>
-          </a:prstGeom>
-          <a:noFill/>
-        </p:spPr>
-        <p:txBody>
-          <a:bodyPr wrap="square" anchor="t" lIns="36000" rIns="36000" tIns="18000" bIns="18000">
-            <a:spAutoFit/>
-          </a:bodyPr>
-          <a:lstStyle/>
-          <a:p>
-            <a:pPr algn="l"/>
-            <a:r>
-              <a:rPr sz="1100" b="0" i="0">
+          <p:cNvPr id="40" name="TextBox 39"/>
+          <p:cNvSpPr txBox="1"/>
+          <p:nvPr/>
+        </p:nvSpPr>
+        <p:spPr>
+          <a:xfrm>
+            <a:off x="4737707" y="3608832"/>
+            <a:ext cx="3100629" cy="274320"/>
+          </a:xfrm>
+          <a:prstGeom prst="rect">
+            <a:avLst/>
+          </a:prstGeom>
+          <a:noFill/>
+        </p:spPr>
+        <p:txBody>
+          <a:bodyPr wrap="square" anchor="t" lIns="36000" rIns="36000" tIns="18000" bIns="18000">
+            <a:spAutoFit/>
+          </a:bodyPr>
+          <a:lstStyle/>
+          <a:p>
+            <a:pPr algn="l"/>
+            <a:r>
+              <a:rPr sz="1000" b="0" i="0">
                 <a:solidFill>
                   <a:srgbClr val="475569"/>
                 </a:solidFill>
@@ -10128,13 +10546,13 @@
       </p:sp>
       <p:sp>
         <p:nvSpPr>
-          <p:cNvPr id="36" name="TextBox 35"/>
-          <p:cNvSpPr txBox="1"/>
-          <p:nvPr/>
-        </p:nvSpPr>
-        <p:spPr>
-          <a:xfrm>
-            <a:off x="8280196" y="1901952"/>
+          <p:cNvPr id="41" name="TextBox 40"/>
+          <p:cNvSpPr txBox="1"/>
+          <p:nvPr/>
+        </p:nvSpPr>
+        <p:spPr>
+          <a:xfrm>
+            <a:off x="4536539" y="3883152"/>
             <a:ext cx="182880" cy="274320"/>
           </a:xfrm>
           <a:prstGeom prst="rect">
@@ -10150,7 +10568,7 @@
           <a:p>
             <a:pPr algn="l"/>
             <a:r>
-              <a:rPr sz="1100" b="0" i="0">
+              <a:rPr sz="1000" b="0" i="0">
                 <a:solidFill>
                   <a:srgbClr val="3B5174"/>
                 </a:solidFill>
@@ -10163,49 +10581,49 @@
       </p:sp>
       <p:sp>
         <p:nvSpPr>
-          <p:cNvPr id="37" name="TextBox 36"/>
-          <p:cNvSpPr txBox="1"/>
-          <p:nvPr/>
-        </p:nvSpPr>
-        <p:spPr>
-          <a:xfrm>
-            <a:off x="8481364" y="1901952"/>
-            <a:ext cx="3161690" cy="274320"/>
-          </a:xfrm>
-          <a:prstGeom prst="rect">
-            <a:avLst/>
-          </a:prstGeom>
-          <a:noFill/>
-        </p:spPr>
-        <p:txBody>
-          <a:bodyPr wrap="square" anchor="t" lIns="36000" rIns="36000" tIns="18000" bIns="18000">
-            <a:spAutoFit/>
-          </a:bodyPr>
-          <a:lstStyle/>
-          <a:p>
-            <a:pPr algn="l"/>
-            <a:r>
-              <a:rPr sz="1100" b="0" i="0">
+          <p:cNvPr id="42" name="TextBox 41"/>
+          <p:cNvSpPr txBox="1"/>
+          <p:nvPr/>
+        </p:nvSpPr>
+        <p:spPr>
+          <a:xfrm>
+            <a:off x="4737707" y="3883152"/>
+            <a:ext cx="3100629" cy="274320"/>
+          </a:xfrm>
+          <a:prstGeom prst="rect">
+            <a:avLst/>
+          </a:prstGeom>
+          <a:noFill/>
+        </p:spPr>
+        <p:txBody>
+          <a:bodyPr wrap="square" anchor="t" lIns="36000" rIns="36000" tIns="18000" bIns="18000">
+            <a:spAutoFit/>
+          </a:bodyPr>
+          <a:lstStyle/>
+          <a:p>
+            <a:pPr algn="l"/>
+            <a:r>
+              <a:rPr sz="1000" b="0" i="0">
                 <a:solidFill>
                   <a:srgbClr val="475569"/>
                 </a:solidFill>
                 <a:latin typeface="Noto Sans JP"/>
               </a:rPr>
-              <a:t>初期厚さに対する比 = Foaming Index</a:t>
-            </a:r>
-          </a:p>
-        </p:txBody>
-      </p:sp>
-      <p:sp>
-        <p:nvSpPr>
-          <p:cNvPr id="38" name="Rounded Rectangle 37"/>
+              <a:t>初期厚さ比 = Foaming Index</a:t>
+            </a:r>
+          </a:p>
+        </p:txBody>
+      </p:sp>
+      <p:sp>
+        <p:nvSpPr>
+          <p:cNvPr id="43" name="Rounded Rectangle 42"/>
           <p:cNvSpPr/>
           <p:nvPr/>
         </p:nvSpPr>
         <p:spPr>
           <a:xfrm>
-            <a:off x="365760" y="3831336"/>
-            <a:ext cx="3728618" cy="2788920"/>
+            <a:off x="8158377" y="2840736"/>
+            <a:ext cx="3667557" cy="1798320"/>
           </a:xfrm>
           <a:prstGeom prst="roundRect">
             <a:avLst>
@@ -10246,14 +10664,14 @@
       </p:sp>
       <p:sp>
         <p:nvSpPr>
-          <p:cNvPr id="39" name="Rectangle 38"/>
+          <p:cNvPr id="44" name="Rectangle 43"/>
           <p:cNvSpPr/>
           <p:nvPr/>
         </p:nvSpPr>
         <p:spPr>
           <a:xfrm>
-            <a:off x="365760" y="3831336"/>
-            <a:ext cx="3728618" cy="36576"/>
+            <a:off x="8158377" y="2840736"/>
+            <a:ext cx="3667557" cy="36576"/>
           </a:xfrm>
           <a:prstGeom prst="rect">
             <a:avLst/>
@@ -10290,14 +10708,14 @@
       </p:sp>
       <p:sp>
         <p:nvSpPr>
-          <p:cNvPr id="40" name="TextBox 39"/>
-          <p:cNvSpPr txBox="1"/>
-          <p:nvPr/>
-        </p:nvSpPr>
-        <p:spPr>
-          <a:xfrm>
-            <a:off x="548640" y="3995928"/>
-            <a:ext cx="3362858" cy="219456"/>
+          <p:cNvPr id="45" name="TextBox 44"/>
+          <p:cNvSpPr txBox="1"/>
+          <p:nvPr/>
+        </p:nvSpPr>
+        <p:spPr>
+          <a:xfrm>
+            <a:off x="8341257" y="3005328"/>
+            <a:ext cx="3301797" cy="219456"/>
           </a:xfrm>
           <a:prstGeom prst="rect">
             <a:avLst/>
@@ -10325,29 +10743,29 @@
       </p:sp>
       <p:sp>
         <p:nvSpPr>
-          <p:cNvPr id="41" name="TextBox 40"/>
-          <p:cNvSpPr txBox="1"/>
-          <p:nvPr/>
-        </p:nvSpPr>
-        <p:spPr>
-          <a:xfrm>
-            <a:off x="548640" y="4233672"/>
-            <a:ext cx="3362858" cy="329184"/>
-          </a:xfrm>
-          <a:prstGeom prst="rect">
-            <a:avLst/>
-          </a:prstGeom>
-          <a:noFill/>
-        </p:spPr>
-        <p:txBody>
-          <a:bodyPr wrap="square" anchor="t" lIns="36000" rIns="36000" tIns="18000" bIns="18000">
-            <a:spAutoFit/>
-          </a:bodyPr>
-          <a:lstStyle/>
-          <a:p>
-            <a:pPr algn="l"/>
-            <a:r>
-              <a:rPr sz="1400" b="1" i="0">
+          <p:cNvPr id="46" name="TextBox 45"/>
+          <p:cNvSpPr txBox="1"/>
+          <p:nvPr/>
+        </p:nvSpPr>
+        <p:spPr>
+          <a:xfrm>
+            <a:off x="8341257" y="3243072"/>
+            <a:ext cx="3301797" cy="329184"/>
+          </a:xfrm>
+          <a:prstGeom prst="rect">
+            <a:avLst/>
+          </a:prstGeom>
+          <a:noFill/>
+        </p:spPr>
+        <p:txBody>
+          <a:bodyPr wrap="square" anchor="t" lIns="36000" rIns="36000" tIns="18000" bIns="18000">
+            <a:spAutoFit/>
+          </a:bodyPr>
+          <a:lstStyle/>
+          <a:p>
+            <a:pPr algn="l"/>
+            <a:r>
+              <a:rPr sz="1300" b="1" i="0">
                 <a:solidFill>
                   <a:srgbClr val="1E293B"/>
                 </a:solidFill>
@@ -10360,13 +10778,13 @@
       </p:sp>
       <p:sp>
         <p:nvSpPr>
-          <p:cNvPr id="42" name="TextBox 41"/>
-          <p:cNvSpPr txBox="1"/>
-          <p:nvPr/>
-        </p:nvSpPr>
-        <p:spPr>
-          <a:xfrm>
-            <a:off x="548640" y="4599432"/>
+          <p:cNvPr id="47" name="TextBox 46"/>
+          <p:cNvSpPr txBox="1"/>
+          <p:nvPr/>
+        </p:nvSpPr>
+        <p:spPr>
+          <a:xfrm>
+            <a:off x="8341257" y="3608832"/>
             <a:ext cx="182880" cy="274320"/>
           </a:xfrm>
           <a:prstGeom prst="rect">
@@ -10382,7 +10800,7 @@
           <a:p>
             <a:pPr algn="l"/>
             <a:r>
-              <a:rPr sz="1100" b="0" i="0">
+              <a:rPr sz="1000" b="0" i="0">
                 <a:solidFill>
                   <a:srgbClr val="3B5174"/>
                 </a:solidFill>
@@ -10395,29 +10813,29 @@
       </p:sp>
       <p:sp>
         <p:nvSpPr>
-          <p:cNvPr id="43" name="TextBox 42"/>
-          <p:cNvSpPr txBox="1"/>
-          <p:nvPr/>
-        </p:nvSpPr>
-        <p:spPr>
-          <a:xfrm>
-            <a:off x="749808" y="4599432"/>
-            <a:ext cx="3161690" cy="274320"/>
-          </a:xfrm>
-          <a:prstGeom prst="rect">
-            <a:avLst/>
-          </a:prstGeom>
-          <a:noFill/>
-        </p:spPr>
-        <p:txBody>
-          <a:bodyPr wrap="square" anchor="t" lIns="36000" rIns="36000" tIns="18000" bIns="18000">
-            <a:spAutoFit/>
-          </a:bodyPr>
-          <a:lstStyle/>
-          <a:p>
-            <a:pPr algn="l"/>
-            <a:r>
-              <a:rPr sz="1100" b="0" i="0">
+          <p:cNvPr id="48" name="TextBox 47"/>
+          <p:cNvSpPr txBox="1"/>
+          <p:nvPr/>
+        </p:nvSpPr>
+        <p:spPr>
+          <a:xfrm>
+            <a:off x="8542425" y="3608832"/>
+            <a:ext cx="3100629" cy="274320"/>
+          </a:xfrm>
+          <a:prstGeom prst="rect">
+            <a:avLst/>
+          </a:prstGeom>
+          <a:noFill/>
+        </p:spPr>
+        <p:txBody>
+          <a:bodyPr wrap="square" anchor="t" lIns="36000" rIns="36000" tIns="18000" bIns="18000">
+            <a:spAutoFit/>
+          </a:bodyPr>
+          <a:lstStyle/>
+          <a:p>
+            <a:pPr algn="l"/>
+            <a:r>
+              <a:rPr sz="1000" b="0" i="0">
                 <a:solidFill>
                   <a:srgbClr val="475569"/>
                 </a:solidFill>
@@ -10430,13 +10848,13 @@
       </p:sp>
       <p:sp>
         <p:nvSpPr>
-          <p:cNvPr id="44" name="TextBox 43"/>
-          <p:cNvSpPr txBox="1"/>
-          <p:nvPr/>
-        </p:nvSpPr>
-        <p:spPr>
-          <a:xfrm>
-            <a:off x="548640" y="4873752"/>
+          <p:cNvPr id="49" name="TextBox 48"/>
+          <p:cNvSpPr txBox="1"/>
+          <p:nvPr/>
+        </p:nvSpPr>
+        <p:spPr>
+          <a:xfrm>
+            <a:off x="8341257" y="3883152"/>
             <a:ext cx="182880" cy="274320"/>
           </a:xfrm>
           <a:prstGeom prst="rect">
@@ -10452,7 +10870,7 @@
           <a:p>
             <a:pPr algn="l"/>
             <a:r>
-              <a:rPr sz="1100" b="0" i="0">
+              <a:rPr sz="1000" b="0" i="0">
                 <a:solidFill>
                   <a:srgbClr val="3B5174"/>
                 </a:solidFill>
@@ -10465,49 +10883,49 @@
       </p:sp>
       <p:sp>
         <p:nvSpPr>
-          <p:cNvPr id="45" name="TextBox 44"/>
-          <p:cNvSpPr txBox="1"/>
-          <p:nvPr/>
-        </p:nvSpPr>
-        <p:spPr>
-          <a:xfrm>
-            <a:off x="749808" y="4873752"/>
-            <a:ext cx="3161690" cy="274320"/>
-          </a:xfrm>
-          <a:prstGeom prst="rect">
-            <a:avLst/>
-          </a:prstGeom>
-          <a:noFill/>
-        </p:spPr>
-        <p:txBody>
-          <a:bodyPr wrap="square" anchor="t" lIns="36000" rIns="36000" tIns="18000" bIns="18000">
-            <a:spAutoFit/>
-          </a:bodyPr>
-          <a:lstStyle/>
-          <a:p>
-            <a:pPr algn="l"/>
-            <a:r>
-              <a:rPr sz="1100" b="0" i="0">
+          <p:cNvPr id="50" name="TextBox 49"/>
+          <p:cNvSpPr txBox="1"/>
+          <p:nvPr/>
+        </p:nvSpPr>
+        <p:spPr>
+          <a:xfrm>
+            <a:off x="8542425" y="3883152"/>
+            <a:ext cx="3100629" cy="274320"/>
+          </a:xfrm>
+          <a:prstGeom prst="rect">
+            <a:avLst/>
+          </a:prstGeom>
+          <a:noFill/>
+        </p:spPr>
+        <p:txBody>
+          <a:bodyPr wrap="square" anchor="t" lIns="36000" rIns="36000" tIns="18000" bIns="18000">
+            <a:spAutoFit/>
+          </a:bodyPr>
+          <a:lstStyle/>
+          <a:p>
+            <a:pPr algn="l"/>
+            <a:r>
+              <a:rPr sz="1000" b="0" i="0">
                 <a:solidFill>
                   <a:srgbClr val="475569"/>
                 </a:solidFill>
                 <a:latin typeface="Noto Sans JP"/>
               </a:rPr>
-              <a:t>燃焼時間別(0/1/2/4分)の焼結進行</a:t>
-            </a:r>
-          </a:p>
-        </p:txBody>
-      </p:sp>
-      <p:sp>
-        <p:nvSpPr>
-          <p:cNvPr id="46" name="Rounded Rectangle 45"/>
+              <a:t>燃焼時間別の焼結進行</a:t>
+            </a:r>
+          </a:p>
+        </p:txBody>
+      </p:sp>
+      <p:sp>
+        <p:nvSpPr>
+          <p:cNvPr id="51" name="Rounded Rectangle 50"/>
           <p:cNvSpPr/>
           <p:nvPr/>
         </p:nvSpPr>
         <p:spPr>
           <a:xfrm>
-            <a:off x="4231538" y="3831336"/>
-            <a:ext cx="3728618" cy="2788920"/>
+            <a:off x="4353659" y="4821936"/>
+            <a:ext cx="3667557" cy="1798320"/>
           </a:xfrm>
           <a:prstGeom prst="roundRect">
             <a:avLst>
@@ -10548,14 +10966,14 @@
       </p:sp>
       <p:sp>
         <p:nvSpPr>
-          <p:cNvPr id="47" name="Rectangle 46"/>
+          <p:cNvPr id="52" name="Rectangle 51"/>
           <p:cNvSpPr/>
           <p:nvPr/>
         </p:nvSpPr>
         <p:spPr>
           <a:xfrm>
-            <a:off x="4231538" y="3831336"/>
-            <a:ext cx="3728618" cy="36576"/>
+            <a:off x="4353659" y="4821936"/>
+            <a:ext cx="3667557" cy="36576"/>
           </a:xfrm>
           <a:prstGeom prst="rect">
             <a:avLst/>
@@ -10592,14 +11010,14 @@
       </p:sp>
       <p:sp>
         <p:nvSpPr>
-          <p:cNvPr id="48" name="TextBox 47"/>
-          <p:cNvSpPr txBox="1"/>
-          <p:nvPr/>
-        </p:nvSpPr>
-        <p:spPr>
-          <a:xfrm>
-            <a:off x="4414418" y="3995928"/>
-            <a:ext cx="3362858" cy="219456"/>
+          <p:cNvPr id="53" name="TextBox 52"/>
+          <p:cNvSpPr txBox="1"/>
+          <p:nvPr/>
+        </p:nvSpPr>
+        <p:spPr>
+          <a:xfrm>
+            <a:off x="4536539" y="4986528"/>
+            <a:ext cx="3301797" cy="219456"/>
           </a:xfrm>
           <a:prstGeom prst="rect">
             <a:avLst/>
@@ -10627,29 +11045,29 @@
       </p:sp>
       <p:sp>
         <p:nvSpPr>
-          <p:cNvPr id="49" name="TextBox 48"/>
-          <p:cNvSpPr txBox="1"/>
-          <p:nvPr/>
-        </p:nvSpPr>
-        <p:spPr>
-          <a:xfrm>
-            <a:off x="4414418" y="4233672"/>
-            <a:ext cx="3362858" cy="329184"/>
-          </a:xfrm>
-          <a:prstGeom prst="rect">
-            <a:avLst/>
-          </a:prstGeom>
-          <a:noFill/>
-        </p:spPr>
-        <p:txBody>
-          <a:bodyPr wrap="square" anchor="t" lIns="36000" rIns="36000" tIns="18000" bIns="18000">
-            <a:spAutoFit/>
-          </a:bodyPr>
-          <a:lstStyle/>
-          <a:p>
-            <a:pPr algn="l"/>
-            <a:r>
-              <a:rPr sz="1400" b="1" i="0">
+          <p:cNvPr id="54" name="TextBox 53"/>
+          <p:cNvSpPr txBox="1"/>
+          <p:nvPr/>
+        </p:nvSpPr>
+        <p:spPr>
+          <a:xfrm>
+            <a:off x="4536539" y="5224272"/>
+            <a:ext cx="3301797" cy="329184"/>
+          </a:xfrm>
+          <a:prstGeom prst="rect">
+            <a:avLst/>
+          </a:prstGeom>
+          <a:noFill/>
+        </p:spPr>
+        <p:txBody>
+          <a:bodyPr wrap="square" anchor="t" lIns="36000" rIns="36000" tIns="18000" bIns="18000">
+            <a:spAutoFit/>
+          </a:bodyPr>
+          <a:lstStyle/>
+          <a:p>
+            <a:pPr algn="l"/>
+            <a:r>
+              <a:rPr sz="1300" b="1" i="0">
                 <a:solidFill>
                   <a:srgbClr val="1E293B"/>
                 </a:solidFill>
@@ -10662,13 +11080,13 @@
       </p:sp>
       <p:sp>
         <p:nvSpPr>
-          <p:cNvPr id="50" name="TextBox 49"/>
-          <p:cNvSpPr txBox="1"/>
-          <p:nvPr/>
-        </p:nvSpPr>
-        <p:spPr>
-          <a:xfrm>
-            <a:off x="4414418" y="4599432"/>
+          <p:cNvPr id="55" name="TextBox 54"/>
+          <p:cNvSpPr txBox="1"/>
+          <p:nvPr/>
+        </p:nvSpPr>
+        <p:spPr>
+          <a:xfrm>
+            <a:off x="4536539" y="5590032"/>
             <a:ext cx="182880" cy="274320"/>
           </a:xfrm>
           <a:prstGeom prst="rect">
@@ -10684,7 +11102,7 @@
           <a:p>
             <a:pPr algn="l"/>
             <a:r>
-              <a:rPr sz="1100" b="0" i="0">
+              <a:rPr sz="1000" b="0" i="0">
                 <a:solidFill>
                   <a:srgbClr val="3B5174"/>
                 </a:solidFill>
@@ -10697,29 +11115,29 @@
       </p:sp>
       <p:sp>
         <p:nvSpPr>
-          <p:cNvPr id="51" name="TextBox 50"/>
-          <p:cNvSpPr txBox="1"/>
-          <p:nvPr/>
-        </p:nvSpPr>
-        <p:spPr>
-          <a:xfrm>
-            <a:off x="4615586" y="4599432"/>
-            <a:ext cx="3161690" cy="274320"/>
-          </a:xfrm>
-          <a:prstGeom prst="rect">
-            <a:avLst/>
-          </a:prstGeom>
-          <a:noFill/>
-        </p:spPr>
-        <p:txBody>
-          <a:bodyPr wrap="square" anchor="t" lIns="36000" rIns="36000" tIns="18000" bIns="18000">
-            <a:spAutoFit/>
-          </a:bodyPr>
-          <a:lstStyle/>
-          <a:p>
-            <a:pPr algn="l"/>
-            <a:r>
-              <a:rPr sz="1100" b="0" i="0">
+          <p:cNvPr id="56" name="TextBox 55"/>
+          <p:cNvSpPr txBox="1"/>
+          <p:nvPr/>
+        </p:nvSpPr>
+        <p:spPr>
+          <a:xfrm>
+            <a:off x="4737707" y="5590032"/>
+            <a:ext cx="3100629" cy="274320"/>
+          </a:xfrm>
+          <a:prstGeom prst="rect">
+            <a:avLst/>
+          </a:prstGeom>
+          <a:noFill/>
+        </p:spPr>
+        <p:txBody>
+          <a:bodyPr wrap="square" anchor="t" lIns="36000" rIns="36000" tIns="18000" bIns="18000">
+            <a:spAutoFit/>
+          </a:bodyPr>
+          <a:lstStyle/>
+          <a:p>
+            <a:pPr algn="l"/>
+            <a:r>
+              <a:rPr sz="1000" b="0" i="0">
                 <a:solidFill>
                   <a:srgbClr val="475569"/>
                 </a:solidFill>
@@ -10732,13 +11150,13 @@
       </p:sp>
       <p:sp>
         <p:nvSpPr>
-          <p:cNvPr id="52" name="TextBox 51"/>
-          <p:cNvSpPr txBox="1"/>
-          <p:nvPr/>
-        </p:nvSpPr>
-        <p:spPr>
-          <a:xfrm>
-            <a:off x="4414418" y="4873752"/>
+          <p:cNvPr id="57" name="TextBox 56"/>
+          <p:cNvSpPr txBox="1"/>
+          <p:nvPr/>
+        </p:nvSpPr>
+        <p:spPr>
+          <a:xfrm>
+            <a:off x="4536539" y="5864352"/>
             <a:ext cx="182880" cy="274320"/>
           </a:xfrm>
           <a:prstGeom prst="rect">
@@ -10754,7 +11172,7 @@
           <a:p>
             <a:pPr algn="l"/>
             <a:r>
-              <a:rPr sz="1100" b="0" i="0">
+              <a:rPr sz="1000" b="0" i="0">
                 <a:solidFill>
                   <a:srgbClr val="3B5174"/>
                 </a:solidFill>
@@ -10767,29 +11185,29 @@
       </p:sp>
       <p:sp>
         <p:nvSpPr>
-          <p:cNvPr id="53" name="TextBox 52"/>
-          <p:cNvSpPr txBox="1"/>
-          <p:nvPr/>
-        </p:nvSpPr>
-        <p:spPr>
-          <a:xfrm>
-            <a:off x="4615586" y="4873752"/>
-            <a:ext cx="3161690" cy="274320"/>
-          </a:xfrm>
-          <a:prstGeom prst="rect">
-            <a:avLst/>
-          </a:prstGeom>
-          <a:noFill/>
-        </p:spPr>
-        <p:txBody>
-          <a:bodyPr wrap="square" anchor="t" lIns="36000" rIns="36000" tIns="18000" bIns="18000">
-            <a:spAutoFit/>
-          </a:bodyPr>
-          <a:lstStyle/>
-          <a:p>
-            <a:pPr algn="l"/>
-            <a:r>
-              <a:rPr sz="1100" b="0" i="0">
+          <p:cNvPr id="58" name="TextBox 57"/>
+          <p:cNvSpPr txBox="1"/>
+          <p:nvPr/>
+        </p:nvSpPr>
+        <p:spPr>
+          <a:xfrm>
+            <a:off x="4737707" y="5864352"/>
+            <a:ext cx="3100629" cy="274320"/>
+          </a:xfrm>
+          <a:prstGeom prst="rect">
+            <a:avLst/>
+          </a:prstGeom>
+          <a:noFill/>
+        </p:spPr>
+        <p:txBody>
+          <a:bodyPr wrap="square" anchor="t" lIns="36000" rIns="36000" tIns="18000" bIns="18000">
+            <a:spAutoFit/>
+          </a:bodyPr>
+          <a:lstStyle/>
+          <a:p>
+            <a:pPr algn="l"/>
+            <a:r>
+              <a:rPr sz="1000" b="0" i="0">
                 <a:solidFill>
                   <a:srgbClr val="475569"/>
                 </a:solidFill>
@@ -10802,14 +11220,14 @@
       </p:sp>
       <p:sp>
         <p:nvSpPr>
-          <p:cNvPr id="54" name="Rounded Rectangle 53"/>
+          <p:cNvPr id="59" name="Rounded Rectangle 58"/>
           <p:cNvSpPr/>
           <p:nvPr/>
         </p:nvSpPr>
         <p:spPr>
           <a:xfrm>
-            <a:off x="8097316" y="3831336"/>
-            <a:ext cx="3728618" cy="2788920"/>
+            <a:off x="8158377" y="4821936"/>
+            <a:ext cx="3667557" cy="1798320"/>
           </a:xfrm>
           <a:prstGeom prst="roundRect">
             <a:avLst>
@@ -10850,14 +11268,14 @@
       </p:sp>
       <p:sp>
         <p:nvSpPr>
-          <p:cNvPr id="55" name="Rectangle 54"/>
+          <p:cNvPr id="60" name="Rectangle 59"/>
           <p:cNvSpPr/>
           <p:nvPr/>
         </p:nvSpPr>
         <p:spPr>
           <a:xfrm>
-            <a:off x="8097316" y="3831336"/>
-            <a:ext cx="3728618" cy="36576"/>
+            <a:off x="8158377" y="4821936"/>
+            <a:ext cx="3667557" cy="36576"/>
           </a:xfrm>
           <a:prstGeom prst="rect">
             <a:avLst/>
@@ -10894,14 +11312,14 @@
       </p:sp>
       <p:sp>
         <p:nvSpPr>
-          <p:cNvPr id="56" name="TextBox 55"/>
-          <p:cNvSpPr txBox="1"/>
-          <p:nvPr/>
-        </p:nvSpPr>
-        <p:spPr>
-          <a:xfrm>
-            <a:off x="8280196" y="3995928"/>
-            <a:ext cx="3362858" cy="219456"/>
+          <p:cNvPr id="61" name="TextBox 60"/>
+          <p:cNvSpPr txBox="1"/>
+          <p:nvPr/>
+        </p:nvSpPr>
+        <p:spPr>
+          <a:xfrm>
+            <a:off x="8341257" y="4986528"/>
+            <a:ext cx="3301797" cy="219456"/>
           </a:xfrm>
           <a:prstGeom prst="rect">
             <a:avLst/>
@@ -10929,29 +11347,29 @@
       </p:sp>
       <p:sp>
         <p:nvSpPr>
-          <p:cNvPr id="57" name="TextBox 56"/>
-          <p:cNvSpPr txBox="1"/>
-          <p:nvPr/>
-        </p:nvSpPr>
-        <p:spPr>
-          <a:xfrm>
-            <a:off x="8280196" y="4233672"/>
-            <a:ext cx="3362858" cy="329184"/>
-          </a:xfrm>
-          <a:prstGeom prst="rect">
-            <a:avLst/>
-          </a:prstGeom>
-          <a:noFill/>
-        </p:spPr>
-        <p:txBody>
-          <a:bodyPr wrap="square" anchor="t" lIns="36000" rIns="36000" tIns="18000" bIns="18000">
-            <a:spAutoFit/>
-          </a:bodyPr>
-          <a:lstStyle/>
-          <a:p>
-            <a:pPr algn="l"/>
-            <a:r>
-              <a:rPr sz="1400" b="1" i="0">
+          <p:cNvPr id="62" name="TextBox 61"/>
+          <p:cNvSpPr txBox="1"/>
+          <p:nvPr/>
+        </p:nvSpPr>
+        <p:spPr>
+          <a:xfrm>
+            <a:off x="8341257" y="5224272"/>
+            <a:ext cx="3301797" cy="329184"/>
+          </a:xfrm>
+          <a:prstGeom prst="rect">
+            <a:avLst/>
+          </a:prstGeom>
+          <a:noFill/>
+        </p:spPr>
+        <p:txBody>
+          <a:bodyPr wrap="square" anchor="t" lIns="36000" rIns="36000" tIns="18000" bIns="18000">
+            <a:spAutoFit/>
+          </a:bodyPr>
+          <a:lstStyle/>
+          <a:p>
+            <a:pPr algn="l"/>
+            <a:r>
+              <a:rPr sz="1300" b="1" i="0">
                 <a:solidFill>
                   <a:srgbClr val="1E293B"/>
                 </a:solidFill>
@@ -10964,13 +11382,13 @@
       </p:sp>
       <p:sp>
         <p:nvSpPr>
-          <p:cNvPr id="58" name="TextBox 57"/>
-          <p:cNvSpPr txBox="1"/>
-          <p:nvPr/>
-        </p:nvSpPr>
-        <p:spPr>
-          <a:xfrm>
-            <a:off x="8280196" y="4599432"/>
+          <p:cNvPr id="63" name="TextBox 62"/>
+          <p:cNvSpPr txBox="1"/>
+          <p:nvPr/>
+        </p:nvSpPr>
+        <p:spPr>
+          <a:xfrm>
+            <a:off x="8341257" y="5590032"/>
             <a:ext cx="182880" cy="274320"/>
           </a:xfrm>
           <a:prstGeom prst="rect">
@@ -10986,7 +11404,7 @@
           <a:p>
             <a:pPr algn="l"/>
             <a:r>
-              <a:rPr sz="1100" b="0" i="0">
+              <a:rPr sz="1000" b="0" i="0">
                 <a:solidFill>
                   <a:srgbClr val="3B5174"/>
                 </a:solidFill>
@@ -10999,48 +11417,48 @@
       </p:sp>
       <p:sp>
         <p:nvSpPr>
-          <p:cNvPr id="59" name="TextBox 58"/>
-          <p:cNvSpPr txBox="1"/>
-          <p:nvPr/>
-        </p:nvSpPr>
-        <p:spPr>
-          <a:xfrm>
-            <a:off x="8481364" y="4599432"/>
-            <a:ext cx="3161690" cy="274320"/>
-          </a:xfrm>
-          <a:prstGeom prst="rect">
-            <a:avLst/>
-          </a:prstGeom>
-          <a:noFill/>
-        </p:spPr>
-        <p:txBody>
-          <a:bodyPr wrap="square" anchor="t" lIns="36000" rIns="36000" tIns="18000" bIns="18000">
-            <a:spAutoFit/>
-          </a:bodyPr>
-          <a:lstStyle/>
-          <a:p>
-            <a:pPr algn="l"/>
-            <a:r>
-              <a:rPr sz="1100" b="0" i="0">
+          <p:cNvPr id="64" name="TextBox 63"/>
+          <p:cNvSpPr txBox="1"/>
+          <p:nvPr/>
+        </p:nvSpPr>
+        <p:spPr>
+          <a:xfrm>
+            <a:off x="8542425" y="5590032"/>
+            <a:ext cx="3100629" cy="274320"/>
+          </a:xfrm>
+          <a:prstGeom prst="rect">
+            <a:avLst/>
+          </a:prstGeom>
+          <a:noFill/>
+        </p:spPr>
+        <p:txBody>
+          <a:bodyPr wrap="square" anchor="t" lIns="36000" rIns="36000" tIns="18000" bIns="18000">
+            <a:spAutoFit/>
+          </a:bodyPr>
+          <a:lstStyle/>
+          <a:p>
+            <a:pPr algn="l"/>
+            <a:r>
+              <a:rPr sz="1000" b="0" i="0">
                 <a:solidFill>
                   <a:srgbClr val="475569"/>
                 </a:solidFill>
                 <a:latin typeface="Noto Sans JP"/>
               </a:rPr>
-              <a:t>TGA（熱重量分析）</a:t>
-            </a:r>
-          </a:p>
-        </p:txBody>
-      </p:sp>
-      <p:sp>
-        <p:nvSpPr>
-          <p:cNvPr id="60" name="TextBox 59"/>
-          <p:cNvSpPr txBox="1"/>
-          <p:nvPr/>
-        </p:nvSpPr>
-        <p:spPr>
-          <a:xfrm>
-            <a:off x="8280196" y="4873752"/>
+              <a:t>TGA（熱重量）</a:t>
+            </a:r>
+          </a:p>
+        </p:txBody>
+      </p:sp>
+      <p:sp>
+        <p:nvSpPr>
+          <p:cNvPr id="65" name="TextBox 64"/>
+          <p:cNvSpPr txBox="1"/>
+          <p:nvPr/>
+        </p:nvSpPr>
+        <p:spPr>
+          <a:xfrm>
+            <a:off x="8341257" y="5864352"/>
             <a:ext cx="182880" cy="274320"/>
           </a:xfrm>
           <a:prstGeom prst="rect">
@@ -11056,7 +11474,7 @@
           <a:p>
             <a:pPr algn="l"/>
             <a:r>
-              <a:rPr sz="1100" b="0" i="0">
+              <a:rPr sz="1000" b="0" i="0">
                 <a:solidFill>
                   <a:srgbClr val="3B5174"/>
                 </a:solidFill>
@@ -11069,35 +11487,35 @@
       </p:sp>
       <p:sp>
         <p:nvSpPr>
-          <p:cNvPr id="61" name="TextBox 60"/>
-          <p:cNvSpPr txBox="1"/>
-          <p:nvPr/>
-        </p:nvSpPr>
-        <p:spPr>
-          <a:xfrm>
-            <a:off x="8481364" y="4873752"/>
-            <a:ext cx="3161690" cy="274320"/>
-          </a:xfrm>
-          <a:prstGeom prst="rect">
-            <a:avLst/>
-          </a:prstGeom>
-          <a:noFill/>
-        </p:spPr>
-        <p:txBody>
-          <a:bodyPr wrap="square" anchor="t" lIns="36000" rIns="36000" tIns="18000" bIns="18000">
-            <a:spAutoFit/>
-          </a:bodyPr>
-          <a:lstStyle/>
-          <a:p>
-            <a:pPr algn="l"/>
-            <a:r>
-              <a:rPr sz="1100" b="0" i="0">
+          <p:cNvPr id="66" name="TextBox 65"/>
+          <p:cNvSpPr txBox="1"/>
+          <p:nvPr/>
+        </p:nvSpPr>
+        <p:spPr>
+          <a:xfrm>
+            <a:off x="8542425" y="5864352"/>
+            <a:ext cx="3100629" cy="274320"/>
+          </a:xfrm>
+          <a:prstGeom prst="rect">
+            <a:avLst/>
+          </a:prstGeom>
+          <a:noFill/>
+        </p:spPr>
+        <p:txBody>
+          <a:bodyPr wrap="square" anchor="t" lIns="36000" rIns="36000" tIns="18000" bIns="18000">
+            <a:spAutoFit/>
+          </a:bodyPr>
+          <a:lstStyle/>
+          <a:p>
+            <a:pPr algn="l"/>
+            <a:r>
+              <a:rPr sz="1000" b="0" i="0">
                 <a:solidFill>
                   <a:srgbClr val="475569"/>
                 </a:solidFill>
                 <a:latin typeface="Noto Sans JP"/>
               </a:rPr>
-              <a:t>DSC（示差走査熱量）</a:t>
+              <a:t>DSC（熱量）</a:t>
             </a:r>
           </a:p>
         </p:txBody>
@@ -11454,19 +11872,19 @@
         <p:spPr>
           <a:xfrm>
             <a:off x="365760" y="859536"/>
-            <a:ext cx="3734714" cy="3291840"/>
+            <a:ext cx="3734714" cy="2194560"/>
           </a:xfrm>
           <a:prstGeom prst="roundRect">
             <a:avLst>
-              <a:gd name="adj" fmla="val 4000"/>
+              <a:gd name="adj" fmla="val 2000"/>
             </a:avLst>
           </a:prstGeom>
           <a:solidFill>
-            <a:srgbClr val="F1F5F9"/>
+            <a:srgbClr val="F5F8FC"/>
           </a:solidFill>
-          <a:ln w="6350">
+          <a:ln w="12700">
             <a:solidFill>
-              <a:srgbClr val="E2E8F0"/>
+              <a:srgbClr val="C0D0E0"/>
             </a:solidFill>
           </a:ln>
           <a:effectLst/>
@@ -11501,8 +11919,1437 @@
         </p:nvSpPr>
         <p:spPr>
           <a:xfrm>
+            <a:off x="475488" y="969264"/>
+            <a:ext cx="868680" cy="292608"/>
+          </a:xfrm>
+          <a:prstGeom prst="rect">
+            <a:avLst/>
+          </a:prstGeom>
+          <a:solidFill>
+            <a:srgbClr val="1E293B"/>
+          </a:solidFill>
+          <a:ln>
+            <a:noFill/>
+          </a:ln>
+          <a:effectLst/>
+        </p:spPr>
+        <p:style>
+          <a:lnRef idx="1">
+            <a:schemeClr val="accent1"/>
+          </a:lnRef>
+          <a:fillRef idx="3">
+            <a:schemeClr val="accent1"/>
+          </a:fillRef>
+          <a:effectRef idx="2">
+            <a:schemeClr val="accent1"/>
+          </a:effectRef>
+          <a:fontRef idx="minor">
+            <a:schemeClr val="lt1"/>
+          </a:fontRef>
+        </p:style>
+        <p:txBody>
+          <a:bodyPr rtlCol="0" anchor="ctr"/>
+          <a:lstStyle/>
+          <a:p>
+            <a:pPr algn="ctr"/>
+          </a:p>
+        </p:txBody>
+      </p:sp>
+      <p:sp>
+        <p:nvSpPr>
+          <p:cNvPr id="12" name="TextBox 11"/>
+          <p:cNvSpPr txBox="1"/>
+          <p:nvPr/>
+        </p:nvSpPr>
+        <p:spPr>
+          <a:xfrm>
+            <a:off x="475488" y="969264"/>
+            <a:ext cx="868680" cy="292608"/>
+          </a:xfrm>
+          <a:prstGeom prst="rect">
+            <a:avLst/>
+          </a:prstGeom>
+          <a:noFill/>
+        </p:spPr>
+        <p:txBody>
+          <a:bodyPr wrap="square" anchor="ctr" lIns="36000" rIns="36000" tIns="18000" bIns="18000">
+            <a:spAutoFit/>
+          </a:bodyPr>
+          <a:lstStyle/>
+          <a:p>
+            <a:pPr algn="ctr"/>
+            <a:r>
+              <a:rPr sz="1100" b="1" i="0">
+                <a:solidFill>
+                  <a:srgbClr val="FFFFFF"/>
+                </a:solidFill>
+                <a:latin typeface="Noto Sans JP"/>
+              </a:rPr>
+              <a:t>Photo</a:t>
+            </a:r>
+          </a:p>
+        </p:txBody>
+      </p:sp>
+      <p:sp>
+        <p:nvSpPr>
+          <p:cNvPr id="13" name="TextBox 12"/>
+          <p:cNvSpPr txBox="1"/>
+          <p:nvPr/>
+        </p:nvSpPr>
+        <p:spPr>
+          <a:xfrm>
             <a:off x="365760" y="859536"/>
-            <a:ext cx="3734714" cy="36576"/>
+            <a:ext cx="3734714" cy="2194560"/>
+          </a:xfrm>
+          <a:prstGeom prst="rect">
+            <a:avLst/>
+          </a:prstGeom>
+          <a:noFill/>
+        </p:spPr>
+        <p:txBody>
+          <a:bodyPr wrap="square" anchor="ctr" lIns="36000" rIns="36000" tIns="18000" bIns="18000">
+            <a:spAutoFit/>
+          </a:bodyPr>
+          <a:lstStyle/>
+          <a:p>
+            <a:pPr algn="ctr"/>
+            <a:r>
+              <a:rPr sz="1200" b="0" i="0">
+                <a:solidFill>
+                  <a:srgbClr val="AAB4C0"/>
+                </a:solidFill>
+                <a:latin typeface="Noto Sans JP"/>
+              </a:rPr>
+              <a:t>（論文の図を貼り付け）</a:t>
+            </a:r>
+          </a:p>
+        </p:txBody>
+      </p:sp>
+      <p:sp>
+        <p:nvSpPr>
+          <p:cNvPr id="14" name="TextBox 13"/>
+          <p:cNvSpPr txBox="1"/>
+          <p:nvPr/>
+        </p:nvSpPr>
+        <p:spPr>
+          <a:xfrm>
+            <a:off x="365760" y="3090672"/>
+            <a:ext cx="3734714" cy="274320"/>
+          </a:xfrm>
+          <a:prstGeom prst="rect">
+            <a:avLst/>
+          </a:prstGeom>
+          <a:noFill/>
+        </p:spPr>
+        <p:txBody>
+          <a:bodyPr wrap="square" anchor="t" lIns="36000" rIns="36000" tIns="18000" bIns="18000">
+            <a:spAutoFit/>
+          </a:bodyPr>
+          <a:lstStyle/>
+          <a:p>
+            <a:pPr algn="ctr"/>
+            <a:r>
+              <a:rPr sz="1000" b="0" i="1">
+                <a:solidFill>
+                  <a:srgbClr val="64748B"/>
+                </a:solidFill>
+                <a:latin typeface="Noto Sans JP"/>
+              </a:rPr>
+              <a:t>木材上での接触角</a:t>
+            </a:r>
+          </a:p>
+        </p:txBody>
+      </p:sp>
+      <p:sp>
+        <p:nvSpPr>
+          <p:cNvPr id="15" name="TextBox 14"/>
+          <p:cNvSpPr txBox="1"/>
+          <p:nvPr/>
+        </p:nvSpPr>
+        <p:spPr>
+          <a:xfrm>
+            <a:off x="365760" y="3401568"/>
+            <a:ext cx="3734714" cy="237744"/>
+          </a:xfrm>
+          <a:prstGeom prst="rect">
+            <a:avLst/>
+          </a:prstGeom>
+          <a:noFill/>
+        </p:spPr>
+        <p:txBody>
+          <a:bodyPr wrap="square" anchor="t" lIns="36000" rIns="36000" tIns="18000" bIns="18000">
+            <a:spAutoFit/>
+          </a:bodyPr>
+          <a:lstStyle/>
+          <a:p>
+            <a:pPr algn="l"/>
+            <a:r>
+              <a:rPr sz="1000" b="1" i="0">
+                <a:solidFill>
+                  <a:srgbClr val="64748B"/>
+                </a:solidFill>
+                <a:latin typeface="Noto Sans JP"/>
+              </a:rPr>
+              <a:t>WETTING</a:t>
+            </a:r>
+          </a:p>
+        </p:txBody>
+      </p:sp>
+      <p:sp>
+        <p:nvSpPr>
+          <p:cNvPr id="16" name="TextBox 15"/>
+          <p:cNvSpPr txBox="1"/>
+          <p:nvPr/>
+        </p:nvSpPr>
+        <p:spPr>
+          <a:xfrm>
+            <a:off x="365760" y="3639312"/>
+            <a:ext cx="3734714" cy="310896"/>
+          </a:xfrm>
+          <a:prstGeom prst="rect">
+            <a:avLst/>
+          </a:prstGeom>
+          <a:noFill/>
+        </p:spPr>
+        <p:txBody>
+          <a:bodyPr wrap="square" anchor="t" lIns="36000" rIns="36000" tIns="18000" bIns="18000">
+            <a:spAutoFit/>
+          </a:bodyPr>
+          <a:lstStyle/>
+          <a:p>
+            <a:pPr algn="l"/>
+            <a:r>
+              <a:rPr sz="1400" b="1" i="0">
+                <a:solidFill>
+                  <a:srgbClr val="1E293B"/>
+                </a:solidFill>
+                <a:latin typeface="Noto Sans JP"/>
+              </a:rPr>
+              <a:t>接触角測定</a:t>
+            </a:r>
+          </a:p>
+        </p:txBody>
+      </p:sp>
+      <p:sp>
+        <p:nvSpPr>
+          <p:cNvPr id="17" name="TextBox 16"/>
+          <p:cNvSpPr txBox="1"/>
+          <p:nvPr/>
+        </p:nvSpPr>
+        <p:spPr>
+          <a:xfrm>
+            <a:off x="365760" y="4023360"/>
+            <a:ext cx="182880" cy="274320"/>
+          </a:xfrm>
+          <a:prstGeom prst="rect">
+            <a:avLst/>
+          </a:prstGeom>
+          <a:noFill/>
+        </p:spPr>
+        <p:txBody>
+          <a:bodyPr wrap="square" anchor="t" lIns="36000" rIns="36000" tIns="18000" bIns="18000">
+            <a:spAutoFit/>
+          </a:bodyPr>
+          <a:lstStyle/>
+          <a:p>
+            <a:pPr algn="l"/>
+            <a:r>
+              <a:rPr sz="1100" b="0" i="0">
+                <a:solidFill>
+                  <a:srgbClr val="3B5174"/>
+                </a:solidFill>
+                <a:latin typeface="Noto Sans JP"/>
+              </a:rPr>
+              <a:t>•</a:t>
+            </a:r>
+          </a:p>
+        </p:txBody>
+      </p:sp>
+      <p:sp>
+        <p:nvSpPr>
+          <p:cNvPr id="18" name="TextBox 17"/>
+          <p:cNvSpPr txBox="1"/>
+          <p:nvPr/>
+        </p:nvSpPr>
+        <p:spPr>
+          <a:xfrm>
+            <a:off x="566928" y="4023360"/>
+            <a:ext cx="3533546" cy="274320"/>
+          </a:xfrm>
+          <a:prstGeom prst="rect">
+            <a:avLst/>
+          </a:prstGeom>
+          <a:noFill/>
+        </p:spPr>
+        <p:txBody>
+          <a:bodyPr wrap="square" anchor="t" lIns="36000" rIns="36000" tIns="18000" bIns="18000">
+            <a:spAutoFit/>
+          </a:bodyPr>
+          <a:lstStyle/>
+          <a:p>
+            <a:pPr algn="l"/>
+            <a:r>
+              <a:rPr sz="1100" b="0" i="0">
+                <a:solidFill>
+                  <a:srgbClr val="334155"/>
+                </a:solidFill>
+                <a:latin typeface="Noto Sans JP"/>
+              </a:rPr>
+              <a:t>木材・コンクリート・金属で評価</a:t>
+            </a:r>
+          </a:p>
+        </p:txBody>
+      </p:sp>
+      <p:sp>
+        <p:nvSpPr>
+          <p:cNvPr id="19" name="TextBox 18"/>
+          <p:cNvSpPr txBox="1"/>
+          <p:nvPr/>
+        </p:nvSpPr>
+        <p:spPr>
+          <a:xfrm>
+            <a:off x="365760" y="4334256"/>
+            <a:ext cx="182880" cy="274320"/>
+          </a:xfrm>
+          <a:prstGeom prst="rect">
+            <a:avLst/>
+          </a:prstGeom>
+          <a:noFill/>
+        </p:spPr>
+        <p:txBody>
+          <a:bodyPr wrap="square" anchor="t" lIns="36000" rIns="36000" tIns="18000" bIns="18000">
+            <a:spAutoFit/>
+          </a:bodyPr>
+          <a:lstStyle/>
+          <a:p>
+            <a:pPr algn="l"/>
+            <a:r>
+              <a:rPr sz="1100" b="0" i="0">
+                <a:solidFill>
+                  <a:srgbClr val="3B5174"/>
+                </a:solidFill>
+                <a:latin typeface="Noto Sans JP"/>
+              </a:rPr>
+              <a:t>•</a:t>
+            </a:r>
+          </a:p>
+        </p:txBody>
+      </p:sp>
+      <p:sp>
+        <p:nvSpPr>
+          <p:cNvPr id="20" name="TextBox 19"/>
+          <p:cNvSpPr txBox="1"/>
+          <p:nvPr/>
+        </p:nvSpPr>
+        <p:spPr>
+          <a:xfrm>
+            <a:off x="566928" y="4334256"/>
+            <a:ext cx="3533546" cy="274320"/>
+          </a:xfrm>
+          <a:prstGeom prst="rect">
+            <a:avLst/>
+          </a:prstGeom>
+          <a:noFill/>
+        </p:spPr>
+        <p:txBody>
+          <a:bodyPr wrap="square" anchor="t" lIns="36000" rIns="36000" tIns="18000" bIns="18000">
+            <a:spAutoFit/>
+          </a:bodyPr>
+          <a:lstStyle/>
+          <a:p>
+            <a:pPr algn="l"/>
+            <a:r>
+              <a:rPr sz="1100" b="0" i="0">
+                <a:solidFill>
+                  <a:srgbClr val="334155"/>
+                </a:solidFill>
+                <a:latin typeface="Noto Sans JP"/>
+              </a:rPr>
+              <a:t>WEGは低接触角 → 高い濡れ性</a:t>
+            </a:r>
+          </a:p>
+        </p:txBody>
+      </p:sp>
+      <p:sp>
+        <p:nvSpPr>
+          <p:cNvPr id="21" name="TextBox 20"/>
+          <p:cNvSpPr txBox="1"/>
+          <p:nvPr/>
+        </p:nvSpPr>
+        <p:spPr>
+          <a:xfrm>
+            <a:off x="365760" y="4645152"/>
+            <a:ext cx="182880" cy="274320"/>
+          </a:xfrm>
+          <a:prstGeom prst="rect">
+            <a:avLst/>
+          </a:prstGeom>
+          <a:noFill/>
+        </p:spPr>
+        <p:txBody>
+          <a:bodyPr wrap="square" anchor="t" lIns="36000" rIns="36000" tIns="18000" bIns="18000">
+            <a:spAutoFit/>
+          </a:bodyPr>
+          <a:lstStyle/>
+          <a:p>
+            <a:pPr algn="l"/>
+            <a:r>
+              <a:rPr sz="1100" b="0" i="0">
+                <a:solidFill>
+                  <a:srgbClr val="3B5174"/>
+                </a:solidFill>
+                <a:latin typeface="Noto Sans JP"/>
+              </a:rPr>
+              <a:t>•</a:t>
+            </a:r>
+          </a:p>
+        </p:txBody>
+      </p:sp>
+      <p:sp>
+        <p:nvSpPr>
+          <p:cNvPr id="22" name="TextBox 21"/>
+          <p:cNvSpPr txBox="1"/>
+          <p:nvPr/>
+        </p:nvSpPr>
+        <p:spPr>
+          <a:xfrm>
+            <a:off x="566928" y="4645152"/>
+            <a:ext cx="3533546" cy="274320"/>
+          </a:xfrm>
+          <a:prstGeom prst="rect">
+            <a:avLst/>
+          </a:prstGeom>
+          <a:noFill/>
+        </p:spPr>
+        <p:txBody>
+          <a:bodyPr wrap="square" anchor="t" lIns="36000" rIns="36000" tIns="18000" bIns="18000">
+            <a:spAutoFit/>
+          </a:bodyPr>
+          <a:lstStyle/>
+          <a:p>
+            <a:pPr algn="l"/>
+            <a:r>
+              <a:rPr sz="1100" b="0" i="0">
+                <a:solidFill>
+                  <a:srgbClr val="334155"/>
+                </a:solidFill>
+                <a:latin typeface="Noto Sans JP"/>
+              </a:rPr>
+              <a:t>HEC+MCは木材との親和性が高い</a:t>
+            </a:r>
+          </a:p>
+        </p:txBody>
+      </p:sp>
+      <p:sp>
+        <p:nvSpPr>
+          <p:cNvPr id="23" name="Rounded Rectangle 22"/>
+          <p:cNvSpPr/>
+          <p:nvPr/>
+        </p:nvSpPr>
+        <p:spPr>
+          <a:xfrm>
+            <a:off x="4228490" y="859536"/>
+            <a:ext cx="3734714" cy="2194560"/>
+          </a:xfrm>
+          <a:prstGeom prst="roundRect">
+            <a:avLst>
+              <a:gd name="adj" fmla="val 2000"/>
+            </a:avLst>
+          </a:prstGeom>
+          <a:solidFill>
+            <a:srgbClr val="F5F8FC"/>
+          </a:solidFill>
+          <a:ln w="12700">
+            <a:solidFill>
+              <a:srgbClr val="C0D0E0"/>
+            </a:solidFill>
+          </a:ln>
+          <a:effectLst/>
+        </p:spPr>
+        <p:style>
+          <a:lnRef idx="1">
+            <a:schemeClr val="accent1"/>
+          </a:lnRef>
+          <a:fillRef idx="3">
+            <a:schemeClr val="accent1"/>
+          </a:fillRef>
+          <a:effectRef idx="2">
+            <a:schemeClr val="accent1"/>
+          </a:effectRef>
+          <a:fontRef idx="minor">
+            <a:schemeClr val="lt1"/>
+          </a:fontRef>
+        </p:style>
+        <p:txBody>
+          <a:bodyPr rtlCol="0" anchor="ctr"/>
+          <a:lstStyle/>
+          <a:p>
+            <a:pPr algn="ctr"/>
+          </a:p>
+        </p:txBody>
+      </p:sp>
+      <p:sp>
+        <p:nvSpPr>
+          <p:cNvPr id="24" name="Rectangle 23"/>
+          <p:cNvSpPr/>
+          <p:nvPr/>
+        </p:nvSpPr>
+        <p:spPr>
+          <a:xfrm>
+            <a:off x="4338218" y="969264"/>
+            <a:ext cx="868680" cy="292608"/>
+          </a:xfrm>
+          <a:prstGeom prst="rect">
+            <a:avLst/>
+          </a:prstGeom>
+          <a:solidFill>
+            <a:srgbClr val="1E293B"/>
+          </a:solidFill>
+          <a:ln>
+            <a:noFill/>
+          </a:ln>
+          <a:effectLst/>
+        </p:spPr>
+        <p:style>
+          <a:lnRef idx="1">
+            <a:schemeClr val="accent1"/>
+          </a:lnRef>
+          <a:fillRef idx="3">
+            <a:schemeClr val="accent1"/>
+          </a:fillRef>
+          <a:effectRef idx="2">
+            <a:schemeClr val="accent1"/>
+          </a:effectRef>
+          <a:fontRef idx="minor">
+            <a:schemeClr val="lt1"/>
+          </a:fontRef>
+        </p:style>
+        <p:txBody>
+          <a:bodyPr rtlCol="0" anchor="ctr"/>
+          <a:lstStyle/>
+          <a:p>
+            <a:pPr algn="ctr"/>
+          </a:p>
+        </p:txBody>
+      </p:sp>
+      <p:sp>
+        <p:nvSpPr>
+          <p:cNvPr id="25" name="TextBox 24"/>
+          <p:cNvSpPr txBox="1"/>
+          <p:nvPr/>
+        </p:nvSpPr>
+        <p:spPr>
+          <a:xfrm>
+            <a:off x="4338218" y="969264"/>
+            <a:ext cx="868680" cy="292608"/>
+          </a:xfrm>
+          <a:prstGeom prst="rect">
+            <a:avLst/>
+          </a:prstGeom>
+          <a:noFill/>
+        </p:spPr>
+        <p:txBody>
+          <a:bodyPr wrap="square" anchor="ctr" lIns="36000" rIns="36000" tIns="18000" bIns="18000">
+            <a:spAutoFit/>
+          </a:bodyPr>
+          <a:lstStyle/>
+          <a:p>
+            <a:pPr algn="ctr"/>
+            <a:r>
+              <a:rPr sz="1100" b="1" i="0">
+                <a:solidFill>
+                  <a:srgbClr val="FFFFFF"/>
+                </a:solidFill>
+                <a:latin typeface="Noto Sans JP"/>
+              </a:rPr>
+              <a:t>Photo</a:t>
+            </a:r>
+          </a:p>
+        </p:txBody>
+      </p:sp>
+      <p:sp>
+        <p:nvSpPr>
+          <p:cNvPr id="26" name="TextBox 25"/>
+          <p:cNvSpPr txBox="1"/>
+          <p:nvPr/>
+        </p:nvSpPr>
+        <p:spPr>
+          <a:xfrm>
+            <a:off x="4228490" y="859536"/>
+            <a:ext cx="3734714" cy="2194560"/>
+          </a:xfrm>
+          <a:prstGeom prst="rect">
+            <a:avLst/>
+          </a:prstGeom>
+          <a:noFill/>
+        </p:spPr>
+        <p:txBody>
+          <a:bodyPr wrap="square" anchor="ctr" lIns="36000" rIns="36000" tIns="18000" bIns="18000">
+            <a:spAutoFit/>
+          </a:bodyPr>
+          <a:lstStyle/>
+          <a:p>
+            <a:pPr algn="ctr"/>
+            <a:r>
+              <a:rPr sz="1200" b="0" i="0">
+                <a:solidFill>
+                  <a:srgbClr val="AAB4C0"/>
+                </a:solidFill>
+                <a:latin typeface="Noto Sans JP"/>
+              </a:rPr>
+              <a:t>（論文の図を貼り付け）</a:t>
+            </a:r>
+          </a:p>
+        </p:txBody>
+      </p:sp>
+      <p:sp>
+        <p:nvSpPr>
+          <p:cNvPr id="27" name="TextBox 26"/>
+          <p:cNvSpPr txBox="1"/>
+          <p:nvPr/>
+        </p:nvSpPr>
+        <p:spPr>
+          <a:xfrm>
+            <a:off x="4228490" y="3090672"/>
+            <a:ext cx="3734714" cy="274320"/>
+          </a:xfrm>
+          <a:prstGeom prst="rect">
+            <a:avLst/>
+          </a:prstGeom>
+          <a:noFill/>
+        </p:spPr>
+        <p:txBody>
+          <a:bodyPr wrap="square" anchor="t" lIns="36000" rIns="36000" tIns="18000" bIns="18000">
+            <a:spAutoFit/>
+          </a:bodyPr>
+          <a:lstStyle/>
+          <a:p>
+            <a:pPr algn="ctr"/>
+            <a:r>
+              <a:rPr sz="1000" b="0" i="1">
+                <a:solidFill>
+                  <a:srgbClr val="64748B"/>
+                </a:solidFill>
+                <a:latin typeface="Noto Sans JP"/>
+              </a:rPr>
+              <a:t>垂直基板でのゲル保持</a:t>
+            </a:r>
+          </a:p>
+        </p:txBody>
+      </p:sp>
+      <p:sp>
+        <p:nvSpPr>
+          <p:cNvPr id="28" name="TextBox 27"/>
+          <p:cNvSpPr txBox="1"/>
+          <p:nvPr/>
+        </p:nvSpPr>
+        <p:spPr>
+          <a:xfrm>
+            <a:off x="4228490" y="3401568"/>
+            <a:ext cx="3734714" cy="237744"/>
+          </a:xfrm>
+          <a:prstGeom prst="rect">
+            <a:avLst/>
+          </a:prstGeom>
+          <a:noFill/>
+        </p:spPr>
+        <p:txBody>
+          <a:bodyPr wrap="square" anchor="t" lIns="36000" rIns="36000" tIns="18000" bIns="18000">
+            <a:spAutoFit/>
+          </a:bodyPr>
+          <a:lstStyle/>
+          <a:p>
+            <a:pPr algn="l"/>
+            <a:r>
+              <a:rPr sz="1000" b="1" i="0">
+                <a:solidFill>
+                  <a:srgbClr val="64748B"/>
+                </a:solidFill>
+                <a:latin typeface="Noto Sans JP"/>
+              </a:rPr>
+              <a:t>ADHESION</a:t>
+            </a:r>
+          </a:p>
+        </p:txBody>
+      </p:sp>
+      <p:sp>
+        <p:nvSpPr>
+          <p:cNvPr id="29" name="TextBox 28"/>
+          <p:cNvSpPr txBox="1"/>
+          <p:nvPr/>
+        </p:nvSpPr>
+        <p:spPr>
+          <a:xfrm>
+            <a:off x="4228490" y="3639312"/>
+            <a:ext cx="3734714" cy="310896"/>
+          </a:xfrm>
+          <a:prstGeom prst="rect">
+            <a:avLst/>
+          </a:prstGeom>
+          <a:noFill/>
+        </p:spPr>
+        <p:txBody>
+          <a:bodyPr wrap="square" anchor="t" lIns="36000" rIns="36000" tIns="18000" bIns="18000">
+            <a:spAutoFit/>
+          </a:bodyPr>
+          <a:lstStyle/>
+          <a:p>
+            <a:pPr algn="l"/>
+            <a:r>
+              <a:rPr sz="1400" b="1" i="0">
+                <a:solidFill>
+                  <a:srgbClr val="1E293B"/>
+                </a:solidFill>
+                <a:latin typeface="Noto Sans JP"/>
+              </a:rPr>
+              <a:t>垂直面付着試験</a:t>
+            </a:r>
+          </a:p>
+        </p:txBody>
+      </p:sp>
+      <p:sp>
+        <p:nvSpPr>
+          <p:cNvPr id="30" name="TextBox 29"/>
+          <p:cNvSpPr txBox="1"/>
+          <p:nvPr/>
+        </p:nvSpPr>
+        <p:spPr>
+          <a:xfrm>
+            <a:off x="4228490" y="4023360"/>
+            <a:ext cx="182880" cy="274320"/>
+          </a:xfrm>
+          <a:prstGeom prst="rect">
+            <a:avLst/>
+          </a:prstGeom>
+          <a:noFill/>
+        </p:spPr>
+        <p:txBody>
+          <a:bodyPr wrap="square" anchor="t" lIns="36000" rIns="36000" tIns="18000" bIns="18000">
+            <a:spAutoFit/>
+          </a:bodyPr>
+          <a:lstStyle/>
+          <a:p>
+            <a:pPr algn="l"/>
+            <a:r>
+              <a:rPr sz="1100" b="0" i="0">
+                <a:solidFill>
+                  <a:srgbClr val="3B5174"/>
+                </a:solidFill>
+                <a:latin typeface="Noto Sans JP"/>
+              </a:rPr>
+              <a:t>•</a:t>
+            </a:r>
+          </a:p>
+        </p:txBody>
+      </p:sp>
+      <p:sp>
+        <p:nvSpPr>
+          <p:cNvPr id="31" name="TextBox 30"/>
+          <p:cNvSpPr txBox="1"/>
+          <p:nvPr/>
+        </p:nvSpPr>
+        <p:spPr>
+          <a:xfrm>
+            <a:off x="4429658" y="4023360"/>
+            <a:ext cx="3533546" cy="274320"/>
+          </a:xfrm>
+          <a:prstGeom prst="rect">
+            <a:avLst/>
+          </a:prstGeom>
+          <a:noFill/>
+        </p:spPr>
+        <p:txBody>
+          <a:bodyPr wrap="square" anchor="t" lIns="36000" rIns="36000" tIns="18000" bIns="18000">
+            <a:spAutoFit/>
+          </a:bodyPr>
+          <a:lstStyle/>
+          <a:p>
+            <a:pPr algn="l"/>
+            <a:r>
+              <a:rPr sz="1100" b="0" i="0">
+                <a:solidFill>
+                  <a:srgbClr val="334155"/>
+                </a:solidFill>
+                <a:latin typeface="Noto Sans JP"/>
+              </a:rPr>
+              <a:t>垂直基板に塗布し保持性を評価</a:t>
+            </a:r>
+          </a:p>
+        </p:txBody>
+      </p:sp>
+      <p:sp>
+        <p:nvSpPr>
+          <p:cNvPr id="32" name="TextBox 31"/>
+          <p:cNvSpPr txBox="1"/>
+          <p:nvPr/>
+        </p:nvSpPr>
+        <p:spPr>
+          <a:xfrm>
+            <a:off x="4228490" y="4334256"/>
+            <a:ext cx="182880" cy="274320"/>
+          </a:xfrm>
+          <a:prstGeom prst="rect">
+            <a:avLst/>
+          </a:prstGeom>
+          <a:noFill/>
+        </p:spPr>
+        <p:txBody>
+          <a:bodyPr wrap="square" anchor="t" lIns="36000" rIns="36000" tIns="18000" bIns="18000">
+            <a:spAutoFit/>
+          </a:bodyPr>
+          <a:lstStyle/>
+          <a:p>
+            <a:pPr algn="l"/>
+            <a:r>
+              <a:rPr sz="1100" b="0" i="0">
+                <a:solidFill>
+                  <a:srgbClr val="3B5174"/>
+                </a:solidFill>
+                <a:latin typeface="Noto Sans JP"/>
+              </a:rPr>
+              <a:t>•</a:t>
+            </a:r>
+          </a:p>
+        </p:txBody>
+      </p:sp>
+      <p:sp>
+        <p:nvSpPr>
+          <p:cNvPr id="33" name="TextBox 32"/>
+          <p:cNvSpPr txBox="1"/>
+          <p:nvPr/>
+        </p:nvSpPr>
+        <p:spPr>
+          <a:xfrm>
+            <a:off x="4429658" y="4334256"/>
+            <a:ext cx="3533546" cy="274320"/>
+          </a:xfrm>
+          <a:prstGeom prst="rect">
+            <a:avLst/>
+          </a:prstGeom>
+          <a:noFill/>
+        </p:spPr>
+        <p:txBody>
+          <a:bodyPr wrap="square" anchor="t" lIns="36000" rIns="36000" tIns="18000" bIns="18000">
+            <a:spAutoFit/>
+          </a:bodyPr>
+          <a:lstStyle/>
+          <a:p>
+            <a:pPr algn="l"/>
+            <a:r>
+              <a:rPr sz="1100" b="0" i="0">
+                <a:solidFill>
+                  <a:srgbClr val="334155"/>
+                </a:solidFill>
+                <a:latin typeface="Noto Sans JP"/>
+              </a:rPr>
+              <a:t>G' ≫ G'' → 流れ落ちない</a:t>
+            </a:r>
+          </a:p>
+        </p:txBody>
+      </p:sp>
+      <p:sp>
+        <p:nvSpPr>
+          <p:cNvPr id="34" name="TextBox 33"/>
+          <p:cNvSpPr txBox="1"/>
+          <p:nvPr/>
+        </p:nvSpPr>
+        <p:spPr>
+          <a:xfrm>
+            <a:off x="4228490" y="4645152"/>
+            <a:ext cx="182880" cy="274320"/>
+          </a:xfrm>
+          <a:prstGeom prst="rect">
+            <a:avLst/>
+          </a:prstGeom>
+          <a:noFill/>
+        </p:spPr>
+        <p:txBody>
+          <a:bodyPr wrap="square" anchor="t" lIns="36000" rIns="36000" tIns="18000" bIns="18000">
+            <a:spAutoFit/>
+          </a:bodyPr>
+          <a:lstStyle/>
+          <a:p>
+            <a:pPr algn="l"/>
+            <a:r>
+              <a:rPr sz="1100" b="0" i="0">
+                <a:solidFill>
+                  <a:srgbClr val="3B5174"/>
+                </a:solidFill>
+                <a:latin typeface="Noto Sans JP"/>
+              </a:rPr>
+              <a:t>•</a:t>
+            </a:r>
+          </a:p>
+        </p:txBody>
+      </p:sp>
+      <p:sp>
+        <p:nvSpPr>
+          <p:cNvPr id="35" name="TextBox 34"/>
+          <p:cNvSpPr txBox="1"/>
+          <p:nvPr/>
+        </p:nvSpPr>
+        <p:spPr>
+          <a:xfrm>
+            <a:off x="4429658" y="4645152"/>
+            <a:ext cx="3533546" cy="274320"/>
+          </a:xfrm>
+          <a:prstGeom prst="rect">
+            <a:avLst/>
+          </a:prstGeom>
+          <a:noFill/>
+        </p:spPr>
+        <p:txBody>
+          <a:bodyPr wrap="square" anchor="t" lIns="36000" rIns="36000" tIns="18000" bIns="18000">
+            <a:spAutoFit/>
+          </a:bodyPr>
+          <a:lstStyle/>
+          <a:p>
+            <a:pPr algn="l"/>
+            <a:r>
+              <a:rPr sz="1100" b="0" i="0">
+                <a:solidFill>
+                  <a:srgbClr val="334155"/>
+                </a:solidFill>
+                <a:latin typeface="Noto Sans JP"/>
+              </a:rPr>
+              <a:t>AquaGel-K同等以上の保持性</a:t>
+            </a:r>
+          </a:p>
+        </p:txBody>
+      </p:sp>
+      <p:sp>
+        <p:nvSpPr>
+          <p:cNvPr id="36" name="Rounded Rectangle 35"/>
+          <p:cNvSpPr/>
+          <p:nvPr/>
+        </p:nvSpPr>
+        <p:spPr>
+          <a:xfrm>
+            <a:off x="8091220" y="859536"/>
+            <a:ext cx="3734714" cy="2194560"/>
+          </a:xfrm>
+          <a:prstGeom prst="roundRect">
+            <a:avLst>
+              <a:gd name="adj" fmla="val 2000"/>
+            </a:avLst>
+          </a:prstGeom>
+          <a:solidFill>
+            <a:srgbClr val="F5F8FC"/>
+          </a:solidFill>
+          <a:ln w="12700">
+            <a:solidFill>
+              <a:srgbClr val="C0D0E0"/>
+            </a:solidFill>
+          </a:ln>
+          <a:effectLst/>
+        </p:spPr>
+        <p:style>
+          <a:lnRef idx="1">
+            <a:schemeClr val="accent1"/>
+          </a:lnRef>
+          <a:fillRef idx="3">
+            <a:schemeClr val="accent1"/>
+          </a:fillRef>
+          <a:effectRef idx="2">
+            <a:schemeClr val="accent1"/>
+          </a:effectRef>
+          <a:fontRef idx="minor">
+            <a:schemeClr val="lt1"/>
+          </a:fontRef>
+        </p:style>
+        <p:txBody>
+          <a:bodyPr rtlCol="0" anchor="ctr"/>
+          <a:lstStyle/>
+          <a:p>
+            <a:pPr algn="ctr"/>
+          </a:p>
+        </p:txBody>
+      </p:sp>
+      <p:sp>
+        <p:nvSpPr>
+          <p:cNvPr id="37" name="Rectangle 36"/>
+          <p:cNvSpPr/>
+          <p:nvPr/>
+        </p:nvSpPr>
+        <p:spPr>
+          <a:xfrm>
+            <a:off x="8200948" y="969264"/>
+            <a:ext cx="868680" cy="292608"/>
+          </a:xfrm>
+          <a:prstGeom prst="rect">
+            <a:avLst/>
+          </a:prstGeom>
+          <a:solidFill>
+            <a:srgbClr val="1E293B"/>
+          </a:solidFill>
+          <a:ln>
+            <a:noFill/>
+          </a:ln>
+          <a:effectLst/>
+        </p:spPr>
+        <p:style>
+          <a:lnRef idx="1">
+            <a:schemeClr val="accent1"/>
+          </a:lnRef>
+          <a:fillRef idx="3">
+            <a:schemeClr val="accent1"/>
+          </a:fillRef>
+          <a:effectRef idx="2">
+            <a:schemeClr val="accent1"/>
+          </a:effectRef>
+          <a:fontRef idx="minor">
+            <a:schemeClr val="lt1"/>
+          </a:fontRef>
+        </p:style>
+        <p:txBody>
+          <a:bodyPr rtlCol="0" anchor="ctr"/>
+          <a:lstStyle/>
+          <a:p>
+            <a:pPr algn="ctr"/>
+          </a:p>
+        </p:txBody>
+      </p:sp>
+      <p:sp>
+        <p:nvSpPr>
+          <p:cNvPr id="38" name="TextBox 37"/>
+          <p:cNvSpPr txBox="1"/>
+          <p:nvPr/>
+        </p:nvSpPr>
+        <p:spPr>
+          <a:xfrm>
+            <a:off x="8200948" y="969264"/>
+            <a:ext cx="868680" cy="292608"/>
+          </a:xfrm>
+          <a:prstGeom prst="rect">
+            <a:avLst/>
+          </a:prstGeom>
+          <a:noFill/>
+        </p:spPr>
+        <p:txBody>
+          <a:bodyPr wrap="square" anchor="ctr" lIns="36000" rIns="36000" tIns="18000" bIns="18000">
+            <a:spAutoFit/>
+          </a:bodyPr>
+          <a:lstStyle/>
+          <a:p>
+            <a:pPr algn="ctr"/>
+            <a:r>
+              <a:rPr sz="1100" b="1" i="0">
+                <a:solidFill>
+                  <a:srgbClr val="FFFFFF"/>
+                </a:solidFill>
+                <a:latin typeface="Noto Sans JP"/>
+              </a:rPr>
+              <a:t>Photo</a:t>
+            </a:r>
+          </a:p>
+        </p:txBody>
+      </p:sp>
+      <p:sp>
+        <p:nvSpPr>
+          <p:cNvPr id="39" name="TextBox 38"/>
+          <p:cNvSpPr txBox="1"/>
+          <p:nvPr/>
+        </p:nvSpPr>
+        <p:spPr>
+          <a:xfrm>
+            <a:off x="8091220" y="859536"/>
+            <a:ext cx="3734714" cy="2194560"/>
+          </a:xfrm>
+          <a:prstGeom prst="rect">
+            <a:avLst/>
+          </a:prstGeom>
+          <a:noFill/>
+        </p:spPr>
+        <p:txBody>
+          <a:bodyPr wrap="square" anchor="ctr" lIns="36000" rIns="36000" tIns="18000" bIns="18000">
+            <a:spAutoFit/>
+          </a:bodyPr>
+          <a:lstStyle/>
+          <a:p>
+            <a:pPr algn="ctr"/>
+            <a:r>
+              <a:rPr sz="1200" b="0" i="0">
+                <a:solidFill>
+                  <a:srgbClr val="AAB4C0"/>
+                </a:solidFill>
+                <a:latin typeface="Noto Sans JP"/>
+              </a:rPr>
+              <a:t>（論文の図を貼り付け）</a:t>
+            </a:r>
+          </a:p>
+        </p:txBody>
+      </p:sp>
+      <p:sp>
+        <p:nvSpPr>
+          <p:cNvPr id="40" name="TextBox 39"/>
+          <p:cNvSpPr txBox="1"/>
+          <p:nvPr/>
+        </p:nvSpPr>
+        <p:spPr>
+          <a:xfrm>
+            <a:off x="8091220" y="3090672"/>
+            <a:ext cx="3734714" cy="274320"/>
+          </a:xfrm>
+          <a:prstGeom prst="rect">
+            <a:avLst/>
+          </a:prstGeom>
+          <a:noFill/>
+        </p:spPr>
+        <p:txBody>
+          <a:bodyPr wrap="square" anchor="t" lIns="36000" rIns="36000" tIns="18000" bIns="18000">
+            <a:spAutoFit/>
+          </a:bodyPr>
+          <a:lstStyle/>
+          <a:p>
+            <a:pPr algn="ctr"/>
+            <a:r>
+              <a:rPr sz="1000" b="0" i="1">
+                <a:solidFill>
+                  <a:srgbClr val="64748B"/>
+                </a:solidFill>
+                <a:latin typeface="Noto Sans JP"/>
+              </a:rPr>
+              <a:t>ノズル噴霧の様子</a:t>
+            </a:r>
+          </a:p>
+        </p:txBody>
+      </p:sp>
+      <p:sp>
+        <p:nvSpPr>
+          <p:cNvPr id="41" name="TextBox 40"/>
+          <p:cNvSpPr txBox="1"/>
+          <p:nvPr/>
+        </p:nvSpPr>
+        <p:spPr>
+          <a:xfrm>
+            <a:off x="8091220" y="3401568"/>
+            <a:ext cx="3734714" cy="237744"/>
+          </a:xfrm>
+          <a:prstGeom prst="rect">
+            <a:avLst/>
+          </a:prstGeom>
+          <a:noFill/>
+        </p:spPr>
+        <p:txBody>
+          <a:bodyPr wrap="square" anchor="t" lIns="36000" rIns="36000" tIns="18000" bIns="18000">
+            <a:spAutoFit/>
+          </a:bodyPr>
+          <a:lstStyle/>
+          <a:p>
+            <a:pPr algn="l"/>
+            <a:r>
+              <a:rPr sz="1000" b="1" i="0">
+                <a:solidFill>
+                  <a:srgbClr val="64748B"/>
+                </a:solidFill>
+                <a:latin typeface="Noto Sans JP"/>
+              </a:rPr>
+              <a:t>SPRAY</a:t>
+            </a:r>
+          </a:p>
+        </p:txBody>
+      </p:sp>
+      <p:sp>
+        <p:nvSpPr>
+          <p:cNvPr id="42" name="TextBox 41"/>
+          <p:cNvSpPr txBox="1"/>
+          <p:nvPr/>
+        </p:nvSpPr>
+        <p:spPr>
+          <a:xfrm>
+            <a:off x="8091220" y="3639312"/>
+            <a:ext cx="3734714" cy="310896"/>
+          </a:xfrm>
+          <a:prstGeom prst="rect">
+            <a:avLst/>
+          </a:prstGeom>
+          <a:noFill/>
+        </p:spPr>
+        <p:txBody>
+          <a:bodyPr wrap="square" anchor="t" lIns="36000" rIns="36000" tIns="18000" bIns="18000">
+            <a:spAutoFit/>
+          </a:bodyPr>
+          <a:lstStyle/>
+          <a:p>
+            <a:pPr algn="l"/>
+            <a:r>
+              <a:rPr sz="1400" b="1" i="0">
+                <a:solidFill>
+                  <a:srgbClr val="1E293B"/>
+                </a:solidFill>
+                <a:latin typeface="Noto Sans JP"/>
+              </a:rPr>
+              <a:t>スプレー散布適性</a:t>
+            </a:r>
+          </a:p>
+        </p:txBody>
+      </p:sp>
+      <p:sp>
+        <p:nvSpPr>
+          <p:cNvPr id="43" name="TextBox 42"/>
+          <p:cNvSpPr txBox="1"/>
+          <p:nvPr/>
+        </p:nvSpPr>
+        <p:spPr>
+          <a:xfrm>
+            <a:off x="8091220" y="4023360"/>
+            <a:ext cx="182880" cy="274320"/>
+          </a:xfrm>
+          <a:prstGeom prst="rect">
+            <a:avLst/>
+          </a:prstGeom>
+          <a:noFill/>
+        </p:spPr>
+        <p:txBody>
+          <a:bodyPr wrap="square" anchor="t" lIns="36000" rIns="36000" tIns="18000" bIns="18000">
+            <a:spAutoFit/>
+          </a:bodyPr>
+          <a:lstStyle/>
+          <a:p>
+            <a:pPr algn="l"/>
+            <a:r>
+              <a:rPr sz="1100" b="0" i="0">
+                <a:solidFill>
+                  <a:srgbClr val="3B5174"/>
+                </a:solidFill>
+                <a:latin typeface="Noto Sans JP"/>
+              </a:rPr>
+              <a:t>•</a:t>
+            </a:r>
+          </a:p>
+        </p:txBody>
+      </p:sp>
+      <p:sp>
+        <p:nvSpPr>
+          <p:cNvPr id="44" name="TextBox 43"/>
+          <p:cNvSpPr txBox="1"/>
+          <p:nvPr/>
+        </p:nvSpPr>
+        <p:spPr>
+          <a:xfrm>
+            <a:off x="8292388" y="4023360"/>
+            <a:ext cx="3533546" cy="274320"/>
+          </a:xfrm>
+          <a:prstGeom prst="rect">
+            <a:avLst/>
+          </a:prstGeom>
+          <a:noFill/>
+        </p:spPr>
+        <p:txBody>
+          <a:bodyPr wrap="square" anchor="t" lIns="36000" rIns="36000" tIns="18000" bIns="18000">
+            <a:spAutoFit/>
+          </a:bodyPr>
+          <a:lstStyle/>
+          <a:p>
+            <a:pPr algn="l"/>
+            <a:r>
+              <a:rPr sz="1100" b="0" i="0">
+                <a:solidFill>
+                  <a:srgbClr val="334155"/>
+                </a:solidFill>
+                <a:latin typeface="Noto Sans JP"/>
+              </a:rPr>
+              <a:t>高せん断で粘度が急低下</a:t>
+            </a:r>
+          </a:p>
+        </p:txBody>
+      </p:sp>
+      <p:sp>
+        <p:nvSpPr>
+          <p:cNvPr id="45" name="TextBox 44"/>
+          <p:cNvSpPr txBox="1"/>
+          <p:nvPr/>
+        </p:nvSpPr>
+        <p:spPr>
+          <a:xfrm>
+            <a:off x="8091220" y="4334256"/>
+            <a:ext cx="182880" cy="274320"/>
+          </a:xfrm>
+          <a:prstGeom prst="rect">
+            <a:avLst/>
+          </a:prstGeom>
+          <a:noFill/>
+        </p:spPr>
+        <p:txBody>
+          <a:bodyPr wrap="square" anchor="t" lIns="36000" rIns="36000" tIns="18000" bIns="18000">
+            <a:spAutoFit/>
+          </a:bodyPr>
+          <a:lstStyle/>
+          <a:p>
+            <a:pPr algn="l"/>
+            <a:r>
+              <a:rPr sz="1100" b="0" i="0">
+                <a:solidFill>
+                  <a:srgbClr val="3B5174"/>
+                </a:solidFill>
+                <a:latin typeface="Noto Sans JP"/>
+              </a:rPr>
+              <a:t>•</a:t>
+            </a:r>
+          </a:p>
+        </p:txBody>
+      </p:sp>
+      <p:sp>
+        <p:nvSpPr>
+          <p:cNvPr id="46" name="TextBox 45"/>
+          <p:cNvSpPr txBox="1"/>
+          <p:nvPr/>
+        </p:nvSpPr>
+        <p:spPr>
+          <a:xfrm>
+            <a:off x="8292388" y="4334256"/>
+            <a:ext cx="3533546" cy="274320"/>
+          </a:xfrm>
+          <a:prstGeom prst="rect">
+            <a:avLst/>
+          </a:prstGeom>
+          <a:noFill/>
+        </p:spPr>
+        <p:txBody>
+          <a:bodyPr wrap="square" anchor="t" lIns="36000" rIns="36000" tIns="18000" bIns="18000">
+            <a:spAutoFit/>
+          </a:bodyPr>
+          <a:lstStyle/>
+          <a:p>
+            <a:pPr algn="l"/>
+            <a:r>
+              <a:rPr sz="1100" b="0" i="0">
+                <a:solidFill>
+                  <a:srgbClr val="334155"/>
+                </a:solidFill>
+                <a:latin typeface="Noto Sans JP"/>
+              </a:rPr>
+              <a:t>到達後すぐ高粘度を回復</a:t>
+            </a:r>
+          </a:p>
+        </p:txBody>
+      </p:sp>
+      <p:sp>
+        <p:nvSpPr>
+          <p:cNvPr id="47" name="TextBox 46"/>
+          <p:cNvSpPr txBox="1"/>
+          <p:nvPr/>
+        </p:nvSpPr>
+        <p:spPr>
+          <a:xfrm>
+            <a:off x="8091220" y="4645152"/>
+            <a:ext cx="182880" cy="274320"/>
+          </a:xfrm>
+          <a:prstGeom prst="rect">
+            <a:avLst/>
+          </a:prstGeom>
+          <a:noFill/>
+        </p:spPr>
+        <p:txBody>
+          <a:bodyPr wrap="square" anchor="t" lIns="36000" rIns="36000" tIns="18000" bIns="18000">
+            <a:spAutoFit/>
+          </a:bodyPr>
+          <a:lstStyle/>
+          <a:p>
+            <a:pPr algn="l"/>
+            <a:r>
+              <a:rPr sz="1100" b="0" i="0">
+                <a:solidFill>
+                  <a:srgbClr val="3B5174"/>
+                </a:solidFill>
+                <a:latin typeface="Noto Sans JP"/>
+              </a:rPr>
+              <a:t>•</a:t>
+            </a:r>
+          </a:p>
+        </p:txBody>
+      </p:sp>
+      <p:sp>
+        <p:nvSpPr>
+          <p:cNvPr id="48" name="TextBox 47"/>
+          <p:cNvSpPr txBox="1"/>
+          <p:nvPr/>
+        </p:nvSpPr>
+        <p:spPr>
+          <a:xfrm>
+            <a:off x="8292388" y="4645152"/>
+            <a:ext cx="3533546" cy="274320"/>
+          </a:xfrm>
+          <a:prstGeom prst="rect">
+            <a:avLst/>
+          </a:prstGeom>
+          <a:noFill/>
+        </p:spPr>
+        <p:txBody>
+          <a:bodyPr wrap="square" anchor="t" lIns="36000" rIns="36000" tIns="18000" bIns="18000">
+            <a:spAutoFit/>
+          </a:bodyPr>
+          <a:lstStyle/>
+          <a:p>
+            <a:pPr algn="l"/>
+            <a:r>
+              <a:rPr sz="1100" b="0" i="0">
+                <a:solidFill>
+                  <a:srgbClr val="334155"/>
+                </a:solidFill>
+                <a:latin typeface="Noto Sans JP"/>
+              </a:rPr>
+              <a:t>既存ホース・ノズルと互換</a:t>
+            </a:r>
+          </a:p>
+        </p:txBody>
+      </p:sp>
+      <p:sp>
+        <p:nvSpPr>
+          <p:cNvPr id="49" name="Rounded Rectangle 48"/>
+          <p:cNvSpPr/>
+          <p:nvPr/>
+        </p:nvSpPr>
+        <p:spPr>
+          <a:xfrm>
+            <a:off x="365760" y="5980176"/>
+            <a:ext cx="11460175" cy="658368"/>
+          </a:xfrm>
+          <a:prstGeom prst="roundRect">
+            <a:avLst>
+              <a:gd name="adj" fmla="val 4000"/>
+            </a:avLst>
+          </a:prstGeom>
+          <a:solidFill>
+            <a:srgbClr val="F8FAFC"/>
+          </a:solidFill>
+          <a:ln>
+            <a:noFill/>
+          </a:ln>
+          <a:effectLst/>
+        </p:spPr>
+        <p:style>
+          <a:lnRef idx="1">
+            <a:schemeClr val="accent1"/>
+          </a:lnRef>
+          <a:fillRef idx="3">
+            <a:schemeClr val="accent1"/>
+          </a:fillRef>
+          <a:effectRef idx="2">
+            <a:schemeClr val="accent1"/>
+          </a:effectRef>
+          <a:fontRef idx="minor">
+            <a:schemeClr val="lt1"/>
+          </a:fontRef>
+        </p:style>
+        <p:txBody>
+          <a:bodyPr rtlCol="0" anchor="ctr"/>
+          <a:lstStyle/>
+          <a:p>
+            <a:pPr algn="ctr"/>
+          </a:p>
+        </p:txBody>
+      </p:sp>
+      <p:sp>
+        <p:nvSpPr>
+          <p:cNvPr id="50" name="Rectangle 49"/>
+          <p:cNvSpPr/>
+          <p:nvPr/>
+        </p:nvSpPr>
+        <p:spPr>
+          <a:xfrm>
+            <a:off x="365760" y="5980176"/>
+            <a:ext cx="54864" cy="658368"/>
           </a:xfrm>
           <a:prstGeom prst="rect">
             <a:avLst/>
@@ -11539,1148 +13386,34 @@
       </p:sp>
       <p:sp>
         <p:nvSpPr>
-          <p:cNvPr id="12" name="TextBox 11"/>
-          <p:cNvSpPr txBox="1"/>
-          <p:nvPr/>
-        </p:nvSpPr>
-        <p:spPr>
-          <a:xfrm>
-            <a:off x="548640" y="1024128"/>
-            <a:ext cx="3368954" cy="219456"/>
-          </a:xfrm>
-          <a:prstGeom prst="rect">
-            <a:avLst/>
-          </a:prstGeom>
-          <a:noFill/>
-        </p:spPr>
-        <p:txBody>
-          <a:bodyPr wrap="square" anchor="t" lIns="36000" rIns="36000" tIns="18000" bIns="18000">
-            <a:spAutoFit/>
-          </a:bodyPr>
-          <a:lstStyle/>
-          <a:p>
-            <a:pPr algn="l"/>
-            <a:r>
-              <a:rPr sz="1000" b="1" i="0">
-                <a:solidFill>
-                  <a:srgbClr val="64748B"/>
-                </a:solidFill>
-                <a:latin typeface="Noto Sans JP"/>
-              </a:rPr>
-              <a:t>WETTING</a:t>
-            </a:r>
-          </a:p>
-        </p:txBody>
-      </p:sp>
-      <p:sp>
-        <p:nvSpPr>
-          <p:cNvPr id="13" name="TextBox 12"/>
-          <p:cNvSpPr txBox="1"/>
-          <p:nvPr/>
-        </p:nvSpPr>
-        <p:spPr>
-          <a:xfrm>
-            <a:off x="548640" y="1261872"/>
-            <a:ext cx="3368954" cy="329184"/>
-          </a:xfrm>
-          <a:prstGeom prst="rect">
-            <a:avLst/>
-          </a:prstGeom>
-          <a:noFill/>
-        </p:spPr>
-        <p:txBody>
-          <a:bodyPr wrap="square" anchor="t" lIns="36000" rIns="36000" tIns="18000" bIns="18000">
-            <a:spAutoFit/>
-          </a:bodyPr>
-          <a:lstStyle/>
-          <a:p>
-            <a:pPr algn="l"/>
-            <a:r>
-              <a:rPr sz="1500" b="1" i="0">
-                <a:solidFill>
-                  <a:srgbClr val="1E293B"/>
-                </a:solidFill>
-                <a:latin typeface="Noto Sans JP"/>
-              </a:rPr>
-              <a:t>接触角測定</a:t>
-            </a:r>
-          </a:p>
-        </p:txBody>
-      </p:sp>
-      <p:sp>
-        <p:nvSpPr>
-          <p:cNvPr id="14" name="TextBox 13"/>
-          <p:cNvSpPr txBox="1"/>
-          <p:nvPr/>
-        </p:nvSpPr>
-        <p:spPr>
-          <a:xfrm>
-            <a:off x="548640" y="1627632"/>
-            <a:ext cx="182880" cy="274320"/>
-          </a:xfrm>
-          <a:prstGeom prst="rect">
-            <a:avLst/>
-          </a:prstGeom>
-          <a:noFill/>
-        </p:spPr>
-        <p:txBody>
-          <a:bodyPr wrap="square" anchor="t" lIns="36000" rIns="36000" tIns="18000" bIns="18000">
-            <a:spAutoFit/>
-          </a:bodyPr>
-          <a:lstStyle/>
-          <a:p>
-            <a:pPr algn="l"/>
-            <a:r>
-              <a:rPr sz="1200" b="0" i="0">
+          <p:cNvPr id="51" name="TextBox 50"/>
+          <p:cNvSpPr txBox="1"/>
+          <p:nvPr/>
+        </p:nvSpPr>
+        <p:spPr>
+          <a:xfrm>
+            <a:off x="548640" y="5980176"/>
+            <a:ext cx="365760" cy="658368"/>
+          </a:xfrm>
+          <a:prstGeom prst="rect">
+            <a:avLst/>
+          </a:prstGeom>
+          <a:noFill/>
+        </p:spPr>
+        <p:txBody>
+          <a:bodyPr wrap="square" anchor="ctr" lIns="36000" rIns="36000" tIns="18000" bIns="18000">
+            <a:spAutoFit/>
+          </a:bodyPr>
+          <a:lstStyle/>
+          <a:p>
+            <a:pPr algn="l"/>
+            <a:r>
+              <a:rPr sz="1400" b="0" i="0">
                 <a:solidFill>
                   <a:srgbClr val="3B5174"/>
                 </a:solidFill>
                 <a:latin typeface="Noto Sans JP"/>
               </a:rPr>
-              <a:t>•</a:t>
-            </a:r>
-          </a:p>
-        </p:txBody>
-      </p:sp>
-      <p:sp>
-        <p:nvSpPr>
-          <p:cNvPr id="15" name="TextBox 14"/>
-          <p:cNvSpPr txBox="1"/>
-          <p:nvPr/>
-        </p:nvSpPr>
-        <p:spPr>
-          <a:xfrm>
-            <a:off x="749808" y="1627632"/>
-            <a:ext cx="3167786" cy="274320"/>
-          </a:xfrm>
-          <a:prstGeom prst="rect">
-            <a:avLst/>
-          </a:prstGeom>
-          <a:noFill/>
-        </p:spPr>
-        <p:txBody>
-          <a:bodyPr wrap="square" anchor="t" lIns="36000" rIns="36000" tIns="18000" bIns="18000">
-            <a:spAutoFit/>
-          </a:bodyPr>
-          <a:lstStyle/>
-          <a:p>
-            <a:pPr algn="l"/>
-            <a:r>
-              <a:rPr sz="1200" b="0" i="0">
-                <a:solidFill>
-                  <a:srgbClr val="475569"/>
-                </a:solidFill>
-                <a:latin typeface="Noto Sans JP"/>
-              </a:rPr>
-              <a:t>木材・コンクリート・金属板で接触角評価</a:t>
-            </a:r>
-          </a:p>
-        </p:txBody>
-      </p:sp>
-      <p:sp>
-        <p:nvSpPr>
-          <p:cNvPr id="16" name="TextBox 15"/>
-          <p:cNvSpPr txBox="1"/>
-          <p:nvPr/>
-        </p:nvSpPr>
-        <p:spPr>
-          <a:xfrm>
-            <a:off x="548640" y="1901952"/>
-            <a:ext cx="182880" cy="274320"/>
-          </a:xfrm>
-          <a:prstGeom prst="rect">
-            <a:avLst/>
-          </a:prstGeom>
-          <a:noFill/>
-        </p:spPr>
-        <p:txBody>
-          <a:bodyPr wrap="square" anchor="t" lIns="36000" rIns="36000" tIns="18000" bIns="18000">
-            <a:spAutoFit/>
-          </a:bodyPr>
-          <a:lstStyle/>
-          <a:p>
-            <a:pPr algn="l"/>
-            <a:r>
-              <a:rPr sz="1200" b="0" i="0">
-                <a:solidFill>
-                  <a:srgbClr val="3B5174"/>
-                </a:solidFill>
-                <a:latin typeface="Noto Sans JP"/>
-              </a:rPr>
-              <a:t>•</a:t>
-            </a:r>
-          </a:p>
-        </p:txBody>
-      </p:sp>
-      <p:sp>
-        <p:nvSpPr>
-          <p:cNvPr id="17" name="TextBox 16"/>
-          <p:cNvSpPr txBox="1"/>
-          <p:nvPr/>
-        </p:nvSpPr>
-        <p:spPr>
-          <a:xfrm>
-            <a:off x="749808" y="1901952"/>
-            <a:ext cx="3167786" cy="274320"/>
-          </a:xfrm>
-          <a:prstGeom prst="rect">
-            <a:avLst/>
-          </a:prstGeom>
-          <a:noFill/>
-        </p:spPr>
-        <p:txBody>
-          <a:bodyPr wrap="square" anchor="t" lIns="36000" rIns="36000" tIns="18000" bIns="18000">
-            <a:spAutoFit/>
-          </a:bodyPr>
-          <a:lstStyle/>
-          <a:p>
-            <a:pPr algn="l"/>
-            <a:r>
-              <a:rPr sz="1200" b="0" i="0">
-                <a:solidFill>
-                  <a:srgbClr val="475569"/>
-                </a:solidFill>
-                <a:latin typeface="Noto Sans JP"/>
-              </a:rPr>
-              <a:t>WEGは低接触角 → 高い濡れ性</a:t>
-            </a:r>
-          </a:p>
-        </p:txBody>
-      </p:sp>
-      <p:sp>
-        <p:nvSpPr>
-          <p:cNvPr id="18" name="TextBox 17"/>
-          <p:cNvSpPr txBox="1"/>
-          <p:nvPr/>
-        </p:nvSpPr>
-        <p:spPr>
-          <a:xfrm>
-            <a:off x="548640" y="2176272"/>
-            <a:ext cx="182880" cy="274320"/>
-          </a:xfrm>
-          <a:prstGeom prst="rect">
-            <a:avLst/>
-          </a:prstGeom>
-          <a:noFill/>
-        </p:spPr>
-        <p:txBody>
-          <a:bodyPr wrap="square" anchor="t" lIns="36000" rIns="36000" tIns="18000" bIns="18000">
-            <a:spAutoFit/>
-          </a:bodyPr>
-          <a:lstStyle/>
-          <a:p>
-            <a:pPr algn="l"/>
-            <a:r>
-              <a:rPr sz="1200" b="0" i="0">
-                <a:solidFill>
-                  <a:srgbClr val="3B5174"/>
-                </a:solidFill>
-                <a:latin typeface="Noto Sans JP"/>
-              </a:rPr>
-              <a:t>•</a:t>
-            </a:r>
-          </a:p>
-        </p:txBody>
-      </p:sp>
-      <p:sp>
-        <p:nvSpPr>
-          <p:cNvPr id="19" name="TextBox 18"/>
-          <p:cNvSpPr txBox="1"/>
-          <p:nvPr/>
-        </p:nvSpPr>
-        <p:spPr>
-          <a:xfrm>
-            <a:off x="749808" y="2176272"/>
-            <a:ext cx="3167786" cy="274320"/>
-          </a:xfrm>
-          <a:prstGeom prst="rect">
-            <a:avLst/>
-          </a:prstGeom>
-          <a:noFill/>
-        </p:spPr>
-        <p:txBody>
-          <a:bodyPr wrap="square" anchor="t" lIns="36000" rIns="36000" tIns="18000" bIns="18000">
-            <a:spAutoFit/>
-          </a:bodyPr>
-          <a:lstStyle/>
-          <a:p>
-            <a:pPr algn="l"/>
-            <a:r>
-              <a:rPr sz="1200" b="0" i="0">
-                <a:solidFill>
-                  <a:srgbClr val="475569"/>
-                </a:solidFill>
-                <a:latin typeface="Noto Sans JP"/>
-              </a:rPr>
-              <a:t>HEC+MCはセルロース-木材間で特に親和性が高い</a:t>
-            </a:r>
-          </a:p>
-        </p:txBody>
-      </p:sp>
-      <p:sp>
-        <p:nvSpPr>
-          <p:cNvPr id="20" name="Rounded Rectangle 19"/>
-          <p:cNvSpPr/>
-          <p:nvPr/>
-        </p:nvSpPr>
-        <p:spPr>
-          <a:xfrm>
-            <a:off x="4228490" y="859536"/>
-            <a:ext cx="3734714" cy="3291840"/>
-          </a:xfrm>
-          <a:prstGeom prst="roundRect">
-            <a:avLst>
-              <a:gd name="adj" fmla="val 4000"/>
-            </a:avLst>
-          </a:prstGeom>
-          <a:solidFill>
-            <a:srgbClr val="F1F5F9"/>
-          </a:solidFill>
-          <a:ln w="6350">
-            <a:solidFill>
-              <a:srgbClr val="E2E8F0"/>
-            </a:solidFill>
-          </a:ln>
-          <a:effectLst/>
-        </p:spPr>
-        <p:style>
-          <a:lnRef idx="1">
-            <a:schemeClr val="accent1"/>
-          </a:lnRef>
-          <a:fillRef idx="3">
-            <a:schemeClr val="accent1"/>
-          </a:fillRef>
-          <a:effectRef idx="2">
-            <a:schemeClr val="accent1"/>
-          </a:effectRef>
-          <a:fontRef idx="minor">
-            <a:schemeClr val="lt1"/>
-          </a:fontRef>
-        </p:style>
-        <p:txBody>
-          <a:bodyPr rtlCol="0" anchor="ctr"/>
-          <a:lstStyle/>
-          <a:p>
-            <a:pPr algn="ctr"/>
-          </a:p>
-        </p:txBody>
-      </p:sp>
-      <p:sp>
-        <p:nvSpPr>
-          <p:cNvPr id="21" name="Rectangle 20"/>
-          <p:cNvSpPr/>
-          <p:nvPr/>
-        </p:nvSpPr>
-        <p:spPr>
-          <a:xfrm>
-            <a:off x="4228490" y="859536"/>
-            <a:ext cx="3734714" cy="36576"/>
-          </a:xfrm>
-          <a:prstGeom prst="rect">
-            <a:avLst/>
-          </a:prstGeom>
-          <a:solidFill>
-            <a:srgbClr val="3B5174"/>
-          </a:solidFill>
-          <a:ln>
-            <a:noFill/>
-          </a:ln>
-          <a:effectLst/>
-        </p:spPr>
-        <p:style>
-          <a:lnRef idx="1">
-            <a:schemeClr val="accent1"/>
-          </a:lnRef>
-          <a:fillRef idx="3">
-            <a:schemeClr val="accent1"/>
-          </a:fillRef>
-          <a:effectRef idx="2">
-            <a:schemeClr val="accent1"/>
-          </a:effectRef>
-          <a:fontRef idx="minor">
-            <a:schemeClr val="lt1"/>
-          </a:fontRef>
-        </p:style>
-        <p:txBody>
-          <a:bodyPr rtlCol="0" anchor="ctr"/>
-          <a:lstStyle/>
-          <a:p>
-            <a:pPr algn="ctr"/>
-          </a:p>
-        </p:txBody>
-      </p:sp>
-      <p:sp>
-        <p:nvSpPr>
-          <p:cNvPr id="22" name="TextBox 21"/>
-          <p:cNvSpPr txBox="1"/>
-          <p:nvPr/>
-        </p:nvSpPr>
-        <p:spPr>
-          <a:xfrm>
-            <a:off x="4411370" y="1024128"/>
-            <a:ext cx="3368954" cy="219456"/>
-          </a:xfrm>
-          <a:prstGeom prst="rect">
-            <a:avLst/>
-          </a:prstGeom>
-          <a:noFill/>
-        </p:spPr>
-        <p:txBody>
-          <a:bodyPr wrap="square" anchor="t" lIns="36000" rIns="36000" tIns="18000" bIns="18000">
-            <a:spAutoFit/>
-          </a:bodyPr>
-          <a:lstStyle/>
-          <a:p>
-            <a:pPr algn="l"/>
-            <a:r>
-              <a:rPr sz="1000" b="1" i="0">
-                <a:solidFill>
-                  <a:srgbClr val="64748B"/>
-                </a:solidFill>
-                <a:latin typeface="Noto Sans JP"/>
-              </a:rPr>
-              <a:t>ADHESION</a:t>
-            </a:r>
-          </a:p>
-        </p:txBody>
-      </p:sp>
-      <p:sp>
-        <p:nvSpPr>
-          <p:cNvPr id="23" name="TextBox 22"/>
-          <p:cNvSpPr txBox="1"/>
-          <p:nvPr/>
-        </p:nvSpPr>
-        <p:spPr>
-          <a:xfrm>
-            <a:off x="4411370" y="1261872"/>
-            <a:ext cx="3368954" cy="329184"/>
-          </a:xfrm>
-          <a:prstGeom prst="rect">
-            <a:avLst/>
-          </a:prstGeom>
-          <a:noFill/>
-        </p:spPr>
-        <p:txBody>
-          <a:bodyPr wrap="square" anchor="t" lIns="36000" rIns="36000" tIns="18000" bIns="18000">
-            <a:spAutoFit/>
-          </a:bodyPr>
-          <a:lstStyle/>
-          <a:p>
-            <a:pPr algn="l"/>
-            <a:r>
-              <a:rPr sz="1500" b="1" i="0">
-                <a:solidFill>
-                  <a:srgbClr val="1E293B"/>
-                </a:solidFill>
-                <a:latin typeface="Noto Sans JP"/>
-              </a:rPr>
-              <a:t>垂直面付着試験</a:t>
-            </a:r>
-          </a:p>
-        </p:txBody>
-      </p:sp>
-      <p:sp>
-        <p:nvSpPr>
-          <p:cNvPr id="24" name="TextBox 23"/>
-          <p:cNvSpPr txBox="1"/>
-          <p:nvPr/>
-        </p:nvSpPr>
-        <p:spPr>
-          <a:xfrm>
-            <a:off x="4411370" y="1627632"/>
-            <a:ext cx="182880" cy="274320"/>
-          </a:xfrm>
-          <a:prstGeom prst="rect">
-            <a:avLst/>
-          </a:prstGeom>
-          <a:noFill/>
-        </p:spPr>
-        <p:txBody>
-          <a:bodyPr wrap="square" anchor="t" lIns="36000" rIns="36000" tIns="18000" bIns="18000">
-            <a:spAutoFit/>
-          </a:bodyPr>
-          <a:lstStyle/>
-          <a:p>
-            <a:pPr algn="l"/>
-            <a:r>
-              <a:rPr sz="1200" b="0" i="0">
-                <a:solidFill>
-                  <a:srgbClr val="3B5174"/>
-                </a:solidFill>
-                <a:latin typeface="Noto Sans JP"/>
-              </a:rPr>
-              <a:t>•</a:t>
-            </a:r>
-          </a:p>
-        </p:txBody>
-      </p:sp>
-      <p:sp>
-        <p:nvSpPr>
-          <p:cNvPr id="25" name="TextBox 24"/>
-          <p:cNvSpPr txBox="1"/>
-          <p:nvPr/>
-        </p:nvSpPr>
-        <p:spPr>
-          <a:xfrm>
-            <a:off x="4612538" y="1627632"/>
-            <a:ext cx="3167786" cy="274320"/>
-          </a:xfrm>
-          <a:prstGeom prst="rect">
-            <a:avLst/>
-          </a:prstGeom>
-          <a:noFill/>
-        </p:spPr>
-        <p:txBody>
-          <a:bodyPr wrap="square" anchor="t" lIns="36000" rIns="36000" tIns="18000" bIns="18000">
-            <a:spAutoFit/>
-          </a:bodyPr>
-          <a:lstStyle/>
-          <a:p>
-            <a:pPr algn="l"/>
-            <a:r>
-              <a:rPr sz="1200" b="0" i="0">
-                <a:solidFill>
-                  <a:srgbClr val="475569"/>
-                </a:solidFill>
-                <a:latin typeface="Noto Sans JP"/>
-              </a:rPr>
-              <a:t>垂直に立てた基板にゲルを塗布</a:t>
-            </a:r>
-          </a:p>
-        </p:txBody>
-      </p:sp>
-      <p:sp>
-        <p:nvSpPr>
-          <p:cNvPr id="26" name="TextBox 25"/>
-          <p:cNvSpPr txBox="1"/>
-          <p:nvPr/>
-        </p:nvSpPr>
-        <p:spPr>
-          <a:xfrm>
-            <a:off x="4411370" y="1901952"/>
-            <a:ext cx="182880" cy="274320"/>
-          </a:xfrm>
-          <a:prstGeom prst="rect">
-            <a:avLst/>
-          </a:prstGeom>
-          <a:noFill/>
-        </p:spPr>
-        <p:txBody>
-          <a:bodyPr wrap="square" anchor="t" lIns="36000" rIns="36000" tIns="18000" bIns="18000">
-            <a:spAutoFit/>
-          </a:bodyPr>
-          <a:lstStyle/>
-          <a:p>
-            <a:pPr algn="l"/>
-            <a:r>
-              <a:rPr sz="1200" b="0" i="0">
-                <a:solidFill>
-                  <a:srgbClr val="3B5174"/>
-                </a:solidFill>
-                <a:latin typeface="Noto Sans JP"/>
-              </a:rPr>
-              <a:t>•</a:t>
-            </a:r>
-          </a:p>
-        </p:txBody>
-      </p:sp>
-      <p:sp>
-        <p:nvSpPr>
-          <p:cNvPr id="27" name="TextBox 26"/>
-          <p:cNvSpPr txBox="1"/>
-          <p:nvPr/>
-        </p:nvSpPr>
-        <p:spPr>
-          <a:xfrm>
-            <a:off x="4612538" y="1901952"/>
-            <a:ext cx="3167786" cy="274320"/>
-          </a:xfrm>
-          <a:prstGeom prst="rect">
-            <a:avLst/>
-          </a:prstGeom>
-          <a:noFill/>
-        </p:spPr>
-        <p:txBody>
-          <a:bodyPr wrap="square" anchor="t" lIns="36000" rIns="36000" tIns="18000" bIns="18000">
-            <a:spAutoFit/>
-          </a:bodyPr>
-          <a:lstStyle/>
-          <a:p>
-            <a:pPr algn="l"/>
-            <a:r>
-              <a:rPr sz="1200" b="0" i="0">
-                <a:solidFill>
-                  <a:srgbClr val="475569"/>
-                </a:solidFill>
-                <a:latin typeface="Noto Sans JP"/>
-              </a:rPr>
-              <a:t>G' ≫ G'' → 重力に抵抗して流れ落ちない</a:t>
-            </a:r>
-          </a:p>
-        </p:txBody>
-      </p:sp>
-      <p:sp>
-        <p:nvSpPr>
-          <p:cNvPr id="28" name="TextBox 27"/>
-          <p:cNvSpPr txBox="1"/>
-          <p:nvPr/>
-        </p:nvSpPr>
-        <p:spPr>
-          <a:xfrm>
-            <a:off x="4411370" y="2176272"/>
-            <a:ext cx="182880" cy="274320"/>
-          </a:xfrm>
-          <a:prstGeom prst="rect">
-            <a:avLst/>
-          </a:prstGeom>
-          <a:noFill/>
-        </p:spPr>
-        <p:txBody>
-          <a:bodyPr wrap="square" anchor="t" lIns="36000" rIns="36000" tIns="18000" bIns="18000">
-            <a:spAutoFit/>
-          </a:bodyPr>
-          <a:lstStyle/>
-          <a:p>
-            <a:pPr algn="l"/>
-            <a:r>
-              <a:rPr sz="1200" b="0" i="0">
-                <a:solidFill>
-                  <a:srgbClr val="3B5174"/>
-                </a:solidFill>
-                <a:latin typeface="Noto Sans JP"/>
-              </a:rPr>
-              <a:t>•</a:t>
-            </a:r>
-          </a:p>
-        </p:txBody>
-      </p:sp>
-      <p:sp>
-        <p:nvSpPr>
-          <p:cNvPr id="29" name="TextBox 28"/>
-          <p:cNvSpPr txBox="1"/>
-          <p:nvPr/>
-        </p:nvSpPr>
-        <p:spPr>
-          <a:xfrm>
-            <a:off x="4612538" y="2176272"/>
-            <a:ext cx="3167786" cy="274320"/>
-          </a:xfrm>
-          <a:prstGeom prst="rect">
-            <a:avLst/>
-          </a:prstGeom>
-          <a:noFill/>
-        </p:spPr>
-        <p:txBody>
-          <a:bodyPr wrap="square" anchor="t" lIns="36000" rIns="36000" tIns="18000" bIns="18000">
-            <a:spAutoFit/>
-          </a:bodyPr>
-          <a:lstStyle/>
-          <a:p>
-            <a:pPr algn="l"/>
-            <a:r>
-              <a:rPr sz="1200" b="0" i="0">
-                <a:solidFill>
-                  <a:srgbClr val="475569"/>
-                </a:solidFill>
-                <a:latin typeface="Noto Sans JP"/>
-              </a:rPr>
-              <a:t>AquaGel-Kと同等以上の垂直面保持性</a:t>
-            </a:r>
-          </a:p>
-        </p:txBody>
-      </p:sp>
-      <p:sp>
-        <p:nvSpPr>
-          <p:cNvPr id="30" name="Rounded Rectangle 29"/>
-          <p:cNvSpPr/>
-          <p:nvPr/>
-        </p:nvSpPr>
-        <p:spPr>
-          <a:xfrm>
-            <a:off x="8091220" y="859536"/>
-            <a:ext cx="3734714" cy="3291840"/>
-          </a:xfrm>
-          <a:prstGeom prst="roundRect">
-            <a:avLst>
-              <a:gd name="adj" fmla="val 4000"/>
-            </a:avLst>
-          </a:prstGeom>
-          <a:solidFill>
-            <a:srgbClr val="F1F5F9"/>
-          </a:solidFill>
-          <a:ln w="6350">
-            <a:solidFill>
-              <a:srgbClr val="E2E8F0"/>
-            </a:solidFill>
-          </a:ln>
-          <a:effectLst/>
-        </p:spPr>
-        <p:style>
-          <a:lnRef idx="1">
-            <a:schemeClr val="accent1"/>
-          </a:lnRef>
-          <a:fillRef idx="3">
-            <a:schemeClr val="accent1"/>
-          </a:fillRef>
-          <a:effectRef idx="2">
-            <a:schemeClr val="accent1"/>
-          </a:effectRef>
-          <a:fontRef idx="minor">
-            <a:schemeClr val="lt1"/>
-          </a:fontRef>
-        </p:style>
-        <p:txBody>
-          <a:bodyPr rtlCol="0" anchor="ctr"/>
-          <a:lstStyle/>
-          <a:p>
-            <a:pPr algn="ctr"/>
-          </a:p>
-        </p:txBody>
-      </p:sp>
-      <p:sp>
-        <p:nvSpPr>
-          <p:cNvPr id="31" name="Rectangle 30"/>
-          <p:cNvSpPr/>
-          <p:nvPr/>
-        </p:nvSpPr>
-        <p:spPr>
-          <a:xfrm>
-            <a:off x="8091220" y="859536"/>
-            <a:ext cx="3734714" cy="36576"/>
-          </a:xfrm>
-          <a:prstGeom prst="rect">
-            <a:avLst/>
-          </a:prstGeom>
-          <a:solidFill>
-            <a:srgbClr val="3B5174"/>
-          </a:solidFill>
-          <a:ln>
-            <a:noFill/>
-          </a:ln>
-          <a:effectLst/>
-        </p:spPr>
-        <p:style>
-          <a:lnRef idx="1">
-            <a:schemeClr val="accent1"/>
-          </a:lnRef>
-          <a:fillRef idx="3">
-            <a:schemeClr val="accent1"/>
-          </a:fillRef>
-          <a:effectRef idx="2">
-            <a:schemeClr val="accent1"/>
-          </a:effectRef>
-          <a:fontRef idx="minor">
-            <a:schemeClr val="lt1"/>
-          </a:fontRef>
-        </p:style>
-        <p:txBody>
-          <a:bodyPr rtlCol="0" anchor="ctr"/>
-          <a:lstStyle/>
-          <a:p>
-            <a:pPr algn="ctr"/>
-          </a:p>
-        </p:txBody>
-      </p:sp>
-      <p:sp>
-        <p:nvSpPr>
-          <p:cNvPr id="32" name="TextBox 31"/>
-          <p:cNvSpPr txBox="1"/>
-          <p:nvPr/>
-        </p:nvSpPr>
-        <p:spPr>
-          <a:xfrm>
-            <a:off x="8274100" y="1024128"/>
-            <a:ext cx="3368954" cy="219456"/>
-          </a:xfrm>
-          <a:prstGeom prst="rect">
-            <a:avLst/>
-          </a:prstGeom>
-          <a:noFill/>
-        </p:spPr>
-        <p:txBody>
-          <a:bodyPr wrap="square" anchor="t" lIns="36000" rIns="36000" tIns="18000" bIns="18000">
-            <a:spAutoFit/>
-          </a:bodyPr>
-          <a:lstStyle/>
-          <a:p>
-            <a:pPr algn="l"/>
-            <a:r>
-              <a:rPr sz="1000" b="1" i="0">
-                <a:solidFill>
-                  <a:srgbClr val="64748B"/>
-                </a:solidFill>
-                <a:latin typeface="Noto Sans JP"/>
-              </a:rPr>
-              <a:t>SPRAY</a:t>
-            </a:r>
-          </a:p>
-        </p:txBody>
-      </p:sp>
-      <p:sp>
-        <p:nvSpPr>
-          <p:cNvPr id="33" name="TextBox 32"/>
-          <p:cNvSpPr txBox="1"/>
-          <p:nvPr/>
-        </p:nvSpPr>
-        <p:spPr>
-          <a:xfrm>
-            <a:off x="8274100" y="1261872"/>
-            <a:ext cx="3368954" cy="329184"/>
-          </a:xfrm>
-          <a:prstGeom prst="rect">
-            <a:avLst/>
-          </a:prstGeom>
-          <a:noFill/>
-        </p:spPr>
-        <p:txBody>
-          <a:bodyPr wrap="square" anchor="t" lIns="36000" rIns="36000" tIns="18000" bIns="18000">
-            <a:spAutoFit/>
-          </a:bodyPr>
-          <a:lstStyle/>
-          <a:p>
-            <a:pPr algn="l"/>
-            <a:r>
-              <a:rPr sz="1500" b="1" i="0">
-                <a:solidFill>
-                  <a:srgbClr val="1E293B"/>
-                </a:solidFill>
-                <a:latin typeface="Noto Sans JP"/>
-              </a:rPr>
-              <a:t>スプレー散布適性</a:t>
-            </a:r>
-          </a:p>
-        </p:txBody>
-      </p:sp>
-      <p:sp>
-        <p:nvSpPr>
-          <p:cNvPr id="34" name="TextBox 33"/>
-          <p:cNvSpPr txBox="1"/>
-          <p:nvPr/>
-        </p:nvSpPr>
-        <p:spPr>
-          <a:xfrm>
-            <a:off x="8274100" y="1627632"/>
-            <a:ext cx="182880" cy="274320"/>
-          </a:xfrm>
-          <a:prstGeom prst="rect">
-            <a:avLst/>
-          </a:prstGeom>
-          <a:noFill/>
-        </p:spPr>
-        <p:txBody>
-          <a:bodyPr wrap="square" anchor="t" lIns="36000" rIns="36000" tIns="18000" bIns="18000">
-            <a:spAutoFit/>
-          </a:bodyPr>
-          <a:lstStyle/>
-          <a:p>
-            <a:pPr algn="l"/>
-            <a:r>
-              <a:rPr sz="1200" b="0" i="0">
-                <a:solidFill>
-                  <a:srgbClr val="3B5174"/>
-                </a:solidFill>
-                <a:latin typeface="Noto Sans JP"/>
-              </a:rPr>
-              <a:t>•</a:t>
-            </a:r>
-          </a:p>
-        </p:txBody>
-      </p:sp>
-      <p:sp>
-        <p:nvSpPr>
-          <p:cNvPr id="35" name="TextBox 34"/>
-          <p:cNvSpPr txBox="1"/>
-          <p:nvPr/>
-        </p:nvSpPr>
-        <p:spPr>
-          <a:xfrm>
-            <a:off x="8475268" y="1627632"/>
-            <a:ext cx="3167786" cy="274320"/>
-          </a:xfrm>
-          <a:prstGeom prst="rect">
-            <a:avLst/>
-          </a:prstGeom>
-          <a:noFill/>
-        </p:spPr>
-        <p:txBody>
-          <a:bodyPr wrap="square" anchor="t" lIns="36000" rIns="36000" tIns="18000" bIns="18000">
-            <a:spAutoFit/>
-          </a:bodyPr>
-          <a:lstStyle/>
-          <a:p>
-            <a:pPr algn="l"/>
-            <a:r>
-              <a:rPr sz="1200" b="0" i="0">
-                <a:solidFill>
-                  <a:srgbClr val="475569"/>
-                </a:solidFill>
-                <a:latin typeface="Noto Sans JP"/>
-              </a:rPr>
-              <a:t>高せん断（ノズル内）で粘度が急低下</a:t>
-            </a:r>
-          </a:p>
-        </p:txBody>
-      </p:sp>
-      <p:sp>
-        <p:nvSpPr>
-          <p:cNvPr id="36" name="TextBox 35"/>
-          <p:cNvSpPr txBox="1"/>
-          <p:nvPr/>
-        </p:nvSpPr>
-        <p:spPr>
-          <a:xfrm>
-            <a:off x="8274100" y="1901952"/>
-            <a:ext cx="182880" cy="274320"/>
-          </a:xfrm>
-          <a:prstGeom prst="rect">
-            <a:avLst/>
-          </a:prstGeom>
-          <a:noFill/>
-        </p:spPr>
-        <p:txBody>
-          <a:bodyPr wrap="square" anchor="t" lIns="36000" rIns="36000" tIns="18000" bIns="18000">
-            <a:spAutoFit/>
-          </a:bodyPr>
-          <a:lstStyle/>
-          <a:p>
-            <a:pPr algn="l"/>
-            <a:r>
-              <a:rPr sz="1200" b="0" i="0">
-                <a:solidFill>
-                  <a:srgbClr val="3B5174"/>
-                </a:solidFill>
-                <a:latin typeface="Noto Sans JP"/>
-              </a:rPr>
-              <a:t>•</a:t>
-            </a:r>
-          </a:p>
-        </p:txBody>
-      </p:sp>
-      <p:sp>
-        <p:nvSpPr>
-          <p:cNvPr id="37" name="TextBox 36"/>
-          <p:cNvSpPr txBox="1"/>
-          <p:nvPr/>
-        </p:nvSpPr>
-        <p:spPr>
-          <a:xfrm>
-            <a:off x="8475268" y="1901952"/>
-            <a:ext cx="3167786" cy="274320"/>
-          </a:xfrm>
-          <a:prstGeom prst="rect">
-            <a:avLst/>
-          </a:prstGeom>
-          <a:noFill/>
-        </p:spPr>
-        <p:txBody>
-          <a:bodyPr wrap="square" anchor="t" lIns="36000" rIns="36000" tIns="18000" bIns="18000">
-            <a:spAutoFit/>
-          </a:bodyPr>
-          <a:lstStyle/>
-          <a:p>
-            <a:pPr algn="l"/>
-            <a:r>
-              <a:rPr sz="1200" b="0" i="0">
-                <a:solidFill>
-                  <a:srgbClr val="475569"/>
-                </a:solidFill>
-                <a:latin typeface="Noto Sans JP"/>
-              </a:rPr>
-              <a:t>基材到達後すぐに高粘度を回復 → 付着維持</a:t>
-            </a:r>
-          </a:p>
-        </p:txBody>
-      </p:sp>
-      <p:sp>
-        <p:nvSpPr>
-          <p:cNvPr id="38" name="TextBox 37"/>
-          <p:cNvSpPr txBox="1"/>
-          <p:nvPr/>
-        </p:nvSpPr>
-        <p:spPr>
-          <a:xfrm>
-            <a:off x="8274100" y="2176272"/>
-            <a:ext cx="182880" cy="274320"/>
-          </a:xfrm>
-          <a:prstGeom prst="rect">
-            <a:avLst/>
-          </a:prstGeom>
-          <a:noFill/>
-        </p:spPr>
-        <p:txBody>
-          <a:bodyPr wrap="square" anchor="t" lIns="36000" rIns="36000" tIns="18000" bIns="18000">
-            <a:spAutoFit/>
-          </a:bodyPr>
-          <a:lstStyle/>
-          <a:p>
-            <a:pPr algn="l"/>
-            <a:r>
-              <a:rPr sz="1200" b="0" i="0">
-                <a:solidFill>
-                  <a:srgbClr val="3B5174"/>
-                </a:solidFill>
-                <a:latin typeface="Noto Sans JP"/>
-              </a:rPr>
-              <a:t>•</a:t>
-            </a:r>
-          </a:p>
-        </p:txBody>
-      </p:sp>
-      <p:sp>
-        <p:nvSpPr>
-          <p:cNvPr id="39" name="TextBox 38"/>
-          <p:cNvSpPr txBox="1"/>
-          <p:nvPr/>
-        </p:nvSpPr>
-        <p:spPr>
-          <a:xfrm>
-            <a:off x="8475268" y="2176272"/>
-            <a:ext cx="3167786" cy="274320"/>
-          </a:xfrm>
-          <a:prstGeom prst="rect">
-            <a:avLst/>
-          </a:prstGeom>
-          <a:noFill/>
-        </p:spPr>
-        <p:txBody>
-          <a:bodyPr wrap="square" anchor="t" lIns="36000" rIns="36000" tIns="18000" bIns="18000">
-            <a:spAutoFit/>
-          </a:bodyPr>
-          <a:lstStyle/>
-          <a:p>
-            <a:pPr algn="l"/>
-            <a:r>
-              <a:rPr sz="1200" b="0" i="0">
-                <a:solidFill>
-                  <a:srgbClr val="475569"/>
-                </a:solidFill>
-                <a:latin typeface="Noto Sans JP"/>
-              </a:rPr>
-              <a:t>既存消防ホース・ノズルと完全互換</a:t>
-            </a:r>
-          </a:p>
-        </p:txBody>
-      </p:sp>
-      <p:sp>
-        <p:nvSpPr>
-          <p:cNvPr id="40" name="Rounded Rectangle 39"/>
-          <p:cNvSpPr/>
-          <p:nvPr/>
-        </p:nvSpPr>
-        <p:spPr>
-          <a:xfrm>
-            <a:off x="365760" y="4425696"/>
-            <a:ext cx="11460175" cy="731520"/>
-          </a:xfrm>
-          <a:prstGeom prst="roundRect">
-            <a:avLst>
-              <a:gd name="adj" fmla="val 4000"/>
-            </a:avLst>
-          </a:prstGeom>
-          <a:solidFill>
-            <a:srgbClr val="F8FAFC"/>
-          </a:solidFill>
-          <a:ln>
-            <a:noFill/>
-          </a:ln>
-          <a:effectLst/>
-        </p:spPr>
-        <p:style>
-          <a:lnRef idx="1">
-            <a:schemeClr val="accent1"/>
-          </a:lnRef>
-          <a:fillRef idx="3">
-            <a:schemeClr val="accent1"/>
-          </a:fillRef>
-          <a:effectRef idx="2">
-            <a:schemeClr val="accent1"/>
-          </a:effectRef>
-          <a:fontRef idx="minor">
-            <a:schemeClr val="lt1"/>
-          </a:fontRef>
-        </p:style>
-        <p:txBody>
-          <a:bodyPr rtlCol="0" anchor="ctr"/>
-          <a:lstStyle/>
-          <a:p>
-            <a:pPr algn="ctr"/>
-          </a:p>
-        </p:txBody>
-      </p:sp>
-      <p:sp>
-        <p:nvSpPr>
-          <p:cNvPr id="41" name="Rectangle 40"/>
-          <p:cNvSpPr/>
-          <p:nvPr/>
-        </p:nvSpPr>
-        <p:spPr>
-          <a:xfrm>
-            <a:off x="365760" y="4425696"/>
-            <a:ext cx="54864" cy="731520"/>
-          </a:xfrm>
-          <a:prstGeom prst="rect">
-            <a:avLst/>
-          </a:prstGeom>
-          <a:solidFill>
-            <a:srgbClr val="3B5174"/>
-          </a:solidFill>
-          <a:ln>
-            <a:noFill/>
-          </a:ln>
-          <a:effectLst/>
-        </p:spPr>
-        <p:style>
-          <a:lnRef idx="1">
-            <a:schemeClr val="accent1"/>
-          </a:lnRef>
-          <a:fillRef idx="3">
-            <a:schemeClr val="accent1"/>
-          </a:fillRef>
-          <a:effectRef idx="2">
-            <a:schemeClr val="accent1"/>
-          </a:effectRef>
-          <a:fontRef idx="minor">
-            <a:schemeClr val="lt1"/>
-          </a:fontRef>
-        </p:style>
-        <p:txBody>
-          <a:bodyPr rtlCol="0" anchor="ctr"/>
-          <a:lstStyle/>
-          <a:p>
-            <a:pPr algn="ctr"/>
-          </a:p>
-        </p:txBody>
-      </p:sp>
-      <p:sp>
-        <p:nvSpPr>
-          <p:cNvPr id="42" name="TextBox 41"/>
-          <p:cNvSpPr txBox="1"/>
-          <p:nvPr/>
-        </p:nvSpPr>
-        <p:spPr>
-          <a:xfrm>
-            <a:off x="548640" y="4425696"/>
-            <a:ext cx="365760" cy="731520"/>
-          </a:xfrm>
-          <a:prstGeom prst="rect">
-            <a:avLst/>
-          </a:prstGeom>
-          <a:noFill/>
-        </p:spPr>
-        <p:txBody>
-          <a:bodyPr wrap="square" anchor="ctr" lIns="36000" rIns="36000" tIns="18000" bIns="18000">
-            <a:spAutoFit/>
-          </a:bodyPr>
-          <a:lstStyle/>
-          <a:p>
-            <a:pPr algn="l"/>
-            <a:r>
-              <a:rPr sz="1400" b="0" i="0">
-                <a:solidFill>
-                  <a:srgbClr val="3B5174"/>
-                </a:solidFill>
-                <a:latin typeface="Noto Sans JP"/>
-              </a:rPr>
               <a:t>✓</a:t>
             </a:r>
           </a:p>
@@ -12688,14 +13421,14 @@
       </p:sp>
       <p:sp>
         <p:nvSpPr>
-          <p:cNvPr id="43" name="TextBox 42"/>
-          <p:cNvSpPr txBox="1"/>
-          <p:nvPr/>
-        </p:nvSpPr>
-        <p:spPr>
-          <a:xfrm>
-            <a:off x="960120" y="4425696"/>
-            <a:ext cx="10774375" cy="731520"/>
+          <p:cNvPr id="52" name="TextBox 51"/>
+          <p:cNvSpPr txBox="1"/>
+          <p:nvPr/>
+        </p:nvSpPr>
+        <p:spPr>
+          <a:xfrm>
+            <a:off x="960120" y="5980176"/>
+            <a:ext cx="10774375" cy="658368"/>
           </a:xfrm>
           <a:prstGeom prst="rect">
             <a:avLst/>
@@ -47228,7 +47961,7 @@
         <p:spPr>
           <a:xfrm>
             <a:off x="5252185" y="859536"/>
-            <a:ext cx="6573749" cy="5760720"/>
+            <a:ext cx="6573749" cy="2926080"/>
           </a:xfrm>
           <a:prstGeom prst="roundRect">
             <a:avLst>
@@ -47355,7 +48088,7 @@
         <p:spPr>
           <a:xfrm>
             <a:off x="5252185" y="859536"/>
-            <a:ext cx="6573749" cy="5760720"/>
+            <a:ext cx="6573749" cy="2926080"/>
           </a:xfrm>
           <a:prstGeom prst="rect">
             <a:avLst/>
@@ -47389,7 +48122,7 @@
         </p:nvSpPr>
         <p:spPr>
           <a:xfrm>
-            <a:off x="5252185" y="6656832"/>
+            <a:off x="5252185" y="3822192"/>
             <a:ext cx="6573749" cy="274320"/>
           </a:xfrm>
           <a:prstGeom prst="rect">
@@ -47412,6 +48145,238 @@
                 <a:latin typeface="Noto Sans JP"/>
               </a:rPr>
               <a:t>山火事・WUI境界帯（写真）</a:t>
+            </a:r>
+          </a:p>
+        </p:txBody>
+      </p:sp>
+      <p:sp>
+        <p:nvSpPr>
+          <p:cNvPr id="26" name="Rounded Rectangle 25"/>
+          <p:cNvSpPr/>
+          <p:nvPr/>
+        </p:nvSpPr>
+        <p:spPr>
+          <a:xfrm>
+            <a:off x="5252185" y="4206240"/>
+            <a:ext cx="6573749" cy="1828800"/>
+          </a:xfrm>
+          <a:prstGeom prst="roundRect">
+            <a:avLst>
+              <a:gd name="adj" fmla="val 2000"/>
+            </a:avLst>
+          </a:prstGeom>
+          <a:solidFill>
+            <a:srgbClr val="F5F8FC"/>
+          </a:solidFill>
+          <a:ln w="12700">
+            <a:solidFill>
+              <a:srgbClr val="C0D0E0"/>
+            </a:solidFill>
+          </a:ln>
+          <a:effectLst/>
+        </p:spPr>
+        <p:style>
+          <a:lnRef idx="1">
+            <a:schemeClr val="accent1"/>
+          </a:lnRef>
+          <a:fillRef idx="3">
+            <a:schemeClr val="accent1"/>
+          </a:fillRef>
+          <a:effectRef idx="2">
+            <a:schemeClr val="accent1"/>
+          </a:effectRef>
+          <a:fontRef idx="minor">
+            <a:schemeClr val="lt1"/>
+          </a:fontRef>
+        </p:style>
+        <p:txBody>
+          <a:bodyPr rtlCol="0" anchor="ctr"/>
+          <a:lstStyle/>
+          <a:p>
+            <a:pPr algn="ctr"/>
+          </a:p>
+        </p:txBody>
+      </p:sp>
+      <p:sp>
+        <p:nvSpPr>
+          <p:cNvPr id="27" name="Rectangle 26"/>
+          <p:cNvSpPr/>
+          <p:nvPr/>
+        </p:nvSpPr>
+        <p:spPr>
+          <a:xfrm>
+            <a:off x="5361913" y="4315968"/>
+            <a:ext cx="868680" cy="292608"/>
+          </a:xfrm>
+          <a:prstGeom prst="rect">
+            <a:avLst/>
+          </a:prstGeom>
+          <a:solidFill>
+            <a:srgbClr val="B08442"/>
+          </a:solidFill>
+          <a:ln>
+            <a:noFill/>
+          </a:ln>
+          <a:effectLst/>
+        </p:spPr>
+        <p:style>
+          <a:lnRef idx="1">
+            <a:schemeClr val="accent1"/>
+          </a:lnRef>
+          <a:fillRef idx="3">
+            <a:schemeClr val="accent1"/>
+          </a:fillRef>
+          <a:effectRef idx="2">
+            <a:schemeClr val="accent1"/>
+          </a:effectRef>
+          <a:fontRef idx="minor">
+            <a:schemeClr val="lt1"/>
+          </a:fontRef>
+        </p:style>
+        <p:txBody>
+          <a:bodyPr rtlCol="0" anchor="ctr"/>
+          <a:lstStyle/>
+          <a:p>
+            <a:pPr algn="ctr"/>
+          </a:p>
+        </p:txBody>
+      </p:sp>
+      <p:sp>
+        <p:nvSpPr>
+          <p:cNvPr id="28" name="TextBox 27"/>
+          <p:cNvSpPr txBox="1"/>
+          <p:nvPr/>
+        </p:nvSpPr>
+        <p:spPr>
+          <a:xfrm>
+            <a:off x="5361913" y="4315968"/>
+            <a:ext cx="868680" cy="292608"/>
+          </a:xfrm>
+          <a:prstGeom prst="rect">
+            <a:avLst/>
+          </a:prstGeom>
+          <a:noFill/>
+        </p:spPr>
+        <p:txBody>
+          <a:bodyPr wrap="square" anchor="ctr" lIns="36000" rIns="36000" tIns="18000" bIns="18000">
+            <a:spAutoFit/>
+          </a:bodyPr>
+          <a:lstStyle/>
+          <a:p>
+            <a:pPr algn="ctr"/>
+            <a:r>
+              <a:rPr sz="1100" b="1" i="0">
+                <a:solidFill>
+                  <a:srgbClr val="FFFFFF"/>
+                </a:solidFill>
+                <a:latin typeface="Noto Sans JP"/>
+              </a:rPr>
+              <a:t>引用</a:t>
+            </a:r>
+          </a:p>
+        </p:txBody>
+      </p:sp>
+      <p:sp>
+        <p:nvSpPr>
+          <p:cNvPr id="29" name="TextBox 28"/>
+          <p:cNvSpPr txBox="1"/>
+          <p:nvPr/>
+        </p:nvSpPr>
+        <p:spPr>
+          <a:xfrm>
+            <a:off x="5252185" y="4206240"/>
+            <a:ext cx="6573749" cy="1828800"/>
+          </a:xfrm>
+          <a:prstGeom prst="rect">
+            <a:avLst/>
+          </a:prstGeom>
+          <a:noFill/>
+        </p:spPr>
+        <p:txBody>
+          <a:bodyPr wrap="square" anchor="ctr" lIns="36000" rIns="36000" tIns="18000" bIns="18000">
+            <a:spAutoFit/>
+          </a:bodyPr>
+          <a:lstStyle/>
+          <a:p>
+            <a:pPr algn="ctr"/>
+            <a:r>
+              <a:rPr sz="1200" b="0" i="0">
+                <a:solidFill>
+                  <a:srgbClr val="AAB4C0"/>
+                </a:solidFill>
+                <a:latin typeface="Noto Sans JP"/>
+              </a:rPr>
+              <a:t>（引用図を貼り付け）</a:t>
+            </a:r>
+          </a:p>
+        </p:txBody>
+      </p:sp>
+      <p:sp>
+        <p:nvSpPr>
+          <p:cNvPr id="30" name="TextBox 29"/>
+          <p:cNvSpPr txBox="1"/>
+          <p:nvPr/>
+        </p:nvSpPr>
+        <p:spPr>
+          <a:xfrm>
+            <a:off x="5361913" y="5687568"/>
+            <a:ext cx="6354293" cy="256032"/>
+          </a:xfrm>
+          <a:prstGeom prst="rect">
+            <a:avLst/>
+          </a:prstGeom>
+          <a:noFill/>
+        </p:spPr>
+        <p:txBody>
+          <a:bodyPr wrap="square" anchor="t" lIns="36000" rIns="36000" tIns="18000" bIns="18000">
+            <a:spAutoFit/>
+          </a:bodyPr>
+          <a:lstStyle/>
+          <a:p>
+            <a:pPr algn="l"/>
+            <a:r>
+              <a:rPr sz="900" b="0" i="1">
+                <a:solidFill>
+                  <a:srgbClr val="9F7639"/>
+                </a:solidFill>
+                <a:latin typeface="Noto Sans JP"/>
+              </a:rPr>
+              <a:t>出典: ________________（後で記入）</a:t>
+            </a:r>
+          </a:p>
+        </p:txBody>
+      </p:sp>
+      <p:sp>
+        <p:nvSpPr>
+          <p:cNvPr id="31" name="TextBox 30"/>
+          <p:cNvSpPr txBox="1"/>
+          <p:nvPr/>
+        </p:nvSpPr>
+        <p:spPr>
+          <a:xfrm>
+            <a:off x="5252185" y="6071616"/>
+            <a:ext cx="6573749" cy="274320"/>
+          </a:xfrm>
+          <a:prstGeom prst="rect">
+            <a:avLst/>
+          </a:prstGeom>
+          <a:noFill/>
+        </p:spPr>
+        <p:txBody>
+          <a:bodyPr wrap="square" anchor="t" lIns="36000" rIns="36000" tIns="18000" bIns="18000">
+            <a:spAutoFit/>
+          </a:bodyPr>
+          <a:lstStyle/>
+          <a:p>
+            <a:pPr algn="ctr"/>
+            <a:r>
+              <a:rPr sz="1000" b="0" i="1">
+                <a:solidFill>
+                  <a:srgbClr val="64748B"/>
+                </a:solidFill>
+                <a:latin typeface="Noto Sans JP"/>
+              </a:rPr>
+              <a:t>山火事の大規模化・年間焼失面積の経年トレンド</a:t>
             </a:r>
           </a:p>
         </p:txBody>
@@ -51188,7 +52153,7 @@
         <p:spPr>
           <a:xfrm>
             <a:off x="4793778" y="859536"/>
-            <a:ext cx="7032156" cy="5760720"/>
+            <a:ext cx="7032156" cy="2834640"/>
           </a:xfrm>
           <a:prstGeom prst="roundRect">
             <a:avLst>
@@ -51315,7 +52280,7 @@
         <p:spPr>
           <a:xfrm>
             <a:off x="4793778" y="859536"/>
-            <a:ext cx="7032156" cy="5760720"/>
+            <a:ext cx="7032156" cy="2834640"/>
           </a:xfrm>
           <a:prstGeom prst="rect">
             <a:avLst/>
@@ -51349,7 +52314,7 @@
         </p:nvSpPr>
         <p:spPr>
           <a:xfrm>
-            <a:off x="4793778" y="6656832"/>
+            <a:off x="4793778" y="3730752"/>
             <a:ext cx="7032156" cy="274320"/>
           </a:xfrm>
           <a:prstGeom prst="rect">
@@ -51372,6 +52337,470 @@
                 <a:latin typeface="Noto Sans JP"/>
               </a:rPr>
               <a:t>加熱トリガーでゲルが多孔質エアロゲル断熱層へ変態</a:t>
+            </a:r>
+          </a:p>
+        </p:txBody>
+      </p:sp>
+      <p:sp>
+        <p:nvSpPr>
+          <p:cNvPr id="29" name="Rounded Rectangle 28"/>
+          <p:cNvSpPr/>
+          <p:nvPr/>
+        </p:nvSpPr>
+        <p:spPr>
+          <a:xfrm>
+            <a:off x="4793778" y="4078224"/>
+            <a:ext cx="3433782" cy="2011680"/>
+          </a:xfrm>
+          <a:prstGeom prst="roundRect">
+            <a:avLst>
+              <a:gd name="adj" fmla="val 2000"/>
+            </a:avLst>
+          </a:prstGeom>
+          <a:solidFill>
+            <a:srgbClr val="F5F8FC"/>
+          </a:solidFill>
+          <a:ln w="12700">
+            <a:solidFill>
+              <a:srgbClr val="C0D0E0"/>
+            </a:solidFill>
+          </a:ln>
+          <a:effectLst/>
+        </p:spPr>
+        <p:style>
+          <a:lnRef idx="1">
+            <a:schemeClr val="accent1"/>
+          </a:lnRef>
+          <a:fillRef idx="3">
+            <a:schemeClr val="accent1"/>
+          </a:fillRef>
+          <a:effectRef idx="2">
+            <a:schemeClr val="accent1"/>
+          </a:effectRef>
+          <a:fontRef idx="minor">
+            <a:schemeClr val="lt1"/>
+          </a:fontRef>
+        </p:style>
+        <p:txBody>
+          <a:bodyPr rtlCol="0" anchor="ctr"/>
+          <a:lstStyle/>
+          <a:p>
+            <a:pPr algn="ctr"/>
+          </a:p>
+        </p:txBody>
+      </p:sp>
+      <p:sp>
+        <p:nvSpPr>
+          <p:cNvPr id="30" name="Rectangle 29"/>
+          <p:cNvSpPr/>
+          <p:nvPr/>
+        </p:nvSpPr>
+        <p:spPr>
+          <a:xfrm>
+            <a:off x="4903506" y="4187952"/>
+            <a:ext cx="868680" cy="292608"/>
+          </a:xfrm>
+          <a:prstGeom prst="rect">
+            <a:avLst/>
+          </a:prstGeom>
+          <a:solidFill>
+            <a:srgbClr val="B08442"/>
+          </a:solidFill>
+          <a:ln>
+            <a:noFill/>
+          </a:ln>
+          <a:effectLst/>
+        </p:spPr>
+        <p:style>
+          <a:lnRef idx="1">
+            <a:schemeClr val="accent1"/>
+          </a:lnRef>
+          <a:fillRef idx="3">
+            <a:schemeClr val="accent1"/>
+          </a:fillRef>
+          <a:effectRef idx="2">
+            <a:schemeClr val="accent1"/>
+          </a:effectRef>
+          <a:fontRef idx="minor">
+            <a:schemeClr val="lt1"/>
+          </a:fontRef>
+        </p:style>
+        <p:txBody>
+          <a:bodyPr rtlCol="0" anchor="ctr"/>
+          <a:lstStyle/>
+          <a:p>
+            <a:pPr algn="ctr"/>
+          </a:p>
+        </p:txBody>
+      </p:sp>
+      <p:sp>
+        <p:nvSpPr>
+          <p:cNvPr id="31" name="TextBox 30"/>
+          <p:cNvSpPr txBox="1"/>
+          <p:nvPr/>
+        </p:nvSpPr>
+        <p:spPr>
+          <a:xfrm>
+            <a:off x="4903506" y="4187952"/>
+            <a:ext cx="868680" cy="292608"/>
+          </a:xfrm>
+          <a:prstGeom prst="rect">
+            <a:avLst/>
+          </a:prstGeom>
+          <a:noFill/>
+        </p:spPr>
+        <p:txBody>
+          <a:bodyPr wrap="square" anchor="ctr" lIns="36000" rIns="36000" tIns="18000" bIns="18000">
+            <a:spAutoFit/>
+          </a:bodyPr>
+          <a:lstStyle/>
+          <a:p>
+            <a:pPr algn="ctr"/>
+            <a:r>
+              <a:rPr sz="1100" b="1" i="0">
+                <a:solidFill>
+                  <a:srgbClr val="FFFFFF"/>
+                </a:solidFill>
+                <a:latin typeface="Noto Sans JP"/>
+              </a:rPr>
+              <a:t>引用</a:t>
+            </a:r>
+          </a:p>
+        </p:txBody>
+      </p:sp>
+      <p:sp>
+        <p:nvSpPr>
+          <p:cNvPr id="32" name="TextBox 31"/>
+          <p:cNvSpPr txBox="1"/>
+          <p:nvPr/>
+        </p:nvSpPr>
+        <p:spPr>
+          <a:xfrm>
+            <a:off x="4793778" y="4078224"/>
+            <a:ext cx="3433782" cy="2011680"/>
+          </a:xfrm>
+          <a:prstGeom prst="rect">
+            <a:avLst/>
+          </a:prstGeom>
+          <a:noFill/>
+        </p:spPr>
+        <p:txBody>
+          <a:bodyPr wrap="square" anchor="ctr" lIns="36000" rIns="36000" tIns="18000" bIns="18000">
+            <a:spAutoFit/>
+          </a:bodyPr>
+          <a:lstStyle/>
+          <a:p>
+            <a:pPr algn="ctr"/>
+            <a:r>
+              <a:rPr sz="1200" b="0" i="0">
+                <a:solidFill>
+                  <a:srgbClr val="AAB4C0"/>
+                </a:solidFill>
+                <a:latin typeface="Noto Sans JP"/>
+              </a:rPr>
+              <a:t>（引用図を貼り付け）</a:t>
+            </a:r>
+          </a:p>
+        </p:txBody>
+      </p:sp>
+      <p:sp>
+        <p:nvSpPr>
+          <p:cNvPr id="33" name="TextBox 32"/>
+          <p:cNvSpPr txBox="1"/>
+          <p:nvPr/>
+        </p:nvSpPr>
+        <p:spPr>
+          <a:xfrm>
+            <a:off x="4903506" y="5742432"/>
+            <a:ext cx="3214326" cy="256032"/>
+          </a:xfrm>
+          <a:prstGeom prst="rect">
+            <a:avLst/>
+          </a:prstGeom>
+          <a:noFill/>
+        </p:spPr>
+        <p:txBody>
+          <a:bodyPr wrap="square" anchor="t" lIns="36000" rIns="36000" tIns="18000" bIns="18000">
+            <a:spAutoFit/>
+          </a:bodyPr>
+          <a:lstStyle/>
+          <a:p>
+            <a:pPr algn="l"/>
+            <a:r>
+              <a:rPr sz="900" b="0" i="1">
+                <a:solidFill>
+                  <a:srgbClr val="9F7639"/>
+                </a:solidFill>
+                <a:latin typeface="Noto Sans JP"/>
+              </a:rPr>
+              <a:t>出典: ________________（後で記入）</a:t>
+            </a:r>
+          </a:p>
+        </p:txBody>
+      </p:sp>
+      <p:sp>
+        <p:nvSpPr>
+          <p:cNvPr id="34" name="TextBox 33"/>
+          <p:cNvSpPr txBox="1"/>
+          <p:nvPr/>
+        </p:nvSpPr>
+        <p:spPr>
+          <a:xfrm>
+            <a:off x="4793778" y="6126480"/>
+            <a:ext cx="3433782" cy="274320"/>
+          </a:xfrm>
+          <a:prstGeom prst="rect">
+            <a:avLst/>
+          </a:prstGeom>
+          <a:noFill/>
+        </p:spPr>
+        <p:txBody>
+          <a:bodyPr wrap="square" anchor="t" lIns="36000" rIns="36000" tIns="18000" bIns="18000">
+            <a:spAutoFit/>
+          </a:bodyPr>
+          <a:lstStyle/>
+          <a:p>
+            <a:pPr algn="ctr"/>
+            <a:r>
+              <a:rPr sz="1000" b="0" i="1">
+                <a:solidFill>
+                  <a:srgbClr val="64748B"/>
+                </a:solidFill>
+                <a:latin typeface="Noto Sans JP"/>
+              </a:rPr>
+              <a:t>シリカエアロゲルのSEM微細構造</a:t>
+            </a:r>
+          </a:p>
+        </p:txBody>
+      </p:sp>
+      <p:sp>
+        <p:nvSpPr>
+          <p:cNvPr id="35" name="Rounded Rectangle 34"/>
+          <p:cNvSpPr/>
+          <p:nvPr/>
+        </p:nvSpPr>
+        <p:spPr>
+          <a:xfrm>
+            <a:off x="8392152" y="4078224"/>
+            <a:ext cx="3433782" cy="2011680"/>
+          </a:xfrm>
+          <a:prstGeom prst="roundRect">
+            <a:avLst>
+              <a:gd name="adj" fmla="val 2000"/>
+            </a:avLst>
+          </a:prstGeom>
+          <a:solidFill>
+            <a:srgbClr val="F5F8FC"/>
+          </a:solidFill>
+          <a:ln w="12700">
+            <a:solidFill>
+              <a:srgbClr val="C0D0E0"/>
+            </a:solidFill>
+          </a:ln>
+          <a:effectLst/>
+        </p:spPr>
+        <p:style>
+          <a:lnRef idx="1">
+            <a:schemeClr val="accent1"/>
+          </a:lnRef>
+          <a:fillRef idx="3">
+            <a:schemeClr val="accent1"/>
+          </a:fillRef>
+          <a:effectRef idx="2">
+            <a:schemeClr val="accent1"/>
+          </a:effectRef>
+          <a:fontRef idx="minor">
+            <a:schemeClr val="lt1"/>
+          </a:fontRef>
+        </p:style>
+        <p:txBody>
+          <a:bodyPr rtlCol="0" anchor="ctr"/>
+          <a:lstStyle/>
+          <a:p>
+            <a:pPr algn="ctr"/>
+          </a:p>
+        </p:txBody>
+      </p:sp>
+      <p:sp>
+        <p:nvSpPr>
+          <p:cNvPr id="36" name="Rectangle 35"/>
+          <p:cNvSpPr/>
+          <p:nvPr/>
+        </p:nvSpPr>
+        <p:spPr>
+          <a:xfrm>
+            <a:off x="8501880" y="4187952"/>
+            <a:ext cx="868680" cy="292608"/>
+          </a:xfrm>
+          <a:prstGeom prst="rect">
+            <a:avLst/>
+          </a:prstGeom>
+          <a:solidFill>
+            <a:srgbClr val="B08442"/>
+          </a:solidFill>
+          <a:ln>
+            <a:noFill/>
+          </a:ln>
+          <a:effectLst/>
+        </p:spPr>
+        <p:style>
+          <a:lnRef idx="1">
+            <a:schemeClr val="accent1"/>
+          </a:lnRef>
+          <a:fillRef idx="3">
+            <a:schemeClr val="accent1"/>
+          </a:fillRef>
+          <a:effectRef idx="2">
+            <a:schemeClr val="accent1"/>
+          </a:effectRef>
+          <a:fontRef idx="minor">
+            <a:schemeClr val="lt1"/>
+          </a:fontRef>
+        </p:style>
+        <p:txBody>
+          <a:bodyPr rtlCol="0" anchor="ctr"/>
+          <a:lstStyle/>
+          <a:p>
+            <a:pPr algn="ctr"/>
+          </a:p>
+        </p:txBody>
+      </p:sp>
+      <p:sp>
+        <p:nvSpPr>
+          <p:cNvPr id="37" name="TextBox 36"/>
+          <p:cNvSpPr txBox="1"/>
+          <p:nvPr/>
+        </p:nvSpPr>
+        <p:spPr>
+          <a:xfrm>
+            <a:off x="8501880" y="4187952"/>
+            <a:ext cx="868680" cy="292608"/>
+          </a:xfrm>
+          <a:prstGeom prst="rect">
+            <a:avLst/>
+          </a:prstGeom>
+          <a:noFill/>
+        </p:spPr>
+        <p:txBody>
+          <a:bodyPr wrap="square" anchor="ctr" lIns="36000" rIns="36000" tIns="18000" bIns="18000">
+            <a:spAutoFit/>
+          </a:bodyPr>
+          <a:lstStyle/>
+          <a:p>
+            <a:pPr algn="ctr"/>
+            <a:r>
+              <a:rPr sz="1100" b="1" i="0">
+                <a:solidFill>
+                  <a:srgbClr val="FFFFFF"/>
+                </a:solidFill>
+                <a:latin typeface="Noto Sans JP"/>
+              </a:rPr>
+              <a:t>引用</a:t>
+            </a:r>
+          </a:p>
+        </p:txBody>
+      </p:sp>
+      <p:sp>
+        <p:nvSpPr>
+          <p:cNvPr id="38" name="TextBox 37"/>
+          <p:cNvSpPr txBox="1"/>
+          <p:nvPr/>
+        </p:nvSpPr>
+        <p:spPr>
+          <a:xfrm>
+            <a:off x="8392152" y="4078224"/>
+            <a:ext cx="3433782" cy="2011680"/>
+          </a:xfrm>
+          <a:prstGeom prst="rect">
+            <a:avLst/>
+          </a:prstGeom>
+          <a:noFill/>
+        </p:spPr>
+        <p:txBody>
+          <a:bodyPr wrap="square" anchor="ctr" lIns="36000" rIns="36000" tIns="18000" bIns="18000">
+            <a:spAutoFit/>
+          </a:bodyPr>
+          <a:lstStyle/>
+          <a:p>
+            <a:pPr algn="ctr"/>
+            <a:r>
+              <a:rPr sz="1200" b="0" i="0">
+                <a:solidFill>
+                  <a:srgbClr val="AAB4C0"/>
+                </a:solidFill>
+                <a:latin typeface="Noto Sans JP"/>
+              </a:rPr>
+              <a:t>（引用図を貼り付け）</a:t>
+            </a:r>
+          </a:p>
+        </p:txBody>
+      </p:sp>
+      <p:sp>
+        <p:nvSpPr>
+          <p:cNvPr id="39" name="TextBox 38"/>
+          <p:cNvSpPr txBox="1"/>
+          <p:nvPr/>
+        </p:nvSpPr>
+        <p:spPr>
+          <a:xfrm>
+            <a:off x="8501880" y="5742432"/>
+            <a:ext cx="3214326" cy="256032"/>
+          </a:xfrm>
+          <a:prstGeom prst="rect">
+            <a:avLst/>
+          </a:prstGeom>
+          <a:noFill/>
+        </p:spPr>
+        <p:txBody>
+          <a:bodyPr wrap="square" anchor="t" lIns="36000" rIns="36000" tIns="18000" bIns="18000">
+            <a:spAutoFit/>
+          </a:bodyPr>
+          <a:lstStyle/>
+          <a:p>
+            <a:pPr algn="l"/>
+            <a:r>
+              <a:rPr sz="900" b="0" i="1">
+                <a:solidFill>
+                  <a:srgbClr val="9F7639"/>
+                </a:solidFill>
+                <a:latin typeface="Noto Sans JP"/>
+              </a:rPr>
+              <a:t>出典: ________________（後で記入）</a:t>
+            </a:r>
+          </a:p>
+        </p:txBody>
+      </p:sp>
+      <p:sp>
+        <p:nvSpPr>
+          <p:cNvPr id="40" name="TextBox 39"/>
+          <p:cNvSpPr txBox="1"/>
+          <p:nvPr/>
+        </p:nvSpPr>
+        <p:spPr>
+          <a:xfrm>
+            <a:off x="8392152" y="6126480"/>
+            <a:ext cx="3433782" cy="274320"/>
+          </a:xfrm>
+          <a:prstGeom prst="rect">
+            <a:avLst/>
+          </a:prstGeom>
+          <a:noFill/>
+        </p:spPr>
+        <p:txBody>
+          <a:bodyPr wrap="square" anchor="t" lIns="36000" rIns="36000" tIns="18000" bIns="18000">
+            <a:spAutoFit/>
+          </a:bodyPr>
+          <a:lstStyle/>
+          <a:p>
+            <a:pPr algn="ctr"/>
+            <a:r>
+              <a:rPr sz="1000" b="0" i="1">
+                <a:solidFill>
+                  <a:srgbClr val="64748B"/>
+                </a:solidFill>
+                <a:latin typeface="Noto Sans JP"/>
+              </a:rPr>
+              <a:t>エアロゲルの断熱性デモ（炎上の試料等）</a:t>
             </a:r>
           </a:p>
         </p:txBody>
@@ -52849,7 +54278,7 @@
         <p:spPr>
           <a:xfrm>
             <a:off x="6742008" y="859536"/>
-            <a:ext cx="5083926" cy="5760720"/>
+            <a:ext cx="5083926" cy="3017520"/>
           </a:xfrm>
           <a:prstGeom prst="roundRect">
             <a:avLst>
@@ -52976,7 +54405,7 @@
         <p:spPr>
           <a:xfrm>
             <a:off x="6742008" y="859536"/>
-            <a:ext cx="5083926" cy="5760720"/>
+            <a:ext cx="5083926" cy="3017520"/>
           </a:xfrm>
           <a:prstGeom prst="rect">
             <a:avLst/>
@@ -53010,7 +54439,7 @@
         </p:nvSpPr>
         <p:spPr>
           <a:xfrm>
-            <a:off x="6742008" y="6656832"/>
+            <a:off x="6742008" y="3913632"/>
             <a:ext cx="5083926" cy="274320"/>
           </a:xfrm>
           <a:prstGeom prst="rect">
@@ -53033,6 +54462,238 @@
                 <a:latin typeface="Noto Sans JP"/>
               </a:rPr>
               <a:t>各ポリマーの化学構造とCSP混合スキーム</a:t>
+            </a:r>
+          </a:p>
+        </p:txBody>
+      </p:sp>
+      <p:sp>
+        <p:nvSpPr>
+          <p:cNvPr id="29" name="Rounded Rectangle 28"/>
+          <p:cNvSpPr/>
+          <p:nvPr/>
+        </p:nvSpPr>
+        <p:spPr>
+          <a:xfrm>
+            <a:off x="6742008" y="4297680"/>
+            <a:ext cx="5083926" cy="1828800"/>
+          </a:xfrm>
+          <a:prstGeom prst="roundRect">
+            <a:avLst>
+              <a:gd name="adj" fmla="val 2000"/>
+            </a:avLst>
+          </a:prstGeom>
+          <a:solidFill>
+            <a:srgbClr val="F5F8FC"/>
+          </a:solidFill>
+          <a:ln w="12700">
+            <a:solidFill>
+              <a:srgbClr val="C0D0E0"/>
+            </a:solidFill>
+          </a:ln>
+          <a:effectLst/>
+        </p:spPr>
+        <p:style>
+          <a:lnRef idx="1">
+            <a:schemeClr val="accent1"/>
+          </a:lnRef>
+          <a:fillRef idx="3">
+            <a:schemeClr val="accent1"/>
+          </a:fillRef>
+          <a:effectRef idx="2">
+            <a:schemeClr val="accent1"/>
+          </a:effectRef>
+          <a:fontRef idx="minor">
+            <a:schemeClr val="lt1"/>
+          </a:fontRef>
+        </p:style>
+        <p:txBody>
+          <a:bodyPr rtlCol="0" anchor="ctr"/>
+          <a:lstStyle/>
+          <a:p>
+            <a:pPr algn="ctr"/>
+          </a:p>
+        </p:txBody>
+      </p:sp>
+      <p:sp>
+        <p:nvSpPr>
+          <p:cNvPr id="30" name="Rectangle 29"/>
+          <p:cNvSpPr/>
+          <p:nvPr/>
+        </p:nvSpPr>
+        <p:spPr>
+          <a:xfrm>
+            <a:off x="6851736" y="4407408"/>
+            <a:ext cx="868680" cy="292608"/>
+          </a:xfrm>
+          <a:prstGeom prst="rect">
+            <a:avLst/>
+          </a:prstGeom>
+          <a:solidFill>
+            <a:srgbClr val="B08442"/>
+          </a:solidFill>
+          <a:ln>
+            <a:noFill/>
+          </a:ln>
+          <a:effectLst/>
+        </p:spPr>
+        <p:style>
+          <a:lnRef idx="1">
+            <a:schemeClr val="accent1"/>
+          </a:lnRef>
+          <a:fillRef idx="3">
+            <a:schemeClr val="accent1"/>
+          </a:fillRef>
+          <a:effectRef idx="2">
+            <a:schemeClr val="accent1"/>
+          </a:effectRef>
+          <a:fontRef idx="minor">
+            <a:schemeClr val="lt1"/>
+          </a:fontRef>
+        </p:style>
+        <p:txBody>
+          <a:bodyPr rtlCol="0" anchor="ctr"/>
+          <a:lstStyle/>
+          <a:p>
+            <a:pPr algn="ctr"/>
+          </a:p>
+        </p:txBody>
+      </p:sp>
+      <p:sp>
+        <p:nvSpPr>
+          <p:cNvPr id="31" name="TextBox 30"/>
+          <p:cNvSpPr txBox="1"/>
+          <p:nvPr/>
+        </p:nvSpPr>
+        <p:spPr>
+          <a:xfrm>
+            <a:off x="6851736" y="4407408"/>
+            <a:ext cx="868680" cy="292608"/>
+          </a:xfrm>
+          <a:prstGeom prst="rect">
+            <a:avLst/>
+          </a:prstGeom>
+          <a:noFill/>
+        </p:spPr>
+        <p:txBody>
+          <a:bodyPr wrap="square" anchor="ctr" lIns="36000" rIns="36000" tIns="18000" bIns="18000">
+            <a:spAutoFit/>
+          </a:bodyPr>
+          <a:lstStyle/>
+          <a:p>
+            <a:pPr algn="ctr"/>
+            <a:r>
+              <a:rPr sz="1100" b="1" i="0">
+                <a:solidFill>
+                  <a:srgbClr val="FFFFFF"/>
+                </a:solidFill>
+                <a:latin typeface="Noto Sans JP"/>
+              </a:rPr>
+              <a:t>引用</a:t>
+            </a:r>
+          </a:p>
+        </p:txBody>
+      </p:sp>
+      <p:sp>
+        <p:nvSpPr>
+          <p:cNvPr id="32" name="TextBox 31"/>
+          <p:cNvSpPr txBox="1"/>
+          <p:nvPr/>
+        </p:nvSpPr>
+        <p:spPr>
+          <a:xfrm>
+            <a:off x="6742008" y="4297680"/>
+            <a:ext cx="5083926" cy="1828800"/>
+          </a:xfrm>
+          <a:prstGeom prst="rect">
+            <a:avLst/>
+          </a:prstGeom>
+          <a:noFill/>
+        </p:spPr>
+        <p:txBody>
+          <a:bodyPr wrap="square" anchor="ctr" lIns="36000" rIns="36000" tIns="18000" bIns="18000">
+            <a:spAutoFit/>
+          </a:bodyPr>
+          <a:lstStyle/>
+          <a:p>
+            <a:pPr algn="ctr"/>
+            <a:r>
+              <a:rPr sz="1200" b="0" i="0">
+                <a:solidFill>
+                  <a:srgbClr val="AAB4C0"/>
+                </a:solidFill>
+                <a:latin typeface="Noto Sans JP"/>
+              </a:rPr>
+              <a:t>（引用図を貼り付け）</a:t>
+            </a:r>
+          </a:p>
+        </p:txBody>
+      </p:sp>
+      <p:sp>
+        <p:nvSpPr>
+          <p:cNvPr id="33" name="TextBox 32"/>
+          <p:cNvSpPr txBox="1"/>
+          <p:nvPr/>
+        </p:nvSpPr>
+        <p:spPr>
+          <a:xfrm>
+            <a:off x="6851736" y="5779008"/>
+            <a:ext cx="4864470" cy="256032"/>
+          </a:xfrm>
+          <a:prstGeom prst="rect">
+            <a:avLst/>
+          </a:prstGeom>
+          <a:noFill/>
+        </p:spPr>
+        <p:txBody>
+          <a:bodyPr wrap="square" anchor="t" lIns="36000" rIns="36000" tIns="18000" bIns="18000">
+            <a:spAutoFit/>
+          </a:bodyPr>
+          <a:lstStyle/>
+          <a:p>
+            <a:pPr algn="l"/>
+            <a:r>
+              <a:rPr sz="900" b="0" i="1">
+                <a:solidFill>
+                  <a:srgbClr val="9F7639"/>
+                </a:solidFill>
+                <a:latin typeface="Noto Sans JP"/>
+              </a:rPr>
+              <a:t>出典: ________________（後で記入）</a:t>
+            </a:r>
+          </a:p>
+        </p:txBody>
+      </p:sp>
+      <p:sp>
+        <p:nvSpPr>
+          <p:cNvPr id="34" name="TextBox 33"/>
+          <p:cNvSpPr txBox="1"/>
+          <p:nvPr/>
+        </p:nvSpPr>
+        <p:spPr>
+          <a:xfrm>
+            <a:off x="6742008" y="6163056"/>
+            <a:ext cx="5083926" cy="274320"/>
+          </a:xfrm>
+          <a:prstGeom prst="rect">
+            <a:avLst/>
+          </a:prstGeom>
+          <a:noFill/>
+        </p:spPr>
+        <p:txBody>
+          <a:bodyPr wrap="square" anchor="t" lIns="36000" rIns="36000" tIns="18000" bIns="18000">
+            <a:spAutoFit/>
+          </a:bodyPr>
+          <a:lstStyle/>
+          <a:p>
+            <a:pPr algn="ctr"/>
+            <a:r>
+              <a:rPr sz="1000" b="0" i="1">
+                <a:solidFill>
+                  <a:srgbClr val="64748B"/>
+                </a:solidFill>
+                <a:latin typeface="Noto Sans JP"/>
+              </a:rPr>
+              <a:t>セルロースの分子構造（参考）</a:t>
             </a:r>
           </a:p>
         </p:txBody>

--- a/slides.pptx
+++ b/slides.pptx
@@ -42,6 +42,7 @@
     <p:sldId id="290" r:id="rId41"/>
     <p:sldId id="291" r:id="rId42"/>
     <p:sldId id="292" r:id="rId43"/>
+    <p:sldId id="293" r:id="rId44"/>
   </p:sldIdLst>
   <p:sldSz cx="12191695" cy="6858000" type="screen4x3"/>
   <p:notesSz cx="6858000" cy="9144000"/>
@@ -3578,7 +3579,7 @@
                 </a:solidFill>
                 <a:latin typeface="Noto Sans JP"/>
               </a:rPr>
-              <a:t>1 / 37</a:t>
+              <a:t>1 / 38</a:t>
             </a:r>
           </a:p>
         </p:txBody>
@@ -3921,7 +3922,7 @@
                 </a:solidFill>
                 <a:latin typeface="Noto Sans JP"/>
               </a:rPr>
-              <a:t>10 / 37</a:t>
+              <a:t>10 / 38</a:t>
             </a:r>
           </a:p>
         </p:txBody>
@@ -5964,7 +5965,7 @@
                 </a:solidFill>
                 <a:latin typeface="Noto Sans JP"/>
               </a:rPr>
-              <a:t>11 / 37</a:t>
+              <a:t>11 / 38</a:t>
             </a:r>
           </a:p>
         </p:txBody>
@@ -7491,7 +7492,7 @@
                 </a:solidFill>
                 <a:latin typeface="Noto Sans JP"/>
               </a:rPr>
-              <a:t>12 / 37</a:t>
+              <a:t>12 / 38</a:t>
             </a:r>
           </a:p>
         </p:txBody>
@@ -9367,7 +9368,7 @@
                 </a:solidFill>
                 <a:latin typeface="Noto Sans JP"/>
               </a:rPr>
-              <a:t>13 / 37</a:t>
+              <a:t>13 / 38</a:t>
             </a:r>
           </a:p>
         </p:txBody>
@@ -11859,7 +11860,7 @@
                 </a:solidFill>
                 <a:latin typeface="Noto Sans JP"/>
               </a:rPr>
-              <a:t>14 / 37</a:t>
+              <a:t>14 / 38</a:t>
             </a:r>
           </a:p>
         </p:txBody>
@@ -14063,7 +14064,7 @@
                 </a:solidFill>
                 <a:latin typeface="Noto Sans JP"/>
               </a:rPr>
-              <a:t>15 / 37</a:t>
+              <a:t>15 / 38</a:t>
             </a:r>
           </a:p>
         </p:txBody>
@@ -14406,7 +14407,7 @@
                 </a:solidFill>
                 <a:latin typeface="Noto Sans JP"/>
               </a:rPr>
-              <a:t>16 / 37</a:t>
+              <a:t>16 / 38</a:t>
             </a:r>
           </a:p>
         </p:txBody>
@@ -15478,7 +15479,7 @@
                 </a:solidFill>
                 <a:latin typeface="Noto Sans JP"/>
               </a:rPr>
-              <a:t>17 / 37</a:t>
+              <a:t>17 / 38</a:t>
             </a:r>
           </a:p>
         </p:txBody>
@@ -16579,7 +16580,7 @@
                 </a:solidFill>
                 <a:latin typeface="Noto Sans JP"/>
               </a:rPr>
-              <a:t>18 / 37</a:t>
+              <a:t>18 / 38</a:t>
             </a:r>
           </a:p>
         </p:txBody>
@@ -18178,7 +18179,7 @@
                 </a:solidFill>
                 <a:latin typeface="Noto Sans JP"/>
               </a:rPr>
-              <a:t>19 / 37</a:t>
+              <a:t>19 / 38</a:t>
             </a:r>
           </a:p>
         </p:txBody>
@@ -19895,7 +19896,7 @@
                 </a:solidFill>
                 <a:latin typeface="Noto Sans JP"/>
               </a:rPr>
-              <a:t>2 / 37</a:t>
+              <a:t>2 / 38</a:t>
             </a:r>
           </a:p>
         </p:txBody>
@@ -21466,7 +21467,7 @@
                 </a:solidFill>
                 <a:latin typeface="Noto Sans JP"/>
               </a:rPr>
-              <a:t>20 / 37</a:t>
+              <a:t>20 / 38</a:t>
             </a:r>
           </a:p>
         </p:txBody>
@@ -23159,7 +23160,7 @@
                 </a:solidFill>
                 <a:latin typeface="Noto Sans JP"/>
               </a:rPr>
-              <a:t>21 / 37</a:t>
+              <a:t>21 / 38</a:t>
             </a:r>
           </a:p>
         </p:txBody>
@@ -24371,7 +24372,7 @@
                 </a:solidFill>
                 <a:latin typeface="Noto Sans JP"/>
               </a:rPr>
-              <a:t>22 / 37</a:t>
+              <a:t>22 / 38</a:t>
             </a:r>
           </a:p>
         </p:txBody>
@@ -25926,7 +25927,7 @@
                 </a:solidFill>
                 <a:latin typeface="Noto Sans JP"/>
               </a:rPr>
-              <a:t>23 / 37</a:t>
+              <a:t>23 / 38</a:t>
             </a:r>
           </a:p>
         </p:txBody>
@@ -27345,7 +27346,7 @@
                 </a:solidFill>
                 <a:latin typeface="Noto Sans JP"/>
               </a:rPr>
-              <a:t>24 / 37</a:t>
+              <a:t>24 / 38</a:t>
             </a:r>
           </a:p>
         </p:txBody>
@@ -28838,7 +28839,7 @@
                 </a:solidFill>
                 <a:latin typeface="Noto Sans JP"/>
               </a:rPr>
-              <a:t>25 / 37</a:t>
+              <a:t>25 / 38</a:t>
             </a:r>
           </a:p>
         </p:txBody>
@@ -29181,7 +29182,7 @@
                 </a:solidFill>
                 <a:latin typeface="Noto Sans JP"/>
               </a:rPr>
-              <a:t>26 / 37</a:t>
+              <a:t>26 / 38</a:t>
             </a:r>
           </a:p>
         </p:txBody>
@@ -30924,7 +30925,7 @@
                 </a:solidFill>
                 <a:latin typeface="Noto Sans JP"/>
               </a:rPr>
-              <a:t>27 / 37</a:t>
+              <a:t>27 / 38</a:t>
             </a:r>
           </a:p>
         </p:txBody>
@@ -31818,7 +31819,7 @@
                 </a:solidFill>
                 <a:latin typeface="Noto Sans JP"/>
               </a:rPr>
-              <a:t>28 / 37</a:t>
+              <a:t>28 / 38</a:t>
             </a:r>
           </a:p>
         </p:txBody>
@@ -34024,7 +34025,7 @@
                 </a:solidFill>
                 <a:latin typeface="Noto Sans JP"/>
               </a:rPr>
-              <a:t>29 / 37</a:t>
+              <a:t>29 / 38</a:t>
             </a:r>
           </a:p>
         </p:txBody>
@@ -36208,7 +36209,7 @@
                 </a:solidFill>
                 <a:latin typeface="Noto Sans JP"/>
               </a:rPr>
-              <a:t>3 / 37</a:t>
+              <a:t>3 / 38</a:t>
             </a:r>
           </a:p>
         </p:txBody>
@@ -36551,7 +36552,7 @@
                 </a:solidFill>
                 <a:latin typeface="Noto Sans JP"/>
               </a:rPr>
-              <a:t>30 / 37</a:t>
+              <a:t>30 / 38</a:t>
             </a:r>
           </a:p>
         </p:txBody>
@@ -38207,7 +38208,7 @@
                 </a:solidFill>
                 <a:latin typeface="Noto Sans JP"/>
               </a:rPr>
-              <a:t>31 / 37</a:t>
+              <a:t>31 / 38</a:t>
             </a:r>
           </a:p>
         </p:txBody>
@@ -40059,7 +40060,7 @@
                 </a:solidFill>
                 <a:latin typeface="Noto Sans JP"/>
               </a:rPr>
-              <a:t>32 / 37</a:t>
+              <a:t>32 / 38</a:t>
             </a:r>
           </a:p>
         </p:txBody>
@@ -41597,7 +41598,7 @@
                 </a:solidFill>
                 <a:latin typeface="Noto Sans JP"/>
               </a:rPr>
-              <a:t>33 / 37</a:t>
+              <a:t>33 / 38</a:t>
             </a:r>
           </a:p>
         </p:txBody>
@@ -41940,7 +41941,7 @@
                 </a:solidFill>
                 <a:latin typeface="Noto Sans JP"/>
               </a:rPr>
-              <a:t>34 / 37</a:t>
+              <a:t>34 / 38</a:t>
             </a:r>
           </a:p>
         </p:txBody>
@@ -43922,7 +43923,7 @@
                 </a:solidFill>
                 <a:latin typeface="Noto Sans JP"/>
               </a:rPr>
-              <a:t>35 / 37</a:t>
+              <a:t>35 / 38</a:t>
             </a:r>
           </a:p>
         </p:txBody>
@@ -46193,7 +46194,7 @@
                 </a:solidFill>
                 <a:latin typeface="Noto Sans JP"/>
               </a:rPr>
-              <a:t>36 / 37</a:t>
+              <a:t>36 / 38</a:t>
             </a:r>
           </a:p>
         </p:txBody>
@@ -48523,7 +48524,1663 @@
                 </a:solidFill>
                 <a:latin typeface="Noto Sans JP"/>
               </a:rPr>
-              <a:t>37 / 37</a:t>
+              <a:t>37 / 38</a:t>
+            </a:r>
+          </a:p>
+        </p:txBody>
+      </p:sp>
+    </p:spTree>
+  </p:cSld>
+  <p:clrMapOvr>
+    <a:masterClrMapping/>
+  </p:clrMapOvr>
+</p:sld>
+</file>
+
+<file path=ppt/slides/slide38.xml><?xml version="1.0" encoding="utf-8"?>
+<p:sld xmlns:a="http://schemas.openxmlformats.org/drawingml/2006/main" xmlns:p="http://schemas.openxmlformats.org/presentationml/2006/main" xmlns:r="http://schemas.openxmlformats.org/officeDocument/2006/relationships">
+  <p:cSld>
+    <p:spTree>
+      <p:nvGrpSpPr>
+        <p:cNvPr id="1" name=""/>
+        <p:cNvGrpSpPr/>
+        <p:nvPr/>
+      </p:nvGrpSpPr>
+      <p:grpSpPr/>
+      <p:sp>
+        <p:nvSpPr>
+          <p:cNvPr id="2" name="Rectangle 1"/>
+          <p:cNvSpPr/>
+          <p:nvPr/>
+        </p:nvSpPr>
+        <p:spPr>
+          <a:xfrm>
+            <a:off x="0" y="0"/>
+            <a:ext cx="12191695" cy="6858000"/>
+          </a:xfrm>
+          <a:prstGeom prst="rect">
+            <a:avLst/>
+          </a:prstGeom>
+          <a:solidFill>
+            <a:srgbClr val="FFFFFF"/>
+          </a:solidFill>
+          <a:ln>
+            <a:noFill/>
+          </a:ln>
+          <a:effectLst/>
+        </p:spPr>
+        <p:style>
+          <a:lnRef idx="1">
+            <a:schemeClr val="accent1"/>
+          </a:lnRef>
+          <a:fillRef idx="3">
+            <a:schemeClr val="accent1"/>
+          </a:fillRef>
+          <a:effectRef idx="2">
+            <a:schemeClr val="accent1"/>
+          </a:effectRef>
+          <a:fontRef idx="minor">
+            <a:schemeClr val="lt1"/>
+          </a:fontRef>
+        </p:style>
+        <p:txBody>
+          <a:bodyPr rtlCol="0" anchor="ctr"/>
+          <a:lstStyle/>
+          <a:p>
+            <a:pPr algn="ctr"/>
+          </a:p>
+        </p:txBody>
+      </p:sp>
+      <p:sp>
+        <p:nvSpPr>
+          <p:cNvPr id="3" name="Rectangle 2"/>
+          <p:cNvSpPr/>
+          <p:nvPr/>
+        </p:nvSpPr>
+        <p:spPr>
+          <a:xfrm>
+            <a:off x="0" y="0"/>
+            <a:ext cx="12191695" cy="658368"/>
+          </a:xfrm>
+          <a:prstGeom prst="rect">
+            <a:avLst/>
+          </a:prstGeom>
+          <a:solidFill>
+            <a:srgbClr val="1E293B"/>
+          </a:solidFill>
+          <a:ln>
+            <a:noFill/>
+          </a:ln>
+          <a:effectLst/>
+        </p:spPr>
+        <p:style>
+          <a:lnRef idx="1">
+            <a:schemeClr val="accent1"/>
+          </a:lnRef>
+          <a:fillRef idx="3">
+            <a:schemeClr val="accent1"/>
+          </a:fillRef>
+          <a:effectRef idx="2">
+            <a:schemeClr val="accent1"/>
+          </a:effectRef>
+          <a:fontRef idx="minor">
+            <a:schemeClr val="lt1"/>
+          </a:fontRef>
+        </p:style>
+        <p:txBody>
+          <a:bodyPr rtlCol="0" anchor="ctr"/>
+          <a:lstStyle/>
+          <a:p>
+            <a:pPr algn="ctr"/>
+          </a:p>
+        </p:txBody>
+      </p:sp>
+      <p:sp>
+        <p:nvSpPr>
+          <p:cNvPr id="4" name="Rectangle 3"/>
+          <p:cNvSpPr/>
+          <p:nvPr/>
+        </p:nvSpPr>
+        <p:spPr>
+          <a:xfrm>
+            <a:off x="0" y="621792"/>
+            <a:ext cx="12191695" cy="36576"/>
+          </a:xfrm>
+          <a:prstGeom prst="rect">
+            <a:avLst/>
+          </a:prstGeom>
+          <a:solidFill>
+            <a:srgbClr val="3B5174"/>
+          </a:solidFill>
+          <a:ln>
+            <a:noFill/>
+          </a:ln>
+          <a:effectLst/>
+        </p:spPr>
+        <p:style>
+          <a:lnRef idx="1">
+            <a:schemeClr val="accent1"/>
+          </a:lnRef>
+          <a:fillRef idx="3">
+            <a:schemeClr val="accent1"/>
+          </a:fillRef>
+          <a:effectRef idx="2">
+            <a:schemeClr val="accent1"/>
+          </a:effectRef>
+          <a:fontRef idx="minor">
+            <a:schemeClr val="lt1"/>
+          </a:fontRef>
+        </p:style>
+        <p:txBody>
+          <a:bodyPr rtlCol="0" anchor="ctr"/>
+          <a:lstStyle/>
+          <a:p>
+            <a:pPr algn="ctr"/>
+          </a:p>
+        </p:txBody>
+      </p:sp>
+      <p:sp>
+        <p:nvSpPr>
+          <p:cNvPr id="5" name="TextBox 4"/>
+          <p:cNvSpPr txBox="1"/>
+          <p:nvPr/>
+        </p:nvSpPr>
+        <p:spPr>
+          <a:xfrm>
+            <a:off x="365760" y="128016"/>
+            <a:ext cx="2194560" cy="365760"/>
+          </a:xfrm>
+          <a:prstGeom prst="rect">
+            <a:avLst/>
+          </a:prstGeom>
+          <a:noFill/>
+        </p:spPr>
+        <p:txBody>
+          <a:bodyPr wrap="square" anchor="ctr" lIns="36000" rIns="36000" tIns="18000" bIns="18000">
+            <a:spAutoFit/>
+          </a:bodyPr>
+          <a:lstStyle/>
+          <a:p>
+            <a:pPr algn="l"/>
+            <a:r>
+              <a:rPr sz="1100" b="1" i="0">
+                <a:solidFill>
+                  <a:srgbClr val="88A4C4"/>
+                </a:solidFill>
+                <a:latin typeface="Noto Sans JP"/>
+              </a:rPr>
+              <a:t>補足</a:t>
+            </a:r>
+          </a:p>
+        </p:txBody>
+      </p:sp>
+      <p:sp>
+        <p:nvSpPr>
+          <p:cNvPr id="6" name="Rectangle 5"/>
+          <p:cNvSpPr/>
+          <p:nvPr/>
+        </p:nvSpPr>
+        <p:spPr>
+          <a:xfrm>
+            <a:off x="2606040" y="182880"/>
+            <a:ext cx="10972" cy="292608"/>
+          </a:xfrm>
+          <a:prstGeom prst="rect">
+            <a:avLst/>
+          </a:prstGeom>
+          <a:solidFill>
+            <a:srgbClr val="445870"/>
+          </a:solidFill>
+          <a:ln>
+            <a:noFill/>
+          </a:ln>
+          <a:effectLst/>
+        </p:spPr>
+        <p:style>
+          <a:lnRef idx="1">
+            <a:schemeClr val="accent1"/>
+          </a:lnRef>
+          <a:fillRef idx="3">
+            <a:schemeClr val="accent1"/>
+          </a:fillRef>
+          <a:effectRef idx="2">
+            <a:schemeClr val="accent1"/>
+          </a:effectRef>
+          <a:fontRef idx="minor">
+            <a:schemeClr val="lt1"/>
+          </a:fontRef>
+        </p:style>
+        <p:txBody>
+          <a:bodyPr rtlCol="0" anchor="ctr"/>
+          <a:lstStyle/>
+          <a:p>
+            <a:pPr algn="ctr"/>
+          </a:p>
+        </p:txBody>
+      </p:sp>
+      <p:sp>
+        <p:nvSpPr>
+          <p:cNvPr id="7" name="TextBox 6"/>
+          <p:cNvSpPr txBox="1"/>
+          <p:nvPr/>
+        </p:nvSpPr>
+        <p:spPr>
+          <a:xfrm>
+            <a:off x="2743200" y="91440"/>
+            <a:ext cx="9082735" cy="502920"/>
+          </a:xfrm>
+          <a:prstGeom prst="rect">
+            <a:avLst/>
+          </a:prstGeom>
+          <a:noFill/>
+        </p:spPr>
+        <p:txBody>
+          <a:bodyPr wrap="square" anchor="ctr" lIns="36000" rIns="36000" tIns="18000" bIns="18000">
+            <a:spAutoFit/>
+          </a:bodyPr>
+          <a:lstStyle/>
+          <a:p>
+            <a:pPr algn="l"/>
+            <a:r>
+              <a:rPr sz="2400" b="1" i="0">
+                <a:solidFill>
+                  <a:srgbClr val="FFFFFF"/>
+                </a:solidFill>
+                <a:latin typeface="Noto Sans JP"/>
+              </a:rPr>
+              <a:t>温度に応じたゲルの3段階変化メカニズム</a:t>
+            </a:r>
+          </a:p>
+        </p:txBody>
+      </p:sp>
+      <p:sp>
+        <p:nvSpPr>
+          <p:cNvPr id="8" name="Rectangle 7"/>
+          <p:cNvSpPr/>
+          <p:nvPr/>
+        </p:nvSpPr>
+        <p:spPr>
+          <a:xfrm>
+            <a:off x="0" y="6803136"/>
+            <a:ext cx="12191695" cy="54864"/>
+          </a:xfrm>
+          <a:prstGeom prst="rect">
+            <a:avLst/>
+          </a:prstGeom>
+          <a:solidFill>
+            <a:srgbClr val="3B5174"/>
+          </a:solidFill>
+          <a:ln>
+            <a:noFill/>
+          </a:ln>
+          <a:effectLst/>
+        </p:spPr>
+        <p:style>
+          <a:lnRef idx="1">
+            <a:schemeClr val="accent1"/>
+          </a:lnRef>
+          <a:fillRef idx="3">
+            <a:schemeClr val="accent1"/>
+          </a:fillRef>
+          <a:effectRef idx="2">
+            <a:schemeClr val="accent1"/>
+          </a:effectRef>
+          <a:fontRef idx="minor">
+            <a:schemeClr val="lt1"/>
+          </a:fontRef>
+        </p:style>
+        <p:txBody>
+          <a:bodyPr rtlCol="0" anchor="ctr"/>
+          <a:lstStyle/>
+          <a:p>
+            <a:pPr algn="ctr"/>
+          </a:p>
+        </p:txBody>
+      </p:sp>
+      <p:sp>
+        <p:nvSpPr>
+          <p:cNvPr id="9" name="TextBox 8"/>
+          <p:cNvSpPr txBox="1"/>
+          <p:nvPr/>
+        </p:nvSpPr>
+        <p:spPr>
+          <a:xfrm>
+            <a:off x="10911535" y="6547104"/>
+            <a:ext cx="1143000" cy="237744"/>
+          </a:xfrm>
+          <a:prstGeom prst="rect">
+            <a:avLst/>
+          </a:prstGeom>
+          <a:noFill/>
+        </p:spPr>
+        <p:txBody>
+          <a:bodyPr wrap="square" anchor="t" lIns="36000" rIns="36000" tIns="18000" bIns="18000">
+            <a:spAutoFit/>
+          </a:bodyPr>
+          <a:lstStyle/>
+          <a:p>
+            <a:pPr algn="r"/>
+            <a:r>
+              <a:rPr sz="1000" b="0" i="0">
+                <a:solidFill>
+                  <a:srgbClr val="64748B"/>
+                </a:solidFill>
+                <a:latin typeface="Noto Sans JP"/>
+              </a:rPr>
+              <a:t>38 / 38</a:t>
+            </a:r>
+          </a:p>
+        </p:txBody>
+      </p:sp>
+      <p:sp>
+        <p:nvSpPr>
+          <p:cNvPr id="10" name="Rounded Rectangle 9"/>
+          <p:cNvSpPr/>
+          <p:nvPr/>
+        </p:nvSpPr>
+        <p:spPr>
+          <a:xfrm>
+            <a:off x="365760" y="859536"/>
+            <a:ext cx="11460175" cy="2011680"/>
+          </a:xfrm>
+          <a:prstGeom prst="roundRect">
+            <a:avLst>
+              <a:gd name="adj" fmla="val 2000"/>
+            </a:avLst>
+          </a:prstGeom>
+          <a:solidFill>
+            <a:srgbClr val="F5F8FC"/>
+          </a:solidFill>
+          <a:ln w="12700">
+            <a:solidFill>
+              <a:srgbClr val="C0D0E0"/>
+            </a:solidFill>
+          </a:ln>
+          <a:effectLst/>
+        </p:spPr>
+        <p:style>
+          <a:lnRef idx="1">
+            <a:schemeClr val="accent1"/>
+          </a:lnRef>
+          <a:fillRef idx="3">
+            <a:schemeClr val="accent1"/>
+          </a:fillRef>
+          <a:effectRef idx="2">
+            <a:schemeClr val="accent1"/>
+          </a:effectRef>
+          <a:fontRef idx="minor">
+            <a:schemeClr val="lt1"/>
+          </a:fontRef>
+        </p:style>
+        <p:txBody>
+          <a:bodyPr rtlCol="0" anchor="ctr"/>
+          <a:lstStyle/>
+          <a:p>
+            <a:pPr algn="ctr"/>
+          </a:p>
+        </p:txBody>
+      </p:sp>
+      <p:sp>
+        <p:nvSpPr>
+          <p:cNvPr id="11" name="Rectangle 10"/>
+          <p:cNvSpPr/>
+          <p:nvPr/>
+        </p:nvSpPr>
+        <p:spPr>
+          <a:xfrm>
+            <a:off x="475488" y="969264"/>
+            <a:ext cx="868680" cy="292608"/>
+          </a:xfrm>
+          <a:prstGeom prst="rect">
+            <a:avLst/>
+          </a:prstGeom>
+          <a:solidFill>
+            <a:srgbClr val="1E293B"/>
+          </a:solidFill>
+          <a:ln>
+            <a:noFill/>
+          </a:ln>
+          <a:effectLst/>
+        </p:spPr>
+        <p:style>
+          <a:lnRef idx="1">
+            <a:schemeClr val="accent1"/>
+          </a:lnRef>
+          <a:fillRef idx="3">
+            <a:schemeClr val="accent1"/>
+          </a:fillRef>
+          <a:effectRef idx="2">
+            <a:schemeClr val="accent1"/>
+          </a:effectRef>
+          <a:fontRef idx="minor">
+            <a:schemeClr val="lt1"/>
+          </a:fontRef>
+        </p:style>
+        <p:txBody>
+          <a:bodyPr rtlCol="0" anchor="ctr"/>
+          <a:lstStyle/>
+          <a:p>
+            <a:pPr algn="ctr"/>
+          </a:p>
+        </p:txBody>
+      </p:sp>
+      <p:sp>
+        <p:nvSpPr>
+          <p:cNvPr id="12" name="TextBox 11"/>
+          <p:cNvSpPr txBox="1"/>
+          <p:nvPr/>
+        </p:nvSpPr>
+        <p:spPr>
+          <a:xfrm>
+            <a:off x="475488" y="969264"/>
+            <a:ext cx="868680" cy="292608"/>
+          </a:xfrm>
+          <a:prstGeom prst="rect">
+            <a:avLst/>
+          </a:prstGeom>
+          <a:noFill/>
+        </p:spPr>
+        <p:txBody>
+          <a:bodyPr wrap="square" anchor="ctr" lIns="36000" rIns="36000" tIns="18000" bIns="18000">
+            <a:spAutoFit/>
+          </a:bodyPr>
+          <a:lstStyle/>
+          <a:p>
+            <a:pPr algn="ctr"/>
+            <a:r>
+              <a:rPr sz="1100" b="1" i="0">
+                <a:solidFill>
+                  <a:srgbClr val="FFFFFF"/>
+                </a:solidFill>
+                <a:latin typeface="Noto Sans JP"/>
+              </a:rPr>
+              <a:t>概念図</a:t>
+            </a:r>
+          </a:p>
+        </p:txBody>
+      </p:sp>
+      <p:sp>
+        <p:nvSpPr>
+          <p:cNvPr id="13" name="TextBox 12"/>
+          <p:cNvSpPr txBox="1"/>
+          <p:nvPr/>
+        </p:nvSpPr>
+        <p:spPr>
+          <a:xfrm>
+            <a:off x="365760" y="859536"/>
+            <a:ext cx="11460175" cy="2011680"/>
+          </a:xfrm>
+          <a:prstGeom prst="rect">
+            <a:avLst/>
+          </a:prstGeom>
+          <a:noFill/>
+        </p:spPr>
+        <p:txBody>
+          <a:bodyPr wrap="square" anchor="ctr" lIns="36000" rIns="36000" tIns="18000" bIns="18000">
+            <a:spAutoFit/>
+          </a:bodyPr>
+          <a:lstStyle/>
+          <a:p>
+            <a:pPr algn="ctr"/>
+            <a:r>
+              <a:rPr sz="1200" b="0" i="0">
+                <a:solidFill>
+                  <a:srgbClr val="AAB4C0"/>
+                </a:solidFill>
+                <a:latin typeface="Noto Sans JP"/>
+              </a:rPr>
+              <a:t>（論文の図を貼り付け）</a:t>
+            </a:r>
+          </a:p>
+        </p:txBody>
+      </p:sp>
+      <p:sp>
+        <p:nvSpPr>
+          <p:cNvPr id="14" name="TextBox 13"/>
+          <p:cNvSpPr txBox="1"/>
+          <p:nvPr/>
+        </p:nvSpPr>
+        <p:spPr>
+          <a:xfrm>
+            <a:off x="365760" y="2907792"/>
+            <a:ext cx="11460175" cy="274320"/>
+          </a:xfrm>
+          <a:prstGeom prst="rect">
+            <a:avLst/>
+          </a:prstGeom>
+          <a:noFill/>
+        </p:spPr>
+        <p:txBody>
+          <a:bodyPr wrap="square" anchor="t" lIns="36000" rIns="36000" tIns="18000" bIns="18000">
+            <a:spAutoFit/>
+          </a:bodyPr>
+          <a:lstStyle/>
+          <a:p>
+            <a:pPr algn="ctr"/>
+            <a:r>
+              <a:rPr sz="1000" b="0" i="1">
+                <a:solidFill>
+                  <a:srgbClr val="64748B"/>
+                </a:solidFill>
+                <a:latin typeface="Noto Sans JP"/>
+              </a:rPr>
+              <a:t>温度上昇に伴う ゾル → 熱ゲル → シリカエアロゲル の3段階転移</a:t>
+            </a:r>
+          </a:p>
+        </p:txBody>
+      </p:sp>
+      <p:sp>
+        <p:nvSpPr>
+          <p:cNvPr id="15" name="Rounded Rectangle 14"/>
+          <p:cNvSpPr/>
+          <p:nvPr/>
+        </p:nvSpPr>
+        <p:spPr>
+          <a:xfrm>
+            <a:off x="365760" y="3273552"/>
+            <a:ext cx="3734714" cy="2651760"/>
+          </a:xfrm>
+          <a:prstGeom prst="roundRect">
+            <a:avLst>
+              <a:gd name="adj" fmla="val 4000"/>
+            </a:avLst>
+          </a:prstGeom>
+          <a:solidFill>
+            <a:srgbClr val="F1F5F9"/>
+          </a:solidFill>
+          <a:ln w="6350">
+            <a:solidFill>
+              <a:srgbClr val="E2E8F0"/>
+            </a:solidFill>
+          </a:ln>
+          <a:effectLst/>
+        </p:spPr>
+        <p:style>
+          <a:lnRef idx="1">
+            <a:schemeClr val="accent1"/>
+          </a:lnRef>
+          <a:fillRef idx="3">
+            <a:schemeClr val="accent1"/>
+          </a:fillRef>
+          <a:effectRef idx="2">
+            <a:schemeClr val="accent1"/>
+          </a:effectRef>
+          <a:fontRef idx="minor">
+            <a:schemeClr val="lt1"/>
+          </a:fontRef>
+        </p:style>
+        <p:txBody>
+          <a:bodyPr rtlCol="0" anchor="ctr"/>
+          <a:lstStyle/>
+          <a:p>
+            <a:pPr algn="ctr"/>
+          </a:p>
+        </p:txBody>
+      </p:sp>
+      <p:sp>
+        <p:nvSpPr>
+          <p:cNvPr id="16" name="Rectangle 15"/>
+          <p:cNvSpPr/>
+          <p:nvPr/>
+        </p:nvSpPr>
+        <p:spPr>
+          <a:xfrm>
+            <a:off x="365760" y="3273552"/>
+            <a:ext cx="3734714" cy="36576"/>
+          </a:xfrm>
+          <a:prstGeom prst="rect">
+            <a:avLst/>
+          </a:prstGeom>
+          <a:solidFill>
+            <a:srgbClr val="3B5174"/>
+          </a:solidFill>
+          <a:ln>
+            <a:noFill/>
+          </a:ln>
+          <a:effectLst/>
+        </p:spPr>
+        <p:style>
+          <a:lnRef idx="1">
+            <a:schemeClr val="accent1"/>
+          </a:lnRef>
+          <a:fillRef idx="3">
+            <a:schemeClr val="accent1"/>
+          </a:fillRef>
+          <a:effectRef idx="2">
+            <a:schemeClr val="accent1"/>
+          </a:effectRef>
+          <a:fontRef idx="minor">
+            <a:schemeClr val="lt1"/>
+          </a:fontRef>
+        </p:style>
+        <p:txBody>
+          <a:bodyPr rtlCol="0" anchor="ctr"/>
+          <a:lstStyle/>
+          <a:p>
+            <a:pPr algn="ctr"/>
+          </a:p>
+        </p:txBody>
+      </p:sp>
+      <p:sp>
+        <p:nvSpPr>
+          <p:cNvPr id="17" name="TextBox 16"/>
+          <p:cNvSpPr txBox="1"/>
+          <p:nvPr/>
+        </p:nvSpPr>
+        <p:spPr>
+          <a:xfrm>
+            <a:off x="548640" y="3438144"/>
+            <a:ext cx="3368954" cy="219456"/>
+          </a:xfrm>
+          <a:prstGeom prst="rect">
+            <a:avLst/>
+          </a:prstGeom>
+          <a:noFill/>
+        </p:spPr>
+        <p:txBody>
+          <a:bodyPr wrap="square" anchor="t" lIns="36000" rIns="36000" tIns="18000" bIns="18000">
+            <a:spAutoFit/>
+          </a:bodyPr>
+          <a:lstStyle/>
+          <a:p>
+            <a:pPr algn="l"/>
+            <a:r>
+              <a:rPr sz="1000" b="1" i="0">
+                <a:solidFill>
+                  <a:srgbClr val="64748B"/>
+                </a:solidFill>
+                <a:latin typeface="Noto Sans JP"/>
+              </a:rPr>
+              <a:t>STEP 1 ・ ゾル</a:t>
+            </a:r>
+          </a:p>
+        </p:txBody>
+      </p:sp>
+      <p:sp>
+        <p:nvSpPr>
+          <p:cNvPr id="18" name="TextBox 17"/>
+          <p:cNvSpPr txBox="1"/>
+          <p:nvPr/>
+        </p:nvSpPr>
+        <p:spPr>
+          <a:xfrm>
+            <a:off x="548640" y="3675888"/>
+            <a:ext cx="3368954" cy="329184"/>
+          </a:xfrm>
+          <a:prstGeom prst="rect">
+            <a:avLst/>
+          </a:prstGeom>
+          <a:noFill/>
+        </p:spPr>
+        <p:txBody>
+          <a:bodyPr wrap="square" anchor="t" lIns="36000" rIns="36000" tIns="18000" bIns="18000">
+            <a:spAutoFit/>
+          </a:bodyPr>
+          <a:lstStyle/>
+          <a:p>
+            <a:pPr algn="l"/>
+            <a:r>
+              <a:rPr sz="1500" b="1" i="0">
+                <a:solidFill>
+                  <a:srgbClr val="1E293B"/>
+                </a:solidFill>
+                <a:latin typeface="Noto Sans JP"/>
+              </a:rPr>
+              <a:t>室温（〜25°C）</a:t>
+            </a:r>
+          </a:p>
+        </p:txBody>
+      </p:sp>
+      <p:sp>
+        <p:nvSpPr>
+          <p:cNvPr id="19" name="TextBox 18"/>
+          <p:cNvSpPr txBox="1"/>
+          <p:nvPr/>
+        </p:nvSpPr>
+        <p:spPr>
+          <a:xfrm>
+            <a:off x="548640" y="4041648"/>
+            <a:ext cx="182880" cy="274320"/>
+          </a:xfrm>
+          <a:prstGeom prst="rect">
+            <a:avLst/>
+          </a:prstGeom>
+          <a:noFill/>
+        </p:spPr>
+        <p:txBody>
+          <a:bodyPr wrap="square" anchor="t" lIns="36000" rIns="36000" tIns="18000" bIns="18000">
+            <a:spAutoFit/>
+          </a:bodyPr>
+          <a:lstStyle/>
+          <a:p>
+            <a:pPr algn="l"/>
+            <a:r>
+              <a:rPr sz="1200" b="0" i="0">
+                <a:solidFill>
+                  <a:srgbClr val="3B5174"/>
+                </a:solidFill>
+                <a:latin typeface="Noto Sans JP"/>
+              </a:rPr>
+              <a:t>•</a:t>
+            </a:r>
+          </a:p>
+        </p:txBody>
+      </p:sp>
+      <p:sp>
+        <p:nvSpPr>
+          <p:cNvPr id="20" name="TextBox 19"/>
+          <p:cNvSpPr txBox="1"/>
+          <p:nvPr/>
+        </p:nvSpPr>
+        <p:spPr>
+          <a:xfrm>
+            <a:off x="749808" y="4041648"/>
+            <a:ext cx="3167786" cy="274320"/>
+          </a:xfrm>
+          <a:prstGeom prst="rect">
+            <a:avLst/>
+          </a:prstGeom>
+          <a:noFill/>
+        </p:spPr>
+        <p:txBody>
+          <a:bodyPr wrap="square" anchor="t" lIns="36000" rIns="36000" tIns="18000" bIns="18000">
+            <a:spAutoFit/>
+          </a:bodyPr>
+          <a:lstStyle/>
+          <a:p>
+            <a:pPr algn="l"/>
+            <a:r>
+              <a:rPr sz="1200" b="0" i="0">
+                <a:solidFill>
+                  <a:srgbClr val="475569"/>
+                </a:solidFill>
+                <a:latin typeface="Noto Sans JP"/>
+              </a:rPr>
+              <a:t>MC鎖が親水性ランダムコイル</a:t>
+            </a:r>
+          </a:p>
+        </p:txBody>
+      </p:sp>
+      <p:sp>
+        <p:nvSpPr>
+          <p:cNvPr id="21" name="TextBox 20"/>
+          <p:cNvSpPr txBox="1"/>
+          <p:nvPr/>
+        </p:nvSpPr>
+        <p:spPr>
+          <a:xfrm>
+            <a:off x="548640" y="4315968"/>
+            <a:ext cx="182880" cy="274320"/>
+          </a:xfrm>
+          <a:prstGeom prst="rect">
+            <a:avLst/>
+          </a:prstGeom>
+          <a:noFill/>
+        </p:spPr>
+        <p:txBody>
+          <a:bodyPr wrap="square" anchor="t" lIns="36000" rIns="36000" tIns="18000" bIns="18000">
+            <a:spAutoFit/>
+          </a:bodyPr>
+          <a:lstStyle/>
+          <a:p>
+            <a:pPr algn="l"/>
+            <a:r>
+              <a:rPr sz="1200" b="0" i="0">
+                <a:solidFill>
+                  <a:srgbClr val="3B5174"/>
+                </a:solidFill>
+                <a:latin typeface="Noto Sans JP"/>
+              </a:rPr>
+              <a:t>•</a:t>
+            </a:r>
+          </a:p>
+        </p:txBody>
+      </p:sp>
+      <p:sp>
+        <p:nvSpPr>
+          <p:cNvPr id="22" name="TextBox 21"/>
+          <p:cNvSpPr txBox="1"/>
+          <p:nvPr/>
+        </p:nvSpPr>
+        <p:spPr>
+          <a:xfrm>
+            <a:off x="749808" y="4315968"/>
+            <a:ext cx="3167786" cy="274320"/>
+          </a:xfrm>
+          <a:prstGeom prst="rect">
+            <a:avLst/>
+          </a:prstGeom>
+          <a:noFill/>
+        </p:spPr>
+        <p:txBody>
+          <a:bodyPr wrap="square" anchor="t" lIns="36000" rIns="36000" tIns="18000" bIns="18000">
+            <a:spAutoFit/>
+          </a:bodyPr>
+          <a:lstStyle/>
+          <a:p>
+            <a:pPr algn="l"/>
+            <a:r>
+              <a:rPr sz="1200" b="0" i="0">
+                <a:solidFill>
+                  <a:srgbClr val="475569"/>
+                </a:solidFill>
+                <a:latin typeface="Noto Sans JP"/>
+              </a:rPr>
+              <a:t>低粘度でスプレー散布が可能</a:t>
+            </a:r>
+          </a:p>
+        </p:txBody>
+      </p:sp>
+      <p:sp>
+        <p:nvSpPr>
+          <p:cNvPr id="23" name="TextBox 22"/>
+          <p:cNvSpPr txBox="1"/>
+          <p:nvPr/>
+        </p:nvSpPr>
+        <p:spPr>
+          <a:xfrm>
+            <a:off x="548640" y="4590288"/>
+            <a:ext cx="182880" cy="274320"/>
+          </a:xfrm>
+          <a:prstGeom prst="rect">
+            <a:avLst/>
+          </a:prstGeom>
+          <a:noFill/>
+        </p:spPr>
+        <p:txBody>
+          <a:bodyPr wrap="square" anchor="t" lIns="36000" rIns="36000" tIns="18000" bIns="18000">
+            <a:spAutoFit/>
+          </a:bodyPr>
+          <a:lstStyle/>
+          <a:p>
+            <a:pPr algn="l"/>
+            <a:r>
+              <a:rPr sz="1200" b="0" i="0">
+                <a:solidFill>
+                  <a:srgbClr val="3B5174"/>
+                </a:solidFill>
+                <a:latin typeface="Noto Sans JP"/>
+              </a:rPr>
+              <a:t>•</a:t>
+            </a:r>
+          </a:p>
+        </p:txBody>
+      </p:sp>
+      <p:sp>
+        <p:nvSpPr>
+          <p:cNvPr id="24" name="TextBox 23"/>
+          <p:cNvSpPr txBox="1"/>
+          <p:nvPr/>
+        </p:nvSpPr>
+        <p:spPr>
+          <a:xfrm>
+            <a:off x="749808" y="4590288"/>
+            <a:ext cx="3167786" cy="274320"/>
+          </a:xfrm>
+          <a:prstGeom prst="rect">
+            <a:avLst/>
+          </a:prstGeom>
+          <a:noFill/>
+        </p:spPr>
+        <p:txBody>
+          <a:bodyPr wrap="square" anchor="t" lIns="36000" rIns="36000" tIns="18000" bIns="18000">
+            <a:spAutoFit/>
+          </a:bodyPr>
+          <a:lstStyle/>
+          <a:p>
+            <a:pPr algn="l"/>
+            <a:r>
+              <a:rPr sz="1200" b="0" i="0">
+                <a:solidFill>
+                  <a:srgbClr val="475569"/>
+                </a:solidFill>
+                <a:latin typeface="Noto Sans JP"/>
+              </a:rPr>
+              <a:t>CSPと高分子は可逆的な水素結合</a:t>
+            </a:r>
+          </a:p>
+        </p:txBody>
+      </p:sp>
+      <p:sp>
+        <p:nvSpPr>
+          <p:cNvPr id="25" name="Rounded Rectangle 24"/>
+          <p:cNvSpPr/>
+          <p:nvPr/>
+        </p:nvSpPr>
+        <p:spPr>
+          <a:xfrm>
+            <a:off x="4228490" y="3273552"/>
+            <a:ext cx="3734714" cy="2651760"/>
+          </a:xfrm>
+          <a:prstGeom prst="roundRect">
+            <a:avLst>
+              <a:gd name="adj" fmla="val 4000"/>
+            </a:avLst>
+          </a:prstGeom>
+          <a:solidFill>
+            <a:srgbClr val="F1F5F9"/>
+          </a:solidFill>
+          <a:ln w="6350">
+            <a:solidFill>
+              <a:srgbClr val="E2E8F0"/>
+            </a:solidFill>
+          </a:ln>
+          <a:effectLst/>
+        </p:spPr>
+        <p:style>
+          <a:lnRef idx="1">
+            <a:schemeClr val="accent1"/>
+          </a:lnRef>
+          <a:fillRef idx="3">
+            <a:schemeClr val="accent1"/>
+          </a:fillRef>
+          <a:effectRef idx="2">
+            <a:schemeClr val="accent1"/>
+          </a:effectRef>
+          <a:fontRef idx="minor">
+            <a:schemeClr val="lt1"/>
+          </a:fontRef>
+        </p:style>
+        <p:txBody>
+          <a:bodyPr rtlCol="0" anchor="ctr"/>
+          <a:lstStyle/>
+          <a:p>
+            <a:pPr algn="ctr"/>
+          </a:p>
+        </p:txBody>
+      </p:sp>
+      <p:sp>
+        <p:nvSpPr>
+          <p:cNvPr id="26" name="Rectangle 25"/>
+          <p:cNvSpPr/>
+          <p:nvPr/>
+        </p:nvSpPr>
+        <p:spPr>
+          <a:xfrm>
+            <a:off x="4228490" y="3273552"/>
+            <a:ext cx="3734714" cy="36576"/>
+          </a:xfrm>
+          <a:prstGeom prst="rect">
+            <a:avLst/>
+          </a:prstGeom>
+          <a:solidFill>
+            <a:srgbClr val="3B5174"/>
+          </a:solidFill>
+          <a:ln>
+            <a:noFill/>
+          </a:ln>
+          <a:effectLst/>
+        </p:spPr>
+        <p:style>
+          <a:lnRef idx="1">
+            <a:schemeClr val="accent1"/>
+          </a:lnRef>
+          <a:fillRef idx="3">
+            <a:schemeClr val="accent1"/>
+          </a:fillRef>
+          <a:effectRef idx="2">
+            <a:schemeClr val="accent1"/>
+          </a:effectRef>
+          <a:fontRef idx="minor">
+            <a:schemeClr val="lt1"/>
+          </a:fontRef>
+        </p:style>
+        <p:txBody>
+          <a:bodyPr rtlCol="0" anchor="ctr"/>
+          <a:lstStyle/>
+          <a:p>
+            <a:pPr algn="ctr"/>
+          </a:p>
+        </p:txBody>
+      </p:sp>
+      <p:sp>
+        <p:nvSpPr>
+          <p:cNvPr id="27" name="TextBox 26"/>
+          <p:cNvSpPr txBox="1"/>
+          <p:nvPr/>
+        </p:nvSpPr>
+        <p:spPr>
+          <a:xfrm>
+            <a:off x="4411370" y="3438144"/>
+            <a:ext cx="3368954" cy="219456"/>
+          </a:xfrm>
+          <a:prstGeom prst="rect">
+            <a:avLst/>
+          </a:prstGeom>
+          <a:noFill/>
+        </p:spPr>
+        <p:txBody>
+          <a:bodyPr wrap="square" anchor="t" lIns="36000" rIns="36000" tIns="18000" bIns="18000">
+            <a:spAutoFit/>
+          </a:bodyPr>
+          <a:lstStyle/>
+          <a:p>
+            <a:pPr algn="l"/>
+            <a:r>
+              <a:rPr sz="1000" b="1" i="0">
+                <a:solidFill>
+                  <a:srgbClr val="64748B"/>
+                </a:solidFill>
+                <a:latin typeface="Noto Sans JP"/>
+              </a:rPr>
+              <a:t>STEP 2 ・ 熱ゲル化</a:t>
+            </a:r>
+          </a:p>
+        </p:txBody>
+      </p:sp>
+      <p:sp>
+        <p:nvSpPr>
+          <p:cNvPr id="28" name="TextBox 27"/>
+          <p:cNvSpPr txBox="1"/>
+          <p:nvPr/>
+        </p:nvSpPr>
+        <p:spPr>
+          <a:xfrm>
+            <a:off x="4411370" y="3675888"/>
+            <a:ext cx="3368954" cy="329184"/>
+          </a:xfrm>
+          <a:prstGeom prst="rect">
+            <a:avLst/>
+          </a:prstGeom>
+          <a:noFill/>
+        </p:spPr>
+        <p:txBody>
+          <a:bodyPr wrap="square" anchor="t" lIns="36000" rIns="36000" tIns="18000" bIns="18000">
+            <a:spAutoFit/>
+          </a:bodyPr>
+          <a:lstStyle/>
+          <a:p>
+            <a:pPr algn="l"/>
+            <a:r>
+              <a:rPr sz="1500" b="1" i="0">
+                <a:solidFill>
+                  <a:srgbClr val="1E293B"/>
+                </a:solidFill>
+                <a:latin typeface="Noto Sans JP"/>
+              </a:rPr>
+              <a:t>加熱（〜50–60°C）</a:t>
+            </a:r>
+          </a:p>
+        </p:txBody>
+      </p:sp>
+      <p:sp>
+        <p:nvSpPr>
+          <p:cNvPr id="29" name="TextBox 28"/>
+          <p:cNvSpPr txBox="1"/>
+          <p:nvPr/>
+        </p:nvSpPr>
+        <p:spPr>
+          <a:xfrm>
+            <a:off x="4411370" y="4041648"/>
+            <a:ext cx="182880" cy="274320"/>
+          </a:xfrm>
+          <a:prstGeom prst="rect">
+            <a:avLst/>
+          </a:prstGeom>
+          <a:noFill/>
+        </p:spPr>
+        <p:txBody>
+          <a:bodyPr wrap="square" anchor="t" lIns="36000" rIns="36000" tIns="18000" bIns="18000">
+            <a:spAutoFit/>
+          </a:bodyPr>
+          <a:lstStyle/>
+          <a:p>
+            <a:pPr algn="l"/>
+            <a:r>
+              <a:rPr sz="1200" b="0" i="0">
+                <a:solidFill>
+                  <a:srgbClr val="3B5174"/>
+                </a:solidFill>
+                <a:latin typeface="Noto Sans JP"/>
+              </a:rPr>
+              <a:t>•</a:t>
+            </a:r>
+          </a:p>
+        </p:txBody>
+      </p:sp>
+      <p:sp>
+        <p:nvSpPr>
+          <p:cNvPr id="30" name="TextBox 29"/>
+          <p:cNvSpPr txBox="1"/>
+          <p:nvPr/>
+        </p:nvSpPr>
+        <p:spPr>
+          <a:xfrm>
+            <a:off x="4612538" y="4041648"/>
+            <a:ext cx="3167786" cy="274320"/>
+          </a:xfrm>
+          <a:prstGeom prst="rect">
+            <a:avLst/>
+          </a:prstGeom>
+          <a:noFill/>
+        </p:spPr>
+        <p:txBody>
+          <a:bodyPr wrap="square" anchor="t" lIns="36000" rIns="36000" tIns="18000" bIns="18000">
+            <a:spAutoFit/>
+          </a:bodyPr>
+          <a:lstStyle/>
+          <a:p>
+            <a:pPr algn="l"/>
+            <a:r>
+              <a:rPr sz="1200" b="0" i="0">
+                <a:solidFill>
+                  <a:srgbClr val="475569"/>
+                </a:solidFill>
+                <a:latin typeface="Noto Sans JP"/>
+              </a:rPr>
+              <a:t>MCのLCST挙動で疎水性相互作用が増大</a:t>
+            </a:r>
+          </a:p>
+        </p:txBody>
+      </p:sp>
+      <p:sp>
+        <p:nvSpPr>
+          <p:cNvPr id="31" name="TextBox 30"/>
+          <p:cNvSpPr txBox="1"/>
+          <p:nvPr/>
+        </p:nvSpPr>
+        <p:spPr>
+          <a:xfrm>
+            <a:off x="4411370" y="4315968"/>
+            <a:ext cx="182880" cy="274320"/>
+          </a:xfrm>
+          <a:prstGeom prst="rect">
+            <a:avLst/>
+          </a:prstGeom>
+          <a:noFill/>
+        </p:spPr>
+        <p:txBody>
+          <a:bodyPr wrap="square" anchor="t" lIns="36000" rIns="36000" tIns="18000" bIns="18000">
+            <a:spAutoFit/>
+          </a:bodyPr>
+          <a:lstStyle/>
+          <a:p>
+            <a:pPr algn="l"/>
+            <a:r>
+              <a:rPr sz="1200" b="0" i="0">
+                <a:solidFill>
+                  <a:srgbClr val="3B5174"/>
+                </a:solidFill>
+                <a:latin typeface="Noto Sans JP"/>
+              </a:rPr>
+              <a:t>•</a:t>
+            </a:r>
+          </a:p>
+        </p:txBody>
+      </p:sp>
+      <p:sp>
+        <p:nvSpPr>
+          <p:cNvPr id="32" name="TextBox 31"/>
+          <p:cNvSpPr txBox="1"/>
+          <p:nvPr/>
+        </p:nvSpPr>
+        <p:spPr>
+          <a:xfrm>
+            <a:off x="4612538" y="4315968"/>
+            <a:ext cx="3167786" cy="274320"/>
+          </a:xfrm>
+          <a:prstGeom prst="rect">
+            <a:avLst/>
+          </a:prstGeom>
+          <a:noFill/>
+        </p:spPr>
+        <p:txBody>
+          <a:bodyPr wrap="square" anchor="t" lIns="36000" rIns="36000" tIns="18000" bIns="18000">
+            <a:spAutoFit/>
+          </a:bodyPr>
+          <a:lstStyle/>
+          <a:p>
+            <a:pPr algn="l"/>
+            <a:r>
+              <a:rPr sz="1200" b="0" i="0">
+                <a:solidFill>
+                  <a:srgbClr val="475569"/>
+                </a:solidFill>
+                <a:latin typeface="Noto Sans JP"/>
+              </a:rPr>
+              <a:t>高分子鎖が集合しゲルネットワーク形成</a:t>
+            </a:r>
+          </a:p>
+        </p:txBody>
+      </p:sp>
+      <p:sp>
+        <p:nvSpPr>
+          <p:cNvPr id="33" name="TextBox 32"/>
+          <p:cNvSpPr txBox="1"/>
+          <p:nvPr/>
+        </p:nvSpPr>
+        <p:spPr>
+          <a:xfrm>
+            <a:off x="4411370" y="4590288"/>
+            <a:ext cx="182880" cy="274320"/>
+          </a:xfrm>
+          <a:prstGeom prst="rect">
+            <a:avLst/>
+          </a:prstGeom>
+          <a:noFill/>
+        </p:spPr>
+        <p:txBody>
+          <a:bodyPr wrap="square" anchor="t" lIns="36000" rIns="36000" tIns="18000" bIns="18000">
+            <a:spAutoFit/>
+          </a:bodyPr>
+          <a:lstStyle/>
+          <a:p>
+            <a:pPr algn="l"/>
+            <a:r>
+              <a:rPr sz="1200" b="0" i="0">
+                <a:solidFill>
+                  <a:srgbClr val="3B5174"/>
+                </a:solidFill>
+                <a:latin typeface="Noto Sans JP"/>
+              </a:rPr>
+              <a:t>•</a:t>
+            </a:r>
+          </a:p>
+        </p:txBody>
+      </p:sp>
+      <p:sp>
+        <p:nvSpPr>
+          <p:cNvPr id="34" name="TextBox 33"/>
+          <p:cNvSpPr txBox="1"/>
+          <p:nvPr/>
+        </p:nvSpPr>
+        <p:spPr>
+          <a:xfrm>
+            <a:off x="4612538" y="4590288"/>
+            <a:ext cx="3167786" cy="274320"/>
+          </a:xfrm>
+          <a:prstGeom prst="rect">
+            <a:avLst/>
+          </a:prstGeom>
+          <a:noFill/>
+        </p:spPr>
+        <p:txBody>
+          <a:bodyPr wrap="square" anchor="t" lIns="36000" rIns="36000" tIns="18000" bIns="18000">
+            <a:spAutoFit/>
+          </a:bodyPr>
+          <a:lstStyle/>
+          <a:p>
+            <a:pPr algn="l"/>
+            <a:r>
+              <a:rPr sz="1200" b="0" i="0">
+                <a:solidFill>
+                  <a:srgbClr val="475569"/>
+                </a:solidFill>
+                <a:latin typeface="Noto Sans JP"/>
+              </a:rPr>
+              <a:t>熱可逆的にゲル化（火炎保護の起点）</a:t>
+            </a:r>
+          </a:p>
+        </p:txBody>
+      </p:sp>
+      <p:sp>
+        <p:nvSpPr>
+          <p:cNvPr id="35" name="Rounded Rectangle 34"/>
+          <p:cNvSpPr/>
+          <p:nvPr/>
+        </p:nvSpPr>
+        <p:spPr>
+          <a:xfrm>
+            <a:off x="8091220" y="3273552"/>
+            <a:ext cx="3734714" cy="2651760"/>
+          </a:xfrm>
+          <a:prstGeom prst="roundRect">
+            <a:avLst>
+              <a:gd name="adj" fmla="val 4000"/>
+            </a:avLst>
+          </a:prstGeom>
+          <a:solidFill>
+            <a:srgbClr val="F1F5F9"/>
+          </a:solidFill>
+          <a:ln w="6350">
+            <a:solidFill>
+              <a:srgbClr val="E2E8F0"/>
+            </a:solidFill>
+          </a:ln>
+          <a:effectLst/>
+        </p:spPr>
+        <p:style>
+          <a:lnRef idx="1">
+            <a:schemeClr val="accent1"/>
+          </a:lnRef>
+          <a:fillRef idx="3">
+            <a:schemeClr val="accent1"/>
+          </a:fillRef>
+          <a:effectRef idx="2">
+            <a:schemeClr val="accent1"/>
+          </a:effectRef>
+          <a:fontRef idx="minor">
+            <a:schemeClr val="lt1"/>
+          </a:fontRef>
+        </p:style>
+        <p:txBody>
+          <a:bodyPr rtlCol="0" anchor="ctr"/>
+          <a:lstStyle/>
+          <a:p>
+            <a:pPr algn="ctr"/>
+          </a:p>
+        </p:txBody>
+      </p:sp>
+      <p:sp>
+        <p:nvSpPr>
+          <p:cNvPr id="36" name="Rectangle 35"/>
+          <p:cNvSpPr/>
+          <p:nvPr/>
+        </p:nvSpPr>
+        <p:spPr>
+          <a:xfrm>
+            <a:off x="8091220" y="3273552"/>
+            <a:ext cx="3734714" cy="36576"/>
+          </a:xfrm>
+          <a:prstGeom prst="rect">
+            <a:avLst/>
+          </a:prstGeom>
+          <a:solidFill>
+            <a:srgbClr val="3B5174"/>
+          </a:solidFill>
+          <a:ln>
+            <a:noFill/>
+          </a:ln>
+          <a:effectLst/>
+        </p:spPr>
+        <p:style>
+          <a:lnRef idx="1">
+            <a:schemeClr val="accent1"/>
+          </a:lnRef>
+          <a:fillRef idx="3">
+            <a:schemeClr val="accent1"/>
+          </a:fillRef>
+          <a:effectRef idx="2">
+            <a:schemeClr val="accent1"/>
+          </a:effectRef>
+          <a:fontRef idx="minor">
+            <a:schemeClr val="lt1"/>
+          </a:fontRef>
+        </p:style>
+        <p:txBody>
+          <a:bodyPr rtlCol="0" anchor="ctr"/>
+          <a:lstStyle/>
+          <a:p>
+            <a:pPr algn="ctr"/>
+          </a:p>
+        </p:txBody>
+      </p:sp>
+      <p:sp>
+        <p:nvSpPr>
+          <p:cNvPr id="37" name="TextBox 36"/>
+          <p:cNvSpPr txBox="1"/>
+          <p:nvPr/>
+        </p:nvSpPr>
+        <p:spPr>
+          <a:xfrm>
+            <a:off x="8274100" y="3438144"/>
+            <a:ext cx="3368954" cy="219456"/>
+          </a:xfrm>
+          <a:prstGeom prst="rect">
+            <a:avLst/>
+          </a:prstGeom>
+          <a:noFill/>
+        </p:spPr>
+        <p:txBody>
+          <a:bodyPr wrap="square" anchor="t" lIns="36000" rIns="36000" tIns="18000" bIns="18000">
+            <a:spAutoFit/>
+          </a:bodyPr>
+          <a:lstStyle/>
+          <a:p>
+            <a:pPr algn="l"/>
+            <a:r>
+              <a:rPr sz="1000" b="1" i="0">
+                <a:solidFill>
+                  <a:srgbClr val="64748B"/>
+                </a:solidFill>
+                <a:latin typeface="Noto Sans JP"/>
+              </a:rPr>
+              <a:t>STEP 3 ・ エアロゲル</a:t>
+            </a:r>
+          </a:p>
+        </p:txBody>
+      </p:sp>
+      <p:sp>
+        <p:nvSpPr>
+          <p:cNvPr id="38" name="TextBox 37"/>
+          <p:cNvSpPr txBox="1"/>
+          <p:nvPr/>
+        </p:nvSpPr>
+        <p:spPr>
+          <a:xfrm>
+            <a:off x="8274100" y="3675888"/>
+            <a:ext cx="3368954" cy="329184"/>
+          </a:xfrm>
+          <a:prstGeom prst="rect">
+            <a:avLst/>
+          </a:prstGeom>
+          <a:noFill/>
+        </p:spPr>
+        <p:txBody>
+          <a:bodyPr wrap="square" anchor="t" lIns="36000" rIns="36000" tIns="18000" bIns="18000">
+            <a:spAutoFit/>
+          </a:bodyPr>
+          <a:lstStyle/>
+          <a:p>
+            <a:pPr algn="l"/>
+            <a:r>
+              <a:rPr sz="1500" b="1" i="0">
+                <a:solidFill>
+                  <a:srgbClr val="1E293B"/>
+                </a:solidFill>
+                <a:latin typeface="Noto Sans JP"/>
+              </a:rPr>
+              <a:t>火炎（数百°C）</a:t>
+            </a:r>
+          </a:p>
+        </p:txBody>
+      </p:sp>
+      <p:sp>
+        <p:nvSpPr>
+          <p:cNvPr id="39" name="TextBox 38"/>
+          <p:cNvSpPr txBox="1"/>
+          <p:nvPr/>
+        </p:nvSpPr>
+        <p:spPr>
+          <a:xfrm>
+            <a:off x="8274100" y="4041648"/>
+            <a:ext cx="182880" cy="274320"/>
+          </a:xfrm>
+          <a:prstGeom prst="rect">
+            <a:avLst/>
+          </a:prstGeom>
+          <a:noFill/>
+        </p:spPr>
+        <p:txBody>
+          <a:bodyPr wrap="square" anchor="t" lIns="36000" rIns="36000" tIns="18000" bIns="18000">
+            <a:spAutoFit/>
+          </a:bodyPr>
+          <a:lstStyle/>
+          <a:p>
+            <a:pPr algn="l"/>
+            <a:r>
+              <a:rPr sz="1200" b="0" i="0">
+                <a:solidFill>
+                  <a:srgbClr val="3B5174"/>
+                </a:solidFill>
+                <a:latin typeface="Noto Sans JP"/>
+              </a:rPr>
+              <a:t>•</a:t>
+            </a:r>
+          </a:p>
+        </p:txBody>
+      </p:sp>
+      <p:sp>
+        <p:nvSpPr>
+          <p:cNvPr id="40" name="TextBox 39"/>
+          <p:cNvSpPr txBox="1"/>
+          <p:nvPr/>
+        </p:nvSpPr>
+        <p:spPr>
+          <a:xfrm>
+            <a:off x="8475268" y="4041648"/>
+            <a:ext cx="3167786" cy="274320"/>
+          </a:xfrm>
+          <a:prstGeom prst="rect">
+            <a:avLst/>
+          </a:prstGeom>
+          <a:noFill/>
+        </p:spPr>
+        <p:txBody>
+          <a:bodyPr wrap="square" anchor="t" lIns="36000" rIns="36000" tIns="18000" bIns="18000">
+            <a:spAutoFit/>
+          </a:bodyPr>
+          <a:lstStyle/>
+          <a:p>
+            <a:pPr algn="l"/>
+            <a:r>
+              <a:rPr sz="1200" b="0" i="0">
+                <a:solidFill>
+                  <a:srgbClr val="475569"/>
+                </a:solidFill>
+                <a:latin typeface="Noto Sans JP"/>
+              </a:rPr>
+              <a:t>水分が急速に蒸発・脱水</a:t>
+            </a:r>
+          </a:p>
+        </p:txBody>
+      </p:sp>
+      <p:sp>
+        <p:nvSpPr>
+          <p:cNvPr id="41" name="TextBox 40"/>
+          <p:cNvSpPr txBox="1"/>
+          <p:nvPr/>
+        </p:nvSpPr>
+        <p:spPr>
+          <a:xfrm>
+            <a:off x="8274100" y="4315968"/>
+            <a:ext cx="182880" cy="274320"/>
+          </a:xfrm>
+          <a:prstGeom prst="rect">
+            <a:avLst/>
+          </a:prstGeom>
+          <a:noFill/>
+        </p:spPr>
+        <p:txBody>
+          <a:bodyPr wrap="square" anchor="t" lIns="36000" rIns="36000" tIns="18000" bIns="18000">
+            <a:spAutoFit/>
+          </a:bodyPr>
+          <a:lstStyle/>
+          <a:p>
+            <a:pPr algn="l"/>
+            <a:r>
+              <a:rPr sz="1200" b="0" i="0">
+                <a:solidFill>
+                  <a:srgbClr val="3B5174"/>
+                </a:solidFill>
+                <a:latin typeface="Noto Sans JP"/>
+              </a:rPr>
+              <a:t>•</a:t>
+            </a:r>
+          </a:p>
+        </p:txBody>
+      </p:sp>
+      <p:sp>
+        <p:nvSpPr>
+          <p:cNvPr id="42" name="TextBox 41"/>
+          <p:cNvSpPr txBox="1"/>
+          <p:nvPr/>
+        </p:nvSpPr>
+        <p:spPr>
+          <a:xfrm>
+            <a:off x="8475268" y="4315968"/>
+            <a:ext cx="3167786" cy="274320"/>
+          </a:xfrm>
+          <a:prstGeom prst="rect">
+            <a:avLst/>
+          </a:prstGeom>
+          <a:noFill/>
+        </p:spPr>
+        <p:txBody>
+          <a:bodyPr wrap="square" anchor="t" lIns="36000" rIns="36000" tIns="18000" bIns="18000">
+            <a:spAutoFit/>
+          </a:bodyPr>
+          <a:lstStyle/>
+          <a:p>
+            <a:pPr algn="l"/>
+            <a:r>
+              <a:rPr sz="1200" b="0" i="0">
+                <a:solidFill>
+                  <a:srgbClr val="475569"/>
+                </a:solidFill>
+                <a:latin typeface="Noto Sans JP"/>
+              </a:rPr>
+              <a:t>CSPが焼結し3次元多孔質骨格へ</a:t>
+            </a:r>
+          </a:p>
+        </p:txBody>
+      </p:sp>
+      <p:sp>
+        <p:nvSpPr>
+          <p:cNvPr id="43" name="TextBox 42"/>
+          <p:cNvSpPr txBox="1"/>
+          <p:nvPr/>
+        </p:nvSpPr>
+        <p:spPr>
+          <a:xfrm>
+            <a:off x="8274100" y="4590288"/>
+            <a:ext cx="182880" cy="274320"/>
+          </a:xfrm>
+          <a:prstGeom prst="rect">
+            <a:avLst/>
+          </a:prstGeom>
+          <a:noFill/>
+        </p:spPr>
+        <p:txBody>
+          <a:bodyPr wrap="square" anchor="t" lIns="36000" rIns="36000" tIns="18000" bIns="18000">
+            <a:spAutoFit/>
+          </a:bodyPr>
+          <a:lstStyle/>
+          <a:p>
+            <a:pPr algn="l"/>
+            <a:r>
+              <a:rPr sz="1200" b="0" i="0">
+                <a:solidFill>
+                  <a:srgbClr val="3B5174"/>
+                </a:solidFill>
+                <a:latin typeface="Noto Sans JP"/>
+              </a:rPr>
+              <a:t>•</a:t>
+            </a:r>
+          </a:p>
+        </p:txBody>
+      </p:sp>
+      <p:sp>
+        <p:nvSpPr>
+          <p:cNvPr id="44" name="TextBox 43"/>
+          <p:cNvSpPr txBox="1"/>
+          <p:nvPr/>
+        </p:nvSpPr>
+        <p:spPr>
+          <a:xfrm>
+            <a:off x="8475268" y="4590288"/>
+            <a:ext cx="3167786" cy="274320"/>
+          </a:xfrm>
+          <a:prstGeom prst="rect">
+            <a:avLst/>
+          </a:prstGeom>
+          <a:noFill/>
+        </p:spPr>
+        <p:txBody>
+          <a:bodyPr wrap="square" anchor="t" lIns="36000" rIns="36000" tIns="18000" bIns="18000">
+            <a:spAutoFit/>
+          </a:bodyPr>
+          <a:lstStyle/>
+          <a:p>
+            <a:pPr algn="l"/>
+            <a:r>
+              <a:rPr sz="1200" b="0" i="0">
+                <a:solidFill>
+                  <a:srgbClr val="475569"/>
+                </a:solidFill>
+                <a:latin typeface="Noto Sans JP"/>
+              </a:rPr>
+              <a:t>断熱性シリカエアロゲル層が完成</a:t>
             </a:r>
           </a:p>
         </p:txBody>
@@ -48866,7 +50523,7 @@
                 </a:solidFill>
                 <a:latin typeface="Noto Sans JP"/>
               </a:rPr>
-              <a:t>4 / 37</a:t>
+              <a:t>4 / 38</a:t>
             </a:r>
           </a:p>
         </p:txBody>
@@ -50071,7 +51728,7 @@
                 </a:solidFill>
                 <a:latin typeface="Noto Sans JP"/>
               </a:rPr>
-              <a:t>5 / 37</a:t>
+              <a:t>5 / 38</a:t>
             </a:r>
           </a:p>
         </p:txBody>
@@ -51395,7 +53052,7 @@
                 </a:solidFill>
                 <a:latin typeface="Noto Sans JP"/>
               </a:rPr>
-              <a:t>6 / 37</a:t>
+              <a:t>6 / 38</a:t>
             </a:r>
           </a:p>
         </p:txBody>
@@ -52983,7 +54640,7 @@
                 </a:solidFill>
                 <a:latin typeface="Noto Sans JP"/>
               </a:rPr>
-              <a:t>7 / 37</a:t>
+              <a:t>7 / 38</a:t>
             </a:r>
           </a:p>
         </p:txBody>
@@ -54765,7 +56422,7 @@
                 </a:solidFill>
                 <a:latin typeface="Noto Sans JP"/>
               </a:rPr>
-              <a:t>8 / 37</a:t>
+              <a:t>8 / 38</a:t>
             </a:r>
           </a:p>
         </p:txBody>
@@ -55108,7 +56765,7 @@
                 </a:solidFill>
                 <a:latin typeface="Noto Sans JP"/>
               </a:rPr>
-              <a:t>9 / 37</a:t>
+              <a:t>9 / 38</a:t>
             </a:r>
           </a:p>
         </p:txBody>

--- a/slides.pptx
+++ b/slides.pptx
@@ -42,7 +42,6 @@
     <p:sldId id="290" r:id="rId41"/>
     <p:sldId id="291" r:id="rId42"/>
     <p:sldId id="292" r:id="rId43"/>
-    <p:sldId id="293" r:id="rId44"/>
   </p:sldIdLst>
   <p:sldSz cx="12191695" cy="6858000" type="screen4x3"/>
   <p:notesSz cx="6858000" cy="9144000"/>
@@ -3579,7 +3578,7 @@
                 </a:solidFill>
                 <a:latin typeface="Noto Sans JP"/>
               </a:rPr>
-              <a:t>1 / 38</a:t>
+              <a:t>1 / 37</a:t>
             </a:r>
           </a:p>
         </p:txBody>
@@ -3922,7 +3921,7 @@
                 </a:solidFill>
                 <a:latin typeface="Noto Sans JP"/>
               </a:rPr>
-              <a:t>10 / 38</a:t>
+              <a:t>10 / 37</a:t>
             </a:r>
           </a:p>
         </p:txBody>
@@ -5965,7 +5964,7 @@
                 </a:solidFill>
                 <a:latin typeface="Noto Sans JP"/>
               </a:rPr>
-              <a:t>11 / 38</a:t>
+              <a:t>11 / 37</a:t>
             </a:r>
           </a:p>
         </p:txBody>
@@ -7492,7 +7491,7 @@
                 </a:solidFill>
                 <a:latin typeface="Noto Sans JP"/>
               </a:rPr>
-              <a:t>12 / 38</a:t>
+              <a:t>12 / 37</a:t>
             </a:r>
           </a:p>
         </p:txBody>
@@ -9368,7 +9367,7 @@
                 </a:solidFill>
                 <a:latin typeface="Noto Sans JP"/>
               </a:rPr>
-              <a:t>13 / 38</a:t>
+              <a:t>13 / 37</a:t>
             </a:r>
           </a:p>
         </p:txBody>
@@ -11860,7 +11859,7 @@
                 </a:solidFill>
                 <a:latin typeface="Noto Sans JP"/>
               </a:rPr>
-              <a:t>14 / 38</a:t>
+              <a:t>14 / 37</a:t>
             </a:r>
           </a:p>
         </p:txBody>
@@ -14064,7 +14063,7 @@
                 </a:solidFill>
                 <a:latin typeface="Noto Sans JP"/>
               </a:rPr>
-              <a:t>15 / 38</a:t>
+              <a:t>15 / 37</a:t>
             </a:r>
           </a:p>
         </p:txBody>
@@ -14407,7 +14406,7 @@
                 </a:solidFill>
                 <a:latin typeface="Noto Sans JP"/>
               </a:rPr>
-              <a:t>16 / 38</a:t>
+              <a:t>16 / 37</a:t>
             </a:r>
           </a:p>
         </p:txBody>
@@ -15479,7 +15478,7 @@
                 </a:solidFill>
                 <a:latin typeface="Noto Sans JP"/>
               </a:rPr>
-              <a:t>17 / 38</a:t>
+              <a:t>17 / 37</a:t>
             </a:r>
           </a:p>
         </p:txBody>
@@ -16580,7 +16579,7 @@
                 </a:solidFill>
                 <a:latin typeface="Noto Sans JP"/>
               </a:rPr>
-              <a:t>18 / 38</a:t>
+              <a:t>18 / 37</a:t>
             </a:r>
           </a:p>
         </p:txBody>
@@ -18179,7 +18178,7 @@
                 </a:solidFill>
                 <a:latin typeface="Noto Sans JP"/>
               </a:rPr>
-              <a:t>19 / 38</a:t>
+              <a:t>19 / 37</a:t>
             </a:r>
           </a:p>
         </p:txBody>
@@ -19896,7 +19895,7 @@
                 </a:solidFill>
                 <a:latin typeface="Noto Sans JP"/>
               </a:rPr>
-              <a:t>2 / 38</a:t>
+              <a:t>2 / 37</a:t>
             </a:r>
           </a:p>
         </p:txBody>
@@ -21467,7 +21466,7 @@
                 </a:solidFill>
                 <a:latin typeface="Noto Sans JP"/>
               </a:rPr>
-              <a:t>20 / 38</a:t>
+              <a:t>20 / 37</a:t>
             </a:r>
           </a:p>
         </p:txBody>
@@ -23160,7 +23159,7 @@
                 </a:solidFill>
                 <a:latin typeface="Noto Sans JP"/>
               </a:rPr>
-              <a:t>21 / 38</a:t>
+              <a:t>21 / 37</a:t>
             </a:r>
           </a:p>
         </p:txBody>
@@ -24372,7 +24371,7 @@
                 </a:solidFill>
                 <a:latin typeface="Noto Sans JP"/>
               </a:rPr>
-              <a:t>22 / 38</a:t>
+              <a:t>22 / 37</a:t>
             </a:r>
           </a:p>
         </p:txBody>
@@ -25927,7 +25926,7 @@
                 </a:solidFill>
                 <a:latin typeface="Noto Sans JP"/>
               </a:rPr>
-              <a:t>23 / 38</a:t>
+              <a:t>23 / 37</a:t>
             </a:r>
           </a:p>
         </p:txBody>
@@ -27346,7 +27345,7 @@
                 </a:solidFill>
                 <a:latin typeface="Noto Sans JP"/>
               </a:rPr>
-              <a:t>24 / 38</a:t>
+              <a:t>24 / 37</a:t>
             </a:r>
           </a:p>
         </p:txBody>
@@ -28839,7 +28838,7 @@
                 </a:solidFill>
                 <a:latin typeface="Noto Sans JP"/>
               </a:rPr>
-              <a:t>25 / 38</a:t>
+              <a:t>25 / 37</a:t>
             </a:r>
           </a:p>
         </p:txBody>
@@ -29182,7 +29181,7 @@
                 </a:solidFill>
                 <a:latin typeface="Noto Sans JP"/>
               </a:rPr>
-              <a:t>26 / 38</a:t>
+              <a:t>26 / 37</a:t>
             </a:r>
           </a:p>
         </p:txBody>
@@ -30925,7 +30924,7 @@
                 </a:solidFill>
                 <a:latin typeface="Noto Sans JP"/>
               </a:rPr>
-              <a:t>27 / 38</a:t>
+              <a:t>27 / 37</a:t>
             </a:r>
           </a:p>
         </p:txBody>
@@ -31819,7 +31818,7 @@
                 </a:solidFill>
                 <a:latin typeface="Noto Sans JP"/>
               </a:rPr>
-              <a:t>28 / 38</a:t>
+              <a:t>28 / 37</a:t>
             </a:r>
           </a:p>
         </p:txBody>
@@ -34025,7 +34024,7 @@
                 </a:solidFill>
                 <a:latin typeface="Noto Sans JP"/>
               </a:rPr>
-              <a:t>29 / 38</a:t>
+              <a:t>29 / 37</a:t>
             </a:r>
           </a:p>
         </p:txBody>
@@ -36209,7 +36208,7 @@
                 </a:solidFill>
                 <a:latin typeface="Noto Sans JP"/>
               </a:rPr>
-              <a:t>3 / 38</a:t>
+              <a:t>3 / 37</a:t>
             </a:r>
           </a:p>
         </p:txBody>
@@ -36552,7 +36551,7 @@
                 </a:solidFill>
                 <a:latin typeface="Noto Sans JP"/>
               </a:rPr>
-              <a:t>30 / 38</a:t>
+              <a:t>30 / 37</a:t>
             </a:r>
           </a:p>
         </p:txBody>
@@ -38208,7 +38207,7 @@
                 </a:solidFill>
                 <a:latin typeface="Noto Sans JP"/>
               </a:rPr>
-              <a:t>31 / 38</a:t>
+              <a:t>31 / 37</a:t>
             </a:r>
           </a:p>
         </p:txBody>
@@ -40060,7 +40059,7 @@
                 </a:solidFill>
                 <a:latin typeface="Noto Sans JP"/>
               </a:rPr>
-              <a:t>32 / 38</a:t>
+              <a:t>32 / 37</a:t>
             </a:r>
           </a:p>
         </p:txBody>
@@ -41598,7 +41597,7 @@
                 </a:solidFill>
                 <a:latin typeface="Noto Sans JP"/>
               </a:rPr>
-              <a:t>33 / 38</a:t>
+              <a:t>33 / 37</a:t>
             </a:r>
           </a:p>
         </p:txBody>
@@ -41941,7 +41940,7 @@
                 </a:solidFill>
                 <a:latin typeface="Noto Sans JP"/>
               </a:rPr>
-              <a:t>34 / 38</a:t>
+              <a:t>34 / 37</a:t>
             </a:r>
           </a:p>
         </p:txBody>
@@ -43923,7 +43922,7 @@
                 </a:solidFill>
                 <a:latin typeface="Noto Sans JP"/>
               </a:rPr>
-              <a:t>35 / 38</a:t>
+              <a:t>35 / 37</a:t>
             </a:r>
           </a:p>
         </p:txBody>
@@ -46194,7 +46193,7 @@
                 </a:solidFill>
                 <a:latin typeface="Noto Sans JP"/>
               </a:rPr>
-              <a:t>36 / 38</a:t>
+              <a:t>36 / 37</a:t>
             </a:r>
           </a:p>
         </p:txBody>
@@ -48524,1663 +48523,7 @@
                 </a:solidFill>
                 <a:latin typeface="Noto Sans JP"/>
               </a:rPr>
-              <a:t>37 / 38</a:t>
-            </a:r>
-          </a:p>
-        </p:txBody>
-      </p:sp>
-    </p:spTree>
-  </p:cSld>
-  <p:clrMapOvr>
-    <a:masterClrMapping/>
-  </p:clrMapOvr>
-</p:sld>
-</file>
-
-<file path=ppt/slides/slide38.xml><?xml version="1.0" encoding="utf-8"?>
-<p:sld xmlns:a="http://schemas.openxmlformats.org/drawingml/2006/main" xmlns:p="http://schemas.openxmlformats.org/presentationml/2006/main" xmlns:r="http://schemas.openxmlformats.org/officeDocument/2006/relationships">
-  <p:cSld>
-    <p:spTree>
-      <p:nvGrpSpPr>
-        <p:cNvPr id="1" name=""/>
-        <p:cNvGrpSpPr/>
-        <p:nvPr/>
-      </p:nvGrpSpPr>
-      <p:grpSpPr/>
-      <p:sp>
-        <p:nvSpPr>
-          <p:cNvPr id="2" name="Rectangle 1"/>
-          <p:cNvSpPr/>
-          <p:nvPr/>
-        </p:nvSpPr>
-        <p:spPr>
-          <a:xfrm>
-            <a:off x="0" y="0"/>
-            <a:ext cx="12191695" cy="6858000"/>
-          </a:xfrm>
-          <a:prstGeom prst="rect">
-            <a:avLst/>
-          </a:prstGeom>
-          <a:solidFill>
-            <a:srgbClr val="FFFFFF"/>
-          </a:solidFill>
-          <a:ln>
-            <a:noFill/>
-          </a:ln>
-          <a:effectLst/>
-        </p:spPr>
-        <p:style>
-          <a:lnRef idx="1">
-            <a:schemeClr val="accent1"/>
-          </a:lnRef>
-          <a:fillRef idx="3">
-            <a:schemeClr val="accent1"/>
-          </a:fillRef>
-          <a:effectRef idx="2">
-            <a:schemeClr val="accent1"/>
-          </a:effectRef>
-          <a:fontRef idx="minor">
-            <a:schemeClr val="lt1"/>
-          </a:fontRef>
-        </p:style>
-        <p:txBody>
-          <a:bodyPr rtlCol="0" anchor="ctr"/>
-          <a:lstStyle/>
-          <a:p>
-            <a:pPr algn="ctr"/>
-          </a:p>
-        </p:txBody>
-      </p:sp>
-      <p:sp>
-        <p:nvSpPr>
-          <p:cNvPr id="3" name="Rectangle 2"/>
-          <p:cNvSpPr/>
-          <p:nvPr/>
-        </p:nvSpPr>
-        <p:spPr>
-          <a:xfrm>
-            <a:off x="0" y="0"/>
-            <a:ext cx="12191695" cy="658368"/>
-          </a:xfrm>
-          <a:prstGeom prst="rect">
-            <a:avLst/>
-          </a:prstGeom>
-          <a:solidFill>
-            <a:srgbClr val="1E293B"/>
-          </a:solidFill>
-          <a:ln>
-            <a:noFill/>
-          </a:ln>
-          <a:effectLst/>
-        </p:spPr>
-        <p:style>
-          <a:lnRef idx="1">
-            <a:schemeClr val="accent1"/>
-          </a:lnRef>
-          <a:fillRef idx="3">
-            <a:schemeClr val="accent1"/>
-          </a:fillRef>
-          <a:effectRef idx="2">
-            <a:schemeClr val="accent1"/>
-          </a:effectRef>
-          <a:fontRef idx="minor">
-            <a:schemeClr val="lt1"/>
-          </a:fontRef>
-        </p:style>
-        <p:txBody>
-          <a:bodyPr rtlCol="0" anchor="ctr"/>
-          <a:lstStyle/>
-          <a:p>
-            <a:pPr algn="ctr"/>
-          </a:p>
-        </p:txBody>
-      </p:sp>
-      <p:sp>
-        <p:nvSpPr>
-          <p:cNvPr id="4" name="Rectangle 3"/>
-          <p:cNvSpPr/>
-          <p:nvPr/>
-        </p:nvSpPr>
-        <p:spPr>
-          <a:xfrm>
-            <a:off x="0" y="621792"/>
-            <a:ext cx="12191695" cy="36576"/>
-          </a:xfrm>
-          <a:prstGeom prst="rect">
-            <a:avLst/>
-          </a:prstGeom>
-          <a:solidFill>
-            <a:srgbClr val="3B5174"/>
-          </a:solidFill>
-          <a:ln>
-            <a:noFill/>
-          </a:ln>
-          <a:effectLst/>
-        </p:spPr>
-        <p:style>
-          <a:lnRef idx="1">
-            <a:schemeClr val="accent1"/>
-          </a:lnRef>
-          <a:fillRef idx="3">
-            <a:schemeClr val="accent1"/>
-          </a:fillRef>
-          <a:effectRef idx="2">
-            <a:schemeClr val="accent1"/>
-          </a:effectRef>
-          <a:fontRef idx="minor">
-            <a:schemeClr val="lt1"/>
-          </a:fontRef>
-        </p:style>
-        <p:txBody>
-          <a:bodyPr rtlCol="0" anchor="ctr"/>
-          <a:lstStyle/>
-          <a:p>
-            <a:pPr algn="ctr"/>
-          </a:p>
-        </p:txBody>
-      </p:sp>
-      <p:sp>
-        <p:nvSpPr>
-          <p:cNvPr id="5" name="TextBox 4"/>
-          <p:cNvSpPr txBox="1"/>
-          <p:nvPr/>
-        </p:nvSpPr>
-        <p:spPr>
-          <a:xfrm>
-            <a:off x="365760" y="128016"/>
-            <a:ext cx="2194560" cy="365760"/>
-          </a:xfrm>
-          <a:prstGeom prst="rect">
-            <a:avLst/>
-          </a:prstGeom>
-          <a:noFill/>
-        </p:spPr>
-        <p:txBody>
-          <a:bodyPr wrap="square" anchor="ctr" lIns="36000" rIns="36000" tIns="18000" bIns="18000">
-            <a:spAutoFit/>
-          </a:bodyPr>
-          <a:lstStyle/>
-          <a:p>
-            <a:pPr algn="l"/>
-            <a:r>
-              <a:rPr sz="1100" b="1" i="0">
-                <a:solidFill>
-                  <a:srgbClr val="88A4C4"/>
-                </a:solidFill>
-                <a:latin typeface="Noto Sans JP"/>
-              </a:rPr>
-              <a:t>補足</a:t>
-            </a:r>
-          </a:p>
-        </p:txBody>
-      </p:sp>
-      <p:sp>
-        <p:nvSpPr>
-          <p:cNvPr id="6" name="Rectangle 5"/>
-          <p:cNvSpPr/>
-          <p:nvPr/>
-        </p:nvSpPr>
-        <p:spPr>
-          <a:xfrm>
-            <a:off x="2606040" y="182880"/>
-            <a:ext cx="10972" cy="292608"/>
-          </a:xfrm>
-          <a:prstGeom prst="rect">
-            <a:avLst/>
-          </a:prstGeom>
-          <a:solidFill>
-            <a:srgbClr val="445870"/>
-          </a:solidFill>
-          <a:ln>
-            <a:noFill/>
-          </a:ln>
-          <a:effectLst/>
-        </p:spPr>
-        <p:style>
-          <a:lnRef idx="1">
-            <a:schemeClr val="accent1"/>
-          </a:lnRef>
-          <a:fillRef idx="3">
-            <a:schemeClr val="accent1"/>
-          </a:fillRef>
-          <a:effectRef idx="2">
-            <a:schemeClr val="accent1"/>
-          </a:effectRef>
-          <a:fontRef idx="minor">
-            <a:schemeClr val="lt1"/>
-          </a:fontRef>
-        </p:style>
-        <p:txBody>
-          <a:bodyPr rtlCol="0" anchor="ctr"/>
-          <a:lstStyle/>
-          <a:p>
-            <a:pPr algn="ctr"/>
-          </a:p>
-        </p:txBody>
-      </p:sp>
-      <p:sp>
-        <p:nvSpPr>
-          <p:cNvPr id="7" name="TextBox 6"/>
-          <p:cNvSpPr txBox="1"/>
-          <p:nvPr/>
-        </p:nvSpPr>
-        <p:spPr>
-          <a:xfrm>
-            <a:off x="2743200" y="91440"/>
-            <a:ext cx="9082735" cy="502920"/>
-          </a:xfrm>
-          <a:prstGeom prst="rect">
-            <a:avLst/>
-          </a:prstGeom>
-          <a:noFill/>
-        </p:spPr>
-        <p:txBody>
-          <a:bodyPr wrap="square" anchor="ctr" lIns="36000" rIns="36000" tIns="18000" bIns="18000">
-            <a:spAutoFit/>
-          </a:bodyPr>
-          <a:lstStyle/>
-          <a:p>
-            <a:pPr algn="l"/>
-            <a:r>
-              <a:rPr sz="2400" b="1" i="0">
-                <a:solidFill>
-                  <a:srgbClr val="FFFFFF"/>
-                </a:solidFill>
-                <a:latin typeface="Noto Sans JP"/>
-              </a:rPr>
-              <a:t>温度に応じたゲルの3段階変化メカニズム</a:t>
-            </a:r>
-          </a:p>
-        </p:txBody>
-      </p:sp>
-      <p:sp>
-        <p:nvSpPr>
-          <p:cNvPr id="8" name="Rectangle 7"/>
-          <p:cNvSpPr/>
-          <p:nvPr/>
-        </p:nvSpPr>
-        <p:spPr>
-          <a:xfrm>
-            <a:off x="0" y="6803136"/>
-            <a:ext cx="12191695" cy="54864"/>
-          </a:xfrm>
-          <a:prstGeom prst="rect">
-            <a:avLst/>
-          </a:prstGeom>
-          <a:solidFill>
-            <a:srgbClr val="3B5174"/>
-          </a:solidFill>
-          <a:ln>
-            <a:noFill/>
-          </a:ln>
-          <a:effectLst/>
-        </p:spPr>
-        <p:style>
-          <a:lnRef idx="1">
-            <a:schemeClr val="accent1"/>
-          </a:lnRef>
-          <a:fillRef idx="3">
-            <a:schemeClr val="accent1"/>
-          </a:fillRef>
-          <a:effectRef idx="2">
-            <a:schemeClr val="accent1"/>
-          </a:effectRef>
-          <a:fontRef idx="minor">
-            <a:schemeClr val="lt1"/>
-          </a:fontRef>
-        </p:style>
-        <p:txBody>
-          <a:bodyPr rtlCol="0" anchor="ctr"/>
-          <a:lstStyle/>
-          <a:p>
-            <a:pPr algn="ctr"/>
-          </a:p>
-        </p:txBody>
-      </p:sp>
-      <p:sp>
-        <p:nvSpPr>
-          <p:cNvPr id="9" name="TextBox 8"/>
-          <p:cNvSpPr txBox="1"/>
-          <p:nvPr/>
-        </p:nvSpPr>
-        <p:spPr>
-          <a:xfrm>
-            <a:off x="10911535" y="6547104"/>
-            <a:ext cx="1143000" cy="237744"/>
-          </a:xfrm>
-          <a:prstGeom prst="rect">
-            <a:avLst/>
-          </a:prstGeom>
-          <a:noFill/>
-        </p:spPr>
-        <p:txBody>
-          <a:bodyPr wrap="square" anchor="t" lIns="36000" rIns="36000" tIns="18000" bIns="18000">
-            <a:spAutoFit/>
-          </a:bodyPr>
-          <a:lstStyle/>
-          <a:p>
-            <a:pPr algn="r"/>
-            <a:r>
-              <a:rPr sz="1000" b="0" i="0">
-                <a:solidFill>
-                  <a:srgbClr val="64748B"/>
-                </a:solidFill>
-                <a:latin typeface="Noto Sans JP"/>
-              </a:rPr>
-              <a:t>38 / 38</a:t>
-            </a:r>
-          </a:p>
-        </p:txBody>
-      </p:sp>
-      <p:sp>
-        <p:nvSpPr>
-          <p:cNvPr id="10" name="Rounded Rectangle 9"/>
-          <p:cNvSpPr/>
-          <p:nvPr/>
-        </p:nvSpPr>
-        <p:spPr>
-          <a:xfrm>
-            <a:off x="365760" y="859536"/>
-            <a:ext cx="11460175" cy="2011680"/>
-          </a:xfrm>
-          <a:prstGeom prst="roundRect">
-            <a:avLst>
-              <a:gd name="adj" fmla="val 2000"/>
-            </a:avLst>
-          </a:prstGeom>
-          <a:solidFill>
-            <a:srgbClr val="F5F8FC"/>
-          </a:solidFill>
-          <a:ln w="12700">
-            <a:solidFill>
-              <a:srgbClr val="C0D0E0"/>
-            </a:solidFill>
-          </a:ln>
-          <a:effectLst/>
-        </p:spPr>
-        <p:style>
-          <a:lnRef idx="1">
-            <a:schemeClr val="accent1"/>
-          </a:lnRef>
-          <a:fillRef idx="3">
-            <a:schemeClr val="accent1"/>
-          </a:fillRef>
-          <a:effectRef idx="2">
-            <a:schemeClr val="accent1"/>
-          </a:effectRef>
-          <a:fontRef idx="minor">
-            <a:schemeClr val="lt1"/>
-          </a:fontRef>
-        </p:style>
-        <p:txBody>
-          <a:bodyPr rtlCol="0" anchor="ctr"/>
-          <a:lstStyle/>
-          <a:p>
-            <a:pPr algn="ctr"/>
-          </a:p>
-        </p:txBody>
-      </p:sp>
-      <p:sp>
-        <p:nvSpPr>
-          <p:cNvPr id="11" name="Rectangle 10"/>
-          <p:cNvSpPr/>
-          <p:nvPr/>
-        </p:nvSpPr>
-        <p:spPr>
-          <a:xfrm>
-            <a:off x="475488" y="969264"/>
-            <a:ext cx="868680" cy="292608"/>
-          </a:xfrm>
-          <a:prstGeom prst="rect">
-            <a:avLst/>
-          </a:prstGeom>
-          <a:solidFill>
-            <a:srgbClr val="1E293B"/>
-          </a:solidFill>
-          <a:ln>
-            <a:noFill/>
-          </a:ln>
-          <a:effectLst/>
-        </p:spPr>
-        <p:style>
-          <a:lnRef idx="1">
-            <a:schemeClr val="accent1"/>
-          </a:lnRef>
-          <a:fillRef idx="3">
-            <a:schemeClr val="accent1"/>
-          </a:fillRef>
-          <a:effectRef idx="2">
-            <a:schemeClr val="accent1"/>
-          </a:effectRef>
-          <a:fontRef idx="minor">
-            <a:schemeClr val="lt1"/>
-          </a:fontRef>
-        </p:style>
-        <p:txBody>
-          <a:bodyPr rtlCol="0" anchor="ctr"/>
-          <a:lstStyle/>
-          <a:p>
-            <a:pPr algn="ctr"/>
-          </a:p>
-        </p:txBody>
-      </p:sp>
-      <p:sp>
-        <p:nvSpPr>
-          <p:cNvPr id="12" name="TextBox 11"/>
-          <p:cNvSpPr txBox="1"/>
-          <p:nvPr/>
-        </p:nvSpPr>
-        <p:spPr>
-          <a:xfrm>
-            <a:off x="475488" y="969264"/>
-            <a:ext cx="868680" cy="292608"/>
-          </a:xfrm>
-          <a:prstGeom prst="rect">
-            <a:avLst/>
-          </a:prstGeom>
-          <a:noFill/>
-        </p:spPr>
-        <p:txBody>
-          <a:bodyPr wrap="square" anchor="ctr" lIns="36000" rIns="36000" tIns="18000" bIns="18000">
-            <a:spAutoFit/>
-          </a:bodyPr>
-          <a:lstStyle/>
-          <a:p>
-            <a:pPr algn="ctr"/>
-            <a:r>
-              <a:rPr sz="1100" b="1" i="0">
-                <a:solidFill>
-                  <a:srgbClr val="FFFFFF"/>
-                </a:solidFill>
-                <a:latin typeface="Noto Sans JP"/>
-              </a:rPr>
-              <a:t>概念図</a:t>
-            </a:r>
-          </a:p>
-        </p:txBody>
-      </p:sp>
-      <p:sp>
-        <p:nvSpPr>
-          <p:cNvPr id="13" name="TextBox 12"/>
-          <p:cNvSpPr txBox="1"/>
-          <p:nvPr/>
-        </p:nvSpPr>
-        <p:spPr>
-          <a:xfrm>
-            <a:off x="365760" y="859536"/>
-            <a:ext cx="11460175" cy="2011680"/>
-          </a:xfrm>
-          <a:prstGeom prst="rect">
-            <a:avLst/>
-          </a:prstGeom>
-          <a:noFill/>
-        </p:spPr>
-        <p:txBody>
-          <a:bodyPr wrap="square" anchor="ctr" lIns="36000" rIns="36000" tIns="18000" bIns="18000">
-            <a:spAutoFit/>
-          </a:bodyPr>
-          <a:lstStyle/>
-          <a:p>
-            <a:pPr algn="ctr"/>
-            <a:r>
-              <a:rPr sz="1200" b="0" i="0">
-                <a:solidFill>
-                  <a:srgbClr val="AAB4C0"/>
-                </a:solidFill>
-                <a:latin typeface="Noto Sans JP"/>
-              </a:rPr>
-              <a:t>（論文の図を貼り付け）</a:t>
-            </a:r>
-          </a:p>
-        </p:txBody>
-      </p:sp>
-      <p:sp>
-        <p:nvSpPr>
-          <p:cNvPr id="14" name="TextBox 13"/>
-          <p:cNvSpPr txBox="1"/>
-          <p:nvPr/>
-        </p:nvSpPr>
-        <p:spPr>
-          <a:xfrm>
-            <a:off x="365760" y="2907792"/>
-            <a:ext cx="11460175" cy="274320"/>
-          </a:xfrm>
-          <a:prstGeom prst="rect">
-            <a:avLst/>
-          </a:prstGeom>
-          <a:noFill/>
-        </p:spPr>
-        <p:txBody>
-          <a:bodyPr wrap="square" anchor="t" lIns="36000" rIns="36000" tIns="18000" bIns="18000">
-            <a:spAutoFit/>
-          </a:bodyPr>
-          <a:lstStyle/>
-          <a:p>
-            <a:pPr algn="ctr"/>
-            <a:r>
-              <a:rPr sz="1000" b="0" i="1">
-                <a:solidFill>
-                  <a:srgbClr val="64748B"/>
-                </a:solidFill>
-                <a:latin typeface="Noto Sans JP"/>
-              </a:rPr>
-              <a:t>温度上昇に伴う ゾル → 熱ゲル → シリカエアロゲル の3段階転移</a:t>
-            </a:r>
-          </a:p>
-        </p:txBody>
-      </p:sp>
-      <p:sp>
-        <p:nvSpPr>
-          <p:cNvPr id="15" name="Rounded Rectangle 14"/>
-          <p:cNvSpPr/>
-          <p:nvPr/>
-        </p:nvSpPr>
-        <p:spPr>
-          <a:xfrm>
-            <a:off x="365760" y="3273552"/>
-            <a:ext cx="3734714" cy="2651760"/>
-          </a:xfrm>
-          <a:prstGeom prst="roundRect">
-            <a:avLst>
-              <a:gd name="adj" fmla="val 4000"/>
-            </a:avLst>
-          </a:prstGeom>
-          <a:solidFill>
-            <a:srgbClr val="F1F5F9"/>
-          </a:solidFill>
-          <a:ln w="6350">
-            <a:solidFill>
-              <a:srgbClr val="E2E8F0"/>
-            </a:solidFill>
-          </a:ln>
-          <a:effectLst/>
-        </p:spPr>
-        <p:style>
-          <a:lnRef idx="1">
-            <a:schemeClr val="accent1"/>
-          </a:lnRef>
-          <a:fillRef idx="3">
-            <a:schemeClr val="accent1"/>
-          </a:fillRef>
-          <a:effectRef idx="2">
-            <a:schemeClr val="accent1"/>
-          </a:effectRef>
-          <a:fontRef idx="minor">
-            <a:schemeClr val="lt1"/>
-          </a:fontRef>
-        </p:style>
-        <p:txBody>
-          <a:bodyPr rtlCol="0" anchor="ctr"/>
-          <a:lstStyle/>
-          <a:p>
-            <a:pPr algn="ctr"/>
-          </a:p>
-        </p:txBody>
-      </p:sp>
-      <p:sp>
-        <p:nvSpPr>
-          <p:cNvPr id="16" name="Rectangle 15"/>
-          <p:cNvSpPr/>
-          <p:nvPr/>
-        </p:nvSpPr>
-        <p:spPr>
-          <a:xfrm>
-            <a:off x="365760" y="3273552"/>
-            <a:ext cx="3734714" cy="36576"/>
-          </a:xfrm>
-          <a:prstGeom prst="rect">
-            <a:avLst/>
-          </a:prstGeom>
-          <a:solidFill>
-            <a:srgbClr val="3B5174"/>
-          </a:solidFill>
-          <a:ln>
-            <a:noFill/>
-          </a:ln>
-          <a:effectLst/>
-        </p:spPr>
-        <p:style>
-          <a:lnRef idx="1">
-            <a:schemeClr val="accent1"/>
-          </a:lnRef>
-          <a:fillRef idx="3">
-            <a:schemeClr val="accent1"/>
-          </a:fillRef>
-          <a:effectRef idx="2">
-            <a:schemeClr val="accent1"/>
-          </a:effectRef>
-          <a:fontRef idx="minor">
-            <a:schemeClr val="lt1"/>
-          </a:fontRef>
-        </p:style>
-        <p:txBody>
-          <a:bodyPr rtlCol="0" anchor="ctr"/>
-          <a:lstStyle/>
-          <a:p>
-            <a:pPr algn="ctr"/>
-          </a:p>
-        </p:txBody>
-      </p:sp>
-      <p:sp>
-        <p:nvSpPr>
-          <p:cNvPr id="17" name="TextBox 16"/>
-          <p:cNvSpPr txBox="1"/>
-          <p:nvPr/>
-        </p:nvSpPr>
-        <p:spPr>
-          <a:xfrm>
-            <a:off x="548640" y="3438144"/>
-            <a:ext cx="3368954" cy="219456"/>
-          </a:xfrm>
-          <a:prstGeom prst="rect">
-            <a:avLst/>
-          </a:prstGeom>
-          <a:noFill/>
-        </p:spPr>
-        <p:txBody>
-          <a:bodyPr wrap="square" anchor="t" lIns="36000" rIns="36000" tIns="18000" bIns="18000">
-            <a:spAutoFit/>
-          </a:bodyPr>
-          <a:lstStyle/>
-          <a:p>
-            <a:pPr algn="l"/>
-            <a:r>
-              <a:rPr sz="1000" b="1" i="0">
-                <a:solidFill>
-                  <a:srgbClr val="64748B"/>
-                </a:solidFill>
-                <a:latin typeface="Noto Sans JP"/>
-              </a:rPr>
-              <a:t>STEP 1 ・ ゾル</a:t>
-            </a:r>
-          </a:p>
-        </p:txBody>
-      </p:sp>
-      <p:sp>
-        <p:nvSpPr>
-          <p:cNvPr id="18" name="TextBox 17"/>
-          <p:cNvSpPr txBox="1"/>
-          <p:nvPr/>
-        </p:nvSpPr>
-        <p:spPr>
-          <a:xfrm>
-            <a:off x="548640" y="3675888"/>
-            <a:ext cx="3368954" cy="329184"/>
-          </a:xfrm>
-          <a:prstGeom prst="rect">
-            <a:avLst/>
-          </a:prstGeom>
-          <a:noFill/>
-        </p:spPr>
-        <p:txBody>
-          <a:bodyPr wrap="square" anchor="t" lIns="36000" rIns="36000" tIns="18000" bIns="18000">
-            <a:spAutoFit/>
-          </a:bodyPr>
-          <a:lstStyle/>
-          <a:p>
-            <a:pPr algn="l"/>
-            <a:r>
-              <a:rPr sz="1500" b="1" i="0">
-                <a:solidFill>
-                  <a:srgbClr val="1E293B"/>
-                </a:solidFill>
-                <a:latin typeface="Noto Sans JP"/>
-              </a:rPr>
-              <a:t>室温（〜25°C）</a:t>
-            </a:r>
-          </a:p>
-        </p:txBody>
-      </p:sp>
-      <p:sp>
-        <p:nvSpPr>
-          <p:cNvPr id="19" name="TextBox 18"/>
-          <p:cNvSpPr txBox="1"/>
-          <p:nvPr/>
-        </p:nvSpPr>
-        <p:spPr>
-          <a:xfrm>
-            <a:off x="548640" y="4041648"/>
-            <a:ext cx="182880" cy="274320"/>
-          </a:xfrm>
-          <a:prstGeom prst="rect">
-            <a:avLst/>
-          </a:prstGeom>
-          <a:noFill/>
-        </p:spPr>
-        <p:txBody>
-          <a:bodyPr wrap="square" anchor="t" lIns="36000" rIns="36000" tIns="18000" bIns="18000">
-            <a:spAutoFit/>
-          </a:bodyPr>
-          <a:lstStyle/>
-          <a:p>
-            <a:pPr algn="l"/>
-            <a:r>
-              <a:rPr sz="1200" b="0" i="0">
-                <a:solidFill>
-                  <a:srgbClr val="3B5174"/>
-                </a:solidFill>
-                <a:latin typeface="Noto Sans JP"/>
-              </a:rPr>
-              <a:t>•</a:t>
-            </a:r>
-          </a:p>
-        </p:txBody>
-      </p:sp>
-      <p:sp>
-        <p:nvSpPr>
-          <p:cNvPr id="20" name="TextBox 19"/>
-          <p:cNvSpPr txBox="1"/>
-          <p:nvPr/>
-        </p:nvSpPr>
-        <p:spPr>
-          <a:xfrm>
-            <a:off x="749808" y="4041648"/>
-            <a:ext cx="3167786" cy="274320"/>
-          </a:xfrm>
-          <a:prstGeom prst="rect">
-            <a:avLst/>
-          </a:prstGeom>
-          <a:noFill/>
-        </p:spPr>
-        <p:txBody>
-          <a:bodyPr wrap="square" anchor="t" lIns="36000" rIns="36000" tIns="18000" bIns="18000">
-            <a:spAutoFit/>
-          </a:bodyPr>
-          <a:lstStyle/>
-          <a:p>
-            <a:pPr algn="l"/>
-            <a:r>
-              <a:rPr sz="1200" b="0" i="0">
-                <a:solidFill>
-                  <a:srgbClr val="475569"/>
-                </a:solidFill>
-                <a:latin typeface="Noto Sans JP"/>
-              </a:rPr>
-              <a:t>MC鎖が親水性ランダムコイル</a:t>
-            </a:r>
-          </a:p>
-        </p:txBody>
-      </p:sp>
-      <p:sp>
-        <p:nvSpPr>
-          <p:cNvPr id="21" name="TextBox 20"/>
-          <p:cNvSpPr txBox="1"/>
-          <p:nvPr/>
-        </p:nvSpPr>
-        <p:spPr>
-          <a:xfrm>
-            <a:off x="548640" y="4315968"/>
-            <a:ext cx="182880" cy="274320"/>
-          </a:xfrm>
-          <a:prstGeom prst="rect">
-            <a:avLst/>
-          </a:prstGeom>
-          <a:noFill/>
-        </p:spPr>
-        <p:txBody>
-          <a:bodyPr wrap="square" anchor="t" lIns="36000" rIns="36000" tIns="18000" bIns="18000">
-            <a:spAutoFit/>
-          </a:bodyPr>
-          <a:lstStyle/>
-          <a:p>
-            <a:pPr algn="l"/>
-            <a:r>
-              <a:rPr sz="1200" b="0" i="0">
-                <a:solidFill>
-                  <a:srgbClr val="3B5174"/>
-                </a:solidFill>
-                <a:latin typeface="Noto Sans JP"/>
-              </a:rPr>
-              <a:t>•</a:t>
-            </a:r>
-          </a:p>
-        </p:txBody>
-      </p:sp>
-      <p:sp>
-        <p:nvSpPr>
-          <p:cNvPr id="22" name="TextBox 21"/>
-          <p:cNvSpPr txBox="1"/>
-          <p:nvPr/>
-        </p:nvSpPr>
-        <p:spPr>
-          <a:xfrm>
-            <a:off x="749808" y="4315968"/>
-            <a:ext cx="3167786" cy="274320"/>
-          </a:xfrm>
-          <a:prstGeom prst="rect">
-            <a:avLst/>
-          </a:prstGeom>
-          <a:noFill/>
-        </p:spPr>
-        <p:txBody>
-          <a:bodyPr wrap="square" anchor="t" lIns="36000" rIns="36000" tIns="18000" bIns="18000">
-            <a:spAutoFit/>
-          </a:bodyPr>
-          <a:lstStyle/>
-          <a:p>
-            <a:pPr algn="l"/>
-            <a:r>
-              <a:rPr sz="1200" b="0" i="0">
-                <a:solidFill>
-                  <a:srgbClr val="475569"/>
-                </a:solidFill>
-                <a:latin typeface="Noto Sans JP"/>
-              </a:rPr>
-              <a:t>低粘度でスプレー散布が可能</a:t>
-            </a:r>
-          </a:p>
-        </p:txBody>
-      </p:sp>
-      <p:sp>
-        <p:nvSpPr>
-          <p:cNvPr id="23" name="TextBox 22"/>
-          <p:cNvSpPr txBox="1"/>
-          <p:nvPr/>
-        </p:nvSpPr>
-        <p:spPr>
-          <a:xfrm>
-            <a:off x="548640" y="4590288"/>
-            <a:ext cx="182880" cy="274320"/>
-          </a:xfrm>
-          <a:prstGeom prst="rect">
-            <a:avLst/>
-          </a:prstGeom>
-          <a:noFill/>
-        </p:spPr>
-        <p:txBody>
-          <a:bodyPr wrap="square" anchor="t" lIns="36000" rIns="36000" tIns="18000" bIns="18000">
-            <a:spAutoFit/>
-          </a:bodyPr>
-          <a:lstStyle/>
-          <a:p>
-            <a:pPr algn="l"/>
-            <a:r>
-              <a:rPr sz="1200" b="0" i="0">
-                <a:solidFill>
-                  <a:srgbClr val="3B5174"/>
-                </a:solidFill>
-                <a:latin typeface="Noto Sans JP"/>
-              </a:rPr>
-              <a:t>•</a:t>
-            </a:r>
-          </a:p>
-        </p:txBody>
-      </p:sp>
-      <p:sp>
-        <p:nvSpPr>
-          <p:cNvPr id="24" name="TextBox 23"/>
-          <p:cNvSpPr txBox="1"/>
-          <p:nvPr/>
-        </p:nvSpPr>
-        <p:spPr>
-          <a:xfrm>
-            <a:off x="749808" y="4590288"/>
-            <a:ext cx="3167786" cy="274320"/>
-          </a:xfrm>
-          <a:prstGeom prst="rect">
-            <a:avLst/>
-          </a:prstGeom>
-          <a:noFill/>
-        </p:spPr>
-        <p:txBody>
-          <a:bodyPr wrap="square" anchor="t" lIns="36000" rIns="36000" tIns="18000" bIns="18000">
-            <a:spAutoFit/>
-          </a:bodyPr>
-          <a:lstStyle/>
-          <a:p>
-            <a:pPr algn="l"/>
-            <a:r>
-              <a:rPr sz="1200" b="0" i="0">
-                <a:solidFill>
-                  <a:srgbClr val="475569"/>
-                </a:solidFill>
-                <a:latin typeface="Noto Sans JP"/>
-              </a:rPr>
-              <a:t>CSPと高分子は可逆的な水素結合</a:t>
-            </a:r>
-          </a:p>
-        </p:txBody>
-      </p:sp>
-      <p:sp>
-        <p:nvSpPr>
-          <p:cNvPr id="25" name="Rounded Rectangle 24"/>
-          <p:cNvSpPr/>
-          <p:nvPr/>
-        </p:nvSpPr>
-        <p:spPr>
-          <a:xfrm>
-            <a:off x="4228490" y="3273552"/>
-            <a:ext cx="3734714" cy="2651760"/>
-          </a:xfrm>
-          <a:prstGeom prst="roundRect">
-            <a:avLst>
-              <a:gd name="adj" fmla="val 4000"/>
-            </a:avLst>
-          </a:prstGeom>
-          <a:solidFill>
-            <a:srgbClr val="F1F5F9"/>
-          </a:solidFill>
-          <a:ln w="6350">
-            <a:solidFill>
-              <a:srgbClr val="E2E8F0"/>
-            </a:solidFill>
-          </a:ln>
-          <a:effectLst/>
-        </p:spPr>
-        <p:style>
-          <a:lnRef idx="1">
-            <a:schemeClr val="accent1"/>
-          </a:lnRef>
-          <a:fillRef idx="3">
-            <a:schemeClr val="accent1"/>
-          </a:fillRef>
-          <a:effectRef idx="2">
-            <a:schemeClr val="accent1"/>
-          </a:effectRef>
-          <a:fontRef idx="minor">
-            <a:schemeClr val="lt1"/>
-          </a:fontRef>
-        </p:style>
-        <p:txBody>
-          <a:bodyPr rtlCol="0" anchor="ctr"/>
-          <a:lstStyle/>
-          <a:p>
-            <a:pPr algn="ctr"/>
-          </a:p>
-        </p:txBody>
-      </p:sp>
-      <p:sp>
-        <p:nvSpPr>
-          <p:cNvPr id="26" name="Rectangle 25"/>
-          <p:cNvSpPr/>
-          <p:nvPr/>
-        </p:nvSpPr>
-        <p:spPr>
-          <a:xfrm>
-            <a:off x="4228490" y="3273552"/>
-            <a:ext cx="3734714" cy="36576"/>
-          </a:xfrm>
-          <a:prstGeom prst="rect">
-            <a:avLst/>
-          </a:prstGeom>
-          <a:solidFill>
-            <a:srgbClr val="3B5174"/>
-          </a:solidFill>
-          <a:ln>
-            <a:noFill/>
-          </a:ln>
-          <a:effectLst/>
-        </p:spPr>
-        <p:style>
-          <a:lnRef idx="1">
-            <a:schemeClr val="accent1"/>
-          </a:lnRef>
-          <a:fillRef idx="3">
-            <a:schemeClr val="accent1"/>
-          </a:fillRef>
-          <a:effectRef idx="2">
-            <a:schemeClr val="accent1"/>
-          </a:effectRef>
-          <a:fontRef idx="minor">
-            <a:schemeClr val="lt1"/>
-          </a:fontRef>
-        </p:style>
-        <p:txBody>
-          <a:bodyPr rtlCol="0" anchor="ctr"/>
-          <a:lstStyle/>
-          <a:p>
-            <a:pPr algn="ctr"/>
-          </a:p>
-        </p:txBody>
-      </p:sp>
-      <p:sp>
-        <p:nvSpPr>
-          <p:cNvPr id="27" name="TextBox 26"/>
-          <p:cNvSpPr txBox="1"/>
-          <p:nvPr/>
-        </p:nvSpPr>
-        <p:spPr>
-          <a:xfrm>
-            <a:off x="4411370" y="3438144"/>
-            <a:ext cx="3368954" cy="219456"/>
-          </a:xfrm>
-          <a:prstGeom prst="rect">
-            <a:avLst/>
-          </a:prstGeom>
-          <a:noFill/>
-        </p:spPr>
-        <p:txBody>
-          <a:bodyPr wrap="square" anchor="t" lIns="36000" rIns="36000" tIns="18000" bIns="18000">
-            <a:spAutoFit/>
-          </a:bodyPr>
-          <a:lstStyle/>
-          <a:p>
-            <a:pPr algn="l"/>
-            <a:r>
-              <a:rPr sz="1000" b="1" i="0">
-                <a:solidFill>
-                  <a:srgbClr val="64748B"/>
-                </a:solidFill>
-                <a:latin typeface="Noto Sans JP"/>
-              </a:rPr>
-              <a:t>STEP 2 ・ 熱ゲル化</a:t>
-            </a:r>
-          </a:p>
-        </p:txBody>
-      </p:sp>
-      <p:sp>
-        <p:nvSpPr>
-          <p:cNvPr id="28" name="TextBox 27"/>
-          <p:cNvSpPr txBox="1"/>
-          <p:nvPr/>
-        </p:nvSpPr>
-        <p:spPr>
-          <a:xfrm>
-            <a:off x="4411370" y="3675888"/>
-            <a:ext cx="3368954" cy="329184"/>
-          </a:xfrm>
-          <a:prstGeom prst="rect">
-            <a:avLst/>
-          </a:prstGeom>
-          <a:noFill/>
-        </p:spPr>
-        <p:txBody>
-          <a:bodyPr wrap="square" anchor="t" lIns="36000" rIns="36000" tIns="18000" bIns="18000">
-            <a:spAutoFit/>
-          </a:bodyPr>
-          <a:lstStyle/>
-          <a:p>
-            <a:pPr algn="l"/>
-            <a:r>
-              <a:rPr sz="1500" b="1" i="0">
-                <a:solidFill>
-                  <a:srgbClr val="1E293B"/>
-                </a:solidFill>
-                <a:latin typeface="Noto Sans JP"/>
-              </a:rPr>
-              <a:t>加熱（〜50–60°C）</a:t>
-            </a:r>
-          </a:p>
-        </p:txBody>
-      </p:sp>
-      <p:sp>
-        <p:nvSpPr>
-          <p:cNvPr id="29" name="TextBox 28"/>
-          <p:cNvSpPr txBox="1"/>
-          <p:nvPr/>
-        </p:nvSpPr>
-        <p:spPr>
-          <a:xfrm>
-            <a:off x="4411370" y="4041648"/>
-            <a:ext cx="182880" cy="274320"/>
-          </a:xfrm>
-          <a:prstGeom prst="rect">
-            <a:avLst/>
-          </a:prstGeom>
-          <a:noFill/>
-        </p:spPr>
-        <p:txBody>
-          <a:bodyPr wrap="square" anchor="t" lIns="36000" rIns="36000" tIns="18000" bIns="18000">
-            <a:spAutoFit/>
-          </a:bodyPr>
-          <a:lstStyle/>
-          <a:p>
-            <a:pPr algn="l"/>
-            <a:r>
-              <a:rPr sz="1200" b="0" i="0">
-                <a:solidFill>
-                  <a:srgbClr val="3B5174"/>
-                </a:solidFill>
-                <a:latin typeface="Noto Sans JP"/>
-              </a:rPr>
-              <a:t>•</a:t>
-            </a:r>
-          </a:p>
-        </p:txBody>
-      </p:sp>
-      <p:sp>
-        <p:nvSpPr>
-          <p:cNvPr id="30" name="TextBox 29"/>
-          <p:cNvSpPr txBox="1"/>
-          <p:nvPr/>
-        </p:nvSpPr>
-        <p:spPr>
-          <a:xfrm>
-            <a:off x="4612538" y="4041648"/>
-            <a:ext cx="3167786" cy="274320"/>
-          </a:xfrm>
-          <a:prstGeom prst="rect">
-            <a:avLst/>
-          </a:prstGeom>
-          <a:noFill/>
-        </p:spPr>
-        <p:txBody>
-          <a:bodyPr wrap="square" anchor="t" lIns="36000" rIns="36000" tIns="18000" bIns="18000">
-            <a:spAutoFit/>
-          </a:bodyPr>
-          <a:lstStyle/>
-          <a:p>
-            <a:pPr algn="l"/>
-            <a:r>
-              <a:rPr sz="1200" b="0" i="0">
-                <a:solidFill>
-                  <a:srgbClr val="475569"/>
-                </a:solidFill>
-                <a:latin typeface="Noto Sans JP"/>
-              </a:rPr>
-              <a:t>MCのLCST挙動で疎水性相互作用が増大</a:t>
-            </a:r>
-          </a:p>
-        </p:txBody>
-      </p:sp>
-      <p:sp>
-        <p:nvSpPr>
-          <p:cNvPr id="31" name="TextBox 30"/>
-          <p:cNvSpPr txBox="1"/>
-          <p:nvPr/>
-        </p:nvSpPr>
-        <p:spPr>
-          <a:xfrm>
-            <a:off x="4411370" y="4315968"/>
-            <a:ext cx="182880" cy="274320"/>
-          </a:xfrm>
-          <a:prstGeom prst="rect">
-            <a:avLst/>
-          </a:prstGeom>
-          <a:noFill/>
-        </p:spPr>
-        <p:txBody>
-          <a:bodyPr wrap="square" anchor="t" lIns="36000" rIns="36000" tIns="18000" bIns="18000">
-            <a:spAutoFit/>
-          </a:bodyPr>
-          <a:lstStyle/>
-          <a:p>
-            <a:pPr algn="l"/>
-            <a:r>
-              <a:rPr sz="1200" b="0" i="0">
-                <a:solidFill>
-                  <a:srgbClr val="3B5174"/>
-                </a:solidFill>
-                <a:latin typeface="Noto Sans JP"/>
-              </a:rPr>
-              <a:t>•</a:t>
-            </a:r>
-          </a:p>
-        </p:txBody>
-      </p:sp>
-      <p:sp>
-        <p:nvSpPr>
-          <p:cNvPr id="32" name="TextBox 31"/>
-          <p:cNvSpPr txBox="1"/>
-          <p:nvPr/>
-        </p:nvSpPr>
-        <p:spPr>
-          <a:xfrm>
-            <a:off x="4612538" y="4315968"/>
-            <a:ext cx="3167786" cy="274320"/>
-          </a:xfrm>
-          <a:prstGeom prst="rect">
-            <a:avLst/>
-          </a:prstGeom>
-          <a:noFill/>
-        </p:spPr>
-        <p:txBody>
-          <a:bodyPr wrap="square" anchor="t" lIns="36000" rIns="36000" tIns="18000" bIns="18000">
-            <a:spAutoFit/>
-          </a:bodyPr>
-          <a:lstStyle/>
-          <a:p>
-            <a:pPr algn="l"/>
-            <a:r>
-              <a:rPr sz="1200" b="0" i="0">
-                <a:solidFill>
-                  <a:srgbClr val="475569"/>
-                </a:solidFill>
-                <a:latin typeface="Noto Sans JP"/>
-              </a:rPr>
-              <a:t>高分子鎖が集合しゲルネットワーク形成</a:t>
-            </a:r>
-          </a:p>
-        </p:txBody>
-      </p:sp>
-      <p:sp>
-        <p:nvSpPr>
-          <p:cNvPr id="33" name="TextBox 32"/>
-          <p:cNvSpPr txBox="1"/>
-          <p:nvPr/>
-        </p:nvSpPr>
-        <p:spPr>
-          <a:xfrm>
-            <a:off x="4411370" y="4590288"/>
-            <a:ext cx="182880" cy="274320"/>
-          </a:xfrm>
-          <a:prstGeom prst="rect">
-            <a:avLst/>
-          </a:prstGeom>
-          <a:noFill/>
-        </p:spPr>
-        <p:txBody>
-          <a:bodyPr wrap="square" anchor="t" lIns="36000" rIns="36000" tIns="18000" bIns="18000">
-            <a:spAutoFit/>
-          </a:bodyPr>
-          <a:lstStyle/>
-          <a:p>
-            <a:pPr algn="l"/>
-            <a:r>
-              <a:rPr sz="1200" b="0" i="0">
-                <a:solidFill>
-                  <a:srgbClr val="3B5174"/>
-                </a:solidFill>
-                <a:latin typeface="Noto Sans JP"/>
-              </a:rPr>
-              <a:t>•</a:t>
-            </a:r>
-          </a:p>
-        </p:txBody>
-      </p:sp>
-      <p:sp>
-        <p:nvSpPr>
-          <p:cNvPr id="34" name="TextBox 33"/>
-          <p:cNvSpPr txBox="1"/>
-          <p:nvPr/>
-        </p:nvSpPr>
-        <p:spPr>
-          <a:xfrm>
-            <a:off x="4612538" y="4590288"/>
-            <a:ext cx="3167786" cy="274320"/>
-          </a:xfrm>
-          <a:prstGeom prst="rect">
-            <a:avLst/>
-          </a:prstGeom>
-          <a:noFill/>
-        </p:spPr>
-        <p:txBody>
-          <a:bodyPr wrap="square" anchor="t" lIns="36000" rIns="36000" tIns="18000" bIns="18000">
-            <a:spAutoFit/>
-          </a:bodyPr>
-          <a:lstStyle/>
-          <a:p>
-            <a:pPr algn="l"/>
-            <a:r>
-              <a:rPr sz="1200" b="0" i="0">
-                <a:solidFill>
-                  <a:srgbClr val="475569"/>
-                </a:solidFill>
-                <a:latin typeface="Noto Sans JP"/>
-              </a:rPr>
-              <a:t>熱可逆的にゲル化（火炎保護の起点）</a:t>
-            </a:r>
-          </a:p>
-        </p:txBody>
-      </p:sp>
-      <p:sp>
-        <p:nvSpPr>
-          <p:cNvPr id="35" name="Rounded Rectangle 34"/>
-          <p:cNvSpPr/>
-          <p:nvPr/>
-        </p:nvSpPr>
-        <p:spPr>
-          <a:xfrm>
-            <a:off x="8091220" y="3273552"/>
-            <a:ext cx="3734714" cy="2651760"/>
-          </a:xfrm>
-          <a:prstGeom prst="roundRect">
-            <a:avLst>
-              <a:gd name="adj" fmla="val 4000"/>
-            </a:avLst>
-          </a:prstGeom>
-          <a:solidFill>
-            <a:srgbClr val="F1F5F9"/>
-          </a:solidFill>
-          <a:ln w="6350">
-            <a:solidFill>
-              <a:srgbClr val="E2E8F0"/>
-            </a:solidFill>
-          </a:ln>
-          <a:effectLst/>
-        </p:spPr>
-        <p:style>
-          <a:lnRef idx="1">
-            <a:schemeClr val="accent1"/>
-          </a:lnRef>
-          <a:fillRef idx="3">
-            <a:schemeClr val="accent1"/>
-          </a:fillRef>
-          <a:effectRef idx="2">
-            <a:schemeClr val="accent1"/>
-          </a:effectRef>
-          <a:fontRef idx="minor">
-            <a:schemeClr val="lt1"/>
-          </a:fontRef>
-        </p:style>
-        <p:txBody>
-          <a:bodyPr rtlCol="0" anchor="ctr"/>
-          <a:lstStyle/>
-          <a:p>
-            <a:pPr algn="ctr"/>
-          </a:p>
-        </p:txBody>
-      </p:sp>
-      <p:sp>
-        <p:nvSpPr>
-          <p:cNvPr id="36" name="Rectangle 35"/>
-          <p:cNvSpPr/>
-          <p:nvPr/>
-        </p:nvSpPr>
-        <p:spPr>
-          <a:xfrm>
-            <a:off x="8091220" y="3273552"/>
-            <a:ext cx="3734714" cy="36576"/>
-          </a:xfrm>
-          <a:prstGeom prst="rect">
-            <a:avLst/>
-          </a:prstGeom>
-          <a:solidFill>
-            <a:srgbClr val="3B5174"/>
-          </a:solidFill>
-          <a:ln>
-            <a:noFill/>
-          </a:ln>
-          <a:effectLst/>
-        </p:spPr>
-        <p:style>
-          <a:lnRef idx="1">
-            <a:schemeClr val="accent1"/>
-          </a:lnRef>
-          <a:fillRef idx="3">
-            <a:schemeClr val="accent1"/>
-          </a:fillRef>
-          <a:effectRef idx="2">
-            <a:schemeClr val="accent1"/>
-          </a:effectRef>
-          <a:fontRef idx="minor">
-            <a:schemeClr val="lt1"/>
-          </a:fontRef>
-        </p:style>
-        <p:txBody>
-          <a:bodyPr rtlCol="0" anchor="ctr"/>
-          <a:lstStyle/>
-          <a:p>
-            <a:pPr algn="ctr"/>
-          </a:p>
-        </p:txBody>
-      </p:sp>
-      <p:sp>
-        <p:nvSpPr>
-          <p:cNvPr id="37" name="TextBox 36"/>
-          <p:cNvSpPr txBox="1"/>
-          <p:nvPr/>
-        </p:nvSpPr>
-        <p:spPr>
-          <a:xfrm>
-            <a:off x="8274100" y="3438144"/>
-            <a:ext cx="3368954" cy="219456"/>
-          </a:xfrm>
-          <a:prstGeom prst="rect">
-            <a:avLst/>
-          </a:prstGeom>
-          <a:noFill/>
-        </p:spPr>
-        <p:txBody>
-          <a:bodyPr wrap="square" anchor="t" lIns="36000" rIns="36000" tIns="18000" bIns="18000">
-            <a:spAutoFit/>
-          </a:bodyPr>
-          <a:lstStyle/>
-          <a:p>
-            <a:pPr algn="l"/>
-            <a:r>
-              <a:rPr sz="1000" b="1" i="0">
-                <a:solidFill>
-                  <a:srgbClr val="64748B"/>
-                </a:solidFill>
-                <a:latin typeface="Noto Sans JP"/>
-              </a:rPr>
-              <a:t>STEP 3 ・ エアロゲル</a:t>
-            </a:r>
-          </a:p>
-        </p:txBody>
-      </p:sp>
-      <p:sp>
-        <p:nvSpPr>
-          <p:cNvPr id="38" name="TextBox 37"/>
-          <p:cNvSpPr txBox="1"/>
-          <p:nvPr/>
-        </p:nvSpPr>
-        <p:spPr>
-          <a:xfrm>
-            <a:off x="8274100" y="3675888"/>
-            <a:ext cx="3368954" cy="329184"/>
-          </a:xfrm>
-          <a:prstGeom prst="rect">
-            <a:avLst/>
-          </a:prstGeom>
-          <a:noFill/>
-        </p:spPr>
-        <p:txBody>
-          <a:bodyPr wrap="square" anchor="t" lIns="36000" rIns="36000" tIns="18000" bIns="18000">
-            <a:spAutoFit/>
-          </a:bodyPr>
-          <a:lstStyle/>
-          <a:p>
-            <a:pPr algn="l"/>
-            <a:r>
-              <a:rPr sz="1500" b="1" i="0">
-                <a:solidFill>
-                  <a:srgbClr val="1E293B"/>
-                </a:solidFill>
-                <a:latin typeface="Noto Sans JP"/>
-              </a:rPr>
-              <a:t>火炎（数百°C）</a:t>
-            </a:r>
-          </a:p>
-        </p:txBody>
-      </p:sp>
-      <p:sp>
-        <p:nvSpPr>
-          <p:cNvPr id="39" name="TextBox 38"/>
-          <p:cNvSpPr txBox="1"/>
-          <p:nvPr/>
-        </p:nvSpPr>
-        <p:spPr>
-          <a:xfrm>
-            <a:off x="8274100" y="4041648"/>
-            <a:ext cx="182880" cy="274320"/>
-          </a:xfrm>
-          <a:prstGeom prst="rect">
-            <a:avLst/>
-          </a:prstGeom>
-          <a:noFill/>
-        </p:spPr>
-        <p:txBody>
-          <a:bodyPr wrap="square" anchor="t" lIns="36000" rIns="36000" tIns="18000" bIns="18000">
-            <a:spAutoFit/>
-          </a:bodyPr>
-          <a:lstStyle/>
-          <a:p>
-            <a:pPr algn="l"/>
-            <a:r>
-              <a:rPr sz="1200" b="0" i="0">
-                <a:solidFill>
-                  <a:srgbClr val="3B5174"/>
-                </a:solidFill>
-                <a:latin typeface="Noto Sans JP"/>
-              </a:rPr>
-              <a:t>•</a:t>
-            </a:r>
-          </a:p>
-        </p:txBody>
-      </p:sp>
-      <p:sp>
-        <p:nvSpPr>
-          <p:cNvPr id="40" name="TextBox 39"/>
-          <p:cNvSpPr txBox="1"/>
-          <p:nvPr/>
-        </p:nvSpPr>
-        <p:spPr>
-          <a:xfrm>
-            <a:off x="8475268" y="4041648"/>
-            <a:ext cx="3167786" cy="274320"/>
-          </a:xfrm>
-          <a:prstGeom prst="rect">
-            <a:avLst/>
-          </a:prstGeom>
-          <a:noFill/>
-        </p:spPr>
-        <p:txBody>
-          <a:bodyPr wrap="square" anchor="t" lIns="36000" rIns="36000" tIns="18000" bIns="18000">
-            <a:spAutoFit/>
-          </a:bodyPr>
-          <a:lstStyle/>
-          <a:p>
-            <a:pPr algn="l"/>
-            <a:r>
-              <a:rPr sz="1200" b="0" i="0">
-                <a:solidFill>
-                  <a:srgbClr val="475569"/>
-                </a:solidFill>
-                <a:latin typeface="Noto Sans JP"/>
-              </a:rPr>
-              <a:t>水分が急速に蒸発・脱水</a:t>
-            </a:r>
-          </a:p>
-        </p:txBody>
-      </p:sp>
-      <p:sp>
-        <p:nvSpPr>
-          <p:cNvPr id="41" name="TextBox 40"/>
-          <p:cNvSpPr txBox="1"/>
-          <p:nvPr/>
-        </p:nvSpPr>
-        <p:spPr>
-          <a:xfrm>
-            <a:off x="8274100" y="4315968"/>
-            <a:ext cx="182880" cy="274320"/>
-          </a:xfrm>
-          <a:prstGeom prst="rect">
-            <a:avLst/>
-          </a:prstGeom>
-          <a:noFill/>
-        </p:spPr>
-        <p:txBody>
-          <a:bodyPr wrap="square" anchor="t" lIns="36000" rIns="36000" tIns="18000" bIns="18000">
-            <a:spAutoFit/>
-          </a:bodyPr>
-          <a:lstStyle/>
-          <a:p>
-            <a:pPr algn="l"/>
-            <a:r>
-              <a:rPr sz="1200" b="0" i="0">
-                <a:solidFill>
-                  <a:srgbClr val="3B5174"/>
-                </a:solidFill>
-                <a:latin typeface="Noto Sans JP"/>
-              </a:rPr>
-              <a:t>•</a:t>
-            </a:r>
-          </a:p>
-        </p:txBody>
-      </p:sp>
-      <p:sp>
-        <p:nvSpPr>
-          <p:cNvPr id="42" name="TextBox 41"/>
-          <p:cNvSpPr txBox="1"/>
-          <p:nvPr/>
-        </p:nvSpPr>
-        <p:spPr>
-          <a:xfrm>
-            <a:off x="8475268" y="4315968"/>
-            <a:ext cx="3167786" cy="274320"/>
-          </a:xfrm>
-          <a:prstGeom prst="rect">
-            <a:avLst/>
-          </a:prstGeom>
-          <a:noFill/>
-        </p:spPr>
-        <p:txBody>
-          <a:bodyPr wrap="square" anchor="t" lIns="36000" rIns="36000" tIns="18000" bIns="18000">
-            <a:spAutoFit/>
-          </a:bodyPr>
-          <a:lstStyle/>
-          <a:p>
-            <a:pPr algn="l"/>
-            <a:r>
-              <a:rPr sz="1200" b="0" i="0">
-                <a:solidFill>
-                  <a:srgbClr val="475569"/>
-                </a:solidFill>
-                <a:latin typeface="Noto Sans JP"/>
-              </a:rPr>
-              <a:t>CSPが焼結し3次元多孔質骨格へ</a:t>
-            </a:r>
-          </a:p>
-        </p:txBody>
-      </p:sp>
-      <p:sp>
-        <p:nvSpPr>
-          <p:cNvPr id="43" name="TextBox 42"/>
-          <p:cNvSpPr txBox="1"/>
-          <p:nvPr/>
-        </p:nvSpPr>
-        <p:spPr>
-          <a:xfrm>
-            <a:off x="8274100" y="4590288"/>
-            <a:ext cx="182880" cy="274320"/>
-          </a:xfrm>
-          <a:prstGeom prst="rect">
-            <a:avLst/>
-          </a:prstGeom>
-          <a:noFill/>
-        </p:spPr>
-        <p:txBody>
-          <a:bodyPr wrap="square" anchor="t" lIns="36000" rIns="36000" tIns="18000" bIns="18000">
-            <a:spAutoFit/>
-          </a:bodyPr>
-          <a:lstStyle/>
-          <a:p>
-            <a:pPr algn="l"/>
-            <a:r>
-              <a:rPr sz="1200" b="0" i="0">
-                <a:solidFill>
-                  <a:srgbClr val="3B5174"/>
-                </a:solidFill>
-                <a:latin typeface="Noto Sans JP"/>
-              </a:rPr>
-              <a:t>•</a:t>
-            </a:r>
-          </a:p>
-        </p:txBody>
-      </p:sp>
-      <p:sp>
-        <p:nvSpPr>
-          <p:cNvPr id="44" name="TextBox 43"/>
-          <p:cNvSpPr txBox="1"/>
-          <p:nvPr/>
-        </p:nvSpPr>
-        <p:spPr>
-          <a:xfrm>
-            <a:off x="8475268" y="4590288"/>
-            <a:ext cx="3167786" cy="274320"/>
-          </a:xfrm>
-          <a:prstGeom prst="rect">
-            <a:avLst/>
-          </a:prstGeom>
-          <a:noFill/>
-        </p:spPr>
-        <p:txBody>
-          <a:bodyPr wrap="square" anchor="t" lIns="36000" rIns="36000" tIns="18000" bIns="18000">
-            <a:spAutoFit/>
-          </a:bodyPr>
-          <a:lstStyle/>
-          <a:p>
-            <a:pPr algn="l"/>
-            <a:r>
-              <a:rPr sz="1200" b="0" i="0">
-                <a:solidFill>
-                  <a:srgbClr val="475569"/>
-                </a:solidFill>
-                <a:latin typeface="Noto Sans JP"/>
-              </a:rPr>
-              <a:t>断熱性シリカエアロゲル層が完成</a:t>
+              <a:t>37 / 37</a:t>
             </a:r>
           </a:p>
         </p:txBody>
@@ -50523,7 +48866,7 @@
                 </a:solidFill>
                 <a:latin typeface="Noto Sans JP"/>
               </a:rPr>
-              <a:t>4 / 38</a:t>
+              <a:t>4 / 37</a:t>
             </a:r>
           </a:p>
         </p:txBody>
@@ -50672,7 +49015,7 @@
                 </a:solidFill>
                 <a:latin typeface="Noto Sans JP"/>
               </a:rPr>
-              <a:t>気候変動・干ばつが主要因</a:t>
+              <a:t>気候変動・可燃物の蓄積が主要因（米・欧・豪）</a:t>
             </a:r>
           </a:p>
         </p:txBody>
@@ -50944,7 +49287,7 @@
                 </a:solidFill>
                 <a:latin typeface="Noto Sans JP"/>
               </a:rPr>
-              <a:t>乾燥・強風期間の長期化により、</a:t>
+              <a:t>経済・インフラ・自然資源・WUI住民に甚大な被害 ─</a:t>
             </a:r>
           </a:p>
           <a:p>
@@ -50956,7 +49299,7 @@
                 </a:solidFill>
                 <a:latin typeface="Noto Sans JP"/>
               </a:rPr>
-              <a:t>従来の消火・防火戦略だけでは対応が困難</a:t>
+              <a:t>環境に優しい新たな火災遅延剤の開発が急務</a:t>
             </a:r>
           </a:p>
         </p:txBody>
@@ -51728,7 +50071,7 @@
                 </a:solidFill>
                 <a:latin typeface="Noto Sans JP"/>
               </a:rPr>
-              <a:t>5 / 38</a:t>
+              <a:t>5 / 37</a:t>
             </a:r>
           </a:p>
         </p:txBody>
@@ -52973,7 +51316,7 @@
                 </a:solidFill>
                 <a:latin typeface="Noto Sans JP"/>
               </a:rPr>
-              <a:t>既存の山火事対策と、その本質的な限界</a:t>
+              <a:t>既存の山火事用消火剤と、その限界（米国森林局の3分類）</a:t>
             </a:r>
           </a:p>
         </p:txBody>
@@ -53052,7 +51395,7 @@
                 </a:solidFill>
                 <a:latin typeface="Noto Sans JP"/>
               </a:rPr>
-              <a:t>6 / 38</a:t>
+              <a:t>6 / 37</a:t>
             </a:r>
           </a:p>
         </p:txBody>
@@ -53066,7 +51409,7 @@
         <p:spPr>
           <a:xfrm>
             <a:off x="365760" y="859536"/>
-            <a:ext cx="2741599" cy="5248656"/>
+            <a:ext cx="3685946" cy="4974336"/>
           </a:xfrm>
           <a:prstGeom prst="roundRect">
             <a:avLst>
@@ -53114,7 +51457,7 @@
         <p:spPr>
           <a:xfrm>
             <a:off x="365760" y="859536"/>
-            <a:ext cx="2741599" cy="36576"/>
+            <a:ext cx="3685946" cy="45720"/>
           </a:xfrm>
           <a:prstGeom prst="rect">
             <a:avLst/>
@@ -53151,27 +51494,93 @@
       </p:sp>
       <p:sp>
         <p:nvSpPr>
-          <p:cNvPr id="12" name="Rounded Rectangle 11"/>
+          <p:cNvPr id="12" name="TextBox 11"/>
+          <p:cNvSpPr txBox="1"/>
+          <p:nvPr/>
+        </p:nvSpPr>
+        <p:spPr>
+          <a:xfrm>
+            <a:off x="566928" y="1133856"/>
+            <a:ext cx="3283610" cy="365760"/>
+          </a:xfrm>
+          <a:prstGeom prst="rect">
+            <a:avLst/>
+          </a:prstGeom>
+          <a:noFill/>
+        </p:spPr>
+        <p:txBody>
+          <a:bodyPr wrap="square" anchor="t" lIns="36000" rIns="36000" tIns="18000" bIns="18000">
+            <a:spAutoFit/>
+          </a:bodyPr>
+          <a:lstStyle/>
+          <a:p>
+            <a:pPr algn="l"/>
+            <a:r>
+              <a:rPr sz="1800" b="1" i="0">
+                <a:solidFill>
+                  <a:srgbClr val="1E293B"/>
+                </a:solidFill>
+                <a:latin typeface="Noto Sans JP"/>
+              </a:rPr>
+              <a:t>長期遅延剤</a:t>
+            </a:r>
+          </a:p>
+        </p:txBody>
+      </p:sp>
+      <p:sp>
+        <p:nvSpPr>
+          <p:cNvPr id="13" name="TextBox 12"/>
+          <p:cNvSpPr txBox="1"/>
+          <p:nvPr/>
+        </p:nvSpPr>
+        <p:spPr>
+          <a:xfrm>
+            <a:off x="566928" y="1536192"/>
+            <a:ext cx="3283610" cy="237744"/>
+          </a:xfrm>
+          <a:prstGeom prst="rect">
+            <a:avLst/>
+          </a:prstGeom>
+          <a:noFill/>
+        </p:spPr>
+        <p:txBody>
+          <a:bodyPr wrap="square" anchor="t" lIns="36000" rIns="36000" tIns="18000" bIns="18000">
+            <a:spAutoFit/>
+          </a:bodyPr>
+          <a:lstStyle/>
+          <a:p>
+            <a:pPr algn="l"/>
+            <a:r>
+              <a:rPr sz="1000" b="0" i="1">
+                <a:solidFill>
+                  <a:srgbClr val="64748B"/>
+                </a:solidFill>
+                <a:latin typeface="Noto Sans JP"/>
+              </a:rPr>
+              <a:t>Long-term retardant</a:t>
+            </a:r>
+          </a:p>
+        </p:txBody>
+      </p:sp>
+      <p:sp>
+        <p:nvSpPr>
+          <p:cNvPr id="14" name="Rectangle 13"/>
           <p:cNvSpPr/>
           <p:nvPr/>
         </p:nvSpPr>
         <p:spPr>
           <a:xfrm>
-            <a:off x="475488" y="969264"/>
-            <a:ext cx="2522143" cy="2514600"/>
-          </a:xfrm>
-          <a:prstGeom prst="roundRect">
-            <a:avLst>
-              <a:gd name="adj" fmla="val 3000"/>
-            </a:avLst>
+            <a:off x="566928" y="1865376"/>
+            <a:ext cx="3283610" cy="13716"/>
+          </a:xfrm>
+          <a:prstGeom prst="rect">
+            <a:avLst/>
           </a:prstGeom>
           <a:solidFill>
-            <a:srgbClr val="F5F8FC"/>
+            <a:srgbClr val="E2E8F0"/>
           </a:solidFill>
-          <a:ln w="8890">
-            <a:solidFill>
-              <a:srgbClr val="C0D0E0"/>
-            </a:solidFill>
+          <a:ln>
+            <a:noFill/>
           </a:ln>
           <a:effectLst/>
         </p:spPr>
@@ -53199,105 +51608,35 @@
       </p:sp>
       <p:sp>
         <p:nvSpPr>
-          <p:cNvPr id="13" name="TextBox 12"/>
-          <p:cNvSpPr txBox="1"/>
-          <p:nvPr/>
-        </p:nvSpPr>
-        <p:spPr>
-          <a:xfrm>
-            <a:off x="475488" y="969264"/>
-            <a:ext cx="2522143" cy="2514600"/>
-          </a:xfrm>
-          <a:prstGeom prst="rect">
-            <a:avLst/>
-          </a:prstGeom>
-          <a:noFill/>
-        </p:spPr>
-        <p:txBody>
-          <a:bodyPr wrap="square" anchor="ctr" lIns="36000" rIns="36000" tIns="18000" bIns="18000">
-            <a:spAutoFit/>
-          </a:bodyPr>
-          <a:lstStyle/>
-          <a:p>
-            <a:pPr algn="ctr"/>
-            <a:r>
-              <a:rPr sz="1100" b="0" i="0">
-                <a:solidFill>
-                  <a:srgbClr val="AAB4C0"/>
-                </a:solidFill>
-                <a:latin typeface="Noto Sans JP"/>
-              </a:rPr>
-              <a:t>（写真）</a:t>
-            </a:r>
-          </a:p>
-        </p:txBody>
-      </p:sp>
-      <p:sp>
-        <p:nvSpPr>
-          <p:cNvPr id="14" name="TextBox 13"/>
-          <p:cNvSpPr txBox="1"/>
-          <p:nvPr/>
-        </p:nvSpPr>
-        <p:spPr>
-          <a:xfrm>
-            <a:off x="457200" y="3611880"/>
-            <a:ext cx="2558719" cy="310896"/>
-          </a:xfrm>
-          <a:prstGeom prst="rect">
-            <a:avLst/>
-          </a:prstGeom>
-          <a:noFill/>
-        </p:spPr>
-        <p:txBody>
-          <a:bodyPr wrap="square" anchor="t" lIns="36000" rIns="36000" tIns="18000" bIns="18000">
-            <a:spAutoFit/>
-          </a:bodyPr>
-          <a:lstStyle/>
-          <a:p>
-            <a:pPr algn="ctr"/>
-            <a:r>
-              <a:rPr sz="1400" b="1" i="0">
-                <a:solidFill>
-                  <a:srgbClr val="1E293B"/>
-                </a:solidFill>
-                <a:latin typeface="Noto Sans JP"/>
-              </a:rPr>
-              <a:t>水のみ</a:t>
-            </a:r>
-          </a:p>
-        </p:txBody>
-      </p:sp>
-      <p:sp>
-        <p:nvSpPr>
           <p:cNvPr id="15" name="TextBox 14"/>
           <p:cNvSpPr txBox="1"/>
           <p:nvPr/>
         </p:nvSpPr>
         <p:spPr>
           <a:xfrm>
-            <a:off x="457200" y="3922776"/>
-            <a:ext cx="2558719" cy="237744"/>
-          </a:xfrm>
-          <a:prstGeom prst="rect">
-            <a:avLst/>
-          </a:prstGeom>
-          <a:noFill/>
-        </p:spPr>
-        <p:txBody>
-          <a:bodyPr wrap="square" anchor="t" lIns="36000" rIns="36000" tIns="18000" bIns="18000">
-            <a:spAutoFit/>
-          </a:bodyPr>
-          <a:lstStyle/>
-          <a:p>
-            <a:pPr algn="ctr"/>
-            <a:r>
-              <a:rPr sz="1000" b="0" i="0">
+            <a:off x="566928" y="2011680"/>
+            <a:ext cx="3283610" cy="219456"/>
+          </a:xfrm>
+          <a:prstGeom prst="rect">
+            <a:avLst/>
+          </a:prstGeom>
+          <a:noFill/>
+        </p:spPr>
+        <p:txBody>
+          <a:bodyPr wrap="square" anchor="t" lIns="36000" rIns="36000" tIns="18000" bIns="18000">
+            <a:spAutoFit/>
+          </a:bodyPr>
+          <a:lstStyle/>
+          <a:p>
+            <a:pPr algn="l"/>
+            <a:r>
+              <a:rPr sz="1000" b="1" i="0">
                 <a:solidFill>
                   <a:srgbClr val="64748B"/>
                 </a:solidFill>
                 <a:latin typeface="Noto Sans JP"/>
               </a:rPr>
-              <a:t>H₂O</a:t>
+              <a:t>主成分</a:t>
             </a:r>
           </a:p>
         </p:txBody>
@@ -53310,55 +51649,183 @@
         </p:nvSpPr>
         <p:spPr>
           <a:xfrm>
-            <a:off x="457200" y="4197096"/>
-            <a:ext cx="2558719" cy="1837944"/>
-          </a:xfrm>
-          <a:prstGeom prst="rect">
-            <a:avLst/>
-          </a:prstGeom>
-          <a:noFill/>
-        </p:spPr>
-        <p:txBody>
-          <a:bodyPr wrap="square" anchor="t" lIns="36000" rIns="36000" tIns="18000" bIns="18000">
-            <a:spAutoFit/>
-          </a:bodyPr>
-          <a:lstStyle/>
-          <a:p>
-            <a:pPr algn="ctr"/>
+            <a:off x="566928" y="2231136"/>
+            <a:ext cx="3283610" cy="475488"/>
+          </a:xfrm>
+          <a:prstGeom prst="rect">
+            <a:avLst/>
+          </a:prstGeom>
+          <a:noFill/>
+        </p:spPr>
+        <p:txBody>
+          <a:bodyPr wrap="square" anchor="t" lIns="36000" rIns="36000" tIns="18000" bIns="18000">
+            <a:spAutoFit/>
+          </a:bodyPr>
+          <a:lstStyle/>
+          <a:p>
+            <a:pPr algn="l"/>
             <a:r>
               <a:rPr sz="1200" b="0" i="0">
                 <a:solidFill>
+                  <a:srgbClr val="475569"/>
+                </a:solidFill>
+                <a:latin typeface="Noto Sans JP"/>
+              </a:rPr>
+              <a:t>リン酸アンモニウム等の化学物質</a:t>
+            </a:r>
+          </a:p>
+        </p:txBody>
+      </p:sp>
+      <p:sp>
+        <p:nvSpPr>
+          <p:cNvPr id="17" name="TextBox 16"/>
+          <p:cNvSpPr txBox="1"/>
+          <p:nvPr/>
+        </p:nvSpPr>
+        <p:spPr>
+          <a:xfrm>
+            <a:off x="566928" y="2743200"/>
+            <a:ext cx="3283610" cy="219456"/>
+          </a:xfrm>
+          <a:prstGeom prst="rect">
+            <a:avLst/>
+          </a:prstGeom>
+          <a:noFill/>
+        </p:spPr>
+        <p:txBody>
+          <a:bodyPr wrap="square" anchor="t" lIns="36000" rIns="36000" tIns="18000" bIns="18000">
+            <a:spAutoFit/>
+          </a:bodyPr>
+          <a:lstStyle/>
+          <a:p>
+            <a:pPr algn="l"/>
+            <a:r>
+              <a:rPr sz="1000" b="1" i="0">
+                <a:solidFill>
+                  <a:srgbClr val="64748B"/>
+                </a:solidFill>
+                <a:latin typeface="Noto Sans JP"/>
+              </a:rPr>
+              <a:t>効果・保持</a:t>
+            </a:r>
+          </a:p>
+        </p:txBody>
+      </p:sp>
+      <p:sp>
+        <p:nvSpPr>
+          <p:cNvPr id="18" name="TextBox 17"/>
+          <p:cNvSpPr txBox="1"/>
+          <p:nvPr/>
+        </p:nvSpPr>
+        <p:spPr>
+          <a:xfrm>
+            <a:off x="566928" y="2962656"/>
+            <a:ext cx="3283610" cy="475488"/>
+          </a:xfrm>
+          <a:prstGeom prst="rect">
+            <a:avLst/>
+          </a:prstGeom>
+          <a:noFill/>
+        </p:spPr>
+        <p:txBody>
+          <a:bodyPr wrap="square" anchor="t" lIns="36000" rIns="36000" tIns="18000" bIns="18000">
+            <a:spAutoFit/>
+          </a:bodyPr>
+          <a:lstStyle/>
+          <a:p>
+            <a:pPr algn="l"/>
+            <a:r>
+              <a:rPr sz="1200" b="0" i="0">
+                <a:solidFill>
+                  <a:srgbClr val="475569"/>
+                </a:solidFill>
+                <a:latin typeface="Noto Sans JP"/>
+              </a:rPr>
+              <a:t>残留物がある限り効果が持続</a:t>
+            </a:r>
+          </a:p>
+        </p:txBody>
+      </p:sp>
+      <p:sp>
+        <p:nvSpPr>
+          <p:cNvPr id="19" name="TextBox 18"/>
+          <p:cNvSpPr txBox="1"/>
+          <p:nvPr/>
+        </p:nvSpPr>
+        <p:spPr>
+          <a:xfrm>
+            <a:off x="566928" y="3493008"/>
+            <a:ext cx="3283610" cy="219456"/>
+          </a:xfrm>
+          <a:prstGeom prst="rect">
+            <a:avLst/>
+          </a:prstGeom>
+          <a:noFill/>
+        </p:spPr>
+        <p:txBody>
+          <a:bodyPr wrap="square" anchor="t" lIns="36000" rIns="36000" tIns="18000" bIns="18000">
+            <a:spAutoFit/>
+          </a:bodyPr>
+          <a:lstStyle/>
+          <a:p>
+            <a:pPr algn="l"/>
+            <a:r>
+              <a:rPr sz="1000" b="1" i="0">
+                <a:solidFill>
                   <a:srgbClr val="A05656"/>
                 </a:solidFill>
                 <a:latin typeface="Noto Sans JP"/>
               </a:rPr>
-              <a:t>蒸発・流失で</a:t>
-            </a:r>
-          </a:p>
-          <a:p>
-            <a:pPr algn="ctr"/>
-            <a:r>
-              <a:rPr sz="1200" b="0" i="0">
+              <a:t>課題</a:t>
+            </a:r>
+          </a:p>
+        </p:txBody>
+      </p:sp>
+      <p:sp>
+        <p:nvSpPr>
+          <p:cNvPr id="20" name="TextBox 19"/>
+          <p:cNvSpPr txBox="1"/>
+          <p:nvPr/>
+        </p:nvSpPr>
+        <p:spPr>
+          <a:xfrm>
+            <a:off x="566928" y="3712464"/>
+            <a:ext cx="3283610" cy="1956816"/>
+          </a:xfrm>
+          <a:prstGeom prst="rect">
+            <a:avLst/>
+          </a:prstGeom>
+          <a:noFill/>
+        </p:spPr>
+        <p:txBody>
+          <a:bodyPr wrap="square" anchor="t" lIns="36000" rIns="36000" tIns="18000" bIns="18000">
+            <a:spAutoFit/>
+          </a:bodyPr>
+          <a:lstStyle/>
+          <a:p>
+            <a:pPr algn="l"/>
+            <a:r>
+              <a:rPr sz="1200" b="1" i="0">
                 <a:solidFill>
                   <a:srgbClr val="A05656"/>
                 </a:solidFill>
                 <a:latin typeface="Noto Sans JP"/>
               </a:rPr>
-              <a:t>即座に効果消失</a:t>
-            </a:r>
-          </a:p>
-        </p:txBody>
-      </p:sp>
-      <p:sp>
-        <p:nvSpPr>
-          <p:cNvPr id="17" name="Rounded Rectangle 16"/>
+              <a:t>化学物質が対象物に残留する</a:t>
+            </a:r>
+          </a:p>
+        </p:txBody>
+      </p:sp>
+      <p:sp>
+        <p:nvSpPr>
+          <p:cNvPr id="21" name="Rounded Rectangle 20"/>
           <p:cNvSpPr/>
           <p:nvPr/>
         </p:nvSpPr>
         <p:spPr>
           <a:xfrm>
-            <a:off x="3271951" y="859536"/>
-            <a:ext cx="2741599" cy="5248656"/>
+            <a:off x="4252874" y="859536"/>
+            <a:ext cx="3685946" cy="4974336"/>
           </a:xfrm>
           <a:prstGeom prst="roundRect">
             <a:avLst>
@@ -53399,14 +51866,14 @@
       </p:sp>
       <p:sp>
         <p:nvSpPr>
-          <p:cNvPr id="18" name="Rectangle 17"/>
+          <p:cNvPr id="22" name="Rectangle 21"/>
           <p:cNvSpPr/>
           <p:nvPr/>
         </p:nvSpPr>
         <p:spPr>
           <a:xfrm>
-            <a:off x="3271951" y="859536"/>
-            <a:ext cx="2741599" cy="36576"/>
+            <a:off x="4252874" y="859536"/>
+            <a:ext cx="3685946" cy="45720"/>
           </a:xfrm>
           <a:prstGeom prst="rect">
             <a:avLst/>
@@ -53443,249 +51910,71 @@
       </p:sp>
       <p:sp>
         <p:nvSpPr>
-          <p:cNvPr id="19" name="Rounded Rectangle 18"/>
-          <p:cNvSpPr/>
-          <p:nvPr/>
-        </p:nvSpPr>
-        <p:spPr>
-          <a:xfrm>
-            <a:off x="3381679" y="969264"/>
-            <a:ext cx="2522143" cy="2514600"/>
-          </a:xfrm>
-          <a:prstGeom prst="roundRect">
-            <a:avLst>
-              <a:gd name="adj" fmla="val 3000"/>
-            </a:avLst>
-          </a:prstGeom>
-          <a:solidFill>
-            <a:srgbClr val="F5F8FC"/>
-          </a:solidFill>
-          <a:ln w="8890">
-            <a:solidFill>
-              <a:srgbClr val="C0D0E0"/>
-            </a:solidFill>
-          </a:ln>
-          <a:effectLst/>
-        </p:spPr>
-        <p:style>
-          <a:lnRef idx="1">
-            <a:schemeClr val="accent1"/>
-          </a:lnRef>
-          <a:fillRef idx="3">
-            <a:schemeClr val="accent1"/>
-          </a:fillRef>
-          <a:effectRef idx="2">
-            <a:schemeClr val="accent1"/>
-          </a:effectRef>
-          <a:fontRef idx="minor">
-            <a:schemeClr val="lt1"/>
-          </a:fontRef>
-        </p:style>
-        <p:txBody>
-          <a:bodyPr rtlCol="0" anchor="ctr"/>
-          <a:lstStyle/>
-          <a:p>
-            <a:pPr algn="ctr"/>
-          </a:p>
-        </p:txBody>
-      </p:sp>
-      <p:sp>
-        <p:nvSpPr>
-          <p:cNvPr id="20" name="TextBox 19"/>
-          <p:cNvSpPr txBox="1"/>
-          <p:nvPr/>
-        </p:nvSpPr>
-        <p:spPr>
-          <a:xfrm>
-            <a:off x="3381679" y="969264"/>
-            <a:ext cx="2522143" cy="2514600"/>
-          </a:xfrm>
-          <a:prstGeom prst="rect">
-            <a:avLst/>
-          </a:prstGeom>
-          <a:noFill/>
-        </p:spPr>
-        <p:txBody>
-          <a:bodyPr wrap="square" anchor="ctr" lIns="36000" rIns="36000" tIns="18000" bIns="18000">
-            <a:spAutoFit/>
-          </a:bodyPr>
-          <a:lstStyle/>
-          <a:p>
-            <a:pPr algn="ctr"/>
-            <a:r>
-              <a:rPr sz="1100" b="0" i="0">
-                <a:solidFill>
-                  <a:srgbClr val="AAB4C0"/>
-                </a:solidFill>
-                <a:latin typeface="Noto Sans JP"/>
-              </a:rPr>
-              <a:t>（写真）</a:t>
-            </a:r>
-          </a:p>
-        </p:txBody>
-      </p:sp>
-      <p:sp>
-        <p:nvSpPr>
-          <p:cNvPr id="21" name="TextBox 20"/>
-          <p:cNvSpPr txBox="1"/>
-          <p:nvPr/>
-        </p:nvSpPr>
-        <p:spPr>
-          <a:xfrm>
-            <a:off x="3363391" y="3611880"/>
-            <a:ext cx="2558719" cy="310896"/>
-          </a:xfrm>
-          <a:prstGeom prst="rect">
-            <a:avLst/>
-          </a:prstGeom>
-          <a:noFill/>
-        </p:spPr>
-        <p:txBody>
-          <a:bodyPr wrap="square" anchor="t" lIns="36000" rIns="36000" tIns="18000" bIns="18000">
-            <a:spAutoFit/>
-          </a:bodyPr>
-          <a:lstStyle/>
-          <a:p>
-            <a:pPr algn="ctr"/>
-            <a:r>
-              <a:rPr sz="1400" b="1" i="0">
+          <p:cNvPr id="23" name="TextBox 22"/>
+          <p:cNvSpPr txBox="1"/>
+          <p:nvPr/>
+        </p:nvSpPr>
+        <p:spPr>
+          <a:xfrm>
+            <a:off x="4454042" y="1133856"/>
+            <a:ext cx="3283610" cy="365760"/>
+          </a:xfrm>
+          <a:prstGeom prst="rect">
+            <a:avLst/>
+          </a:prstGeom>
+          <a:noFill/>
+        </p:spPr>
+        <p:txBody>
+          <a:bodyPr wrap="square" anchor="t" lIns="36000" rIns="36000" tIns="18000" bIns="18000">
+            <a:spAutoFit/>
+          </a:bodyPr>
+          <a:lstStyle/>
+          <a:p>
+            <a:pPr algn="l"/>
+            <a:r>
+              <a:rPr sz="1800" b="1" i="0">
                 <a:solidFill>
                   <a:srgbClr val="1E293B"/>
                 </a:solidFill>
                 <a:latin typeface="Noto Sans JP"/>
               </a:rPr>
-              <a:t>Phos-Chek</a:t>
-            </a:r>
-          </a:p>
-        </p:txBody>
-      </p:sp>
-      <p:sp>
-        <p:nvSpPr>
-          <p:cNvPr id="22" name="TextBox 21"/>
-          <p:cNvSpPr txBox="1"/>
-          <p:nvPr/>
-        </p:nvSpPr>
-        <p:spPr>
-          <a:xfrm>
-            <a:off x="3363391" y="3922776"/>
-            <a:ext cx="2558719" cy="237744"/>
-          </a:xfrm>
-          <a:prstGeom prst="rect">
-            <a:avLst/>
-          </a:prstGeom>
-          <a:noFill/>
-        </p:spPr>
-        <p:txBody>
-          <a:bodyPr wrap="square" anchor="t" lIns="36000" rIns="36000" tIns="18000" bIns="18000">
-            <a:spAutoFit/>
-          </a:bodyPr>
-          <a:lstStyle/>
-          <a:p>
-            <a:pPr algn="ctr"/>
-            <a:r>
-              <a:rPr sz="1000" b="0" i="0">
+              <a:t>泡消火剤</a:t>
+            </a:r>
+          </a:p>
+        </p:txBody>
+      </p:sp>
+      <p:sp>
+        <p:nvSpPr>
+          <p:cNvPr id="24" name="TextBox 23"/>
+          <p:cNvSpPr txBox="1"/>
+          <p:nvPr/>
+        </p:nvSpPr>
+        <p:spPr>
+          <a:xfrm>
+            <a:off x="4454042" y="1536192"/>
+            <a:ext cx="3283610" cy="237744"/>
+          </a:xfrm>
+          <a:prstGeom prst="rect">
+            <a:avLst/>
+          </a:prstGeom>
+          <a:noFill/>
+        </p:spPr>
+        <p:txBody>
+          <a:bodyPr wrap="square" anchor="t" lIns="36000" rIns="36000" tIns="18000" bIns="18000">
+            <a:spAutoFit/>
+          </a:bodyPr>
+          <a:lstStyle/>
+          <a:p>
+            <a:pPr algn="l"/>
+            <a:r>
+              <a:rPr sz="1000" b="0" i="1">
                 <a:solidFill>
                   <a:srgbClr val="64748B"/>
                 </a:solidFill>
                 <a:latin typeface="Noto Sans JP"/>
               </a:rPr>
-              <a:t>リン酸アンモニウム</a:t>
-            </a:r>
-          </a:p>
-        </p:txBody>
-      </p:sp>
-      <p:sp>
-        <p:nvSpPr>
-          <p:cNvPr id="23" name="TextBox 22"/>
-          <p:cNvSpPr txBox="1"/>
-          <p:nvPr/>
-        </p:nvSpPr>
-        <p:spPr>
-          <a:xfrm>
-            <a:off x="3363391" y="4197096"/>
-            <a:ext cx="2558719" cy="1837944"/>
-          </a:xfrm>
-          <a:prstGeom prst="rect">
-            <a:avLst/>
-          </a:prstGeom>
-          <a:noFill/>
-        </p:spPr>
-        <p:txBody>
-          <a:bodyPr wrap="square" anchor="t" lIns="36000" rIns="36000" tIns="18000" bIns="18000">
-            <a:spAutoFit/>
-          </a:bodyPr>
-          <a:lstStyle/>
-          <a:p>
-            <a:pPr algn="ctr"/>
-            <a:r>
-              <a:rPr sz="1200" b="0" i="0">
-                <a:solidFill>
-                  <a:srgbClr val="A05656"/>
-                </a:solidFill>
-                <a:latin typeface="Noto Sans JP"/>
-              </a:rPr>
-              <a:t>土壌・水系への</a:t>
-            </a:r>
-          </a:p>
-          <a:p>
-            <a:pPr algn="ctr"/>
-            <a:r>
-              <a:rPr sz="1200" b="0" i="0">
-                <a:solidFill>
-                  <a:srgbClr val="A05656"/>
-                </a:solidFill>
-                <a:latin typeface="Noto Sans JP"/>
-              </a:rPr>
-              <a:t>化学汚染が残留</a:t>
-            </a:r>
-          </a:p>
-        </p:txBody>
-      </p:sp>
-      <p:sp>
-        <p:nvSpPr>
-          <p:cNvPr id="24" name="Rounded Rectangle 23"/>
-          <p:cNvSpPr/>
-          <p:nvPr/>
-        </p:nvSpPr>
-        <p:spPr>
-          <a:xfrm>
-            <a:off x="6178143" y="859536"/>
-            <a:ext cx="2741599" cy="5248656"/>
-          </a:xfrm>
-          <a:prstGeom prst="roundRect">
-            <a:avLst>
-              <a:gd name="adj" fmla="val 4000"/>
-            </a:avLst>
-          </a:prstGeom>
-          <a:solidFill>
-            <a:srgbClr val="F1F5F9"/>
-          </a:solidFill>
-          <a:ln w="6350">
-            <a:solidFill>
-              <a:srgbClr val="E2E8F0"/>
-            </a:solidFill>
-          </a:ln>
-          <a:effectLst/>
-        </p:spPr>
-        <p:style>
-          <a:lnRef idx="1">
-            <a:schemeClr val="accent1"/>
-          </a:lnRef>
-          <a:fillRef idx="3">
-            <a:schemeClr val="accent1"/>
-          </a:fillRef>
-          <a:effectRef idx="2">
-            <a:schemeClr val="accent1"/>
-          </a:effectRef>
-          <a:fontRef idx="minor">
-            <a:schemeClr val="lt1"/>
-          </a:fontRef>
-        </p:style>
-        <p:txBody>
-          <a:bodyPr rtlCol="0" anchor="ctr"/>
-          <a:lstStyle/>
-          <a:p>
-            <a:pPr algn="ctr"/>
+              <a:t>Foam suppressant</a:t>
+            </a:r>
           </a:p>
         </p:txBody>
       </p:sp>
@@ -53697,8 +51986,8 @@
         </p:nvSpPr>
         <p:spPr>
           <a:xfrm>
-            <a:off x="6178143" y="859536"/>
-            <a:ext cx="2741599" cy="36576"/>
+            <a:off x="4454042" y="1865376"/>
+            <a:ext cx="3283610" cy="13716"/>
           </a:xfrm>
           <a:prstGeom prst="rect">
             <a:avLst/>
@@ -53735,214 +52024,224 @@
       </p:sp>
       <p:sp>
         <p:nvSpPr>
-          <p:cNvPr id="26" name="Rounded Rectangle 25"/>
+          <p:cNvPr id="26" name="TextBox 25"/>
+          <p:cNvSpPr txBox="1"/>
+          <p:nvPr/>
+        </p:nvSpPr>
+        <p:spPr>
+          <a:xfrm>
+            <a:off x="4454042" y="2011680"/>
+            <a:ext cx="3283610" cy="219456"/>
+          </a:xfrm>
+          <a:prstGeom prst="rect">
+            <a:avLst/>
+          </a:prstGeom>
+          <a:noFill/>
+        </p:spPr>
+        <p:txBody>
+          <a:bodyPr wrap="square" anchor="t" lIns="36000" rIns="36000" tIns="18000" bIns="18000">
+            <a:spAutoFit/>
+          </a:bodyPr>
+          <a:lstStyle/>
+          <a:p>
+            <a:pPr algn="l"/>
+            <a:r>
+              <a:rPr sz="1000" b="1" i="0">
+                <a:solidFill>
+                  <a:srgbClr val="64748B"/>
+                </a:solidFill>
+                <a:latin typeface="Noto Sans JP"/>
+              </a:rPr>
+              <a:t>主成分</a:t>
+            </a:r>
+          </a:p>
+        </p:txBody>
+      </p:sp>
+      <p:sp>
+        <p:nvSpPr>
+          <p:cNvPr id="27" name="TextBox 26"/>
+          <p:cNvSpPr txBox="1"/>
+          <p:nvPr/>
+        </p:nvSpPr>
+        <p:spPr>
+          <a:xfrm>
+            <a:off x="4454042" y="2231136"/>
+            <a:ext cx="3283610" cy="475488"/>
+          </a:xfrm>
+          <a:prstGeom prst="rect">
+            <a:avLst/>
+          </a:prstGeom>
+          <a:noFill/>
+        </p:spPr>
+        <p:txBody>
+          <a:bodyPr wrap="square" anchor="t" lIns="36000" rIns="36000" tIns="18000" bIns="18000">
+            <a:spAutoFit/>
+          </a:bodyPr>
+          <a:lstStyle/>
+          <a:p>
+            <a:pPr algn="l"/>
+            <a:r>
+              <a:rPr sz="1200" b="0" i="0">
+                <a:solidFill>
+                  <a:srgbClr val="475569"/>
+                </a:solidFill>
+                <a:latin typeface="Noto Sans JP"/>
+              </a:rPr>
+              <a:t>界面活性剤（旧来はフッ素系）</a:t>
+            </a:r>
+          </a:p>
+        </p:txBody>
+      </p:sp>
+      <p:sp>
+        <p:nvSpPr>
+          <p:cNvPr id="28" name="TextBox 27"/>
+          <p:cNvSpPr txBox="1"/>
+          <p:nvPr/>
+        </p:nvSpPr>
+        <p:spPr>
+          <a:xfrm>
+            <a:off x="4454042" y="2743200"/>
+            <a:ext cx="3283610" cy="219456"/>
+          </a:xfrm>
+          <a:prstGeom prst="rect">
+            <a:avLst/>
+          </a:prstGeom>
+          <a:noFill/>
+        </p:spPr>
+        <p:txBody>
+          <a:bodyPr wrap="square" anchor="t" lIns="36000" rIns="36000" tIns="18000" bIns="18000">
+            <a:spAutoFit/>
+          </a:bodyPr>
+          <a:lstStyle/>
+          <a:p>
+            <a:pPr algn="l"/>
+            <a:r>
+              <a:rPr sz="1000" b="1" i="0">
+                <a:solidFill>
+                  <a:srgbClr val="64748B"/>
+                </a:solidFill>
+                <a:latin typeface="Noto Sans JP"/>
+              </a:rPr>
+              <a:t>効果・保持</a:t>
+            </a:r>
+          </a:p>
+        </p:txBody>
+      </p:sp>
+      <p:sp>
+        <p:nvSpPr>
+          <p:cNvPr id="29" name="TextBox 28"/>
+          <p:cNvSpPr txBox="1"/>
+          <p:nvPr/>
+        </p:nvSpPr>
+        <p:spPr>
+          <a:xfrm>
+            <a:off x="4454042" y="2962656"/>
+            <a:ext cx="3283610" cy="475488"/>
+          </a:xfrm>
+          <a:prstGeom prst="rect">
+            <a:avLst/>
+          </a:prstGeom>
+          <a:noFill/>
+        </p:spPr>
+        <p:txBody>
+          <a:bodyPr wrap="square" anchor="t" lIns="36000" rIns="36000" tIns="18000" bIns="18000">
+            <a:spAutoFit/>
+          </a:bodyPr>
+          <a:lstStyle/>
+          <a:p>
+            <a:pPr algn="l"/>
+            <a:r>
+              <a:rPr sz="1200" b="0" i="0">
+                <a:solidFill>
+                  <a:srgbClr val="475569"/>
+                </a:solidFill>
+                <a:latin typeface="Noto Sans JP"/>
+              </a:rPr>
+              <a:t>水分保持 15〜30分（短期的）</a:t>
+            </a:r>
+          </a:p>
+        </p:txBody>
+      </p:sp>
+      <p:sp>
+        <p:nvSpPr>
+          <p:cNvPr id="30" name="TextBox 29"/>
+          <p:cNvSpPr txBox="1"/>
+          <p:nvPr/>
+        </p:nvSpPr>
+        <p:spPr>
+          <a:xfrm>
+            <a:off x="4454042" y="3493008"/>
+            <a:ext cx="3283610" cy="219456"/>
+          </a:xfrm>
+          <a:prstGeom prst="rect">
+            <a:avLst/>
+          </a:prstGeom>
+          <a:noFill/>
+        </p:spPr>
+        <p:txBody>
+          <a:bodyPr wrap="square" anchor="t" lIns="36000" rIns="36000" tIns="18000" bIns="18000">
+            <a:spAutoFit/>
+          </a:bodyPr>
+          <a:lstStyle/>
+          <a:p>
+            <a:pPr algn="l"/>
+            <a:r>
+              <a:rPr sz="1000" b="1" i="0">
+                <a:solidFill>
+                  <a:srgbClr val="A05656"/>
+                </a:solidFill>
+                <a:latin typeface="Noto Sans JP"/>
+              </a:rPr>
+              <a:t>課題</a:t>
+            </a:r>
+          </a:p>
+        </p:txBody>
+      </p:sp>
+      <p:sp>
+        <p:nvSpPr>
+          <p:cNvPr id="31" name="TextBox 30"/>
+          <p:cNvSpPr txBox="1"/>
+          <p:nvPr/>
+        </p:nvSpPr>
+        <p:spPr>
+          <a:xfrm>
+            <a:off x="4454042" y="3712464"/>
+            <a:ext cx="3283610" cy="1956816"/>
+          </a:xfrm>
+          <a:prstGeom prst="rect">
+            <a:avLst/>
+          </a:prstGeom>
+          <a:noFill/>
+        </p:spPr>
+        <p:txBody>
+          <a:bodyPr wrap="square" anchor="t" lIns="36000" rIns="36000" tIns="18000" bIns="18000">
+            <a:spAutoFit/>
+          </a:bodyPr>
+          <a:lstStyle/>
+          <a:p>
+            <a:pPr algn="l"/>
+            <a:r>
+              <a:rPr sz="1200" b="1" i="0">
+                <a:solidFill>
+                  <a:srgbClr val="A05656"/>
+                </a:solidFill>
+                <a:latin typeface="Noto Sans JP"/>
+              </a:rPr>
+              <a:t>乾燥で効果消失／フッ素系は生体蓄積・環境毒性</a:t>
+            </a:r>
+          </a:p>
+        </p:txBody>
+      </p:sp>
+      <p:sp>
+        <p:nvSpPr>
+          <p:cNvPr id="32" name="Rounded Rectangle 31"/>
           <p:cNvSpPr/>
           <p:nvPr/>
         </p:nvSpPr>
         <p:spPr>
           <a:xfrm>
-            <a:off x="6287871" y="969264"/>
-            <a:ext cx="2522143" cy="2514600"/>
-          </a:xfrm>
-          <a:prstGeom prst="roundRect">
-            <a:avLst>
-              <a:gd name="adj" fmla="val 3000"/>
-            </a:avLst>
-          </a:prstGeom>
-          <a:solidFill>
-            <a:srgbClr val="F5F8FC"/>
-          </a:solidFill>
-          <a:ln w="8890">
-            <a:solidFill>
-              <a:srgbClr val="C0D0E0"/>
-            </a:solidFill>
-          </a:ln>
-          <a:effectLst/>
-        </p:spPr>
-        <p:style>
-          <a:lnRef idx="1">
-            <a:schemeClr val="accent1"/>
-          </a:lnRef>
-          <a:fillRef idx="3">
-            <a:schemeClr val="accent1"/>
-          </a:fillRef>
-          <a:effectRef idx="2">
-            <a:schemeClr val="accent1"/>
-          </a:effectRef>
-          <a:fontRef idx="minor">
-            <a:schemeClr val="lt1"/>
-          </a:fontRef>
-        </p:style>
-        <p:txBody>
-          <a:bodyPr rtlCol="0" anchor="ctr"/>
-          <a:lstStyle/>
-          <a:p>
-            <a:pPr algn="ctr"/>
-          </a:p>
-        </p:txBody>
-      </p:sp>
-      <p:sp>
-        <p:nvSpPr>
-          <p:cNvPr id="27" name="TextBox 26"/>
-          <p:cNvSpPr txBox="1"/>
-          <p:nvPr/>
-        </p:nvSpPr>
-        <p:spPr>
-          <a:xfrm>
-            <a:off x="6287871" y="969264"/>
-            <a:ext cx="2522143" cy="2514600"/>
-          </a:xfrm>
-          <a:prstGeom prst="rect">
-            <a:avLst/>
-          </a:prstGeom>
-          <a:noFill/>
-        </p:spPr>
-        <p:txBody>
-          <a:bodyPr wrap="square" anchor="ctr" lIns="36000" rIns="36000" tIns="18000" bIns="18000">
-            <a:spAutoFit/>
-          </a:bodyPr>
-          <a:lstStyle/>
-          <a:p>
-            <a:pPr algn="ctr"/>
-            <a:r>
-              <a:rPr sz="1100" b="0" i="0">
-                <a:solidFill>
-                  <a:srgbClr val="AAB4C0"/>
-                </a:solidFill>
-                <a:latin typeface="Noto Sans JP"/>
-              </a:rPr>
-              <a:t>（写真）</a:t>
-            </a:r>
-          </a:p>
-        </p:txBody>
-      </p:sp>
-      <p:sp>
-        <p:nvSpPr>
-          <p:cNvPr id="28" name="TextBox 27"/>
-          <p:cNvSpPr txBox="1"/>
-          <p:nvPr/>
-        </p:nvSpPr>
-        <p:spPr>
-          <a:xfrm>
-            <a:off x="6269583" y="3611880"/>
-            <a:ext cx="2558719" cy="310896"/>
-          </a:xfrm>
-          <a:prstGeom prst="rect">
-            <a:avLst/>
-          </a:prstGeom>
-          <a:noFill/>
-        </p:spPr>
-        <p:txBody>
-          <a:bodyPr wrap="square" anchor="t" lIns="36000" rIns="36000" tIns="18000" bIns="18000">
-            <a:spAutoFit/>
-          </a:bodyPr>
-          <a:lstStyle/>
-          <a:p>
-            <a:pPr algn="ctr"/>
-            <a:r>
-              <a:rPr sz="1400" b="1" i="0">
-                <a:solidFill>
-                  <a:srgbClr val="1E293B"/>
-                </a:solidFill>
-                <a:latin typeface="Noto Sans JP"/>
-              </a:rPr>
-              <a:t>AquaGel-K</a:t>
-            </a:r>
-          </a:p>
-        </p:txBody>
-      </p:sp>
-      <p:sp>
-        <p:nvSpPr>
-          <p:cNvPr id="29" name="TextBox 28"/>
-          <p:cNvSpPr txBox="1"/>
-          <p:nvPr/>
-        </p:nvSpPr>
-        <p:spPr>
-          <a:xfrm>
-            <a:off x="6269583" y="3922776"/>
-            <a:ext cx="2558719" cy="237744"/>
-          </a:xfrm>
-          <a:prstGeom prst="rect">
-            <a:avLst/>
-          </a:prstGeom>
-          <a:noFill/>
-        </p:spPr>
-        <p:txBody>
-          <a:bodyPr wrap="square" anchor="t" lIns="36000" rIns="36000" tIns="18000" bIns="18000">
-            <a:spAutoFit/>
-          </a:bodyPr>
-          <a:lstStyle/>
-          <a:p>
-            <a:pPr algn="ctr"/>
-            <a:r>
-              <a:rPr sz="1000" b="0" i="0">
-                <a:solidFill>
-                  <a:srgbClr val="64748B"/>
-                </a:solidFill>
-                <a:latin typeface="Noto Sans JP"/>
-              </a:rPr>
-              <a:t>架橋ポリアクリレート</a:t>
-            </a:r>
-          </a:p>
-        </p:txBody>
-      </p:sp>
-      <p:sp>
-        <p:nvSpPr>
-          <p:cNvPr id="30" name="TextBox 29"/>
-          <p:cNvSpPr txBox="1"/>
-          <p:nvPr/>
-        </p:nvSpPr>
-        <p:spPr>
-          <a:xfrm>
-            <a:off x="6269583" y="4197096"/>
-            <a:ext cx="2558719" cy="1837944"/>
-          </a:xfrm>
-          <a:prstGeom prst="rect">
-            <a:avLst/>
-          </a:prstGeom>
-          <a:noFill/>
-        </p:spPr>
-        <p:txBody>
-          <a:bodyPr wrap="square" anchor="t" lIns="36000" rIns="36000" tIns="18000" bIns="18000">
-            <a:spAutoFit/>
-          </a:bodyPr>
-          <a:lstStyle/>
-          <a:p>
-            <a:pPr algn="ctr"/>
-            <a:r>
-              <a:rPr sz="1200" b="0" i="0">
-                <a:solidFill>
-                  <a:srgbClr val="A05656"/>
-                </a:solidFill>
-                <a:latin typeface="Noto Sans JP"/>
-              </a:rPr>
-              <a:t>水蒸発と同時に</a:t>
-            </a:r>
-          </a:p>
-          <a:p>
-            <a:pPr algn="ctr"/>
-            <a:r>
-              <a:rPr sz="1200" b="0" i="0">
-                <a:solidFill>
-                  <a:srgbClr val="A05656"/>
-                </a:solidFill>
-                <a:latin typeface="Noto Sans JP"/>
-              </a:rPr>
-              <a:t>保護機能が消失</a:t>
-            </a:r>
-          </a:p>
-        </p:txBody>
-      </p:sp>
-      <p:sp>
-        <p:nvSpPr>
-          <p:cNvPr id="31" name="Rounded Rectangle 30"/>
-          <p:cNvSpPr/>
-          <p:nvPr/>
-        </p:nvSpPr>
-        <p:spPr>
-          <a:xfrm>
-            <a:off x="9084335" y="859536"/>
-            <a:ext cx="2741599" cy="5248656"/>
+            <a:off x="8139988" y="859536"/>
+            <a:ext cx="3685946" cy="4974336"/>
           </a:xfrm>
           <a:prstGeom prst="roundRect">
             <a:avLst>
@@ -53981,14 +52280,14 @@
       </p:sp>
       <p:sp>
         <p:nvSpPr>
-          <p:cNvPr id="32" name="Rectangle 31"/>
+          <p:cNvPr id="33" name="Rectangle 32"/>
           <p:cNvSpPr/>
           <p:nvPr/>
         </p:nvSpPr>
         <p:spPr>
           <a:xfrm>
-            <a:off x="9084335" y="859536"/>
-            <a:ext cx="2741599" cy="36576"/>
+            <a:off x="8139988" y="859536"/>
+            <a:ext cx="3685946" cy="45720"/>
           </a:xfrm>
           <a:prstGeom prst="rect">
             <a:avLst/>
@@ -54025,27 +52324,93 @@
       </p:sp>
       <p:sp>
         <p:nvSpPr>
-          <p:cNvPr id="33" name="Rounded Rectangle 32"/>
+          <p:cNvPr id="34" name="TextBox 33"/>
+          <p:cNvSpPr txBox="1"/>
+          <p:nvPr/>
+        </p:nvSpPr>
+        <p:spPr>
+          <a:xfrm>
+            <a:off x="8341156" y="1133856"/>
+            <a:ext cx="3283610" cy="365760"/>
+          </a:xfrm>
+          <a:prstGeom prst="rect">
+            <a:avLst/>
+          </a:prstGeom>
+          <a:noFill/>
+        </p:spPr>
+        <p:txBody>
+          <a:bodyPr wrap="square" anchor="t" lIns="36000" rIns="36000" tIns="18000" bIns="18000">
+            <a:spAutoFit/>
+          </a:bodyPr>
+          <a:lstStyle/>
+          <a:p>
+            <a:pPr algn="l"/>
+            <a:r>
+              <a:rPr sz="1800" b="1" i="0">
+                <a:solidFill>
+                  <a:srgbClr val="FFFFFF"/>
+                </a:solidFill>
+                <a:latin typeface="Noto Sans JP"/>
+              </a:rPr>
+              <a:t>水強化ゲル（WEG）</a:t>
+            </a:r>
+          </a:p>
+        </p:txBody>
+      </p:sp>
+      <p:sp>
+        <p:nvSpPr>
+          <p:cNvPr id="35" name="TextBox 34"/>
+          <p:cNvSpPr txBox="1"/>
+          <p:nvPr/>
+        </p:nvSpPr>
+        <p:spPr>
+          <a:xfrm>
+            <a:off x="8341156" y="1536192"/>
+            <a:ext cx="3283610" cy="237744"/>
+          </a:xfrm>
+          <a:prstGeom prst="rect">
+            <a:avLst/>
+          </a:prstGeom>
+          <a:noFill/>
+        </p:spPr>
+        <p:txBody>
+          <a:bodyPr wrap="square" anchor="t" lIns="36000" rIns="36000" tIns="18000" bIns="18000">
+            <a:spAutoFit/>
+          </a:bodyPr>
+          <a:lstStyle/>
+          <a:p>
+            <a:pPr algn="l"/>
+            <a:r>
+              <a:rPr sz="1000" b="0" i="1">
+                <a:solidFill>
+                  <a:srgbClr val="A0B8D0"/>
+                </a:solidFill>
+                <a:latin typeface="Noto Sans JP"/>
+              </a:rPr>
+              <a:t>Water-enhancing gel</a:t>
+            </a:r>
+          </a:p>
+        </p:txBody>
+      </p:sp>
+      <p:sp>
+        <p:nvSpPr>
+          <p:cNvPr id="36" name="Rectangle 35"/>
           <p:cNvSpPr/>
           <p:nvPr/>
         </p:nvSpPr>
         <p:spPr>
           <a:xfrm>
-            <a:off x="9194063" y="969264"/>
-            <a:ext cx="2522143" cy="2514600"/>
-          </a:xfrm>
-          <a:prstGeom prst="roundRect">
-            <a:avLst>
-              <a:gd name="adj" fmla="val 3000"/>
-            </a:avLst>
+            <a:off x="8341156" y="1865376"/>
+            <a:ext cx="3283610" cy="13716"/>
+          </a:xfrm>
+          <a:prstGeom prst="rect">
+            <a:avLst/>
           </a:prstGeom>
           <a:solidFill>
-            <a:srgbClr val="2A3C54"/>
+            <a:srgbClr val="445870"/>
           </a:solidFill>
-          <a:ln w="8890">
-            <a:solidFill>
-              <a:srgbClr val="445E7A"/>
-            </a:solidFill>
+          <a:ln>
+            <a:noFill/>
           </a:ln>
           <a:effectLst/>
         </p:spPr>
@@ -54073,172 +52438,232 @@
       </p:sp>
       <p:sp>
         <p:nvSpPr>
-          <p:cNvPr id="34" name="TextBox 33"/>
-          <p:cNvSpPr txBox="1"/>
-          <p:nvPr/>
-        </p:nvSpPr>
-        <p:spPr>
-          <a:xfrm>
-            <a:off x="9194063" y="969264"/>
-            <a:ext cx="2522143" cy="2514600"/>
-          </a:xfrm>
-          <a:prstGeom prst="rect">
-            <a:avLst/>
-          </a:prstGeom>
-          <a:noFill/>
-        </p:spPr>
-        <p:txBody>
-          <a:bodyPr wrap="square" anchor="ctr" lIns="36000" rIns="36000" tIns="18000" bIns="18000">
-            <a:spAutoFit/>
-          </a:bodyPr>
-          <a:lstStyle/>
-          <a:p>
-            <a:pPr algn="ctr"/>
-            <a:r>
-              <a:rPr sz="1100" b="0" i="0">
+          <p:cNvPr id="37" name="TextBox 36"/>
+          <p:cNvSpPr txBox="1"/>
+          <p:nvPr/>
+        </p:nvSpPr>
+        <p:spPr>
+          <a:xfrm>
+            <a:off x="8341156" y="2011680"/>
+            <a:ext cx="3283610" cy="219456"/>
+          </a:xfrm>
+          <a:prstGeom prst="rect">
+            <a:avLst/>
+          </a:prstGeom>
+          <a:noFill/>
+        </p:spPr>
+        <p:txBody>
+          <a:bodyPr wrap="square" anchor="t" lIns="36000" rIns="36000" tIns="18000" bIns="18000">
+            <a:spAutoFit/>
+          </a:bodyPr>
+          <a:lstStyle/>
+          <a:p>
+            <a:pPr algn="l"/>
+            <a:r>
+              <a:rPr sz="1000" b="1" i="0">
                 <a:solidFill>
                   <a:srgbClr val="88A0B8"/>
                 </a:solidFill>
                 <a:latin typeface="Noto Sans JP"/>
               </a:rPr>
-              <a:t>（写真）</a:t>
-            </a:r>
-          </a:p>
-        </p:txBody>
-      </p:sp>
-      <p:sp>
-        <p:nvSpPr>
-          <p:cNvPr id="35" name="TextBox 34"/>
-          <p:cNvSpPr txBox="1"/>
-          <p:nvPr/>
-        </p:nvSpPr>
-        <p:spPr>
-          <a:xfrm>
-            <a:off x="9175775" y="3611880"/>
-            <a:ext cx="2558719" cy="310896"/>
-          </a:xfrm>
-          <a:prstGeom prst="rect">
-            <a:avLst/>
-          </a:prstGeom>
-          <a:noFill/>
-        </p:spPr>
-        <p:txBody>
-          <a:bodyPr wrap="square" anchor="t" lIns="36000" rIns="36000" tIns="18000" bIns="18000">
-            <a:spAutoFit/>
-          </a:bodyPr>
-          <a:lstStyle/>
-          <a:p>
-            <a:pPr algn="ctr"/>
-            <a:r>
-              <a:rPr sz="1400" b="1" i="0">
+              <a:t>主成分</a:t>
+            </a:r>
+          </a:p>
+        </p:txBody>
+      </p:sp>
+      <p:sp>
+        <p:nvSpPr>
+          <p:cNvPr id="38" name="TextBox 37"/>
+          <p:cNvSpPr txBox="1"/>
+          <p:nvPr/>
+        </p:nvSpPr>
+        <p:spPr>
+          <a:xfrm>
+            <a:off x="8341156" y="2231136"/>
+            <a:ext cx="3283610" cy="475488"/>
+          </a:xfrm>
+          <a:prstGeom prst="rect">
+            <a:avLst/>
+          </a:prstGeom>
+          <a:noFill/>
+        </p:spPr>
+        <p:txBody>
+          <a:bodyPr wrap="square" anchor="t" lIns="36000" rIns="36000" tIns="18000" bIns="18000">
+            <a:spAutoFit/>
+          </a:bodyPr>
+          <a:lstStyle/>
+          <a:p>
+            <a:pPr algn="l"/>
+            <a:r>
+              <a:rPr sz="1200" b="0" i="0">
+                <a:solidFill>
+                  <a:srgbClr val="D8E2EE"/>
+                </a:solidFill>
+                <a:latin typeface="Noto Sans JP"/>
+              </a:rPr>
+              <a:t>高吸水性ポリマー（環境配慮型）</a:t>
+            </a:r>
+          </a:p>
+        </p:txBody>
+      </p:sp>
+      <p:sp>
+        <p:nvSpPr>
+          <p:cNvPr id="39" name="TextBox 38"/>
+          <p:cNvSpPr txBox="1"/>
+          <p:nvPr/>
+        </p:nvSpPr>
+        <p:spPr>
+          <a:xfrm>
+            <a:off x="8341156" y="2743200"/>
+            <a:ext cx="3283610" cy="219456"/>
+          </a:xfrm>
+          <a:prstGeom prst="rect">
+            <a:avLst/>
+          </a:prstGeom>
+          <a:noFill/>
+        </p:spPr>
+        <p:txBody>
+          <a:bodyPr wrap="square" anchor="t" lIns="36000" rIns="36000" tIns="18000" bIns="18000">
+            <a:spAutoFit/>
+          </a:bodyPr>
+          <a:lstStyle/>
+          <a:p>
+            <a:pPr algn="l"/>
+            <a:r>
+              <a:rPr sz="1000" b="1" i="0">
+                <a:solidFill>
+                  <a:srgbClr val="88A0B8"/>
+                </a:solidFill>
+                <a:latin typeface="Noto Sans JP"/>
+              </a:rPr>
+              <a:t>効果・保持</a:t>
+            </a:r>
+          </a:p>
+        </p:txBody>
+      </p:sp>
+      <p:sp>
+        <p:nvSpPr>
+          <p:cNvPr id="40" name="TextBox 39"/>
+          <p:cNvSpPr txBox="1"/>
+          <p:nvPr/>
+        </p:nvSpPr>
+        <p:spPr>
+          <a:xfrm>
+            <a:off x="8341156" y="2962656"/>
+            <a:ext cx="3283610" cy="475488"/>
+          </a:xfrm>
+          <a:prstGeom prst="rect">
+            <a:avLst/>
+          </a:prstGeom>
+          <a:noFill/>
+        </p:spPr>
+        <p:txBody>
+          <a:bodyPr wrap="square" anchor="t" lIns="36000" rIns="36000" tIns="18000" bIns="18000">
+            <a:spAutoFit/>
+          </a:bodyPr>
+          <a:lstStyle/>
+          <a:p>
+            <a:pPr algn="l"/>
+            <a:r>
+              <a:rPr sz="1200" b="0" i="0">
+                <a:solidFill>
+                  <a:srgbClr val="D8E2EE"/>
+                </a:solidFill>
+                <a:latin typeface="Noto Sans JP"/>
+              </a:rPr>
+              <a:t>水分保持 30〜60分・建物保護に有効</a:t>
+            </a:r>
+          </a:p>
+        </p:txBody>
+      </p:sp>
+      <p:sp>
+        <p:nvSpPr>
+          <p:cNvPr id="41" name="TextBox 40"/>
+          <p:cNvSpPr txBox="1"/>
+          <p:nvPr/>
+        </p:nvSpPr>
+        <p:spPr>
+          <a:xfrm>
+            <a:off x="8341156" y="3493008"/>
+            <a:ext cx="3283610" cy="219456"/>
+          </a:xfrm>
+          <a:prstGeom prst="rect">
+            <a:avLst/>
+          </a:prstGeom>
+          <a:noFill/>
+        </p:spPr>
+        <p:txBody>
+          <a:bodyPr wrap="square" anchor="t" lIns="36000" rIns="36000" tIns="18000" bIns="18000">
+            <a:spAutoFit/>
+          </a:bodyPr>
+          <a:lstStyle/>
+          <a:p>
+            <a:pPr algn="l"/>
+            <a:r>
+              <a:rPr sz="1000" b="1" i="0">
+                <a:solidFill>
+                  <a:srgbClr val="D4A574"/>
+                </a:solidFill>
+                <a:latin typeface="Noto Sans JP"/>
+              </a:rPr>
+              <a:t>課題</a:t>
+            </a:r>
+          </a:p>
+        </p:txBody>
+      </p:sp>
+      <p:sp>
+        <p:nvSpPr>
+          <p:cNvPr id="42" name="TextBox 41"/>
+          <p:cNvSpPr txBox="1"/>
+          <p:nvPr/>
+        </p:nvSpPr>
+        <p:spPr>
+          <a:xfrm>
+            <a:off x="8341156" y="3712464"/>
+            <a:ext cx="3283610" cy="1956816"/>
+          </a:xfrm>
+          <a:prstGeom prst="rect">
+            <a:avLst/>
+          </a:prstGeom>
+          <a:noFill/>
+        </p:spPr>
+        <p:txBody>
+          <a:bodyPr wrap="square" anchor="t" lIns="36000" rIns="36000" tIns="18000" bIns="18000">
+            <a:spAutoFit/>
+          </a:bodyPr>
+          <a:lstStyle/>
+          <a:p>
+            <a:pPr algn="l"/>
+            <a:r>
+              <a:rPr sz="1200" b="1" i="0">
                 <a:solidFill>
                   <a:srgbClr val="FFFFFF"/>
                 </a:solidFill>
                 <a:latin typeface="Noto Sans JP"/>
               </a:rPr>
-              <a:t>WEG（本研究）</a:t>
-            </a:r>
-          </a:p>
-        </p:txBody>
-      </p:sp>
-      <p:sp>
-        <p:nvSpPr>
-          <p:cNvPr id="36" name="TextBox 35"/>
-          <p:cNvSpPr txBox="1"/>
-          <p:nvPr/>
-        </p:nvSpPr>
-        <p:spPr>
-          <a:xfrm>
-            <a:off x="9175775" y="3922776"/>
-            <a:ext cx="2558719" cy="237744"/>
-          </a:xfrm>
-          <a:prstGeom prst="rect">
-            <a:avLst/>
-          </a:prstGeom>
-          <a:noFill/>
-        </p:spPr>
-        <p:txBody>
-          <a:bodyPr wrap="square" anchor="t" lIns="36000" rIns="36000" tIns="18000" bIns="18000">
-            <a:spAutoFit/>
-          </a:bodyPr>
-          <a:lstStyle/>
-          <a:p>
-            <a:pPr algn="ctr"/>
-            <a:r>
-              <a:rPr sz="1000" b="0" i="0">
-                <a:solidFill>
-                  <a:srgbClr val="A0B8D0"/>
-                </a:solidFill>
-                <a:latin typeface="Noto Sans JP"/>
-              </a:rPr>
-              <a:t>セルロース＋シリカ</a:t>
-            </a:r>
-          </a:p>
-        </p:txBody>
-      </p:sp>
-      <p:sp>
-        <p:nvSpPr>
-          <p:cNvPr id="37" name="TextBox 36"/>
-          <p:cNvSpPr txBox="1"/>
-          <p:nvPr/>
-        </p:nvSpPr>
-        <p:spPr>
-          <a:xfrm>
-            <a:off x="9175775" y="4197096"/>
-            <a:ext cx="2558719" cy="1837944"/>
-          </a:xfrm>
-          <a:prstGeom prst="rect">
-            <a:avLst/>
-          </a:prstGeom>
-          <a:noFill/>
-        </p:spPr>
-        <p:txBody>
-          <a:bodyPr wrap="square" anchor="t" lIns="36000" rIns="36000" tIns="18000" bIns="18000">
-            <a:spAutoFit/>
-          </a:bodyPr>
-          <a:lstStyle/>
-          <a:p>
-            <a:pPr algn="ctr"/>
-            <a:r>
-              <a:rPr sz="1200" b="1" i="0">
-                <a:solidFill>
-                  <a:srgbClr val="5B8C5A"/>
-                </a:solidFill>
-                <a:latin typeface="Noto Sans JP"/>
-              </a:rPr>
-              <a:t>水蒸発後も</a:t>
-            </a:r>
-          </a:p>
-          <a:p>
-            <a:pPr algn="ctr"/>
-            <a:r>
-              <a:rPr sz="1200" b="1" i="0">
-                <a:solidFill>
-                  <a:srgbClr val="5B8C5A"/>
-                </a:solidFill>
-                <a:latin typeface="Noto Sans JP"/>
-              </a:rPr>
-              <a:t>エアロゲル層が継続保護</a:t>
-            </a:r>
-          </a:p>
-        </p:txBody>
-      </p:sp>
-      <p:sp>
-        <p:nvSpPr>
-          <p:cNvPr id="38" name="Rectangle 37"/>
+              <a:t>高温・強風で乾燥すると効果を完全に喪失</a:t>
+            </a:r>
+          </a:p>
+        </p:txBody>
+      </p:sp>
+      <p:sp>
+        <p:nvSpPr>
+          <p:cNvPr id="43" name="Rounded Rectangle 42"/>
           <p:cNvSpPr/>
           <p:nvPr/>
         </p:nvSpPr>
         <p:spPr>
           <a:xfrm>
-            <a:off x="365760" y="6236208"/>
-            <a:ext cx="11460175" cy="18288"/>
-          </a:xfrm>
-          <a:prstGeom prst="rect">
-            <a:avLst/>
+            <a:off x="365760" y="5998464"/>
+            <a:ext cx="11460175" cy="475488"/>
+          </a:xfrm>
+          <a:prstGeom prst="roundRect">
+            <a:avLst>
+              <a:gd name="adj" fmla="val 4000"/>
+            </a:avLst>
           </a:prstGeom>
           <a:solidFill>
-            <a:srgbClr val="E2E8F0"/>
+            <a:srgbClr val="F8FAFC"/>
           </a:solidFill>
           <a:ln>
             <a:noFill/>
@@ -54269,27 +52694,106 @@
       </p:sp>
       <p:sp>
         <p:nvSpPr>
-          <p:cNvPr id="39" name="TextBox 38"/>
-          <p:cNvSpPr txBox="1"/>
-          <p:nvPr/>
-        </p:nvSpPr>
-        <p:spPr>
-          <a:xfrm>
-            <a:off x="365760" y="6345936"/>
-            <a:ext cx="11460175" cy="329184"/>
-          </a:xfrm>
-          <a:prstGeom prst="rect">
-            <a:avLst/>
-          </a:prstGeom>
-          <a:noFill/>
-        </p:spPr>
-        <p:txBody>
-          <a:bodyPr wrap="square" anchor="t" lIns="36000" rIns="36000" tIns="18000" bIns="18000">
-            <a:spAutoFit/>
-          </a:bodyPr>
-          <a:lstStyle/>
-          <a:p>
-            <a:pPr algn="ctr"/>
+          <p:cNvPr id="44" name="Rectangle 43"/>
+          <p:cNvSpPr/>
+          <p:nvPr/>
+        </p:nvSpPr>
+        <p:spPr>
+          <a:xfrm>
+            <a:off x="365760" y="5998464"/>
+            <a:ext cx="54864" cy="475488"/>
+          </a:xfrm>
+          <a:prstGeom prst="rect">
+            <a:avLst/>
+          </a:prstGeom>
+          <a:solidFill>
+            <a:srgbClr val="3B5174"/>
+          </a:solidFill>
+          <a:ln>
+            <a:noFill/>
+          </a:ln>
+          <a:effectLst/>
+        </p:spPr>
+        <p:style>
+          <a:lnRef idx="1">
+            <a:schemeClr val="accent1"/>
+          </a:lnRef>
+          <a:fillRef idx="3">
+            <a:schemeClr val="accent1"/>
+          </a:fillRef>
+          <a:effectRef idx="2">
+            <a:schemeClr val="accent1"/>
+          </a:effectRef>
+          <a:fontRef idx="minor">
+            <a:schemeClr val="lt1"/>
+          </a:fontRef>
+        </p:style>
+        <p:txBody>
+          <a:bodyPr rtlCol="0" anchor="ctr"/>
+          <a:lstStyle/>
+          <a:p>
+            <a:pPr algn="ctr"/>
+          </a:p>
+        </p:txBody>
+      </p:sp>
+      <p:sp>
+        <p:nvSpPr>
+          <p:cNvPr id="45" name="TextBox 44"/>
+          <p:cNvSpPr txBox="1"/>
+          <p:nvPr/>
+        </p:nvSpPr>
+        <p:spPr>
+          <a:xfrm>
+            <a:off x="548640" y="5998464"/>
+            <a:ext cx="365760" cy="475488"/>
+          </a:xfrm>
+          <a:prstGeom prst="rect">
+            <a:avLst/>
+          </a:prstGeom>
+          <a:noFill/>
+        </p:spPr>
+        <p:txBody>
+          <a:bodyPr wrap="square" anchor="ctr" lIns="36000" rIns="36000" tIns="18000" bIns="18000">
+            <a:spAutoFit/>
+          </a:bodyPr>
+          <a:lstStyle/>
+          <a:p>
+            <a:pPr algn="l"/>
+            <a:r>
+              <a:rPr sz="1400" b="0" i="0">
+                <a:solidFill>
+                  <a:srgbClr val="3B5174"/>
+                </a:solidFill>
+                <a:latin typeface="Noto Sans JP"/>
+              </a:rPr>
+              <a:t>→</a:t>
+            </a:r>
+          </a:p>
+        </p:txBody>
+      </p:sp>
+      <p:sp>
+        <p:nvSpPr>
+          <p:cNvPr id="46" name="TextBox 45"/>
+          <p:cNvSpPr txBox="1"/>
+          <p:nvPr/>
+        </p:nvSpPr>
+        <p:spPr>
+          <a:xfrm>
+            <a:off x="960120" y="5998464"/>
+            <a:ext cx="10774375" cy="475488"/>
+          </a:xfrm>
+          <a:prstGeom prst="rect">
+            <a:avLst/>
+          </a:prstGeom>
+          <a:noFill/>
+        </p:spPr>
+        <p:txBody>
+          <a:bodyPr wrap="square" anchor="ctr" lIns="36000" rIns="36000" tIns="18000" bIns="18000">
+            <a:spAutoFit/>
+          </a:bodyPr>
+          <a:lstStyle/>
+          <a:p>
+            <a:pPr algn="l"/>
             <a:r>
               <a:rPr sz="1300" b="1" i="0">
                 <a:solidFill>
@@ -54297,7 +52801,7 @@
                 </a:solidFill>
                 <a:latin typeface="Noto Sans JP"/>
               </a:rPr>
-              <a:t>課題：既存WEGは「水のキャリア」止まり ─ 水分喪失と同時に保護機能が失われる</a:t>
+              <a:t>本研究は、環境配慮型WEGが持つ「乾燥すると無効になる」致命的な弱点を克服する</a:t>
             </a:r>
           </a:p>
         </p:txBody>
@@ -54640,7 +53144,7 @@
                 </a:solidFill>
                 <a:latin typeface="Noto Sans JP"/>
               </a:rPr>
-              <a:t>7 / 38</a:t>
+              <a:t>7 / 37</a:t>
             </a:r>
           </a:p>
         </p:txBody>
@@ -54903,7 +53407,7 @@
                 </a:solidFill>
                 <a:latin typeface="Noto Sans JP"/>
               </a:rPr>
-              <a:t>水分依存からの脱却</a:t>
+              <a:t>材料構成</a:t>
             </a:r>
           </a:p>
         </p:txBody>
@@ -54917,6 +53421,76 @@
         <p:spPr>
           <a:xfrm>
             <a:off x="786384" y="2706624"/>
+            <a:ext cx="3824514" cy="365760"/>
+          </a:xfrm>
+          <a:prstGeom prst="rect">
+            <a:avLst/>
+          </a:prstGeom>
+          <a:noFill/>
+        </p:spPr>
+        <p:txBody>
+          <a:bodyPr wrap="square" anchor="t" lIns="36000" rIns="36000" tIns="18000" bIns="18000">
+            <a:spAutoFit/>
+          </a:bodyPr>
+          <a:lstStyle/>
+          <a:p>
+            <a:pPr algn="l"/>
+            <a:r>
+              <a:rPr sz="1100" b="0" i="0">
+                <a:solidFill>
+                  <a:srgbClr val="64748B"/>
+                </a:solidFill>
+                <a:latin typeface="Noto Sans JP"/>
+              </a:rPr>
+              <a:t>セルロース系バイオポリマー × コロイダルシリカの物理架橋</a:t>
+            </a:r>
+          </a:p>
+        </p:txBody>
+      </p:sp>
+      <p:sp>
+        <p:nvSpPr>
+          <p:cNvPr id="18" name="TextBox 17"/>
+          <p:cNvSpPr txBox="1"/>
+          <p:nvPr/>
+        </p:nvSpPr>
+        <p:spPr>
+          <a:xfrm>
+            <a:off x="365760" y="3090672"/>
+            <a:ext cx="402336" cy="274320"/>
+          </a:xfrm>
+          <a:prstGeom prst="rect">
+            <a:avLst/>
+          </a:prstGeom>
+          <a:noFill/>
+        </p:spPr>
+        <p:txBody>
+          <a:bodyPr wrap="square" anchor="t" lIns="36000" rIns="36000" tIns="18000" bIns="18000">
+            <a:spAutoFit/>
+          </a:bodyPr>
+          <a:lstStyle/>
+          <a:p>
+            <a:pPr algn="l"/>
+            <a:r>
+              <a:rPr sz="1100" b="1" i="0">
+                <a:solidFill>
+                  <a:srgbClr val="3B5174"/>
+                </a:solidFill>
+                <a:latin typeface="Noto Sans JP"/>
+              </a:rPr>
+              <a:t>02</a:t>
+            </a:r>
+          </a:p>
+        </p:txBody>
+      </p:sp>
+      <p:sp>
+        <p:nvSpPr>
+          <p:cNvPr id="19" name="TextBox 18"/>
+          <p:cNvSpPr txBox="1"/>
+          <p:nvPr/>
+        </p:nvSpPr>
+        <p:spPr>
+          <a:xfrm>
+            <a:off x="786384" y="3090672"/>
             <a:ext cx="3824514" cy="256032"/>
           </a:xfrm>
           <a:prstGeom prst="rect">
@@ -54932,26 +53506,61 @@
           <a:p>
             <a:pPr algn="l"/>
             <a:r>
+              <a:rPr sz="1300" b="1" i="0">
+                <a:solidFill>
+                  <a:srgbClr val="1E293B"/>
+                </a:solidFill>
+                <a:latin typeface="Noto Sans JP"/>
+              </a:rPr>
+              <a:t>エアロゲル化</a:t>
+            </a:r>
+          </a:p>
+        </p:txBody>
+      </p:sp>
+      <p:sp>
+        <p:nvSpPr>
+          <p:cNvPr id="20" name="TextBox 19"/>
+          <p:cNvSpPr txBox="1"/>
+          <p:nvPr/>
+        </p:nvSpPr>
+        <p:spPr>
+          <a:xfrm>
+            <a:off x="786384" y="3346704"/>
+            <a:ext cx="3824514" cy="365760"/>
+          </a:xfrm>
+          <a:prstGeom prst="rect">
+            <a:avLst/>
+          </a:prstGeom>
+          <a:noFill/>
+        </p:spPr>
+        <p:txBody>
+          <a:bodyPr wrap="square" anchor="t" lIns="36000" rIns="36000" tIns="18000" bIns="18000">
+            <a:spAutoFit/>
+          </a:bodyPr>
+          <a:lstStyle/>
+          <a:p>
+            <a:pPr algn="l"/>
+            <a:r>
               <a:rPr sz="1100" b="0" i="0">
                 <a:solidFill>
                   <a:srgbClr val="64748B"/>
                 </a:solidFill>
                 <a:latin typeface="Noto Sans JP"/>
               </a:rPr>
-              <a:t>熱で活性化する固体保護層を形成</a:t>
-            </a:r>
-          </a:p>
-        </p:txBody>
-      </p:sp>
-      <p:sp>
-        <p:nvSpPr>
-          <p:cNvPr id="18" name="TextBox 17"/>
-          <p:cNvSpPr txBox="1"/>
-          <p:nvPr/>
-        </p:nvSpPr>
-        <p:spPr>
-          <a:xfrm>
-            <a:off x="365760" y="3136392"/>
+              <a:t>炎で水分が失われると多孔質シリカ網がその場形成</a:t>
+            </a:r>
+          </a:p>
+        </p:txBody>
+      </p:sp>
+      <p:sp>
+        <p:nvSpPr>
+          <p:cNvPr id="21" name="TextBox 20"/>
+          <p:cNvSpPr txBox="1"/>
+          <p:nvPr/>
+        </p:nvSpPr>
+        <p:spPr>
+          <a:xfrm>
+            <a:off x="365760" y="3730752"/>
             <a:ext cx="402336" cy="274320"/>
           </a:xfrm>
           <a:prstGeom prst="rect">
@@ -54973,20 +53582,20 @@
                 </a:solidFill>
                 <a:latin typeface="Noto Sans JP"/>
               </a:rPr>
-              <a:t>02</a:t>
-            </a:r>
-          </a:p>
-        </p:txBody>
-      </p:sp>
-      <p:sp>
-        <p:nvSpPr>
-          <p:cNvPr id="19" name="TextBox 18"/>
-          <p:cNvSpPr txBox="1"/>
-          <p:nvPr/>
-        </p:nvSpPr>
-        <p:spPr>
-          <a:xfrm>
-            <a:off x="786384" y="3136392"/>
+              <a:t>03</a:t>
+            </a:r>
+          </a:p>
+        </p:txBody>
+      </p:sp>
+      <p:sp>
+        <p:nvSpPr>
+          <p:cNvPr id="22" name="TextBox 21"/>
+          <p:cNvSpPr txBox="1"/>
+          <p:nvPr/>
+        </p:nvSpPr>
+        <p:spPr>
+          <a:xfrm>
+            <a:off x="786384" y="3730752"/>
             <a:ext cx="3824514" cy="256032"/>
           </a:xfrm>
           <a:prstGeom prst="rect">
@@ -55008,20 +53617,90 @@
                 </a:solidFill>
                 <a:latin typeface="Noto Sans JP"/>
               </a:rPr>
-              <a:t>持続可能な素材</a:t>
-            </a:r>
-          </a:p>
-        </p:txBody>
-      </p:sp>
-      <p:sp>
-        <p:nvSpPr>
-          <p:cNvPr id="20" name="TextBox 19"/>
-          <p:cNvSpPr txBox="1"/>
-          <p:nvPr/>
-        </p:nvSpPr>
-        <p:spPr>
-          <a:xfrm>
-            <a:off x="786384" y="3392424"/>
+              <a:t>持続的防護</a:t>
+            </a:r>
+          </a:p>
+        </p:txBody>
+      </p:sp>
+      <p:sp>
+        <p:nvSpPr>
+          <p:cNvPr id="23" name="TextBox 22"/>
+          <p:cNvSpPr txBox="1"/>
+          <p:nvPr/>
+        </p:nvSpPr>
+        <p:spPr>
+          <a:xfrm>
+            <a:off x="786384" y="3986784"/>
+            <a:ext cx="3824514" cy="365760"/>
+          </a:xfrm>
+          <a:prstGeom prst="rect">
+            <a:avLst/>
+          </a:prstGeom>
+          <a:noFill/>
+        </p:spPr>
+        <p:txBody>
+          <a:bodyPr wrap="square" anchor="t" lIns="36000" rIns="36000" tIns="18000" bIns="18000">
+            <a:spAutoFit/>
+          </a:bodyPr>
+          <a:lstStyle/>
+          <a:p>
+            <a:pPr algn="l"/>
+            <a:r>
+              <a:rPr sz="1100" b="0" i="0">
+                <a:solidFill>
+                  <a:srgbClr val="64748B"/>
+                </a:solidFill>
+                <a:latin typeface="Noto Sans JP"/>
+              </a:rPr>
+              <a:t>水分が枯渇した後も断熱バリアが発火を防ぐ</a:t>
+            </a:r>
+          </a:p>
+        </p:txBody>
+      </p:sp>
+      <p:sp>
+        <p:nvSpPr>
+          <p:cNvPr id="24" name="TextBox 23"/>
+          <p:cNvSpPr txBox="1"/>
+          <p:nvPr/>
+        </p:nvSpPr>
+        <p:spPr>
+          <a:xfrm>
+            <a:off x="365760" y="4370832"/>
+            <a:ext cx="402336" cy="274320"/>
+          </a:xfrm>
+          <a:prstGeom prst="rect">
+            <a:avLst/>
+          </a:prstGeom>
+          <a:noFill/>
+        </p:spPr>
+        <p:txBody>
+          <a:bodyPr wrap="square" anchor="t" lIns="36000" rIns="36000" tIns="18000" bIns="18000">
+            <a:spAutoFit/>
+          </a:bodyPr>
+          <a:lstStyle/>
+          <a:p>
+            <a:pPr algn="l"/>
+            <a:r>
+              <a:rPr sz="1100" b="1" i="0">
+                <a:solidFill>
+                  <a:srgbClr val="3B5174"/>
+                </a:solidFill>
+                <a:latin typeface="Noto Sans JP"/>
+              </a:rPr>
+              <a:t>04</a:t>
+            </a:r>
+          </a:p>
+        </p:txBody>
+      </p:sp>
+      <p:sp>
+        <p:nvSpPr>
+          <p:cNvPr id="25" name="TextBox 24"/>
+          <p:cNvSpPr txBox="1"/>
+          <p:nvPr/>
+        </p:nvSpPr>
+        <p:spPr>
+          <a:xfrm>
+            <a:off x="786384" y="4370832"/>
             <a:ext cx="3824514" cy="256032"/>
           </a:xfrm>
           <a:prstGeom prst="rect">
@@ -55037,125 +53716,55 @@
           <a:p>
             <a:pPr algn="l"/>
             <a:r>
+              <a:rPr sz="1300" b="1" i="0">
+                <a:solidFill>
+                  <a:srgbClr val="1E293B"/>
+                </a:solidFill>
+                <a:latin typeface="Noto Sans JP"/>
+              </a:rPr>
+              <a:t>応用性・拡張性</a:t>
+            </a:r>
+          </a:p>
+        </p:txBody>
+      </p:sp>
+      <p:sp>
+        <p:nvSpPr>
+          <p:cNvPr id="26" name="TextBox 25"/>
+          <p:cNvSpPr txBox="1"/>
+          <p:nvPr/>
+        </p:nvSpPr>
+        <p:spPr>
+          <a:xfrm>
+            <a:off x="786384" y="4626864"/>
+            <a:ext cx="3824514" cy="365760"/>
+          </a:xfrm>
+          <a:prstGeom prst="rect">
+            <a:avLst/>
+          </a:prstGeom>
+          <a:noFill/>
+        </p:spPr>
+        <p:txBody>
+          <a:bodyPr wrap="square" anchor="t" lIns="36000" rIns="36000" tIns="18000" bIns="18000">
+            <a:spAutoFit/>
+          </a:bodyPr>
+          <a:lstStyle/>
+          <a:p>
+            <a:pPr algn="l"/>
+            <a:r>
               <a:rPr sz="1100" b="0" i="0">
                 <a:solidFill>
                   <a:srgbClr val="64748B"/>
                 </a:solidFill>
                 <a:latin typeface="Noto Sans JP"/>
               </a:rPr>
-              <a:t>天然由来・食品添加物グレード素材</a:t>
-            </a:r>
-          </a:p>
-        </p:txBody>
-      </p:sp>
-      <p:sp>
-        <p:nvSpPr>
-          <p:cNvPr id="21" name="TextBox 20"/>
-          <p:cNvSpPr txBox="1"/>
-          <p:nvPr/>
-        </p:nvSpPr>
-        <p:spPr>
-          <a:xfrm>
-            <a:off x="365760" y="3822192"/>
-            <a:ext cx="402336" cy="274320"/>
-          </a:xfrm>
-          <a:prstGeom prst="rect">
-            <a:avLst/>
-          </a:prstGeom>
-          <a:noFill/>
-        </p:spPr>
-        <p:txBody>
-          <a:bodyPr wrap="square" anchor="t" lIns="36000" rIns="36000" tIns="18000" bIns="18000">
-            <a:spAutoFit/>
-          </a:bodyPr>
-          <a:lstStyle/>
-          <a:p>
-            <a:pPr algn="l"/>
-            <a:r>
-              <a:rPr sz="1100" b="1" i="0">
-                <a:solidFill>
-                  <a:srgbClr val="3B5174"/>
-                </a:solidFill>
-                <a:latin typeface="Noto Sans JP"/>
-              </a:rPr>
-              <a:t>03</a:t>
-            </a:r>
-          </a:p>
-        </p:txBody>
-      </p:sp>
-      <p:sp>
-        <p:nvSpPr>
-          <p:cNvPr id="22" name="TextBox 21"/>
-          <p:cNvSpPr txBox="1"/>
-          <p:nvPr/>
-        </p:nvSpPr>
-        <p:spPr>
-          <a:xfrm>
-            <a:off x="786384" y="3822192"/>
-            <a:ext cx="3824514" cy="256032"/>
-          </a:xfrm>
-          <a:prstGeom prst="rect">
-            <a:avLst/>
-          </a:prstGeom>
-          <a:noFill/>
-        </p:spPr>
-        <p:txBody>
-          <a:bodyPr wrap="square" anchor="t" lIns="36000" rIns="36000" tIns="18000" bIns="18000">
-            <a:spAutoFit/>
-          </a:bodyPr>
-          <a:lstStyle/>
-          <a:p>
-            <a:pPr algn="l"/>
-            <a:r>
-              <a:rPr sz="1300" b="1" i="0">
-                <a:solidFill>
-                  <a:srgbClr val="1E293B"/>
-                </a:solidFill>
-                <a:latin typeface="Noto Sans JP"/>
-              </a:rPr>
-              <a:t>既存インフラと互換</a:t>
-            </a:r>
-          </a:p>
-        </p:txBody>
-      </p:sp>
-      <p:sp>
-        <p:nvSpPr>
-          <p:cNvPr id="23" name="TextBox 22"/>
-          <p:cNvSpPr txBox="1"/>
-          <p:nvPr/>
-        </p:nvSpPr>
-        <p:spPr>
-          <a:xfrm>
-            <a:off x="786384" y="4078224"/>
-            <a:ext cx="3824514" cy="256032"/>
-          </a:xfrm>
-          <a:prstGeom prst="rect">
-            <a:avLst/>
-          </a:prstGeom>
-          <a:noFill/>
-        </p:spPr>
-        <p:txBody>
-          <a:bodyPr wrap="square" anchor="t" lIns="36000" rIns="36000" tIns="18000" bIns="18000">
-            <a:spAutoFit/>
-          </a:bodyPr>
-          <a:lstStyle/>
-          <a:p>
-            <a:pPr algn="l"/>
-            <a:r>
-              <a:rPr sz="1100" b="0" i="0">
-                <a:solidFill>
-                  <a:srgbClr val="64748B"/>
-                </a:solidFill>
-                <a:latin typeface="Noto Sans JP"/>
-              </a:rPr>
-              <a:t>噴霧可能な流体として散布可能</a:t>
-            </a:r>
-          </a:p>
-        </p:txBody>
-      </p:sp>
-      <p:sp>
-        <p:nvSpPr>
-          <p:cNvPr id="24" name="Rounded Rectangle 23"/>
+              <a:t>噴霧・ポンプ送液に適した流動特性／大規模製造も可能</a:t>
+            </a:r>
+          </a:p>
+        </p:txBody>
+      </p:sp>
+      <p:sp>
+        <p:nvSpPr>
+          <p:cNvPr id="27" name="Rounded Rectangle 26"/>
           <p:cNvSpPr/>
           <p:nvPr/>
         </p:nvSpPr>
@@ -55203,7 +53812,7 @@
       </p:sp>
       <p:sp>
         <p:nvSpPr>
-          <p:cNvPr id="25" name="Rectangle 24"/>
+          <p:cNvPr id="28" name="Rectangle 27"/>
           <p:cNvSpPr/>
           <p:nvPr/>
         </p:nvSpPr>
@@ -55247,7 +53856,7 @@
       </p:sp>
       <p:sp>
         <p:nvSpPr>
-          <p:cNvPr id="26" name="TextBox 25"/>
+          <p:cNvPr id="29" name="TextBox 28"/>
           <p:cNvSpPr txBox="1"/>
           <p:nvPr/>
         </p:nvSpPr>
@@ -55282,7 +53891,7 @@
       </p:sp>
       <p:sp>
         <p:nvSpPr>
-          <p:cNvPr id="27" name="TextBox 26"/>
+          <p:cNvPr id="30" name="TextBox 29"/>
           <p:cNvSpPr txBox="1"/>
           <p:nvPr/>
         </p:nvSpPr>
@@ -55317,7 +53926,7 @@
       </p:sp>
       <p:sp>
         <p:nvSpPr>
-          <p:cNvPr id="28" name="TextBox 27"/>
+          <p:cNvPr id="31" name="TextBox 30"/>
           <p:cNvSpPr txBox="1"/>
           <p:nvPr/>
         </p:nvSpPr>
@@ -55352,7 +53961,7 @@
       </p:sp>
       <p:sp>
         <p:nvSpPr>
-          <p:cNvPr id="29" name="Rounded Rectangle 28"/>
+          <p:cNvPr id="32" name="Rounded Rectangle 31"/>
           <p:cNvSpPr/>
           <p:nvPr/>
         </p:nvSpPr>
@@ -55400,7 +54009,7 @@
       </p:sp>
       <p:sp>
         <p:nvSpPr>
-          <p:cNvPr id="30" name="Rectangle 29"/>
+          <p:cNvPr id="33" name="Rectangle 32"/>
           <p:cNvSpPr/>
           <p:nvPr/>
         </p:nvSpPr>
@@ -55444,7 +54053,7 @@
       </p:sp>
       <p:sp>
         <p:nvSpPr>
-          <p:cNvPr id="31" name="TextBox 30"/>
+          <p:cNvPr id="34" name="TextBox 33"/>
           <p:cNvSpPr txBox="1"/>
           <p:nvPr/>
         </p:nvSpPr>
@@ -55479,7 +54088,7 @@
       </p:sp>
       <p:sp>
         <p:nvSpPr>
-          <p:cNvPr id="32" name="TextBox 31"/>
+          <p:cNvPr id="35" name="TextBox 34"/>
           <p:cNvSpPr txBox="1"/>
           <p:nvPr/>
         </p:nvSpPr>
@@ -55514,7 +54123,7 @@
       </p:sp>
       <p:sp>
         <p:nvSpPr>
-          <p:cNvPr id="33" name="TextBox 32"/>
+          <p:cNvPr id="36" name="TextBox 35"/>
           <p:cNvSpPr txBox="1"/>
           <p:nvPr/>
         </p:nvSpPr>
@@ -55549,7 +54158,7 @@
       </p:sp>
       <p:sp>
         <p:nvSpPr>
-          <p:cNvPr id="34" name="TextBox 33"/>
+          <p:cNvPr id="37" name="TextBox 36"/>
           <p:cNvSpPr txBox="1"/>
           <p:nvPr/>
         </p:nvSpPr>
@@ -55584,7 +54193,7 @@
       </p:sp>
       <p:sp>
         <p:nvSpPr>
-          <p:cNvPr id="35" name="Rounded Rectangle 34"/>
+          <p:cNvPr id="38" name="Rounded Rectangle 37"/>
           <p:cNvSpPr/>
           <p:nvPr/>
         </p:nvSpPr>
@@ -55632,7 +54241,7 @@
       </p:sp>
       <p:sp>
         <p:nvSpPr>
-          <p:cNvPr id="36" name="Rectangle 35"/>
+          <p:cNvPr id="39" name="Rectangle 38"/>
           <p:cNvSpPr/>
           <p:nvPr/>
         </p:nvSpPr>
@@ -55676,7 +54285,7 @@
       </p:sp>
       <p:sp>
         <p:nvSpPr>
-          <p:cNvPr id="37" name="TextBox 36"/>
+          <p:cNvPr id="40" name="TextBox 39"/>
           <p:cNvSpPr txBox="1"/>
           <p:nvPr/>
         </p:nvSpPr>
@@ -55711,7 +54320,7 @@
       </p:sp>
       <p:sp>
         <p:nvSpPr>
-          <p:cNvPr id="38" name="TextBox 37"/>
+          <p:cNvPr id="41" name="TextBox 40"/>
           <p:cNvSpPr txBox="1"/>
           <p:nvPr/>
         </p:nvSpPr>
@@ -55746,7 +54355,7 @@
       </p:sp>
       <p:sp>
         <p:nvSpPr>
-          <p:cNvPr id="39" name="TextBox 38"/>
+          <p:cNvPr id="42" name="TextBox 41"/>
           <p:cNvSpPr txBox="1"/>
           <p:nvPr/>
         </p:nvSpPr>
@@ -55781,7 +54390,7 @@
       </p:sp>
       <p:sp>
         <p:nvSpPr>
-          <p:cNvPr id="40" name="TextBox 39"/>
+          <p:cNvPr id="43" name="TextBox 42"/>
           <p:cNvSpPr txBox="1"/>
           <p:nvPr/>
         </p:nvSpPr>
@@ -56422,7 +55031,7 @@
                 </a:solidFill>
                 <a:latin typeface="Noto Sans JP"/>
               </a:rPr>
-              <a:t>8 / 38</a:t>
+              <a:t>8 / 37</a:t>
             </a:r>
           </a:p>
         </p:txBody>
@@ -56765,7 +55374,7 @@
                 </a:solidFill>
                 <a:latin typeface="Noto Sans JP"/>
               </a:rPr>
-              <a:t>9 / 38</a:t>
+              <a:t>9 / 37</a:t>
             </a:r>
           </a:p>
         </p:txBody>

--- a/slides.pptx
+++ b/slides.pptx
@@ -3564,7 +3564,7 @@
                   <a:srgbClr val="FFFFFF"/>
                 </a:solidFill>
               </a:rPr>
-              <a:t>メチルセルロース(MC)の熱ゲル化：火炎保護の鍵となる特性</a:t>
+              <a:t>メチルセルロース(MC)の熱ゲル化：一般物性と本研究での位置づけ</a:t>
             </a:r>
           </a:p>
         </p:txBody>
@@ -3796,7 +3796,7 @@
                   <a:srgbClr val="475569"/>
                 </a:solidFill>
               </a:rPr>
-              <a:t>• 常温では液体 → 火炎接触で即座にゲル → 流れ落ちを防止</a:t>
+              <a:t>• ※上記はMC単体水溶液の一般物性。本配合は常温でCSPと降伏応力ゲルを形成済みで、垂れ落ち防止は降伏応力による（LCSTゲル化ではない）</a:t>
             </a:r>
           </a:p>
         </p:txBody>
@@ -3938,7 +3938,7 @@
                   <a:srgbClr val="CCDDEE"/>
                 </a:solidFill>
               </a:rPr>
-              <a:t>MCゲル化</a:t>
+              <a:t>MC熱ゲル化</a:t>
             </a:r>
           </a:p>
           <a:p>
@@ -3949,7 +3949,7 @@
                   <a:srgbClr val="CCDDEE"/>
                 </a:solidFill>
               </a:rPr>
-              <a:t>構造を固定</a:t>
+              <a:t>一般物性・主機構ではない</a:t>
             </a:r>
           </a:p>
           <a:p>
@@ -4091,7 +4091,7 @@
                   <a:srgbClr val="1E293B"/>
                 </a:solidFill>
               </a:rPr>
-              <a:t>火炎接触初期にMCがゲル化 → CSPを固定したまま発泡構造を維持</a:t>
+              <a:t>防火の主機構は 保水（蒸発冷却）＋加熱によるCSP焼結→シリカエアロゲル形成 。MCのLCST(~55°C)は遥か低温で主因ではなく、論文ではMCを除いた単一ポリマーMHECでも同等の防火性（＝MCの熱応答性は必須ではない）</a:t>
             </a:r>
           </a:p>
         </p:txBody>

--- a/slides.pptx
+++ b/slides.pptx
@@ -3844,7 +3844,7 @@
                 </a:solidFill>
                 <a:latin typeface="Noto Sans JP"/>
               </a:rPr>
-              <a:t>熱活性化による自己防護メカニズム</a:t>
+              <a:t>噴霧・付着・耐火のメカニズム</a:t>
             </a:r>
           </a:p>
         </p:txBody>
@@ -3958,7 +3958,7 @@
                 </a:solidFill>
                 <a:latin typeface="Noto Sans JP"/>
               </a:rPr>
-              <a:t>熱活性化による</a:t>
+              <a:t>せん断変形と</a:t>
             </a:r>
           </a:p>
         </p:txBody>
@@ -3993,7 +3993,7 @@
                 </a:solidFill>
                 <a:latin typeface="Noto Sans JP"/>
               </a:rPr>
-              <a:t>自己防護メカニズム</a:t>
+              <a:t>自己修復性が鍵</a:t>
             </a:r>
           </a:p>
         </p:txBody>
@@ -4072,7 +4072,7 @@
                 </a:solidFill>
                 <a:latin typeface="Noto Sans JP"/>
               </a:rPr>
-              <a:t>本研究が開発したバイオミメティック・ヒドロゲルは、炎にさらされることで「シリカエアロゲル」へと変貌します。</a:t>
+              <a:t>噴霧時のせん断ひずみでゾル様に変化し、壁に付着すると自己修復性によって即座にゲル構造を回復します。</a:t>
             </a:r>
           </a:p>
         </p:txBody>
@@ -4107,7 +4107,7 @@
                 </a:solidFill>
                 <a:latin typeface="Noto Sans JP"/>
               </a:rPr>
-              <a:t>水分が枯渇した後も、強固な断熱壁として機能し、基材の発火を長時間防ぎます。</a:t>
+              <a:t>炎にさらされると「シリカエアロゲル」へと変貌し、水分が枯渇した後も断熱層として基材を保護します。</a:t>
             </a:r>
           </a:p>
         </p:txBody>
@@ -4121,7 +4121,7 @@
         <p:spPr>
           <a:xfrm>
             <a:off x="365760" y="3785616"/>
-            <a:ext cx="1497744" cy="640080"/>
+            <a:ext cx="1114164" cy="640080"/>
           </a:xfrm>
           <a:prstGeom prst="roundRect">
             <a:avLst>
@@ -4169,7 +4169,7 @@
         <p:spPr>
           <a:xfrm>
             <a:off x="365760" y="3785616"/>
-            <a:ext cx="1497744" cy="36576"/>
+            <a:ext cx="1114164" cy="36576"/>
           </a:xfrm>
           <a:prstGeom prst="rect">
             <a:avLst/>
@@ -4213,7 +4213,7 @@
         <p:spPr>
           <a:xfrm>
             <a:off x="365760" y="3785616"/>
-            <a:ext cx="1497744" cy="640080"/>
+            <a:ext cx="1114164" cy="640080"/>
           </a:xfrm>
           <a:prstGeom prst="rect">
             <a:avLst/>
@@ -4228,25 +4228,25 @@
           <a:p>
             <a:pPr algn="ctr"/>
             <a:r>
-              <a:rPr sz="1000" b="1" i="0">
+              <a:rPr sz="900" b="1" i="0">
                 <a:solidFill>
                   <a:srgbClr val="1E293B"/>
                 </a:solidFill>
                 <a:latin typeface="Noto Sans JP"/>
               </a:rPr>
-              <a:t>ゾル</a:t>
-            </a:r>
-          </a:p>
-          <a:p>
-            <a:pPr algn="ctr"/>
-            <a:r>
-              <a:rPr sz="1000" b="1" i="0">
+              <a:t>ゲル</a:t>
+            </a:r>
+          </a:p>
+          <a:p>
+            <a:pPr algn="ctr"/>
+            <a:r>
+              <a:rPr sz="900" b="1" i="0">
                 <a:solidFill>
                   <a:srgbClr val="1E293B"/>
                 </a:solidFill>
                 <a:latin typeface="Noto Sans JP"/>
               </a:rPr>
-              <a:t>（散布）</a:t>
+              <a:t>（静止）</a:t>
             </a:r>
           </a:p>
         </p:txBody>
@@ -4259,8 +4259,8 @@
         </p:nvSpPr>
         <p:spPr>
           <a:xfrm>
-            <a:off x="1872648" y="3785616"/>
-            <a:ext cx="91440" cy="640080"/>
+            <a:off x="1489068" y="3785616"/>
+            <a:ext cx="73152" cy="640080"/>
           </a:xfrm>
           <a:prstGeom prst="rect">
             <a:avLst/>
@@ -4275,7 +4275,7 @@
           <a:p>
             <a:pPr algn="ctr"/>
             <a:r>
-              <a:rPr sz="1100" b="0" i="0">
+              <a:rPr sz="1000" b="0" i="0">
                 <a:solidFill>
                   <a:srgbClr val="64748B"/>
                 </a:solidFill>
@@ -4294,8 +4294,8 @@
         </p:nvSpPr>
         <p:spPr>
           <a:xfrm>
-            <a:off x="1954944" y="3785616"/>
-            <a:ext cx="1497744" cy="640080"/>
+            <a:off x="1553076" y="3785616"/>
+            <a:ext cx="1114164" cy="640080"/>
           </a:xfrm>
           <a:prstGeom prst="roundRect">
             <a:avLst>
@@ -4342,8 +4342,8 @@
         </p:nvSpPr>
         <p:spPr>
           <a:xfrm>
-            <a:off x="1954944" y="3785616"/>
-            <a:ext cx="1497744" cy="36576"/>
+            <a:off x="1553076" y="3785616"/>
+            <a:ext cx="1114164" cy="36576"/>
           </a:xfrm>
           <a:prstGeom prst="rect">
             <a:avLst/>
@@ -4386,8 +4386,8 @@
         </p:nvSpPr>
         <p:spPr>
           <a:xfrm>
-            <a:off x="1954944" y="3785616"/>
-            <a:ext cx="1497744" cy="640080"/>
+            <a:off x="1553076" y="3785616"/>
+            <a:ext cx="1114164" cy="640080"/>
           </a:xfrm>
           <a:prstGeom prst="rect">
             <a:avLst/>
@@ -4402,25 +4402,25 @@
           <a:p>
             <a:pPr algn="ctr"/>
             <a:r>
-              <a:rPr sz="1000" b="1" i="0">
+              <a:rPr sz="900" b="1" i="0">
                 <a:solidFill>
                   <a:srgbClr val="1E293B"/>
                 </a:solidFill>
                 <a:latin typeface="Noto Sans JP"/>
               </a:rPr>
-              <a:t>熱ゲル</a:t>
-            </a:r>
-          </a:p>
-          <a:p>
-            <a:pPr algn="ctr"/>
-            <a:r>
-              <a:rPr sz="1000" b="1" i="0">
+              <a:t>ゾル様</a:t>
+            </a:r>
+          </a:p>
+          <a:p>
+            <a:pPr algn="ctr"/>
+            <a:r>
+              <a:rPr sz="900" b="1" i="0">
                 <a:solidFill>
                   <a:srgbClr val="1E293B"/>
                 </a:solidFill>
                 <a:latin typeface="Noto Sans JP"/>
               </a:rPr>
-              <a:t>（接触）</a:t>
+              <a:t>（噴霧）</a:t>
             </a:r>
           </a:p>
         </p:txBody>
@@ -4433,8 +4433,8 @@
         </p:nvSpPr>
         <p:spPr>
           <a:xfrm>
-            <a:off x="3461833" y="3785616"/>
-            <a:ext cx="91440" cy="640080"/>
+            <a:off x="2676384" y="3785616"/>
+            <a:ext cx="73152" cy="640080"/>
           </a:xfrm>
           <a:prstGeom prst="rect">
             <a:avLst/>
@@ -4449,7 +4449,7 @@
           <a:p>
             <a:pPr algn="ctr"/>
             <a:r>
-              <a:rPr sz="1100" b="0" i="0">
+              <a:rPr sz="1000" b="0" i="0">
                 <a:solidFill>
                   <a:srgbClr val="64748B"/>
                 </a:solidFill>
@@ -4468,8 +4468,182 @@
         </p:nvSpPr>
         <p:spPr>
           <a:xfrm>
-            <a:off x="3544129" y="3785616"/>
-            <a:ext cx="1497744" cy="640080"/>
+            <a:off x="2740392" y="3785616"/>
+            <a:ext cx="1114164" cy="640080"/>
+          </a:xfrm>
+          <a:prstGeom prst="roundRect">
+            <a:avLst>
+              <a:gd name="adj" fmla="val 3000"/>
+            </a:avLst>
+          </a:prstGeom>
+          <a:solidFill>
+            <a:srgbClr val="F1F5F9"/>
+          </a:solidFill>
+          <a:ln w="8890">
+            <a:solidFill>
+              <a:srgbClr val="5B8C5A"/>
+            </a:solidFill>
+          </a:ln>
+          <a:effectLst/>
+        </p:spPr>
+        <p:style>
+          <a:lnRef idx="1">
+            <a:schemeClr val="accent1"/>
+          </a:lnRef>
+          <a:fillRef idx="3">
+            <a:schemeClr val="accent1"/>
+          </a:fillRef>
+          <a:effectRef idx="2">
+            <a:schemeClr val="accent1"/>
+          </a:effectRef>
+          <a:fontRef idx="minor">
+            <a:schemeClr val="lt1"/>
+          </a:fontRef>
+        </p:style>
+        <p:txBody>
+          <a:bodyPr rtlCol="0" anchor="ctr"/>
+          <a:lstStyle/>
+          <a:p>
+            <a:pPr algn="ctr"/>
+          </a:p>
+        </p:txBody>
+      </p:sp>
+      <p:sp>
+        <p:nvSpPr>
+          <p:cNvPr id="24" name="Rectangle 23"/>
+          <p:cNvSpPr/>
+          <p:nvPr/>
+        </p:nvSpPr>
+        <p:spPr>
+          <a:xfrm>
+            <a:off x="2740392" y="3785616"/>
+            <a:ext cx="1114164" cy="36576"/>
+          </a:xfrm>
+          <a:prstGeom prst="rect">
+            <a:avLst/>
+          </a:prstGeom>
+          <a:solidFill>
+            <a:srgbClr val="5B8C5A"/>
+          </a:solidFill>
+          <a:ln>
+            <a:noFill/>
+          </a:ln>
+          <a:effectLst/>
+        </p:spPr>
+        <p:style>
+          <a:lnRef idx="1">
+            <a:schemeClr val="accent1"/>
+          </a:lnRef>
+          <a:fillRef idx="3">
+            <a:schemeClr val="accent1"/>
+          </a:fillRef>
+          <a:effectRef idx="2">
+            <a:schemeClr val="accent1"/>
+          </a:effectRef>
+          <a:fontRef idx="minor">
+            <a:schemeClr val="lt1"/>
+          </a:fontRef>
+        </p:style>
+        <p:txBody>
+          <a:bodyPr rtlCol="0" anchor="ctr"/>
+          <a:lstStyle/>
+          <a:p>
+            <a:pPr algn="ctr"/>
+          </a:p>
+        </p:txBody>
+      </p:sp>
+      <p:sp>
+        <p:nvSpPr>
+          <p:cNvPr id="25" name="TextBox 24"/>
+          <p:cNvSpPr txBox="1"/>
+          <p:nvPr/>
+        </p:nvSpPr>
+        <p:spPr>
+          <a:xfrm>
+            <a:off x="2740392" y="3785616"/>
+            <a:ext cx="1114164" cy="640080"/>
+          </a:xfrm>
+          <a:prstGeom prst="rect">
+            <a:avLst/>
+          </a:prstGeom>
+          <a:noFill/>
+        </p:spPr>
+        <p:txBody>
+          <a:bodyPr wrap="square" anchor="ctr" lIns="36000" rIns="36000" tIns="18000" bIns="18000">
+            <a:spAutoFit/>
+          </a:bodyPr>
+          <a:lstStyle/>
+          <a:p>
+            <a:pPr algn="ctr"/>
+            <a:r>
+              <a:rPr sz="900" b="1" i="0">
+                <a:solidFill>
+                  <a:srgbClr val="1E293B"/>
+                </a:solidFill>
+                <a:latin typeface="Noto Sans JP"/>
+              </a:rPr>
+              <a:t>自己修復ゲル</a:t>
+            </a:r>
+          </a:p>
+          <a:p>
+            <a:pPr algn="ctr"/>
+            <a:r>
+              <a:rPr sz="900" b="1" i="0">
+                <a:solidFill>
+                  <a:srgbClr val="1E293B"/>
+                </a:solidFill>
+                <a:latin typeface="Noto Sans JP"/>
+              </a:rPr>
+              <a:t>（付着）</a:t>
+            </a:r>
+          </a:p>
+        </p:txBody>
+      </p:sp>
+      <p:sp>
+        <p:nvSpPr>
+          <p:cNvPr id="26" name="TextBox 25"/>
+          <p:cNvSpPr txBox="1"/>
+          <p:nvPr/>
+        </p:nvSpPr>
+        <p:spPr>
+          <a:xfrm>
+            <a:off x="3863701" y="3785616"/>
+            <a:ext cx="73152" cy="640080"/>
+          </a:xfrm>
+          <a:prstGeom prst="rect">
+            <a:avLst/>
+          </a:prstGeom>
+          <a:noFill/>
+        </p:spPr>
+        <p:txBody>
+          <a:bodyPr wrap="square" anchor="ctr" lIns="36000" rIns="36000" tIns="18000" bIns="18000">
+            <a:spAutoFit/>
+          </a:bodyPr>
+          <a:lstStyle/>
+          <a:p>
+            <a:pPr algn="ctr"/>
+            <a:r>
+              <a:rPr sz="1000" b="0" i="0">
+                <a:solidFill>
+                  <a:srgbClr val="64748B"/>
+                </a:solidFill>
+                <a:latin typeface="Noto Sans JP"/>
+              </a:rPr>
+              <a:t>→</a:t>
+            </a:r>
+          </a:p>
+        </p:txBody>
+      </p:sp>
+      <p:sp>
+        <p:nvSpPr>
+          <p:cNvPr id="27" name="Rounded Rectangle 26"/>
+          <p:cNvSpPr/>
+          <p:nvPr/>
+        </p:nvSpPr>
+        <p:spPr>
+          <a:xfrm>
+            <a:off x="3927709" y="3785616"/>
+            <a:ext cx="1114164" cy="640080"/>
           </a:xfrm>
           <a:prstGeom prst="roundRect">
             <a:avLst>
@@ -4510,14 +4684,14 @@
       </p:sp>
       <p:sp>
         <p:nvSpPr>
-          <p:cNvPr id="24" name="Rectangle 23"/>
+          <p:cNvPr id="28" name="Rectangle 27"/>
           <p:cNvSpPr/>
           <p:nvPr/>
         </p:nvSpPr>
         <p:spPr>
           <a:xfrm>
-            <a:off x="3544129" y="3785616"/>
-            <a:ext cx="1497744" cy="36576"/>
+            <a:off x="3927709" y="3785616"/>
+            <a:ext cx="1114164" cy="36576"/>
           </a:xfrm>
           <a:prstGeom prst="rect">
             <a:avLst/>
@@ -4554,14 +4728,14 @@
       </p:sp>
       <p:sp>
         <p:nvSpPr>
-          <p:cNvPr id="25" name="TextBox 24"/>
-          <p:cNvSpPr txBox="1"/>
-          <p:nvPr/>
-        </p:nvSpPr>
-        <p:spPr>
-          <a:xfrm>
-            <a:off x="3544129" y="3785616"/>
-            <a:ext cx="1497744" cy="640080"/>
+          <p:cNvPr id="29" name="TextBox 28"/>
+          <p:cNvSpPr txBox="1"/>
+          <p:nvPr/>
+        </p:nvSpPr>
+        <p:spPr>
+          <a:xfrm>
+            <a:off x="3927709" y="3785616"/>
+            <a:ext cx="1114164" cy="640080"/>
           </a:xfrm>
           <a:prstGeom prst="rect">
             <a:avLst/>
@@ -4576,7 +4750,7 @@
           <a:p>
             <a:pPr algn="ctr"/>
             <a:r>
-              <a:rPr sz="1000" b="1" i="0">
+              <a:rPr sz="900" b="1" i="0">
                 <a:solidFill>
                   <a:srgbClr val="1E293B"/>
                 </a:solidFill>
@@ -4588,20 +4762,20 @@
           <a:p>
             <a:pPr algn="ctr"/>
             <a:r>
-              <a:rPr sz="1000" b="1" i="0">
+              <a:rPr sz="900" b="1" i="0">
                 <a:solidFill>
                   <a:srgbClr val="1E293B"/>
                 </a:solidFill>
                 <a:latin typeface="Noto Sans JP"/>
               </a:rPr>
-              <a:t>（保護）</a:t>
-            </a:r>
-          </a:p>
-        </p:txBody>
-      </p:sp>
-      <p:sp>
-        <p:nvSpPr>
-          <p:cNvPr id="26" name="Rounded Rectangle 25"/>
+              <a:t>（炎）</a:t>
+            </a:r>
+          </a:p>
+        </p:txBody>
+      </p:sp>
+      <p:sp>
+        <p:nvSpPr>
+          <p:cNvPr id="30" name="Rounded Rectangle 29"/>
           <p:cNvSpPr/>
           <p:nvPr/>
         </p:nvSpPr>
@@ -4649,7 +4823,7 @@
       </p:sp>
       <p:sp>
         <p:nvSpPr>
-          <p:cNvPr id="27" name="Rectangle 26"/>
+          <p:cNvPr id="31" name="Rectangle 30"/>
           <p:cNvSpPr/>
           <p:nvPr/>
         </p:nvSpPr>
@@ -4693,7 +4867,7 @@
       </p:sp>
       <p:sp>
         <p:nvSpPr>
-          <p:cNvPr id="28" name="TextBox 27"/>
+          <p:cNvPr id="32" name="TextBox 31"/>
           <p:cNvSpPr txBox="1"/>
           <p:nvPr/>
         </p:nvSpPr>
@@ -4728,7 +4902,7 @@
       </p:sp>
       <p:sp>
         <p:nvSpPr>
-          <p:cNvPr id="29" name="TextBox 28"/>
+          <p:cNvPr id="33" name="TextBox 32"/>
           <p:cNvSpPr txBox="1"/>
           <p:nvPr/>
         </p:nvSpPr>
@@ -4763,7 +4937,7 @@
       </p:sp>
       <p:sp>
         <p:nvSpPr>
-          <p:cNvPr id="30" name="TextBox 29"/>
+          <p:cNvPr id="34" name="TextBox 33"/>
           <p:cNvSpPr txBox="1"/>
           <p:nvPr/>
         </p:nvSpPr>
@@ -6335,7 +6509,7 @@
                 </a:solidFill>
                 <a:latin typeface="Noto Sans JP"/>
               </a:rPr>
-              <a:t>メチルセルロース(MC)の熱ゲル化：火炎保護の鍵となる特性</a:t>
+              <a:t>レオロジー設計：せん断希薄化と自己修復性</a:t>
             </a:r>
           </a:p>
         </p:txBody>
@@ -6541,7 +6715,7 @@
                 </a:solidFill>
                 <a:latin typeface="Noto Sans JP"/>
               </a:rPr>
-              <a:t>Photo</a:t>
+              <a:t>Fig. 2</a:t>
             </a:r>
           </a:p>
         </p:txBody>
@@ -6611,7 +6785,7 @@
                 </a:solidFill>
                 <a:latin typeface="Noto Sans JP"/>
               </a:rPr>
-              <a:t>MCゾル（室温）→ ゲル（加熱後）の外観比較</a:t>
+              <a:t>粘度 vs せん断速度（シアシニング挙動）</a:t>
             </a:r>
           </a:p>
         </p:txBody>
@@ -6669,7 +6843,7 @@
         <p:spPr>
           <a:xfrm>
             <a:off x="365760" y="3675888"/>
-            <a:ext cx="804672" cy="274320"/>
+            <a:ext cx="1005840" cy="274320"/>
           </a:xfrm>
           <a:prstGeom prst="rect">
             <a:avLst/>
@@ -6690,7 +6864,7 @@
                 </a:solidFill>
                 <a:latin typeface="Noto Sans JP"/>
               </a:rPr>
-              <a:t>LCST</a:t>
+              <a:t>せん断希薄化</a:t>
             </a:r>
           </a:p>
         </p:txBody>
@@ -6703,8 +6877,8 @@
         </p:nvSpPr>
         <p:spPr>
           <a:xfrm>
-            <a:off x="1207008" y="3675888"/>
-            <a:ext cx="4568196" cy="274320"/>
+            <a:off x="1408175" y="3675888"/>
+            <a:ext cx="4367029" cy="274320"/>
           </a:xfrm>
           <a:prstGeom prst="rect">
             <a:avLst/>
@@ -6725,7 +6899,7 @@
                 </a:solidFill>
                 <a:latin typeface="Noto Sans JP"/>
               </a:rPr>
-              <a:t>~55°C でゲル化開始（1 wt% 水溶液）</a:t>
+              <a:t>流動指数 n &lt; 1（噴霧時に低粘度化）</a:t>
             </a:r>
           </a:p>
         </p:txBody>
@@ -6739,7 +6913,7 @@
         <p:spPr>
           <a:xfrm>
             <a:off x="365760" y="4041648"/>
-            <a:ext cx="804672" cy="274320"/>
+            <a:ext cx="1005840" cy="274320"/>
           </a:xfrm>
           <a:prstGeom prst="rect">
             <a:avLst/>
@@ -6760,7 +6934,7 @@
                 </a:solidFill>
                 <a:latin typeface="Noto Sans JP"/>
               </a:rPr>
-              <a:t>熱分解</a:t>
+              <a:t>降伏応力</a:t>
             </a:r>
           </a:p>
         </p:txBody>
@@ -6773,8 +6947,8 @@
         </p:nvSpPr>
         <p:spPr>
           <a:xfrm>
-            <a:off x="1207008" y="4041648"/>
-            <a:ext cx="4568196" cy="274320"/>
+            <a:off x="1408175" y="4041648"/>
+            <a:ext cx="4367029" cy="274320"/>
           </a:xfrm>
           <a:prstGeom prst="rect">
             <a:avLst/>
@@ -6795,7 +6969,7 @@
                 </a:solidFill>
                 <a:latin typeface="Noto Sans JP"/>
               </a:rPr>
-              <a:t>~300°C で有機成分が分解</a:t>
+              <a:t>~33 Pa（静止時のゲル構造を維持）</a:t>
             </a:r>
           </a:p>
         </p:txBody>
@@ -6809,7 +6983,7 @@
         <p:spPr>
           <a:xfrm>
             <a:off x="365760" y="4407408"/>
-            <a:ext cx="804672" cy="274320"/>
+            <a:ext cx="1005840" cy="274320"/>
           </a:xfrm>
           <a:prstGeom prst="rect">
             <a:avLst/>
@@ -6830,7 +7004,7 @@
                 </a:solidFill>
                 <a:latin typeface="Noto Sans JP"/>
               </a:rPr>
-              <a:t>設計意図</a:t>
+              <a:t>自己修復性</a:t>
             </a:r>
           </a:p>
         </p:txBody>
@@ -6843,8 +7017,8 @@
         </p:nvSpPr>
         <p:spPr>
           <a:xfrm>
-            <a:off x="1207008" y="4407408"/>
-            <a:ext cx="4568196" cy="274320"/>
+            <a:off x="1408175" y="4407408"/>
+            <a:ext cx="4367029" cy="274320"/>
           </a:xfrm>
           <a:prstGeom prst="rect">
             <a:avLst/>
@@ -6865,7 +7039,7 @@
                 </a:solidFill>
                 <a:latin typeface="Noto Sans JP"/>
               </a:rPr>
-              <a:t>常温では液体、火炎接触で即ゲル → CSPを固定</a:t>
+              <a:t>ひずみ除去後 G' が ~90% 回復</a:t>
             </a:r>
           </a:p>
         </p:txBody>
@@ -6948,7 +7122,7 @@
                 </a:solidFill>
                 <a:latin typeface="Noto Sans JP"/>
               </a:rPr>
-              <a:t>LCST（ゲル化開始）</a:t>
+              <a:t>流動指数 n</a:t>
             </a:r>
           </a:p>
         </p:txBody>
@@ -6983,7 +7157,7 @@
                 </a:solidFill>
                 <a:latin typeface="Noto Sans JP"/>
               </a:rPr>
-              <a:t>~55°C</a:t>
+              <a:t>&lt; 1</a:t>
             </a:r>
           </a:p>
         </p:txBody>
@@ -7018,7 +7192,7 @@
                 </a:solidFill>
                 <a:latin typeface="Noto Sans JP"/>
               </a:rPr>
-              <a:t>1 wt% MC水溶液</a:t>
+              <a:t>強いせん断希薄化</a:t>
             </a:r>
           </a:p>
         </p:txBody>
@@ -7101,7 +7275,7 @@
                 </a:solidFill>
                 <a:latin typeface="Noto Sans JP"/>
               </a:rPr>
-              <a:t>熱分解温度</a:t>
+              <a:t>静的降伏応力</a:t>
             </a:r>
           </a:p>
         </p:txBody>
@@ -7132,11 +7306,11 @@
             <a:r>
               <a:rPr sz="2000" b="1" i="0">
                 <a:solidFill>
-                  <a:srgbClr val="A05656"/>
-                </a:solidFill>
-                <a:latin typeface="Noto Sans JP"/>
-              </a:rPr>
-              <a:t>~300°C</a:t>
+                  <a:srgbClr val="4A7C8C"/>
+                </a:solidFill>
+                <a:latin typeface="Noto Sans JP"/>
+              </a:rPr>
+              <a:t>~33 Pa</a:t>
             </a:r>
           </a:p>
         </p:txBody>
@@ -7171,7 +7345,7 @@
                 </a:solidFill>
                 <a:latin typeface="Noto Sans JP"/>
               </a:rPr>
-              <a:t>TGA測定</a:t>
+              <a:t>HEC+MC/CSP</a:t>
             </a:r>
           </a:p>
         </p:txBody>
@@ -7254,7 +7428,7 @@
                 </a:solidFill>
                 <a:latin typeface="Noto Sans JP"/>
               </a:rPr>
-              <a:t>CSP焼結開始</a:t>
+              <a:t>G' 回復率</a:t>
             </a:r>
           </a:p>
         </p:txBody>
@@ -7285,11 +7459,11 @@
             <a:r>
               <a:rPr sz="2000" b="1" i="0">
                 <a:solidFill>
-                  <a:srgbClr val="4A7C8C"/>
-                </a:solidFill>
-                <a:latin typeface="Noto Sans JP"/>
-              </a:rPr>
-              <a:t>~200°C</a:t>
+                  <a:srgbClr val="5B8C5A"/>
+                </a:solidFill>
+                <a:latin typeface="Noto Sans JP"/>
+              </a:rPr>
+              <a:t>~90%</a:t>
             </a:r>
           </a:p>
         </p:txBody>
@@ -7324,7 +7498,7 @@
                 </a:solidFill>
                 <a:latin typeface="Noto Sans JP"/>
               </a:rPr>
-              <a:t>粒子間ネック形成</a:t>
+              <a:t>1000秒後</a:t>
             </a:r>
           </a:p>
         </p:txBody>
@@ -7405,7 +7579,7 @@
                 </a:solidFill>
                 <a:latin typeface="Noto Sans JP"/>
               </a:rPr>
-              <a:t>温度別プロセス</a:t>
+              <a:t>噴霧〜耐火プロセス</a:t>
             </a:r>
           </a:p>
         </p:txBody>
@@ -7486,7 +7660,7 @@
                 </a:solidFill>
                 <a:latin typeface="Noto Sans JP"/>
               </a:rPr>
-              <a:t>~55°C</a:t>
+              <a:t>静止時</a:t>
             </a:r>
           </a:p>
         </p:txBody>
@@ -7521,7 +7695,7 @@
                 </a:solidFill>
                 <a:latin typeface="Noto Sans JP"/>
               </a:rPr>
-              <a:t>MCゲル化</a:t>
+              <a:t>ゲル状態</a:t>
             </a:r>
           </a:p>
         </p:txBody>
@@ -7556,7 +7730,7 @@
                 </a:solidFill>
                 <a:latin typeface="Noto Sans JP"/>
               </a:rPr>
-              <a:t>構造を固定</a:t>
+              <a:t>G' &gt; G''</a:t>
             </a:r>
           </a:p>
         </p:txBody>
@@ -7672,7 +7846,7 @@
                 </a:solidFill>
                 <a:latin typeface="Noto Sans JP"/>
               </a:rPr>
-              <a:t>~100°C</a:t>
+              <a:t>噴霧時</a:t>
             </a:r>
           </a:p>
         </p:txBody>
@@ -7707,7 +7881,7 @@
                 </a:solidFill>
                 <a:latin typeface="Noto Sans JP"/>
               </a:rPr>
-              <a:t>水分蒸発</a:t>
+              <a:t>せん断希薄化</a:t>
             </a:r>
           </a:p>
         </p:txBody>
@@ -7742,7 +7916,7 @@
                 </a:solidFill>
                 <a:latin typeface="Noto Sans JP"/>
               </a:rPr>
-              <a:t>発泡・膨張</a:t>
+              <a:t>低粘度・ゾル様</a:t>
             </a:r>
           </a:p>
         </p:txBody>
@@ -7858,7 +8032,7 @@
                 </a:solidFill>
                 <a:latin typeface="Noto Sans JP"/>
               </a:rPr>
-              <a:t>~200°C</a:t>
+              <a:t>付着後</a:t>
             </a:r>
           </a:p>
         </p:txBody>
@@ -7893,7 +8067,7 @@
                 </a:solidFill>
                 <a:latin typeface="Noto Sans JP"/>
               </a:rPr>
-              <a:t>CSP焼結</a:t>
+              <a:t>自己修復</a:t>
             </a:r>
           </a:p>
         </p:txBody>
@@ -7928,7 +8102,7 @@
                 </a:solidFill>
                 <a:latin typeface="Noto Sans JP"/>
               </a:rPr>
-              <a:t>粒界形成</a:t>
+              <a:t>G' 回復</a:t>
             </a:r>
           </a:p>
         </p:txBody>
@@ -8044,7 +8218,7 @@
                 </a:solidFill>
                 <a:latin typeface="Noto Sans JP"/>
               </a:rPr>
-              <a:t>&gt;300°C</a:t>
+              <a:t>炎接触</a:t>
             </a:r>
           </a:p>
         </p:txBody>
@@ -8079,7 +8253,7 @@
                 </a:solidFill>
                 <a:latin typeface="Noto Sans JP"/>
               </a:rPr>
-              <a:t>有機分解</a:t>
+              <a:t>エアロゲル化</a:t>
             </a:r>
           </a:p>
         </p:txBody>
@@ -8114,7 +8288,7 @@
                 </a:solidFill>
                 <a:latin typeface="Noto Sans JP"/>
               </a:rPr>
-              <a:t>純シリカ層</a:t>
+              <a:t>多孔質シリカ層</a:t>
             </a:r>
           </a:p>
         </p:txBody>

--- a/slides.pptx
+++ b/slides.pptx
@@ -3937,64 +3937,77 @@
         <p:spPr>
           <a:xfrm>
             <a:off x="365760" y="859536"/>
-            <a:ext cx="4676113" cy="640080"/>
-          </a:xfrm>
-          <a:prstGeom prst="rect">
-            <a:avLst/>
-          </a:prstGeom>
-          <a:noFill/>
-        </p:spPr>
-        <p:txBody>
-          <a:bodyPr wrap="square" anchor="t" lIns="36000" rIns="36000" tIns="18000" bIns="18000">
-            <a:spAutoFit/>
-          </a:bodyPr>
-          <a:lstStyle/>
-          <a:p>
-            <a:pPr algn="l"/>
-            <a:r>
-              <a:rPr sz="2600" b="1" i="0">
+            <a:ext cx="11460175" cy="475488"/>
+          </a:xfrm>
+          <a:prstGeom prst="rect">
+            <a:avLst/>
+          </a:prstGeom>
+          <a:noFill/>
+        </p:spPr>
+        <p:txBody>
+          <a:bodyPr wrap="square" anchor="ctr" lIns="36000" rIns="36000" tIns="18000" bIns="18000">
+            <a:spAutoFit/>
+          </a:bodyPr>
+          <a:lstStyle/>
+          <a:p>
+            <a:pPr algn="l"/>
+            <a:r>
+              <a:rPr sz="1500" b="1" i="0">
                 <a:solidFill>
                   <a:srgbClr val="1E293B"/>
                 </a:solidFill>
                 <a:latin typeface="Noto Sans JP"/>
               </a:rPr>
-              <a:t>せん断変形と</a:t>
-            </a:r>
-          </a:p>
-        </p:txBody>
-      </p:sp>
-      <p:sp>
-        <p:nvSpPr>
-          <p:cNvPr id="11" name="TextBox 10"/>
-          <p:cNvSpPr txBox="1"/>
-          <p:nvPr/>
-        </p:nvSpPr>
-        <p:spPr>
-          <a:xfrm>
-            <a:off x="365760" y="1481328"/>
-            <a:ext cx="4676113" cy="640080"/>
-          </a:xfrm>
-          <a:prstGeom prst="rect">
-            <a:avLst/>
-          </a:prstGeom>
-          <a:noFill/>
-        </p:spPr>
-        <p:txBody>
-          <a:bodyPr wrap="square" anchor="t" lIns="36000" rIns="36000" tIns="18000" bIns="18000">
-            <a:spAutoFit/>
-          </a:bodyPr>
-          <a:lstStyle/>
-          <a:p>
-            <a:pPr algn="l"/>
-            <a:r>
-              <a:rPr sz="2600" b="1" i="0">
-                <a:solidFill>
-                  <a:srgbClr val="1E293B"/>
-                </a:solidFill>
-                <a:latin typeface="Noto Sans JP"/>
-              </a:rPr>
-              <a:t>自己修復性が鍵</a:t>
-            </a:r>
+              <a:t>温度ではなく「せん断力」と「自己修復性」が、噴霧から付着までを支配します。</a:t>
+            </a:r>
+          </a:p>
+        </p:txBody>
+      </p:sp>
+      <p:sp>
+        <p:nvSpPr>
+          <p:cNvPr id="11" name="Rounded Rectangle 10"/>
+          <p:cNvSpPr/>
+          <p:nvPr/>
+        </p:nvSpPr>
+        <p:spPr>
+          <a:xfrm>
+            <a:off x="365760" y="1463040"/>
+            <a:ext cx="2659303" cy="3200400"/>
+          </a:xfrm>
+          <a:prstGeom prst="roundRect">
+            <a:avLst>
+              <a:gd name="adj" fmla="val 4000"/>
+            </a:avLst>
+          </a:prstGeom>
+          <a:solidFill>
+            <a:srgbClr val="F1F5F9"/>
+          </a:solidFill>
+          <a:ln w="6350">
+            <a:solidFill>
+              <a:srgbClr val="E2E8F0"/>
+            </a:solidFill>
+          </a:ln>
+          <a:effectLst/>
+        </p:spPr>
+        <p:style>
+          <a:lnRef idx="1">
+            <a:schemeClr val="accent1"/>
+          </a:lnRef>
+          <a:fillRef idx="3">
+            <a:schemeClr val="accent1"/>
+          </a:fillRef>
+          <a:effectRef idx="2">
+            <a:schemeClr val="accent1"/>
+          </a:effectRef>
+          <a:fontRef idx="minor">
+            <a:schemeClr val="lt1"/>
+          </a:fontRef>
+        </p:style>
+        <p:txBody>
+          <a:bodyPr rtlCol="0" anchor="ctr"/>
+          <a:lstStyle/>
+          <a:p>
+            <a:pPr algn="ctr"/>
           </a:p>
         </p:txBody>
       </p:sp>
@@ -4006,8 +4019,8 @@
         </p:nvSpPr>
         <p:spPr>
           <a:xfrm>
-            <a:off x="365760" y="2286000"/>
-            <a:ext cx="45720" cy="1645920"/>
+            <a:off x="365760" y="1463040"/>
+            <a:ext cx="2659303" cy="54864"/>
           </a:xfrm>
           <a:prstGeom prst="rect">
             <a:avLst/>
@@ -4050,8 +4063,157 @@
         </p:nvSpPr>
         <p:spPr>
           <a:xfrm>
-            <a:off x="530352" y="2340864"/>
-            <a:ext cx="4511521" cy="512064"/>
+            <a:off x="548640" y="1627632"/>
+            <a:ext cx="2293543" cy="310896"/>
+          </a:xfrm>
+          <a:prstGeom prst="rect">
+            <a:avLst/>
+          </a:prstGeom>
+          <a:noFill/>
+        </p:spPr>
+        <p:txBody>
+          <a:bodyPr wrap="square" anchor="t" lIns="36000" rIns="36000" tIns="18000" bIns="18000">
+            <a:spAutoFit/>
+          </a:bodyPr>
+          <a:lstStyle/>
+          <a:p>
+            <a:pPr algn="l"/>
+            <a:r>
+              <a:rPr sz="1300" b="1" i="0">
+                <a:solidFill>
+                  <a:srgbClr val="3B5174"/>
+                </a:solidFill>
+                <a:latin typeface="Noto Sans JP"/>
+              </a:rPr>
+              <a:t>01</a:t>
+            </a:r>
+          </a:p>
+        </p:txBody>
+      </p:sp>
+      <p:sp>
+        <p:nvSpPr>
+          <p:cNvPr id="14" name="TextBox 13"/>
+          <p:cNvSpPr txBox="1"/>
+          <p:nvPr/>
+        </p:nvSpPr>
+        <p:spPr>
+          <a:xfrm>
+            <a:off x="548640" y="1956816"/>
+            <a:ext cx="2293543" cy="274320"/>
+          </a:xfrm>
+          <a:prstGeom prst="rect">
+            <a:avLst/>
+          </a:prstGeom>
+          <a:noFill/>
+        </p:spPr>
+        <p:txBody>
+          <a:bodyPr wrap="square" anchor="t" lIns="36000" rIns="36000" tIns="18000" bIns="18000">
+            <a:spAutoFit/>
+          </a:bodyPr>
+          <a:lstStyle/>
+          <a:p>
+            <a:pPr algn="l"/>
+            <a:r>
+              <a:rPr sz="1200" b="1" i="0">
+                <a:solidFill>
+                  <a:srgbClr val="64748B"/>
+                </a:solidFill>
+                <a:latin typeface="Noto Sans JP"/>
+              </a:rPr>
+              <a:t>静止時</a:t>
+            </a:r>
+          </a:p>
+        </p:txBody>
+      </p:sp>
+      <p:sp>
+        <p:nvSpPr>
+          <p:cNvPr id="15" name="TextBox 14"/>
+          <p:cNvSpPr txBox="1"/>
+          <p:nvPr/>
+        </p:nvSpPr>
+        <p:spPr>
+          <a:xfrm>
+            <a:off x="548640" y="2304288"/>
+            <a:ext cx="2293543" cy="512064"/>
+          </a:xfrm>
+          <a:prstGeom prst="rect">
+            <a:avLst/>
+          </a:prstGeom>
+          <a:noFill/>
+        </p:spPr>
+        <p:txBody>
+          <a:bodyPr wrap="square" anchor="t" lIns="36000" rIns="36000" tIns="18000" bIns="18000">
+            <a:spAutoFit/>
+          </a:bodyPr>
+          <a:lstStyle/>
+          <a:p>
+            <a:pPr algn="l"/>
+            <a:r>
+              <a:rPr sz="2200" b="1" i="0">
+                <a:solidFill>
+                  <a:srgbClr val="1E293B"/>
+                </a:solidFill>
+                <a:latin typeface="Noto Sans JP"/>
+              </a:rPr>
+              <a:t>ゲル</a:t>
+            </a:r>
+          </a:p>
+        </p:txBody>
+      </p:sp>
+      <p:sp>
+        <p:nvSpPr>
+          <p:cNvPr id="16" name="Rectangle 15"/>
+          <p:cNvSpPr/>
+          <p:nvPr/>
+        </p:nvSpPr>
+        <p:spPr>
+          <a:xfrm>
+            <a:off x="548640" y="2907792"/>
+            <a:ext cx="2293543" cy="13716"/>
+          </a:xfrm>
+          <a:prstGeom prst="rect">
+            <a:avLst/>
+          </a:prstGeom>
+          <a:solidFill>
+            <a:srgbClr val="E2E8F0"/>
+          </a:solidFill>
+          <a:ln>
+            <a:noFill/>
+          </a:ln>
+          <a:effectLst/>
+        </p:spPr>
+        <p:style>
+          <a:lnRef idx="1">
+            <a:schemeClr val="accent1"/>
+          </a:lnRef>
+          <a:fillRef idx="3">
+            <a:schemeClr val="accent1"/>
+          </a:fillRef>
+          <a:effectRef idx="2">
+            <a:schemeClr val="accent1"/>
+          </a:effectRef>
+          <a:fontRef idx="minor">
+            <a:schemeClr val="lt1"/>
+          </a:fontRef>
+        </p:style>
+        <p:txBody>
+          <a:bodyPr rtlCol="0" anchor="ctr"/>
+          <a:lstStyle/>
+          <a:p>
+            <a:pPr algn="ctr"/>
+          </a:p>
+        </p:txBody>
+      </p:sp>
+      <p:sp>
+        <p:nvSpPr>
+          <p:cNvPr id="17" name="TextBox 16"/>
+          <p:cNvSpPr txBox="1"/>
+          <p:nvPr/>
+        </p:nvSpPr>
+        <p:spPr>
+          <a:xfrm>
+            <a:off x="548640" y="3035808"/>
+            <a:ext cx="2293543" cy="1005840"/>
           </a:xfrm>
           <a:prstGeom prst="rect">
             <a:avLst/>
@@ -4068,68 +4230,33 @@
             <a:r>
               <a:rPr sz="1200" b="0" i="0">
                 <a:solidFill>
-                  <a:srgbClr val="334155"/>
-                </a:solidFill>
-                <a:latin typeface="Noto Sans JP"/>
-              </a:rPr>
-              <a:t>噴霧時のせん断ひずみでゾル様に変化し、壁に付着すると自己修復性によって即座にゲル構造を回復します。</a:t>
-            </a:r>
-          </a:p>
-        </p:txBody>
-      </p:sp>
-      <p:sp>
-        <p:nvSpPr>
-          <p:cNvPr id="14" name="TextBox 13"/>
-          <p:cNvSpPr txBox="1"/>
-          <p:nvPr/>
-        </p:nvSpPr>
-        <p:spPr>
-          <a:xfrm>
-            <a:off x="530352" y="2962656"/>
-            <a:ext cx="4511521" cy="512064"/>
-          </a:xfrm>
-          <a:prstGeom prst="rect">
-            <a:avLst/>
-          </a:prstGeom>
-          <a:noFill/>
-        </p:spPr>
-        <p:txBody>
-          <a:bodyPr wrap="square" anchor="t" lIns="36000" rIns="36000" tIns="18000" bIns="18000">
-            <a:spAutoFit/>
-          </a:bodyPr>
-          <a:lstStyle/>
-          <a:p>
-            <a:pPr algn="l"/>
-            <a:r>
-              <a:rPr sz="1200" b="0" i="0">
-                <a:solidFill>
-                  <a:srgbClr val="334155"/>
-                </a:solidFill>
-                <a:latin typeface="Noto Sans JP"/>
-              </a:rPr>
-              <a:t>炎にさらされると「シリカエアロゲル」へと変貌し、水分が枯渇した後も断熱層として基材を保護します。</a:t>
-            </a:r>
-          </a:p>
-        </p:txBody>
-      </p:sp>
-      <p:sp>
-        <p:nvSpPr>
-          <p:cNvPr id="15" name="Rounded Rectangle 14"/>
+                  <a:srgbClr val="475569"/>
+                </a:solidFill>
+                <a:latin typeface="Noto Sans JP"/>
+              </a:rPr>
+              <a:t>高粘度の弾性ゲル。G′ &gt; G″ で構造を保持。</a:t>
+            </a:r>
+          </a:p>
+        </p:txBody>
+      </p:sp>
+      <p:sp>
+        <p:nvSpPr>
+          <p:cNvPr id="18" name="Rounded Rectangle 17"/>
           <p:cNvSpPr/>
           <p:nvPr/>
         </p:nvSpPr>
         <p:spPr>
           <a:xfrm>
-            <a:off x="365760" y="3785616"/>
-            <a:ext cx="1114164" cy="640080"/>
+            <a:off x="548640" y="4078224"/>
+            <a:ext cx="2293543" cy="420624"/>
           </a:xfrm>
           <a:prstGeom prst="roundRect">
             <a:avLst>
-              <a:gd name="adj" fmla="val 3000"/>
+              <a:gd name="adj" fmla="val 6000"/>
             </a:avLst>
           </a:prstGeom>
           <a:solidFill>
-            <a:srgbClr val="F1F5F9"/>
+            <a:srgbClr val="FFFFFF"/>
           </a:solidFill>
           <a:ln w="8890">
             <a:solidFill>
@@ -4162,20 +4289,138 @@
       </p:sp>
       <p:sp>
         <p:nvSpPr>
-          <p:cNvPr id="16" name="Rectangle 15"/>
+          <p:cNvPr id="19" name="TextBox 18"/>
+          <p:cNvSpPr txBox="1"/>
+          <p:nvPr/>
+        </p:nvSpPr>
+        <p:spPr>
+          <a:xfrm>
+            <a:off x="548640" y="4078224"/>
+            <a:ext cx="2293543" cy="420624"/>
+          </a:xfrm>
+          <a:prstGeom prst="rect">
+            <a:avLst/>
+          </a:prstGeom>
+          <a:noFill/>
+        </p:spPr>
+        <p:txBody>
+          <a:bodyPr wrap="square" anchor="ctr" lIns="36000" rIns="36000" tIns="18000" bIns="18000">
+            <a:spAutoFit/>
+          </a:bodyPr>
+          <a:lstStyle/>
+          <a:p>
+            <a:pPr algn="ctr"/>
+            <a:r>
+              <a:rPr sz="1100" b="1" i="0">
+                <a:solidFill>
+                  <a:srgbClr val="3B5174"/>
+                </a:solidFill>
+                <a:latin typeface="Noto Sans JP"/>
+              </a:rPr>
+              <a:t>降伏応力 ~33 Pa</a:t>
+            </a:r>
+          </a:p>
+        </p:txBody>
+      </p:sp>
+      <p:sp>
+        <p:nvSpPr>
+          <p:cNvPr id="20" name="TextBox 19"/>
+          <p:cNvSpPr txBox="1"/>
+          <p:nvPr/>
+        </p:nvSpPr>
+        <p:spPr>
+          <a:xfrm>
+            <a:off x="3025063" y="1463040"/>
+            <a:ext cx="274320" cy="3200400"/>
+          </a:xfrm>
+          <a:prstGeom prst="rect">
+            <a:avLst/>
+          </a:prstGeom>
+          <a:noFill/>
+        </p:spPr>
+        <p:txBody>
+          <a:bodyPr wrap="square" anchor="ctr" lIns="36000" rIns="36000" tIns="18000" bIns="18000">
+            <a:spAutoFit/>
+          </a:bodyPr>
+          <a:lstStyle/>
+          <a:p>
+            <a:pPr algn="ctr"/>
+            <a:r>
+              <a:rPr sz="2000" b="0" i="0">
+                <a:solidFill>
+                  <a:srgbClr val="AAB4C0"/>
+                </a:solidFill>
+                <a:latin typeface="Noto Sans JP"/>
+              </a:rPr>
+              <a:t>→</a:t>
+            </a:r>
+          </a:p>
+        </p:txBody>
+      </p:sp>
+      <p:sp>
+        <p:nvSpPr>
+          <p:cNvPr id="21" name="Rounded Rectangle 20"/>
           <p:cNvSpPr/>
           <p:nvPr/>
         </p:nvSpPr>
         <p:spPr>
           <a:xfrm>
-            <a:off x="365760" y="3785616"/>
-            <a:ext cx="1114164" cy="36576"/>
-          </a:xfrm>
-          <a:prstGeom prst="rect">
-            <a:avLst/>
+            <a:off x="3299383" y="1463040"/>
+            <a:ext cx="2659303" cy="3200400"/>
+          </a:xfrm>
+          <a:prstGeom prst="roundRect">
+            <a:avLst>
+              <a:gd name="adj" fmla="val 4000"/>
+            </a:avLst>
           </a:prstGeom>
           <a:solidFill>
-            <a:srgbClr val="3B5174"/>
+            <a:srgbClr val="F1F5F9"/>
+          </a:solidFill>
+          <a:ln w="6350">
+            <a:solidFill>
+              <a:srgbClr val="E2E8F0"/>
+            </a:solidFill>
+          </a:ln>
+          <a:effectLst/>
+        </p:spPr>
+        <p:style>
+          <a:lnRef idx="1">
+            <a:schemeClr val="accent1"/>
+          </a:lnRef>
+          <a:fillRef idx="3">
+            <a:schemeClr val="accent1"/>
+          </a:fillRef>
+          <a:effectRef idx="2">
+            <a:schemeClr val="accent1"/>
+          </a:effectRef>
+          <a:fontRef idx="minor">
+            <a:schemeClr val="lt1"/>
+          </a:fontRef>
+        </p:style>
+        <p:txBody>
+          <a:bodyPr rtlCol="0" anchor="ctr"/>
+          <a:lstStyle/>
+          <a:p>
+            <a:pPr algn="ctr"/>
+          </a:p>
+        </p:txBody>
+      </p:sp>
+      <p:sp>
+        <p:nvSpPr>
+          <p:cNvPr id="22" name="Rectangle 21"/>
+          <p:cNvSpPr/>
+          <p:nvPr/>
+        </p:nvSpPr>
+        <p:spPr>
+          <a:xfrm>
+            <a:off x="3299383" y="1463040"/>
+            <a:ext cx="2659303" cy="54864"/>
+          </a:xfrm>
+          <a:prstGeom prst="rect">
+            <a:avLst/>
+          </a:prstGeom>
+          <a:solidFill>
+            <a:srgbClr val="4A7C8C"/>
           </a:solidFill>
           <a:ln>
             <a:noFill/>
@@ -4206,104 +4451,206 @@
       </p:sp>
       <p:sp>
         <p:nvSpPr>
-          <p:cNvPr id="17" name="TextBox 16"/>
-          <p:cNvSpPr txBox="1"/>
-          <p:nvPr/>
-        </p:nvSpPr>
-        <p:spPr>
-          <a:xfrm>
-            <a:off x="365760" y="3785616"/>
-            <a:ext cx="1114164" cy="640080"/>
-          </a:xfrm>
-          <a:prstGeom prst="rect">
-            <a:avLst/>
-          </a:prstGeom>
-          <a:noFill/>
-        </p:spPr>
-        <p:txBody>
-          <a:bodyPr wrap="square" anchor="ctr" lIns="36000" rIns="36000" tIns="18000" bIns="18000">
-            <a:spAutoFit/>
-          </a:bodyPr>
-          <a:lstStyle/>
-          <a:p>
-            <a:pPr algn="ctr"/>
-            <a:r>
-              <a:rPr sz="900" b="1" i="0">
+          <p:cNvPr id="23" name="TextBox 22"/>
+          <p:cNvSpPr txBox="1"/>
+          <p:nvPr/>
+        </p:nvSpPr>
+        <p:spPr>
+          <a:xfrm>
+            <a:off x="3482263" y="1627632"/>
+            <a:ext cx="2293543" cy="310896"/>
+          </a:xfrm>
+          <a:prstGeom prst="rect">
+            <a:avLst/>
+          </a:prstGeom>
+          <a:noFill/>
+        </p:spPr>
+        <p:txBody>
+          <a:bodyPr wrap="square" anchor="t" lIns="36000" rIns="36000" tIns="18000" bIns="18000">
+            <a:spAutoFit/>
+          </a:bodyPr>
+          <a:lstStyle/>
+          <a:p>
+            <a:pPr algn="l"/>
+            <a:r>
+              <a:rPr sz="1300" b="1" i="0">
+                <a:solidFill>
+                  <a:srgbClr val="4A7C8C"/>
+                </a:solidFill>
+                <a:latin typeface="Noto Sans JP"/>
+              </a:rPr>
+              <a:t>02</a:t>
+            </a:r>
+          </a:p>
+        </p:txBody>
+      </p:sp>
+      <p:sp>
+        <p:nvSpPr>
+          <p:cNvPr id="24" name="TextBox 23"/>
+          <p:cNvSpPr txBox="1"/>
+          <p:nvPr/>
+        </p:nvSpPr>
+        <p:spPr>
+          <a:xfrm>
+            <a:off x="3482263" y="1956816"/>
+            <a:ext cx="2293543" cy="274320"/>
+          </a:xfrm>
+          <a:prstGeom prst="rect">
+            <a:avLst/>
+          </a:prstGeom>
+          <a:noFill/>
+        </p:spPr>
+        <p:txBody>
+          <a:bodyPr wrap="square" anchor="t" lIns="36000" rIns="36000" tIns="18000" bIns="18000">
+            <a:spAutoFit/>
+          </a:bodyPr>
+          <a:lstStyle/>
+          <a:p>
+            <a:pPr algn="l"/>
+            <a:r>
+              <a:rPr sz="1200" b="1" i="0">
+                <a:solidFill>
+                  <a:srgbClr val="64748B"/>
+                </a:solidFill>
+                <a:latin typeface="Noto Sans JP"/>
+              </a:rPr>
+              <a:t>噴霧時</a:t>
+            </a:r>
+          </a:p>
+        </p:txBody>
+      </p:sp>
+      <p:sp>
+        <p:nvSpPr>
+          <p:cNvPr id="25" name="TextBox 24"/>
+          <p:cNvSpPr txBox="1"/>
+          <p:nvPr/>
+        </p:nvSpPr>
+        <p:spPr>
+          <a:xfrm>
+            <a:off x="3482263" y="2304288"/>
+            <a:ext cx="2293543" cy="512064"/>
+          </a:xfrm>
+          <a:prstGeom prst="rect">
+            <a:avLst/>
+          </a:prstGeom>
+          <a:noFill/>
+        </p:spPr>
+        <p:txBody>
+          <a:bodyPr wrap="square" anchor="t" lIns="36000" rIns="36000" tIns="18000" bIns="18000">
+            <a:spAutoFit/>
+          </a:bodyPr>
+          <a:lstStyle/>
+          <a:p>
+            <a:pPr algn="l"/>
+            <a:r>
+              <a:rPr sz="2200" b="1" i="0">
                 <a:solidFill>
                   <a:srgbClr val="1E293B"/>
                 </a:solidFill>
                 <a:latin typeface="Noto Sans JP"/>
               </a:rPr>
-              <a:t>ゲル</a:t>
-            </a:r>
-          </a:p>
-          <a:p>
-            <a:pPr algn="ctr"/>
-            <a:r>
-              <a:rPr sz="900" b="1" i="0">
-                <a:solidFill>
-                  <a:srgbClr val="1E293B"/>
-                </a:solidFill>
-                <a:latin typeface="Noto Sans JP"/>
-              </a:rPr>
-              <a:t>（静止）</a:t>
-            </a:r>
-          </a:p>
-        </p:txBody>
-      </p:sp>
-      <p:sp>
-        <p:nvSpPr>
-          <p:cNvPr id="18" name="TextBox 17"/>
-          <p:cNvSpPr txBox="1"/>
-          <p:nvPr/>
-        </p:nvSpPr>
-        <p:spPr>
-          <a:xfrm>
-            <a:off x="1489068" y="3785616"/>
-            <a:ext cx="73152" cy="640080"/>
-          </a:xfrm>
-          <a:prstGeom prst="rect">
-            <a:avLst/>
-          </a:prstGeom>
-          <a:noFill/>
-        </p:spPr>
-        <p:txBody>
-          <a:bodyPr wrap="square" anchor="ctr" lIns="36000" rIns="36000" tIns="18000" bIns="18000">
-            <a:spAutoFit/>
-          </a:bodyPr>
-          <a:lstStyle/>
-          <a:p>
-            <a:pPr algn="ctr"/>
-            <a:r>
-              <a:rPr sz="1000" b="0" i="0">
-                <a:solidFill>
-                  <a:srgbClr val="64748B"/>
-                </a:solidFill>
-                <a:latin typeface="Noto Sans JP"/>
-              </a:rPr>
-              <a:t>→</a:t>
-            </a:r>
-          </a:p>
-        </p:txBody>
-      </p:sp>
-      <p:sp>
-        <p:nvSpPr>
-          <p:cNvPr id="19" name="Rounded Rectangle 18"/>
+              <a:t>ゾル様</a:t>
+            </a:r>
+          </a:p>
+        </p:txBody>
+      </p:sp>
+      <p:sp>
+        <p:nvSpPr>
+          <p:cNvPr id="26" name="Rectangle 25"/>
           <p:cNvSpPr/>
           <p:nvPr/>
         </p:nvSpPr>
         <p:spPr>
           <a:xfrm>
-            <a:off x="1553076" y="3785616"/>
-            <a:ext cx="1114164" cy="640080"/>
+            <a:off x="3482263" y="2907792"/>
+            <a:ext cx="2293543" cy="13716"/>
+          </a:xfrm>
+          <a:prstGeom prst="rect">
+            <a:avLst/>
+          </a:prstGeom>
+          <a:solidFill>
+            <a:srgbClr val="E2E8F0"/>
+          </a:solidFill>
+          <a:ln>
+            <a:noFill/>
+          </a:ln>
+          <a:effectLst/>
+        </p:spPr>
+        <p:style>
+          <a:lnRef idx="1">
+            <a:schemeClr val="accent1"/>
+          </a:lnRef>
+          <a:fillRef idx="3">
+            <a:schemeClr val="accent1"/>
+          </a:fillRef>
+          <a:effectRef idx="2">
+            <a:schemeClr val="accent1"/>
+          </a:effectRef>
+          <a:fontRef idx="minor">
+            <a:schemeClr val="lt1"/>
+          </a:fontRef>
+        </p:style>
+        <p:txBody>
+          <a:bodyPr rtlCol="0" anchor="ctr"/>
+          <a:lstStyle/>
+          <a:p>
+            <a:pPr algn="ctr"/>
+          </a:p>
+        </p:txBody>
+      </p:sp>
+      <p:sp>
+        <p:nvSpPr>
+          <p:cNvPr id="27" name="TextBox 26"/>
+          <p:cNvSpPr txBox="1"/>
+          <p:nvPr/>
+        </p:nvSpPr>
+        <p:spPr>
+          <a:xfrm>
+            <a:off x="3482263" y="3035808"/>
+            <a:ext cx="2293543" cy="1005840"/>
+          </a:xfrm>
+          <a:prstGeom prst="rect">
+            <a:avLst/>
+          </a:prstGeom>
+          <a:noFill/>
+        </p:spPr>
+        <p:txBody>
+          <a:bodyPr wrap="square" anchor="t" lIns="36000" rIns="36000" tIns="18000" bIns="18000">
+            <a:spAutoFit/>
+          </a:bodyPr>
+          <a:lstStyle/>
+          <a:p>
+            <a:pPr algn="l"/>
+            <a:r>
+              <a:rPr sz="1200" b="0" i="0">
+                <a:solidFill>
+                  <a:srgbClr val="475569"/>
+                </a:solidFill>
+                <a:latin typeface="Noto Sans JP"/>
+              </a:rPr>
+              <a:t>せん断ひずみで粘度が低下し、流動化。</a:t>
+            </a:r>
+          </a:p>
+        </p:txBody>
+      </p:sp>
+      <p:sp>
+        <p:nvSpPr>
+          <p:cNvPr id="28" name="Rounded Rectangle 27"/>
+          <p:cNvSpPr/>
+          <p:nvPr/>
+        </p:nvSpPr>
+        <p:spPr>
+          <a:xfrm>
+            <a:off x="3482263" y="4078224"/>
+            <a:ext cx="2293543" cy="420624"/>
           </a:xfrm>
           <a:prstGeom prst="roundRect">
             <a:avLst>
-              <a:gd name="adj" fmla="val 3000"/>
+              <a:gd name="adj" fmla="val 6000"/>
             </a:avLst>
           </a:prstGeom>
           <a:solidFill>
-            <a:srgbClr val="F1F5F9"/>
+            <a:srgbClr val="FFFFFF"/>
           </a:solidFill>
           <a:ln w="8890">
             <a:solidFill>
@@ -4336,20 +4683,138 @@
       </p:sp>
       <p:sp>
         <p:nvSpPr>
-          <p:cNvPr id="20" name="Rectangle 19"/>
+          <p:cNvPr id="29" name="TextBox 28"/>
+          <p:cNvSpPr txBox="1"/>
+          <p:nvPr/>
+        </p:nvSpPr>
+        <p:spPr>
+          <a:xfrm>
+            <a:off x="3482263" y="4078224"/>
+            <a:ext cx="2293543" cy="420624"/>
+          </a:xfrm>
+          <a:prstGeom prst="rect">
+            <a:avLst/>
+          </a:prstGeom>
+          <a:noFill/>
+        </p:spPr>
+        <p:txBody>
+          <a:bodyPr wrap="square" anchor="ctr" lIns="36000" rIns="36000" tIns="18000" bIns="18000">
+            <a:spAutoFit/>
+          </a:bodyPr>
+          <a:lstStyle/>
+          <a:p>
+            <a:pPr algn="ctr"/>
+            <a:r>
+              <a:rPr sz="1100" b="1" i="0">
+                <a:solidFill>
+                  <a:srgbClr val="4A7C8C"/>
+                </a:solidFill>
+                <a:latin typeface="Noto Sans JP"/>
+              </a:rPr>
+              <a:t>せん断希薄化 n &lt; 1</a:t>
+            </a:r>
+          </a:p>
+        </p:txBody>
+      </p:sp>
+      <p:sp>
+        <p:nvSpPr>
+          <p:cNvPr id="30" name="TextBox 29"/>
+          <p:cNvSpPr txBox="1"/>
+          <p:nvPr/>
+        </p:nvSpPr>
+        <p:spPr>
+          <a:xfrm>
+            <a:off x="5958687" y="1463040"/>
+            <a:ext cx="274320" cy="3200400"/>
+          </a:xfrm>
+          <a:prstGeom prst="rect">
+            <a:avLst/>
+          </a:prstGeom>
+          <a:noFill/>
+        </p:spPr>
+        <p:txBody>
+          <a:bodyPr wrap="square" anchor="ctr" lIns="36000" rIns="36000" tIns="18000" bIns="18000">
+            <a:spAutoFit/>
+          </a:bodyPr>
+          <a:lstStyle/>
+          <a:p>
+            <a:pPr algn="ctr"/>
+            <a:r>
+              <a:rPr sz="2000" b="0" i="0">
+                <a:solidFill>
+                  <a:srgbClr val="AAB4C0"/>
+                </a:solidFill>
+                <a:latin typeface="Noto Sans JP"/>
+              </a:rPr>
+              <a:t>→</a:t>
+            </a:r>
+          </a:p>
+        </p:txBody>
+      </p:sp>
+      <p:sp>
+        <p:nvSpPr>
+          <p:cNvPr id="31" name="Rounded Rectangle 30"/>
           <p:cNvSpPr/>
           <p:nvPr/>
         </p:nvSpPr>
         <p:spPr>
           <a:xfrm>
-            <a:off x="1553076" y="3785616"/>
-            <a:ext cx="1114164" cy="36576"/>
-          </a:xfrm>
-          <a:prstGeom prst="rect">
-            <a:avLst/>
+            <a:off x="6233007" y="1463040"/>
+            <a:ext cx="2659303" cy="3200400"/>
+          </a:xfrm>
+          <a:prstGeom prst="roundRect">
+            <a:avLst>
+              <a:gd name="adj" fmla="val 4000"/>
+            </a:avLst>
           </a:prstGeom>
           <a:solidFill>
-            <a:srgbClr val="4A7C8C"/>
+            <a:srgbClr val="F1F5F9"/>
+          </a:solidFill>
+          <a:ln w="6350">
+            <a:solidFill>
+              <a:srgbClr val="E2E8F0"/>
+            </a:solidFill>
+          </a:ln>
+          <a:effectLst/>
+        </p:spPr>
+        <p:style>
+          <a:lnRef idx="1">
+            <a:schemeClr val="accent1"/>
+          </a:lnRef>
+          <a:fillRef idx="3">
+            <a:schemeClr val="accent1"/>
+          </a:fillRef>
+          <a:effectRef idx="2">
+            <a:schemeClr val="accent1"/>
+          </a:effectRef>
+          <a:fontRef idx="minor">
+            <a:schemeClr val="lt1"/>
+          </a:fontRef>
+        </p:style>
+        <p:txBody>
+          <a:bodyPr rtlCol="0" anchor="ctr"/>
+          <a:lstStyle/>
+          <a:p>
+            <a:pPr algn="ctr"/>
+          </a:p>
+        </p:txBody>
+      </p:sp>
+      <p:sp>
+        <p:nvSpPr>
+          <p:cNvPr id="32" name="Rectangle 31"/>
+          <p:cNvSpPr/>
+          <p:nvPr/>
+        </p:nvSpPr>
+        <p:spPr>
+          <a:xfrm>
+            <a:off x="6233007" y="1463040"/>
+            <a:ext cx="2659303" cy="54864"/>
+          </a:xfrm>
+          <a:prstGeom prst="rect">
+            <a:avLst/>
+          </a:prstGeom>
+          <a:solidFill>
+            <a:srgbClr val="5B8C5A"/>
           </a:solidFill>
           <a:ln>
             <a:noFill/>
@@ -4380,104 +4845,206 @@
       </p:sp>
       <p:sp>
         <p:nvSpPr>
-          <p:cNvPr id="21" name="TextBox 20"/>
-          <p:cNvSpPr txBox="1"/>
-          <p:nvPr/>
-        </p:nvSpPr>
-        <p:spPr>
-          <a:xfrm>
-            <a:off x="1553076" y="3785616"/>
-            <a:ext cx="1114164" cy="640080"/>
-          </a:xfrm>
-          <a:prstGeom prst="rect">
-            <a:avLst/>
-          </a:prstGeom>
-          <a:noFill/>
-        </p:spPr>
-        <p:txBody>
-          <a:bodyPr wrap="square" anchor="ctr" lIns="36000" rIns="36000" tIns="18000" bIns="18000">
-            <a:spAutoFit/>
-          </a:bodyPr>
-          <a:lstStyle/>
-          <a:p>
-            <a:pPr algn="ctr"/>
-            <a:r>
-              <a:rPr sz="900" b="1" i="0">
+          <p:cNvPr id="33" name="TextBox 32"/>
+          <p:cNvSpPr txBox="1"/>
+          <p:nvPr/>
+        </p:nvSpPr>
+        <p:spPr>
+          <a:xfrm>
+            <a:off x="6415887" y="1627632"/>
+            <a:ext cx="2293543" cy="310896"/>
+          </a:xfrm>
+          <a:prstGeom prst="rect">
+            <a:avLst/>
+          </a:prstGeom>
+          <a:noFill/>
+        </p:spPr>
+        <p:txBody>
+          <a:bodyPr wrap="square" anchor="t" lIns="36000" rIns="36000" tIns="18000" bIns="18000">
+            <a:spAutoFit/>
+          </a:bodyPr>
+          <a:lstStyle/>
+          <a:p>
+            <a:pPr algn="l"/>
+            <a:r>
+              <a:rPr sz="1300" b="1" i="0">
+                <a:solidFill>
+                  <a:srgbClr val="5B8C5A"/>
+                </a:solidFill>
+                <a:latin typeface="Noto Sans JP"/>
+              </a:rPr>
+              <a:t>03</a:t>
+            </a:r>
+          </a:p>
+        </p:txBody>
+      </p:sp>
+      <p:sp>
+        <p:nvSpPr>
+          <p:cNvPr id="34" name="TextBox 33"/>
+          <p:cNvSpPr txBox="1"/>
+          <p:nvPr/>
+        </p:nvSpPr>
+        <p:spPr>
+          <a:xfrm>
+            <a:off x="6415887" y="1956816"/>
+            <a:ext cx="2293543" cy="274320"/>
+          </a:xfrm>
+          <a:prstGeom prst="rect">
+            <a:avLst/>
+          </a:prstGeom>
+          <a:noFill/>
+        </p:spPr>
+        <p:txBody>
+          <a:bodyPr wrap="square" anchor="t" lIns="36000" rIns="36000" tIns="18000" bIns="18000">
+            <a:spAutoFit/>
+          </a:bodyPr>
+          <a:lstStyle/>
+          <a:p>
+            <a:pPr algn="l"/>
+            <a:r>
+              <a:rPr sz="1200" b="1" i="0">
+                <a:solidFill>
+                  <a:srgbClr val="64748B"/>
+                </a:solidFill>
+                <a:latin typeface="Noto Sans JP"/>
+              </a:rPr>
+              <a:t>付着後</a:t>
+            </a:r>
+          </a:p>
+        </p:txBody>
+      </p:sp>
+      <p:sp>
+        <p:nvSpPr>
+          <p:cNvPr id="35" name="TextBox 34"/>
+          <p:cNvSpPr txBox="1"/>
+          <p:nvPr/>
+        </p:nvSpPr>
+        <p:spPr>
+          <a:xfrm>
+            <a:off x="6415887" y="2304288"/>
+            <a:ext cx="2293543" cy="512064"/>
+          </a:xfrm>
+          <a:prstGeom prst="rect">
+            <a:avLst/>
+          </a:prstGeom>
+          <a:noFill/>
+        </p:spPr>
+        <p:txBody>
+          <a:bodyPr wrap="square" anchor="t" lIns="36000" rIns="36000" tIns="18000" bIns="18000">
+            <a:spAutoFit/>
+          </a:bodyPr>
+          <a:lstStyle/>
+          <a:p>
+            <a:pPr algn="l"/>
+            <a:r>
+              <a:rPr sz="2200" b="1" i="0">
                 <a:solidFill>
                   <a:srgbClr val="1E293B"/>
                 </a:solidFill>
                 <a:latin typeface="Noto Sans JP"/>
               </a:rPr>
-              <a:t>ゾル様</a:t>
-            </a:r>
-          </a:p>
-          <a:p>
-            <a:pPr algn="ctr"/>
-            <a:r>
-              <a:rPr sz="900" b="1" i="0">
-                <a:solidFill>
-                  <a:srgbClr val="1E293B"/>
-                </a:solidFill>
-                <a:latin typeface="Noto Sans JP"/>
-              </a:rPr>
-              <a:t>（噴霧）</a:t>
-            </a:r>
-          </a:p>
-        </p:txBody>
-      </p:sp>
-      <p:sp>
-        <p:nvSpPr>
-          <p:cNvPr id="22" name="TextBox 21"/>
-          <p:cNvSpPr txBox="1"/>
-          <p:nvPr/>
-        </p:nvSpPr>
-        <p:spPr>
-          <a:xfrm>
-            <a:off x="2676384" y="3785616"/>
-            <a:ext cx="73152" cy="640080"/>
-          </a:xfrm>
-          <a:prstGeom prst="rect">
-            <a:avLst/>
-          </a:prstGeom>
-          <a:noFill/>
-        </p:spPr>
-        <p:txBody>
-          <a:bodyPr wrap="square" anchor="ctr" lIns="36000" rIns="36000" tIns="18000" bIns="18000">
-            <a:spAutoFit/>
-          </a:bodyPr>
-          <a:lstStyle/>
-          <a:p>
-            <a:pPr algn="ctr"/>
-            <a:r>
-              <a:rPr sz="1000" b="0" i="0">
-                <a:solidFill>
-                  <a:srgbClr val="64748B"/>
-                </a:solidFill>
-                <a:latin typeface="Noto Sans JP"/>
-              </a:rPr>
-              <a:t>→</a:t>
-            </a:r>
-          </a:p>
-        </p:txBody>
-      </p:sp>
-      <p:sp>
-        <p:nvSpPr>
-          <p:cNvPr id="23" name="Rounded Rectangle 22"/>
+              <a:t>自己修復ゲル</a:t>
+            </a:r>
+          </a:p>
+        </p:txBody>
+      </p:sp>
+      <p:sp>
+        <p:nvSpPr>
+          <p:cNvPr id="36" name="Rectangle 35"/>
           <p:cNvSpPr/>
           <p:nvPr/>
         </p:nvSpPr>
         <p:spPr>
           <a:xfrm>
-            <a:off x="2740392" y="3785616"/>
-            <a:ext cx="1114164" cy="640080"/>
+            <a:off x="6415887" y="2907792"/>
+            <a:ext cx="2293543" cy="13716"/>
+          </a:xfrm>
+          <a:prstGeom prst="rect">
+            <a:avLst/>
+          </a:prstGeom>
+          <a:solidFill>
+            <a:srgbClr val="E2E8F0"/>
+          </a:solidFill>
+          <a:ln>
+            <a:noFill/>
+          </a:ln>
+          <a:effectLst/>
+        </p:spPr>
+        <p:style>
+          <a:lnRef idx="1">
+            <a:schemeClr val="accent1"/>
+          </a:lnRef>
+          <a:fillRef idx="3">
+            <a:schemeClr val="accent1"/>
+          </a:fillRef>
+          <a:effectRef idx="2">
+            <a:schemeClr val="accent1"/>
+          </a:effectRef>
+          <a:fontRef idx="minor">
+            <a:schemeClr val="lt1"/>
+          </a:fontRef>
+        </p:style>
+        <p:txBody>
+          <a:bodyPr rtlCol="0" anchor="ctr"/>
+          <a:lstStyle/>
+          <a:p>
+            <a:pPr algn="ctr"/>
+          </a:p>
+        </p:txBody>
+      </p:sp>
+      <p:sp>
+        <p:nvSpPr>
+          <p:cNvPr id="37" name="TextBox 36"/>
+          <p:cNvSpPr txBox="1"/>
+          <p:nvPr/>
+        </p:nvSpPr>
+        <p:spPr>
+          <a:xfrm>
+            <a:off x="6415887" y="3035808"/>
+            <a:ext cx="2293543" cy="1005840"/>
+          </a:xfrm>
+          <a:prstGeom prst="rect">
+            <a:avLst/>
+          </a:prstGeom>
+          <a:noFill/>
+        </p:spPr>
+        <p:txBody>
+          <a:bodyPr wrap="square" anchor="t" lIns="36000" rIns="36000" tIns="18000" bIns="18000">
+            <a:spAutoFit/>
+          </a:bodyPr>
+          <a:lstStyle/>
+          <a:p>
+            <a:pPr algn="l"/>
+            <a:r>
+              <a:rPr sz="1200" b="0" i="0">
+                <a:solidFill>
+                  <a:srgbClr val="475569"/>
+                </a:solidFill>
+                <a:latin typeface="Noto Sans JP"/>
+              </a:rPr>
+              <a:t>ひずみ解放で即座にゲル構造を回復。</a:t>
+            </a:r>
+          </a:p>
+        </p:txBody>
+      </p:sp>
+      <p:sp>
+        <p:nvSpPr>
+          <p:cNvPr id="38" name="Rounded Rectangle 37"/>
+          <p:cNvSpPr/>
+          <p:nvPr/>
+        </p:nvSpPr>
+        <p:spPr>
+          <a:xfrm>
+            <a:off x="6415887" y="4078224"/>
+            <a:ext cx="2293543" cy="420624"/>
           </a:xfrm>
           <a:prstGeom prst="roundRect">
             <a:avLst>
-              <a:gd name="adj" fmla="val 3000"/>
+              <a:gd name="adj" fmla="val 6000"/>
             </a:avLst>
           </a:prstGeom>
           <a:solidFill>
-            <a:srgbClr val="F1F5F9"/>
+            <a:srgbClr val="FFFFFF"/>
           </a:solidFill>
           <a:ln w="8890">
             <a:solidFill>
@@ -4510,20 +5077,138 @@
       </p:sp>
       <p:sp>
         <p:nvSpPr>
-          <p:cNvPr id="24" name="Rectangle 23"/>
+          <p:cNvPr id="39" name="TextBox 38"/>
+          <p:cNvSpPr txBox="1"/>
+          <p:nvPr/>
+        </p:nvSpPr>
+        <p:spPr>
+          <a:xfrm>
+            <a:off x="6415887" y="4078224"/>
+            <a:ext cx="2293543" cy="420624"/>
+          </a:xfrm>
+          <a:prstGeom prst="rect">
+            <a:avLst/>
+          </a:prstGeom>
+          <a:noFill/>
+        </p:spPr>
+        <p:txBody>
+          <a:bodyPr wrap="square" anchor="ctr" lIns="36000" rIns="36000" tIns="18000" bIns="18000">
+            <a:spAutoFit/>
+          </a:bodyPr>
+          <a:lstStyle/>
+          <a:p>
+            <a:pPr algn="ctr"/>
+            <a:r>
+              <a:rPr sz="1100" b="1" i="0">
+                <a:solidFill>
+                  <a:srgbClr val="5B8C5A"/>
+                </a:solidFill>
+                <a:latin typeface="Noto Sans JP"/>
+              </a:rPr>
+              <a:t>G′ 回復率 ~90%</a:t>
+            </a:r>
+          </a:p>
+        </p:txBody>
+      </p:sp>
+      <p:sp>
+        <p:nvSpPr>
+          <p:cNvPr id="40" name="TextBox 39"/>
+          <p:cNvSpPr txBox="1"/>
+          <p:nvPr/>
+        </p:nvSpPr>
+        <p:spPr>
+          <a:xfrm>
+            <a:off x="8892311" y="1463040"/>
+            <a:ext cx="274320" cy="3200400"/>
+          </a:xfrm>
+          <a:prstGeom prst="rect">
+            <a:avLst/>
+          </a:prstGeom>
+          <a:noFill/>
+        </p:spPr>
+        <p:txBody>
+          <a:bodyPr wrap="square" anchor="ctr" lIns="36000" rIns="36000" tIns="18000" bIns="18000">
+            <a:spAutoFit/>
+          </a:bodyPr>
+          <a:lstStyle/>
+          <a:p>
+            <a:pPr algn="ctr"/>
+            <a:r>
+              <a:rPr sz="2000" b="0" i="0">
+                <a:solidFill>
+                  <a:srgbClr val="AAB4C0"/>
+                </a:solidFill>
+                <a:latin typeface="Noto Sans JP"/>
+              </a:rPr>
+              <a:t>→</a:t>
+            </a:r>
+          </a:p>
+        </p:txBody>
+      </p:sp>
+      <p:sp>
+        <p:nvSpPr>
+          <p:cNvPr id="41" name="Rounded Rectangle 40"/>
           <p:cNvSpPr/>
           <p:nvPr/>
         </p:nvSpPr>
         <p:spPr>
           <a:xfrm>
-            <a:off x="2740392" y="3785616"/>
-            <a:ext cx="1114164" cy="36576"/>
-          </a:xfrm>
-          <a:prstGeom prst="rect">
-            <a:avLst/>
+            <a:off x="9166631" y="1463040"/>
+            <a:ext cx="2659303" cy="3200400"/>
+          </a:xfrm>
+          <a:prstGeom prst="roundRect">
+            <a:avLst>
+              <a:gd name="adj" fmla="val 4000"/>
+            </a:avLst>
           </a:prstGeom>
           <a:solidFill>
-            <a:srgbClr val="5B8C5A"/>
+            <a:srgbClr val="F1F5F9"/>
+          </a:solidFill>
+          <a:ln w="6350">
+            <a:solidFill>
+              <a:srgbClr val="E2E8F0"/>
+            </a:solidFill>
+          </a:ln>
+          <a:effectLst/>
+        </p:spPr>
+        <p:style>
+          <a:lnRef idx="1">
+            <a:schemeClr val="accent1"/>
+          </a:lnRef>
+          <a:fillRef idx="3">
+            <a:schemeClr val="accent1"/>
+          </a:fillRef>
+          <a:effectRef idx="2">
+            <a:schemeClr val="accent1"/>
+          </a:effectRef>
+          <a:fontRef idx="minor">
+            <a:schemeClr val="lt1"/>
+          </a:fontRef>
+        </p:style>
+        <p:txBody>
+          <a:bodyPr rtlCol="0" anchor="ctr"/>
+          <a:lstStyle/>
+          <a:p>
+            <a:pPr algn="ctr"/>
+          </a:p>
+        </p:txBody>
+      </p:sp>
+      <p:sp>
+        <p:nvSpPr>
+          <p:cNvPr id="42" name="Rectangle 41"/>
+          <p:cNvSpPr/>
+          <p:nvPr/>
+        </p:nvSpPr>
+        <p:spPr>
+          <a:xfrm>
+            <a:off x="9166631" y="1463040"/>
+            <a:ext cx="2659303" cy="54864"/>
+          </a:xfrm>
+          <a:prstGeom prst="rect">
+            <a:avLst/>
+          </a:prstGeom>
+          <a:solidFill>
+            <a:srgbClr val="9F7639"/>
           </a:solidFill>
           <a:ln>
             <a:noFill/>
@@ -4554,104 +5239,206 @@
       </p:sp>
       <p:sp>
         <p:nvSpPr>
-          <p:cNvPr id="25" name="TextBox 24"/>
-          <p:cNvSpPr txBox="1"/>
-          <p:nvPr/>
-        </p:nvSpPr>
-        <p:spPr>
-          <a:xfrm>
-            <a:off x="2740392" y="3785616"/>
-            <a:ext cx="1114164" cy="640080"/>
-          </a:xfrm>
-          <a:prstGeom prst="rect">
-            <a:avLst/>
-          </a:prstGeom>
-          <a:noFill/>
-        </p:spPr>
-        <p:txBody>
-          <a:bodyPr wrap="square" anchor="ctr" lIns="36000" rIns="36000" tIns="18000" bIns="18000">
-            <a:spAutoFit/>
-          </a:bodyPr>
-          <a:lstStyle/>
-          <a:p>
-            <a:pPr algn="ctr"/>
-            <a:r>
-              <a:rPr sz="900" b="1" i="0">
+          <p:cNvPr id="43" name="TextBox 42"/>
+          <p:cNvSpPr txBox="1"/>
+          <p:nvPr/>
+        </p:nvSpPr>
+        <p:spPr>
+          <a:xfrm>
+            <a:off x="9349511" y="1627632"/>
+            <a:ext cx="2293543" cy="310896"/>
+          </a:xfrm>
+          <a:prstGeom prst="rect">
+            <a:avLst/>
+          </a:prstGeom>
+          <a:noFill/>
+        </p:spPr>
+        <p:txBody>
+          <a:bodyPr wrap="square" anchor="t" lIns="36000" rIns="36000" tIns="18000" bIns="18000">
+            <a:spAutoFit/>
+          </a:bodyPr>
+          <a:lstStyle/>
+          <a:p>
+            <a:pPr algn="l"/>
+            <a:r>
+              <a:rPr sz="1300" b="1" i="0">
+                <a:solidFill>
+                  <a:srgbClr val="9F7639"/>
+                </a:solidFill>
+                <a:latin typeface="Noto Sans JP"/>
+              </a:rPr>
+              <a:t>04</a:t>
+            </a:r>
+          </a:p>
+        </p:txBody>
+      </p:sp>
+      <p:sp>
+        <p:nvSpPr>
+          <p:cNvPr id="44" name="TextBox 43"/>
+          <p:cNvSpPr txBox="1"/>
+          <p:nvPr/>
+        </p:nvSpPr>
+        <p:spPr>
+          <a:xfrm>
+            <a:off x="9349511" y="1956816"/>
+            <a:ext cx="2293543" cy="274320"/>
+          </a:xfrm>
+          <a:prstGeom prst="rect">
+            <a:avLst/>
+          </a:prstGeom>
+          <a:noFill/>
+        </p:spPr>
+        <p:txBody>
+          <a:bodyPr wrap="square" anchor="t" lIns="36000" rIns="36000" tIns="18000" bIns="18000">
+            <a:spAutoFit/>
+          </a:bodyPr>
+          <a:lstStyle/>
+          <a:p>
+            <a:pPr algn="l"/>
+            <a:r>
+              <a:rPr sz="1200" b="1" i="0">
+                <a:solidFill>
+                  <a:srgbClr val="64748B"/>
+                </a:solidFill>
+                <a:latin typeface="Noto Sans JP"/>
+              </a:rPr>
+              <a:t>炎接触</a:t>
+            </a:r>
+          </a:p>
+        </p:txBody>
+      </p:sp>
+      <p:sp>
+        <p:nvSpPr>
+          <p:cNvPr id="45" name="TextBox 44"/>
+          <p:cNvSpPr txBox="1"/>
+          <p:nvPr/>
+        </p:nvSpPr>
+        <p:spPr>
+          <a:xfrm>
+            <a:off x="9349511" y="2304288"/>
+            <a:ext cx="2293543" cy="512064"/>
+          </a:xfrm>
+          <a:prstGeom prst="rect">
+            <a:avLst/>
+          </a:prstGeom>
+          <a:noFill/>
+        </p:spPr>
+        <p:txBody>
+          <a:bodyPr wrap="square" anchor="t" lIns="36000" rIns="36000" tIns="18000" bIns="18000">
+            <a:spAutoFit/>
+          </a:bodyPr>
+          <a:lstStyle/>
+          <a:p>
+            <a:pPr algn="l"/>
+            <a:r>
+              <a:rPr sz="2200" b="1" i="0">
                 <a:solidFill>
                   <a:srgbClr val="1E293B"/>
                 </a:solidFill>
                 <a:latin typeface="Noto Sans JP"/>
               </a:rPr>
-              <a:t>自己修復ゲル</a:t>
-            </a:r>
-          </a:p>
-          <a:p>
-            <a:pPr algn="ctr"/>
-            <a:r>
-              <a:rPr sz="900" b="1" i="0">
-                <a:solidFill>
-                  <a:srgbClr val="1E293B"/>
-                </a:solidFill>
-                <a:latin typeface="Noto Sans JP"/>
-              </a:rPr>
-              <a:t>（付着）</a:t>
-            </a:r>
-          </a:p>
-        </p:txBody>
-      </p:sp>
-      <p:sp>
-        <p:nvSpPr>
-          <p:cNvPr id="26" name="TextBox 25"/>
-          <p:cNvSpPr txBox="1"/>
-          <p:nvPr/>
-        </p:nvSpPr>
-        <p:spPr>
-          <a:xfrm>
-            <a:off x="3863701" y="3785616"/>
-            <a:ext cx="73152" cy="640080"/>
-          </a:xfrm>
-          <a:prstGeom prst="rect">
-            <a:avLst/>
-          </a:prstGeom>
-          <a:noFill/>
-        </p:spPr>
-        <p:txBody>
-          <a:bodyPr wrap="square" anchor="ctr" lIns="36000" rIns="36000" tIns="18000" bIns="18000">
-            <a:spAutoFit/>
-          </a:bodyPr>
-          <a:lstStyle/>
-          <a:p>
-            <a:pPr algn="ctr"/>
-            <a:r>
-              <a:rPr sz="1000" b="0" i="0">
-                <a:solidFill>
-                  <a:srgbClr val="64748B"/>
-                </a:solidFill>
-                <a:latin typeface="Noto Sans JP"/>
-              </a:rPr>
-              <a:t>→</a:t>
-            </a:r>
-          </a:p>
-        </p:txBody>
-      </p:sp>
-      <p:sp>
-        <p:nvSpPr>
-          <p:cNvPr id="27" name="Rounded Rectangle 26"/>
+              <a:t>エアロゲル</a:t>
+            </a:r>
+          </a:p>
+        </p:txBody>
+      </p:sp>
+      <p:sp>
+        <p:nvSpPr>
+          <p:cNvPr id="46" name="Rectangle 45"/>
           <p:cNvSpPr/>
           <p:nvPr/>
         </p:nvSpPr>
         <p:spPr>
           <a:xfrm>
-            <a:off x="3927709" y="3785616"/>
-            <a:ext cx="1114164" cy="640080"/>
+            <a:off x="9349511" y="2907792"/>
+            <a:ext cx="2293543" cy="13716"/>
+          </a:xfrm>
+          <a:prstGeom prst="rect">
+            <a:avLst/>
+          </a:prstGeom>
+          <a:solidFill>
+            <a:srgbClr val="E2E8F0"/>
+          </a:solidFill>
+          <a:ln>
+            <a:noFill/>
+          </a:ln>
+          <a:effectLst/>
+        </p:spPr>
+        <p:style>
+          <a:lnRef idx="1">
+            <a:schemeClr val="accent1"/>
+          </a:lnRef>
+          <a:fillRef idx="3">
+            <a:schemeClr val="accent1"/>
+          </a:fillRef>
+          <a:effectRef idx="2">
+            <a:schemeClr val="accent1"/>
+          </a:effectRef>
+          <a:fontRef idx="minor">
+            <a:schemeClr val="lt1"/>
+          </a:fontRef>
+        </p:style>
+        <p:txBody>
+          <a:bodyPr rtlCol="0" anchor="ctr"/>
+          <a:lstStyle/>
+          <a:p>
+            <a:pPr algn="ctr"/>
+          </a:p>
+        </p:txBody>
+      </p:sp>
+      <p:sp>
+        <p:nvSpPr>
+          <p:cNvPr id="47" name="TextBox 46"/>
+          <p:cNvSpPr txBox="1"/>
+          <p:nvPr/>
+        </p:nvSpPr>
+        <p:spPr>
+          <a:xfrm>
+            <a:off x="9349511" y="3035808"/>
+            <a:ext cx="2293543" cy="1005840"/>
+          </a:xfrm>
+          <a:prstGeom prst="rect">
+            <a:avLst/>
+          </a:prstGeom>
+          <a:noFill/>
+        </p:spPr>
+        <p:txBody>
+          <a:bodyPr wrap="square" anchor="t" lIns="36000" rIns="36000" tIns="18000" bIns="18000">
+            <a:spAutoFit/>
+          </a:bodyPr>
+          <a:lstStyle/>
+          <a:p>
+            <a:pPr algn="l"/>
+            <a:r>
+              <a:rPr sz="1200" b="0" i="0">
+                <a:solidFill>
+                  <a:srgbClr val="475569"/>
+                </a:solidFill>
+                <a:latin typeface="Noto Sans JP"/>
+              </a:rPr>
+              <a:t>CSP が焼結し多孔質シリカ層を形成。</a:t>
+            </a:r>
+          </a:p>
+        </p:txBody>
+      </p:sp>
+      <p:sp>
+        <p:nvSpPr>
+          <p:cNvPr id="48" name="Rounded Rectangle 47"/>
+          <p:cNvSpPr/>
+          <p:nvPr/>
+        </p:nvSpPr>
+        <p:spPr>
+          <a:xfrm>
+            <a:off x="9349511" y="4078224"/>
+            <a:ext cx="2293543" cy="420624"/>
           </a:xfrm>
           <a:prstGeom prst="roundRect">
             <a:avLst>
-              <a:gd name="adj" fmla="val 3000"/>
+              <a:gd name="adj" fmla="val 6000"/>
             </a:avLst>
           </a:prstGeom>
           <a:solidFill>
-            <a:srgbClr val="F1F5F9"/>
+            <a:srgbClr val="FFFFFF"/>
           </a:solidFill>
           <a:ln w="8890">
             <a:solidFill>
@@ -4684,156 +5471,54 @@
       </p:sp>
       <p:sp>
         <p:nvSpPr>
-          <p:cNvPr id="28" name="Rectangle 27"/>
+          <p:cNvPr id="49" name="TextBox 48"/>
+          <p:cNvSpPr txBox="1"/>
+          <p:nvPr/>
+        </p:nvSpPr>
+        <p:spPr>
+          <a:xfrm>
+            <a:off x="9349511" y="4078224"/>
+            <a:ext cx="2293543" cy="420624"/>
+          </a:xfrm>
+          <a:prstGeom prst="rect">
+            <a:avLst/>
+          </a:prstGeom>
+          <a:noFill/>
+        </p:spPr>
+        <p:txBody>
+          <a:bodyPr wrap="square" anchor="ctr" lIns="36000" rIns="36000" tIns="18000" bIns="18000">
+            <a:spAutoFit/>
+          </a:bodyPr>
+          <a:lstStyle/>
+          <a:p>
+            <a:pPr algn="ctr"/>
+            <a:r>
+              <a:rPr sz="1100" b="1" i="0">
+                <a:solidFill>
+                  <a:srgbClr val="9F7639"/>
+                </a:solidFill>
+                <a:latin typeface="Noto Sans JP"/>
+              </a:rPr>
+              <a:t>断熱バリアとして機能</a:t>
+            </a:r>
+          </a:p>
+        </p:txBody>
+      </p:sp>
+      <p:sp>
+        <p:nvSpPr>
+          <p:cNvPr id="50" name="Rounded Rectangle 49"/>
           <p:cNvSpPr/>
           <p:nvPr/>
         </p:nvSpPr>
         <p:spPr>
           <a:xfrm>
-            <a:off x="3927709" y="3785616"/>
-            <a:ext cx="1114164" cy="36576"/>
-          </a:xfrm>
-          <a:prstGeom prst="rect">
-            <a:avLst/>
-          </a:prstGeom>
-          <a:solidFill>
-            <a:srgbClr val="9F7639"/>
-          </a:solidFill>
-          <a:ln>
-            <a:noFill/>
-          </a:ln>
-          <a:effectLst/>
-        </p:spPr>
-        <p:style>
-          <a:lnRef idx="1">
-            <a:schemeClr val="accent1"/>
-          </a:lnRef>
-          <a:fillRef idx="3">
-            <a:schemeClr val="accent1"/>
-          </a:fillRef>
-          <a:effectRef idx="2">
-            <a:schemeClr val="accent1"/>
-          </a:effectRef>
-          <a:fontRef idx="minor">
-            <a:schemeClr val="lt1"/>
-          </a:fontRef>
-        </p:style>
-        <p:txBody>
-          <a:bodyPr rtlCol="0" anchor="ctr"/>
-          <a:lstStyle/>
-          <a:p>
-            <a:pPr algn="ctr"/>
-          </a:p>
-        </p:txBody>
-      </p:sp>
-      <p:sp>
-        <p:nvSpPr>
-          <p:cNvPr id="29" name="TextBox 28"/>
-          <p:cNvSpPr txBox="1"/>
-          <p:nvPr/>
-        </p:nvSpPr>
-        <p:spPr>
-          <a:xfrm>
-            <a:off x="3927709" y="3785616"/>
-            <a:ext cx="1114164" cy="640080"/>
-          </a:xfrm>
-          <a:prstGeom prst="rect">
-            <a:avLst/>
-          </a:prstGeom>
-          <a:noFill/>
-        </p:spPr>
-        <p:txBody>
-          <a:bodyPr wrap="square" anchor="ctr" lIns="36000" rIns="36000" tIns="18000" bIns="18000">
-            <a:spAutoFit/>
-          </a:bodyPr>
-          <a:lstStyle/>
-          <a:p>
-            <a:pPr algn="ctr"/>
-            <a:r>
-              <a:rPr sz="900" b="1" i="0">
-                <a:solidFill>
-                  <a:srgbClr val="1E293B"/>
-                </a:solidFill>
-                <a:latin typeface="Noto Sans JP"/>
-              </a:rPr>
-              <a:t>エアロゲル</a:t>
-            </a:r>
-          </a:p>
-          <a:p>
-            <a:pPr algn="ctr"/>
-            <a:r>
-              <a:rPr sz="900" b="1" i="0">
-                <a:solidFill>
-                  <a:srgbClr val="1E293B"/>
-                </a:solidFill>
-                <a:latin typeface="Noto Sans JP"/>
-              </a:rPr>
-              <a:t>（炎）</a:t>
-            </a:r>
-          </a:p>
-        </p:txBody>
-      </p:sp>
-      <p:sp>
-        <p:nvSpPr>
-          <p:cNvPr id="30" name="Rounded Rectangle 29"/>
-          <p:cNvSpPr/>
-          <p:nvPr/>
-        </p:nvSpPr>
-        <p:spPr>
-          <a:xfrm>
-            <a:off x="5224753" y="859536"/>
-            <a:ext cx="6601181" cy="5394960"/>
+            <a:off x="365760" y="4846320"/>
+            <a:ext cx="11460175" cy="1755648"/>
           </a:xfrm>
           <a:prstGeom prst="roundRect">
             <a:avLst>
-              <a:gd name="adj" fmla="val 2000"/>
+              <a:gd name="adj" fmla="val 5000"/>
             </a:avLst>
-          </a:prstGeom>
-          <a:solidFill>
-            <a:srgbClr val="F5F8FC"/>
-          </a:solidFill>
-          <a:ln w="12700">
-            <a:solidFill>
-              <a:srgbClr val="C0D0E0"/>
-            </a:solidFill>
-          </a:ln>
-          <a:effectLst/>
-        </p:spPr>
-        <p:style>
-          <a:lnRef idx="1">
-            <a:schemeClr val="accent1"/>
-          </a:lnRef>
-          <a:fillRef idx="3">
-            <a:schemeClr val="accent1"/>
-          </a:fillRef>
-          <a:effectRef idx="2">
-            <a:schemeClr val="accent1"/>
-          </a:effectRef>
-          <a:fontRef idx="minor">
-            <a:schemeClr val="lt1"/>
-          </a:fontRef>
-        </p:style>
-        <p:txBody>
-          <a:bodyPr rtlCol="0" anchor="ctr"/>
-          <a:lstStyle/>
-          <a:p>
-            <a:pPr algn="ctr"/>
-          </a:p>
-        </p:txBody>
-      </p:sp>
-      <p:sp>
-        <p:nvSpPr>
-          <p:cNvPr id="31" name="Rectangle 30"/>
-          <p:cNvSpPr/>
-          <p:nvPr/>
-        </p:nvSpPr>
-        <p:spPr>
-          <a:xfrm>
-            <a:off x="5334481" y="969264"/>
-            <a:ext cx="868680" cy="292608"/>
-          </a:xfrm>
-          <a:prstGeom prst="rect">
-            <a:avLst/>
           </a:prstGeom>
           <a:solidFill>
             <a:srgbClr val="1E293B"/>
@@ -4867,14 +5552,58 @@
       </p:sp>
       <p:sp>
         <p:nvSpPr>
-          <p:cNvPr id="32" name="TextBox 31"/>
-          <p:cNvSpPr txBox="1"/>
-          <p:nvPr/>
-        </p:nvSpPr>
-        <p:spPr>
-          <a:xfrm>
-            <a:off x="5334481" y="969264"/>
-            <a:ext cx="868680" cy="292608"/>
+          <p:cNvPr id="51" name="Rectangle 50"/>
+          <p:cNvSpPr/>
+          <p:nvPr/>
+        </p:nvSpPr>
+        <p:spPr>
+          <a:xfrm>
+            <a:off x="365760" y="4846320"/>
+            <a:ext cx="73152" cy="1755648"/>
+          </a:xfrm>
+          <a:prstGeom prst="rect">
+            <a:avLst/>
+          </a:prstGeom>
+          <a:solidFill>
+            <a:srgbClr val="D4A574"/>
+          </a:solidFill>
+          <a:ln>
+            <a:noFill/>
+          </a:ln>
+          <a:effectLst/>
+        </p:spPr>
+        <p:style>
+          <a:lnRef idx="1">
+            <a:schemeClr val="accent1"/>
+          </a:lnRef>
+          <a:fillRef idx="3">
+            <a:schemeClr val="accent1"/>
+          </a:fillRef>
+          <a:effectRef idx="2">
+            <a:schemeClr val="accent1"/>
+          </a:effectRef>
+          <a:fontRef idx="minor">
+            <a:schemeClr val="lt1"/>
+          </a:fontRef>
+        </p:style>
+        <p:txBody>
+          <a:bodyPr rtlCol="0" anchor="ctr"/>
+          <a:lstStyle/>
+          <a:p>
+            <a:pPr algn="ctr"/>
+          </a:p>
+        </p:txBody>
+      </p:sp>
+      <p:sp>
+        <p:nvSpPr>
+          <p:cNvPr id="52" name="TextBox 51"/>
+          <p:cNvSpPr txBox="1"/>
+          <p:nvPr/>
+        </p:nvSpPr>
+        <p:spPr>
+          <a:xfrm>
+            <a:off x="640080" y="4846320"/>
+            <a:ext cx="2194560" cy="1755648"/>
           </a:xfrm>
           <a:prstGeom prst="rect">
             <a:avLst/>
@@ -4887,85 +5616,50 @@
           </a:bodyPr>
           <a:lstStyle/>
           <a:p>
-            <a:pPr algn="ctr"/>
-            <a:r>
-              <a:rPr sz="1100" b="1" i="0">
+            <a:pPr algn="l"/>
+            <a:r>
+              <a:rPr sz="1300" b="1" i="0">
+                <a:solidFill>
+                  <a:srgbClr val="D4A574"/>
+                </a:solidFill>
+                <a:latin typeface="Noto Sans JP"/>
+              </a:rPr>
+              <a:t>POINT</a:t>
+            </a:r>
+          </a:p>
+        </p:txBody>
+      </p:sp>
+      <p:sp>
+        <p:nvSpPr>
+          <p:cNvPr id="53" name="TextBox 52"/>
+          <p:cNvSpPr txBox="1"/>
+          <p:nvPr/>
+        </p:nvSpPr>
+        <p:spPr>
+          <a:xfrm>
+            <a:off x="2194560" y="4846320"/>
+            <a:ext cx="9357055" cy="1755648"/>
+          </a:xfrm>
+          <a:prstGeom prst="rect">
+            <a:avLst/>
+          </a:prstGeom>
+          <a:noFill/>
+        </p:spPr>
+        <p:txBody>
+          <a:bodyPr wrap="square" anchor="ctr" lIns="36000" rIns="36000" tIns="18000" bIns="18000">
+            <a:spAutoFit/>
+          </a:bodyPr>
+          <a:lstStyle/>
+          <a:p>
+            <a:pPr algn="l"/>
+            <a:r>
+              <a:rPr sz="1300" b="0" i="0">
                 <a:solidFill>
                   <a:srgbClr val="FFFFFF"/>
                 </a:solidFill>
                 <a:latin typeface="Noto Sans JP"/>
               </a:rPr>
-              <a:t>Fig. 概念</a:t>
-            </a:r>
-          </a:p>
-        </p:txBody>
-      </p:sp>
-      <p:sp>
-        <p:nvSpPr>
-          <p:cNvPr id="33" name="TextBox 32"/>
-          <p:cNvSpPr txBox="1"/>
-          <p:nvPr/>
-        </p:nvSpPr>
-        <p:spPr>
-          <a:xfrm>
-            <a:off x="5224753" y="859536"/>
-            <a:ext cx="6601181" cy="5394960"/>
-          </a:xfrm>
-          <a:prstGeom prst="rect">
-            <a:avLst/>
-          </a:prstGeom>
-          <a:noFill/>
-        </p:spPr>
-        <p:txBody>
-          <a:bodyPr wrap="square" anchor="ctr" lIns="36000" rIns="36000" tIns="18000" bIns="18000">
-            <a:spAutoFit/>
-          </a:bodyPr>
-          <a:lstStyle/>
-          <a:p>
-            <a:pPr algn="ctr"/>
-            <a:r>
-              <a:rPr sz="1200" b="0" i="0">
-                <a:solidFill>
-                  <a:srgbClr val="AAB4C0"/>
-                </a:solidFill>
-                <a:latin typeface="Noto Sans JP"/>
-              </a:rPr>
-              <a:t>（論文の図を貼り付け）</a:t>
-            </a:r>
-          </a:p>
-        </p:txBody>
-      </p:sp>
-      <p:sp>
-        <p:nvSpPr>
-          <p:cNvPr id="34" name="TextBox 33"/>
-          <p:cNvSpPr txBox="1"/>
-          <p:nvPr/>
-        </p:nvSpPr>
-        <p:spPr>
-          <a:xfrm>
-            <a:off x="5224753" y="6291072"/>
-            <a:ext cx="6601181" cy="274320"/>
-          </a:xfrm>
-          <a:prstGeom prst="rect">
-            <a:avLst/>
-          </a:prstGeom>
-          <a:noFill/>
-        </p:spPr>
-        <p:txBody>
-          <a:bodyPr wrap="square" anchor="t" lIns="36000" rIns="36000" tIns="18000" bIns="18000">
-            <a:spAutoFit/>
-          </a:bodyPr>
-          <a:lstStyle/>
-          <a:p>
-            <a:pPr algn="ctr"/>
-            <a:r>
-              <a:rPr sz="1000" b="0" i="1">
-                <a:solidFill>
-                  <a:srgbClr val="64748B"/>
-                </a:solidFill>
-                <a:latin typeface="Noto Sans JP"/>
-              </a:rPr>
-              <a:t>セルロース系ポリマー × コロイダルシリカ → シリカエアロゲル形成の概念模式図</a:t>
+              <a:t>MC の温度応答性（LCST）に頼らず、レオロジー特性だけで「飛ばす→留める→固める」を実現する点が本材料の核心です。</a:t>
             </a:r>
           </a:p>
         </p:txBody>
@@ -58048,18 +58742,53 @@
       </p:sp>
       <p:sp>
         <p:nvSpPr>
-          <p:cNvPr id="10" name="Rounded Rectangle 9"/>
+          <p:cNvPr id="10" name="TextBox 9"/>
+          <p:cNvSpPr txBox="1"/>
+          <p:nvPr/>
+        </p:nvSpPr>
+        <p:spPr>
+          <a:xfrm>
+            <a:off x="365760" y="859536"/>
+            <a:ext cx="11460175" cy="457200"/>
+          </a:xfrm>
+          <a:prstGeom prst="rect">
+            <a:avLst/>
+          </a:prstGeom>
+          <a:noFill/>
+        </p:spPr>
+        <p:txBody>
+          <a:bodyPr wrap="square" anchor="ctr" lIns="36000" rIns="36000" tIns="18000" bIns="18000">
+            <a:spAutoFit/>
+          </a:bodyPr>
+          <a:lstStyle/>
+          <a:p>
+            <a:pPr algn="l"/>
+            <a:r>
+              <a:rPr sz="1400" b="0" i="0">
+                <a:solidFill>
+                  <a:srgbClr val="334155"/>
+                </a:solidFill>
+                <a:latin typeface="Noto Sans JP"/>
+              </a:rPr>
+              <a:t>本ゲルは「骨格・機能・結合」を担う3要素で構成され、生分解性と高性能を両立します。</a:t>
+            </a:r>
+          </a:p>
+        </p:txBody>
+      </p:sp>
+      <p:sp>
+        <p:nvSpPr>
+          <p:cNvPr id="11" name="Rounded Rectangle 10"/>
           <p:cNvSpPr/>
           <p:nvPr/>
         </p:nvSpPr>
         <p:spPr>
           <a:xfrm>
-            <a:off x="365760" y="859536"/>
-            <a:ext cx="3637178" cy="5303520"/>
+            <a:off x="365760" y="1444752"/>
+            <a:ext cx="3637178" cy="5138928"/>
           </a:xfrm>
           <a:prstGeom prst="roundRect">
             <a:avLst>
-              <a:gd name="adj" fmla="val 4000"/>
+              <a:gd name="adj" fmla="val 3500"/>
             </a:avLst>
           </a:prstGeom>
           <a:solidFill>
@@ -58096,14 +58825,14 @@
       </p:sp>
       <p:sp>
         <p:nvSpPr>
-          <p:cNvPr id="11" name="Rectangle 10"/>
+          <p:cNvPr id="12" name="Rectangle 11"/>
           <p:cNvSpPr/>
           <p:nvPr/>
         </p:nvSpPr>
         <p:spPr>
           <a:xfrm>
-            <a:off x="365760" y="859536"/>
-            <a:ext cx="3637178" cy="45720"/>
+            <a:off x="365760" y="1444752"/>
+            <a:ext cx="3637178" cy="54864"/>
           </a:xfrm>
           <a:prstGeom prst="rect">
             <a:avLst/>
@@ -58140,14 +58869,14 @@
       </p:sp>
       <p:sp>
         <p:nvSpPr>
-          <p:cNvPr id="12" name="TextBox 11"/>
-          <p:cNvSpPr txBox="1"/>
-          <p:nvPr/>
-        </p:nvSpPr>
-        <p:spPr>
-          <a:xfrm>
-            <a:off x="365760" y="1225296"/>
-            <a:ext cx="3637178" cy="548640"/>
+          <p:cNvPr id="13" name="TextBox 12"/>
+          <p:cNvSpPr txBox="1"/>
+          <p:nvPr/>
+        </p:nvSpPr>
+        <p:spPr>
+          <a:xfrm>
+            <a:off x="365760" y="1719072"/>
+            <a:ext cx="3637178" cy="512064"/>
           </a:xfrm>
           <a:prstGeom prst="rect">
             <a:avLst/>
@@ -58162,7 +58891,7 @@
           <a:p>
             <a:pPr algn="ctr"/>
             <a:r>
-              <a:rPr sz="3200" b="0" i="0">
+              <a:rPr sz="3000" b="0" i="0">
                 <a:solidFill>
                   <a:srgbClr val="3B5174"/>
                 </a:solidFill>
@@ -58175,14 +58904,14 @@
       </p:sp>
       <p:sp>
         <p:nvSpPr>
-          <p:cNvPr id="13" name="TextBox 12"/>
-          <p:cNvSpPr txBox="1"/>
-          <p:nvPr/>
-        </p:nvSpPr>
-        <p:spPr>
-          <a:xfrm>
-            <a:off x="566928" y="1865376"/>
-            <a:ext cx="3234842" cy="512064"/>
+          <p:cNvPr id="14" name="TextBox 13"/>
+          <p:cNvSpPr txBox="1"/>
+          <p:nvPr/>
+        </p:nvSpPr>
+        <p:spPr>
+          <a:xfrm>
+            <a:off x="585216" y="2286000"/>
+            <a:ext cx="3198266" cy="384048"/>
           </a:xfrm>
           <a:prstGeom prst="rect">
             <a:avLst/>
@@ -58210,14 +58939,49 @@
       </p:sp>
       <p:sp>
         <p:nvSpPr>
-          <p:cNvPr id="14" name="Rectangle 13"/>
+          <p:cNvPr id="15" name="TextBox 14"/>
+          <p:cNvSpPr txBox="1"/>
+          <p:nvPr/>
+        </p:nvSpPr>
+        <p:spPr>
+          <a:xfrm>
+            <a:off x="585216" y="2670048"/>
+            <a:ext cx="3198266" cy="256032"/>
+          </a:xfrm>
+          <a:prstGeom prst="rect">
+            <a:avLst/>
+          </a:prstGeom>
+          <a:noFill/>
+        </p:spPr>
+        <p:txBody>
+          <a:bodyPr wrap="square" anchor="t" lIns="36000" rIns="36000" tIns="18000" bIns="18000">
+            <a:spAutoFit/>
+          </a:bodyPr>
+          <a:lstStyle/>
+          <a:p>
+            <a:pPr algn="ctr"/>
+            <a:r>
+              <a:rPr sz="1000" b="0" i="1">
+                <a:solidFill>
+                  <a:srgbClr val="64748B"/>
+                </a:solidFill>
+                <a:latin typeface="Noto Sans JP"/>
+              </a:rPr>
+              <a:t>Cellulose derivatives</a:t>
+            </a:r>
+          </a:p>
+        </p:txBody>
+      </p:sp>
+      <p:sp>
+        <p:nvSpPr>
+          <p:cNvPr id="16" name="Rectangle 15"/>
           <p:cNvSpPr/>
           <p:nvPr/>
         </p:nvSpPr>
         <p:spPr>
           <a:xfrm>
-            <a:off x="640080" y="2414016"/>
-            <a:ext cx="3088538" cy="13716"/>
+            <a:off x="658368" y="2999232"/>
+            <a:ext cx="3051962" cy="13716"/>
           </a:xfrm>
           <a:prstGeom prst="rect">
             <a:avLst/>
@@ -58254,53 +59018,407 @@
       </p:sp>
       <p:sp>
         <p:nvSpPr>
-          <p:cNvPr id="15" name="TextBox 14"/>
-          <p:cNvSpPr txBox="1"/>
-          <p:nvPr/>
-        </p:nvSpPr>
-        <p:spPr>
-          <a:xfrm>
-            <a:off x="566928" y="2560320"/>
-            <a:ext cx="3234842" cy="3383280"/>
-          </a:xfrm>
-          <a:prstGeom prst="rect">
-            <a:avLst/>
-          </a:prstGeom>
-          <a:noFill/>
-        </p:spPr>
-        <p:txBody>
-          <a:bodyPr wrap="square" anchor="t" lIns="36000" rIns="36000" tIns="18000" bIns="18000">
-            <a:spAutoFit/>
-          </a:bodyPr>
-          <a:lstStyle/>
-          <a:p>
-            <a:pPr algn="ctr"/>
-            <a:r>
-              <a:rPr sz="1300" b="0" i="0">
+          <p:cNvPr id="17" name="TextBox 16"/>
+          <p:cNvSpPr txBox="1"/>
+          <p:nvPr/>
+        </p:nvSpPr>
+        <p:spPr>
+          <a:xfrm>
+            <a:off x="585216" y="3127248"/>
+            <a:ext cx="3198266" cy="914400"/>
+          </a:xfrm>
+          <a:prstGeom prst="rect">
+            <a:avLst/>
+          </a:prstGeom>
+          <a:noFill/>
+        </p:spPr>
+        <p:txBody>
+          <a:bodyPr wrap="square" anchor="t" lIns="36000" rIns="36000" tIns="18000" bIns="18000">
+            <a:spAutoFit/>
+          </a:bodyPr>
+          <a:lstStyle/>
+          <a:p>
+            <a:pPr algn="ctr"/>
+            <a:r>
+              <a:rPr sz="1200" b="0" i="0">
                 <a:solidFill>
                   <a:srgbClr val="475569"/>
                 </a:solidFill>
                 <a:latin typeface="Noto Sans JP"/>
               </a:rPr>
-              <a:t>植物由来のバイオポリマー。生分解性が高く、ネットワークの骨格を形成します。</a:t>
-            </a:r>
-          </a:p>
-        </p:txBody>
-      </p:sp>
-      <p:sp>
-        <p:nvSpPr>
-          <p:cNvPr id="16" name="Rounded Rectangle 15"/>
+              <a:t>植物由来のバイオポリマー。ゲルネットワークの骨格を形成します。</a:t>
+            </a:r>
+          </a:p>
+        </p:txBody>
+      </p:sp>
+      <p:sp>
+        <p:nvSpPr>
+          <p:cNvPr id="18" name="Rounded Rectangle 17"/>
           <p:cNvSpPr/>
           <p:nvPr/>
         </p:nvSpPr>
         <p:spPr>
           <a:xfrm>
-            <a:off x="4277258" y="859536"/>
-            <a:ext cx="3637178" cy="5303520"/>
+            <a:off x="585216" y="4279392"/>
+            <a:ext cx="841248" cy="292608"/>
           </a:xfrm>
           <a:prstGeom prst="roundRect">
             <a:avLst>
-              <a:gd name="adj" fmla="val 4000"/>
+              <a:gd name="adj" fmla="val 50000"/>
+            </a:avLst>
+          </a:prstGeom>
+          <a:solidFill>
+            <a:srgbClr val="FFFFFF"/>
+          </a:solidFill>
+          <a:ln w="8890">
+            <a:solidFill>
+              <a:srgbClr val="3B5174"/>
+            </a:solidFill>
+          </a:ln>
+          <a:effectLst/>
+        </p:spPr>
+        <p:style>
+          <a:lnRef idx="1">
+            <a:schemeClr val="accent1"/>
+          </a:lnRef>
+          <a:fillRef idx="3">
+            <a:schemeClr val="accent1"/>
+          </a:fillRef>
+          <a:effectRef idx="2">
+            <a:schemeClr val="accent1"/>
+          </a:effectRef>
+          <a:fontRef idx="minor">
+            <a:schemeClr val="lt1"/>
+          </a:fontRef>
+        </p:style>
+        <p:txBody>
+          <a:bodyPr rtlCol="0" anchor="ctr"/>
+          <a:lstStyle/>
+          <a:p>
+            <a:pPr algn="ctr"/>
+          </a:p>
+        </p:txBody>
+      </p:sp>
+      <p:sp>
+        <p:nvSpPr>
+          <p:cNvPr id="19" name="TextBox 18"/>
+          <p:cNvSpPr txBox="1"/>
+          <p:nvPr/>
+        </p:nvSpPr>
+        <p:spPr>
+          <a:xfrm>
+            <a:off x="585216" y="4279392"/>
+            <a:ext cx="841248" cy="292608"/>
+          </a:xfrm>
+          <a:prstGeom prst="rect">
+            <a:avLst/>
+          </a:prstGeom>
+          <a:noFill/>
+        </p:spPr>
+        <p:txBody>
+          <a:bodyPr wrap="square" anchor="ctr" lIns="36000" rIns="36000" tIns="18000" bIns="18000">
+            <a:spAutoFit/>
+          </a:bodyPr>
+          <a:lstStyle/>
+          <a:p>
+            <a:pPr algn="ctr"/>
+            <a:r>
+              <a:rPr sz="1000" b="1" i="0">
+                <a:solidFill>
+                  <a:srgbClr val="3B5174"/>
+                </a:solidFill>
+                <a:latin typeface="Noto Sans JP"/>
+              </a:rPr>
+              <a:t>3種</a:t>
+            </a:r>
+          </a:p>
+        </p:txBody>
+      </p:sp>
+      <p:sp>
+        <p:nvSpPr>
+          <p:cNvPr id="20" name="TextBox 19"/>
+          <p:cNvSpPr txBox="1"/>
+          <p:nvPr/>
+        </p:nvSpPr>
+        <p:spPr>
+          <a:xfrm>
+            <a:off x="1517904" y="4242816"/>
+            <a:ext cx="2265578" cy="365760"/>
+          </a:xfrm>
+          <a:prstGeom prst="rect">
+            <a:avLst/>
+          </a:prstGeom>
+          <a:noFill/>
+        </p:spPr>
+        <p:txBody>
+          <a:bodyPr wrap="square" anchor="ctr" lIns="36000" rIns="36000" tIns="18000" bIns="18000">
+            <a:spAutoFit/>
+          </a:bodyPr>
+          <a:lstStyle/>
+          <a:p>
+            <a:pPr algn="l"/>
+            <a:r>
+              <a:rPr sz="1100" b="0" i="0">
+                <a:solidFill>
+                  <a:srgbClr val="334155"/>
+                </a:solidFill>
+                <a:latin typeface="Noto Sans JP"/>
+              </a:rPr>
+              <a:t>HEC・MC・MHEC を使用</a:t>
+            </a:r>
+          </a:p>
+        </p:txBody>
+      </p:sp>
+      <p:sp>
+        <p:nvSpPr>
+          <p:cNvPr id="21" name="Rounded Rectangle 20"/>
+          <p:cNvSpPr/>
+          <p:nvPr/>
+        </p:nvSpPr>
+        <p:spPr>
+          <a:xfrm>
+            <a:off x="585216" y="4956048"/>
+            <a:ext cx="841248" cy="292608"/>
+          </a:xfrm>
+          <a:prstGeom prst="roundRect">
+            <a:avLst>
+              <a:gd name="adj" fmla="val 50000"/>
+            </a:avLst>
+          </a:prstGeom>
+          <a:solidFill>
+            <a:srgbClr val="FFFFFF"/>
+          </a:solidFill>
+          <a:ln w="8890">
+            <a:solidFill>
+              <a:srgbClr val="3B5174"/>
+            </a:solidFill>
+          </a:ln>
+          <a:effectLst/>
+        </p:spPr>
+        <p:style>
+          <a:lnRef idx="1">
+            <a:schemeClr val="accent1"/>
+          </a:lnRef>
+          <a:fillRef idx="3">
+            <a:schemeClr val="accent1"/>
+          </a:fillRef>
+          <a:effectRef idx="2">
+            <a:schemeClr val="accent1"/>
+          </a:effectRef>
+          <a:fontRef idx="minor">
+            <a:schemeClr val="lt1"/>
+          </a:fontRef>
+        </p:style>
+        <p:txBody>
+          <a:bodyPr rtlCol="0" anchor="ctr"/>
+          <a:lstStyle/>
+          <a:p>
+            <a:pPr algn="ctr"/>
+          </a:p>
+        </p:txBody>
+      </p:sp>
+      <p:sp>
+        <p:nvSpPr>
+          <p:cNvPr id="22" name="TextBox 21"/>
+          <p:cNvSpPr txBox="1"/>
+          <p:nvPr/>
+        </p:nvSpPr>
+        <p:spPr>
+          <a:xfrm>
+            <a:off x="585216" y="4956048"/>
+            <a:ext cx="841248" cy="292608"/>
+          </a:xfrm>
+          <a:prstGeom prst="rect">
+            <a:avLst/>
+          </a:prstGeom>
+          <a:noFill/>
+        </p:spPr>
+        <p:txBody>
+          <a:bodyPr wrap="square" anchor="ctr" lIns="36000" rIns="36000" tIns="18000" bIns="18000">
+            <a:spAutoFit/>
+          </a:bodyPr>
+          <a:lstStyle/>
+          <a:p>
+            <a:pPr algn="ctr"/>
+            <a:r>
+              <a:rPr sz="1000" b="1" i="0">
+                <a:solidFill>
+                  <a:srgbClr val="3B5174"/>
+                </a:solidFill>
+                <a:latin typeface="Noto Sans JP"/>
+              </a:rPr>
+              <a:t>生分解性</a:t>
+            </a:r>
+          </a:p>
+        </p:txBody>
+      </p:sp>
+      <p:sp>
+        <p:nvSpPr>
+          <p:cNvPr id="23" name="TextBox 22"/>
+          <p:cNvSpPr txBox="1"/>
+          <p:nvPr/>
+        </p:nvSpPr>
+        <p:spPr>
+          <a:xfrm>
+            <a:off x="1517904" y="4919472"/>
+            <a:ext cx="2265578" cy="365760"/>
+          </a:xfrm>
+          <a:prstGeom prst="rect">
+            <a:avLst/>
+          </a:prstGeom>
+          <a:noFill/>
+        </p:spPr>
+        <p:txBody>
+          <a:bodyPr wrap="square" anchor="ctr" lIns="36000" rIns="36000" tIns="18000" bIns="18000">
+            <a:spAutoFit/>
+          </a:bodyPr>
+          <a:lstStyle/>
+          <a:p>
+            <a:pPr algn="l"/>
+            <a:r>
+              <a:rPr sz="1100" b="0" i="0">
+                <a:solidFill>
+                  <a:srgbClr val="334155"/>
+                </a:solidFill>
+                <a:latin typeface="Noto Sans JP"/>
+              </a:rPr>
+              <a:t>環境負荷が低い</a:t>
+            </a:r>
+          </a:p>
+        </p:txBody>
+      </p:sp>
+      <p:sp>
+        <p:nvSpPr>
+          <p:cNvPr id="24" name="Rounded Rectangle 23"/>
+          <p:cNvSpPr/>
+          <p:nvPr/>
+        </p:nvSpPr>
+        <p:spPr>
+          <a:xfrm>
+            <a:off x="585216" y="5632704"/>
+            <a:ext cx="841248" cy="292608"/>
+          </a:xfrm>
+          <a:prstGeom prst="roundRect">
+            <a:avLst>
+              <a:gd name="adj" fmla="val 50000"/>
+            </a:avLst>
+          </a:prstGeom>
+          <a:solidFill>
+            <a:srgbClr val="FFFFFF"/>
+          </a:solidFill>
+          <a:ln w="8890">
+            <a:solidFill>
+              <a:srgbClr val="3B5174"/>
+            </a:solidFill>
+          </a:ln>
+          <a:effectLst/>
+        </p:spPr>
+        <p:style>
+          <a:lnRef idx="1">
+            <a:schemeClr val="accent1"/>
+          </a:lnRef>
+          <a:fillRef idx="3">
+            <a:schemeClr val="accent1"/>
+          </a:fillRef>
+          <a:effectRef idx="2">
+            <a:schemeClr val="accent1"/>
+          </a:effectRef>
+          <a:fontRef idx="minor">
+            <a:schemeClr val="lt1"/>
+          </a:fontRef>
+        </p:style>
+        <p:txBody>
+          <a:bodyPr rtlCol="0" anchor="ctr"/>
+          <a:lstStyle/>
+          <a:p>
+            <a:pPr algn="ctr"/>
+          </a:p>
+        </p:txBody>
+      </p:sp>
+      <p:sp>
+        <p:nvSpPr>
+          <p:cNvPr id="25" name="TextBox 24"/>
+          <p:cNvSpPr txBox="1"/>
+          <p:nvPr/>
+        </p:nvSpPr>
+        <p:spPr>
+          <a:xfrm>
+            <a:off x="585216" y="5632704"/>
+            <a:ext cx="841248" cy="292608"/>
+          </a:xfrm>
+          <a:prstGeom prst="rect">
+            <a:avLst/>
+          </a:prstGeom>
+          <a:noFill/>
+        </p:spPr>
+        <p:txBody>
+          <a:bodyPr wrap="square" anchor="ctr" lIns="36000" rIns="36000" tIns="18000" bIns="18000">
+            <a:spAutoFit/>
+          </a:bodyPr>
+          <a:lstStyle/>
+          <a:p>
+            <a:pPr algn="ctr"/>
+            <a:r>
+              <a:rPr sz="1000" b="1" i="0">
+                <a:solidFill>
+                  <a:srgbClr val="3B5174"/>
+                </a:solidFill>
+                <a:latin typeface="Noto Sans JP"/>
+              </a:rPr>
+              <a:t>役割</a:t>
+            </a:r>
+          </a:p>
+        </p:txBody>
+      </p:sp>
+      <p:sp>
+        <p:nvSpPr>
+          <p:cNvPr id="26" name="TextBox 25"/>
+          <p:cNvSpPr txBox="1"/>
+          <p:nvPr/>
+        </p:nvSpPr>
+        <p:spPr>
+          <a:xfrm>
+            <a:off x="1517904" y="5596128"/>
+            <a:ext cx="2265578" cy="365760"/>
+          </a:xfrm>
+          <a:prstGeom prst="rect">
+            <a:avLst/>
+          </a:prstGeom>
+          <a:noFill/>
+        </p:spPr>
+        <p:txBody>
+          <a:bodyPr wrap="square" anchor="ctr" lIns="36000" rIns="36000" tIns="18000" bIns="18000">
+            <a:spAutoFit/>
+          </a:bodyPr>
+          <a:lstStyle/>
+          <a:p>
+            <a:pPr algn="l"/>
+            <a:r>
+              <a:rPr sz="1100" b="0" i="0">
+                <a:solidFill>
+                  <a:srgbClr val="334155"/>
+                </a:solidFill>
+                <a:latin typeface="Noto Sans JP"/>
+              </a:rPr>
+              <a:t>粘性・構造の土台</a:t>
+            </a:r>
+          </a:p>
+        </p:txBody>
+      </p:sp>
+      <p:sp>
+        <p:nvSpPr>
+          <p:cNvPr id="27" name="Rounded Rectangle 26"/>
+          <p:cNvSpPr/>
+          <p:nvPr/>
+        </p:nvSpPr>
+        <p:spPr>
+          <a:xfrm>
+            <a:off x="4277258" y="1444752"/>
+            <a:ext cx="3637178" cy="5138928"/>
+          </a:xfrm>
+          <a:prstGeom prst="roundRect">
+            <a:avLst>
+              <a:gd name="adj" fmla="val 3500"/>
             </a:avLst>
           </a:prstGeom>
           <a:solidFill>
@@ -58337,14 +59455,14 @@
       </p:sp>
       <p:sp>
         <p:nvSpPr>
-          <p:cNvPr id="17" name="Rectangle 16"/>
+          <p:cNvPr id="28" name="Rectangle 27"/>
           <p:cNvSpPr/>
           <p:nvPr/>
         </p:nvSpPr>
         <p:spPr>
           <a:xfrm>
-            <a:off x="4277258" y="859536"/>
-            <a:ext cx="3637178" cy="45720"/>
+            <a:off x="4277258" y="1444752"/>
+            <a:ext cx="3637178" cy="54864"/>
           </a:xfrm>
           <a:prstGeom prst="rect">
             <a:avLst/>
@@ -58381,14 +59499,14 @@
       </p:sp>
       <p:sp>
         <p:nvSpPr>
-          <p:cNvPr id="18" name="TextBox 17"/>
-          <p:cNvSpPr txBox="1"/>
-          <p:nvPr/>
-        </p:nvSpPr>
-        <p:spPr>
-          <a:xfrm>
-            <a:off x="4277258" y="1225296"/>
-            <a:ext cx="3637178" cy="548640"/>
+          <p:cNvPr id="29" name="TextBox 28"/>
+          <p:cNvSpPr txBox="1"/>
+          <p:nvPr/>
+        </p:nvSpPr>
+        <p:spPr>
+          <a:xfrm>
+            <a:off x="4277258" y="1719072"/>
+            <a:ext cx="3637178" cy="512064"/>
           </a:xfrm>
           <a:prstGeom prst="rect">
             <a:avLst/>
@@ -58403,7 +59521,7 @@
           <a:p>
             <a:pPr algn="ctr"/>
             <a:r>
-              <a:rPr sz="3200" b="0" i="0">
+              <a:rPr sz="3000" b="0" i="0">
                 <a:solidFill>
                   <a:srgbClr val="4A7C8C"/>
                 </a:solidFill>
@@ -58416,14 +59534,14 @@
       </p:sp>
       <p:sp>
         <p:nvSpPr>
-          <p:cNvPr id="19" name="TextBox 18"/>
-          <p:cNvSpPr txBox="1"/>
-          <p:nvPr/>
-        </p:nvSpPr>
-        <p:spPr>
-          <a:xfrm>
-            <a:off x="4478426" y="1865376"/>
-            <a:ext cx="3234842" cy="512064"/>
+          <p:cNvPr id="30" name="TextBox 29"/>
+          <p:cNvSpPr txBox="1"/>
+          <p:nvPr/>
+        </p:nvSpPr>
+        <p:spPr>
+          <a:xfrm>
+            <a:off x="4496714" y="2286000"/>
+            <a:ext cx="3198266" cy="384048"/>
           </a:xfrm>
           <a:prstGeom prst="rect">
             <a:avLst/>
@@ -58451,14 +59569,49 @@
       </p:sp>
       <p:sp>
         <p:nvSpPr>
-          <p:cNvPr id="20" name="Rectangle 19"/>
+          <p:cNvPr id="31" name="TextBox 30"/>
+          <p:cNvSpPr txBox="1"/>
+          <p:nvPr/>
+        </p:nvSpPr>
+        <p:spPr>
+          <a:xfrm>
+            <a:off x="4496714" y="2670048"/>
+            <a:ext cx="3198266" cy="256032"/>
+          </a:xfrm>
+          <a:prstGeom prst="rect">
+            <a:avLst/>
+          </a:prstGeom>
+          <a:noFill/>
+        </p:spPr>
+        <p:txBody>
+          <a:bodyPr wrap="square" anchor="t" lIns="36000" rIns="36000" tIns="18000" bIns="18000">
+            <a:spAutoFit/>
+          </a:bodyPr>
+          <a:lstStyle/>
+          <a:p>
+            <a:pPr algn="ctr"/>
+            <a:r>
+              <a:rPr sz="1000" b="0" i="1">
+                <a:solidFill>
+                  <a:srgbClr val="64748B"/>
+                </a:solidFill>
+                <a:latin typeface="Noto Sans JP"/>
+              </a:rPr>
+              <a:t>Colloidal Silica Particles</a:t>
+            </a:r>
+          </a:p>
+        </p:txBody>
+      </p:sp>
+      <p:sp>
+        <p:nvSpPr>
+          <p:cNvPr id="32" name="Rectangle 31"/>
           <p:cNvSpPr/>
           <p:nvPr/>
         </p:nvSpPr>
         <p:spPr>
           <a:xfrm>
-            <a:off x="4551578" y="2414016"/>
-            <a:ext cx="3088538" cy="13716"/>
+            <a:off x="4569866" y="2999232"/>
+            <a:ext cx="3051962" cy="13716"/>
           </a:xfrm>
           <a:prstGeom prst="rect">
             <a:avLst/>
@@ -58495,53 +59648,407 @@
       </p:sp>
       <p:sp>
         <p:nvSpPr>
-          <p:cNvPr id="21" name="TextBox 20"/>
-          <p:cNvSpPr txBox="1"/>
-          <p:nvPr/>
-        </p:nvSpPr>
-        <p:spPr>
-          <a:xfrm>
-            <a:off x="4478426" y="2560320"/>
-            <a:ext cx="3234842" cy="3383280"/>
-          </a:xfrm>
-          <a:prstGeom prst="rect">
-            <a:avLst/>
-          </a:prstGeom>
-          <a:noFill/>
-        </p:spPr>
-        <p:txBody>
-          <a:bodyPr wrap="square" anchor="t" lIns="36000" rIns="36000" tIns="18000" bIns="18000">
-            <a:spAutoFit/>
-          </a:bodyPr>
-          <a:lstStyle/>
-          <a:p>
-            <a:pPr algn="ctr"/>
-            <a:r>
-              <a:rPr sz="1300" b="0" i="0">
+          <p:cNvPr id="33" name="TextBox 32"/>
+          <p:cNvSpPr txBox="1"/>
+          <p:nvPr/>
+        </p:nvSpPr>
+        <p:spPr>
+          <a:xfrm>
+            <a:off x="4496714" y="3127248"/>
+            <a:ext cx="3198266" cy="914400"/>
+          </a:xfrm>
+          <a:prstGeom prst="rect">
+            <a:avLst/>
+          </a:prstGeom>
+          <a:noFill/>
+        </p:spPr>
+        <p:txBody>
+          <a:bodyPr wrap="square" anchor="t" lIns="36000" rIns="36000" tIns="18000" bIns="18000">
+            <a:spAutoFit/>
+          </a:bodyPr>
+          <a:lstStyle/>
+          <a:p>
+            <a:pPr algn="ctr"/>
+            <a:r>
+              <a:rPr sz="1200" b="0" i="0">
                 <a:solidFill>
                   <a:srgbClr val="475569"/>
                 </a:solidFill>
                 <a:latin typeface="Noto Sans JP"/>
               </a:rPr>
-              <a:t>ポリマーと動的な相互作用を行い、熱活性化時にエアロゲルを形成する主要成分です。</a:t>
-            </a:r>
-          </a:p>
-        </p:txBody>
-      </p:sp>
-      <p:sp>
-        <p:nvSpPr>
-          <p:cNvPr id="22" name="Rounded Rectangle 21"/>
+              <a:t>ポリマーと動的に相互作用し、熱でエアロゲルを形成する主役成分です。</a:t>
+            </a:r>
+          </a:p>
+        </p:txBody>
+      </p:sp>
+      <p:sp>
+        <p:nvSpPr>
+          <p:cNvPr id="34" name="Rounded Rectangle 33"/>
           <p:cNvSpPr/>
           <p:nvPr/>
         </p:nvSpPr>
         <p:spPr>
           <a:xfrm>
-            <a:off x="8188756" y="859536"/>
-            <a:ext cx="3637178" cy="5303520"/>
+            <a:off x="4496714" y="4279392"/>
+            <a:ext cx="841248" cy="292608"/>
           </a:xfrm>
           <a:prstGeom prst="roundRect">
             <a:avLst>
-              <a:gd name="adj" fmla="val 4000"/>
+              <a:gd name="adj" fmla="val 50000"/>
+            </a:avLst>
+          </a:prstGeom>
+          <a:solidFill>
+            <a:srgbClr val="FFFFFF"/>
+          </a:solidFill>
+          <a:ln w="8890">
+            <a:solidFill>
+              <a:srgbClr val="4A7C8C"/>
+            </a:solidFill>
+          </a:ln>
+          <a:effectLst/>
+        </p:spPr>
+        <p:style>
+          <a:lnRef idx="1">
+            <a:schemeClr val="accent1"/>
+          </a:lnRef>
+          <a:fillRef idx="3">
+            <a:schemeClr val="accent1"/>
+          </a:fillRef>
+          <a:effectRef idx="2">
+            <a:schemeClr val="accent1"/>
+          </a:effectRef>
+          <a:fontRef idx="minor">
+            <a:schemeClr val="lt1"/>
+          </a:fontRef>
+        </p:style>
+        <p:txBody>
+          <a:bodyPr rtlCol="0" anchor="ctr"/>
+          <a:lstStyle/>
+          <a:p>
+            <a:pPr algn="ctr"/>
+          </a:p>
+        </p:txBody>
+      </p:sp>
+      <p:sp>
+        <p:nvSpPr>
+          <p:cNvPr id="35" name="TextBox 34"/>
+          <p:cNvSpPr txBox="1"/>
+          <p:nvPr/>
+        </p:nvSpPr>
+        <p:spPr>
+          <a:xfrm>
+            <a:off x="4496714" y="4279392"/>
+            <a:ext cx="841248" cy="292608"/>
+          </a:xfrm>
+          <a:prstGeom prst="rect">
+            <a:avLst/>
+          </a:prstGeom>
+          <a:noFill/>
+        </p:spPr>
+        <p:txBody>
+          <a:bodyPr wrap="square" anchor="ctr" lIns="36000" rIns="36000" tIns="18000" bIns="18000">
+            <a:spAutoFit/>
+          </a:bodyPr>
+          <a:lstStyle/>
+          <a:p>
+            <a:pPr algn="ctr"/>
+            <a:r>
+              <a:rPr sz="1000" b="1" i="0">
+                <a:solidFill>
+                  <a:srgbClr val="4A7C8C"/>
+                </a:solidFill>
+                <a:latin typeface="Noto Sans JP"/>
+              </a:rPr>
+              <a:t>直径</a:t>
+            </a:r>
+          </a:p>
+        </p:txBody>
+      </p:sp>
+      <p:sp>
+        <p:nvSpPr>
+          <p:cNvPr id="36" name="TextBox 35"/>
+          <p:cNvSpPr txBox="1"/>
+          <p:nvPr/>
+        </p:nvSpPr>
+        <p:spPr>
+          <a:xfrm>
+            <a:off x="5429402" y="4242816"/>
+            <a:ext cx="2265578" cy="365760"/>
+          </a:xfrm>
+          <a:prstGeom prst="rect">
+            <a:avLst/>
+          </a:prstGeom>
+          <a:noFill/>
+        </p:spPr>
+        <p:txBody>
+          <a:bodyPr wrap="square" anchor="ctr" lIns="36000" rIns="36000" tIns="18000" bIns="18000">
+            <a:spAutoFit/>
+          </a:bodyPr>
+          <a:lstStyle/>
+          <a:p>
+            <a:pPr algn="l"/>
+            <a:r>
+              <a:rPr sz="1100" b="0" i="0">
+                <a:solidFill>
+                  <a:srgbClr val="334155"/>
+                </a:solidFill>
+                <a:latin typeface="Noto Sans JP"/>
+              </a:rPr>
+              <a:t>約 22 nm の単分散粒子</a:t>
+            </a:r>
+          </a:p>
+        </p:txBody>
+      </p:sp>
+      <p:sp>
+        <p:nvSpPr>
+          <p:cNvPr id="37" name="Rounded Rectangle 36"/>
+          <p:cNvSpPr/>
+          <p:nvPr/>
+        </p:nvSpPr>
+        <p:spPr>
+          <a:xfrm>
+            <a:off x="4496714" y="4956048"/>
+            <a:ext cx="841248" cy="292608"/>
+          </a:xfrm>
+          <a:prstGeom prst="roundRect">
+            <a:avLst>
+              <a:gd name="adj" fmla="val 50000"/>
+            </a:avLst>
+          </a:prstGeom>
+          <a:solidFill>
+            <a:srgbClr val="FFFFFF"/>
+          </a:solidFill>
+          <a:ln w="8890">
+            <a:solidFill>
+              <a:srgbClr val="4A7C8C"/>
+            </a:solidFill>
+          </a:ln>
+          <a:effectLst/>
+        </p:spPr>
+        <p:style>
+          <a:lnRef idx="1">
+            <a:schemeClr val="accent1"/>
+          </a:lnRef>
+          <a:fillRef idx="3">
+            <a:schemeClr val="accent1"/>
+          </a:fillRef>
+          <a:effectRef idx="2">
+            <a:schemeClr val="accent1"/>
+          </a:effectRef>
+          <a:fontRef idx="minor">
+            <a:schemeClr val="lt1"/>
+          </a:fontRef>
+        </p:style>
+        <p:txBody>
+          <a:bodyPr rtlCol="0" anchor="ctr"/>
+          <a:lstStyle/>
+          <a:p>
+            <a:pPr algn="ctr"/>
+          </a:p>
+        </p:txBody>
+      </p:sp>
+      <p:sp>
+        <p:nvSpPr>
+          <p:cNvPr id="38" name="TextBox 37"/>
+          <p:cNvSpPr txBox="1"/>
+          <p:nvPr/>
+        </p:nvSpPr>
+        <p:spPr>
+          <a:xfrm>
+            <a:off x="4496714" y="4956048"/>
+            <a:ext cx="841248" cy="292608"/>
+          </a:xfrm>
+          <a:prstGeom prst="rect">
+            <a:avLst/>
+          </a:prstGeom>
+          <a:noFill/>
+        </p:spPr>
+        <p:txBody>
+          <a:bodyPr wrap="square" anchor="ctr" lIns="36000" rIns="36000" tIns="18000" bIns="18000">
+            <a:spAutoFit/>
+          </a:bodyPr>
+          <a:lstStyle/>
+          <a:p>
+            <a:pPr algn="ctr"/>
+            <a:r>
+              <a:rPr sz="1000" b="1" i="0">
+                <a:solidFill>
+                  <a:srgbClr val="4A7C8C"/>
+                </a:solidFill>
+                <a:latin typeface="Noto Sans JP"/>
+              </a:rPr>
+              <a:t>焼結</a:t>
+            </a:r>
+          </a:p>
+        </p:txBody>
+      </p:sp>
+      <p:sp>
+        <p:nvSpPr>
+          <p:cNvPr id="39" name="TextBox 38"/>
+          <p:cNvSpPr txBox="1"/>
+          <p:nvPr/>
+        </p:nvSpPr>
+        <p:spPr>
+          <a:xfrm>
+            <a:off x="5429402" y="4919472"/>
+            <a:ext cx="2265578" cy="365760"/>
+          </a:xfrm>
+          <a:prstGeom prst="rect">
+            <a:avLst/>
+          </a:prstGeom>
+          <a:noFill/>
+        </p:spPr>
+        <p:txBody>
+          <a:bodyPr wrap="square" anchor="ctr" lIns="36000" rIns="36000" tIns="18000" bIns="18000">
+            <a:spAutoFit/>
+          </a:bodyPr>
+          <a:lstStyle/>
+          <a:p>
+            <a:pPr algn="l"/>
+            <a:r>
+              <a:rPr sz="1100" b="0" i="0">
+                <a:solidFill>
+                  <a:srgbClr val="334155"/>
+                </a:solidFill>
+                <a:latin typeface="Noto Sans JP"/>
+              </a:rPr>
+              <a:t>加熱でシリカ骨格を形成</a:t>
+            </a:r>
+          </a:p>
+        </p:txBody>
+      </p:sp>
+      <p:sp>
+        <p:nvSpPr>
+          <p:cNvPr id="40" name="Rounded Rectangle 39"/>
+          <p:cNvSpPr/>
+          <p:nvPr/>
+        </p:nvSpPr>
+        <p:spPr>
+          <a:xfrm>
+            <a:off x="4496714" y="5632704"/>
+            <a:ext cx="841248" cy="292608"/>
+          </a:xfrm>
+          <a:prstGeom prst="roundRect">
+            <a:avLst>
+              <a:gd name="adj" fmla="val 50000"/>
+            </a:avLst>
+          </a:prstGeom>
+          <a:solidFill>
+            <a:srgbClr val="FFFFFF"/>
+          </a:solidFill>
+          <a:ln w="8890">
+            <a:solidFill>
+              <a:srgbClr val="4A7C8C"/>
+            </a:solidFill>
+          </a:ln>
+          <a:effectLst/>
+        </p:spPr>
+        <p:style>
+          <a:lnRef idx="1">
+            <a:schemeClr val="accent1"/>
+          </a:lnRef>
+          <a:fillRef idx="3">
+            <a:schemeClr val="accent1"/>
+          </a:fillRef>
+          <a:effectRef idx="2">
+            <a:schemeClr val="accent1"/>
+          </a:effectRef>
+          <a:fontRef idx="minor">
+            <a:schemeClr val="lt1"/>
+          </a:fontRef>
+        </p:style>
+        <p:txBody>
+          <a:bodyPr rtlCol="0" anchor="ctr"/>
+          <a:lstStyle/>
+          <a:p>
+            <a:pPr algn="ctr"/>
+          </a:p>
+        </p:txBody>
+      </p:sp>
+      <p:sp>
+        <p:nvSpPr>
+          <p:cNvPr id="41" name="TextBox 40"/>
+          <p:cNvSpPr txBox="1"/>
+          <p:nvPr/>
+        </p:nvSpPr>
+        <p:spPr>
+          <a:xfrm>
+            <a:off x="4496714" y="5632704"/>
+            <a:ext cx="841248" cy="292608"/>
+          </a:xfrm>
+          <a:prstGeom prst="rect">
+            <a:avLst/>
+          </a:prstGeom>
+          <a:noFill/>
+        </p:spPr>
+        <p:txBody>
+          <a:bodyPr wrap="square" anchor="ctr" lIns="36000" rIns="36000" tIns="18000" bIns="18000">
+            <a:spAutoFit/>
+          </a:bodyPr>
+          <a:lstStyle/>
+          <a:p>
+            <a:pPr algn="ctr"/>
+            <a:r>
+              <a:rPr sz="1000" b="1" i="0">
+                <a:solidFill>
+                  <a:srgbClr val="4A7C8C"/>
+                </a:solidFill>
+                <a:latin typeface="Noto Sans JP"/>
+              </a:rPr>
+              <a:t>役割</a:t>
+            </a:r>
+          </a:p>
+        </p:txBody>
+      </p:sp>
+      <p:sp>
+        <p:nvSpPr>
+          <p:cNvPr id="42" name="TextBox 41"/>
+          <p:cNvSpPr txBox="1"/>
+          <p:nvPr/>
+        </p:nvSpPr>
+        <p:spPr>
+          <a:xfrm>
+            <a:off x="5429402" y="5596128"/>
+            <a:ext cx="2265578" cy="365760"/>
+          </a:xfrm>
+          <a:prstGeom prst="rect">
+            <a:avLst/>
+          </a:prstGeom>
+          <a:noFill/>
+        </p:spPr>
+        <p:txBody>
+          <a:bodyPr wrap="square" anchor="ctr" lIns="36000" rIns="36000" tIns="18000" bIns="18000">
+            <a:spAutoFit/>
+          </a:bodyPr>
+          <a:lstStyle/>
+          <a:p>
+            <a:pPr algn="l"/>
+            <a:r>
+              <a:rPr sz="1100" b="0" i="0">
+                <a:solidFill>
+                  <a:srgbClr val="334155"/>
+                </a:solidFill>
+                <a:latin typeface="Noto Sans JP"/>
+              </a:rPr>
+              <a:t>断熱エアロゲルの源</a:t>
+            </a:r>
+          </a:p>
+        </p:txBody>
+      </p:sp>
+      <p:sp>
+        <p:nvSpPr>
+          <p:cNvPr id="43" name="Rounded Rectangle 42"/>
+          <p:cNvSpPr/>
+          <p:nvPr/>
+        </p:nvSpPr>
+        <p:spPr>
+          <a:xfrm>
+            <a:off x="8188756" y="1444752"/>
+            <a:ext cx="3637178" cy="5138928"/>
+          </a:xfrm>
+          <a:prstGeom prst="roundRect">
+            <a:avLst>
+              <a:gd name="adj" fmla="val 3500"/>
             </a:avLst>
           </a:prstGeom>
           <a:solidFill>
@@ -58578,14 +60085,14 @@
       </p:sp>
       <p:sp>
         <p:nvSpPr>
-          <p:cNvPr id="23" name="Rectangle 22"/>
+          <p:cNvPr id="44" name="Rectangle 43"/>
           <p:cNvSpPr/>
           <p:nvPr/>
         </p:nvSpPr>
         <p:spPr>
           <a:xfrm>
-            <a:off x="8188756" y="859536"/>
-            <a:ext cx="3637178" cy="45720"/>
+            <a:off x="8188756" y="1444752"/>
+            <a:ext cx="3637178" cy="54864"/>
           </a:xfrm>
           <a:prstGeom prst="rect">
             <a:avLst/>
@@ -58622,14 +60129,14 @@
       </p:sp>
       <p:sp>
         <p:nvSpPr>
-          <p:cNvPr id="24" name="TextBox 23"/>
-          <p:cNvSpPr txBox="1"/>
-          <p:nvPr/>
-        </p:nvSpPr>
-        <p:spPr>
-          <a:xfrm>
-            <a:off x="8188756" y="1225296"/>
-            <a:ext cx="3637178" cy="548640"/>
+          <p:cNvPr id="45" name="TextBox 44"/>
+          <p:cNvSpPr txBox="1"/>
+          <p:nvPr/>
+        </p:nvSpPr>
+        <p:spPr>
+          <a:xfrm>
+            <a:off x="8188756" y="1719072"/>
+            <a:ext cx="3637178" cy="512064"/>
           </a:xfrm>
           <a:prstGeom prst="rect">
             <a:avLst/>
@@ -58644,7 +60151,7 @@
           <a:p>
             <a:pPr algn="ctr"/>
             <a:r>
-              <a:rPr sz="3200" b="0" i="0">
+              <a:rPr sz="3000" b="0" i="0">
                 <a:solidFill>
                   <a:srgbClr val="9F7639"/>
                 </a:solidFill>
@@ -58657,14 +60164,14 @@
       </p:sp>
       <p:sp>
         <p:nvSpPr>
-          <p:cNvPr id="25" name="TextBox 24"/>
-          <p:cNvSpPr txBox="1"/>
-          <p:nvPr/>
-        </p:nvSpPr>
-        <p:spPr>
-          <a:xfrm>
-            <a:off x="8389924" y="1865376"/>
-            <a:ext cx="3234842" cy="512064"/>
+          <p:cNvPr id="46" name="TextBox 45"/>
+          <p:cNvSpPr txBox="1"/>
+          <p:nvPr/>
+        </p:nvSpPr>
+        <p:spPr>
+          <a:xfrm>
+            <a:off x="8408212" y="2286000"/>
+            <a:ext cx="3198266" cy="384048"/>
           </a:xfrm>
           <a:prstGeom prst="rect">
             <a:avLst/>
@@ -58685,21 +60192,56 @@
                 </a:solidFill>
                 <a:latin typeface="Noto Sans JP"/>
               </a:rPr>
-              <a:t>PP相互作用</a:t>
-            </a:r>
-          </a:p>
-        </p:txBody>
-      </p:sp>
-      <p:sp>
-        <p:nvSpPr>
-          <p:cNvPr id="26" name="Rectangle 25"/>
+              <a:t>PP 相互作用</a:t>
+            </a:r>
+          </a:p>
+        </p:txBody>
+      </p:sp>
+      <p:sp>
+        <p:nvSpPr>
+          <p:cNvPr id="47" name="TextBox 46"/>
+          <p:cNvSpPr txBox="1"/>
+          <p:nvPr/>
+        </p:nvSpPr>
+        <p:spPr>
+          <a:xfrm>
+            <a:off x="8408212" y="2670048"/>
+            <a:ext cx="3198266" cy="256032"/>
+          </a:xfrm>
+          <a:prstGeom prst="rect">
+            <a:avLst/>
+          </a:prstGeom>
+          <a:noFill/>
+        </p:spPr>
+        <p:txBody>
+          <a:bodyPr wrap="square" anchor="t" lIns="36000" rIns="36000" tIns="18000" bIns="18000">
+            <a:spAutoFit/>
+          </a:bodyPr>
+          <a:lstStyle/>
+          <a:p>
+            <a:pPr algn="ctr"/>
+            <a:r>
+              <a:rPr sz="1000" b="0" i="1">
+                <a:solidFill>
+                  <a:srgbClr val="64748B"/>
+                </a:solidFill>
+                <a:latin typeface="Noto Sans JP"/>
+              </a:rPr>
+              <a:t>Polymer–Particle Interaction</a:t>
+            </a:r>
+          </a:p>
+        </p:txBody>
+      </p:sp>
+      <p:sp>
+        <p:nvSpPr>
+          <p:cNvPr id="48" name="Rectangle 47"/>
           <p:cNvSpPr/>
           <p:nvPr/>
         </p:nvSpPr>
         <p:spPr>
           <a:xfrm>
-            <a:off x="8463076" y="2414016"/>
-            <a:ext cx="3088538" cy="13716"/>
+            <a:off x="8481364" y="2999232"/>
+            <a:ext cx="3051962" cy="13716"/>
           </a:xfrm>
           <a:prstGeom prst="rect">
             <a:avLst/>
@@ -58736,35 +60278,389 @@
       </p:sp>
       <p:sp>
         <p:nvSpPr>
-          <p:cNvPr id="27" name="TextBox 26"/>
-          <p:cNvSpPr txBox="1"/>
-          <p:nvPr/>
-        </p:nvSpPr>
-        <p:spPr>
-          <a:xfrm>
-            <a:off x="8389924" y="2560320"/>
-            <a:ext cx="3234842" cy="3383280"/>
-          </a:xfrm>
-          <a:prstGeom prst="rect">
-            <a:avLst/>
-          </a:prstGeom>
-          <a:noFill/>
-        </p:spPr>
-        <p:txBody>
-          <a:bodyPr wrap="square" anchor="t" lIns="36000" rIns="36000" tIns="18000" bIns="18000">
-            <a:spAutoFit/>
-          </a:bodyPr>
-          <a:lstStyle/>
-          <a:p>
-            <a:pPr algn="ctr"/>
-            <a:r>
-              <a:rPr sz="1300" b="0" i="0">
+          <p:cNvPr id="49" name="TextBox 48"/>
+          <p:cNvSpPr txBox="1"/>
+          <p:nvPr/>
+        </p:nvSpPr>
+        <p:spPr>
+          <a:xfrm>
+            <a:off x="8408212" y="3127248"/>
+            <a:ext cx="3198266" cy="914400"/>
+          </a:xfrm>
+          <a:prstGeom prst="rect">
+            <a:avLst/>
+          </a:prstGeom>
+          <a:noFill/>
+        </p:spPr>
+        <p:txBody>
+          <a:bodyPr wrap="square" anchor="t" lIns="36000" rIns="36000" tIns="18000" bIns="18000">
+            <a:spAutoFit/>
+          </a:bodyPr>
+          <a:lstStyle/>
+          <a:p>
+            <a:pPr algn="ctr"/>
+            <a:r>
+              <a:rPr sz="1200" b="0" i="0">
                 <a:solidFill>
                   <a:srgbClr val="475569"/>
                 </a:solidFill>
                 <a:latin typeface="Noto Sans JP"/>
               </a:rPr>
-              <a:t>動的な多価相互作用により、優れた付着性と噴霧適性を実現します。</a:t>
+              <a:t>動的な多価水素結合でネットワークを構築。共有結合に依存しません。</a:t>
+            </a:r>
+          </a:p>
+        </p:txBody>
+      </p:sp>
+      <p:sp>
+        <p:nvSpPr>
+          <p:cNvPr id="50" name="Rounded Rectangle 49"/>
+          <p:cNvSpPr/>
+          <p:nvPr/>
+        </p:nvSpPr>
+        <p:spPr>
+          <a:xfrm>
+            <a:off x="8408212" y="4279392"/>
+            <a:ext cx="841248" cy="292608"/>
+          </a:xfrm>
+          <a:prstGeom prst="roundRect">
+            <a:avLst>
+              <a:gd name="adj" fmla="val 50000"/>
+            </a:avLst>
+          </a:prstGeom>
+          <a:solidFill>
+            <a:srgbClr val="FFFFFF"/>
+          </a:solidFill>
+          <a:ln w="8890">
+            <a:solidFill>
+              <a:srgbClr val="9F7639"/>
+            </a:solidFill>
+          </a:ln>
+          <a:effectLst/>
+        </p:spPr>
+        <p:style>
+          <a:lnRef idx="1">
+            <a:schemeClr val="accent1"/>
+          </a:lnRef>
+          <a:fillRef idx="3">
+            <a:schemeClr val="accent1"/>
+          </a:fillRef>
+          <a:effectRef idx="2">
+            <a:schemeClr val="accent1"/>
+          </a:effectRef>
+          <a:fontRef idx="minor">
+            <a:schemeClr val="lt1"/>
+          </a:fontRef>
+        </p:style>
+        <p:txBody>
+          <a:bodyPr rtlCol="0" anchor="ctr"/>
+          <a:lstStyle/>
+          <a:p>
+            <a:pPr algn="ctr"/>
+          </a:p>
+        </p:txBody>
+      </p:sp>
+      <p:sp>
+        <p:nvSpPr>
+          <p:cNvPr id="51" name="TextBox 50"/>
+          <p:cNvSpPr txBox="1"/>
+          <p:nvPr/>
+        </p:nvSpPr>
+        <p:spPr>
+          <a:xfrm>
+            <a:off x="8408212" y="4279392"/>
+            <a:ext cx="841248" cy="292608"/>
+          </a:xfrm>
+          <a:prstGeom prst="rect">
+            <a:avLst/>
+          </a:prstGeom>
+          <a:noFill/>
+        </p:spPr>
+        <p:txBody>
+          <a:bodyPr wrap="square" anchor="ctr" lIns="36000" rIns="36000" tIns="18000" bIns="18000">
+            <a:spAutoFit/>
+          </a:bodyPr>
+          <a:lstStyle/>
+          <a:p>
+            <a:pPr algn="ctr"/>
+            <a:r>
+              <a:rPr sz="1000" b="1" i="0">
+                <a:solidFill>
+                  <a:srgbClr val="9F7639"/>
+                </a:solidFill>
+                <a:latin typeface="Noto Sans JP"/>
+              </a:rPr>
+              <a:t>結合</a:t>
+            </a:r>
+          </a:p>
+        </p:txBody>
+      </p:sp>
+      <p:sp>
+        <p:nvSpPr>
+          <p:cNvPr id="52" name="TextBox 51"/>
+          <p:cNvSpPr txBox="1"/>
+          <p:nvPr/>
+        </p:nvSpPr>
+        <p:spPr>
+          <a:xfrm>
+            <a:off x="9340900" y="4242816"/>
+            <a:ext cx="2265578" cy="365760"/>
+          </a:xfrm>
+          <a:prstGeom prst="rect">
+            <a:avLst/>
+          </a:prstGeom>
+          <a:noFill/>
+        </p:spPr>
+        <p:txBody>
+          <a:bodyPr wrap="square" anchor="ctr" lIns="36000" rIns="36000" tIns="18000" bIns="18000">
+            <a:spAutoFit/>
+          </a:bodyPr>
+          <a:lstStyle/>
+          <a:p>
+            <a:pPr algn="l"/>
+            <a:r>
+              <a:rPr sz="1100" b="0" i="0">
+                <a:solidFill>
+                  <a:srgbClr val="334155"/>
+                </a:solidFill>
+                <a:latin typeface="Noto Sans JP"/>
+              </a:rPr>
+              <a:t>動的・多価の水素結合</a:t>
+            </a:r>
+          </a:p>
+        </p:txBody>
+      </p:sp>
+      <p:sp>
+        <p:nvSpPr>
+          <p:cNvPr id="53" name="Rounded Rectangle 52"/>
+          <p:cNvSpPr/>
+          <p:nvPr/>
+        </p:nvSpPr>
+        <p:spPr>
+          <a:xfrm>
+            <a:off x="8408212" y="4956048"/>
+            <a:ext cx="841248" cy="292608"/>
+          </a:xfrm>
+          <a:prstGeom prst="roundRect">
+            <a:avLst>
+              <a:gd name="adj" fmla="val 50000"/>
+            </a:avLst>
+          </a:prstGeom>
+          <a:solidFill>
+            <a:srgbClr val="FFFFFF"/>
+          </a:solidFill>
+          <a:ln w="8890">
+            <a:solidFill>
+              <a:srgbClr val="9F7639"/>
+            </a:solidFill>
+          </a:ln>
+          <a:effectLst/>
+        </p:spPr>
+        <p:style>
+          <a:lnRef idx="1">
+            <a:schemeClr val="accent1"/>
+          </a:lnRef>
+          <a:fillRef idx="3">
+            <a:schemeClr val="accent1"/>
+          </a:fillRef>
+          <a:effectRef idx="2">
+            <a:schemeClr val="accent1"/>
+          </a:effectRef>
+          <a:fontRef idx="minor">
+            <a:schemeClr val="lt1"/>
+          </a:fontRef>
+        </p:style>
+        <p:txBody>
+          <a:bodyPr rtlCol="0" anchor="ctr"/>
+          <a:lstStyle/>
+          <a:p>
+            <a:pPr algn="ctr"/>
+          </a:p>
+        </p:txBody>
+      </p:sp>
+      <p:sp>
+        <p:nvSpPr>
+          <p:cNvPr id="54" name="TextBox 53"/>
+          <p:cNvSpPr txBox="1"/>
+          <p:nvPr/>
+        </p:nvSpPr>
+        <p:spPr>
+          <a:xfrm>
+            <a:off x="8408212" y="4956048"/>
+            <a:ext cx="841248" cy="292608"/>
+          </a:xfrm>
+          <a:prstGeom prst="rect">
+            <a:avLst/>
+          </a:prstGeom>
+          <a:noFill/>
+        </p:spPr>
+        <p:txBody>
+          <a:bodyPr wrap="square" anchor="ctr" lIns="36000" rIns="36000" tIns="18000" bIns="18000">
+            <a:spAutoFit/>
+          </a:bodyPr>
+          <a:lstStyle/>
+          <a:p>
+            <a:pPr algn="ctr"/>
+            <a:r>
+              <a:rPr sz="1000" b="1" i="0">
+                <a:solidFill>
+                  <a:srgbClr val="9F7639"/>
+                </a:solidFill>
+                <a:latin typeface="Noto Sans JP"/>
+              </a:rPr>
+              <a:t>自己修復</a:t>
+            </a:r>
+          </a:p>
+        </p:txBody>
+      </p:sp>
+      <p:sp>
+        <p:nvSpPr>
+          <p:cNvPr id="55" name="TextBox 54"/>
+          <p:cNvSpPr txBox="1"/>
+          <p:nvPr/>
+        </p:nvSpPr>
+        <p:spPr>
+          <a:xfrm>
+            <a:off x="9340900" y="4919472"/>
+            <a:ext cx="2265578" cy="365760"/>
+          </a:xfrm>
+          <a:prstGeom prst="rect">
+            <a:avLst/>
+          </a:prstGeom>
+          <a:noFill/>
+        </p:spPr>
+        <p:txBody>
+          <a:bodyPr wrap="square" anchor="ctr" lIns="36000" rIns="36000" tIns="18000" bIns="18000">
+            <a:spAutoFit/>
+          </a:bodyPr>
+          <a:lstStyle/>
+          <a:p>
+            <a:pPr algn="l"/>
+            <a:r>
+              <a:rPr sz="1100" b="0" i="0">
+                <a:solidFill>
+                  <a:srgbClr val="334155"/>
+                </a:solidFill>
+                <a:latin typeface="Noto Sans JP"/>
+              </a:rPr>
+              <a:t>ひずみ後にゲルが回復</a:t>
+            </a:r>
+          </a:p>
+        </p:txBody>
+      </p:sp>
+      <p:sp>
+        <p:nvSpPr>
+          <p:cNvPr id="56" name="Rounded Rectangle 55"/>
+          <p:cNvSpPr/>
+          <p:nvPr/>
+        </p:nvSpPr>
+        <p:spPr>
+          <a:xfrm>
+            <a:off x="8408212" y="5632704"/>
+            <a:ext cx="841248" cy="292608"/>
+          </a:xfrm>
+          <a:prstGeom prst="roundRect">
+            <a:avLst>
+              <a:gd name="adj" fmla="val 50000"/>
+            </a:avLst>
+          </a:prstGeom>
+          <a:solidFill>
+            <a:srgbClr val="FFFFFF"/>
+          </a:solidFill>
+          <a:ln w="8890">
+            <a:solidFill>
+              <a:srgbClr val="9F7639"/>
+            </a:solidFill>
+          </a:ln>
+          <a:effectLst/>
+        </p:spPr>
+        <p:style>
+          <a:lnRef idx="1">
+            <a:schemeClr val="accent1"/>
+          </a:lnRef>
+          <a:fillRef idx="3">
+            <a:schemeClr val="accent1"/>
+          </a:fillRef>
+          <a:effectRef idx="2">
+            <a:schemeClr val="accent1"/>
+          </a:effectRef>
+          <a:fontRef idx="minor">
+            <a:schemeClr val="lt1"/>
+          </a:fontRef>
+        </p:style>
+        <p:txBody>
+          <a:bodyPr rtlCol="0" anchor="ctr"/>
+          <a:lstStyle/>
+          <a:p>
+            <a:pPr algn="ctr"/>
+          </a:p>
+        </p:txBody>
+      </p:sp>
+      <p:sp>
+        <p:nvSpPr>
+          <p:cNvPr id="57" name="TextBox 56"/>
+          <p:cNvSpPr txBox="1"/>
+          <p:nvPr/>
+        </p:nvSpPr>
+        <p:spPr>
+          <a:xfrm>
+            <a:off x="8408212" y="5632704"/>
+            <a:ext cx="841248" cy="292608"/>
+          </a:xfrm>
+          <a:prstGeom prst="rect">
+            <a:avLst/>
+          </a:prstGeom>
+          <a:noFill/>
+        </p:spPr>
+        <p:txBody>
+          <a:bodyPr wrap="square" anchor="ctr" lIns="36000" rIns="36000" tIns="18000" bIns="18000">
+            <a:spAutoFit/>
+          </a:bodyPr>
+          <a:lstStyle/>
+          <a:p>
+            <a:pPr algn="ctr"/>
+            <a:r>
+              <a:rPr sz="1000" b="1" i="0">
+                <a:solidFill>
+                  <a:srgbClr val="9F7639"/>
+                </a:solidFill>
+                <a:latin typeface="Noto Sans JP"/>
+              </a:rPr>
+              <a:t>噴霧適性</a:t>
+            </a:r>
+          </a:p>
+        </p:txBody>
+      </p:sp>
+      <p:sp>
+        <p:nvSpPr>
+          <p:cNvPr id="58" name="TextBox 57"/>
+          <p:cNvSpPr txBox="1"/>
+          <p:nvPr/>
+        </p:nvSpPr>
+        <p:spPr>
+          <a:xfrm>
+            <a:off x="9340900" y="5596128"/>
+            <a:ext cx="2265578" cy="365760"/>
+          </a:xfrm>
+          <a:prstGeom prst="rect">
+            <a:avLst/>
+          </a:prstGeom>
+          <a:noFill/>
+        </p:spPr>
+        <p:txBody>
+          <a:bodyPr wrap="square" anchor="ctr" lIns="36000" rIns="36000" tIns="18000" bIns="18000">
+            <a:spAutoFit/>
+          </a:bodyPr>
+          <a:lstStyle/>
+          <a:p>
+            <a:pPr algn="l"/>
+            <a:r>
+              <a:rPr sz="1100" b="0" i="0">
+                <a:solidFill>
+                  <a:srgbClr val="334155"/>
+                </a:solidFill>
+                <a:latin typeface="Noto Sans JP"/>
+              </a:rPr>
+              <a:t>スプレー塗布が容易</a:t>
             </a:r>
           </a:p>
         </p:txBody>

--- a/slides.pptx
+++ b/slides.pptx
@@ -54770,7 +54770,7 @@
         <p:spPr>
           <a:xfrm>
             <a:off x="365760" y="859536"/>
-            <a:ext cx="3685946" cy="4974336"/>
+            <a:ext cx="3685946" cy="5047488"/>
           </a:xfrm>
           <a:prstGeom prst="roundRect">
             <a:avLst>
@@ -54855,29 +54855,191 @@
       </p:sp>
       <p:sp>
         <p:nvSpPr>
-          <p:cNvPr id="12" name="TextBox 11"/>
-          <p:cNvSpPr txBox="1"/>
-          <p:nvPr/>
-        </p:nvSpPr>
-        <p:spPr>
-          <a:xfrm>
-            <a:off x="566928" y="1133856"/>
-            <a:ext cx="3283610" cy="365760"/>
-          </a:xfrm>
-          <a:prstGeom prst="rect">
-            <a:avLst/>
-          </a:prstGeom>
-          <a:noFill/>
-        </p:spPr>
-        <p:txBody>
-          <a:bodyPr wrap="square" anchor="t" lIns="36000" rIns="36000" tIns="18000" bIns="18000">
-            <a:spAutoFit/>
-          </a:bodyPr>
-          <a:lstStyle/>
-          <a:p>
-            <a:pPr algn="l"/>
-            <a:r>
-              <a:rPr sz="1800" b="1" i="0">
+          <p:cNvPr id="12" name="Rounded Rectangle 11"/>
+          <p:cNvSpPr/>
+          <p:nvPr/>
+        </p:nvSpPr>
+        <p:spPr>
+          <a:xfrm>
+            <a:off x="548640" y="1024128"/>
+            <a:ext cx="3320186" cy="1078992"/>
+          </a:xfrm>
+          <a:prstGeom prst="roundRect">
+            <a:avLst>
+              <a:gd name="adj" fmla="val 3000"/>
+            </a:avLst>
+          </a:prstGeom>
+          <a:solidFill>
+            <a:srgbClr val="F5F8FC"/>
+          </a:solidFill>
+          <a:ln w="12700">
+            <a:solidFill>
+              <a:srgbClr val="C0D0E0"/>
+            </a:solidFill>
+          </a:ln>
+          <a:effectLst/>
+        </p:spPr>
+        <p:style>
+          <a:lnRef idx="1">
+            <a:schemeClr val="accent1"/>
+          </a:lnRef>
+          <a:fillRef idx="3">
+            <a:schemeClr val="accent1"/>
+          </a:fillRef>
+          <a:effectRef idx="2">
+            <a:schemeClr val="accent1"/>
+          </a:effectRef>
+          <a:fontRef idx="minor">
+            <a:schemeClr val="lt1"/>
+          </a:fontRef>
+        </p:style>
+        <p:txBody>
+          <a:bodyPr rtlCol="0" anchor="ctr"/>
+          <a:lstStyle/>
+          <a:p>
+            <a:pPr algn="ctr"/>
+          </a:p>
+        </p:txBody>
+      </p:sp>
+      <p:sp>
+        <p:nvSpPr>
+          <p:cNvPr id="13" name="Rectangle 12"/>
+          <p:cNvSpPr/>
+          <p:nvPr/>
+        </p:nvSpPr>
+        <p:spPr>
+          <a:xfrm>
+            <a:off x="621792" y="1097280"/>
+            <a:ext cx="640080" cy="237744"/>
+          </a:xfrm>
+          <a:prstGeom prst="rect">
+            <a:avLst/>
+          </a:prstGeom>
+          <a:solidFill>
+            <a:srgbClr val="3B5174"/>
+          </a:solidFill>
+          <a:ln>
+            <a:noFill/>
+          </a:ln>
+          <a:effectLst/>
+        </p:spPr>
+        <p:style>
+          <a:lnRef idx="1">
+            <a:schemeClr val="accent1"/>
+          </a:lnRef>
+          <a:fillRef idx="3">
+            <a:schemeClr val="accent1"/>
+          </a:fillRef>
+          <a:effectRef idx="2">
+            <a:schemeClr val="accent1"/>
+          </a:effectRef>
+          <a:fontRef idx="minor">
+            <a:schemeClr val="lt1"/>
+          </a:fontRef>
+        </p:style>
+        <p:txBody>
+          <a:bodyPr rtlCol="0" anchor="ctr"/>
+          <a:lstStyle/>
+          <a:p>
+            <a:pPr algn="ctr"/>
+          </a:p>
+        </p:txBody>
+      </p:sp>
+      <p:sp>
+        <p:nvSpPr>
+          <p:cNvPr id="14" name="TextBox 13"/>
+          <p:cNvSpPr txBox="1"/>
+          <p:nvPr/>
+        </p:nvSpPr>
+        <p:spPr>
+          <a:xfrm>
+            <a:off x="621792" y="1097280"/>
+            <a:ext cx="640080" cy="237744"/>
+          </a:xfrm>
+          <a:prstGeom prst="rect">
+            <a:avLst/>
+          </a:prstGeom>
+          <a:noFill/>
+        </p:spPr>
+        <p:txBody>
+          <a:bodyPr wrap="square" anchor="ctr" lIns="36000" rIns="36000" tIns="18000" bIns="18000">
+            <a:spAutoFit/>
+          </a:bodyPr>
+          <a:lstStyle/>
+          <a:p>
+            <a:pPr algn="ctr"/>
+            <a:r>
+              <a:rPr sz="900" b="1" i="0">
+                <a:solidFill>
+                  <a:srgbClr val="FFFFFF"/>
+                </a:solidFill>
+                <a:latin typeface="Noto Sans JP"/>
+              </a:rPr>
+              <a:t>写真</a:t>
+            </a:r>
+          </a:p>
+        </p:txBody>
+      </p:sp>
+      <p:sp>
+        <p:nvSpPr>
+          <p:cNvPr id="15" name="TextBox 14"/>
+          <p:cNvSpPr txBox="1"/>
+          <p:nvPr/>
+        </p:nvSpPr>
+        <p:spPr>
+          <a:xfrm>
+            <a:off x="548640" y="1298448"/>
+            <a:ext cx="3320186" cy="512064"/>
+          </a:xfrm>
+          <a:prstGeom prst="rect">
+            <a:avLst/>
+          </a:prstGeom>
+          <a:noFill/>
+        </p:spPr>
+        <p:txBody>
+          <a:bodyPr wrap="square" anchor="ctr" lIns="36000" rIns="36000" tIns="18000" bIns="18000">
+            <a:spAutoFit/>
+          </a:bodyPr>
+          <a:lstStyle/>
+          <a:p>
+            <a:pPr algn="ctr"/>
+            <a:r>
+              <a:rPr sz="1000" b="0" i="0">
+                <a:solidFill>
+                  <a:srgbClr val="AAB4C0"/>
+                </a:solidFill>
+                <a:latin typeface="Noto Sans JP"/>
+              </a:rPr>
+              <a:t>航空機からの赤色スラリー散布</a:t>
+            </a:r>
+          </a:p>
+        </p:txBody>
+      </p:sp>
+      <p:sp>
+        <p:nvSpPr>
+          <p:cNvPr id="16" name="TextBox 15"/>
+          <p:cNvSpPr txBox="1"/>
+          <p:nvPr/>
+        </p:nvSpPr>
+        <p:spPr>
+          <a:xfrm>
+            <a:off x="548640" y="2212848"/>
+            <a:ext cx="3320186" cy="329184"/>
+          </a:xfrm>
+          <a:prstGeom prst="rect">
+            <a:avLst/>
+          </a:prstGeom>
+          <a:noFill/>
+        </p:spPr>
+        <p:txBody>
+          <a:bodyPr wrap="square" anchor="t" lIns="36000" rIns="36000" tIns="18000" bIns="18000">
+            <a:spAutoFit/>
+          </a:bodyPr>
+          <a:lstStyle/>
+          <a:p>
+            <a:pPr algn="l"/>
+            <a:r>
+              <a:rPr sz="1600" b="1" i="0">
                 <a:solidFill>
                   <a:srgbClr val="1E293B"/>
                 </a:solidFill>
@@ -54890,29 +55052,29 @@
       </p:sp>
       <p:sp>
         <p:nvSpPr>
-          <p:cNvPr id="13" name="TextBox 12"/>
-          <p:cNvSpPr txBox="1"/>
-          <p:nvPr/>
-        </p:nvSpPr>
-        <p:spPr>
-          <a:xfrm>
-            <a:off x="566928" y="1536192"/>
-            <a:ext cx="3283610" cy="237744"/>
-          </a:xfrm>
-          <a:prstGeom prst="rect">
-            <a:avLst/>
-          </a:prstGeom>
-          <a:noFill/>
-        </p:spPr>
-        <p:txBody>
-          <a:bodyPr wrap="square" anchor="t" lIns="36000" rIns="36000" tIns="18000" bIns="18000">
-            <a:spAutoFit/>
-          </a:bodyPr>
-          <a:lstStyle/>
-          <a:p>
-            <a:pPr algn="l"/>
-            <a:r>
-              <a:rPr sz="1000" b="0" i="1">
+          <p:cNvPr id="17" name="TextBox 16"/>
+          <p:cNvSpPr txBox="1"/>
+          <p:nvPr/>
+        </p:nvSpPr>
+        <p:spPr>
+          <a:xfrm>
+            <a:off x="548640" y="2542032"/>
+            <a:ext cx="3320186" cy="201168"/>
+          </a:xfrm>
+          <a:prstGeom prst="rect">
+            <a:avLst/>
+          </a:prstGeom>
+          <a:noFill/>
+        </p:spPr>
+        <p:txBody>
+          <a:bodyPr wrap="square" anchor="t" lIns="36000" rIns="36000" tIns="18000" bIns="18000">
+            <a:spAutoFit/>
+          </a:bodyPr>
+          <a:lstStyle/>
+          <a:p>
+            <a:pPr algn="l"/>
+            <a:r>
+              <a:rPr sz="900" b="0" i="1">
                 <a:solidFill>
                   <a:srgbClr val="64748B"/>
                 </a:solidFill>
@@ -54925,14 +55087,14 @@
       </p:sp>
       <p:sp>
         <p:nvSpPr>
-          <p:cNvPr id="14" name="Rectangle 13"/>
+          <p:cNvPr id="18" name="Rectangle 17"/>
           <p:cNvSpPr/>
           <p:nvPr/>
         </p:nvSpPr>
         <p:spPr>
           <a:xfrm>
-            <a:off x="566928" y="1865376"/>
-            <a:ext cx="3283610" cy="13716"/>
+            <a:off x="548640" y="2798064"/>
+            <a:ext cx="3320186" cy="10972"/>
           </a:xfrm>
           <a:prstGeom prst="rect">
             <a:avLst/>
@@ -54969,29 +55131,99 @@
       </p:sp>
       <p:sp>
         <p:nvSpPr>
-          <p:cNvPr id="15" name="TextBox 14"/>
-          <p:cNvSpPr txBox="1"/>
-          <p:nvPr/>
-        </p:nvSpPr>
-        <p:spPr>
-          <a:xfrm>
-            <a:off x="566928" y="2011680"/>
-            <a:ext cx="3283610" cy="219456"/>
-          </a:xfrm>
-          <a:prstGeom prst="rect">
-            <a:avLst/>
-          </a:prstGeom>
-          <a:noFill/>
-        </p:spPr>
-        <p:txBody>
-          <a:bodyPr wrap="square" anchor="t" lIns="36000" rIns="36000" tIns="18000" bIns="18000">
-            <a:spAutoFit/>
-          </a:bodyPr>
-          <a:lstStyle/>
-          <a:p>
-            <a:pPr algn="l"/>
-            <a:r>
-              <a:rPr sz="1000" b="1" i="0">
+          <p:cNvPr id="19" name="TextBox 18"/>
+          <p:cNvSpPr txBox="1"/>
+          <p:nvPr/>
+        </p:nvSpPr>
+        <p:spPr>
+          <a:xfrm>
+            <a:off x="548640" y="2889504"/>
+            <a:ext cx="3320186" cy="201168"/>
+          </a:xfrm>
+          <a:prstGeom prst="rect">
+            <a:avLst/>
+          </a:prstGeom>
+          <a:noFill/>
+        </p:spPr>
+        <p:txBody>
+          <a:bodyPr wrap="square" anchor="t" lIns="36000" rIns="36000" tIns="18000" bIns="18000">
+            <a:spAutoFit/>
+          </a:bodyPr>
+          <a:lstStyle/>
+          <a:p>
+            <a:pPr algn="l"/>
+            <a:r>
+              <a:rPr sz="900" b="1" i="0">
+                <a:solidFill>
+                  <a:srgbClr val="3B5174"/>
+                </a:solidFill>
+                <a:latin typeface="Noto Sans JP"/>
+              </a:rPr>
+              <a:t>例</a:t>
+            </a:r>
+          </a:p>
+        </p:txBody>
+      </p:sp>
+      <p:sp>
+        <p:nvSpPr>
+          <p:cNvPr id="20" name="TextBox 19"/>
+          <p:cNvSpPr txBox="1"/>
+          <p:nvPr/>
+        </p:nvSpPr>
+        <p:spPr>
+          <a:xfrm>
+            <a:off x="548640" y="3072384"/>
+            <a:ext cx="3320186" cy="365760"/>
+          </a:xfrm>
+          <a:prstGeom prst="rect">
+            <a:avLst/>
+          </a:prstGeom>
+          <a:noFill/>
+        </p:spPr>
+        <p:txBody>
+          <a:bodyPr wrap="square" anchor="t" lIns="36000" rIns="36000" tIns="18000" bIns="18000">
+            <a:spAutoFit/>
+          </a:bodyPr>
+          <a:lstStyle/>
+          <a:p>
+            <a:pPr algn="l"/>
+            <a:r>
+              <a:rPr sz="1100" b="1" i="0">
+                <a:solidFill>
+                  <a:srgbClr val="475569"/>
+                </a:solidFill>
+                <a:latin typeface="Noto Sans JP"/>
+              </a:rPr>
+              <a:t>Phos-Chek（リン酸塩系スラリー）</a:t>
+            </a:r>
+          </a:p>
+        </p:txBody>
+      </p:sp>
+      <p:sp>
+        <p:nvSpPr>
+          <p:cNvPr id="21" name="TextBox 20"/>
+          <p:cNvSpPr txBox="1"/>
+          <p:nvPr/>
+        </p:nvSpPr>
+        <p:spPr>
+          <a:xfrm>
+            <a:off x="548640" y="3493008"/>
+            <a:ext cx="3320186" cy="201168"/>
+          </a:xfrm>
+          <a:prstGeom prst="rect">
+            <a:avLst/>
+          </a:prstGeom>
+          <a:noFill/>
+        </p:spPr>
+        <p:txBody>
+          <a:bodyPr wrap="square" anchor="t" lIns="36000" rIns="36000" tIns="18000" bIns="18000">
+            <a:spAutoFit/>
+          </a:bodyPr>
+          <a:lstStyle/>
+          <a:p>
+            <a:pPr algn="l"/>
+            <a:r>
+              <a:rPr sz="900" b="1" i="0">
                 <a:solidFill>
                   <a:srgbClr val="64748B"/>
                 </a:solidFill>
@@ -55004,29 +55236,29 @@
       </p:sp>
       <p:sp>
         <p:nvSpPr>
-          <p:cNvPr id="16" name="TextBox 15"/>
-          <p:cNvSpPr txBox="1"/>
-          <p:nvPr/>
-        </p:nvSpPr>
-        <p:spPr>
-          <a:xfrm>
-            <a:off x="566928" y="2231136"/>
-            <a:ext cx="3283610" cy="475488"/>
-          </a:xfrm>
-          <a:prstGeom prst="rect">
-            <a:avLst/>
-          </a:prstGeom>
-          <a:noFill/>
-        </p:spPr>
-        <p:txBody>
-          <a:bodyPr wrap="square" anchor="t" lIns="36000" rIns="36000" tIns="18000" bIns="18000">
-            <a:spAutoFit/>
-          </a:bodyPr>
-          <a:lstStyle/>
-          <a:p>
-            <a:pPr algn="l"/>
-            <a:r>
-              <a:rPr sz="1200" b="0" i="0">
+          <p:cNvPr id="22" name="TextBox 21"/>
+          <p:cNvSpPr txBox="1"/>
+          <p:nvPr/>
+        </p:nvSpPr>
+        <p:spPr>
+          <a:xfrm>
+            <a:off x="548640" y="3675888"/>
+            <a:ext cx="3320186" cy="365760"/>
+          </a:xfrm>
+          <a:prstGeom prst="rect">
+            <a:avLst/>
+          </a:prstGeom>
+          <a:noFill/>
+        </p:spPr>
+        <p:txBody>
+          <a:bodyPr wrap="square" anchor="t" lIns="36000" rIns="36000" tIns="18000" bIns="18000">
+            <a:spAutoFit/>
+          </a:bodyPr>
+          <a:lstStyle/>
+          <a:p>
+            <a:pPr algn="l"/>
+            <a:r>
+              <a:rPr sz="1100" b="0" i="0">
                 <a:solidFill>
                   <a:srgbClr val="475569"/>
                 </a:solidFill>
@@ -55039,29 +55271,29 @@
       </p:sp>
       <p:sp>
         <p:nvSpPr>
-          <p:cNvPr id="17" name="TextBox 16"/>
-          <p:cNvSpPr txBox="1"/>
-          <p:nvPr/>
-        </p:nvSpPr>
-        <p:spPr>
-          <a:xfrm>
-            <a:off x="566928" y="2743200"/>
-            <a:ext cx="3283610" cy="219456"/>
-          </a:xfrm>
-          <a:prstGeom prst="rect">
-            <a:avLst/>
-          </a:prstGeom>
-          <a:noFill/>
-        </p:spPr>
-        <p:txBody>
-          <a:bodyPr wrap="square" anchor="t" lIns="36000" rIns="36000" tIns="18000" bIns="18000">
-            <a:spAutoFit/>
-          </a:bodyPr>
-          <a:lstStyle/>
-          <a:p>
-            <a:pPr algn="l"/>
-            <a:r>
-              <a:rPr sz="1000" b="1" i="0">
+          <p:cNvPr id="23" name="TextBox 22"/>
+          <p:cNvSpPr txBox="1"/>
+          <p:nvPr/>
+        </p:nvSpPr>
+        <p:spPr>
+          <a:xfrm>
+            <a:off x="548640" y="4096512"/>
+            <a:ext cx="3320186" cy="201168"/>
+          </a:xfrm>
+          <a:prstGeom prst="rect">
+            <a:avLst/>
+          </a:prstGeom>
+          <a:noFill/>
+        </p:spPr>
+        <p:txBody>
+          <a:bodyPr wrap="square" anchor="t" lIns="36000" rIns="36000" tIns="18000" bIns="18000">
+            <a:spAutoFit/>
+          </a:bodyPr>
+          <a:lstStyle/>
+          <a:p>
+            <a:pPr algn="l"/>
+            <a:r>
+              <a:rPr sz="900" b="1" i="0">
                 <a:solidFill>
                   <a:srgbClr val="64748B"/>
                 </a:solidFill>
@@ -55074,29 +55306,29 @@
       </p:sp>
       <p:sp>
         <p:nvSpPr>
-          <p:cNvPr id="18" name="TextBox 17"/>
-          <p:cNvSpPr txBox="1"/>
-          <p:nvPr/>
-        </p:nvSpPr>
-        <p:spPr>
-          <a:xfrm>
-            <a:off x="566928" y="2962656"/>
-            <a:ext cx="3283610" cy="475488"/>
-          </a:xfrm>
-          <a:prstGeom prst="rect">
-            <a:avLst/>
-          </a:prstGeom>
-          <a:noFill/>
-        </p:spPr>
-        <p:txBody>
-          <a:bodyPr wrap="square" anchor="t" lIns="36000" rIns="36000" tIns="18000" bIns="18000">
-            <a:spAutoFit/>
-          </a:bodyPr>
-          <a:lstStyle/>
-          <a:p>
-            <a:pPr algn="l"/>
-            <a:r>
-              <a:rPr sz="1200" b="0" i="0">
+          <p:cNvPr id="24" name="TextBox 23"/>
+          <p:cNvSpPr txBox="1"/>
+          <p:nvPr/>
+        </p:nvSpPr>
+        <p:spPr>
+          <a:xfrm>
+            <a:off x="548640" y="4279391"/>
+            <a:ext cx="3320186" cy="365760"/>
+          </a:xfrm>
+          <a:prstGeom prst="rect">
+            <a:avLst/>
+          </a:prstGeom>
+          <a:noFill/>
+        </p:spPr>
+        <p:txBody>
+          <a:bodyPr wrap="square" anchor="t" lIns="36000" rIns="36000" tIns="18000" bIns="18000">
+            <a:spAutoFit/>
+          </a:bodyPr>
+          <a:lstStyle/>
+          <a:p>
+            <a:pPr algn="l"/>
+            <a:r>
+              <a:rPr sz="1100" b="0" i="0">
                 <a:solidFill>
                   <a:srgbClr val="475569"/>
                 </a:solidFill>
@@ -55109,29 +55341,29 @@
       </p:sp>
       <p:sp>
         <p:nvSpPr>
-          <p:cNvPr id="19" name="TextBox 18"/>
-          <p:cNvSpPr txBox="1"/>
-          <p:nvPr/>
-        </p:nvSpPr>
-        <p:spPr>
-          <a:xfrm>
-            <a:off x="566928" y="3493008"/>
-            <a:ext cx="3283610" cy="219456"/>
-          </a:xfrm>
-          <a:prstGeom prst="rect">
-            <a:avLst/>
-          </a:prstGeom>
-          <a:noFill/>
-        </p:spPr>
-        <p:txBody>
-          <a:bodyPr wrap="square" anchor="t" lIns="36000" rIns="36000" tIns="18000" bIns="18000">
-            <a:spAutoFit/>
-          </a:bodyPr>
-          <a:lstStyle/>
-          <a:p>
-            <a:pPr algn="l"/>
-            <a:r>
-              <a:rPr sz="1000" b="1" i="0">
+          <p:cNvPr id="25" name="TextBox 24"/>
+          <p:cNvSpPr txBox="1"/>
+          <p:nvPr/>
+        </p:nvSpPr>
+        <p:spPr>
+          <a:xfrm>
+            <a:off x="548640" y="4700016"/>
+            <a:ext cx="3320186" cy="201168"/>
+          </a:xfrm>
+          <a:prstGeom prst="rect">
+            <a:avLst/>
+          </a:prstGeom>
+          <a:noFill/>
+        </p:spPr>
+        <p:txBody>
+          <a:bodyPr wrap="square" anchor="t" lIns="36000" rIns="36000" tIns="18000" bIns="18000">
+            <a:spAutoFit/>
+          </a:bodyPr>
+          <a:lstStyle/>
+          <a:p>
+            <a:pPr algn="l"/>
+            <a:r>
+              <a:rPr sz="900" b="1" i="0">
                 <a:solidFill>
                   <a:srgbClr val="A05656"/>
                 </a:solidFill>
@@ -55144,29 +55376,29 @@
       </p:sp>
       <p:sp>
         <p:nvSpPr>
-          <p:cNvPr id="20" name="TextBox 19"/>
-          <p:cNvSpPr txBox="1"/>
-          <p:nvPr/>
-        </p:nvSpPr>
-        <p:spPr>
-          <a:xfrm>
-            <a:off x="566928" y="3712464"/>
-            <a:ext cx="3283610" cy="1956816"/>
-          </a:xfrm>
-          <a:prstGeom prst="rect">
-            <a:avLst/>
-          </a:prstGeom>
-          <a:noFill/>
-        </p:spPr>
-        <p:txBody>
-          <a:bodyPr wrap="square" anchor="t" lIns="36000" rIns="36000" tIns="18000" bIns="18000">
-            <a:spAutoFit/>
-          </a:bodyPr>
-          <a:lstStyle/>
-          <a:p>
-            <a:pPr algn="l"/>
-            <a:r>
-              <a:rPr sz="1200" b="1" i="0">
+          <p:cNvPr id="26" name="TextBox 25"/>
+          <p:cNvSpPr txBox="1"/>
+          <p:nvPr/>
+        </p:nvSpPr>
+        <p:spPr>
+          <a:xfrm>
+            <a:off x="548640" y="4882896"/>
+            <a:ext cx="3320186" cy="859536"/>
+          </a:xfrm>
+          <a:prstGeom prst="rect">
+            <a:avLst/>
+          </a:prstGeom>
+          <a:noFill/>
+        </p:spPr>
+        <p:txBody>
+          <a:bodyPr wrap="square" anchor="t" lIns="36000" rIns="36000" tIns="18000" bIns="18000">
+            <a:spAutoFit/>
+          </a:bodyPr>
+          <a:lstStyle/>
+          <a:p>
+            <a:pPr algn="l"/>
+            <a:r>
+              <a:rPr sz="1100" b="1" i="0">
                 <a:solidFill>
                   <a:srgbClr val="A05656"/>
                 </a:solidFill>
@@ -55179,14 +55411,14 @@
       </p:sp>
       <p:sp>
         <p:nvSpPr>
-          <p:cNvPr id="21" name="Rounded Rectangle 20"/>
+          <p:cNvPr id="27" name="Rounded Rectangle 26"/>
           <p:cNvSpPr/>
           <p:nvPr/>
         </p:nvSpPr>
         <p:spPr>
           <a:xfrm>
             <a:off x="4252874" y="859536"/>
-            <a:ext cx="3685946" cy="4974336"/>
+            <a:ext cx="3685946" cy="5047488"/>
           </a:xfrm>
           <a:prstGeom prst="roundRect">
             <a:avLst>
@@ -55227,7 +55459,7 @@
       </p:sp>
       <p:sp>
         <p:nvSpPr>
-          <p:cNvPr id="22" name="Rectangle 21"/>
+          <p:cNvPr id="28" name="Rectangle 27"/>
           <p:cNvSpPr/>
           <p:nvPr/>
         </p:nvSpPr>
@@ -55271,29 +55503,191 @@
       </p:sp>
       <p:sp>
         <p:nvSpPr>
-          <p:cNvPr id="23" name="TextBox 22"/>
-          <p:cNvSpPr txBox="1"/>
-          <p:nvPr/>
-        </p:nvSpPr>
-        <p:spPr>
-          <a:xfrm>
-            <a:off x="4454042" y="1133856"/>
-            <a:ext cx="3283610" cy="365760"/>
-          </a:xfrm>
-          <a:prstGeom prst="rect">
-            <a:avLst/>
-          </a:prstGeom>
-          <a:noFill/>
-        </p:spPr>
-        <p:txBody>
-          <a:bodyPr wrap="square" anchor="t" lIns="36000" rIns="36000" tIns="18000" bIns="18000">
-            <a:spAutoFit/>
-          </a:bodyPr>
-          <a:lstStyle/>
-          <a:p>
-            <a:pPr algn="l"/>
-            <a:r>
-              <a:rPr sz="1800" b="1" i="0">
+          <p:cNvPr id="29" name="Rounded Rectangle 28"/>
+          <p:cNvSpPr/>
+          <p:nvPr/>
+        </p:nvSpPr>
+        <p:spPr>
+          <a:xfrm>
+            <a:off x="4435754" y="1024128"/>
+            <a:ext cx="3320186" cy="1078992"/>
+          </a:xfrm>
+          <a:prstGeom prst="roundRect">
+            <a:avLst>
+              <a:gd name="adj" fmla="val 3000"/>
+            </a:avLst>
+          </a:prstGeom>
+          <a:solidFill>
+            <a:srgbClr val="F5F8FC"/>
+          </a:solidFill>
+          <a:ln w="12700">
+            <a:solidFill>
+              <a:srgbClr val="C0D0E0"/>
+            </a:solidFill>
+          </a:ln>
+          <a:effectLst/>
+        </p:spPr>
+        <p:style>
+          <a:lnRef idx="1">
+            <a:schemeClr val="accent1"/>
+          </a:lnRef>
+          <a:fillRef idx="3">
+            <a:schemeClr val="accent1"/>
+          </a:fillRef>
+          <a:effectRef idx="2">
+            <a:schemeClr val="accent1"/>
+          </a:effectRef>
+          <a:fontRef idx="minor">
+            <a:schemeClr val="lt1"/>
+          </a:fontRef>
+        </p:style>
+        <p:txBody>
+          <a:bodyPr rtlCol="0" anchor="ctr"/>
+          <a:lstStyle/>
+          <a:p>
+            <a:pPr algn="ctr"/>
+          </a:p>
+        </p:txBody>
+      </p:sp>
+      <p:sp>
+        <p:nvSpPr>
+          <p:cNvPr id="30" name="Rectangle 29"/>
+          <p:cNvSpPr/>
+          <p:nvPr/>
+        </p:nvSpPr>
+        <p:spPr>
+          <a:xfrm>
+            <a:off x="4508906" y="1097280"/>
+            <a:ext cx="640080" cy="237744"/>
+          </a:xfrm>
+          <a:prstGeom prst="rect">
+            <a:avLst/>
+          </a:prstGeom>
+          <a:solidFill>
+            <a:srgbClr val="3B5174"/>
+          </a:solidFill>
+          <a:ln>
+            <a:noFill/>
+          </a:ln>
+          <a:effectLst/>
+        </p:spPr>
+        <p:style>
+          <a:lnRef idx="1">
+            <a:schemeClr val="accent1"/>
+          </a:lnRef>
+          <a:fillRef idx="3">
+            <a:schemeClr val="accent1"/>
+          </a:fillRef>
+          <a:effectRef idx="2">
+            <a:schemeClr val="accent1"/>
+          </a:effectRef>
+          <a:fontRef idx="minor">
+            <a:schemeClr val="lt1"/>
+          </a:fontRef>
+        </p:style>
+        <p:txBody>
+          <a:bodyPr rtlCol="0" anchor="ctr"/>
+          <a:lstStyle/>
+          <a:p>
+            <a:pPr algn="ctr"/>
+          </a:p>
+        </p:txBody>
+      </p:sp>
+      <p:sp>
+        <p:nvSpPr>
+          <p:cNvPr id="31" name="TextBox 30"/>
+          <p:cNvSpPr txBox="1"/>
+          <p:nvPr/>
+        </p:nvSpPr>
+        <p:spPr>
+          <a:xfrm>
+            <a:off x="4508906" y="1097280"/>
+            <a:ext cx="640080" cy="237744"/>
+          </a:xfrm>
+          <a:prstGeom prst="rect">
+            <a:avLst/>
+          </a:prstGeom>
+          <a:noFill/>
+        </p:spPr>
+        <p:txBody>
+          <a:bodyPr wrap="square" anchor="ctr" lIns="36000" rIns="36000" tIns="18000" bIns="18000">
+            <a:spAutoFit/>
+          </a:bodyPr>
+          <a:lstStyle/>
+          <a:p>
+            <a:pPr algn="ctr"/>
+            <a:r>
+              <a:rPr sz="900" b="1" i="0">
+                <a:solidFill>
+                  <a:srgbClr val="FFFFFF"/>
+                </a:solidFill>
+                <a:latin typeface="Noto Sans JP"/>
+              </a:rPr>
+              <a:t>写真</a:t>
+            </a:r>
+          </a:p>
+        </p:txBody>
+      </p:sp>
+      <p:sp>
+        <p:nvSpPr>
+          <p:cNvPr id="32" name="TextBox 31"/>
+          <p:cNvSpPr txBox="1"/>
+          <p:nvPr/>
+        </p:nvSpPr>
+        <p:spPr>
+          <a:xfrm>
+            <a:off x="4435754" y="1298448"/>
+            <a:ext cx="3320186" cy="512064"/>
+          </a:xfrm>
+          <a:prstGeom prst="rect">
+            <a:avLst/>
+          </a:prstGeom>
+          <a:noFill/>
+        </p:spPr>
+        <p:txBody>
+          <a:bodyPr wrap="square" anchor="ctr" lIns="36000" rIns="36000" tIns="18000" bIns="18000">
+            <a:spAutoFit/>
+          </a:bodyPr>
+          <a:lstStyle/>
+          <a:p>
+            <a:pPr algn="ctr"/>
+            <a:r>
+              <a:rPr sz="1000" b="0" i="0">
+                <a:solidFill>
+                  <a:srgbClr val="AAB4C0"/>
+                </a:solidFill>
+                <a:latin typeface="Noto Sans JP"/>
+              </a:rPr>
+              <a:t>消防ホースからの泡放水</a:t>
+            </a:r>
+          </a:p>
+        </p:txBody>
+      </p:sp>
+      <p:sp>
+        <p:nvSpPr>
+          <p:cNvPr id="33" name="TextBox 32"/>
+          <p:cNvSpPr txBox="1"/>
+          <p:nvPr/>
+        </p:nvSpPr>
+        <p:spPr>
+          <a:xfrm>
+            <a:off x="4435754" y="2212848"/>
+            <a:ext cx="3320186" cy="329184"/>
+          </a:xfrm>
+          <a:prstGeom prst="rect">
+            <a:avLst/>
+          </a:prstGeom>
+          <a:noFill/>
+        </p:spPr>
+        <p:txBody>
+          <a:bodyPr wrap="square" anchor="t" lIns="36000" rIns="36000" tIns="18000" bIns="18000">
+            <a:spAutoFit/>
+          </a:bodyPr>
+          <a:lstStyle/>
+          <a:p>
+            <a:pPr algn="l"/>
+            <a:r>
+              <a:rPr sz="1600" b="1" i="0">
                 <a:solidFill>
                   <a:srgbClr val="1E293B"/>
                 </a:solidFill>
@@ -55306,29 +55700,29 @@
       </p:sp>
       <p:sp>
         <p:nvSpPr>
-          <p:cNvPr id="24" name="TextBox 23"/>
-          <p:cNvSpPr txBox="1"/>
-          <p:nvPr/>
-        </p:nvSpPr>
-        <p:spPr>
-          <a:xfrm>
-            <a:off x="4454042" y="1536192"/>
-            <a:ext cx="3283610" cy="237744"/>
-          </a:xfrm>
-          <a:prstGeom prst="rect">
-            <a:avLst/>
-          </a:prstGeom>
-          <a:noFill/>
-        </p:spPr>
-        <p:txBody>
-          <a:bodyPr wrap="square" anchor="t" lIns="36000" rIns="36000" tIns="18000" bIns="18000">
-            <a:spAutoFit/>
-          </a:bodyPr>
-          <a:lstStyle/>
-          <a:p>
-            <a:pPr algn="l"/>
-            <a:r>
-              <a:rPr sz="1000" b="0" i="1">
+          <p:cNvPr id="34" name="TextBox 33"/>
+          <p:cNvSpPr txBox="1"/>
+          <p:nvPr/>
+        </p:nvSpPr>
+        <p:spPr>
+          <a:xfrm>
+            <a:off x="4435754" y="2542032"/>
+            <a:ext cx="3320186" cy="201168"/>
+          </a:xfrm>
+          <a:prstGeom prst="rect">
+            <a:avLst/>
+          </a:prstGeom>
+          <a:noFill/>
+        </p:spPr>
+        <p:txBody>
+          <a:bodyPr wrap="square" anchor="t" lIns="36000" rIns="36000" tIns="18000" bIns="18000">
+            <a:spAutoFit/>
+          </a:bodyPr>
+          <a:lstStyle/>
+          <a:p>
+            <a:pPr algn="l"/>
+            <a:r>
+              <a:rPr sz="900" b="0" i="1">
                 <a:solidFill>
                   <a:srgbClr val="64748B"/>
                 </a:solidFill>
@@ -55341,14 +55735,14 @@
       </p:sp>
       <p:sp>
         <p:nvSpPr>
-          <p:cNvPr id="25" name="Rectangle 24"/>
+          <p:cNvPr id="35" name="Rectangle 34"/>
           <p:cNvSpPr/>
           <p:nvPr/>
         </p:nvSpPr>
         <p:spPr>
           <a:xfrm>
-            <a:off x="4454042" y="1865376"/>
-            <a:ext cx="3283610" cy="13716"/>
+            <a:off x="4435754" y="2798064"/>
+            <a:ext cx="3320186" cy="10972"/>
           </a:xfrm>
           <a:prstGeom prst="rect">
             <a:avLst/>
@@ -55385,29 +55779,99 @@
       </p:sp>
       <p:sp>
         <p:nvSpPr>
-          <p:cNvPr id="26" name="TextBox 25"/>
-          <p:cNvSpPr txBox="1"/>
-          <p:nvPr/>
-        </p:nvSpPr>
-        <p:spPr>
-          <a:xfrm>
-            <a:off x="4454042" y="2011680"/>
-            <a:ext cx="3283610" cy="219456"/>
-          </a:xfrm>
-          <a:prstGeom prst="rect">
-            <a:avLst/>
-          </a:prstGeom>
-          <a:noFill/>
-        </p:spPr>
-        <p:txBody>
-          <a:bodyPr wrap="square" anchor="t" lIns="36000" rIns="36000" tIns="18000" bIns="18000">
-            <a:spAutoFit/>
-          </a:bodyPr>
-          <a:lstStyle/>
-          <a:p>
-            <a:pPr algn="l"/>
-            <a:r>
-              <a:rPr sz="1000" b="1" i="0">
+          <p:cNvPr id="36" name="TextBox 35"/>
+          <p:cNvSpPr txBox="1"/>
+          <p:nvPr/>
+        </p:nvSpPr>
+        <p:spPr>
+          <a:xfrm>
+            <a:off x="4435754" y="2889504"/>
+            <a:ext cx="3320186" cy="201168"/>
+          </a:xfrm>
+          <a:prstGeom prst="rect">
+            <a:avLst/>
+          </a:prstGeom>
+          <a:noFill/>
+        </p:spPr>
+        <p:txBody>
+          <a:bodyPr wrap="square" anchor="t" lIns="36000" rIns="36000" tIns="18000" bIns="18000">
+            <a:spAutoFit/>
+          </a:bodyPr>
+          <a:lstStyle/>
+          <a:p>
+            <a:pPr algn="l"/>
+            <a:r>
+              <a:rPr sz="900" b="1" i="0">
+                <a:solidFill>
+                  <a:srgbClr val="3B5174"/>
+                </a:solidFill>
+                <a:latin typeface="Noto Sans JP"/>
+              </a:rPr>
+              <a:t>例</a:t>
+            </a:r>
+          </a:p>
+        </p:txBody>
+      </p:sp>
+      <p:sp>
+        <p:nvSpPr>
+          <p:cNvPr id="37" name="TextBox 36"/>
+          <p:cNvSpPr txBox="1"/>
+          <p:nvPr/>
+        </p:nvSpPr>
+        <p:spPr>
+          <a:xfrm>
+            <a:off x="4435754" y="3072384"/>
+            <a:ext cx="3320186" cy="365760"/>
+          </a:xfrm>
+          <a:prstGeom prst="rect">
+            <a:avLst/>
+          </a:prstGeom>
+          <a:noFill/>
+        </p:spPr>
+        <p:txBody>
+          <a:bodyPr wrap="square" anchor="t" lIns="36000" rIns="36000" tIns="18000" bIns="18000">
+            <a:spAutoFit/>
+          </a:bodyPr>
+          <a:lstStyle/>
+          <a:p>
+            <a:pPr algn="l"/>
+            <a:r>
+              <a:rPr sz="1100" b="1" i="0">
+                <a:solidFill>
+                  <a:srgbClr val="475569"/>
+                </a:solidFill>
+                <a:latin typeface="Noto Sans JP"/>
+              </a:rPr>
+              <a:t>Class A フォーム／旧 AFFF</a:t>
+            </a:r>
+          </a:p>
+        </p:txBody>
+      </p:sp>
+      <p:sp>
+        <p:nvSpPr>
+          <p:cNvPr id="38" name="TextBox 37"/>
+          <p:cNvSpPr txBox="1"/>
+          <p:nvPr/>
+        </p:nvSpPr>
+        <p:spPr>
+          <a:xfrm>
+            <a:off x="4435754" y="3493008"/>
+            <a:ext cx="3320186" cy="201168"/>
+          </a:xfrm>
+          <a:prstGeom prst="rect">
+            <a:avLst/>
+          </a:prstGeom>
+          <a:noFill/>
+        </p:spPr>
+        <p:txBody>
+          <a:bodyPr wrap="square" anchor="t" lIns="36000" rIns="36000" tIns="18000" bIns="18000">
+            <a:spAutoFit/>
+          </a:bodyPr>
+          <a:lstStyle/>
+          <a:p>
+            <a:pPr algn="l"/>
+            <a:r>
+              <a:rPr sz="900" b="1" i="0">
                 <a:solidFill>
                   <a:srgbClr val="64748B"/>
                 </a:solidFill>
@@ -55420,29 +55884,29 @@
       </p:sp>
       <p:sp>
         <p:nvSpPr>
-          <p:cNvPr id="27" name="TextBox 26"/>
-          <p:cNvSpPr txBox="1"/>
-          <p:nvPr/>
-        </p:nvSpPr>
-        <p:spPr>
-          <a:xfrm>
-            <a:off x="4454042" y="2231136"/>
-            <a:ext cx="3283610" cy="475488"/>
-          </a:xfrm>
-          <a:prstGeom prst="rect">
-            <a:avLst/>
-          </a:prstGeom>
-          <a:noFill/>
-        </p:spPr>
-        <p:txBody>
-          <a:bodyPr wrap="square" anchor="t" lIns="36000" rIns="36000" tIns="18000" bIns="18000">
-            <a:spAutoFit/>
-          </a:bodyPr>
-          <a:lstStyle/>
-          <a:p>
-            <a:pPr algn="l"/>
-            <a:r>
-              <a:rPr sz="1200" b="0" i="0">
+          <p:cNvPr id="39" name="TextBox 38"/>
+          <p:cNvSpPr txBox="1"/>
+          <p:nvPr/>
+        </p:nvSpPr>
+        <p:spPr>
+          <a:xfrm>
+            <a:off x="4435754" y="3675888"/>
+            <a:ext cx="3320186" cy="365760"/>
+          </a:xfrm>
+          <a:prstGeom prst="rect">
+            <a:avLst/>
+          </a:prstGeom>
+          <a:noFill/>
+        </p:spPr>
+        <p:txBody>
+          <a:bodyPr wrap="square" anchor="t" lIns="36000" rIns="36000" tIns="18000" bIns="18000">
+            <a:spAutoFit/>
+          </a:bodyPr>
+          <a:lstStyle/>
+          <a:p>
+            <a:pPr algn="l"/>
+            <a:r>
+              <a:rPr sz="1100" b="0" i="0">
                 <a:solidFill>
                   <a:srgbClr val="475569"/>
                 </a:solidFill>
@@ -55455,29 +55919,29 @@
       </p:sp>
       <p:sp>
         <p:nvSpPr>
-          <p:cNvPr id="28" name="TextBox 27"/>
-          <p:cNvSpPr txBox="1"/>
-          <p:nvPr/>
-        </p:nvSpPr>
-        <p:spPr>
-          <a:xfrm>
-            <a:off x="4454042" y="2743200"/>
-            <a:ext cx="3283610" cy="219456"/>
-          </a:xfrm>
-          <a:prstGeom prst="rect">
-            <a:avLst/>
-          </a:prstGeom>
-          <a:noFill/>
-        </p:spPr>
-        <p:txBody>
-          <a:bodyPr wrap="square" anchor="t" lIns="36000" rIns="36000" tIns="18000" bIns="18000">
-            <a:spAutoFit/>
-          </a:bodyPr>
-          <a:lstStyle/>
-          <a:p>
-            <a:pPr algn="l"/>
-            <a:r>
-              <a:rPr sz="1000" b="1" i="0">
+          <p:cNvPr id="40" name="TextBox 39"/>
+          <p:cNvSpPr txBox="1"/>
+          <p:nvPr/>
+        </p:nvSpPr>
+        <p:spPr>
+          <a:xfrm>
+            <a:off x="4435754" y="4096512"/>
+            <a:ext cx="3320186" cy="201168"/>
+          </a:xfrm>
+          <a:prstGeom prst="rect">
+            <a:avLst/>
+          </a:prstGeom>
+          <a:noFill/>
+        </p:spPr>
+        <p:txBody>
+          <a:bodyPr wrap="square" anchor="t" lIns="36000" rIns="36000" tIns="18000" bIns="18000">
+            <a:spAutoFit/>
+          </a:bodyPr>
+          <a:lstStyle/>
+          <a:p>
+            <a:pPr algn="l"/>
+            <a:r>
+              <a:rPr sz="900" b="1" i="0">
                 <a:solidFill>
                   <a:srgbClr val="64748B"/>
                 </a:solidFill>
@@ -55490,29 +55954,29 @@
       </p:sp>
       <p:sp>
         <p:nvSpPr>
-          <p:cNvPr id="29" name="TextBox 28"/>
-          <p:cNvSpPr txBox="1"/>
-          <p:nvPr/>
-        </p:nvSpPr>
-        <p:spPr>
-          <a:xfrm>
-            <a:off x="4454042" y="2962656"/>
-            <a:ext cx="3283610" cy="475488"/>
-          </a:xfrm>
-          <a:prstGeom prst="rect">
-            <a:avLst/>
-          </a:prstGeom>
-          <a:noFill/>
-        </p:spPr>
-        <p:txBody>
-          <a:bodyPr wrap="square" anchor="t" lIns="36000" rIns="36000" tIns="18000" bIns="18000">
-            <a:spAutoFit/>
-          </a:bodyPr>
-          <a:lstStyle/>
-          <a:p>
-            <a:pPr algn="l"/>
-            <a:r>
-              <a:rPr sz="1200" b="0" i="0">
+          <p:cNvPr id="41" name="TextBox 40"/>
+          <p:cNvSpPr txBox="1"/>
+          <p:nvPr/>
+        </p:nvSpPr>
+        <p:spPr>
+          <a:xfrm>
+            <a:off x="4435754" y="4279391"/>
+            <a:ext cx="3320186" cy="365760"/>
+          </a:xfrm>
+          <a:prstGeom prst="rect">
+            <a:avLst/>
+          </a:prstGeom>
+          <a:noFill/>
+        </p:spPr>
+        <p:txBody>
+          <a:bodyPr wrap="square" anchor="t" lIns="36000" rIns="36000" tIns="18000" bIns="18000">
+            <a:spAutoFit/>
+          </a:bodyPr>
+          <a:lstStyle/>
+          <a:p>
+            <a:pPr algn="l"/>
+            <a:r>
+              <a:rPr sz="1100" b="0" i="0">
                 <a:solidFill>
                   <a:srgbClr val="475569"/>
                 </a:solidFill>
@@ -55525,29 +55989,29 @@
       </p:sp>
       <p:sp>
         <p:nvSpPr>
-          <p:cNvPr id="30" name="TextBox 29"/>
-          <p:cNvSpPr txBox="1"/>
-          <p:nvPr/>
-        </p:nvSpPr>
-        <p:spPr>
-          <a:xfrm>
-            <a:off x="4454042" y="3493008"/>
-            <a:ext cx="3283610" cy="219456"/>
-          </a:xfrm>
-          <a:prstGeom prst="rect">
-            <a:avLst/>
-          </a:prstGeom>
-          <a:noFill/>
-        </p:spPr>
-        <p:txBody>
-          <a:bodyPr wrap="square" anchor="t" lIns="36000" rIns="36000" tIns="18000" bIns="18000">
-            <a:spAutoFit/>
-          </a:bodyPr>
-          <a:lstStyle/>
-          <a:p>
-            <a:pPr algn="l"/>
-            <a:r>
-              <a:rPr sz="1000" b="1" i="0">
+          <p:cNvPr id="42" name="TextBox 41"/>
+          <p:cNvSpPr txBox="1"/>
+          <p:nvPr/>
+        </p:nvSpPr>
+        <p:spPr>
+          <a:xfrm>
+            <a:off x="4435754" y="4700016"/>
+            <a:ext cx="3320186" cy="201168"/>
+          </a:xfrm>
+          <a:prstGeom prst="rect">
+            <a:avLst/>
+          </a:prstGeom>
+          <a:noFill/>
+        </p:spPr>
+        <p:txBody>
+          <a:bodyPr wrap="square" anchor="t" lIns="36000" rIns="36000" tIns="18000" bIns="18000">
+            <a:spAutoFit/>
+          </a:bodyPr>
+          <a:lstStyle/>
+          <a:p>
+            <a:pPr algn="l"/>
+            <a:r>
+              <a:rPr sz="900" b="1" i="0">
                 <a:solidFill>
                   <a:srgbClr val="A05656"/>
                 </a:solidFill>
@@ -55560,29 +56024,29 @@
       </p:sp>
       <p:sp>
         <p:nvSpPr>
-          <p:cNvPr id="31" name="TextBox 30"/>
-          <p:cNvSpPr txBox="1"/>
-          <p:nvPr/>
-        </p:nvSpPr>
-        <p:spPr>
-          <a:xfrm>
-            <a:off x="4454042" y="3712464"/>
-            <a:ext cx="3283610" cy="1956816"/>
-          </a:xfrm>
-          <a:prstGeom prst="rect">
-            <a:avLst/>
-          </a:prstGeom>
-          <a:noFill/>
-        </p:spPr>
-        <p:txBody>
-          <a:bodyPr wrap="square" anchor="t" lIns="36000" rIns="36000" tIns="18000" bIns="18000">
-            <a:spAutoFit/>
-          </a:bodyPr>
-          <a:lstStyle/>
-          <a:p>
-            <a:pPr algn="l"/>
-            <a:r>
-              <a:rPr sz="1200" b="1" i="0">
+          <p:cNvPr id="43" name="TextBox 42"/>
+          <p:cNvSpPr txBox="1"/>
+          <p:nvPr/>
+        </p:nvSpPr>
+        <p:spPr>
+          <a:xfrm>
+            <a:off x="4435754" y="4882896"/>
+            <a:ext cx="3320186" cy="859536"/>
+          </a:xfrm>
+          <a:prstGeom prst="rect">
+            <a:avLst/>
+          </a:prstGeom>
+          <a:noFill/>
+        </p:spPr>
+        <p:txBody>
+          <a:bodyPr wrap="square" anchor="t" lIns="36000" rIns="36000" tIns="18000" bIns="18000">
+            <a:spAutoFit/>
+          </a:bodyPr>
+          <a:lstStyle/>
+          <a:p>
+            <a:pPr algn="l"/>
+            <a:r>
+              <a:rPr sz="1100" b="1" i="0">
                 <a:solidFill>
                   <a:srgbClr val="A05656"/>
                 </a:solidFill>
@@ -55595,14 +56059,14 @@
       </p:sp>
       <p:sp>
         <p:nvSpPr>
-          <p:cNvPr id="32" name="Rounded Rectangle 31"/>
+          <p:cNvPr id="44" name="Rounded Rectangle 43"/>
           <p:cNvSpPr/>
           <p:nvPr/>
         </p:nvSpPr>
         <p:spPr>
           <a:xfrm>
             <a:off x="8139988" y="859536"/>
-            <a:ext cx="3685946" cy="4974336"/>
+            <a:ext cx="3685946" cy="5047488"/>
           </a:xfrm>
           <a:prstGeom prst="roundRect">
             <a:avLst>
@@ -55641,7 +56105,7 @@
       </p:sp>
       <p:sp>
         <p:nvSpPr>
-          <p:cNvPr id="33" name="Rectangle 32"/>
+          <p:cNvPr id="45" name="Rectangle 44"/>
           <p:cNvSpPr/>
           <p:nvPr/>
         </p:nvSpPr>
@@ -55685,34 +56149,196 @@
       </p:sp>
       <p:sp>
         <p:nvSpPr>
-          <p:cNvPr id="34" name="TextBox 33"/>
-          <p:cNvSpPr txBox="1"/>
-          <p:nvPr/>
-        </p:nvSpPr>
-        <p:spPr>
-          <a:xfrm>
-            <a:off x="8341156" y="1133856"/>
-            <a:ext cx="3283610" cy="365760"/>
-          </a:xfrm>
-          <a:prstGeom prst="rect">
-            <a:avLst/>
-          </a:prstGeom>
-          <a:noFill/>
-        </p:spPr>
-        <p:txBody>
-          <a:bodyPr wrap="square" anchor="t" lIns="36000" rIns="36000" tIns="18000" bIns="18000">
-            <a:spAutoFit/>
-          </a:bodyPr>
-          <a:lstStyle/>
-          <a:p>
-            <a:pPr algn="l"/>
-            <a:r>
-              <a:rPr sz="1800" b="1" i="0">
+          <p:cNvPr id="46" name="Rounded Rectangle 45"/>
+          <p:cNvSpPr/>
+          <p:nvPr/>
+        </p:nvSpPr>
+        <p:spPr>
+          <a:xfrm>
+            <a:off x="8322868" y="1024128"/>
+            <a:ext cx="3320186" cy="1078992"/>
+          </a:xfrm>
+          <a:prstGeom prst="roundRect">
+            <a:avLst>
+              <a:gd name="adj" fmla="val 3000"/>
+            </a:avLst>
+          </a:prstGeom>
+          <a:solidFill>
+            <a:srgbClr val="F5F8FC"/>
+          </a:solidFill>
+          <a:ln w="12700">
+            <a:solidFill>
+              <a:srgbClr val="C0D0E0"/>
+            </a:solidFill>
+          </a:ln>
+          <a:effectLst/>
+        </p:spPr>
+        <p:style>
+          <a:lnRef idx="1">
+            <a:schemeClr val="accent1"/>
+          </a:lnRef>
+          <a:fillRef idx="3">
+            <a:schemeClr val="accent1"/>
+          </a:fillRef>
+          <a:effectRef idx="2">
+            <a:schemeClr val="accent1"/>
+          </a:effectRef>
+          <a:fontRef idx="minor">
+            <a:schemeClr val="lt1"/>
+          </a:fontRef>
+        </p:style>
+        <p:txBody>
+          <a:bodyPr rtlCol="0" anchor="ctr"/>
+          <a:lstStyle/>
+          <a:p>
+            <a:pPr algn="ctr"/>
+          </a:p>
+        </p:txBody>
+      </p:sp>
+      <p:sp>
+        <p:nvSpPr>
+          <p:cNvPr id="47" name="Rectangle 46"/>
+          <p:cNvSpPr/>
+          <p:nvPr/>
+        </p:nvSpPr>
+        <p:spPr>
+          <a:xfrm>
+            <a:off x="8396020" y="1097280"/>
+            <a:ext cx="640080" cy="237744"/>
+          </a:xfrm>
+          <a:prstGeom prst="rect">
+            <a:avLst/>
+          </a:prstGeom>
+          <a:solidFill>
+            <a:srgbClr val="D4A574"/>
+          </a:solidFill>
+          <a:ln>
+            <a:noFill/>
+          </a:ln>
+          <a:effectLst/>
+        </p:spPr>
+        <p:style>
+          <a:lnRef idx="1">
+            <a:schemeClr val="accent1"/>
+          </a:lnRef>
+          <a:fillRef idx="3">
+            <a:schemeClr val="accent1"/>
+          </a:fillRef>
+          <a:effectRef idx="2">
+            <a:schemeClr val="accent1"/>
+          </a:effectRef>
+          <a:fontRef idx="minor">
+            <a:schemeClr val="lt1"/>
+          </a:fontRef>
+        </p:style>
+        <p:txBody>
+          <a:bodyPr rtlCol="0" anchor="ctr"/>
+          <a:lstStyle/>
+          <a:p>
+            <a:pPr algn="ctr"/>
+          </a:p>
+        </p:txBody>
+      </p:sp>
+      <p:sp>
+        <p:nvSpPr>
+          <p:cNvPr id="48" name="TextBox 47"/>
+          <p:cNvSpPr txBox="1"/>
+          <p:nvPr/>
+        </p:nvSpPr>
+        <p:spPr>
+          <a:xfrm>
+            <a:off x="8396020" y="1097280"/>
+            <a:ext cx="640080" cy="237744"/>
+          </a:xfrm>
+          <a:prstGeom prst="rect">
+            <a:avLst/>
+          </a:prstGeom>
+          <a:noFill/>
+        </p:spPr>
+        <p:txBody>
+          <a:bodyPr wrap="square" anchor="ctr" lIns="36000" rIns="36000" tIns="18000" bIns="18000">
+            <a:spAutoFit/>
+          </a:bodyPr>
+          <a:lstStyle/>
+          <a:p>
+            <a:pPr algn="ctr"/>
+            <a:r>
+              <a:rPr sz="900" b="1" i="0">
                 <a:solidFill>
                   <a:srgbClr val="FFFFFF"/>
                 </a:solidFill>
                 <a:latin typeface="Noto Sans JP"/>
               </a:rPr>
+              <a:t>写真</a:t>
+            </a:r>
+          </a:p>
+        </p:txBody>
+      </p:sp>
+      <p:sp>
+        <p:nvSpPr>
+          <p:cNvPr id="49" name="TextBox 48"/>
+          <p:cNvSpPr txBox="1"/>
+          <p:nvPr/>
+        </p:nvSpPr>
+        <p:spPr>
+          <a:xfrm>
+            <a:off x="8322868" y="1298448"/>
+            <a:ext cx="3320186" cy="512064"/>
+          </a:xfrm>
+          <a:prstGeom prst="rect">
+            <a:avLst/>
+          </a:prstGeom>
+          <a:noFill/>
+        </p:spPr>
+        <p:txBody>
+          <a:bodyPr wrap="square" anchor="ctr" lIns="36000" rIns="36000" tIns="18000" bIns="18000">
+            <a:spAutoFit/>
+          </a:bodyPr>
+          <a:lstStyle/>
+          <a:p>
+            <a:pPr algn="ctr"/>
+            <a:r>
+              <a:rPr sz="1000" b="0" i="0">
+                <a:solidFill>
+                  <a:srgbClr val="AAB4C0"/>
+                </a:solidFill>
+                <a:latin typeface="Noto Sans JP"/>
+              </a:rPr>
+              <a:t>住宅・植生へのゲル事前塗布</a:t>
+            </a:r>
+          </a:p>
+        </p:txBody>
+      </p:sp>
+      <p:sp>
+        <p:nvSpPr>
+          <p:cNvPr id="50" name="TextBox 49"/>
+          <p:cNvSpPr txBox="1"/>
+          <p:nvPr/>
+        </p:nvSpPr>
+        <p:spPr>
+          <a:xfrm>
+            <a:off x="8322868" y="2212848"/>
+            <a:ext cx="3320186" cy="329184"/>
+          </a:xfrm>
+          <a:prstGeom prst="rect">
+            <a:avLst/>
+          </a:prstGeom>
+          <a:noFill/>
+        </p:spPr>
+        <p:txBody>
+          <a:bodyPr wrap="square" anchor="t" lIns="36000" rIns="36000" tIns="18000" bIns="18000">
+            <a:spAutoFit/>
+          </a:bodyPr>
+          <a:lstStyle/>
+          <a:p>
+            <a:pPr algn="l"/>
+            <a:r>
+              <a:rPr sz="1600" b="1" i="0">
+                <a:solidFill>
+                  <a:srgbClr val="FFFFFF"/>
+                </a:solidFill>
+                <a:latin typeface="Noto Sans JP"/>
+              </a:rPr>
               <a:t>水強化ゲル（WEG）</a:t>
             </a:r>
           </a:p>
@@ -55720,29 +56346,29 @@
       </p:sp>
       <p:sp>
         <p:nvSpPr>
-          <p:cNvPr id="35" name="TextBox 34"/>
-          <p:cNvSpPr txBox="1"/>
-          <p:nvPr/>
-        </p:nvSpPr>
-        <p:spPr>
-          <a:xfrm>
-            <a:off x="8341156" y="1536192"/>
-            <a:ext cx="3283610" cy="237744"/>
-          </a:xfrm>
-          <a:prstGeom prst="rect">
-            <a:avLst/>
-          </a:prstGeom>
-          <a:noFill/>
-        </p:spPr>
-        <p:txBody>
-          <a:bodyPr wrap="square" anchor="t" lIns="36000" rIns="36000" tIns="18000" bIns="18000">
-            <a:spAutoFit/>
-          </a:bodyPr>
-          <a:lstStyle/>
-          <a:p>
-            <a:pPr algn="l"/>
-            <a:r>
-              <a:rPr sz="1000" b="0" i="1">
+          <p:cNvPr id="51" name="TextBox 50"/>
+          <p:cNvSpPr txBox="1"/>
+          <p:nvPr/>
+        </p:nvSpPr>
+        <p:spPr>
+          <a:xfrm>
+            <a:off x="8322868" y="2542032"/>
+            <a:ext cx="3320186" cy="201168"/>
+          </a:xfrm>
+          <a:prstGeom prst="rect">
+            <a:avLst/>
+          </a:prstGeom>
+          <a:noFill/>
+        </p:spPr>
+        <p:txBody>
+          <a:bodyPr wrap="square" anchor="t" lIns="36000" rIns="36000" tIns="18000" bIns="18000">
+            <a:spAutoFit/>
+          </a:bodyPr>
+          <a:lstStyle/>
+          <a:p>
+            <a:pPr algn="l"/>
+            <a:r>
+              <a:rPr sz="900" b="0" i="1">
                 <a:solidFill>
                   <a:srgbClr val="A0B8D0"/>
                 </a:solidFill>
@@ -55755,14 +56381,14 @@
       </p:sp>
       <p:sp>
         <p:nvSpPr>
-          <p:cNvPr id="36" name="Rectangle 35"/>
+          <p:cNvPr id="52" name="Rectangle 51"/>
           <p:cNvSpPr/>
           <p:nvPr/>
         </p:nvSpPr>
         <p:spPr>
           <a:xfrm>
-            <a:off x="8341156" y="1865376"/>
-            <a:ext cx="3283610" cy="13716"/>
+            <a:off x="8322868" y="2798064"/>
+            <a:ext cx="3320186" cy="10972"/>
           </a:xfrm>
           <a:prstGeom prst="rect">
             <a:avLst/>
@@ -55799,29 +56425,99 @@
       </p:sp>
       <p:sp>
         <p:nvSpPr>
-          <p:cNvPr id="37" name="TextBox 36"/>
-          <p:cNvSpPr txBox="1"/>
-          <p:nvPr/>
-        </p:nvSpPr>
-        <p:spPr>
-          <a:xfrm>
-            <a:off x="8341156" y="2011680"/>
-            <a:ext cx="3283610" cy="219456"/>
-          </a:xfrm>
-          <a:prstGeom prst="rect">
-            <a:avLst/>
-          </a:prstGeom>
-          <a:noFill/>
-        </p:spPr>
-        <p:txBody>
-          <a:bodyPr wrap="square" anchor="t" lIns="36000" rIns="36000" tIns="18000" bIns="18000">
-            <a:spAutoFit/>
-          </a:bodyPr>
-          <a:lstStyle/>
-          <a:p>
-            <a:pPr algn="l"/>
-            <a:r>
-              <a:rPr sz="1000" b="1" i="0">
+          <p:cNvPr id="53" name="TextBox 52"/>
+          <p:cNvSpPr txBox="1"/>
+          <p:nvPr/>
+        </p:nvSpPr>
+        <p:spPr>
+          <a:xfrm>
+            <a:off x="8322868" y="2889504"/>
+            <a:ext cx="3320186" cy="201168"/>
+          </a:xfrm>
+          <a:prstGeom prst="rect">
+            <a:avLst/>
+          </a:prstGeom>
+          <a:noFill/>
+        </p:spPr>
+        <p:txBody>
+          <a:bodyPr wrap="square" anchor="t" lIns="36000" rIns="36000" tIns="18000" bIns="18000">
+            <a:spAutoFit/>
+          </a:bodyPr>
+          <a:lstStyle/>
+          <a:p>
+            <a:pPr algn="l"/>
+            <a:r>
+              <a:rPr sz="900" b="1" i="0">
+                <a:solidFill>
+                  <a:srgbClr val="D4A574"/>
+                </a:solidFill>
+                <a:latin typeface="Noto Sans JP"/>
+              </a:rPr>
+              <a:t>例</a:t>
+            </a:r>
+          </a:p>
+        </p:txBody>
+      </p:sp>
+      <p:sp>
+        <p:nvSpPr>
+          <p:cNvPr id="54" name="TextBox 53"/>
+          <p:cNvSpPr txBox="1"/>
+          <p:nvPr/>
+        </p:nvSpPr>
+        <p:spPr>
+          <a:xfrm>
+            <a:off x="8322868" y="3072384"/>
+            <a:ext cx="3320186" cy="365760"/>
+          </a:xfrm>
+          <a:prstGeom prst="rect">
+            <a:avLst/>
+          </a:prstGeom>
+          <a:noFill/>
+        </p:spPr>
+        <p:txBody>
+          <a:bodyPr wrap="square" anchor="t" lIns="36000" rIns="36000" tIns="18000" bIns="18000">
+            <a:spAutoFit/>
+          </a:bodyPr>
+          <a:lstStyle/>
+          <a:p>
+            <a:pPr algn="l"/>
+            <a:r>
+              <a:rPr sz="1100" b="1" i="0">
+                <a:solidFill>
+                  <a:srgbClr val="D8E2EE"/>
+                </a:solidFill>
+                <a:latin typeface="Noto Sans JP"/>
+              </a:rPr>
+              <a:t>Barricade／Thermo-Gel／AquaGel-K</a:t>
+            </a:r>
+          </a:p>
+        </p:txBody>
+      </p:sp>
+      <p:sp>
+        <p:nvSpPr>
+          <p:cNvPr id="55" name="TextBox 54"/>
+          <p:cNvSpPr txBox="1"/>
+          <p:nvPr/>
+        </p:nvSpPr>
+        <p:spPr>
+          <a:xfrm>
+            <a:off x="8322868" y="3493008"/>
+            <a:ext cx="3320186" cy="201168"/>
+          </a:xfrm>
+          <a:prstGeom prst="rect">
+            <a:avLst/>
+          </a:prstGeom>
+          <a:noFill/>
+        </p:spPr>
+        <p:txBody>
+          <a:bodyPr wrap="square" anchor="t" lIns="36000" rIns="36000" tIns="18000" bIns="18000">
+            <a:spAutoFit/>
+          </a:bodyPr>
+          <a:lstStyle/>
+          <a:p>
+            <a:pPr algn="l"/>
+            <a:r>
+              <a:rPr sz="900" b="1" i="0">
                 <a:solidFill>
                   <a:srgbClr val="88A0B8"/>
                 </a:solidFill>
@@ -55834,29 +56530,29 @@
       </p:sp>
       <p:sp>
         <p:nvSpPr>
-          <p:cNvPr id="38" name="TextBox 37"/>
-          <p:cNvSpPr txBox="1"/>
-          <p:nvPr/>
-        </p:nvSpPr>
-        <p:spPr>
-          <a:xfrm>
-            <a:off x="8341156" y="2231136"/>
-            <a:ext cx="3283610" cy="475488"/>
-          </a:xfrm>
-          <a:prstGeom prst="rect">
-            <a:avLst/>
-          </a:prstGeom>
-          <a:noFill/>
-        </p:spPr>
-        <p:txBody>
-          <a:bodyPr wrap="square" anchor="t" lIns="36000" rIns="36000" tIns="18000" bIns="18000">
-            <a:spAutoFit/>
-          </a:bodyPr>
-          <a:lstStyle/>
-          <a:p>
-            <a:pPr algn="l"/>
-            <a:r>
-              <a:rPr sz="1200" b="0" i="0">
+          <p:cNvPr id="56" name="TextBox 55"/>
+          <p:cNvSpPr txBox="1"/>
+          <p:nvPr/>
+        </p:nvSpPr>
+        <p:spPr>
+          <a:xfrm>
+            <a:off x="8322868" y="3675888"/>
+            <a:ext cx="3320186" cy="365760"/>
+          </a:xfrm>
+          <a:prstGeom prst="rect">
+            <a:avLst/>
+          </a:prstGeom>
+          <a:noFill/>
+        </p:spPr>
+        <p:txBody>
+          <a:bodyPr wrap="square" anchor="t" lIns="36000" rIns="36000" tIns="18000" bIns="18000">
+            <a:spAutoFit/>
+          </a:bodyPr>
+          <a:lstStyle/>
+          <a:p>
+            <a:pPr algn="l"/>
+            <a:r>
+              <a:rPr sz="1100" b="0" i="0">
                 <a:solidFill>
                   <a:srgbClr val="D8E2EE"/>
                 </a:solidFill>
@@ -55869,29 +56565,29 @@
       </p:sp>
       <p:sp>
         <p:nvSpPr>
-          <p:cNvPr id="39" name="TextBox 38"/>
-          <p:cNvSpPr txBox="1"/>
-          <p:nvPr/>
-        </p:nvSpPr>
-        <p:spPr>
-          <a:xfrm>
-            <a:off x="8341156" y="2743200"/>
-            <a:ext cx="3283610" cy="219456"/>
-          </a:xfrm>
-          <a:prstGeom prst="rect">
-            <a:avLst/>
-          </a:prstGeom>
-          <a:noFill/>
-        </p:spPr>
-        <p:txBody>
-          <a:bodyPr wrap="square" anchor="t" lIns="36000" rIns="36000" tIns="18000" bIns="18000">
-            <a:spAutoFit/>
-          </a:bodyPr>
-          <a:lstStyle/>
-          <a:p>
-            <a:pPr algn="l"/>
-            <a:r>
-              <a:rPr sz="1000" b="1" i="0">
+          <p:cNvPr id="57" name="TextBox 56"/>
+          <p:cNvSpPr txBox="1"/>
+          <p:nvPr/>
+        </p:nvSpPr>
+        <p:spPr>
+          <a:xfrm>
+            <a:off x="8322868" y="4096512"/>
+            <a:ext cx="3320186" cy="201168"/>
+          </a:xfrm>
+          <a:prstGeom prst="rect">
+            <a:avLst/>
+          </a:prstGeom>
+          <a:noFill/>
+        </p:spPr>
+        <p:txBody>
+          <a:bodyPr wrap="square" anchor="t" lIns="36000" rIns="36000" tIns="18000" bIns="18000">
+            <a:spAutoFit/>
+          </a:bodyPr>
+          <a:lstStyle/>
+          <a:p>
+            <a:pPr algn="l"/>
+            <a:r>
+              <a:rPr sz="900" b="1" i="0">
                 <a:solidFill>
                   <a:srgbClr val="88A0B8"/>
                 </a:solidFill>
@@ -55904,29 +56600,29 @@
       </p:sp>
       <p:sp>
         <p:nvSpPr>
-          <p:cNvPr id="40" name="TextBox 39"/>
-          <p:cNvSpPr txBox="1"/>
-          <p:nvPr/>
-        </p:nvSpPr>
-        <p:spPr>
-          <a:xfrm>
-            <a:off x="8341156" y="2962656"/>
-            <a:ext cx="3283610" cy="475488"/>
-          </a:xfrm>
-          <a:prstGeom prst="rect">
-            <a:avLst/>
-          </a:prstGeom>
-          <a:noFill/>
-        </p:spPr>
-        <p:txBody>
-          <a:bodyPr wrap="square" anchor="t" lIns="36000" rIns="36000" tIns="18000" bIns="18000">
-            <a:spAutoFit/>
-          </a:bodyPr>
-          <a:lstStyle/>
-          <a:p>
-            <a:pPr algn="l"/>
-            <a:r>
-              <a:rPr sz="1200" b="0" i="0">
+          <p:cNvPr id="58" name="TextBox 57"/>
+          <p:cNvSpPr txBox="1"/>
+          <p:nvPr/>
+        </p:nvSpPr>
+        <p:spPr>
+          <a:xfrm>
+            <a:off x="8322868" y="4279391"/>
+            <a:ext cx="3320186" cy="365760"/>
+          </a:xfrm>
+          <a:prstGeom prst="rect">
+            <a:avLst/>
+          </a:prstGeom>
+          <a:noFill/>
+        </p:spPr>
+        <p:txBody>
+          <a:bodyPr wrap="square" anchor="t" lIns="36000" rIns="36000" tIns="18000" bIns="18000">
+            <a:spAutoFit/>
+          </a:bodyPr>
+          <a:lstStyle/>
+          <a:p>
+            <a:pPr algn="l"/>
+            <a:r>
+              <a:rPr sz="1100" b="0" i="0">
                 <a:solidFill>
                   <a:srgbClr val="D8E2EE"/>
                 </a:solidFill>
@@ -55939,29 +56635,29 @@
       </p:sp>
       <p:sp>
         <p:nvSpPr>
-          <p:cNvPr id="41" name="TextBox 40"/>
-          <p:cNvSpPr txBox="1"/>
-          <p:nvPr/>
-        </p:nvSpPr>
-        <p:spPr>
-          <a:xfrm>
-            <a:off x="8341156" y="3493008"/>
-            <a:ext cx="3283610" cy="219456"/>
-          </a:xfrm>
-          <a:prstGeom prst="rect">
-            <a:avLst/>
-          </a:prstGeom>
-          <a:noFill/>
-        </p:spPr>
-        <p:txBody>
-          <a:bodyPr wrap="square" anchor="t" lIns="36000" rIns="36000" tIns="18000" bIns="18000">
-            <a:spAutoFit/>
-          </a:bodyPr>
-          <a:lstStyle/>
-          <a:p>
-            <a:pPr algn="l"/>
-            <a:r>
-              <a:rPr sz="1000" b="1" i="0">
+          <p:cNvPr id="59" name="TextBox 58"/>
+          <p:cNvSpPr txBox="1"/>
+          <p:nvPr/>
+        </p:nvSpPr>
+        <p:spPr>
+          <a:xfrm>
+            <a:off x="8322868" y="4700016"/>
+            <a:ext cx="3320186" cy="201168"/>
+          </a:xfrm>
+          <a:prstGeom prst="rect">
+            <a:avLst/>
+          </a:prstGeom>
+          <a:noFill/>
+        </p:spPr>
+        <p:txBody>
+          <a:bodyPr wrap="square" anchor="t" lIns="36000" rIns="36000" tIns="18000" bIns="18000">
+            <a:spAutoFit/>
+          </a:bodyPr>
+          <a:lstStyle/>
+          <a:p>
+            <a:pPr algn="l"/>
+            <a:r>
+              <a:rPr sz="900" b="1" i="0">
                 <a:solidFill>
                   <a:srgbClr val="D4A574"/>
                 </a:solidFill>
@@ -55974,29 +56670,29 @@
       </p:sp>
       <p:sp>
         <p:nvSpPr>
-          <p:cNvPr id="42" name="TextBox 41"/>
-          <p:cNvSpPr txBox="1"/>
-          <p:nvPr/>
-        </p:nvSpPr>
-        <p:spPr>
-          <a:xfrm>
-            <a:off x="8341156" y="3712464"/>
-            <a:ext cx="3283610" cy="1956816"/>
-          </a:xfrm>
-          <a:prstGeom prst="rect">
-            <a:avLst/>
-          </a:prstGeom>
-          <a:noFill/>
-        </p:spPr>
-        <p:txBody>
-          <a:bodyPr wrap="square" anchor="t" lIns="36000" rIns="36000" tIns="18000" bIns="18000">
-            <a:spAutoFit/>
-          </a:bodyPr>
-          <a:lstStyle/>
-          <a:p>
-            <a:pPr algn="l"/>
-            <a:r>
-              <a:rPr sz="1200" b="1" i="0">
+          <p:cNvPr id="60" name="TextBox 59"/>
+          <p:cNvSpPr txBox="1"/>
+          <p:nvPr/>
+        </p:nvSpPr>
+        <p:spPr>
+          <a:xfrm>
+            <a:off x="8322868" y="4882896"/>
+            <a:ext cx="3320186" cy="859536"/>
+          </a:xfrm>
+          <a:prstGeom prst="rect">
+            <a:avLst/>
+          </a:prstGeom>
+          <a:noFill/>
+        </p:spPr>
+        <p:txBody>
+          <a:bodyPr wrap="square" anchor="t" lIns="36000" rIns="36000" tIns="18000" bIns="18000">
+            <a:spAutoFit/>
+          </a:bodyPr>
+          <a:lstStyle/>
+          <a:p>
+            <a:pPr algn="l"/>
+            <a:r>
+              <a:rPr sz="1100" b="1" i="0">
                 <a:solidFill>
                   <a:srgbClr val="FFFFFF"/>
                 </a:solidFill>
@@ -56009,14 +56705,14 @@
       </p:sp>
       <p:sp>
         <p:nvSpPr>
-          <p:cNvPr id="43" name="Rounded Rectangle 42"/>
+          <p:cNvPr id="61" name="Rounded Rectangle 60"/>
           <p:cNvSpPr/>
           <p:nvPr/>
         </p:nvSpPr>
         <p:spPr>
           <a:xfrm>
-            <a:off x="365760" y="5998464"/>
-            <a:ext cx="11460175" cy="475488"/>
+            <a:off x="365760" y="6053328"/>
+            <a:ext cx="11460175" cy="457200"/>
           </a:xfrm>
           <a:prstGeom prst="roundRect">
             <a:avLst>
@@ -56055,14 +56751,14 @@
       </p:sp>
       <p:sp>
         <p:nvSpPr>
-          <p:cNvPr id="44" name="Rectangle 43"/>
+          <p:cNvPr id="62" name="Rectangle 61"/>
           <p:cNvSpPr/>
           <p:nvPr/>
         </p:nvSpPr>
         <p:spPr>
           <a:xfrm>
-            <a:off x="365760" y="5998464"/>
-            <a:ext cx="54864" cy="475488"/>
+            <a:off x="365760" y="6053328"/>
+            <a:ext cx="54864" cy="457200"/>
           </a:xfrm>
           <a:prstGeom prst="rect">
             <a:avLst/>
@@ -56099,14 +56795,14 @@
       </p:sp>
       <p:sp>
         <p:nvSpPr>
-          <p:cNvPr id="45" name="TextBox 44"/>
-          <p:cNvSpPr txBox="1"/>
-          <p:nvPr/>
-        </p:nvSpPr>
-        <p:spPr>
-          <a:xfrm>
-            <a:off x="548640" y="5998464"/>
-            <a:ext cx="365760" cy="475488"/>
+          <p:cNvPr id="63" name="TextBox 62"/>
+          <p:cNvSpPr txBox="1"/>
+          <p:nvPr/>
+        </p:nvSpPr>
+        <p:spPr>
+          <a:xfrm>
+            <a:off x="548640" y="6053328"/>
+            <a:ext cx="365760" cy="457200"/>
           </a:xfrm>
           <a:prstGeom prst="rect">
             <a:avLst/>
@@ -56134,14 +56830,14 @@
       </p:sp>
       <p:sp>
         <p:nvSpPr>
-          <p:cNvPr id="46" name="TextBox 45"/>
-          <p:cNvSpPr txBox="1"/>
-          <p:nvPr/>
-        </p:nvSpPr>
-        <p:spPr>
-          <a:xfrm>
-            <a:off x="960120" y="5998464"/>
-            <a:ext cx="10774375" cy="475488"/>
+          <p:cNvPr id="64" name="TextBox 63"/>
+          <p:cNvSpPr txBox="1"/>
+          <p:nvPr/>
+        </p:nvSpPr>
+        <p:spPr>
+          <a:xfrm>
+            <a:off x="960120" y="6053328"/>
+            <a:ext cx="10774375" cy="457200"/>
           </a:xfrm>
           <a:prstGeom prst="rect">
             <a:avLst/>

--- a/slides.pptx
+++ b/slides.pptx
@@ -54870,12 +54870,10 @@
             </a:avLst>
           </a:prstGeom>
           <a:solidFill>
-            <a:srgbClr val="F5F8FC"/>
+            <a:srgbClr val="A8D4EF"/>
           </a:solidFill>
-          <a:ln w="12700">
-            <a:solidFill>
-              <a:srgbClr val="C0D0E0"/>
-            </a:solidFill>
+          <a:ln>
+            <a:noFill/>
           </a:ln>
           <a:effectLst/>
         </p:spPr>
@@ -54909,14 +54907,14 @@
         </p:nvSpPr>
         <p:spPr>
           <a:xfrm>
-            <a:off x="621792" y="1097280"/>
-            <a:ext cx="640080" cy="237744"/>
+            <a:off x="548640" y="1865741"/>
+            <a:ext cx="3320186" cy="237378"/>
           </a:xfrm>
           <a:prstGeom prst="rect">
             <a:avLst/>
           </a:prstGeom>
           <a:solidFill>
-            <a:srgbClr val="3B5174"/>
+            <a:srgbClr val="6AA55E"/>
           </a:solidFill>
           <a:ln>
             <a:noFill/>
@@ -54947,77 +54945,491 @@
       </p:sp>
       <p:sp>
         <p:nvSpPr>
-          <p:cNvPr id="14" name="TextBox 13"/>
-          <p:cNvSpPr txBox="1"/>
-          <p:nvPr/>
-        </p:nvSpPr>
-        <p:spPr>
-          <a:xfrm>
-            <a:off x="621792" y="1097280"/>
-            <a:ext cx="640080" cy="237744"/>
-          </a:xfrm>
-          <a:prstGeom prst="rect">
-            <a:avLst/>
-          </a:prstGeom>
-          <a:noFill/>
-        </p:spPr>
-        <p:txBody>
-          <a:bodyPr wrap="square" anchor="ctr" lIns="36000" rIns="36000" tIns="18000" bIns="18000">
-            <a:spAutoFit/>
-          </a:bodyPr>
-          <a:lstStyle/>
-          <a:p>
-            <a:pPr algn="ctr"/>
-            <a:r>
-              <a:rPr sz="900" b="1" i="0">
-                <a:solidFill>
-                  <a:srgbClr val="FFFFFF"/>
-                </a:solidFill>
-                <a:latin typeface="Noto Sans JP"/>
-              </a:rPr>
-              <a:t>写真</a:t>
-            </a:r>
-          </a:p>
-        </p:txBody>
-      </p:sp>
-      <p:sp>
-        <p:nvSpPr>
-          <p:cNvPr id="15" name="TextBox 14"/>
-          <p:cNvSpPr txBox="1"/>
-          <p:nvPr/>
-        </p:nvSpPr>
-        <p:spPr>
-          <a:xfrm>
-            <a:off x="548640" y="1298448"/>
-            <a:ext cx="3320186" cy="512064"/>
-          </a:xfrm>
-          <a:prstGeom prst="rect">
-            <a:avLst/>
-          </a:prstGeom>
-          <a:noFill/>
-        </p:spPr>
-        <p:txBody>
-          <a:bodyPr wrap="square" anchor="ctr" lIns="36000" rIns="36000" tIns="18000" bIns="18000">
-            <a:spAutoFit/>
-          </a:bodyPr>
-          <a:lstStyle/>
-          <a:p>
-            <a:pPr algn="ctr"/>
-            <a:r>
-              <a:rPr sz="1000" b="0" i="0">
-                <a:solidFill>
-                  <a:srgbClr val="AAB4C0"/>
-                </a:solidFill>
-                <a:latin typeface="Noto Sans JP"/>
-              </a:rPr>
-              <a:t>航空機からの赤色スラリー散布</a:t>
-            </a:r>
-          </a:p>
-        </p:txBody>
-      </p:sp>
-      <p:sp>
-        <p:nvSpPr>
-          <p:cNvPr id="16" name="TextBox 15"/>
+          <p:cNvPr id="14" name="Rectangle 13"/>
+          <p:cNvSpPr/>
+          <p:nvPr/>
+        </p:nvSpPr>
+        <p:spPr>
+          <a:xfrm>
+            <a:off x="548640" y="1865741"/>
+            <a:ext cx="3320186" cy="16459"/>
+          </a:xfrm>
+          <a:prstGeom prst="rect">
+            <a:avLst/>
+          </a:prstGeom>
+          <a:solidFill>
+            <a:srgbClr val="4E8842"/>
+          </a:solidFill>
+          <a:ln>
+            <a:noFill/>
+          </a:ln>
+          <a:effectLst/>
+        </p:spPr>
+        <p:style>
+          <a:lnRef idx="1">
+            <a:schemeClr val="accent1"/>
+          </a:lnRef>
+          <a:fillRef idx="3">
+            <a:schemeClr val="accent1"/>
+          </a:fillRef>
+          <a:effectRef idx="2">
+            <a:schemeClr val="accent1"/>
+          </a:effectRef>
+          <a:fontRef idx="minor">
+            <a:schemeClr val="lt1"/>
+          </a:fontRef>
+        </p:style>
+        <p:txBody>
+          <a:bodyPr rtlCol="0" anchor="ctr"/>
+          <a:lstStyle/>
+          <a:p>
+            <a:pPr algn="ctr"/>
+          </a:p>
+        </p:txBody>
+      </p:sp>
+      <p:sp>
+        <p:nvSpPr>
+          <p:cNvPr id="15" name="Rectangle 14"/>
+          <p:cNvSpPr/>
+          <p:nvPr/>
+        </p:nvSpPr>
+        <p:spPr>
+          <a:xfrm>
+            <a:off x="880658" y="1261506"/>
+            <a:ext cx="996055" cy="86319"/>
+          </a:xfrm>
+          <a:prstGeom prst="rect">
+            <a:avLst/>
+          </a:prstGeom>
+          <a:solidFill>
+            <a:srgbClr val="556A7E"/>
+          </a:solidFill>
+          <a:ln>
+            <a:noFill/>
+          </a:ln>
+          <a:effectLst/>
+        </p:spPr>
+        <p:style>
+          <a:lnRef idx="1">
+            <a:schemeClr val="accent1"/>
+          </a:lnRef>
+          <a:fillRef idx="3">
+            <a:schemeClr val="accent1"/>
+          </a:fillRef>
+          <a:effectRef idx="2">
+            <a:schemeClr val="accent1"/>
+          </a:effectRef>
+          <a:fontRef idx="minor">
+            <a:schemeClr val="lt1"/>
+          </a:fontRef>
+        </p:style>
+        <p:txBody>
+          <a:bodyPr rtlCol="0" anchor="ctr"/>
+          <a:lstStyle/>
+          <a:p>
+            <a:pPr algn="ctr"/>
+          </a:p>
+        </p:txBody>
+      </p:sp>
+      <p:sp>
+        <p:nvSpPr>
+          <p:cNvPr id="16" name="Rectangle 15"/>
+          <p:cNvSpPr/>
+          <p:nvPr/>
+        </p:nvSpPr>
+        <p:spPr>
+          <a:xfrm>
+            <a:off x="1159554" y="1175186"/>
+            <a:ext cx="332018" cy="237378"/>
+          </a:xfrm>
+          <a:prstGeom prst="rect">
+            <a:avLst/>
+          </a:prstGeom>
+          <a:solidFill>
+            <a:srgbClr val="556A7E"/>
+          </a:solidFill>
+          <a:ln>
+            <a:noFill/>
+          </a:ln>
+          <a:effectLst/>
+        </p:spPr>
+        <p:style>
+          <a:lnRef idx="1">
+            <a:schemeClr val="accent1"/>
+          </a:lnRef>
+          <a:fillRef idx="3">
+            <a:schemeClr val="accent1"/>
+          </a:fillRef>
+          <a:effectRef idx="2">
+            <a:schemeClr val="accent1"/>
+          </a:effectRef>
+          <a:fontRef idx="minor">
+            <a:schemeClr val="lt1"/>
+          </a:fontRef>
+        </p:style>
+        <p:txBody>
+          <a:bodyPr rtlCol="0" anchor="ctr"/>
+          <a:lstStyle/>
+          <a:p>
+            <a:pPr algn="ctr"/>
+          </a:p>
+        </p:txBody>
+      </p:sp>
+      <p:sp>
+        <p:nvSpPr>
+          <p:cNvPr id="17" name="Rectangle 16"/>
+          <p:cNvSpPr/>
+          <p:nvPr/>
+        </p:nvSpPr>
+        <p:spPr>
+          <a:xfrm>
+            <a:off x="913860" y="1153607"/>
+            <a:ext cx="132807" cy="129479"/>
+          </a:xfrm>
+          <a:prstGeom prst="rect">
+            <a:avLst/>
+          </a:prstGeom>
+          <a:solidFill>
+            <a:srgbClr val="556A7E"/>
+          </a:solidFill>
+          <a:ln>
+            <a:noFill/>
+          </a:ln>
+          <a:effectLst/>
+        </p:spPr>
+        <p:style>
+          <a:lnRef idx="1">
+            <a:schemeClr val="accent1"/>
+          </a:lnRef>
+          <a:fillRef idx="3">
+            <a:schemeClr val="accent1"/>
+          </a:fillRef>
+          <a:effectRef idx="2">
+            <a:schemeClr val="accent1"/>
+          </a:effectRef>
+          <a:fontRef idx="minor">
+            <a:schemeClr val="lt1"/>
+          </a:fontRef>
+        </p:style>
+        <p:txBody>
+          <a:bodyPr rtlCol="0" anchor="ctr"/>
+          <a:lstStyle/>
+          <a:p>
+            <a:pPr algn="ctr"/>
+          </a:p>
+        </p:txBody>
+      </p:sp>
+      <p:sp>
+        <p:nvSpPr>
+          <p:cNvPr id="18" name="Oval 17"/>
+          <p:cNvSpPr/>
+          <p:nvPr/>
+        </p:nvSpPr>
+        <p:spPr>
+          <a:xfrm>
+            <a:off x="1710705" y="1498884"/>
+            <a:ext cx="132807" cy="94951"/>
+          </a:xfrm>
+          <a:prstGeom prst="ellipse">
+            <a:avLst/>
+          </a:prstGeom>
+          <a:solidFill>
+            <a:srgbClr val="C03C3C"/>
+          </a:solidFill>
+          <a:ln>
+            <a:noFill/>
+          </a:ln>
+          <a:effectLst/>
+        </p:spPr>
+        <p:style>
+          <a:lnRef idx="1">
+            <a:schemeClr val="accent1"/>
+          </a:lnRef>
+          <a:fillRef idx="3">
+            <a:schemeClr val="accent1"/>
+          </a:fillRef>
+          <a:effectRef idx="2">
+            <a:schemeClr val="accent1"/>
+          </a:effectRef>
+          <a:fontRef idx="minor">
+            <a:schemeClr val="lt1"/>
+          </a:fontRef>
+        </p:style>
+        <p:txBody>
+          <a:bodyPr rtlCol="0" anchor="ctr"/>
+          <a:lstStyle/>
+          <a:p>
+            <a:pPr algn="ctr"/>
+          </a:p>
+        </p:txBody>
+      </p:sp>
+      <p:sp>
+        <p:nvSpPr>
+          <p:cNvPr id="19" name="Oval 18"/>
+          <p:cNvSpPr/>
+          <p:nvPr/>
+        </p:nvSpPr>
+        <p:spPr>
+          <a:xfrm>
+            <a:off x="2009521" y="1595993"/>
+            <a:ext cx="119526" cy="84161"/>
+          </a:xfrm>
+          <a:prstGeom prst="ellipse">
+            <a:avLst/>
+          </a:prstGeom>
+          <a:solidFill>
+            <a:srgbClr val="C03C3C"/>
+          </a:solidFill>
+          <a:ln>
+            <a:noFill/>
+          </a:ln>
+          <a:effectLst/>
+        </p:spPr>
+        <p:style>
+          <a:lnRef idx="1">
+            <a:schemeClr val="accent1"/>
+          </a:lnRef>
+          <a:fillRef idx="3">
+            <a:schemeClr val="accent1"/>
+          </a:fillRef>
+          <a:effectRef idx="2">
+            <a:schemeClr val="accent1"/>
+          </a:effectRef>
+          <a:fontRef idx="minor">
+            <a:schemeClr val="lt1"/>
+          </a:fontRef>
+        </p:style>
+        <p:txBody>
+          <a:bodyPr rtlCol="0" anchor="ctr"/>
+          <a:lstStyle/>
+          <a:p>
+            <a:pPr algn="ctr"/>
+          </a:p>
+        </p:txBody>
+      </p:sp>
+      <p:sp>
+        <p:nvSpPr>
+          <p:cNvPr id="20" name="Oval 19"/>
+          <p:cNvSpPr/>
+          <p:nvPr/>
+        </p:nvSpPr>
+        <p:spPr>
+          <a:xfrm>
+            <a:off x="2275136" y="1520464"/>
+            <a:ext cx="126167" cy="88477"/>
+          </a:xfrm>
+          <a:prstGeom prst="ellipse">
+            <a:avLst/>
+          </a:prstGeom>
+          <a:solidFill>
+            <a:srgbClr val="C03C3C"/>
+          </a:solidFill>
+          <a:ln>
+            <a:noFill/>
+          </a:ln>
+          <a:effectLst/>
+        </p:spPr>
+        <p:style>
+          <a:lnRef idx="1">
+            <a:schemeClr val="accent1"/>
+          </a:lnRef>
+          <a:fillRef idx="3">
+            <a:schemeClr val="accent1"/>
+          </a:fillRef>
+          <a:effectRef idx="2">
+            <a:schemeClr val="accent1"/>
+          </a:effectRef>
+          <a:fontRef idx="minor">
+            <a:schemeClr val="lt1"/>
+          </a:fontRef>
+        </p:style>
+        <p:txBody>
+          <a:bodyPr rtlCol="0" anchor="ctr"/>
+          <a:lstStyle/>
+          <a:p>
+            <a:pPr algn="ctr"/>
+          </a:p>
+        </p:txBody>
+      </p:sp>
+      <p:sp>
+        <p:nvSpPr>
+          <p:cNvPr id="21" name="Oval 20"/>
+          <p:cNvSpPr/>
+          <p:nvPr/>
+        </p:nvSpPr>
+        <p:spPr>
+          <a:xfrm>
+            <a:off x="1943118" y="1725472"/>
+            <a:ext cx="106245" cy="75529"/>
+          </a:xfrm>
+          <a:prstGeom prst="ellipse">
+            <a:avLst/>
+          </a:prstGeom>
+          <a:solidFill>
+            <a:srgbClr val="C03C3C"/>
+          </a:solidFill>
+          <a:ln>
+            <a:noFill/>
+          </a:ln>
+          <a:effectLst/>
+        </p:spPr>
+        <p:style>
+          <a:lnRef idx="1">
+            <a:schemeClr val="accent1"/>
+          </a:lnRef>
+          <a:fillRef idx="3">
+            <a:schemeClr val="accent1"/>
+          </a:fillRef>
+          <a:effectRef idx="2">
+            <a:schemeClr val="accent1"/>
+          </a:effectRef>
+          <a:fontRef idx="minor">
+            <a:schemeClr val="lt1"/>
+          </a:fontRef>
+        </p:style>
+        <p:txBody>
+          <a:bodyPr rtlCol="0" anchor="ctr"/>
+          <a:lstStyle/>
+          <a:p>
+            <a:pPr algn="ctr"/>
+          </a:p>
+        </p:txBody>
+      </p:sp>
+      <p:sp>
+        <p:nvSpPr>
+          <p:cNvPr id="22" name="Oval 21"/>
+          <p:cNvSpPr/>
+          <p:nvPr/>
+        </p:nvSpPr>
+        <p:spPr>
+          <a:xfrm>
+            <a:off x="2474348" y="1649943"/>
+            <a:ext cx="112886" cy="79845"/>
+          </a:xfrm>
+          <a:prstGeom prst="ellipse">
+            <a:avLst/>
+          </a:prstGeom>
+          <a:solidFill>
+            <a:srgbClr val="C03C3C"/>
+          </a:solidFill>
+          <a:ln>
+            <a:noFill/>
+          </a:ln>
+          <a:effectLst/>
+        </p:spPr>
+        <p:style>
+          <a:lnRef idx="1">
+            <a:schemeClr val="accent1"/>
+          </a:lnRef>
+          <a:fillRef idx="3">
+            <a:schemeClr val="accent1"/>
+          </a:fillRef>
+          <a:effectRef idx="2">
+            <a:schemeClr val="accent1"/>
+          </a:effectRef>
+          <a:fontRef idx="minor">
+            <a:schemeClr val="lt1"/>
+          </a:fontRef>
+        </p:style>
+        <p:txBody>
+          <a:bodyPr rtlCol="0" anchor="ctr"/>
+          <a:lstStyle/>
+          <a:p>
+            <a:pPr algn="ctr"/>
+          </a:p>
+        </p:txBody>
+      </p:sp>
+      <p:sp>
+        <p:nvSpPr>
+          <p:cNvPr id="23" name="Oval 22"/>
+          <p:cNvSpPr/>
+          <p:nvPr/>
+        </p:nvSpPr>
+        <p:spPr>
+          <a:xfrm>
+            <a:off x="2208733" y="1779422"/>
+            <a:ext cx="99605" cy="71213"/>
+          </a:xfrm>
+          <a:prstGeom prst="ellipse">
+            <a:avLst/>
+          </a:prstGeom>
+          <a:solidFill>
+            <a:srgbClr val="C03C3C"/>
+          </a:solidFill>
+          <a:ln>
+            <a:noFill/>
+          </a:ln>
+          <a:effectLst/>
+        </p:spPr>
+        <p:style>
+          <a:lnRef idx="1">
+            <a:schemeClr val="accent1"/>
+          </a:lnRef>
+          <a:fillRef idx="3">
+            <a:schemeClr val="accent1"/>
+          </a:fillRef>
+          <a:effectRef idx="2">
+            <a:schemeClr val="accent1"/>
+          </a:effectRef>
+          <a:fontRef idx="minor">
+            <a:schemeClr val="lt1"/>
+          </a:fontRef>
+        </p:style>
+        <p:txBody>
+          <a:bodyPr rtlCol="0" anchor="ctr"/>
+          <a:lstStyle/>
+          <a:p>
+            <a:pPr algn="ctr"/>
+          </a:p>
+        </p:txBody>
+      </p:sp>
+      <p:sp>
+        <p:nvSpPr>
+          <p:cNvPr id="24" name="Oval 23"/>
+          <p:cNvSpPr/>
+          <p:nvPr/>
+        </p:nvSpPr>
+        <p:spPr>
+          <a:xfrm>
+            <a:off x="2607155" y="1563624"/>
+            <a:ext cx="92965" cy="66897"/>
+          </a:xfrm>
+          <a:prstGeom prst="ellipse">
+            <a:avLst/>
+          </a:prstGeom>
+          <a:solidFill>
+            <a:srgbClr val="C03C3C"/>
+          </a:solidFill>
+          <a:ln>
+            <a:noFill/>
+          </a:ln>
+          <a:effectLst/>
+        </p:spPr>
+        <p:style>
+          <a:lnRef idx="1">
+            <a:schemeClr val="accent1"/>
+          </a:lnRef>
+          <a:fillRef idx="3">
+            <a:schemeClr val="accent1"/>
+          </a:fillRef>
+          <a:effectRef idx="2">
+            <a:schemeClr val="accent1"/>
+          </a:effectRef>
+          <a:fontRef idx="minor">
+            <a:schemeClr val="lt1"/>
+          </a:fontRef>
+        </p:style>
+        <p:txBody>
+          <a:bodyPr rtlCol="0" anchor="ctr"/>
+          <a:lstStyle/>
+          <a:p>
+            <a:pPr algn="ctr"/>
+          </a:p>
+        </p:txBody>
+      </p:sp>
+      <p:sp>
+        <p:nvSpPr>
+          <p:cNvPr id="25" name="TextBox 24"/>
           <p:cNvSpPr txBox="1"/>
           <p:nvPr/>
         </p:nvSpPr>
@@ -55052,7 +55464,7 @@
       </p:sp>
       <p:sp>
         <p:nvSpPr>
-          <p:cNvPr id="17" name="TextBox 16"/>
+          <p:cNvPr id="26" name="TextBox 25"/>
           <p:cNvSpPr txBox="1"/>
           <p:nvPr/>
         </p:nvSpPr>
@@ -55087,7 +55499,7 @@
       </p:sp>
       <p:sp>
         <p:nvSpPr>
-          <p:cNvPr id="18" name="Rectangle 17"/>
+          <p:cNvPr id="27" name="Rectangle 26"/>
           <p:cNvSpPr/>
           <p:nvPr/>
         </p:nvSpPr>
@@ -55131,7 +55543,7 @@
       </p:sp>
       <p:sp>
         <p:nvSpPr>
-          <p:cNvPr id="19" name="TextBox 18"/>
+          <p:cNvPr id="28" name="TextBox 27"/>
           <p:cNvSpPr txBox="1"/>
           <p:nvPr/>
         </p:nvSpPr>
@@ -55166,7 +55578,7 @@
       </p:sp>
       <p:sp>
         <p:nvSpPr>
-          <p:cNvPr id="20" name="TextBox 19"/>
+          <p:cNvPr id="29" name="TextBox 28"/>
           <p:cNvSpPr txBox="1"/>
           <p:nvPr/>
         </p:nvSpPr>
@@ -55201,7 +55613,7 @@
       </p:sp>
       <p:sp>
         <p:nvSpPr>
-          <p:cNvPr id="21" name="TextBox 20"/>
+          <p:cNvPr id="30" name="TextBox 29"/>
           <p:cNvSpPr txBox="1"/>
           <p:nvPr/>
         </p:nvSpPr>
@@ -55236,7 +55648,7 @@
       </p:sp>
       <p:sp>
         <p:nvSpPr>
-          <p:cNvPr id="22" name="TextBox 21"/>
+          <p:cNvPr id="31" name="TextBox 30"/>
           <p:cNvSpPr txBox="1"/>
           <p:nvPr/>
         </p:nvSpPr>
@@ -55271,7 +55683,7 @@
       </p:sp>
       <p:sp>
         <p:nvSpPr>
-          <p:cNvPr id="23" name="TextBox 22"/>
+          <p:cNvPr id="32" name="TextBox 31"/>
           <p:cNvSpPr txBox="1"/>
           <p:nvPr/>
         </p:nvSpPr>
@@ -55306,7 +55718,7 @@
       </p:sp>
       <p:sp>
         <p:nvSpPr>
-          <p:cNvPr id="24" name="TextBox 23"/>
+          <p:cNvPr id="33" name="TextBox 32"/>
           <p:cNvSpPr txBox="1"/>
           <p:nvPr/>
         </p:nvSpPr>
@@ -55341,7 +55753,7 @@
       </p:sp>
       <p:sp>
         <p:nvSpPr>
-          <p:cNvPr id="25" name="TextBox 24"/>
+          <p:cNvPr id="34" name="TextBox 33"/>
           <p:cNvSpPr txBox="1"/>
           <p:nvPr/>
         </p:nvSpPr>
@@ -55376,7 +55788,7 @@
       </p:sp>
       <p:sp>
         <p:nvSpPr>
-          <p:cNvPr id="26" name="TextBox 25"/>
+          <p:cNvPr id="35" name="TextBox 34"/>
           <p:cNvSpPr txBox="1"/>
           <p:nvPr/>
         </p:nvSpPr>
@@ -55411,7 +55823,7 @@
       </p:sp>
       <p:sp>
         <p:nvSpPr>
-          <p:cNvPr id="27" name="Rounded Rectangle 26"/>
+          <p:cNvPr id="36" name="Rounded Rectangle 35"/>
           <p:cNvSpPr/>
           <p:nvPr/>
         </p:nvSpPr>
@@ -55459,7 +55871,7 @@
       </p:sp>
       <p:sp>
         <p:nvSpPr>
-          <p:cNvPr id="28" name="Rectangle 27"/>
+          <p:cNvPr id="37" name="Rectangle 36"/>
           <p:cNvSpPr/>
           <p:nvPr/>
         </p:nvSpPr>
@@ -55503,7 +55915,7 @@
       </p:sp>
       <p:sp>
         <p:nvSpPr>
-          <p:cNvPr id="29" name="Rounded Rectangle 28"/>
+          <p:cNvPr id="38" name="Rounded Rectangle 37"/>
           <p:cNvSpPr/>
           <p:nvPr/>
         </p:nvSpPr>
@@ -55518,12 +55930,10 @@
             </a:avLst>
           </a:prstGeom>
           <a:solidFill>
-            <a:srgbClr val="F5F8FC"/>
+            <a:srgbClr val="BEE0F5"/>
           </a:solidFill>
-          <a:ln w="12700">
-            <a:solidFill>
-              <a:srgbClr val="C0D0E0"/>
-            </a:solidFill>
+          <a:ln>
+            <a:noFill/>
           </a:ln>
           <a:effectLst/>
         </p:spPr>
@@ -55551,14 +55961,2304 @@
       </p:sp>
       <p:sp>
         <p:nvSpPr>
-          <p:cNvPr id="30" name="Rectangle 29"/>
+          <p:cNvPr id="39" name="Rectangle 38"/>
           <p:cNvSpPr/>
           <p:nvPr/>
         </p:nvSpPr>
         <p:spPr>
           <a:xfrm>
-            <a:off x="4508906" y="1097280"/>
-            <a:ext cx="640080" cy="237744"/>
+            <a:off x="4502158" y="1563624"/>
+            <a:ext cx="232413" cy="431596"/>
+          </a:xfrm>
+          <a:prstGeom prst="rect">
+            <a:avLst/>
+          </a:prstGeom>
+          <a:solidFill>
+            <a:srgbClr val="2C3E50"/>
+          </a:solidFill>
+          <a:ln>
+            <a:noFill/>
+          </a:ln>
+          <a:effectLst/>
+        </p:spPr>
+        <p:style>
+          <a:lnRef idx="1">
+            <a:schemeClr val="accent1"/>
+          </a:lnRef>
+          <a:fillRef idx="3">
+            <a:schemeClr val="accent1"/>
+          </a:fillRef>
+          <a:effectRef idx="2">
+            <a:schemeClr val="accent1"/>
+          </a:effectRef>
+          <a:fontRef idx="minor">
+            <a:schemeClr val="lt1"/>
+          </a:fontRef>
+        </p:style>
+        <p:txBody>
+          <a:bodyPr rtlCol="0" anchor="ctr"/>
+          <a:lstStyle/>
+          <a:p>
+            <a:pPr algn="ctr"/>
+          </a:p>
+        </p:txBody>
+      </p:sp>
+      <p:sp>
+        <p:nvSpPr>
+          <p:cNvPr id="40" name="Rectangle 39"/>
+          <p:cNvSpPr/>
+          <p:nvPr/>
+        </p:nvSpPr>
+        <p:spPr>
+          <a:xfrm>
+            <a:off x="4601763" y="1412565"/>
+            <a:ext cx="332018" cy="302117"/>
+          </a:xfrm>
+          <a:prstGeom prst="rect">
+            <a:avLst/>
+          </a:prstGeom>
+          <a:solidFill>
+            <a:srgbClr val="2C3E50"/>
+          </a:solidFill>
+          <a:ln>
+            <a:noFill/>
+          </a:ln>
+          <a:effectLst/>
+        </p:spPr>
+        <p:style>
+          <a:lnRef idx="1">
+            <a:schemeClr val="accent1"/>
+          </a:lnRef>
+          <a:fillRef idx="3">
+            <a:schemeClr val="accent1"/>
+          </a:fillRef>
+          <a:effectRef idx="2">
+            <a:schemeClr val="accent1"/>
+          </a:effectRef>
+          <a:fontRef idx="minor">
+            <a:schemeClr val="lt1"/>
+          </a:fontRef>
+        </p:style>
+        <p:txBody>
+          <a:bodyPr rtlCol="0" anchor="ctr"/>
+          <a:lstStyle/>
+          <a:p>
+            <a:pPr algn="ctr"/>
+          </a:p>
+        </p:txBody>
+      </p:sp>
+      <p:sp>
+        <p:nvSpPr>
+          <p:cNvPr id="41" name="Rectangle 40"/>
+          <p:cNvSpPr/>
+          <p:nvPr/>
+        </p:nvSpPr>
+        <p:spPr>
+          <a:xfrm>
+            <a:off x="4867378" y="1488094"/>
+            <a:ext cx="132807" cy="151058"/>
+          </a:xfrm>
+          <a:prstGeom prst="rect">
+            <a:avLst/>
+          </a:prstGeom>
+          <a:solidFill>
+            <a:srgbClr val="2C3E50"/>
+          </a:solidFill>
+          <a:ln>
+            <a:noFill/>
+          </a:ln>
+          <a:effectLst/>
+        </p:spPr>
+        <p:style>
+          <a:lnRef idx="1">
+            <a:schemeClr val="accent1"/>
+          </a:lnRef>
+          <a:fillRef idx="3">
+            <a:schemeClr val="accent1"/>
+          </a:fillRef>
+          <a:effectRef idx="2">
+            <a:schemeClr val="accent1"/>
+          </a:effectRef>
+          <a:fontRef idx="minor">
+            <a:schemeClr val="lt1"/>
+          </a:fontRef>
+        </p:style>
+        <p:txBody>
+          <a:bodyPr rtlCol="0" anchor="ctr"/>
+          <a:lstStyle/>
+          <a:p>
+            <a:pPr algn="ctr"/>
+          </a:p>
+        </p:txBody>
+      </p:sp>
+      <p:sp>
+        <p:nvSpPr>
+          <p:cNvPr id="42" name="Oval 41"/>
+          <p:cNvSpPr/>
+          <p:nvPr/>
+        </p:nvSpPr>
+        <p:spPr>
+          <a:xfrm>
+            <a:off x="5033387" y="1261506"/>
+            <a:ext cx="464826" cy="323697"/>
+          </a:xfrm>
+          <a:prstGeom prst="ellipse">
+            <a:avLst/>
+          </a:prstGeom>
+          <a:solidFill>
+            <a:srgbClr val="F2F8FE"/>
+          </a:solidFill>
+          <a:ln>
+            <a:noFill/>
+          </a:ln>
+          <a:effectLst/>
+        </p:spPr>
+        <p:style>
+          <a:lnRef idx="1">
+            <a:schemeClr val="accent1"/>
+          </a:lnRef>
+          <a:fillRef idx="3">
+            <a:schemeClr val="accent1"/>
+          </a:fillRef>
+          <a:effectRef idx="2">
+            <a:schemeClr val="accent1"/>
+          </a:effectRef>
+          <a:fontRef idx="minor">
+            <a:schemeClr val="lt1"/>
+          </a:fontRef>
+        </p:style>
+        <p:txBody>
+          <a:bodyPr rtlCol="0" anchor="ctr"/>
+          <a:lstStyle/>
+          <a:p>
+            <a:pPr algn="ctr"/>
+          </a:p>
+        </p:txBody>
+      </p:sp>
+      <p:sp>
+        <p:nvSpPr>
+          <p:cNvPr id="43" name="Oval 42"/>
+          <p:cNvSpPr/>
+          <p:nvPr/>
+        </p:nvSpPr>
+        <p:spPr>
+          <a:xfrm>
+            <a:off x="5365406" y="1175186"/>
+            <a:ext cx="531229" cy="345277"/>
+          </a:xfrm>
+          <a:prstGeom prst="ellipse">
+            <a:avLst/>
+          </a:prstGeom>
+          <a:solidFill>
+            <a:srgbClr val="F2F8FE"/>
+          </a:solidFill>
+          <a:ln>
+            <a:noFill/>
+          </a:ln>
+          <a:effectLst/>
+        </p:spPr>
+        <p:style>
+          <a:lnRef idx="1">
+            <a:schemeClr val="accent1"/>
+          </a:lnRef>
+          <a:fillRef idx="3">
+            <a:schemeClr val="accent1"/>
+          </a:fillRef>
+          <a:effectRef idx="2">
+            <a:schemeClr val="accent1"/>
+          </a:effectRef>
+          <a:fontRef idx="minor">
+            <a:schemeClr val="lt1"/>
+          </a:fontRef>
+        </p:style>
+        <p:txBody>
+          <a:bodyPr rtlCol="0" anchor="ctr"/>
+          <a:lstStyle/>
+          <a:p>
+            <a:pPr algn="ctr"/>
+          </a:p>
+        </p:txBody>
+      </p:sp>
+      <p:sp>
+        <p:nvSpPr>
+          <p:cNvPr id="44" name="Oval 43"/>
+          <p:cNvSpPr/>
+          <p:nvPr/>
+        </p:nvSpPr>
+        <p:spPr>
+          <a:xfrm>
+            <a:off x="5763828" y="1229136"/>
+            <a:ext cx="464826" cy="302117"/>
+          </a:xfrm>
+          <a:prstGeom prst="ellipse">
+            <a:avLst/>
+          </a:prstGeom>
+          <a:solidFill>
+            <a:srgbClr val="F2F8FE"/>
+          </a:solidFill>
+          <a:ln>
+            <a:noFill/>
+          </a:ln>
+          <a:effectLst/>
+        </p:spPr>
+        <p:style>
+          <a:lnRef idx="1">
+            <a:schemeClr val="accent1"/>
+          </a:lnRef>
+          <a:fillRef idx="3">
+            <a:schemeClr val="accent1"/>
+          </a:fillRef>
+          <a:effectRef idx="2">
+            <a:schemeClr val="accent1"/>
+          </a:effectRef>
+          <a:fontRef idx="minor">
+            <a:schemeClr val="lt1"/>
+          </a:fontRef>
+        </p:style>
+        <p:txBody>
+          <a:bodyPr rtlCol="0" anchor="ctr"/>
+          <a:lstStyle/>
+          <a:p>
+            <a:pPr algn="ctr"/>
+          </a:p>
+        </p:txBody>
+      </p:sp>
+      <p:sp>
+        <p:nvSpPr>
+          <p:cNvPr id="45" name="Oval 44"/>
+          <p:cNvSpPr/>
+          <p:nvPr/>
+        </p:nvSpPr>
+        <p:spPr>
+          <a:xfrm>
+            <a:off x="6129049" y="1175186"/>
+            <a:ext cx="498027" cy="323697"/>
+          </a:xfrm>
+          <a:prstGeom prst="ellipse">
+            <a:avLst/>
+          </a:prstGeom>
+          <a:solidFill>
+            <a:srgbClr val="F2F8FE"/>
+          </a:solidFill>
+          <a:ln>
+            <a:noFill/>
+          </a:ln>
+          <a:effectLst/>
+        </p:spPr>
+        <p:style>
+          <a:lnRef idx="1">
+            <a:schemeClr val="accent1"/>
+          </a:lnRef>
+          <a:fillRef idx="3">
+            <a:schemeClr val="accent1"/>
+          </a:fillRef>
+          <a:effectRef idx="2">
+            <a:schemeClr val="accent1"/>
+          </a:effectRef>
+          <a:fontRef idx="minor">
+            <a:schemeClr val="lt1"/>
+          </a:fontRef>
+        </p:style>
+        <p:txBody>
+          <a:bodyPr rtlCol="0" anchor="ctr"/>
+          <a:lstStyle/>
+          <a:p>
+            <a:pPr algn="ctr"/>
+          </a:p>
+        </p:txBody>
+      </p:sp>
+      <p:sp>
+        <p:nvSpPr>
+          <p:cNvPr id="46" name="Oval 45"/>
+          <p:cNvSpPr/>
+          <p:nvPr/>
+        </p:nvSpPr>
+        <p:spPr>
+          <a:xfrm>
+            <a:off x="6494269" y="1239926"/>
+            <a:ext cx="431624" cy="280537"/>
+          </a:xfrm>
+          <a:prstGeom prst="ellipse">
+            <a:avLst/>
+          </a:prstGeom>
+          <a:solidFill>
+            <a:srgbClr val="F2F8FE"/>
+          </a:solidFill>
+          <a:ln>
+            <a:noFill/>
+          </a:ln>
+          <a:effectLst/>
+        </p:spPr>
+        <p:style>
+          <a:lnRef idx="1">
+            <a:schemeClr val="accent1"/>
+          </a:lnRef>
+          <a:fillRef idx="3">
+            <a:schemeClr val="accent1"/>
+          </a:fillRef>
+          <a:effectRef idx="2">
+            <a:schemeClr val="accent1"/>
+          </a:effectRef>
+          <a:fontRef idx="minor">
+            <a:schemeClr val="lt1"/>
+          </a:fontRef>
+        </p:style>
+        <p:txBody>
+          <a:bodyPr rtlCol="0" anchor="ctr"/>
+          <a:lstStyle/>
+          <a:p>
+            <a:pPr algn="ctr"/>
+          </a:p>
+        </p:txBody>
+      </p:sp>
+      <p:sp>
+        <p:nvSpPr>
+          <p:cNvPr id="47" name="Oval 46"/>
+          <p:cNvSpPr/>
+          <p:nvPr/>
+        </p:nvSpPr>
+        <p:spPr>
+          <a:xfrm>
+            <a:off x="6826288" y="1196766"/>
+            <a:ext cx="464826" cy="302117"/>
+          </a:xfrm>
+          <a:prstGeom prst="ellipse">
+            <a:avLst/>
+          </a:prstGeom>
+          <a:solidFill>
+            <a:srgbClr val="F2F8FE"/>
+          </a:solidFill>
+          <a:ln>
+            <a:noFill/>
+          </a:ln>
+          <a:effectLst/>
+        </p:spPr>
+        <p:style>
+          <a:lnRef idx="1">
+            <a:schemeClr val="accent1"/>
+          </a:lnRef>
+          <a:fillRef idx="3">
+            <a:schemeClr val="accent1"/>
+          </a:fillRef>
+          <a:effectRef idx="2">
+            <a:schemeClr val="accent1"/>
+          </a:effectRef>
+          <a:fontRef idx="minor">
+            <a:schemeClr val="lt1"/>
+          </a:fontRef>
+        </p:style>
+        <p:txBody>
+          <a:bodyPr rtlCol="0" anchor="ctr"/>
+          <a:lstStyle/>
+          <a:p>
+            <a:pPr algn="ctr"/>
+          </a:p>
+        </p:txBody>
+      </p:sp>
+      <p:sp>
+        <p:nvSpPr>
+          <p:cNvPr id="48" name="Oval 47"/>
+          <p:cNvSpPr/>
+          <p:nvPr/>
+        </p:nvSpPr>
+        <p:spPr>
+          <a:xfrm>
+            <a:off x="7158307" y="1283086"/>
+            <a:ext cx="398422" cy="258958"/>
+          </a:xfrm>
+          <a:prstGeom prst="ellipse">
+            <a:avLst/>
+          </a:prstGeom>
+          <a:solidFill>
+            <a:srgbClr val="F2F8FE"/>
+          </a:solidFill>
+          <a:ln>
+            <a:noFill/>
+          </a:ln>
+          <a:effectLst/>
+        </p:spPr>
+        <p:style>
+          <a:lnRef idx="1">
+            <a:schemeClr val="accent1"/>
+          </a:lnRef>
+          <a:fillRef idx="3">
+            <a:schemeClr val="accent1"/>
+          </a:fillRef>
+          <a:effectRef idx="2">
+            <a:schemeClr val="accent1"/>
+          </a:effectRef>
+          <a:fontRef idx="minor">
+            <a:schemeClr val="lt1"/>
+          </a:fontRef>
+        </p:style>
+        <p:txBody>
+          <a:bodyPr rtlCol="0" anchor="ctr"/>
+          <a:lstStyle/>
+          <a:p>
+            <a:pPr algn="ctr"/>
+          </a:p>
+        </p:txBody>
+      </p:sp>
+      <p:sp>
+        <p:nvSpPr>
+          <p:cNvPr id="49" name="Oval 48"/>
+          <p:cNvSpPr/>
+          <p:nvPr/>
+        </p:nvSpPr>
+        <p:spPr>
+          <a:xfrm>
+            <a:off x="5199397" y="1498884"/>
+            <a:ext cx="498027" cy="323697"/>
+          </a:xfrm>
+          <a:prstGeom prst="ellipse">
+            <a:avLst/>
+          </a:prstGeom>
+          <a:solidFill>
+            <a:srgbClr val="C8E4F5"/>
+          </a:solidFill>
+          <a:ln>
+            <a:noFill/>
+          </a:ln>
+          <a:effectLst/>
+        </p:spPr>
+        <p:style>
+          <a:lnRef idx="1">
+            <a:schemeClr val="accent1"/>
+          </a:lnRef>
+          <a:fillRef idx="3">
+            <a:schemeClr val="accent1"/>
+          </a:fillRef>
+          <a:effectRef idx="2">
+            <a:schemeClr val="accent1"/>
+          </a:effectRef>
+          <a:fontRef idx="minor">
+            <a:schemeClr val="lt1"/>
+          </a:fontRef>
+        </p:style>
+        <p:txBody>
+          <a:bodyPr rtlCol="0" anchor="ctr"/>
+          <a:lstStyle/>
+          <a:p>
+            <a:pPr algn="ctr"/>
+          </a:p>
+        </p:txBody>
+      </p:sp>
+      <p:sp>
+        <p:nvSpPr>
+          <p:cNvPr id="50" name="Oval 49"/>
+          <p:cNvSpPr/>
+          <p:nvPr/>
+        </p:nvSpPr>
+        <p:spPr>
+          <a:xfrm>
+            <a:off x="5564617" y="1434144"/>
+            <a:ext cx="531229" cy="345277"/>
+          </a:xfrm>
+          <a:prstGeom prst="ellipse">
+            <a:avLst/>
+          </a:prstGeom>
+          <a:solidFill>
+            <a:srgbClr val="C8E4F5"/>
+          </a:solidFill>
+          <a:ln>
+            <a:noFill/>
+          </a:ln>
+          <a:effectLst/>
+        </p:spPr>
+        <p:style>
+          <a:lnRef idx="1">
+            <a:schemeClr val="accent1"/>
+          </a:lnRef>
+          <a:fillRef idx="3">
+            <a:schemeClr val="accent1"/>
+          </a:fillRef>
+          <a:effectRef idx="2">
+            <a:schemeClr val="accent1"/>
+          </a:effectRef>
+          <a:fontRef idx="minor">
+            <a:schemeClr val="lt1"/>
+          </a:fontRef>
+        </p:style>
+        <p:txBody>
+          <a:bodyPr rtlCol="0" anchor="ctr"/>
+          <a:lstStyle/>
+          <a:p>
+            <a:pPr algn="ctr"/>
+          </a:p>
+        </p:txBody>
+      </p:sp>
+      <p:sp>
+        <p:nvSpPr>
+          <p:cNvPr id="51" name="Oval 50"/>
+          <p:cNvSpPr/>
+          <p:nvPr/>
+        </p:nvSpPr>
+        <p:spPr>
+          <a:xfrm>
+            <a:off x="5963040" y="1498884"/>
+            <a:ext cx="464826" cy="302117"/>
+          </a:xfrm>
+          <a:prstGeom prst="ellipse">
+            <a:avLst/>
+          </a:prstGeom>
+          <a:solidFill>
+            <a:srgbClr val="F2F8FE"/>
+          </a:solidFill>
+          <a:ln>
+            <a:noFill/>
+          </a:ln>
+          <a:effectLst/>
+        </p:spPr>
+        <p:style>
+          <a:lnRef idx="1">
+            <a:schemeClr val="accent1"/>
+          </a:lnRef>
+          <a:fillRef idx="3">
+            <a:schemeClr val="accent1"/>
+          </a:fillRef>
+          <a:effectRef idx="2">
+            <a:schemeClr val="accent1"/>
+          </a:effectRef>
+          <a:fontRef idx="minor">
+            <a:schemeClr val="lt1"/>
+          </a:fontRef>
+        </p:style>
+        <p:txBody>
+          <a:bodyPr rtlCol="0" anchor="ctr"/>
+          <a:lstStyle/>
+          <a:p>
+            <a:pPr algn="ctr"/>
+          </a:p>
+        </p:txBody>
+      </p:sp>
+      <p:sp>
+        <p:nvSpPr>
+          <p:cNvPr id="52" name="Oval 51"/>
+          <p:cNvSpPr/>
+          <p:nvPr/>
+        </p:nvSpPr>
+        <p:spPr>
+          <a:xfrm>
+            <a:off x="6328260" y="1434144"/>
+            <a:ext cx="464826" cy="302117"/>
+          </a:xfrm>
+          <a:prstGeom prst="ellipse">
+            <a:avLst/>
+          </a:prstGeom>
+          <a:solidFill>
+            <a:srgbClr val="C8E4F5"/>
+          </a:solidFill>
+          <a:ln>
+            <a:noFill/>
+          </a:ln>
+          <a:effectLst/>
+        </p:spPr>
+        <p:style>
+          <a:lnRef idx="1">
+            <a:schemeClr val="accent1"/>
+          </a:lnRef>
+          <a:fillRef idx="3">
+            <a:schemeClr val="accent1"/>
+          </a:fillRef>
+          <a:effectRef idx="2">
+            <a:schemeClr val="accent1"/>
+          </a:effectRef>
+          <a:fontRef idx="minor">
+            <a:schemeClr val="lt1"/>
+          </a:fontRef>
+        </p:style>
+        <p:txBody>
+          <a:bodyPr rtlCol="0" anchor="ctr"/>
+          <a:lstStyle/>
+          <a:p>
+            <a:pPr algn="ctr"/>
+          </a:p>
+        </p:txBody>
+      </p:sp>
+      <p:sp>
+        <p:nvSpPr>
+          <p:cNvPr id="53" name="Oval 52"/>
+          <p:cNvSpPr/>
+          <p:nvPr/>
+        </p:nvSpPr>
+        <p:spPr>
+          <a:xfrm>
+            <a:off x="6693481" y="1498884"/>
+            <a:ext cx="431624" cy="280537"/>
+          </a:xfrm>
+          <a:prstGeom prst="ellipse">
+            <a:avLst/>
+          </a:prstGeom>
+          <a:solidFill>
+            <a:srgbClr val="F2F8FE"/>
+          </a:solidFill>
+          <a:ln>
+            <a:noFill/>
+          </a:ln>
+          <a:effectLst/>
+        </p:spPr>
+        <p:style>
+          <a:lnRef idx="1">
+            <a:schemeClr val="accent1"/>
+          </a:lnRef>
+          <a:fillRef idx="3">
+            <a:schemeClr val="accent1"/>
+          </a:fillRef>
+          <a:effectRef idx="2">
+            <a:schemeClr val="accent1"/>
+          </a:effectRef>
+          <a:fontRef idx="minor">
+            <a:schemeClr val="lt1"/>
+          </a:fontRef>
+        </p:style>
+        <p:txBody>
+          <a:bodyPr rtlCol="0" anchor="ctr"/>
+          <a:lstStyle/>
+          <a:p>
+            <a:pPr algn="ctr"/>
+          </a:p>
+        </p:txBody>
+      </p:sp>
+      <p:sp>
+        <p:nvSpPr>
+          <p:cNvPr id="54" name="Oval 53"/>
+          <p:cNvSpPr/>
+          <p:nvPr/>
+        </p:nvSpPr>
+        <p:spPr>
+          <a:xfrm>
+            <a:off x="7058701" y="1412565"/>
+            <a:ext cx="398422" cy="258958"/>
+          </a:xfrm>
+          <a:prstGeom prst="ellipse">
+            <a:avLst/>
+          </a:prstGeom>
+          <a:solidFill>
+            <a:srgbClr val="C8E4F5"/>
+          </a:solidFill>
+          <a:ln>
+            <a:noFill/>
+          </a:ln>
+          <a:effectLst/>
+        </p:spPr>
+        <p:style>
+          <a:lnRef idx="1">
+            <a:schemeClr val="accent1"/>
+          </a:lnRef>
+          <a:fillRef idx="3">
+            <a:schemeClr val="accent1"/>
+          </a:fillRef>
+          <a:effectRef idx="2">
+            <a:schemeClr val="accent1"/>
+          </a:effectRef>
+          <a:fontRef idx="minor">
+            <a:schemeClr val="lt1"/>
+          </a:fontRef>
+        </p:style>
+        <p:txBody>
+          <a:bodyPr rtlCol="0" anchor="ctr"/>
+          <a:lstStyle/>
+          <a:p>
+            <a:pPr algn="ctr"/>
+          </a:p>
+        </p:txBody>
+      </p:sp>
+      <p:sp>
+        <p:nvSpPr>
+          <p:cNvPr id="55" name="Oval 54"/>
+          <p:cNvSpPr/>
+          <p:nvPr/>
+        </p:nvSpPr>
+        <p:spPr>
+          <a:xfrm>
+            <a:off x="7357518" y="1347825"/>
+            <a:ext cx="332018" cy="215798"/>
+          </a:xfrm>
+          <a:prstGeom prst="ellipse">
+            <a:avLst/>
+          </a:prstGeom>
+          <a:solidFill>
+            <a:srgbClr val="F2F8FE"/>
+          </a:solidFill>
+          <a:ln>
+            <a:noFill/>
+          </a:ln>
+          <a:effectLst/>
+        </p:spPr>
+        <p:style>
+          <a:lnRef idx="1">
+            <a:schemeClr val="accent1"/>
+          </a:lnRef>
+          <a:fillRef idx="3">
+            <a:schemeClr val="accent1"/>
+          </a:fillRef>
+          <a:effectRef idx="2">
+            <a:schemeClr val="accent1"/>
+          </a:effectRef>
+          <a:fontRef idx="minor">
+            <a:schemeClr val="lt1"/>
+          </a:fontRef>
+        </p:style>
+        <p:txBody>
+          <a:bodyPr rtlCol="0" anchor="ctr"/>
+          <a:lstStyle/>
+          <a:p>
+            <a:pPr algn="ctr"/>
+          </a:p>
+        </p:txBody>
+      </p:sp>
+      <p:sp>
+        <p:nvSpPr>
+          <p:cNvPr id="56" name="TextBox 55"/>
+          <p:cNvSpPr txBox="1"/>
+          <p:nvPr/>
+        </p:nvSpPr>
+        <p:spPr>
+          <a:xfrm>
+            <a:off x="4435754" y="2212848"/>
+            <a:ext cx="3320186" cy="329184"/>
+          </a:xfrm>
+          <a:prstGeom prst="rect">
+            <a:avLst/>
+          </a:prstGeom>
+          <a:noFill/>
+        </p:spPr>
+        <p:txBody>
+          <a:bodyPr wrap="square" anchor="t" lIns="36000" rIns="36000" tIns="18000" bIns="18000">
+            <a:spAutoFit/>
+          </a:bodyPr>
+          <a:lstStyle/>
+          <a:p>
+            <a:pPr algn="l"/>
+            <a:r>
+              <a:rPr sz="1600" b="1" i="0">
+                <a:solidFill>
+                  <a:srgbClr val="1E293B"/>
+                </a:solidFill>
+                <a:latin typeface="Noto Sans JP"/>
+              </a:rPr>
+              <a:t>泡消火剤</a:t>
+            </a:r>
+          </a:p>
+        </p:txBody>
+      </p:sp>
+      <p:sp>
+        <p:nvSpPr>
+          <p:cNvPr id="57" name="TextBox 56"/>
+          <p:cNvSpPr txBox="1"/>
+          <p:nvPr/>
+        </p:nvSpPr>
+        <p:spPr>
+          <a:xfrm>
+            <a:off x="4435754" y="2542032"/>
+            <a:ext cx="3320186" cy="201168"/>
+          </a:xfrm>
+          <a:prstGeom prst="rect">
+            <a:avLst/>
+          </a:prstGeom>
+          <a:noFill/>
+        </p:spPr>
+        <p:txBody>
+          <a:bodyPr wrap="square" anchor="t" lIns="36000" rIns="36000" tIns="18000" bIns="18000">
+            <a:spAutoFit/>
+          </a:bodyPr>
+          <a:lstStyle/>
+          <a:p>
+            <a:pPr algn="l"/>
+            <a:r>
+              <a:rPr sz="900" b="0" i="1">
+                <a:solidFill>
+                  <a:srgbClr val="64748B"/>
+                </a:solidFill>
+                <a:latin typeface="Noto Sans JP"/>
+              </a:rPr>
+              <a:t>Foam suppressant</a:t>
+            </a:r>
+          </a:p>
+        </p:txBody>
+      </p:sp>
+      <p:sp>
+        <p:nvSpPr>
+          <p:cNvPr id="58" name="Rectangle 57"/>
+          <p:cNvSpPr/>
+          <p:nvPr/>
+        </p:nvSpPr>
+        <p:spPr>
+          <a:xfrm>
+            <a:off x="4435754" y="2798064"/>
+            <a:ext cx="3320186" cy="10972"/>
+          </a:xfrm>
+          <a:prstGeom prst="rect">
+            <a:avLst/>
+          </a:prstGeom>
+          <a:solidFill>
+            <a:srgbClr val="E2E8F0"/>
+          </a:solidFill>
+          <a:ln>
+            <a:noFill/>
+          </a:ln>
+          <a:effectLst/>
+        </p:spPr>
+        <p:style>
+          <a:lnRef idx="1">
+            <a:schemeClr val="accent1"/>
+          </a:lnRef>
+          <a:fillRef idx="3">
+            <a:schemeClr val="accent1"/>
+          </a:fillRef>
+          <a:effectRef idx="2">
+            <a:schemeClr val="accent1"/>
+          </a:effectRef>
+          <a:fontRef idx="minor">
+            <a:schemeClr val="lt1"/>
+          </a:fontRef>
+        </p:style>
+        <p:txBody>
+          <a:bodyPr rtlCol="0" anchor="ctr"/>
+          <a:lstStyle/>
+          <a:p>
+            <a:pPr algn="ctr"/>
+          </a:p>
+        </p:txBody>
+      </p:sp>
+      <p:sp>
+        <p:nvSpPr>
+          <p:cNvPr id="59" name="TextBox 58"/>
+          <p:cNvSpPr txBox="1"/>
+          <p:nvPr/>
+        </p:nvSpPr>
+        <p:spPr>
+          <a:xfrm>
+            <a:off x="4435754" y="2889504"/>
+            <a:ext cx="3320186" cy="201168"/>
+          </a:xfrm>
+          <a:prstGeom prst="rect">
+            <a:avLst/>
+          </a:prstGeom>
+          <a:noFill/>
+        </p:spPr>
+        <p:txBody>
+          <a:bodyPr wrap="square" anchor="t" lIns="36000" rIns="36000" tIns="18000" bIns="18000">
+            <a:spAutoFit/>
+          </a:bodyPr>
+          <a:lstStyle/>
+          <a:p>
+            <a:pPr algn="l"/>
+            <a:r>
+              <a:rPr sz="900" b="1" i="0">
+                <a:solidFill>
+                  <a:srgbClr val="3B5174"/>
+                </a:solidFill>
+                <a:latin typeface="Noto Sans JP"/>
+              </a:rPr>
+              <a:t>例</a:t>
+            </a:r>
+          </a:p>
+        </p:txBody>
+      </p:sp>
+      <p:sp>
+        <p:nvSpPr>
+          <p:cNvPr id="60" name="TextBox 59"/>
+          <p:cNvSpPr txBox="1"/>
+          <p:nvPr/>
+        </p:nvSpPr>
+        <p:spPr>
+          <a:xfrm>
+            <a:off x="4435754" y="3072384"/>
+            <a:ext cx="3320186" cy="365760"/>
+          </a:xfrm>
+          <a:prstGeom prst="rect">
+            <a:avLst/>
+          </a:prstGeom>
+          <a:noFill/>
+        </p:spPr>
+        <p:txBody>
+          <a:bodyPr wrap="square" anchor="t" lIns="36000" rIns="36000" tIns="18000" bIns="18000">
+            <a:spAutoFit/>
+          </a:bodyPr>
+          <a:lstStyle/>
+          <a:p>
+            <a:pPr algn="l"/>
+            <a:r>
+              <a:rPr sz="1100" b="1" i="0">
+                <a:solidFill>
+                  <a:srgbClr val="475569"/>
+                </a:solidFill>
+                <a:latin typeface="Noto Sans JP"/>
+              </a:rPr>
+              <a:t>Class A フォーム／旧 AFFF</a:t>
+            </a:r>
+          </a:p>
+        </p:txBody>
+      </p:sp>
+      <p:sp>
+        <p:nvSpPr>
+          <p:cNvPr id="61" name="TextBox 60"/>
+          <p:cNvSpPr txBox="1"/>
+          <p:nvPr/>
+        </p:nvSpPr>
+        <p:spPr>
+          <a:xfrm>
+            <a:off x="4435754" y="3493008"/>
+            <a:ext cx="3320186" cy="201168"/>
+          </a:xfrm>
+          <a:prstGeom prst="rect">
+            <a:avLst/>
+          </a:prstGeom>
+          <a:noFill/>
+        </p:spPr>
+        <p:txBody>
+          <a:bodyPr wrap="square" anchor="t" lIns="36000" rIns="36000" tIns="18000" bIns="18000">
+            <a:spAutoFit/>
+          </a:bodyPr>
+          <a:lstStyle/>
+          <a:p>
+            <a:pPr algn="l"/>
+            <a:r>
+              <a:rPr sz="900" b="1" i="0">
+                <a:solidFill>
+                  <a:srgbClr val="64748B"/>
+                </a:solidFill>
+                <a:latin typeface="Noto Sans JP"/>
+              </a:rPr>
+              <a:t>主成分</a:t>
+            </a:r>
+          </a:p>
+        </p:txBody>
+      </p:sp>
+      <p:sp>
+        <p:nvSpPr>
+          <p:cNvPr id="62" name="TextBox 61"/>
+          <p:cNvSpPr txBox="1"/>
+          <p:nvPr/>
+        </p:nvSpPr>
+        <p:spPr>
+          <a:xfrm>
+            <a:off x="4435754" y="3675888"/>
+            <a:ext cx="3320186" cy="365760"/>
+          </a:xfrm>
+          <a:prstGeom prst="rect">
+            <a:avLst/>
+          </a:prstGeom>
+          <a:noFill/>
+        </p:spPr>
+        <p:txBody>
+          <a:bodyPr wrap="square" anchor="t" lIns="36000" rIns="36000" tIns="18000" bIns="18000">
+            <a:spAutoFit/>
+          </a:bodyPr>
+          <a:lstStyle/>
+          <a:p>
+            <a:pPr algn="l"/>
+            <a:r>
+              <a:rPr sz="1100" b="0" i="0">
+                <a:solidFill>
+                  <a:srgbClr val="475569"/>
+                </a:solidFill>
+                <a:latin typeface="Noto Sans JP"/>
+              </a:rPr>
+              <a:t>界面活性剤（旧来はフッ素系）</a:t>
+            </a:r>
+          </a:p>
+        </p:txBody>
+      </p:sp>
+      <p:sp>
+        <p:nvSpPr>
+          <p:cNvPr id="63" name="TextBox 62"/>
+          <p:cNvSpPr txBox="1"/>
+          <p:nvPr/>
+        </p:nvSpPr>
+        <p:spPr>
+          <a:xfrm>
+            <a:off x="4435754" y="4096512"/>
+            <a:ext cx="3320186" cy="201168"/>
+          </a:xfrm>
+          <a:prstGeom prst="rect">
+            <a:avLst/>
+          </a:prstGeom>
+          <a:noFill/>
+        </p:spPr>
+        <p:txBody>
+          <a:bodyPr wrap="square" anchor="t" lIns="36000" rIns="36000" tIns="18000" bIns="18000">
+            <a:spAutoFit/>
+          </a:bodyPr>
+          <a:lstStyle/>
+          <a:p>
+            <a:pPr algn="l"/>
+            <a:r>
+              <a:rPr sz="900" b="1" i="0">
+                <a:solidFill>
+                  <a:srgbClr val="64748B"/>
+                </a:solidFill>
+                <a:latin typeface="Noto Sans JP"/>
+              </a:rPr>
+              <a:t>効果・保持</a:t>
+            </a:r>
+          </a:p>
+        </p:txBody>
+      </p:sp>
+      <p:sp>
+        <p:nvSpPr>
+          <p:cNvPr id="64" name="TextBox 63"/>
+          <p:cNvSpPr txBox="1"/>
+          <p:nvPr/>
+        </p:nvSpPr>
+        <p:spPr>
+          <a:xfrm>
+            <a:off x="4435754" y="4279391"/>
+            <a:ext cx="3320186" cy="365760"/>
+          </a:xfrm>
+          <a:prstGeom prst="rect">
+            <a:avLst/>
+          </a:prstGeom>
+          <a:noFill/>
+        </p:spPr>
+        <p:txBody>
+          <a:bodyPr wrap="square" anchor="t" lIns="36000" rIns="36000" tIns="18000" bIns="18000">
+            <a:spAutoFit/>
+          </a:bodyPr>
+          <a:lstStyle/>
+          <a:p>
+            <a:pPr algn="l"/>
+            <a:r>
+              <a:rPr sz="1100" b="0" i="0">
+                <a:solidFill>
+                  <a:srgbClr val="475569"/>
+                </a:solidFill>
+                <a:latin typeface="Noto Sans JP"/>
+              </a:rPr>
+              <a:t>水分保持 15〜30分（短期的）</a:t>
+            </a:r>
+          </a:p>
+        </p:txBody>
+      </p:sp>
+      <p:sp>
+        <p:nvSpPr>
+          <p:cNvPr id="65" name="TextBox 64"/>
+          <p:cNvSpPr txBox="1"/>
+          <p:nvPr/>
+        </p:nvSpPr>
+        <p:spPr>
+          <a:xfrm>
+            <a:off x="4435754" y="4700016"/>
+            <a:ext cx="3320186" cy="201168"/>
+          </a:xfrm>
+          <a:prstGeom prst="rect">
+            <a:avLst/>
+          </a:prstGeom>
+          <a:noFill/>
+        </p:spPr>
+        <p:txBody>
+          <a:bodyPr wrap="square" anchor="t" lIns="36000" rIns="36000" tIns="18000" bIns="18000">
+            <a:spAutoFit/>
+          </a:bodyPr>
+          <a:lstStyle/>
+          <a:p>
+            <a:pPr algn="l"/>
+            <a:r>
+              <a:rPr sz="900" b="1" i="0">
+                <a:solidFill>
+                  <a:srgbClr val="A05656"/>
+                </a:solidFill>
+                <a:latin typeface="Noto Sans JP"/>
+              </a:rPr>
+              <a:t>課題</a:t>
+            </a:r>
+          </a:p>
+        </p:txBody>
+      </p:sp>
+      <p:sp>
+        <p:nvSpPr>
+          <p:cNvPr id="66" name="TextBox 65"/>
+          <p:cNvSpPr txBox="1"/>
+          <p:nvPr/>
+        </p:nvSpPr>
+        <p:spPr>
+          <a:xfrm>
+            <a:off x="4435754" y="4882896"/>
+            <a:ext cx="3320186" cy="859536"/>
+          </a:xfrm>
+          <a:prstGeom prst="rect">
+            <a:avLst/>
+          </a:prstGeom>
+          <a:noFill/>
+        </p:spPr>
+        <p:txBody>
+          <a:bodyPr wrap="square" anchor="t" lIns="36000" rIns="36000" tIns="18000" bIns="18000">
+            <a:spAutoFit/>
+          </a:bodyPr>
+          <a:lstStyle/>
+          <a:p>
+            <a:pPr algn="l"/>
+            <a:r>
+              <a:rPr sz="1100" b="1" i="0">
+                <a:solidFill>
+                  <a:srgbClr val="A05656"/>
+                </a:solidFill>
+                <a:latin typeface="Noto Sans JP"/>
+              </a:rPr>
+              <a:t>乾燥で効果消失／フッ素系は生体蓄積・環境毒性</a:t>
+            </a:r>
+          </a:p>
+        </p:txBody>
+      </p:sp>
+      <p:sp>
+        <p:nvSpPr>
+          <p:cNvPr id="67" name="Rounded Rectangle 66"/>
+          <p:cNvSpPr/>
+          <p:nvPr/>
+        </p:nvSpPr>
+        <p:spPr>
+          <a:xfrm>
+            <a:off x="8139988" y="859536"/>
+            <a:ext cx="3685946" cy="5047488"/>
+          </a:xfrm>
+          <a:prstGeom prst="roundRect">
+            <a:avLst>
+              <a:gd name="adj" fmla="val 4000"/>
+            </a:avLst>
+          </a:prstGeom>
+          <a:solidFill>
+            <a:srgbClr val="1E293B"/>
+          </a:solidFill>
+          <a:ln>
+            <a:noFill/>
+          </a:ln>
+          <a:effectLst/>
+        </p:spPr>
+        <p:style>
+          <a:lnRef idx="1">
+            <a:schemeClr val="accent1"/>
+          </a:lnRef>
+          <a:fillRef idx="3">
+            <a:schemeClr val="accent1"/>
+          </a:fillRef>
+          <a:effectRef idx="2">
+            <a:schemeClr val="accent1"/>
+          </a:effectRef>
+          <a:fontRef idx="minor">
+            <a:schemeClr val="lt1"/>
+          </a:fontRef>
+        </p:style>
+        <p:txBody>
+          <a:bodyPr rtlCol="0" anchor="ctr"/>
+          <a:lstStyle/>
+          <a:p>
+            <a:pPr algn="ctr"/>
+          </a:p>
+        </p:txBody>
+      </p:sp>
+      <p:sp>
+        <p:nvSpPr>
+          <p:cNvPr id="68" name="Rectangle 67"/>
+          <p:cNvSpPr/>
+          <p:nvPr/>
+        </p:nvSpPr>
+        <p:spPr>
+          <a:xfrm>
+            <a:off x="8139988" y="859536"/>
+            <a:ext cx="3685946" cy="45720"/>
+          </a:xfrm>
+          <a:prstGeom prst="rect">
+            <a:avLst/>
+          </a:prstGeom>
+          <a:solidFill>
+            <a:srgbClr val="D4A574"/>
+          </a:solidFill>
+          <a:ln>
+            <a:noFill/>
+          </a:ln>
+          <a:effectLst/>
+        </p:spPr>
+        <p:style>
+          <a:lnRef idx="1">
+            <a:schemeClr val="accent1"/>
+          </a:lnRef>
+          <a:fillRef idx="3">
+            <a:schemeClr val="accent1"/>
+          </a:fillRef>
+          <a:effectRef idx="2">
+            <a:schemeClr val="accent1"/>
+          </a:effectRef>
+          <a:fontRef idx="minor">
+            <a:schemeClr val="lt1"/>
+          </a:fontRef>
+        </p:style>
+        <p:txBody>
+          <a:bodyPr rtlCol="0" anchor="ctr"/>
+          <a:lstStyle/>
+          <a:p>
+            <a:pPr algn="ctr"/>
+          </a:p>
+        </p:txBody>
+      </p:sp>
+      <p:sp>
+        <p:nvSpPr>
+          <p:cNvPr id="69" name="Rounded Rectangle 68"/>
+          <p:cNvSpPr/>
+          <p:nvPr/>
+        </p:nvSpPr>
+        <p:spPr>
+          <a:xfrm>
+            <a:off x="8322868" y="1024128"/>
+            <a:ext cx="3320186" cy="1078992"/>
+          </a:xfrm>
+          <a:prstGeom prst="roundRect">
+            <a:avLst>
+              <a:gd name="adj" fmla="val 3000"/>
+            </a:avLst>
+          </a:prstGeom>
+          <a:solidFill>
+            <a:srgbClr val="1E293B"/>
+          </a:solidFill>
+          <a:ln>
+            <a:noFill/>
+          </a:ln>
+          <a:effectLst/>
+        </p:spPr>
+        <p:style>
+          <a:lnRef idx="1">
+            <a:schemeClr val="accent1"/>
+          </a:lnRef>
+          <a:fillRef idx="3">
+            <a:schemeClr val="accent1"/>
+          </a:fillRef>
+          <a:effectRef idx="2">
+            <a:schemeClr val="accent1"/>
+          </a:effectRef>
+          <a:fontRef idx="minor">
+            <a:schemeClr val="lt1"/>
+          </a:fontRef>
+        </p:style>
+        <p:txBody>
+          <a:bodyPr rtlCol="0" anchor="ctr"/>
+          <a:lstStyle/>
+          <a:p>
+            <a:pPr algn="ctr"/>
+          </a:p>
+        </p:txBody>
+      </p:sp>
+      <p:sp>
+        <p:nvSpPr>
+          <p:cNvPr id="70" name="Rectangle 69"/>
+          <p:cNvSpPr/>
+          <p:nvPr/>
+        </p:nvSpPr>
+        <p:spPr>
+          <a:xfrm>
+            <a:off x="8322868" y="1973640"/>
+            <a:ext cx="3320186" cy="129479"/>
+          </a:xfrm>
+          <a:prstGeom prst="rect">
+            <a:avLst/>
+          </a:prstGeom>
+          <a:solidFill>
+            <a:srgbClr val="2E4A38"/>
+          </a:solidFill>
+          <a:ln>
+            <a:noFill/>
+          </a:ln>
+          <a:effectLst/>
+        </p:spPr>
+        <p:style>
+          <a:lnRef idx="1">
+            <a:schemeClr val="accent1"/>
+          </a:lnRef>
+          <a:fillRef idx="3">
+            <a:schemeClr val="accent1"/>
+          </a:fillRef>
+          <a:effectRef idx="2">
+            <a:schemeClr val="accent1"/>
+          </a:effectRef>
+          <a:fontRef idx="minor">
+            <a:schemeClr val="lt1"/>
+          </a:fontRef>
+        </p:style>
+        <p:txBody>
+          <a:bodyPr rtlCol="0" anchor="ctr"/>
+          <a:lstStyle/>
+          <a:p>
+            <a:pPr algn="ctr"/>
+          </a:p>
+        </p:txBody>
+      </p:sp>
+      <p:sp>
+        <p:nvSpPr>
+          <p:cNvPr id="71" name="Oval 70"/>
+          <p:cNvSpPr/>
+          <p:nvPr/>
+        </p:nvSpPr>
+        <p:spPr>
+          <a:xfrm>
+            <a:off x="9352126" y="1477304"/>
+            <a:ext cx="1261670" cy="561075"/>
+          </a:xfrm>
+          <a:prstGeom prst="ellipse">
+            <a:avLst/>
+          </a:prstGeom>
+          <a:solidFill>
+            <a:srgbClr val="4AAA92"/>
+          </a:solidFill>
+          <a:ln>
+            <a:noFill/>
+          </a:ln>
+          <a:effectLst/>
+        </p:spPr>
+        <p:style>
+          <a:lnRef idx="1">
+            <a:schemeClr val="accent1"/>
+          </a:lnRef>
+          <a:fillRef idx="3">
+            <a:schemeClr val="accent1"/>
+          </a:fillRef>
+          <a:effectRef idx="2">
+            <a:schemeClr val="accent1"/>
+          </a:effectRef>
+          <a:fontRef idx="minor">
+            <a:schemeClr val="lt1"/>
+          </a:fontRef>
+        </p:style>
+        <p:txBody>
+          <a:bodyPr rtlCol="0" anchor="ctr"/>
+          <a:lstStyle/>
+          <a:p>
+            <a:pPr algn="ctr"/>
+          </a:p>
+        </p:txBody>
+      </p:sp>
+      <p:sp>
+        <p:nvSpPr>
+          <p:cNvPr id="72" name="Rectangle 71"/>
+          <p:cNvSpPr/>
+          <p:nvPr/>
+        </p:nvSpPr>
+        <p:spPr>
+          <a:xfrm>
+            <a:off x="9451732" y="1542044"/>
+            <a:ext cx="1062459" cy="431596"/>
+          </a:xfrm>
+          <a:prstGeom prst="rect">
+            <a:avLst/>
+          </a:prstGeom>
+          <a:solidFill>
+            <a:srgbClr val="E8F0F8"/>
+          </a:solidFill>
+          <a:ln>
+            <a:noFill/>
+          </a:ln>
+          <a:effectLst/>
+        </p:spPr>
+        <p:style>
+          <a:lnRef idx="1">
+            <a:schemeClr val="accent1"/>
+          </a:lnRef>
+          <a:fillRef idx="3">
+            <a:schemeClr val="accent1"/>
+          </a:fillRef>
+          <a:effectRef idx="2">
+            <a:schemeClr val="accent1"/>
+          </a:effectRef>
+          <a:fontRef idx="minor">
+            <a:schemeClr val="lt1"/>
+          </a:fontRef>
+        </p:style>
+        <p:txBody>
+          <a:bodyPr rtlCol="0" anchor="ctr"/>
+          <a:lstStyle/>
+          <a:p>
+            <a:pPr algn="ctr"/>
+          </a:p>
+        </p:txBody>
+      </p:sp>
+      <p:sp>
+        <p:nvSpPr>
+          <p:cNvPr id="73" name="Isosceles Triangle 72"/>
+          <p:cNvSpPr/>
+          <p:nvPr/>
+        </p:nvSpPr>
+        <p:spPr>
+          <a:xfrm>
+            <a:off x="9385328" y="1218346"/>
+            <a:ext cx="1195267" cy="345277"/>
+          </a:xfrm>
+          <a:prstGeom prst="triangle">
+            <a:avLst/>
+          </a:prstGeom>
+          <a:solidFill>
+            <a:srgbClr val="CCD8E8"/>
+          </a:solidFill>
+          <a:ln>
+            <a:noFill/>
+          </a:ln>
+          <a:effectLst/>
+        </p:spPr>
+        <p:style>
+          <a:lnRef idx="1">
+            <a:schemeClr val="accent1"/>
+          </a:lnRef>
+          <a:fillRef idx="3">
+            <a:schemeClr val="accent1"/>
+          </a:fillRef>
+          <a:effectRef idx="2">
+            <a:schemeClr val="accent1"/>
+          </a:effectRef>
+          <a:fontRef idx="minor">
+            <a:schemeClr val="lt1"/>
+          </a:fontRef>
+        </p:style>
+        <p:txBody>
+          <a:bodyPr rtlCol="0" anchor="ctr"/>
+          <a:lstStyle/>
+          <a:p>
+            <a:pPr algn="ctr"/>
+          </a:p>
+        </p:txBody>
+      </p:sp>
+      <p:sp>
+        <p:nvSpPr>
+          <p:cNvPr id="74" name="Rectangle 73"/>
+          <p:cNvSpPr/>
+          <p:nvPr/>
+        </p:nvSpPr>
+        <p:spPr>
+          <a:xfrm>
+            <a:off x="9557977" y="1602467"/>
+            <a:ext cx="276239" cy="129479"/>
+          </a:xfrm>
+          <a:prstGeom prst="rect">
+            <a:avLst/>
+          </a:prstGeom>
+          <a:solidFill>
+            <a:srgbClr val="70AACC"/>
+          </a:solidFill>
+          <a:ln>
+            <a:noFill/>
+          </a:ln>
+          <a:effectLst/>
+        </p:spPr>
+        <p:style>
+          <a:lnRef idx="1">
+            <a:schemeClr val="accent1"/>
+          </a:lnRef>
+          <a:fillRef idx="3">
+            <a:schemeClr val="accent1"/>
+          </a:fillRef>
+          <a:effectRef idx="2">
+            <a:schemeClr val="accent1"/>
+          </a:effectRef>
+          <a:fontRef idx="minor">
+            <a:schemeClr val="lt1"/>
+          </a:fontRef>
+        </p:style>
+        <p:txBody>
+          <a:bodyPr rtlCol="0" anchor="ctr"/>
+          <a:lstStyle/>
+          <a:p>
+            <a:pPr algn="ctr"/>
+          </a:p>
+        </p:txBody>
+      </p:sp>
+      <p:sp>
+        <p:nvSpPr>
+          <p:cNvPr id="75" name="Rectangle 74"/>
+          <p:cNvSpPr/>
+          <p:nvPr/>
+        </p:nvSpPr>
+        <p:spPr>
+          <a:xfrm>
+            <a:off x="10089207" y="1602467"/>
+            <a:ext cx="276239" cy="129479"/>
+          </a:xfrm>
+          <a:prstGeom prst="rect">
+            <a:avLst/>
+          </a:prstGeom>
+          <a:solidFill>
+            <a:srgbClr val="70AACC"/>
+          </a:solidFill>
+          <a:ln>
+            <a:noFill/>
+          </a:ln>
+          <a:effectLst/>
+        </p:spPr>
+        <p:style>
+          <a:lnRef idx="1">
+            <a:schemeClr val="accent1"/>
+          </a:lnRef>
+          <a:fillRef idx="3">
+            <a:schemeClr val="accent1"/>
+          </a:fillRef>
+          <a:effectRef idx="2">
+            <a:schemeClr val="accent1"/>
+          </a:effectRef>
+          <a:fontRef idx="minor">
+            <a:schemeClr val="lt1"/>
+          </a:fontRef>
+        </p:style>
+        <p:txBody>
+          <a:bodyPr rtlCol="0" anchor="ctr"/>
+          <a:lstStyle/>
+          <a:p>
+            <a:pPr algn="ctr"/>
+          </a:p>
+        </p:txBody>
+      </p:sp>
+      <p:sp>
+        <p:nvSpPr>
+          <p:cNvPr id="76" name="Rectangle 75"/>
+          <p:cNvSpPr/>
+          <p:nvPr/>
+        </p:nvSpPr>
+        <p:spPr>
+          <a:xfrm>
+            <a:off x="9834217" y="1792370"/>
+            <a:ext cx="297488" cy="181270"/>
+          </a:xfrm>
+          <a:prstGeom prst="rect">
+            <a:avLst/>
+          </a:prstGeom>
+          <a:solidFill>
+            <a:srgbClr val="70AACC"/>
+          </a:solidFill>
+          <a:ln>
+            <a:noFill/>
+          </a:ln>
+          <a:effectLst/>
+        </p:spPr>
+        <p:style>
+          <a:lnRef idx="1">
+            <a:schemeClr val="accent1"/>
+          </a:lnRef>
+          <a:fillRef idx="3">
+            <a:schemeClr val="accent1"/>
+          </a:fillRef>
+          <a:effectRef idx="2">
+            <a:schemeClr val="accent1"/>
+          </a:effectRef>
+          <a:fontRef idx="minor">
+            <a:schemeClr val="lt1"/>
+          </a:fontRef>
+        </p:style>
+        <p:txBody>
+          <a:bodyPr rtlCol="0" anchor="ctr"/>
+          <a:lstStyle/>
+          <a:p>
+            <a:pPr algn="ctr"/>
+          </a:p>
+        </p:txBody>
+      </p:sp>
+      <p:sp>
+        <p:nvSpPr>
+          <p:cNvPr id="77" name="Oval 76"/>
+          <p:cNvSpPr/>
+          <p:nvPr/>
+        </p:nvSpPr>
+        <p:spPr>
+          <a:xfrm>
+            <a:off x="8654887" y="1239926"/>
+            <a:ext cx="92965" cy="82003"/>
+          </a:xfrm>
+          <a:prstGeom prst="ellipse">
+            <a:avLst/>
+          </a:prstGeom>
+          <a:solidFill>
+            <a:srgbClr val="38907A"/>
+          </a:solidFill>
+          <a:ln>
+            <a:noFill/>
+          </a:ln>
+          <a:effectLst/>
+        </p:spPr>
+        <p:style>
+          <a:lnRef idx="1">
+            <a:schemeClr val="accent1"/>
+          </a:lnRef>
+          <a:fillRef idx="3">
+            <a:schemeClr val="accent1"/>
+          </a:fillRef>
+          <a:effectRef idx="2">
+            <a:schemeClr val="accent1"/>
+          </a:effectRef>
+          <a:fontRef idx="minor">
+            <a:schemeClr val="lt1"/>
+          </a:fontRef>
+        </p:style>
+        <p:txBody>
+          <a:bodyPr rtlCol="0" anchor="ctr"/>
+          <a:lstStyle/>
+          <a:p>
+            <a:pPr algn="ctr"/>
+          </a:p>
+        </p:txBody>
+      </p:sp>
+      <p:sp>
+        <p:nvSpPr>
+          <p:cNvPr id="78" name="Oval 77"/>
+          <p:cNvSpPr/>
+          <p:nvPr/>
+        </p:nvSpPr>
+        <p:spPr>
+          <a:xfrm>
+            <a:off x="8820896" y="1477304"/>
+            <a:ext cx="79684" cy="69055"/>
+          </a:xfrm>
+          <a:prstGeom prst="ellipse">
+            <a:avLst/>
+          </a:prstGeom>
+          <a:solidFill>
+            <a:srgbClr val="38907A"/>
+          </a:solidFill>
+          <a:ln>
+            <a:noFill/>
+          </a:ln>
+          <a:effectLst/>
+        </p:spPr>
+        <p:style>
+          <a:lnRef idx="1">
+            <a:schemeClr val="accent1"/>
+          </a:lnRef>
+          <a:fillRef idx="3">
+            <a:schemeClr val="accent1"/>
+          </a:fillRef>
+          <a:effectRef idx="2">
+            <a:schemeClr val="accent1"/>
+          </a:effectRef>
+          <a:fontRef idx="minor">
+            <a:schemeClr val="lt1"/>
+          </a:fontRef>
+        </p:style>
+        <p:txBody>
+          <a:bodyPr rtlCol="0" anchor="ctr"/>
+          <a:lstStyle/>
+          <a:p>
+            <a:pPr algn="ctr"/>
+          </a:p>
+        </p:txBody>
+      </p:sp>
+      <p:sp>
+        <p:nvSpPr>
+          <p:cNvPr id="79" name="Oval 78"/>
+          <p:cNvSpPr/>
+          <p:nvPr/>
+        </p:nvSpPr>
+        <p:spPr>
+          <a:xfrm>
+            <a:off x="8986905" y="1347825"/>
+            <a:ext cx="86324" cy="75529"/>
+          </a:xfrm>
+          <a:prstGeom prst="ellipse">
+            <a:avLst/>
+          </a:prstGeom>
+          <a:solidFill>
+            <a:srgbClr val="38907A"/>
+          </a:solidFill>
+          <a:ln>
+            <a:noFill/>
+          </a:ln>
+          <a:effectLst/>
+        </p:spPr>
+        <p:style>
+          <a:lnRef idx="1">
+            <a:schemeClr val="accent1"/>
+          </a:lnRef>
+          <a:fillRef idx="3">
+            <a:schemeClr val="accent1"/>
+          </a:fillRef>
+          <a:effectRef idx="2">
+            <a:schemeClr val="accent1"/>
+          </a:effectRef>
+          <a:fontRef idx="minor">
+            <a:schemeClr val="lt1"/>
+          </a:fontRef>
+        </p:style>
+        <p:txBody>
+          <a:bodyPr rtlCol="0" anchor="ctr"/>
+          <a:lstStyle/>
+          <a:p>
+            <a:pPr algn="ctr"/>
+          </a:p>
+        </p:txBody>
+      </p:sp>
+      <p:sp>
+        <p:nvSpPr>
+          <p:cNvPr id="80" name="Oval 79"/>
+          <p:cNvSpPr/>
+          <p:nvPr/>
+        </p:nvSpPr>
+        <p:spPr>
+          <a:xfrm>
+            <a:off x="10979017" y="1261506"/>
+            <a:ext cx="86324" cy="79845"/>
+          </a:xfrm>
+          <a:prstGeom prst="ellipse">
+            <a:avLst/>
+          </a:prstGeom>
+          <a:solidFill>
+            <a:srgbClr val="38907A"/>
+          </a:solidFill>
+          <a:ln>
+            <a:noFill/>
+          </a:ln>
+          <a:effectLst/>
+        </p:spPr>
+        <p:style>
+          <a:lnRef idx="1">
+            <a:schemeClr val="accent1"/>
+          </a:lnRef>
+          <a:fillRef idx="3">
+            <a:schemeClr val="accent1"/>
+          </a:fillRef>
+          <a:effectRef idx="2">
+            <a:schemeClr val="accent1"/>
+          </a:effectRef>
+          <a:fontRef idx="minor">
+            <a:schemeClr val="lt1"/>
+          </a:fontRef>
+        </p:style>
+        <p:txBody>
+          <a:bodyPr rtlCol="0" anchor="ctr"/>
+          <a:lstStyle/>
+          <a:p>
+            <a:pPr algn="ctr"/>
+          </a:p>
+        </p:txBody>
+      </p:sp>
+      <p:sp>
+        <p:nvSpPr>
+          <p:cNvPr id="81" name="Oval 80"/>
+          <p:cNvSpPr/>
+          <p:nvPr/>
+        </p:nvSpPr>
+        <p:spPr>
+          <a:xfrm>
+            <a:off x="11111825" y="1477304"/>
+            <a:ext cx="79684" cy="71213"/>
+          </a:xfrm>
+          <a:prstGeom prst="ellipse">
+            <a:avLst/>
+          </a:prstGeom>
+          <a:solidFill>
+            <a:srgbClr val="38907A"/>
+          </a:solidFill>
+          <a:ln>
+            <a:noFill/>
+          </a:ln>
+          <a:effectLst/>
+        </p:spPr>
+        <p:style>
+          <a:lnRef idx="1">
+            <a:schemeClr val="accent1"/>
+          </a:lnRef>
+          <a:fillRef idx="3">
+            <a:schemeClr val="accent1"/>
+          </a:fillRef>
+          <a:effectRef idx="2">
+            <a:schemeClr val="accent1"/>
+          </a:effectRef>
+          <a:fontRef idx="minor">
+            <a:schemeClr val="lt1"/>
+          </a:fontRef>
+        </p:style>
+        <p:txBody>
+          <a:bodyPr rtlCol="0" anchor="ctr"/>
+          <a:lstStyle/>
+          <a:p>
+            <a:pPr algn="ctr"/>
+          </a:p>
+        </p:txBody>
+      </p:sp>
+      <p:sp>
+        <p:nvSpPr>
+          <p:cNvPr id="82" name="Oval 81"/>
+          <p:cNvSpPr/>
+          <p:nvPr/>
+        </p:nvSpPr>
+        <p:spPr>
+          <a:xfrm>
+            <a:off x="10846210" y="1606783"/>
+            <a:ext cx="92965" cy="75529"/>
+          </a:xfrm>
+          <a:prstGeom prst="ellipse">
+            <a:avLst/>
+          </a:prstGeom>
+          <a:solidFill>
+            <a:srgbClr val="38907A"/>
+          </a:solidFill>
+          <a:ln>
+            <a:noFill/>
+          </a:ln>
+          <a:effectLst/>
+        </p:spPr>
+        <p:style>
+          <a:lnRef idx="1">
+            <a:schemeClr val="accent1"/>
+          </a:lnRef>
+          <a:fillRef idx="3">
+            <a:schemeClr val="accent1"/>
+          </a:fillRef>
+          <a:effectRef idx="2">
+            <a:schemeClr val="accent1"/>
+          </a:effectRef>
+          <a:fontRef idx="minor">
+            <a:schemeClr val="lt1"/>
+          </a:fontRef>
+        </p:style>
+        <p:txBody>
+          <a:bodyPr rtlCol="0" anchor="ctr"/>
+          <a:lstStyle/>
+          <a:p>
+            <a:pPr algn="ctr"/>
+          </a:p>
+        </p:txBody>
+      </p:sp>
+      <p:sp>
+        <p:nvSpPr>
+          <p:cNvPr id="83" name="TextBox 82"/>
+          <p:cNvSpPr txBox="1"/>
+          <p:nvPr/>
+        </p:nvSpPr>
+        <p:spPr>
+          <a:xfrm>
+            <a:off x="8322868" y="2212848"/>
+            <a:ext cx="3320186" cy="329184"/>
+          </a:xfrm>
+          <a:prstGeom prst="rect">
+            <a:avLst/>
+          </a:prstGeom>
+          <a:noFill/>
+        </p:spPr>
+        <p:txBody>
+          <a:bodyPr wrap="square" anchor="t" lIns="36000" rIns="36000" tIns="18000" bIns="18000">
+            <a:spAutoFit/>
+          </a:bodyPr>
+          <a:lstStyle/>
+          <a:p>
+            <a:pPr algn="l"/>
+            <a:r>
+              <a:rPr sz="1600" b="1" i="0">
+                <a:solidFill>
+                  <a:srgbClr val="FFFFFF"/>
+                </a:solidFill>
+                <a:latin typeface="Noto Sans JP"/>
+              </a:rPr>
+              <a:t>水強化ゲル（WEG）</a:t>
+            </a:r>
+          </a:p>
+        </p:txBody>
+      </p:sp>
+      <p:sp>
+        <p:nvSpPr>
+          <p:cNvPr id="84" name="TextBox 83"/>
+          <p:cNvSpPr txBox="1"/>
+          <p:nvPr/>
+        </p:nvSpPr>
+        <p:spPr>
+          <a:xfrm>
+            <a:off x="8322868" y="2542032"/>
+            <a:ext cx="3320186" cy="201168"/>
+          </a:xfrm>
+          <a:prstGeom prst="rect">
+            <a:avLst/>
+          </a:prstGeom>
+          <a:noFill/>
+        </p:spPr>
+        <p:txBody>
+          <a:bodyPr wrap="square" anchor="t" lIns="36000" rIns="36000" tIns="18000" bIns="18000">
+            <a:spAutoFit/>
+          </a:bodyPr>
+          <a:lstStyle/>
+          <a:p>
+            <a:pPr algn="l"/>
+            <a:r>
+              <a:rPr sz="900" b="0" i="1">
+                <a:solidFill>
+                  <a:srgbClr val="A0B8D0"/>
+                </a:solidFill>
+                <a:latin typeface="Noto Sans JP"/>
+              </a:rPr>
+              <a:t>Water-enhancing gel</a:t>
+            </a:r>
+          </a:p>
+        </p:txBody>
+      </p:sp>
+      <p:sp>
+        <p:nvSpPr>
+          <p:cNvPr id="85" name="Rectangle 84"/>
+          <p:cNvSpPr/>
+          <p:nvPr/>
+        </p:nvSpPr>
+        <p:spPr>
+          <a:xfrm>
+            <a:off x="8322868" y="2798064"/>
+            <a:ext cx="3320186" cy="10972"/>
+          </a:xfrm>
+          <a:prstGeom prst="rect">
+            <a:avLst/>
+          </a:prstGeom>
+          <a:solidFill>
+            <a:srgbClr val="445870"/>
+          </a:solidFill>
+          <a:ln>
+            <a:noFill/>
+          </a:ln>
+          <a:effectLst/>
+        </p:spPr>
+        <p:style>
+          <a:lnRef idx="1">
+            <a:schemeClr val="accent1"/>
+          </a:lnRef>
+          <a:fillRef idx="3">
+            <a:schemeClr val="accent1"/>
+          </a:fillRef>
+          <a:effectRef idx="2">
+            <a:schemeClr val="accent1"/>
+          </a:effectRef>
+          <a:fontRef idx="minor">
+            <a:schemeClr val="lt1"/>
+          </a:fontRef>
+        </p:style>
+        <p:txBody>
+          <a:bodyPr rtlCol="0" anchor="ctr"/>
+          <a:lstStyle/>
+          <a:p>
+            <a:pPr algn="ctr"/>
+          </a:p>
+        </p:txBody>
+      </p:sp>
+      <p:sp>
+        <p:nvSpPr>
+          <p:cNvPr id="86" name="TextBox 85"/>
+          <p:cNvSpPr txBox="1"/>
+          <p:nvPr/>
+        </p:nvSpPr>
+        <p:spPr>
+          <a:xfrm>
+            <a:off x="8322868" y="2889504"/>
+            <a:ext cx="3320186" cy="201168"/>
+          </a:xfrm>
+          <a:prstGeom prst="rect">
+            <a:avLst/>
+          </a:prstGeom>
+          <a:noFill/>
+        </p:spPr>
+        <p:txBody>
+          <a:bodyPr wrap="square" anchor="t" lIns="36000" rIns="36000" tIns="18000" bIns="18000">
+            <a:spAutoFit/>
+          </a:bodyPr>
+          <a:lstStyle/>
+          <a:p>
+            <a:pPr algn="l"/>
+            <a:r>
+              <a:rPr sz="900" b="1" i="0">
+                <a:solidFill>
+                  <a:srgbClr val="D4A574"/>
+                </a:solidFill>
+                <a:latin typeface="Noto Sans JP"/>
+              </a:rPr>
+              <a:t>例</a:t>
+            </a:r>
+          </a:p>
+        </p:txBody>
+      </p:sp>
+      <p:sp>
+        <p:nvSpPr>
+          <p:cNvPr id="87" name="TextBox 86"/>
+          <p:cNvSpPr txBox="1"/>
+          <p:nvPr/>
+        </p:nvSpPr>
+        <p:spPr>
+          <a:xfrm>
+            <a:off x="8322868" y="3072384"/>
+            <a:ext cx="3320186" cy="365760"/>
+          </a:xfrm>
+          <a:prstGeom prst="rect">
+            <a:avLst/>
+          </a:prstGeom>
+          <a:noFill/>
+        </p:spPr>
+        <p:txBody>
+          <a:bodyPr wrap="square" anchor="t" lIns="36000" rIns="36000" tIns="18000" bIns="18000">
+            <a:spAutoFit/>
+          </a:bodyPr>
+          <a:lstStyle/>
+          <a:p>
+            <a:pPr algn="l"/>
+            <a:r>
+              <a:rPr sz="1100" b="1" i="0">
+                <a:solidFill>
+                  <a:srgbClr val="D8E2EE"/>
+                </a:solidFill>
+                <a:latin typeface="Noto Sans JP"/>
+              </a:rPr>
+              <a:t>Barricade／Thermo-Gel／AquaGel-K</a:t>
+            </a:r>
+          </a:p>
+        </p:txBody>
+      </p:sp>
+      <p:sp>
+        <p:nvSpPr>
+          <p:cNvPr id="88" name="TextBox 87"/>
+          <p:cNvSpPr txBox="1"/>
+          <p:nvPr/>
+        </p:nvSpPr>
+        <p:spPr>
+          <a:xfrm>
+            <a:off x="8322868" y="3493008"/>
+            <a:ext cx="3320186" cy="201168"/>
+          </a:xfrm>
+          <a:prstGeom prst="rect">
+            <a:avLst/>
+          </a:prstGeom>
+          <a:noFill/>
+        </p:spPr>
+        <p:txBody>
+          <a:bodyPr wrap="square" anchor="t" lIns="36000" rIns="36000" tIns="18000" bIns="18000">
+            <a:spAutoFit/>
+          </a:bodyPr>
+          <a:lstStyle/>
+          <a:p>
+            <a:pPr algn="l"/>
+            <a:r>
+              <a:rPr sz="900" b="1" i="0">
+                <a:solidFill>
+                  <a:srgbClr val="88A0B8"/>
+                </a:solidFill>
+                <a:latin typeface="Noto Sans JP"/>
+              </a:rPr>
+              <a:t>主成分</a:t>
+            </a:r>
+          </a:p>
+        </p:txBody>
+      </p:sp>
+      <p:sp>
+        <p:nvSpPr>
+          <p:cNvPr id="89" name="TextBox 88"/>
+          <p:cNvSpPr txBox="1"/>
+          <p:nvPr/>
+        </p:nvSpPr>
+        <p:spPr>
+          <a:xfrm>
+            <a:off x="8322868" y="3675888"/>
+            <a:ext cx="3320186" cy="365760"/>
+          </a:xfrm>
+          <a:prstGeom prst="rect">
+            <a:avLst/>
+          </a:prstGeom>
+          <a:noFill/>
+        </p:spPr>
+        <p:txBody>
+          <a:bodyPr wrap="square" anchor="t" lIns="36000" rIns="36000" tIns="18000" bIns="18000">
+            <a:spAutoFit/>
+          </a:bodyPr>
+          <a:lstStyle/>
+          <a:p>
+            <a:pPr algn="l"/>
+            <a:r>
+              <a:rPr sz="1100" b="0" i="0">
+                <a:solidFill>
+                  <a:srgbClr val="D8E2EE"/>
+                </a:solidFill>
+                <a:latin typeface="Noto Sans JP"/>
+              </a:rPr>
+              <a:t>高吸水性ポリマー（環境配慮型）</a:t>
+            </a:r>
+          </a:p>
+        </p:txBody>
+      </p:sp>
+      <p:sp>
+        <p:nvSpPr>
+          <p:cNvPr id="90" name="TextBox 89"/>
+          <p:cNvSpPr txBox="1"/>
+          <p:nvPr/>
+        </p:nvSpPr>
+        <p:spPr>
+          <a:xfrm>
+            <a:off x="8322868" y="4096512"/>
+            <a:ext cx="3320186" cy="201168"/>
+          </a:xfrm>
+          <a:prstGeom prst="rect">
+            <a:avLst/>
+          </a:prstGeom>
+          <a:noFill/>
+        </p:spPr>
+        <p:txBody>
+          <a:bodyPr wrap="square" anchor="t" lIns="36000" rIns="36000" tIns="18000" bIns="18000">
+            <a:spAutoFit/>
+          </a:bodyPr>
+          <a:lstStyle/>
+          <a:p>
+            <a:pPr algn="l"/>
+            <a:r>
+              <a:rPr sz="900" b="1" i="0">
+                <a:solidFill>
+                  <a:srgbClr val="88A0B8"/>
+                </a:solidFill>
+                <a:latin typeface="Noto Sans JP"/>
+              </a:rPr>
+              <a:t>効果・保持</a:t>
+            </a:r>
+          </a:p>
+        </p:txBody>
+      </p:sp>
+      <p:sp>
+        <p:nvSpPr>
+          <p:cNvPr id="91" name="TextBox 90"/>
+          <p:cNvSpPr txBox="1"/>
+          <p:nvPr/>
+        </p:nvSpPr>
+        <p:spPr>
+          <a:xfrm>
+            <a:off x="8322868" y="4279391"/>
+            <a:ext cx="3320186" cy="365760"/>
+          </a:xfrm>
+          <a:prstGeom prst="rect">
+            <a:avLst/>
+          </a:prstGeom>
+          <a:noFill/>
+        </p:spPr>
+        <p:txBody>
+          <a:bodyPr wrap="square" anchor="t" lIns="36000" rIns="36000" tIns="18000" bIns="18000">
+            <a:spAutoFit/>
+          </a:bodyPr>
+          <a:lstStyle/>
+          <a:p>
+            <a:pPr algn="l"/>
+            <a:r>
+              <a:rPr sz="1100" b="0" i="0">
+                <a:solidFill>
+                  <a:srgbClr val="D8E2EE"/>
+                </a:solidFill>
+                <a:latin typeface="Noto Sans JP"/>
+              </a:rPr>
+              <a:t>水分保持 30〜60分・建物保護に有効</a:t>
+            </a:r>
+          </a:p>
+        </p:txBody>
+      </p:sp>
+      <p:sp>
+        <p:nvSpPr>
+          <p:cNvPr id="92" name="TextBox 91"/>
+          <p:cNvSpPr txBox="1"/>
+          <p:nvPr/>
+        </p:nvSpPr>
+        <p:spPr>
+          <a:xfrm>
+            <a:off x="8322868" y="4700016"/>
+            <a:ext cx="3320186" cy="201168"/>
+          </a:xfrm>
+          <a:prstGeom prst="rect">
+            <a:avLst/>
+          </a:prstGeom>
+          <a:noFill/>
+        </p:spPr>
+        <p:txBody>
+          <a:bodyPr wrap="square" anchor="t" lIns="36000" rIns="36000" tIns="18000" bIns="18000">
+            <a:spAutoFit/>
+          </a:bodyPr>
+          <a:lstStyle/>
+          <a:p>
+            <a:pPr algn="l"/>
+            <a:r>
+              <a:rPr sz="900" b="1" i="0">
+                <a:solidFill>
+                  <a:srgbClr val="D4A574"/>
+                </a:solidFill>
+                <a:latin typeface="Noto Sans JP"/>
+              </a:rPr>
+              <a:t>課題</a:t>
+            </a:r>
+          </a:p>
+        </p:txBody>
+      </p:sp>
+      <p:sp>
+        <p:nvSpPr>
+          <p:cNvPr id="93" name="TextBox 92"/>
+          <p:cNvSpPr txBox="1"/>
+          <p:nvPr/>
+        </p:nvSpPr>
+        <p:spPr>
+          <a:xfrm>
+            <a:off x="8322868" y="4882896"/>
+            <a:ext cx="3320186" cy="859536"/>
+          </a:xfrm>
+          <a:prstGeom prst="rect">
+            <a:avLst/>
+          </a:prstGeom>
+          <a:noFill/>
+        </p:spPr>
+        <p:txBody>
+          <a:bodyPr wrap="square" anchor="t" lIns="36000" rIns="36000" tIns="18000" bIns="18000">
+            <a:spAutoFit/>
+          </a:bodyPr>
+          <a:lstStyle/>
+          <a:p>
+            <a:pPr algn="l"/>
+            <a:r>
+              <a:rPr sz="1100" b="1" i="0">
+                <a:solidFill>
+                  <a:srgbClr val="FFFFFF"/>
+                </a:solidFill>
+                <a:latin typeface="Noto Sans JP"/>
+              </a:rPr>
+              <a:t>高温・強風で乾燥すると効果を完全に喪失</a:t>
+            </a:r>
+          </a:p>
+        </p:txBody>
+      </p:sp>
+      <p:sp>
+        <p:nvSpPr>
+          <p:cNvPr id="94" name="Rounded Rectangle 93"/>
+          <p:cNvSpPr/>
+          <p:nvPr/>
+        </p:nvSpPr>
+        <p:spPr>
+          <a:xfrm>
+            <a:off x="365760" y="6053328"/>
+            <a:ext cx="11460175" cy="457200"/>
+          </a:xfrm>
+          <a:prstGeom prst="roundRect">
+            <a:avLst>
+              <a:gd name="adj" fmla="val 4000"/>
+            </a:avLst>
+          </a:prstGeom>
+          <a:solidFill>
+            <a:srgbClr val="F8FAFC"/>
+          </a:solidFill>
+          <a:ln>
+            <a:noFill/>
+          </a:ln>
+          <a:effectLst/>
+        </p:spPr>
+        <p:style>
+          <a:lnRef idx="1">
+            <a:schemeClr val="accent1"/>
+          </a:lnRef>
+          <a:fillRef idx="3">
+            <a:schemeClr val="accent1"/>
+          </a:fillRef>
+          <a:effectRef idx="2">
+            <a:schemeClr val="accent1"/>
+          </a:effectRef>
+          <a:fontRef idx="minor">
+            <a:schemeClr val="lt1"/>
+          </a:fontRef>
+        </p:style>
+        <p:txBody>
+          <a:bodyPr rtlCol="0" anchor="ctr"/>
+          <a:lstStyle/>
+          <a:p>
+            <a:pPr algn="ctr"/>
+          </a:p>
+        </p:txBody>
+      </p:sp>
+      <p:sp>
+        <p:nvSpPr>
+          <p:cNvPr id="95" name="Rectangle 94"/>
+          <p:cNvSpPr/>
+          <p:nvPr/>
+        </p:nvSpPr>
+        <p:spPr>
+          <a:xfrm>
+            <a:off x="365760" y="6053328"/>
+            <a:ext cx="54864" cy="457200"/>
           </a:xfrm>
           <a:prstGeom prst="rect">
             <a:avLst/>
@@ -55595,1207 +58295,7 @@
       </p:sp>
       <p:sp>
         <p:nvSpPr>
-          <p:cNvPr id="31" name="TextBox 30"/>
-          <p:cNvSpPr txBox="1"/>
-          <p:nvPr/>
-        </p:nvSpPr>
-        <p:spPr>
-          <a:xfrm>
-            <a:off x="4508906" y="1097280"/>
-            <a:ext cx="640080" cy="237744"/>
-          </a:xfrm>
-          <a:prstGeom prst="rect">
-            <a:avLst/>
-          </a:prstGeom>
-          <a:noFill/>
-        </p:spPr>
-        <p:txBody>
-          <a:bodyPr wrap="square" anchor="ctr" lIns="36000" rIns="36000" tIns="18000" bIns="18000">
-            <a:spAutoFit/>
-          </a:bodyPr>
-          <a:lstStyle/>
-          <a:p>
-            <a:pPr algn="ctr"/>
-            <a:r>
-              <a:rPr sz="900" b="1" i="0">
-                <a:solidFill>
-                  <a:srgbClr val="FFFFFF"/>
-                </a:solidFill>
-                <a:latin typeface="Noto Sans JP"/>
-              </a:rPr>
-              <a:t>写真</a:t>
-            </a:r>
-          </a:p>
-        </p:txBody>
-      </p:sp>
-      <p:sp>
-        <p:nvSpPr>
-          <p:cNvPr id="32" name="TextBox 31"/>
-          <p:cNvSpPr txBox="1"/>
-          <p:nvPr/>
-        </p:nvSpPr>
-        <p:spPr>
-          <a:xfrm>
-            <a:off x="4435754" y="1298448"/>
-            <a:ext cx="3320186" cy="512064"/>
-          </a:xfrm>
-          <a:prstGeom prst="rect">
-            <a:avLst/>
-          </a:prstGeom>
-          <a:noFill/>
-        </p:spPr>
-        <p:txBody>
-          <a:bodyPr wrap="square" anchor="ctr" lIns="36000" rIns="36000" tIns="18000" bIns="18000">
-            <a:spAutoFit/>
-          </a:bodyPr>
-          <a:lstStyle/>
-          <a:p>
-            <a:pPr algn="ctr"/>
-            <a:r>
-              <a:rPr sz="1000" b="0" i="0">
-                <a:solidFill>
-                  <a:srgbClr val="AAB4C0"/>
-                </a:solidFill>
-                <a:latin typeface="Noto Sans JP"/>
-              </a:rPr>
-              <a:t>消防ホースからの泡放水</a:t>
-            </a:r>
-          </a:p>
-        </p:txBody>
-      </p:sp>
-      <p:sp>
-        <p:nvSpPr>
-          <p:cNvPr id="33" name="TextBox 32"/>
-          <p:cNvSpPr txBox="1"/>
-          <p:nvPr/>
-        </p:nvSpPr>
-        <p:spPr>
-          <a:xfrm>
-            <a:off x="4435754" y="2212848"/>
-            <a:ext cx="3320186" cy="329184"/>
-          </a:xfrm>
-          <a:prstGeom prst="rect">
-            <a:avLst/>
-          </a:prstGeom>
-          <a:noFill/>
-        </p:spPr>
-        <p:txBody>
-          <a:bodyPr wrap="square" anchor="t" lIns="36000" rIns="36000" tIns="18000" bIns="18000">
-            <a:spAutoFit/>
-          </a:bodyPr>
-          <a:lstStyle/>
-          <a:p>
-            <a:pPr algn="l"/>
-            <a:r>
-              <a:rPr sz="1600" b="1" i="0">
-                <a:solidFill>
-                  <a:srgbClr val="1E293B"/>
-                </a:solidFill>
-                <a:latin typeface="Noto Sans JP"/>
-              </a:rPr>
-              <a:t>泡消火剤</a:t>
-            </a:r>
-          </a:p>
-        </p:txBody>
-      </p:sp>
-      <p:sp>
-        <p:nvSpPr>
-          <p:cNvPr id="34" name="TextBox 33"/>
-          <p:cNvSpPr txBox="1"/>
-          <p:nvPr/>
-        </p:nvSpPr>
-        <p:spPr>
-          <a:xfrm>
-            <a:off x="4435754" y="2542032"/>
-            <a:ext cx="3320186" cy="201168"/>
-          </a:xfrm>
-          <a:prstGeom prst="rect">
-            <a:avLst/>
-          </a:prstGeom>
-          <a:noFill/>
-        </p:spPr>
-        <p:txBody>
-          <a:bodyPr wrap="square" anchor="t" lIns="36000" rIns="36000" tIns="18000" bIns="18000">
-            <a:spAutoFit/>
-          </a:bodyPr>
-          <a:lstStyle/>
-          <a:p>
-            <a:pPr algn="l"/>
-            <a:r>
-              <a:rPr sz="900" b="0" i="1">
-                <a:solidFill>
-                  <a:srgbClr val="64748B"/>
-                </a:solidFill>
-                <a:latin typeface="Noto Sans JP"/>
-              </a:rPr>
-              <a:t>Foam suppressant</a:t>
-            </a:r>
-          </a:p>
-        </p:txBody>
-      </p:sp>
-      <p:sp>
-        <p:nvSpPr>
-          <p:cNvPr id="35" name="Rectangle 34"/>
-          <p:cNvSpPr/>
-          <p:nvPr/>
-        </p:nvSpPr>
-        <p:spPr>
-          <a:xfrm>
-            <a:off x="4435754" y="2798064"/>
-            <a:ext cx="3320186" cy="10972"/>
-          </a:xfrm>
-          <a:prstGeom prst="rect">
-            <a:avLst/>
-          </a:prstGeom>
-          <a:solidFill>
-            <a:srgbClr val="E2E8F0"/>
-          </a:solidFill>
-          <a:ln>
-            <a:noFill/>
-          </a:ln>
-          <a:effectLst/>
-        </p:spPr>
-        <p:style>
-          <a:lnRef idx="1">
-            <a:schemeClr val="accent1"/>
-          </a:lnRef>
-          <a:fillRef idx="3">
-            <a:schemeClr val="accent1"/>
-          </a:fillRef>
-          <a:effectRef idx="2">
-            <a:schemeClr val="accent1"/>
-          </a:effectRef>
-          <a:fontRef idx="minor">
-            <a:schemeClr val="lt1"/>
-          </a:fontRef>
-        </p:style>
-        <p:txBody>
-          <a:bodyPr rtlCol="0" anchor="ctr"/>
-          <a:lstStyle/>
-          <a:p>
-            <a:pPr algn="ctr"/>
-          </a:p>
-        </p:txBody>
-      </p:sp>
-      <p:sp>
-        <p:nvSpPr>
-          <p:cNvPr id="36" name="TextBox 35"/>
-          <p:cNvSpPr txBox="1"/>
-          <p:nvPr/>
-        </p:nvSpPr>
-        <p:spPr>
-          <a:xfrm>
-            <a:off x="4435754" y="2889504"/>
-            <a:ext cx="3320186" cy="201168"/>
-          </a:xfrm>
-          <a:prstGeom prst="rect">
-            <a:avLst/>
-          </a:prstGeom>
-          <a:noFill/>
-        </p:spPr>
-        <p:txBody>
-          <a:bodyPr wrap="square" anchor="t" lIns="36000" rIns="36000" tIns="18000" bIns="18000">
-            <a:spAutoFit/>
-          </a:bodyPr>
-          <a:lstStyle/>
-          <a:p>
-            <a:pPr algn="l"/>
-            <a:r>
-              <a:rPr sz="900" b="1" i="0">
-                <a:solidFill>
-                  <a:srgbClr val="3B5174"/>
-                </a:solidFill>
-                <a:latin typeface="Noto Sans JP"/>
-              </a:rPr>
-              <a:t>例</a:t>
-            </a:r>
-          </a:p>
-        </p:txBody>
-      </p:sp>
-      <p:sp>
-        <p:nvSpPr>
-          <p:cNvPr id="37" name="TextBox 36"/>
-          <p:cNvSpPr txBox="1"/>
-          <p:nvPr/>
-        </p:nvSpPr>
-        <p:spPr>
-          <a:xfrm>
-            <a:off x="4435754" y="3072384"/>
-            <a:ext cx="3320186" cy="365760"/>
-          </a:xfrm>
-          <a:prstGeom prst="rect">
-            <a:avLst/>
-          </a:prstGeom>
-          <a:noFill/>
-        </p:spPr>
-        <p:txBody>
-          <a:bodyPr wrap="square" anchor="t" lIns="36000" rIns="36000" tIns="18000" bIns="18000">
-            <a:spAutoFit/>
-          </a:bodyPr>
-          <a:lstStyle/>
-          <a:p>
-            <a:pPr algn="l"/>
-            <a:r>
-              <a:rPr sz="1100" b="1" i="0">
-                <a:solidFill>
-                  <a:srgbClr val="475569"/>
-                </a:solidFill>
-                <a:latin typeface="Noto Sans JP"/>
-              </a:rPr>
-              <a:t>Class A フォーム／旧 AFFF</a:t>
-            </a:r>
-          </a:p>
-        </p:txBody>
-      </p:sp>
-      <p:sp>
-        <p:nvSpPr>
-          <p:cNvPr id="38" name="TextBox 37"/>
-          <p:cNvSpPr txBox="1"/>
-          <p:nvPr/>
-        </p:nvSpPr>
-        <p:spPr>
-          <a:xfrm>
-            <a:off x="4435754" y="3493008"/>
-            <a:ext cx="3320186" cy="201168"/>
-          </a:xfrm>
-          <a:prstGeom prst="rect">
-            <a:avLst/>
-          </a:prstGeom>
-          <a:noFill/>
-        </p:spPr>
-        <p:txBody>
-          <a:bodyPr wrap="square" anchor="t" lIns="36000" rIns="36000" tIns="18000" bIns="18000">
-            <a:spAutoFit/>
-          </a:bodyPr>
-          <a:lstStyle/>
-          <a:p>
-            <a:pPr algn="l"/>
-            <a:r>
-              <a:rPr sz="900" b="1" i="0">
-                <a:solidFill>
-                  <a:srgbClr val="64748B"/>
-                </a:solidFill>
-                <a:latin typeface="Noto Sans JP"/>
-              </a:rPr>
-              <a:t>主成分</a:t>
-            </a:r>
-          </a:p>
-        </p:txBody>
-      </p:sp>
-      <p:sp>
-        <p:nvSpPr>
-          <p:cNvPr id="39" name="TextBox 38"/>
-          <p:cNvSpPr txBox="1"/>
-          <p:nvPr/>
-        </p:nvSpPr>
-        <p:spPr>
-          <a:xfrm>
-            <a:off x="4435754" y="3675888"/>
-            <a:ext cx="3320186" cy="365760"/>
-          </a:xfrm>
-          <a:prstGeom prst="rect">
-            <a:avLst/>
-          </a:prstGeom>
-          <a:noFill/>
-        </p:spPr>
-        <p:txBody>
-          <a:bodyPr wrap="square" anchor="t" lIns="36000" rIns="36000" tIns="18000" bIns="18000">
-            <a:spAutoFit/>
-          </a:bodyPr>
-          <a:lstStyle/>
-          <a:p>
-            <a:pPr algn="l"/>
-            <a:r>
-              <a:rPr sz="1100" b="0" i="0">
-                <a:solidFill>
-                  <a:srgbClr val="475569"/>
-                </a:solidFill>
-                <a:latin typeface="Noto Sans JP"/>
-              </a:rPr>
-              <a:t>界面活性剤（旧来はフッ素系）</a:t>
-            </a:r>
-          </a:p>
-        </p:txBody>
-      </p:sp>
-      <p:sp>
-        <p:nvSpPr>
-          <p:cNvPr id="40" name="TextBox 39"/>
-          <p:cNvSpPr txBox="1"/>
-          <p:nvPr/>
-        </p:nvSpPr>
-        <p:spPr>
-          <a:xfrm>
-            <a:off x="4435754" y="4096512"/>
-            <a:ext cx="3320186" cy="201168"/>
-          </a:xfrm>
-          <a:prstGeom prst="rect">
-            <a:avLst/>
-          </a:prstGeom>
-          <a:noFill/>
-        </p:spPr>
-        <p:txBody>
-          <a:bodyPr wrap="square" anchor="t" lIns="36000" rIns="36000" tIns="18000" bIns="18000">
-            <a:spAutoFit/>
-          </a:bodyPr>
-          <a:lstStyle/>
-          <a:p>
-            <a:pPr algn="l"/>
-            <a:r>
-              <a:rPr sz="900" b="1" i="0">
-                <a:solidFill>
-                  <a:srgbClr val="64748B"/>
-                </a:solidFill>
-                <a:latin typeface="Noto Sans JP"/>
-              </a:rPr>
-              <a:t>効果・保持</a:t>
-            </a:r>
-          </a:p>
-        </p:txBody>
-      </p:sp>
-      <p:sp>
-        <p:nvSpPr>
-          <p:cNvPr id="41" name="TextBox 40"/>
-          <p:cNvSpPr txBox="1"/>
-          <p:nvPr/>
-        </p:nvSpPr>
-        <p:spPr>
-          <a:xfrm>
-            <a:off x="4435754" y="4279391"/>
-            <a:ext cx="3320186" cy="365760"/>
-          </a:xfrm>
-          <a:prstGeom prst="rect">
-            <a:avLst/>
-          </a:prstGeom>
-          <a:noFill/>
-        </p:spPr>
-        <p:txBody>
-          <a:bodyPr wrap="square" anchor="t" lIns="36000" rIns="36000" tIns="18000" bIns="18000">
-            <a:spAutoFit/>
-          </a:bodyPr>
-          <a:lstStyle/>
-          <a:p>
-            <a:pPr algn="l"/>
-            <a:r>
-              <a:rPr sz="1100" b="0" i="0">
-                <a:solidFill>
-                  <a:srgbClr val="475569"/>
-                </a:solidFill>
-                <a:latin typeface="Noto Sans JP"/>
-              </a:rPr>
-              <a:t>水分保持 15〜30分（短期的）</a:t>
-            </a:r>
-          </a:p>
-        </p:txBody>
-      </p:sp>
-      <p:sp>
-        <p:nvSpPr>
-          <p:cNvPr id="42" name="TextBox 41"/>
-          <p:cNvSpPr txBox="1"/>
-          <p:nvPr/>
-        </p:nvSpPr>
-        <p:spPr>
-          <a:xfrm>
-            <a:off x="4435754" y="4700016"/>
-            <a:ext cx="3320186" cy="201168"/>
-          </a:xfrm>
-          <a:prstGeom prst="rect">
-            <a:avLst/>
-          </a:prstGeom>
-          <a:noFill/>
-        </p:spPr>
-        <p:txBody>
-          <a:bodyPr wrap="square" anchor="t" lIns="36000" rIns="36000" tIns="18000" bIns="18000">
-            <a:spAutoFit/>
-          </a:bodyPr>
-          <a:lstStyle/>
-          <a:p>
-            <a:pPr algn="l"/>
-            <a:r>
-              <a:rPr sz="900" b="1" i="0">
-                <a:solidFill>
-                  <a:srgbClr val="A05656"/>
-                </a:solidFill>
-                <a:latin typeface="Noto Sans JP"/>
-              </a:rPr>
-              <a:t>課題</a:t>
-            </a:r>
-          </a:p>
-        </p:txBody>
-      </p:sp>
-      <p:sp>
-        <p:nvSpPr>
-          <p:cNvPr id="43" name="TextBox 42"/>
-          <p:cNvSpPr txBox="1"/>
-          <p:nvPr/>
-        </p:nvSpPr>
-        <p:spPr>
-          <a:xfrm>
-            <a:off x="4435754" y="4882896"/>
-            <a:ext cx="3320186" cy="859536"/>
-          </a:xfrm>
-          <a:prstGeom prst="rect">
-            <a:avLst/>
-          </a:prstGeom>
-          <a:noFill/>
-        </p:spPr>
-        <p:txBody>
-          <a:bodyPr wrap="square" anchor="t" lIns="36000" rIns="36000" tIns="18000" bIns="18000">
-            <a:spAutoFit/>
-          </a:bodyPr>
-          <a:lstStyle/>
-          <a:p>
-            <a:pPr algn="l"/>
-            <a:r>
-              <a:rPr sz="1100" b="1" i="0">
-                <a:solidFill>
-                  <a:srgbClr val="A05656"/>
-                </a:solidFill>
-                <a:latin typeface="Noto Sans JP"/>
-              </a:rPr>
-              <a:t>乾燥で効果消失／フッ素系は生体蓄積・環境毒性</a:t>
-            </a:r>
-          </a:p>
-        </p:txBody>
-      </p:sp>
-      <p:sp>
-        <p:nvSpPr>
-          <p:cNvPr id="44" name="Rounded Rectangle 43"/>
-          <p:cNvSpPr/>
-          <p:nvPr/>
-        </p:nvSpPr>
-        <p:spPr>
-          <a:xfrm>
-            <a:off x="8139988" y="859536"/>
-            <a:ext cx="3685946" cy="5047488"/>
-          </a:xfrm>
-          <a:prstGeom prst="roundRect">
-            <a:avLst>
-              <a:gd name="adj" fmla="val 4000"/>
-            </a:avLst>
-          </a:prstGeom>
-          <a:solidFill>
-            <a:srgbClr val="1E293B"/>
-          </a:solidFill>
-          <a:ln>
-            <a:noFill/>
-          </a:ln>
-          <a:effectLst/>
-        </p:spPr>
-        <p:style>
-          <a:lnRef idx="1">
-            <a:schemeClr val="accent1"/>
-          </a:lnRef>
-          <a:fillRef idx="3">
-            <a:schemeClr val="accent1"/>
-          </a:fillRef>
-          <a:effectRef idx="2">
-            <a:schemeClr val="accent1"/>
-          </a:effectRef>
-          <a:fontRef idx="minor">
-            <a:schemeClr val="lt1"/>
-          </a:fontRef>
-        </p:style>
-        <p:txBody>
-          <a:bodyPr rtlCol="0" anchor="ctr"/>
-          <a:lstStyle/>
-          <a:p>
-            <a:pPr algn="ctr"/>
-          </a:p>
-        </p:txBody>
-      </p:sp>
-      <p:sp>
-        <p:nvSpPr>
-          <p:cNvPr id="45" name="Rectangle 44"/>
-          <p:cNvSpPr/>
-          <p:nvPr/>
-        </p:nvSpPr>
-        <p:spPr>
-          <a:xfrm>
-            <a:off x="8139988" y="859536"/>
-            <a:ext cx="3685946" cy="45720"/>
-          </a:xfrm>
-          <a:prstGeom prst="rect">
-            <a:avLst/>
-          </a:prstGeom>
-          <a:solidFill>
-            <a:srgbClr val="D4A574"/>
-          </a:solidFill>
-          <a:ln>
-            <a:noFill/>
-          </a:ln>
-          <a:effectLst/>
-        </p:spPr>
-        <p:style>
-          <a:lnRef idx="1">
-            <a:schemeClr val="accent1"/>
-          </a:lnRef>
-          <a:fillRef idx="3">
-            <a:schemeClr val="accent1"/>
-          </a:fillRef>
-          <a:effectRef idx="2">
-            <a:schemeClr val="accent1"/>
-          </a:effectRef>
-          <a:fontRef idx="minor">
-            <a:schemeClr val="lt1"/>
-          </a:fontRef>
-        </p:style>
-        <p:txBody>
-          <a:bodyPr rtlCol="0" anchor="ctr"/>
-          <a:lstStyle/>
-          <a:p>
-            <a:pPr algn="ctr"/>
-          </a:p>
-        </p:txBody>
-      </p:sp>
-      <p:sp>
-        <p:nvSpPr>
-          <p:cNvPr id="46" name="Rounded Rectangle 45"/>
-          <p:cNvSpPr/>
-          <p:nvPr/>
-        </p:nvSpPr>
-        <p:spPr>
-          <a:xfrm>
-            <a:off x="8322868" y="1024128"/>
-            <a:ext cx="3320186" cy="1078992"/>
-          </a:xfrm>
-          <a:prstGeom prst="roundRect">
-            <a:avLst>
-              <a:gd name="adj" fmla="val 3000"/>
-            </a:avLst>
-          </a:prstGeom>
-          <a:solidFill>
-            <a:srgbClr val="F5F8FC"/>
-          </a:solidFill>
-          <a:ln w="12700">
-            <a:solidFill>
-              <a:srgbClr val="C0D0E0"/>
-            </a:solidFill>
-          </a:ln>
-          <a:effectLst/>
-        </p:spPr>
-        <p:style>
-          <a:lnRef idx="1">
-            <a:schemeClr val="accent1"/>
-          </a:lnRef>
-          <a:fillRef idx="3">
-            <a:schemeClr val="accent1"/>
-          </a:fillRef>
-          <a:effectRef idx="2">
-            <a:schemeClr val="accent1"/>
-          </a:effectRef>
-          <a:fontRef idx="minor">
-            <a:schemeClr val="lt1"/>
-          </a:fontRef>
-        </p:style>
-        <p:txBody>
-          <a:bodyPr rtlCol="0" anchor="ctr"/>
-          <a:lstStyle/>
-          <a:p>
-            <a:pPr algn="ctr"/>
-          </a:p>
-        </p:txBody>
-      </p:sp>
-      <p:sp>
-        <p:nvSpPr>
-          <p:cNvPr id="47" name="Rectangle 46"/>
-          <p:cNvSpPr/>
-          <p:nvPr/>
-        </p:nvSpPr>
-        <p:spPr>
-          <a:xfrm>
-            <a:off x="8396020" y="1097280"/>
-            <a:ext cx="640080" cy="237744"/>
-          </a:xfrm>
-          <a:prstGeom prst="rect">
-            <a:avLst/>
-          </a:prstGeom>
-          <a:solidFill>
-            <a:srgbClr val="D4A574"/>
-          </a:solidFill>
-          <a:ln>
-            <a:noFill/>
-          </a:ln>
-          <a:effectLst/>
-        </p:spPr>
-        <p:style>
-          <a:lnRef idx="1">
-            <a:schemeClr val="accent1"/>
-          </a:lnRef>
-          <a:fillRef idx="3">
-            <a:schemeClr val="accent1"/>
-          </a:fillRef>
-          <a:effectRef idx="2">
-            <a:schemeClr val="accent1"/>
-          </a:effectRef>
-          <a:fontRef idx="minor">
-            <a:schemeClr val="lt1"/>
-          </a:fontRef>
-        </p:style>
-        <p:txBody>
-          <a:bodyPr rtlCol="0" anchor="ctr"/>
-          <a:lstStyle/>
-          <a:p>
-            <a:pPr algn="ctr"/>
-          </a:p>
-        </p:txBody>
-      </p:sp>
-      <p:sp>
-        <p:nvSpPr>
-          <p:cNvPr id="48" name="TextBox 47"/>
-          <p:cNvSpPr txBox="1"/>
-          <p:nvPr/>
-        </p:nvSpPr>
-        <p:spPr>
-          <a:xfrm>
-            <a:off x="8396020" y="1097280"/>
-            <a:ext cx="640080" cy="237744"/>
-          </a:xfrm>
-          <a:prstGeom prst="rect">
-            <a:avLst/>
-          </a:prstGeom>
-          <a:noFill/>
-        </p:spPr>
-        <p:txBody>
-          <a:bodyPr wrap="square" anchor="ctr" lIns="36000" rIns="36000" tIns="18000" bIns="18000">
-            <a:spAutoFit/>
-          </a:bodyPr>
-          <a:lstStyle/>
-          <a:p>
-            <a:pPr algn="ctr"/>
-            <a:r>
-              <a:rPr sz="900" b="1" i="0">
-                <a:solidFill>
-                  <a:srgbClr val="FFFFFF"/>
-                </a:solidFill>
-                <a:latin typeface="Noto Sans JP"/>
-              </a:rPr>
-              <a:t>写真</a:t>
-            </a:r>
-          </a:p>
-        </p:txBody>
-      </p:sp>
-      <p:sp>
-        <p:nvSpPr>
-          <p:cNvPr id="49" name="TextBox 48"/>
-          <p:cNvSpPr txBox="1"/>
-          <p:nvPr/>
-        </p:nvSpPr>
-        <p:spPr>
-          <a:xfrm>
-            <a:off x="8322868" y="1298448"/>
-            <a:ext cx="3320186" cy="512064"/>
-          </a:xfrm>
-          <a:prstGeom prst="rect">
-            <a:avLst/>
-          </a:prstGeom>
-          <a:noFill/>
-        </p:spPr>
-        <p:txBody>
-          <a:bodyPr wrap="square" anchor="ctr" lIns="36000" rIns="36000" tIns="18000" bIns="18000">
-            <a:spAutoFit/>
-          </a:bodyPr>
-          <a:lstStyle/>
-          <a:p>
-            <a:pPr algn="ctr"/>
-            <a:r>
-              <a:rPr sz="1000" b="0" i="0">
-                <a:solidFill>
-                  <a:srgbClr val="AAB4C0"/>
-                </a:solidFill>
-                <a:latin typeface="Noto Sans JP"/>
-              </a:rPr>
-              <a:t>住宅・植生へのゲル事前塗布</a:t>
-            </a:r>
-          </a:p>
-        </p:txBody>
-      </p:sp>
-      <p:sp>
-        <p:nvSpPr>
-          <p:cNvPr id="50" name="TextBox 49"/>
-          <p:cNvSpPr txBox="1"/>
-          <p:nvPr/>
-        </p:nvSpPr>
-        <p:spPr>
-          <a:xfrm>
-            <a:off x="8322868" y="2212848"/>
-            <a:ext cx="3320186" cy="329184"/>
-          </a:xfrm>
-          <a:prstGeom prst="rect">
-            <a:avLst/>
-          </a:prstGeom>
-          <a:noFill/>
-        </p:spPr>
-        <p:txBody>
-          <a:bodyPr wrap="square" anchor="t" lIns="36000" rIns="36000" tIns="18000" bIns="18000">
-            <a:spAutoFit/>
-          </a:bodyPr>
-          <a:lstStyle/>
-          <a:p>
-            <a:pPr algn="l"/>
-            <a:r>
-              <a:rPr sz="1600" b="1" i="0">
-                <a:solidFill>
-                  <a:srgbClr val="FFFFFF"/>
-                </a:solidFill>
-                <a:latin typeface="Noto Sans JP"/>
-              </a:rPr>
-              <a:t>水強化ゲル（WEG）</a:t>
-            </a:r>
-          </a:p>
-        </p:txBody>
-      </p:sp>
-      <p:sp>
-        <p:nvSpPr>
-          <p:cNvPr id="51" name="TextBox 50"/>
-          <p:cNvSpPr txBox="1"/>
-          <p:nvPr/>
-        </p:nvSpPr>
-        <p:spPr>
-          <a:xfrm>
-            <a:off x="8322868" y="2542032"/>
-            <a:ext cx="3320186" cy="201168"/>
-          </a:xfrm>
-          <a:prstGeom prst="rect">
-            <a:avLst/>
-          </a:prstGeom>
-          <a:noFill/>
-        </p:spPr>
-        <p:txBody>
-          <a:bodyPr wrap="square" anchor="t" lIns="36000" rIns="36000" tIns="18000" bIns="18000">
-            <a:spAutoFit/>
-          </a:bodyPr>
-          <a:lstStyle/>
-          <a:p>
-            <a:pPr algn="l"/>
-            <a:r>
-              <a:rPr sz="900" b="0" i="1">
-                <a:solidFill>
-                  <a:srgbClr val="A0B8D0"/>
-                </a:solidFill>
-                <a:latin typeface="Noto Sans JP"/>
-              </a:rPr>
-              <a:t>Water-enhancing gel</a:t>
-            </a:r>
-          </a:p>
-        </p:txBody>
-      </p:sp>
-      <p:sp>
-        <p:nvSpPr>
-          <p:cNvPr id="52" name="Rectangle 51"/>
-          <p:cNvSpPr/>
-          <p:nvPr/>
-        </p:nvSpPr>
-        <p:spPr>
-          <a:xfrm>
-            <a:off x="8322868" y="2798064"/>
-            <a:ext cx="3320186" cy="10972"/>
-          </a:xfrm>
-          <a:prstGeom prst="rect">
-            <a:avLst/>
-          </a:prstGeom>
-          <a:solidFill>
-            <a:srgbClr val="445870"/>
-          </a:solidFill>
-          <a:ln>
-            <a:noFill/>
-          </a:ln>
-          <a:effectLst/>
-        </p:spPr>
-        <p:style>
-          <a:lnRef idx="1">
-            <a:schemeClr val="accent1"/>
-          </a:lnRef>
-          <a:fillRef idx="3">
-            <a:schemeClr val="accent1"/>
-          </a:fillRef>
-          <a:effectRef idx="2">
-            <a:schemeClr val="accent1"/>
-          </a:effectRef>
-          <a:fontRef idx="minor">
-            <a:schemeClr val="lt1"/>
-          </a:fontRef>
-        </p:style>
-        <p:txBody>
-          <a:bodyPr rtlCol="0" anchor="ctr"/>
-          <a:lstStyle/>
-          <a:p>
-            <a:pPr algn="ctr"/>
-          </a:p>
-        </p:txBody>
-      </p:sp>
-      <p:sp>
-        <p:nvSpPr>
-          <p:cNvPr id="53" name="TextBox 52"/>
-          <p:cNvSpPr txBox="1"/>
-          <p:nvPr/>
-        </p:nvSpPr>
-        <p:spPr>
-          <a:xfrm>
-            <a:off x="8322868" y="2889504"/>
-            <a:ext cx="3320186" cy="201168"/>
-          </a:xfrm>
-          <a:prstGeom prst="rect">
-            <a:avLst/>
-          </a:prstGeom>
-          <a:noFill/>
-        </p:spPr>
-        <p:txBody>
-          <a:bodyPr wrap="square" anchor="t" lIns="36000" rIns="36000" tIns="18000" bIns="18000">
-            <a:spAutoFit/>
-          </a:bodyPr>
-          <a:lstStyle/>
-          <a:p>
-            <a:pPr algn="l"/>
-            <a:r>
-              <a:rPr sz="900" b="1" i="0">
-                <a:solidFill>
-                  <a:srgbClr val="D4A574"/>
-                </a:solidFill>
-                <a:latin typeface="Noto Sans JP"/>
-              </a:rPr>
-              <a:t>例</a:t>
-            </a:r>
-          </a:p>
-        </p:txBody>
-      </p:sp>
-      <p:sp>
-        <p:nvSpPr>
-          <p:cNvPr id="54" name="TextBox 53"/>
-          <p:cNvSpPr txBox="1"/>
-          <p:nvPr/>
-        </p:nvSpPr>
-        <p:spPr>
-          <a:xfrm>
-            <a:off x="8322868" y="3072384"/>
-            <a:ext cx="3320186" cy="365760"/>
-          </a:xfrm>
-          <a:prstGeom prst="rect">
-            <a:avLst/>
-          </a:prstGeom>
-          <a:noFill/>
-        </p:spPr>
-        <p:txBody>
-          <a:bodyPr wrap="square" anchor="t" lIns="36000" rIns="36000" tIns="18000" bIns="18000">
-            <a:spAutoFit/>
-          </a:bodyPr>
-          <a:lstStyle/>
-          <a:p>
-            <a:pPr algn="l"/>
-            <a:r>
-              <a:rPr sz="1100" b="1" i="0">
-                <a:solidFill>
-                  <a:srgbClr val="D8E2EE"/>
-                </a:solidFill>
-                <a:latin typeface="Noto Sans JP"/>
-              </a:rPr>
-              <a:t>Barricade／Thermo-Gel／AquaGel-K</a:t>
-            </a:r>
-          </a:p>
-        </p:txBody>
-      </p:sp>
-      <p:sp>
-        <p:nvSpPr>
-          <p:cNvPr id="55" name="TextBox 54"/>
-          <p:cNvSpPr txBox="1"/>
-          <p:nvPr/>
-        </p:nvSpPr>
-        <p:spPr>
-          <a:xfrm>
-            <a:off x="8322868" y="3493008"/>
-            <a:ext cx="3320186" cy="201168"/>
-          </a:xfrm>
-          <a:prstGeom prst="rect">
-            <a:avLst/>
-          </a:prstGeom>
-          <a:noFill/>
-        </p:spPr>
-        <p:txBody>
-          <a:bodyPr wrap="square" anchor="t" lIns="36000" rIns="36000" tIns="18000" bIns="18000">
-            <a:spAutoFit/>
-          </a:bodyPr>
-          <a:lstStyle/>
-          <a:p>
-            <a:pPr algn="l"/>
-            <a:r>
-              <a:rPr sz="900" b="1" i="0">
-                <a:solidFill>
-                  <a:srgbClr val="88A0B8"/>
-                </a:solidFill>
-                <a:latin typeface="Noto Sans JP"/>
-              </a:rPr>
-              <a:t>主成分</a:t>
-            </a:r>
-          </a:p>
-        </p:txBody>
-      </p:sp>
-      <p:sp>
-        <p:nvSpPr>
-          <p:cNvPr id="56" name="TextBox 55"/>
-          <p:cNvSpPr txBox="1"/>
-          <p:nvPr/>
-        </p:nvSpPr>
-        <p:spPr>
-          <a:xfrm>
-            <a:off x="8322868" y="3675888"/>
-            <a:ext cx="3320186" cy="365760"/>
-          </a:xfrm>
-          <a:prstGeom prst="rect">
-            <a:avLst/>
-          </a:prstGeom>
-          <a:noFill/>
-        </p:spPr>
-        <p:txBody>
-          <a:bodyPr wrap="square" anchor="t" lIns="36000" rIns="36000" tIns="18000" bIns="18000">
-            <a:spAutoFit/>
-          </a:bodyPr>
-          <a:lstStyle/>
-          <a:p>
-            <a:pPr algn="l"/>
-            <a:r>
-              <a:rPr sz="1100" b="0" i="0">
-                <a:solidFill>
-                  <a:srgbClr val="D8E2EE"/>
-                </a:solidFill>
-                <a:latin typeface="Noto Sans JP"/>
-              </a:rPr>
-              <a:t>高吸水性ポリマー（環境配慮型）</a:t>
-            </a:r>
-          </a:p>
-        </p:txBody>
-      </p:sp>
-      <p:sp>
-        <p:nvSpPr>
-          <p:cNvPr id="57" name="TextBox 56"/>
-          <p:cNvSpPr txBox="1"/>
-          <p:nvPr/>
-        </p:nvSpPr>
-        <p:spPr>
-          <a:xfrm>
-            <a:off x="8322868" y="4096512"/>
-            <a:ext cx="3320186" cy="201168"/>
-          </a:xfrm>
-          <a:prstGeom prst="rect">
-            <a:avLst/>
-          </a:prstGeom>
-          <a:noFill/>
-        </p:spPr>
-        <p:txBody>
-          <a:bodyPr wrap="square" anchor="t" lIns="36000" rIns="36000" tIns="18000" bIns="18000">
-            <a:spAutoFit/>
-          </a:bodyPr>
-          <a:lstStyle/>
-          <a:p>
-            <a:pPr algn="l"/>
-            <a:r>
-              <a:rPr sz="900" b="1" i="0">
-                <a:solidFill>
-                  <a:srgbClr val="88A0B8"/>
-                </a:solidFill>
-                <a:latin typeface="Noto Sans JP"/>
-              </a:rPr>
-              <a:t>効果・保持</a:t>
-            </a:r>
-          </a:p>
-        </p:txBody>
-      </p:sp>
-      <p:sp>
-        <p:nvSpPr>
-          <p:cNvPr id="58" name="TextBox 57"/>
-          <p:cNvSpPr txBox="1"/>
-          <p:nvPr/>
-        </p:nvSpPr>
-        <p:spPr>
-          <a:xfrm>
-            <a:off x="8322868" y="4279391"/>
-            <a:ext cx="3320186" cy="365760"/>
-          </a:xfrm>
-          <a:prstGeom prst="rect">
-            <a:avLst/>
-          </a:prstGeom>
-          <a:noFill/>
-        </p:spPr>
-        <p:txBody>
-          <a:bodyPr wrap="square" anchor="t" lIns="36000" rIns="36000" tIns="18000" bIns="18000">
-            <a:spAutoFit/>
-          </a:bodyPr>
-          <a:lstStyle/>
-          <a:p>
-            <a:pPr algn="l"/>
-            <a:r>
-              <a:rPr sz="1100" b="0" i="0">
-                <a:solidFill>
-                  <a:srgbClr val="D8E2EE"/>
-                </a:solidFill>
-                <a:latin typeface="Noto Sans JP"/>
-              </a:rPr>
-              <a:t>水分保持 30〜60分・建物保護に有効</a:t>
-            </a:r>
-          </a:p>
-        </p:txBody>
-      </p:sp>
-      <p:sp>
-        <p:nvSpPr>
-          <p:cNvPr id="59" name="TextBox 58"/>
-          <p:cNvSpPr txBox="1"/>
-          <p:nvPr/>
-        </p:nvSpPr>
-        <p:spPr>
-          <a:xfrm>
-            <a:off x="8322868" y="4700016"/>
-            <a:ext cx="3320186" cy="201168"/>
-          </a:xfrm>
-          <a:prstGeom prst="rect">
-            <a:avLst/>
-          </a:prstGeom>
-          <a:noFill/>
-        </p:spPr>
-        <p:txBody>
-          <a:bodyPr wrap="square" anchor="t" lIns="36000" rIns="36000" tIns="18000" bIns="18000">
-            <a:spAutoFit/>
-          </a:bodyPr>
-          <a:lstStyle/>
-          <a:p>
-            <a:pPr algn="l"/>
-            <a:r>
-              <a:rPr sz="900" b="1" i="0">
-                <a:solidFill>
-                  <a:srgbClr val="D4A574"/>
-                </a:solidFill>
-                <a:latin typeface="Noto Sans JP"/>
-              </a:rPr>
-              <a:t>課題</a:t>
-            </a:r>
-          </a:p>
-        </p:txBody>
-      </p:sp>
-      <p:sp>
-        <p:nvSpPr>
-          <p:cNvPr id="60" name="TextBox 59"/>
-          <p:cNvSpPr txBox="1"/>
-          <p:nvPr/>
-        </p:nvSpPr>
-        <p:spPr>
-          <a:xfrm>
-            <a:off x="8322868" y="4882896"/>
-            <a:ext cx="3320186" cy="859536"/>
-          </a:xfrm>
-          <a:prstGeom prst="rect">
-            <a:avLst/>
-          </a:prstGeom>
-          <a:noFill/>
-        </p:spPr>
-        <p:txBody>
-          <a:bodyPr wrap="square" anchor="t" lIns="36000" rIns="36000" tIns="18000" bIns="18000">
-            <a:spAutoFit/>
-          </a:bodyPr>
-          <a:lstStyle/>
-          <a:p>
-            <a:pPr algn="l"/>
-            <a:r>
-              <a:rPr sz="1100" b="1" i="0">
-                <a:solidFill>
-                  <a:srgbClr val="FFFFFF"/>
-                </a:solidFill>
-                <a:latin typeface="Noto Sans JP"/>
-              </a:rPr>
-              <a:t>高温・強風で乾燥すると効果を完全に喪失</a:t>
-            </a:r>
-          </a:p>
-        </p:txBody>
-      </p:sp>
-      <p:sp>
-        <p:nvSpPr>
-          <p:cNvPr id="61" name="Rounded Rectangle 60"/>
-          <p:cNvSpPr/>
-          <p:nvPr/>
-        </p:nvSpPr>
-        <p:spPr>
-          <a:xfrm>
-            <a:off x="365760" y="6053328"/>
-            <a:ext cx="11460175" cy="457200"/>
-          </a:xfrm>
-          <a:prstGeom prst="roundRect">
-            <a:avLst>
-              <a:gd name="adj" fmla="val 4000"/>
-            </a:avLst>
-          </a:prstGeom>
-          <a:solidFill>
-            <a:srgbClr val="F8FAFC"/>
-          </a:solidFill>
-          <a:ln>
-            <a:noFill/>
-          </a:ln>
-          <a:effectLst/>
-        </p:spPr>
-        <p:style>
-          <a:lnRef idx="1">
-            <a:schemeClr val="accent1"/>
-          </a:lnRef>
-          <a:fillRef idx="3">
-            <a:schemeClr val="accent1"/>
-          </a:fillRef>
-          <a:effectRef idx="2">
-            <a:schemeClr val="accent1"/>
-          </a:effectRef>
-          <a:fontRef idx="minor">
-            <a:schemeClr val="lt1"/>
-          </a:fontRef>
-        </p:style>
-        <p:txBody>
-          <a:bodyPr rtlCol="0" anchor="ctr"/>
-          <a:lstStyle/>
-          <a:p>
-            <a:pPr algn="ctr"/>
-          </a:p>
-        </p:txBody>
-      </p:sp>
-      <p:sp>
-        <p:nvSpPr>
-          <p:cNvPr id="62" name="Rectangle 61"/>
-          <p:cNvSpPr/>
-          <p:nvPr/>
-        </p:nvSpPr>
-        <p:spPr>
-          <a:xfrm>
-            <a:off x="365760" y="6053328"/>
-            <a:ext cx="54864" cy="457200"/>
-          </a:xfrm>
-          <a:prstGeom prst="rect">
-            <a:avLst/>
-          </a:prstGeom>
-          <a:solidFill>
-            <a:srgbClr val="3B5174"/>
-          </a:solidFill>
-          <a:ln>
-            <a:noFill/>
-          </a:ln>
-          <a:effectLst/>
-        </p:spPr>
-        <p:style>
-          <a:lnRef idx="1">
-            <a:schemeClr val="accent1"/>
-          </a:lnRef>
-          <a:fillRef idx="3">
-            <a:schemeClr val="accent1"/>
-          </a:fillRef>
-          <a:effectRef idx="2">
-            <a:schemeClr val="accent1"/>
-          </a:effectRef>
-          <a:fontRef idx="minor">
-            <a:schemeClr val="lt1"/>
-          </a:fontRef>
-        </p:style>
-        <p:txBody>
-          <a:bodyPr rtlCol="0" anchor="ctr"/>
-          <a:lstStyle/>
-          <a:p>
-            <a:pPr algn="ctr"/>
-          </a:p>
-        </p:txBody>
-      </p:sp>
-      <p:sp>
-        <p:nvSpPr>
-          <p:cNvPr id="63" name="TextBox 62"/>
+          <p:cNvPr id="96" name="TextBox 95"/>
           <p:cNvSpPr txBox="1"/>
           <p:nvPr/>
         </p:nvSpPr>
@@ -56830,7 +58330,7 @@
       </p:sp>
       <p:sp>
         <p:nvSpPr>
-          <p:cNvPr id="64" name="TextBox 63"/>
+          <p:cNvPr id="97" name="TextBox 96"/>
           <p:cNvSpPr txBox="1"/>
           <p:nvPr/>
         </p:nvSpPr>

--- a/slides.pptx
+++ b/slides.pptx
@@ -17412,7 +17412,7 @@
                 </a:solidFill>
                 <a:latin typeface="Noto Sans JP"/>
               </a:rPr>
-              <a:t>付着性・表面濡れ性：実装に不可欠な特性</a:t>
+              <a:t>レオロジー設計が実装性能に直結する</a:t>
             </a:r>
           </a:p>
         </p:txBody>
@@ -17498,26 +17498,96 @@
       </p:sp>
       <p:sp>
         <p:nvSpPr>
-          <p:cNvPr id="10" name="Rounded Rectangle 9"/>
+          <p:cNvPr id="10" name="TextBox 9"/>
+          <p:cNvSpPr txBox="1"/>
+          <p:nvPr/>
+        </p:nvSpPr>
+        <p:spPr>
+          <a:xfrm>
+            <a:off x="365760" y="859536"/>
+            <a:ext cx="4114800" cy="274320"/>
+          </a:xfrm>
+          <a:prstGeom prst="rect">
+            <a:avLst/>
+          </a:prstGeom>
+          <a:noFill/>
+        </p:spPr>
+        <p:txBody>
+          <a:bodyPr wrap="square" anchor="t" lIns="36000" rIns="36000" tIns="18000" bIns="18000">
+            <a:spAutoFit/>
+          </a:bodyPr>
+          <a:lstStyle/>
+          <a:p>
+            <a:pPr algn="l"/>
+            <a:r>
+              <a:rPr sz="1200" b="1" i="0">
+                <a:solidFill>
+                  <a:srgbClr val="64748B"/>
+                </a:solidFill>
+                <a:latin typeface="Noto Sans JP"/>
+              </a:rPr>
+              <a:t>レオロジー設計（実測された物性）</a:t>
+            </a:r>
+          </a:p>
+        </p:txBody>
+      </p:sp>
+      <p:sp>
+        <p:nvSpPr>
+          <p:cNvPr id="11" name="TextBox 10"/>
+          <p:cNvSpPr txBox="1"/>
+          <p:nvPr/>
+        </p:nvSpPr>
+        <p:spPr>
+          <a:xfrm>
+            <a:off x="5449824" y="859536"/>
+            <a:ext cx="6376111" cy="274320"/>
+          </a:xfrm>
+          <a:prstGeom prst="rect">
+            <a:avLst/>
+          </a:prstGeom>
+          <a:noFill/>
+        </p:spPr>
+        <p:txBody>
+          <a:bodyPr wrap="square" anchor="t" lIns="36000" rIns="36000" tIns="18000" bIns="18000">
+            <a:spAutoFit/>
+          </a:bodyPr>
+          <a:lstStyle/>
+          <a:p>
+            <a:pPr algn="l"/>
+            <a:r>
+              <a:rPr sz="1200" b="1" i="0">
+                <a:solidFill>
+                  <a:srgbClr val="64748B"/>
+                </a:solidFill>
+                <a:latin typeface="Noto Sans JP"/>
+              </a:rPr>
+              <a:t>期待される実装性能（現場での挙動）</a:t>
+            </a:r>
+          </a:p>
+        </p:txBody>
+      </p:sp>
+      <p:sp>
+        <p:nvSpPr>
+          <p:cNvPr id="12" name="Rounded Rectangle 11"/>
           <p:cNvSpPr/>
           <p:nvPr/>
         </p:nvSpPr>
         <p:spPr>
           <a:xfrm>
-            <a:off x="365760" y="859536"/>
-            <a:ext cx="3734714" cy="2194560"/>
+            <a:off x="365760" y="1243584"/>
+            <a:ext cx="4114800" cy="1207008"/>
           </a:xfrm>
           <a:prstGeom prst="roundRect">
             <a:avLst>
-              <a:gd name="adj" fmla="val 2000"/>
+              <a:gd name="adj" fmla="val 5000"/>
             </a:avLst>
           </a:prstGeom>
           <a:solidFill>
-            <a:srgbClr val="F5F8FC"/>
+            <a:srgbClr val="F1F5F9"/>
           </a:solidFill>
-          <a:ln w="12700">
+          <a:ln w="6350">
             <a:solidFill>
-              <a:srgbClr val="C0D0E0"/>
+              <a:srgbClr val="E2E8F0"/>
             </a:solidFill>
           </a:ln>
           <a:effectLst/>
@@ -17546,20 +17616,20 @@
       </p:sp>
       <p:sp>
         <p:nvSpPr>
-          <p:cNvPr id="11" name="Rectangle 10"/>
+          <p:cNvPr id="13" name="Rectangle 12"/>
           <p:cNvSpPr/>
           <p:nvPr/>
         </p:nvSpPr>
         <p:spPr>
           <a:xfrm>
-            <a:off x="475488" y="969264"/>
-            <a:ext cx="868680" cy="292608"/>
+            <a:off x="365760" y="1243584"/>
+            <a:ext cx="54864" cy="1207008"/>
           </a:xfrm>
           <a:prstGeom prst="rect">
             <a:avLst/>
           </a:prstGeom>
           <a:solidFill>
-            <a:srgbClr val="1E293B"/>
+            <a:srgbClr val="4A7C8C"/>
           </a:solidFill>
           <a:ln>
             <a:noFill/>
@@ -17590,412 +17660,93 @@
       </p:sp>
       <p:sp>
         <p:nvSpPr>
-          <p:cNvPr id="12" name="TextBox 11"/>
-          <p:cNvSpPr txBox="1"/>
-          <p:nvPr/>
-        </p:nvSpPr>
-        <p:spPr>
-          <a:xfrm>
-            <a:off x="475488" y="969264"/>
-            <a:ext cx="868680" cy="292608"/>
-          </a:xfrm>
-          <a:prstGeom prst="rect">
-            <a:avLst/>
-          </a:prstGeom>
-          <a:noFill/>
-        </p:spPr>
-        <p:txBody>
-          <a:bodyPr wrap="square" anchor="ctr" lIns="36000" rIns="36000" tIns="18000" bIns="18000">
-            <a:spAutoFit/>
-          </a:bodyPr>
-          <a:lstStyle/>
-          <a:p>
-            <a:pPr algn="ctr"/>
-            <a:r>
-              <a:rPr sz="1100" b="1" i="0">
-                <a:solidFill>
-                  <a:srgbClr val="FFFFFF"/>
-                </a:solidFill>
-                <a:latin typeface="Noto Sans JP"/>
-              </a:rPr>
-              <a:t>Photo</a:t>
-            </a:r>
-          </a:p>
-        </p:txBody>
-      </p:sp>
-      <p:sp>
-        <p:nvSpPr>
-          <p:cNvPr id="13" name="TextBox 12"/>
-          <p:cNvSpPr txBox="1"/>
-          <p:nvPr/>
-        </p:nvSpPr>
-        <p:spPr>
-          <a:xfrm>
-            <a:off x="365760" y="859536"/>
-            <a:ext cx="3734714" cy="2194560"/>
-          </a:xfrm>
-          <a:prstGeom prst="rect">
-            <a:avLst/>
-          </a:prstGeom>
-          <a:noFill/>
-        </p:spPr>
-        <p:txBody>
-          <a:bodyPr wrap="square" anchor="ctr" lIns="36000" rIns="36000" tIns="18000" bIns="18000">
-            <a:spAutoFit/>
-          </a:bodyPr>
-          <a:lstStyle/>
-          <a:p>
-            <a:pPr algn="ctr"/>
+          <p:cNvPr id="14" name="TextBox 13"/>
+          <p:cNvSpPr txBox="1"/>
+          <p:nvPr/>
+        </p:nvSpPr>
+        <p:spPr>
+          <a:xfrm>
+            <a:off x="566928" y="1408176"/>
+            <a:ext cx="3803904" cy="365760"/>
+          </a:xfrm>
+          <a:prstGeom prst="rect">
+            <a:avLst/>
+          </a:prstGeom>
+          <a:noFill/>
+        </p:spPr>
+        <p:txBody>
+          <a:bodyPr wrap="square" anchor="t" lIns="36000" rIns="36000" tIns="18000" bIns="18000">
+            <a:spAutoFit/>
+          </a:bodyPr>
+          <a:lstStyle/>
+          <a:p>
+            <a:pPr algn="l"/>
+            <a:r>
+              <a:rPr sz="1500" b="1" i="0">
+                <a:solidFill>
+                  <a:srgbClr val="1E293B"/>
+                </a:solidFill>
+                <a:latin typeface="Noto Sans JP"/>
+              </a:rPr>
+              <a:t>低い Power-law 指数 n</a:t>
+            </a:r>
+          </a:p>
+        </p:txBody>
+      </p:sp>
+      <p:sp>
+        <p:nvSpPr>
+          <p:cNvPr id="15" name="TextBox 14"/>
+          <p:cNvSpPr txBox="1"/>
+          <p:nvPr/>
+        </p:nvSpPr>
+        <p:spPr>
+          <a:xfrm>
+            <a:off x="566928" y="1883664"/>
+            <a:ext cx="3803904" cy="457200"/>
+          </a:xfrm>
+          <a:prstGeom prst="rect">
+            <a:avLst/>
+          </a:prstGeom>
+          <a:noFill/>
+        </p:spPr>
+        <p:txBody>
+          <a:bodyPr wrap="square" anchor="t" lIns="36000" rIns="36000" tIns="18000" bIns="18000">
+            <a:spAutoFit/>
+          </a:bodyPr>
+          <a:lstStyle/>
+          <a:p>
+            <a:pPr algn="l"/>
             <a:r>
               <a:rPr sz="1200" b="0" i="0">
                 <a:solidFill>
-                  <a:srgbClr val="AAB4C0"/>
-                </a:solidFill>
-                <a:latin typeface="Noto Sans JP"/>
-              </a:rPr>
-              <a:t>（論文の図を貼り付け）</a:t>
-            </a:r>
-          </a:p>
-        </p:txBody>
-      </p:sp>
-      <p:sp>
-        <p:nvSpPr>
-          <p:cNvPr id="14" name="TextBox 13"/>
-          <p:cNvSpPr txBox="1"/>
-          <p:nvPr/>
-        </p:nvSpPr>
-        <p:spPr>
-          <a:xfrm>
-            <a:off x="365760" y="3090672"/>
-            <a:ext cx="3734714" cy="274320"/>
-          </a:xfrm>
-          <a:prstGeom prst="rect">
-            <a:avLst/>
-          </a:prstGeom>
-          <a:noFill/>
-        </p:spPr>
-        <p:txBody>
-          <a:bodyPr wrap="square" anchor="t" lIns="36000" rIns="36000" tIns="18000" bIns="18000">
-            <a:spAutoFit/>
-          </a:bodyPr>
-          <a:lstStyle/>
-          <a:p>
-            <a:pPr algn="ctr"/>
-            <a:r>
-              <a:rPr sz="1000" b="0" i="1">
-                <a:solidFill>
-                  <a:srgbClr val="64748B"/>
-                </a:solidFill>
-                <a:latin typeface="Noto Sans JP"/>
-              </a:rPr>
-              <a:t>木材上での接触角</a:t>
-            </a:r>
-          </a:p>
-        </p:txBody>
-      </p:sp>
-      <p:sp>
-        <p:nvSpPr>
-          <p:cNvPr id="15" name="TextBox 14"/>
-          <p:cNvSpPr txBox="1"/>
-          <p:nvPr/>
-        </p:nvSpPr>
-        <p:spPr>
-          <a:xfrm>
-            <a:off x="365760" y="3401568"/>
-            <a:ext cx="3734714" cy="237744"/>
-          </a:xfrm>
-          <a:prstGeom prst="rect">
-            <a:avLst/>
-          </a:prstGeom>
-          <a:noFill/>
-        </p:spPr>
-        <p:txBody>
-          <a:bodyPr wrap="square" anchor="t" lIns="36000" rIns="36000" tIns="18000" bIns="18000">
-            <a:spAutoFit/>
-          </a:bodyPr>
-          <a:lstStyle/>
-          <a:p>
-            <a:pPr algn="l"/>
-            <a:r>
-              <a:rPr sz="1000" b="1" i="0">
-                <a:solidFill>
-                  <a:srgbClr val="64748B"/>
-                </a:solidFill>
-                <a:latin typeface="Noto Sans JP"/>
-              </a:rPr>
-              <a:t>WETTING</a:t>
-            </a:r>
-          </a:p>
-        </p:txBody>
-      </p:sp>
-      <p:sp>
-        <p:nvSpPr>
-          <p:cNvPr id="16" name="TextBox 15"/>
-          <p:cNvSpPr txBox="1"/>
-          <p:nvPr/>
-        </p:nvSpPr>
-        <p:spPr>
-          <a:xfrm>
-            <a:off x="365760" y="3639312"/>
-            <a:ext cx="3734714" cy="310896"/>
-          </a:xfrm>
-          <a:prstGeom prst="rect">
-            <a:avLst/>
-          </a:prstGeom>
-          <a:noFill/>
-        </p:spPr>
-        <p:txBody>
-          <a:bodyPr wrap="square" anchor="t" lIns="36000" rIns="36000" tIns="18000" bIns="18000">
-            <a:spAutoFit/>
-          </a:bodyPr>
-          <a:lstStyle/>
-          <a:p>
-            <a:pPr algn="l"/>
-            <a:r>
-              <a:rPr sz="1400" b="1" i="0">
-                <a:solidFill>
-                  <a:srgbClr val="1E293B"/>
-                </a:solidFill>
-                <a:latin typeface="Noto Sans JP"/>
-              </a:rPr>
-              <a:t>接触角測定</a:t>
-            </a:r>
-          </a:p>
-        </p:txBody>
-      </p:sp>
-      <p:sp>
-        <p:nvSpPr>
-          <p:cNvPr id="17" name="TextBox 16"/>
-          <p:cNvSpPr txBox="1"/>
-          <p:nvPr/>
-        </p:nvSpPr>
-        <p:spPr>
-          <a:xfrm>
-            <a:off x="365760" y="4023360"/>
-            <a:ext cx="182880" cy="274320"/>
-          </a:xfrm>
-          <a:prstGeom prst="rect">
-            <a:avLst/>
-          </a:prstGeom>
-          <a:noFill/>
-        </p:spPr>
-        <p:txBody>
-          <a:bodyPr wrap="square" anchor="t" lIns="36000" rIns="36000" tIns="18000" bIns="18000">
-            <a:spAutoFit/>
-          </a:bodyPr>
-          <a:lstStyle/>
-          <a:p>
-            <a:pPr algn="l"/>
-            <a:r>
-              <a:rPr sz="1100" b="0" i="0">
-                <a:solidFill>
-                  <a:srgbClr val="3B5174"/>
-                </a:solidFill>
-                <a:latin typeface="Noto Sans JP"/>
-              </a:rPr>
-              <a:t>•</a:t>
-            </a:r>
-          </a:p>
-        </p:txBody>
-      </p:sp>
-      <p:sp>
-        <p:nvSpPr>
-          <p:cNvPr id="18" name="TextBox 17"/>
-          <p:cNvSpPr txBox="1"/>
-          <p:nvPr/>
-        </p:nvSpPr>
-        <p:spPr>
-          <a:xfrm>
-            <a:off x="566928" y="4023360"/>
-            <a:ext cx="3533546" cy="274320"/>
-          </a:xfrm>
-          <a:prstGeom prst="rect">
-            <a:avLst/>
-          </a:prstGeom>
-          <a:noFill/>
-        </p:spPr>
-        <p:txBody>
-          <a:bodyPr wrap="square" anchor="t" lIns="36000" rIns="36000" tIns="18000" bIns="18000">
-            <a:spAutoFit/>
-          </a:bodyPr>
-          <a:lstStyle/>
-          <a:p>
-            <a:pPr algn="l"/>
-            <a:r>
-              <a:rPr sz="1100" b="0" i="0">
-                <a:solidFill>
                   <a:srgbClr val="334155"/>
                 </a:solidFill>
                 <a:latin typeface="Noto Sans JP"/>
               </a:rPr>
-              <a:t>木材・コンクリート・金属で評価</a:t>
-            </a:r>
-          </a:p>
-        </p:txBody>
-      </p:sp>
-      <p:sp>
-        <p:nvSpPr>
-          <p:cNvPr id="19" name="TextBox 18"/>
-          <p:cNvSpPr txBox="1"/>
-          <p:nvPr/>
-        </p:nvSpPr>
-        <p:spPr>
-          <a:xfrm>
-            <a:off x="365760" y="4334256"/>
-            <a:ext cx="182880" cy="274320"/>
-          </a:xfrm>
-          <a:prstGeom prst="rect">
-            <a:avLst/>
-          </a:prstGeom>
-          <a:noFill/>
-        </p:spPr>
-        <p:txBody>
-          <a:bodyPr wrap="square" anchor="t" lIns="36000" rIns="36000" tIns="18000" bIns="18000">
-            <a:spAutoFit/>
-          </a:bodyPr>
-          <a:lstStyle/>
-          <a:p>
-            <a:pPr algn="l"/>
-            <a:r>
-              <a:rPr sz="1100" b="0" i="0">
-                <a:solidFill>
-                  <a:srgbClr val="3B5174"/>
-                </a:solidFill>
-                <a:latin typeface="Noto Sans JP"/>
-              </a:rPr>
-              <a:t>•</a:t>
-            </a:r>
-          </a:p>
-        </p:txBody>
-      </p:sp>
-      <p:sp>
-        <p:nvSpPr>
-          <p:cNvPr id="20" name="TextBox 19"/>
-          <p:cNvSpPr txBox="1"/>
-          <p:nvPr/>
-        </p:nvSpPr>
-        <p:spPr>
-          <a:xfrm>
-            <a:off x="566928" y="4334256"/>
-            <a:ext cx="3533546" cy="274320"/>
-          </a:xfrm>
-          <a:prstGeom prst="rect">
-            <a:avLst/>
-          </a:prstGeom>
-          <a:noFill/>
-        </p:spPr>
-        <p:txBody>
-          <a:bodyPr wrap="square" anchor="t" lIns="36000" rIns="36000" tIns="18000" bIns="18000">
-            <a:spAutoFit/>
-          </a:bodyPr>
-          <a:lstStyle/>
-          <a:p>
-            <a:pPr algn="l"/>
-            <a:r>
-              <a:rPr sz="1100" b="0" i="0">
-                <a:solidFill>
-                  <a:srgbClr val="334155"/>
-                </a:solidFill>
-                <a:latin typeface="Noto Sans JP"/>
-              </a:rPr>
-              <a:t>WEGは低接触角 → 高い濡れ性</a:t>
-            </a:r>
-          </a:p>
-        </p:txBody>
-      </p:sp>
-      <p:sp>
-        <p:nvSpPr>
-          <p:cNvPr id="21" name="TextBox 20"/>
-          <p:cNvSpPr txBox="1"/>
-          <p:nvPr/>
-        </p:nvSpPr>
-        <p:spPr>
-          <a:xfrm>
-            <a:off x="365760" y="4645152"/>
-            <a:ext cx="182880" cy="274320"/>
-          </a:xfrm>
-          <a:prstGeom prst="rect">
-            <a:avLst/>
-          </a:prstGeom>
-          <a:noFill/>
-        </p:spPr>
-        <p:txBody>
-          <a:bodyPr wrap="square" anchor="t" lIns="36000" rIns="36000" tIns="18000" bIns="18000">
-            <a:spAutoFit/>
-          </a:bodyPr>
-          <a:lstStyle/>
-          <a:p>
-            <a:pPr algn="l"/>
-            <a:r>
-              <a:rPr sz="1100" b="0" i="0">
-                <a:solidFill>
-                  <a:srgbClr val="3B5174"/>
-                </a:solidFill>
-                <a:latin typeface="Noto Sans JP"/>
-              </a:rPr>
-              <a:t>•</a:t>
-            </a:r>
-          </a:p>
-        </p:txBody>
-      </p:sp>
-      <p:sp>
-        <p:nvSpPr>
-          <p:cNvPr id="22" name="TextBox 21"/>
-          <p:cNvSpPr txBox="1"/>
-          <p:nvPr/>
-        </p:nvSpPr>
-        <p:spPr>
-          <a:xfrm>
-            <a:off x="566928" y="4645152"/>
-            <a:ext cx="3533546" cy="274320"/>
-          </a:xfrm>
-          <a:prstGeom prst="rect">
-            <a:avLst/>
-          </a:prstGeom>
-          <a:noFill/>
-        </p:spPr>
-        <p:txBody>
-          <a:bodyPr wrap="square" anchor="t" lIns="36000" rIns="36000" tIns="18000" bIns="18000">
-            <a:spAutoFit/>
-          </a:bodyPr>
-          <a:lstStyle/>
-          <a:p>
-            <a:pPr algn="l"/>
-            <a:r>
-              <a:rPr sz="1100" b="0" i="0">
-                <a:solidFill>
-                  <a:srgbClr val="334155"/>
-                </a:solidFill>
-                <a:latin typeface="Noto Sans JP"/>
-              </a:rPr>
-              <a:t>HEC+MCは木材との親和性が高い</a:t>
-            </a:r>
-          </a:p>
-        </p:txBody>
-      </p:sp>
-      <p:sp>
-        <p:nvSpPr>
-          <p:cNvPr id="23" name="Rounded Rectangle 22"/>
+              <a:t>強いせん断希薄化（n ≪ 1）</a:t>
+            </a:r>
+          </a:p>
+        </p:txBody>
+      </p:sp>
+      <p:sp>
+        <p:nvSpPr>
+          <p:cNvPr id="16" name="Right Arrow 15"/>
           <p:cNvSpPr/>
           <p:nvPr/>
         </p:nvSpPr>
         <p:spPr>
           <a:xfrm>
-            <a:off x="4228490" y="859536"/>
-            <a:ext cx="3734714" cy="2194560"/>
-          </a:xfrm>
-          <a:prstGeom prst="roundRect">
-            <a:avLst>
-              <a:gd name="adj" fmla="val 2000"/>
-            </a:avLst>
+            <a:off x="4645152" y="1645920"/>
+            <a:ext cx="640080" cy="402336"/>
+          </a:xfrm>
+          <a:prstGeom prst="rightArrow">
+            <a:avLst/>
           </a:prstGeom>
           <a:solidFill>
-            <a:srgbClr val="F5F8FC"/>
+            <a:srgbClr val="4A7C8C"/>
           </a:solidFill>
-          <a:ln w="12700">
-            <a:solidFill>
-              <a:srgbClr val="C0D0E0"/>
-            </a:solidFill>
+          <a:ln>
+            <a:noFill/>
           </a:ln>
           <a:effectLst/>
         </p:spPr>
@@ -18023,20 +17774,198 @@
       </p:sp>
       <p:sp>
         <p:nvSpPr>
-          <p:cNvPr id="24" name="Rectangle 23"/>
+          <p:cNvPr id="17" name="Rounded Rectangle 16"/>
           <p:cNvSpPr/>
           <p:nvPr/>
         </p:nvSpPr>
         <p:spPr>
           <a:xfrm>
-            <a:off x="4338218" y="969264"/>
-            <a:ext cx="868680" cy="292608"/>
-          </a:xfrm>
-          <a:prstGeom prst="rect">
-            <a:avLst/>
+            <a:off x="5449824" y="1243584"/>
+            <a:ext cx="6376111" cy="1207008"/>
+          </a:xfrm>
+          <a:prstGeom prst="roundRect">
+            <a:avLst>
+              <a:gd name="adj" fmla="val 5000"/>
+            </a:avLst>
           </a:prstGeom>
           <a:solidFill>
-            <a:srgbClr val="1E293B"/>
+            <a:srgbClr val="FFFFFF"/>
+          </a:solidFill>
+          <a:ln w="12700">
+            <a:solidFill>
+              <a:srgbClr val="4A7C8C"/>
+            </a:solidFill>
+          </a:ln>
+          <a:effectLst/>
+        </p:spPr>
+        <p:style>
+          <a:lnRef idx="1">
+            <a:schemeClr val="accent1"/>
+          </a:lnRef>
+          <a:fillRef idx="3">
+            <a:schemeClr val="accent1"/>
+          </a:fillRef>
+          <a:effectRef idx="2">
+            <a:schemeClr val="accent1"/>
+          </a:effectRef>
+          <a:fontRef idx="minor">
+            <a:schemeClr val="lt1"/>
+          </a:fontRef>
+        </p:style>
+        <p:txBody>
+          <a:bodyPr rtlCol="0" anchor="ctr"/>
+          <a:lstStyle/>
+          <a:p>
+            <a:pPr algn="ctr"/>
+          </a:p>
+        </p:txBody>
+      </p:sp>
+      <p:sp>
+        <p:nvSpPr>
+          <p:cNvPr id="18" name="TextBox 17"/>
+          <p:cNvSpPr txBox="1"/>
+          <p:nvPr/>
+        </p:nvSpPr>
+        <p:spPr>
+          <a:xfrm>
+            <a:off x="5650992" y="1389888"/>
+            <a:ext cx="6065215" cy="365760"/>
+          </a:xfrm>
+          <a:prstGeom prst="rect">
+            <a:avLst/>
+          </a:prstGeom>
+          <a:noFill/>
+        </p:spPr>
+        <p:txBody>
+          <a:bodyPr wrap="square" anchor="t" lIns="36000" rIns="36000" tIns="18000" bIns="18000">
+            <a:spAutoFit/>
+          </a:bodyPr>
+          <a:lstStyle/>
+          <a:p>
+            <a:pPr algn="l"/>
+            <a:r>
+              <a:rPr sz="1500" b="1" i="0">
+                <a:solidFill>
+                  <a:srgbClr val="4A7C8C"/>
+                </a:solidFill>
+                <a:latin typeface="Noto Sans JP"/>
+              </a:rPr>
+              <a:t>噴霧できる</a:t>
+            </a:r>
+          </a:p>
+        </p:txBody>
+      </p:sp>
+      <p:sp>
+        <p:nvSpPr>
+          <p:cNvPr id="19" name="TextBox 18"/>
+          <p:cNvSpPr txBox="1"/>
+          <p:nvPr/>
+        </p:nvSpPr>
+        <p:spPr>
+          <a:xfrm>
+            <a:off x="5650992" y="1810512"/>
+            <a:ext cx="6065215" cy="566928"/>
+          </a:xfrm>
+          <a:prstGeom prst="rect">
+            <a:avLst/>
+          </a:prstGeom>
+          <a:noFill/>
+        </p:spPr>
+        <p:txBody>
+          <a:bodyPr wrap="square" anchor="t" lIns="36000" rIns="36000" tIns="18000" bIns="18000">
+            <a:spAutoFit/>
+          </a:bodyPr>
+          <a:lstStyle/>
+          <a:p>
+            <a:pPr algn="l"/>
+            <a:r>
+              <a:rPr sz="1200" b="0" i="0">
+                <a:solidFill>
+                  <a:srgbClr val="334155"/>
+                </a:solidFill>
+                <a:latin typeface="Noto Sans JP"/>
+              </a:rPr>
+              <a:t>ノズル通過時の高せん断で粘度が急低下</a:t>
+            </a:r>
+          </a:p>
+          <a:p>
+            <a:pPr algn="l"/>
+            <a:r>
+              <a:rPr sz="1200" b="0" i="0">
+                <a:solidFill>
+                  <a:srgbClr val="334155"/>
+                </a:solidFill>
+                <a:latin typeface="Noto Sans JP"/>
+              </a:rPr>
+              <a:t>→ 既存ホース・ノズルで散布可能</a:t>
+            </a:r>
+          </a:p>
+        </p:txBody>
+      </p:sp>
+      <p:sp>
+        <p:nvSpPr>
+          <p:cNvPr id="20" name="Rounded Rectangle 19"/>
+          <p:cNvSpPr/>
+          <p:nvPr/>
+        </p:nvSpPr>
+        <p:spPr>
+          <a:xfrm>
+            <a:off x="365760" y="2633472"/>
+            <a:ext cx="4114800" cy="1207008"/>
+          </a:xfrm>
+          <a:prstGeom prst="roundRect">
+            <a:avLst>
+              <a:gd name="adj" fmla="val 5000"/>
+            </a:avLst>
+          </a:prstGeom>
+          <a:solidFill>
+            <a:srgbClr val="F1F5F9"/>
+          </a:solidFill>
+          <a:ln w="6350">
+            <a:solidFill>
+              <a:srgbClr val="E2E8F0"/>
+            </a:solidFill>
+          </a:ln>
+          <a:effectLst/>
+        </p:spPr>
+        <p:style>
+          <a:lnRef idx="1">
+            <a:schemeClr val="accent1"/>
+          </a:lnRef>
+          <a:fillRef idx="3">
+            <a:schemeClr val="accent1"/>
+          </a:fillRef>
+          <a:effectRef idx="2">
+            <a:schemeClr val="accent1"/>
+          </a:effectRef>
+          <a:fontRef idx="minor">
+            <a:schemeClr val="lt1"/>
+          </a:fontRef>
+        </p:style>
+        <p:txBody>
+          <a:bodyPr rtlCol="0" anchor="ctr"/>
+          <a:lstStyle/>
+          <a:p>
+            <a:pPr algn="ctr"/>
+          </a:p>
+        </p:txBody>
+      </p:sp>
+      <p:sp>
+        <p:nvSpPr>
+          <p:cNvPr id="21" name="Rectangle 20"/>
+          <p:cNvSpPr/>
+          <p:nvPr/>
+        </p:nvSpPr>
+        <p:spPr>
+          <a:xfrm>
+            <a:off x="365760" y="2633472"/>
+            <a:ext cx="54864" cy="1207008"/>
+          </a:xfrm>
+          <a:prstGeom prst="rect">
+            <a:avLst/>
+          </a:prstGeom>
+          <a:solidFill>
+            <a:srgbClr val="3B5174"/>
           </a:solidFill>
           <a:ln>
             <a:noFill/>
@@ -18067,412 +17996,93 @@
       </p:sp>
       <p:sp>
         <p:nvSpPr>
-          <p:cNvPr id="25" name="TextBox 24"/>
-          <p:cNvSpPr txBox="1"/>
-          <p:nvPr/>
-        </p:nvSpPr>
-        <p:spPr>
-          <a:xfrm>
-            <a:off x="4338218" y="969264"/>
-            <a:ext cx="868680" cy="292608"/>
-          </a:xfrm>
-          <a:prstGeom prst="rect">
-            <a:avLst/>
-          </a:prstGeom>
-          <a:noFill/>
-        </p:spPr>
-        <p:txBody>
-          <a:bodyPr wrap="square" anchor="ctr" lIns="36000" rIns="36000" tIns="18000" bIns="18000">
-            <a:spAutoFit/>
-          </a:bodyPr>
-          <a:lstStyle/>
-          <a:p>
-            <a:pPr algn="ctr"/>
-            <a:r>
-              <a:rPr sz="1100" b="1" i="0">
-                <a:solidFill>
-                  <a:srgbClr val="FFFFFF"/>
-                </a:solidFill>
-                <a:latin typeface="Noto Sans JP"/>
-              </a:rPr>
-              <a:t>Photo</a:t>
-            </a:r>
-          </a:p>
-        </p:txBody>
-      </p:sp>
-      <p:sp>
-        <p:nvSpPr>
-          <p:cNvPr id="26" name="TextBox 25"/>
-          <p:cNvSpPr txBox="1"/>
-          <p:nvPr/>
-        </p:nvSpPr>
-        <p:spPr>
-          <a:xfrm>
-            <a:off x="4228490" y="859536"/>
-            <a:ext cx="3734714" cy="2194560"/>
-          </a:xfrm>
-          <a:prstGeom prst="rect">
-            <a:avLst/>
-          </a:prstGeom>
-          <a:noFill/>
-        </p:spPr>
-        <p:txBody>
-          <a:bodyPr wrap="square" anchor="ctr" lIns="36000" rIns="36000" tIns="18000" bIns="18000">
-            <a:spAutoFit/>
-          </a:bodyPr>
-          <a:lstStyle/>
-          <a:p>
-            <a:pPr algn="ctr"/>
+          <p:cNvPr id="22" name="TextBox 21"/>
+          <p:cNvSpPr txBox="1"/>
+          <p:nvPr/>
+        </p:nvSpPr>
+        <p:spPr>
+          <a:xfrm>
+            <a:off x="566928" y="2798064"/>
+            <a:ext cx="3803904" cy="365760"/>
+          </a:xfrm>
+          <a:prstGeom prst="rect">
+            <a:avLst/>
+          </a:prstGeom>
+          <a:noFill/>
+        </p:spPr>
+        <p:txBody>
+          <a:bodyPr wrap="square" anchor="t" lIns="36000" rIns="36000" tIns="18000" bIns="18000">
+            <a:spAutoFit/>
+          </a:bodyPr>
+          <a:lstStyle/>
+          <a:p>
+            <a:pPr algn="l"/>
+            <a:r>
+              <a:rPr sz="1500" b="1" i="0">
+                <a:solidFill>
+                  <a:srgbClr val="1E293B"/>
+                </a:solidFill>
+                <a:latin typeface="Noto Sans JP"/>
+              </a:rPr>
+              <a:t>高い貯蔵弾性率 G'（G' ≫ G''）</a:t>
+            </a:r>
+          </a:p>
+        </p:txBody>
+      </p:sp>
+      <p:sp>
+        <p:nvSpPr>
+          <p:cNvPr id="23" name="TextBox 22"/>
+          <p:cNvSpPr txBox="1"/>
+          <p:nvPr/>
+        </p:nvSpPr>
+        <p:spPr>
+          <a:xfrm>
+            <a:off x="566928" y="3273552"/>
+            <a:ext cx="3803904" cy="457200"/>
+          </a:xfrm>
+          <a:prstGeom prst="rect">
+            <a:avLst/>
+          </a:prstGeom>
+          <a:noFill/>
+        </p:spPr>
+        <p:txBody>
+          <a:bodyPr wrap="square" anchor="t" lIns="36000" rIns="36000" tIns="18000" bIns="18000">
+            <a:spAutoFit/>
+          </a:bodyPr>
+          <a:lstStyle/>
+          <a:p>
+            <a:pPr algn="l"/>
             <a:r>
               <a:rPr sz="1200" b="0" i="0">
                 <a:solidFill>
-                  <a:srgbClr val="AAB4C0"/>
-                </a:solidFill>
-                <a:latin typeface="Noto Sans JP"/>
-              </a:rPr>
-              <a:t>（論文の図を貼り付け）</a:t>
-            </a:r>
-          </a:p>
-        </p:txBody>
-      </p:sp>
-      <p:sp>
-        <p:nvSpPr>
-          <p:cNvPr id="27" name="TextBox 26"/>
-          <p:cNvSpPr txBox="1"/>
-          <p:nvPr/>
-        </p:nvSpPr>
-        <p:spPr>
-          <a:xfrm>
-            <a:off x="4228490" y="3090672"/>
-            <a:ext cx="3734714" cy="274320"/>
-          </a:xfrm>
-          <a:prstGeom prst="rect">
-            <a:avLst/>
-          </a:prstGeom>
-          <a:noFill/>
-        </p:spPr>
-        <p:txBody>
-          <a:bodyPr wrap="square" anchor="t" lIns="36000" rIns="36000" tIns="18000" bIns="18000">
-            <a:spAutoFit/>
-          </a:bodyPr>
-          <a:lstStyle/>
-          <a:p>
-            <a:pPr algn="ctr"/>
-            <a:r>
-              <a:rPr sz="1000" b="0" i="1">
-                <a:solidFill>
-                  <a:srgbClr val="64748B"/>
-                </a:solidFill>
-                <a:latin typeface="Noto Sans JP"/>
-              </a:rPr>
-              <a:t>垂直基板でのゲル保持</a:t>
-            </a:r>
-          </a:p>
-        </p:txBody>
-      </p:sp>
-      <p:sp>
-        <p:nvSpPr>
-          <p:cNvPr id="28" name="TextBox 27"/>
-          <p:cNvSpPr txBox="1"/>
-          <p:nvPr/>
-        </p:nvSpPr>
-        <p:spPr>
-          <a:xfrm>
-            <a:off x="4228490" y="3401568"/>
-            <a:ext cx="3734714" cy="237744"/>
-          </a:xfrm>
-          <a:prstGeom prst="rect">
-            <a:avLst/>
-          </a:prstGeom>
-          <a:noFill/>
-        </p:spPr>
-        <p:txBody>
-          <a:bodyPr wrap="square" anchor="t" lIns="36000" rIns="36000" tIns="18000" bIns="18000">
-            <a:spAutoFit/>
-          </a:bodyPr>
-          <a:lstStyle/>
-          <a:p>
-            <a:pPr algn="l"/>
-            <a:r>
-              <a:rPr sz="1000" b="1" i="0">
-                <a:solidFill>
-                  <a:srgbClr val="64748B"/>
-                </a:solidFill>
-                <a:latin typeface="Noto Sans JP"/>
-              </a:rPr>
-              <a:t>ADHESION</a:t>
-            </a:r>
-          </a:p>
-        </p:txBody>
-      </p:sp>
-      <p:sp>
-        <p:nvSpPr>
-          <p:cNvPr id="29" name="TextBox 28"/>
-          <p:cNvSpPr txBox="1"/>
-          <p:nvPr/>
-        </p:nvSpPr>
-        <p:spPr>
-          <a:xfrm>
-            <a:off x="4228490" y="3639312"/>
-            <a:ext cx="3734714" cy="310896"/>
-          </a:xfrm>
-          <a:prstGeom prst="rect">
-            <a:avLst/>
-          </a:prstGeom>
-          <a:noFill/>
-        </p:spPr>
-        <p:txBody>
-          <a:bodyPr wrap="square" anchor="t" lIns="36000" rIns="36000" tIns="18000" bIns="18000">
-            <a:spAutoFit/>
-          </a:bodyPr>
-          <a:lstStyle/>
-          <a:p>
-            <a:pPr algn="l"/>
-            <a:r>
-              <a:rPr sz="1400" b="1" i="0">
-                <a:solidFill>
-                  <a:srgbClr val="1E293B"/>
-                </a:solidFill>
-                <a:latin typeface="Noto Sans JP"/>
-              </a:rPr>
-              <a:t>垂直面付着試験</a:t>
-            </a:r>
-          </a:p>
-        </p:txBody>
-      </p:sp>
-      <p:sp>
-        <p:nvSpPr>
-          <p:cNvPr id="30" name="TextBox 29"/>
-          <p:cNvSpPr txBox="1"/>
-          <p:nvPr/>
-        </p:nvSpPr>
-        <p:spPr>
-          <a:xfrm>
-            <a:off x="4228490" y="4023360"/>
-            <a:ext cx="182880" cy="274320"/>
-          </a:xfrm>
-          <a:prstGeom prst="rect">
-            <a:avLst/>
-          </a:prstGeom>
-          <a:noFill/>
-        </p:spPr>
-        <p:txBody>
-          <a:bodyPr wrap="square" anchor="t" lIns="36000" rIns="36000" tIns="18000" bIns="18000">
-            <a:spAutoFit/>
-          </a:bodyPr>
-          <a:lstStyle/>
-          <a:p>
-            <a:pPr algn="l"/>
-            <a:r>
-              <a:rPr sz="1100" b="0" i="0">
-                <a:solidFill>
-                  <a:srgbClr val="3B5174"/>
-                </a:solidFill>
-                <a:latin typeface="Noto Sans JP"/>
-              </a:rPr>
-              <a:t>•</a:t>
-            </a:r>
-          </a:p>
-        </p:txBody>
-      </p:sp>
-      <p:sp>
-        <p:nvSpPr>
-          <p:cNvPr id="31" name="TextBox 30"/>
-          <p:cNvSpPr txBox="1"/>
-          <p:nvPr/>
-        </p:nvSpPr>
-        <p:spPr>
-          <a:xfrm>
-            <a:off x="4429658" y="4023360"/>
-            <a:ext cx="3533546" cy="274320"/>
-          </a:xfrm>
-          <a:prstGeom prst="rect">
-            <a:avLst/>
-          </a:prstGeom>
-          <a:noFill/>
-        </p:spPr>
-        <p:txBody>
-          <a:bodyPr wrap="square" anchor="t" lIns="36000" rIns="36000" tIns="18000" bIns="18000">
-            <a:spAutoFit/>
-          </a:bodyPr>
-          <a:lstStyle/>
-          <a:p>
-            <a:pPr algn="l"/>
-            <a:r>
-              <a:rPr sz="1100" b="0" i="0">
-                <a:solidFill>
                   <a:srgbClr val="334155"/>
                 </a:solidFill>
                 <a:latin typeface="Noto Sans JP"/>
               </a:rPr>
-              <a:t>垂直基板に塗布し保持性を評価</a:t>
-            </a:r>
-          </a:p>
-        </p:txBody>
-      </p:sp>
-      <p:sp>
-        <p:nvSpPr>
-          <p:cNvPr id="32" name="TextBox 31"/>
-          <p:cNvSpPr txBox="1"/>
-          <p:nvPr/>
-        </p:nvSpPr>
-        <p:spPr>
-          <a:xfrm>
-            <a:off x="4228490" y="4334256"/>
-            <a:ext cx="182880" cy="274320"/>
-          </a:xfrm>
-          <a:prstGeom prst="rect">
-            <a:avLst/>
-          </a:prstGeom>
-          <a:noFill/>
-        </p:spPr>
-        <p:txBody>
-          <a:bodyPr wrap="square" anchor="t" lIns="36000" rIns="36000" tIns="18000" bIns="18000">
-            <a:spAutoFit/>
-          </a:bodyPr>
-          <a:lstStyle/>
-          <a:p>
-            <a:pPr algn="l"/>
-            <a:r>
-              <a:rPr sz="1100" b="0" i="0">
-                <a:solidFill>
-                  <a:srgbClr val="3B5174"/>
-                </a:solidFill>
-                <a:latin typeface="Noto Sans JP"/>
-              </a:rPr>
-              <a:t>•</a:t>
-            </a:r>
-          </a:p>
-        </p:txBody>
-      </p:sp>
-      <p:sp>
-        <p:nvSpPr>
-          <p:cNvPr id="33" name="TextBox 32"/>
-          <p:cNvSpPr txBox="1"/>
-          <p:nvPr/>
-        </p:nvSpPr>
-        <p:spPr>
-          <a:xfrm>
-            <a:off x="4429658" y="4334256"/>
-            <a:ext cx="3533546" cy="274320"/>
-          </a:xfrm>
-          <a:prstGeom prst="rect">
-            <a:avLst/>
-          </a:prstGeom>
-          <a:noFill/>
-        </p:spPr>
-        <p:txBody>
-          <a:bodyPr wrap="square" anchor="t" lIns="36000" rIns="36000" tIns="18000" bIns="18000">
-            <a:spAutoFit/>
-          </a:bodyPr>
-          <a:lstStyle/>
-          <a:p>
-            <a:pPr algn="l"/>
-            <a:r>
-              <a:rPr sz="1100" b="0" i="0">
-                <a:solidFill>
-                  <a:srgbClr val="334155"/>
-                </a:solidFill>
-                <a:latin typeface="Noto Sans JP"/>
-              </a:rPr>
-              <a:t>G' ≫ G'' → 流れ落ちない</a:t>
-            </a:r>
-          </a:p>
-        </p:txBody>
-      </p:sp>
-      <p:sp>
-        <p:nvSpPr>
-          <p:cNvPr id="34" name="TextBox 33"/>
-          <p:cNvSpPr txBox="1"/>
-          <p:nvPr/>
-        </p:nvSpPr>
-        <p:spPr>
-          <a:xfrm>
-            <a:off x="4228490" y="4645152"/>
-            <a:ext cx="182880" cy="274320"/>
-          </a:xfrm>
-          <a:prstGeom prst="rect">
-            <a:avLst/>
-          </a:prstGeom>
-          <a:noFill/>
-        </p:spPr>
-        <p:txBody>
-          <a:bodyPr wrap="square" anchor="t" lIns="36000" rIns="36000" tIns="18000" bIns="18000">
-            <a:spAutoFit/>
-          </a:bodyPr>
-          <a:lstStyle/>
-          <a:p>
-            <a:pPr algn="l"/>
-            <a:r>
-              <a:rPr sz="1100" b="0" i="0">
-                <a:solidFill>
-                  <a:srgbClr val="3B5174"/>
-                </a:solidFill>
-                <a:latin typeface="Noto Sans JP"/>
-              </a:rPr>
-              <a:t>•</a:t>
-            </a:r>
-          </a:p>
-        </p:txBody>
-      </p:sp>
-      <p:sp>
-        <p:nvSpPr>
-          <p:cNvPr id="35" name="TextBox 34"/>
-          <p:cNvSpPr txBox="1"/>
-          <p:nvPr/>
-        </p:nvSpPr>
-        <p:spPr>
-          <a:xfrm>
-            <a:off x="4429658" y="4645152"/>
-            <a:ext cx="3533546" cy="274320"/>
-          </a:xfrm>
-          <a:prstGeom prst="rect">
-            <a:avLst/>
-          </a:prstGeom>
-          <a:noFill/>
-        </p:spPr>
-        <p:txBody>
-          <a:bodyPr wrap="square" anchor="t" lIns="36000" rIns="36000" tIns="18000" bIns="18000">
-            <a:spAutoFit/>
-          </a:bodyPr>
-          <a:lstStyle/>
-          <a:p>
-            <a:pPr algn="l"/>
-            <a:r>
-              <a:rPr sz="1100" b="0" i="0">
-                <a:solidFill>
-                  <a:srgbClr val="334155"/>
-                </a:solidFill>
-                <a:latin typeface="Noto Sans JP"/>
-              </a:rPr>
-              <a:t>AquaGel-K同等以上の保持性</a:t>
-            </a:r>
-          </a:p>
-        </p:txBody>
-      </p:sp>
-      <p:sp>
-        <p:nvSpPr>
-          <p:cNvPr id="36" name="Rounded Rectangle 35"/>
+              <a:t>静止時はゲル状態を保持</a:t>
+            </a:r>
+          </a:p>
+        </p:txBody>
+      </p:sp>
+      <p:sp>
+        <p:nvSpPr>
+          <p:cNvPr id="24" name="Right Arrow 23"/>
           <p:cNvSpPr/>
           <p:nvPr/>
         </p:nvSpPr>
         <p:spPr>
           <a:xfrm>
-            <a:off x="8091220" y="859536"/>
-            <a:ext cx="3734714" cy="2194560"/>
-          </a:xfrm>
-          <a:prstGeom prst="roundRect">
-            <a:avLst>
-              <a:gd name="adj" fmla="val 2000"/>
-            </a:avLst>
+            <a:off x="4645152" y="3035808"/>
+            <a:ext cx="640080" cy="402336"/>
+          </a:xfrm>
+          <a:prstGeom prst="rightArrow">
+            <a:avLst/>
           </a:prstGeom>
           <a:solidFill>
-            <a:srgbClr val="F5F8FC"/>
+            <a:srgbClr val="3B5174"/>
           </a:solidFill>
-          <a:ln w="12700">
-            <a:solidFill>
-              <a:srgbClr val="C0D0E0"/>
-            </a:solidFill>
+          <a:ln>
+            <a:noFill/>
           </a:ln>
           <a:effectLst/>
         </p:spPr>
@@ -18500,20 +18110,198 @@
       </p:sp>
       <p:sp>
         <p:nvSpPr>
-          <p:cNvPr id="37" name="Rectangle 36"/>
+          <p:cNvPr id="25" name="Rounded Rectangle 24"/>
           <p:cNvSpPr/>
           <p:nvPr/>
         </p:nvSpPr>
         <p:spPr>
           <a:xfrm>
-            <a:off x="8200948" y="969264"/>
-            <a:ext cx="868680" cy="292608"/>
-          </a:xfrm>
-          <a:prstGeom prst="rect">
-            <a:avLst/>
+            <a:off x="5449824" y="2633472"/>
+            <a:ext cx="6376111" cy="1207008"/>
+          </a:xfrm>
+          <a:prstGeom prst="roundRect">
+            <a:avLst>
+              <a:gd name="adj" fmla="val 5000"/>
+            </a:avLst>
           </a:prstGeom>
           <a:solidFill>
-            <a:srgbClr val="1E293B"/>
+            <a:srgbClr val="FFFFFF"/>
+          </a:solidFill>
+          <a:ln w="12700">
+            <a:solidFill>
+              <a:srgbClr val="3B5174"/>
+            </a:solidFill>
+          </a:ln>
+          <a:effectLst/>
+        </p:spPr>
+        <p:style>
+          <a:lnRef idx="1">
+            <a:schemeClr val="accent1"/>
+          </a:lnRef>
+          <a:fillRef idx="3">
+            <a:schemeClr val="accent1"/>
+          </a:fillRef>
+          <a:effectRef idx="2">
+            <a:schemeClr val="accent1"/>
+          </a:effectRef>
+          <a:fontRef idx="minor">
+            <a:schemeClr val="lt1"/>
+          </a:fontRef>
+        </p:style>
+        <p:txBody>
+          <a:bodyPr rtlCol="0" anchor="ctr"/>
+          <a:lstStyle/>
+          <a:p>
+            <a:pPr algn="ctr"/>
+          </a:p>
+        </p:txBody>
+      </p:sp>
+      <p:sp>
+        <p:nvSpPr>
+          <p:cNvPr id="26" name="TextBox 25"/>
+          <p:cNvSpPr txBox="1"/>
+          <p:nvPr/>
+        </p:nvSpPr>
+        <p:spPr>
+          <a:xfrm>
+            <a:off x="5650992" y="2779776"/>
+            <a:ext cx="6065215" cy="365760"/>
+          </a:xfrm>
+          <a:prstGeom prst="rect">
+            <a:avLst/>
+          </a:prstGeom>
+          <a:noFill/>
+        </p:spPr>
+        <p:txBody>
+          <a:bodyPr wrap="square" anchor="t" lIns="36000" rIns="36000" tIns="18000" bIns="18000">
+            <a:spAutoFit/>
+          </a:bodyPr>
+          <a:lstStyle/>
+          <a:p>
+            <a:pPr algn="l"/>
+            <a:r>
+              <a:rPr sz="1500" b="1" i="0">
+                <a:solidFill>
+                  <a:srgbClr val="3B5174"/>
+                </a:solidFill>
+                <a:latin typeface="Noto Sans JP"/>
+              </a:rPr>
+              <a:t>垂直面で流れ落ちない</a:t>
+            </a:r>
+          </a:p>
+        </p:txBody>
+      </p:sp>
+      <p:sp>
+        <p:nvSpPr>
+          <p:cNvPr id="27" name="TextBox 26"/>
+          <p:cNvSpPr txBox="1"/>
+          <p:nvPr/>
+        </p:nvSpPr>
+        <p:spPr>
+          <a:xfrm>
+            <a:off x="5650992" y="3200400"/>
+            <a:ext cx="6065215" cy="566928"/>
+          </a:xfrm>
+          <a:prstGeom prst="rect">
+            <a:avLst/>
+          </a:prstGeom>
+          <a:noFill/>
+        </p:spPr>
+        <p:txBody>
+          <a:bodyPr wrap="square" anchor="t" lIns="36000" rIns="36000" tIns="18000" bIns="18000">
+            <a:spAutoFit/>
+          </a:bodyPr>
+          <a:lstStyle/>
+          <a:p>
+            <a:pPr algn="l"/>
+            <a:r>
+              <a:rPr sz="1200" b="0" i="0">
+                <a:solidFill>
+                  <a:srgbClr val="334155"/>
+                </a:solidFill>
+                <a:latin typeface="Noto Sans JP"/>
+              </a:rPr>
+              <a:t>塗布後は形状を保持して付着</a:t>
+            </a:r>
+          </a:p>
+          <a:p>
+            <a:pPr algn="l"/>
+            <a:r>
+              <a:rPr sz="1200" b="0" i="0">
+                <a:solidFill>
+                  <a:srgbClr val="334155"/>
+                </a:solidFill>
+                <a:latin typeface="Noto Sans JP"/>
+              </a:rPr>
+              <a:t>→ 木材・壁面など垂直基材にも保持</a:t>
+            </a:r>
+          </a:p>
+        </p:txBody>
+      </p:sp>
+      <p:sp>
+        <p:nvSpPr>
+          <p:cNvPr id="28" name="Rounded Rectangle 27"/>
+          <p:cNvSpPr/>
+          <p:nvPr/>
+        </p:nvSpPr>
+        <p:spPr>
+          <a:xfrm>
+            <a:off x="365760" y="4023360"/>
+            <a:ext cx="4114800" cy="1207008"/>
+          </a:xfrm>
+          <a:prstGeom prst="roundRect">
+            <a:avLst>
+              <a:gd name="adj" fmla="val 5000"/>
+            </a:avLst>
+          </a:prstGeom>
+          <a:solidFill>
+            <a:srgbClr val="F1F5F9"/>
+          </a:solidFill>
+          <a:ln w="6350">
+            <a:solidFill>
+              <a:srgbClr val="E2E8F0"/>
+            </a:solidFill>
+          </a:ln>
+          <a:effectLst/>
+        </p:spPr>
+        <p:style>
+          <a:lnRef idx="1">
+            <a:schemeClr val="accent1"/>
+          </a:lnRef>
+          <a:fillRef idx="3">
+            <a:schemeClr val="accent1"/>
+          </a:fillRef>
+          <a:effectRef idx="2">
+            <a:schemeClr val="accent1"/>
+          </a:effectRef>
+          <a:fontRef idx="minor">
+            <a:schemeClr val="lt1"/>
+          </a:fontRef>
+        </p:style>
+        <p:txBody>
+          <a:bodyPr rtlCol="0" anchor="ctr"/>
+          <a:lstStyle/>
+          <a:p>
+            <a:pPr algn="ctr"/>
+          </a:p>
+        </p:txBody>
+      </p:sp>
+      <p:sp>
+        <p:nvSpPr>
+          <p:cNvPr id="29" name="Rectangle 28"/>
+          <p:cNvSpPr/>
+          <p:nvPr/>
+        </p:nvSpPr>
+        <p:spPr>
+          <a:xfrm>
+            <a:off x="365760" y="4023360"/>
+            <a:ext cx="54864" cy="1207008"/>
+          </a:xfrm>
+          <a:prstGeom prst="rect">
+            <a:avLst/>
+          </a:prstGeom>
+          <a:solidFill>
+            <a:srgbClr val="D4A574"/>
           </a:solidFill>
           <a:ln>
             <a:noFill/>
@@ -18544,84 +18332,176 @@
       </p:sp>
       <p:sp>
         <p:nvSpPr>
-          <p:cNvPr id="38" name="TextBox 37"/>
-          <p:cNvSpPr txBox="1"/>
-          <p:nvPr/>
-        </p:nvSpPr>
-        <p:spPr>
-          <a:xfrm>
-            <a:off x="8200948" y="969264"/>
-            <a:ext cx="868680" cy="292608"/>
-          </a:xfrm>
-          <a:prstGeom prst="rect">
-            <a:avLst/>
-          </a:prstGeom>
-          <a:noFill/>
-        </p:spPr>
-        <p:txBody>
-          <a:bodyPr wrap="square" anchor="ctr" lIns="36000" rIns="36000" tIns="18000" bIns="18000">
-            <a:spAutoFit/>
-          </a:bodyPr>
-          <a:lstStyle/>
-          <a:p>
-            <a:pPr algn="ctr"/>
-            <a:r>
-              <a:rPr sz="1100" b="1" i="0">
-                <a:solidFill>
-                  <a:srgbClr val="FFFFFF"/>
-                </a:solidFill>
-                <a:latin typeface="Noto Sans JP"/>
-              </a:rPr>
-              <a:t>Photo</a:t>
-            </a:r>
-          </a:p>
-        </p:txBody>
-      </p:sp>
-      <p:sp>
-        <p:nvSpPr>
-          <p:cNvPr id="39" name="TextBox 38"/>
-          <p:cNvSpPr txBox="1"/>
-          <p:nvPr/>
-        </p:nvSpPr>
-        <p:spPr>
-          <a:xfrm>
-            <a:off x="8091220" y="859536"/>
-            <a:ext cx="3734714" cy="2194560"/>
-          </a:xfrm>
-          <a:prstGeom prst="rect">
-            <a:avLst/>
-          </a:prstGeom>
-          <a:noFill/>
-        </p:spPr>
-        <p:txBody>
-          <a:bodyPr wrap="square" anchor="ctr" lIns="36000" rIns="36000" tIns="18000" bIns="18000">
-            <a:spAutoFit/>
-          </a:bodyPr>
-          <a:lstStyle/>
-          <a:p>
-            <a:pPr algn="ctr"/>
+          <p:cNvPr id="30" name="TextBox 29"/>
+          <p:cNvSpPr txBox="1"/>
+          <p:nvPr/>
+        </p:nvSpPr>
+        <p:spPr>
+          <a:xfrm>
+            <a:off x="566928" y="4187952"/>
+            <a:ext cx="3803904" cy="365760"/>
+          </a:xfrm>
+          <a:prstGeom prst="rect">
+            <a:avLst/>
+          </a:prstGeom>
+          <a:noFill/>
+        </p:spPr>
+        <p:txBody>
+          <a:bodyPr wrap="square" anchor="t" lIns="36000" rIns="36000" tIns="18000" bIns="18000">
+            <a:spAutoFit/>
+          </a:bodyPr>
+          <a:lstStyle/>
+          <a:p>
+            <a:pPr algn="l"/>
+            <a:r>
+              <a:rPr sz="1500" b="1" i="0">
+                <a:solidFill>
+                  <a:srgbClr val="1E293B"/>
+                </a:solidFill>
+                <a:latin typeface="Noto Sans JP"/>
+              </a:rPr>
+              <a:t>自己修復性</a:t>
+            </a:r>
+          </a:p>
+        </p:txBody>
+      </p:sp>
+      <p:sp>
+        <p:nvSpPr>
+          <p:cNvPr id="31" name="TextBox 30"/>
+          <p:cNvSpPr txBox="1"/>
+          <p:nvPr/>
+        </p:nvSpPr>
+        <p:spPr>
+          <a:xfrm>
+            <a:off x="566928" y="4663440"/>
+            <a:ext cx="3803904" cy="457200"/>
+          </a:xfrm>
+          <a:prstGeom prst="rect">
+            <a:avLst/>
+          </a:prstGeom>
+          <a:noFill/>
+        </p:spPr>
+        <p:txBody>
+          <a:bodyPr wrap="square" anchor="t" lIns="36000" rIns="36000" tIns="18000" bIns="18000">
+            <a:spAutoFit/>
+          </a:bodyPr>
+          <a:lstStyle/>
+          <a:p>
+            <a:pPr algn="l"/>
             <a:r>
               <a:rPr sz="1200" b="0" i="0">
                 <a:solidFill>
-                  <a:srgbClr val="AAB4C0"/>
-                </a:solidFill>
-                <a:latin typeface="Noto Sans JP"/>
-              </a:rPr>
-              <a:t>（論文の図を貼り付け）</a:t>
-            </a:r>
-          </a:p>
-        </p:txBody>
-      </p:sp>
-      <p:sp>
-        <p:nvSpPr>
-          <p:cNvPr id="40" name="TextBox 39"/>
-          <p:cNvSpPr txBox="1"/>
-          <p:nvPr/>
-        </p:nvSpPr>
-        <p:spPr>
-          <a:xfrm>
-            <a:off x="8091220" y="3090672"/>
-            <a:ext cx="3734714" cy="274320"/>
+                  <a:srgbClr val="334155"/>
+                </a:solidFill>
+                <a:latin typeface="Noto Sans JP"/>
+              </a:rPr>
+              <a:t>step-strain で G' が即時回復</a:t>
+            </a:r>
+          </a:p>
+        </p:txBody>
+      </p:sp>
+      <p:sp>
+        <p:nvSpPr>
+          <p:cNvPr id="32" name="Right Arrow 31"/>
+          <p:cNvSpPr/>
+          <p:nvPr/>
+        </p:nvSpPr>
+        <p:spPr>
+          <a:xfrm>
+            <a:off x="4645152" y="4425696"/>
+            <a:ext cx="640080" cy="402336"/>
+          </a:xfrm>
+          <a:prstGeom prst="rightArrow">
+            <a:avLst/>
+          </a:prstGeom>
+          <a:solidFill>
+            <a:srgbClr val="D4A574"/>
+          </a:solidFill>
+          <a:ln>
+            <a:noFill/>
+          </a:ln>
+          <a:effectLst/>
+        </p:spPr>
+        <p:style>
+          <a:lnRef idx="1">
+            <a:schemeClr val="accent1"/>
+          </a:lnRef>
+          <a:fillRef idx="3">
+            <a:schemeClr val="accent1"/>
+          </a:fillRef>
+          <a:effectRef idx="2">
+            <a:schemeClr val="accent1"/>
+          </a:effectRef>
+          <a:fontRef idx="minor">
+            <a:schemeClr val="lt1"/>
+          </a:fontRef>
+        </p:style>
+        <p:txBody>
+          <a:bodyPr rtlCol="0" anchor="ctr"/>
+          <a:lstStyle/>
+          <a:p>
+            <a:pPr algn="ctr"/>
+          </a:p>
+        </p:txBody>
+      </p:sp>
+      <p:sp>
+        <p:nvSpPr>
+          <p:cNvPr id="33" name="Rounded Rectangle 32"/>
+          <p:cNvSpPr/>
+          <p:nvPr/>
+        </p:nvSpPr>
+        <p:spPr>
+          <a:xfrm>
+            <a:off x="5449824" y="4023360"/>
+            <a:ext cx="6376111" cy="1207008"/>
+          </a:xfrm>
+          <a:prstGeom prst="roundRect">
+            <a:avLst>
+              <a:gd name="adj" fmla="val 5000"/>
+            </a:avLst>
+          </a:prstGeom>
+          <a:solidFill>
+            <a:srgbClr val="FFFFFF"/>
+          </a:solidFill>
+          <a:ln w="12700">
+            <a:solidFill>
+              <a:srgbClr val="D4A574"/>
+            </a:solidFill>
+          </a:ln>
+          <a:effectLst/>
+        </p:spPr>
+        <p:style>
+          <a:lnRef idx="1">
+            <a:schemeClr val="accent1"/>
+          </a:lnRef>
+          <a:fillRef idx="3">
+            <a:schemeClr val="accent1"/>
+          </a:fillRef>
+          <a:effectRef idx="2">
+            <a:schemeClr val="accent1"/>
+          </a:effectRef>
+          <a:fontRef idx="minor">
+            <a:schemeClr val="lt1"/>
+          </a:fontRef>
+        </p:style>
+        <p:txBody>
+          <a:bodyPr rtlCol="0" anchor="ctr"/>
+          <a:lstStyle/>
+          <a:p>
+            <a:pPr algn="ctr"/>
+          </a:p>
+        </p:txBody>
+      </p:sp>
+      <p:sp>
+        <p:nvSpPr>
+          <p:cNvPr id="34" name="TextBox 33"/>
+          <p:cNvSpPr txBox="1"/>
+          <p:nvPr/>
+        </p:nvSpPr>
+        <p:spPr>
+          <a:xfrm>
+            <a:off x="5650992" y="4169664"/>
+            <a:ext cx="6065215" cy="365760"/>
           </a:xfrm>
           <a:prstGeom prst="rect">
             <a:avLst/>
@@ -18634,29 +18514,29 @@
           </a:bodyPr>
           <a:lstStyle/>
           <a:p>
-            <a:pPr algn="ctr"/>
-            <a:r>
-              <a:rPr sz="1000" b="0" i="1">
-                <a:solidFill>
-                  <a:srgbClr val="64748B"/>
-                </a:solidFill>
-                <a:latin typeface="Noto Sans JP"/>
-              </a:rPr>
-              <a:t>ノズル噴霧の様子</a:t>
-            </a:r>
-          </a:p>
-        </p:txBody>
-      </p:sp>
-      <p:sp>
-        <p:nvSpPr>
-          <p:cNvPr id="41" name="TextBox 40"/>
-          <p:cNvSpPr txBox="1"/>
-          <p:nvPr/>
-        </p:nvSpPr>
-        <p:spPr>
-          <a:xfrm>
-            <a:off x="8091220" y="3401568"/>
-            <a:ext cx="3734714" cy="237744"/>
+            <a:pPr algn="l"/>
+            <a:r>
+              <a:rPr sz="1500" b="1" i="0">
+                <a:solidFill>
+                  <a:srgbClr val="D4A574"/>
+                </a:solidFill>
+                <a:latin typeface="Noto Sans JP"/>
+              </a:rPr>
+              <a:t>到達後すぐ保護膜を形成</a:t>
+            </a:r>
+          </a:p>
+        </p:txBody>
+      </p:sp>
+      <p:sp>
+        <p:nvSpPr>
+          <p:cNvPr id="35" name="TextBox 34"/>
+          <p:cNvSpPr txBox="1"/>
+          <p:nvPr/>
+        </p:nvSpPr>
+        <p:spPr>
+          <a:xfrm>
+            <a:off x="5650992" y="4590288"/>
+            <a:ext cx="6065215" cy="566928"/>
           </a:xfrm>
           <a:prstGeom prst="rect">
             <a:avLst/>
@@ -18671,272 +18551,39 @@
           <a:p>
             <a:pPr algn="l"/>
             <a:r>
-              <a:rPr sz="1000" b="1" i="0">
-                <a:solidFill>
-                  <a:srgbClr val="64748B"/>
-                </a:solidFill>
-                <a:latin typeface="Noto Sans JP"/>
-              </a:rPr>
-              <a:t>SPRAY</a:t>
-            </a:r>
-          </a:p>
-        </p:txBody>
-      </p:sp>
-      <p:sp>
-        <p:nvSpPr>
-          <p:cNvPr id="42" name="TextBox 41"/>
-          <p:cNvSpPr txBox="1"/>
-          <p:nvPr/>
-        </p:nvSpPr>
-        <p:spPr>
-          <a:xfrm>
-            <a:off x="8091220" y="3639312"/>
-            <a:ext cx="3734714" cy="310896"/>
-          </a:xfrm>
-          <a:prstGeom prst="rect">
-            <a:avLst/>
-          </a:prstGeom>
-          <a:noFill/>
-        </p:spPr>
-        <p:txBody>
-          <a:bodyPr wrap="square" anchor="t" lIns="36000" rIns="36000" tIns="18000" bIns="18000">
-            <a:spAutoFit/>
-          </a:bodyPr>
-          <a:lstStyle/>
-          <a:p>
-            <a:pPr algn="l"/>
-            <a:r>
-              <a:rPr sz="1400" b="1" i="0">
-                <a:solidFill>
-                  <a:srgbClr val="1E293B"/>
-                </a:solidFill>
-                <a:latin typeface="Noto Sans JP"/>
-              </a:rPr>
-              <a:t>スプレー散布適性</a:t>
-            </a:r>
-          </a:p>
-        </p:txBody>
-      </p:sp>
-      <p:sp>
-        <p:nvSpPr>
-          <p:cNvPr id="43" name="TextBox 42"/>
-          <p:cNvSpPr txBox="1"/>
-          <p:nvPr/>
-        </p:nvSpPr>
-        <p:spPr>
-          <a:xfrm>
-            <a:off x="8091220" y="4023360"/>
-            <a:ext cx="182880" cy="274320"/>
-          </a:xfrm>
-          <a:prstGeom prst="rect">
-            <a:avLst/>
-          </a:prstGeom>
-          <a:noFill/>
-        </p:spPr>
-        <p:txBody>
-          <a:bodyPr wrap="square" anchor="t" lIns="36000" rIns="36000" tIns="18000" bIns="18000">
-            <a:spAutoFit/>
-          </a:bodyPr>
-          <a:lstStyle/>
-          <a:p>
-            <a:pPr algn="l"/>
-            <a:r>
-              <a:rPr sz="1100" b="0" i="0">
-                <a:solidFill>
-                  <a:srgbClr val="3B5174"/>
-                </a:solidFill>
-                <a:latin typeface="Noto Sans JP"/>
-              </a:rPr>
-              <a:t>•</a:t>
-            </a:r>
-          </a:p>
-        </p:txBody>
-      </p:sp>
-      <p:sp>
-        <p:nvSpPr>
-          <p:cNvPr id="44" name="TextBox 43"/>
-          <p:cNvSpPr txBox="1"/>
-          <p:nvPr/>
-        </p:nvSpPr>
-        <p:spPr>
-          <a:xfrm>
-            <a:off x="8292388" y="4023360"/>
-            <a:ext cx="3533546" cy="274320"/>
-          </a:xfrm>
-          <a:prstGeom prst="rect">
-            <a:avLst/>
-          </a:prstGeom>
-          <a:noFill/>
-        </p:spPr>
-        <p:txBody>
-          <a:bodyPr wrap="square" anchor="t" lIns="36000" rIns="36000" tIns="18000" bIns="18000">
-            <a:spAutoFit/>
-          </a:bodyPr>
-          <a:lstStyle/>
-          <a:p>
-            <a:pPr algn="l"/>
-            <a:r>
-              <a:rPr sz="1100" b="0" i="0">
+              <a:rPr sz="1200" b="0" i="0">
                 <a:solidFill>
                   <a:srgbClr val="334155"/>
                 </a:solidFill>
                 <a:latin typeface="Noto Sans JP"/>
               </a:rPr>
-              <a:t>高せん断で粘度が急低下</a:t>
-            </a:r>
-          </a:p>
-        </p:txBody>
-      </p:sp>
-      <p:sp>
-        <p:nvSpPr>
-          <p:cNvPr id="45" name="TextBox 44"/>
-          <p:cNvSpPr txBox="1"/>
-          <p:nvPr/>
-        </p:nvSpPr>
-        <p:spPr>
-          <a:xfrm>
-            <a:off x="8091220" y="4334256"/>
-            <a:ext cx="182880" cy="274320"/>
-          </a:xfrm>
-          <a:prstGeom prst="rect">
-            <a:avLst/>
-          </a:prstGeom>
-          <a:noFill/>
-        </p:spPr>
-        <p:txBody>
-          <a:bodyPr wrap="square" anchor="t" lIns="36000" rIns="36000" tIns="18000" bIns="18000">
-            <a:spAutoFit/>
-          </a:bodyPr>
-          <a:lstStyle/>
-          <a:p>
-            <a:pPr algn="l"/>
-            <a:r>
-              <a:rPr sz="1100" b="0" i="0">
-                <a:solidFill>
-                  <a:srgbClr val="3B5174"/>
-                </a:solidFill>
-                <a:latin typeface="Noto Sans JP"/>
-              </a:rPr>
-              <a:t>•</a:t>
-            </a:r>
-          </a:p>
-        </p:txBody>
-      </p:sp>
-      <p:sp>
-        <p:nvSpPr>
-          <p:cNvPr id="46" name="TextBox 45"/>
-          <p:cNvSpPr txBox="1"/>
-          <p:nvPr/>
-        </p:nvSpPr>
-        <p:spPr>
-          <a:xfrm>
-            <a:off x="8292388" y="4334256"/>
-            <a:ext cx="3533546" cy="274320"/>
-          </a:xfrm>
-          <a:prstGeom prst="rect">
-            <a:avLst/>
-          </a:prstGeom>
-          <a:noFill/>
-        </p:spPr>
-        <p:txBody>
-          <a:bodyPr wrap="square" anchor="t" lIns="36000" rIns="36000" tIns="18000" bIns="18000">
-            <a:spAutoFit/>
-          </a:bodyPr>
-          <a:lstStyle/>
-          <a:p>
-            <a:pPr algn="l"/>
-            <a:r>
-              <a:rPr sz="1100" b="0" i="0">
+              <a:t>散布直後に再ゲル化</a:t>
+            </a:r>
+          </a:p>
+          <a:p>
+            <a:pPr algn="l"/>
+            <a:r>
+              <a:rPr sz="1200" b="0" i="0">
                 <a:solidFill>
                   <a:srgbClr val="334155"/>
                 </a:solidFill>
                 <a:latin typeface="Noto Sans JP"/>
               </a:rPr>
-              <a:t>到達後すぐ高粘度を回復</a:t>
-            </a:r>
-          </a:p>
-        </p:txBody>
-      </p:sp>
-      <p:sp>
-        <p:nvSpPr>
-          <p:cNvPr id="47" name="TextBox 46"/>
-          <p:cNvSpPr txBox="1"/>
-          <p:nvPr/>
-        </p:nvSpPr>
-        <p:spPr>
-          <a:xfrm>
-            <a:off x="8091220" y="4645152"/>
-            <a:ext cx="182880" cy="274320"/>
-          </a:xfrm>
-          <a:prstGeom prst="rect">
-            <a:avLst/>
-          </a:prstGeom>
-          <a:noFill/>
-        </p:spPr>
-        <p:txBody>
-          <a:bodyPr wrap="square" anchor="t" lIns="36000" rIns="36000" tIns="18000" bIns="18000">
-            <a:spAutoFit/>
-          </a:bodyPr>
-          <a:lstStyle/>
-          <a:p>
-            <a:pPr algn="l"/>
-            <a:r>
-              <a:rPr sz="1100" b="0" i="0">
-                <a:solidFill>
-                  <a:srgbClr val="3B5174"/>
-                </a:solidFill>
-                <a:latin typeface="Noto Sans JP"/>
-              </a:rPr>
-              <a:t>•</a:t>
-            </a:r>
-          </a:p>
-        </p:txBody>
-      </p:sp>
-      <p:sp>
-        <p:nvSpPr>
-          <p:cNvPr id="48" name="TextBox 47"/>
-          <p:cNvSpPr txBox="1"/>
-          <p:nvPr/>
-        </p:nvSpPr>
-        <p:spPr>
-          <a:xfrm>
-            <a:off x="8292388" y="4645152"/>
-            <a:ext cx="3533546" cy="274320"/>
-          </a:xfrm>
-          <a:prstGeom prst="rect">
-            <a:avLst/>
-          </a:prstGeom>
-          <a:noFill/>
-        </p:spPr>
-        <p:txBody>
-          <a:bodyPr wrap="square" anchor="t" lIns="36000" rIns="36000" tIns="18000" bIns="18000">
-            <a:spAutoFit/>
-          </a:bodyPr>
-          <a:lstStyle/>
-          <a:p>
-            <a:pPr algn="l"/>
-            <a:r>
-              <a:rPr sz="1100" b="0" i="0">
-                <a:solidFill>
-                  <a:srgbClr val="334155"/>
-                </a:solidFill>
-                <a:latin typeface="Noto Sans JP"/>
-              </a:rPr>
-              <a:t>既存ホース・ノズルと互換</a:t>
-            </a:r>
-          </a:p>
-        </p:txBody>
-      </p:sp>
-      <p:sp>
-        <p:nvSpPr>
-          <p:cNvPr id="49" name="Rounded Rectangle 48"/>
+              <a:t>→ 風雨・自重で流出せず防火層を維持</a:t>
+            </a:r>
+          </a:p>
+        </p:txBody>
+      </p:sp>
+      <p:sp>
+        <p:nvSpPr>
+          <p:cNvPr id="36" name="Rounded Rectangle 35"/>
           <p:cNvSpPr/>
           <p:nvPr/>
         </p:nvSpPr>
         <p:spPr>
           <a:xfrm>
-            <a:off x="365760" y="5980176"/>
-            <a:ext cx="11460175" cy="658368"/>
+            <a:off x="365760" y="6089904"/>
+            <a:ext cx="11460175" cy="566928"/>
           </a:xfrm>
           <a:prstGeom prst="roundRect">
             <a:avLst>
@@ -18975,14 +18622,14 @@
       </p:sp>
       <p:sp>
         <p:nvSpPr>
-          <p:cNvPr id="50" name="Rectangle 49"/>
+          <p:cNvPr id="37" name="Rectangle 36"/>
           <p:cNvSpPr/>
           <p:nvPr/>
         </p:nvSpPr>
         <p:spPr>
           <a:xfrm>
-            <a:off x="365760" y="5980176"/>
-            <a:ext cx="54864" cy="658368"/>
+            <a:off x="365760" y="6089904"/>
+            <a:ext cx="54864" cy="566928"/>
           </a:xfrm>
           <a:prstGeom prst="rect">
             <a:avLst/>
@@ -19019,14 +18666,14 @@
       </p:sp>
       <p:sp>
         <p:nvSpPr>
-          <p:cNvPr id="51" name="TextBox 50"/>
-          <p:cNvSpPr txBox="1"/>
-          <p:nvPr/>
-        </p:nvSpPr>
-        <p:spPr>
-          <a:xfrm>
-            <a:off x="548640" y="5980176"/>
-            <a:ext cx="365760" cy="658368"/>
+          <p:cNvPr id="38" name="TextBox 37"/>
+          <p:cNvSpPr txBox="1"/>
+          <p:nvPr/>
+        </p:nvSpPr>
+        <p:spPr>
+          <a:xfrm>
+            <a:off x="548640" y="6089904"/>
+            <a:ext cx="365760" cy="566928"/>
           </a:xfrm>
           <a:prstGeom prst="rect">
             <a:avLst/>
@@ -19047,21 +18694,21 @@
                 </a:solidFill>
                 <a:latin typeface="Noto Sans JP"/>
               </a:rPr>
-              <a:t>✓</a:t>
-            </a:r>
-          </a:p>
-        </p:txBody>
-      </p:sp>
-      <p:sp>
-        <p:nvSpPr>
-          <p:cNvPr id="52" name="TextBox 51"/>
-          <p:cNvSpPr txBox="1"/>
-          <p:nvPr/>
-        </p:nvSpPr>
-        <p:spPr>
-          <a:xfrm>
-            <a:off x="960120" y="5980176"/>
-            <a:ext cx="10774375" cy="658368"/>
+              <a:t>ⓘ</a:t>
+            </a:r>
+          </a:p>
+        </p:txBody>
+      </p:sp>
+      <p:sp>
+        <p:nvSpPr>
+          <p:cNvPr id="39" name="TextBox 38"/>
+          <p:cNvSpPr txBox="1"/>
+          <p:nvPr/>
+        </p:nvSpPr>
+        <p:spPr>
+          <a:xfrm>
+            <a:off x="960120" y="6089904"/>
+            <a:ext cx="10774375" cy="566928"/>
           </a:xfrm>
           <a:prstGeom prst="rect">
             <a:avLst/>
@@ -19082,7 +18729,7 @@
                 </a:solidFill>
                 <a:latin typeface="Noto Sans JP"/>
               </a:rPr>
-              <a:t>流動学的設計（低 n、高 G'）により、散布適性と付着保持を同時に達成</a:t>
+              <a:t>これらの実装性能はレオロジー実測値からの帰結。接触角・付着力の独立した測定試験は本論文では行われていない</a:t>
             </a:r>
           </a:p>
         </p:txBody>

--- a/slides.pptx
+++ b/slides.pptx
@@ -37934,7 +37934,7 @@
                 </a:solidFill>
                 <a:latin typeface="Noto Sans JP"/>
               </a:rPr>
-              <a:t>発泡指数（Foaming Index）の比較</a:t>
+              <a:t>SDS 添加：発泡性向上を期待したが、逆の結果に（Fig. 4）</a:t>
             </a:r>
           </a:p>
         </p:txBody>
@@ -38027,7 +38027,609 @@
         <p:spPr>
           <a:xfrm>
             <a:off x="365760" y="859536"/>
-            <a:ext cx="5638647" cy="2103120"/>
+            <a:ext cx="3291840" cy="1005840"/>
+          </a:xfrm>
+          <a:prstGeom prst="roundRect">
+            <a:avLst>
+              <a:gd name="adj" fmla="val 5000"/>
+            </a:avLst>
+          </a:prstGeom>
+          <a:solidFill>
+            <a:srgbClr val="F1F5F9"/>
+          </a:solidFill>
+          <a:ln w="15240">
+            <a:solidFill>
+              <a:srgbClr val="4A7C8C"/>
+            </a:solidFill>
+          </a:ln>
+          <a:effectLst/>
+        </p:spPr>
+        <p:style>
+          <a:lnRef idx="1">
+            <a:schemeClr val="accent1"/>
+          </a:lnRef>
+          <a:fillRef idx="3">
+            <a:schemeClr val="accent1"/>
+          </a:fillRef>
+          <a:effectRef idx="2">
+            <a:schemeClr val="accent1"/>
+          </a:effectRef>
+          <a:fontRef idx="minor">
+            <a:schemeClr val="lt1"/>
+          </a:fontRef>
+        </p:style>
+        <p:txBody>
+          <a:bodyPr rtlCol="0" anchor="ctr"/>
+          <a:lstStyle/>
+          <a:p>
+            <a:pPr algn="ctr"/>
+          </a:p>
+        </p:txBody>
+      </p:sp>
+      <p:sp>
+        <p:nvSpPr>
+          <p:cNvPr id="11" name="Rectangle 10"/>
+          <p:cNvSpPr/>
+          <p:nvPr/>
+        </p:nvSpPr>
+        <p:spPr>
+          <a:xfrm>
+            <a:off x="365760" y="859536"/>
+            <a:ext cx="54864" cy="1005840"/>
+          </a:xfrm>
+          <a:prstGeom prst="rect">
+            <a:avLst/>
+          </a:prstGeom>
+          <a:solidFill>
+            <a:srgbClr val="4A7C8C"/>
+          </a:solidFill>
+          <a:ln>
+            <a:noFill/>
+          </a:ln>
+          <a:effectLst/>
+        </p:spPr>
+        <p:style>
+          <a:lnRef idx="1">
+            <a:schemeClr val="accent1"/>
+          </a:lnRef>
+          <a:fillRef idx="3">
+            <a:schemeClr val="accent1"/>
+          </a:fillRef>
+          <a:effectRef idx="2">
+            <a:schemeClr val="accent1"/>
+          </a:effectRef>
+          <a:fontRef idx="minor">
+            <a:schemeClr val="lt1"/>
+          </a:fontRef>
+        </p:style>
+        <p:txBody>
+          <a:bodyPr rtlCol="0" anchor="ctr"/>
+          <a:lstStyle/>
+          <a:p>
+            <a:pPr algn="ctr"/>
+          </a:p>
+        </p:txBody>
+      </p:sp>
+      <p:sp>
+        <p:nvSpPr>
+          <p:cNvPr id="12" name="TextBox 11"/>
+          <p:cNvSpPr txBox="1"/>
+          <p:nvPr/>
+        </p:nvSpPr>
+        <p:spPr>
+          <a:xfrm>
+            <a:off x="566928" y="932688"/>
+            <a:ext cx="3017520" cy="219456"/>
+          </a:xfrm>
+          <a:prstGeom prst="rect">
+            <a:avLst/>
+          </a:prstGeom>
+          <a:noFill/>
+        </p:spPr>
+        <p:txBody>
+          <a:bodyPr wrap="square" anchor="t" lIns="36000" rIns="36000" tIns="18000" bIns="18000">
+            <a:spAutoFit/>
+          </a:bodyPr>
+          <a:lstStyle/>
+          <a:p>
+            <a:pPr algn="l"/>
+            <a:r>
+              <a:rPr sz="1000" b="1" i="0">
+                <a:solidFill>
+                  <a:srgbClr val="4A7C8C"/>
+                </a:solidFill>
+                <a:latin typeface="Noto Sans JP"/>
+              </a:rPr>
+              <a:t>仮説（SDS 添加の目的）</a:t>
+            </a:r>
+          </a:p>
+        </p:txBody>
+      </p:sp>
+      <p:sp>
+        <p:nvSpPr>
+          <p:cNvPr id="13" name="TextBox 12"/>
+          <p:cNvSpPr txBox="1"/>
+          <p:nvPr/>
+        </p:nvSpPr>
+        <p:spPr>
+          <a:xfrm>
+            <a:off x="566928" y="1207008"/>
+            <a:ext cx="3017520" cy="585216"/>
+          </a:xfrm>
+          <a:prstGeom prst="rect">
+            <a:avLst/>
+          </a:prstGeom>
+          <a:noFill/>
+        </p:spPr>
+        <p:txBody>
+          <a:bodyPr wrap="square" anchor="t" lIns="36000" rIns="36000" tIns="18000" bIns="18000">
+            <a:spAutoFit/>
+          </a:bodyPr>
+          <a:lstStyle/>
+          <a:p>
+            <a:pPr algn="l"/>
+            <a:r>
+              <a:rPr sz="1100" b="0" i="0">
+                <a:solidFill>
+                  <a:srgbClr val="334155"/>
+                </a:solidFill>
+                <a:latin typeface="Noto Sans JP"/>
+              </a:rPr>
+              <a:t>界面活性剤 SDS が発泡を促進</a:t>
+            </a:r>
+          </a:p>
+          <a:p>
+            <a:pPr algn="l"/>
+            <a:r>
+              <a:rPr sz="1100" b="0" i="0">
+                <a:solidFill>
+                  <a:srgbClr val="334155"/>
+                </a:solidFill>
+                <a:latin typeface="Noto Sans JP"/>
+              </a:rPr>
+              <a:t>→ Foaming Index が上昇</a:t>
+            </a:r>
+          </a:p>
+          <a:p>
+            <a:pPr algn="l"/>
+            <a:r>
+              <a:rPr sz="1100" b="0" i="0">
+                <a:solidFill>
+                  <a:srgbClr val="334155"/>
+                </a:solidFill>
+                <a:latin typeface="Noto Sans JP"/>
+              </a:rPr>
+              <a:t>→ エアロゲル断熱層が厚くなる</a:t>
+            </a:r>
+          </a:p>
+        </p:txBody>
+      </p:sp>
+      <p:sp>
+        <p:nvSpPr>
+          <p:cNvPr id="14" name="Right Arrow 13"/>
+          <p:cNvSpPr/>
+          <p:nvPr/>
+        </p:nvSpPr>
+        <p:spPr>
+          <a:xfrm>
+            <a:off x="3733723" y="1161288"/>
+            <a:ext cx="640080" cy="402336"/>
+          </a:xfrm>
+          <a:prstGeom prst="rightArrow">
+            <a:avLst/>
+          </a:prstGeom>
+          <a:solidFill>
+            <a:srgbClr val="64748B"/>
+          </a:solidFill>
+          <a:ln>
+            <a:noFill/>
+          </a:ln>
+          <a:effectLst/>
+        </p:spPr>
+        <p:style>
+          <a:lnRef idx="1">
+            <a:schemeClr val="accent1"/>
+          </a:lnRef>
+          <a:fillRef idx="3">
+            <a:schemeClr val="accent1"/>
+          </a:fillRef>
+          <a:effectRef idx="2">
+            <a:schemeClr val="accent1"/>
+          </a:effectRef>
+          <a:fontRef idx="minor">
+            <a:schemeClr val="lt1"/>
+          </a:fontRef>
+        </p:style>
+        <p:txBody>
+          <a:bodyPr rtlCol="0" anchor="ctr"/>
+          <a:lstStyle/>
+          <a:p>
+            <a:pPr algn="ctr"/>
+          </a:p>
+        </p:txBody>
+      </p:sp>
+      <p:sp>
+        <p:nvSpPr>
+          <p:cNvPr id="15" name="Rounded Rectangle 14"/>
+          <p:cNvSpPr/>
+          <p:nvPr/>
+        </p:nvSpPr>
+        <p:spPr>
+          <a:xfrm>
+            <a:off x="4449927" y="859536"/>
+            <a:ext cx="3291840" cy="1005840"/>
+          </a:xfrm>
+          <a:prstGeom prst="roundRect">
+            <a:avLst>
+              <a:gd name="adj" fmla="val 5000"/>
+            </a:avLst>
+          </a:prstGeom>
+          <a:solidFill>
+            <a:srgbClr val="F1F5F9"/>
+          </a:solidFill>
+          <a:ln w="10160">
+            <a:solidFill>
+              <a:srgbClr val="E2E8F0"/>
+            </a:solidFill>
+          </a:ln>
+          <a:effectLst/>
+        </p:spPr>
+        <p:style>
+          <a:lnRef idx="1">
+            <a:schemeClr val="accent1"/>
+          </a:lnRef>
+          <a:fillRef idx="3">
+            <a:schemeClr val="accent1"/>
+          </a:fillRef>
+          <a:effectRef idx="2">
+            <a:schemeClr val="accent1"/>
+          </a:effectRef>
+          <a:fontRef idx="minor">
+            <a:schemeClr val="lt1"/>
+          </a:fontRef>
+        </p:style>
+        <p:txBody>
+          <a:bodyPr rtlCol="0" anchor="ctr"/>
+          <a:lstStyle/>
+          <a:p>
+            <a:pPr algn="ctr"/>
+          </a:p>
+        </p:txBody>
+      </p:sp>
+      <p:sp>
+        <p:nvSpPr>
+          <p:cNvPr id="16" name="TextBox 15"/>
+          <p:cNvSpPr txBox="1"/>
+          <p:nvPr/>
+        </p:nvSpPr>
+        <p:spPr>
+          <a:xfrm>
+            <a:off x="4651095" y="932688"/>
+            <a:ext cx="3017520" cy="219456"/>
+          </a:xfrm>
+          <a:prstGeom prst="rect">
+            <a:avLst/>
+          </a:prstGeom>
+          <a:noFill/>
+        </p:spPr>
+        <p:txBody>
+          <a:bodyPr wrap="square" anchor="t" lIns="36000" rIns="36000" tIns="18000" bIns="18000">
+            <a:spAutoFit/>
+          </a:bodyPr>
+          <a:lstStyle/>
+          <a:p>
+            <a:pPr algn="l"/>
+            <a:r>
+              <a:rPr sz="1000" b="1" i="0">
+                <a:solidFill>
+                  <a:srgbClr val="64748B"/>
+                </a:solidFill>
+                <a:latin typeface="Noto Sans JP"/>
+              </a:rPr>
+              <a:t>実験</a:t>
+            </a:r>
+          </a:p>
+        </p:txBody>
+      </p:sp>
+      <p:sp>
+        <p:nvSpPr>
+          <p:cNvPr id="17" name="TextBox 16"/>
+          <p:cNvSpPr txBox="1"/>
+          <p:nvPr/>
+        </p:nvSpPr>
+        <p:spPr>
+          <a:xfrm>
+            <a:off x="4651095" y="1207008"/>
+            <a:ext cx="3017520" cy="585216"/>
+          </a:xfrm>
+          <a:prstGeom prst="rect">
+            <a:avLst/>
+          </a:prstGeom>
+          <a:noFill/>
+        </p:spPr>
+        <p:txBody>
+          <a:bodyPr wrap="square" anchor="t" lIns="36000" rIns="36000" tIns="18000" bIns="18000">
+            <a:spAutoFit/>
+          </a:bodyPr>
+          <a:lstStyle/>
+          <a:p>
+            <a:pPr algn="l"/>
+            <a:r>
+              <a:rPr sz="1100" b="0" i="0">
+                <a:solidFill>
+                  <a:srgbClr val="334155"/>
+                </a:solidFill>
+                <a:latin typeface="Noto Sans JP"/>
+              </a:rPr>
+              <a:t>SDS 0 / 0.1 / 0.5 wt% を添加した</a:t>
+            </a:r>
+          </a:p>
+          <a:p>
+            <a:pPr algn="l"/>
+            <a:r>
+              <a:rPr sz="1100" b="0" i="0">
+                <a:solidFill>
+                  <a:srgbClr val="334155"/>
+                </a:solidFill>
+                <a:latin typeface="Noto Sans JP"/>
+              </a:rPr>
+              <a:t>HEC+MC/CSP の燃焼試験</a:t>
+            </a:r>
+          </a:p>
+          <a:p>
+            <a:pPr algn="l"/>
+            <a:r>
+              <a:rPr sz="1100" b="0" i="0">
+                <a:solidFill>
+                  <a:srgbClr val="334155"/>
+                </a:solidFill>
+                <a:latin typeface="Noto Sans JP"/>
+              </a:rPr>
+              <a:t>→ Foaming Index を定量（Fig. 4a/4b）</a:t>
+            </a:r>
+          </a:p>
+        </p:txBody>
+      </p:sp>
+      <p:sp>
+        <p:nvSpPr>
+          <p:cNvPr id="18" name="Right Arrow 17"/>
+          <p:cNvSpPr/>
+          <p:nvPr/>
+        </p:nvSpPr>
+        <p:spPr>
+          <a:xfrm>
+            <a:off x="7817891" y="1161288"/>
+            <a:ext cx="640080" cy="402336"/>
+          </a:xfrm>
+          <a:prstGeom prst="rightArrow">
+            <a:avLst/>
+          </a:prstGeom>
+          <a:solidFill>
+            <a:srgbClr val="9F7639"/>
+          </a:solidFill>
+          <a:ln>
+            <a:noFill/>
+          </a:ln>
+          <a:effectLst/>
+        </p:spPr>
+        <p:style>
+          <a:lnRef idx="1">
+            <a:schemeClr val="accent1"/>
+          </a:lnRef>
+          <a:fillRef idx="3">
+            <a:schemeClr val="accent1"/>
+          </a:fillRef>
+          <a:effectRef idx="2">
+            <a:schemeClr val="accent1"/>
+          </a:effectRef>
+          <a:fontRef idx="minor">
+            <a:schemeClr val="lt1"/>
+          </a:fontRef>
+        </p:style>
+        <p:txBody>
+          <a:bodyPr rtlCol="0" anchor="ctr"/>
+          <a:lstStyle/>
+          <a:p>
+            <a:pPr algn="ctr"/>
+          </a:p>
+        </p:txBody>
+      </p:sp>
+      <p:sp>
+        <p:nvSpPr>
+          <p:cNvPr id="19" name="Rounded Rectangle 18"/>
+          <p:cNvSpPr/>
+          <p:nvPr/>
+        </p:nvSpPr>
+        <p:spPr>
+          <a:xfrm>
+            <a:off x="8534095" y="859536"/>
+            <a:ext cx="3291840" cy="1005840"/>
+          </a:xfrm>
+          <a:prstGeom prst="roundRect">
+            <a:avLst>
+              <a:gd name="adj" fmla="val 5000"/>
+            </a:avLst>
+          </a:prstGeom>
+          <a:solidFill>
+            <a:srgbClr val="FFF7ED"/>
+          </a:solidFill>
+          <a:ln w="17780">
+            <a:solidFill>
+              <a:srgbClr val="9F7639"/>
+            </a:solidFill>
+          </a:ln>
+          <a:effectLst/>
+        </p:spPr>
+        <p:style>
+          <a:lnRef idx="1">
+            <a:schemeClr val="accent1"/>
+          </a:lnRef>
+          <a:fillRef idx="3">
+            <a:schemeClr val="accent1"/>
+          </a:fillRef>
+          <a:effectRef idx="2">
+            <a:schemeClr val="accent1"/>
+          </a:effectRef>
+          <a:fontRef idx="minor">
+            <a:schemeClr val="lt1"/>
+          </a:fontRef>
+        </p:style>
+        <p:txBody>
+          <a:bodyPr rtlCol="0" anchor="ctr"/>
+          <a:lstStyle/>
+          <a:p>
+            <a:pPr algn="ctr"/>
+          </a:p>
+        </p:txBody>
+      </p:sp>
+      <p:sp>
+        <p:nvSpPr>
+          <p:cNvPr id="20" name="Rectangle 19"/>
+          <p:cNvSpPr/>
+          <p:nvPr/>
+        </p:nvSpPr>
+        <p:spPr>
+          <a:xfrm>
+            <a:off x="8534095" y="859536"/>
+            <a:ext cx="54864" cy="1005840"/>
+          </a:xfrm>
+          <a:prstGeom prst="rect">
+            <a:avLst/>
+          </a:prstGeom>
+          <a:solidFill>
+            <a:srgbClr val="9F7639"/>
+          </a:solidFill>
+          <a:ln>
+            <a:noFill/>
+          </a:ln>
+          <a:effectLst/>
+        </p:spPr>
+        <p:style>
+          <a:lnRef idx="1">
+            <a:schemeClr val="accent1"/>
+          </a:lnRef>
+          <a:fillRef idx="3">
+            <a:schemeClr val="accent1"/>
+          </a:fillRef>
+          <a:effectRef idx="2">
+            <a:schemeClr val="accent1"/>
+          </a:effectRef>
+          <a:fontRef idx="minor">
+            <a:schemeClr val="lt1"/>
+          </a:fontRef>
+        </p:style>
+        <p:txBody>
+          <a:bodyPr rtlCol="0" anchor="ctr"/>
+          <a:lstStyle/>
+          <a:p>
+            <a:pPr algn="ctr"/>
+          </a:p>
+        </p:txBody>
+      </p:sp>
+      <p:sp>
+        <p:nvSpPr>
+          <p:cNvPr id="21" name="TextBox 20"/>
+          <p:cNvSpPr txBox="1"/>
+          <p:nvPr/>
+        </p:nvSpPr>
+        <p:spPr>
+          <a:xfrm>
+            <a:off x="8735263" y="932688"/>
+            <a:ext cx="3017520" cy="219456"/>
+          </a:xfrm>
+          <a:prstGeom prst="rect">
+            <a:avLst/>
+          </a:prstGeom>
+          <a:noFill/>
+        </p:spPr>
+        <p:txBody>
+          <a:bodyPr wrap="square" anchor="t" lIns="36000" rIns="36000" tIns="18000" bIns="18000">
+            <a:spAutoFit/>
+          </a:bodyPr>
+          <a:lstStyle/>
+          <a:p>
+            <a:pPr algn="l"/>
+            <a:r>
+              <a:rPr sz="1000" b="1" i="0">
+                <a:solidFill>
+                  <a:srgbClr val="9F7639"/>
+                </a:solidFill>
+                <a:latin typeface="Noto Sans JP"/>
+              </a:rPr>
+              <a:t>結果（予想と逆）</a:t>
+            </a:r>
+          </a:p>
+        </p:txBody>
+      </p:sp>
+      <p:sp>
+        <p:nvSpPr>
+          <p:cNvPr id="22" name="TextBox 21"/>
+          <p:cNvSpPr txBox="1"/>
+          <p:nvPr/>
+        </p:nvSpPr>
+        <p:spPr>
+          <a:xfrm>
+            <a:off x="8735263" y="1207008"/>
+            <a:ext cx="3017520" cy="585216"/>
+          </a:xfrm>
+          <a:prstGeom prst="rect">
+            <a:avLst/>
+          </a:prstGeom>
+          <a:noFill/>
+        </p:spPr>
+        <p:txBody>
+          <a:bodyPr wrap="square" anchor="t" lIns="36000" rIns="36000" tIns="18000" bIns="18000">
+            <a:spAutoFit/>
+          </a:bodyPr>
+          <a:lstStyle/>
+          <a:p>
+            <a:pPr algn="l"/>
+            <a:r>
+              <a:rPr sz="1100" b="0" i="0">
+                <a:solidFill>
+                  <a:srgbClr val="334155"/>
+                </a:solidFill>
+                <a:latin typeface="Noto Sans JP"/>
+              </a:rPr>
+              <a:t>SDS 添加で Foaming Index が低下</a:t>
+            </a:r>
+          </a:p>
+          <a:p>
+            <a:pPr algn="l"/>
+            <a:r>
+              <a:rPr sz="1100" b="0" i="0">
+                <a:solidFill>
+                  <a:srgbClr val="334155"/>
+                </a:solidFill>
+                <a:latin typeface="Noto Sans JP"/>
+              </a:rPr>
+              <a:t>2.6（SDS 0%） → 2.3（0.1%）→ さらに低下（0.5%）</a:t>
+            </a:r>
+          </a:p>
+          <a:p>
+            <a:pPr algn="l"/>
+            <a:r>
+              <a:rPr sz="1100" b="0" i="0">
+                <a:solidFill>
+                  <a:srgbClr val="334155"/>
+                </a:solidFill>
+                <a:latin typeface="Noto Sans JP"/>
+              </a:rPr>
+              <a:t>発泡性向上には寄与せず</a:t>
+            </a:r>
+          </a:p>
+        </p:txBody>
+      </p:sp>
+      <p:sp>
+        <p:nvSpPr>
+          <p:cNvPr id="23" name="Rounded Rectangle 22"/>
+          <p:cNvSpPr/>
+          <p:nvPr/>
+        </p:nvSpPr>
+        <p:spPr>
+          <a:xfrm>
+            <a:off x="365760" y="2121408"/>
+            <a:ext cx="5638647" cy="1920240"/>
           </a:xfrm>
           <a:prstGeom prst="roundRect">
             <a:avLst>
@@ -38068,13 +38670,13 @@
       </p:sp>
       <p:sp>
         <p:nvSpPr>
-          <p:cNvPr id="11" name="Rectangle 10"/>
+          <p:cNvPr id="24" name="Rectangle 23"/>
           <p:cNvSpPr/>
           <p:nvPr/>
         </p:nvSpPr>
         <p:spPr>
           <a:xfrm>
-            <a:off x="475488" y="969264"/>
+            <a:off x="475488" y="2231136"/>
             <a:ext cx="868680" cy="292608"/>
           </a:xfrm>
           <a:prstGeom prst="rect">
@@ -38112,13 +38714,13 @@
       </p:sp>
       <p:sp>
         <p:nvSpPr>
-          <p:cNvPr id="12" name="TextBox 11"/>
-          <p:cNvSpPr txBox="1"/>
-          <p:nvPr/>
-        </p:nvSpPr>
-        <p:spPr>
-          <a:xfrm>
-            <a:off x="475488" y="969264"/>
+          <p:cNvPr id="25" name="TextBox 24"/>
+          <p:cNvSpPr txBox="1"/>
+          <p:nvPr/>
+        </p:nvSpPr>
+        <p:spPr>
+          <a:xfrm>
+            <a:off x="475488" y="2231136"/>
             <a:ext cx="868680" cy="292608"/>
           </a:xfrm>
           <a:prstGeom prst="rect">
@@ -38147,14 +38749,14 @@
       </p:sp>
       <p:sp>
         <p:nvSpPr>
-          <p:cNvPr id="13" name="TextBox 12"/>
-          <p:cNvSpPr txBox="1"/>
-          <p:nvPr/>
-        </p:nvSpPr>
-        <p:spPr>
-          <a:xfrm>
-            <a:off x="365760" y="859536"/>
-            <a:ext cx="5638647" cy="2103120"/>
+          <p:cNvPr id="26" name="TextBox 25"/>
+          <p:cNvSpPr txBox="1"/>
+          <p:nvPr/>
+        </p:nvSpPr>
+        <p:spPr>
+          <a:xfrm>
+            <a:off x="365760" y="2121408"/>
+            <a:ext cx="5638647" cy="1920240"/>
           </a:xfrm>
           <a:prstGeom prst="rect">
             <a:avLst/>
@@ -38182,13 +38784,13 @@
       </p:sp>
       <p:sp>
         <p:nvSpPr>
-          <p:cNvPr id="14" name="TextBox 13"/>
-          <p:cNvSpPr txBox="1"/>
-          <p:nvPr/>
-        </p:nvSpPr>
-        <p:spPr>
-          <a:xfrm>
-            <a:off x="365760" y="2999232"/>
+          <p:cNvPr id="27" name="TextBox 26"/>
+          <p:cNvSpPr txBox="1"/>
+          <p:nvPr/>
+        </p:nvSpPr>
+        <p:spPr>
+          <a:xfrm>
+            <a:off x="365760" y="4078224"/>
             <a:ext cx="5638647" cy="274320"/>
           </a:xfrm>
           <a:prstGeom prst="rect">
@@ -38210,21 +38812,21 @@
                 </a:solidFill>
                 <a:latin typeface="Noto Sans JP"/>
               </a:rPr>
-              <a:t>燃焼後の発泡層外観</a:t>
-            </a:r>
-          </a:p>
-        </p:txBody>
-      </p:sp>
-      <p:sp>
-        <p:nvSpPr>
-          <p:cNvPr id="15" name="Rounded Rectangle 14"/>
+              <a:t>燃焼後の発泡層外観（SDS 濃度別）</a:t>
+            </a:r>
+          </a:p>
+        </p:txBody>
+      </p:sp>
+      <p:sp>
+        <p:nvSpPr>
+          <p:cNvPr id="28" name="Rounded Rectangle 27"/>
           <p:cNvSpPr/>
           <p:nvPr/>
         </p:nvSpPr>
         <p:spPr>
           <a:xfrm>
-            <a:off x="6187287" y="859536"/>
-            <a:ext cx="5638647" cy="2103120"/>
+            <a:off x="6187287" y="2121408"/>
+            <a:ext cx="5638647" cy="1920240"/>
           </a:xfrm>
           <a:prstGeom prst="roundRect">
             <a:avLst>
@@ -38265,13 +38867,13 @@
       </p:sp>
       <p:sp>
         <p:nvSpPr>
-          <p:cNvPr id="16" name="Rectangle 15"/>
+          <p:cNvPr id="29" name="Rectangle 28"/>
           <p:cNvSpPr/>
           <p:nvPr/>
         </p:nvSpPr>
         <p:spPr>
           <a:xfrm>
-            <a:off x="6297015" y="969264"/>
+            <a:off x="6297015" y="2231136"/>
             <a:ext cx="868680" cy="292608"/>
           </a:xfrm>
           <a:prstGeom prst="rect">
@@ -38309,13 +38911,13 @@
       </p:sp>
       <p:sp>
         <p:nvSpPr>
-          <p:cNvPr id="17" name="TextBox 16"/>
-          <p:cNvSpPr txBox="1"/>
-          <p:nvPr/>
-        </p:nvSpPr>
-        <p:spPr>
-          <a:xfrm>
-            <a:off x="6297015" y="969264"/>
+          <p:cNvPr id="30" name="TextBox 29"/>
+          <p:cNvSpPr txBox="1"/>
+          <p:nvPr/>
+        </p:nvSpPr>
+        <p:spPr>
+          <a:xfrm>
+            <a:off x="6297015" y="2231136"/>
             <a:ext cx="868680" cy="292608"/>
           </a:xfrm>
           <a:prstGeom prst="rect">
@@ -38344,14 +38946,14 @@
       </p:sp>
       <p:sp>
         <p:nvSpPr>
-          <p:cNvPr id="18" name="TextBox 17"/>
-          <p:cNvSpPr txBox="1"/>
-          <p:nvPr/>
-        </p:nvSpPr>
-        <p:spPr>
-          <a:xfrm>
-            <a:off x="6187287" y="859536"/>
-            <a:ext cx="5638647" cy="2103120"/>
+          <p:cNvPr id="31" name="TextBox 30"/>
+          <p:cNvSpPr txBox="1"/>
+          <p:nvPr/>
+        </p:nvSpPr>
+        <p:spPr>
+          <a:xfrm>
+            <a:off x="6187287" y="2121408"/>
+            <a:ext cx="5638647" cy="1920240"/>
           </a:xfrm>
           <a:prstGeom prst="rect">
             <a:avLst/>
@@ -38379,13 +38981,13 @@
       </p:sp>
       <p:sp>
         <p:nvSpPr>
-          <p:cNvPr id="19" name="TextBox 18"/>
-          <p:cNvSpPr txBox="1"/>
-          <p:nvPr/>
-        </p:nvSpPr>
-        <p:spPr>
-          <a:xfrm>
-            <a:off x="6187287" y="2999232"/>
+          <p:cNvPr id="32" name="TextBox 31"/>
+          <p:cNvSpPr txBox="1"/>
+          <p:nvPr/>
+        </p:nvSpPr>
+        <p:spPr>
+          <a:xfrm>
+            <a:off x="6187287" y="4078224"/>
             <a:ext cx="5638647" cy="274320"/>
           </a:xfrm>
           <a:prstGeom prst="rect">
@@ -38407,21 +39009,21 @@
                 </a:solidFill>
                 <a:latin typeface="Noto Sans JP"/>
               </a:rPr>
-              <a:t>各配合系の Foaming Index</a:t>
-            </a:r>
-          </a:p>
-        </p:txBody>
-      </p:sp>
-      <p:sp>
-        <p:nvSpPr>
-          <p:cNvPr id="20" name="TextBox 19"/>
-          <p:cNvSpPr txBox="1"/>
-          <p:nvPr/>
-        </p:nvSpPr>
-        <p:spPr>
-          <a:xfrm>
-            <a:off x="365760" y="3374136"/>
-            <a:ext cx="5638647" cy="274320"/>
+              <a:t>各配合系の Foaming Index（定量）</a:t>
+            </a:r>
+          </a:p>
+        </p:txBody>
+      </p:sp>
+      <p:sp>
+        <p:nvSpPr>
+          <p:cNvPr id="33" name="TextBox 32"/>
+          <p:cNvSpPr txBox="1"/>
+          <p:nvPr/>
+        </p:nvSpPr>
+        <p:spPr>
+          <a:xfrm>
+            <a:off x="365760" y="4297680"/>
+            <a:ext cx="5730087" cy="237744"/>
           </a:xfrm>
           <a:prstGeom prst="rect">
             <a:avLst/>
@@ -38436,7 +39038,7 @@
           <a:p>
             <a:pPr algn="l"/>
             <a:r>
-              <a:rPr sz="1200" b="1" i="0">
+              <a:rPr sz="1100" b="1" i="0">
                 <a:solidFill>
                   <a:srgbClr val="64748B"/>
                 </a:solidFill>
@@ -38449,14 +39051,14 @@
       </p:sp>
       <p:sp>
         <p:nvSpPr>
-          <p:cNvPr id="21" name="TextBox 20"/>
-          <p:cNvSpPr txBox="1"/>
-          <p:nvPr/>
-        </p:nvSpPr>
-        <p:spPr>
-          <a:xfrm>
-            <a:off x="365760" y="3739896"/>
-            <a:ext cx="1463040" cy="274320"/>
+          <p:cNvPr id="34" name="TextBox 33"/>
+          <p:cNvSpPr txBox="1"/>
+          <p:nvPr/>
+        </p:nvSpPr>
+        <p:spPr>
+          <a:xfrm>
+            <a:off x="365760" y="4590288"/>
+            <a:ext cx="2926080" cy="274320"/>
           </a:xfrm>
           <a:prstGeom prst="rect">
             <a:avLst/>
@@ -38477,21 +39079,21 @@
                 </a:solidFill>
                 <a:latin typeface="Noto Sans JP"/>
               </a:rPr>
-              <a:t>AquaGel-K</a:t>
-            </a:r>
-          </a:p>
-        </p:txBody>
-      </p:sp>
-      <p:sp>
-        <p:nvSpPr>
-          <p:cNvPr id="22" name="Rounded Rectangle 21"/>
+              <a:t>HEC+MC/CSP 1-5（SDS 0%）</a:t>
+            </a:r>
+          </a:p>
+        </p:txBody>
+      </p:sp>
+      <p:sp>
+        <p:nvSpPr>
+          <p:cNvPr id="35" name="Rounded Rectangle 34"/>
           <p:cNvSpPr/>
           <p:nvPr/>
         </p:nvSpPr>
         <p:spPr>
           <a:xfrm>
-            <a:off x="1920240" y="3813048"/>
-            <a:ext cx="3124047" cy="146304"/>
+            <a:off x="3383280" y="4663440"/>
+            <a:ext cx="3081948" cy="146304"/>
           </a:xfrm>
           <a:prstGeom prst="roundRect">
             <a:avLst>
@@ -38532,14 +39134,14 @@
       </p:sp>
       <p:sp>
         <p:nvSpPr>
-          <p:cNvPr id="23" name="Rounded Rectangle 22"/>
+          <p:cNvPr id="36" name="Rounded Rectangle 35"/>
           <p:cNvSpPr/>
           <p:nvPr/>
         </p:nvSpPr>
         <p:spPr>
           <a:xfrm>
-            <a:off x="1920240" y="3813048"/>
-            <a:ext cx="62480" cy="146304"/>
+            <a:off x="3383280" y="4663440"/>
+            <a:ext cx="3081948" cy="146304"/>
           </a:xfrm>
           <a:prstGeom prst="roundRect">
             <a:avLst>
@@ -38547,7 +39149,7 @@
             </a:avLst>
           </a:prstGeom>
           <a:solidFill>
-            <a:srgbClr val="AAB4C0"/>
+            <a:srgbClr val="4A7C8C"/>
           </a:solidFill>
           <a:ln>
             <a:noFill/>
@@ -38578,14 +39180,14 @@
       </p:sp>
       <p:sp>
         <p:nvSpPr>
-          <p:cNvPr id="24" name="TextBox 23"/>
-          <p:cNvSpPr txBox="1"/>
-          <p:nvPr/>
-        </p:nvSpPr>
-        <p:spPr>
-          <a:xfrm>
-            <a:off x="5135727" y="3739896"/>
-            <a:ext cx="868680" cy="274320"/>
+          <p:cNvPr id="37" name="TextBox 36"/>
+          <p:cNvSpPr txBox="1"/>
+          <p:nvPr/>
+        </p:nvSpPr>
+        <p:spPr>
+          <a:xfrm>
+            <a:off x="6556668" y="4590288"/>
+            <a:ext cx="914400" cy="274320"/>
           </a:xfrm>
           <a:prstGeom prst="rect">
             <a:avLst/>
@@ -38606,21 +39208,21 @@
                 </a:solidFill>
                 <a:latin typeface="Noto Sans JP"/>
               </a:rPr>
-              <a:t>≈0</a:t>
-            </a:r>
-          </a:p>
-        </p:txBody>
-      </p:sp>
-      <p:sp>
-        <p:nvSpPr>
-          <p:cNvPr id="25" name="TextBox 24"/>
-          <p:cNvSpPr txBox="1"/>
-          <p:nvPr/>
-        </p:nvSpPr>
-        <p:spPr>
-          <a:xfrm>
-            <a:off x="365760" y="4151376"/>
-            <a:ext cx="1463040" cy="274320"/>
+              <a:t>≈2.6×</a:t>
+            </a:r>
+          </a:p>
+        </p:txBody>
+      </p:sp>
+      <p:sp>
+        <p:nvSpPr>
+          <p:cNvPr id="38" name="TextBox 37"/>
+          <p:cNvSpPr txBox="1"/>
+          <p:nvPr/>
+        </p:nvSpPr>
+        <p:spPr>
+          <a:xfrm>
+            <a:off x="365760" y="4956048"/>
+            <a:ext cx="2926080" cy="274320"/>
           </a:xfrm>
           <a:prstGeom prst="rect">
             <a:avLst/>
@@ -38641,21 +39243,21 @@
                 </a:solidFill>
                 <a:latin typeface="Noto Sans JP"/>
               </a:rPr>
-              <a:t>MHEC/CSP 1-5</a:t>
-            </a:r>
-          </a:p>
-        </p:txBody>
-      </p:sp>
-      <p:sp>
-        <p:nvSpPr>
-          <p:cNvPr id="26" name="Rounded Rectangle 25"/>
+              <a:t>HEC+MC/CSP/SDS 1-5-0.1</a:t>
+            </a:r>
+          </a:p>
+        </p:txBody>
+      </p:sp>
+      <p:sp>
+        <p:nvSpPr>
+          <p:cNvPr id="39" name="Rounded Rectangle 38"/>
           <p:cNvSpPr/>
           <p:nvPr/>
         </p:nvSpPr>
         <p:spPr>
           <a:xfrm>
-            <a:off x="1920240" y="4224528"/>
-            <a:ext cx="3124047" cy="146304"/>
+            <a:off x="3383280" y="5029200"/>
+            <a:ext cx="3081948" cy="146304"/>
           </a:xfrm>
           <a:prstGeom prst="roundRect">
             <a:avLst>
@@ -38696,14 +39298,14 @@
       </p:sp>
       <p:sp>
         <p:nvSpPr>
-          <p:cNvPr id="27" name="Rounded Rectangle 26"/>
+          <p:cNvPr id="40" name="Rounded Rectangle 39"/>
           <p:cNvSpPr/>
           <p:nvPr/>
         </p:nvSpPr>
         <p:spPr>
           <a:xfrm>
-            <a:off x="1920240" y="4224528"/>
-            <a:ext cx="1655745" cy="146304"/>
+            <a:off x="3383280" y="5029200"/>
+            <a:ext cx="2712114" cy="146304"/>
           </a:xfrm>
           <a:prstGeom prst="roundRect">
             <a:avLst>
@@ -38711,7 +39313,7 @@
             </a:avLst>
           </a:prstGeom>
           <a:solidFill>
-            <a:srgbClr val="9F7639"/>
+            <a:srgbClr val="64748B"/>
           </a:solidFill>
           <a:ln>
             <a:noFill/>
@@ -38742,14 +39344,14 @@
       </p:sp>
       <p:sp>
         <p:nvSpPr>
-          <p:cNvPr id="28" name="TextBox 27"/>
-          <p:cNvSpPr txBox="1"/>
-          <p:nvPr/>
-        </p:nvSpPr>
-        <p:spPr>
-          <a:xfrm>
-            <a:off x="5135727" y="4151376"/>
-            <a:ext cx="868680" cy="274320"/>
+          <p:cNvPr id="41" name="TextBox 40"/>
+          <p:cNvSpPr txBox="1"/>
+          <p:nvPr/>
+        </p:nvSpPr>
+        <p:spPr>
+          <a:xfrm>
+            <a:off x="6556668" y="4956048"/>
+            <a:ext cx="914400" cy="274320"/>
           </a:xfrm>
           <a:prstGeom prst="rect">
             <a:avLst/>
@@ -38770,21 +39372,21 @@
                 </a:solidFill>
                 <a:latin typeface="Noto Sans JP"/>
               </a:rPr>
-              <a:t>≈2.1×</a:t>
-            </a:r>
-          </a:p>
-        </p:txBody>
-      </p:sp>
-      <p:sp>
-        <p:nvSpPr>
-          <p:cNvPr id="29" name="TextBox 28"/>
-          <p:cNvSpPr txBox="1"/>
-          <p:nvPr/>
-        </p:nvSpPr>
-        <p:spPr>
-          <a:xfrm>
-            <a:off x="365760" y="4562856"/>
-            <a:ext cx="1463040" cy="274320"/>
+              <a:t>≈2.3×</a:t>
+            </a:r>
+          </a:p>
+        </p:txBody>
+      </p:sp>
+      <p:sp>
+        <p:nvSpPr>
+          <p:cNvPr id="42" name="TextBox 41"/>
+          <p:cNvSpPr txBox="1"/>
+          <p:nvPr/>
+        </p:nvSpPr>
+        <p:spPr>
+          <a:xfrm>
+            <a:off x="365760" y="5321808"/>
+            <a:ext cx="2926080" cy="274320"/>
           </a:xfrm>
           <a:prstGeom prst="rect">
             <a:avLst/>
@@ -38805,21 +39407,21 @@
                 </a:solidFill>
                 <a:latin typeface="Noto Sans JP"/>
               </a:rPr>
-              <a:t>HEC+MC/CSP/SDS 1-5-0.1</a:t>
-            </a:r>
-          </a:p>
-        </p:txBody>
-      </p:sp>
-      <p:sp>
-        <p:nvSpPr>
-          <p:cNvPr id="30" name="Rounded Rectangle 29"/>
+              <a:t>HEC+MC/CSP/SDS 1-5-0.5</a:t>
+            </a:r>
+          </a:p>
+        </p:txBody>
+      </p:sp>
+      <p:sp>
+        <p:nvSpPr>
+          <p:cNvPr id="43" name="Rounded Rectangle 42"/>
           <p:cNvSpPr/>
           <p:nvPr/>
         </p:nvSpPr>
         <p:spPr>
           <a:xfrm>
-            <a:off x="1920240" y="4636008"/>
-            <a:ext cx="3124047" cy="146304"/>
+            <a:off x="3383280" y="5394960"/>
+            <a:ext cx="3081948" cy="146304"/>
           </a:xfrm>
           <a:prstGeom prst="roundRect">
             <a:avLst>
@@ -38860,14 +39462,14 @@
       </p:sp>
       <p:sp>
         <p:nvSpPr>
-          <p:cNvPr id="31" name="Rounded Rectangle 30"/>
+          <p:cNvPr id="44" name="Rounded Rectangle 43"/>
           <p:cNvSpPr/>
           <p:nvPr/>
         </p:nvSpPr>
         <p:spPr>
           <a:xfrm>
-            <a:off x="1920240" y="4636008"/>
-            <a:ext cx="1874428" cy="146304"/>
+            <a:off x="3383280" y="5394960"/>
+            <a:ext cx="2219002" cy="146304"/>
           </a:xfrm>
           <a:prstGeom prst="roundRect">
             <a:avLst>
@@ -38875,7 +39477,7 @@
             </a:avLst>
           </a:prstGeom>
           <a:solidFill>
-            <a:srgbClr val="5B7A99"/>
+            <a:srgbClr val="9F7639"/>
           </a:solidFill>
           <a:ln>
             <a:noFill/>
@@ -38906,14 +39508,14 @@
       </p:sp>
       <p:sp>
         <p:nvSpPr>
-          <p:cNvPr id="32" name="TextBox 31"/>
-          <p:cNvSpPr txBox="1"/>
-          <p:nvPr/>
-        </p:nvSpPr>
-        <p:spPr>
-          <a:xfrm>
-            <a:off x="5135727" y="4562856"/>
-            <a:ext cx="868680" cy="274320"/>
+          <p:cNvPr id="45" name="TextBox 44"/>
+          <p:cNvSpPr txBox="1"/>
+          <p:nvPr/>
+        </p:nvSpPr>
+        <p:spPr>
+          <a:xfrm>
+            <a:off x="6556668" y="5321808"/>
+            <a:ext cx="914400" cy="274320"/>
           </a:xfrm>
           <a:prstGeom prst="rect">
             <a:avLst/>
@@ -38934,21 +39536,21 @@
                 </a:solidFill>
                 <a:latin typeface="Noto Sans JP"/>
               </a:rPr>
-              <a:t>≈2.3×</a:t>
-            </a:r>
-          </a:p>
-        </p:txBody>
-      </p:sp>
-      <p:sp>
-        <p:nvSpPr>
-          <p:cNvPr id="33" name="TextBox 32"/>
-          <p:cNvSpPr txBox="1"/>
-          <p:nvPr/>
-        </p:nvSpPr>
-        <p:spPr>
-          <a:xfrm>
-            <a:off x="365760" y="4974336"/>
-            <a:ext cx="1463040" cy="274320"/>
+              <a:t>さらに低下</a:t>
+            </a:r>
+          </a:p>
+        </p:txBody>
+      </p:sp>
+      <p:sp>
+        <p:nvSpPr>
+          <p:cNvPr id="46" name="TextBox 45"/>
+          <p:cNvSpPr txBox="1"/>
+          <p:nvPr/>
+        </p:nvSpPr>
+        <p:spPr>
+          <a:xfrm>
+            <a:off x="365760" y="5687568"/>
+            <a:ext cx="2926080" cy="274320"/>
           </a:xfrm>
           <a:prstGeom prst="rect">
             <a:avLst/>
@@ -38969,21 +39571,21 @@
                 </a:solidFill>
                 <a:latin typeface="Noto Sans JP"/>
               </a:rPr>
-              <a:t>HEC+MC/CSP 1-5</a:t>
-            </a:r>
-          </a:p>
-        </p:txBody>
-      </p:sp>
-      <p:sp>
-        <p:nvSpPr>
-          <p:cNvPr id="34" name="Rounded Rectangle 33"/>
+              <a:t>AquaGel-K（参考）</a:t>
+            </a:r>
+          </a:p>
+        </p:txBody>
+      </p:sp>
+      <p:sp>
+        <p:nvSpPr>
+          <p:cNvPr id="47" name="Rounded Rectangle 46"/>
           <p:cNvSpPr/>
           <p:nvPr/>
         </p:nvSpPr>
         <p:spPr>
           <a:xfrm>
-            <a:off x="1920240" y="5047488"/>
-            <a:ext cx="3124047" cy="146304"/>
+            <a:off x="3383280" y="5760720"/>
+            <a:ext cx="3081948" cy="146304"/>
           </a:xfrm>
           <a:prstGeom prst="roundRect">
             <a:avLst>
@@ -39024,14 +39626,14 @@
       </p:sp>
       <p:sp>
         <p:nvSpPr>
-          <p:cNvPr id="35" name="Rounded Rectangle 34"/>
+          <p:cNvPr id="48" name="Rounded Rectangle 47"/>
           <p:cNvSpPr/>
           <p:nvPr/>
         </p:nvSpPr>
         <p:spPr>
           <a:xfrm>
-            <a:off x="1920240" y="5047488"/>
-            <a:ext cx="2124352" cy="146304"/>
+            <a:off x="3383280" y="5760720"/>
+            <a:ext cx="61638" cy="146304"/>
           </a:xfrm>
           <a:prstGeom prst="roundRect">
             <a:avLst>
@@ -39039,7 +39641,7 @@
             </a:avLst>
           </a:prstGeom>
           <a:solidFill>
-            <a:srgbClr val="4A7C8C"/>
+            <a:srgbClr val="AAB4C0"/>
           </a:solidFill>
           <a:ln>
             <a:noFill/>
@@ -39070,14 +39672,14 @@
       </p:sp>
       <p:sp>
         <p:nvSpPr>
-          <p:cNvPr id="36" name="TextBox 35"/>
-          <p:cNvSpPr txBox="1"/>
-          <p:nvPr/>
-        </p:nvSpPr>
-        <p:spPr>
-          <a:xfrm>
-            <a:off x="5135727" y="4974336"/>
-            <a:ext cx="868680" cy="274320"/>
+          <p:cNvPr id="49" name="TextBox 48"/>
+          <p:cNvSpPr txBox="1"/>
+          <p:nvPr/>
+        </p:nvSpPr>
+        <p:spPr>
+          <a:xfrm>
+            <a:off x="6556668" y="5687568"/>
+            <a:ext cx="914400" cy="274320"/>
           </a:xfrm>
           <a:prstGeom prst="rect">
             <a:avLst/>
@@ -39098,64 +39700,119 @@
                 </a:solidFill>
                 <a:latin typeface="Noto Sans JP"/>
               </a:rPr>
-              <a:t>≈2.6×</a:t>
-            </a:r>
-          </a:p>
-        </p:txBody>
-      </p:sp>
-      <p:sp>
-        <p:nvSpPr>
-          <p:cNvPr id="37" name="TextBox 36"/>
-          <p:cNvSpPr txBox="1"/>
-          <p:nvPr/>
-        </p:nvSpPr>
-        <p:spPr>
-          <a:xfrm>
-            <a:off x="6187287" y="3374136"/>
-            <a:ext cx="5638647" cy="274320"/>
-          </a:xfrm>
-          <a:prstGeom prst="rect">
-            <a:avLst/>
-          </a:prstGeom>
-          <a:noFill/>
-        </p:spPr>
-        <p:txBody>
-          <a:bodyPr wrap="square" anchor="t" lIns="36000" rIns="36000" tIns="18000" bIns="18000">
-            <a:spAutoFit/>
-          </a:bodyPr>
-          <a:lstStyle/>
-          <a:p>
-            <a:pPr algn="l"/>
-            <a:r>
-              <a:rPr sz="1200" b="1" i="0">
-                <a:solidFill>
-                  <a:srgbClr val="64748B"/>
-                </a:solidFill>
-                <a:latin typeface="Noto Sans JP"/>
-              </a:rPr>
-              <a:t>発泡がもたらす断熱効果</a:t>
-            </a:r>
-          </a:p>
-        </p:txBody>
-      </p:sp>
-      <p:sp>
-        <p:nvSpPr>
-          <p:cNvPr id="38" name="TextBox 37"/>
-          <p:cNvSpPr txBox="1"/>
-          <p:nvPr/>
-        </p:nvSpPr>
-        <p:spPr>
-          <a:xfrm>
-            <a:off x="6233007" y="3739896"/>
-            <a:ext cx="182880" cy="274320"/>
-          </a:xfrm>
-          <a:prstGeom prst="rect">
-            <a:avLst/>
-          </a:prstGeom>
-          <a:noFill/>
-        </p:spPr>
-        <p:txBody>
-          <a:bodyPr wrap="square" anchor="t" lIns="36000" rIns="36000" tIns="18000" bIns="18000">
+              <a:t>≈0</a:t>
+            </a:r>
+          </a:p>
+        </p:txBody>
+      </p:sp>
+      <p:sp>
+        <p:nvSpPr>
+          <p:cNvPr id="50" name="Rounded Rectangle 49"/>
+          <p:cNvSpPr/>
+          <p:nvPr/>
+        </p:nvSpPr>
+        <p:spPr>
+          <a:xfrm>
+            <a:off x="365760" y="6144768"/>
+            <a:ext cx="11460175" cy="530352"/>
+          </a:xfrm>
+          <a:prstGeom prst="roundRect">
+            <a:avLst>
+              <a:gd name="adj" fmla="val 4000"/>
+            </a:avLst>
+          </a:prstGeom>
+          <a:solidFill>
+            <a:srgbClr val="1E293B"/>
+          </a:solidFill>
+          <a:ln>
+            <a:noFill/>
+          </a:ln>
+          <a:effectLst/>
+        </p:spPr>
+        <p:style>
+          <a:lnRef idx="1">
+            <a:schemeClr val="accent1"/>
+          </a:lnRef>
+          <a:fillRef idx="3">
+            <a:schemeClr val="accent1"/>
+          </a:fillRef>
+          <a:effectRef idx="2">
+            <a:schemeClr val="accent1"/>
+          </a:effectRef>
+          <a:fontRef idx="minor">
+            <a:schemeClr val="lt1"/>
+          </a:fontRef>
+        </p:style>
+        <p:txBody>
+          <a:bodyPr rtlCol="0" anchor="ctr"/>
+          <a:lstStyle/>
+          <a:p>
+            <a:pPr algn="ctr"/>
+          </a:p>
+        </p:txBody>
+      </p:sp>
+      <p:sp>
+        <p:nvSpPr>
+          <p:cNvPr id="51" name="Rectangle 50"/>
+          <p:cNvSpPr/>
+          <p:nvPr/>
+        </p:nvSpPr>
+        <p:spPr>
+          <a:xfrm>
+            <a:off x="365760" y="6144768"/>
+            <a:ext cx="54864" cy="530352"/>
+          </a:xfrm>
+          <a:prstGeom prst="rect">
+            <a:avLst/>
+          </a:prstGeom>
+          <a:solidFill>
+            <a:srgbClr val="D4A574"/>
+          </a:solidFill>
+          <a:ln>
+            <a:noFill/>
+          </a:ln>
+          <a:effectLst/>
+        </p:spPr>
+        <p:style>
+          <a:lnRef idx="1">
+            <a:schemeClr val="accent1"/>
+          </a:lnRef>
+          <a:fillRef idx="3">
+            <a:schemeClr val="accent1"/>
+          </a:fillRef>
+          <a:effectRef idx="2">
+            <a:schemeClr val="accent1"/>
+          </a:effectRef>
+          <a:fontRef idx="minor">
+            <a:schemeClr val="lt1"/>
+          </a:fontRef>
+        </p:style>
+        <p:txBody>
+          <a:bodyPr rtlCol="0" anchor="ctr"/>
+          <a:lstStyle/>
+          <a:p>
+            <a:pPr algn="ctr"/>
+          </a:p>
+        </p:txBody>
+      </p:sp>
+      <p:sp>
+        <p:nvSpPr>
+          <p:cNvPr id="52" name="TextBox 51"/>
+          <p:cNvSpPr txBox="1"/>
+          <p:nvPr/>
+        </p:nvSpPr>
+        <p:spPr>
+          <a:xfrm>
+            <a:off x="548640" y="6144768"/>
+            <a:ext cx="365760" cy="530352"/>
+          </a:xfrm>
+          <a:prstGeom prst="rect">
+            <a:avLst/>
+          </a:prstGeom>
+          <a:noFill/>
+        </p:spPr>
+        <p:txBody>
+          <a:bodyPr wrap="square" anchor="ctr" lIns="36000" rIns="36000" tIns="18000" bIns="18000">
             <a:spAutoFit/>
           </a:bodyPr>
           <a:lstStyle/>
@@ -39164,256 +39821,46 @@
             <a:r>
               <a:rPr sz="1400" b="0" i="0">
                 <a:solidFill>
-                  <a:srgbClr val="3B5174"/>
-                </a:solidFill>
-                <a:latin typeface="Noto Sans JP"/>
-              </a:rPr>
-              <a:t>•</a:t>
-            </a:r>
-          </a:p>
-        </p:txBody>
-      </p:sp>
-      <p:sp>
-        <p:nvSpPr>
-          <p:cNvPr id="39" name="TextBox 38"/>
-          <p:cNvSpPr txBox="1"/>
-          <p:nvPr/>
-        </p:nvSpPr>
-        <p:spPr>
-          <a:xfrm>
-            <a:off x="6461607" y="3739896"/>
-            <a:ext cx="5318607" cy="274320"/>
-          </a:xfrm>
-          <a:prstGeom prst="rect">
-            <a:avLst/>
-          </a:prstGeom>
-          <a:noFill/>
-        </p:spPr>
-        <p:txBody>
-          <a:bodyPr wrap="square" anchor="t" lIns="36000" rIns="36000" tIns="18000" bIns="18000">
-            <a:spAutoFit/>
-          </a:bodyPr>
-          <a:lstStyle/>
-          <a:p>
-            <a:pPr algn="l"/>
-            <a:r>
-              <a:rPr sz="1200" b="0" i="0">
-                <a:solidFill>
-                  <a:srgbClr val="334155"/>
-                </a:solidFill>
-                <a:latin typeface="Noto Sans JP"/>
-              </a:rPr>
-              <a:t>初期厚の2倍以上に膨張 → 熱伝導経路が延長</a:t>
-            </a:r>
-          </a:p>
-        </p:txBody>
-      </p:sp>
-      <p:sp>
-        <p:nvSpPr>
-          <p:cNvPr id="40" name="TextBox 39"/>
-          <p:cNvSpPr txBox="1"/>
-          <p:nvPr/>
-        </p:nvSpPr>
-        <p:spPr>
-          <a:xfrm>
-            <a:off x="6233007" y="4123944"/>
-            <a:ext cx="182880" cy="274320"/>
-          </a:xfrm>
-          <a:prstGeom prst="rect">
-            <a:avLst/>
-          </a:prstGeom>
-          <a:noFill/>
-        </p:spPr>
-        <p:txBody>
-          <a:bodyPr wrap="square" anchor="t" lIns="36000" rIns="36000" tIns="18000" bIns="18000">
-            <a:spAutoFit/>
-          </a:bodyPr>
-          <a:lstStyle/>
-          <a:p>
-            <a:pPr algn="l"/>
-            <a:r>
-              <a:rPr sz="1400" b="0" i="0">
-                <a:solidFill>
-                  <a:srgbClr val="3B5174"/>
-                </a:solidFill>
-                <a:latin typeface="Noto Sans JP"/>
-              </a:rPr>
-              <a:t>•</a:t>
-            </a:r>
-          </a:p>
-        </p:txBody>
-      </p:sp>
-      <p:sp>
-        <p:nvSpPr>
-          <p:cNvPr id="41" name="TextBox 40"/>
-          <p:cNvSpPr txBox="1"/>
-          <p:nvPr/>
-        </p:nvSpPr>
-        <p:spPr>
-          <a:xfrm>
-            <a:off x="6461607" y="4123944"/>
-            <a:ext cx="5318607" cy="274320"/>
-          </a:xfrm>
-          <a:prstGeom prst="rect">
-            <a:avLst/>
-          </a:prstGeom>
-          <a:noFill/>
-        </p:spPr>
-        <p:txBody>
-          <a:bodyPr wrap="square" anchor="t" lIns="36000" rIns="36000" tIns="18000" bIns="18000">
-            <a:spAutoFit/>
-          </a:bodyPr>
-          <a:lstStyle/>
-          <a:p>
-            <a:pPr algn="l"/>
-            <a:r>
-              <a:rPr sz="1200" b="0" i="0">
-                <a:solidFill>
-                  <a:srgbClr val="334155"/>
-                </a:solidFill>
-                <a:latin typeface="Noto Sans JP"/>
-              </a:rPr>
-              <a:t>気孔内に空気が閉じ込められ断熱性が向上</a:t>
-            </a:r>
-          </a:p>
-        </p:txBody>
-      </p:sp>
-      <p:sp>
-        <p:nvSpPr>
-          <p:cNvPr id="42" name="TextBox 41"/>
-          <p:cNvSpPr txBox="1"/>
-          <p:nvPr/>
-        </p:nvSpPr>
-        <p:spPr>
-          <a:xfrm>
-            <a:off x="6233007" y="4507992"/>
-            <a:ext cx="182880" cy="274320"/>
-          </a:xfrm>
-          <a:prstGeom prst="rect">
-            <a:avLst/>
-          </a:prstGeom>
-          <a:noFill/>
-        </p:spPr>
-        <p:txBody>
-          <a:bodyPr wrap="square" anchor="t" lIns="36000" rIns="36000" tIns="18000" bIns="18000">
-            <a:spAutoFit/>
-          </a:bodyPr>
-          <a:lstStyle/>
-          <a:p>
-            <a:pPr algn="l"/>
-            <a:r>
-              <a:rPr sz="1400" b="0" i="0">
-                <a:solidFill>
-                  <a:srgbClr val="3B5174"/>
-                </a:solidFill>
-                <a:latin typeface="Noto Sans JP"/>
-              </a:rPr>
-              <a:t>•</a:t>
-            </a:r>
-          </a:p>
-        </p:txBody>
-      </p:sp>
-      <p:sp>
-        <p:nvSpPr>
-          <p:cNvPr id="43" name="TextBox 42"/>
-          <p:cNvSpPr txBox="1"/>
-          <p:nvPr/>
-        </p:nvSpPr>
-        <p:spPr>
-          <a:xfrm>
-            <a:off x="6461607" y="4507992"/>
-            <a:ext cx="5318607" cy="274320"/>
-          </a:xfrm>
-          <a:prstGeom prst="rect">
-            <a:avLst/>
-          </a:prstGeom>
-          <a:noFill/>
-        </p:spPr>
-        <p:txBody>
-          <a:bodyPr wrap="square" anchor="t" lIns="36000" rIns="36000" tIns="18000" bIns="18000">
-            <a:spAutoFit/>
-          </a:bodyPr>
-          <a:lstStyle/>
-          <a:p>
-            <a:pPr algn="l"/>
-            <a:r>
-              <a:rPr sz="1200" b="0" i="0">
-                <a:solidFill>
-                  <a:srgbClr val="334155"/>
-                </a:solidFill>
-                <a:latin typeface="Noto Sans JP"/>
-              </a:rPr>
-              <a:t>AquaGel-Kは発泡せず → 火炎で平坦に崩壊</a:t>
-            </a:r>
-          </a:p>
-        </p:txBody>
-      </p:sp>
-      <p:sp>
-        <p:nvSpPr>
-          <p:cNvPr id="44" name="TextBox 43"/>
-          <p:cNvSpPr txBox="1"/>
-          <p:nvPr/>
-        </p:nvSpPr>
-        <p:spPr>
-          <a:xfrm>
-            <a:off x="6233007" y="4892040"/>
-            <a:ext cx="182880" cy="274320"/>
-          </a:xfrm>
-          <a:prstGeom prst="rect">
-            <a:avLst/>
-          </a:prstGeom>
-          <a:noFill/>
-        </p:spPr>
-        <p:txBody>
-          <a:bodyPr wrap="square" anchor="t" lIns="36000" rIns="36000" tIns="18000" bIns="18000">
-            <a:spAutoFit/>
-          </a:bodyPr>
-          <a:lstStyle/>
-          <a:p>
-            <a:pPr algn="l"/>
-            <a:r>
-              <a:rPr sz="1400" b="0" i="0">
-                <a:solidFill>
-                  <a:srgbClr val="3B5174"/>
-                </a:solidFill>
-                <a:latin typeface="Noto Sans JP"/>
-              </a:rPr>
-              <a:t>•</a:t>
-            </a:r>
-          </a:p>
-        </p:txBody>
-      </p:sp>
-      <p:sp>
-        <p:nvSpPr>
-          <p:cNvPr id="45" name="TextBox 44"/>
-          <p:cNvSpPr txBox="1"/>
-          <p:nvPr/>
-        </p:nvSpPr>
-        <p:spPr>
-          <a:xfrm>
-            <a:off x="6461607" y="4892040"/>
-            <a:ext cx="5318607" cy="274320"/>
-          </a:xfrm>
-          <a:prstGeom prst="rect">
-            <a:avLst/>
-          </a:prstGeom>
-          <a:noFill/>
-        </p:spPr>
-        <p:txBody>
-          <a:bodyPr wrap="square" anchor="t" lIns="36000" rIns="36000" tIns="18000" bIns="18000">
-            <a:spAutoFit/>
-          </a:bodyPr>
-          <a:lstStyle/>
-          <a:p>
-            <a:pPr algn="l"/>
-            <a:r>
-              <a:rPr sz="1200" b="0" i="0">
-                <a:solidFill>
-                  <a:srgbClr val="334155"/>
-                </a:solidFill>
-                <a:latin typeface="Noto Sans JP"/>
-              </a:rPr>
-              <a:t>SDS無しのHEC+MC/CSPが最高発泡指数（≈2.6）を達成</a:t>
+                  <a:srgbClr val="D4A574"/>
+                </a:solidFill>
+                <a:latin typeface="Noto Sans JP"/>
+              </a:rPr>
+              <a:t>!</a:t>
+            </a:r>
+          </a:p>
+        </p:txBody>
+      </p:sp>
+      <p:sp>
+        <p:nvSpPr>
+          <p:cNvPr id="53" name="TextBox 52"/>
+          <p:cNvSpPr txBox="1"/>
+          <p:nvPr/>
+        </p:nvSpPr>
+        <p:spPr>
+          <a:xfrm>
+            <a:off x="960120" y="6144768"/>
+            <a:ext cx="10774375" cy="530352"/>
+          </a:xfrm>
+          <a:prstGeom prst="rect">
+            <a:avLst/>
+          </a:prstGeom>
+          <a:noFill/>
+        </p:spPr>
+        <p:txBody>
+          <a:bodyPr wrap="square" anchor="ctr" lIns="36000" rIns="36000" tIns="18000" bIns="18000">
+            <a:spAutoFit/>
+          </a:bodyPr>
+          <a:lstStyle/>
+          <a:p>
+            <a:pPr algn="l"/>
+            <a:r>
+              <a:rPr sz="1300" b="1" i="0">
+                <a:solidFill>
+                  <a:srgbClr val="FFFFFF"/>
+                </a:solidFill>
+                <a:latin typeface="Noto Sans JP"/>
+              </a:rPr>
+              <a:t>SDS は発泡に寄与せず、むしろ気泡を粗大化・不均一化（Fig. 4c SEM）→ 発泡指数低下の原因</a:t>
             </a:r>
           </a:p>
         </p:txBody>

--- a/slides.pptx
+++ b/slides.pptx
@@ -22250,7 +22250,7 @@
                 </a:solidFill>
                 <a:latin typeface="Noto Sans JP"/>
               </a:rPr>
-              <a:t>レオロジー②：剪断希薄化と Power-law 指数</a:t>
+              <a:t>レオロジー②：2つの降伏応力 — 静的（付着）と動的（噴霧）</a:t>
             </a:r>
           </a:p>
         </p:txBody>
@@ -22343,7 +22343,167 @@
         <p:spPr>
           <a:xfrm>
             <a:off x="365760" y="859536"/>
-            <a:ext cx="6555461" cy="4389120"/>
+            <a:ext cx="11460175" cy="566928"/>
+          </a:xfrm>
+          <a:prstGeom prst="roundRect">
+            <a:avLst>
+              <a:gd name="adj" fmla="val 4000"/>
+            </a:avLst>
+          </a:prstGeom>
+          <a:solidFill>
+            <a:srgbClr val="F8FAFC"/>
+          </a:solidFill>
+          <a:ln>
+            <a:noFill/>
+          </a:ln>
+          <a:effectLst/>
+        </p:spPr>
+        <p:style>
+          <a:lnRef idx="1">
+            <a:schemeClr val="accent1"/>
+          </a:lnRef>
+          <a:fillRef idx="3">
+            <a:schemeClr val="accent1"/>
+          </a:fillRef>
+          <a:effectRef idx="2">
+            <a:schemeClr val="accent1"/>
+          </a:effectRef>
+          <a:fontRef idx="minor">
+            <a:schemeClr val="lt1"/>
+          </a:fontRef>
+        </p:style>
+        <p:txBody>
+          <a:bodyPr rtlCol="0" anchor="ctr"/>
+          <a:lstStyle/>
+          <a:p>
+            <a:pPr algn="ctr"/>
+          </a:p>
+        </p:txBody>
+      </p:sp>
+      <p:sp>
+        <p:nvSpPr>
+          <p:cNvPr id="11" name="Rectangle 10"/>
+          <p:cNvSpPr/>
+          <p:nvPr/>
+        </p:nvSpPr>
+        <p:spPr>
+          <a:xfrm>
+            <a:off x="365760" y="859536"/>
+            <a:ext cx="54864" cy="566928"/>
+          </a:xfrm>
+          <a:prstGeom prst="rect">
+            <a:avLst/>
+          </a:prstGeom>
+          <a:solidFill>
+            <a:srgbClr val="3B5174"/>
+          </a:solidFill>
+          <a:ln>
+            <a:noFill/>
+          </a:ln>
+          <a:effectLst/>
+        </p:spPr>
+        <p:style>
+          <a:lnRef idx="1">
+            <a:schemeClr val="accent1"/>
+          </a:lnRef>
+          <a:fillRef idx="3">
+            <a:schemeClr val="accent1"/>
+          </a:fillRef>
+          <a:effectRef idx="2">
+            <a:schemeClr val="accent1"/>
+          </a:effectRef>
+          <a:fontRef idx="minor">
+            <a:schemeClr val="lt1"/>
+          </a:fontRef>
+        </p:style>
+        <p:txBody>
+          <a:bodyPr rtlCol="0" anchor="ctr"/>
+          <a:lstStyle/>
+          <a:p>
+            <a:pPr algn="ctr"/>
+          </a:p>
+        </p:txBody>
+      </p:sp>
+      <p:sp>
+        <p:nvSpPr>
+          <p:cNvPr id="12" name="TextBox 11"/>
+          <p:cNvSpPr txBox="1"/>
+          <p:nvPr/>
+        </p:nvSpPr>
+        <p:spPr>
+          <a:xfrm>
+            <a:off x="548640" y="859536"/>
+            <a:ext cx="365760" cy="566928"/>
+          </a:xfrm>
+          <a:prstGeom prst="rect">
+            <a:avLst/>
+          </a:prstGeom>
+          <a:noFill/>
+        </p:spPr>
+        <p:txBody>
+          <a:bodyPr wrap="square" anchor="ctr" lIns="36000" rIns="36000" tIns="18000" bIns="18000">
+            <a:spAutoFit/>
+          </a:bodyPr>
+          <a:lstStyle/>
+          <a:p>
+            <a:pPr algn="l"/>
+            <a:r>
+              <a:rPr sz="1400" b="0" i="0">
+                <a:solidFill>
+                  <a:srgbClr val="3B5174"/>
+                </a:solidFill>
+                <a:latin typeface="Noto Sans JP"/>
+              </a:rPr>
+              <a:t>ƒ</a:t>
+            </a:r>
+          </a:p>
+        </p:txBody>
+      </p:sp>
+      <p:sp>
+        <p:nvSpPr>
+          <p:cNvPr id="13" name="TextBox 12"/>
+          <p:cNvSpPr txBox="1"/>
+          <p:nvPr/>
+        </p:nvSpPr>
+        <p:spPr>
+          <a:xfrm>
+            <a:off x="960120" y="859536"/>
+            <a:ext cx="10774375" cy="566928"/>
+          </a:xfrm>
+          <a:prstGeom prst="rect">
+            <a:avLst/>
+          </a:prstGeom>
+          <a:noFill/>
+        </p:spPr>
+        <p:txBody>
+          <a:bodyPr wrap="square" anchor="ctr" lIns="36000" rIns="36000" tIns="18000" bIns="18000">
+            <a:spAutoFit/>
+          </a:bodyPr>
+          <a:lstStyle/>
+          <a:p>
+            <a:pPr algn="l"/>
+            <a:r>
+              <a:rPr sz="1300" b="1" i="0">
+                <a:solidFill>
+                  <a:srgbClr val="1E293B"/>
+                </a:solidFill>
+                <a:latin typeface="Noto Sans JP"/>
+              </a:rPr>
+              <a:t>降伏応力＝ゲルが流れ出す／流れ続けるのに必要な応力。本研究は2つの定義で評価（Fig. 2c–d・S3）</a:t>
+            </a:r>
+          </a:p>
+        </p:txBody>
+      </p:sp>
+      <p:sp>
+        <p:nvSpPr>
+          <p:cNvPr id="14" name="Rounded Rectangle 13"/>
+          <p:cNvSpPr/>
+          <p:nvPr/>
+        </p:nvSpPr>
+        <p:spPr>
+          <a:xfrm>
+            <a:off x="365760" y="1609344"/>
+            <a:ext cx="4492630" cy="3246120"/>
           </a:xfrm>
           <a:prstGeom prst="roundRect">
             <a:avLst>
@@ -22384,13 +22544,13 @@
       </p:sp>
       <p:sp>
         <p:nvSpPr>
-          <p:cNvPr id="11" name="Rectangle 10"/>
+          <p:cNvPr id="15" name="Rectangle 14"/>
           <p:cNvSpPr/>
           <p:nvPr/>
         </p:nvSpPr>
         <p:spPr>
           <a:xfrm>
-            <a:off x="475488" y="969264"/>
+            <a:off x="475488" y="1719072"/>
             <a:ext cx="868680" cy="292608"/>
           </a:xfrm>
           <a:prstGeom prst="rect">
@@ -22428,13 +22588,13 @@
       </p:sp>
       <p:sp>
         <p:nvSpPr>
-          <p:cNvPr id="12" name="TextBox 11"/>
-          <p:cNvSpPr txBox="1"/>
-          <p:nvPr/>
-        </p:nvSpPr>
-        <p:spPr>
-          <a:xfrm>
-            <a:off x="475488" y="969264"/>
+          <p:cNvPr id="16" name="TextBox 15"/>
+          <p:cNvSpPr txBox="1"/>
+          <p:nvPr/>
+        </p:nvSpPr>
+        <p:spPr>
+          <a:xfrm>
+            <a:off x="475488" y="1719072"/>
             <a:ext cx="868680" cy="292608"/>
           </a:xfrm>
           <a:prstGeom prst="rect">
@@ -22463,14 +22623,14 @@
       </p:sp>
       <p:sp>
         <p:nvSpPr>
-          <p:cNvPr id="13" name="TextBox 12"/>
-          <p:cNvSpPr txBox="1"/>
-          <p:nvPr/>
-        </p:nvSpPr>
-        <p:spPr>
-          <a:xfrm>
-            <a:off x="365760" y="859536"/>
-            <a:ext cx="6555461" cy="4389120"/>
+          <p:cNvPr id="17" name="TextBox 16"/>
+          <p:cNvSpPr txBox="1"/>
+          <p:nvPr/>
+        </p:nvSpPr>
+        <p:spPr>
+          <a:xfrm>
+            <a:off x="365760" y="1609344"/>
+            <a:ext cx="4492630" cy="3246120"/>
           </a:xfrm>
           <a:prstGeom prst="rect">
             <a:avLst/>
@@ -22498,14 +22658,14 @@
       </p:sp>
       <p:sp>
         <p:nvSpPr>
-          <p:cNvPr id="14" name="TextBox 13"/>
-          <p:cNvSpPr txBox="1"/>
-          <p:nvPr/>
-        </p:nvSpPr>
-        <p:spPr>
-          <a:xfrm>
-            <a:off x="365760" y="5285232"/>
-            <a:ext cx="6555461" cy="274320"/>
+          <p:cNvPr id="18" name="TextBox 17"/>
+          <p:cNvSpPr txBox="1"/>
+          <p:nvPr/>
+        </p:nvSpPr>
+        <p:spPr>
+          <a:xfrm>
+            <a:off x="365760" y="4892040"/>
+            <a:ext cx="4492630" cy="274320"/>
           </a:xfrm>
           <a:prstGeom prst="rect">
             <a:avLst/>
@@ -22526,33 +22686,33 @@
                 </a:solidFill>
                 <a:latin typeface="Noto Sans JP"/>
               </a:rPr>
-              <a:t>粘度 vs 剪断速度（shear-thinning挙動）</a:t>
-            </a:r>
-          </a:p>
-        </p:txBody>
-      </p:sp>
-      <p:sp>
-        <p:nvSpPr>
-          <p:cNvPr id="15" name="Rounded Rectangle 14"/>
+              <a:t>定常せん断フロースイープ → HB fit で動的降伏応力を算出</a:t>
+            </a:r>
+          </a:p>
+        </p:txBody>
+      </p:sp>
+      <p:sp>
+        <p:nvSpPr>
+          <p:cNvPr id="19" name="Rounded Rectangle 18"/>
           <p:cNvSpPr/>
           <p:nvPr/>
         </p:nvSpPr>
         <p:spPr>
           <a:xfrm>
-            <a:off x="7104101" y="859536"/>
-            <a:ext cx="4721833" cy="1097280"/>
+            <a:off x="5077846" y="1609344"/>
+            <a:ext cx="6748089" cy="1554480"/>
           </a:xfrm>
           <a:prstGeom prst="roundRect">
             <a:avLst>
-              <a:gd name="adj" fmla="val 3000"/>
+              <a:gd name="adj" fmla="val 5000"/>
             </a:avLst>
           </a:prstGeom>
           <a:solidFill>
-            <a:srgbClr val="F8FAFC"/>
+            <a:srgbClr val="F1F5F9"/>
           </a:solidFill>
-          <a:ln w="6350">
+          <a:ln w="15240">
             <a:solidFill>
-              <a:srgbClr val="E2E8F0"/>
+              <a:srgbClr val="4A7C8C"/>
             </a:solidFill>
           </a:ln>
           <a:effectLst/>
@@ -22581,132 +22741,23 @@
       </p:sp>
       <p:sp>
         <p:nvSpPr>
-          <p:cNvPr id="16" name="TextBox 15"/>
-          <p:cNvSpPr txBox="1"/>
-          <p:nvPr/>
-        </p:nvSpPr>
-        <p:spPr>
-          <a:xfrm>
-            <a:off x="7232117" y="969264"/>
-            <a:ext cx="4465801" cy="228600"/>
-          </a:xfrm>
-          <a:prstGeom prst="rect">
-            <a:avLst/>
-          </a:prstGeom>
-          <a:noFill/>
-        </p:spPr>
-        <p:txBody>
-          <a:bodyPr wrap="square" anchor="t" lIns="36000" rIns="36000" tIns="18000" bIns="18000">
-            <a:spAutoFit/>
-          </a:bodyPr>
-          <a:lstStyle/>
-          <a:p>
-            <a:pPr algn="l"/>
-            <a:r>
-              <a:rPr sz="1000" b="1" i="0">
-                <a:solidFill>
-                  <a:srgbClr val="64748B"/>
-                </a:solidFill>
-                <a:latin typeface="Noto Sans JP"/>
-              </a:rPr>
-              <a:t>流動指数 n</a:t>
-            </a:r>
-          </a:p>
-        </p:txBody>
-      </p:sp>
-      <p:sp>
-        <p:nvSpPr>
-          <p:cNvPr id="17" name="TextBox 16"/>
-          <p:cNvSpPr txBox="1"/>
-          <p:nvPr/>
-        </p:nvSpPr>
-        <p:spPr>
-          <a:xfrm>
-            <a:off x="7232117" y="1225296"/>
-            <a:ext cx="4465801" cy="411480"/>
-          </a:xfrm>
-          <a:prstGeom prst="rect">
-            <a:avLst/>
-          </a:prstGeom>
-          <a:noFill/>
-        </p:spPr>
-        <p:txBody>
-          <a:bodyPr wrap="square" anchor="t" lIns="36000" rIns="36000" tIns="18000" bIns="18000">
-            <a:spAutoFit/>
-          </a:bodyPr>
-          <a:lstStyle/>
-          <a:p>
-            <a:pPr algn="l"/>
-            <a:r>
-              <a:rPr sz="2000" b="1" i="0">
-                <a:solidFill>
-                  <a:srgbClr val="3B5174"/>
-                </a:solidFill>
-                <a:latin typeface="Noto Sans JP"/>
-              </a:rPr>
-              <a:t>n &lt; 1</a:t>
-            </a:r>
-          </a:p>
-        </p:txBody>
-      </p:sp>
-      <p:sp>
-        <p:nvSpPr>
-          <p:cNvPr id="18" name="TextBox 17"/>
-          <p:cNvSpPr txBox="1"/>
-          <p:nvPr/>
-        </p:nvSpPr>
-        <p:spPr>
-          <a:xfrm>
-            <a:off x="7232117" y="1645920"/>
-            <a:ext cx="4465801" cy="219456"/>
-          </a:xfrm>
-          <a:prstGeom prst="rect">
-            <a:avLst/>
-          </a:prstGeom>
-          <a:noFill/>
-        </p:spPr>
-        <p:txBody>
-          <a:bodyPr wrap="square" anchor="t" lIns="36000" rIns="36000" tIns="18000" bIns="18000">
-            <a:spAutoFit/>
-          </a:bodyPr>
-          <a:lstStyle/>
-          <a:p>
-            <a:pPr algn="l"/>
-            <a:r>
-              <a:rPr sz="900" b="0" i="0">
-                <a:solidFill>
-                  <a:srgbClr val="64748B"/>
-                </a:solidFill>
-                <a:latin typeface="Noto Sans JP"/>
-              </a:rPr>
-              <a:t>HEC+MC/CSP — 強い剪断希薄化</a:t>
-            </a:r>
-          </a:p>
-        </p:txBody>
-      </p:sp>
-      <p:sp>
-        <p:nvSpPr>
-          <p:cNvPr id="19" name="Rounded Rectangle 18"/>
+          <p:cNvPr id="20" name="Rectangle 19"/>
           <p:cNvSpPr/>
           <p:nvPr/>
         </p:nvSpPr>
         <p:spPr>
           <a:xfrm>
-            <a:off x="7104101" y="2093976"/>
-            <a:ext cx="4721833" cy="1097280"/>
-          </a:xfrm>
-          <a:prstGeom prst="roundRect">
-            <a:avLst>
-              <a:gd name="adj" fmla="val 3000"/>
-            </a:avLst>
+            <a:off x="5077846" y="1609344"/>
+            <a:ext cx="54864" cy="1554480"/>
+          </a:xfrm>
+          <a:prstGeom prst="rect">
+            <a:avLst/>
           </a:prstGeom>
           <a:solidFill>
-            <a:srgbClr val="F8FAFC"/>
+            <a:srgbClr val="4A7C8C"/>
           </a:solidFill>
-          <a:ln w="6350">
-            <a:solidFill>
-              <a:srgbClr val="E2E8F0"/>
-            </a:solidFill>
+          <a:ln>
+            <a:noFill/>
           </a:ln>
           <a:effectLst/>
         </p:spPr>
@@ -22734,14 +22785,14 @@
       </p:sp>
       <p:sp>
         <p:nvSpPr>
-          <p:cNvPr id="20" name="TextBox 19"/>
-          <p:cNvSpPr txBox="1"/>
-          <p:nvPr/>
-        </p:nvSpPr>
-        <p:spPr>
-          <a:xfrm>
-            <a:off x="7232117" y="2203704"/>
-            <a:ext cx="4465801" cy="228600"/>
+          <p:cNvPr id="21" name="TextBox 20"/>
+          <p:cNvSpPr txBox="1"/>
+          <p:nvPr/>
+        </p:nvSpPr>
+        <p:spPr>
+          <a:xfrm>
+            <a:off x="5279014" y="1719072"/>
+            <a:ext cx="6437193" cy="274320"/>
           </a:xfrm>
           <a:prstGeom prst="rect">
             <a:avLst/>
@@ -22756,27 +22807,27 @@
           <a:p>
             <a:pPr algn="l"/>
             <a:r>
-              <a:rPr sz="1000" b="1" i="0">
-                <a:solidFill>
-                  <a:srgbClr val="64748B"/>
-                </a:solidFill>
-                <a:latin typeface="Noto Sans JP"/>
-              </a:rPr>
-              <a:t>流動指数 n</a:t>
-            </a:r>
-          </a:p>
-        </p:txBody>
-      </p:sp>
-      <p:sp>
-        <p:nvSpPr>
-          <p:cNvPr id="21" name="TextBox 20"/>
-          <p:cNvSpPr txBox="1"/>
-          <p:nvPr/>
-        </p:nvSpPr>
-        <p:spPr>
-          <a:xfrm>
-            <a:off x="7232117" y="2459736"/>
-            <a:ext cx="4465801" cy="411480"/>
+              <a:rPr sz="1300" b="1" i="0">
+                <a:solidFill>
+                  <a:srgbClr val="4A7C8C"/>
+                </a:solidFill>
+                <a:latin typeface="Noto Sans JP"/>
+              </a:rPr>
+              <a:t>静的降伏応力 σ_static（＝絶対降伏応力）</a:t>
+            </a:r>
+          </a:p>
+        </p:txBody>
+      </p:sp>
+      <p:sp>
+        <p:nvSpPr>
+          <p:cNvPr id="22" name="TextBox 21"/>
+          <p:cNvSpPr txBox="1"/>
+          <p:nvPr/>
+        </p:nvSpPr>
+        <p:spPr>
+          <a:xfrm>
+            <a:off x="5279014" y="2066544"/>
+            <a:ext cx="6437193" cy="457200"/>
           </a:xfrm>
           <a:prstGeom prst="rect">
             <a:avLst/>
@@ -22791,27 +22842,27 @@
           <a:p>
             <a:pPr algn="l"/>
             <a:r>
-              <a:rPr sz="2000" b="1" i="0">
-                <a:solidFill>
-                  <a:srgbClr val="3B5174"/>
-                </a:solidFill>
-                <a:latin typeface="Noto Sans JP"/>
-              </a:rPr>
-              <a:t>n &lt; 1</a:t>
-            </a:r>
-          </a:p>
-        </p:txBody>
-      </p:sp>
-      <p:sp>
-        <p:nvSpPr>
-          <p:cNvPr id="22" name="TextBox 21"/>
-          <p:cNvSpPr txBox="1"/>
-          <p:nvPr/>
-        </p:nvSpPr>
-        <p:spPr>
-          <a:xfrm>
-            <a:off x="7232117" y="2880360"/>
-            <a:ext cx="4465801" cy="219456"/>
+              <a:rPr sz="1150" b="0" i="0">
+                <a:solidFill>
+                  <a:srgbClr val="334155"/>
+                </a:solidFill>
+                <a:latin typeface="Noto Sans JP"/>
+              </a:rPr>
+              <a:t>測定：大振幅振動（LAOS）の G' / G'' クロスオーバー応力</a:t>
+            </a:r>
+          </a:p>
+        </p:txBody>
+      </p:sp>
+      <p:sp>
+        <p:nvSpPr>
+          <p:cNvPr id="23" name="TextBox 22"/>
+          <p:cNvSpPr txBox="1"/>
+          <p:nvPr/>
+        </p:nvSpPr>
+        <p:spPr>
+          <a:xfrm>
+            <a:off x="5279014" y="2505456"/>
+            <a:ext cx="6437193" cy="585216"/>
           </a:xfrm>
           <a:prstGeom prst="rect">
             <a:avLst/>
@@ -22826,39 +22877,51 @@
           <a:p>
             <a:pPr algn="l"/>
             <a:r>
-              <a:rPr sz="900" b="0" i="0">
-                <a:solidFill>
-                  <a:srgbClr val="64748B"/>
-                </a:solidFill>
-                <a:latin typeface="Noto Sans JP"/>
-              </a:rPr>
-              <a:t>MHEC/CSP — 同様に剪断希薄化</a:t>
-            </a:r>
-          </a:p>
-        </p:txBody>
-      </p:sp>
-      <p:sp>
-        <p:nvSpPr>
-          <p:cNvPr id="23" name="Rounded Rectangle 22"/>
+              <a:rPr sz="1150" b="0" i="0">
+                <a:solidFill>
+                  <a:srgbClr val="475569"/>
+                </a:solidFill>
+                <a:latin typeface="Noto Sans JP"/>
+              </a:rPr>
+              <a:t>意味：流れ始める（変形開始）のに必要な応力</a:t>
+            </a:r>
+          </a:p>
+          <a:p>
+            <a:pPr algn="l"/>
+            <a:r>
+              <a:rPr sz="1150" b="0" i="0">
+                <a:solidFill>
+                  <a:srgbClr val="475569"/>
+                </a:solidFill>
+                <a:latin typeface="Noto Sans JP"/>
+              </a:rPr>
+              <a:t>→ 高いほど垂直・高所の燃料面に強く付着し、流れ出しにくい</a:t>
+            </a:r>
+          </a:p>
+        </p:txBody>
+      </p:sp>
+      <p:sp>
+        <p:nvSpPr>
+          <p:cNvPr id="24" name="Rounded Rectangle 23"/>
           <p:cNvSpPr/>
           <p:nvPr/>
         </p:nvSpPr>
         <p:spPr>
           <a:xfrm>
-            <a:off x="7104101" y="3419856"/>
-            <a:ext cx="4721833" cy="914400"/>
+            <a:off x="5077846" y="3300984"/>
+            <a:ext cx="6748089" cy="1554480"/>
           </a:xfrm>
           <a:prstGeom prst="roundRect">
             <a:avLst>
-              <a:gd name="adj" fmla="val 4000"/>
+              <a:gd name="adj" fmla="val 5000"/>
             </a:avLst>
           </a:prstGeom>
           <a:solidFill>
-            <a:srgbClr val="FFFFFF"/>
+            <a:srgbClr val="F1F5F9"/>
           </a:solidFill>
-          <a:ln w="6350">
+          <a:ln w="15240">
             <a:solidFill>
-              <a:srgbClr val="E2E8F0"/>
+              <a:srgbClr val="3B5174"/>
             </a:solidFill>
           </a:ln>
           <a:effectLst/>
@@ -22887,107 +22950,14 @@
       </p:sp>
       <p:sp>
         <p:nvSpPr>
-          <p:cNvPr id="24" name="TextBox 23"/>
-          <p:cNvSpPr txBox="1"/>
-          <p:nvPr/>
-        </p:nvSpPr>
-        <p:spPr>
-          <a:xfrm>
-            <a:off x="7241261" y="3557016"/>
-            <a:ext cx="4447513" cy="640080"/>
-          </a:xfrm>
-          <a:prstGeom prst="rect">
-            <a:avLst/>
-          </a:prstGeom>
-          <a:noFill/>
-        </p:spPr>
-        <p:txBody>
-          <a:bodyPr wrap="square" anchor="t" lIns="36000" rIns="36000" tIns="18000" bIns="18000">
-            <a:spAutoFit/>
-          </a:bodyPr>
-          <a:lstStyle/>
-          <a:p>
-            <a:pPr algn="l"/>
-            <a:r>
-              <a:rPr sz="1200" b="0" i="0">
-                <a:solidFill>
-                  <a:srgbClr val="475569"/>
-                </a:solidFill>
-                <a:latin typeface="Noto Sans JP"/>
-              </a:rPr>
-              <a:t>n &lt; 1 = 剪断希薄化（shear-thinning）</a:t>
-            </a:r>
-          </a:p>
-          <a:p>
-            <a:pPr algn="l"/>
-            <a:r>
-              <a:rPr sz="1200" b="0" i="0">
-                <a:solidFill>
-                  <a:srgbClr val="475569"/>
-                </a:solidFill>
-                <a:latin typeface="Noto Sans JP"/>
-              </a:rPr>
-              <a:t>低いほど高せん断でよく流れる → スプレー性◎</a:t>
-            </a:r>
-          </a:p>
-        </p:txBody>
-      </p:sp>
-      <p:sp>
-        <p:nvSpPr>
-          <p:cNvPr id="25" name="Rounded Rectangle 24"/>
+          <p:cNvPr id="25" name="Rectangle 24"/>
           <p:cNvSpPr/>
           <p:nvPr/>
         </p:nvSpPr>
         <p:spPr>
           <a:xfrm>
-            <a:off x="365760" y="5431536"/>
-            <a:ext cx="11460175" cy="594360"/>
-          </a:xfrm>
-          <a:prstGeom prst="roundRect">
-            <a:avLst>
-              <a:gd name="adj" fmla="val 4000"/>
-            </a:avLst>
-          </a:prstGeom>
-          <a:solidFill>
-            <a:srgbClr val="F8FAFC"/>
-          </a:solidFill>
-          <a:ln>
-            <a:noFill/>
-          </a:ln>
-          <a:effectLst/>
-        </p:spPr>
-        <p:style>
-          <a:lnRef idx="1">
-            <a:schemeClr val="accent1"/>
-          </a:lnRef>
-          <a:fillRef idx="3">
-            <a:schemeClr val="accent1"/>
-          </a:fillRef>
-          <a:effectRef idx="2">
-            <a:schemeClr val="accent1"/>
-          </a:effectRef>
-          <a:fontRef idx="minor">
-            <a:schemeClr val="lt1"/>
-          </a:fontRef>
-        </p:style>
-        <p:txBody>
-          <a:bodyPr rtlCol="0" anchor="ctr"/>
-          <a:lstStyle/>
-          <a:p>
-            <a:pPr algn="ctr"/>
-          </a:p>
-        </p:txBody>
-      </p:sp>
-      <p:sp>
-        <p:nvSpPr>
-          <p:cNvPr id="26" name="Rectangle 25"/>
-          <p:cNvSpPr/>
-          <p:nvPr/>
-        </p:nvSpPr>
-        <p:spPr>
-          <a:xfrm>
-            <a:off x="365760" y="5431536"/>
-            <a:ext cx="54864" cy="594360"/>
+            <a:off x="5077846" y="3300984"/>
+            <a:ext cx="54864" cy="1554480"/>
           </a:xfrm>
           <a:prstGeom prst="rect">
             <a:avLst/>
@@ -23024,14 +22994,221 @@
       </p:sp>
       <p:sp>
         <p:nvSpPr>
+          <p:cNvPr id="26" name="TextBox 25"/>
+          <p:cNvSpPr txBox="1"/>
+          <p:nvPr/>
+        </p:nvSpPr>
+        <p:spPr>
+          <a:xfrm>
+            <a:off x="5279014" y="3410712"/>
+            <a:ext cx="6437193" cy="274320"/>
+          </a:xfrm>
+          <a:prstGeom prst="rect">
+            <a:avLst/>
+          </a:prstGeom>
+          <a:noFill/>
+        </p:spPr>
+        <p:txBody>
+          <a:bodyPr wrap="square" anchor="t" lIns="36000" rIns="36000" tIns="18000" bIns="18000">
+            <a:spAutoFit/>
+          </a:bodyPr>
+          <a:lstStyle/>
+          <a:p>
+            <a:pPr algn="l"/>
+            <a:r>
+              <a:rPr sz="1300" b="1" i="0">
+                <a:solidFill>
+                  <a:srgbClr val="3B5174"/>
+                </a:solidFill>
+                <a:latin typeface="Noto Sans JP"/>
+              </a:rPr>
+              <a:t>動的降伏応力 σ_dynamic</a:t>
+            </a:r>
+          </a:p>
+        </p:txBody>
+      </p:sp>
+      <p:sp>
+        <p:nvSpPr>
           <p:cNvPr id="27" name="TextBox 26"/>
           <p:cNvSpPr txBox="1"/>
           <p:nvPr/>
         </p:nvSpPr>
         <p:spPr>
           <a:xfrm>
-            <a:off x="548640" y="5431536"/>
-            <a:ext cx="365760" cy="594360"/>
+            <a:off x="5279014" y="3758184"/>
+            <a:ext cx="6437193" cy="274320"/>
+          </a:xfrm>
+          <a:prstGeom prst="rect">
+            <a:avLst/>
+          </a:prstGeom>
+          <a:noFill/>
+        </p:spPr>
+        <p:txBody>
+          <a:bodyPr wrap="square" anchor="t" lIns="36000" rIns="36000" tIns="18000" bIns="18000">
+            <a:spAutoFit/>
+          </a:bodyPr>
+          <a:lstStyle/>
+          <a:p>
+            <a:pPr algn="l"/>
+            <a:r>
+              <a:rPr sz="1150" b="0" i="0">
+                <a:solidFill>
+                  <a:srgbClr val="334155"/>
+                </a:solidFill>
+                <a:latin typeface="Noto Sans JP"/>
+              </a:rPr>
+              <a:t>測定：フロースイープ（100→0.01 s⁻¹）を HB モデルにフィット</a:t>
+            </a:r>
+          </a:p>
+        </p:txBody>
+      </p:sp>
+      <p:sp>
+        <p:nvSpPr>
+          <p:cNvPr id="28" name="TextBox 27"/>
+          <p:cNvSpPr txBox="1"/>
+          <p:nvPr/>
+        </p:nvSpPr>
+        <p:spPr>
+          <a:xfrm>
+            <a:off x="5279014" y="4069080"/>
+            <a:ext cx="6437193" cy="731520"/>
+          </a:xfrm>
+          <a:prstGeom prst="rect">
+            <a:avLst/>
+          </a:prstGeom>
+          <a:noFill/>
+        </p:spPr>
+        <p:txBody>
+          <a:bodyPr wrap="square" anchor="t" lIns="36000" rIns="36000" tIns="18000" bIns="18000">
+            <a:spAutoFit/>
+          </a:bodyPr>
+          <a:lstStyle/>
+          <a:p>
+            <a:pPr algn="l"/>
+            <a:r>
+              <a:rPr sz="1150" b="0" i="0">
+                <a:solidFill>
+                  <a:srgbClr val="475569"/>
+                </a:solidFill>
+                <a:latin typeface="Noto Sans JP"/>
+              </a:rPr>
+              <a:t>意味：流れ続ける（流動維持）のに必要な応力 → 適度ならポンプ圧の制約内で噴霧可能</a:t>
+            </a:r>
+          </a:p>
+          <a:p>
+            <a:pPr algn="l"/>
+            <a:r>
+              <a:rPr sz="1150" b="0" i="0">
+                <a:solidFill>
+                  <a:srgbClr val="475569"/>
+                </a:solidFill>
+                <a:latin typeface="Noto Sans JP"/>
+              </a:rPr>
+              <a:t>実測（新鮮）：HEC+MC/CSP 33.34 Pa ／ MHEC/CSP 3.31 Pa</a:t>
+            </a:r>
+          </a:p>
+        </p:txBody>
+      </p:sp>
+      <p:sp>
+        <p:nvSpPr>
+          <p:cNvPr id="29" name="Rounded Rectangle 28"/>
+          <p:cNvSpPr/>
+          <p:nvPr/>
+        </p:nvSpPr>
+        <p:spPr>
+          <a:xfrm>
+            <a:off x="365760" y="5056632"/>
+            <a:ext cx="11460175" cy="566928"/>
+          </a:xfrm>
+          <a:prstGeom prst="roundRect">
+            <a:avLst>
+              <a:gd name="adj" fmla="val 4000"/>
+            </a:avLst>
+          </a:prstGeom>
+          <a:solidFill>
+            <a:srgbClr val="1E293B"/>
+          </a:solidFill>
+          <a:ln>
+            <a:noFill/>
+          </a:ln>
+          <a:effectLst/>
+        </p:spPr>
+        <p:style>
+          <a:lnRef idx="1">
+            <a:schemeClr val="accent1"/>
+          </a:lnRef>
+          <a:fillRef idx="3">
+            <a:schemeClr val="accent1"/>
+          </a:fillRef>
+          <a:effectRef idx="2">
+            <a:schemeClr val="accent1"/>
+          </a:effectRef>
+          <a:fontRef idx="minor">
+            <a:schemeClr val="lt1"/>
+          </a:fontRef>
+        </p:style>
+        <p:txBody>
+          <a:bodyPr rtlCol="0" anchor="ctr"/>
+          <a:lstStyle/>
+          <a:p>
+            <a:pPr algn="ctr"/>
+          </a:p>
+        </p:txBody>
+      </p:sp>
+      <p:sp>
+        <p:nvSpPr>
+          <p:cNvPr id="30" name="Rectangle 29"/>
+          <p:cNvSpPr/>
+          <p:nvPr/>
+        </p:nvSpPr>
+        <p:spPr>
+          <a:xfrm>
+            <a:off x="365760" y="5056632"/>
+            <a:ext cx="54864" cy="566928"/>
+          </a:xfrm>
+          <a:prstGeom prst="rect">
+            <a:avLst/>
+          </a:prstGeom>
+          <a:solidFill>
+            <a:srgbClr val="D4A574"/>
+          </a:solidFill>
+          <a:ln>
+            <a:noFill/>
+          </a:ln>
+          <a:effectLst/>
+        </p:spPr>
+        <p:style>
+          <a:lnRef idx="1">
+            <a:schemeClr val="accent1"/>
+          </a:lnRef>
+          <a:fillRef idx="3">
+            <a:schemeClr val="accent1"/>
+          </a:fillRef>
+          <a:effectRef idx="2">
+            <a:schemeClr val="accent1"/>
+          </a:effectRef>
+          <a:fontRef idx="minor">
+            <a:schemeClr val="lt1"/>
+          </a:fontRef>
+        </p:style>
+        <p:txBody>
+          <a:bodyPr rtlCol="0" anchor="ctr"/>
+          <a:lstStyle/>
+          <a:p>
+            <a:pPr algn="ctr"/>
+          </a:p>
+        </p:txBody>
+      </p:sp>
+      <p:sp>
+        <p:nvSpPr>
+          <p:cNvPr id="31" name="TextBox 30"/>
+          <p:cNvSpPr txBox="1"/>
+          <p:nvPr/>
+        </p:nvSpPr>
+        <p:spPr>
+          <a:xfrm>
+            <a:off x="548640" y="5056632"/>
+            <a:ext cx="365760" cy="566928"/>
           </a:xfrm>
           <a:prstGeom prst="rect">
             <a:avLst/>
@@ -23048,25 +23225,25 @@
             <a:r>
               <a:rPr sz="1400" b="0" i="0">
                 <a:solidFill>
-                  <a:srgbClr val="3B5174"/>
-                </a:solidFill>
-                <a:latin typeface="Noto Sans JP"/>
-              </a:rPr>
-              <a:t>💨</a:t>
-            </a:r>
-          </a:p>
-        </p:txBody>
-      </p:sp>
-      <p:sp>
-        <p:nvSpPr>
-          <p:cNvPr id="28" name="TextBox 27"/>
-          <p:cNvSpPr txBox="1"/>
-          <p:nvPr/>
-        </p:nvSpPr>
-        <p:spPr>
-          <a:xfrm>
-            <a:off x="960120" y="5431536"/>
-            <a:ext cx="10774375" cy="594360"/>
+                  <a:srgbClr val="D4A574"/>
+                </a:solidFill>
+                <a:latin typeface="Noto Sans JP"/>
+              </a:rPr>
+              <a:t>✓</a:t>
+            </a:r>
+          </a:p>
+        </p:txBody>
+      </p:sp>
+      <p:sp>
+        <p:nvSpPr>
+          <p:cNvPr id="32" name="TextBox 31"/>
+          <p:cNvSpPr txBox="1"/>
+          <p:nvPr/>
+        </p:nvSpPr>
+        <p:spPr>
+          <a:xfrm>
+            <a:off x="960120" y="5056632"/>
+            <a:ext cx="10774375" cy="566928"/>
           </a:xfrm>
           <a:prstGeom prst="rect">
             <a:avLst/>
@@ -23083,11 +23260,11 @@
             <a:r>
               <a:rPr sz="1300" b="1" i="0">
                 <a:solidFill>
-                  <a:srgbClr val="1E293B"/>
-                </a:solidFill>
-                <a:latin typeface="Noto Sans JP"/>
-              </a:rPr>
-              <a:t>静止時は高粘度で付着、噴霧時は低粘度で散布 — 既存の消火機材でそのまま使える流動特性</a:t>
+                  <a:srgbClr val="FFFFFF"/>
+                </a:solidFill>
+                <a:latin typeface="Noto Sans JP"/>
+              </a:rPr>
+              <a:t>高い静的降伏応力（付着）と適度な動的降伏応力（噴霧）の両立が実用化の鍵。界面活性剤（SDS）添加は両降伏応力を下げ、付着・安定性に影響</a:t>
             </a:r>
           </a:p>
         </p:txBody>
@@ -23351,7 +23528,7 @@
                 </a:solidFill>
                 <a:latin typeface="Noto Sans JP"/>
               </a:rPr>
-              <a:t>レオロジー③：静的降伏応力と長期安定性</a:t>
+              <a:t>レオロジー③：動的降伏応力の経時変化と長期安定性</a:t>
             </a:r>
           </a:p>
         </p:txBody>
@@ -23590,7 +23767,7 @@
                 </a:solidFill>
                 <a:latin typeface="Noto Sans JP"/>
               </a:rPr>
-              <a:t>静的降伏応力：振幅掃引のG'/G'' クロスオーバー点（σ_s）。流れ始めに必要な最小応力</a:t>
+              <a:t>動的降伏応力：定常フロースイープを HB モデルにフィットして算出（σ_d）。流動状態を維持するのに必要な応力（Fig. S7）</a:t>
             </a:r>
           </a:p>
         </p:txBody>
@@ -23704,7 +23881,7 @@
                 </a:solidFill>
                 <a:latin typeface="Noto Sans JP"/>
               </a:rPr>
-              <a:t>静的降伏応力（新鮮）</a:t>
+              <a:t>動的降伏応力（Day 1）</a:t>
             </a:r>
           </a:p>
         </p:txBody>
@@ -23739,7 +23916,7 @@
                 </a:solidFill>
                 <a:latin typeface="Noto Sans JP"/>
               </a:rPr>
-              <a:t>静的降伏応力（455日後）</a:t>
+              <a:t>動的降伏応力（Day 455）</a:t>
             </a:r>
           </a:p>
         </p:txBody>
@@ -24415,7 +24592,7 @@
                 </a:solidFill>
                 <a:latin typeface="Noto Sans JP"/>
               </a:rPr>
-              <a:t>静的降伏応力</a:t>
+              <a:t>動的降伏応力（HB fit）</a:t>
             </a:r>
           </a:p>
         </p:txBody>
@@ -24450,7 +24627,7 @@
                 </a:solidFill>
                 <a:latin typeface="Noto Sans JP"/>
               </a:rPr>
-              <a:t>振幅掃引のG'/G''クロスオーバー点で測定。HEC+MC/CSPは33.34 Pa、MHEC/CSPは3.31 Pa（新鮮配合）</a:t>
+              <a:t>定常フロースイープを HB モデルにフィットして測定。HEC+MC/CSPは33.34 Pa、MHEC/CSPは3.31 Pa（Day 1）</a:t>
             </a:r>
           </a:p>
         </p:txBody>
@@ -24686,7 +24863,7 @@
                 </a:solidFill>
                 <a:latin typeface="Noto Sans JP"/>
               </a:rPr>
-              <a:t>HEC+MC系はより高い降伏応力で垂直面付着に有利。MHEC系は単一ポリマーで製造が簡便</a:t>
+              <a:t>HEC+MC系は経時で剛性化（33.34→68.9 Pa）。MHEC系は変化が穏やかで単一ポリマーにより製造も簡便</a:t>
             </a:r>
           </a:p>
         </p:txBody>

--- a/slides.pptx
+++ b/slides.pptx
@@ -6983,7 +6983,7 @@
                 </a:solidFill>
                 <a:latin typeface="Noto Sans JP"/>
               </a:rPr>
-              <a:t>せん断希薄化 n &lt; 1</a:t>
+              <a:t>せん断希薄化（粘度低下）</a:t>
             </a:r>
           </a:p>
         </p:txBody>
@@ -9865,7 +9865,7 @@
                 </a:solidFill>
                 <a:latin typeface="Noto Sans JP"/>
               </a:rPr>
-              <a:t>流動指数 n &lt; 1（噴霧時に低粘度化）</a:t>
+              <a:t>高せん断で粘度が急低下（噴霧時に低粘度化）</a:t>
             </a:r>
           </a:p>
         </p:txBody>
@@ -10088,7 +10088,7 @@
                 </a:solidFill>
                 <a:latin typeface="Noto Sans JP"/>
               </a:rPr>
-              <a:t>流動指数 n</a:t>
+              <a:t>粘度挙動</a:t>
             </a:r>
           </a:p>
         </p:txBody>
@@ -10123,7 +10123,7 @@
                 </a:solidFill>
                 <a:latin typeface="Noto Sans JP"/>
               </a:rPr>
-              <a:t>&lt; 1</a:t>
+              <a:t>可逆</a:t>
             </a:r>
           </a:p>
         </p:txBody>
@@ -10158,7 +10158,7 @@
                 </a:solidFill>
                 <a:latin typeface="Noto Sans JP"/>
               </a:rPr>
-              <a:t>強いせん断希薄化</a:t>
+              <a:t>高せん断で低粘度→静止で回復</a:t>
             </a:r>
           </a:p>
         </p:txBody>
@@ -10241,7 +10241,7 @@
                 </a:solidFill>
                 <a:latin typeface="Noto Sans JP"/>
               </a:rPr>
-              <a:t>静的降伏応力</a:t>
+              <a:t>動的降伏応力</a:t>
             </a:r>
           </a:p>
         </p:txBody>
@@ -10311,7 +10311,7 @@
                 </a:solidFill>
                 <a:latin typeface="Noto Sans JP"/>
               </a:rPr>
-              <a:t>HEC+MC/CSP</a:t>
+              <a:t>HEC+MC/CSP（HB fit）</a:t>
             </a:r>
           </a:p>
         </p:txBody>
@@ -17689,7 +17689,7 @@
                 </a:solidFill>
                 <a:latin typeface="Noto Sans JP"/>
               </a:rPr>
-              <a:t>低い Power-law 指数 n</a:t>
+              <a:t>せん断希薄化挙動</a:t>
             </a:r>
           </a:p>
         </p:txBody>
@@ -17724,7 +17724,7 @@
                 </a:solidFill>
                 <a:latin typeface="Noto Sans JP"/>
               </a:rPr>
-              <a:t>強いせん断希薄化（n ≪ 1）</a:t>
+              <a:t>高せん断で粘度が急低下</a:t>
             </a:r>
           </a:p>
         </p:txBody>
@@ -28866,7 +28866,7 @@
                 </a:solidFill>
                 <a:latin typeface="Noto Sans JP"/>
               </a:rPr>
-              <a:t>強い剪断希薄化（n &lt; 1）</a:t>
+              <a:t>せん断希薄化（高せん断で低粘度）</a:t>
             </a:r>
           </a:p>
         </p:txBody>
@@ -29461,7 +29461,7 @@
                 </a:solidFill>
                 <a:latin typeface="Noto Sans JP"/>
               </a:rPr>
-              <a:t>剪断希薄化（n &lt; 1）</a:t>
+              <a:t>せん断希薄化挙動</a:t>
             </a:r>
           </a:p>
         </p:txBody>
@@ -60660,7 +60660,7 @@
                 </a:solidFill>
                 <a:latin typeface="Noto Sans JP"/>
               </a:rPr>
-              <a:t>n &lt; 1</a:t>
+              <a:t>実証</a:t>
             </a:r>
           </a:p>
         </p:txBody>
@@ -66865,7 +66865,7 @@
                 </a:solidFill>
                 <a:latin typeface="Noto Sans JP"/>
               </a:rPr>
-              <a:t>n &lt; 1 の Power-law 挙動（噴霧・パイプ送液に適合）</a:t>
+              <a:t>高せん断で粘度が低下（噴霧・パイプ送液に適合）</a:t>
             </a:r>
           </a:p>
         </p:txBody>

--- a/slides.pptx
+++ b/slides.pptx
@@ -19607,7 +19607,7 @@
                 </a:solidFill>
                 <a:latin typeface="Noto Sans JP"/>
               </a:rPr>
-              <a:t>レオロジー①：振動弾性率 G' / G''</a:t>
+              <a:t>レオロジー①：粘弾性とせん断希薄化（Fig. 2a–c）</a:t>
             </a:r>
           </a:p>
         </p:txBody>
@@ -19700,7 +19700,7 @@
         <p:spPr>
           <a:xfrm>
             <a:off x="365760" y="859536"/>
-            <a:ext cx="6555461" cy="4389120"/>
+            <a:ext cx="5620359" cy="3200400"/>
           </a:xfrm>
           <a:prstGeom prst="roundRect">
             <a:avLst>
@@ -19827,7 +19827,7 @@
         <p:spPr>
           <a:xfrm>
             <a:off x="365760" y="859536"/>
-            <a:ext cx="6555461" cy="4389120"/>
+            <a:ext cx="5620359" cy="3200400"/>
           </a:xfrm>
           <a:prstGeom prst="rect">
             <a:avLst/>
@@ -19861,8 +19861,8 @@
         </p:nvSpPr>
         <p:spPr>
           <a:xfrm>
-            <a:off x="365760" y="5285232"/>
-            <a:ext cx="6555461" cy="274320"/>
+            <a:off x="365760" y="4096512"/>
+            <a:ext cx="5620359" cy="274320"/>
           </a:xfrm>
           <a:prstGeom prst="rect">
             <a:avLst/>
@@ -19883,7 +19883,7 @@
                 </a:solidFill>
                 <a:latin typeface="Noto Sans JP"/>
               </a:rPr>
-              <a:t>角周波数 vs Storage modulus G' ・ Loss modulus G''</a:t>
+              <a:t>角周波数 vs G' / G''（静止時の粘弾性）</a:t>
             </a:r>
           </a:p>
         </p:txBody>
@@ -19896,20 +19896,20 @@
         </p:nvSpPr>
         <p:spPr>
           <a:xfrm>
-            <a:off x="7104101" y="859536"/>
-            <a:ext cx="4721833" cy="2560320"/>
+            <a:off x="6205575" y="859536"/>
+            <a:ext cx="5620359" cy="3200400"/>
           </a:xfrm>
           <a:prstGeom prst="roundRect">
             <a:avLst>
-              <a:gd name="adj" fmla="val 4000"/>
+              <a:gd name="adj" fmla="val 2000"/>
             </a:avLst>
           </a:prstGeom>
           <a:solidFill>
-            <a:srgbClr val="F1F5F9"/>
+            <a:srgbClr val="F5F8FC"/>
           </a:solidFill>
-          <a:ln w="6350">
+          <a:ln w="12700">
             <a:solidFill>
-              <a:srgbClr val="E2E8F0"/>
+              <a:srgbClr val="C0D0E0"/>
             </a:solidFill>
           </a:ln>
           <a:effectLst/>
@@ -19944,8 +19944,367 @@
         </p:nvSpPr>
         <p:spPr>
           <a:xfrm>
-            <a:off x="7104101" y="859536"/>
-            <a:ext cx="4721833" cy="36576"/>
+            <a:off x="6315303" y="969264"/>
+            <a:ext cx="868680" cy="292608"/>
+          </a:xfrm>
+          <a:prstGeom prst="rect">
+            <a:avLst/>
+          </a:prstGeom>
+          <a:solidFill>
+            <a:srgbClr val="1E293B"/>
+          </a:solidFill>
+          <a:ln>
+            <a:noFill/>
+          </a:ln>
+          <a:effectLst/>
+        </p:spPr>
+        <p:style>
+          <a:lnRef idx="1">
+            <a:schemeClr val="accent1"/>
+          </a:lnRef>
+          <a:fillRef idx="3">
+            <a:schemeClr val="accent1"/>
+          </a:fillRef>
+          <a:effectRef idx="2">
+            <a:schemeClr val="accent1"/>
+          </a:effectRef>
+          <a:fontRef idx="minor">
+            <a:schemeClr val="lt1"/>
+          </a:fontRef>
+        </p:style>
+        <p:txBody>
+          <a:bodyPr rtlCol="0" anchor="ctr"/>
+          <a:lstStyle/>
+          <a:p>
+            <a:pPr algn="ctr"/>
+          </a:p>
+        </p:txBody>
+      </p:sp>
+      <p:sp>
+        <p:nvSpPr>
+          <p:cNvPr id="17" name="TextBox 16"/>
+          <p:cNvSpPr txBox="1"/>
+          <p:nvPr/>
+        </p:nvSpPr>
+        <p:spPr>
+          <a:xfrm>
+            <a:off x="6315303" y="969264"/>
+            <a:ext cx="868680" cy="292608"/>
+          </a:xfrm>
+          <a:prstGeom prst="rect">
+            <a:avLst/>
+          </a:prstGeom>
+          <a:noFill/>
+        </p:spPr>
+        <p:txBody>
+          <a:bodyPr wrap="square" anchor="ctr" lIns="36000" rIns="36000" tIns="18000" bIns="18000">
+            <a:spAutoFit/>
+          </a:bodyPr>
+          <a:lstStyle/>
+          <a:p>
+            <a:pPr algn="ctr"/>
+            <a:r>
+              <a:rPr sz="1100" b="1" i="0">
+                <a:solidFill>
+                  <a:srgbClr val="FFFFFF"/>
+                </a:solidFill>
+                <a:latin typeface="Noto Sans JP"/>
+              </a:rPr>
+              <a:t>Fig. 2c</a:t>
+            </a:r>
+          </a:p>
+        </p:txBody>
+      </p:sp>
+      <p:sp>
+        <p:nvSpPr>
+          <p:cNvPr id="18" name="TextBox 17"/>
+          <p:cNvSpPr txBox="1"/>
+          <p:nvPr/>
+        </p:nvSpPr>
+        <p:spPr>
+          <a:xfrm>
+            <a:off x="6205575" y="859536"/>
+            <a:ext cx="5620359" cy="3200400"/>
+          </a:xfrm>
+          <a:prstGeom prst="rect">
+            <a:avLst/>
+          </a:prstGeom>
+          <a:noFill/>
+        </p:spPr>
+        <p:txBody>
+          <a:bodyPr wrap="square" anchor="ctr" lIns="36000" rIns="36000" tIns="18000" bIns="18000">
+            <a:spAutoFit/>
+          </a:bodyPr>
+          <a:lstStyle/>
+          <a:p>
+            <a:pPr algn="ctr"/>
+            <a:r>
+              <a:rPr sz="1200" b="0" i="0">
+                <a:solidFill>
+                  <a:srgbClr val="AAB4C0"/>
+                </a:solidFill>
+                <a:latin typeface="Noto Sans JP"/>
+              </a:rPr>
+              <a:t>（論文の図を貼り付け）</a:t>
+            </a:r>
+          </a:p>
+        </p:txBody>
+      </p:sp>
+      <p:sp>
+        <p:nvSpPr>
+          <p:cNvPr id="19" name="TextBox 18"/>
+          <p:cNvSpPr txBox="1"/>
+          <p:nvPr/>
+        </p:nvSpPr>
+        <p:spPr>
+          <a:xfrm>
+            <a:off x="6205575" y="4096512"/>
+            <a:ext cx="5620359" cy="274320"/>
+          </a:xfrm>
+          <a:prstGeom prst="rect">
+            <a:avLst/>
+          </a:prstGeom>
+          <a:noFill/>
+        </p:spPr>
+        <p:txBody>
+          <a:bodyPr wrap="square" anchor="t" lIns="36000" rIns="36000" tIns="18000" bIns="18000">
+            <a:spAutoFit/>
+          </a:bodyPr>
+          <a:lstStyle/>
+          <a:p>
+            <a:pPr algn="ctr"/>
+            <a:r>
+              <a:rPr sz="1000" b="0" i="1">
+                <a:solidFill>
+                  <a:srgbClr val="64748B"/>
+                </a:solidFill>
+                <a:latin typeface="Noto Sans JP"/>
+              </a:rPr>
+              <a:t>せん断速度 vs 粘度（せん断希薄化）</a:t>
+            </a:r>
+          </a:p>
+        </p:txBody>
+      </p:sp>
+      <p:sp>
+        <p:nvSpPr>
+          <p:cNvPr id="20" name="Rounded Rectangle 19"/>
+          <p:cNvSpPr/>
+          <p:nvPr/>
+        </p:nvSpPr>
+        <p:spPr>
+          <a:xfrm>
+            <a:off x="365760" y="4261104"/>
+            <a:ext cx="5620359" cy="914400"/>
+          </a:xfrm>
+          <a:prstGeom prst="roundRect">
+            <a:avLst>
+              <a:gd name="adj" fmla="val 5000"/>
+            </a:avLst>
+          </a:prstGeom>
+          <a:solidFill>
+            <a:srgbClr val="F1F5F9"/>
+          </a:solidFill>
+          <a:ln w="15240">
+            <a:solidFill>
+              <a:srgbClr val="4A7C8C"/>
+            </a:solidFill>
+          </a:ln>
+          <a:effectLst/>
+        </p:spPr>
+        <p:style>
+          <a:lnRef idx="1">
+            <a:schemeClr val="accent1"/>
+          </a:lnRef>
+          <a:fillRef idx="3">
+            <a:schemeClr val="accent1"/>
+          </a:fillRef>
+          <a:effectRef idx="2">
+            <a:schemeClr val="accent1"/>
+          </a:effectRef>
+          <a:fontRef idx="minor">
+            <a:schemeClr val="lt1"/>
+          </a:fontRef>
+        </p:style>
+        <p:txBody>
+          <a:bodyPr rtlCol="0" anchor="ctr"/>
+          <a:lstStyle/>
+          <a:p>
+            <a:pPr algn="ctr"/>
+          </a:p>
+        </p:txBody>
+      </p:sp>
+      <p:sp>
+        <p:nvSpPr>
+          <p:cNvPr id="21" name="Rectangle 20"/>
+          <p:cNvSpPr/>
+          <p:nvPr/>
+        </p:nvSpPr>
+        <p:spPr>
+          <a:xfrm>
+            <a:off x="365760" y="4261104"/>
+            <a:ext cx="54864" cy="914400"/>
+          </a:xfrm>
+          <a:prstGeom prst="rect">
+            <a:avLst/>
+          </a:prstGeom>
+          <a:solidFill>
+            <a:srgbClr val="4A7C8C"/>
+          </a:solidFill>
+          <a:ln>
+            <a:noFill/>
+          </a:ln>
+          <a:effectLst/>
+        </p:spPr>
+        <p:style>
+          <a:lnRef idx="1">
+            <a:schemeClr val="accent1"/>
+          </a:lnRef>
+          <a:fillRef idx="3">
+            <a:schemeClr val="accent1"/>
+          </a:fillRef>
+          <a:effectRef idx="2">
+            <a:schemeClr val="accent1"/>
+          </a:effectRef>
+          <a:fontRef idx="minor">
+            <a:schemeClr val="lt1"/>
+          </a:fontRef>
+        </p:style>
+        <p:txBody>
+          <a:bodyPr rtlCol="0" anchor="ctr"/>
+          <a:lstStyle/>
+          <a:p>
+            <a:pPr algn="ctr"/>
+          </a:p>
+        </p:txBody>
+      </p:sp>
+      <p:sp>
+        <p:nvSpPr>
+          <p:cNvPr id="22" name="TextBox 21"/>
+          <p:cNvSpPr txBox="1"/>
+          <p:nvPr/>
+        </p:nvSpPr>
+        <p:spPr>
+          <a:xfrm>
+            <a:off x="548640" y="4370832"/>
+            <a:ext cx="5309463" cy="274320"/>
+          </a:xfrm>
+          <a:prstGeom prst="rect">
+            <a:avLst/>
+          </a:prstGeom>
+          <a:noFill/>
+        </p:spPr>
+        <p:txBody>
+          <a:bodyPr wrap="square" anchor="t" lIns="36000" rIns="36000" tIns="18000" bIns="18000">
+            <a:spAutoFit/>
+          </a:bodyPr>
+          <a:lstStyle/>
+          <a:p>
+            <a:pPr algn="l"/>
+            <a:r>
+              <a:rPr sz="1250" b="1" i="0">
+                <a:solidFill>
+                  <a:srgbClr val="4A7C8C"/>
+                </a:solidFill>
+                <a:latin typeface="Noto Sans JP"/>
+              </a:rPr>
+              <a:t>静止時：G' &gt; G'' → 固体的（ゲル）挙動</a:t>
+            </a:r>
+          </a:p>
+        </p:txBody>
+      </p:sp>
+      <p:sp>
+        <p:nvSpPr>
+          <p:cNvPr id="23" name="TextBox 22"/>
+          <p:cNvSpPr txBox="1"/>
+          <p:nvPr/>
+        </p:nvSpPr>
+        <p:spPr>
+          <a:xfrm>
+            <a:off x="548640" y="4700016"/>
+            <a:ext cx="5309463" cy="411480"/>
+          </a:xfrm>
+          <a:prstGeom prst="rect">
+            <a:avLst/>
+          </a:prstGeom>
+          <a:noFill/>
+        </p:spPr>
+        <p:txBody>
+          <a:bodyPr wrap="square" anchor="t" lIns="36000" rIns="36000" tIns="18000" bIns="18000">
+            <a:spAutoFit/>
+          </a:bodyPr>
+          <a:lstStyle/>
+          <a:p>
+            <a:pPr algn="l"/>
+            <a:r>
+              <a:rPr sz="1150" b="0" i="0">
+                <a:solidFill>
+                  <a:srgbClr val="334155"/>
+                </a:solidFill>
+                <a:latin typeface="Noto Sans JP"/>
+              </a:rPr>
+              <a:t>周波数依存性が小さく安定なネットワーク → 塗布後に流れ落ちない</a:t>
+            </a:r>
+          </a:p>
+        </p:txBody>
+      </p:sp>
+      <p:sp>
+        <p:nvSpPr>
+          <p:cNvPr id="24" name="Rounded Rectangle 23"/>
+          <p:cNvSpPr/>
+          <p:nvPr/>
+        </p:nvSpPr>
+        <p:spPr>
+          <a:xfrm>
+            <a:off x="6205575" y="4261104"/>
+            <a:ext cx="5620359" cy="914400"/>
+          </a:xfrm>
+          <a:prstGeom prst="roundRect">
+            <a:avLst>
+              <a:gd name="adj" fmla="val 5000"/>
+            </a:avLst>
+          </a:prstGeom>
+          <a:solidFill>
+            <a:srgbClr val="F1F5F9"/>
+          </a:solidFill>
+          <a:ln w="15240">
+            <a:solidFill>
+              <a:srgbClr val="3B5174"/>
+            </a:solidFill>
+          </a:ln>
+          <a:effectLst/>
+        </p:spPr>
+        <p:style>
+          <a:lnRef idx="1">
+            <a:schemeClr val="accent1"/>
+          </a:lnRef>
+          <a:fillRef idx="3">
+            <a:schemeClr val="accent1"/>
+          </a:fillRef>
+          <a:effectRef idx="2">
+            <a:schemeClr val="accent1"/>
+          </a:effectRef>
+          <a:fontRef idx="minor">
+            <a:schemeClr val="lt1"/>
+          </a:fontRef>
+        </p:style>
+        <p:txBody>
+          <a:bodyPr rtlCol="0" anchor="ctr"/>
+          <a:lstStyle/>
+          <a:p>
+            <a:pPr algn="ctr"/>
+          </a:p>
+        </p:txBody>
+      </p:sp>
+      <p:sp>
+        <p:nvSpPr>
+          <p:cNvPr id="25" name="Rectangle 24"/>
+          <p:cNvSpPr/>
+          <p:nvPr/>
+        </p:nvSpPr>
+        <p:spPr>
+          <a:xfrm>
+            <a:off x="6205575" y="4261104"/>
+            <a:ext cx="54864" cy="914400"/>
           </a:xfrm>
           <a:prstGeom prst="rect">
             <a:avLst/>
@@ -19982,14 +20341,14 @@
       </p:sp>
       <p:sp>
         <p:nvSpPr>
-          <p:cNvPr id="17" name="TextBox 16"/>
-          <p:cNvSpPr txBox="1"/>
-          <p:nvPr/>
-        </p:nvSpPr>
-        <p:spPr>
-          <a:xfrm>
-            <a:off x="7286981" y="1024128"/>
-            <a:ext cx="4356073" cy="219456"/>
+          <p:cNvPr id="26" name="TextBox 25"/>
+          <p:cNvSpPr txBox="1"/>
+          <p:nvPr/>
+        </p:nvSpPr>
+        <p:spPr>
+          <a:xfrm>
+            <a:off x="6388455" y="4370832"/>
+            <a:ext cx="5309463" cy="274320"/>
           </a:xfrm>
           <a:prstGeom prst="rect">
             <a:avLst/>
@@ -20004,27 +20363,27 @@
           <a:p>
             <a:pPr algn="l"/>
             <a:r>
-              <a:rPr sz="1000" b="1" i="0">
-                <a:solidFill>
-                  <a:srgbClr val="64748B"/>
-                </a:solidFill>
-                <a:latin typeface="Noto Sans JP"/>
-              </a:rPr>
-              <a:t>KEY OBSERVATION</a:t>
-            </a:r>
-          </a:p>
-        </p:txBody>
-      </p:sp>
-      <p:sp>
-        <p:nvSpPr>
-          <p:cNvPr id="18" name="TextBox 17"/>
-          <p:cNvSpPr txBox="1"/>
-          <p:nvPr/>
-        </p:nvSpPr>
-        <p:spPr>
-          <a:xfrm>
-            <a:off x="7286981" y="1261872"/>
-            <a:ext cx="4356073" cy="329184"/>
+              <a:rPr sz="1250" b="1" i="0">
+                <a:solidFill>
+                  <a:srgbClr val="3B5174"/>
+                </a:solidFill>
+                <a:latin typeface="Noto Sans JP"/>
+              </a:rPr>
+              <a:t>高せん断時：粘度が急低下（せん断希薄化）</a:t>
+            </a:r>
+          </a:p>
+        </p:txBody>
+      </p:sp>
+      <p:sp>
+        <p:nvSpPr>
+          <p:cNvPr id="27" name="TextBox 26"/>
+          <p:cNvSpPr txBox="1"/>
+          <p:nvPr/>
+        </p:nvSpPr>
+        <p:spPr>
+          <a:xfrm>
+            <a:off x="6388455" y="4700016"/>
+            <a:ext cx="5309463" cy="411480"/>
           </a:xfrm>
           <a:prstGeom prst="rect">
             <a:avLst/>
@@ -20039,237 +20398,27 @@
           <a:p>
             <a:pPr algn="l"/>
             <a:r>
-              <a:rPr sz="1500" b="1" i="0">
-                <a:solidFill>
-                  <a:srgbClr val="1E293B"/>
-                </a:solidFill>
-                <a:latin typeface="Noto Sans JP"/>
-              </a:rPr>
-              <a:t>主な観察</a:t>
-            </a:r>
-          </a:p>
-        </p:txBody>
-      </p:sp>
-      <p:sp>
-        <p:nvSpPr>
-          <p:cNvPr id="19" name="TextBox 18"/>
-          <p:cNvSpPr txBox="1"/>
-          <p:nvPr/>
-        </p:nvSpPr>
-        <p:spPr>
-          <a:xfrm>
-            <a:off x="7286981" y="1627632"/>
-            <a:ext cx="182880" cy="274320"/>
-          </a:xfrm>
-          <a:prstGeom prst="rect">
-            <a:avLst/>
-          </a:prstGeom>
-          <a:noFill/>
-        </p:spPr>
-        <p:txBody>
-          <a:bodyPr wrap="square" anchor="t" lIns="36000" rIns="36000" tIns="18000" bIns="18000">
-            <a:spAutoFit/>
-          </a:bodyPr>
-          <a:lstStyle/>
-          <a:p>
-            <a:pPr algn="l"/>
-            <a:r>
-              <a:rPr sz="1200" b="0" i="0">
-                <a:solidFill>
-                  <a:srgbClr val="3B5174"/>
-                </a:solidFill>
-                <a:latin typeface="Noto Sans JP"/>
-              </a:rPr>
-              <a:t>•</a:t>
-            </a:r>
-          </a:p>
-        </p:txBody>
-      </p:sp>
-      <p:sp>
-        <p:nvSpPr>
-          <p:cNvPr id="20" name="TextBox 19"/>
-          <p:cNvSpPr txBox="1"/>
-          <p:nvPr/>
-        </p:nvSpPr>
-        <p:spPr>
-          <a:xfrm>
-            <a:off x="7488149" y="1627632"/>
-            <a:ext cx="4154905" cy="274320"/>
-          </a:xfrm>
-          <a:prstGeom prst="rect">
-            <a:avLst/>
-          </a:prstGeom>
-          <a:noFill/>
-        </p:spPr>
-        <p:txBody>
-          <a:bodyPr wrap="square" anchor="t" lIns="36000" rIns="36000" tIns="18000" bIns="18000">
-            <a:spAutoFit/>
-          </a:bodyPr>
-          <a:lstStyle/>
-          <a:p>
-            <a:pPr algn="l"/>
-            <a:r>
-              <a:rPr sz="1200" b="0" i="0">
-                <a:solidFill>
-                  <a:srgbClr val="475569"/>
-                </a:solidFill>
-                <a:latin typeface="Noto Sans JP"/>
-              </a:rPr>
-              <a:t>全配合系で G' &gt; G'' → 固体的（ゲル）挙動</a:t>
-            </a:r>
-          </a:p>
-        </p:txBody>
-      </p:sp>
-      <p:sp>
-        <p:nvSpPr>
-          <p:cNvPr id="21" name="TextBox 20"/>
-          <p:cNvSpPr txBox="1"/>
-          <p:nvPr/>
-        </p:nvSpPr>
-        <p:spPr>
-          <a:xfrm>
-            <a:off x="7286981" y="1901952"/>
-            <a:ext cx="182880" cy="274320"/>
-          </a:xfrm>
-          <a:prstGeom prst="rect">
-            <a:avLst/>
-          </a:prstGeom>
-          <a:noFill/>
-        </p:spPr>
-        <p:txBody>
-          <a:bodyPr wrap="square" anchor="t" lIns="36000" rIns="36000" tIns="18000" bIns="18000">
-            <a:spAutoFit/>
-          </a:bodyPr>
-          <a:lstStyle/>
-          <a:p>
-            <a:pPr algn="l"/>
-            <a:r>
-              <a:rPr sz="1200" b="0" i="0">
-                <a:solidFill>
-                  <a:srgbClr val="3B5174"/>
-                </a:solidFill>
-                <a:latin typeface="Noto Sans JP"/>
-              </a:rPr>
-              <a:t>•</a:t>
-            </a:r>
-          </a:p>
-        </p:txBody>
-      </p:sp>
-      <p:sp>
-        <p:nvSpPr>
-          <p:cNvPr id="22" name="TextBox 21"/>
-          <p:cNvSpPr txBox="1"/>
-          <p:nvPr/>
-        </p:nvSpPr>
-        <p:spPr>
-          <a:xfrm>
-            <a:off x="7488149" y="1901952"/>
-            <a:ext cx="4154905" cy="274320"/>
-          </a:xfrm>
-          <a:prstGeom prst="rect">
-            <a:avLst/>
-          </a:prstGeom>
-          <a:noFill/>
-        </p:spPr>
-        <p:txBody>
-          <a:bodyPr wrap="square" anchor="t" lIns="36000" rIns="36000" tIns="18000" bIns="18000">
-            <a:spAutoFit/>
-          </a:bodyPr>
-          <a:lstStyle/>
-          <a:p>
-            <a:pPr algn="l"/>
-            <a:r>
-              <a:rPr sz="1200" b="0" i="0">
-                <a:solidFill>
-                  <a:srgbClr val="475569"/>
-                </a:solidFill>
-                <a:latin typeface="Noto Sans JP"/>
-              </a:rPr>
-              <a:t>周波数依存性が小さい → 安定したネットワーク</a:t>
-            </a:r>
-          </a:p>
-        </p:txBody>
-      </p:sp>
-      <p:sp>
-        <p:nvSpPr>
-          <p:cNvPr id="23" name="TextBox 22"/>
-          <p:cNvSpPr txBox="1"/>
-          <p:nvPr/>
-        </p:nvSpPr>
-        <p:spPr>
-          <a:xfrm>
-            <a:off x="7286981" y="2176272"/>
-            <a:ext cx="182880" cy="274320"/>
-          </a:xfrm>
-          <a:prstGeom prst="rect">
-            <a:avLst/>
-          </a:prstGeom>
-          <a:noFill/>
-        </p:spPr>
-        <p:txBody>
-          <a:bodyPr wrap="square" anchor="t" lIns="36000" rIns="36000" tIns="18000" bIns="18000">
-            <a:spAutoFit/>
-          </a:bodyPr>
-          <a:lstStyle/>
-          <a:p>
-            <a:pPr algn="l"/>
-            <a:r>
-              <a:rPr sz="1200" b="0" i="0">
-                <a:solidFill>
-                  <a:srgbClr val="3B5174"/>
-                </a:solidFill>
-                <a:latin typeface="Noto Sans JP"/>
-              </a:rPr>
-              <a:t>•</a:t>
-            </a:r>
-          </a:p>
-        </p:txBody>
-      </p:sp>
-      <p:sp>
-        <p:nvSpPr>
-          <p:cNvPr id="24" name="TextBox 23"/>
-          <p:cNvSpPr txBox="1"/>
-          <p:nvPr/>
-        </p:nvSpPr>
-        <p:spPr>
-          <a:xfrm>
-            <a:off x="7488149" y="2176272"/>
-            <a:ext cx="4154905" cy="274320"/>
-          </a:xfrm>
-          <a:prstGeom prst="rect">
-            <a:avLst/>
-          </a:prstGeom>
-          <a:noFill/>
-        </p:spPr>
-        <p:txBody>
-          <a:bodyPr wrap="square" anchor="t" lIns="36000" rIns="36000" tIns="18000" bIns="18000">
-            <a:spAutoFit/>
-          </a:bodyPr>
-          <a:lstStyle/>
-          <a:p>
-            <a:pPr algn="l"/>
-            <a:r>
-              <a:rPr sz="1200" b="0" i="0">
-                <a:solidFill>
-                  <a:srgbClr val="475569"/>
-                </a:solidFill>
-                <a:latin typeface="Noto Sans JP"/>
-              </a:rPr>
-              <a:t>AquaGel-K（G'=457 Pa）より低い G'（46/26 Pa）だが全系でゲル挙動</a:t>
-            </a:r>
-          </a:p>
-        </p:txBody>
-      </p:sp>
-      <p:sp>
-        <p:nvSpPr>
-          <p:cNvPr id="25" name="Rounded Rectangle 24"/>
+              <a:rPr sz="1150" b="0" i="0">
+                <a:solidFill>
+                  <a:srgbClr val="334155"/>
+                </a:solidFill>
+                <a:latin typeface="Noto Sans JP"/>
+              </a:rPr>
+              <a:t>ノズル通過時の高せん断で粘度低下 → スプレー噴霧が可能</a:t>
+            </a:r>
+          </a:p>
+        </p:txBody>
+      </p:sp>
+      <p:sp>
+        <p:nvSpPr>
+          <p:cNvPr id="28" name="Rounded Rectangle 27"/>
           <p:cNvSpPr/>
           <p:nvPr/>
         </p:nvSpPr>
         <p:spPr>
           <a:xfrm>
-            <a:off x="7104101" y="3648456"/>
-            <a:ext cx="4721833" cy="731520"/>
+            <a:off x="365760" y="5340096"/>
+            <a:ext cx="11460175" cy="512064"/>
           </a:xfrm>
           <a:prstGeom prst="roundRect">
             <a:avLst>
@@ -20277,7 +20426,7 @@
             </a:avLst>
           </a:prstGeom>
           <a:solidFill>
-            <a:srgbClr val="F8FAFC"/>
+            <a:srgbClr val="1E293B"/>
           </a:solidFill>
           <a:ln>
             <a:noFill/>
@@ -20308,20 +20457,20 @@
       </p:sp>
       <p:sp>
         <p:nvSpPr>
-          <p:cNvPr id="26" name="Rectangle 25"/>
+          <p:cNvPr id="29" name="Rectangle 28"/>
           <p:cNvSpPr/>
           <p:nvPr/>
         </p:nvSpPr>
         <p:spPr>
           <a:xfrm>
-            <a:off x="7104101" y="3648456"/>
-            <a:ext cx="54864" cy="731520"/>
+            <a:off x="365760" y="5340096"/>
+            <a:ext cx="54864" cy="512064"/>
           </a:xfrm>
           <a:prstGeom prst="rect">
             <a:avLst/>
           </a:prstGeom>
           <a:solidFill>
-            <a:srgbClr val="3B5174"/>
+            <a:srgbClr val="D4A574"/>
           </a:solidFill>
           <a:ln>
             <a:noFill/>
@@ -20352,14 +20501,14 @@
       </p:sp>
       <p:sp>
         <p:nvSpPr>
-          <p:cNvPr id="27" name="TextBox 26"/>
-          <p:cNvSpPr txBox="1"/>
-          <p:nvPr/>
-        </p:nvSpPr>
-        <p:spPr>
-          <a:xfrm>
-            <a:off x="7286981" y="3648456"/>
-            <a:ext cx="365760" cy="731520"/>
+          <p:cNvPr id="30" name="TextBox 29"/>
+          <p:cNvSpPr txBox="1"/>
+          <p:nvPr/>
+        </p:nvSpPr>
+        <p:spPr>
+          <a:xfrm>
+            <a:off x="548640" y="5340096"/>
+            <a:ext cx="365760" cy="512064"/>
           </a:xfrm>
           <a:prstGeom prst="rect">
             <a:avLst/>
@@ -20376,25 +20525,25 @@
             <a:r>
               <a:rPr sz="1400" b="0" i="0">
                 <a:solidFill>
-                  <a:srgbClr val="3B5174"/>
-                </a:solidFill>
-                <a:latin typeface="Noto Sans JP"/>
-              </a:rPr>
-              <a:t>"</a:t>
-            </a:r>
-          </a:p>
-        </p:txBody>
-      </p:sp>
-      <p:sp>
-        <p:nvSpPr>
-          <p:cNvPr id="28" name="TextBox 27"/>
-          <p:cNvSpPr txBox="1"/>
-          <p:nvPr/>
-        </p:nvSpPr>
-        <p:spPr>
-          <a:xfrm>
-            <a:off x="7698461" y="3648456"/>
-            <a:ext cx="4036033" cy="731520"/>
+                  <a:srgbClr val="D4A574"/>
+                </a:solidFill>
+                <a:latin typeface="Noto Sans JP"/>
+              </a:rPr>
+              <a:t>✓</a:t>
+            </a:r>
+          </a:p>
+        </p:txBody>
+      </p:sp>
+      <p:sp>
+        <p:nvSpPr>
+          <p:cNvPr id="31" name="TextBox 30"/>
+          <p:cNvSpPr txBox="1"/>
+          <p:nvPr/>
+        </p:nvSpPr>
+        <p:spPr>
+          <a:xfrm>
+            <a:off x="960120" y="5340096"/>
+            <a:ext cx="10774375" cy="512064"/>
           </a:xfrm>
           <a:prstGeom prst="rect">
             <a:avLst/>
@@ -20411,11 +20560,11 @@
             <a:r>
               <a:rPr sz="1300" b="1" i="0">
                 <a:solidFill>
-                  <a:srgbClr val="1E293B"/>
-                </a:solidFill>
-                <a:latin typeface="Noto Sans JP"/>
-              </a:rPr>
-              <a:t>ゲル骨格が明確に形成されており、塗布後に流れ落ちない</a:t>
+                  <a:srgbClr val="FFFFFF"/>
+                </a:solidFill>
+                <a:latin typeface="Noto Sans JP"/>
+              </a:rPr>
+              <a:t>静止時はゲル（垂れない）／噴霧時は低粘度（飛ばせる）の両立がスプレー散布の基盤</a:t>
             </a:r>
           </a:p>
         </p:txBody>
@@ -22250,7 +22399,7 @@
                 </a:solidFill>
                 <a:latin typeface="Noto Sans JP"/>
               </a:rPr>
-              <a:t>レオロジー②：2つの降伏応力 — 静的（付着）と動的（噴霧）</a:t>
+              <a:t>レオロジー②：静的・動的降伏応力と AquaGel-K 比較（Fig. 2d・S3）</a:t>
             </a:r>
           </a:p>
         </p:txBody>
@@ -22489,7 +22638,7 @@
                 </a:solidFill>
                 <a:latin typeface="Noto Sans JP"/>
               </a:rPr>
-              <a:t>降伏応力＝ゲルが流れ出す／流れ続けるのに必要な応力。本研究は2つの定義で評価（Fig. 2c–d・S3）</a:t>
+              <a:t>降伏応力＝ゲルが流れ出す／流れ続けるのに必要な応力。静的（流れ始め＝付着）と動的（流動維持＝噴霧）の2定義で評価</a:t>
             </a:r>
           </a:p>
         </p:txBody>
@@ -22503,7 +22652,7 @@
         <p:spPr>
           <a:xfrm>
             <a:off x="365760" y="1609344"/>
-            <a:ext cx="4492630" cy="3246120"/>
+            <a:ext cx="4492630" cy="1554480"/>
           </a:xfrm>
           <a:prstGeom prst="roundRect">
             <a:avLst>
@@ -22616,7 +22765,7 @@
                 </a:solidFill>
                 <a:latin typeface="Noto Sans JP"/>
               </a:rPr>
-              <a:t>Fig. 2c–d</a:t>
+              <a:t>SI Fig. S3</a:t>
             </a:r>
           </a:p>
         </p:txBody>
@@ -22630,7 +22779,7 @@
         <p:spPr>
           <a:xfrm>
             <a:off x="365760" y="1609344"/>
-            <a:ext cx="4492630" cy="3246120"/>
+            <a:ext cx="4492630" cy="1554480"/>
           </a:xfrm>
           <a:prstGeom prst="rect">
             <a:avLst/>
@@ -22659,6 +22808,203 @@
       <p:sp>
         <p:nvSpPr>
           <p:cNvPr id="18" name="TextBox 17"/>
+          <p:cNvSpPr txBox="1"/>
+          <p:nvPr/>
+        </p:nvSpPr>
+        <p:spPr>
+          <a:xfrm>
+            <a:off x="365760" y="3200400"/>
+            <a:ext cx="4492630" cy="274320"/>
+          </a:xfrm>
+          <a:prstGeom prst="rect">
+            <a:avLst/>
+          </a:prstGeom>
+          <a:noFill/>
+        </p:spPr>
+        <p:txBody>
+          <a:bodyPr wrap="square" anchor="t" lIns="36000" rIns="36000" tIns="18000" bIns="18000">
+            <a:spAutoFit/>
+          </a:bodyPr>
+          <a:lstStyle/>
+          <a:p>
+            <a:pPr algn="ctr"/>
+            <a:r>
+              <a:rPr sz="1000" b="0" i="1">
+                <a:solidFill>
+                  <a:srgbClr val="64748B"/>
+                </a:solidFill>
+                <a:latin typeface="Noto Sans JP"/>
+              </a:rPr>
+              <a:t>振幅掃引：G'/G'' クロスオーバー（静的降伏応力）</a:t>
+            </a:r>
+          </a:p>
+        </p:txBody>
+      </p:sp>
+      <p:sp>
+        <p:nvSpPr>
+          <p:cNvPr id="19" name="Rounded Rectangle 18"/>
+          <p:cNvSpPr/>
+          <p:nvPr/>
+        </p:nvSpPr>
+        <p:spPr>
+          <a:xfrm>
+            <a:off x="365760" y="3300984"/>
+            <a:ext cx="4492630" cy="1554480"/>
+          </a:xfrm>
+          <a:prstGeom prst="roundRect">
+            <a:avLst>
+              <a:gd name="adj" fmla="val 2000"/>
+            </a:avLst>
+          </a:prstGeom>
+          <a:solidFill>
+            <a:srgbClr val="F5F8FC"/>
+          </a:solidFill>
+          <a:ln w="12700">
+            <a:solidFill>
+              <a:srgbClr val="C0D0E0"/>
+            </a:solidFill>
+          </a:ln>
+          <a:effectLst/>
+        </p:spPr>
+        <p:style>
+          <a:lnRef idx="1">
+            <a:schemeClr val="accent1"/>
+          </a:lnRef>
+          <a:fillRef idx="3">
+            <a:schemeClr val="accent1"/>
+          </a:fillRef>
+          <a:effectRef idx="2">
+            <a:schemeClr val="accent1"/>
+          </a:effectRef>
+          <a:fontRef idx="minor">
+            <a:schemeClr val="lt1"/>
+          </a:fontRef>
+        </p:style>
+        <p:txBody>
+          <a:bodyPr rtlCol="0" anchor="ctr"/>
+          <a:lstStyle/>
+          <a:p>
+            <a:pPr algn="ctr"/>
+          </a:p>
+        </p:txBody>
+      </p:sp>
+      <p:sp>
+        <p:nvSpPr>
+          <p:cNvPr id="20" name="Rectangle 19"/>
+          <p:cNvSpPr/>
+          <p:nvPr/>
+        </p:nvSpPr>
+        <p:spPr>
+          <a:xfrm>
+            <a:off x="475488" y="3410712"/>
+            <a:ext cx="868680" cy="292608"/>
+          </a:xfrm>
+          <a:prstGeom prst="rect">
+            <a:avLst/>
+          </a:prstGeom>
+          <a:solidFill>
+            <a:srgbClr val="1E293B"/>
+          </a:solidFill>
+          <a:ln>
+            <a:noFill/>
+          </a:ln>
+          <a:effectLst/>
+        </p:spPr>
+        <p:style>
+          <a:lnRef idx="1">
+            <a:schemeClr val="accent1"/>
+          </a:lnRef>
+          <a:fillRef idx="3">
+            <a:schemeClr val="accent1"/>
+          </a:fillRef>
+          <a:effectRef idx="2">
+            <a:schemeClr val="accent1"/>
+          </a:effectRef>
+          <a:fontRef idx="minor">
+            <a:schemeClr val="lt1"/>
+          </a:fontRef>
+        </p:style>
+        <p:txBody>
+          <a:bodyPr rtlCol="0" anchor="ctr"/>
+          <a:lstStyle/>
+          <a:p>
+            <a:pPr algn="ctr"/>
+          </a:p>
+        </p:txBody>
+      </p:sp>
+      <p:sp>
+        <p:nvSpPr>
+          <p:cNvPr id="21" name="TextBox 20"/>
+          <p:cNvSpPr txBox="1"/>
+          <p:nvPr/>
+        </p:nvSpPr>
+        <p:spPr>
+          <a:xfrm>
+            <a:off x="475488" y="3410712"/>
+            <a:ext cx="868680" cy="292608"/>
+          </a:xfrm>
+          <a:prstGeom prst="rect">
+            <a:avLst/>
+          </a:prstGeom>
+          <a:noFill/>
+        </p:spPr>
+        <p:txBody>
+          <a:bodyPr wrap="square" anchor="ctr" lIns="36000" rIns="36000" tIns="18000" bIns="18000">
+            <a:spAutoFit/>
+          </a:bodyPr>
+          <a:lstStyle/>
+          <a:p>
+            <a:pPr algn="ctr"/>
+            <a:r>
+              <a:rPr sz="1100" b="1" i="0">
+                <a:solidFill>
+                  <a:srgbClr val="FFFFFF"/>
+                </a:solidFill>
+                <a:latin typeface="Noto Sans JP"/>
+              </a:rPr>
+              <a:t>Fig. 2d</a:t>
+            </a:r>
+          </a:p>
+        </p:txBody>
+      </p:sp>
+      <p:sp>
+        <p:nvSpPr>
+          <p:cNvPr id="22" name="TextBox 21"/>
+          <p:cNvSpPr txBox="1"/>
+          <p:nvPr/>
+        </p:nvSpPr>
+        <p:spPr>
+          <a:xfrm>
+            <a:off x="365760" y="3300984"/>
+            <a:ext cx="4492630" cy="1554480"/>
+          </a:xfrm>
+          <a:prstGeom prst="rect">
+            <a:avLst/>
+          </a:prstGeom>
+          <a:noFill/>
+        </p:spPr>
+        <p:txBody>
+          <a:bodyPr wrap="square" anchor="ctr" lIns="36000" rIns="36000" tIns="18000" bIns="18000">
+            <a:spAutoFit/>
+          </a:bodyPr>
+          <a:lstStyle/>
+          <a:p>
+            <a:pPr algn="ctr"/>
+            <a:r>
+              <a:rPr sz="1200" b="0" i="0">
+                <a:solidFill>
+                  <a:srgbClr val="AAB4C0"/>
+                </a:solidFill>
+                <a:latin typeface="Noto Sans JP"/>
+              </a:rPr>
+              <a:t>（論文の図を貼り付け）</a:t>
+            </a:r>
+          </a:p>
+        </p:txBody>
+      </p:sp>
+      <p:sp>
+        <p:nvSpPr>
+          <p:cNvPr id="23" name="TextBox 22"/>
           <p:cNvSpPr txBox="1"/>
           <p:nvPr/>
         </p:nvSpPr>
@@ -22686,14 +23032,14 @@
                 </a:solidFill>
                 <a:latin typeface="Noto Sans JP"/>
               </a:rPr>
-              <a:t>定常せん断フロースイープ → HB fit で動的降伏応力を算出</a:t>
-            </a:r>
-          </a:p>
-        </p:txBody>
-      </p:sp>
-      <p:sp>
-        <p:nvSpPr>
-          <p:cNvPr id="19" name="Rounded Rectangle 18"/>
+              <a:t>HB fit による動的降伏応力（棒グラフ）</a:t>
+            </a:r>
+          </a:p>
+        </p:txBody>
+      </p:sp>
+      <p:sp>
+        <p:nvSpPr>
+          <p:cNvPr id="24" name="Rounded Rectangle 23"/>
           <p:cNvSpPr/>
           <p:nvPr/>
         </p:nvSpPr>
@@ -22741,7 +23087,7 @@
       </p:sp>
       <p:sp>
         <p:nvSpPr>
-          <p:cNvPr id="20" name="Rectangle 19"/>
+          <p:cNvPr id="25" name="Rectangle 24"/>
           <p:cNvSpPr/>
           <p:nvPr/>
         </p:nvSpPr>
@@ -22785,7 +23131,7 @@
       </p:sp>
       <p:sp>
         <p:nvSpPr>
-          <p:cNvPr id="21" name="TextBox 20"/>
+          <p:cNvPr id="26" name="TextBox 25"/>
           <p:cNvSpPr txBox="1"/>
           <p:nvPr/>
         </p:nvSpPr>
@@ -22813,21 +23159,21 @@
                 </a:solidFill>
                 <a:latin typeface="Noto Sans JP"/>
               </a:rPr>
-              <a:t>静的降伏応力 σ_static（＝絶対降伏応力）</a:t>
-            </a:r>
-          </a:p>
-        </p:txBody>
-      </p:sp>
-      <p:sp>
-        <p:nvSpPr>
-          <p:cNvPr id="22" name="TextBox 21"/>
+              <a:t>静的降伏応力 σ_static（流れ始め＝付着）</a:t>
+            </a:r>
+          </a:p>
+        </p:txBody>
+      </p:sp>
+      <p:sp>
+        <p:nvSpPr>
+          <p:cNvPr id="27" name="TextBox 26"/>
           <p:cNvSpPr txBox="1"/>
           <p:nvPr/>
         </p:nvSpPr>
         <p:spPr>
           <a:xfrm>
             <a:off x="5279014" y="2066544"/>
-            <a:ext cx="6437193" cy="457200"/>
+            <a:ext cx="6437193" cy="274320"/>
           </a:xfrm>
           <a:prstGeom prst="rect">
             <a:avLst/>
@@ -22848,21 +23194,21 @@
                 </a:solidFill>
                 <a:latin typeface="Noto Sans JP"/>
               </a:rPr>
-              <a:t>測定：大振幅振動（LAOS）の G' / G'' クロスオーバー応力</a:t>
-            </a:r>
-          </a:p>
-        </p:txBody>
-      </p:sp>
-      <p:sp>
-        <p:nvSpPr>
-          <p:cNvPr id="23" name="TextBox 22"/>
-          <p:cNvSpPr txBox="1"/>
-          <p:nvPr/>
-        </p:nvSpPr>
-        <p:spPr>
-          <a:xfrm>
-            <a:off x="5279014" y="2505456"/>
-            <a:ext cx="6437193" cy="585216"/>
+              <a:t>測定：振幅掃引（LAOS）の G' / G'' クロスオーバー応力（S3）</a:t>
+            </a:r>
+          </a:p>
+        </p:txBody>
+      </p:sp>
+      <p:sp>
+        <p:nvSpPr>
+          <p:cNvPr id="28" name="TextBox 27"/>
+          <p:cNvSpPr txBox="1"/>
+          <p:nvPr/>
+        </p:nvSpPr>
+        <p:spPr>
+          <a:xfrm>
+            <a:off x="5279014" y="2377440"/>
+            <a:ext cx="6437193" cy="731520"/>
           </a:xfrm>
           <a:prstGeom prst="rect">
             <a:avLst/>
@@ -22883,7 +23229,7 @@
                 </a:solidFill>
                 <a:latin typeface="Noto Sans JP"/>
               </a:rPr>
-              <a:t>意味：流れ始める（変形開始）のに必要な応力</a:t>
+              <a:t>PPハイドロゲルは AquaGel-K より高い静的降伏応力</a:t>
             </a:r>
           </a:p>
           <a:p>
@@ -22895,14 +23241,14 @@
                 </a:solidFill>
                 <a:latin typeface="Noto Sans JP"/>
               </a:rPr>
-              <a:t>→ 高いほど垂直・高所の燃料面に強く付着し、流れ出しにくい</a:t>
-            </a:r>
-          </a:p>
-        </p:txBody>
-      </p:sp>
-      <p:sp>
-        <p:nvSpPr>
-          <p:cNvPr id="24" name="Rounded Rectangle 23"/>
+              <a:t>→ 垂直・高所の燃料面でも流れ落ちにくく、強く付着する</a:t>
+            </a:r>
+          </a:p>
+        </p:txBody>
+      </p:sp>
+      <p:sp>
+        <p:nvSpPr>
+          <p:cNvPr id="29" name="Rounded Rectangle 28"/>
           <p:cNvSpPr/>
           <p:nvPr/>
         </p:nvSpPr>
@@ -22950,7 +23296,7 @@
       </p:sp>
       <p:sp>
         <p:nvSpPr>
-          <p:cNvPr id="25" name="Rectangle 24"/>
+          <p:cNvPr id="30" name="Rectangle 29"/>
           <p:cNvSpPr/>
           <p:nvPr/>
         </p:nvSpPr>
@@ -22994,7 +23340,7 @@
       </p:sp>
       <p:sp>
         <p:nvSpPr>
-          <p:cNvPr id="26" name="TextBox 25"/>
+          <p:cNvPr id="31" name="TextBox 30"/>
           <p:cNvSpPr txBox="1"/>
           <p:nvPr/>
         </p:nvSpPr>
@@ -23022,14 +23368,14 @@
                 </a:solidFill>
                 <a:latin typeface="Noto Sans JP"/>
               </a:rPr>
-              <a:t>動的降伏応力 σ_dynamic</a:t>
-            </a:r>
-          </a:p>
-        </p:txBody>
-      </p:sp>
-      <p:sp>
-        <p:nvSpPr>
-          <p:cNvPr id="27" name="TextBox 26"/>
+              <a:t>動的降伏応力 σ_dynamic（流動維持＝噴霧）</a:t>
+            </a:r>
+          </a:p>
+        </p:txBody>
+      </p:sp>
+      <p:sp>
+        <p:nvSpPr>
+          <p:cNvPr id="32" name="TextBox 31"/>
           <p:cNvSpPr txBox="1"/>
           <p:nvPr/>
         </p:nvSpPr>
@@ -23057,14 +23403,14 @@
                 </a:solidFill>
                 <a:latin typeface="Noto Sans JP"/>
               </a:rPr>
-              <a:t>測定：フロースイープ（100→0.01 s⁻¹）を HB モデルにフィット</a:t>
-            </a:r>
-          </a:p>
-        </p:txBody>
-      </p:sp>
-      <p:sp>
-        <p:nvSpPr>
-          <p:cNvPr id="28" name="TextBox 27"/>
+              <a:t>測定：フロースイープ（100→0.01 s⁻¹）の HB モデル fit（2d）</a:t>
+            </a:r>
+          </a:p>
+        </p:txBody>
+      </p:sp>
+      <p:sp>
+        <p:nvSpPr>
+          <p:cNvPr id="33" name="TextBox 32"/>
           <p:cNvSpPr txBox="1"/>
           <p:nvPr/>
         </p:nvSpPr>
@@ -23092,7 +23438,7 @@
                 </a:solidFill>
                 <a:latin typeface="Noto Sans JP"/>
               </a:rPr>
-              <a:t>意味：流れ続ける（流動維持）のに必要な応力 → 適度ならポンプ圧の制約内で噴霧可能</a:t>
+              <a:t>AquaGel-K（基準線 0.05 Pa）に対し PPハイドロゲルは桁違いに高い</a:t>
             </a:r>
           </a:p>
           <a:p>
@@ -23104,14 +23450,14 @@
                 </a:solidFill>
                 <a:latin typeface="Noto Sans JP"/>
               </a:rPr>
-              <a:t>実測（新鮮）：HEC+MC/CSP 33.34 Pa ／ MHEC/CSP 3.31 Pa</a:t>
-            </a:r>
-          </a:p>
-        </p:txBody>
-      </p:sp>
-      <p:sp>
-        <p:nvSpPr>
-          <p:cNvPr id="29" name="Rounded Rectangle 28"/>
+              <a:t>→ ポンプ圧内で噴霧でき、かつ流れにくい設計を両立</a:t>
+            </a:r>
+          </a:p>
+        </p:txBody>
+      </p:sp>
+      <p:sp>
+        <p:nvSpPr>
+          <p:cNvPr id="34" name="Rounded Rectangle 33"/>
           <p:cNvSpPr/>
           <p:nvPr/>
         </p:nvSpPr>
@@ -23157,7 +23503,7 @@
       </p:sp>
       <p:sp>
         <p:nvSpPr>
-          <p:cNvPr id="30" name="Rectangle 29"/>
+          <p:cNvPr id="35" name="Rectangle 34"/>
           <p:cNvSpPr/>
           <p:nvPr/>
         </p:nvSpPr>
@@ -23201,7 +23547,7 @@
       </p:sp>
       <p:sp>
         <p:nvSpPr>
-          <p:cNvPr id="31" name="TextBox 30"/>
+          <p:cNvPr id="36" name="TextBox 35"/>
           <p:cNvSpPr txBox="1"/>
           <p:nvPr/>
         </p:nvSpPr>
@@ -23236,7 +23582,7 @@
       </p:sp>
       <p:sp>
         <p:nvSpPr>
-          <p:cNvPr id="32" name="TextBox 31"/>
+          <p:cNvPr id="37" name="TextBox 36"/>
           <p:cNvSpPr txBox="1"/>
           <p:nvPr/>
         </p:nvSpPr>
@@ -23264,7 +23610,7 @@
                 </a:solidFill>
                 <a:latin typeface="Noto Sans JP"/>
               </a:rPr>
-              <a:t>高い静的降伏応力（付着）と適度な動的降伏応力（噴霧）の両立が実用化の鍵。界面活性剤（SDS）添加は両降伏応力を下げ、付着・安定性に影響</a:t>
+              <a:t>静的・動的いずれの降伏応力でも PPハイドロゲルは市販 AquaGel-K を大きく上回る。両者の差が小さい（弱いチキソトロピー）ため構造が即再形成され、自己修復的に付着を保つ</a:t>
             </a:r>
           </a:p>
         </p:txBody>

--- a/slides.pptx
+++ b/slides.pptx
@@ -30454,7 +30454,7 @@
                 </a:solidFill>
                 <a:latin typeface="Noto Sans JP"/>
               </a:rPr>
-              <a:t>SDS 添加によるレオロジー調整（Fig. 2e–h）</a:t>
+              <a:t>SDS 添加：目的は発泡促進・濡れ性改善だったが…（Fig. 2e–h）</a:t>
             </a:r>
           </a:p>
         </p:txBody>
@@ -30547,15 +30547,61 @@
         <p:spPr>
           <a:xfrm>
             <a:off x="365760" y="859536"/>
-            <a:ext cx="11460175" cy="475488"/>
+            <a:ext cx="5647791" cy="822960"/>
           </a:xfrm>
           <a:prstGeom prst="roundRect">
             <a:avLst>
-              <a:gd name="adj" fmla="val 4000"/>
+              <a:gd name="adj" fmla="val 5000"/>
             </a:avLst>
           </a:prstGeom>
           <a:solidFill>
-            <a:srgbClr val="F8FAFC"/>
+            <a:srgbClr val="F1F5F9"/>
+          </a:solidFill>
+          <a:ln w="15240">
+            <a:solidFill>
+              <a:srgbClr val="4A7C8C"/>
+            </a:solidFill>
+          </a:ln>
+          <a:effectLst/>
+        </p:spPr>
+        <p:style>
+          <a:lnRef idx="1">
+            <a:schemeClr val="accent1"/>
+          </a:lnRef>
+          <a:fillRef idx="3">
+            <a:schemeClr val="accent1"/>
+          </a:fillRef>
+          <a:effectRef idx="2">
+            <a:schemeClr val="accent1"/>
+          </a:effectRef>
+          <a:fontRef idx="minor">
+            <a:schemeClr val="lt1"/>
+          </a:fontRef>
+        </p:style>
+        <p:txBody>
+          <a:bodyPr rtlCol="0" anchor="ctr"/>
+          <a:lstStyle/>
+          <a:p>
+            <a:pPr algn="ctr"/>
+          </a:p>
+        </p:txBody>
+      </p:sp>
+      <p:sp>
+        <p:nvSpPr>
+          <p:cNvPr id="11" name="Rectangle 10"/>
+          <p:cNvSpPr/>
+          <p:nvPr/>
+        </p:nvSpPr>
+        <p:spPr>
+          <a:xfrm>
+            <a:off x="365760" y="859536"/>
+            <a:ext cx="54864" cy="822960"/>
+          </a:xfrm>
+          <a:prstGeom prst="rect">
+            <a:avLst/>
+          </a:prstGeom>
+          <a:solidFill>
+            <a:srgbClr val="4A7C8C"/>
           </a:solidFill>
           <a:ln>
             <a:noFill/>
@@ -30586,14 +30632,132 @@
       </p:sp>
       <p:sp>
         <p:nvSpPr>
-          <p:cNvPr id="11" name="Rectangle 10"/>
+          <p:cNvPr id="12" name="TextBox 11"/>
+          <p:cNvSpPr txBox="1"/>
+          <p:nvPr/>
+        </p:nvSpPr>
+        <p:spPr>
+          <a:xfrm>
+            <a:off x="548640" y="932688"/>
+            <a:ext cx="5373471" cy="256032"/>
+          </a:xfrm>
+          <a:prstGeom prst="rect">
+            <a:avLst/>
+          </a:prstGeom>
+          <a:noFill/>
+        </p:spPr>
+        <p:txBody>
+          <a:bodyPr wrap="square" anchor="t" lIns="36000" rIns="36000" tIns="18000" bIns="18000">
+            <a:spAutoFit/>
+          </a:bodyPr>
+          <a:lstStyle/>
+          <a:p>
+            <a:pPr algn="l"/>
+            <a:r>
+              <a:rPr sz="1200" b="1" i="0">
+                <a:solidFill>
+                  <a:srgbClr val="4A7C8C"/>
+                </a:solidFill>
+                <a:latin typeface="Noto Sans JP"/>
+              </a:rPr>
+              <a:t>SDS 添加の目的</a:t>
+            </a:r>
+          </a:p>
+        </p:txBody>
+      </p:sp>
+      <p:sp>
+        <p:nvSpPr>
+          <p:cNvPr id="13" name="TextBox 12"/>
+          <p:cNvSpPr txBox="1"/>
+          <p:nvPr/>
+        </p:nvSpPr>
+        <p:spPr>
+          <a:xfrm>
+            <a:off x="548640" y="1225296"/>
+            <a:ext cx="5373471" cy="411480"/>
+          </a:xfrm>
+          <a:prstGeom prst="rect">
+            <a:avLst/>
+          </a:prstGeom>
+          <a:noFill/>
+        </p:spPr>
+        <p:txBody>
+          <a:bodyPr wrap="square" anchor="t" lIns="36000" rIns="36000" tIns="18000" bIns="18000">
+            <a:spAutoFit/>
+          </a:bodyPr>
+          <a:lstStyle/>
+          <a:p>
+            <a:pPr algn="l"/>
+            <a:r>
+              <a:rPr sz="1100" b="0" i="0">
+                <a:solidFill>
+                  <a:srgbClr val="334155"/>
+                </a:solidFill>
+                <a:latin typeface="Noto Sans JP"/>
+              </a:rPr>
+              <a:t>界面活性剤 SDS（0 / 0.1 / 0.5 wt%）を HEC+MC/CSP に添加し、燃料表面への濡れ性改善と発泡層形成の促進を狙った</a:t>
+            </a:r>
+          </a:p>
+        </p:txBody>
+      </p:sp>
+      <p:sp>
+        <p:nvSpPr>
+          <p:cNvPr id="14" name="Rounded Rectangle 13"/>
           <p:cNvSpPr/>
           <p:nvPr/>
         </p:nvSpPr>
         <p:spPr>
           <a:xfrm>
-            <a:off x="365760" y="859536"/>
-            <a:ext cx="54864" cy="475488"/>
+            <a:off x="6178143" y="859536"/>
+            <a:ext cx="5647791" cy="822960"/>
+          </a:xfrm>
+          <a:prstGeom prst="roundRect">
+            <a:avLst>
+              <a:gd name="adj" fmla="val 5000"/>
+            </a:avLst>
+          </a:prstGeom>
+          <a:solidFill>
+            <a:srgbClr val="F1F5F9"/>
+          </a:solidFill>
+          <a:ln w="15240">
+            <a:solidFill>
+              <a:srgbClr val="3B5174"/>
+            </a:solidFill>
+          </a:ln>
+          <a:effectLst/>
+        </p:spPr>
+        <p:style>
+          <a:lnRef idx="1">
+            <a:schemeClr val="accent1"/>
+          </a:lnRef>
+          <a:fillRef idx="3">
+            <a:schemeClr val="accent1"/>
+          </a:fillRef>
+          <a:effectRef idx="2">
+            <a:schemeClr val="accent1"/>
+          </a:effectRef>
+          <a:fontRef idx="minor">
+            <a:schemeClr val="lt1"/>
+          </a:fontRef>
+        </p:style>
+        <p:txBody>
+          <a:bodyPr rtlCol="0" anchor="ctr"/>
+          <a:lstStyle/>
+          <a:p>
+            <a:pPr algn="ctr"/>
+          </a:p>
+        </p:txBody>
+      </p:sp>
+      <p:sp>
+        <p:nvSpPr>
+          <p:cNvPr id="15" name="Rectangle 14"/>
+          <p:cNvSpPr/>
+          <p:nvPr/>
+        </p:nvSpPr>
+        <p:spPr>
+          <a:xfrm>
+            <a:off x="6178143" y="859536"/>
+            <a:ext cx="54864" cy="822960"/>
           </a:xfrm>
           <a:prstGeom prst="rect">
             <a:avLst/>
@@ -30630,84 +30794,84 @@
       </p:sp>
       <p:sp>
         <p:nvSpPr>
-          <p:cNvPr id="12" name="TextBox 11"/>
-          <p:cNvSpPr txBox="1"/>
-          <p:nvPr/>
-        </p:nvSpPr>
-        <p:spPr>
-          <a:xfrm>
-            <a:off x="548640" y="859536"/>
-            <a:ext cx="365760" cy="475488"/>
-          </a:xfrm>
-          <a:prstGeom prst="rect">
-            <a:avLst/>
-          </a:prstGeom>
-          <a:noFill/>
-        </p:spPr>
-        <p:txBody>
-          <a:bodyPr wrap="square" anchor="ctr" lIns="36000" rIns="36000" tIns="18000" bIns="18000">
-            <a:spAutoFit/>
-          </a:bodyPr>
-          <a:lstStyle/>
-          <a:p>
-            <a:pPr algn="l"/>
-            <a:r>
-              <a:rPr sz="1400" b="0" i="0">
+          <p:cNvPr id="16" name="TextBox 15"/>
+          <p:cNvSpPr txBox="1"/>
+          <p:nvPr/>
+        </p:nvSpPr>
+        <p:spPr>
+          <a:xfrm>
+            <a:off x="6361023" y="932688"/>
+            <a:ext cx="5373471" cy="256032"/>
+          </a:xfrm>
+          <a:prstGeom prst="rect">
+            <a:avLst/>
+          </a:prstGeom>
+          <a:noFill/>
+        </p:spPr>
+        <p:txBody>
+          <a:bodyPr wrap="square" anchor="t" lIns="36000" rIns="36000" tIns="18000" bIns="18000">
+            <a:spAutoFit/>
+          </a:bodyPr>
+          <a:lstStyle/>
+          <a:p>
+            <a:pPr algn="l"/>
+            <a:r>
+              <a:rPr sz="1200" b="1" i="0">
                 <a:solidFill>
                   <a:srgbClr val="3B5174"/>
                 </a:solidFill>
                 <a:latin typeface="Noto Sans JP"/>
               </a:rPr>
-              <a:t>ⓘ</a:t>
-            </a:r>
-          </a:p>
-        </p:txBody>
-      </p:sp>
-      <p:sp>
-        <p:nvSpPr>
-          <p:cNvPr id="13" name="TextBox 12"/>
-          <p:cNvSpPr txBox="1"/>
-          <p:nvPr/>
-        </p:nvSpPr>
-        <p:spPr>
-          <a:xfrm>
-            <a:off x="960120" y="859536"/>
-            <a:ext cx="10774375" cy="475488"/>
-          </a:xfrm>
-          <a:prstGeom prst="rect">
-            <a:avLst/>
-          </a:prstGeom>
-          <a:noFill/>
-        </p:spPr>
-        <p:txBody>
-          <a:bodyPr wrap="square" anchor="ctr" lIns="36000" rIns="36000" tIns="18000" bIns="18000">
-            <a:spAutoFit/>
-          </a:bodyPr>
-          <a:lstStyle/>
-          <a:p>
-            <a:pPr algn="l"/>
-            <a:r>
-              <a:rPr sz="1300" b="1" i="0">
-                <a:solidFill>
-                  <a:srgbClr val="1E293B"/>
-                </a:solidFill>
-                <a:latin typeface="Noto Sans JP"/>
-              </a:rPr>
-              <a:t>HEC+MC/CSP 系に SDS を添加すると濃度依存的にゲル特性が変化 — 0.1 wt% で剛性最大化（G'=58.2 Pa）、0.5 wt% で軟化（G'=33.8 Pa）</a:t>
-            </a:r>
-          </a:p>
-        </p:txBody>
-      </p:sp>
-      <p:sp>
-        <p:nvSpPr>
-          <p:cNvPr id="14" name="Rounded Rectangle 13"/>
+              <a:t>期待した効果</a:t>
+            </a:r>
+          </a:p>
+        </p:txBody>
+      </p:sp>
+      <p:sp>
+        <p:nvSpPr>
+          <p:cNvPr id="17" name="TextBox 16"/>
+          <p:cNvSpPr txBox="1"/>
+          <p:nvPr/>
+        </p:nvSpPr>
+        <p:spPr>
+          <a:xfrm>
+            <a:off x="6361023" y="1225296"/>
+            <a:ext cx="5373471" cy="411480"/>
+          </a:xfrm>
+          <a:prstGeom prst="rect">
+            <a:avLst/>
+          </a:prstGeom>
+          <a:noFill/>
+        </p:spPr>
+        <p:txBody>
+          <a:bodyPr wrap="square" anchor="t" lIns="36000" rIns="36000" tIns="18000" bIns="18000">
+            <a:spAutoFit/>
+          </a:bodyPr>
+          <a:lstStyle/>
+          <a:p>
+            <a:pPr algn="l"/>
+            <a:r>
+              <a:rPr sz="1100" b="0" i="0">
+                <a:solidFill>
+                  <a:srgbClr val="334155"/>
+                </a:solidFill>
+                <a:latin typeface="Noto Sans JP"/>
+              </a:rPr>
+              <a:t>①ゲル粘度を下げてスプレー性を向上　②気泡を安定化して Foaming Index を増大</a:t>
+            </a:r>
+          </a:p>
+        </p:txBody>
+      </p:sp>
+      <p:sp>
+        <p:nvSpPr>
+          <p:cNvPr id="18" name="Rounded Rectangle 17"/>
           <p:cNvSpPr/>
           <p:nvPr/>
         </p:nvSpPr>
         <p:spPr>
           <a:xfrm>
-            <a:off x="365760" y="1481328"/>
-            <a:ext cx="5647791" cy="2212848"/>
+            <a:off x="365760" y="1828800"/>
+            <a:ext cx="5647791" cy="1874519"/>
           </a:xfrm>
           <a:prstGeom prst="roundRect">
             <a:avLst>
@@ -30748,13 +30912,13 @@
       </p:sp>
       <p:sp>
         <p:nvSpPr>
-          <p:cNvPr id="15" name="Rectangle 14"/>
+          <p:cNvPr id="19" name="Rectangle 18"/>
           <p:cNvSpPr/>
           <p:nvPr/>
         </p:nvSpPr>
         <p:spPr>
           <a:xfrm>
-            <a:off x="475488" y="1591056"/>
+            <a:off x="475488" y="1938528"/>
             <a:ext cx="868680" cy="292608"/>
           </a:xfrm>
           <a:prstGeom prst="rect">
@@ -30792,13 +30956,13 @@
       </p:sp>
       <p:sp>
         <p:nvSpPr>
-          <p:cNvPr id="16" name="TextBox 15"/>
-          <p:cNvSpPr txBox="1"/>
-          <p:nvPr/>
-        </p:nvSpPr>
-        <p:spPr>
-          <a:xfrm>
-            <a:off x="475488" y="1591056"/>
+          <p:cNvPr id="20" name="TextBox 19"/>
+          <p:cNvSpPr txBox="1"/>
+          <p:nvPr/>
+        </p:nvSpPr>
+        <p:spPr>
+          <a:xfrm>
+            <a:off x="475488" y="1938528"/>
             <a:ext cx="868680" cy="292608"/>
           </a:xfrm>
           <a:prstGeom prst="rect">
@@ -30827,14 +30991,14 @@
       </p:sp>
       <p:sp>
         <p:nvSpPr>
-          <p:cNvPr id="17" name="TextBox 16"/>
-          <p:cNvSpPr txBox="1"/>
-          <p:nvPr/>
-        </p:nvSpPr>
-        <p:spPr>
-          <a:xfrm>
-            <a:off x="365760" y="1481328"/>
-            <a:ext cx="5647791" cy="2212848"/>
+          <p:cNvPr id="21" name="TextBox 20"/>
+          <p:cNvSpPr txBox="1"/>
+          <p:nvPr/>
+        </p:nvSpPr>
+        <p:spPr>
+          <a:xfrm>
+            <a:off x="365760" y="1828800"/>
+            <a:ext cx="5647791" cy="1874519"/>
           </a:xfrm>
           <a:prstGeom prst="rect">
             <a:avLst/>
@@ -30862,13 +31026,13 @@
       </p:sp>
       <p:sp>
         <p:nvSpPr>
-          <p:cNvPr id="18" name="TextBox 17"/>
-          <p:cNvSpPr txBox="1"/>
-          <p:nvPr/>
-        </p:nvSpPr>
-        <p:spPr>
-          <a:xfrm>
-            <a:off x="365760" y="3730752"/>
+          <p:cNvPr id="22" name="TextBox 21"/>
+          <p:cNvSpPr txBox="1"/>
+          <p:nvPr/>
+        </p:nvSpPr>
+        <p:spPr>
+          <a:xfrm>
+            <a:off x="365760" y="3739895"/>
             <a:ext cx="5647791" cy="274320"/>
           </a:xfrm>
           <a:prstGeom prst="rect">
@@ -30890,21 +31054,21 @@
                 </a:solidFill>
                 <a:latin typeface="Noto Sans JP"/>
               </a:rPr>
-              <a:t>G' / G'' vs 角周波数（SDS 3濃度の SAOS）</a:t>
-            </a:r>
-          </a:p>
-        </p:txBody>
-      </p:sp>
-      <p:sp>
-        <p:nvSpPr>
-          <p:cNvPr id="19" name="Rounded Rectangle 18"/>
+              <a:t>G' / G'' vs 角周波数（SDS 3濃度）</a:t>
+            </a:r>
+          </a:p>
+        </p:txBody>
+      </p:sp>
+      <p:sp>
+        <p:nvSpPr>
+          <p:cNvPr id="23" name="Rounded Rectangle 22"/>
           <p:cNvSpPr/>
           <p:nvPr/>
         </p:nvSpPr>
         <p:spPr>
           <a:xfrm>
-            <a:off x="6178143" y="1481328"/>
-            <a:ext cx="5647791" cy="2212848"/>
+            <a:off x="6178143" y="1828800"/>
+            <a:ext cx="5647791" cy="1874519"/>
           </a:xfrm>
           <a:prstGeom prst="roundRect">
             <a:avLst>
@@ -30945,13 +31109,13 @@
       </p:sp>
       <p:sp>
         <p:nvSpPr>
-          <p:cNvPr id="20" name="Rectangle 19"/>
+          <p:cNvPr id="24" name="Rectangle 23"/>
           <p:cNvSpPr/>
           <p:nvPr/>
         </p:nvSpPr>
         <p:spPr>
           <a:xfrm>
-            <a:off x="6287871" y="1591056"/>
+            <a:off x="6287871" y="1938528"/>
             <a:ext cx="868680" cy="292608"/>
           </a:xfrm>
           <a:prstGeom prst="rect">
@@ -30989,13 +31153,13 @@
       </p:sp>
       <p:sp>
         <p:nvSpPr>
-          <p:cNvPr id="21" name="TextBox 20"/>
-          <p:cNvSpPr txBox="1"/>
-          <p:nvPr/>
-        </p:nvSpPr>
-        <p:spPr>
-          <a:xfrm>
-            <a:off x="6287871" y="1591056"/>
+          <p:cNvPr id="25" name="TextBox 24"/>
+          <p:cNvSpPr txBox="1"/>
+          <p:nvPr/>
+        </p:nvSpPr>
+        <p:spPr>
+          <a:xfrm>
+            <a:off x="6287871" y="1938528"/>
             <a:ext cx="868680" cy="292608"/>
           </a:xfrm>
           <a:prstGeom prst="rect">
@@ -31024,14 +31188,14 @@
       </p:sp>
       <p:sp>
         <p:nvSpPr>
-          <p:cNvPr id="22" name="TextBox 21"/>
-          <p:cNvSpPr txBox="1"/>
-          <p:nvPr/>
-        </p:nvSpPr>
-        <p:spPr>
-          <a:xfrm>
-            <a:off x="6178143" y="1481328"/>
-            <a:ext cx="5647791" cy="2212848"/>
+          <p:cNvPr id="26" name="TextBox 25"/>
+          <p:cNvSpPr txBox="1"/>
+          <p:nvPr/>
+        </p:nvSpPr>
+        <p:spPr>
+          <a:xfrm>
+            <a:off x="6178143" y="1828800"/>
+            <a:ext cx="5647791" cy="1874519"/>
           </a:xfrm>
           <a:prstGeom prst="rect">
             <a:avLst/>
@@ -31059,13 +31223,13 @@
       </p:sp>
       <p:sp>
         <p:nvSpPr>
-          <p:cNvPr id="23" name="TextBox 22"/>
-          <p:cNvSpPr txBox="1"/>
-          <p:nvPr/>
-        </p:nvSpPr>
-        <p:spPr>
-          <a:xfrm>
-            <a:off x="6178143" y="3730752"/>
+          <p:cNvPr id="27" name="TextBox 26"/>
+          <p:cNvSpPr txBox="1"/>
+          <p:nvPr/>
+        </p:nvSpPr>
+        <p:spPr>
+          <a:xfrm>
+            <a:off x="6178143" y="3739895"/>
             <a:ext cx="5647791" cy="274320"/>
           </a:xfrm>
           <a:prstGeom prst="rect">
@@ -31087,21 +31251,21 @@
                 </a:solidFill>
                 <a:latin typeface="Noto Sans JP"/>
               </a:rPr>
-              <a:t>G' と tan δ（棒グラフ、1 rad/s）</a:t>
-            </a:r>
-          </a:p>
-        </p:txBody>
-      </p:sp>
-      <p:sp>
-        <p:nvSpPr>
-          <p:cNvPr id="24" name="Rounded Rectangle 23"/>
+              <a:t>G' と tan δ（1 rad/s、濃度別棒グラフ）</a:t>
+            </a:r>
+          </a:p>
+        </p:txBody>
+      </p:sp>
+      <p:sp>
+        <p:nvSpPr>
+          <p:cNvPr id="28" name="Rounded Rectangle 27"/>
           <p:cNvSpPr/>
           <p:nvPr/>
         </p:nvSpPr>
         <p:spPr>
           <a:xfrm>
-            <a:off x="365760" y="3858768"/>
-            <a:ext cx="5647791" cy="2212848"/>
+            <a:off x="365760" y="3867911"/>
+            <a:ext cx="5647791" cy="1874519"/>
           </a:xfrm>
           <a:prstGeom prst="roundRect">
             <a:avLst>
@@ -31142,13 +31306,13 @@
       </p:sp>
       <p:sp>
         <p:nvSpPr>
-          <p:cNvPr id="25" name="Rectangle 24"/>
+          <p:cNvPr id="29" name="Rectangle 28"/>
           <p:cNvSpPr/>
           <p:nvPr/>
         </p:nvSpPr>
         <p:spPr>
           <a:xfrm>
-            <a:off x="475488" y="3968496"/>
+            <a:off x="475488" y="3977639"/>
             <a:ext cx="868680" cy="292608"/>
           </a:xfrm>
           <a:prstGeom prst="rect">
@@ -31186,13 +31350,13 @@
       </p:sp>
       <p:sp>
         <p:nvSpPr>
-          <p:cNvPr id="26" name="TextBox 25"/>
-          <p:cNvSpPr txBox="1"/>
-          <p:nvPr/>
-        </p:nvSpPr>
-        <p:spPr>
-          <a:xfrm>
-            <a:off x="475488" y="3968496"/>
+          <p:cNvPr id="30" name="TextBox 29"/>
+          <p:cNvSpPr txBox="1"/>
+          <p:nvPr/>
+        </p:nvSpPr>
+        <p:spPr>
+          <a:xfrm>
+            <a:off x="475488" y="3977639"/>
             <a:ext cx="868680" cy="292608"/>
           </a:xfrm>
           <a:prstGeom prst="rect">
@@ -31221,14 +31385,14 @@
       </p:sp>
       <p:sp>
         <p:nvSpPr>
-          <p:cNvPr id="27" name="TextBox 26"/>
-          <p:cNvSpPr txBox="1"/>
-          <p:nvPr/>
-        </p:nvSpPr>
-        <p:spPr>
-          <a:xfrm>
-            <a:off x="365760" y="3858768"/>
-            <a:ext cx="5647791" cy="2212848"/>
+          <p:cNvPr id="31" name="TextBox 30"/>
+          <p:cNvSpPr txBox="1"/>
+          <p:nvPr/>
+        </p:nvSpPr>
+        <p:spPr>
+          <a:xfrm>
+            <a:off x="365760" y="3867911"/>
+            <a:ext cx="5647791" cy="1874519"/>
           </a:xfrm>
           <a:prstGeom prst="rect">
             <a:avLst/>
@@ -31256,13 +31420,13 @@
       </p:sp>
       <p:sp>
         <p:nvSpPr>
-          <p:cNvPr id="28" name="TextBox 27"/>
-          <p:cNvSpPr txBox="1"/>
-          <p:nvPr/>
-        </p:nvSpPr>
-        <p:spPr>
-          <a:xfrm>
-            <a:off x="365760" y="6108192"/>
+          <p:cNvPr id="32" name="TextBox 31"/>
+          <p:cNvSpPr txBox="1"/>
+          <p:nvPr/>
+        </p:nvSpPr>
+        <p:spPr>
+          <a:xfrm>
+            <a:off x="365760" y="5779006"/>
             <a:ext cx="5647791" cy="274320"/>
           </a:xfrm>
           <a:prstGeom prst="rect">
@@ -31284,21 +31448,21 @@
                 </a:solidFill>
                 <a:latin typeface="Noto Sans JP"/>
               </a:rPr>
-              <a:t>粘度 vs せん断速度（HB モデル fit）</a:t>
-            </a:r>
-          </a:p>
-        </p:txBody>
-      </p:sp>
-      <p:sp>
-        <p:nvSpPr>
-          <p:cNvPr id="29" name="Rounded Rectangle 28"/>
+              <a:t>粘度 vs せん断速度（HB fit）</a:t>
+            </a:r>
+          </a:p>
+        </p:txBody>
+      </p:sp>
+      <p:sp>
+        <p:nvSpPr>
+          <p:cNvPr id="33" name="Rounded Rectangle 32"/>
           <p:cNvSpPr/>
           <p:nvPr/>
         </p:nvSpPr>
         <p:spPr>
           <a:xfrm>
-            <a:off x="6178143" y="3858768"/>
-            <a:ext cx="5647791" cy="2212848"/>
+            <a:off x="6178143" y="3867911"/>
+            <a:ext cx="5647791" cy="1874519"/>
           </a:xfrm>
           <a:prstGeom prst="roundRect">
             <a:avLst>
@@ -31339,13 +31503,13 @@
       </p:sp>
       <p:sp>
         <p:nvSpPr>
-          <p:cNvPr id="30" name="Rectangle 29"/>
+          <p:cNvPr id="34" name="Rectangle 33"/>
           <p:cNvSpPr/>
           <p:nvPr/>
         </p:nvSpPr>
         <p:spPr>
           <a:xfrm>
-            <a:off x="6287871" y="3968496"/>
+            <a:off x="6287871" y="3977639"/>
             <a:ext cx="868680" cy="292608"/>
           </a:xfrm>
           <a:prstGeom prst="rect">
@@ -31383,13 +31547,13 @@
       </p:sp>
       <p:sp>
         <p:nvSpPr>
-          <p:cNvPr id="31" name="TextBox 30"/>
-          <p:cNvSpPr txBox="1"/>
-          <p:nvPr/>
-        </p:nvSpPr>
-        <p:spPr>
-          <a:xfrm>
-            <a:off x="6287871" y="3968496"/>
+          <p:cNvPr id="35" name="TextBox 34"/>
+          <p:cNvSpPr txBox="1"/>
+          <p:nvPr/>
+        </p:nvSpPr>
+        <p:spPr>
+          <a:xfrm>
+            <a:off x="6287871" y="3977639"/>
             <a:ext cx="868680" cy="292608"/>
           </a:xfrm>
           <a:prstGeom prst="rect">
@@ -31418,14 +31582,14 @@
       </p:sp>
       <p:sp>
         <p:nvSpPr>
-          <p:cNvPr id="32" name="TextBox 31"/>
-          <p:cNvSpPr txBox="1"/>
-          <p:nvPr/>
-        </p:nvSpPr>
-        <p:spPr>
-          <a:xfrm>
-            <a:off x="6178143" y="3858768"/>
-            <a:ext cx="5647791" cy="2212848"/>
+          <p:cNvPr id="36" name="TextBox 35"/>
+          <p:cNvSpPr txBox="1"/>
+          <p:nvPr/>
+        </p:nvSpPr>
+        <p:spPr>
+          <a:xfrm>
+            <a:off x="6178143" y="3867911"/>
+            <a:ext cx="5647791" cy="1874519"/>
           </a:xfrm>
           <a:prstGeom prst="rect">
             <a:avLst/>
@@ -31453,13 +31617,13 @@
       </p:sp>
       <p:sp>
         <p:nvSpPr>
-          <p:cNvPr id="33" name="TextBox 32"/>
-          <p:cNvSpPr txBox="1"/>
-          <p:nvPr/>
-        </p:nvSpPr>
-        <p:spPr>
-          <a:xfrm>
-            <a:off x="6178143" y="6108192"/>
+          <p:cNvPr id="37" name="TextBox 36"/>
+          <p:cNvSpPr txBox="1"/>
+          <p:nvPr/>
+        </p:nvSpPr>
+        <p:spPr>
+          <a:xfrm>
+            <a:off x="6178143" y="5779006"/>
             <a:ext cx="5647791" cy="274320"/>
           </a:xfrm>
           <a:prstGeom prst="rect">
@@ -31481,29 +31645,75 @@
                 </a:solidFill>
                 <a:latin typeface="Noto Sans JP"/>
               </a:rPr>
-              <a:t>動的降伏応力（SDS 濃度別、0.05 Pa 基準線）</a:t>
-            </a:r>
-          </a:p>
-        </p:txBody>
-      </p:sp>
-      <p:sp>
-        <p:nvSpPr>
-          <p:cNvPr id="34" name="Rounded Rectangle 33"/>
+              <a:t>動的降伏応力（SDS 濃度別・0.05 Pa 基準線）</a:t>
+            </a:r>
+          </a:p>
+        </p:txBody>
+      </p:sp>
+      <p:sp>
+        <p:nvSpPr>
+          <p:cNvPr id="38" name="Rounded Rectangle 37"/>
           <p:cNvSpPr/>
           <p:nvPr/>
         </p:nvSpPr>
         <p:spPr>
           <a:xfrm>
-            <a:off x="365760" y="6236208"/>
-            <a:ext cx="11460175" cy="402336"/>
+            <a:off x="365760" y="5888734"/>
+            <a:ext cx="5647791" cy="768098"/>
           </a:xfrm>
           <a:prstGeom prst="roundRect">
             <a:avLst>
-              <a:gd name="adj" fmla="val 5000"/>
+              <a:gd name="adj" fmla="val 4000"/>
             </a:avLst>
           </a:prstGeom>
           <a:solidFill>
-            <a:srgbClr val="1E293B"/>
+            <a:srgbClr val="F1F5F9"/>
+          </a:solidFill>
+          <a:ln w="15240">
+            <a:solidFill>
+              <a:srgbClr val="9F7639"/>
+            </a:solidFill>
+          </a:ln>
+          <a:effectLst/>
+        </p:spPr>
+        <p:style>
+          <a:lnRef idx="1">
+            <a:schemeClr val="accent1"/>
+          </a:lnRef>
+          <a:fillRef idx="3">
+            <a:schemeClr val="accent1"/>
+          </a:fillRef>
+          <a:effectRef idx="2">
+            <a:schemeClr val="accent1"/>
+          </a:effectRef>
+          <a:fontRef idx="minor">
+            <a:schemeClr val="lt1"/>
+          </a:fontRef>
+        </p:style>
+        <p:txBody>
+          <a:bodyPr rtlCol="0" anchor="ctr"/>
+          <a:lstStyle/>
+          <a:p>
+            <a:pPr algn="ctr"/>
+          </a:p>
+        </p:txBody>
+      </p:sp>
+      <p:sp>
+        <p:nvSpPr>
+          <p:cNvPr id="39" name="Rectangle 38"/>
+          <p:cNvSpPr/>
+          <p:nvPr/>
+        </p:nvSpPr>
+        <p:spPr>
+          <a:xfrm>
+            <a:off x="365760" y="5888734"/>
+            <a:ext cx="54864" cy="768098"/>
+          </a:xfrm>
+          <a:prstGeom prst="rect">
+            <a:avLst/>
+          </a:prstGeom>
+          <a:solidFill>
+            <a:srgbClr val="9F7639"/>
           </a:solidFill>
           <a:ln>
             <a:noFill/>
@@ -31534,20 +31744,138 @@
       </p:sp>
       <p:sp>
         <p:nvSpPr>
-          <p:cNvPr id="35" name="Rectangle 34"/>
+          <p:cNvPr id="40" name="TextBox 39"/>
+          <p:cNvSpPr txBox="1"/>
+          <p:nvPr/>
+        </p:nvSpPr>
+        <p:spPr>
+          <a:xfrm>
+            <a:off x="548640" y="5943598"/>
+            <a:ext cx="5373471" cy="237744"/>
+          </a:xfrm>
+          <a:prstGeom prst="rect">
+            <a:avLst/>
+          </a:prstGeom>
+          <a:noFill/>
+        </p:spPr>
+        <p:txBody>
+          <a:bodyPr wrap="square" anchor="t" lIns="36000" rIns="36000" tIns="18000" bIns="18000">
+            <a:spAutoFit/>
+          </a:bodyPr>
+          <a:lstStyle/>
+          <a:p>
+            <a:pPr algn="l"/>
+            <a:r>
+              <a:rPr sz="1150" b="1" i="0">
+                <a:solidFill>
+                  <a:srgbClr val="9F7639"/>
+                </a:solidFill>
+                <a:latin typeface="Noto Sans JP"/>
+              </a:rPr>
+              <a:t>レオロジー：濃度依存的だが限定的改善</a:t>
+            </a:r>
+          </a:p>
+        </p:txBody>
+      </p:sp>
+      <p:sp>
+        <p:nvSpPr>
+          <p:cNvPr id="41" name="TextBox 40"/>
+          <p:cNvSpPr txBox="1"/>
+          <p:nvPr/>
+        </p:nvSpPr>
+        <p:spPr>
+          <a:xfrm>
+            <a:off x="548640" y="6199630"/>
+            <a:ext cx="5373471" cy="420626"/>
+          </a:xfrm>
+          <a:prstGeom prst="rect">
+            <a:avLst/>
+          </a:prstGeom>
+          <a:noFill/>
+        </p:spPr>
+        <p:txBody>
+          <a:bodyPr wrap="square" anchor="t" lIns="36000" rIns="36000" tIns="18000" bIns="18000">
+            <a:spAutoFit/>
+          </a:bodyPr>
+          <a:lstStyle/>
+          <a:p>
+            <a:pPr algn="l"/>
+            <a:r>
+              <a:rPr sz="1100" b="0" i="0">
+                <a:solidFill>
+                  <a:srgbClr val="475569"/>
+                </a:solidFill>
+                <a:latin typeface="Noto Sans JP"/>
+              </a:rPr>
+              <a:t>0.1 wt% で G' がわずかに上昇するが、0.5 wt% ではむしろ軟化し降伏応力も低下。付着性・ゲル強度の観点では SDS 添加は全体的にマイナスに働く</a:t>
+            </a:r>
+          </a:p>
+        </p:txBody>
+      </p:sp>
+      <p:sp>
+        <p:nvSpPr>
+          <p:cNvPr id="42" name="Rounded Rectangle 41"/>
           <p:cNvSpPr/>
           <p:nvPr/>
         </p:nvSpPr>
         <p:spPr>
           <a:xfrm>
-            <a:off x="365760" y="6236208"/>
-            <a:ext cx="73152" cy="402336"/>
-          </a:xfrm>
-          <a:prstGeom prst="rect">
-            <a:avLst/>
+            <a:off x="6178143" y="5888734"/>
+            <a:ext cx="5647791" cy="768098"/>
+          </a:xfrm>
+          <a:prstGeom prst="roundRect">
+            <a:avLst>
+              <a:gd name="adj" fmla="val 4000"/>
+            </a:avLst>
           </a:prstGeom>
           <a:solidFill>
-            <a:srgbClr val="D4A574"/>
+            <a:srgbClr val="F1F5F9"/>
+          </a:solidFill>
+          <a:ln w="15240">
+            <a:solidFill>
+              <a:srgbClr val="A05656"/>
+            </a:solidFill>
+          </a:ln>
+          <a:effectLst/>
+        </p:spPr>
+        <p:style>
+          <a:lnRef idx="1">
+            <a:schemeClr val="accent1"/>
+          </a:lnRef>
+          <a:fillRef idx="3">
+            <a:schemeClr val="accent1"/>
+          </a:fillRef>
+          <a:effectRef idx="2">
+            <a:schemeClr val="accent1"/>
+          </a:effectRef>
+          <a:fontRef idx="minor">
+            <a:schemeClr val="lt1"/>
+          </a:fontRef>
+        </p:style>
+        <p:txBody>
+          <a:bodyPr rtlCol="0" anchor="ctr"/>
+          <a:lstStyle/>
+          <a:p>
+            <a:pPr algn="ctr"/>
+          </a:p>
+        </p:txBody>
+      </p:sp>
+      <p:sp>
+        <p:nvSpPr>
+          <p:cNvPr id="43" name="Rectangle 42"/>
+          <p:cNvSpPr/>
+          <p:nvPr/>
+        </p:nvSpPr>
+        <p:spPr>
+          <a:xfrm>
+            <a:off x="6178143" y="5888734"/>
+            <a:ext cx="54864" cy="768098"/>
+          </a:xfrm>
+          <a:prstGeom prst="rect">
+            <a:avLst/>
+          </a:prstGeom>
+          <a:solidFill>
+            <a:srgbClr val="A05656"/>
           </a:solidFill>
           <a:ln>
             <a:noFill/>
@@ -31578,70 +31906,70 @@
       </p:sp>
       <p:sp>
         <p:nvSpPr>
-          <p:cNvPr id="36" name="TextBox 35"/>
-          <p:cNvSpPr txBox="1"/>
-          <p:nvPr/>
-        </p:nvSpPr>
-        <p:spPr>
-          <a:xfrm>
-            <a:off x="640080" y="6236208"/>
-            <a:ext cx="2194560" cy="402336"/>
-          </a:xfrm>
-          <a:prstGeom prst="rect">
-            <a:avLst/>
-          </a:prstGeom>
-          <a:noFill/>
-        </p:spPr>
-        <p:txBody>
-          <a:bodyPr wrap="square" anchor="ctr" lIns="36000" rIns="36000" tIns="18000" bIns="18000">
-            <a:spAutoFit/>
-          </a:bodyPr>
-          <a:lstStyle/>
-          <a:p>
-            <a:pPr algn="l"/>
-            <a:r>
-              <a:rPr sz="1300" b="1" i="0">
-                <a:solidFill>
-                  <a:srgbClr val="D4A574"/>
-                </a:solidFill>
-                <a:latin typeface="Noto Sans JP"/>
-              </a:rPr>
-              <a:t>POINT</a:t>
-            </a:r>
-          </a:p>
-        </p:txBody>
-      </p:sp>
-      <p:sp>
-        <p:nvSpPr>
-          <p:cNvPr id="37" name="TextBox 36"/>
-          <p:cNvSpPr txBox="1"/>
-          <p:nvPr/>
-        </p:nvSpPr>
-        <p:spPr>
-          <a:xfrm>
-            <a:off x="2194560" y="6236208"/>
-            <a:ext cx="9357055" cy="402336"/>
-          </a:xfrm>
-          <a:prstGeom prst="rect">
-            <a:avLst/>
-          </a:prstGeom>
-          <a:noFill/>
-        </p:spPr>
-        <p:txBody>
-          <a:bodyPr wrap="square" anchor="ctr" lIns="36000" rIns="36000" tIns="18000" bIns="18000">
-            <a:spAutoFit/>
-          </a:bodyPr>
-          <a:lstStyle/>
-          <a:p>
-            <a:pPr algn="l"/>
-            <a:r>
-              <a:rPr sz="1300" b="0" i="0">
-                <a:solidFill>
-                  <a:srgbClr val="FFFFFF"/>
-                </a:solidFill>
-                <a:latin typeface="Noto Sans JP"/>
-              </a:rPr>
-              <a:t>SDS 0.1 wt% が最適点：G' 最大（58.2 Pa）・tan δ 最小（0.193）・せん断希薄化を維持 — 発泡構造の制御と付着性の最適化に直結</a:t>
+          <p:cNvPr id="44" name="TextBox 43"/>
+          <p:cNvSpPr txBox="1"/>
+          <p:nvPr/>
+        </p:nvSpPr>
+        <p:spPr>
+          <a:xfrm>
+            <a:off x="6361023" y="5943598"/>
+            <a:ext cx="5373471" cy="237744"/>
+          </a:xfrm>
+          <a:prstGeom prst="rect">
+            <a:avLst/>
+          </a:prstGeom>
+          <a:noFill/>
+        </p:spPr>
+        <p:txBody>
+          <a:bodyPr wrap="square" anchor="t" lIns="36000" rIns="36000" tIns="18000" bIns="18000">
+            <a:spAutoFit/>
+          </a:bodyPr>
+          <a:lstStyle/>
+          <a:p>
+            <a:pPr algn="l"/>
+            <a:r>
+              <a:rPr sz="1150" b="1" i="0">
+                <a:solidFill>
+                  <a:srgbClr val="A05656"/>
+                </a:solidFill>
+                <a:latin typeface="Noto Sans JP"/>
+              </a:rPr>
+              <a:t>発泡：期待に反して Foaming Index が低下</a:t>
+            </a:r>
+          </a:p>
+        </p:txBody>
+      </p:sp>
+      <p:sp>
+        <p:nvSpPr>
+          <p:cNvPr id="45" name="TextBox 44"/>
+          <p:cNvSpPr txBox="1"/>
+          <p:nvPr/>
+        </p:nvSpPr>
+        <p:spPr>
+          <a:xfrm>
+            <a:off x="6361023" y="6199630"/>
+            <a:ext cx="5373471" cy="420626"/>
+          </a:xfrm>
+          <a:prstGeom prst="rect">
+            <a:avLst/>
+          </a:prstGeom>
+          <a:noFill/>
+        </p:spPr>
+        <p:txBody>
+          <a:bodyPr wrap="square" anchor="t" lIns="36000" rIns="36000" tIns="18000" bIns="18000">
+            <a:spAutoFit/>
+          </a:bodyPr>
+          <a:lstStyle/>
+          <a:p>
+            <a:pPr algn="l"/>
+            <a:r>
+              <a:rPr sz="1100" b="0" i="0">
+                <a:solidFill>
+                  <a:srgbClr val="475569"/>
+                </a:solidFill>
+                <a:latin typeface="Noto Sans JP"/>
+              </a:rPr>
+              <a:t>SDS 添加により気泡が粗大化・不均一化し、Foaming Index は低下（Fig. 4 参照）。発泡促進という当初の目的は達成されなかった</a:t>
             </a:r>
           </a:p>
         </p:txBody>
